--- a/collections/organoid/presentation/brain-organoid-question-journey/outputs/output.pptx
+++ b/collections/organoid/presentation/brain-organoid-question-journey/outputs/output.pptx
@@ -2,21 +2,21 @@
 <file path=ppt/presentation.xml><?xml version="1.0" encoding="utf-8"?>
 <p:presentation xmlns:p="http://schemas.openxmlformats.org/presentationml/2006/main">
   <p:sldMasterIdLst>
-    <p:sldMasterId xmlns:r="http://schemas.openxmlformats.org/officeDocument/2006/relationships" id="2147483648" r:id="Re8b4c42d32954e26"/>
+    <p:sldMasterId xmlns:r="http://schemas.openxmlformats.org/officeDocument/2006/relationships" id="2147483648" r:id="Rb88a1a25143b4751"/>
   </p:sldMasterIdLst>
   <p:notesMasterIdLst>
-    <p:notesMasterId xmlns:r="http://schemas.openxmlformats.org/officeDocument/2006/relationships" r:id="R1915c5f2bab54db7"/>
+    <p:notesMasterId xmlns:r="http://schemas.openxmlformats.org/officeDocument/2006/relationships" r:id="R441e14e826e14265"/>
   </p:notesMasterIdLst>
   <p:sldIdLst>
-    <p:sldId xmlns:r="http://schemas.openxmlformats.org/officeDocument/2006/relationships" id="256" r:id="R552de2df7df34de3"/>
-    <p:sldId xmlns:r="http://schemas.openxmlformats.org/officeDocument/2006/relationships" id="257" r:id="Rf6cf85fce53e4950"/>
-    <p:sldId xmlns:r="http://schemas.openxmlformats.org/officeDocument/2006/relationships" id="258" r:id="Rbb593c37658c4419"/>
-    <p:sldId xmlns:r="http://schemas.openxmlformats.org/officeDocument/2006/relationships" id="259" r:id="Rdcbdfee0e5f24ce7"/>
-    <p:sldId xmlns:r="http://schemas.openxmlformats.org/officeDocument/2006/relationships" id="260" r:id="Rcecdd72753d64089"/>
-    <p:sldId xmlns:r="http://schemas.openxmlformats.org/officeDocument/2006/relationships" id="261" r:id="Rb3180b3f16c44b6d"/>
-    <p:sldId xmlns:r="http://schemas.openxmlformats.org/officeDocument/2006/relationships" id="262" r:id="Read94a3238fc49d6"/>
-    <p:sldId xmlns:r="http://schemas.openxmlformats.org/officeDocument/2006/relationships" id="263" r:id="R279a5d36a97b4efb"/>
-    <p:sldId xmlns:r="http://schemas.openxmlformats.org/officeDocument/2006/relationships" id="264" r:id="R4cdb591e7b5848b0"/>
+    <p:sldId xmlns:r="http://schemas.openxmlformats.org/officeDocument/2006/relationships" id="256" r:id="Rcd351aebe51b4fa0"/>
+    <p:sldId xmlns:r="http://schemas.openxmlformats.org/officeDocument/2006/relationships" id="257" r:id="R84e8a18e1fb8465c"/>
+    <p:sldId xmlns:r="http://schemas.openxmlformats.org/officeDocument/2006/relationships" id="258" r:id="R4858ec7312bc4939"/>
+    <p:sldId xmlns:r="http://schemas.openxmlformats.org/officeDocument/2006/relationships" id="259" r:id="Rb1146354b7a54c53"/>
+    <p:sldId xmlns:r="http://schemas.openxmlformats.org/officeDocument/2006/relationships" id="260" r:id="R92b1f070c99c49a3"/>
+    <p:sldId xmlns:r="http://schemas.openxmlformats.org/officeDocument/2006/relationships" id="261" r:id="Ra1bafc5ff72c432c"/>
+    <p:sldId xmlns:r="http://schemas.openxmlformats.org/officeDocument/2006/relationships" id="262" r:id="Rd4588126fc374c78"/>
+    <p:sldId xmlns:r="http://schemas.openxmlformats.org/officeDocument/2006/relationships" id="263" r:id="Re3be955824284323"/>
+    <p:sldId xmlns:r="http://schemas.openxmlformats.org/officeDocument/2006/relationships" id="264" r:id="R5e3749ef50d343ef"/>
   </p:sldIdLst>
   <p:sldSz cx="12192000" cy="6858000"/>
   <p:notesSz cx="6858000" cy="9144000"/>
@@ -1537,7 +1537,7 @@
           <p:cNvPr id="1" name="Title 1">
             <a:extLst xmlns:a="http://schemas.openxmlformats.org/drawingml/2006/main">
               <a:ext uri="{FF2B5EF4-FFF2-40B4-BE49-F238E27FC236}">
-                <a16:creationId xmlns:a16="http://schemas.microsoft.com/office/drawing/2014/main" id="{2BAE738B-338B-40E8-A826-06409573BB21}"/>
+                <a16:creationId xmlns:a16="http://schemas.microsoft.com/office/drawing/2014/main" id="{8AF621C7-F94B-4768-9AC2-F1012E25D495}"/>
               </a:ext>
             </a:extLst>
           </p:cNvPr>
@@ -1568,7 +1568,7 @@
           <p:cNvPr id="2" name="Subtitle 2">
             <a:extLst xmlns:a="http://schemas.openxmlformats.org/drawingml/2006/main">
               <a:ext uri="{FF2B5EF4-FFF2-40B4-BE49-F238E27FC236}">
-                <a16:creationId xmlns:a16="http://schemas.microsoft.com/office/drawing/2014/main" id="{74308B9F-6F41-40FB-A39B-2DBF34578B33}"/>
+                <a16:creationId xmlns:a16="http://schemas.microsoft.com/office/drawing/2014/main" id="{648AA70F-8157-4479-B8F4-CD13E46638E5}"/>
               </a:ext>
             </a:extLst>
           </p:cNvPr>
@@ -1631,7 +1631,7 @@
           <p:cNvPr id="3" name="Date Placeholder 3">
             <a:extLst xmlns:a="http://schemas.openxmlformats.org/drawingml/2006/main">
               <a:ext uri="{FF2B5EF4-FFF2-40B4-BE49-F238E27FC236}">
-                <a16:creationId xmlns:a16="http://schemas.microsoft.com/office/drawing/2014/main" id="{CFE8E75F-B5DC-433B-844B-64DE7B5266C1}"/>
+                <a16:creationId xmlns:a16="http://schemas.microsoft.com/office/drawing/2014/main" id="{A273723D-83A1-4075-B6B1-1B9BB638041E}"/>
               </a:ext>
             </a:extLst>
           </p:cNvPr>
@@ -1652,7 +1652,7 @@
           <p:cNvPr id="4" name="Footer Placeholder 4">
             <a:extLst xmlns:a="http://schemas.openxmlformats.org/drawingml/2006/main">
               <a:ext uri="{FF2B5EF4-FFF2-40B4-BE49-F238E27FC236}">
-                <a16:creationId xmlns:a16="http://schemas.microsoft.com/office/drawing/2014/main" id="{125A5E59-BEF8-4BAA-91D7-9D3B093A8710}"/>
+                <a16:creationId xmlns:a16="http://schemas.microsoft.com/office/drawing/2014/main" id="{7CBA711E-8E10-41BC-A445-D3A111FDC836}"/>
               </a:ext>
             </a:extLst>
           </p:cNvPr>
@@ -1673,7 +1673,7 @@
           <p:cNvPr id="5" name="Slide Number Placeholder 5">
             <a:extLst xmlns:a="http://schemas.openxmlformats.org/drawingml/2006/main">
               <a:ext uri="{FF2B5EF4-FFF2-40B4-BE49-F238E27FC236}">
-                <a16:creationId xmlns:a16="http://schemas.microsoft.com/office/drawing/2014/main" id="{F572615B-7240-42F8-B48E-DAA8AA9FBBC2}"/>
+                <a16:creationId xmlns:a16="http://schemas.microsoft.com/office/drawing/2014/main" id="{38BDF79F-9F16-4FEE-B72E-1F506FE9EBEC}"/>
               </a:ext>
             </a:extLst>
           </p:cNvPr>
@@ -1716,7 +1716,7 @@
           <p:cNvPr id="1" name="Slide Number Placeholder 5">
             <a:extLst xmlns:a="http://schemas.openxmlformats.org/drawingml/2006/main">
               <a:ext uri="{FF2B5EF4-FFF2-40B4-BE49-F238E27FC236}">
-                <a16:creationId xmlns:a16="http://schemas.microsoft.com/office/drawing/2014/main" id="{42E96300-12E1-4435-9089-B6510B13E1C0}"/>
+                <a16:creationId xmlns:a16="http://schemas.microsoft.com/office/drawing/2014/main" id="{BE2B7849-1DBE-45F5-91FA-164AAD4B63DC}"/>
               </a:ext>
             </a:extLst>
           </p:cNvPr>
@@ -1755,7 +1755,7 @@
   </p:cSld>
   <p:clrMap bg1="lt1" tx1="dk1" bg2="lt2" tx2="dk2" accent1="accent1" accent2="accent2" accent3="accent3" accent4="accent4" accent5="accent5" accent6="accent6" hlink="hlink" folHlink="folHlink"/>
   <p:sldLayoutIdLst>
-    <p:sldLayoutId xmlns:r="http://schemas.openxmlformats.org/officeDocument/2006/relationships" id="2147483649" r:id="Reece38c9c5ea4173"/>
+    <p:sldLayoutId xmlns:r="http://schemas.openxmlformats.org/officeDocument/2006/relationships" id="2147483649" r:id="Red90d854311b43f9"/>
   </p:sldLayoutIdLst>
   <p:txStyles>
     <p:titleStyle>
@@ -2061,7 +2061,7 @@
           <p:cNvPr id="1" name="Slide Number Placeholder 5">
             <a:extLst xmlns:a="http://schemas.openxmlformats.org/drawingml/2006/main">
               <a:ext uri="{FF2B5EF4-FFF2-40B4-BE49-F238E27FC236}">
-                <a16:creationId xmlns:a16="http://schemas.microsoft.com/office/drawing/2014/main" id="{F572615B-7240-42F8-B48E-DAA8AA9FBBC2}"/>
+                <a16:creationId xmlns:a16="http://schemas.microsoft.com/office/drawing/2014/main" id="{38BDF79F-9F16-4FEE-B72E-1F506FE9EBEC}"/>
               </a:ext>
             </a:extLst>
           </p:cNvPr>
@@ -2097,7 +2097,7 @@
           <p:nvPr/>
         </p:nvPicPr>
         <p:blipFill>
-          <a:blip xmlns:r="http://schemas.openxmlformats.org/officeDocument/2006/relationships" xmlns:a="http://schemas.openxmlformats.org/drawingml/2006/main" r:embed="Rfa3ac8b2704543bf"/>
+          <a:blip xmlns:r="http://schemas.openxmlformats.org/officeDocument/2006/relationships" xmlns:a="http://schemas.openxmlformats.org/drawingml/2006/main" r:embed="Rf60bff4d2b86457c"/>
           <a:srcRect xmlns:a="http://schemas.openxmlformats.org/drawingml/2006/main" l="0" t="21875" r="0" b="21875"/>
           <a:stretch xmlns:a="http://schemas.openxmlformats.org/drawingml/2006/main">
             <a:fillRect l="0" t="0" r="0" b="0"/>
@@ -2118,7 +2118,7 @@
           <p:cNvPr id="3" name="">
             <a:extLst xmlns:a="http://schemas.openxmlformats.org/drawingml/2006/main">
               <a:ext uri="{FF2B5EF4-FFF2-40B4-BE49-F238E27FC236}">
-                <a16:creationId xmlns:a16="http://schemas.microsoft.com/office/drawing/2014/main" id="{9662133D-BF76-4BFB-A292-9F0E8C1B5124}"/>
+                <a16:creationId xmlns:a16="http://schemas.microsoft.com/office/drawing/2014/main" id="{9F1FC59B-A6D8-460E-A372-B98EFC8712D8}"/>
               </a:ext>
             </a:extLst>
           </p:cNvPr>
@@ -2153,7 +2153,7 @@
           <p:cNvPr id="4" name="">
             <a:extLst xmlns:a="http://schemas.openxmlformats.org/drawingml/2006/main">
               <a:ext uri="{FF2B5EF4-FFF2-40B4-BE49-F238E27FC236}">
-                <a16:creationId xmlns:a16="http://schemas.microsoft.com/office/drawing/2014/main" id="{C90B9248-7511-4126-8704-605E379E3F1E}"/>
+                <a16:creationId xmlns:a16="http://schemas.microsoft.com/office/drawing/2014/main" id="{6DD5B498-AA2E-4B75-BDF8-5EC328D886DC}"/>
               </a:ext>
             </a:extLst>
           </p:cNvPr>
@@ -2188,7 +2188,7 @@
           <p:cNvPr id="5" name="">
             <a:extLst xmlns:a="http://schemas.openxmlformats.org/drawingml/2006/main">
               <a:ext uri="{FF2B5EF4-FFF2-40B4-BE49-F238E27FC236}">
-                <a16:creationId xmlns:a16="http://schemas.microsoft.com/office/drawing/2014/main" id="{C8DC06F8-8516-44AA-8350-E00B99FF2DCD}"/>
+                <a16:creationId xmlns:a16="http://schemas.microsoft.com/office/drawing/2014/main" id="{8F859939-8ABD-4668-92A6-807048A70AC8}"/>
               </a:ext>
             </a:extLst>
           </p:cNvPr>
@@ -2225,7 +2225,7 @@
           <p:cNvPr id="6" name="">
             <a:extLst xmlns:a="http://schemas.openxmlformats.org/drawingml/2006/main">
               <a:ext uri="{FF2B5EF4-FFF2-40B4-BE49-F238E27FC236}">
-                <a16:creationId xmlns:a16="http://schemas.microsoft.com/office/drawing/2014/main" id="{52962C33-720E-47F0-A1BC-E340CE13C2EA}"/>
+                <a16:creationId xmlns:a16="http://schemas.microsoft.com/office/drawing/2014/main" id="{0D156D27-6171-4A7F-ABDB-3EB87A783583}"/>
               </a:ext>
             </a:extLst>
           </p:cNvPr>
@@ -2262,7 +2262,7 @@
           <p:cNvPr id="7" name="">
             <a:extLst xmlns:a="http://schemas.openxmlformats.org/drawingml/2006/main">
               <a:ext uri="{FF2B5EF4-FFF2-40B4-BE49-F238E27FC236}">
-                <a16:creationId xmlns:a16="http://schemas.microsoft.com/office/drawing/2014/main" id="{2853568E-2377-4D85-9B20-9AE238362285}"/>
+                <a16:creationId xmlns:a16="http://schemas.microsoft.com/office/drawing/2014/main" id="{B86E36F7-4C32-4867-9694-CAC7697427C0}"/>
               </a:ext>
             </a:extLst>
           </p:cNvPr>
@@ -2299,7 +2299,7 @@
           <p:cNvPr id="8" name="">
             <a:extLst xmlns:a="http://schemas.openxmlformats.org/drawingml/2006/main">
               <a:ext uri="{FF2B5EF4-FFF2-40B4-BE49-F238E27FC236}">
-                <a16:creationId xmlns:a16="http://schemas.microsoft.com/office/drawing/2014/main" id="{309D1A20-9D1B-49E3-AC55-37EDE2F90C8C}"/>
+                <a16:creationId xmlns:a16="http://schemas.microsoft.com/office/drawing/2014/main" id="{FE6BD932-0AF1-4005-92BC-092DFA1090EE}"/>
               </a:ext>
             </a:extLst>
           </p:cNvPr>
@@ -2336,7 +2336,7 @@
           <p:cNvPr id="9" name="">
             <a:extLst xmlns:a="http://schemas.openxmlformats.org/drawingml/2006/main">
               <a:ext uri="{FF2B5EF4-FFF2-40B4-BE49-F238E27FC236}">
-                <a16:creationId xmlns:a16="http://schemas.microsoft.com/office/drawing/2014/main" id="{47C7439A-F1C6-459D-A684-FC4CF43AB4CE}"/>
+                <a16:creationId xmlns:a16="http://schemas.microsoft.com/office/drawing/2014/main" id="{772DAEEC-D5EF-4A3A-BFDB-D617E4E4B627}"/>
               </a:ext>
             </a:extLst>
           </p:cNvPr>
@@ -2371,7 +2371,7 @@
           <p:cNvPr id="10" name="">
             <a:extLst xmlns:a="http://schemas.openxmlformats.org/drawingml/2006/main">
               <a:ext uri="{FF2B5EF4-FFF2-40B4-BE49-F238E27FC236}">
-                <a16:creationId xmlns:a16="http://schemas.microsoft.com/office/drawing/2014/main" id="{AAC1FF1F-C0A3-442B-A9C3-178F82BB49DE}"/>
+                <a16:creationId xmlns:a16="http://schemas.microsoft.com/office/drawing/2014/main" id="{65E96BF2-1483-4BA7-94A6-F001108AB06D}"/>
               </a:ext>
             </a:extLst>
           </p:cNvPr>
@@ -2429,7 +2429,7 @@
           <p:cNvPr id="11" name="">
             <a:extLst xmlns:a="http://schemas.openxmlformats.org/drawingml/2006/main">
               <a:ext uri="{FF2B5EF4-FFF2-40B4-BE49-F238E27FC236}">
-                <a16:creationId xmlns:a16="http://schemas.microsoft.com/office/drawing/2014/main" id="{59798ED5-1E63-48E5-810B-682E0F466FA8}"/>
+                <a16:creationId xmlns:a16="http://schemas.microsoft.com/office/drawing/2014/main" id="{588AC4A2-CBFD-4405-8603-CEA6AC4907F0}"/>
               </a:ext>
             </a:extLst>
           </p:cNvPr>
@@ -2504,7 +2504,7 @@
           <p:cNvPr id="12" name="">
             <a:extLst xmlns:a="http://schemas.openxmlformats.org/drawingml/2006/main">
               <a:ext uri="{FF2B5EF4-FFF2-40B4-BE49-F238E27FC236}">
-                <a16:creationId xmlns:a16="http://schemas.microsoft.com/office/drawing/2014/main" id="{1E51D70C-9A3D-470E-9C2F-80B3753D3471}"/>
+                <a16:creationId xmlns:a16="http://schemas.microsoft.com/office/drawing/2014/main" id="{4EE983D0-D5FB-41EA-A75D-2D55AC6EFBE4}"/>
               </a:ext>
             </a:extLst>
           </p:cNvPr>
@@ -2579,7 +2579,7 @@
           <p:cNvPr id="13" name="">
             <a:extLst xmlns:a="http://schemas.openxmlformats.org/drawingml/2006/main">
               <a:ext uri="{FF2B5EF4-FFF2-40B4-BE49-F238E27FC236}">
-                <a16:creationId xmlns:a16="http://schemas.microsoft.com/office/drawing/2014/main" id="{AD31226C-CD1E-4CB9-8437-6E3809CB7CBC}"/>
+                <a16:creationId xmlns:a16="http://schemas.microsoft.com/office/drawing/2014/main" id="{A18CCF79-F5C4-41E5-A2B4-AA924790BFB3}"/>
               </a:ext>
             </a:extLst>
           </p:cNvPr>
@@ -2616,7 +2616,7 @@
           <p:cNvPr id="14" name="">
             <a:extLst xmlns:a="http://schemas.openxmlformats.org/drawingml/2006/main">
               <a:ext uri="{FF2B5EF4-FFF2-40B4-BE49-F238E27FC236}">
-                <a16:creationId xmlns:a16="http://schemas.microsoft.com/office/drawing/2014/main" id="{9F8F3FAB-D5BB-40D9-B97D-86EE1CC7ADE8}"/>
+                <a16:creationId xmlns:a16="http://schemas.microsoft.com/office/drawing/2014/main" id="{0F95EEC8-B83F-40D6-BED4-BB35B07FE4CD}"/>
               </a:ext>
             </a:extLst>
           </p:cNvPr>
@@ -2674,7 +2674,7 @@
           <p:cNvPr id="15" name="">
             <a:extLst xmlns:a="http://schemas.openxmlformats.org/drawingml/2006/main">
               <a:ext uri="{FF2B5EF4-FFF2-40B4-BE49-F238E27FC236}">
-                <a16:creationId xmlns:a16="http://schemas.microsoft.com/office/drawing/2014/main" id="{BC44047B-7E85-47C7-A426-7E7ECE2F142F}"/>
+                <a16:creationId xmlns:a16="http://schemas.microsoft.com/office/drawing/2014/main" id="{6327A68B-EB87-4FA8-AD57-090A3FB8FE7B}"/>
               </a:ext>
             </a:extLst>
           </p:cNvPr>
@@ -2709,7 +2709,7 @@
           <p:cNvPr id="16" name="">
             <a:extLst xmlns:a="http://schemas.openxmlformats.org/drawingml/2006/main">
               <a:ext uri="{FF2B5EF4-FFF2-40B4-BE49-F238E27FC236}">
-                <a16:creationId xmlns:a16="http://schemas.microsoft.com/office/drawing/2014/main" id="{1A56BE6C-E259-4855-92C0-A0F8ED326F02}"/>
+                <a16:creationId xmlns:a16="http://schemas.microsoft.com/office/drawing/2014/main" id="{5E8E7AC8-18A7-4615-B7D6-4A4974BC5E35}"/>
               </a:ext>
             </a:extLst>
           </p:cNvPr>
@@ -2744,7 +2744,7 @@
           <p:cNvPr id="17" name="">
             <a:extLst xmlns:a="http://schemas.openxmlformats.org/drawingml/2006/main">
               <a:ext uri="{FF2B5EF4-FFF2-40B4-BE49-F238E27FC236}">
-                <a16:creationId xmlns:a16="http://schemas.microsoft.com/office/drawing/2014/main" id="{32CEE6C9-8EC1-4603-A1C1-E15E1EB2D35E}"/>
+                <a16:creationId xmlns:a16="http://schemas.microsoft.com/office/drawing/2014/main" id="{843B3C93-729C-4BEA-AE31-37E6E7DD60A2}"/>
               </a:ext>
             </a:extLst>
           </p:cNvPr>
@@ -2798,7 +2798,7 @@
           <p:cNvPr id="18" name="">
             <a:extLst xmlns:a="http://schemas.openxmlformats.org/drawingml/2006/main">
               <a:ext uri="{FF2B5EF4-FFF2-40B4-BE49-F238E27FC236}">
-                <a16:creationId xmlns:a16="http://schemas.microsoft.com/office/drawing/2014/main" id="{32A62568-3173-4B0E-8D2B-AF1052FA68C0}"/>
+                <a16:creationId xmlns:a16="http://schemas.microsoft.com/office/drawing/2014/main" id="{A262D0F9-9D7A-4BAF-9A2F-CBBD7B738EE9}"/>
               </a:ext>
             </a:extLst>
           </p:cNvPr>
@@ -2856,7 +2856,7 @@
           <p:cNvPr id="19" name="">
             <a:extLst xmlns:a="http://schemas.openxmlformats.org/drawingml/2006/main">
               <a:ext uri="{FF2B5EF4-FFF2-40B4-BE49-F238E27FC236}">
-                <a16:creationId xmlns:a16="http://schemas.microsoft.com/office/drawing/2014/main" id="{BA96BF40-D15A-48AD-ABAC-CA6F05D21BBA}"/>
+                <a16:creationId xmlns:a16="http://schemas.microsoft.com/office/drawing/2014/main" id="{58D5C3EA-9E7D-4E78-A5DF-CABB392F10DC}"/>
               </a:ext>
             </a:extLst>
           </p:cNvPr>
@@ -2931,7 +2931,7 @@
           <p:cNvPr id="20" name="">
             <a:extLst xmlns:a="http://schemas.openxmlformats.org/drawingml/2006/main">
               <a:ext uri="{FF2B5EF4-FFF2-40B4-BE49-F238E27FC236}">
-                <a16:creationId xmlns:a16="http://schemas.microsoft.com/office/drawing/2014/main" id="{D6EC519F-FB91-4666-AB68-79BD7164D650}"/>
+                <a16:creationId xmlns:a16="http://schemas.microsoft.com/office/drawing/2014/main" id="{F9EF71F5-981E-401C-BA2D-C85E728862EB}"/>
               </a:ext>
             </a:extLst>
           </p:cNvPr>
@@ -2966,7 +2966,7 @@
           <p:cNvPr id="21" name="">
             <a:extLst xmlns:a="http://schemas.openxmlformats.org/drawingml/2006/main">
               <a:ext uri="{FF2B5EF4-FFF2-40B4-BE49-F238E27FC236}">
-                <a16:creationId xmlns:a16="http://schemas.microsoft.com/office/drawing/2014/main" id="{0BC55846-CE13-4FB7-B46F-063305B2979C}"/>
+                <a16:creationId xmlns:a16="http://schemas.microsoft.com/office/drawing/2014/main" id="{F703BC64-88BF-4FB7-BB87-370C5D25306D}"/>
               </a:ext>
             </a:extLst>
           </p:cNvPr>
@@ -3001,7 +3001,7 @@
           <p:cNvPr id="22" name="">
             <a:extLst xmlns:a="http://schemas.openxmlformats.org/drawingml/2006/main">
               <a:ext uri="{FF2B5EF4-FFF2-40B4-BE49-F238E27FC236}">
-                <a16:creationId xmlns:a16="http://schemas.microsoft.com/office/drawing/2014/main" id="{40281284-F999-421E-8FCB-BFBA8CA9CE5E}"/>
+                <a16:creationId xmlns:a16="http://schemas.microsoft.com/office/drawing/2014/main" id="{F0D76B4E-ECF9-4D48-92CE-C7B75AAD8A3C}"/>
               </a:ext>
             </a:extLst>
           </p:cNvPr>
@@ -3055,7 +3055,7 @@
           <p:cNvPr id="23" name="">
             <a:extLst xmlns:a="http://schemas.openxmlformats.org/drawingml/2006/main">
               <a:ext uri="{FF2B5EF4-FFF2-40B4-BE49-F238E27FC236}">
-                <a16:creationId xmlns:a16="http://schemas.microsoft.com/office/drawing/2014/main" id="{848EC909-8650-4AC3-B011-9FA6D60FBA5B}"/>
+                <a16:creationId xmlns:a16="http://schemas.microsoft.com/office/drawing/2014/main" id="{F1465740-70B2-4F24-866D-539D42CEBE57}"/>
               </a:ext>
             </a:extLst>
           </p:cNvPr>
@@ -3113,7 +3113,7 @@
           <p:cNvPr id="24" name="">
             <a:extLst xmlns:a="http://schemas.openxmlformats.org/drawingml/2006/main">
               <a:ext uri="{FF2B5EF4-FFF2-40B4-BE49-F238E27FC236}">
-                <a16:creationId xmlns:a16="http://schemas.microsoft.com/office/drawing/2014/main" id="{46CF3A8B-DAB8-44F8-8779-A4E326F4075C}"/>
+                <a16:creationId xmlns:a16="http://schemas.microsoft.com/office/drawing/2014/main" id="{9B388E07-00EB-4A99-8A5C-D85635225797}"/>
               </a:ext>
             </a:extLst>
           </p:cNvPr>
@@ -3188,7 +3188,7 @@
           <p:cNvPr id="25" name="">
             <a:extLst xmlns:a="http://schemas.openxmlformats.org/drawingml/2006/main">
               <a:ext uri="{FF2B5EF4-FFF2-40B4-BE49-F238E27FC236}">
-                <a16:creationId xmlns:a16="http://schemas.microsoft.com/office/drawing/2014/main" id="{141F9750-84C8-4FC8-8C72-DD9172166BE6}"/>
+                <a16:creationId xmlns:a16="http://schemas.microsoft.com/office/drawing/2014/main" id="{F38F5299-2E03-4D75-BC73-EC0EE55D2AB4}"/>
               </a:ext>
             </a:extLst>
           </p:cNvPr>
@@ -3223,7 +3223,7 @@
           <p:cNvPr id="26" name="">
             <a:extLst xmlns:a="http://schemas.openxmlformats.org/drawingml/2006/main">
               <a:ext uri="{FF2B5EF4-FFF2-40B4-BE49-F238E27FC236}">
-                <a16:creationId xmlns:a16="http://schemas.microsoft.com/office/drawing/2014/main" id="{EB8BE568-EFE7-4936-AB6C-28F95531F010}"/>
+                <a16:creationId xmlns:a16="http://schemas.microsoft.com/office/drawing/2014/main" id="{D3907CAB-283D-4C7E-ADA0-9318CF37E867}"/>
               </a:ext>
             </a:extLst>
           </p:cNvPr>
@@ -3258,7 +3258,7 @@
           <p:cNvPr id="27" name="">
             <a:extLst xmlns:a="http://schemas.openxmlformats.org/drawingml/2006/main">
               <a:ext uri="{FF2B5EF4-FFF2-40B4-BE49-F238E27FC236}">
-                <a16:creationId xmlns:a16="http://schemas.microsoft.com/office/drawing/2014/main" id="{67BB9F0F-0442-4179-99BC-545BD0E7B497}"/>
+                <a16:creationId xmlns:a16="http://schemas.microsoft.com/office/drawing/2014/main" id="{A90C37AA-79CE-4C71-88B8-4EFAAE146A1B}"/>
               </a:ext>
             </a:extLst>
           </p:cNvPr>
@@ -3312,7 +3312,7 @@
           <p:cNvPr id="28" name="">
             <a:extLst xmlns:a="http://schemas.openxmlformats.org/drawingml/2006/main">
               <a:ext uri="{FF2B5EF4-FFF2-40B4-BE49-F238E27FC236}">
-                <a16:creationId xmlns:a16="http://schemas.microsoft.com/office/drawing/2014/main" id="{F7A91C4B-BFB3-4672-B111-41F8C87AF356}"/>
+                <a16:creationId xmlns:a16="http://schemas.microsoft.com/office/drawing/2014/main" id="{15687EE4-0E6F-48BB-B856-6344A789B3F6}"/>
               </a:ext>
             </a:extLst>
           </p:cNvPr>
@@ -3370,7 +3370,7 @@
           <p:cNvPr id="29" name="">
             <a:extLst xmlns:a="http://schemas.openxmlformats.org/drawingml/2006/main">
               <a:ext uri="{FF2B5EF4-FFF2-40B4-BE49-F238E27FC236}">
-                <a16:creationId xmlns:a16="http://schemas.microsoft.com/office/drawing/2014/main" id="{630E565A-0CE6-493D-AA0B-9CA7633BA117}"/>
+                <a16:creationId xmlns:a16="http://schemas.microsoft.com/office/drawing/2014/main" id="{C795AFFB-00D9-4610-B58E-B840D1DD4E60}"/>
               </a:ext>
             </a:extLst>
           </p:cNvPr>
@@ -3445,7 +3445,7 @@
           <p:cNvPr id="30" name="">
             <a:extLst xmlns:a="http://schemas.openxmlformats.org/drawingml/2006/main">
               <a:ext uri="{FF2B5EF4-FFF2-40B4-BE49-F238E27FC236}">
-                <a16:creationId xmlns:a16="http://schemas.microsoft.com/office/drawing/2014/main" id="{38B3AC92-24CE-481F-9DED-81B26C1B309F}"/>
+                <a16:creationId xmlns:a16="http://schemas.microsoft.com/office/drawing/2014/main" id="{066F5F5C-0E69-42E3-B514-FBA980F1CE05}"/>
               </a:ext>
             </a:extLst>
           </p:cNvPr>
@@ -3480,7 +3480,7 @@
           <p:cNvPr id="31" name="">
             <a:extLst xmlns:a="http://schemas.openxmlformats.org/drawingml/2006/main">
               <a:ext uri="{FF2B5EF4-FFF2-40B4-BE49-F238E27FC236}">
-                <a16:creationId xmlns:a16="http://schemas.microsoft.com/office/drawing/2014/main" id="{CAC0A61A-0F11-46B0-9CBD-F9CC948FC855}"/>
+                <a16:creationId xmlns:a16="http://schemas.microsoft.com/office/drawing/2014/main" id="{55B486F0-C4CE-4C25-B896-344F54E46268}"/>
               </a:ext>
             </a:extLst>
           </p:cNvPr>
@@ -3515,7 +3515,7 @@
           <p:cNvPr id="32" name="">
             <a:extLst xmlns:a="http://schemas.openxmlformats.org/drawingml/2006/main">
               <a:ext uri="{FF2B5EF4-FFF2-40B4-BE49-F238E27FC236}">
-                <a16:creationId xmlns:a16="http://schemas.microsoft.com/office/drawing/2014/main" id="{82A8F125-CB2E-4608-9E0A-B7FC488B86CC}"/>
+                <a16:creationId xmlns:a16="http://schemas.microsoft.com/office/drawing/2014/main" id="{D03342EC-66C0-4F02-9BCC-D1AAD6C8AED7}"/>
               </a:ext>
             </a:extLst>
           </p:cNvPr>
@@ -3569,7 +3569,7 @@
           <p:cNvPr id="33" name="">
             <a:extLst xmlns:a="http://schemas.openxmlformats.org/drawingml/2006/main">
               <a:ext uri="{FF2B5EF4-FFF2-40B4-BE49-F238E27FC236}">
-                <a16:creationId xmlns:a16="http://schemas.microsoft.com/office/drawing/2014/main" id="{CB0DE509-A76A-45FC-8E22-7CC065937131}"/>
+                <a16:creationId xmlns:a16="http://schemas.microsoft.com/office/drawing/2014/main" id="{256ED97F-4511-4979-B764-20826B4D73C5}"/>
               </a:ext>
             </a:extLst>
           </p:cNvPr>
@@ -3627,7 +3627,7 @@
           <p:cNvPr id="34" name="">
             <a:extLst xmlns:a="http://schemas.openxmlformats.org/drawingml/2006/main">
               <a:ext uri="{FF2B5EF4-FFF2-40B4-BE49-F238E27FC236}">
-                <a16:creationId xmlns:a16="http://schemas.microsoft.com/office/drawing/2014/main" id="{D8583512-2EEA-4842-B9BB-7D97D4DAD177}"/>
+                <a16:creationId xmlns:a16="http://schemas.microsoft.com/office/drawing/2014/main" id="{B3D1F4AA-B616-4229-99E4-9594062A719A}"/>
               </a:ext>
             </a:extLst>
           </p:cNvPr>
@@ -3685,7 +3685,7 @@
           <p:cNvPr id="35" name="">
             <a:extLst xmlns:a="http://schemas.openxmlformats.org/drawingml/2006/main">
               <a:ext uri="{FF2B5EF4-FFF2-40B4-BE49-F238E27FC236}">
-                <a16:creationId xmlns:a16="http://schemas.microsoft.com/office/drawing/2014/main" id="{07FC8FC6-6C4C-4F90-A16F-85DDB26C1B1C}"/>
+                <a16:creationId xmlns:a16="http://schemas.microsoft.com/office/drawing/2014/main" id="{F3777401-0E4A-4CB7-933D-936FD126015C}"/>
               </a:ext>
             </a:extLst>
           </p:cNvPr>
@@ -3720,7 +3720,7 @@
           <p:cNvPr id="36" name="">
             <a:extLst xmlns:a="http://schemas.openxmlformats.org/drawingml/2006/main">
               <a:ext uri="{FF2B5EF4-FFF2-40B4-BE49-F238E27FC236}">
-                <a16:creationId xmlns:a16="http://schemas.microsoft.com/office/drawing/2014/main" id="{798E802D-F739-4007-8819-113EBA93A141}"/>
+                <a16:creationId xmlns:a16="http://schemas.microsoft.com/office/drawing/2014/main" id="{95AC3342-A061-4173-A451-EA3C80D6EBD1}"/>
               </a:ext>
             </a:extLst>
           </p:cNvPr>
@@ -3755,7 +3755,7 @@
           <p:cNvPr id="37" name="">
             <a:extLst xmlns:a="http://schemas.openxmlformats.org/drawingml/2006/main">
               <a:ext uri="{FF2B5EF4-FFF2-40B4-BE49-F238E27FC236}">
-                <a16:creationId xmlns:a16="http://schemas.microsoft.com/office/drawing/2014/main" id="{2B8FF840-DFAA-4F56-B601-D05626FD54E0}"/>
+                <a16:creationId xmlns:a16="http://schemas.microsoft.com/office/drawing/2014/main" id="{21653D15-BD76-44E0-B8D9-CB1F64831758}"/>
               </a:ext>
             </a:extLst>
           </p:cNvPr>
@@ -3790,7 +3790,7 @@
           <p:cNvPr id="38" name="">
             <a:extLst xmlns:a="http://schemas.openxmlformats.org/drawingml/2006/main">
               <a:ext uri="{FF2B5EF4-FFF2-40B4-BE49-F238E27FC236}">
-                <a16:creationId xmlns:a16="http://schemas.microsoft.com/office/drawing/2014/main" id="{D4225480-1359-4951-B146-7FBC5AF12D04}"/>
+                <a16:creationId xmlns:a16="http://schemas.microsoft.com/office/drawing/2014/main" id="{5141AAE8-AAF4-4399-B400-0F10D9F506D2}"/>
               </a:ext>
             </a:extLst>
           </p:cNvPr>
@@ -3844,7 +3844,7 @@
           <p:cNvPr id="39" name="">
             <a:extLst xmlns:a="http://schemas.openxmlformats.org/drawingml/2006/main">
               <a:ext uri="{FF2B5EF4-FFF2-40B4-BE49-F238E27FC236}">
-                <a16:creationId xmlns:a16="http://schemas.microsoft.com/office/drawing/2014/main" id="{6FF40700-4708-4643-A3B7-24827E0A1232}"/>
+                <a16:creationId xmlns:a16="http://schemas.microsoft.com/office/drawing/2014/main" id="{6F2ED822-382A-4DF2-9DFD-111171EC680D}"/>
               </a:ext>
             </a:extLst>
           </p:cNvPr>
@@ -3898,7 +3898,7 @@
           <p:cNvPr id="40" name="">
             <a:extLst xmlns:a="http://schemas.openxmlformats.org/drawingml/2006/main">
               <a:ext uri="{FF2B5EF4-FFF2-40B4-BE49-F238E27FC236}">
-                <a16:creationId xmlns:a16="http://schemas.microsoft.com/office/drawing/2014/main" id="{79CA5986-A6F6-4C9E-9E32-905CE16346AF}"/>
+                <a16:creationId xmlns:a16="http://schemas.microsoft.com/office/drawing/2014/main" id="{3A95D7A4-CF9D-4ABF-A5C0-5CC52547D08B}"/>
               </a:ext>
             </a:extLst>
           </p:cNvPr>
@@ -3954,7 +3954,7 @@
     </p:spTree>
     <p:extLst>
       <p:ext uri="{BB962C8B-B14F-4D97-AF65-F5344CB8AC3E}">
-        <p14:creationId xmlns:p14="http://schemas.microsoft.com/office/powerpoint/2010/main" val="1440925319"/>
+        <p14:creationId xmlns:p14="http://schemas.microsoft.com/office/powerpoint/2010/main" val="1133417431"/>
       </p:ext>
     </p:extLst>
   </p:cSld>
@@ -3985,7 +3985,7 @@
           <p:cNvPr id="1" name="Slide Number Placeholder 5">
             <a:extLst xmlns:a="http://schemas.openxmlformats.org/drawingml/2006/main">
               <a:ext uri="{FF2B5EF4-FFF2-40B4-BE49-F238E27FC236}">
-                <a16:creationId xmlns:a16="http://schemas.microsoft.com/office/drawing/2014/main" id="{F572615B-7240-42F8-B48E-DAA8AA9FBBC2}"/>
+                <a16:creationId xmlns:a16="http://schemas.microsoft.com/office/drawing/2014/main" id="{38BDF79F-9F16-4FEE-B72E-1F506FE9EBEC}"/>
               </a:ext>
             </a:extLst>
           </p:cNvPr>
@@ -4021,7 +4021,7 @@
           <p:nvPr/>
         </p:nvPicPr>
         <p:blipFill>
-          <a:blip xmlns:r="http://schemas.openxmlformats.org/officeDocument/2006/relationships" xmlns:a="http://schemas.openxmlformats.org/drawingml/2006/main" r:embed="R828f1b010c084d12"/>
+          <a:blip xmlns:r="http://schemas.openxmlformats.org/officeDocument/2006/relationships" xmlns:a="http://schemas.openxmlformats.org/drawingml/2006/main" r:embed="R95aec88cc53147ee"/>
           <a:srcRect xmlns:a="http://schemas.openxmlformats.org/drawingml/2006/main" l="0" t="21875" r="0" b="21875"/>
           <a:stretch xmlns:a="http://schemas.openxmlformats.org/drawingml/2006/main">
             <a:fillRect l="0" t="0" r="0" b="0"/>
@@ -4042,7 +4042,7 @@
           <p:cNvPr id="3" name="">
             <a:extLst xmlns:a="http://schemas.openxmlformats.org/drawingml/2006/main">
               <a:ext uri="{FF2B5EF4-FFF2-40B4-BE49-F238E27FC236}">
-                <a16:creationId xmlns:a16="http://schemas.microsoft.com/office/drawing/2014/main" id="{D461F6AB-4E66-4915-BD27-D562E604B3F8}"/>
+                <a16:creationId xmlns:a16="http://schemas.microsoft.com/office/drawing/2014/main" id="{A1DAEA24-2BD7-4DE0-9431-DDEBEF808174}"/>
               </a:ext>
             </a:extLst>
           </p:cNvPr>
@@ -4077,7 +4077,7 @@
           <p:cNvPr id="4" name="">
             <a:extLst xmlns:a="http://schemas.openxmlformats.org/drawingml/2006/main">
               <a:ext uri="{FF2B5EF4-FFF2-40B4-BE49-F238E27FC236}">
-                <a16:creationId xmlns:a16="http://schemas.microsoft.com/office/drawing/2014/main" id="{823497F2-7FC9-4161-A41B-E36C4559ADB9}"/>
+                <a16:creationId xmlns:a16="http://schemas.microsoft.com/office/drawing/2014/main" id="{A44FE9A1-01D2-4E81-A716-4A7151CB5807}"/>
               </a:ext>
             </a:extLst>
           </p:cNvPr>
@@ -4112,7 +4112,7 @@
           <p:cNvPr id="5" name="">
             <a:extLst xmlns:a="http://schemas.openxmlformats.org/drawingml/2006/main">
               <a:ext uri="{FF2B5EF4-FFF2-40B4-BE49-F238E27FC236}">
-                <a16:creationId xmlns:a16="http://schemas.microsoft.com/office/drawing/2014/main" id="{5961CF1B-8781-4943-8EAD-ADC77CB4D49D}"/>
+                <a16:creationId xmlns:a16="http://schemas.microsoft.com/office/drawing/2014/main" id="{7F80C01D-D87D-4A55-B582-C92AE26942F5}"/>
               </a:ext>
             </a:extLst>
           </p:cNvPr>
@@ -4149,7 +4149,7 @@
           <p:cNvPr id="6" name="">
             <a:extLst xmlns:a="http://schemas.openxmlformats.org/drawingml/2006/main">
               <a:ext uri="{FF2B5EF4-FFF2-40B4-BE49-F238E27FC236}">
-                <a16:creationId xmlns:a16="http://schemas.microsoft.com/office/drawing/2014/main" id="{6334147D-3C9C-4C55-A748-684183084757}"/>
+                <a16:creationId xmlns:a16="http://schemas.microsoft.com/office/drawing/2014/main" id="{1B124463-D37B-4B83-868B-1B8CB0E41D0E}"/>
               </a:ext>
             </a:extLst>
           </p:cNvPr>
@@ -4186,7 +4186,7 @@
           <p:cNvPr id="7" name="">
             <a:extLst xmlns:a="http://schemas.openxmlformats.org/drawingml/2006/main">
               <a:ext uri="{FF2B5EF4-FFF2-40B4-BE49-F238E27FC236}">
-                <a16:creationId xmlns:a16="http://schemas.microsoft.com/office/drawing/2014/main" id="{24F41FA5-580E-4412-878C-26AAADEB282B}"/>
+                <a16:creationId xmlns:a16="http://schemas.microsoft.com/office/drawing/2014/main" id="{AE369EF5-2F33-4FA6-BF69-EA408862A9AF}"/>
               </a:ext>
             </a:extLst>
           </p:cNvPr>
@@ -4223,7 +4223,7 @@
           <p:cNvPr id="8" name="">
             <a:extLst xmlns:a="http://schemas.openxmlformats.org/drawingml/2006/main">
               <a:ext uri="{FF2B5EF4-FFF2-40B4-BE49-F238E27FC236}">
-                <a16:creationId xmlns:a16="http://schemas.microsoft.com/office/drawing/2014/main" id="{7C9022EC-3787-4B00-BC1D-982A54439B77}"/>
+                <a16:creationId xmlns:a16="http://schemas.microsoft.com/office/drawing/2014/main" id="{52C57C82-EBF2-4615-8D51-72925C354982}"/>
               </a:ext>
             </a:extLst>
           </p:cNvPr>
@@ -4260,7 +4260,7 @@
           <p:cNvPr id="9" name="">
             <a:extLst xmlns:a="http://schemas.openxmlformats.org/drawingml/2006/main">
               <a:ext uri="{FF2B5EF4-FFF2-40B4-BE49-F238E27FC236}">
-                <a16:creationId xmlns:a16="http://schemas.microsoft.com/office/drawing/2014/main" id="{7F6C64C7-E212-4224-9A92-DE097B8677B9}"/>
+                <a16:creationId xmlns:a16="http://schemas.microsoft.com/office/drawing/2014/main" id="{E1BACB03-2D85-4747-B040-B0767C072988}"/>
               </a:ext>
             </a:extLst>
           </p:cNvPr>
@@ -4318,7 +4318,7 @@
           <p:cNvPr id="10" name="">
             <a:extLst xmlns:a="http://schemas.openxmlformats.org/drawingml/2006/main">
               <a:ext uri="{FF2B5EF4-FFF2-40B4-BE49-F238E27FC236}">
-                <a16:creationId xmlns:a16="http://schemas.microsoft.com/office/drawing/2014/main" id="{464B82D9-5177-4A1D-99AC-333D2FF82D57}"/>
+                <a16:creationId xmlns:a16="http://schemas.microsoft.com/office/drawing/2014/main" id="{A32F1147-6D35-421D-9FAE-3061AF045474}"/>
               </a:ext>
             </a:extLst>
           </p:cNvPr>
@@ -4376,7 +4376,7 @@
           <p:cNvPr id="11" name="">
             <a:extLst xmlns:a="http://schemas.openxmlformats.org/drawingml/2006/main">
               <a:ext uri="{FF2B5EF4-FFF2-40B4-BE49-F238E27FC236}">
-                <a16:creationId xmlns:a16="http://schemas.microsoft.com/office/drawing/2014/main" id="{A03A5FEC-621D-4DB0-8FB8-C3058CA72DA1}"/>
+                <a16:creationId xmlns:a16="http://schemas.microsoft.com/office/drawing/2014/main" id="{04A0C30B-EBA7-4F89-8F26-D367637788F1}"/>
               </a:ext>
             </a:extLst>
           </p:cNvPr>
@@ -4411,7 +4411,7 @@
           <p:cNvPr id="12" name="">
             <a:extLst xmlns:a="http://schemas.openxmlformats.org/drawingml/2006/main">
               <a:ext uri="{FF2B5EF4-FFF2-40B4-BE49-F238E27FC236}">
-                <a16:creationId xmlns:a16="http://schemas.microsoft.com/office/drawing/2014/main" id="{6CC8BA0D-6077-43CF-8698-EA8B88D18EBF}"/>
+                <a16:creationId xmlns:a16="http://schemas.microsoft.com/office/drawing/2014/main" id="{E84985F2-C20B-4691-8081-32FE801F6655}"/>
               </a:ext>
             </a:extLst>
           </p:cNvPr>
@@ -4444,7 +4444,7 @@
           <p:cNvPr id="13" name="">
             <a:extLst xmlns:a="http://schemas.openxmlformats.org/drawingml/2006/main">
               <a:ext uri="{FF2B5EF4-FFF2-40B4-BE49-F238E27FC236}">
-                <a16:creationId xmlns:a16="http://schemas.microsoft.com/office/drawing/2014/main" id="{30C4185C-D922-4547-8EB9-64C1F9407DD9}"/>
+                <a16:creationId xmlns:a16="http://schemas.microsoft.com/office/drawing/2014/main" id="{EE1F047A-C5D1-4413-B2E9-C67D9BA49175}"/>
               </a:ext>
             </a:extLst>
           </p:cNvPr>
@@ -4519,82 +4519,7 @@
           <p:cNvPr id="14" name="">
             <a:extLst xmlns:a="http://schemas.openxmlformats.org/drawingml/2006/main">
               <a:ext uri="{FF2B5EF4-FFF2-40B4-BE49-F238E27FC236}">
-                <a16:creationId xmlns:a16="http://schemas.microsoft.com/office/drawing/2014/main" id="{49F0FFE9-493F-4B30-A617-E89BBFBF4BE0}"/>
-              </a:ext>
-            </a:extLst>
-          </p:cNvPr>
-          <p:cNvSpPr>
-            <a:spLocks xmlns:a="http://schemas.openxmlformats.org/drawingml/2006/main" noGrp="1"/>
-          </p:cNvSpPr>
-          <p:nvPr/>
-        </p:nvSpPr>
-        <p:spPr>
-          <a:xfrm xmlns:a="http://schemas.openxmlformats.org/drawingml/2006/main">
-            <a:off x="628650" y="2038350"/>
-            <a:ext cx="6858000" cy="628650"/>
-          </a:xfrm>
-          <a:prstGeom xmlns:a="http://schemas.openxmlformats.org/drawingml/2006/main" prst="rect">
-            <a:avLst/>
-          </a:prstGeom>
-          <a:solidFill xmlns:a="http://schemas.openxmlformats.org/drawingml/2006/main">
-            <a:srgbClr val="000000">
-              <a:alpha val="0"/>
-            </a:srgbClr>
-          </a:solidFill>
-          <a:ln xmlns:a="http://schemas.openxmlformats.org/drawingml/2006/main" w="0">
-            <a:solidFill>
-              <a:srgbClr val="000000">
-                <a:alpha val="0"/>
-              </a:srgbClr>
-            </a:solidFill>
-            <a:prstDash val="solid"/>
-          </a:ln>
-        </p:spPr>
-        <p:txBody>
-          <a:bodyPr xmlns:a="http://schemas.openxmlformats.org/drawingml/2006/main" lIns="0" tIns="0" rIns="0" bIns="0" anchor="t"/>
-          <a:lstStyle xmlns:a="http://schemas.openxmlformats.org/drawingml/2006/main"/>
-          <a:p xmlns:a="http://schemas.openxmlformats.org/drawingml/2006/main">
-            <a:pPr algn="l">
-              <a:defRPr sz="1350" b="0">
-                <a:solidFill>
-                  <a:srgbClr val="344146"/>
-                </a:solidFill>
-              </a:defRPr>
-            </a:pPr>
-            <a:r>
-              <a:rPr sz="1350" b="0">
-                <a:solidFill>
-                  <a:srgbClr val="344146"/>
-                </a:solidFill>
-              </a:rPr>
-              <a:t>논문을 많이 읽었다는 사실보다,</a:t>
-            </a:r>
-          </a:p>
-          <a:p xmlns:a="http://schemas.openxmlformats.org/drawingml/2006/main">
-            <a:pPr algn="l">
-              <a:defRPr sz="1350" b="0">
-                <a:solidFill>
-                  <a:srgbClr val="344146"/>
-                </a:solidFill>
-              </a:defRPr>
-            </a:pPr>
-            <a:r>
-              <a:rPr sz="1350" b="0">
-                <a:solidFill>
-                  <a:srgbClr val="344146"/>
-                </a:solidFill>
-              </a:rPr>
-              <a:t>위키를 통해 질문이 어떻게 진화했는지를 중심에 둔다.</a:t>
-            </a:r>
-          </a:p>
-        </p:txBody>
-      </p:sp>
-      <p:sp>
-        <p:nvSpPr>
-          <p:cNvPr id="15" name="">
-            <a:extLst xmlns:a="http://schemas.openxmlformats.org/drawingml/2006/main">
-              <a:ext uri="{FF2B5EF4-FFF2-40B4-BE49-F238E27FC236}">
-                <a16:creationId xmlns:a16="http://schemas.microsoft.com/office/drawing/2014/main" id="{F17BB4A5-191C-43C8-B615-13979B535D88}"/>
+                <a16:creationId xmlns:a16="http://schemas.microsoft.com/office/drawing/2014/main" id="{87CC9AC4-5322-45C1-B0B3-C9963A6CEDEF}"/>
               </a:ext>
             </a:extLst>
           </p:cNvPr>
@@ -4626,10 +4551,10 @@
       </p:sp>
       <p:sp>
         <p:nvSpPr>
-          <p:cNvPr id="16" name="">
-            <a:extLst xmlns:a="http://schemas.openxmlformats.org/drawingml/2006/main">
-              <a:ext uri="{FF2B5EF4-FFF2-40B4-BE49-F238E27FC236}">
-                <a16:creationId xmlns:a16="http://schemas.microsoft.com/office/drawing/2014/main" id="{8DFB00F1-0F20-405E-9DA6-90CACED0CFFD}"/>
+          <p:cNvPr id="15" name="">
+            <a:extLst xmlns:a="http://schemas.openxmlformats.org/drawingml/2006/main">
+              <a:ext uri="{FF2B5EF4-FFF2-40B4-BE49-F238E27FC236}">
+                <a16:creationId xmlns:a16="http://schemas.microsoft.com/office/drawing/2014/main" id="{9AEF35A7-E1E1-4FAD-BBDF-CE93D68D7598}"/>
               </a:ext>
             </a:extLst>
           </p:cNvPr>
@@ -4661,10 +4586,10 @@
       </p:sp>
       <p:sp>
         <p:nvSpPr>
-          <p:cNvPr id="17" name="">
-            <a:extLst xmlns:a="http://schemas.openxmlformats.org/drawingml/2006/main">
-              <a:ext uri="{FF2B5EF4-FFF2-40B4-BE49-F238E27FC236}">
-                <a16:creationId xmlns:a16="http://schemas.microsoft.com/office/drawing/2014/main" id="{859978A6-2477-49C9-9B82-684EDE3230B9}"/>
+          <p:cNvPr id="16" name="">
+            <a:extLst xmlns:a="http://schemas.openxmlformats.org/drawingml/2006/main">
+              <a:ext uri="{FF2B5EF4-FFF2-40B4-BE49-F238E27FC236}">
+                <a16:creationId xmlns:a16="http://schemas.microsoft.com/office/drawing/2014/main" id="{40B9B2BC-33E1-4ACE-A677-66784BD69901}"/>
               </a:ext>
             </a:extLst>
           </p:cNvPr>
@@ -4719,10 +4644,10 @@
       </p:sp>
       <p:sp>
         <p:nvSpPr>
-          <p:cNvPr id="18" name="">
-            <a:extLst xmlns:a="http://schemas.openxmlformats.org/drawingml/2006/main">
-              <a:ext uri="{FF2B5EF4-FFF2-40B4-BE49-F238E27FC236}">
-                <a16:creationId xmlns:a16="http://schemas.microsoft.com/office/drawing/2014/main" id="{4E88EDD8-2FF9-4C25-B596-5BE92DA8F24D}"/>
+          <p:cNvPr id="17" name="">
+            <a:extLst xmlns:a="http://schemas.openxmlformats.org/drawingml/2006/main">
+              <a:ext uri="{FF2B5EF4-FFF2-40B4-BE49-F238E27FC236}">
+                <a16:creationId xmlns:a16="http://schemas.microsoft.com/office/drawing/2014/main" id="{26354C82-4775-4BA4-B9DB-B41C4C52B3C5}"/>
               </a:ext>
             </a:extLst>
           </p:cNvPr>
@@ -4756,10 +4681,10 @@
       </p:sp>
       <p:sp>
         <p:nvSpPr>
-          <p:cNvPr id="19" name="">
-            <a:extLst xmlns:a="http://schemas.openxmlformats.org/drawingml/2006/main">
-              <a:ext uri="{FF2B5EF4-FFF2-40B4-BE49-F238E27FC236}">
-                <a16:creationId xmlns:a16="http://schemas.microsoft.com/office/drawing/2014/main" id="{4536D79F-1D6C-4C32-AD36-5E43DB1D48C2}"/>
+          <p:cNvPr id="18" name="">
+            <a:extLst xmlns:a="http://schemas.openxmlformats.org/drawingml/2006/main">
+              <a:ext uri="{FF2B5EF4-FFF2-40B4-BE49-F238E27FC236}">
+                <a16:creationId xmlns:a16="http://schemas.microsoft.com/office/drawing/2014/main" id="{BCF132CD-4136-461C-A457-1DABEF682CE3}"/>
               </a:ext>
             </a:extLst>
           </p:cNvPr>
@@ -4791,10 +4716,10 @@
       </p:sp>
       <p:sp>
         <p:nvSpPr>
-          <p:cNvPr id="20" name="">
-            <a:extLst xmlns:a="http://schemas.openxmlformats.org/drawingml/2006/main">
-              <a:ext uri="{FF2B5EF4-FFF2-40B4-BE49-F238E27FC236}">
-                <a16:creationId xmlns:a16="http://schemas.microsoft.com/office/drawing/2014/main" id="{F8C30351-4669-4AA5-B7B7-086A403A6C04}"/>
+          <p:cNvPr id="19" name="">
+            <a:extLst xmlns:a="http://schemas.openxmlformats.org/drawingml/2006/main">
+              <a:ext uri="{FF2B5EF4-FFF2-40B4-BE49-F238E27FC236}">
+                <a16:creationId xmlns:a16="http://schemas.microsoft.com/office/drawing/2014/main" id="{4133AE49-69AD-4FE6-96AE-8B62552A311B}"/>
               </a:ext>
             </a:extLst>
           </p:cNvPr>
@@ -4849,10 +4774,10 @@
       </p:sp>
       <p:sp>
         <p:nvSpPr>
-          <p:cNvPr id="21" name="">
-            <a:extLst xmlns:a="http://schemas.openxmlformats.org/drawingml/2006/main">
-              <a:ext uri="{FF2B5EF4-FFF2-40B4-BE49-F238E27FC236}">
-                <a16:creationId xmlns:a16="http://schemas.microsoft.com/office/drawing/2014/main" id="{9CD20A99-901B-40A2-BB3C-E8C69D18B57A}"/>
+          <p:cNvPr id="20" name="">
+            <a:extLst xmlns:a="http://schemas.openxmlformats.org/drawingml/2006/main">
+              <a:ext uri="{FF2B5EF4-FFF2-40B4-BE49-F238E27FC236}">
+                <a16:creationId xmlns:a16="http://schemas.microsoft.com/office/drawing/2014/main" id="{6C85BFD0-39DD-4E97-A70F-460BB05BAC4B}"/>
               </a:ext>
             </a:extLst>
           </p:cNvPr>
@@ -4907,10 +4832,10 @@
       </p:sp>
       <p:sp>
         <p:nvSpPr>
-          <p:cNvPr id="22" name="">
-            <a:extLst xmlns:a="http://schemas.openxmlformats.org/drawingml/2006/main">
-              <a:ext uri="{FF2B5EF4-FFF2-40B4-BE49-F238E27FC236}">
-                <a16:creationId xmlns:a16="http://schemas.microsoft.com/office/drawing/2014/main" id="{9DBB5F9D-BE63-4C77-B0DA-42BC8BFB4EFF}"/>
+          <p:cNvPr id="21" name="">
+            <a:extLst xmlns:a="http://schemas.openxmlformats.org/drawingml/2006/main">
+              <a:ext uri="{FF2B5EF4-FFF2-40B4-BE49-F238E27FC236}">
+                <a16:creationId xmlns:a16="http://schemas.microsoft.com/office/drawing/2014/main" id="{8C63D3E0-8EA7-4E00-AF2B-981F1058DB01}"/>
               </a:ext>
             </a:extLst>
           </p:cNvPr>
@@ -4965,10 +4890,10 @@
       </p:sp>
       <p:sp>
         <p:nvSpPr>
-          <p:cNvPr id="23" name="">
-            <a:extLst xmlns:a="http://schemas.openxmlformats.org/drawingml/2006/main">
-              <a:ext uri="{FF2B5EF4-FFF2-40B4-BE49-F238E27FC236}">
-                <a16:creationId xmlns:a16="http://schemas.microsoft.com/office/drawing/2014/main" id="{1DE4734B-6C77-499A-A112-93A173C9D568}"/>
+          <p:cNvPr id="22" name="">
+            <a:extLst xmlns:a="http://schemas.openxmlformats.org/drawingml/2006/main">
+              <a:ext uri="{FF2B5EF4-FFF2-40B4-BE49-F238E27FC236}">
+                <a16:creationId xmlns:a16="http://schemas.microsoft.com/office/drawing/2014/main" id="{D8B2769A-31AE-45B5-9C7A-B1DABB7E0DAC}"/>
               </a:ext>
             </a:extLst>
           </p:cNvPr>
@@ -5002,10 +4927,10 @@
       </p:sp>
       <p:sp>
         <p:nvSpPr>
-          <p:cNvPr id="24" name="">
-            <a:extLst xmlns:a="http://schemas.openxmlformats.org/drawingml/2006/main">
-              <a:ext uri="{FF2B5EF4-FFF2-40B4-BE49-F238E27FC236}">
-                <a16:creationId xmlns:a16="http://schemas.microsoft.com/office/drawing/2014/main" id="{232AB3F2-08E1-4873-9415-28C01FE6984F}"/>
+          <p:cNvPr id="23" name="">
+            <a:extLst xmlns:a="http://schemas.openxmlformats.org/drawingml/2006/main">
+              <a:ext uri="{FF2B5EF4-FFF2-40B4-BE49-F238E27FC236}">
+                <a16:creationId xmlns:a16="http://schemas.microsoft.com/office/drawing/2014/main" id="{50D894EB-182C-4CE8-85DD-22D4E7AD38B1}"/>
               </a:ext>
             </a:extLst>
           </p:cNvPr>
@@ -5037,10 +4962,10 @@
       </p:sp>
       <p:sp>
         <p:nvSpPr>
-          <p:cNvPr id="25" name="">
-            <a:extLst xmlns:a="http://schemas.openxmlformats.org/drawingml/2006/main">
-              <a:ext uri="{FF2B5EF4-FFF2-40B4-BE49-F238E27FC236}">
-                <a16:creationId xmlns:a16="http://schemas.microsoft.com/office/drawing/2014/main" id="{1E2EEC91-D1DE-4A0F-8640-7D30A05434B2}"/>
+          <p:cNvPr id="24" name="">
+            <a:extLst xmlns:a="http://schemas.openxmlformats.org/drawingml/2006/main">
+              <a:ext uri="{FF2B5EF4-FFF2-40B4-BE49-F238E27FC236}">
+                <a16:creationId xmlns:a16="http://schemas.microsoft.com/office/drawing/2014/main" id="{3D82AB2F-A277-40EE-A2FF-65F3D81B3521}"/>
               </a:ext>
             </a:extLst>
           </p:cNvPr>
@@ -5095,10 +5020,10 @@
       </p:sp>
       <p:sp>
         <p:nvSpPr>
-          <p:cNvPr id="26" name="">
-            <a:extLst xmlns:a="http://schemas.openxmlformats.org/drawingml/2006/main">
-              <a:ext uri="{FF2B5EF4-FFF2-40B4-BE49-F238E27FC236}">
-                <a16:creationId xmlns:a16="http://schemas.microsoft.com/office/drawing/2014/main" id="{9D2B77D3-3986-4EFC-B3C7-B4BA498CEB2D}"/>
+          <p:cNvPr id="25" name="">
+            <a:extLst xmlns:a="http://schemas.openxmlformats.org/drawingml/2006/main">
+              <a:ext uri="{FF2B5EF4-FFF2-40B4-BE49-F238E27FC236}">
+                <a16:creationId xmlns:a16="http://schemas.microsoft.com/office/drawing/2014/main" id="{CDFFC842-E45B-41B0-A36B-40D458EC6A33}"/>
               </a:ext>
             </a:extLst>
           </p:cNvPr>
@@ -5153,10 +5078,10 @@
       </p:sp>
       <p:sp>
         <p:nvSpPr>
-          <p:cNvPr id="27" name="">
-            <a:extLst xmlns:a="http://schemas.openxmlformats.org/drawingml/2006/main">
-              <a:ext uri="{FF2B5EF4-FFF2-40B4-BE49-F238E27FC236}">
-                <a16:creationId xmlns:a16="http://schemas.microsoft.com/office/drawing/2014/main" id="{BEF1AD21-D99E-4B66-8B91-F20E3941D253}"/>
+          <p:cNvPr id="26" name="">
+            <a:extLst xmlns:a="http://schemas.openxmlformats.org/drawingml/2006/main">
+              <a:ext uri="{FF2B5EF4-FFF2-40B4-BE49-F238E27FC236}">
+                <a16:creationId xmlns:a16="http://schemas.microsoft.com/office/drawing/2014/main" id="{F4080FE7-907C-4F73-A32C-02410EE40C8F}"/>
               </a:ext>
             </a:extLst>
           </p:cNvPr>
@@ -5211,10 +5136,10 @@
       </p:sp>
       <p:sp>
         <p:nvSpPr>
-          <p:cNvPr id="28" name="">
-            <a:extLst xmlns:a="http://schemas.openxmlformats.org/drawingml/2006/main">
-              <a:ext uri="{FF2B5EF4-FFF2-40B4-BE49-F238E27FC236}">
-                <a16:creationId xmlns:a16="http://schemas.microsoft.com/office/drawing/2014/main" id="{9B1D46C5-AC0C-42F0-B1EE-43282A705759}"/>
+          <p:cNvPr id="27" name="">
+            <a:extLst xmlns:a="http://schemas.openxmlformats.org/drawingml/2006/main">
+              <a:ext uri="{FF2B5EF4-FFF2-40B4-BE49-F238E27FC236}">
+                <a16:creationId xmlns:a16="http://schemas.microsoft.com/office/drawing/2014/main" id="{CB4F2EB4-24CD-4F3C-A206-A85E405409B7}"/>
               </a:ext>
             </a:extLst>
           </p:cNvPr>
@@ -5248,10 +5173,10 @@
       </p:sp>
       <p:sp>
         <p:nvSpPr>
-          <p:cNvPr id="29" name="">
-            <a:extLst xmlns:a="http://schemas.openxmlformats.org/drawingml/2006/main">
-              <a:ext uri="{FF2B5EF4-FFF2-40B4-BE49-F238E27FC236}">
-                <a16:creationId xmlns:a16="http://schemas.microsoft.com/office/drawing/2014/main" id="{1C0AC46D-7049-46F2-B66F-A5C5E0B655F6}"/>
+          <p:cNvPr id="28" name="">
+            <a:extLst xmlns:a="http://schemas.openxmlformats.org/drawingml/2006/main">
+              <a:ext uri="{FF2B5EF4-FFF2-40B4-BE49-F238E27FC236}">
+                <a16:creationId xmlns:a16="http://schemas.microsoft.com/office/drawing/2014/main" id="{CE4F6853-C39F-411B-BEAE-9C3CC27394C7}"/>
               </a:ext>
             </a:extLst>
           </p:cNvPr>
@@ -5283,10 +5208,10 @@
       </p:sp>
       <p:sp>
         <p:nvSpPr>
-          <p:cNvPr id="30" name="">
-            <a:extLst xmlns:a="http://schemas.openxmlformats.org/drawingml/2006/main">
-              <a:ext uri="{FF2B5EF4-FFF2-40B4-BE49-F238E27FC236}">
-                <a16:creationId xmlns:a16="http://schemas.microsoft.com/office/drawing/2014/main" id="{EB68EC74-B122-470E-ACE1-740774C95190}"/>
+          <p:cNvPr id="29" name="">
+            <a:extLst xmlns:a="http://schemas.openxmlformats.org/drawingml/2006/main">
+              <a:ext uri="{FF2B5EF4-FFF2-40B4-BE49-F238E27FC236}">
+                <a16:creationId xmlns:a16="http://schemas.microsoft.com/office/drawing/2014/main" id="{DA8E5C30-E3AA-4ECD-96A4-337E769D1E5C}"/>
               </a:ext>
             </a:extLst>
           </p:cNvPr>
@@ -5341,10 +5266,10 @@
       </p:sp>
       <p:sp>
         <p:nvSpPr>
-          <p:cNvPr id="31" name="">
-            <a:extLst xmlns:a="http://schemas.openxmlformats.org/drawingml/2006/main">
-              <a:ext uri="{FF2B5EF4-FFF2-40B4-BE49-F238E27FC236}">
-                <a16:creationId xmlns:a16="http://schemas.microsoft.com/office/drawing/2014/main" id="{F65A6C6F-7C75-4B85-8C1C-74A7DEA30A63}"/>
+          <p:cNvPr id="30" name="">
+            <a:extLst xmlns:a="http://schemas.openxmlformats.org/drawingml/2006/main">
+              <a:ext uri="{FF2B5EF4-FFF2-40B4-BE49-F238E27FC236}">
+                <a16:creationId xmlns:a16="http://schemas.microsoft.com/office/drawing/2014/main" id="{46330CBD-E8A5-4D41-80F1-50995FA04038}"/>
               </a:ext>
             </a:extLst>
           </p:cNvPr>
@@ -5399,10 +5324,10 @@
       </p:sp>
       <p:sp>
         <p:nvSpPr>
-          <p:cNvPr id="32" name="">
-            <a:extLst xmlns:a="http://schemas.openxmlformats.org/drawingml/2006/main">
-              <a:ext uri="{FF2B5EF4-FFF2-40B4-BE49-F238E27FC236}">
-                <a16:creationId xmlns:a16="http://schemas.microsoft.com/office/drawing/2014/main" id="{71A76A8F-2B6C-42F0-BC1D-65CF3B6DEC7D}"/>
+          <p:cNvPr id="31" name="">
+            <a:extLst xmlns:a="http://schemas.openxmlformats.org/drawingml/2006/main">
+              <a:ext uri="{FF2B5EF4-FFF2-40B4-BE49-F238E27FC236}">
+                <a16:creationId xmlns:a16="http://schemas.microsoft.com/office/drawing/2014/main" id="{9096E122-3E0D-432F-B8BD-134DFE63143D}"/>
               </a:ext>
             </a:extLst>
           </p:cNvPr>
@@ -5457,10 +5382,10 @@
       </p:sp>
       <p:sp>
         <p:nvSpPr>
-          <p:cNvPr id="33" name="">
-            <a:extLst xmlns:a="http://schemas.openxmlformats.org/drawingml/2006/main">
-              <a:ext uri="{FF2B5EF4-FFF2-40B4-BE49-F238E27FC236}">
-                <a16:creationId xmlns:a16="http://schemas.microsoft.com/office/drawing/2014/main" id="{432988C4-0F76-488A-BAB6-CF7F93C525A5}"/>
+          <p:cNvPr id="32" name="">
+            <a:extLst xmlns:a="http://schemas.openxmlformats.org/drawingml/2006/main">
+              <a:ext uri="{FF2B5EF4-FFF2-40B4-BE49-F238E27FC236}">
+                <a16:creationId xmlns:a16="http://schemas.microsoft.com/office/drawing/2014/main" id="{0D02EE02-19CC-475B-909A-09776A68F067}"/>
               </a:ext>
             </a:extLst>
           </p:cNvPr>
@@ -5494,10 +5419,10 @@
       </p:sp>
       <p:sp>
         <p:nvSpPr>
-          <p:cNvPr id="34" name="">
-            <a:extLst xmlns:a="http://schemas.openxmlformats.org/drawingml/2006/main">
-              <a:ext uri="{FF2B5EF4-FFF2-40B4-BE49-F238E27FC236}">
-                <a16:creationId xmlns:a16="http://schemas.microsoft.com/office/drawing/2014/main" id="{C5202E92-9CB4-4856-8F5A-1F795BE808F2}"/>
+          <p:cNvPr id="33" name="">
+            <a:extLst xmlns:a="http://schemas.openxmlformats.org/drawingml/2006/main">
+              <a:ext uri="{FF2B5EF4-FFF2-40B4-BE49-F238E27FC236}">
+                <a16:creationId xmlns:a16="http://schemas.microsoft.com/office/drawing/2014/main" id="{8CA296CE-7A4E-4D34-861D-D11AFD8DE567}"/>
               </a:ext>
             </a:extLst>
           </p:cNvPr>
@@ -5529,10 +5454,10 @@
       </p:sp>
       <p:sp>
         <p:nvSpPr>
-          <p:cNvPr id="35" name="">
-            <a:extLst xmlns:a="http://schemas.openxmlformats.org/drawingml/2006/main">
-              <a:ext uri="{FF2B5EF4-FFF2-40B4-BE49-F238E27FC236}">
-                <a16:creationId xmlns:a16="http://schemas.microsoft.com/office/drawing/2014/main" id="{F5F750F4-C9D0-47BE-AF44-15B5D5EF4E79}"/>
+          <p:cNvPr id="34" name="">
+            <a:extLst xmlns:a="http://schemas.openxmlformats.org/drawingml/2006/main">
+              <a:ext uri="{FF2B5EF4-FFF2-40B4-BE49-F238E27FC236}">
+                <a16:creationId xmlns:a16="http://schemas.microsoft.com/office/drawing/2014/main" id="{20AC3745-548E-45BE-9A12-28D77BB4F0ED}"/>
               </a:ext>
             </a:extLst>
           </p:cNvPr>
@@ -5587,10 +5512,10 @@
       </p:sp>
       <p:sp>
         <p:nvSpPr>
-          <p:cNvPr id="36" name="">
-            <a:extLst xmlns:a="http://schemas.openxmlformats.org/drawingml/2006/main">
-              <a:ext uri="{FF2B5EF4-FFF2-40B4-BE49-F238E27FC236}">
-                <a16:creationId xmlns:a16="http://schemas.microsoft.com/office/drawing/2014/main" id="{54936CC0-FCC7-4F91-B9C9-B2ED46CCDEB2}"/>
+          <p:cNvPr id="35" name="">
+            <a:extLst xmlns:a="http://schemas.openxmlformats.org/drawingml/2006/main">
+              <a:ext uri="{FF2B5EF4-FFF2-40B4-BE49-F238E27FC236}">
+                <a16:creationId xmlns:a16="http://schemas.microsoft.com/office/drawing/2014/main" id="{29ECB9F1-D5F7-4D90-B81F-BAB4ACC39466}"/>
               </a:ext>
             </a:extLst>
           </p:cNvPr>
@@ -5696,10 +5621,10 @@
       </p:sp>
       <p:sp>
         <p:nvSpPr>
-          <p:cNvPr id="37" name="">
-            <a:extLst xmlns:a="http://schemas.openxmlformats.org/drawingml/2006/main">
-              <a:ext uri="{FF2B5EF4-FFF2-40B4-BE49-F238E27FC236}">
-                <a16:creationId xmlns:a16="http://schemas.microsoft.com/office/drawing/2014/main" id="{64D1C165-1B82-4F5E-881B-1F09963F02D2}"/>
+          <p:cNvPr id="36" name="">
+            <a:extLst xmlns:a="http://schemas.openxmlformats.org/drawingml/2006/main">
+              <a:ext uri="{FF2B5EF4-FFF2-40B4-BE49-F238E27FC236}">
+                <a16:creationId xmlns:a16="http://schemas.microsoft.com/office/drawing/2014/main" id="{DBFBD4E9-8D80-41D2-966E-2AC641B85D89}"/>
               </a:ext>
             </a:extLst>
           </p:cNvPr>
@@ -5729,10 +5654,10 @@
       </p:sp>
       <p:sp>
         <p:nvSpPr>
-          <p:cNvPr id="38" name="">
-            <a:extLst xmlns:a="http://schemas.openxmlformats.org/drawingml/2006/main">
-              <a:ext uri="{FF2B5EF4-FFF2-40B4-BE49-F238E27FC236}">
-                <a16:creationId xmlns:a16="http://schemas.microsoft.com/office/drawing/2014/main" id="{BD27D43E-784C-48F7-A306-D54F22C5C248}"/>
+          <p:cNvPr id="37" name="">
+            <a:extLst xmlns:a="http://schemas.openxmlformats.org/drawingml/2006/main">
+              <a:ext uri="{FF2B5EF4-FFF2-40B4-BE49-F238E27FC236}">
+                <a16:creationId xmlns:a16="http://schemas.microsoft.com/office/drawing/2014/main" id="{027F9994-26A8-4694-9244-0C1ADA23B8DD}"/>
               </a:ext>
             </a:extLst>
           </p:cNvPr>
@@ -5766,10 +5691,10 @@
       </p:sp>
       <p:sp>
         <p:nvSpPr>
-          <p:cNvPr id="39" name="">
-            <a:extLst xmlns:a="http://schemas.openxmlformats.org/drawingml/2006/main">
-              <a:ext uri="{FF2B5EF4-FFF2-40B4-BE49-F238E27FC236}">
-                <a16:creationId xmlns:a16="http://schemas.microsoft.com/office/drawing/2014/main" id="{5C1F5871-4550-49E2-AEB6-D9EF15A4EFAA}"/>
+          <p:cNvPr id="38" name="">
+            <a:extLst xmlns:a="http://schemas.openxmlformats.org/drawingml/2006/main">
+              <a:ext uri="{FF2B5EF4-FFF2-40B4-BE49-F238E27FC236}">
+                <a16:creationId xmlns:a16="http://schemas.microsoft.com/office/drawing/2014/main" id="{AAB8A65E-311D-4007-8655-BDCF3BB60DB6}"/>
               </a:ext>
             </a:extLst>
           </p:cNvPr>
@@ -5801,10 +5726,10 @@
       </p:sp>
       <p:sp>
         <p:nvSpPr>
-          <p:cNvPr id="40" name="">
-            <a:extLst xmlns:a="http://schemas.openxmlformats.org/drawingml/2006/main">
-              <a:ext uri="{FF2B5EF4-FFF2-40B4-BE49-F238E27FC236}">
-                <a16:creationId xmlns:a16="http://schemas.microsoft.com/office/drawing/2014/main" id="{4EB93884-ABF7-4743-A81F-7A4E892DED82}"/>
+          <p:cNvPr id="39" name="">
+            <a:extLst xmlns:a="http://schemas.openxmlformats.org/drawingml/2006/main">
+              <a:ext uri="{FF2B5EF4-FFF2-40B4-BE49-F238E27FC236}">
+                <a16:creationId xmlns:a16="http://schemas.microsoft.com/office/drawing/2014/main" id="{5002BB03-81E5-4699-BED2-2F563FE98749}"/>
               </a:ext>
             </a:extLst>
           </p:cNvPr>
@@ -5859,10 +5784,10 @@
       </p:sp>
       <p:sp>
         <p:nvSpPr>
-          <p:cNvPr id="41" name="">
-            <a:extLst xmlns:a="http://schemas.openxmlformats.org/drawingml/2006/main">
-              <a:ext uri="{FF2B5EF4-FFF2-40B4-BE49-F238E27FC236}">
-                <a16:creationId xmlns:a16="http://schemas.microsoft.com/office/drawing/2014/main" id="{D0468369-A7A8-4D0D-8820-6EAC162A4BAA}"/>
+          <p:cNvPr id="40" name="">
+            <a:extLst xmlns:a="http://schemas.openxmlformats.org/drawingml/2006/main">
+              <a:ext uri="{FF2B5EF4-FFF2-40B4-BE49-F238E27FC236}">
+                <a16:creationId xmlns:a16="http://schemas.microsoft.com/office/drawing/2014/main" id="{CF520FAD-3ECF-4B8D-A5D0-1FD391FB9F76}"/>
               </a:ext>
             </a:extLst>
           </p:cNvPr>
@@ -5951,10 +5876,10 @@
       </p:sp>
       <p:sp>
         <p:nvSpPr>
-          <p:cNvPr id="42" name="">
-            <a:extLst xmlns:a="http://schemas.openxmlformats.org/drawingml/2006/main">
-              <a:ext uri="{FF2B5EF4-FFF2-40B4-BE49-F238E27FC236}">
-                <a16:creationId xmlns:a16="http://schemas.microsoft.com/office/drawing/2014/main" id="{98DDCDC2-D011-47E2-A99C-8D27D0CB1799}"/>
+          <p:cNvPr id="41" name="">
+            <a:extLst xmlns:a="http://schemas.openxmlformats.org/drawingml/2006/main">
+              <a:ext uri="{FF2B5EF4-FFF2-40B4-BE49-F238E27FC236}">
+                <a16:creationId xmlns:a16="http://schemas.microsoft.com/office/drawing/2014/main" id="{8F0F9DDD-B00E-4A1F-9810-3143CC9FF335}"/>
               </a:ext>
             </a:extLst>
           </p:cNvPr>
@@ -5984,10 +5909,10 @@
       </p:sp>
       <p:sp>
         <p:nvSpPr>
-          <p:cNvPr id="43" name="">
-            <a:extLst xmlns:a="http://schemas.openxmlformats.org/drawingml/2006/main">
-              <a:ext uri="{FF2B5EF4-FFF2-40B4-BE49-F238E27FC236}">
-                <a16:creationId xmlns:a16="http://schemas.microsoft.com/office/drawing/2014/main" id="{EEBBB5FF-2400-4ED7-8CE6-0FB1C3ECA851}"/>
+          <p:cNvPr id="42" name="">
+            <a:extLst xmlns:a="http://schemas.openxmlformats.org/drawingml/2006/main">
+              <a:ext uri="{FF2B5EF4-FFF2-40B4-BE49-F238E27FC236}">
+                <a16:creationId xmlns:a16="http://schemas.microsoft.com/office/drawing/2014/main" id="{E799D2BB-40B9-41D3-BFD1-9C5C148A47C8}"/>
               </a:ext>
             </a:extLst>
           </p:cNvPr>
@@ -6021,10 +5946,10 @@
       </p:sp>
       <p:sp>
         <p:nvSpPr>
-          <p:cNvPr id="44" name="">
-            <a:extLst xmlns:a="http://schemas.openxmlformats.org/drawingml/2006/main">
-              <a:ext uri="{FF2B5EF4-FFF2-40B4-BE49-F238E27FC236}">
-                <a16:creationId xmlns:a16="http://schemas.microsoft.com/office/drawing/2014/main" id="{F27CBB80-C800-49D6-AB0A-D11EF48B8A50}"/>
+          <p:cNvPr id="43" name="">
+            <a:extLst xmlns:a="http://schemas.openxmlformats.org/drawingml/2006/main">
+              <a:ext uri="{FF2B5EF4-FFF2-40B4-BE49-F238E27FC236}">
+                <a16:creationId xmlns:a16="http://schemas.microsoft.com/office/drawing/2014/main" id="{1865265C-0C76-4C3A-8477-D6221D5C1483}"/>
               </a:ext>
             </a:extLst>
           </p:cNvPr>
@@ -6056,10 +5981,10 @@
       </p:sp>
       <p:sp>
         <p:nvSpPr>
-          <p:cNvPr id="45" name="">
-            <a:extLst xmlns:a="http://schemas.openxmlformats.org/drawingml/2006/main">
-              <a:ext uri="{FF2B5EF4-FFF2-40B4-BE49-F238E27FC236}">
-                <a16:creationId xmlns:a16="http://schemas.microsoft.com/office/drawing/2014/main" id="{4D13BD46-877A-41AA-AED2-6B85C85C42F4}"/>
+          <p:cNvPr id="44" name="">
+            <a:extLst xmlns:a="http://schemas.openxmlformats.org/drawingml/2006/main">
+              <a:ext uri="{FF2B5EF4-FFF2-40B4-BE49-F238E27FC236}">
+                <a16:creationId xmlns:a16="http://schemas.microsoft.com/office/drawing/2014/main" id="{E76178EA-1CB2-4F9C-949A-0759D4D79C85}"/>
               </a:ext>
             </a:extLst>
           </p:cNvPr>
@@ -6114,10 +6039,10 @@
       </p:sp>
       <p:sp>
         <p:nvSpPr>
-          <p:cNvPr id="46" name="">
-            <a:extLst xmlns:a="http://schemas.openxmlformats.org/drawingml/2006/main">
-              <a:ext uri="{FF2B5EF4-FFF2-40B4-BE49-F238E27FC236}">
-                <a16:creationId xmlns:a16="http://schemas.microsoft.com/office/drawing/2014/main" id="{E5B21E47-3ADD-4F78-B439-BE918C7C3E59}"/>
+          <p:cNvPr id="45" name="">
+            <a:extLst xmlns:a="http://schemas.openxmlformats.org/drawingml/2006/main">
+              <a:ext uri="{FF2B5EF4-FFF2-40B4-BE49-F238E27FC236}">
+                <a16:creationId xmlns:a16="http://schemas.microsoft.com/office/drawing/2014/main" id="{E027365C-C9A5-4EA7-A920-782FA8C61193}"/>
               </a:ext>
             </a:extLst>
           </p:cNvPr>
@@ -6206,10 +6131,10 @@
       </p:sp>
       <p:sp>
         <p:nvSpPr>
-          <p:cNvPr id="47" name="">
-            <a:extLst xmlns:a="http://schemas.openxmlformats.org/drawingml/2006/main">
-              <a:ext uri="{FF2B5EF4-FFF2-40B4-BE49-F238E27FC236}">
-                <a16:creationId xmlns:a16="http://schemas.microsoft.com/office/drawing/2014/main" id="{7AC9ED51-F7D4-4C87-A3B2-6FC651FA3761}"/>
+          <p:cNvPr id="46" name="">
+            <a:extLst xmlns:a="http://schemas.openxmlformats.org/drawingml/2006/main">
+              <a:ext uri="{FF2B5EF4-FFF2-40B4-BE49-F238E27FC236}">
+                <a16:creationId xmlns:a16="http://schemas.microsoft.com/office/drawing/2014/main" id="{0E8995D8-D8F3-45E1-83B2-831AE757097B}"/>
               </a:ext>
             </a:extLst>
           </p:cNvPr>
@@ -6265,7 +6190,7 @@
     </p:spTree>
     <p:extLst>
       <p:ext uri="{BB962C8B-B14F-4D97-AF65-F5344CB8AC3E}">
-        <p14:creationId xmlns:p14="http://schemas.microsoft.com/office/powerpoint/2010/main" val="242126894"/>
+        <p14:creationId xmlns:p14="http://schemas.microsoft.com/office/powerpoint/2010/main" val="1417414538"/>
       </p:ext>
     </p:extLst>
   </p:cSld>
@@ -6296,7 +6221,7 @@
           <p:cNvPr id="1" name="Slide Number Placeholder 5">
             <a:extLst xmlns:a="http://schemas.openxmlformats.org/drawingml/2006/main">
               <a:ext uri="{FF2B5EF4-FFF2-40B4-BE49-F238E27FC236}">
-                <a16:creationId xmlns:a16="http://schemas.microsoft.com/office/drawing/2014/main" id="{F572615B-7240-42F8-B48E-DAA8AA9FBBC2}"/>
+                <a16:creationId xmlns:a16="http://schemas.microsoft.com/office/drawing/2014/main" id="{38BDF79F-9F16-4FEE-B72E-1F506FE9EBEC}"/>
               </a:ext>
             </a:extLst>
           </p:cNvPr>
@@ -6332,7 +6257,7 @@
           <p:nvPr/>
         </p:nvPicPr>
         <p:blipFill>
-          <a:blip xmlns:r="http://schemas.openxmlformats.org/officeDocument/2006/relationships" xmlns:a="http://schemas.openxmlformats.org/drawingml/2006/main" r:embed="Rb9af00f58de549e2"/>
+          <a:blip xmlns:r="http://schemas.openxmlformats.org/officeDocument/2006/relationships" xmlns:a="http://schemas.openxmlformats.org/drawingml/2006/main" r:embed="Rc1602807d1134e50"/>
           <a:srcRect xmlns:a="http://schemas.openxmlformats.org/drawingml/2006/main" l="0" t="21875" r="0" b="21875"/>
           <a:stretch xmlns:a="http://schemas.openxmlformats.org/drawingml/2006/main">
             <a:fillRect l="0" t="0" r="0" b="0"/>
@@ -6353,7 +6278,7 @@
           <p:cNvPr id="3" name="">
             <a:extLst xmlns:a="http://schemas.openxmlformats.org/drawingml/2006/main">
               <a:ext uri="{FF2B5EF4-FFF2-40B4-BE49-F238E27FC236}">
-                <a16:creationId xmlns:a16="http://schemas.microsoft.com/office/drawing/2014/main" id="{C9A74251-F653-4730-8943-C4118B6FFB54}"/>
+                <a16:creationId xmlns:a16="http://schemas.microsoft.com/office/drawing/2014/main" id="{1E75D1FE-E61B-47A3-AB8B-9A66138CDB10}"/>
               </a:ext>
             </a:extLst>
           </p:cNvPr>
@@ -6388,7 +6313,7 @@
           <p:cNvPr id="4" name="">
             <a:extLst xmlns:a="http://schemas.openxmlformats.org/drawingml/2006/main">
               <a:ext uri="{FF2B5EF4-FFF2-40B4-BE49-F238E27FC236}">
-                <a16:creationId xmlns:a16="http://schemas.microsoft.com/office/drawing/2014/main" id="{54C812D5-78F1-4213-AF05-B2E809E61812}"/>
+                <a16:creationId xmlns:a16="http://schemas.microsoft.com/office/drawing/2014/main" id="{66BF111C-5567-4892-A7C6-9A9DC1C71984}"/>
               </a:ext>
             </a:extLst>
           </p:cNvPr>
@@ -6423,7 +6348,7 @@
           <p:cNvPr id="5" name="">
             <a:extLst xmlns:a="http://schemas.openxmlformats.org/drawingml/2006/main">
               <a:ext uri="{FF2B5EF4-FFF2-40B4-BE49-F238E27FC236}">
-                <a16:creationId xmlns:a16="http://schemas.microsoft.com/office/drawing/2014/main" id="{79F6FB29-1162-4A89-BF1E-FD667CC42287}"/>
+                <a16:creationId xmlns:a16="http://schemas.microsoft.com/office/drawing/2014/main" id="{C14A8AB7-43F0-4277-8909-1A58EEAA5D19}"/>
               </a:ext>
             </a:extLst>
           </p:cNvPr>
@@ -6460,7 +6385,7 @@
           <p:cNvPr id="6" name="">
             <a:extLst xmlns:a="http://schemas.openxmlformats.org/drawingml/2006/main">
               <a:ext uri="{FF2B5EF4-FFF2-40B4-BE49-F238E27FC236}">
-                <a16:creationId xmlns:a16="http://schemas.microsoft.com/office/drawing/2014/main" id="{039D5736-6FF5-4C9D-94D3-04891BD83F63}"/>
+                <a16:creationId xmlns:a16="http://schemas.microsoft.com/office/drawing/2014/main" id="{6D83FE16-FFA9-4FEB-9C8D-290FB4D70671}"/>
               </a:ext>
             </a:extLst>
           </p:cNvPr>
@@ -6497,7 +6422,7 @@
           <p:cNvPr id="7" name="">
             <a:extLst xmlns:a="http://schemas.openxmlformats.org/drawingml/2006/main">
               <a:ext uri="{FF2B5EF4-FFF2-40B4-BE49-F238E27FC236}">
-                <a16:creationId xmlns:a16="http://schemas.microsoft.com/office/drawing/2014/main" id="{8F0E6FF1-BD1E-4419-A224-C9BEED89B127}"/>
+                <a16:creationId xmlns:a16="http://schemas.microsoft.com/office/drawing/2014/main" id="{3CEC46F4-DE77-48FD-B7C1-6DC75249D43D}"/>
               </a:ext>
             </a:extLst>
           </p:cNvPr>
@@ -6534,7 +6459,7 @@
           <p:cNvPr id="8" name="">
             <a:extLst xmlns:a="http://schemas.openxmlformats.org/drawingml/2006/main">
               <a:ext uri="{FF2B5EF4-FFF2-40B4-BE49-F238E27FC236}">
-                <a16:creationId xmlns:a16="http://schemas.microsoft.com/office/drawing/2014/main" id="{93B4A495-0C8E-4995-B9AC-350CF9A96803}"/>
+                <a16:creationId xmlns:a16="http://schemas.microsoft.com/office/drawing/2014/main" id="{7961F3A7-8C5A-4F0C-B7D8-3EA31FC61D85}"/>
               </a:ext>
             </a:extLst>
           </p:cNvPr>
@@ -6571,7 +6496,7 @@
           <p:cNvPr id="9" name="">
             <a:extLst xmlns:a="http://schemas.openxmlformats.org/drawingml/2006/main">
               <a:ext uri="{FF2B5EF4-FFF2-40B4-BE49-F238E27FC236}">
-                <a16:creationId xmlns:a16="http://schemas.microsoft.com/office/drawing/2014/main" id="{2B9CDF26-B787-4B70-880A-38D4410F5819}"/>
+                <a16:creationId xmlns:a16="http://schemas.microsoft.com/office/drawing/2014/main" id="{F142064F-76D4-4450-9972-EB1E1A70A696}"/>
               </a:ext>
             </a:extLst>
           </p:cNvPr>
@@ -6629,7 +6554,7 @@
           <p:cNvPr id="10" name="">
             <a:extLst xmlns:a="http://schemas.openxmlformats.org/drawingml/2006/main">
               <a:ext uri="{FF2B5EF4-FFF2-40B4-BE49-F238E27FC236}">
-                <a16:creationId xmlns:a16="http://schemas.microsoft.com/office/drawing/2014/main" id="{D006DB2C-CBD2-43F7-9358-AAB0084559A4}"/>
+                <a16:creationId xmlns:a16="http://schemas.microsoft.com/office/drawing/2014/main" id="{D1CF43F0-86E8-417B-8BBD-997A9F2491B8}"/>
               </a:ext>
             </a:extLst>
           </p:cNvPr>
@@ -6687,7 +6612,7 @@
           <p:cNvPr id="11" name="">
             <a:extLst xmlns:a="http://schemas.openxmlformats.org/drawingml/2006/main">
               <a:ext uri="{FF2B5EF4-FFF2-40B4-BE49-F238E27FC236}">
-                <a16:creationId xmlns:a16="http://schemas.microsoft.com/office/drawing/2014/main" id="{C3E124F3-59D2-4421-A781-2F0AEF1E2E74}"/>
+                <a16:creationId xmlns:a16="http://schemas.microsoft.com/office/drawing/2014/main" id="{2D610C14-4DF2-4B94-B936-0152572087A2}"/>
               </a:ext>
             </a:extLst>
           </p:cNvPr>
@@ -6722,7 +6647,7 @@
           <p:cNvPr id="12" name="">
             <a:extLst xmlns:a="http://schemas.openxmlformats.org/drawingml/2006/main">
               <a:ext uri="{FF2B5EF4-FFF2-40B4-BE49-F238E27FC236}">
-                <a16:creationId xmlns:a16="http://schemas.microsoft.com/office/drawing/2014/main" id="{47FE51FD-4A1B-45D3-85B7-86F239C88B85}"/>
+                <a16:creationId xmlns:a16="http://schemas.microsoft.com/office/drawing/2014/main" id="{BB7BA91A-5960-4122-9600-21DACF5235E2}"/>
               </a:ext>
             </a:extLst>
           </p:cNvPr>
@@ -6755,7 +6680,7 @@
           <p:cNvPr id="13" name="">
             <a:extLst xmlns:a="http://schemas.openxmlformats.org/drawingml/2006/main">
               <a:ext uri="{FF2B5EF4-FFF2-40B4-BE49-F238E27FC236}">
-                <a16:creationId xmlns:a16="http://schemas.microsoft.com/office/drawing/2014/main" id="{CB0ED1C0-E045-4DD4-8118-8F6D8B6CFEEC}"/>
+                <a16:creationId xmlns:a16="http://schemas.microsoft.com/office/drawing/2014/main" id="{5983DB4E-FF79-4AEB-B80F-CF237C3780B4}"/>
               </a:ext>
             </a:extLst>
           </p:cNvPr>
@@ -6830,7 +6755,7 @@
           <p:cNvPr id="14" name="">
             <a:extLst xmlns:a="http://schemas.openxmlformats.org/drawingml/2006/main">
               <a:ext uri="{FF2B5EF4-FFF2-40B4-BE49-F238E27FC236}">
-                <a16:creationId xmlns:a16="http://schemas.microsoft.com/office/drawing/2014/main" id="{D661FF4F-E201-4E84-B09D-DE40557B415A}"/>
+                <a16:creationId xmlns:a16="http://schemas.microsoft.com/office/drawing/2014/main" id="{AF2CC836-9AAF-4EA7-844B-594C4FAECAF5}"/>
               </a:ext>
             </a:extLst>
           </p:cNvPr>
@@ -6905,7 +6830,7 @@
           <p:cNvPr id="15" name="">
             <a:extLst xmlns:a="http://schemas.openxmlformats.org/drawingml/2006/main">
               <a:ext uri="{FF2B5EF4-FFF2-40B4-BE49-F238E27FC236}">
-                <a16:creationId xmlns:a16="http://schemas.microsoft.com/office/drawing/2014/main" id="{A8B85DE6-F782-4E45-A153-120475B745A8}"/>
+                <a16:creationId xmlns:a16="http://schemas.microsoft.com/office/drawing/2014/main" id="{6CAF3C73-F4D0-496A-B520-367E081D4979}"/>
               </a:ext>
             </a:extLst>
           </p:cNvPr>
@@ -6940,7 +6865,7 @@
           <p:cNvPr id="16" name="">
             <a:extLst xmlns:a="http://schemas.openxmlformats.org/drawingml/2006/main">
               <a:ext uri="{FF2B5EF4-FFF2-40B4-BE49-F238E27FC236}">
-                <a16:creationId xmlns:a16="http://schemas.microsoft.com/office/drawing/2014/main" id="{48519F90-D868-43CD-9E3A-5B9F1EEB1036}"/>
+                <a16:creationId xmlns:a16="http://schemas.microsoft.com/office/drawing/2014/main" id="{725BBE9A-3047-43F6-B50B-267688FC1E2E}"/>
               </a:ext>
             </a:extLst>
           </p:cNvPr>
@@ -6975,7 +6900,7 @@
           <p:cNvPr id="17" name="">
             <a:extLst xmlns:a="http://schemas.openxmlformats.org/drawingml/2006/main">
               <a:ext uri="{FF2B5EF4-FFF2-40B4-BE49-F238E27FC236}">
-                <a16:creationId xmlns:a16="http://schemas.microsoft.com/office/drawing/2014/main" id="{28CE8A7A-FF9B-4891-A116-B2DC29E98CE8}"/>
+                <a16:creationId xmlns:a16="http://schemas.microsoft.com/office/drawing/2014/main" id="{18FC66C5-CDB0-4D03-A9B8-57755EBC0B2E}"/>
               </a:ext>
             </a:extLst>
           </p:cNvPr>
@@ -7029,7 +6954,7 @@
           <p:cNvPr id="18" name="">
             <a:extLst xmlns:a="http://schemas.openxmlformats.org/drawingml/2006/main">
               <a:ext uri="{FF2B5EF4-FFF2-40B4-BE49-F238E27FC236}">
-                <a16:creationId xmlns:a16="http://schemas.microsoft.com/office/drawing/2014/main" id="{4BAC7AD7-03EF-42B2-8002-98742E0ADDCB}"/>
+                <a16:creationId xmlns:a16="http://schemas.microsoft.com/office/drawing/2014/main" id="{41B6DB8F-2BDF-45AC-81FF-53F93A184848}"/>
               </a:ext>
             </a:extLst>
           </p:cNvPr>
@@ -7087,7 +7012,7 @@
           <p:cNvPr id="19" name="">
             <a:extLst xmlns:a="http://schemas.openxmlformats.org/drawingml/2006/main">
               <a:ext uri="{FF2B5EF4-FFF2-40B4-BE49-F238E27FC236}">
-                <a16:creationId xmlns:a16="http://schemas.microsoft.com/office/drawing/2014/main" id="{77302AFE-6DB1-4F90-B753-2F0AFD92A0ED}"/>
+                <a16:creationId xmlns:a16="http://schemas.microsoft.com/office/drawing/2014/main" id="{AA9AF575-B1DA-40BC-8E0D-47BEC68FC39D}"/>
               </a:ext>
             </a:extLst>
           </p:cNvPr>
@@ -7145,7 +7070,7 @@
           <p:cNvPr id="20" name="">
             <a:extLst xmlns:a="http://schemas.openxmlformats.org/drawingml/2006/main">
               <a:ext uri="{FF2B5EF4-FFF2-40B4-BE49-F238E27FC236}">
-                <a16:creationId xmlns:a16="http://schemas.microsoft.com/office/drawing/2014/main" id="{3FFE4EC7-FCBF-425C-BF80-CA69C528D05F}"/>
+                <a16:creationId xmlns:a16="http://schemas.microsoft.com/office/drawing/2014/main" id="{5686A8D9-F85E-413D-B882-870636204707}"/>
               </a:ext>
             </a:extLst>
           </p:cNvPr>
@@ -7180,7 +7105,7 @@
           <p:cNvPr id="21" name="">
             <a:extLst xmlns:a="http://schemas.openxmlformats.org/drawingml/2006/main">
               <a:ext uri="{FF2B5EF4-FFF2-40B4-BE49-F238E27FC236}">
-                <a16:creationId xmlns:a16="http://schemas.microsoft.com/office/drawing/2014/main" id="{C2DC5EE5-6D14-42F0-9251-E8B80CB69628}"/>
+                <a16:creationId xmlns:a16="http://schemas.microsoft.com/office/drawing/2014/main" id="{643F7BBC-E7CE-481C-8014-6C11633B4E8F}"/>
               </a:ext>
             </a:extLst>
           </p:cNvPr>
@@ -7215,7 +7140,7 @@
           <p:cNvPr id="22" name="">
             <a:extLst xmlns:a="http://schemas.openxmlformats.org/drawingml/2006/main">
               <a:ext uri="{FF2B5EF4-FFF2-40B4-BE49-F238E27FC236}">
-                <a16:creationId xmlns:a16="http://schemas.microsoft.com/office/drawing/2014/main" id="{7A44AB59-9EF1-4D7E-BBA3-7B0D7FE152D1}"/>
+                <a16:creationId xmlns:a16="http://schemas.microsoft.com/office/drawing/2014/main" id="{8BA38400-49D0-4D75-A76C-62FB39A931C3}"/>
               </a:ext>
             </a:extLst>
           </p:cNvPr>
@@ -7269,7 +7194,7 @@
           <p:cNvPr id="23" name="">
             <a:extLst xmlns:a="http://schemas.openxmlformats.org/drawingml/2006/main">
               <a:ext uri="{FF2B5EF4-FFF2-40B4-BE49-F238E27FC236}">
-                <a16:creationId xmlns:a16="http://schemas.microsoft.com/office/drawing/2014/main" id="{2E93400D-D60C-4047-A340-F214C842B5FD}"/>
+                <a16:creationId xmlns:a16="http://schemas.microsoft.com/office/drawing/2014/main" id="{59B2C587-DB53-43D9-B2AB-F1CFCB9102AF}"/>
               </a:ext>
             </a:extLst>
           </p:cNvPr>
@@ -7327,7 +7252,7 @@
           <p:cNvPr id="24" name="">
             <a:extLst xmlns:a="http://schemas.openxmlformats.org/drawingml/2006/main">
               <a:ext uri="{FF2B5EF4-FFF2-40B4-BE49-F238E27FC236}">
-                <a16:creationId xmlns:a16="http://schemas.microsoft.com/office/drawing/2014/main" id="{27093ED0-0CEC-436C-87E9-B6B367F58BCB}"/>
+                <a16:creationId xmlns:a16="http://schemas.microsoft.com/office/drawing/2014/main" id="{0F0BD039-4C7B-4BED-8D89-1B6444379C7F}"/>
               </a:ext>
             </a:extLst>
           </p:cNvPr>
@@ -7385,7 +7310,7 @@
           <p:cNvPr id="25" name="">
             <a:extLst xmlns:a="http://schemas.openxmlformats.org/drawingml/2006/main">
               <a:ext uri="{FF2B5EF4-FFF2-40B4-BE49-F238E27FC236}">
-                <a16:creationId xmlns:a16="http://schemas.microsoft.com/office/drawing/2014/main" id="{71227CA5-EA45-4D2C-91A0-B396E4CA15DA}"/>
+                <a16:creationId xmlns:a16="http://schemas.microsoft.com/office/drawing/2014/main" id="{E113898C-C22F-407A-8E99-8F931A732111}"/>
               </a:ext>
             </a:extLst>
           </p:cNvPr>
@@ -7420,7 +7345,7 @@
           <p:cNvPr id="26" name="">
             <a:extLst xmlns:a="http://schemas.openxmlformats.org/drawingml/2006/main">
               <a:ext uri="{FF2B5EF4-FFF2-40B4-BE49-F238E27FC236}">
-                <a16:creationId xmlns:a16="http://schemas.microsoft.com/office/drawing/2014/main" id="{B32C03CE-EEDB-4817-A462-1211AB58E5AA}"/>
+                <a16:creationId xmlns:a16="http://schemas.microsoft.com/office/drawing/2014/main" id="{6CBC081E-23C6-4A02-92D6-1FF63A8E9BAC}"/>
               </a:ext>
             </a:extLst>
           </p:cNvPr>
@@ -7455,7 +7380,7 @@
           <p:cNvPr id="27" name="">
             <a:extLst xmlns:a="http://schemas.openxmlformats.org/drawingml/2006/main">
               <a:ext uri="{FF2B5EF4-FFF2-40B4-BE49-F238E27FC236}">
-                <a16:creationId xmlns:a16="http://schemas.microsoft.com/office/drawing/2014/main" id="{D1D9020F-081A-4B20-9AAD-BE72F999C322}"/>
+                <a16:creationId xmlns:a16="http://schemas.microsoft.com/office/drawing/2014/main" id="{FF4116DF-1859-4E31-8972-580E10B142AB}"/>
               </a:ext>
             </a:extLst>
           </p:cNvPr>
@@ -7509,7 +7434,7 @@
           <p:cNvPr id="28" name="">
             <a:extLst xmlns:a="http://schemas.openxmlformats.org/drawingml/2006/main">
               <a:ext uri="{FF2B5EF4-FFF2-40B4-BE49-F238E27FC236}">
-                <a16:creationId xmlns:a16="http://schemas.microsoft.com/office/drawing/2014/main" id="{4441E4AC-C379-4318-862F-786CD81A0EB6}"/>
+                <a16:creationId xmlns:a16="http://schemas.microsoft.com/office/drawing/2014/main" id="{389F2218-A171-44EE-A78A-07CAB3ABE768}"/>
               </a:ext>
             </a:extLst>
           </p:cNvPr>
@@ -7567,7 +7492,7 @@
           <p:cNvPr id="29" name="">
             <a:extLst xmlns:a="http://schemas.openxmlformats.org/drawingml/2006/main">
               <a:ext uri="{FF2B5EF4-FFF2-40B4-BE49-F238E27FC236}">
-                <a16:creationId xmlns:a16="http://schemas.microsoft.com/office/drawing/2014/main" id="{B0672947-4E51-4069-89B9-E263B862F24F}"/>
+                <a16:creationId xmlns:a16="http://schemas.microsoft.com/office/drawing/2014/main" id="{121C9A7F-F6D5-410C-B03C-165FEEAB56AC}"/>
               </a:ext>
             </a:extLst>
           </p:cNvPr>
@@ -7642,7 +7567,7 @@
           <p:cNvPr id="30" name="">
             <a:extLst xmlns:a="http://schemas.openxmlformats.org/drawingml/2006/main">
               <a:ext uri="{FF2B5EF4-FFF2-40B4-BE49-F238E27FC236}">
-                <a16:creationId xmlns:a16="http://schemas.microsoft.com/office/drawing/2014/main" id="{9E79DA4A-31E1-437E-903A-CA7A5754423C}"/>
+                <a16:creationId xmlns:a16="http://schemas.microsoft.com/office/drawing/2014/main" id="{4B860FE3-EAFB-47A5-B373-ACA16302ED15}"/>
               </a:ext>
             </a:extLst>
           </p:cNvPr>
@@ -7677,7 +7602,7 @@
           <p:cNvPr id="31" name="">
             <a:extLst xmlns:a="http://schemas.openxmlformats.org/drawingml/2006/main">
               <a:ext uri="{FF2B5EF4-FFF2-40B4-BE49-F238E27FC236}">
-                <a16:creationId xmlns:a16="http://schemas.microsoft.com/office/drawing/2014/main" id="{5A1A11DB-2E04-4E1A-B259-0156619A7115}"/>
+                <a16:creationId xmlns:a16="http://schemas.microsoft.com/office/drawing/2014/main" id="{92A096CB-8C5D-4BE8-82CB-5AFCD0CF32A4}"/>
               </a:ext>
             </a:extLst>
           </p:cNvPr>
@@ -7712,7 +7637,7 @@
           <p:cNvPr id="32" name="">
             <a:extLst xmlns:a="http://schemas.openxmlformats.org/drawingml/2006/main">
               <a:ext uri="{FF2B5EF4-FFF2-40B4-BE49-F238E27FC236}">
-                <a16:creationId xmlns:a16="http://schemas.microsoft.com/office/drawing/2014/main" id="{0F63F19F-F64D-4505-A479-C2A3477EF7DE}"/>
+                <a16:creationId xmlns:a16="http://schemas.microsoft.com/office/drawing/2014/main" id="{B89D60C8-B62B-455C-AC40-DE0B948244C1}"/>
               </a:ext>
             </a:extLst>
           </p:cNvPr>
@@ -7766,7 +7691,7 @@
           <p:cNvPr id="33" name="">
             <a:extLst xmlns:a="http://schemas.openxmlformats.org/drawingml/2006/main">
               <a:ext uri="{FF2B5EF4-FFF2-40B4-BE49-F238E27FC236}">
-                <a16:creationId xmlns:a16="http://schemas.microsoft.com/office/drawing/2014/main" id="{44C75B90-2FBB-434C-BFB1-4CFACA7D91AC}"/>
+                <a16:creationId xmlns:a16="http://schemas.microsoft.com/office/drawing/2014/main" id="{0F024ECB-6AFD-42E8-8B15-68D96D28A5DA}"/>
               </a:ext>
             </a:extLst>
           </p:cNvPr>
@@ -7824,7 +7749,7 @@
           <p:cNvPr id="34" name="">
             <a:extLst xmlns:a="http://schemas.openxmlformats.org/drawingml/2006/main">
               <a:ext uri="{FF2B5EF4-FFF2-40B4-BE49-F238E27FC236}">
-                <a16:creationId xmlns:a16="http://schemas.microsoft.com/office/drawing/2014/main" id="{3269867F-984B-4B79-9256-0AC2FD941962}"/>
+                <a16:creationId xmlns:a16="http://schemas.microsoft.com/office/drawing/2014/main" id="{879A5B86-835B-45BC-9B22-1996BC62FA98}"/>
               </a:ext>
             </a:extLst>
           </p:cNvPr>
@@ -7899,7 +7824,7 @@
           <p:cNvPr id="35" name="">
             <a:extLst xmlns:a="http://schemas.openxmlformats.org/drawingml/2006/main">
               <a:ext uri="{FF2B5EF4-FFF2-40B4-BE49-F238E27FC236}">
-                <a16:creationId xmlns:a16="http://schemas.microsoft.com/office/drawing/2014/main" id="{7E378AA8-02C4-4207-860D-1A340BA951F9}"/>
+                <a16:creationId xmlns:a16="http://schemas.microsoft.com/office/drawing/2014/main" id="{3371778E-0307-47A4-8145-121F226658C6}"/>
               </a:ext>
             </a:extLst>
           </p:cNvPr>
@@ -7934,7 +7859,7 @@
           <p:cNvPr id="36" name="">
             <a:extLst xmlns:a="http://schemas.openxmlformats.org/drawingml/2006/main">
               <a:ext uri="{FF2B5EF4-FFF2-40B4-BE49-F238E27FC236}">
-                <a16:creationId xmlns:a16="http://schemas.microsoft.com/office/drawing/2014/main" id="{80D8A7D6-1985-44EE-8D7F-18ED6CAC7413}"/>
+                <a16:creationId xmlns:a16="http://schemas.microsoft.com/office/drawing/2014/main" id="{742746C0-A7A8-4375-8C37-456D477A56DB}"/>
               </a:ext>
             </a:extLst>
           </p:cNvPr>
@@ -7969,7 +7894,7 @@
           <p:cNvPr id="37" name="">
             <a:extLst xmlns:a="http://schemas.openxmlformats.org/drawingml/2006/main">
               <a:ext uri="{FF2B5EF4-FFF2-40B4-BE49-F238E27FC236}">
-                <a16:creationId xmlns:a16="http://schemas.microsoft.com/office/drawing/2014/main" id="{523F5A8F-FA18-44D8-A1D0-B1851DF52F8D}"/>
+                <a16:creationId xmlns:a16="http://schemas.microsoft.com/office/drawing/2014/main" id="{050C3C19-030A-4607-A69B-E562A4E1D9B3}"/>
               </a:ext>
             </a:extLst>
           </p:cNvPr>
@@ -8023,7 +7948,7 @@
           <p:cNvPr id="38" name="">
             <a:extLst xmlns:a="http://schemas.openxmlformats.org/drawingml/2006/main">
               <a:ext uri="{FF2B5EF4-FFF2-40B4-BE49-F238E27FC236}">
-                <a16:creationId xmlns:a16="http://schemas.microsoft.com/office/drawing/2014/main" id="{4A808DC1-94BD-4C87-A6B5-2A722561E39B}"/>
+                <a16:creationId xmlns:a16="http://schemas.microsoft.com/office/drawing/2014/main" id="{6AF8B326-DABD-4279-B2BE-F2E4C192C851}"/>
               </a:ext>
             </a:extLst>
           </p:cNvPr>
@@ -8081,7 +8006,7 @@
           <p:cNvPr id="39" name="">
             <a:extLst xmlns:a="http://schemas.openxmlformats.org/drawingml/2006/main">
               <a:ext uri="{FF2B5EF4-FFF2-40B4-BE49-F238E27FC236}">
-                <a16:creationId xmlns:a16="http://schemas.microsoft.com/office/drawing/2014/main" id="{DD43AAF6-EBD1-4E40-9DD3-0C30F16C5E7B}"/>
+                <a16:creationId xmlns:a16="http://schemas.microsoft.com/office/drawing/2014/main" id="{CBD0CB0C-0F4B-4452-A4B9-486F54DC1FA5}"/>
               </a:ext>
             </a:extLst>
           </p:cNvPr>
@@ -8139,7 +8064,7 @@
           <p:cNvPr id="40" name="">
             <a:extLst xmlns:a="http://schemas.openxmlformats.org/drawingml/2006/main">
               <a:ext uri="{FF2B5EF4-FFF2-40B4-BE49-F238E27FC236}">
-                <a16:creationId xmlns:a16="http://schemas.microsoft.com/office/drawing/2014/main" id="{80EE4916-1444-4909-9513-39AFAE837B26}"/>
+                <a16:creationId xmlns:a16="http://schemas.microsoft.com/office/drawing/2014/main" id="{FA75921A-8A47-4945-8F07-FCE7E9B83311}"/>
               </a:ext>
             </a:extLst>
           </p:cNvPr>
@@ -8174,7 +8099,7 @@
           <p:cNvPr id="41" name="">
             <a:extLst xmlns:a="http://schemas.openxmlformats.org/drawingml/2006/main">
               <a:ext uri="{FF2B5EF4-FFF2-40B4-BE49-F238E27FC236}">
-                <a16:creationId xmlns:a16="http://schemas.microsoft.com/office/drawing/2014/main" id="{D74583F9-9176-42DE-94C5-8BB404468311}"/>
+                <a16:creationId xmlns:a16="http://schemas.microsoft.com/office/drawing/2014/main" id="{6F892A4C-1916-4525-8277-D34D5DFD833B}"/>
               </a:ext>
             </a:extLst>
           </p:cNvPr>
@@ -8209,7 +8134,7 @@
           <p:cNvPr id="42" name="">
             <a:extLst xmlns:a="http://schemas.openxmlformats.org/drawingml/2006/main">
               <a:ext uri="{FF2B5EF4-FFF2-40B4-BE49-F238E27FC236}">
-                <a16:creationId xmlns:a16="http://schemas.microsoft.com/office/drawing/2014/main" id="{04812895-09CA-432B-AE7D-E5F1C81C3D7F}"/>
+                <a16:creationId xmlns:a16="http://schemas.microsoft.com/office/drawing/2014/main" id="{ADB12641-90D1-4B96-BA35-F07F5934479A}"/>
               </a:ext>
             </a:extLst>
           </p:cNvPr>
@@ -8263,7 +8188,7 @@
           <p:cNvPr id="43" name="">
             <a:extLst xmlns:a="http://schemas.openxmlformats.org/drawingml/2006/main">
               <a:ext uri="{FF2B5EF4-FFF2-40B4-BE49-F238E27FC236}">
-                <a16:creationId xmlns:a16="http://schemas.microsoft.com/office/drawing/2014/main" id="{31DCAAD5-B4BE-461E-A378-3AC946EE76D2}"/>
+                <a16:creationId xmlns:a16="http://schemas.microsoft.com/office/drawing/2014/main" id="{5F8C90B2-94B9-4401-AA5E-D1D470C64CB5}"/>
               </a:ext>
             </a:extLst>
           </p:cNvPr>
@@ -8321,7 +8246,7 @@
           <p:cNvPr id="44" name="">
             <a:extLst xmlns:a="http://schemas.openxmlformats.org/drawingml/2006/main">
               <a:ext uri="{FF2B5EF4-FFF2-40B4-BE49-F238E27FC236}">
-                <a16:creationId xmlns:a16="http://schemas.microsoft.com/office/drawing/2014/main" id="{3BD92B98-9586-4DA8-B06E-73917142A341}"/>
+                <a16:creationId xmlns:a16="http://schemas.microsoft.com/office/drawing/2014/main" id="{A24568CC-D9AD-4380-A94E-9966FA83DA1B}"/>
               </a:ext>
             </a:extLst>
           </p:cNvPr>
@@ -8379,7 +8304,7 @@
           <p:cNvPr id="45" name="">
             <a:extLst xmlns:a="http://schemas.openxmlformats.org/drawingml/2006/main">
               <a:ext uri="{FF2B5EF4-FFF2-40B4-BE49-F238E27FC236}">
-                <a16:creationId xmlns:a16="http://schemas.microsoft.com/office/drawing/2014/main" id="{8A5F0AA4-88CF-4307-8C68-A1A05589771A}"/>
+                <a16:creationId xmlns:a16="http://schemas.microsoft.com/office/drawing/2014/main" id="{259B07B4-FB8D-4E09-945A-FA274D32055F}"/>
               </a:ext>
             </a:extLst>
           </p:cNvPr>
@@ -8414,7 +8339,7 @@
           <p:cNvPr id="46" name="">
             <a:extLst xmlns:a="http://schemas.openxmlformats.org/drawingml/2006/main">
               <a:ext uri="{FF2B5EF4-FFF2-40B4-BE49-F238E27FC236}">
-                <a16:creationId xmlns:a16="http://schemas.microsoft.com/office/drawing/2014/main" id="{B27D3051-70A7-4FDF-A254-F28874EC8C1A}"/>
+                <a16:creationId xmlns:a16="http://schemas.microsoft.com/office/drawing/2014/main" id="{D57BFA31-9E8E-43C2-92AD-B14D43D68482}"/>
               </a:ext>
             </a:extLst>
           </p:cNvPr>
@@ -8449,7 +8374,7 @@
           <p:cNvPr id="47" name="">
             <a:extLst xmlns:a="http://schemas.openxmlformats.org/drawingml/2006/main">
               <a:ext uri="{FF2B5EF4-FFF2-40B4-BE49-F238E27FC236}">
-                <a16:creationId xmlns:a16="http://schemas.microsoft.com/office/drawing/2014/main" id="{02C0194C-3581-4B95-B44F-6CBE9854EC50}"/>
+                <a16:creationId xmlns:a16="http://schemas.microsoft.com/office/drawing/2014/main" id="{2ED3EA49-893C-45FA-9036-C502F85DCD9B}"/>
               </a:ext>
             </a:extLst>
           </p:cNvPr>
@@ -8503,7 +8428,7 @@
           <p:cNvPr id="48" name="">
             <a:extLst xmlns:a="http://schemas.openxmlformats.org/drawingml/2006/main">
               <a:ext uri="{FF2B5EF4-FFF2-40B4-BE49-F238E27FC236}">
-                <a16:creationId xmlns:a16="http://schemas.microsoft.com/office/drawing/2014/main" id="{CD31C9B7-7664-4B74-93A4-5B637A874E93}"/>
+                <a16:creationId xmlns:a16="http://schemas.microsoft.com/office/drawing/2014/main" id="{09FAA738-F69C-4085-9812-0C660D2959AD}"/>
               </a:ext>
             </a:extLst>
           </p:cNvPr>
@@ -8561,7 +8486,7 @@
           <p:cNvPr id="49" name="">
             <a:extLst xmlns:a="http://schemas.openxmlformats.org/drawingml/2006/main">
               <a:ext uri="{FF2B5EF4-FFF2-40B4-BE49-F238E27FC236}">
-                <a16:creationId xmlns:a16="http://schemas.microsoft.com/office/drawing/2014/main" id="{82D58523-8214-4B48-9622-2BC3D525614F}"/>
+                <a16:creationId xmlns:a16="http://schemas.microsoft.com/office/drawing/2014/main" id="{563F582D-48E7-4263-A423-C480B35F0947}"/>
               </a:ext>
             </a:extLst>
           </p:cNvPr>
@@ -8619,7 +8544,7 @@
           <p:cNvPr id="50" name="">
             <a:extLst xmlns:a="http://schemas.openxmlformats.org/drawingml/2006/main">
               <a:ext uri="{FF2B5EF4-FFF2-40B4-BE49-F238E27FC236}">
-                <a16:creationId xmlns:a16="http://schemas.microsoft.com/office/drawing/2014/main" id="{D98EC333-83DA-48DA-86B8-C59FFB715593}"/>
+                <a16:creationId xmlns:a16="http://schemas.microsoft.com/office/drawing/2014/main" id="{CE07595E-3A9B-4E32-A888-F1C0CD13C394}"/>
               </a:ext>
             </a:extLst>
           </p:cNvPr>
@@ -8654,7 +8579,7 @@
           <p:cNvPr id="51" name="">
             <a:extLst xmlns:a="http://schemas.openxmlformats.org/drawingml/2006/main">
               <a:ext uri="{FF2B5EF4-FFF2-40B4-BE49-F238E27FC236}">
-                <a16:creationId xmlns:a16="http://schemas.microsoft.com/office/drawing/2014/main" id="{5B2FEB4E-7652-4028-889E-4155FC4D9BE4}"/>
+                <a16:creationId xmlns:a16="http://schemas.microsoft.com/office/drawing/2014/main" id="{CF802DAE-1EC5-4CA6-BBE0-16DFE438FC40}"/>
               </a:ext>
             </a:extLst>
           </p:cNvPr>
@@ -8689,7 +8614,7 @@
           <p:cNvPr id="52" name="">
             <a:extLst xmlns:a="http://schemas.openxmlformats.org/drawingml/2006/main">
               <a:ext uri="{FF2B5EF4-FFF2-40B4-BE49-F238E27FC236}">
-                <a16:creationId xmlns:a16="http://schemas.microsoft.com/office/drawing/2014/main" id="{DB6FA8D7-727E-4C80-897E-39D4CE4D563C}"/>
+                <a16:creationId xmlns:a16="http://schemas.microsoft.com/office/drawing/2014/main" id="{95FFBB06-C7B5-42CF-8DD4-73BB173DF017}"/>
               </a:ext>
             </a:extLst>
           </p:cNvPr>
@@ -8743,7 +8668,7 @@
           <p:cNvPr id="53" name="">
             <a:extLst xmlns:a="http://schemas.openxmlformats.org/drawingml/2006/main">
               <a:ext uri="{FF2B5EF4-FFF2-40B4-BE49-F238E27FC236}">
-                <a16:creationId xmlns:a16="http://schemas.microsoft.com/office/drawing/2014/main" id="{5F46B2CE-082E-4506-B1EB-1FD06E87EB54}"/>
+                <a16:creationId xmlns:a16="http://schemas.microsoft.com/office/drawing/2014/main" id="{77AEC59C-7C7E-43EB-8618-94A57977FF3E}"/>
               </a:ext>
             </a:extLst>
           </p:cNvPr>
@@ -8801,7 +8726,7 @@
           <p:cNvPr id="54" name="">
             <a:extLst xmlns:a="http://schemas.openxmlformats.org/drawingml/2006/main">
               <a:ext uri="{FF2B5EF4-FFF2-40B4-BE49-F238E27FC236}">
-                <a16:creationId xmlns:a16="http://schemas.microsoft.com/office/drawing/2014/main" id="{E1ED64BA-A23E-4CFE-A01F-D22A9A66B5B1}"/>
+                <a16:creationId xmlns:a16="http://schemas.microsoft.com/office/drawing/2014/main" id="{77D3059A-E79F-4E3A-9033-30D7D10A5D0D}"/>
               </a:ext>
             </a:extLst>
           </p:cNvPr>
@@ -8859,7 +8784,7 @@
           <p:cNvPr id="55" name="">
             <a:extLst xmlns:a="http://schemas.openxmlformats.org/drawingml/2006/main">
               <a:ext uri="{FF2B5EF4-FFF2-40B4-BE49-F238E27FC236}">
-                <a16:creationId xmlns:a16="http://schemas.microsoft.com/office/drawing/2014/main" id="{41483EE5-1D85-4358-ADFE-B916A147F574}"/>
+                <a16:creationId xmlns:a16="http://schemas.microsoft.com/office/drawing/2014/main" id="{1F35ADA7-0526-4D76-9E90-1B82A392F421}"/>
               </a:ext>
             </a:extLst>
           </p:cNvPr>
@@ -8894,7 +8819,7 @@
           <p:cNvPr id="56" name="">
             <a:extLst xmlns:a="http://schemas.openxmlformats.org/drawingml/2006/main">
               <a:ext uri="{FF2B5EF4-FFF2-40B4-BE49-F238E27FC236}">
-                <a16:creationId xmlns:a16="http://schemas.microsoft.com/office/drawing/2014/main" id="{CEE27704-299E-4190-A669-795F458EE744}"/>
+                <a16:creationId xmlns:a16="http://schemas.microsoft.com/office/drawing/2014/main" id="{74634BAA-CD6A-41BA-8C1A-50AE0075E98C}"/>
               </a:ext>
             </a:extLst>
           </p:cNvPr>
@@ -8929,7 +8854,7 @@
           <p:cNvPr id="57" name="">
             <a:extLst xmlns:a="http://schemas.openxmlformats.org/drawingml/2006/main">
               <a:ext uri="{FF2B5EF4-FFF2-40B4-BE49-F238E27FC236}">
-                <a16:creationId xmlns:a16="http://schemas.microsoft.com/office/drawing/2014/main" id="{85A46E46-92F5-4A31-8B9F-53E31171A583}"/>
+                <a16:creationId xmlns:a16="http://schemas.microsoft.com/office/drawing/2014/main" id="{F17EA2AA-FE81-45CE-A140-6AA619453DF1}"/>
               </a:ext>
             </a:extLst>
           </p:cNvPr>
@@ -8983,7 +8908,7 @@
           <p:cNvPr id="58" name="">
             <a:extLst xmlns:a="http://schemas.openxmlformats.org/drawingml/2006/main">
               <a:ext uri="{FF2B5EF4-FFF2-40B4-BE49-F238E27FC236}">
-                <a16:creationId xmlns:a16="http://schemas.microsoft.com/office/drawing/2014/main" id="{0C57769C-3BB3-4C21-A4D1-91C7A83C42A0}"/>
+                <a16:creationId xmlns:a16="http://schemas.microsoft.com/office/drawing/2014/main" id="{6689D980-9633-45BD-AC2E-2EB0942402E9}"/>
               </a:ext>
             </a:extLst>
           </p:cNvPr>
@@ -9041,7 +8966,7 @@
           <p:cNvPr id="59" name="">
             <a:extLst xmlns:a="http://schemas.openxmlformats.org/drawingml/2006/main">
               <a:ext uri="{FF2B5EF4-FFF2-40B4-BE49-F238E27FC236}">
-                <a16:creationId xmlns:a16="http://schemas.microsoft.com/office/drawing/2014/main" id="{6CC3FED3-1806-4CEE-9970-4A4F36BCFA71}"/>
+                <a16:creationId xmlns:a16="http://schemas.microsoft.com/office/drawing/2014/main" id="{2B1DAB2C-4BF3-4135-ABD2-4F6FA886C9E6}"/>
               </a:ext>
             </a:extLst>
           </p:cNvPr>
@@ -9099,7 +9024,7 @@
           <p:cNvPr id="60" name="">
             <a:extLst xmlns:a="http://schemas.openxmlformats.org/drawingml/2006/main">
               <a:ext uri="{FF2B5EF4-FFF2-40B4-BE49-F238E27FC236}">
-                <a16:creationId xmlns:a16="http://schemas.microsoft.com/office/drawing/2014/main" id="{AA3DE1E8-87F0-4A1E-9821-9BEBA3CA39A6}"/>
+                <a16:creationId xmlns:a16="http://schemas.microsoft.com/office/drawing/2014/main" id="{850D59FE-1099-4141-924D-5DD97803E55B}"/>
               </a:ext>
             </a:extLst>
           </p:cNvPr>
@@ -9134,7 +9059,7 @@
           <p:cNvPr id="61" name="">
             <a:extLst xmlns:a="http://schemas.openxmlformats.org/drawingml/2006/main">
               <a:ext uri="{FF2B5EF4-FFF2-40B4-BE49-F238E27FC236}">
-                <a16:creationId xmlns:a16="http://schemas.microsoft.com/office/drawing/2014/main" id="{C6FAF1BD-791E-4EC2-ABAE-A28A6D8F8E62}"/>
+                <a16:creationId xmlns:a16="http://schemas.microsoft.com/office/drawing/2014/main" id="{DB742A6C-7B5C-4092-B948-FE905E9E6265}"/>
               </a:ext>
             </a:extLst>
           </p:cNvPr>
@@ -9169,7 +9094,7 @@
           <p:cNvPr id="62" name="">
             <a:extLst xmlns:a="http://schemas.openxmlformats.org/drawingml/2006/main">
               <a:ext uri="{FF2B5EF4-FFF2-40B4-BE49-F238E27FC236}">
-                <a16:creationId xmlns:a16="http://schemas.microsoft.com/office/drawing/2014/main" id="{BAEE20A2-53BA-49FB-A8F0-0AEAB4B3534E}"/>
+                <a16:creationId xmlns:a16="http://schemas.microsoft.com/office/drawing/2014/main" id="{A814CD95-A237-4BFB-9800-F3A8527AA06A}"/>
               </a:ext>
             </a:extLst>
           </p:cNvPr>
@@ -9204,7 +9129,7 @@
           <p:cNvPr id="63" name="">
             <a:extLst xmlns:a="http://schemas.openxmlformats.org/drawingml/2006/main">
               <a:ext uri="{FF2B5EF4-FFF2-40B4-BE49-F238E27FC236}">
-                <a16:creationId xmlns:a16="http://schemas.microsoft.com/office/drawing/2014/main" id="{AD540434-5F5D-4246-8F1D-EB24915B825A}"/>
+                <a16:creationId xmlns:a16="http://schemas.microsoft.com/office/drawing/2014/main" id="{BB84399F-257B-41BC-BC96-0B752D09872B}"/>
               </a:ext>
             </a:extLst>
           </p:cNvPr>
@@ -9239,7 +9164,7 @@
           <p:cNvPr id="64" name="">
             <a:extLst xmlns:a="http://schemas.openxmlformats.org/drawingml/2006/main">
               <a:ext uri="{FF2B5EF4-FFF2-40B4-BE49-F238E27FC236}">
-                <a16:creationId xmlns:a16="http://schemas.microsoft.com/office/drawing/2014/main" id="{7EB04C03-FEF7-4547-AF38-ABD472DFA999}"/>
+                <a16:creationId xmlns:a16="http://schemas.microsoft.com/office/drawing/2014/main" id="{DA608194-FC49-4DC9-967A-F6670053BA37}"/>
               </a:ext>
             </a:extLst>
           </p:cNvPr>
@@ -9274,7 +9199,7 @@
           <p:cNvPr id="65" name="">
             <a:extLst xmlns:a="http://schemas.openxmlformats.org/drawingml/2006/main">
               <a:ext uri="{FF2B5EF4-FFF2-40B4-BE49-F238E27FC236}">
-                <a16:creationId xmlns:a16="http://schemas.microsoft.com/office/drawing/2014/main" id="{BE87E25C-EF6E-4D17-B33B-A818B431FADA}"/>
+                <a16:creationId xmlns:a16="http://schemas.microsoft.com/office/drawing/2014/main" id="{A67EDA33-022C-48AE-BD2A-F1FB7C84DDD1}"/>
               </a:ext>
             </a:extLst>
           </p:cNvPr>
@@ -9309,7 +9234,7 @@
           <p:cNvPr id="66" name="">
             <a:extLst xmlns:a="http://schemas.openxmlformats.org/drawingml/2006/main">
               <a:ext uri="{FF2B5EF4-FFF2-40B4-BE49-F238E27FC236}">
-                <a16:creationId xmlns:a16="http://schemas.microsoft.com/office/drawing/2014/main" id="{8C02A303-3D02-4018-A277-8AEE69AD7FBA}"/>
+                <a16:creationId xmlns:a16="http://schemas.microsoft.com/office/drawing/2014/main" id="{C65CC434-31FD-44E7-99B6-FF42E1159317}"/>
               </a:ext>
             </a:extLst>
           </p:cNvPr>
@@ -9344,7 +9269,7 @@
           <p:cNvPr id="67" name="">
             <a:extLst xmlns:a="http://schemas.openxmlformats.org/drawingml/2006/main">
               <a:ext uri="{FF2B5EF4-FFF2-40B4-BE49-F238E27FC236}">
-                <a16:creationId xmlns:a16="http://schemas.microsoft.com/office/drawing/2014/main" id="{76AEFB54-E5BE-4D50-A2A5-410B3F5ECAE2}"/>
+                <a16:creationId xmlns:a16="http://schemas.microsoft.com/office/drawing/2014/main" id="{97040B0C-55ED-446F-AE36-8FFE65A02C3E}"/>
               </a:ext>
             </a:extLst>
           </p:cNvPr>
@@ -9379,7 +9304,7 @@
           <p:cNvPr id="68" name="">
             <a:extLst xmlns:a="http://schemas.openxmlformats.org/drawingml/2006/main">
               <a:ext uri="{FF2B5EF4-FFF2-40B4-BE49-F238E27FC236}">
-                <a16:creationId xmlns:a16="http://schemas.microsoft.com/office/drawing/2014/main" id="{E495FB69-14CA-4999-AB7E-C78ACB27456C}"/>
+                <a16:creationId xmlns:a16="http://schemas.microsoft.com/office/drawing/2014/main" id="{4CCFAFD4-977A-4B6C-BEE6-2A27D76B702D}"/>
               </a:ext>
             </a:extLst>
           </p:cNvPr>
@@ -9433,7 +9358,7 @@
           <p:cNvPr id="69" name="">
             <a:extLst xmlns:a="http://schemas.openxmlformats.org/drawingml/2006/main">
               <a:ext uri="{FF2B5EF4-FFF2-40B4-BE49-F238E27FC236}">
-                <a16:creationId xmlns:a16="http://schemas.microsoft.com/office/drawing/2014/main" id="{3747C3A1-B2F3-4DB6-8595-B7E6B19DA782}"/>
+                <a16:creationId xmlns:a16="http://schemas.microsoft.com/office/drawing/2014/main" id="{619758D7-F515-4B25-88BD-5D272BF85516}"/>
               </a:ext>
             </a:extLst>
           </p:cNvPr>
@@ -9487,7 +9412,7 @@
           <p:cNvPr id="70" name="">
             <a:extLst xmlns:a="http://schemas.openxmlformats.org/drawingml/2006/main">
               <a:ext uri="{FF2B5EF4-FFF2-40B4-BE49-F238E27FC236}">
-                <a16:creationId xmlns:a16="http://schemas.microsoft.com/office/drawing/2014/main" id="{1D168C17-61F8-45AE-89F1-E836CA389B52}"/>
+                <a16:creationId xmlns:a16="http://schemas.microsoft.com/office/drawing/2014/main" id="{2E246DDA-621E-40D2-A9A6-5B3BE4245DB3}"/>
               </a:ext>
             </a:extLst>
           </p:cNvPr>
@@ -9541,7 +9466,7 @@
           <p:cNvPr id="71" name="">
             <a:extLst xmlns:a="http://schemas.openxmlformats.org/drawingml/2006/main">
               <a:ext uri="{FF2B5EF4-FFF2-40B4-BE49-F238E27FC236}">
-                <a16:creationId xmlns:a16="http://schemas.microsoft.com/office/drawing/2014/main" id="{AA61746E-AA42-4FD8-B68D-06734CBB986E}"/>
+                <a16:creationId xmlns:a16="http://schemas.microsoft.com/office/drawing/2014/main" id="{C8889D3F-92DC-4A5F-9C52-CF6FCB398BE6}"/>
               </a:ext>
             </a:extLst>
           </p:cNvPr>
@@ -9578,7 +9503,7 @@
           <p:cNvPr id="72" name="">
             <a:extLst xmlns:a="http://schemas.openxmlformats.org/drawingml/2006/main">
               <a:ext uri="{FF2B5EF4-FFF2-40B4-BE49-F238E27FC236}">
-                <a16:creationId xmlns:a16="http://schemas.microsoft.com/office/drawing/2014/main" id="{7A0470EF-215E-4E4C-994C-737216AEFE0F}"/>
+                <a16:creationId xmlns:a16="http://schemas.microsoft.com/office/drawing/2014/main" id="{0A883702-CDCE-4F75-B19F-49555874E619}"/>
               </a:ext>
             </a:extLst>
           </p:cNvPr>
@@ -9613,7 +9538,7 @@
           <p:cNvPr id="73" name="">
             <a:extLst xmlns:a="http://schemas.openxmlformats.org/drawingml/2006/main">
               <a:ext uri="{FF2B5EF4-FFF2-40B4-BE49-F238E27FC236}">
-                <a16:creationId xmlns:a16="http://schemas.microsoft.com/office/drawing/2014/main" id="{D596A34C-9EA0-4B17-8608-F141273CF884}"/>
+                <a16:creationId xmlns:a16="http://schemas.microsoft.com/office/drawing/2014/main" id="{9C007F42-CE0F-4C44-9722-33D5202559A9}"/>
               </a:ext>
             </a:extLst>
           </p:cNvPr>
@@ -9671,7 +9596,7 @@
           <p:cNvPr id="74" name="">
             <a:extLst xmlns:a="http://schemas.openxmlformats.org/drawingml/2006/main">
               <a:ext uri="{FF2B5EF4-FFF2-40B4-BE49-F238E27FC236}">
-                <a16:creationId xmlns:a16="http://schemas.microsoft.com/office/drawing/2014/main" id="{2E66D79A-4BC5-4D13-A24A-DB6D74257315}"/>
+                <a16:creationId xmlns:a16="http://schemas.microsoft.com/office/drawing/2014/main" id="{4F93DC28-A4A4-45D6-95E9-5F656BC62A55}"/>
               </a:ext>
             </a:extLst>
           </p:cNvPr>
@@ -9727,7 +9652,7 @@
     </p:spTree>
     <p:extLst>
       <p:ext uri="{BB962C8B-B14F-4D97-AF65-F5344CB8AC3E}">
-        <p14:creationId xmlns:p14="http://schemas.microsoft.com/office/powerpoint/2010/main" val="852035026"/>
+        <p14:creationId xmlns:p14="http://schemas.microsoft.com/office/powerpoint/2010/main" val="378878978"/>
       </p:ext>
     </p:extLst>
   </p:cSld>
@@ -9758,7 +9683,7 @@
           <p:cNvPr id="1" name="Slide Number Placeholder 5">
             <a:extLst xmlns:a="http://schemas.openxmlformats.org/drawingml/2006/main">
               <a:ext uri="{FF2B5EF4-FFF2-40B4-BE49-F238E27FC236}">
-                <a16:creationId xmlns:a16="http://schemas.microsoft.com/office/drawing/2014/main" id="{F572615B-7240-42F8-B48E-DAA8AA9FBBC2}"/>
+                <a16:creationId xmlns:a16="http://schemas.microsoft.com/office/drawing/2014/main" id="{38BDF79F-9F16-4FEE-B72E-1F506FE9EBEC}"/>
               </a:ext>
             </a:extLst>
           </p:cNvPr>
@@ -9794,7 +9719,7 @@
           <p:nvPr/>
         </p:nvPicPr>
         <p:blipFill>
-          <a:blip xmlns:r="http://schemas.openxmlformats.org/officeDocument/2006/relationships" xmlns:a="http://schemas.openxmlformats.org/drawingml/2006/main" r:embed="R6fa57985e635438b"/>
+          <a:blip xmlns:r="http://schemas.openxmlformats.org/officeDocument/2006/relationships" xmlns:a="http://schemas.openxmlformats.org/drawingml/2006/main" r:embed="R7f30c73b723f4756"/>
           <a:srcRect xmlns:a="http://schemas.openxmlformats.org/drawingml/2006/main" l="0" t="21875" r="0" b="21875"/>
           <a:stretch xmlns:a="http://schemas.openxmlformats.org/drawingml/2006/main">
             <a:fillRect l="0" t="0" r="0" b="0"/>
@@ -9815,7 +9740,7 @@
           <p:cNvPr id="3" name="">
             <a:extLst xmlns:a="http://schemas.openxmlformats.org/drawingml/2006/main">
               <a:ext uri="{FF2B5EF4-FFF2-40B4-BE49-F238E27FC236}">
-                <a16:creationId xmlns:a16="http://schemas.microsoft.com/office/drawing/2014/main" id="{51042A71-2FE2-433E-AA4E-3D8526E57CB8}"/>
+                <a16:creationId xmlns:a16="http://schemas.microsoft.com/office/drawing/2014/main" id="{594B5224-990F-4EAF-90CC-D97E1DE42FC3}"/>
               </a:ext>
             </a:extLst>
           </p:cNvPr>
@@ -9850,7 +9775,7 @@
           <p:cNvPr id="4" name="">
             <a:extLst xmlns:a="http://schemas.openxmlformats.org/drawingml/2006/main">
               <a:ext uri="{FF2B5EF4-FFF2-40B4-BE49-F238E27FC236}">
-                <a16:creationId xmlns:a16="http://schemas.microsoft.com/office/drawing/2014/main" id="{BA12259B-3D2B-406A-B378-4EF6937932D7}"/>
+                <a16:creationId xmlns:a16="http://schemas.microsoft.com/office/drawing/2014/main" id="{84BC89D2-C3A5-4D51-BCCC-8625F2A3B51E}"/>
               </a:ext>
             </a:extLst>
           </p:cNvPr>
@@ -9885,7 +9810,7 @@
           <p:cNvPr id="5" name="">
             <a:extLst xmlns:a="http://schemas.openxmlformats.org/drawingml/2006/main">
               <a:ext uri="{FF2B5EF4-FFF2-40B4-BE49-F238E27FC236}">
-                <a16:creationId xmlns:a16="http://schemas.microsoft.com/office/drawing/2014/main" id="{0EA174C9-11BC-44C7-BD80-D2955315F78B}"/>
+                <a16:creationId xmlns:a16="http://schemas.microsoft.com/office/drawing/2014/main" id="{F88ACF30-5FA9-4F41-ADA0-8FFC30A1A67B}"/>
               </a:ext>
             </a:extLst>
           </p:cNvPr>
@@ -9922,7 +9847,7 @@
           <p:cNvPr id="6" name="">
             <a:extLst xmlns:a="http://schemas.openxmlformats.org/drawingml/2006/main">
               <a:ext uri="{FF2B5EF4-FFF2-40B4-BE49-F238E27FC236}">
-                <a16:creationId xmlns:a16="http://schemas.microsoft.com/office/drawing/2014/main" id="{A9ACA93D-4AB1-431A-8080-EACD6B551076}"/>
+                <a16:creationId xmlns:a16="http://schemas.microsoft.com/office/drawing/2014/main" id="{66D9BB22-8FD5-4714-A250-BB193382F090}"/>
               </a:ext>
             </a:extLst>
           </p:cNvPr>
@@ -9959,7 +9884,7 @@
           <p:cNvPr id="7" name="">
             <a:extLst xmlns:a="http://schemas.openxmlformats.org/drawingml/2006/main">
               <a:ext uri="{FF2B5EF4-FFF2-40B4-BE49-F238E27FC236}">
-                <a16:creationId xmlns:a16="http://schemas.microsoft.com/office/drawing/2014/main" id="{4EF4AD3C-D261-4551-9383-D9E1FAFCD3AC}"/>
+                <a16:creationId xmlns:a16="http://schemas.microsoft.com/office/drawing/2014/main" id="{63C85720-DADE-4C49-90DE-40DAF6007BFB}"/>
               </a:ext>
             </a:extLst>
           </p:cNvPr>
@@ -9996,7 +9921,7 @@
           <p:cNvPr id="8" name="">
             <a:extLst xmlns:a="http://schemas.openxmlformats.org/drawingml/2006/main">
               <a:ext uri="{FF2B5EF4-FFF2-40B4-BE49-F238E27FC236}">
-                <a16:creationId xmlns:a16="http://schemas.microsoft.com/office/drawing/2014/main" id="{5F65F617-F922-48F7-8503-52ED56C96F8A}"/>
+                <a16:creationId xmlns:a16="http://schemas.microsoft.com/office/drawing/2014/main" id="{57AB3CE1-7A70-4945-8592-A731181000D3}"/>
               </a:ext>
             </a:extLst>
           </p:cNvPr>
@@ -10033,7 +9958,7 @@
           <p:cNvPr id="9" name="">
             <a:extLst xmlns:a="http://schemas.openxmlformats.org/drawingml/2006/main">
               <a:ext uri="{FF2B5EF4-FFF2-40B4-BE49-F238E27FC236}">
-                <a16:creationId xmlns:a16="http://schemas.microsoft.com/office/drawing/2014/main" id="{1DC924DA-10F0-40DD-989F-65DE0953FA88}"/>
+                <a16:creationId xmlns:a16="http://schemas.microsoft.com/office/drawing/2014/main" id="{1DFAF67C-DB41-4CB3-A05E-CC6306057145}"/>
               </a:ext>
             </a:extLst>
           </p:cNvPr>
@@ -10091,7 +10016,7 @@
           <p:cNvPr id="10" name="">
             <a:extLst xmlns:a="http://schemas.openxmlformats.org/drawingml/2006/main">
               <a:ext uri="{FF2B5EF4-FFF2-40B4-BE49-F238E27FC236}">
-                <a16:creationId xmlns:a16="http://schemas.microsoft.com/office/drawing/2014/main" id="{5CD9C15F-1C46-4F98-A842-181E63AA3B26}"/>
+                <a16:creationId xmlns:a16="http://schemas.microsoft.com/office/drawing/2014/main" id="{5FDDC3D3-23A8-47C6-ACE2-50DCC2576541}"/>
               </a:ext>
             </a:extLst>
           </p:cNvPr>
@@ -10149,7 +10074,7 @@
           <p:cNvPr id="11" name="">
             <a:extLst xmlns:a="http://schemas.openxmlformats.org/drawingml/2006/main">
               <a:ext uri="{FF2B5EF4-FFF2-40B4-BE49-F238E27FC236}">
-                <a16:creationId xmlns:a16="http://schemas.microsoft.com/office/drawing/2014/main" id="{C2E54A48-57F1-4EFC-B087-6CAF91748881}"/>
+                <a16:creationId xmlns:a16="http://schemas.microsoft.com/office/drawing/2014/main" id="{9D519DFD-D654-40F4-A1E8-53AAD124EB0A}"/>
               </a:ext>
             </a:extLst>
           </p:cNvPr>
@@ -10184,7 +10109,7 @@
           <p:cNvPr id="12" name="">
             <a:extLst xmlns:a="http://schemas.openxmlformats.org/drawingml/2006/main">
               <a:ext uri="{FF2B5EF4-FFF2-40B4-BE49-F238E27FC236}">
-                <a16:creationId xmlns:a16="http://schemas.microsoft.com/office/drawing/2014/main" id="{F5B06B72-455A-448F-A541-70E9CB6E28D4}"/>
+                <a16:creationId xmlns:a16="http://schemas.microsoft.com/office/drawing/2014/main" id="{A63901D5-8F3C-4CA5-95D2-936E5A5E0515}"/>
               </a:ext>
             </a:extLst>
           </p:cNvPr>
@@ -10217,7 +10142,7 @@
           <p:cNvPr id="13" name="">
             <a:extLst xmlns:a="http://schemas.openxmlformats.org/drawingml/2006/main">
               <a:ext uri="{FF2B5EF4-FFF2-40B4-BE49-F238E27FC236}">
-                <a16:creationId xmlns:a16="http://schemas.microsoft.com/office/drawing/2014/main" id="{D8D0F44A-B3A7-46BD-AB4D-092244DA1885}"/>
+                <a16:creationId xmlns:a16="http://schemas.microsoft.com/office/drawing/2014/main" id="{E79E38CF-FB65-4A1A-A2BC-3B09BAC2F2BE}"/>
               </a:ext>
             </a:extLst>
           </p:cNvPr>
@@ -10275,82 +10200,7 @@
           <p:cNvPr id="14" name="">
             <a:extLst xmlns:a="http://schemas.openxmlformats.org/drawingml/2006/main">
               <a:ext uri="{FF2B5EF4-FFF2-40B4-BE49-F238E27FC236}">
-                <a16:creationId xmlns:a16="http://schemas.microsoft.com/office/drawing/2014/main" id="{8C6FF909-66F6-4BFF-BA56-0CCE17B1E936}"/>
-              </a:ext>
-            </a:extLst>
-          </p:cNvPr>
-          <p:cNvSpPr>
-            <a:spLocks xmlns:a="http://schemas.openxmlformats.org/drawingml/2006/main" noGrp="1"/>
-          </p:cNvSpPr>
-          <p:nvPr/>
-        </p:nvSpPr>
-        <p:spPr>
-          <a:xfrm xmlns:a="http://schemas.openxmlformats.org/drawingml/2006/main">
-            <a:off x="628650" y="2038350"/>
-            <a:ext cx="6858000" cy="628650"/>
-          </a:xfrm>
-          <a:prstGeom xmlns:a="http://schemas.openxmlformats.org/drawingml/2006/main" prst="rect">
-            <a:avLst/>
-          </a:prstGeom>
-          <a:solidFill xmlns:a="http://schemas.openxmlformats.org/drawingml/2006/main">
-            <a:srgbClr val="000000">
-              <a:alpha val="0"/>
-            </a:srgbClr>
-          </a:solidFill>
-          <a:ln xmlns:a="http://schemas.openxmlformats.org/drawingml/2006/main" w="0">
-            <a:solidFill>
-              <a:srgbClr val="000000">
-                <a:alpha val="0"/>
-              </a:srgbClr>
-            </a:solidFill>
-            <a:prstDash val="solid"/>
-          </a:ln>
-        </p:spPr>
-        <p:txBody>
-          <a:bodyPr xmlns:a="http://schemas.openxmlformats.org/drawingml/2006/main" lIns="0" tIns="0" rIns="0" bIns="0" anchor="t"/>
-          <a:lstStyle xmlns:a="http://schemas.openxmlformats.org/drawingml/2006/main"/>
-          <a:p xmlns:a="http://schemas.openxmlformats.org/drawingml/2006/main">
-            <a:pPr algn="l">
-              <a:defRPr sz="1350" b="0">
-                <a:solidFill>
-                  <a:srgbClr val="344146"/>
-                </a:solidFill>
-              </a:defRPr>
-            </a:pPr>
-            <a:r>
-              <a:rPr sz="1350" b="0">
-                <a:solidFill>
-                  <a:srgbClr val="344146"/>
-                </a:solidFill>
-              </a:rPr>
-              <a:t>brain organoid 비교는 우선</a:t>
-            </a:r>
-          </a:p>
-          <a:p xmlns:a="http://schemas.openxmlformats.org/drawingml/2006/main">
-            <a:pPr algn="l">
-              <a:defRPr sz="1350" b="0">
-                <a:solidFill>
-                  <a:srgbClr val="344146"/>
-                </a:solidFill>
-              </a:defRPr>
-            </a:pPr>
-            <a:r>
-              <a:rPr sz="1350" b="0">
-                <a:solidFill>
-                  <a:srgbClr val="344146"/>
-                </a:solidFill>
-              </a:rPr>
-              <a:t>subregion과 patterning logic의 문제로 정리할 수 있었다.</a:t>
-            </a:r>
-          </a:p>
-        </p:txBody>
-      </p:sp>
-      <p:sp>
-        <p:nvSpPr>
-          <p:cNvPr id="15" name="">
-            <a:extLst xmlns:a="http://schemas.openxmlformats.org/drawingml/2006/main">
-              <a:ext uri="{FF2B5EF4-FFF2-40B4-BE49-F238E27FC236}">
-                <a16:creationId xmlns:a16="http://schemas.microsoft.com/office/drawing/2014/main" id="{5994193F-5B3B-4F24-9DC8-0BF29487CC25}"/>
+                <a16:creationId xmlns:a16="http://schemas.microsoft.com/office/drawing/2014/main" id="{4AB156E6-EBBA-4009-8A03-93FBA25AE54A}"/>
               </a:ext>
             </a:extLst>
           </p:cNvPr>
@@ -10384,10 +10234,10 @@
       </p:sp>
       <p:sp>
         <p:nvSpPr>
-          <p:cNvPr id="16" name="">
-            <a:extLst xmlns:a="http://schemas.openxmlformats.org/drawingml/2006/main">
-              <a:ext uri="{FF2B5EF4-FFF2-40B4-BE49-F238E27FC236}">
-                <a16:creationId xmlns:a16="http://schemas.microsoft.com/office/drawing/2014/main" id="{8B4EFF7C-3646-4A30-B120-CCE137DF78A2}"/>
+          <p:cNvPr id="15" name="">
+            <a:extLst xmlns:a="http://schemas.openxmlformats.org/drawingml/2006/main">
+              <a:ext uri="{FF2B5EF4-FFF2-40B4-BE49-F238E27FC236}">
+                <a16:creationId xmlns:a16="http://schemas.microsoft.com/office/drawing/2014/main" id="{ADC34777-C9CC-4776-8793-E1DDB2998E71}"/>
               </a:ext>
             </a:extLst>
           </p:cNvPr>
@@ -10419,10 +10269,10 @@
       </p:sp>
       <p:sp>
         <p:nvSpPr>
-          <p:cNvPr id="17" name="">
-            <a:extLst xmlns:a="http://schemas.openxmlformats.org/drawingml/2006/main">
-              <a:ext uri="{FF2B5EF4-FFF2-40B4-BE49-F238E27FC236}">
-                <a16:creationId xmlns:a16="http://schemas.microsoft.com/office/drawing/2014/main" id="{14970295-911C-477B-BEA4-7FD1E64FF5F4}"/>
+          <p:cNvPr id="16" name="">
+            <a:extLst xmlns:a="http://schemas.openxmlformats.org/drawingml/2006/main">
+              <a:ext uri="{FF2B5EF4-FFF2-40B4-BE49-F238E27FC236}">
+                <a16:creationId xmlns:a16="http://schemas.microsoft.com/office/drawing/2014/main" id="{19C969C0-3713-4495-8EAD-D43D1A532C86}"/>
               </a:ext>
             </a:extLst>
           </p:cNvPr>
@@ -10477,10 +10327,10 @@
       </p:sp>
       <p:sp>
         <p:nvSpPr>
-          <p:cNvPr id="18" name="">
-            <a:extLst xmlns:a="http://schemas.openxmlformats.org/drawingml/2006/main">
-              <a:ext uri="{FF2B5EF4-FFF2-40B4-BE49-F238E27FC236}">
-                <a16:creationId xmlns:a16="http://schemas.microsoft.com/office/drawing/2014/main" id="{96429040-2A9A-434F-939E-8B4192607C66}"/>
+          <p:cNvPr id="17" name="">
+            <a:extLst xmlns:a="http://schemas.openxmlformats.org/drawingml/2006/main">
+              <a:ext uri="{FF2B5EF4-FFF2-40B4-BE49-F238E27FC236}">
+                <a16:creationId xmlns:a16="http://schemas.microsoft.com/office/drawing/2014/main" id="{E997DC82-0C3D-4186-A05E-E971BFC38660}"/>
               </a:ext>
             </a:extLst>
           </p:cNvPr>
@@ -10603,10 +10453,10 @@
       </p:sp>
       <p:sp>
         <p:nvSpPr>
-          <p:cNvPr id="19" name="">
-            <a:extLst xmlns:a="http://schemas.openxmlformats.org/drawingml/2006/main">
-              <a:ext uri="{FF2B5EF4-FFF2-40B4-BE49-F238E27FC236}">
-                <a16:creationId xmlns:a16="http://schemas.microsoft.com/office/drawing/2014/main" id="{21D9D4E9-0C50-4900-826A-92C847C7955C}"/>
+          <p:cNvPr id="18" name="">
+            <a:extLst xmlns:a="http://schemas.openxmlformats.org/drawingml/2006/main">
+              <a:ext uri="{FF2B5EF4-FFF2-40B4-BE49-F238E27FC236}">
+                <a16:creationId xmlns:a16="http://schemas.microsoft.com/office/drawing/2014/main" id="{0781FA9F-AC82-49CB-A774-D8545DD88A52}"/>
               </a:ext>
             </a:extLst>
           </p:cNvPr>
@@ -10640,10 +10490,10 @@
       </p:sp>
       <p:sp>
         <p:nvSpPr>
-          <p:cNvPr id="20" name="">
-            <a:extLst xmlns:a="http://schemas.openxmlformats.org/drawingml/2006/main">
-              <a:ext uri="{FF2B5EF4-FFF2-40B4-BE49-F238E27FC236}">
-                <a16:creationId xmlns:a16="http://schemas.microsoft.com/office/drawing/2014/main" id="{E0ED09CE-F400-45E4-8B4A-9EDC15B68E5D}"/>
+          <p:cNvPr id="19" name="">
+            <a:extLst xmlns:a="http://schemas.openxmlformats.org/drawingml/2006/main">
+              <a:ext uri="{FF2B5EF4-FFF2-40B4-BE49-F238E27FC236}">
+                <a16:creationId xmlns:a16="http://schemas.microsoft.com/office/drawing/2014/main" id="{4AD062A2-2D21-4BD3-9501-F6E7C8F0BFE8}"/>
               </a:ext>
             </a:extLst>
           </p:cNvPr>
@@ -10675,10 +10525,10 @@
       </p:sp>
       <p:sp>
         <p:nvSpPr>
-          <p:cNvPr id="21" name="">
-            <a:extLst xmlns:a="http://schemas.openxmlformats.org/drawingml/2006/main">
-              <a:ext uri="{FF2B5EF4-FFF2-40B4-BE49-F238E27FC236}">
-                <a16:creationId xmlns:a16="http://schemas.microsoft.com/office/drawing/2014/main" id="{8BC97E5A-945F-4F49-90E3-8140C7F6190F}"/>
+          <p:cNvPr id="20" name="">
+            <a:extLst xmlns:a="http://schemas.openxmlformats.org/drawingml/2006/main">
+              <a:ext uri="{FF2B5EF4-FFF2-40B4-BE49-F238E27FC236}">
+                <a16:creationId xmlns:a16="http://schemas.microsoft.com/office/drawing/2014/main" id="{1D62C0CF-8B8B-4F25-91E5-9F254B2ADD22}"/>
               </a:ext>
             </a:extLst>
           </p:cNvPr>
@@ -10733,10 +10583,10 @@
       </p:sp>
       <p:sp>
         <p:nvSpPr>
-          <p:cNvPr id="22" name="">
-            <a:extLst xmlns:a="http://schemas.openxmlformats.org/drawingml/2006/main">
-              <a:ext uri="{FF2B5EF4-FFF2-40B4-BE49-F238E27FC236}">
-                <a16:creationId xmlns:a16="http://schemas.microsoft.com/office/drawing/2014/main" id="{8C9A8D08-19C0-4B76-B3F0-909CCB215F32}"/>
+          <p:cNvPr id="21" name="">
+            <a:extLst xmlns:a="http://schemas.openxmlformats.org/drawingml/2006/main">
+              <a:ext uri="{FF2B5EF4-FFF2-40B4-BE49-F238E27FC236}">
+                <a16:creationId xmlns:a16="http://schemas.microsoft.com/office/drawing/2014/main" id="{6106DA93-5C57-42E3-9A3B-6A64EF612FD7}"/>
               </a:ext>
             </a:extLst>
           </p:cNvPr>
@@ -10859,10 +10709,10 @@
       </p:sp>
       <p:sp>
         <p:nvSpPr>
-          <p:cNvPr id="23" name="">
-            <a:extLst xmlns:a="http://schemas.openxmlformats.org/drawingml/2006/main">
-              <a:ext uri="{FF2B5EF4-FFF2-40B4-BE49-F238E27FC236}">
-                <a16:creationId xmlns:a16="http://schemas.microsoft.com/office/drawing/2014/main" id="{CA731339-55A8-4872-81C8-7058F0C218DE}"/>
+          <p:cNvPr id="22" name="">
+            <a:extLst xmlns:a="http://schemas.openxmlformats.org/drawingml/2006/main">
+              <a:ext uri="{FF2B5EF4-FFF2-40B4-BE49-F238E27FC236}">
+                <a16:creationId xmlns:a16="http://schemas.microsoft.com/office/drawing/2014/main" id="{41E814F1-6912-4909-A20A-46B78A8EE35C}"/>
               </a:ext>
             </a:extLst>
           </p:cNvPr>
@@ -10896,10 +10746,10 @@
       </p:sp>
       <p:sp>
         <p:nvSpPr>
-          <p:cNvPr id="24" name="">
-            <a:extLst xmlns:a="http://schemas.openxmlformats.org/drawingml/2006/main">
-              <a:ext uri="{FF2B5EF4-FFF2-40B4-BE49-F238E27FC236}">
-                <a16:creationId xmlns:a16="http://schemas.microsoft.com/office/drawing/2014/main" id="{44E9CFF3-60CC-4275-A0EA-924D9F445529}"/>
+          <p:cNvPr id="23" name="">
+            <a:extLst xmlns:a="http://schemas.openxmlformats.org/drawingml/2006/main">
+              <a:ext uri="{FF2B5EF4-FFF2-40B4-BE49-F238E27FC236}">
+                <a16:creationId xmlns:a16="http://schemas.microsoft.com/office/drawing/2014/main" id="{E4005AA6-2C70-4BBC-A0D4-0DCDA2283188}"/>
               </a:ext>
             </a:extLst>
           </p:cNvPr>
@@ -10931,10 +10781,10 @@
       </p:sp>
       <p:sp>
         <p:nvSpPr>
-          <p:cNvPr id="25" name="">
-            <a:extLst xmlns:a="http://schemas.openxmlformats.org/drawingml/2006/main">
-              <a:ext uri="{FF2B5EF4-FFF2-40B4-BE49-F238E27FC236}">
-                <a16:creationId xmlns:a16="http://schemas.microsoft.com/office/drawing/2014/main" id="{6F4632C4-3DBE-4D38-91FC-D3A6214A8728}"/>
+          <p:cNvPr id="24" name="">
+            <a:extLst xmlns:a="http://schemas.openxmlformats.org/drawingml/2006/main">
+              <a:ext uri="{FF2B5EF4-FFF2-40B4-BE49-F238E27FC236}">
+                <a16:creationId xmlns:a16="http://schemas.microsoft.com/office/drawing/2014/main" id="{014E74C0-4ABB-42FE-A11C-10D0B72BAD76}"/>
               </a:ext>
             </a:extLst>
           </p:cNvPr>
@@ -10989,10 +10839,10 @@
       </p:sp>
       <p:sp>
         <p:nvSpPr>
-          <p:cNvPr id="26" name="">
-            <a:extLst xmlns:a="http://schemas.openxmlformats.org/drawingml/2006/main">
-              <a:ext uri="{FF2B5EF4-FFF2-40B4-BE49-F238E27FC236}">
-                <a16:creationId xmlns:a16="http://schemas.microsoft.com/office/drawing/2014/main" id="{72AAAD44-7948-48CC-B394-1D1EF91E8E30}"/>
+          <p:cNvPr id="25" name="">
+            <a:extLst xmlns:a="http://schemas.openxmlformats.org/drawingml/2006/main">
+              <a:ext uri="{FF2B5EF4-FFF2-40B4-BE49-F238E27FC236}">
+                <a16:creationId xmlns:a16="http://schemas.microsoft.com/office/drawing/2014/main" id="{81566718-7EC1-4C78-B4C3-77FB61A8D81E}"/>
               </a:ext>
             </a:extLst>
           </p:cNvPr>
@@ -11132,10 +10982,10 @@
       </p:sp>
       <p:sp>
         <p:nvSpPr>
-          <p:cNvPr id="27" name="">
-            <a:extLst xmlns:a="http://schemas.openxmlformats.org/drawingml/2006/main">
-              <a:ext uri="{FF2B5EF4-FFF2-40B4-BE49-F238E27FC236}">
-                <a16:creationId xmlns:a16="http://schemas.microsoft.com/office/drawing/2014/main" id="{67C892F6-64B1-4964-88D4-6906BD01F0FE}"/>
+          <p:cNvPr id="26" name="">
+            <a:extLst xmlns:a="http://schemas.openxmlformats.org/drawingml/2006/main">
+              <a:ext uri="{FF2B5EF4-FFF2-40B4-BE49-F238E27FC236}">
+                <a16:creationId xmlns:a16="http://schemas.microsoft.com/office/drawing/2014/main" id="{FF7989B1-E343-4757-A1FD-EA79C947F502}"/>
               </a:ext>
             </a:extLst>
           </p:cNvPr>
@@ -11167,10 +11017,10 @@
       </p:sp>
       <p:sp>
         <p:nvSpPr>
-          <p:cNvPr id="28" name="">
-            <a:extLst xmlns:a="http://schemas.openxmlformats.org/drawingml/2006/main">
-              <a:ext uri="{FF2B5EF4-FFF2-40B4-BE49-F238E27FC236}">
-                <a16:creationId xmlns:a16="http://schemas.microsoft.com/office/drawing/2014/main" id="{512F1672-29AC-4939-90A5-EB4D28A7F5BA}"/>
+          <p:cNvPr id="27" name="">
+            <a:extLst xmlns:a="http://schemas.openxmlformats.org/drawingml/2006/main">
+              <a:ext uri="{FF2B5EF4-FFF2-40B4-BE49-F238E27FC236}">
+                <a16:creationId xmlns:a16="http://schemas.microsoft.com/office/drawing/2014/main" id="{5FD10802-1AC0-4FAE-AB9F-BFB055A61EAF}"/>
               </a:ext>
             </a:extLst>
           </p:cNvPr>
@@ -11202,10 +11052,10 @@
       </p:sp>
       <p:sp>
         <p:nvSpPr>
-          <p:cNvPr id="29" name="">
-            <a:extLst xmlns:a="http://schemas.openxmlformats.org/drawingml/2006/main">
-              <a:ext uri="{FF2B5EF4-FFF2-40B4-BE49-F238E27FC236}">
-                <a16:creationId xmlns:a16="http://schemas.microsoft.com/office/drawing/2014/main" id="{683C9DA4-BC1C-48C5-B3EC-0A8F97877ED3}"/>
+          <p:cNvPr id="28" name="">
+            <a:extLst xmlns:a="http://schemas.openxmlformats.org/drawingml/2006/main">
+              <a:ext uri="{FF2B5EF4-FFF2-40B4-BE49-F238E27FC236}">
+                <a16:creationId xmlns:a16="http://schemas.microsoft.com/office/drawing/2014/main" id="{81F494BE-237B-415C-B632-2D9237566654}"/>
               </a:ext>
             </a:extLst>
           </p:cNvPr>
@@ -11260,10 +11110,10 @@
       </p:sp>
       <p:sp>
         <p:nvSpPr>
-          <p:cNvPr id="30" name="">
-            <a:extLst xmlns:a="http://schemas.openxmlformats.org/drawingml/2006/main">
-              <a:ext uri="{FF2B5EF4-FFF2-40B4-BE49-F238E27FC236}">
-                <a16:creationId xmlns:a16="http://schemas.microsoft.com/office/drawing/2014/main" id="{D7D8EE45-B6FA-4C00-8CAA-94AC97CF1868}"/>
+          <p:cNvPr id="29" name="">
+            <a:extLst xmlns:a="http://schemas.openxmlformats.org/drawingml/2006/main">
+              <a:ext uri="{FF2B5EF4-FFF2-40B4-BE49-F238E27FC236}">
+                <a16:creationId xmlns:a16="http://schemas.microsoft.com/office/drawing/2014/main" id="{7AEDCC51-6C84-4099-9590-0F30DDBF05BF}"/>
               </a:ext>
             </a:extLst>
           </p:cNvPr>
@@ -11319,7 +11169,7 @@
     </p:spTree>
     <p:extLst>
       <p:ext uri="{BB962C8B-B14F-4D97-AF65-F5344CB8AC3E}">
-        <p14:creationId xmlns:p14="http://schemas.microsoft.com/office/powerpoint/2010/main" val="1385170139"/>
+        <p14:creationId xmlns:p14="http://schemas.microsoft.com/office/powerpoint/2010/main" val="1300958238"/>
       </p:ext>
     </p:extLst>
   </p:cSld>
@@ -11350,7 +11200,7 @@
           <p:cNvPr id="1" name="Slide Number Placeholder 5">
             <a:extLst xmlns:a="http://schemas.openxmlformats.org/drawingml/2006/main">
               <a:ext uri="{FF2B5EF4-FFF2-40B4-BE49-F238E27FC236}">
-                <a16:creationId xmlns:a16="http://schemas.microsoft.com/office/drawing/2014/main" id="{F572615B-7240-42F8-B48E-DAA8AA9FBBC2}"/>
+                <a16:creationId xmlns:a16="http://schemas.microsoft.com/office/drawing/2014/main" id="{38BDF79F-9F16-4FEE-B72E-1F506FE9EBEC}"/>
               </a:ext>
             </a:extLst>
           </p:cNvPr>
@@ -11386,7 +11236,7 @@
           <p:nvPr/>
         </p:nvPicPr>
         <p:blipFill>
-          <a:blip xmlns:r="http://schemas.openxmlformats.org/officeDocument/2006/relationships" xmlns:a="http://schemas.openxmlformats.org/drawingml/2006/main" r:embed="R090c2e9ede5a4f44"/>
+          <a:blip xmlns:r="http://schemas.openxmlformats.org/officeDocument/2006/relationships" xmlns:a="http://schemas.openxmlformats.org/drawingml/2006/main" r:embed="Rca5ceab256ae4fdf"/>
           <a:srcRect xmlns:a="http://schemas.openxmlformats.org/drawingml/2006/main" l="0" t="21875" r="0" b="21875"/>
           <a:stretch xmlns:a="http://schemas.openxmlformats.org/drawingml/2006/main">
             <a:fillRect l="0" t="0" r="0" b="0"/>
@@ -11407,7 +11257,7 @@
           <p:cNvPr id="3" name="">
             <a:extLst xmlns:a="http://schemas.openxmlformats.org/drawingml/2006/main">
               <a:ext uri="{FF2B5EF4-FFF2-40B4-BE49-F238E27FC236}">
-                <a16:creationId xmlns:a16="http://schemas.microsoft.com/office/drawing/2014/main" id="{99A4992A-9A51-4EEA-AFB4-06CEE8B24C26}"/>
+                <a16:creationId xmlns:a16="http://schemas.microsoft.com/office/drawing/2014/main" id="{5DEE6927-0D4C-4978-84FA-CD3D3B2E716F}"/>
               </a:ext>
             </a:extLst>
           </p:cNvPr>
@@ -11442,7 +11292,7 @@
           <p:cNvPr id="4" name="">
             <a:extLst xmlns:a="http://schemas.openxmlformats.org/drawingml/2006/main">
               <a:ext uri="{FF2B5EF4-FFF2-40B4-BE49-F238E27FC236}">
-                <a16:creationId xmlns:a16="http://schemas.microsoft.com/office/drawing/2014/main" id="{7136622E-43E1-416D-98A5-1BCEB14B9889}"/>
+                <a16:creationId xmlns:a16="http://schemas.microsoft.com/office/drawing/2014/main" id="{85F3797F-0E77-4237-9EF8-0E1B0D3D3F22}"/>
               </a:ext>
             </a:extLst>
           </p:cNvPr>
@@ -11477,7 +11327,7 @@
           <p:cNvPr id="5" name="">
             <a:extLst xmlns:a="http://schemas.openxmlformats.org/drawingml/2006/main">
               <a:ext uri="{FF2B5EF4-FFF2-40B4-BE49-F238E27FC236}">
-                <a16:creationId xmlns:a16="http://schemas.microsoft.com/office/drawing/2014/main" id="{D27DEC6E-3DAA-4871-B168-F8F9DF83C02C}"/>
+                <a16:creationId xmlns:a16="http://schemas.microsoft.com/office/drawing/2014/main" id="{B2A76673-6364-4C91-8F9B-24C004392D7A}"/>
               </a:ext>
             </a:extLst>
           </p:cNvPr>
@@ -11514,7 +11364,7 @@
           <p:cNvPr id="6" name="">
             <a:extLst xmlns:a="http://schemas.openxmlformats.org/drawingml/2006/main">
               <a:ext uri="{FF2B5EF4-FFF2-40B4-BE49-F238E27FC236}">
-                <a16:creationId xmlns:a16="http://schemas.microsoft.com/office/drawing/2014/main" id="{D19A082B-ADC2-45D1-A55D-90F32778F245}"/>
+                <a16:creationId xmlns:a16="http://schemas.microsoft.com/office/drawing/2014/main" id="{31ADB5BC-FFE1-404C-981E-D614CD5D9D99}"/>
               </a:ext>
             </a:extLst>
           </p:cNvPr>
@@ -11551,7 +11401,7 @@
           <p:cNvPr id="7" name="">
             <a:extLst xmlns:a="http://schemas.openxmlformats.org/drawingml/2006/main">
               <a:ext uri="{FF2B5EF4-FFF2-40B4-BE49-F238E27FC236}">
-                <a16:creationId xmlns:a16="http://schemas.microsoft.com/office/drawing/2014/main" id="{D664F65E-5B47-4E7B-8EC1-8469BDB8FD7B}"/>
+                <a16:creationId xmlns:a16="http://schemas.microsoft.com/office/drawing/2014/main" id="{5AA405A7-61C8-494C-85FC-92D3E07C6BFC}"/>
               </a:ext>
             </a:extLst>
           </p:cNvPr>
@@ -11588,7 +11438,7 @@
           <p:cNvPr id="8" name="">
             <a:extLst xmlns:a="http://schemas.openxmlformats.org/drawingml/2006/main">
               <a:ext uri="{FF2B5EF4-FFF2-40B4-BE49-F238E27FC236}">
-                <a16:creationId xmlns:a16="http://schemas.microsoft.com/office/drawing/2014/main" id="{C02FF478-54CC-4BA6-AF2C-20D142B35BF1}"/>
+                <a16:creationId xmlns:a16="http://schemas.microsoft.com/office/drawing/2014/main" id="{F585CF9D-7980-45D6-A8A9-50F94697DE27}"/>
               </a:ext>
             </a:extLst>
           </p:cNvPr>
@@ -11625,7 +11475,7 @@
           <p:cNvPr id="9" name="">
             <a:extLst xmlns:a="http://schemas.openxmlformats.org/drawingml/2006/main">
               <a:ext uri="{FF2B5EF4-FFF2-40B4-BE49-F238E27FC236}">
-                <a16:creationId xmlns:a16="http://schemas.microsoft.com/office/drawing/2014/main" id="{B4E6170B-5623-4554-BCE8-2E3A3BBA2D5D}"/>
+                <a16:creationId xmlns:a16="http://schemas.microsoft.com/office/drawing/2014/main" id="{3F4240D2-5AAF-4778-9142-49D6F6AE233E}"/>
               </a:ext>
             </a:extLst>
           </p:cNvPr>
@@ -11683,7 +11533,7 @@
           <p:cNvPr id="10" name="">
             <a:extLst xmlns:a="http://schemas.openxmlformats.org/drawingml/2006/main">
               <a:ext uri="{FF2B5EF4-FFF2-40B4-BE49-F238E27FC236}">
-                <a16:creationId xmlns:a16="http://schemas.microsoft.com/office/drawing/2014/main" id="{2602D620-F979-4A7B-9684-60AC7B66F00D}"/>
+                <a16:creationId xmlns:a16="http://schemas.microsoft.com/office/drawing/2014/main" id="{6788B704-197C-4A75-84B8-684A0FB6132D}"/>
               </a:ext>
             </a:extLst>
           </p:cNvPr>
@@ -11741,7 +11591,7 @@
           <p:cNvPr id="11" name="">
             <a:extLst xmlns:a="http://schemas.openxmlformats.org/drawingml/2006/main">
               <a:ext uri="{FF2B5EF4-FFF2-40B4-BE49-F238E27FC236}">
-                <a16:creationId xmlns:a16="http://schemas.microsoft.com/office/drawing/2014/main" id="{105AD566-2333-46A4-9AA8-9333DC8171E2}"/>
+                <a16:creationId xmlns:a16="http://schemas.microsoft.com/office/drawing/2014/main" id="{52C0D622-4894-4AF7-B9FA-ED7FA568D0E5}"/>
               </a:ext>
             </a:extLst>
           </p:cNvPr>
@@ -11776,7 +11626,7 @@
           <p:cNvPr id="12" name="">
             <a:extLst xmlns:a="http://schemas.openxmlformats.org/drawingml/2006/main">
               <a:ext uri="{FF2B5EF4-FFF2-40B4-BE49-F238E27FC236}">
-                <a16:creationId xmlns:a16="http://schemas.microsoft.com/office/drawing/2014/main" id="{8A35F0AC-DCF1-4FB8-ACB8-6B573A5E2431}"/>
+                <a16:creationId xmlns:a16="http://schemas.microsoft.com/office/drawing/2014/main" id="{D3419526-027B-487F-A204-06738CCBE17C}"/>
               </a:ext>
             </a:extLst>
           </p:cNvPr>
@@ -11809,7 +11659,7 @@
           <p:cNvPr id="13" name="">
             <a:extLst xmlns:a="http://schemas.openxmlformats.org/drawingml/2006/main">
               <a:ext uri="{FF2B5EF4-FFF2-40B4-BE49-F238E27FC236}">
-                <a16:creationId xmlns:a16="http://schemas.microsoft.com/office/drawing/2014/main" id="{D5D7A32F-1DEC-4DA5-BFBD-68D56A0E2230}"/>
+                <a16:creationId xmlns:a16="http://schemas.microsoft.com/office/drawing/2014/main" id="{4A9F9148-1B9C-433F-8F5A-CB8849A3F7B0}"/>
               </a:ext>
             </a:extLst>
           </p:cNvPr>
@@ -11867,82 +11717,7 @@
           <p:cNvPr id="14" name="">
             <a:extLst xmlns:a="http://schemas.openxmlformats.org/drawingml/2006/main">
               <a:ext uri="{FF2B5EF4-FFF2-40B4-BE49-F238E27FC236}">
-                <a16:creationId xmlns:a16="http://schemas.microsoft.com/office/drawing/2014/main" id="{856B890E-3396-4ECB-B5F4-B20DDB986E5D}"/>
-              </a:ext>
-            </a:extLst>
-          </p:cNvPr>
-          <p:cNvSpPr>
-            <a:spLocks xmlns:a="http://schemas.openxmlformats.org/drawingml/2006/main" noGrp="1"/>
-          </p:cNvSpPr>
-          <p:nvPr/>
-        </p:nvSpPr>
-        <p:spPr>
-          <a:xfrm xmlns:a="http://schemas.openxmlformats.org/drawingml/2006/main">
-            <a:off x="628650" y="2038350"/>
-            <a:ext cx="6858000" cy="628650"/>
-          </a:xfrm>
-          <a:prstGeom xmlns:a="http://schemas.openxmlformats.org/drawingml/2006/main" prst="rect">
-            <a:avLst/>
-          </a:prstGeom>
-          <a:solidFill xmlns:a="http://schemas.openxmlformats.org/drawingml/2006/main">
-            <a:srgbClr val="000000">
-              <a:alpha val="0"/>
-            </a:srgbClr>
-          </a:solidFill>
-          <a:ln xmlns:a="http://schemas.openxmlformats.org/drawingml/2006/main" w="0">
-            <a:solidFill>
-              <a:srgbClr val="000000">
-                <a:alpha val="0"/>
-              </a:srgbClr>
-            </a:solidFill>
-            <a:prstDash val="solid"/>
-          </a:ln>
-        </p:spPr>
-        <p:txBody>
-          <a:bodyPr xmlns:a="http://schemas.openxmlformats.org/drawingml/2006/main" lIns="0" tIns="0" rIns="0" bIns="0" anchor="t"/>
-          <a:lstStyle xmlns:a="http://schemas.openxmlformats.org/drawingml/2006/main"/>
-          <a:p xmlns:a="http://schemas.openxmlformats.org/drawingml/2006/main">
-            <a:pPr algn="l">
-              <a:defRPr sz="1350" b="0">
-                <a:solidFill>
-                  <a:srgbClr val="344146"/>
-                </a:solidFill>
-              </a:defRPr>
-            </a:pPr>
-            <a:r>
-              <a:rPr sz="1350" b="0">
-                <a:solidFill>
-                  <a:srgbClr val="344146"/>
-                </a:solidFill>
-              </a:rPr>
-              <a:t>같은 forebrain이어도 같은 모델이라고 말할 수는 없었다.</a:t>
-            </a:r>
-          </a:p>
-          <a:p xmlns:a="http://schemas.openxmlformats.org/drawingml/2006/main">
-            <a:pPr algn="l">
-              <a:defRPr sz="1350" b="0">
-                <a:solidFill>
-                  <a:srgbClr val="344146"/>
-                </a:solidFill>
-              </a:defRPr>
-            </a:pPr>
-            <a:r>
-              <a:rPr sz="1350" b="0">
-                <a:solidFill>
-                  <a:srgbClr val="344146"/>
-                </a:solidFill>
-              </a:rPr>
-              <a:t>질문은 region 밖으로 확장되기 시작했다.</a:t>
-            </a:r>
-          </a:p>
-        </p:txBody>
-      </p:sp>
-      <p:sp>
-        <p:nvSpPr>
-          <p:cNvPr id="15" name="">
-            <a:extLst xmlns:a="http://schemas.openxmlformats.org/drawingml/2006/main">
-              <a:ext uri="{FF2B5EF4-FFF2-40B4-BE49-F238E27FC236}">
-                <a16:creationId xmlns:a16="http://schemas.microsoft.com/office/drawing/2014/main" id="{663C3916-BD96-48D2-AC33-C9C543BC0101}"/>
+                <a16:creationId xmlns:a16="http://schemas.microsoft.com/office/drawing/2014/main" id="{0E82C703-B3EC-40FF-ADA1-DA31021D2050}"/>
               </a:ext>
             </a:extLst>
           </p:cNvPr>
@@ -11974,10 +11749,10 @@
       </p:sp>
       <p:sp>
         <p:nvSpPr>
-          <p:cNvPr id="16" name="">
-            <a:extLst xmlns:a="http://schemas.openxmlformats.org/drawingml/2006/main">
-              <a:ext uri="{FF2B5EF4-FFF2-40B4-BE49-F238E27FC236}">
-                <a16:creationId xmlns:a16="http://schemas.microsoft.com/office/drawing/2014/main" id="{F9A241B3-6FA0-40EE-BF6F-28CE26AACA05}"/>
+          <p:cNvPr id="15" name="">
+            <a:extLst xmlns:a="http://schemas.openxmlformats.org/drawingml/2006/main">
+              <a:ext uri="{FF2B5EF4-FFF2-40B4-BE49-F238E27FC236}">
+                <a16:creationId xmlns:a16="http://schemas.microsoft.com/office/drawing/2014/main" id="{DFCA7E41-EB43-44C6-8DE7-FCB37F82D90F}"/>
               </a:ext>
             </a:extLst>
           </p:cNvPr>
@@ -12009,10 +11784,10 @@
       </p:sp>
       <p:sp>
         <p:nvSpPr>
-          <p:cNvPr id="17" name="">
-            <a:extLst xmlns:a="http://schemas.openxmlformats.org/drawingml/2006/main">
-              <a:ext uri="{FF2B5EF4-FFF2-40B4-BE49-F238E27FC236}">
-                <a16:creationId xmlns:a16="http://schemas.microsoft.com/office/drawing/2014/main" id="{11C18C71-5FA5-4A2C-A634-EEEA652EA699}"/>
+          <p:cNvPr id="16" name="">
+            <a:extLst xmlns:a="http://schemas.openxmlformats.org/drawingml/2006/main">
+              <a:ext uri="{FF2B5EF4-FFF2-40B4-BE49-F238E27FC236}">
+                <a16:creationId xmlns:a16="http://schemas.microsoft.com/office/drawing/2014/main" id="{E1903D35-DC5B-479E-8403-8A4E1330D95E}"/>
               </a:ext>
             </a:extLst>
           </p:cNvPr>
@@ -12067,10 +11842,10 @@
       </p:sp>
       <p:sp>
         <p:nvSpPr>
-          <p:cNvPr id="18" name="">
-            <a:extLst xmlns:a="http://schemas.openxmlformats.org/drawingml/2006/main">
-              <a:ext uri="{FF2B5EF4-FFF2-40B4-BE49-F238E27FC236}">
-                <a16:creationId xmlns:a16="http://schemas.microsoft.com/office/drawing/2014/main" id="{36097256-F35E-43B2-87E9-9F0F4D12146E}"/>
+          <p:cNvPr id="17" name="">
+            <a:extLst xmlns:a="http://schemas.openxmlformats.org/drawingml/2006/main">
+              <a:ext uri="{FF2B5EF4-FFF2-40B4-BE49-F238E27FC236}">
+                <a16:creationId xmlns:a16="http://schemas.microsoft.com/office/drawing/2014/main" id="{8AA9943D-5569-4E29-8834-B09A28B91419}"/>
               </a:ext>
             </a:extLst>
           </p:cNvPr>
@@ -12104,10 +11879,10 @@
       </p:sp>
       <p:sp>
         <p:nvSpPr>
-          <p:cNvPr id="19" name="">
-            <a:extLst xmlns:a="http://schemas.openxmlformats.org/drawingml/2006/main">
-              <a:ext uri="{FF2B5EF4-FFF2-40B4-BE49-F238E27FC236}">
-                <a16:creationId xmlns:a16="http://schemas.microsoft.com/office/drawing/2014/main" id="{58D5587F-ABF2-4931-A34C-3A190293FE8B}"/>
+          <p:cNvPr id="18" name="">
+            <a:extLst xmlns:a="http://schemas.openxmlformats.org/drawingml/2006/main">
+              <a:ext uri="{FF2B5EF4-FFF2-40B4-BE49-F238E27FC236}">
+                <a16:creationId xmlns:a16="http://schemas.microsoft.com/office/drawing/2014/main" id="{BA3ED7ED-2BC4-4471-A47F-4BB897FDE7CD}"/>
               </a:ext>
             </a:extLst>
           </p:cNvPr>
@@ -12139,10 +11914,10 @@
       </p:sp>
       <p:sp>
         <p:nvSpPr>
-          <p:cNvPr id="20" name="">
-            <a:extLst xmlns:a="http://schemas.openxmlformats.org/drawingml/2006/main">
-              <a:ext uri="{FF2B5EF4-FFF2-40B4-BE49-F238E27FC236}">
-                <a16:creationId xmlns:a16="http://schemas.microsoft.com/office/drawing/2014/main" id="{EAD0B418-8384-4C88-9DAD-2E34807EA923}"/>
+          <p:cNvPr id="19" name="">
+            <a:extLst xmlns:a="http://schemas.openxmlformats.org/drawingml/2006/main">
+              <a:ext uri="{FF2B5EF4-FFF2-40B4-BE49-F238E27FC236}">
+                <a16:creationId xmlns:a16="http://schemas.microsoft.com/office/drawing/2014/main" id="{0A4F4D6E-7FBA-43C9-9256-485CDEEFBAF4}"/>
               </a:ext>
             </a:extLst>
           </p:cNvPr>
@@ -12197,10 +11972,10 @@
       </p:sp>
       <p:sp>
         <p:nvSpPr>
-          <p:cNvPr id="21" name="">
-            <a:extLst xmlns:a="http://schemas.openxmlformats.org/drawingml/2006/main">
-              <a:ext uri="{FF2B5EF4-FFF2-40B4-BE49-F238E27FC236}">
-                <a16:creationId xmlns:a16="http://schemas.microsoft.com/office/drawing/2014/main" id="{CEC91327-6EDC-4A92-9E8C-C3E680F6DBB8}"/>
+          <p:cNvPr id="20" name="">
+            <a:extLst xmlns:a="http://schemas.openxmlformats.org/drawingml/2006/main">
+              <a:ext uri="{FF2B5EF4-FFF2-40B4-BE49-F238E27FC236}">
+                <a16:creationId xmlns:a16="http://schemas.microsoft.com/office/drawing/2014/main" id="{48DDCAF8-911B-4263-9272-DF15CD9AD8CF}"/>
               </a:ext>
             </a:extLst>
           </p:cNvPr>
@@ -12289,10 +12064,10 @@
       </p:sp>
       <p:sp>
         <p:nvSpPr>
-          <p:cNvPr id="22" name="">
-            <a:extLst xmlns:a="http://schemas.openxmlformats.org/drawingml/2006/main">
-              <a:ext uri="{FF2B5EF4-FFF2-40B4-BE49-F238E27FC236}">
-                <a16:creationId xmlns:a16="http://schemas.microsoft.com/office/drawing/2014/main" id="{ED4E3210-BA14-488A-8FDE-2FB2E249C5B3}"/>
+          <p:cNvPr id="21" name="">
+            <a:extLst xmlns:a="http://schemas.openxmlformats.org/drawingml/2006/main">
+              <a:ext uri="{FF2B5EF4-FFF2-40B4-BE49-F238E27FC236}">
+                <a16:creationId xmlns:a16="http://schemas.microsoft.com/office/drawing/2014/main" id="{219F346D-6858-40D4-9611-42B1BE43146E}"/>
               </a:ext>
             </a:extLst>
           </p:cNvPr>
@@ -12326,10 +12101,10 @@
       </p:sp>
       <p:sp>
         <p:nvSpPr>
-          <p:cNvPr id="23" name="">
-            <a:extLst xmlns:a="http://schemas.openxmlformats.org/drawingml/2006/main">
-              <a:ext uri="{FF2B5EF4-FFF2-40B4-BE49-F238E27FC236}">
-                <a16:creationId xmlns:a16="http://schemas.microsoft.com/office/drawing/2014/main" id="{071A4018-4F61-445C-A075-E660140D15EF}"/>
+          <p:cNvPr id="22" name="">
+            <a:extLst xmlns:a="http://schemas.openxmlformats.org/drawingml/2006/main">
+              <a:ext uri="{FF2B5EF4-FFF2-40B4-BE49-F238E27FC236}">
+                <a16:creationId xmlns:a16="http://schemas.microsoft.com/office/drawing/2014/main" id="{EDA430B5-9823-40BE-B6AA-95CA9CA4B62F}"/>
               </a:ext>
             </a:extLst>
           </p:cNvPr>
@@ -12361,10 +12136,10 @@
       </p:sp>
       <p:sp>
         <p:nvSpPr>
-          <p:cNvPr id="24" name="">
-            <a:extLst xmlns:a="http://schemas.openxmlformats.org/drawingml/2006/main">
-              <a:ext uri="{FF2B5EF4-FFF2-40B4-BE49-F238E27FC236}">
-                <a16:creationId xmlns:a16="http://schemas.microsoft.com/office/drawing/2014/main" id="{1D196F59-8478-46D7-9555-56D5CE2B98DE}"/>
+          <p:cNvPr id="23" name="">
+            <a:extLst xmlns:a="http://schemas.openxmlformats.org/drawingml/2006/main">
+              <a:ext uri="{FF2B5EF4-FFF2-40B4-BE49-F238E27FC236}">
+                <a16:creationId xmlns:a16="http://schemas.microsoft.com/office/drawing/2014/main" id="{26C68748-D83D-4FB5-B3DA-51F34A263702}"/>
               </a:ext>
             </a:extLst>
           </p:cNvPr>
@@ -12419,10 +12194,10 @@
       </p:sp>
       <p:sp>
         <p:nvSpPr>
-          <p:cNvPr id="25" name="">
-            <a:extLst xmlns:a="http://schemas.openxmlformats.org/drawingml/2006/main">
-              <a:ext uri="{FF2B5EF4-FFF2-40B4-BE49-F238E27FC236}">
-                <a16:creationId xmlns:a16="http://schemas.microsoft.com/office/drawing/2014/main" id="{77ED83B8-B083-484E-9ECB-4FA5CC5B0977}"/>
+          <p:cNvPr id="24" name="">
+            <a:extLst xmlns:a="http://schemas.openxmlformats.org/drawingml/2006/main">
+              <a:ext uri="{FF2B5EF4-FFF2-40B4-BE49-F238E27FC236}">
+                <a16:creationId xmlns:a16="http://schemas.microsoft.com/office/drawing/2014/main" id="{BF274958-3AF7-4380-9A79-A8A85A4CFC2E}"/>
               </a:ext>
             </a:extLst>
           </p:cNvPr>
@@ -12511,10 +12286,10 @@
       </p:sp>
       <p:sp>
         <p:nvSpPr>
-          <p:cNvPr id="26" name="">
-            <a:extLst xmlns:a="http://schemas.openxmlformats.org/drawingml/2006/main">
-              <a:ext uri="{FF2B5EF4-FFF2-40B4-BE49-F238E27FC236}">
-                <a16:creationId xmlns:a16="http://schemas.microsoft.com/office/drawing/2014/main" id="{634A5673-A49B-42A2-9DC4-7DE94FA52CCD}"/>
+          <p:cNvPr id="25" name="">
+            <a:extLst xmlns:a="http://schemas.openxmlformats.org/drawingml/2006/main">
+              <a:ext uri="{FF2B5EF4-FFF2-40B4-BE49-F238E27FC236}">
+                <a16:creationId xmlns:a16="http://schemas.microsoft.com/office/drawing/2014/main" id="{B0DD95A9-C604-48AA-BDD9-7E49D9B98643}"/>
               </a:ext>
             </a:extLst>
           </p:cNvPr>
@@ -12548,10 +12323,10 @@
       </p:sp>
       <p:sp>
         <p:nvSpPr>
-          <p:cNvPr id="27" name="">
-            <a:extLst xmlns:a="http://schemas.openxmlformats.org/drawingml/2006/main">
-              <a:ext uri="{FF2B5EF4-FFF2-40B4-BE49-F238E27FC236}">
-                <a16:creationId xmlns:a16="http://schemas.microsoft.com/office/drawing/2014/main" id="{C5512DF3-566D-45ED-BCDB-930B3F5C1A30}"/>
+          <p:cNvPr id="26" name="">
+            <a:extLst xmlns:a="http://schemas.openxmlformats.org/drawingml/2006/main">
+              <a:ext uri="{FF2B5EF4-FFF2-40B4-BE49-F238E27FC236}">
+                <a16:creationId xmlns:a16="http://schemas.microsoft.com/office/drawing/2014/main" id="{404D8235-A556-40CF-A7D3-D7BA132E50A8}"/>
               </a:ext>
             </a:extLst>
           </p:cNvPr>
@@ -12583,10 +12358,10 @@
       </p:sp>
       <p:sp>
         <p:nvSpPr>
-          <p:cNvPr id="28" name="">
-            <a:extLst xmlns:a="http://schemas.openxmlformats.org/drawingml/2006/main">
-              <a:ext uri="{FF2B5EF4-FFF2-40B4-BE49-F238E27FC236}">
-                <a16:creationId xmlns:a16="http://schemas.microsoft.com/office/drawing/2014/main" id="{60363D01-7486-447C-9F07-5BE854249925}"/>
+          <p:cNvPr id="27" name="">
+            <a:extLst xmlns:a="http://schemas.openxmlformats.org/drawingml/2006/main">
+              <a:ext uri="{FF2B5EF4-FFF2-40B4-BE49-F238E27FC236}">
+                <a16:creationId xmlns:a16="http://schemas.microsoft.com/office/drawing/2014/main" id="{BA75BF4E-E1A3-475B-9593-BE9385DB2F58}"/>
               </a:ext>
             </a:extLst>
           </p:cNvPr>
@@ -12641,10 +12416,10 @@
       </p:sp>
       <p:sp>
         <p:nvSpPr>
-          <p:cNvPr id="29" name="">
-            <a:extLst xmlns:a="http://schemas.openxmlformats.org/drawingml/2006/main">
-              <a:ext uri="{FF2B5EF4-FFF2-40B4-BE49-F238E27FC236}">
-                <a16:creationId xmlns:a16="http://schemas.microsoft.com/office/drawing/2014/main" id="{80F7ABC8-7378-4FB6-9721-742F3511C05E}"/>
+          <p:cNvPr id="28" name="">
+            <a:extLst xmlns:a="http://schemas.openxmlformats.org/drawingml/2006/main">
+              <a:ext uri="{FF2B5EF4-FFF2-40B4-BE49-F238E27FC236}">
+                <a16:creationId xmlns:a16="http://schemas.microsoft.com/office/drawing/2014/main" id="{2AC9B7AE-89DC-47FE-8E30-61256E734CB6}"/>
               </a:ext>
             </a:extLst>
           </p:cNvPr>
@@ -12733,10 +12508,10 @@
       </p:sp>
       <p:sp>
         <p:nvSpPr>
-          <p:cNvPr id="30" name="">
-            <a:extLst xmlns:a="http://schemas.openxmlformats.org/drawingml/2006/main">
-              <a:ext uri="{FF2B5EF4-FFF2-40B4-BE49-F238E27FC236}">
-                <a16:creationId xmlns:a16="http://schemas.microsoft.com/office/drawing/2014/main" id="{8B54013F-645E-4DFB-AAA2-40618C614B3F}"/>
+          <p:cNvPr id="29" name="">
+            <a:extLst xmlns:a="http://schemas.openxmlformats.org/drawingml/2006/main">
+              <a:ext uri="{FF2B5EF4-FFF2-40B4-BE49-F238E27FC236}">
+                <a16:creationId xmlns:a16="http://schemas.microsoft.com/office/drawing/2014/main" id="{C149E10E-2497-4FBC-8323-120B453F33DF}"/>
               </a:ext>
             </a:extLst>
           </p:cNvPr>
@@ -12787,10 +12562,10 @@
       </p:sp>
       <p:sp>
         <p:nvSpPr>
-          <p:cNvPr id="31" name="">
-            <a:extLst xmlns:a="http://schemas.openxmlformats.org/drawingml/2006/main">
-              <a:ext uri="{FF2B5EF4-FFF2-40B4-BE49-F238E27FC236}">
-                <a16:creationId xmlns:a16="http://schemas.microsoft.com/office/drawing/2014/main" id="{D78EDCE9-24F8-4410-ACB9-5EF03A19AACC}"/>
+          <p:cNvPr id="30" name="">
+            <a:extLst xmlns:a="http://schemas.openxmlformats.org/drawingml/2006/main">
+              <a:ext uri="{FF2B5EF4-FFF2-40B4-BE49-F238E27FC236}">
+                <a16:creationId xmlns:a16="http://schemas.microsoft.com/office/drawing/2014/main" id="{F94F13B0-8055-4507-AC32-650F789A7ACA}"/>
               </a:ext>
             </a:extLst>
           </p:cNvPr>
@@ -12846,7 +12621,7 @@
     </p:spTree>
     <p:extLst>
       <p:ext uri="{BB962C8B-B14F-4D97-AF65-F5344CB8AC3E}">
-        <p14:creationId xmlns:p14="http://schemas.microsoft.com/office/powerpoint/2010/main" val="179760597"/>
+        <p14:creationId xmlns:p14="http://schemas.microsoft.com/office/powerpoint/2010/main" val="2081073485"/>
       </p:ext>
     </p:extLst>
   </p:cSld>
@@ -12877,7 +12652,7 @@
           <p:cNvPr id="1" name="Slide Number Placeholder 5">
             <a:extLst xmlns:a="http://schemas.openxmlformats.org/drawingml/2006/main">
               <a:ext uri="{FF2B5EF4-FFF2-40B4-BE49-F238E27FC236}">
-                <a16:creationId xmlns:a16="http://schemas.microsoft.com/office/drawing/2014/main" id="{F572615B-7240-42F8-B48E-DAA8AA9FBBC2}"/>
+                <a16:creationId xmlns:a16="http://schemas.microsoft.com/office/drawing/2014/main" id="{38BDF79F-9F16-4FEE-B72E-1F506FE9EBEC}"/>
               </a:ext>
             </a:extLst>
           </p:cNvPr>
@@ -12913,7 +12688,7 @@
           <p:nvPr/>
         </p:nvPicPr>
         <p:blipFill>
-          <a:blip xmlns:r="http://schemas.openxmlformats.org/officeDocument/2006/relationships" xmlns:a="http://schemas.openxmlformats.org/drawingml/2006/main" r:embed="R379679773a70476c"/>
+          <a:blip xmlns:r="http://schemas.openxmlformats.org/officeDocument/2006/relationships" xmlns:a="http://schemas.openxmlformats.org/drawingml/2006/main" r:embed="Rda91e4fb05424552"/>
           <a:srcRect xmlns:a="http://schemas.openxmlformats.org/drawingml/2006/main" l="0" t="21875" r="0" b="21875"/>
           <a:stretch xmlns:a="http://schemas.openxmlformats.org/drawingml/2006/main">
             <a:fillRect l="0" t="0" r="0" b="0"/>
@@ -12934,7 +12709,7 @@
           <p:cNvPr id="3" name="">
             <a:extLst xmlns:a="http://schemas.openxmlformats.org/drawingml/2006/main">
               <a:ext uri="{FF2B5EF4-FFF2-40B4-BE49-F238E27FC236}">
-                <a16:creationId xmlns:a16="http://schemas.microsoft.com/office/drawing/2014/main" id="{2A9F7D02-4124-498A-B492-66FC78F701D2}"/>
+                <a16:creationId xmlns:a16="http://schemas.microsoft.com/office/drawing/2014/main" id="{CD294D12-89BB-457C-AD2B-515EF102021D}"/>
               </a:ext>
             </a:extLst>
           </p:cNvPr>
@@ -12969,7 +12744,7 @@
           <p:cNvPr id="4" name="">
             <a:extLst xmlns:a="http://schemas.openxmlformats.org/drawingml/2006/main">
               <a:ext uri="{FF2B5EF4-FFF2-40B4-BE49-F238E27FC236}">
-                <a16:creationId xmlns:a16="http://schemas.microsoft.com/office/drawing/2014/main" id="{DB38C439-C1A8-4673-9440-82055465D831}"/>
+                <a16:creationId xmlns:a16="http://schemas.microsoft.com/office/drawing/2014/main" id="{9482DCA7-FBDC-4E0C-960D-66E22FC6D1F2}"/>
               </a:ext>
             </a:extLst>
           </p:cNvPr>
@@ -13004,7 +12779,7 @@
           <p:cNvPr id="5" name="">
             <a:extLst xmlns:a="http://schemas.openxmlformats.org/drawingml/2006/main">
               <a:ext uri="{FF2B5EF4-FFF2-40B4-BE49-F238E27FC236}">
-                <a16:creationId xmlns:a16="http://schemas.microsoft.com/office/drawing/2014/main" id="{CE344315-4F11-4B40-A6E3-BE78A11EE232}"/>
+                <a16:creationId xmlns:a16="http://schemas.microsoft.com/office/drawing/2014/main" id="{FD96DD69-E8FA-49A7-97FB-D35E6A6E26EF}"/>
               </a:ext>
             </a:extLst>
           </p:cNvPr>
@@ -13041,7 +12816,7 @@
           <p:cNvPr id="6" name="">
             <a:extLst xmlns:a="http://schemas.openxmlformats.org/drawingml/2006/main">
               <a:ext uri="{FF2B5EF4-FFF2-40B4-BE49-F238E27FC236}">
-                <a16:creationId xmlns:a16="http://schemas.microsoft.com/office/drawing/2014/main" id="{D5D9B8B5-AF5B-49AB-A8F0-908DE49A9B32}"/>
+                <a16:creationId xmlns:a16="http://schemas.microsoft.com/office/drawing/2014/main" id="{014C5B91-33C5-4F69-A39C-7CC66A33119C}"/>
               </a:ext>
             </a:extLst>
           </p:cNvPr>
@@ -13078,7 +12853,7 @@
           <p:cNvPr id="7" name="">
             <a:extLst xmlns:a="http://schemas.openxmlformats.org/drawingml/2006/main">
               <a:ext uri="{FF2B5EF4-FFF2-40B4-BE49-F238E27FC236}">
-                <a16:creationId xmlns:a16="http://schemas.microsoft.com/office/drawing/2014/main" id="{0757DA29-F5BE-4D81-A3DC-EC88BD23604C}"/>
+                <a16:creationId xmlns:a16="http://schemas.microsoft.com/office/drawing/2014/main" id="{18317FC8-CDDE-4333-9824-18428509DAC5}"/>
               </a:ext>
             </a:extLst>
           </p:cNvPr>
@@ -13115,7 +12890,7 @@
           <p:cNvPr id="8" name="">
             <a:extLst xmlns:a="http://schemas.openxmlformats.org/drawingml/2006/main">
               <a:ext uri="{FF2B5EF4-FFF2-40B4-BE49-F238E27FC236}">
-                <a16:creationId xmlns:a16="http://schemas.microsoft.com/office/drawing/2014/main" id="{EA93D7F0-9A47-4843-92CC-9C494BD723BD}"/>
+                <a16:creationId xmlns:a16="http://schemas.microsoft.com/office/drawing/2014/main" id="{093F996B-17F6-4966-A98A-7D2EA82526E9}"/>
               </a:ext>
             </a:extLst>
           </p:cNvPr>
@@ -13152,7 +12927,7 @@
           <p:cNvPr id="9" name="">
             <a:extLst xmlns:a="http://schemas.openxmlformats.org/drawingml/2006/main">
               <a:ext uri="{FF2B5EF4-FFF2-40B4-BE49-F238E27FC236}">
-                <a16:creationId xmlns:a16="http://schemas.microsoft.com/office/drawing/2014/main" id="{A8A25D60-6A9B-4D4D-879A-BF51EF6E174C}"/>
+                <a16:creationId xmlns:a16="http://schemas.microsoft.com/office/drawing/2014/main" id="{82EC5712-1C9F-4D80-9130-CF6F7DD55FC4}"/>
               </a:ext>
             </a:extLst>
           </p:cNvPr>
@@ -13210,7 +12985,7 @@
           <p:cNvPr id="10" name="">
             <a:extLst xmlns:a="http://schemas.openxmlformats.org/drawingml/2006/main">
               <a:ext uri="{FF2B5EF4-FFF2-40B4-BE49-F238E27FC236}">
-                <a16:creationId xmlns:a16="http://schemas.microsoft.com/office/drawing/2014/main" id="{1E33E3E4-8B42-4622-B639-19F8FFF099A1}"/>
+                <a16:creationId xmlns:a16="http://schemas.microsoft.com/office/drawing/2014/main" id="{E9DD3B2D-1C31-4F95-9DF9-B15E355FB8B1}"/>
               </a:ext>
             </a:extLst>
           </p:cNvPr>
@@ -13268,7 +13043,7 @@
           <p:cNvPr id="11" name="">
             <a:extLst xmlns:a="http://schemas.openxmlformats.org/drawingml/2006/main">
               <a:ext uri="{FF2B5EF4-FFF2-40B4-BE49-F238E27FC236}">
-                <a16:creationId xmlns:a16="http://schemas.microsoft.com/office/drawing/2014/main" id="{92000A92-B234-427E-AABC-A45A587BC51A}"/>
+                <a16:creationId xmlns:a16="http://schemas.microsoft.com/office/drawing/2014/main" id="{DE9ADBB0-7E0C-4970-9EC9-AAA0BFB47CEC}"/>
               </a:ext>
             </a:extLst>
           </p:cNvPr>
@@ -13303,7 +13078,7 @@
           <p:cNvPr id="12" name="">
             <a:extLst xmlns:a="http://schemas.openxmlformats.org/drawingml/2006/main">
               <a:ext uri="{FF2B5EF4-FFF2-40B4-BE49-F238E27FC236}">
-                <a16:creationId xmlns:a16="http://schemas.microsoft.com/office/drawing/2014/main" id="{E67F3AD7-B451-43D1-98FB-85776FEAA73A}"/>
+                <a16:creationId xmlns:a16="http://schemas.microsoft.com/office/drawing/2014/main" id="{3100ECDB-70E8-4EAA-A899-27A9AEB58E6B}"/>
               </a:ext>
             </a:extLst>
           </p:cNvPr>
@@ -13336,7 +13111,7 @@
           <p:cNvPr id="13" name="">
             <a:extLst xmlns:a="http://schemas.openxmlformats.org/drawingml/2006/main">
               <a:ext uri="{FF2B5EF4-FFF2-40B4-BE49-F238E27FC236}">
-                <a16:creationId xmlns:a16="http://schemas.microsoft.com/office/drawing/2014/main" id="{B7D0DB55-646F-4656-B7D7-E2380EC60B65}"/>
+                <a16:creationId xmlns:a16="http://schemas.microsoft.com/office/drawing/2014/main" id="{3E1C1014-2E11-4734-9710-587BD510180F}"/>
               </a:ext>
             </a:extLst>
           </p:cNvPr>
@@ -13411,7 +13186,7 @@
           <p:cNvPr id="14" name="">
             <a:extLst xmlns:a="http://schemas.openxmlformats.org/drawingml/2006/main">
               <a:ext uri="{FF2B5EF4-FFF2-40B4-BE49-F238E27FC236}">
-                <a16:creationId xmlns:a16="http://schemas.microsoft.com/office/drawing/2014/main" id="{1D6E7EC0-3CEF-4AF3-BC8D-FCEC02B00283}"/>
+                <a16:creationId xmlns:a16="http://schemas.microsoft.com/office/drawing/2014/main" id="{5E2A9A20-D964-4EA3-9948-F19F35C290E7}"/>
               </a:ext>
             </a:extLst>
           </p:cNvPr>
@@ -13486,7 +13261,7 @@
           <p:cNvPr id="15" name="">
             <a:extLst xmlns:a="http://schemas.openxmlformats.org/drawingml/2006/main">
               <a:ext uri="{FF2B5EF4-FFF2-40B4-BE49-F238E27FC236}">
-                <a16:creationId xmlns:a16="http://schemas.microsoft.com/office/drawing/2014/main" id="{62C5103E-2BF9-470C-BEBD-8219FFA32736}"/>
+                <a16:creationId xmlns:a16="http://schemas.microsoft.com/office/drawing/2014/main" id="{19FE4D58-E19E-42FA-AFFE-D75E5A765CDD}"/>
               </a:ext>
             </a:extLst>
           </p:cNvPr>
@@ -13540,7 +13315,7 @@
           <p:cNvPr id="16" name="">
             <a:extLst xmlns:a="http://schemas.openxmlformats.org/drawingml/2006/main">
               <a:ext uri="{FF2B5EF4-FFF2-40B4-BE49-F238E27FC236}">
-                <a16:creationId xmlns:a16="http://schemas.microsoft.com/office/drawing/2014/main" id="{855F2B23-A807-4A0B-9B10-2714F3733D66}"/>
+                <a16:creationId xmlns:a16="http://schemas.microsoft.com/office/drawing/2014/main" id="{241EF0C2-1522-46A5-9379-9145E29F76B1}"/>
               </a:ext>
             </a:extLst>
           </p:cNvPr>
@@ -13575,7 +13350,7 @@
           <p:cNvPr id="17" name="">
             <a:extLst xmlns:a="http://schemas.openxmlformats.org/drawingml/2006/main">
               <a:ext uri="{FF2B5EF4-FFF2-40B4-BE49-F238E27FC236}">
-                <a16:creationId xmlns:a16="http://schemas.microsoft.com/office/drawing/2014/main" id="{E67D25FE-38E8-41C0-8741-80F26C0D3DD4}"/>
+                <a16:creationId xmlns:a16="http://schemas.microsoft.com/office/drawing/2014/main" id="{6122FB66-48D5-40B9-AB52-063505840896}"/>
               </a:ext>
             </a:extLst>
           </p:cNvPr>
@@ -13610,7 +13385,7 @@
           <p:cNvPr id="18" name="">
             <a:extLst xmlns:a="http://schemas.openxmlformats.org/drawingml/2006/main">
               <a:ext uri="{FF2B5EF4-FFF2-40B4-BE49-F238E27FC236}">
-                <a16:creationId xmlns:a16="http://schemas.microsoft.com/office/drawing/2014/main" id="{88A9EFF9-4AA1-476E-B560-6302E4138C86}"/>
+                <a16:creationId xmlns:a16="http://schemas.microsoft.com/office/drawing/2014/main" id="{79C5E0A4-226A-4670-8D08-0479D65F400B}"/>
               </a:ext>
             </a:extLst>
           </p:cNvPr>
@@ -13664,7 +13439,7 @@
           <p:cNvPr id="19" name="">
             <a:extLst xmlns:a="http://schemas.openxmlformats.org/drawingml/2006/main">
               <a:ext uri="{FF2B5EF4-FFF2-40B4-BE49-F238E27FC236}">
-                <a16:creationId xmlns:a16="http://schemas.microsoft.com/office/drawing/2014/main" id="{788E893A-301F-4D0F-8332-7F99E5A7F755}"/>
+                <a16:creationId xmlns:a16="http://schemas.microsoft.com/office/drawing/2014/main" id="{B9AB77F9-83E3-438D-9989-A558FBBF7050}"/>
               </a:ext>
             </a:extLst>
           </p:cNvPr>
@@ -13722,7 +13497,7 @@
           <p:cNvPr id="20" name="">
             <a:extLst xmlns:a="http://schemas.openxmlformats.org/drawingml/2006/main">
               <a:ext uri="{FF2B5EF4-FFF2-40B4-BE49-F238E27FC236}">
-                <a16:creationId xmlns:a16="http://schemas.microsoft.com/office/drawing/2014/main" id="{F74D811B-634C-43C3-9166-03DF030C5B32}"/>
+                <a16:creationId xmlns:a16="http://schemas.microsoft.com/office/drawing/2014/main" id="{A2E9AC2C-E595-4700-9669-BF6BFB71BBD8}"/>
               </a:ext>
             </a:extLst>
           </p:cNvPr>
@@ -13780,7 +13555,7 @@
           <p:cNvPr id="21" name="">
             <a:extLst xmlns:a="http://schemas.openxmlformats.org/drawingml/2006/main">
               <a:ext uri="{FF2B5EF4-FFF2-40B4-BE49-F238E27FC236}">
-                <a16:creationId xmlns:a16="http://schemas.microsoft.com/office/drawing/2014/main" id="{954D8B61-9951-437C-AC11-CFE5A72E1589}"/>
+                <a16:creationId xmlns:a16="http://schemas.microsoft.com/office/drawing/2014/main" id="{9C06971A-9C36-4E2C-85C1-FEF0793CDAFA}"/>
               </a:ext>
             </a:extLst>
           </p:cNvPr>
@@ -13815,7 +13590,7 @@
           <p:cNvPr id="22" name="">
             <a:extLst xmlns:a="http://schemas.openxmlformats.org/drawingml/2006/main">
               <a:ext uri="{FF2B5EF4-FFF2-40B4-BE49-F238E27FC236}">
-                <a16:creationId xmlns:a16="http://schemas.microsoft.com/office/drawing/2014/main" id="{623DDAD0-E3B7-449D-BA89-18E57AB277CC}"/>
+                <a16:creationId xmlns:a16="http://schemas.microsoft.com/office/drawing/2014/main" id="{2D1DD782-F83A-48F3-B4D3-D7BA9FA0DA11}"/>
               </a:ext>
             </a:extLst>
           </p:cNvPr>
@@ -13850,7 +13625,7 @@
           <p:cNvPr id="23" name="">
             <a:extLst xmlns:a="http://schemas.openxmlformats.org/drawingml/2006/main">
               <a:ext uri="{FF2B5EF4-FFF2-40B4-BE49-F238E27FC236}">
-                <a16:creationId xmlns:a16="http://schemas.microsoft.com/office/drawing/2014/main" id="{0AF79D78-501F-4D38-A1A7-B8D10C04115F}"/>
+                <a16:creationId xmlns:a16="http://schemas.microsoft.com/office/drawing/2014/main" id="{3E736DD9-DC8E-4D3B-A4F0-650F790204AD}"/>
               </a:ext>
             </a:extLst>
           </p:cNvPr>
@@ -13904,7 +13679,7 @@
           <p:cNvPr id="24" name="">
             <a:extLst xmlns:a="http://schemas.openxmlformats.org/drawingml/2006/main">
               <a:ext uri="{FF2B5EF4-FFF2-40B4-BE49-F238E27FC236}">
-                <a16:creationId xmlns:a16="http://schemas.microsoft.com/office/drawing/2014/main" id="{FD62CBC3-9925-402E-8C2E-306CC71A4011}"/>
+                <a16:creationId xmlns:a16="http://schemas.microsoft.com/office/drawing/2014/main" id="{BF69235A-71DF-4CC3-9300-79352369CFAF}"/>
               </a:ext>
             </a:extLst>
           </p:cNvPr>
@@ -13962,7 +13737,7 @@
           <p:cNvPr id="25" name="">
             <a:extLst xmlns:a="http://schemas.openxmlformats.org/drawingml/2006/main">
               <a:ext uri="{FF2B5EF4-FFF2-40B4-BE49-F238E27FC236}">
-                <a16:creationId xmlns:a16="http://schemas.microsoft.com/office/drawing/2014/main" id="{D6C797FF-7730-4D78-A756-4CE75D83CC58}"/>
+                <a16:creationId xmlns:a16="http://schemas.microsoft.com/office/drawing/2014/main" id="{A784FD4F-AD19-436A-AD79-E44FADC50561}"/>
               </a:ext>
             </a:extLst>
           </p:cNvPr>
@@ -14037,7 +13812,7 @@
           <p:cNvPr id="26" name="">
             <a:extLst xmlns:a="http://schemas.openxmlformats.org/drawingml/2006/main">
               <a:ext uri="{FF2B5EF4-FFF2-40B4-BE49-F238E27FC236}">
-                <a16:creationId xmlns:a16="http://schemas.microsoft.com/office/drawing/2014/main" id="{B9FFCA72-02CD-404E-86C9-C216E226E3E6}"/>
+                <a16:creationId xmlns:a16="http://schemas.microsoft.com/office/drawing/2014/main" id="{1F688F1E-6BC1-4D47-BD9D-FE1B32735F25}"/>
               </a:ext>
             </a:extLst>
           </p:cNvPr>
@@ -14072,7 +13847,7 @@
           <p:cNvPr id="27" name="">
             <a:extLst xmlns:a="http://schemas.openxmlformats.org/drawingml/2006/main">
               <a:ext uri="{FF2B5EF4-FFF2-40B4-BE49-F238E27FC236}">
-                <a16:creationId xmlns:a16="http://schemas.microsoft.com/office/drawing/2014/main" id="{B4E9988C-0694-4BBB-9F9E-5A01B33944CA}"/>
+                <a16:creationId xmlns:a16="http://schemas.microsoft.com/office/drawing/2014/main" id="{0C8061F6-11D6-4071-9D5F-6BBCB507C9EB}"/>
               </a:ext>
             </a:extLst>
           </p:cNvPr>
@@ -14107,7 +13882,7 @@
           <p:cNvPr id="28" name="">
             <a:extLst xmlns:a="http://schemas.openxmlformats.org/drawingml/2006/main">
               <a:ext uri="{FF2B5EF4-FFF2-40B4-BE49-F238E27FC236}">
-                <a16:creationId xmlns:a16="http://schemas.microsoft.com/office/drawing/2014/main" id="{C77A369C-6E46-4E33-B462-A4168C27B836}"/>
+                <a16:creationId xmlns:a16="http://schemas.microsoft.com/office/drawing/2014/main" id="{64F7B82C-D6D2-4D9C-ACAF-48C7B76F8A97}"/>
               </a:ext>
             </a:extLst>
           </p:cNvPr>
@@ -14161,7 +13936,7 @@
           <p:cNvPr id="29" name="">
             <a:extLst xmlns:a="http://schemas.openxmlformats.org/drawingml/2006/main">
               <a:ext uri="{FF2B5EF4-FFF2-40B4-BE49-F238E27FC236}">
-                <a16:creationId xmlns:a16="http://schemas.microsoft.com/office/drawing/2014/main" id="{A45065FB-6F95-4D8F-A230-19665F88F1F8}"/>
+                <a16:creationId xmlns:a16="http://schemas.microsoft.com/office/drawing/2014/main" id="{5B603C58-0C03-4965-9D2D-4B56DA422DC7}"/>
               </a:ext>
             </a:extLst>
           </p:cNvPr>
@@ -14219,7 +13994,7 @@
           <p:cNvPr id="30" name="">
             <a:extLst xmlns:a="http://schemas.openxmlformats.org/drawingml/2006/main">
               <a:ext uri="{FF2B5EF4-FFF2-40B4-BE49-F238E27FC236}">
-                <a16:creationId xmlns:a16="http://schemas.microsoft.com/office/drawing/2014/main" id="{C7E71DEC-0432-46A5-B235-ADB896E8F1A0}"/>
+                <a16:creationId xmlns:a16="http://schemas.microsoft.com/office/drawing/2014/main" id="{1AA15915-B048-48E2-92D4-37C7CDD32FAF}"/>
               </a:ext>
             </a:extLst>
           </p:cNvPr>
@@ -14294,7 +14069,7 @@
           <p:cNvPr id="31" name="">
             <a:extLst xmlns:a="http://schemas.openxmlformats.org/drawingml/2006/main">
               <a:ext uri="{FF2B5EF4-FFF2-40B4-BE49-F238E27FC236}">
-                <a16:creationId xmlns:a16="http://schemas.microsoft.com/office/drawing/2014/main" id="{4EFA5231-B9D7-4BE4-B35A-45203A66B10D}"/>
+                <a16:creationId xmlns:a16="http://schemas.microsoft.com/office/drawing/2014/main" id="{CC36B0F8-849F-4018-9B6D-45E727F966C4}"/>
               </a:ext>
             </a:extLst>
           </p:cNvPr>
@@ -14329,7 +14104,7 @@
           <p:cNvPr id="32" name="">
             <a:extLst xmlns:a="http://schemas.openxmlformats.org/drawingml/2006/main">
               <a:ext uri="{FF2B5EF4-FFF2-40B4-BE49-F238E27FC236}">
-                <a16:creationId xmlns:a16="http://schemas.microsoft.com/office/drawing/2014/main" id="{EB99BE3E-1713-4F84-873D-70DA392781F8}"/>
+                <a16:creationId xmlns:a16="http://schemas.microsoft.com/office/drawing/2014/main" id="{52B6C334-F0B8-48F1-83FD-FB161B4E8222}"/>
               </a:ext>
             </a:extLst>
           </p:cNvPr>
@@ -14364,7 +14139,7 @@
           <p:cNvPr id="33" name="">
             <a:extLst xmlns:a="http://schemas.openxmlformats.org/drawingml/2006/main">
               <a:ext uri="{FF2B5EF4-FFF2-40B4-BE49-F238E27FC236}">
-                <a16:creationId xmlns:a16="http://schemas.microsoft.com/office/drawing/2014/main" id="{A26DAAD0-578E-4AE7-B75C-F7914A292204}"/>
+                <a16:creationId xmlns:a16="http://schemas.microsoft.com/office/drawing/2014/main" id="{91887849-63AA-4DA0-A48C-F6663173CB18}"/>
               </a:ext>
             </a:extLst>
           </p:cNvPr>
@@ -14418,7 +14193,7 @@
           <p:cNvPr id="34" name="">
             <a:extLst xmlns:a="http://schemas.openxmlformats.org/drawingml/2006/main">
               <a:ext uri="{FF2B5EF4-FFF2-40B4-BE49-F238E27FC236}">
-                <a16:creationId xmlns:a16="http://schemas.microsoft.com/office/drawing/2014/main" id="{39C77905-4FF4-4C48-B1CD-6144BE63E2CE}"/>
+                <a16:creationId xmlns:a16="http://schemas.microsoft.com/office/drawing/2014/main" id="{126DF275-D2D4-481D-BF20-43657DEE1FC1}"/>
               </a:ext>
             </a:extLst>
           </p:cNvPr>
@@ -14476,7 +14251,7 @@
           <p:cNvPr id="35" name="">
             <a:extLst xmlns:a="http://schemas.openxmlformats.org/drawingml/2006/main">
               <a:ext uri="{FF2B5EF4-FFF2-40B4-BE49-F238E27FC236}">
-                <a16:creationId xmlns:a16="http://schemas.microsoft.com/office/drawing/2014/main" id="{DDEF2C14-1BDA-4D14-B4AF-F43DC231BA15}"/>
+                <a16:creationId xmlns:a16="http://schemas.microsoft.com/office/drawing/2014/main" id="{7890FAA9-7FD2-4462-9100-38F8E3FD9CB1}"/>
               </a:ext>
             </a:extLst>
           </p:cNvPr>
@@ -14551,7 +14326,7 @@
           <p:cNvPr id="36" name="">
             <a:extLst xmlns:a="http://schemas.openxmlformats.org/drawingml/2006/main">
               <a:ext uri="{FF2B5EF4-FFF2-40B4-BE49-F238E27FC236}">
-                <a16:creationId xmlns:a16="http://schemas.microsoft.com/office/drawing/2014/main" id="{C62C4B70-9D65-4036-9AA7-8D4C3D57EE77}"/>
+                <a16:creationId xmlns:a16="http://schemas.microsoft.com/office/drawing/2014/main" id="{3B742E03-3851-427C-8A8C-336C5051C5D3}"/>
               </a:ext>
             </a:extLst>
           </p:cNvPr>
@@ -14586,7 +14361,7 @@
           <p:cNvPr id="37" name="">
             <a:extLst xmlns:a="http://schemas.openxmlformats.org/drawingml/2006/main">
               <a:ext uri="{FF2B5EF4-FFF2-40B4-BE49-F238E27FC236}">
-                <a16:creationId xmlns:a16="http://schemas.microsoft.com/office/drawing/2014/main" id="{8FAAA741-FFB5-4743-AB75-27BCD66044FA}"/>
+                <a16:creationId xmlns:a16="http://schemas.microsoft.com/office/drawing/2014/main" id="{0CA364B5-7705-4768-8858-20F5BE206188}"/>
               </a:ext>
             </a:extLst>
           </p:cNvPr>
@@ -14621,7 +14396,7 @@
           <p:cNvPr id="38" name="">
             <a:extLst xmlns:a="http://schemas.openxmlformats.org/drawingml/2006/main">
               <a:ext uri="{FF2B5EF4-FFF2-40B4-BE49-F238E27FC236}">
-                <a16:creationId xmlns:a16="http://schemas.microsoft.com/office/drawing/2014/main" id="{53C82CF1-CDB5-43AF-9354-DC8D274AB751}"/>
+                <a16:creationId xmlns:a16="http://schemas.microsoft.com/office/drawing/2014/main" id="{32C64406-EA35-4BB2-8434-C6E4131C98D7}"/>
               </a:ext>
             </a:extLst>
           </p:cNvPr>
@@ -14675,7 +14450,7 @@
           <p:cNvPr id="39" name="">
             <a:extLst xmlns:a="http://schemas.openxmlformats.org/drawingml/2006/main">
               <a:ext uri="{FF2B5EF4-FFF2-40B4-BE49-F238E27FC236}">
-                <a16:creationId xmlns:a16="http://schemas.microsoft.com/office/drawing/2014/main" id="{81B8135E-DDF7-4707-9BAA-F024A0D43037}"/>
+                <a16:creationId xmlns:a16="http://schemas.microsoft.com/office/drawing/2014/main" id="{2DB02456-16C5-4851-B039-B5A918EDC518}"/>
               </a:ext>
             </a:extLst>
           </p:cNvPr>
@@ -14733,7 +14508,7 @@
           <p:cNvPr id="40" name="">
             <a:extLst xmlns:a="http://schemas.openxmlformats.org/drawingml/2006/main">
               <a:ext uri="{FF2B5EF4-FFF2-40B4-BE49-F238E27FC236}">
-                <a16:creationId xmlns:a16="http://schemas.microsoft.com/office/drawing/2014/main" id="{9762B38D-840B-4AAA-9EFC-46DA02D97901}"/>
+                <a16:creationId xmlns:a16="http://schemas.microsoft.com/office/drawing/2014/main" id="{E004849A-6AD4-4A53-B46C-8FCBEDA344AE}"/>
               </a:ext>
             </a:extLst>
           </p:cNvPr>
@@ -14791,7 +14566,7 @@
           <p:cNvPr id="41" name="">
             <a:extLst xmlns:a="http://schemas.openxmlformats.org/drawingml/2006/main">
               <a:ext uri="{FF2B5EF4-FFF2-40B4-BE49-F238E27FC236}">
-                <a16:creationId xmlns:a16="http://schemas.microsoft.com/office/drawing/2014/main" id="{333D4870-EF7A-4F62-A812-85F0EDF81983}"/>
+                <a16:creationId xmlns:a16="http://schemas.microsoft.com/office/drawing/2014/main" id="{B75EA2E6-668B-421D-9913-A9551503D35A}"/>
               </a:ext>
             </a:extLst>
           </p:cNvPr>
@@ -14826,7 +14601,7 @@
           <p:cNvPr id="42" name="">
             <a:extLst xmlns:a="http://schemas.openxmlformats.org/drawingml/2006/main">
               <a:ext uri="{FF2B5EF4-FFF2-40B4-BE49-F238E27FC236}">
-                <a16:creationId xmlns:a16="http://schemas.microsoft.com/office/drawing/2014/main" id="{39A28454-94BE-4DCA-B9D7-C39DFCCE6FA4}"/>
+                <a16:creationId xmlns:a16="http://schemas.microsoft.com/office/drawing/2014/main" id="{7DCEC619-7758-4FAC-AB6C-6D5B51628006}"/>
               </a:ext>
             </a:extLst>
           </p:cNvPr>
@@ -14861,7 +14636,7 @@
           <p:cNvPr id="43" name="">
             <a:extLst xmlns:a="http://schemas.openxmlformats.org/drawingml/2006/main">
               <a:ext uri="{FF2B5EF4-FFF2-40B4-BE49-F238E27FC236}">
-                <a16:creationId xmlns:a16="http://schemas.microsoft.com/office/drawing/2014/main" id="{BA1595D4-5EB8-4F6C-9954-9742A1C2238A}"/>
+                <a16:creationId xmlns:a16="http://schemas.microsoft.com/office/drawing/2014/main" id="{F2E0B718-2EE8-46B7-A47A-8827EC3114D5}"/>
               </a:ext>
             </a:extLst>
           </p:cNvPr>
@@ -14915,7 +14690,7 @@
           <p:cNvPr id="44" name="">
             <a:extLst xmlns:a="http://schemas.openxmlformats.org/drawingml/2006/main">
               <a:ext uri="{FF2B5EF4-FFF2-40B4-BE49-F238E27FC236}">
-                <a16:creationId xmlns:a16="http://schemas.microsoft.com/office/drawing/2014/main" id="{862FBD2F-264B-4747-B6EE-28F7CF636CF2}"/>
+                <a16:creationId xmlns:a16="http://schemas.microsoft.com/office/drawing/2014/main" id="{29D6D26E-E0D9-483E-9184-CE94EF498588}"/>
               </a:ext>
             </a:extLst>
           </p:cNvPr>
@@ -14973,7 +14748,7 @@
           <p:cNvPr id="45" name="">
             <a:extLst xmlns:a="http://schemas.openxmlformats.org/drawingml/2006/main">
               <a:ext uri="{FF2B5EF4-FFF2-40B4-BE49-F238E27FC236}">
-                <a16:creationId xmlns:a16="http://schemas.microsoft.com/office/drawing/2014/main" id="{D39127B8-E992-42B3-A382-03B3C22A08D1}"/>
+                <a16:creationId xmlns:a16="http://schemas.microsoft.com/office/drawing/2014/main" id="{018582C1-0C78-4369-99AD-92144B125CBE}"/>
               </a:ext>
             </a:extLst>
           </p:cNvPr>
@@ -15048,7 +14823,7 @@
           <p:cNvPr id="46" name="">
             <a:extLst xmlns:a="http://schemas.openxmlformats.org/drawingml/2006/main">
               <a:ext uri="{FF2B5EF4-FFF2-40B4-BE49-F238E27FC236}">
-                <a16:creationId xmlns:a16="http://schemas.microsoft.com/office/drawing/2014/main" id="{02F2CF84-B4DC-4350-9D28-6A2CBF70CB5B}"/>
+                <a16:creationId xmlns:a16="http://schemas.microsoft.com/office/drawing/2014/main" id="{F664B76E-B2E6-4450-B188-B1D01B842289}"/>
               </a:ext>
             </a:extLst>
           </p:cNvPr>
@@ -15083,7 +14858,7 @@
           <p:cNvPr id="47" name="">
             <a:extLst xmlns:a="http://schemas.openxmlformats.org/drawingml/2006/main">
               <a:ext uri="{FF2B5EF4-FFF2-40B4-BE49-F238E27FC236}">
-                <a16:creationId xmlns:a16="http://schemas.microsoft.com/office/drawing/2014/main" id="{730ACDA6-CFD8-485E-A352-BDE500F1C5B0}"/>
+                <a16:creationId xmlns:a16="http://schemas.microsoft.com/office/drawing/2014/main" id="{99E5139C-CE5A-4C98-B18D-232FAB59F781}"/>
               </a:ext>
             </a:extLst>
           </p:cNvPr>
@@ -15118,7 +14893,7 @@
           <p:cNvPr id="48" name="">
             <a:extLst xmlns:a="http://schemas.openxmlformats.org/drawingml/2006/main">
               <a:ext uri="{FF2B5EF4-FFF2-40B4-BE49-F238E27FC236}">
-                <a16:creationId xmlns:a16="http://schemas.microsoft.com/office/drawing/2014/main" id="{F622C5D6-C983-420B-BAAB-150AFEC93B3A}"/>
+                <a16:creationId xmlns:a16="http://schemas.microsoft.com/office/drawing/2014/main" id="{B7C9A656-35E7-4EB3-BD06-8571E5F7FEC8}"/>
               </a:ext>
             </a:extLst>
           </p:cNvPr>
@@ -15153,7 +14928,7 @@
           <p:cNvPr id="49" name="">
             <a:extLst xmlns:a="http://schemas.openxmlformats.org/drawingml/2006/main">
               <a:ext uri="{FF2B5EF4-FFF2-40B4-BE49-F238E27FC236}">
-                <a16:creationId xmlns:a16="http://schemas.microsoft.com/office/drawing/2014/main" id="{6470B97F-9E31-4D6D-8507-CFF28BD6BC24}"/>
+                <a16:creationId xmlns:a16="http://schemas.microsoft.com/office/drawing/2014/main" id="{69486279-B779-4F1C-8731-D1A3435E9A12}"/>
               </a:ext>
             </a:extLst>
           </p:cNvPr>
@@ -15188,7 +14963,7 @@
           <p:cNvPr id="50" name="">
             <a:extLst xmlns:a="http://schemas.openxmlformats.org/drawingml/2006/main">
               <a:ext uri="{FF2B5EF4-FFF2-40B4-BE49-F238E27FC236}">
-                <a16:creationId xmlns:a16="http://schemas.microsoft.com/office/drawing/2014/main" id="{73DF7EF1-1037-466A-812E-CCA35177C923}"/>
+                <a16:creationId xmlns:a16="http://schemas.microsoft.com/office/drawing/2014/main" id="{CDE24545-0972-46F0-A477-C208C7C97C81}"/>
               </a:ext>
             </a:extLst>
           </p:cNvPr>
@@ -15223,7 +14998,7 @@
           <p:cNvPr id="51" name="">
             <a:extLst xmlns:a="http://schemas.openxmlformats.org/drawingml/2006/main">
               <a:ext uri="{FF2B5EF4-FFF2-40B4-BE49-F238E27FC236}">
-                <a16:creationId xmlns:a16="http://schemas.microsoft.com/office/drawing/2014/main" id="{8290C660-0B70-4837-91B6-95A275F77D58}"/>
+                <a16:creationId xmlns:a16="http://schemas.microsoft.com/office/drawing/2014/main" id="{0B2DB7CE-44ED-4EFF-962B-F517355A6F2A}"/>
               </a:ext>
             </a:extLst>
           </p:cNvPr>
@@ -15258,7 +15033,7 @@
           <p:cNvPr id="52" name="">
             <a:extLst xmlns:a="http://schemas.openxmlformats.org/drawingml/2006/main">
               <a:ext uri="{FF2B5EF4-FFF2-40B4-BE49-F238E27FC236}">
-                <a16:creationId xmlns:a16="http://schemas.microsoft.com/office/drawing/2014/main" id="{2B4C639A-DEC6-4E49-86F9-761D3149CA62}"/>
+                <a16:creationId xmlns:a16="http://schemas.microsoft.com/office/drawing/2014/main" id="{D682F3DB-644C-4432-9C6F-D04E8E005BD2}"/>
               </a:ext>
             </a:extLst>
           </p:cNvPr>
@@ -15316,7 +15091,7 @@
           <p:cNvPr id="53" name="">
             <a:extLst xmlns:a="http://schemas.openxmlformats.org/drawingml/2006/main">
               <a:ext uri="{FF2B5EF4-FFF2-40B4-BE49-F238E27FC236}">
-                <a16:creationId xmlns:a16="http://schemas.microsoft.com/office/drawing/2014/main" id="{870F9015-460E-441B-9D72-5A941045BAD7}"/>
+                <a16:creationId xmlns:a16="http://schemas.microsoft.com/office/drawing/2014/main" id="{1F099B62-C5C1-4E6F-AC55-0D70557A5942}"/>
               </a:ext>
             </a:extLst>
           </p:cNvPr>
@@ -15351,7 +15126,7 @@
           <p:cNvPr id="54" name="">
             <a:extLst xmlns:a="http://schemas.openxmlformats.org/drawingml/2006/main">
               <a:ext uri="{FF2B5EF4-FFF2-40B4-BE49-F238E27FC236}">
-                <a16:creationId xmlns:a16="http://schemas.microsoft.com/office/drawing/2014/main" id="{4C2B7065-E02D-441D-A460-CFD982A4A94E}"/>
+                <a16:creationId xmlns:a16="http://schemas.microsoft.com/office/drawing/2014/main" id="{4E308F91-27F3-4C46-B522-0129E8EFDC90}"/>
               </a:ext>
             </a:extLst>
           </p:cNvPr>
@@ -15409,7 +15184,7 @@
           <p:cNvPr id="55" name="">
             <a:extLst xmlns:a="http://schemas.openxmlformats.org/drawingml/2006/main">
               <a:ext uri="{FF2B5EF4-FFF2-40B4-BE49-F238E27FC236}">
-                <a16:creationId xmlns:a16="http://schemas.microsoft.com/office/drawing/2014/main" id="{B027DC83-11BD-4905-AFA2-F5D775EE9E3E}"/>
+                <a16:creationId xmlns:a16="http://schemas.microsoft.com/office/drawing/2014/main" id="{F74730F4-F747-4314-874C-7D9C89A173C8}"/>
               </a:ext>
             </a:extLst>
           </p:cNvPr>
@@ -15446,7 +15221,7 @@
           <p:cNvPr id="56" name="">
             <a:extLst xmlns:a="http://schemas.openxmlformats.org/drawingml/2006/main">
               <a:ext uri="{FF2B5EF4-FFF2-40B4-BE49-F238E27FC236}">
-                <a16:creationId xmlns:a16="http://schemas.microsoft.com/office/drawing/2014/main" id="{010FEF97-CCAB-49F7-87AF-001582B6ED18}"/>
+                <a16:creationId xmlns:a16="http://schemas.microsoft.com/office/drawing/2014/main" id="{C287B9E1-9753-4912-AE3B-242985B2D81E}"/>
               </a:ext>
             </a:extLst>
           </p:cNvPr>
@@ -15481,7 +15256,7 @@
           <p:cNvPr id="57" name="">
             <a:extLst xmlns:a="http://schemas.openxmlformats.org/drawingml/2006/main">
               <a:ext uri="{FF2B5EF4-FFF2-40B4-BE49-F238E27FC236}">
-                <a16:creationId xmlns:a16="http://schemas.microsoft.com/office/drawing/2014/main" id="{3D8E09D7-22E7-4A32-8D3C-1856F417CF52}"/>
+                <a16:creationId xmlns:a16="http://schemas.microsoft.com/office/drawing/2014/main" id="{8D153683-9705-4ADD-BEC6-A71649399971}"/>
               </a:ext>
             </a:extLst>
           </p:cNvPr>
@@ -15539,7 +15314,7 @@
           <p:cNvPr id="58" name="">
             <a:extLst xmlns:a="http://schemas.openxmlformats.org/drawingml/2006/main">
               <a:ext uri="{FF2B5EF4-FFF2-40B4-BE49-F238E27FC236}">
-                <a16:creationId xmlns:a16="http://schemas.microsoft.com/office/drawing/2014/main" id="{FF8AC238-82F5-495D-BB73-64DFD667CF12}"/>
+                <a16:creationId xmlns:a16="http://schemas.microsoft.com/office/drawing/2014/main" id="{C1FDF736-8F01-4816-91AE-3561F6511A00}"/>
               </a:ext>
             </a:extLst>
           </p:cNvPr>
@@ -15595,7 +15370,7 @@
     </p:spTree>
     <p:extLst>
       <p:ext uri="{BB962C8B-B14F-4D97-AF65-F5344CB8AC3E}">
-        <p14:creationId xmlns:p14="http://schemas.microsoft.com/office/powerpoint/2010/main" val="1216081184"/>
+        <p14:creationId xmlns:p14="http://schemas.microsoft.com/office/powerpoint/2010/main" val="282822978"/>
       </p:ext>
     </p:extLst>
   </p:cSld>
@@ -15626,7 +15401,7 @@
           <p:cNvPr id="1" name="Slide Number Placeholder 5">
             <a:extLst xmlns:a="http://schemas.openxmlformats.org/drawingml/2006/main">
               <a:ext uri="{FF2B5EF4-FFF2-40B4-BE49-F238E27FC236}">
-                <a16:creationId xmlns:a16="http://schemas.microsoft.com/office/drawing/2014/main" id="{F572615B-7240-42F8-B48E-DAA8AA9FBBC2}"/>
+                <a16:creationId xmlns:a16="http://schemas.microsoft.com/office/drawing/2014/main" id="{38BDF79F-9F16-4FEE-B72E-1F506FE9EBEC}"/>
               </a:ext>
             </a:extLst>
           </p:cNvPr>
@@ -15662,7 +15437,7 @@
           <p:nvPr/>
         </p:nvPicPr>
         <p:blipFill>
-          <a:blip xmlns:r="http://schemas.openxmlformats.org/officeDocument/2006/relationships" xmlns:a="http://schemas.openxmlformats.org/drawingml/2006/main" r:embed="Rc9b9c512b2654a94"/>
+          <a:blip xmlns:r="http://schemas.openxmlformats.org/officeDocument/2006/relationships" xmlns:a="http://schemas.openxmlformats.org/drawingml/2006/main" r:embed="R57d977ec12ed4227"/>
           <a:srcRect xmlns:a="http://schemas.openxmlformats.org/drawingml/2006/main" l="0" t="21875" r="0" b="21875"/>
           <a:stretch xmlns:a="http://schemas.openxmlformats.org/drawingml/2006/main">
             <a:fillRect l="0" t="0" r="0" b="0"/>
@@ -15683,7 +15458,7 @@
           <p:cNvPr id="3" name="">
             <a:extLst xmlns:a="http://schemas.openxmlformats.org/drawingml/2006/main">
               <a:ext uri="{FF2B5EF4-FFF2-40B4-BE49-F238E27FC236}">
-                <a16:creationId xmlns:a16="http://schemas.microsoft.com/office/drawing/2014/main" id="{32004F92-415F-42E2-9A59-C34138418E54}"/>
+                <a16:creationId xmlns:a16="http://schemas.microsoft.com/office/drawing/2014/main" id="{EF5B2FFD-362C-4FC6-A498-D78B138C909F}"/>
               </a:ext>
             </a:extLst>
           </p:cNvPr>
@@ -15718,7 +15493,7 @@
           <p:cNvPr id="4" name="">
             <a:extLst xmlns:a="http://schemas.openxmlformats.org/drawingml/2006/main">
               <a:ext uri="{FF2B5EF4-FFF2-40B4-BE49-F238E27FC236}">
-                <a16:creationId xmlns:a16="http://schemas.microsoft.com/office/drawing/2014/main" id="{A78A09A3-5E14-481A-866C-DC86D490093E}"/>
+                <a16:creationId xmlns:a16="http://schemas.microsoft.com/office/drawing/2014/main" id="{45362FD2-715C-44D1-89BF-10960BFB871D}"/>
               </a:ext>
             </a:extLst>
           </p:cNvPr>
@@ -15753,7 +15528,7 @@
           <p:cNvPr id="5" name="">
             <a:extLst xmlns:a="http://schemas.openxmlformats.org/drawingml/2006/main">
               <a:ext uri="{FF2B5EF4-FFF2-40B4-BE49-F238E27FC236}">
-                <a16:creationId xmlns:a16="http://schemas.microsoft.com/office/drawing/2014/main" id="{722681E2-6E28-469F-8658-5AE991DB98A6}"/>
+                <a16:creationId xmlns:a16="http://schemas.microsoft.com/office/drawing/2014/main" id="{70937945-E060-48D6-AEFD-3661DFA77FDF}"/>
               </a:ext>
             </a:extLst>
           </p:cNvPr>
@@ -15790,7 +15565,7 @@
           <p:cNvPr id="6" name="">
             <a:extLst xmlns:a="http://schemas.openxmlformats.org/drawingml/2006/main">
               <a:ext uri="{FF2B5EF4-FFF2-40B4-BE49-F238E27FC236}">
-                <a16:creationId xmlns:a16="http://schemas.microsoft.com/office/drawing/2014/main" id="{40BBCAF9-A756-48EF-A310-EF510C7E8B6E}"/>
+                <a16:creationId xmlns:a16="http://schemas.microsoft.com/office/drawing/2014/main" id="{8CF7672A-B8FC-4D68-8DF9-097DC65A941F}"/>
               </a:ext>
             </a:extLst>
           </p:cNvPr>
@@ -15827,7 +15602,7 @@
           <p:cNvPr id="7" name="">
             <a:extLst xmlns:a="http://schemas.openxmlformats.org/drawingml/2006/main">
               <a:ext uri="{FF2B5EF4-FFF2-40B4-BE49-F238E27FC236}">
-                <a16:creationId xmlns:a16="http://schemas.microsoft.com/office/drawing/2014/main" id="{AF3A3600-EFEC-4169-9175-706F98B1FBD3}"/>
+                <a16:creationId xmlns:a16="http://schemas.microsoft.com/office/drawing/2014/main" id="{999F4448-BE64-45D8-B6A5-FDD80AA93F35}"/>
               </a:ext>
             </a:extLst>
           </p:cNvPr>
@@ -15864,7 +15639,7 @@
           <p:cNvPr id="8" name="">
             <a:extLst xmlns:a="http://schemas.openxmlformats.org/drawingml/2006/main">
               <a:ext uri="{FF2B5EF4-FFF2-40B4-BE49-F238E27FC236}">
-                <a16:creationId xmlns:a16="http://schemas.microsoft.com/office/drawing/2014/main" id="{86316A2E-F754-4B62-A7A0-5AF9C39DB54A}"/>
+                <a16:creationId xmlns:a16="http://schemas.microsoft.com/office/drawing/2014/main" id="{2018F5E5-349D-421F-A8A0-56BA9BF5A082}"/>
               </a:ext>
             </a:extLst>
           </p:cNvPr>
@@ -15901,7 +15676,7 @@
           <p:cNvPr id="9" name="">
             <a:extLst xmlns:a="http://schemas.openxmlformats.org/drawingml/2006/main">
               <a:ext uri="{FF2B5EF4-FFF2-40B4-BE49-F238E27FC236}">
-                <a16:creationId xmlns:a16="http://schemas.microsoft.com/office/drawing/2014/main" id="{1EE3C384-1FD1-468E-8F0B-C4A5CE5A607E}"/>
+                <a16:creationId xmlns:a16="http://schemas.microsoft.com/office/drawing/2014/main" id="{EE1FC54F-21A0-49FD-9A39-6668A2BB6A02}"/>
               </a:ext>
             </a:extLst>
           </p:cNvPr>
@@ -15959,7 +15734,7 @@
           <p:cNvPr id="10" name="">
             <a:extLst xmlns:a="http://schemas.openxmlformats.org/drawingml/2006/main">
               <a:ext uri="{FF2B5EF4-FFF2-40B4-BE49-F238E27FC236}">
-                <a16:creationId xmlns:a16="http://schemas.microsoft.com/office/drawing/2014/main" id="{FFB8FDF8-A87B-4F0B-9EA5-F22C89ED2AB3}"/>
+                <a16:creationId xmlns:a16="http://schemas.microsoft.com/office/drawing/2014/main" id="{E3A54548-AB3D-4B34-AD73-2796C7BA8644}"/>
               </a:ext>
             </a:extLst>
           </p:cNvPr>
@@ -16017,7 +15792,7 @@
           <p:cNvPr id="11" name="">
             <a:extLst xmlns:a="http://schemas.openxmlformats.org/drawingml/2006/main">
               <a:ext uri="{FF2B5EF4-FFF2-40B4-BE49-F238E27FC236}">
-                <a16:creationId xmlns:a16="http://schemas.microsoft.com/office/drawing/2014/main" id="{C1704061-88DF-43F7-92EF-0F8DAC34B0FE}"/>
+                <a16:creationId xmlns:a16="http://schemas.microsoft.com/office/drawing/2014/main" id="{F1AE3A78-3CBE-4209-A7AD-50FDFA4775B7}"/>
               </a:ext>
             </a:extLst>
           </p:cNvPr>
@@ -16052,7 +15827,7 @@
           <p:cNvPr id="12" name="">
             <a:extLst xmlns:a="http://schemas.openxmlformats.org/drawingml/2006/main">
               <a:ext uri="{FF2B5EF4-FFF2-40B4-BE49-F238E27FC236}">
-                <a16:creationId xmlns:a16="http://schemas.microsoft.com/office/drawing/2014/main" id="{53853356-E0CB-4D50-ADF2-70D1698BFE46}"/>
+                <a16:creationId xmlns:a16="http://schemas.microsoft.com/office/drawing/2014/main" id="{5B4F5D7E-9CDA-4E29-8600-37074BC150E2}"/>
               </a:ext>
             </a:extLst>
           </p:cNvPr>
@@ -16085,7 +15860,7 @@
           <p:cNvPr id="13" name="">
             <a:extLst xmlns:a="http://schemas.openxmlformats.org/drawingml/2006/main">
               <a:ext uri="{FF2B5EF4-FFF2-40B4-BE49-F238E27FC236}">
-                <a16:creationId xmlns:a16="http://schemas.microsoft.com/office/drawing/2014/main" id="{D7169F43-DA1B-463A-8AE6-7A98383869B4}"/>
+                <a16:creationId xmlns:a16="http://schemas.microsoft.com/office/drawing/2014/main" id="{1F8D2F0E-ADC4-4AFF-AC70-7DBB2D61A085}"/>
               </a:ext>
             </a:extLst>
           </p:cNvPr>
@@ -16143,82 +15918,7 @@
           <p:cNvPr id="14" name="">
             <a:extLst xmlns:a="http://schemas.openxmlformats.org/drawingml/2006/main">
               <a:ext uri="{FF2B5EF4-FFF2-40B4-BE49-F238E27FC236}">
-                <a16:creationId xmlns:a16="http://schemas.microsoft.com/office/drawing/2014/main" id="{22AB0108-1875-4C15-9016-C5F95409A78E}"/>
-              </a:ext>
-            </a:extLst>
-          </p:cNvPr>
-          <p:cNvSpPr>
-            <a:spLocks xmlns:a="http://schemas.openxmlformats.org/drawingml/2006/main" noGrp="1"/>
-          </p:cNvSpPr>
-          <p:nvPr/>
-        </p:nvSpPr>
-        <p:spPr>
-          <a:xfrm xmlns:a="http://schemas.openxmlformats.org/drawingml/2006/main">
-            <a:off x="628650" y="2038350"/>
-            <a:ext cx="6858000" cy="628650"/>
-          </a:xfrm>
-          <a:prstGeom xmlns:a="http://schemas.openxmlformats.org/drawingml/2006/main" prst="rect">
-            <a:avLst/>
-          </a:prstGeom>
-          <a:solidFill xmlns:a="http://schemas.openxmlformats.org/drawingml/2006/main">
-            <a:srgbClr val="000000">
-              <a:alpha val="0"/>
-            </a:srgbClr>
-          </a:solidFill>
-          <a:ln xmlns:a="http://schemas.openxmlformats.org/drawingml/2006/main" w="0">
-            <a:solidFill>
-              <a:srgbClr val="000000">
-                <a:alpha val="0"/>
-              </a:srgbClr>
-            </a:solidFill>
-            <a:prstDash val="solid"/>
-          </a:ln>
-        </p:spPr>
-        <p:txBody>
-          <a:bodyPr xmlns:a="http://schemas.openxmlformats.org/drawingml/2006/main" lIns="0" tIns="0" rIns="0" bIns="0" anchor="t"/>
-          <a:lstStyle xmlns:a="http://schemas.openxmlformats.org/drawingml/2006/main"/>
-          <a:p xmlns:a="http://schemas.openxmlformats.org/drawingml/2006/main">
-            <a:pPr algn="l">
-              <a:defRPr sz="1350" b="0">
-                <a:solidFill>
-                  <a:srgbClr val="344146"/>
-                </a:solidFill>
-              </a:defRPr>
-            </a:pPr>
-            <a:r>
-              <a:rPr sz="1350" b="0">
-                <a:solidFill>
-                  <a:srgbClr val="344146"/>
-                </a:solidFill>
-              </a:rPr>
-              <a:t>brain organoid protocol 비교는 한 축이 아니라,</a:t>
-            </a:r>
-          </a:p>
-          <a:p xmlns:a="http://schemas.openxmlformats.org/drawingml/2006/main">
-            <a:pPr algn="l">
-              <a:defRPr sz="1350" b="0">
-                <a:solidFill>
-                  <a:srgbClr val="344146"/>
-                </a:solidFill>
-              </a:defRPr>
-            </a:pPr>
-            <a:r>
-              <a:rPr sz="1350" b="0">
-                <a:solidFill>
-                  <a:srgbClr val="344146"/>
-                </a:solidFill>
-              </a:rPr>
-              <a:t>서로 다른 benchmark 축을 분리해서 봐야 했다.</a:t>
-            </a:r>
-          </a:p>
-        </p:txBody>
-      </p:sp>
-      <p:sp>
-        <p:nvSpPr>
-          <p:cNvPr id="15" name="">
-            <a:extLst xmlns:a="http://schemas.openxmlformats.org/drawingml/2006/main">
-              <a:ext uri="{FF2B5EF4-FFF2-40B4-BE49-F238E27FC236}">
-                <a16:creationId xmlns:a16="http://schemas.microsoft.com/office/drawing/2014/main" id="{227D716F-7A2B-4306-A780-ED1408B0C46D}"/>
+                <a16:creationId xmlns:a16="http://schemas.microsoft.com/office/drawing/2014/main" id="{17E0DC1A-8997-4FBF-B8C5-C1978D78901B}"/>
               </a:ext>
             </a:extLst>
           </p:cNvPr>
@@ -16252,10 +15952,10 @@
       </p:sp>
       <p:sp>
         <p:nvSpPr>
-          <p:cNvPr id="16" name="">
-            <a:extLst xmlns:a="http://schemas.openxmlformats.org/drawingml/2006/main">
-              <a:ext uri="{FF2B5EF4-FFF2-40B4-BE49-F238E27FC236}">
-                <a16:creationId xmlns:a16="http://schemas.microsoft.com/office/drawing/2014/main" id="{4EAC8082-9117-47B7-9A3A-8B4A14C39F97}"/>
+          <p:cNvPr id="15" name="">
+            <a:extLst xmlns:a="http://schemas.openxmlformats.org/drawingml/2006/main">
+              <a:ext uri="{FF2B5EF4-FFF2-40B4-BE49-F238E27FC236}">
+                <a16:creationId xmlns:a16="http://schemas.microsoft.com/office/drawing/2014/main" id="{B9F48D9E-A0E0-4570-9780-9CD6AF15AC05}"/>
               </a:ext>
             </a:extLst>
           </p:cNvPr>
@@ -16287,10 +15987,10 @@
       </p:sp>
       <p:sp>
         <p:nvSpPr>
-          <p:cNvPr id="17" name="">
-            <a:extLst xmlns:a="http://schemas.openxmlformats.org/drawingml/2006/main">
-              <a:ext uri="{FF2B5EF4-FFF2-40B4-BE49-F238E27FC236}">
-                <a16:creationId xmlns:a16="http://schemas.microsoft.com/office/drawing/2014/main" id="{14F24940-1DE4-4BBD-AD19-FBCD3F2170CB}"/>
+          <p:cNvPr id="16" name="">
+            <a:extLst xmlns:a="http://schemas.openxmlformats.org/drawingml/2006/main">
+              <a:ext uri="{FF2B5EF4-FFF2-40B4-BE49-F238E27FC236}">
+                <a16:creationId xmlns:a16="http://schemas.microsoft.com/office/drawing/2014/main" id="{337DBC74-EE0A-4F28-BA67-5C3C03F3F3D3}"/>
               </a:ext>
             </a:extLst>
           </p:cNvPr>
@@ -16345,10 +16045,10 @@
       </p:sp>
       <p:sp>
         <p:nvSpPr>
-          <p:cNvPr id="18" name="">
-            <a:extLst xmlns:a="http://schemas.openxmlformats.org/drawingml/2006/main">
-              <a:ext uri="{FF2B5EF4-FFF2-40B4-BE49-F238E27FC236}">
-                <a16:creationId xmlns:a16="http://schemas.microsoft.com/office/drawing/2014/main" id="{895EAF45-9293-4ED6-8364-B59FE634B2E4}"/>
+          <p:cNvPr id="17" name="">
+            <a:extLst xmlns:a="http://schemas.openxmlformats.org/drawingml/2006/main">
+              <a:ext uri="{FF2B5EF4-FFF2-40B4-BE49-F238E27FC236}">
+                <a16:creationId xmlns:a16="http://schemas.microsoft.com/office/drawing/2014/main" id="{25FE4692-8B58-47B7-A307-F1337756CBF6}"/>
               </a:ext>
             </a:extLst>
           </p:cNvPr>
@@ -16437,10 +16137,10 @@
       </p:sp>
       <p:sp>
         <p:nvSpPr>
-          <p:cNvPr id="19" name="">
-            <a:extLst xmlns:a="http://schemas.openxmlformats.org/drawingml/2006/main">
-              <a:ext uri="{FF2B5EF4-FFF2-40B4-BE49-F238E27FC236}">
-                <a16:creationId xmlns:a16="http://schemas.microsoft.com/office/drawing/2014/main" id="{360A3637-190A-4A9E-9292-4455F6B7D24F}"/>
+          <p:cNvPr id="18" name="">
+            <a:extLst xmlns:a="http://schemas.openxmlformats.org/drawingml/2006/main">
+              <a:ext uri="{FF2B5EF4-FFF2-40B4-BE49-F238E27FC236}">
+                <a16:creationId xmlns:a16="http://schemas.microsoft.com/office/drawing/2014/main" id="{0A080E2F-BDFF-48E4-96E2-91A91A2E7D86}"/>
               </a:ext>
             </a:extLst>
           </p:cNvPr>
@@ -16474,10 +16174,10 @@
       </p:sp>
       <p:sp>
         <p:nvSpPr>
-          <p:cNvPr id="20" name="">
-            <a:extLst xmlns:a="http://schemas.openxmlformats.org/drawingml/2006/main">
-              <a:ext uri="{FF2B5EF4-FFF2-40B4-BE49-F238E27FC236}">
-                <a16:creationId xmlns:a16="http://schemas.microsoft.com/office/drawing/2014/main" id="{5AD19BA8-4201-4F8E-B6ED-6A0EE04EDEFC}"/>
+          <p:cNvPr id="19" name="">
+            <a:extLst xmlns:a="http://schemas.openxmlformats.org/drawingml/2006/main">
+              <a:ext uri="{FF2B5EF4-FFF2-40B4-BE49-F238E27FC236}">
+                <a16:creationId xmlns:a16="http://schemas.microsoft.com/office/drawing/2014/main" id="{9C710924-9967-4B4D-A0E5-30CF671C8EDD}"/>
               </a:ext>
             </a:extLst>
           </p:cNvPr>
@@ -16509,10 +16209,10 @@
       </p:sp>
       <p:sp>
         <p:nvSpPr>
-          <p:cNvPr id="21" name="">
-            <a:extLst xmlns:a="http://schemas.openxmlformats.org/drawingml/2006/main">
-              <a:ext uri="{FF2B5EF4-FFF2-40B4-BE49-F238E27FC236}">
-                <a16:creationId xmlns:a16="http://schemas.microsoft.com/office/drawing/2014/main" id="{BC73D855-29EA-4441-A1BF-A372115A7072}"/>
+          <p:cNvPr id="20" name="">
+            <a:extLst xmlns:a="http://schemas.openxmlformats.org/drawingml/2006/main">
+              <a:ext uri="{FF2B5EF4-FFF2-40B4-BE49-F238E27FC236}">
+                <a16:creationId xmlns:a16="http://schemas.microsoft.com/office/drawing/2014/main" id="{F70D80D4-F639-46CC-ACA8-2C517D43FC69}"/>
               </a:ext>
             </a:extLst>
           </p:cNvPr>
@@ -16567,10 +16267,10 @@
       </p:sp>
       <p:sp>
         <p:nvSpPr>
-          <p:cNvPr id="22" name="">
-            <a:extLst xmlns:a="http://schemas.openxmlformats.org/drawingml/2006/main">
-              <a:ext uri="{FF2B5EF4-FFF2-40B4-BE49-F238E27FC236}">
-                <a16:creationId xmlns:a16="http://schemas.microsoft.com/office/drawing/2014/main" id="{E562D5D7-DFA1-41BA-8585-F4C900E65F58}"/>
+          <p:cNvPr id="21" name="">
+            <a:extLst xmlns:a="http://schemas.openxmlformats.org/drawingml/2006/main">
+              <a:ext uri="{FF2B5EF4-FFF2-40B4-BE49-F238E27FC236}">
+                <a16:creationId xmlns:a16="http://schemas.microsoft.com/office/drawing/2014/main" id="{C36BEBE7-B496-444B-940E-9597B2B36487}"/>
               </a:ext>
             </a:extLst>
           </p:cNvPr>
@@ -16659,10 +16359,10 @@
       </p:sp>
       <p:sp>
         <p:nvSpPr>
-          <p:cNvPr id="23" name="">
-            <a:extLst xmlns:a="http://schemas.openxmlformats.org/drawingml/2006/main">
-              <a:ext uri="{FF2B5EF4-FFF2-40B4-BE49-F238E27FC236}">
-                <a16:creationId xmlns:a16="http://schemas.microsoft.com/office/drawing/2014/main" id="{C93308F6-1401-447B-B627-03542D9A1D17}"/>
+          <p:cNvPr id="22" name="">
+            <a:extLst xmlns:a="http://schemas.openxmlformats.org/drawingml/2006/main">
+              <a:ext uri="{FF2B5EF4-FFF2-40B4-BE49-F238E27FC236}">
+                <a16:creationId xmlns:a16="http://schemas.microsoft.com/office/drawing/2014/main" id="{9FB2811E-0A9C-45AF-8BC6-2886CD7ACBE7}"/>
               </a:ext>
             </a:extLst>
           </p:cNvPr>
@@ -16696,10 +16396,10 @@
       </p:sp>
       <p:sp>
         <p:nvSpPr>
-          <p:cNvPr id="24" name="">
-            <a:extLst xmlns:a="http://schemas.openxmlformats.org/drawingml/2006/main">
-              <a:ext uri="{FF2B5EF4-FFF2-40B4-BE49-F238E27FC236}">
-                <a16:creationId xmlns:a16="http://schemas.microsoft.com/office/drawing/2014/main" id="{FE8F044C-6BCE-48AF-B347-04E46ECA591D}"/>
+          <p:cNvPr id="23" name="">
+            <a:extLst xmlns:a="http://schemas.openxmlformats.org/drawingml/2006/main">
+              <a:ext uri="{FF2B5EF4-FFF2-40B4-BE49-F238E27FC236}">
+                <a16:creationId xmlns:a16="http://schemas.microsoft.com/office/drawing/2014/main" id="{6ADD634C-EB1B-4F73-907B-607DF77F08DD}"/>
               </a:ext>
             </a:extLst>
           </p:cNvPr>
@@ -16731,10 +16431,10 @@
       </p:sp>
       <p:sp>
         <p:nvSpPr>
-          <p:cNvPr id="25" name="">
-            <a:extLst xmlns:a="http://schemas.openxmlformats.org/drawingml/2006/main">
-              <a:ext uri="{FF2B5EF4-FFF2-40B4-BE49-F238E27FC236}">
-                <a16:creationId xmlns:a16="http://schemas.microsoft.com/office/drawing/2014/main" id="{E1AE76EE-FD51-462C-9A8D-BC374886F06B}"/>
+          <p:cNvPr id="24" name="">
+            <a:extLst xmlns:a="http://schemas.openxmlformats.org/drawingml/2006/main">
+              <a:ext uri="{FF2B5EF4-FFF2-40B4-BE49-F238E27FC236}">
+                <a16:creationId xmlns:a16="http://schemas.microsoft.com/office/drawing/2014/main" id="{0A4280E9-AA02-496C-BFDF-08B940B8279D}"/>
               </a:ext>
             </a:extLst>
           </p:cNvPr>
@@ -16789,10 +16489,10 @@
       </p:sp>
       <p:sp>
         <p:nvSpPr>
-          <p:cNvPr id="26" name="">
-            <a:extLst xmlns:a="http://schemas.openxmlformats.org/drawingml/2006/main">
-              <a:ext uri="{FF2B5EF4-FFF2-40B4-BE49-F238E27FC236}">
-                <a16:creationId xmlns:a16="http://schemas.microsoft.com/office/drawing/2014/main" id="{FDCCA0AB-208F-4D3E-AEC5-3303168C3181}"/>
+          <p:cNvPr id="25" name="">
+            <a:extLst xmlns:a="http://schemas.openxmlformats.org/drawingml/2006/main">
+              <a:ext uri="{FF2B5EF4-FFF2-40B4-BE49-F238E27FC236}">
+                <a16:creationId xmlns:a16="http://schemas.microsoft.com/office/drawing/2014/main" id="{7685E2C3-195C-4064-A7E4-31F3DACFC6D7}"/>
               </a:ext>
             </a:extLst>
           </p:cNvPr>
@@ -16881,10 +16581,10 @@
       </p:sp>
       <p:sp>
         <p:nvSpPr>
-          <p:cNvPr id="27" name="">
-            <a:extLst xmlns:a="http://schemas.openxmlformats.org/drawingml/2006/main">
-              <a:ext uri="{FF2B5EF4-FFF2-40B4-BE49-F238E27FC236}">
-                <a16:creationId xmlns:a16="http://schemas.microsoft.com/office/drawing/2014/main" id="{D5F1BF66-A7ED-42AE-BBF7-B207476AE41A}"/>
+          <p:cNvPr id="26" name="">
+            <a:extLst xmlns:a="http://schemas.openxmlformats.org/drawingml/2006/main">
+              <a:ext uri="{FF2B5EF4-FFF2-40B4-BE49-F238E27FC236}">
+                <a16:creationId xmlns:a16="http://schemas.microsoft.com/office/drawing/2014/main" id="{AE44771C-D5F5-4FDA-BE17-8EE2E56FE9D1}"/>
               </a:ext>
             </a:extLst>
           </p:cNvPr>
@@ -16918,10 +16618,10 @@
       </p:sp>
       <p:sp>
         <p:nvSpPr>
-          <p:cNvPr id="28" name="">
-            <a:extLst xmlns:a="http://schemas.openxmlformats.org/drawingml/2006/main">
-              <a:ext uri="{FF2B5EF4-FFF2-40B4-BE49-F238E27FC236}">
-                <a16:creationId xmlns:a16="http://schemas.microsoft.com/office/drawing/2014/main" id="{30BB752E-0D14-48FA-A214-589D3FE369C3}"/>
+          <p:cNvPr id="27" name="">
+            <a:extLst xmlns:a="http://schemas.openxmlformats.org/drawingml/2006/main">
+              <a:ext uri="{FF2B5EF4-FFF2-40B4-BE49-F238E27FC236}">
+                <a16:creationId xmlns:a16="http://schemas.microsoft.com/office/drawing/2014/main" id="{D3F4D85E-B97B-4415-A3A3-BE9122E601E1}"/>
               </a:ext>
             </a:extLst>
           </p:cNvPr>
@@ -16953,10 +16653,10 @@
       </p:sp>
       <p:sp>
         <p:nvSpPr>
-          <p:cNvPr id="29" name="">
-            <a:extLst xmlns:a="http://schemas.openxmlformats.org/drawingml/2006/main">
-              <a:ext uri="{FF2B5EF4-FFF2-40B4-BE49-F238E27FC236}">
-                <a16:creationId xmlns:a16="http://schemas.microsoft.com/office/drawing/2014/main" id="{4CB3EC3B-C387-4ADA-AE00-0042E1519A4A}"/>
+          <p:cNvPr id="28" name="">
+            <a:extLst xmlns:a="http://schemas.openxmlformats.org/drawingml/2006/main">
+              <a:ext uri="{FF2B5EF4-FFF2-40B4-BE49-F238E27FC236}">
+                <a16:creationId xmlns:a16="http://schemas.microsoft.com/office/drawing/2014/main" id="{31ACB868-46AB-454B-BC04-60038059FD34}"/>
               </a:ext>
             </a:extLst>
           </p:cNvPr>
@@ -17011,10 +16711,10 @@
       </p:sp>
       <p:sp>
         <p:nvSpPr>
-          <p:cNvPr id="30" name="">
-            <a:extLst xmlns:a="http://schemas.openxmlformats.org/drawingml/2006/main">
-              <a:ext uri="{FF2B5EF4-FFF2-40B4-BE49-F238E27FC236}">
-                <a16:creationId xmlns:a16="http://schemas.microsoft.com/office/drawing/2014/main" id="{D767F4AB-D2B6-4D89-8330-02E7CF15C8A2}"/>
+          <p:cNvPr id="29" name="">
+            <a:extLst xmlns:a="http://schemas.openxmlformats.org/drawingml/2006/main">
+              <a:ext uri="{FF2B5EF4-FFF2-40B4-BE49-F238E27FC236}">
+                <a16:creationId xmlns:a16="http://schemas.microsoft.com/office/drawing/2014/main" id="{9C222BFF-5AAE-474D-95B8-E70E5EC651AF}"/>
               </a:ext>
             </a:extLst>
           </p:cNvPr>
@@ -17086,10 +16786,10 @@
       </p:sp>
       <p:sp>
         <p:nvSpPr>
-          <p:cNvPr id="31" name="">
-            <a:extLst xmlns:a="http://schemas.openxmlformats.org/drawingml/2006/main">
-              <a:ext uri="{FF2B5EF4-FFF2-40B4-BE49-F238E27FC236}">
-                <a16:creationId xmlns:a16="http://schemas.microsoft.com/office/drawing/2014/main" id="{5642FF5A-170A-457D-8D78-A75451615C68}"/>
+          <p:cNvPr id="30" name="">
+            <a:extLst xmlns:a="http://schemas.openxmlformats.org/drawingml/2006/main">
+              <a:ext uri="{FF2B5EF4-FFF2-40B4-BE49-F238E27FC236}">
+                <a16:creationId xmlns:a16="http://schemas.microsoft.com/office/drawing/2014/main" id="{18A78621-996F-408A-BD2F-E48DFB27E780}"/>
               </a:ext>
             </a:extLst>
           </p:cNvPr>
@@ -17123,10 +16823,10 @@
       </p:sp>
       <p:sp>
         <p:nvSpPr>
-          <p:cNvPr id="32" name="">
-            <a:extLst xmlns:a="http://schemas.openxmlformats.org/drawingml/2006/main">
-              <a:ext uri="{FF2B5EF4-FFF2-40B4-BE49-F238E27FC236}">
-                <a16:creationId xmlns:a16="http://schemas.microsoft.com/office/drawing/2014/main" id="{289ECE6A-40BF-4D5E-9B49-4203BBDAF30F}"/>
+          <p:cNvPr id="31" name="">
+            <a:extLst xmlns:a="http://schemas.openxmlformats.org/drawingml/2006/main">
+              <a:ext uri="{FF2B5EF4-FFF2-40B4-BE49-F238E27FC236}">
+                <a16:creationId xmlns:a16="http://schemas.microsoft.com/office/drawing/2014/main" id="{D949192C-4532-4E54-B738-E4ED4A6D0677}"/>
               </a:ext>
             </a:extLst>
           </p:cNvPr>
@@ -17158,10 +16858,10 @@
       </p:sp>
       <p:sp>
         <p:nvSpPr>
-          <p:cNvPr id="33" name="">
-            <a:extLst xmlns:a="http://schemas.openxmlformats.org/drawingml/2006/main">
-              <a:ext uri="{FF2B5EF4-FFF2-40B4-BE49-F238E27FC236}">
-                <a16:creationId xmlns:a16="http://schemas.microsoft.com/office/drawing/2014/main" id="{2717C923-77C2-437A-8DB8-5629231D010A}"/>
+          <p:cNvPr id="32" name="">
+            <a:extLst xmlns:a="http://schemas.openxmlformats.org/drawingml/2006/main">
+              <a:ext uri="{FF2B5EF4-FFF2-40B4-BE49-F238E27FC236}">
+                <a16:creationId xmlns:a16="http://schemas.microsoft.com/office/drawing/2014/main" id="{3E216671-517C-4CBB-B726-7F52C052457D}"/>
               </a:ext>
             </a:extLst>
           </p:cNvPr>
@@ -17216,10 +16916,10 @@
       </p:sp>
       <p:sp>
         <p:nvSpPr>
-          <p:cNvPr id="34" name="">
-            <a:extLst xmlns:a="http://schemas.openxmlformats.org/drawingml/2006/main">
-              <a:ext uri="{FF2B5EF4-FFF2-40B4-BE49-F238E27FC236}">
-                <a16:creationId xmlns:a16="http://schemas.microsoft.com/office/drawing/2014/main" id="{BFEEE087-ACC2-4DCE-A98A-FE5697CD50F3}"/>
+          <p:cNvPr id="33" name="">
+            <a:extLst xmlns:a="http://schemas.openxmlformats.org/drawingml/2006/main">
+              <a:ext uri="{FF2B5EF4-FFF2-40B4-BE49-F238E27FC236}">
+                <a16:creationId xmlns:a16="http://schemas.microsoft.com/office/drawing/2014/main" id="{FDACCBAD-40CF-4EE2-B560-67EDF08C85B7}"/>
               </a:ext>
             </a:extLst>
           </p:cNvPr>
@@ -17291,10 +16991,10 @@
       </p:sp>
       <p:sp>
         <p:nvSpPr>
-          <p:cNvPr id="35" name="">
-            <a:extLst xmlns:a="http://schemas.openxmlformats.org/drawingml/2006/main">
-              <a:ext uri="{FF2B5EF4-FFF2-40B4-BE49-F238E27FC236}">
-                <a16:creationId xmlns:a16="http://schemas.microsoft.com/office/drawing/2014/main" id="{EBE9D69B-D0EB-4D07-8919-3CE8EC0F0E2B}"/>
+          <p:cNvPr id="34" name="">
+            <a:extLst xmlns:a="http://schemas.openxmlformats.org/drawingml/2006/main">
+              <a:ext uri="{FF2B5EF4-FFF2-40B4-BE49-F238E27FC236}">
+                <a16:creationId xmlns:a16="http://schemas.microsoft.com/office/drawing/2014/main" id="{EA2FCB23-48EB-47D7-8B63-A24274CCB32D}"/>
               </a:ext>
             </a:extLst>
           </p:cNvPr>
@@ -17326,10 +17026,10 @@
       </p:sp>
       <p:sp>
         <p:nvSpPr>
-          <p:cNvPr id="36" name="">
-            <a:extLst xmlns:a="http://schemas.openxmlformats.org/drawingml/2006/main">
-              <a:ext uri="{FF2B5EF4-FFF2-40B4-BE49-F238E27FC236}">
-                <a16:creationId xmlns:a16="http://schemas.microsoft.com/office/drawing/2014/main" id="{CD24E894-C10C-457A-9801-CE39D58948D5}"/>
+          <p:cNvPr id="35" name="">
+            <a:extLst xmlns:a="http://schemas.openxmlformats.org/drawingml/2006/main">
+              <a:ext uri="{FF2B5EF4-FFF2-40B4-BE49-F238E27FC236}">
+                <a16:creationId xmlns:a16="http://schemas.microsoft.com/office/drawing/2014/main" id="{6C89C5D3-F06D-455E-9CE5-02E7393D1D9A}"/>
               </a:ext>
             </a:extLst>
           </p:cNvPr>
@@ -17361,10 +17061,10 @@
       </p:sp>
       <p:sp>
         <p:nvSpPr>
-          <p:cNvPr id="37" name="">
-            <a:extLst xmlns:a="http://schemas.openxmlformats.org/drawingml/2006/main">
-              <a:ext uri="{FF2B5EF4-FFF2-40B4-BE49-F238E27FC236}">
-                <a16:creationId xmlns:a16="http://schemas.microsoft.com/office/drawing/2014/main" id="{2C3D55BF-8A16-4E5C-98D0-142C1D302747}"/>
+          <p:cNvPr id="36" name="">
+            <a:extLst xmlns:a="http://schemas.openxmlformats.org/drawingml/2006/main">
+              <a:ext uri="{FF2B5EF4-FFF2-40B4-BE49-F238E27FC236}">
+                <a16:creationId xmlns:a16="http://schemas.microsoft.com/office/drawing/2014/main" id="{F7D79A1D-1653-465C-AF14-ED992B123459}"/>
               </a:ext>
             </a:extLst>
           </p:cNvPr>
@@ -17419,10 +17119,10 @@
       </p:sp>
       <p:sp>
         <p:nvSpPr>
-          <p:cNvPr id="38" name="">
-            <a:extLst xmlns:a="http://schemas.openxmlformats.org/drawingml/2006/main">
-              <a:ext uri="{FF2B5EF4-FFF2-40B4-BE49-F238E27FC236}">
-                <a16:creationId xmlns:a16="http://schemas.microsoft.com/office/drawing/2014/main" id="{8B04D470-EB53-4F1A-A6CE-D980852B12D7}"/>
+          <p:cNvPr id="37" name="">
+            <a:extLst xmlns:a="http://schemas.openxmlformats.org/drawingml/2006/main">
+              <a:ext uri="{FF2B5EF4-FFF2-40B4-BE49-F238E27FC236}">
+                <a16:creationId xmlns:a16="http://schemas.microsoft.com/office/drawing/2014/main" id="{36CA988D-02FE-458D-8A18-C70D1C2E58EF}"/>
               </a:ext>
             </a:extLst>
           </p:cNvPr>
@@ -17478,7 +17178,7 @@
     </p:spTree>
     <p:extLst>
       <p:ext uri="{BB962C8B-B14F-4D97-AF65-F5344CB8AC3E}">
-        <p14:creationId xmlns:p14="http://schemas.microsoft.com/office/powerpoint/2010/main" val="11053188"/>
+        <p14:creationId xmlns:p14="http://schemas.microsoft.com/office/powerpoint/2010/main" val="1293279042"/>
       </p:ext>
     </p:extLst>
   </p:cSld>
@@ -17509,7 +17209,7 @@
           <p:cNvPr id="1" name="Slide Number Placeholder 5">
             <a:extLst xmlns:a="http://schemas.openxmlformats.org/drawingml/2006/main">
               <a:ext uri="{FF2B5EF4-FFF2-40B4-BE49-F238E27FC236}">
-                <a16:creationId xmlns:a16="http://schemas.microsoft.com/office/drawing/2014/main" id="{F572615B-7240-42F8-B48E-DAA8AA9FBBC2}"/>
+                <a16:creationId xmlns:a16="http://schemas.microsoft.com/office/drawing/2014/main" id="{38BDF79F-9F16-4FEE-B72E-1F506FE9EBEC}"/>
               </a:ext>
             </a:extLst>
           </p:cNvPr>
@@ -17545,7 +17245,7 @@
           <p:nvPr/>
         </p:nvPicPr>
         <p:blipFill>
-          <a:blip xmlns:r="http://schemas.openxmlformats.org/officeDocument/2006/relationships" xmlns:a="http://schemas.openxmlformats.org/drawingml/2006/main" r:embed="R51d94238d567431b"/>
+          <a:blip xmlns:r="http://schemas.openxmlformats.org/officeDocument/2006/relationships" xmlns:a="http://schemas.openxmlformats.org/drawingml/2006/main" r:embed="R823d20a8cf224c17"/>
           <a:srcRect xmlns:a="http://schemas.openxmlformats.org/drawingml/2006/main" l="0" t="21875" r="0" b="21875"/>
           <a:stretch xmlns:a="http://schemas.openxmlformats.org/drawingml/2006/main">
             <a:fillRect l="0" t="0" r="0" b="0"/>
@@ -17566,7 +17266,7 @@
           <p:cNvPr id="3" name="">
             <a:extLst xmlns:a="http://schemas.openxmlformats.org/drawingml/2006/main">
               <a:ext uri="{FF2B5EF4-FFF2-40B4-BE49-F238E27FC236}">
-                <a16:creationId xmlns:a16="http://schemas.microsoft.com/office/drawing/2014/main" id="{89720960-2A78-479D-9FA0-00E2B250F2EE}"/>
+                <a16:creationId xmlns:a16="http://schemas.microsoft.com/office/drawing/2014/main" id="{03A3B2FC-7E04-4C81-9C19-8F36EAB3664D}"/>
               </a:ext>
             </a:extLst>
           </p:cNvPr>
@@ -17601,7 +17301,7 @@
           <p:cNvPr id="4" name="">
             <a:extLst xmlns:a="http://schemas.openxmlformats.org/drawingml/2006/main">
               <a:ext uri="{FF2B5EF4-FFF2-40B4-BE49-F238E27FC236}">
-                <a16:creationId xmlns:a16="http://schemas.microsoft.com/office/drawing/2014/main" id="{5D63994D-F9A1-419A-A3BB-CFE1A09D22F1}"/>
+                <a16:creationId xmlns:a16="http://schemas.microsoft.com/office/drawing/2014/main" id="{8CFB26AB-0E37-4138-ADBF-A67B4EC436EA}"/>
               </a:ext>
             </a:extLst>
           </p:cNvPr>
@@ -17636,7 +17336,7 @@
           <p:cNvPr id="5" name="">
             <a:extLst xmlns:a="http://schemas.openxmlformats.org/drawingml/2006/main">
               <a:ext uri="{FF2B5EF4-FFF2-40B4-BE49-F238E27FC236}">
-                <a16:creationId xmlns:a16="http://schemas.microsoft.com/office/drawing/2014/main" id="{50C167D4-C762-4BDF-9CF9-80AD90FBA203}"/>
+                <a16:creationId xmlns:a16="http://schemas.microsoft.com/office/drawing/2014/main" id="{078455BF-50A2-4F63-8C37-D70BA49B4101}"/>
               </a:ext>
             </a:extLst>
           </p:cNvPr>
@@ -17673,7 +17373,7 @@
           <p:cNvPr id="6" name="">
             <a:extLst xmlns:a="http://schemas.openxmlformats.org/drawingml/2006/main">
               <a:ext uri="{FF2B5EF4-FFF2-40B4-BE49-F238E27FC236}">
-                <a16:creationId xmlns:a16="http://schemas.microsoft.com/office/drawing/2014/main" id="{A32B9C37-7E4E-4592-8EB0-7B8DE10E3BC9}"/>
+                <a16:creationId xmlns:a16="http://schemas.microsoft.com/office/drawing/2014/main" id="{E24D0F3C-EE6D-4E3B-B8E2-9697D20E460C}"/>
               </a:ext>
             </a:extLst>
           </p:cNvPr>
@@ -17710,7 +17410,7 @@
           <p:cNvPr id="7" name="">
             <a:extLst xmlns:a="http://schemas.openxmlformats.org/drawingml/2006/main">
               <a:ext uri="{FF2B5EF4-FFF2-40B4-BE49-F238E27FC236}">
-                <a16:creationId xmlns:a16="http://schemas.microsoft.com/office/drawing/2014/main" id="{66ADA70E-ADA9-46CC-96DF-8753EB28D261}"/>
+                <a16:creationId xmlns:a16="http://schemas.microsoft.com/office/drawing/2014/main" id="{04424ABB-304E-4045-BC3F-224521C5F6E9}"/>
               </a:ext>
             </a:extLst>
           </p:cNvPr>
@@ -17747,7 +17447,7 @@
           <p:cNvPr id="8" name="">
             <a:extLst xmlns:a="http://schemas.openxmlformats.org/drawingml/2006/main">
               <a:ext uri="{FF2B5EF4-FFF2-40B4-BE49-F238E27FC236}">
-                <a16:creationId xmlns:a16="http://schemas.microsoft.com/office/drawing/2014/main" id="{BC46D0E1-A9D1-401A-AEA5-D75908A0B489}"/>
+                <a16:creationId xmlns:a16="http://schemas.microsoft.com/office/drawing/2014/main" id="{88AE7738-7DA7-43BD-A9ED-A0C7C7F50CB2}"/>
               </a:ext>
             </a:extLst>
           </p:cNvPr>
@@ -17784,7 +17484,7 @@
           <p:cNvPr id="9" name="">
             <a:extLst xmlns:a="http://schemas.openxmlformats.org/drawingml/2006/main">
               <a:ext uri="{FF2B5EF4-FFF2-40B4-BE49-F238E27FC236}">
-                <a16:creationId xmlns:a16="http://schemas.microsoft.com/office/drawing/2014/main" id="{F06E7B0D-DEC7-45D6-90EE-E33790BCD7DB}"/>
+                <a16:creationId xmlns:a16="http://schemas.microsoft.com/office/drawing/2014/main" id="{3A6A833B-8FA5-452A-8378-A7C3A71662DA}"/>
               </a:ext>
             </a:extLst>
           </p:cNvPr>
@@ -17842,7 +17542,7 @@
           <p:cNvPr id="10" name="">
             <a:extLst xmlns:a="http://schemas.openxmlformats.org/drawingml/2006/main">
               <a:ext uri="{FF2B5EF4-FFF2-40B4-BE49-F238E27FC236}">
-                <a16:creationId xmlns:a16="http://schemas.microsoft.com/office/drawing/2014/main" id="{991F76B4-2175-44D0-8970-B1D071E4B62D}"/>
+                <a16:creationId xmlns:a16="http://schemas.microsoft.com/office/drawing/2014/main" id="{ED198204-E708-43C7-B764-C98D32012781}"/>
               </a:ext>
             </a:extLst>
           </p:cNvPr>
@@ -17900,7 +17600,7 @@
           <p:cNvPr id="11" name="">
             <a:extLst xmlns:a="http://schemas.openxmlformats.org/drawingml/2006/main">
               <a:ext uri="{FF2B5EF4-FFF2-40B4-BE49-F238E27FC236}">
-                <a16:creationId xmlns:a16="http://schemas.microsoft.com/office/drawing/2014/main" id="{E43D5C60-C27C-49FE-99ED-D4C36FF16B24}"/>
+                <a16:creationId xmlns:a16="http://schemas.microsoft.com/office/drawing/2014/main" id="{FC8E3C39-DD16-485A-9DD6-547BBA485999}"/>
               </a:ext>
             </a:extLst>
           </p:cNvPr>
@@ -17935,7 +17635,7 @@
           <p:cNvPr id="12" name="">
             <a:extLst xmlns:a="http://schemas.openxmlformats.org/drawingml/2006/main">
               <a:ext uri="{FF2B5EF4-FFF2-40B4-BE49-F238E27FC236}">
-                <a16:creationId xmlns:a16="http://schemas.microsoft.com/office/drawing/2014/main" id="{CB24C106-4F9C-4FD2-8AE9-53F3E0A59EFC}"/>
+                <a16:creationId xmlns:a16="http://schemas.microsoft.com/office/drawing/2014/main" id="{0F6F60E7-073B-476F-A101-6BCA0F4EE48F}"/>
               </a:ext>
             </a:extLst>
           </p:cNvPr>
@@ -17968,7 +17668,7 @@
           <p:cNvPr id="13" name="">
             <a:extLst xmlns:a="http://schemas.openxmlformats.org/drawingml/2006/main">
               <a:ext uri="{FF2B5EF4-FFF2-40B4-BE49-F238E27FC236}">
-                <a16:creationId xmlns:a16="http://schemas.microsoft.com/office/drawing/2014/main" id="{E639C652-699E-4FDA-B565-5CFC6E48718B}"/>
+                <a16:creationId xmlns:a16="http://schemas.microsoft.com/office/drawing/2014/main" id="{61DBD056-F313-49A1-B952-87F35DDA9C37}"/>
               </a:ext>
             </a:extLst>
           </p:cNvPr>
@@ -18043,82 +17743,7 @@
           <p:cNvPr id="14" name="">
             <a:extLst xmlns:a="http://schemas.openxmlformats.org/drawingml/2006/main">
               <a:ext uri="{FF2B5EF4-FFF2-40B4-BE49-F238E27FC236}">
-                <a16:creationId xmlns:a16="http://schemas.microsoft.com/office/drawing/2014/main" id="{C8B01CA2-8103-42B9-B0B3-B6B200DA9757}"/>
-              </a:ext>
-            </a:extLst>
-          </p:cNvPr>
-          <p:cNvSpPr>
-            <a:spLocks xmlns:a="http://schemas.openxmlformats.org/drawingml/2006/main" noGrp="1"/>
-          </p:cNvSpPr>
-          <p:nvPr/>
-        </p:nvSpPr>
-        <p:spPr>
-          <a:xfrm xmlns:a="http://schemas.openxmlformats.org/drawingml/2006/main">
-            <a:off x="628650" y="2038350"/>
-            <a:ext cx="6858000" cy="628650"/>
-          </a:xfrm>
-          <a:prstGeom xmlns:a="http://schemas.openxmlformats.org/drawingml/2006/main" prst="rect">
-            <a:avLst/>
-          </a:prstGeom>
-          <a:solidFill xmlns:a="http://schemas.openxmlformats.org/drawingml/2006/main">
-            <a:srgbClr val="000000">
-              <a:alpha val="0"/>
-            </a:srgbClr>
-          </a:solidFill>
-          <a:ln xmlns:a="http://schemas.openxmlformats.org/drawingml/2006/main" w="0">
-            <a:solidFill>
-              <a:srgbClr val="000000">
-                <a:alpha val="0"/>
-              </a:srgbClr>
-            </a:solidFill>
-            <a:prstDash val="solid"/>
-          </a:ln>
-        </p:spPr>
-        <p:txBody>
-          <a:bodyPr xmlns:a="http://schemas.openxmlformats.org/drawingml/2006/main" lIns="0" tIns="0" rIns="0" bIns="0" anchor="t"/>
-          <a:lstStyle xmlns:a="http://schemas.openxmlformats.org/drawingml/2006/main"/>
-          <a:p xmlns:a="http://schemas.openxmlformats.org/drawingml/2006/main">
-            <a:pPr algn="l">
-              <a:defRPr sz="1350" b="0">
-                <a:solidFill>
-                  <a:srgbClr val="344146"/>
-                </a:solidFill>
-              </a:defRPr>
-            </a:pPr>
-            <a:r>
-              <a:rPr sz="1350" b="0">
-                <a:solidFill>
-                  <a:srgbClr val="344146"/>
-                </a:solidFill>
-              </a:rPr>
-              <a:t>최종적으로 protocol choice는 region보다도</a:t>
-            </a:r>
-          </a:p>
-          <a:p xmlns:a="http://schemas.openxmlformats.org/drawingml/2006/main">
-            <a:pPr algn="l">
-              <a:defRPr sz="1350" b="0">
-                <a:solidFill>
-                  <a:srgbClr val="344146"/>
-                </a:solidFill>
-              </a:defRPr>
-            </a:pPr>
-            <a:r>
-              <a:rPr sz="1350" b="0">
-                <a:solidFill>
-                  <a:srgbClr val="344146"/>
-                </a:solidFill>
-              </a:rPr>
-              <a:t>readout을 먼저 적는 문제에 가까워졌다.</a:t>
-            </a:r>
-          </a:p>
-        </p:txBody>
-      </p:sp>
-      <p:sp>
-        <p:nvSpPr>
-          <p:cNvPr id="15" name="">
-            <a:extLst xmlns:a="http://schemas.openxmlformats.org/drawingml/2006/main">
-              <a:ext uri="{FF2B5EF4-FFF2-40B4-BE49-F238E27FC236}">
-                <a16:creationId xmlns:a16="http://schemas.microsoft.com/office/drawing/2014/main" id="{AD261962-2827-44A3-8EA7-BC52B2A180A4}"/>
+                <a16:creationId xmlns:a16="http://schemas.microsoft.com/office/drawing/2014/main" id="{4D26466D-7BDD-4F5C-958C-E7F4D7433B22}"/>
               </a:ext>
             </a:extLst>
           </p:cNvPr>
@@ -18150,10 +17775,10 @@
       </p:sp>
       <p:sp>
         <p:nvSpPr>
-          <p:cNvPr id="16" name="">
-            <a:extLst xmlns:a="http://schemas.openxmlformats.org/drawingml/2006/main">
-              <a:ext uri="{FF2B5EF4-FFF2-40B4-BE49-F238E27FC236}">
-                <a16:creationId xmlns:a16="http://schemas.microsoft.com/office/drawing/2014/main" id="{6168B9B7-C41C-47EE-ABCF-F1076B47A656}"/>
+          <p:cNvPr id="15" name="">
+            <a:extLst xmlns:a="http://schemas.openxmlformats.org/drawingml/2006/main">
+              <a:ext uri="{FF2B5EF4-FFF2-40B4-BE49-F238E27FC236}">
+                <a16:creationId xmlns:a16="http://schemas.microsoft.com/office/drawing/2014/main" id="{B7A43FCC-789F-4100-9A24-59B27767795B}"/>
               </a:ext>
             </a:extLst>
           </p:cNvPr>
@@ -18185,10 +17810,10 @@
       </p:sp>
       <p:sp>
         <p:nvSpPr>
-          <p:cNvPr id="17" name="">
-            <a:extLst xmlns:a="http://schemas.openxmlformats.org/drawingml/2006/main">
-              <a:ext uri="{FF2B5EF4-FFF2-40B4-BE49-F238E27FC236}">
-                <a16:creationId xmlns:a16="http://schemas.microsoft.com/office/drawing/2014/main" id="{0E2C53C4-C32D-4743-9DFD-7C1A3A804FD9}"/>
+          <p:cNvPr id="16" name="">
+            <a:extLst xmlns:a="http://schemas.openxmlformats.org/drawingml/2006/main">
+              <a:ext uri="{FF2B5EF4-FFF2-40B4-BE49-F238E27FC236}">
+                <a16:creationId xmlns:a16="http://schemas.microsoft.com/office/drawing/2014/main" id="{80F92F5E-6D94-4F01-A299-77B01217B456}"/>
               </a:ext>
             </a:extLst>
           </p:cNvPr>
@@ -18243,10 +17868,10 @@
       </p:sp>
       <p:sp>
         <p:nvSpPr>
-          <p:cNvPr id="18" name="">
-            <a:extLst xmlns:a="http://schemas.openxmlformats.org/drawingml/2006/main">
-              <a:ext uri="{FF2B5EF4-FFF2-40B4-BE49-F238E27FC236}">
-                <a16:creationId xmlns:a16="http://schemas.microsoft.com/office/drawing/2014/main" id="{69AEDFF0-73CF-433F-9D66-B60D5EF17ECA}"/>
+          <p:cNvPr id="17" name="">
+            <a:extLst xmlns:a="http://schemas.openxmlformats.org/drawingml/2006/main">
+              <a:ext uri="{FF2B5EF4-FFF2-40B4-BE49-F238E27FC236}">
+                <a16:creationId xmlns:a16="http://schemas.microsoft.com/office/drawing/2014/main" id="{52D3225A-1CCF-4F37-B49A-9F64A5ABC183}"/>
               </a:ext>
             </a:extLst>
           </p:cNvPr>
@@ -18386,10 +18011,10 @@
       </p:sp>
       <p:sp>
         <p:nvSpPr>
-          <p:cNvPr id="19" name="">
-            <a:extLst xmlns:a="http://schemas.openxmlformats.org/drawingml/2006/main">
-              <a:ext uri="{FF2B5EF4-FFF2-40B4-BE49-F238E27FC236}">
-                <a16:creationId xmlns:a16="http://schemas.microsoft.com/office/drawing/2014/main" id="{5A99BBB1-790C-4F96-B6CE-7AE010BE6D04}"/>
+          <p:cNvPr id="18" name="">
+            <a:extLst xmlns:a="http://schemas.openxmlformats.org/drawingml/2006/main">
+              <a:ext uri="{FF2B5EF4-FFF2-40B4-BE49-F238E27FC236}">
+                <a16:creationId xmlns:a16="http://schemas.microsoft.com/office/drawing/2014/main" id="{DBC91E45-9F27-4F02-9DBE-959AF90628BA}"/>
               </a:ext>
             </a:extLst>
           </p:cNvPr>
@@ -18421,10 +18046,10 @@
       </p:sp>
       <p:sp>
         <p:nvSpPr>
-          <p:cNvPr id="20" name="">
-            <a:extLst xmlns:a="http://schemas.openxmlformats.org/drawingml/2006/main">
-              <a:ext uri="{FF2B5EF4-FFF2-40B4-BE49-F238E27FC236}">
-                <a16:creationId xmlns:a16="http://schemas.microsoft.com/office/drawing/2014/main" id="{431CE4B1-1762-4FB1-8A32-5237EA6B1DF3}"/>
+          <p:cNvPr id="19" name="">
+            <a:extLst xmlns:a="http://schemas.openxmlformats.org/drawingml/2006/main">
+              <a:ext uri="{FF2B5EF4-FFF2-40B4-BE49-F238E27FC236}">
+                <a16:creationId xmlns:a16="http://schemas.microsoft.com/office/drawing/2014/main" id="{BF0BA9F4-20DF-4F0E-AF9E-70BA6524B803}"/>
               </a:ext>
             </a:extLst>
           </p:cNvPr>
@@ -18456,10 +18081,10 @@
       </p:sp>
       <p:sp>
         <p:nvSpPr>
-          <p:cNvPr id="21" name="">
-            <a:extLst xmlns:a="http://schemas.openxmlformats.org/drawingml/2006/main">
-              <a:ext uri="{FF2B5EF4-FFF2-40B4-BE49-F238E27FC236}">
-                <a16:creationId xmlns:a16="http://schemas.microsoft.com/office/drawing/2014/main" id="{2ED01223-6C83-4530-BCE7-17C7D4670204}"/>
+          <p:cNvPr id="20" name="">
+            <a:extLst xmlns:a="http://schemas.openxmlformats.org/drawingml/2006/main">
+              <a:ext uri="{FF2B5EF4-FFF2-40B4-BE49-F238E27FC236}">
+                <a16:creationId xmlns:a16="http://schemas.microsoft.com/office/drawing/2014/main" id="{886FFAE2-659C-41B5-90B5-10A922ED307C}"/>
               </a:ext>
             </a:extLst>
           </p:cNvPr>
@@ -18510,10 +18135,10 @@
       </p:sp>
       <p:sp>
         <p:nvSpPr>
-          <p:cNvPr id="22" name="">
-            <a:extLst xmlns:a="http://schemas.openxmlformats.org/drawingml/2006/main">
-              <a:ext uri="{FF2B5EF4-FFF2-40B4-BE49-F238E27FC236}">
-                <a16:creationId xmlns:a16="http://schemas.microsoft.com/office/drawing/2014/main" id="{05F5DD9C-479E-40E7-B53D-1A2FF9706AB0}"/>
+          <p:cNvPr id="21" name="">
+            <a:extLst xmlns:a="http://schemas.openxmlformats.org/drawingml/2006/main">
+              <a:ext uri="{FF2B5EF4-FFF2-40B4-BE49-F238E27FC236}">
+                <a16:creationId xmlns:a16="http://schemas.microsoft.com/office/drawing/2014/main" id="{E4DFCD2A-D6D3-4ED8-A979-835E00F80942}"/>
               </a:ext>
             </a:extLst>
           </p:cNvPr>
@@ -18568,10 +18193,10 @@
       </p:sp>
       <p:sp>
         <p:nvSpPr>
-          <p:cNvPr id="23" name="">
-            <a:extLst xmlns:a="http://schemas.openxmlformats.org/drawingml/2006/main">
-              <a:ext uri="{FF2B5EF4-FFF2-40B4-BE49-F238E27FC236}">
-                <a16:creationId xmlns:a16="http://schemas.microsoft.com/office/drawing/2014/main" id="{AF89609F-A079-48C2-8AE0-197AC0CA3AD1}"/>
+          <p:cNvPr id="22" name="">
+            <a:extLst xmlns:a="http://schemas.openxmlformats.org/drawingml/2006/main">
+              <a:ext uri="{FF2B5EF4-FFF2-40B4-BE49-F238E27FC236}">
+                <a16:creationId xmlns:a16="http://schemas.microsoft.com/office/drawing/2014/main" id="{C0BB9EA2-5673-4FFD-BD26-0D52790295F8}"/>
               </a:ext>
             </a:extLst>
           </p:cNvPr>
@@ -18643,10 +18268,10 @@
       </p:sp>
       <p:sp>
         <p:nvSpPr>
-          <p:cNvPr id="24" name="">
-            <a:extLst xmlns:a="http://schemas.openxmlformats.org/drawingml/2006/main">
-              <a:ext uri="{FF2B5EF4-FFF2-40B4-BE49-F238E27FC236}">
-                <a16:creationId xmlns:a16="http://schemas.microsoft.com/office/drawing/2014/main" id="{3BA3F1EA-74F6-409F-9251-85D46A6567FD}"/>
+          <p:cNvPr id="23" name="">
+            <a:extLst xmlns:a="http://schemas.openxmlformats.org/drawingml/2006/main">
+              <a:ext uri="{FF2B5EF4-FFF2-40B4-BE49-F238E27FC236}">
+                <a16:creationId xmlns:a16="http://schemas.microsoft.com/office/drawing/2014/main" id="{408DB472-624D-4915-9DE5-9C39146A6C47}"/>
               </a:ext>
             </a:extLst>
           </p:cNvPr>
@@ -18678,10 +18303,10 @@
       </p:sp>
       <p:sp>
         <p:nvSpPr>
-          <p:cNvPr id="25" name="">
-            <a:extLst xmlns:a="http://schemas.openxmlformats.org/drawingml/2006/main">
-              <a:ext uri="{FF2B5EF4-FFF2-40B4-BE49-F238E27FC236}">
-                <a16:creationId xmlns:a16="http://schemas.microsoft.com/office/drawing/2014/main" id="{E5D5F817-D073-414B-8E5B-7E67552FD69B}"/>
+          <p:cNvPr id="24" name="">
+            <a:extLst xmlns:a="http://schemas.openxmlformats.org/drawingml/2006/main">
+              <a:ext uri="{FF2B5EF4-FFF2-40B4-BE49-F238E27FC236}">
+                <a16:creationId xmlns:a16="http://schemas.microsoft.com/office/drawing/2014/main" id="{B2AC93D5-ABF4-4F95-AEDC-B55E331E5265}"/>
               </a:ext>
             </a:extLst>
           </p:cNvPr>
@@ -18713,10 +18338,10 @@
       </p:sp>
       <p:sp>
         <p:nvSpPr>
-          <p:cNvPr id="26" name="">
-            <a:extLst xmlns:a="http://schemas.openxmlformats.org/drawingml/2006/main">
-              <a:ext uri="{FF2B5EF4-FFF2-40B4-BE49-F238E27FC236}">
-                <a16:creationId xmlns:a16="http://schemas.microsoft.com/office/drawing/2014/main" id="{DD16A616-41F5-413F-9792-2C044E938A15}"/>
+          <p:cNvPr id="25" name="">
+            <a:extLst xmlns:a="http://schemas.openxmlformats.org/drawingml/2006/main">
+              <a:ext uri="{FF2B5EF4-FFF2-40B4-BE49-F238E27FC236}">
+                <a16:creationId xmlns:a16="http://schemas.microsoft.com/office/drawing/2014/main" id="{ABDD2FC6-4478-4CED-A356-D7FA92A17C4B}"/>
               </a:ext>
             </a:extLst>
           </p:cNvPr>
@@ -18767,10 +18392,10 @@
       </p:sp>
       <p:sp>
         <p:nvSpPr>
-          <p:cNvPr id="27" name="">
-            <a:extLst xmlns:a="http://schemas.openxmlformats.org/drawingml/2006/main">
-              <a:ext uri="{FF2B5EF4-FFF2-40B4-BE49-F238E27FC236}">
-                <a16:creationId xmlns:a16="http://schemas.microsoft.com/office/drawing/2014/main" id="{E07FF338-078C-40CE-ABD5-A539BCD99214}"/>
+          <p:cNvPr id="26" name="">
+            <a:extLst xmlns:a="http://schemas.openxmlformats.org/drawingml/2006/main">
+              <a:ext uri="{FF2B5EF4-FFF2-40B4-BE49-F238E27FC236}">
+                <a16:creationId xmlns:a16="http://schemas.microsoft.com/office/drawing/2014/main" id="{DF295926-BFC6-4B6F-AE4E-57AFA83A005B}"/>
               </a:ext>
             </a:extLst>
           </p:cNvPr>
@@ -18825,10 +18450,10 @@
       </p:sp>
       <p:sp>
         <p:nvSpPr>
-          <p:cNvPr id="28" name="">
-            <a:extLst xmlns:a="http://schemas.openxmlformats.org/drawingml/2006/main">
-              <a:ext uri="{FF2B5EF4-FFF2-40B4-BE49-F238E27FC236}">
-                <a16:creationId xmlns:a16="http://schemas.microsoft.com/office/drawing/2014/main" id="{18AFA3E1-9FF1-4DC6-B8EA-65C93B2004DD}"/>
+          <p:cNvPr id="27" name="">
+            <a:extLst xmlns:a="http://schemas.openxmlformats.org/drawingml/2006/main">
+              <a:ext uri="{FF2B5EF4-FFF2-40B4-BE49-F238E27FC236}">
+                <a16:creationId xmlns:a16="http://schemas.microsoft.com/office/drawing/2014/main" id="{D3165107-9C9B-47FD-AFDA-E87C4147EBEB}"/>
               </a:ext>
             </a:extLst>
           </p:cNvPr>
@@ -18900,10 +18525,10 @@
       </p:sp>
       <p:sp>
         <p:nvSpPr>
-          <p:cNvPr id="29" name="">
-            <a:extLst xmlns:a="http://schemas.openxmlformats.org/drawingml/2006/main">
-              <a:ext uri="{FF2B5EF4-FFF2-40B4-BE49-F238E27FC236}">
-                <a16:creationId xmlns:a16="http://schemas.microsoft.com/office/drawing/2014/main" id="{26E11332-5054-4D32-887B-6FC761D57C7B}"/>
+          <p:cNvPr id="28" name="">
+            <a:extLst xmlns:a="http://schemas.openxmlformats.org/drawingml/2006/main">
+              <a:ext uri="{FF2B5EF4-FFF2-40B4-BE49-F238E27FC236}">
+                <a16:creationId xmlns:a16="http://schemas.microsoft.com/office/drawing/2014/main" id="{EA95FD51-CDBF-49BC-9A94-EEC1871C4D1E}"/>
               </a:ext>
             </a:extLst>
           </p:cNvPr>
@@ -18935,10 +18560,10 @@
       </p:sp>
       <p:sp>
         <p:nvSpPr>
-          <p:cNvPr id="30" name="">
-            <a:extLst xmlns:a="http://schemas.openxmlformats.org/drawingml/2006/main">
-              <a:ext uri="{FF2B5EF4-FFF2-40B4-BE49-F238E27FC236}">
-                <a16:creationId xmlns:a16="http://schemas.microsoft.com/office/drawing/2014/main" id="{0B96253D-6348-433A-85BF-7F738BF5446B}"/>
+          <p:cNvPr id="29" name="">
+            <a:extLst xmlns:a="http://schemas.openxmlformats.org/drawingml/2006/main">
+              <a:ext uri="{FF2B5EF4-FFF2-40B4-BE49-F238E27FC236}">
+                <a16:creationId xmlns:a16="http://schemas.microsoft.com/office/drawing/2014/main" id="{280F5DCF-2239-498D-A67B-3FB1E75646AE}"/>
               </a:ext>
             </a:extLst>
           </p:cNvPr>
@@ -18970,10 +18595,10 @@
       </p:sp>
       <p:sp>
         <p:nvSpPr>
-          <p:cNvPr id="31" name="">
-            <a:extLst xmlns:a="http://schemas.openxmlformats.org/drawingml/2006/main">
-              <a:ext uri="{FF2B5EF4-FFF2-40B4-BE49-F238E27FC236}">
-                <a16:creationId xmlns:a16="http://schemas.microsoft.com/office/drawing/2014/main" id="{D3714007-0246-417A-B379-AA920413AC45}"/>
+          <p:cNvPr id="30" name="">
+            <a:extLst xmlns:a="http://schemas.openxmlformats.org/drawingml/2006/main">
+              <a:ext uri="{FF2B5EF4-FFF2-40B4-BE49-F238E27FC236}">
+                <a16:creationId xmlns:a16="http://schemas.microsoft.com/office/drawing/2014/main" id="{1AC75DE0-F7AF-4123-AF88-09827BEAEFB1}"/>
               </a:ext>
             </a:extLst>
           </p:cNvPr>
@@ -19024,10 +18649,10 @@
       </p:sp>
       <p:sp>
         <p:nvSpPr>
-          <p:cNvPr id="32" name="">
-            <a:extLst xmlns:a="http://schemas.openxmlformats.org/drawingml/2006/main">
-              <a:ext uri="{FF2B5EF4-FFF2-40B4-BE49-F238E27FC236}">
-                <a16:creationId xmlns:a16="http://schemas.microsoft.com/office/drawing/2014/main" id="{DFD14F57-4DBE-40A0-BF7C-610A62F752F8}"/>
+          <p:cNvPr id="31" name="">
+            <a:extLst xmlns:a="http://schemas.openxmlformats.org/drawingml/2006/main">
+              <a:ext uri="{FF2B5EF4-FFF2-40B4-BE49-F238E27FC236}">
+                <a16:creationId xmlns:a16="http://schemas.microsoft.com/office/drawing/2014/main" id="{2E2B5C77-A65A-4062-AF36-B4F28E193E84}"/>
               </a:ext>
             </a:extLst>
           </p:cNvPr>
@@ -19082,10 +18707,10 @@
       </p:sp>
       <p:sp>
         <p:nvSpPr>
-          <p:cNvPr id="33" name="">
-            <a:extLst xmlns:a="http://schemas.openxmlformats.org/drawingml/2006/main">
-              <a:ext uri="{FF2B5EF4-FFF2-40B4-BE49-F238E27FC236}">
-                <a16:creationId xmlns:a16="http://schemas.microsoft.com/office/drawing/2014/main" id="{526CECDC-3FBB-4162-A59B-DA67EA641C67}"/>
+          <p:cNvPr id="32" name="">
+            <a:extLst xmlns:a="http://schemas.openxmlformats.org/drawingml/2006/main">
+              <a:ext uri="{FF2B5EF4-FFF2-40B4-BE49-F238E27FC236}">
+                <a16:creationId xmlns:a16="http://schemas.microsoft.com/office/drawing/2014/main" id="{1C354D2F-499D-47BE-88B5-71CF85EE94D7}"/>
               </a:ext>
             </a:extLst>
           </p:cNvPr>
@@ -19157,10 +18782,10 @@
       </p:sp>
       <p:sp>
         <p:nvSpPr>
-          <p:cNvPr id="34" name="">
-            <a:extLst xmlns:a="http://schemas.openxmlformats.org/drawingml/2006/main">
-              <a:ext uri="{FF2B5EF4-FFF2-40B4-BE49-F238E27FC236}">
-                <a16:creationId xmlns:a16="http://schemas.microsoft.com/office/drawing/2014/main" id="{5B2D05CF-607C-4639-AFDD-08D6573526E9}"/>
+          <p:cNvPr id="33" name="">
+            <a:extLst xmlns:a="http://schemas.openxmlformats.org/drawingml/2006/main">
+              <a:ext uri="{FF2B5EF4-FFF2-40B4-BE49-F238E27FC236}">
+                <a16:creationId xmlns:a16="http://schemas.microsoft.com/office/drawing/2014/main" id="{472D7274-DE46-4BCE-9C02-3F837D3F8A3A}"/>
               </a:ext>
             </a:extLst>
           </p:cNvPr>
@@ -19192,10 +18817,10 @@
       </p:sp>
       <p:sp>
         <p:nvSpPr>
-          <p:cNvPr id="35" name="">
-            <a:extLst xmlns:a="http://schemas.openxmlformats.org/drawingml/2006/main">
-              <a:ext uri="{FF2B5EF4-FFF2-40B4-BE49-F238E27FC236}">
-                <a16:creationId xmlns:a16="http://schemas.microsoft.com/office/drawing/2014/main" id="{17787113-2920-4868-AA34-892B8D8505B2}"/>
+          <p:cNvPr id="34" name="">
+            <a:extLst xmlns:a="http://schemas.openxmlformats.org/drawingml/2006/main">
+              <a:ext uri="{FF2B5EF4-FFF2-40B4-BE49-F238E27FC236}">
+                <a16:creationId xmlns:a16="http://schemas.microsoft.com/office/drawing/2014/main" id="{0CAB97A9-1A1F-489D-9EA8-8E1013BD2166}"/>
               </a:ext>
             </a:extLst>
           </p:cNvPr>
@@ -19227,10 +18852,10 @@
       </p:sp>
       <p:sp>
         <p:nvSpPr>
-          <p:cNvPr id="36" name="">
-            <a:extLst xmlns:a="http://schemas.openxmlformats.org/drawingml/2006/main">
-              <a:ext uri="{FF2B5EF4-FFF2-40B4-BE49-F238E27FC236}">
-                <a16:creationId xmlns:a16="http://schemas.microsoft.com/office/drawing/2014/main" id="{CE5CEF66-5B51-4911-8583-3E59BBB04C8B}"/>
+          <p:cNvPr id="35" name="">
+            <a:extLst xmlns:a="http://schemas.openxmlformats.org/drawingml/2006/main">
+              <a:ext uri="{FF2B5EF4-FFF2-40B4-BE49-F238E27FC236}">
+                <a16:creationId xmlns:a16="http://schemas.microsoft.com/office/drawing/2014/main" id="{F4D17F32-1BD1-49A3-ACC5-BDB609421044}"/>
               </a:ext>
             </a:extLst>
           </p:cNvPr>
@@ -19281,10 +18906,10 @@
       </p:sp>
       <p:sp>
         <p:nvSpPr>
-          <p:cNvPr id="37" name="">
-            <a:extLst xmlns:a="http://schemas.openxmlformats.org/drawingml/2006/main">
-              <a:ext uri="{FF2B5EF4-FFF2-40B4-BE49-F238E27FC236}">
-                <a16:creationId xmlns:a16="http://schemas.microsoft.com/office/drawing/2014/main" id="{900EA193-465B-46EB-92C7-2469FBA47EFE}"/>
+          <p:cNvPr id="36" name="">
+            <a:extLst xmlns:a="http://schemas.openxmlformats.org/drawingml/2006/main">
+              <a:ext uri="{FF2B5EF4-FFF2-40B4-BE49-F238E27FC236}">
+                <a16:creationId xmlns:a16="http://schemas.microsoft.com/office/drawing/2014/main" id="{EBC79638-64C9-4B6D-9AD8-70D624576800}"/>
               </a:ext>
             </a:extLst>
           </p:cNvPr>
@@ -19339,10 +18964,10 @@
       </p:sp>
       <p:sp>
         <p:nvSpPr>
-          <p:cNvPr id="38" name="">
-            <a:extLst xmlns:a="http://schemas.openxmlformats.org/drawingml/2006/main">
-              <a:ext uri="{FF2B5EF4-FFF2-40B4-BE49-F238E27FC236}">
-                <a16:creationId xmlns:a16="http://schemas.microsoft.com/office/drawing/2014/main" id="{C63380AD-F2FA-40F9-B6FA-0E968B9EA674}"/>
+          <p:cNvPr id="37" name="">
+            <a:extLst xmlns:a="http://schemas.openxmlformats.org/drawingml/2006/main">
+              <a:ext uri="{FF2B5EF4-FFF2-40B4-BE49-F238E27FC236}">
+                <a16:creationId xmlns:a16="http://schemas.microsoft.com/office/drawing/2014/main" id="{A0A10920-BFE5-47ED-9C8E-AA84D98F83AE}"/>
               </a:ext>
             </a:extLst>
           </p:cNvPr>
@@ -19414,10 +19039,10 @@
       </p:sp>
       <p:sp>
         <p:nvSpPr>
-          <p:cNvPr id="39" name="">
-            <a:extLst xmlns:a="http://schemas.openxmlformats.org/drawingml/2006/main">
-              <a:ext uri="{FF2B5EF4-FFF2-40B4-BE49-F238E27FC236}">
-                <a16:creationId xmlns:a16="http://schemas.microsoft.com/office/drawing/2014/main" id="{2B984177-D2C3-433C-A7BC-E4B7EF97AA5F}"/>
+          <p:cNvPr id="38" name="">
+            <a:extLst xmlns:a="http://schemas.openxmlformats.org/drawingml/2006/main">
+              <a:ext uri="{FF2B5EF4-FFF2-40B4-BE49-F238E27FC236}">
+                <a16:creationId xmlns:a16="http://schemas.microsoft.com/office/drawing/2014/main" id="{EA58FB64-5617-43D0-965B-79DFC17E06AA}"/>
               </a:ext>
             </a:extLst>
           </p:cNvPr>
@@ -19449,10 +19074,10 @@
       </p:sp>
       <p:sp>
         <p:nvSpPr>
-          <p:cNvPr id="40" name="">
-            <a:extLst xmlns:a="http://schemas.openxmlformats.org/drawingml/2006/main">
-              <a:ext uri="{FF2B5EF4-FFF2-40B4-BE49-F238E27FC236}">
-                <a16:creationId xmlns:a16="http://schemas.microsoft.com/office/drawing/2014/main" id="{751228FA-CBF8-4E25-8A0F-CE56BC0A4567}"/>
+          <p:cNvPr id="39" name="">
+            <a:extLst xmlns:a="http://schemas.openxmlformats.org/drawingml/2006/main">
+              <a:ext uri="{FF2B5EF4-FFF2-40B4-BE49-F238E27FC236}">
+                <a16:creationId xmlns:a16="http://schemas.microsoft.com/office/drawing/2014/main" id="{4A230E98-3D73-4B09-9436-2C51719E71C5}"/>
               </a:ext>
             </a:extLst>
           </p:cNvPr>
@@ -19484,10 +19109,10 @@
       </p:sp>
       <p:sp>
         <p:nvSpPr>
-          <p:cNvPr id="41" name="">
-            <a:extLst xmlns:a="http://schemas.openxmlformats.org/drawingml/2006/main">
-              <a:ext uri="{FF2B5EF4-FFF2-40B4-BE49-F238E27FC236}">
-                <a16:creationId xmlns:a16="http://schemas.microsoft.com/office/drawing/2014/main" id="{35DA8D9F-BE73-48DB-94A6-CF62A1137EE9}"/>
+          <p:cNvPr id="40" name="">
+            <a:extLst xmlns:a="http://schemas.openxmlformats.org/drawingml/2006/main">
+              <a:ext uri="{FF2B5EF4-FFF2-40B4-BE49-F238E27FC236}">
+                <a16:creationId xmlns:a16="http://schemas.microsoft.com/office/drawing/2014/main" id="{CF463AF9-74E4-4BEE-98FF-9B2A3140F7A1}"/>
               </a:ext>
             </a:extLst>
           </p:cNvPr>
@@ -19538,10 +19163,10 @@
       </p:sp>
       <p:sp>
         <p:nvSpPr>
-          <p:cNvPr id="42" name="">
-            <a:extLst xmlns:a="http://schemas.openxmlformats.org/drawingml/2006/main">
-              <a:ext uri="{FF2B5EF4-FFF2-40B4-BE49-F238E27FC236}">
-                <a16:creationId xmlns:a16="http://schemas.microsoft.com/office/drawing/2014/main" id="{FB46B743-8CA0-49FB-861E-88ED2A474921}"/>
+          <p:cNvPr id="41" name="">
+            <a:extLst xmlns:a="http://schemas.openxmlformats.org/drawingml/2006/main">
+              <a:ext uri="{FF2B5EF4-FFF2-40B4-BE49-F238E27FC236}">
+                <a16:creationId xmlns:a16="http://schemas.microsoft.com/office/drawing/2014/main" id="{127C7D8E-85B9-4E82-9373-1C9D38EC4558}"/>
               </a:ext>
             </a:extLst>
           </p:cNvPr>
@@ -19596,10 +19221,10 @@
       </p:sp>
       <p:sp>
         <p:nvSpPr>
-          <p:cNvPr id="43" name="">
-            <a:extLst xmlns:a="http://schemas.openxmlformats.org/drawingml/2006/main">
-              <a:ext uri="{FF2B5EF4-FFF2-40B4-BE49-F238E27FC236}">
-                <a16:creationId xmlns:a16="http://schemas.microsoft.com/office/drawing/2014/main" id="{819ABDE8-B9D6-461D-BE38-83E3A12EB4F2}"/>
+          <p:cNvPr id="42" name="">
+            <a:extLst xmlns:a="http://schemas.openxmlformats.org/drawingml/2006/main">
+              <a:ext uri="{FF2B5EF4-FFF2-40B4-BE49-F238E27FC236}">
+                <a16:creationId xmlns:a16="http://schemas.microsoft.com/office/drawing/2014/main" id="{FD9A9ECF-DD95-4BC9-8683-9E2D38A6EB07}"/>
               </a:ext>
             </a:extLst>
           </p:cNvPr>
@@ -19671,10 +19296,10 @@
       </p:sp>
       <p:sp>
         <p:nvSpPr>
-          <p:cNvPr id="44" name="">
-            <a:extLst xmlns:a="http://schemas.openxmlformats.org/drawingml/2006/main">
-              <a:ext uri="{FF2B5EF4-FFF2-40B4-BE49-F238E27FC236}">
-                <a16:creationId xmlns:a16="http://schemas.microsoft.com/office/drawing/2014/main" id="{65D835AA-D0BC-4508-8F59-9B0602E08053}"/>
+          <p:cNvPr id="43" name="">
+            <a:extLst xmlns:a="http://schemas.openxmlformats.org/drawingml/2006/main">
+              <a:ext uri="{FF2B5EF4-FFF2-40B4-BE49-F238E27FC236}">
+                <a16:creationId xmlns:a16="http://schemas.microsoft.com/office/drawing/2014/main" id="{CC5BF9CB-35AC-4B93-A197-D0DBE0126F34}"/>
               </a:ext>
             </a:extLst>
           </p:cNvPr>
@@ -19706,10 +19331,10 @@
       </p:sp>
       <p:sp>
         <p:nvSpPr>
-          <p:cNvPr id="45" name="">
-            <a:extLst xmlns:a="http://schemas.openxmlformats.org/drawingml/2006/main">
-              <a:ext uri="{FF2B5EF4-FFF2-40B4-BE49-F238E27FC236}">
-                <a16:creationId xmlns:a16="http://schemas.microsoft.com/office/drawing/2014/main" id="{BDE9B0E7-6E8B-4C1C-BA50-9C18B2933432}"/>
+          <p:cNvPr id="44" name="">
+            <a:extLst xmlns:a="http://schemas.openxmlformats.org/drawingml/2006/main">
+              <a:ext uri="{FF2B5EF4-FFF2-40B4-BE49-F238E27FC236}">
+                <a16:creationId xmlns:a16="http://schemas.microsoft.com/office/drawing/2014/main" id="{FBF11DAC-439D-4BEE-A4ED-656D383ED65E}"/>
               </a:ext>
             </a:extLst>
           </p:cNvPr>
@@ -19741,10 +19366,10 @@
       </p:sp>
       <p:sp>
         <p:nvSpPr>
-          <p:cNvPr id="46" name="">
-            <a:extLst xmlns:a="http://schemas.openxmlformats.org/drawingml/2006/main">
-              <a:ext uri="{FF2B5EF4-FFF2-40B4-BE49-F238E27FC236}">
-                <a16:creationId xmlns:a16="http://schemas.microsoft.com/office/drawing/2014/main" id="{EFA49215-2C35-49C0-94B0-611DA51B2195}"/>
+          <p:cNvPr id="45" name="">
+            <a:extLst xmlns:a="http://schemas.openxmlformats.org/drawingml/2006/main">
+              <a:ext uri="{FF2B5EF4-FFF2-40B4-BE49-F238E27FC236}">
+                <a16:creationId xmlns:a16="http://schemas.microsoft.com/office/drawing/2014/main" id="{72AE383F-900D-4F3F-A312-1B108C725E84}"/>
               </a:ext>
             </a:extLst>
           </p:cNvPr>
@@ -19795,10 +19420,10 @@
       </p:sp>
       <p:sp>
         <p:nvSpPr>
-          <p:cNvPr id="47" name="">
-            <a:extLst xmlns:a="http://schemas.openxmlformats.org/drawingml/2006/main">
-              <a:ext uri="{FF2B5EF4-FFF2-40B4-BE49-F238E27FC236}">
-                <a16:creationId xmlns:a16="http://schemas.microsoft.com/office/drawing/2014/main" id="{72C52953-1C80-4FFC-8D12-07C0A1AB8ED7}"/>
+          <p:cNvPr id="46" name="">
+            <a:extLst xmlns:a="http://schemas.openxmlformats.org/drawingml/2006/main">
+              <a:ext uri="{FF2B5EF4-FFF2-40B4-BE49-F238E27FC236}">
+                <a16:creationId xmlns:a16="http://schemas.microsoft.com/office/drawing/2014/main" id="{668E09D5-68C1-492A-A853-574C19C30D0F}"/>
               </a:ext>
             </a:extLst>
           </p:cNvPr>
@@ -19853,10 +19478,10 @@
       </p:sp>
       <p:sp>
         <p:nvSpPr>
-          <p:cNvPr id="48" name="">
-            <a:extLst xmlns:a="http://schemas.openxmlformats.org/drawingml/2006/main">
-              <a:ext uri="{FF2B5EF4-FFF2-40B4-BE49-F238E27FC236}">
-                <a16:creationId xmlns:a16="http://schemas.microsoft.com/office/drawing/2014/main" id="{C0852F73-F771-421A-8288-C27D0530FE54}"/>
+          <p:cNvPr id="47" name="">
+            <a:extLst xmlns:a="http://schemas.openxmlformats.org/drawingml/2006/main">
+              <a:ext uri="{FF2B5EF4-FFF2-40B4-BE49-F238E27FC236}">
+                <a16:creationId xmlns:a16="http://schemas.microsoft.com/office/drawing/2014/main" id="{F115606E-9F0C-4A08-B9AB-956D8C2E37A7}"/>
               </a:ext>
             </a:extLst>
           </p:cNvPr>
@@ -19928,10 +19553,10 @@
       </p:sp>
       <p:sp>
         <p:nvSpPr>
-          <p:cNvPr id="49" name="">
-            <a:extLst xmlns:a="http://schemas.openxmlformats.org/drawingml/2006/main">
-              <a:ext uri="{FF2B5EF4-FFF2-40B4-BE49-F238E27FC236}">
-                <a16:creationId xmlns:a16="http://schemas.microsoft.com/office/drawing/2014/main" id="{D29E6934-1A2B-410D-9756-0E73A5AE40DD}"/>
+          <p:cNvPr id="48" name="">
+            <a:extLst xmlns:a="http://schemas.openxmlformats.org/drawingml/2006/main">
+              <a:ext uri="{FF2B5EF4-FFF2-40B4-BE49-F238E27FC236}">
+                <a16:creationId xmlns:a16="http://schemas.microsoft.com/office/drawing/2014/main" id="{95EB6663-BC62-43A2-B3A0-CBA838599936}"/>
               </a:ext>
             </a:extLst>
           </p:cNvPr>
@@ -19987,7 +19612,7 @@
     </p:spTree>
     <p:extLst>
       <p:ext uri="{BB962C8B-B14F-4D97-AF65-F5344CB8AC3E}">
-        <p14:creationId xmlns:p14="http://schemas.microsoft.com/office/powerpoint/2010/main" val="99174042"/>
+        <p14:creationId xmlns:p14="http://schemas.microsoft.com/office/powerpoint/2010/main" val="215761826"/>
       </p:ext>
     </p:extLst>
   </p:cSld>
@@ -20018,7 +19643,7 @@
           <p:cNvPr id="1" name="Slide Number Placeholder 5">
             <a:extLst xmlns:a="http://schemas.openxmlformats.org/drawingml/2006/main">
               <a:ext uri="{FF2B5EF4-FFF2-40B4-BE49-F238E27FC236}">
-                <a16:creationId xmlns:a16="http://schemas.microsoft.com/office/drawing/2014/main" id="{F572615B-7240-42F8-B48E-DAA8AA9FBBC2}"/>
+                <a16:creationId xmlns:a16="http://schemas.microsoft.com/office/drawing/2014/main" id="{38BDF79F-9F16-4FEE-B72E-1F506FE9EBEC}"/>
               </a:ext>
             </a:extLst>
           </p:cNvPr>
@@ -20054,7 +19679,7 @@
           <p:nvPr/>
         </p:nvPicPr>
         <p:blipFill>
-          <a:blip xmlns:r="http://schemas.openxmlformats.org/officeDocument/2006/relationships" xmlns:a="http://schemas.openxmlformats.org/drawingml/2006/main" r:embed="R5c75292a0fbd4d3a"/>
+          <a:blip xmlns:r="http://schemas.openxmlformats.org/officeDocument/2006/relationships" xmlns:a="http://schemas.openxmlformats.org/drawingml/2006/main" r:embed="Re98304e6cc95476f"/>
           <a:srcRect xmlns:a="http://schemas.openxmlformats.org/drawingml/2006/main" l="0" t="21875" r="0" b="21875"/>
           <a:stretch xmlns:a="http://schemas.openxmlformats.org/drawingml/2006/main">
             <a:fillRect l="0" t="0" r="0" b="0"/>
@@ -20075,7 +19700,7 @@
           <p:cNvPr id="3" name="">
             <a:extLst xmlns:a="http://schemas.openxmlformats.org/drawingml/2006/main">
               <a:ext uri="{FF2B5EF4-FFF2-40B4-BE49-F238E27FC236}">
-                <a16:creationId xmlns:a16="http://schemas.microsoft.com/office/drawing/2014/main" id="{4485653A-2E02-4177-8CEA-177F3DE94384}"/>
+                <a16:creationId xmlns:a16="http://schemas.microsoft.com/office/drawing/2014/main" id="{8A03BA67-B894-4C2A-873F-5D6CE90C2D79}"/>
               </a:ext>
             </a:extLst>
           </p:cNvPr>
@@ -20110,7 +19735,7 @@
           <p:cNvPr id="4" name="">
             <a:extLst xmlns:a="http://schemas.openxmlformats.org/drawingml/2006/main">
               <a:ext uri="{FF2B5EF4-FFF2-40B4-BE49-F238E27FC236}">
-                <a16:creationId xmlns:a16="http://schemas.microsoft.com/office/drawing/2014/main" id="{A37047E7-FE36-485D-B711-450186C3293F}"/>
+                <a16:creationId xmlns:a16="http://schemas.microsoft.com/office/drawing/2014/main" id="{9A2014B0-0DF3-431F-A91F-E1008DA7E24E}"/>
               </a:ext>
             </a:extLst>
           </p:cNvPr>
@@ -20145,7 +19770,7 @@
           <p:cNvPr id="5" name="">
             <a:extLst xmlns:a="http://schemas.openxmlformats.org/drawingml/2006/main">
               <a:ext uri="{FF2B5EF4-FFF2-40B4-BE49-F238E27FC236}">
-                <a16:creationId xmlns:a16="http://schemas.microsoft.com/office/drawing/2014/main" id="{2AA7FF45-D3F8-4C69-8972-D2CF9C490FB0}"/>
+                <a16:creationId xmlns:a16="http://schemas.microsoft.com/office/drawing/2014/main" id="{F96DA863-5216-4F04-BCE9-AC6324FAE1AD}"/>
               </a:ext>
             </a:extLst>
           </p:cNvPr>
@@ -20182,7 +19807,7 @@
           <p:cNvPr id="6" name="">
             <a:extLst xmlns:a="http://schemas.openxmlformats.org/drawingml/2006/main">
               <a:ext uri="{FF2B5EF4-FFF2-40B4-BE49-F238E27FC236}">
-                <a16:creationId xmlns:a16="http://schemas.microsoft.com/office/drawing/2014/main" id="{B57F0C5D-44B9-4F8A-951E-4C64A0C4CBE4}"/>
+                <a16:creationId xmlns:a16="http://schemas.microsoft.com/office/drawing/2014/main" id="{B629AB18-35E1-4F24-BDDC-ACABFCF5C685}"/>
               </a:ext>
             </a:extLst>
           </p:cNvPr>
@@ -20219,7 +19844,7 @@
           <p:cNvPr id="7" name="">
             <a:extLst xmlns:a="http://schemas.openxmlformats.org/drawingml/2006/main">
               <a:ext uri="{FF2B5EF4-FFF2-40B4-BE49-F238E27FC236}">
-                <a16:creationId xmlns:a16="http://schemas.microsoft.com/office/drawing/2014/main" id="{4408C9BB-DC3E-42A3-AECE-33A960215A81}"/>
+                <a16:creationId xmlns:a16="http://schemas.microsoft.com/office/drawing/2014/main" id="{477932E1-8F66-4074-893A-DFB725E1A9DF}"/>
               </a:ext>
             </a:extLst>
           </p:cNvPr>
@@ -20256,7 +19881,7 @@
           <p:cNvPr id="8" name="">
             <a:extLst xmlns:a="http://schemas.openxmlformats.org/drawingml/2006/main">
               <a:ext uri="{FF2B5EF4-FFF2-40B4-BE49-F238E27FC236}">
-                <a16:creationId xmlns:a16="http://schemas.microsoft.com/office/drawing/2014/main" id="{0C2FBCDE-A1FA-4A79-B8F8-B758145745EB}"/>
+                <a16:creationId xmlns:a16="http://schemas.microsoft.com/office/drawing/2014/main" id="{F7057823-6AD3-4F3F-A60A-3A5B85EB1753}"/>
               </a:ext>
             </a:extLst>
           </p:cNvPr>
@@ -20293,7 +19918,7 @@
           <p:cNvPr id="9" name="">
             <a:extLst xmlns:a="http://schemas.openxmlformats.org/drawingml/2006/main">
               <a:ext uri="{FF2B5EF4-FFF2-40B4-BE49-F238E27FC236}">
-                <a16:creationId xmlns:a16="http://schemas.microsoft.com/office/drawing/2014/main" id="{7798EDB2-1A3B-454C-B4C1-791DC34C3D2F}"/>
+                <a16:creationId xmlns:a16="http://schemas.microsoft.com/office/drawing/2014/main" id="{0CA0DCC7-54E8-424D-8399-A5AD2A1FFF01}"/>
               </a:ext>
             </a:extLst>
           </p:cNvPr>
@@ -20351,7 +19976,7 @@
           <p:cNvPr id="10" name="">
             <a:extLst xmlns:a="http://schemas.openxmlformats.org/drawingml/2006/main">
               <a:ext uri="{FF2B5EF4-FFF2-40B4-BE49-F238E27FC236}">
-                <a16:creationId xmlns:a16="http://schemas.microsoft.com/office/drawing/2014/main" id="{C1362716-3E42-4077-8812-78721514E676}"/>
+                <a16:creationId xmlns:a16="http://schemas.microsoft.com/office/drawing/2014/main" id="{0B5B9862-5664-4467-8C0B-D98DA3715513}"/>
               </a:ext>
             </a:extLst>
           </p:cNvPr>
@@ -20409,7 +20034,7 @@
           <p:cNvPr id="11" name="">
             <a:extLst xmlns:a="http://schemas.openxmlformats.org/drawingml/2006/main">
               <a:ext uri="{FF2B5EF4-FFF2-40B4-BE49-F238E27FC236}">
-                <a16:creationId xmlns:a16="http://schemas.microsoft.com/office/drawing/2014/main" id="{197CAA45-2068-47DA-B508-4979B1DEDD08}"/>
+                <a16:creationId xmlns:a16="http://schemas.microsoft.com/office/drawing/2014/main" id="{C03C2B40-4732-407A-8FF9-2BC5FE921742}"/>
               </a:ext>
             </a:extLst>
           </p:cNvPr>
@@ -20444,7 +20069,7 @@
           <p:cNvPr id="12" name="">
             <a:extLst xmlns:a="http://schemas.openxmlformats.org/drawingml/2006/main">
               <a:ext uri="{FF2B5EF4-FFF2-40B4-BE49-F238E27FC236}">
-                <a16:creationId xmlns:a16="http://schemas.microsoft.com/office/drawing/2014/main" id="{5791CA55-D367-4379-9F39-A0C8FC136075}"/>
+                <a16:creationId xmlns:a16="http://schemas.microsoft.com/office/drawing/2014/main" id="{1A5F7612-426A-4A66-8D1D-613DF56B3AE1}"/>
               </a:ext>
             </a:extLst>
           </p:cNvPr>
@@ -20477,7 +20102,7 @@
           <p:cNvPr id="13" name="">
             <a:extLst xmlns:a="http://schemas.openxmlformats.org/drawingml/2006/main">
               <a:ext uri="{FF2B5EF4-FFF2-40B4-BE49-F238E27FC236}">
-                <a16:creationId xmlns:a16="http://schemas.microsoft.com/office/drawing/2014/main" id="{2CE5C7C7-5342-4FA1-B7E9-9CC573624AA5}"/>
+                <a16:creationId xmlns:a16="http://schemas.microsoft.com/office/drawing/2014/main" id="{D9ED6F4B-133E-44F9-9CD8-8E663E2FD2FA}"/>
               </a:ext>
             </a:extLst>
           </p:cNvPr>
@@ -20535,82 +20160,7 @@
           <p:cNvPr id="14" name="">
             <a:extLst xmlns:a="http://schemas.openxmlformats.org/drawingml/2006/main">
               <a:ext uri="{FF2B5EF4-FFF2-40B4-BE49-F238E27FC236}">
-                <a16:creationId xmlns:a16="http://schemas.microsoft.com/office/drawing/2014/main" id="{6B49CDA8-7931-42A4-AB37-90B452E75C36}"/>
-              </a:ext>
-            </a:extLst>
-          </p:cNvPr>
-          <p:cNvSpPr>
-            <a:spLocks xmlns:a="http://schemas.openxmlformats.org/drawingml/2006/main" noGrp="1"/>
-          </p:cNvSpPr>
-          <p:nvPr/>
-        </p:nvSpPr>
-        <p:spPr>
-          <a:xfrm xmlns:a="http://schemas.openxmlformats.org/drawingml/2006/main">
-            <a:off x="628650" y="2038350"/>
-            <a:ext cx="6858000" cy="628650"/>
-          </a:xfrm>
-          <a:prstGeom xmlns:a="http://schemas.openxmlformats.org/drawingml/2006/main" prst="rect">
-            <a:avLst/>
-          </a:prstGeom>
-          <a:solidFill xmlns:a="http://schemas.openxmlformats.org/drawingml/2006/main">
-            <a:srgbClr val="000000">
-              <a:alpha val="0"/>
-            </a:srgbClr>
-          </a:solidFill>
-          <a:ln xmlns:a="http://schemas.openxmlformats.org/drawingml/2006/main" w="0">
-            <a:solidFill>
-              <a:srgbClr val="000000">
-                <a:alpha val="0"/>
-              </a:srgbClr>
-            </a:solidFill>
-            <a:prstDash val="solid"/>
-          </a:ln>
-        </p:spPr>
-        <p:txBody>
-          <a:bodyPr xmlns:a="http://schemas.openxmlformats.org/drawingml/2006/main" lIns="0" tIns="0" rIns="0" bIns="0" anchor="t"/>
-          <a:lstStyle xmlns:a="http://schemas.openxmlformats.org/drawingml/2006/main"/>
-          <a:p xmlns:a="http://schemas.openxmlformats.org/drawingml/2006/main">
-            <a:pPr algn="l">
-              <a:defRPr sz="1350" b="0">
-                <a:solidFill>
-                  <a:srgbClr val="344146"/>
-                </a:solidFill>
-              </a:defRPr>
-            </a:pPr>
-            <a:r>
-              <a:rPr sz="1350" b="0">
-                <a:solidFill>
-                  <a:srgbClr val="344146"/>
-                </a:solidFill>
-              </a:rPr>
-              <a:t>이 발표의 핵심은 brain organoid 정답이 아니라,</a:t>
-            </a:r>
-          </a:p>
-          <a:p xmlns:a="http://schemas.openxmlformats.org/drawingml/2006/main">
-            <a:pPr algn="l">
-              <a:defRPr sz="1350" b="0">
-                <a:solidFill>
-                  <a:srgbClr val="344146"/>
-                </a:solidFill>
-              </a:defRPr>
-            </a:pPr>
-            <a:r>
-              <a:rPr sz="1350" b="0">
-                <a:solidFill>
-                  <a:srgbClr val="344146"/>
-                </a:solidFill>
-              </a:rPr>
-              <a:t>질문이 위키를 통해 어떻게 더 좋은 질문으로 변했는가이다.</a:t>
-            </a:r>
-          </a:p>
-        </p:txBody>
-      </p:sp>
-      <p:sp>
-        <p:nvSpPr>
-          <p:cNvPr id="15" name="">
-            <a:extLst xmlns:a="http://schemas.openxmlformats.org/drawingml/2006/main">
-              <a:ext uri="{FF2B5EF4-FFF2-40B4-BE49-F238E27FC236}">
-                <a16:creationId xmlns:a16="http://schemas.microsoft.com/office/drawing/2014/main" id="{3AE45A92-02C2-42F9-B0FF-244DD73D7C56}"/>
+                <a16:creationId xmlns:a16="http://schemas.microsoft.com/office/drawing/2014/main" id="{01D12F6D-C45B-4F0D-81D1-0AF8AE37D072}"/>
               </a:ext>
             </a:extLst>
           </p:cNvPr>
@@ -20644,10 +20194,10 @@
       </p:sp>
       <p:sp>
         <p:nvSpPr>
-          <p:cNvPr id="16" name="">
-            <a:extLst xmlns:a="http://schemas.openxmlformats.org/drawingml/2006/main">
-              <a:ext uri="{FF2B5EF4-FFF2-40B4-BE49-F238E27FC236}">
-                <a16:creationId xmlns:a16="http://schemas.microsoft.com/office/drawing/2014/main" id="{3EDA34B6-1549-42D1-B2FA-F13C7BBD309D}"/>
+          <p:cNvPr id="15" name="">
+            <a:extLst xmlns:a="http://schemas.openxmlformats.org/drawingml/2006/main">
+              <a:ext uri="{FF2B5EF4-FFF2-40B4-BE49-F238E27FC236}">
+                <a16:creationId xmlns:a16="http://schemas.microsoft.com/office/drawing/2014/main" id="{F73D4000-DDFF-42FE-AB3A-5DA655170701}"/>
               </a:ext>
             </a:extLst>
           </p:cNvPr>
@@ -20679,10 +20229,10 @@
       </p:sp>
       <p:sp>
         <p:nvSpPr>
-          <p:cNvPr id="17" name="">
-            <a:extLst xmlns:a="http://schemas.openxmlformats.org/drawingml/2006/main">
-              <a:ext uri="{FF2B5EF4-FFF2-40B4-BE49-F238E27FC236}">
-                <a16:creationId xmlns:a16="http://schemas.microsoft.com/office/drawing/2014/main" id="{CE34EE2A-892E-4B83-B27D-60344264ED9F}"/>
+          <p:cNvPr id="16" name="">
+            <a:extLst xmlns:a="http://schemas.openxmlformats.org/drawingml/2006/main">
+              <a:ext uri="{FF2B5EF4-FFF2-40B4-BE49-F238E27FC236}">
+                <a16:creationId xmlns:a16="http://schemas.microsoft.com/office/drawing/2014/main" id="{6BB4AD58-37CB-4092-8617-D9621AC11D74}"/>
               </a:ext>
             </a:extLst>
           </p:cNvPr>
@@ -20737,10 +20287,10 @@
       </p:sp>
       <p:sp>
         <p:nvSpPr>
-          <p:cNvPr id="18" name="">
-            <a:extLst xmlns:a="http://schemas.openxmlformats.org/drawingml/2006/main">
-              <a:ext uri="{FF2B5EF4-FFF2-40B4-BE49-F238E27FC236}">
-                <a16:creationId xmlns:a16="http://schemas.microsoft.com/office/drawing/2014/main" id="{744BB576-0FAE-43E7-9C0D-13C0853B9E4C}"/>
+          <p:cNvPr id="17" name="">
+            <a:extLst xmlns:a="http://schemas.openxmlformats.org/drawingml/2006/main">
+              <a:ext uri="{FF2B5EF4-FFF2-40B4-BE49-F238E27FC236}">
+                <a16:creationId xmlns:a16="http://schemas.microsoft.com/office/drawing/2014/main" id="{42389042-5B39-4419-BD2A-7986B0E17C6C}"/>
               </a:ext>
             </a:extLst>
           </p:cNvPr>
@@ -20829,10 +20379,10 @@
       </p:sp>
       <p:sp>
         <p:nvSpPr>
-          <p:cNvPr id="19" name="">
-            <a:extLst xmlns:a="http://schemas.openxmlformats.org/drawingml/2006/main">
-              <a:ext uri="{FF2B5EF4-FFF2-40B4-BE49-F238E27FC236}">
-                <a16:creationId xmlns:a16="http://schemas.microsoft.com/office/drawing/2014/main" id="{E63A439F-C126-4086-B0F8-98A0A71A80D3}"/>
+          <p:cNvPr id="18" name="">
+            <a:extLst xmlns:a="http://schemas.openxmlformats.org/drawingml/2006/main">
+              <a:ext uri="{FF2B5EF4-FFF2-40B4-BE49-F238E27FC236}">
+                <a16:creationId xmlns:a16="http://schemas.microsoft.com/office/drawing/2014/main" id="{E5A854FC-1325-477D-89D6-3D1085E2CDC3}"/>
               </a:ext>
             </a:extLst>
           </p:cNvPr>
@@ -20866,10 +20416,10 @@
       </p:sp>
       <p:sp>
         <p:nvSpPr>
-          <p:cNvPr id="20" name="">
-            <a:extLst xmlns:a="http://schemas.openxmlformats.org/drawingml/2006/main">
-              <a:ext uri="{FF2B5EF4-FFF2-40B4-BE49-F238E27FC236}">
-                <a16:creationId xmlns:a16="http://schemas.microsoft.com/office/drawing/2014/main" id="{AF02CEFC-5587-40DA-9D9C-A0B662ACCB43}"/>
+          <p:cNvPr id="19" name="">
+            <a:extLst xmlns:a="http://schemas.openxmlformats.org/drawingml/2006/main">
+              <a:ext uri="{FF2B5EF4-FFF2-40B4-BE49-F238E27FC236}">
+                <a16:creationId xmlns:a16="http://schemas.microsoft.com/office/drawing/2014/main" id="{97C268CF-78FE-43F7-A86A-03BCF5C1775D}"/>
               </a:ext>
             </a:extLst>
           </p:cNvPr>
@@ -20901,10 +20451,10 @@
       </p:sp>
       <p:sp>
         <p:nvSpPr>
-          <p:cNvPr id="21" name="">
-            <a:extLst xmlns:a="http://schemas.openxmlformats.org/drawingml/2006/main">
-              <a:ext uri="{FF2B5EF4-FFF2-40B4-BE49-F238E27FC236}">
-                <a16:creationId xmlns:a16="http://schemas.microsoft.com/office/drawing/2014/main" id="{C2348BF9-CBE3-42E8-A79C-12FA314E14BD}"/>
+          <p:cNvPr id="20" name="">
+            <a:extLst xmlns:a="http://schemas.openxmlformats.org/drawingml/2006/main">
+              <a:ext uri="{FF2B5EF4-FFF2-40B4-BE49-F238E27FC236}">
+                <a16:creationId xmlns:a16="http://schemas.microsoft.com/office/drawing/2014/main" id="{29FD1B36-5EF8-4A26-9690-DC79E71BE031}"/>
               </a:ext>
             </a:extLst>
           </p:cNvPr>
@@ -20959,10 +20509,10 @@
       </p:sp>
       <p:sp>
         <p:nvSpPr>
-          <p:cNvPr id="22" name="">
-            <a:extLst xmlns:a="http://schemas.openxmlformats.org/drawingml/2006/main">
-              <a:ext uri="{FF2B5EF4-FFF2-40B4-BE49-F238E27FC236}">
-                <a16:creationId xmlns:a16="http://schemas.microsoft.com/office/drawing/2014/main" id="{97103D21-8571-46B2-ADE8-AA547FF443CF}"/>
+          <p:cNvPr id="21" name="">
+            <a:extLst xmlns:a="http://schemas.openxmlformats.org/drawingml/2006/main">
+              <a:ext uri="{FF2B5EF4-FFF2-40B4-BE49-F238E27FC236}">
+                <a16:creationId xmlns:a16="http://schemas.microsoft.com/office/drawing/2014/main" id="{449F23E7-B896-4111-AC8D-2E070D9D74DB}"/>
               </a:ext>
             </a:extLst>
           </p:cNvPr>
@@ -21034,10 +20584,10 @@
       </p:sp>
       <p:sp>
         <p:nvSpPr>
-          <p:cNvPr id="23" name="">
-            <a:extLst xmlns:a="http://schemas.openxmlformats.org/drawingml/2006/main">
-              <a:ext uri="{FF2B5EF4-FFF2-40B4-BE49-F238E27FC236}">
-                <a16:creationId xmlns:a16="http://schemas.microsoft.com/office/drawing/2014/main" id="{A416F051-EB65-488D-8AF9-1CC6D8B9D1D4}"/>
+          <p:cNvPr id="22" name="">
+            <a:extLst xmlns:a="http://schemas.openxmlformats.org/drawingml/2006/main">
+              <a:ext uri="{FF2B5EF4-FFF2-40B4-BE49-F238E27FC236}">
+                <a16:creationId xmlns:a16="http://schemas.microsoft.com/office/drawing/2014/main" id="{5E312C2C-1528-49C2-AF99-1C0AF1D9B5C5}"/>
               </a:ext>
             </a:extLst>
           </p:cNvPr>
@@ -21071,10 +20621,10 @@
       </p:sp>
       <p:sp>
         <p:nvSpPr>
-          <p:cNvPr id="24" name="">
-            <a:extLst xmlns:a="http://schemas.openxmlformats.org/drawingml/2006/main">
-              <a:ext uri="{FF2B5EF4-FFF2-40B4-BE49-F238E27FC236}">
-                <a16:creationId xmlns:a16="http://schemas.microsoft.com/office/drawing/2014/main" id="{A12D0890-9B5D-434C-A21F-A7D68BC233CA}"/>
+          <p:cNvPr id="23" name="">
+            <a:extLst xmlns:a="http://schemas.openxmlformats.org/drawingml/2006/main">
+              <a:ext uri="{FF2B5EF4-FFF2-40B4-BE49-F238E27FC236}">
+                <a16:creationId xmlns:a16="http://schemas.microsoft.com/office/drawing/2014/main" id="{77A34212-C0F3-413F-AAEE-64CAC96E01D7}"/>
               </a:ext>
             </a:extLst>
           </p:cNvPr>
@@ -21106,10 +20656,10 @@
       </p:sp>
       <p:sp>
         <p:nvSpPr>
-          <p:cNvPr id="25" name="">
-            <a:extLst xmlns:a="http://schemas.openxmlformats.org/drawingml/2006/main">
-              <a:ext uri="{FF2B5EF4-FFF2-40B4-BE49-F238E27FC236}">
-                <a16:creationId xmlns:a16="http://schemas.microsoft.com/office/drawing/2014/main" id="{A2B68DC7-CF17-4F7C-A0BB-E86D73780CBB}"/>
+          <p:cNvPr id="24" name="">
+            <a:extLst xmlns:a="http://schemas.openxmlformats.org/drawingml/2006/main">
+              <a:ext uri="{FF2B5EF4-FFF2-40B4-BE49-F238E27FC236}">
+                <a16:creationId xmlns:a16="http://schemas.microsoft.com/office/drawing/2014/main" id="{3DDBBB5F-D4B6-4463-BCE8-724F1AE575C5}"/>
               </a:ext>
             </a:extLst>
           </p:cNvPr>
@@ -21164,10 +20714,10 @@
       </p:sp>
       <p:sp>
         <p:nvSpPr>
-          <p:cNvPr id="26" name="">
-            <a:extLst xmlns:a="http://schemas.openxmlformats.org/drawingml/2006/main">
-              <a:ext uri="{FF2B5EF4-FFF2-40B4-BE49-F238E27FC236}">
-                <a16:creationId xmlns:a16="http://schemas.microsoft.com/office/drawing/2014/main" id="{731F9509-6F58-4539-9513-2DD1BF5EC88C}"/>
+          <p:cNvPr id="25" name="">
+            <a:extLst xmlns:a="http://schemas.openxmlformats.org/drawingml/2006/main">
+              <a:ext uri="{FF2B5EF4-FFF2-40B4-BE49-F238E27FC236}">
+                <a16:creationId xmlns:a16="http://schemas.microsoft.com/office/drawing/2014/main" id="{52FB4B09-7525-4F8B-9338-25E07FD53356}"/>
               </a:ext>
             </a:extLst>
           </p:cNvPr>
@@ -21256,10 +20806,10 @@
       </p:sp>
       <p:sp>
         <p:nvSpPr>
-          <p:cNvPr id="27" name="">
-            <a:extLst xmlns:a="http://schemas.openxmlformats.org/drawingml/2006/main">
-              <a:ext uri="{FF2B5EF4-FFF2-40B4-BE49-F238E27FC236}">
-                <a16:creationId xmlns:a16="http://schemas.microsoft.com/office/drawing/2014/main" id="{418867F7-EBC8-4664-A8CE-BAD9531459EF}"/>
+          <p:cNvPr id="26" name="">
+            <a:extLst xmlns:a="http://schemas.openxmlformats.org/drawingml/2006/main">
+              <a:ext uri="{FF2B5EF4-FFF2-40B4-BE49-F238E27FC236}">
+                <a16:creationId xmlns:a16="http://schemas.microsoft.com/office/drawing/2014/main" id="{DA980EBD-03BB-429D-AF2F-05B0C63417F2}"/>
               </a:ext>
             </a:extLst>
           </p:cNvPr>
@@ -21293,10 +20843,10 @@
       </p:sp>
       <p:sp>
         <p:nvSpPr>
-          <p:cNvPr id="28" name="">
-            <a:extLst xmlns:a="http://schemas.openxmlformats.org/drawingml/2006/main">
-              <a:ext uri="{FF2B5EF4-FFF2-40B4-BE49-F238E27FC236}">
-                <a16:creationId xmlns:a16="http://schemas.microsoft.com/office/drawing/2014/main" id="{40C34467-08CF-45A5-B019-55C224260B1A}"/>
+          <p:cNvPr id="27" name="">
+            <a:extLst xmlns:a="http://schemas.openxmlformats.org/drawingml/2006/main">
+              <a:ext uri="{FF2B5EF4-FFF2-40B4-BE49-F238E27FC236}">
+                <a16:creationId xmlns:a16="http://schemas.microsoft.com/office/drawing/2014/main" id="{427697C4-B73A-4839-AC83-6F1A4C226C3B}"/>
               </a:ext>
             </a:extLst>
           </p:cNvPr>
@@ -21328,10 +20878,10 @@
       </p:sp>
       <p:sp>
         <p:nvSpPr>
-          <p:cNvPr id="29" name="">
-            <a:extLst xmlns:a="http://schemas.openxmlformats.org/drawingml/2006/main">
-              <a:ext uri="{FF2B5EF4-FFF2-40B4-BE49-F238E27FC236}">
-                <a16:creationId xmlns:a16="http://schemas.microsoft.com/office/drawing/2014/main" id="{54C172F3-3D96-4FA3-933C-579237368FA3}"/>
+          <p:cNvPr id="28" name="">
+            <a:extLst xmlns:a="http://schemas.openxmlformats.org/drawingml/2006/main">
+              <a:ext uri="{FF2B5EF4-FFF2-40B4-BE49-F238E27FC236}">
+                <a16:creationId xmlns:a16="http://schemas.microsoft.com/office/drawing/2014/main" id="{9B9A0C58-AEBD-4694-8DE7-26BA7C20C836}"/>
               </a:ext>
             </a:extLst>
           </p:cNvPr>
@@ -21386,10 +20936,10 @@
       </p:sp>
       <p:sp>
         <p:nvSpPr>
-          <p:cNvPr id="30" name="">
-            <a:extLst xmlns:a="http://schemas.openxmlformats.org/drawingml/2006/main">
-              <a:ext uri="{FF2B5EF4-FFF2-40B4-BE49-F238E27FC236}">
-                <a16:creationId xmlns:a16="http://schemas.microsoft.com/office/drawing/2014/main" id="{DE3873BA-5F3C-4DA6-8AAF-176F49836CFE}"/>
+          <p:cNvPr id="29" name="">
+            <a:extLst xmlns:a="http://schemas.openxmlformats.org/drawingml/2006/main">
+              <a:ext uri="{FF2B5EF4-FFF2-40B4-BE49-F238E27FC236}">
+                <a16:creationId xmlns:a16="http://schemas.microsoft.com/office/drawing/2014/main" id="{4EC3E7AF-113D-4A49-824D-BD67E67D7232}"/>
               </a:ext>
             </a:extLst>
           </p:cNvPr>
@@ -21421,10 +20971,10 @@
       </p:sp>
       <p:sp>
         <p:nvSpPr>
-          <p:cNvPr id="31" name="">
-            <a:extLst xmlns:a="http://schemas.openxmlformats.org/drawingml/2006/main">
-              <a:ext uri="{FF2B5EF4-FFF2-40B4-BE49-F238E27FC236}">
-                <a16:creationId xmlns:a16="http://schemas.microsoft.com/office/drawing/2014/main" id="{86F4C5FE-8F79-4162-9179-8454846FEEC0}"/>
+          <p:cNvPr id="30" name="">
+            <a:extLst xmlns:a="http://schemas.openxmlformats.org/drawingml/2006/main">
+              <a:ext uri="{FF2B5EF4-FFF2-40B4-BE49-F238E27FC236}">
+                <a16:creationId xmlns:a16="http://schemas.microsoft.com/office/drawing/2014/main" id="{D9CE5809-E7FF-4400-9F55-84E47A0E0985}"/>
               </a:ext>
             </a:extLst>
           </p:cNvPr>
@@ -21456,10 +21006,10 @@
       </p:sp>
       <p:sp>
         <p:nvSpPr>
-          <p:cNvPr id="32" name="">
-            <a:extLst xmlns:a="http://schemas.openxmlformats.org/drawingml/2006/main">
-              <a:ext uri="{FF2B5EF4-FFF2-40B4-BE49-F238E27FC236}">
-                <a16:creationId xmlns:a16="http://schemas.microsoft.com/office/drawing/2014/main" id="{243E8319-6672-42FA-984C-ACC53E8FF4C5}"/>
+          <p:cNvPr id="31" name="">
+            <a:extLst xmlns:a="http://schemas.openxmlformats.org/drawingml/2006/main">
+              <a:ext uri="{FF2B5EF4-FFF2-40B4-BE49-F238E27FC236}">
+                <a16:creationId xmlns:a16="http://schemas.microsoft.com/office/drawing/2014/main" id="{218A7CF8-E4E1-4FFB-9795-002AA4FC02FC}"/>
               </a:ext>
             </a:extLst>
           </p:cNvPr>
@@ -21514,10 +21064,10 @@
       </p:sp>
       <p:sp>
         <p:nvSpPr>
-          <p:cNvPr id="33" name="">
-            <a:extLst xmlns:a="http://schemas.openxmlformats.org/drawingml/2006/main">
-              <a:ext uri="{FF2B5EF4-FFF2-40B4-BE49-F238E27FC236}">
-                <a16:creationId xmlns:a16="http://schemas.microsoft.com/office/drawing/2014/main" id="{C2727B37-8620-41EA-B963-04036CB170D4}"/>
+          <p:cNvPr id="32" name="">
+            <a:extLst xmlns:a="http://schemas.openxmlformats.org/drawingml/2006/main">
+              <a:ext uri="{FF2B5EF4-FFF2-40B4-BE49-F238E27FC236}">
+                <a16:creationId xmlns:a16="http://schemas.microsoft.com/office/drawing/2014/main" id="{73BC0608-1B18-4777-A0B5-487C4ABD145B}"/>
               </a:ext>
             </a:extLst>
           </p:cNvPr>
@@ -21573,7 +21123,7 @@
     </p:spTree>
     <p:extLst>
       <p:ext uri="{BB962C8B-B14F-4D97-AF65-F5344CB8AC3E}">
-        <p14:creationId xmlns:p14="http://schemas.microsoft.com/office/powerpoint/2010/main" val="2085275121"/>
+        <p14:creationId xmlns:p14="http://schemas.microsoft.com/office/powerpoint/2010/main" val="171149207"/>
       </p:ext>
     </p:extLst>
   </p:cSld>

--- a/collections/organoid/presentation/brain-organoid-question-journey/outputs/output.pptx
+++ b/collections/organoid/presentation/brain-organoid-question-journey/outputs/output.pptx
@@ -2,21 +2,21 @@
 <file path=ppt/presentation.xml><?xml version="1.0" encoding="utf-8"?>
 <p:presentation xmlns:p="http://schemas.openxmlformats.org/presentationml/2006/main">
   <p:sldMasterIdLst>
-    <p:sldMasterId xmlns:r="http://schemas.openxmlformats.org/officeDocument/2006/relationships" id="2147483648" r:id="Rb88a1a25143b4751"/>
+    <p:sldMasterId xmlns:r="http://schemas.openxmlformats.org/officeDocument/2006/relationships" id="2147483648" r:id="R9411b49d911c4ffa"/>
   </p:sldMasterIdLst>
   <p:notesMasterIdLst>
-    <p:notesMasterId xmlns:r="http://schemas.openxmlformats.org/officeDocument/2006/relationships" r:id="R441e14e826e14265"/>
+    <p:notesMasterId xmlns:r="http://schemas.openxmlformats.org/officeDocument/2006/relationships" r:id="R4a10f5f0132848bc"/>
   </p:notesMasterIdLst>
   <p:sldIdLst>
-    <p:sldId xmlns:r="http://schemas.openxmlformats.org/officeDocument/2006/relationships" id="256" r:id="Rcd351aebe51b4fa0"/>
-    <p:sldId xmlns:r="http://schemas.openxmlformats.org/officeDocument/2006/relationships" id="257" r:id="R84e8a18e1fb8465c"/>
-    <p:sldId xmlns:r="http://schemas.openxmlformats.org/officeDocument/2006/relationships" id="258" r:id="R4858ec7312bc4939"/>
-    <p:sldId xmlns:r="http://schemas.openxmlformats.org/officeDocument/2006/relationships" id="259" r:id="Rb1146354b7a54c53"/>
-    <p:sldId xmlns:r="http://schemas.openxmlformats.org/officeDocument/2006/relationships" id="260" r:id="R92b1f070c99c49a3"/>
-    <p:sldId xmlns:r="http://schemas.openxmlformats.org/officeDocument/2006/relationships" id="261" r:id="Ra1bafc5ff72c432c"/>
-    <p:sldId xmlns:r="http://schemas.openxmlformats.org/officeDocument/2006/relationships" id="262" r:id="Rd4588126fc374c78"/>
-    <p:sldId xmlns:r="http://schemas.openxmlformats.org/officeDocument/2006/relationships" id="263" r:id="Re3be955824284323"/>
-    <p:sldId xmlns:r="http://schemas.openxmlformats.org/officeDocument/2006/relationships" id="264" r:id="R5e3749ef50d343ef"/>
+    <p:sldId xmlns:r="http://schemas.openxmlformats.org/officeDocument/2006/relationships" id="256" r:id="Rd97ccbd616524e05"/>
+    <p:sldId xmlns:r="http://schemas.openxmlformats.org/officeDocument/2006/relationships" id="257" r:id="R07513fe56101475c"/>
+    <p:sldId xmlns:r="http://schemas.openxmlformats.org/officeDocument/2006/relationships" id="258" r:id="R7e482af0de0e46be"/>
+    <p:sldId xmlns:r="http://schemas.openxmlformats.org/officeDocument/2006/relationships" id="259" r:id="R8b03ee8254ac4145"/>
+    <p:sldId xmlns:r="http://schemas.openxmlformats.org/officeDocument/2006/relationships" id="260" r:id="R6281fee239bd49e1"/>
+    <p:sldId xmlns:r="http://schemas.openxmlformats.org/officeDocument/2006/relationships" id="261" r:id="R58fa1c58da864025"/>
+    <p:sldId xmlns:r="http://schemas.openxmlformats.org/officeDocument/2006/relationships" id="262" r:id="R5ad69c205bc84069"/>
+    <p:sldId xmlns:r="http://schemas.openxmlformats.org/officeDocument/2006/relationships" id="263" r:id="Rf648a433370942a2"/>
+    <p:sldId xmlns:r="http://schemas.openxmlformats.org/officeDocument/2006/relationships" id="264" r:id="R90e94cfa39724507"/>
   </p:sldIdLst>
   <p:sldSz cx="12192000" cy="6858000"/>
   <p:notesSz cx="6858000" cy="9144000"/>
@@ -1537,7 +1537,7 @@
           <p:cNvPr id="1" name="Title 1">
             <a:extLst xmlns:a="http://schemas.openxmlformats.org/drawingml/2006/main">
               <a:ext uri="{FF2B5EF4-FFF2-40B4-BE49-F238E27FC236}">
-                <a16:creationId xmlns:a16="http://schemas.microsoft.com/office/drawing/2014/main" id="{8AF621C7-F94B-4768-9AC2-F1012E25D495}"/>
+                <a16:creationId xmlns:a16="http://schemas.microsoft.com/office/drawing/2014/main" id="{6917B465-ED37-4A53-9A67-196A4534E31E}"/>
               </a:ext>
             </a:extLst>
           </p:cNvPr>
@@ -1568,7 +1568,7 @@
           <p:cNvPr id="2" name="Subtitle 2">
             <a:extLst xmlns:a="http://schemas.openxmlformats.org/drawingml/2006/main">
               <a:ext uri="{FF2B5EF4-FFF2-40B4-BE49-F238E27FC236}">
-                <a16:creationId xmlns:a16="http://schemas.microsoft.com/office/drawing/2014/main" id="{648AA70F-8157-4479-B8F4-CD13E46638E5}"/>
+                <a16:creationId xmlns:a16="http://schemas.microsoft.com/office/drawing/2014/main" id="{447E73B5-E6F5-4578-A4B2-598EA8EE43D0}"/>
               </a:ext>
             </a:extLst>
           </p:cNvPr>
@@ -1631,7 +1631,7 @@
           <p:cNvPr id="3" name="Date Placeholder 3">
             <a:extLst xmlns:a="http://schemas.openxmlformats.org/drawingml/2006/main">
               <a:ext uri="{FF2B5EF4-FFF2-40B4-BE49-F238E27FC236}">
-                <a16:creationId xmlns:a16="http://schemas.microsoft.com/office/drawing/2014/main" id="{A273723D-83A1-4075-B6B1-1B9BB638041E}"/>
+                <a16:creationId xmlns:a16="http://schemas.microsoft.com/office/drawing/2014/main" id="{6376AB7A-FA76-4D5D-8E25-CC2AC92F26F5}"/>
               </a:ext>
             </a:extLst>
           </p:cNvPr>
@@ -1652,7 +1652,7 @@
           <p:cNvPr id="4" name="Footer Placeholder 4">
             <a:extLst xmlns:a="http://schemas.openxmlformats.org/drawingml/2006/main">
               <a:ext uri="{FF2B5EF4-FFF2-40B4-BE49-F238E27FC236}">
-                <a16:creationId xmlns:a16="http://schemas.microsoft.com/office/drawing/2014/main" id="{7CBA711E-8E10-41BC-A445-D3A111FDC836}"/>
+                <a16:creationId xmlns:a16="http://schemas.microsoft.com/office/drawing/2014/main" id="{264D090E-4F72-4333-BE47-05B540B9B08F}"/>
               </a:ext>
             </a:extLst>
           </p:cNvPr>
@@ -1673,7 +1673,7 @@
           <p:cNvPr id="5" name="Slide Number Placeholder 5">
             <a:extLst xmlns:a="http://schemas.openxmlformats.org/drawingml/2006/main">
               <a:ext uri="{FF2B5EF4-FFF2-40B4-BE49-F238E27FC236}">
-                <a16:creationId xmlns:a16="http://schemas.microsoft.com/office/drawing/2014/main" id="{38BDF79F-9F16-4FEE-B72E-1F506FE9EBEC}"/>
+                <a16:creationId xmlns:a16="http://schemas.microsoft.com/office/drawing/2014/main" id="{039602EF-25C6-4B7F-BD52-B0182DC44CC0}"/>
               </a:ext>
             </a:extLst>
           </p:cNvPr>
@@ -1716,7 +1716,7 @@
           <p:cNvPr id="1" name="Slide Number Placeholder 5">
             <a:extLst xmlns:a="http://schemas.openxmlformats.org/drawingml/2006/main">
               <a:ext uri="{FF2B5EF4-FFF2-40B4-BE49-F238E27FC236}">
-                <a16:creationId xmlns:a16="http://schemas.microsoft.com/office/drawing/2014/main" id="{BE2B7849-1DBE-45F5-91FA-164AAD4B63DC}"/>
+                <a16:creationId xmlns:a16="http://schemas.microsoft.com/office/drawing/2014/main" id="{8B3098DD-8220-477B-9D33-80864FE90A81}"/>
               </a:ext>
             </a:extLst>
           </p:cNvPr>
@@ -1755,7 +1755,7 @@
   </p:cSld>
   <p:clrMap bg1="lt1" tx1="dk1" bg2="lt2" tx2="dk2" accent1="accent1" accent2="accent2" accent3="accent3" accent4="accent4" accent5="accent5" accent6="accent6" hlink="hlink" folHlink="folHlink"/>
   <p:sldLayoutIdLst>
-    <p:sldLayoutId xmlns:r="http://schemas.openxmlformats.org/officeDocument/2006/relationships" id="2147483649" r:id="Red90d854311b43f9"/>
+    <p:sldLayoutId xmlns:r="http://schemas.openxmlformats.org/officeDocument/2006/relationships" id="2147483649" r:id="R0458ea5dab604138"/>
   </p:sldLayoutIdLst>
   <p:txStyles>
     <p:titleStyle>
@@ -2061,7 +2061,7 @@
           <p:cNvPr id="1" name="Slide Number Placeholder 5">
             <a:extLst xmlns:a="http://schemas.openxmlformats.org/drawingml/2006/main">
               <a:ext uri="{FF2B5EF4-FFF2-40B4-BE49-F238E27FC236}">
-                <a16:creationId xmlns:a16="http://schemas.microsoft.com/office/drawing/2014/main" id="{38BDF79F-9F16-4FEE-B72E-1F506FE9EBEC}"/>
+                <a16:creationId xmlns:a16="http://schemas.microsoft.com/office/drawing/2014/main" id="{039602EF-25C6-4B7F-BD52-B0182DC44CC0}"/>
               </a:ext>
             </a:extLst>
           </p:cNvPr>
@@ -2097,7 +2097,7 @@
           <p:nvPr/>
         </p:nvPicPr>
         <p:blipFill>
-          <a:blip xmlns:r="http://schemas.openxmlformats.org/officeDocument/2006/relationships" xmlns:a="http://schemas.openxmlformats.org/drawingml/2006/main" r:embed="Rf60bff4d2b86457c"/>
+          <a:blip xmlns:r="http://schemas.openxmlformats.org/officeDocument/2006/relationships" xmlns:a="http://schemas.openxmlformats.org/drawingml/2006/main" r:embed="R5764bff5d4834a0b"/>
           <a:srcRect xmlns:a="http://schemas.openxmlformats.org/drawingml/2006/main" l="0" t="21875" r="0" b="21875"/>
           <a:stretch xmlns:a="http://schemas.openxmlformats.org/drawingml/2006/main">
             <a:fillRect l="0" t="0" r="0" b="0"/>
@@ -2118,7 +2118,7 @@
           <p:cNvPr id="3" name="">
             <a:extLst xmlns:a="http://schemas.openxmlformats.org/drawingml/2006/main">
               <a:ext uri="{FF2B5EF4-FFF2-40B4-BE49-F238E27FC236}">
-                <a16:creationId xmlns:a16="http://schemas.microsoft.com/office/drawing/2014/main" id="{9F1FC59B-A6D8-460E-A372-B98EFC8712D8}"/>
+                <a16:creationId xmlns:a16="http://schemas.microsoft.com/office/drawing/2014/main" id="{55C23355-0985-47E0-99A3-6D399A48CD05}"/>
               </a:ext>
             </a:extLst>
           </p:cNvPr>
@@ -2153,7 +2153,7 @@
           <p:cNvPr id="4" name="">
             <a:extLst xmlns:a="http://schemas.openxmlformats.org/drawingml/2006/main">
               <a:ext uri="{FF2B5EF4-FFF2-40B4-BE49-F238E27FC236}">
-                <a16:creationId xmlns:a16="http://schemas.microsoft.com/office/drawing/2014/main" id="{6DD5B498-AA2E-4B75-BDF8-5EC328D886DC}"/>
+                <a16:creationId xmlns:a16="http://schemas.microsoft.com/office/drawing/2014/main" id="{03D66CCA-C44B-4D03-A2BA-5BB7331F42FB}"/>
               </a:ext>
             </a:extLst>
           </p:cNvPr>
@@ -2188,7 +2188,7 @@
           <p:cNvPr id="5" name="">
             <a:extLst xmlns:a="http://schemas.openxmlformats.org/drawingml/2006/main">
               <a:ext uri="{FF2B5EF4-FFF2-40B4-BE49-F238E27FC236}">
-                <a16:creationId xmlns:a16="http://schemas.microsoft.com/office/drawing/2014/main" id="{8F859939-8ABD-4668-92A6-807048A70AC8}"/>
+                <a16:creationId xmlns:a16="http://schemas.microsoft.com/office/drawing/2014/main" id="{8EDAEF8C-7819-4DBC-BCE9-B31140206E38}"/>
               </a:ext>
             </a:extLst>
           </p:cNvPr>
@@ -2225,7 +2225,7 @@
           <p:cNvPr id="6" name="">
             <a:extLst xmlns:a="http://schemas.openxmlformats.org/drawingml/2006/main">
               <a:ext uri="{FF2B5EF4-FFF2-40B4-BE49-F238E27FC236}">
-                <a16:creationId xmlns:a16="http://schemas.microsoft.com/office/drawing/2014/main" id="{0D156D27-6171-4A7F-ABDB-3EB87A783583}"/>
+                <a16:creationId xmlns:a16="http://schemas.microsoft.com/office/drawing/2014/main" id="{C5F073AB-3A1C-4C0D-A209-11BF965FFDC8}"/>
               </a:ext>
             </a:extLst>
           </p:cNvPr>
@@ -2262,7 +2262,7 @@
           <p:cNvPr id="7" name="">
             <a:extLst xmlns:a="http://schemas.openxmlformats.org/drawingml/2006/main">
               <a:ext uri="{FF2B5EF4-FFF2-40B4-BE49-F238E27FC236}">
-                <a16:creationId xmlns:a16="http://schemas.microsoft.com/office/drawing/2014/main" id="{B86E36F7-4C32-4867-9694-CAC7697427C0}"/>
+                <a16:creationId xmlns:a16="http://schemas.microsoft.com/office/drawing/2014/main" id="{0441B1B9-D51F-4438-92EC-8ECB80B9CF6A}"/>
               </a:ext>
             </a:extLst>
           </p:cNvPr>
@@ -2299,7 +2299,7 @@
           <p:cNvPr id="8" name="">
             <a:extLst xmlns:a="http://schemas.openxmlformats.org/drawingml/2006/main">
               <a:ext uri="{FF2B5EF4-FFF2-40B4-BE49-F238E27FC236}">
-                <a16:creationId xmlns:a16="http://schemas.microsoft.com/office/drawing/2014/main" id="{FE6BD932-0AF1-4005-92BC-092DFA1090EE}"/>
+                <a16:creationId xmlns:a16="http://schemas.microsoft.com/office/drawing/2014/main" id="{24E3D9BA-3374-43AF-9818-EFD06C3ADB79}"/>
               </a:ext>
             </a:extLst>
           </p:cNvPr>
@@ -2336,7 +2336,7 @@
           <p:cNvPr id="9" name="">
             <a:extLst xmlns:a="http://schemas.openxmlformats.org/drawingml/2006/main">
               <a:ext uri="{FF2B5EF4-FFF2-40B4-BE49-F238E27FC236}">
-                <a16:creationId xmlns:a16="http://schemas.microsoft.com/office/drawing/2014/main" id="{772DAEEC-D5EF-4A3A-BFDB-D617E4E4B627}"/>
+                <a16:creationId xmlns:a16="http://schemas.microsoft.com/office/drawing/2014/main" id="{515AA8B3-46F4-4AA4-BF53-F87BD625C89D}"/>
               </a:ext>
             </a:extLst>
           </p:cNvPr>
@@ -2371,7 +2371,7 @@
           <p:cNvPr id="10" name="">
             <a:extLst xmlns:a="http://schemas.openxmlformats.org/drawingml/2006/main">
               <a:ext uri="{FF2B5EF4-FFF2-40B4-BE49-F238E27FC236}">
-                <a16:creationId xmlns:a16="http://schemas.microsoft.com/office/drawing/2014/main" id="{65E96BF2-1483-4BA7-94A6-F001108AB06D}"/>
+                <a16:creationId xmlns:a16="http://schemas.microsoft.com/office/drawing/2014/main" id="{CF6F009B-6612-486F-9B46-DB087447451B}"/>
               </a:ext>
             </a:extLst>
           </p:cNvPr>
@@ -2429,7 +2429,7 @@
           <p:cNvPr id="11" name="">
             <a:extLst xmlns:a="http://schemas.openxmlformats.org/drawingml/2006/main">
               <a:ext uri="{FF2B5EF4-FFF2-40B4-BE49-F238E27FC236}">
-                <a16:creationId xmlns:a16="http://schemas.microsoft.com/office/drawing/2014/main" id="{588AC4A2-CBFD-4405-8603-CEA6AC4907F0}"/>
+                <a16:creationId xmlns:a16="http://schemas.microsoft.com/office/drawing/2014/main" id="{77B953F4-3803-48F3-82F7-FA258B82D930}"/>
               </a:ext>
             </a:extLst>
           </p:cNvPr>
@@ -2504,7 +2504,7 @@
           <p:cNvPr id="12" name="">
             <a:extLst xmlns:a="http://schemas.openxmlformats.org/drawingml/2006/main">
               <a:ext uri="{FF2B5EF4-FFF2-40B4-BE49-F238E27FC236}">
-                <a16:creationId xmlns:a16="http://schemas.microsoft.com/office/drawing/2014/main" id="{4EE983D0-D5FB-41EA-A75D-2D55AC6EFBE4}"/>
+                <a16:creationId xmlns:a16="http://schemas.microsoft.com/office/drawing/2014/main" id="{3FACFB1B-D1DE-4000-B700-0CE87D9C8BDB}"/>
               </a:ext>
             </a:extLst>
           </p:cNvPr>
@@ -2579,7 +2579,7 @@
           <p:cNvPr id="13" name="">
             <a:extLst xmlns:a="http://schemas.openxmlformats.org/drawingml/2006/main">
               <a:ext uri="{FF2B5EF4-FFF2-40B4-BE49-F238E27FC236}">
-                <a16:creationId xmlns:a16="http://schemas.microsoft.com/office/drawing/2014/main" id="{A18CCF79-F5C4-41E5-A2B4-AA924790BFB3}"/>
+                <a16:creationId xmlns:a16="http://schemas.microsoft.com/office/drawing/2014/main" id="{0908FAF6-2BFF-49FC-8D00-BF914A86EBC3}"/>
               </a:ext>
             </a:extLst>
           </p:cNvPr>
@@ -2616,7 +2616,7 @@
           <p:cNvPr id="14" name="">
             <a:extLst xmlns:a="http://schemas.openxmlformats.org/drawingml/2006/main">
               <a:ext uri="{FF2B5EF4-FFF2-40B4-BE49-F238E27FC236}">
-                <a16:creationId xmlns:a16="http://schemas.microsoft.com/office/drawing/2014/main" id="{0F95EEC8-B83F-40D6-BED4-BB35B07FE4CD}"/>
+                <a16:creationId xmlns:a16="http://schemas.microsoft.com/office/drawing/2014/main" id="{98F1741E-E901-4325-91E6-339D3E40A428}"/>
               </a:ext>
             </a:extLst>
           </p:cNvPr>
@@ -2674,7 +2674,7 @@
           <p:cNvPr id="15" name="">
             <a:extLst xmlns:a="http://schemas.openxmlformats.org/drawingml/2006/main">
               <a:ext uri="{FF2B5EF4-FFF2-40B4-BE49-F238E27FC236}">
-                <a16:creationId xmlns:a16="http://schemas.microsoft.com/office/drawing/2014/main" id="{6327A68B-EB87-4FA8-AD57-090A3FB8FE7B}"/>
+                <a16:creationId xmlns:a16="http://schemas.microsoft.com/office/drawing/2014/main" id="{3FB34F59-B2C8-42B2-BAF5-00BC86E840EA}"/>
               </a:ext>
             </a:extLst>
           </p:cNvPr>
@@ -2709,7 +2709,7 @@
           <p:cNvPr id="16" name="">
             <a:extLst xmlns:a="http://schemas.openxmlformats.org/drawingml/2006/main">
               <a:ext uri="{FF2B5EF4-FFF2-40B4-BE49-F238E27FC236}">
-                <a16:creationId xmlns:a16="http://schemas.microsoft.com/office/drawing/2014/main" id="{5E8E7AC8-18A7-4615-B7D6-4A4974BC5E35}"/>
+                <a16:creationId xmlns:a16="http://schemas.microsoft.com/office/drawing/2014/main" id="{2B7C7A57-F078-41ED-9779-B4D2104D2259}"/>
               </a:ext>
             </a:extLst>
           </p:cNvPr>
@@ -2744,7 +2744,7 @@
           <p:cNvPr id="17" name="">
             <a:extLst xmlns:a="http://schemas.openxmlformats.org/drawingml/2006/main">
               <a:ext uri="{FF2B5EF4-FFF2-40B4-BE49-F238E27FC236}">
-                <a16:creationId xmlns:a16="http://schemas.microsoft.com/office/drawing/2014/main" id="{843B3C93-729C-4BEA-AE31-37E6E7DD60A2}"/>
+                <a16:creationId xmlns:a16="http://schemas.microsoft.com/office/drawing/2014/main" id="{E7AED728-F103-45A3-ABB6-1B950F5A1AD0}"/>
               </a:ext>
             </a:extLst>
           </p:cNvPr>
@@ -2798,7 +2798,7 @@
           <p:cNvPr id="18" name="">
             <a:extLst xmlns:a="http://schemas.openxmlformats.org/drawingml/2006/main">
               <a:ext uri="{FF2B5EF4-FFF2-40B4-BE49-F238E27FC236}">
-                <a16:creationId xmlns:a16="http://schemas.microsoft.com/office/drawing/2014/main" id="{A262D0F9-9D7A-4BAF-9A2F-CBBD7B738EE9}"/>
+                <a16:creationId xmlns:a16="http://schemas.microsoft.com/office/drawing/2014/main" id="{13EFBCE3-F915-46B2-B520-F4A07827CF5A}"/>
               </a:ext>
             </a:extLst>
           </p:cNvPr>
@@ -2856,7 +2856,7 @@
           <p:cNvPr id="19" name="">
             <a:extLst xmlns:a="http://schemas.openxmlformats.org/drawingml/2006/main">
               <a:ext uri="{FF2B5EF4-FFF2-40B4-BE49-F238E27FC236}">
-                <a16:creationId xmlns:a16="http://schemas.microsoft.com/office/drawing/2014/main" id="{58D5C3EA-9E7D-4E78-A5DF-CABB392F10DC}"/>
+                <a16:creationId xmlns:a16="http://schemas.microsoft.com/office/drawing/2014/main" id="{3C9D2F44-8B33-4D59-BFED-C989274CABDB}"/>
               </a:ext>
             </a:extLst>
           </p:cNvPr>
@@ -2931,7 +2931,7 @@
           <p:cNvPr id="20" name="">
             <a:extLst xmlns:a="http://schemas.openxmlformats.org/drawingml/2006/main">
               <a:ext uri="{FF2B5EF4-FFF2-40B4-BE49-F238E27FC236}">
-                <a16:creationId xmlns:a16="http://schemas.microsoft.com/office/drawing/2014/main" id="{F9EF71F5-981E-401C-BA2D-C85E728862EB}"/>
+                <a16:creationId xmlns:a16="http://schemas.microsoft.com/office/drawing/2014/main" id="{577F7523-1D0E-4012-8091-B47B5EC8496F}"/>
               </a:ext>
             </a:extLst>
           </p:cNvPr>
@@ -2966,7 +2966,7 @@
           <p:cNvPr id="21" name="">
             <a:extLst xmlns:a="http://schemas.openxmlformats.org/drawingml/2006/main">
               <a:ext uri="{FF2B5EF4-FFF2-40B4-BE49-F238E27FC236}">
-                <a16:creationId xmlns:a16="http://schemas.microsoft.com/office/drawing/2014/main" id="{F703BC64-88BF-4FB7-BB87-370C5D25306D}"/>
+                <a16:creationId xmlns:a16="http://schemas.microsoft.com/office/drawing/2014/main" id="{27A58A45-9993-4EC6-B5BE-C7EEF11AACE5}"/>
               </a:ext>
             </a:extLst>
           </p:cNvPr>
@@ -3001,7 +3001,7 @@
           <p:cNvPr id="22" name="">
             <a:extLst xmlns:a="http://schemas.openxmlformats.org/drawingml/2006/main">
               <a:ext uri="{FF2B5EF4-FFF2-40B4-BE49-F238E27FC236}">
-                <a16:creationId xmlns:a16="http://schemas.microsoft.com/office/drawing/2014/main" id="{F0D76B4E-ECF9-4D48-92CE-C7B75AAD8A3C}"/>
+                <a16:creationId xmlns:a16="http://schemas.microsoft.com/office/drawing/2014/main" id="{84B2CCBC-679A-44A3-BCF4-A6848EE20CC0}"/>
               </a:ext>
             </a:extLst>
           </p:cNvPr>
@@ -3055,7 +3055,7 @@
           <p:cNvPr id="23" name="">
             <a:extLst xmlns:a="http://schemas.openxmlformats.org/drawingml/2006/main">
               <a:ext uri="{FF2B5EF4-FFF2-40B4-BE49-F238E27FC236}">
-                <a16:creationId xmlns:a16="http://schemas.microsoft.com/office/drawing/2014/main" id="{F1465740-70B2-4F24-866D-539D42CEBE57}"/>
+                <a16:creationId xmlns:a16="http://schemas.microsoft.com/office/drawing/2014/main" id="{696BC462-9CFD-44FD-B7D2-11B41E977243}"/>
               </a:ext>
             </a:extLst>
           </p:cNvPr>
@@ -3113,7 +3113,7 @@
           <p:cNvPr id="24" name="">
             <a:extLst xmlns:a="http://schemas.openxmlformats.org/drawingml/2006/main">
               <a:ext uri="{FF2B5EF4-FFF2-40B4-BE49-F238E27FC236}">
-                <a16:creationId xmlns:a16="http://schemas.microsoft.com/office/drawing/2014/main" id="{9B388E07-00EB-4A99-8A5C-D85635225797}"/>
+                <a16:creationId xmlns:a16="http://schemas.microsoft.com/office/drawing/2014/main" id="{11F3FAD2-526A-46DB-969B-DACF0F9CA92C}"/>
               </a:ext>
             </a:extLst>
           </p:cNvPr>
@@ -3188,7 +3188,7 @@
           <p:cNvPr id="25" name="">
             <a:extLst xmlns:a="http://schemas.openxmlformats.org/drawingml/2006/main">
               <a:ext uri="{FF2B5EF4-FFF2-40B4-BE49-F238E27FC236}">
-                <a16:creationId xmlns:a16="http://schemas.microsoft.com/office/drawing/2014/main" id="{F38F5299-2E03-4D75-BC73-EC0EE55D2AB4}"/>
+                <a16:creationId xmlns:a16="http://schemas.microsoft.com/office/drawing/2014/main" id="{7DA6BB9D-EBC2-4C46-8F09-84C9A11B6511}"/>
               </a:ext>
             </a:extLst>
           </p:cNvPr>
@@ -3223,7 +3223,7 @@
           <p:cNvPr id="26" name="">
             <a:extLst xmlns:a="http://schemas.openxmlformats.org/drawingml/2006/main">
               <a:ext uri="{FF2B5EF4-FFF2-40B4-BE49-F238E27FC236}">
-                <a16:creationId xmlns:a16="http://schemas.microsoft.com/office/drawing/2014/main" id="{D3907CAB-283D-4C7E-ADA0-9318CF37E867}"/>
+                <a16:creationId xmlns:a16="http://schemas.microsoft.com/office/drawing/2014/main" id="{41CD21D5-281A-432B-89EA-8330364C6ECE}"/>
               </a:ext>
             </a:extLst>
           </p:cNvPr>
@@ -3258,7 +3258,7 @@
           <p:cNvPr id="27" name="">
             <a:extLst xmlns:a="http://schemas.openxmlformats.org/drawingml/2006/main">
               <a:ext uri="{FF2B5EF4-FFF2-40B4-BE49-F238E27FC236}">
-                <a16:creationId xmlns:a16="http://schemas.microsoft.com/office/drawing/2014/main" id="{A90C37AA-79CE-4C71-88B8-4EFAAE146A1B}"/>
+                <a16:creationId xmlns:a16="http://schemas.microsoft.com/office/drawing/2014/main" id="{5F2F2B93-3668-4D79-99C9-A86E06038C2D}"/>
               </a:ext>
             </a:extLst>
           </p:cNvPr>
@@ -3312,7 +3312,7 @@
           <p:cNvPr id="28" name="">
             <a:extLst xmlns:a="http://schemas.openxmlformats.org/drawingml/2006/main">
               <a:ext uri="{FF2B5EF4-FFF2-40B4-BE49-F238E27FC236}">
-                <a16:creationId xmlns:a16="http://schemas.microsoft.com/office/drawing/2014/main" id="{15687EE4-0E6F-48BB-B856-6344A789B3F6}"/>
+                <a16:creationId xmlns:a16="http://schemas.microsoft.com/office/drawing/2014/main" id="{752685D6-19C8-4B13-AFBC-964E3BC7ED8C}"/>
               </a:ext>
             </a:extLst>
           </p:cNvPr>
@@ -3370,7 +3370,7 @@
           <p:cNvPr id="29" name="">
             <a:extLst xmlns:a="http://schemas.openxmlformats.org/drawingml/2006/main">
               <a:ext uri="{FF2B5EF4-FFF2-40B4-BE49-F238E27FC236}">
-                <a16:creationId xmlns:a16="http://schemas.microsoft.com/office/drawing/2014/main" id="{C795AFFB-00D9-4610-B58E-B840D1DD4E60}"/>
+                <a16:creationId xmlns:a16="http://schemas.microsoft.com/office/drawing/2014/main" id="{E4152A85-0A14-47CD-8DB8-6CE3DDD880C7}"/>
               </a:ext>
             </a:extLst>
           </p:cNvPr>
@@ -3445,7 +3445,7 @@
           <p:cNvPr id="30" name="">
             <a:extLst xmlns:a="http://schemas.openxmlformats.org/drawingml/2006/main">
               <a:ext uri="{FF2B5EF4-FFF2-40B4-BE49-F238E27FC236}">
-                <a16:creationId xmlns:a16="http://schemas.microsoft.com/office/drawing/2014/main" id="{066F5F5C-0E69-42E3-B514-FBA980F1CE05}"/>
+                <a16:creationId xmlns:a16="http://schemas.microsoft.com/office/drawing/2014/main" id="{2B45905A-3026-4F3C-B421-CBB010B52071}"/>
               </a:ext>
             </a:extLst>
           </p:cNvPr>
@@ -3480,7 +3480,7 @@
           <p:cNvPr id="31" name="">
             <a:extLst xmlns:a="http://schemas.openxmlformats.org/drawingml/2006/main">
               <a:ext uri="{FF2B5EF4-FFF2-40B4-BE49-F238E27FC236}">
-                <a16:creationId xmlns:a16="http://schemas.microsoft.com/office/drawing/2014/main" id="{55B486F0-C4CE-4C25-B896-344F54E46268}"/>
+                <a16:creationId xmlns:a16="http://schemas.microsoft.com/office/drawing/2014/main" id="{65B3EDD4-A3F3-4484-9D9F-556E2C499534}"/>
               </a:ext>
             </a:extLst>
           </p:cNvPr>
@@ -3515,7 +3515,7 @@
           <p:cNvPr id="32" name="">
             <a:extLst xmlns:a="http://schemas.openxmlformats.org/drawingml/2006/main">
               <a:ext uri="{FF2B5EF4-FFF2-40B4-BE49-F238E27FC236}">
-                <a16:creationId xmlns:a16="http://schemas.microsoft.com/office/drawing/2014/main" id="{D03342EC-66C0-4F02-9BCC-D1AAD6C8AED7}"/>
+                <a16:creationId xmlns:a16="http://schemas.microsoft.com/office/drawing/2014/main" id="{76F83803-9F20-4A8A-A47E-4DE98556C87A}"/>
               </a:ext>
             </a:extLst>
           </p:cNvPr>
@@ -3569,7 +3569,7 @@
           <p:cNvPr id="33" name="">
             <a:extLst xmlns:a="http://schemas.openxmlformats.org/drawingml/2006/main">
               <a:ext uri="{FF2B5EF4-FFF2-40B4-BE49-F238E27FC236}">
-                <a16:creationId xmlns:a16="http://schemas.microsoft.com/office/drawing/2014/main" id="{256ED97F-4511-4979-B764-20826B4D73C5}"/>
+                <a16:creationId xmlns:a16="http://schemas.microsoft.com/office/drawing/2014/main" id="{15D709CE-4DB0-4927-BFAF-5A5B57D09B08}"/>
               </a:ext>
             </a:extLst>
           </p:cNvPr>
@@ -3627,7 +3627,7 @@
           <p:cNvPr id="34" name="">
             <a:extLst xmlns:a="http://schemas.openxmlformats.org/drawingml/2006/main">
               <a:ext uri="{FF2B5EF4-FFF2-40B4-BE49-F238E27FC236}">
-                <a16:creationId xmlns:a16="http://schemas.microsoft.com/office/drawing/2014/main" id="{B3D1F4AA-B616-4229-99E4-9594062A719A}"/>
+                <a16:creationId xmlns:a16="http://schemas.microsoft.com/office/drawing/2014/main" id="{523E68B2-2E25-48DF-B3A1-1953FF6B5EEE}"/>
               </a:ext>
             </a:extLst>
           </p:cNvPr>
@@ -3685,7 +3685,7 @@
           <p:cNvPr id="35" name="">
             <a:extLst xmlns:a="http://schemas.openxmlformats.org/drawingml/2006/main">
               <a:ext uri="{FF2B5EF4-FFF2-40B4-BE49-F238E27FC236}">
-                <a16:creationId xmlns:a16="http://schemas.microsoft.com/office/drawing/2014/main" id="{F3777401-0E4A-4CB7-933D-936FD126015C}"/>
+                <a16:creationId xmlns:a16="http://schemas.microsoft.com/office/drawing/2014/main" id="{B7A4A1F1-2396-438F-81D8-C74195C550E0}"/>
               </a:ext>
             </a:extLst>
           </p:cNvPr>
@@ -3720,7 +3720,7 @@
           <p:cNvPr id="36" name="">
             <a:extLst xmlns:a="http://schemas.openxmlformats.org/drawingml/2006/main">
               <a:ext uri="{FF2B5EF4-FFF2-40B4-BE49-F238E27FC236}">
-                <a16:creationId xmlns:a16="http://schemas.microsoft.com/office/drawing/2014/main" id="{95AC3342-A061-4173-A451-EA3C80D6EBD1}"/>
+                <a16:creationId xmlns:a16="http://schemas.microsoft.com/office/drawing/2014/main" id="{EECBAA50-1AB2-4B14-BDEF-01CB5DA60D3B}"/>
               </a:ext>
             </a:extLst>
           </p:cNvPr>
@@ -3755,7 +3755,7 @@
           <p:cNvPr id="37" name="">
             <a:extLst xmlns:a="http://schemas.openxmlformats.org/drawingml/2006/main">
               <a:ext uri="{FF2B5EF4-FFF2-40B4-BE49-F238E27FC236}">
-                <a16:creationId xmlns:a16="http://schemas.microsoft.com/office/drawing/2014/main" id="{21653D15-BD76-44E0-B8D9-CB1F64831758}"/>
+                <a16:creationId xmlns:a16="http://schemas.microsoft.com/office/drawing/2014/main" id="{DF0E9FFF-56E6-4B78-BEC9-3AF8E6FF2CA9}"/>
               </a:ext>
             </a:extLst>
           </p:cNvPr>
@@ -3790,7 +3790,7 @@
           <p:cNvPr id="38" name="">
             <a:extLst xmlns:a="http://schemas.openxmlformats.org/drawingml/2006/main">
               <a:ext uri="{FF2B5EF4-FFF2-40B4-BE49-F238E27FC236}">
-                <a16:creationId xmlns:a16="http://schemas.microsoft.com/office/drawing/2014/main" id="{5141AAE8-AAF4-4399-B400-0F10D9F506D2}"/>
+                <a16:creationId xmlns:a16="http://schemas.microsoft.com/office/drawing/2014/main" id="{3203FC25-C2BE-4B75-A934-8779B89E75C3}"/>
               </a:ext>
             </a:extLst>
           </p:cNvPr>
@@ -3844,7 +3844,7 @@
           <p:cNvPr id="39" name="">
             <a:extLst xmlns:a="http://schemas.openxmlformats.org/drawingml/2006/main">
               <a:ext uri="{FF2B5EF4-FFF2-40B4-BE49-F238E27FC236}">
-                <a16:creationId xmlns:a16="http://schemas.microsoft.com/office/drawing/2014/main" id="{6F2ED822-382A-4DF2-9DFD-111171EC680D}"/>
+                <a16:creationId xmlns:a16="http://schemas.microsoft.com/office/drawing/2014/main" id="{F7425BA9-A1CF-4B24-9E9B-E5FB2DE4F58B}"/>
               </a:ext>
             </a:extLst>
           </p:cNvPr>
@@ -3898,7 +3898,7 @@
           <p:cNvPr id="40" name="">
             <a:extLst xmlns:a="http://schemas.openxmlformats.org/drawingml/2006/main">
               <a:ext uri="{FF2B5EF4-FFF2-40B4-BE49-F238E27FC236}">
-                <a16:creationId xmlns:a16="http://schemas.microsoft.com/office/drawing/2014/main" id="{3A95D7A4-CF9D-4ABF-A5C0-5CC52547D08B}"/>
+                <a16:creationId xmlns:a16="http://schemas.microsoft.com/office/drawing/2014/main" id="{A2282E6F-2B2B-4DEB-A45D-9EB82E2EA161}"/>
               </a:ext>
             </a:extLst>
           </p:cNvPr>
@@ -3954,7 +3954,7 @@
     </p:spTree>
     <p:extLst>
       <p:ext uri="{BB962C8B-B14F-4D97-AF65-F5344CB8AC3E}">
-        <p14:creationId xmlns:p14="http://schemas.microsoft.com/office/powerpoint/2010/main" val="1133417431"/>
+        <p14:creationId xmlns:p14="http://schemas.microsoft.com/office/powerpoint/2010/main" val="1370385042"/>
       </p:ext>
     </p:extLst>
   </p:cSld>
@@ -3985,7 +3985,7 @@
           <p:cNvPr id="1" name="Slide Number Placeholder 5">
             <a:extLst xmlns:a="http://schemas.openxmlformats.org/drawingml/2006/main">
               <a:ext uri="{FF2B5EF4-FFF2-40B4-BE49-F238E27FC236}">
-                <a16:creationId xmlns:a16="http://schemas.microsoft.com/office/drawing/2014/main" id="{38BDF79F-9F16-4FEE-B72E-1F506FE9EBEC}"/>
+                <a16:creationId xmlns:a16="http://schemas.microsoft.com/office/drawing/2014/main" id="{039602EF-25C6-4B7F-BD52-B0182DC44CC0}"/>
               </a:ext>
             </a:extLst>
           </p:cNvPr>
@@ -4021,7 +4021,7 @@
           <p:nvPr/>
         </p:nvPicPr>
         <p:blipFill>
-          <a:blip xmlns:r="http://schemas.openxmlformats.org/officeDocument/2006/relationships" xmlns:a="http://schemas.openxmlformats.org/drawingml/2006/main" r:embed="R95aec88cc53147ee"/>
+          <a:blip xmlns:r="http://schemas.openxmlformats.org/officeDocument/2006/relationships" xmlns:a="http://schemas.openxmlformats.org/drawingml/2006/main" r:embed="Rd7f50d69c85e47fb"/>
           <a:srcRect xmlns:a="http://schemas.openxmlformats.org/drawingml/2006/main" l="0" t="21875" r="0" b="21875"/>
           <a:stretch xmlns:a="http://schemas.openxmlformats.org/drawingml/2006/main">
             <a:fillRect l="0" t="0" r="0" b="0"/>
@@ -4042,7 +4042,7 @@
           <p:cNvPr id="3" name="">
             <a:extLst xmlns:a="http://schemas.openxmlformats.org/drawingml/2006/main">
               <a:ext uri="{FF2B5EF4-FFF2-40B4-BE49-F238E27FC236}">
-                <a16:creationId xmlns:a16="http://schemas.microsoft.com/office/drawing/2014/main" id="{A1DAEA24-2BD7-4DE0-9431-DDEBEF808174}"/>
+                <a16:creationId xmlns:a16="http://schemas.microsoft.com/office/drawing/2014/main" id="{E97254FC-EC6D-479D-89D4-4D49016D7A14}"/>
               </a:ext>
             </a:extLst>
           </p:cNvPr>
@@ -4077,7 +4077,7 @@
           <p:cNvPr id="4" name="">
             <a:extLst xmlns:a="http://schemas.openxmlformats.org/drawingml/2006/main">
               <a:ext uri="{FF2B5EF4-FFF2-40B4-BE49-F238E27FC236}">
-                <a16:creationId xmlns:a16="http://schemas.microsoft.com/office/drawing/2014/main" id="{A44FE9A1-01D2-4E81-A716-4A7151CB5807}"/>
+                <a16:creationId xmlns:a16="http://schemas.microsoft.com/office/drawing/2014/main" id="{EF3B0FCF-52B4-460A-AB90-1DA460AE2217}"/>
               </a:ext>
             </a:extLst>
           </p:cNvPr>
@@ -4112,7 +4112,7 @@
           <p:cNvPr id="5" name="">
             <a:extLst xmlns:a="http://schemas.openxmlformats.org/drawingml/2006/main">
               <a:ext uri="{FF2B5EF4-FFF2-40B4-BE49-F238E27FC236}">
-                <a16:creationId xmlns:a16="http://schemas.microsoft.com/office/drawing/2014/main" id="{7F80C01D-D87D-4A55-B582-C92AE26942F5}"/>
+                <a16:creationId xmlns:a16="http://schemas.microsoft.com/office/drawing/2014/main" id="{FD2FE0E8-F882-472D-AA07-5617EA3A7D03}"/>
               </a:ext>
             </a:extLst>
           </p:cNvPr>
@@ -4149,7 +4149,7 @@
           <p:cNvPr id="6" name="">
             <a:extLst xmlns:a="http://schemas.openxmlformats.org/drawingml/2006/main">
               <a:ext uri="{FF2B5EF4-FFF2-40B4-BE49-F238E27FC236}">
-                <a16:creationId xmlns:a16="http://schemas.microsoft.com/office/drawing/2014/main" id="{1B124463-D37B-4B83-868B-1B8CB0E41D0E}"/>
+                <a16:creationId xmlns:a16="http://schemas.microsoft.com/office/drawing/2014/main" id="{553FF980-25A2-4020-AC91-FEFE65C1E48C}"/>
               </a:ext>
             </a:extLst>
           </p:cNvPr>
@@ -4186,7 +4186,7 @@
           <p:cNvPr id="7" name="">
             <a:extLst xmlns:a="http://schemas.openxmlformats.org/drawingml/2006/main">
               <a:ext uri="{FF2B5EF4-FFF2-40B4-BE49-F238E27FC236}">
-                <a16:creationId xmlns:a16="http://schemas.microsoft.com/office/drawing/2014/main" id="{AE369EF5-2F33-4FA6-BF69-EA408862A9AF}"/>
+                <a16:creationId xmlns:a16="http://schemas.microsoft.com/office/drawing/2014/main" id="{EF9F595D-7089-4286-8AB5-0AB8355090FF}"/>
               </a:ext>
             </a:extLst>
           </p:cNvPr>
@@ -4223,7 +4223,7 @@
           <p:cNvPr id="8" name="">
             <a:extLst xmlns:a="http://schemas.openxmlformats.org/drawingml/2006/main">
               <a:ext uri="{FF2B5EF4-FFF2-40B4-BE49-F238E27FC236}">
-                <a16:creationId xmlns:a16="http://schemas.microsoft.com/office/drawing/2014/main" id="{52C57C82-EBF2-4615-8D51-72925C354982}"/>
+                <a16:creationId xmlns:a16="http://schemas.microsoft.com/office/drawing/2014/main" id="{47F35C74-D489-4C04-8F51-7043F49AF36F}"/>
               </a:ext>
             </a:extLst>
           </p:cNvPr>
@@ -4260,7 +4260,7 @@
           <p:cNvPr id="9" name="">
             <a:extLst xmlns:a="http://schemas.openxmlformats.org/drawingml/2006/main">
               <a:ext uri="{FF2B5EF4-FFF2-40B4-BE49-F238E27FC236}">
-                <a16:creationId xmlns:a16="http://schemas.microsoft.com/office/drawing/2014/main" id="{E1BACB03-2D85-4747-B040-B0767C072988}"/>
+                <a16:creationId xmlns:a16="http://schemas.microsoft.com/office/drawing/2014/main" id="{E30AAE48-D69C-4ADE-8E96-6DDB0D705710}"/>
               </a:ext>
             </a:extLst>
           </p:cNvPr>
@@ -4318,7 +4318,7 @@
           <p:cNvPr id="10" name="">
             <a:extLst xmlns:a="http://schemas.openxmlformats.org/drawingml/2006/main">
               <a:ext uri="{FF2B5EF4-FFF2-40B4-BE49-F238E27FC236}">
-                <a16:creationId xmlns:a16="http://schemas.microsoft.com/office/drawing/2014/main" id="{A32F1147-6D35-421D-9FAE-3061AF045474}"/>
+                <a16:creationId xmlns:a16="http://schemas.microsoft.com/office/drawing/2014/main" id="{8D5578EE-9DA5-4B40-AFAB-55FF9C7C1296}"/>
               </a:ext>
             </a:extLst>
           </p:cNvPr>
@@ -4376,7 +4376,7 @@
           <p:cNvPr id="11" name="">
             <a:extLst xmlns:a="http://schemas.openxmlformats.org/drawingml/2006/main">
               <a:ext uri="{FF2B5EF4-FFF2-40B4-BE49-F238E27FC236}">
-                <a16:creationId xmlns:a16="http://schemas.microsoft.com/office/drawing/2014/main" id="{04A0C30B-EBA7-4F89-8F26-D367637788F1}"/>
+                <a16:creationId xmlns:a16="http://schemas.microsoft.com/office/drawing/2014/main" id="{723AB036-0852-44E9-8BB8-9890CB9F5868}"/>
               </a:ext>
             </a:extLst>
           </p:cNvPr>
@@ -4411,7 +4411,7 @@
           <p:cNvPr id="12" name="">
             <a:extLst xmlns:a="http://schemas.openxmlformats.org/drawingml/2006/main">
               <a:ext uri="{FF2B5EF4-FFF2-40B4-BE49-F238E27FC236}">
-                <a16:creationId xmlns:a16="http://schemas.microsoft.com/office/drawing/2014/main" id="{E84985F2-C20B-4691-8081-32FE801F6655}"/>
+                <a16:creationId xmlns:a16="http://schemas.microsoft.com/office/drawing/2014/main" id="{52A2A85E-3040-4AED-AA93-016E76841A6B}"/>
               </a:ext>
             </a:extLst>
           </p:cNvPr>
@@ -4444,7 +4444,7 @@
           <p:cNvPr id="13" name="">
             <a:extLst xmlns:a="http://schemas.openxmlformats.org/drawingml/2006/main">
               <a:ext uri="{FF2B5EF4-FFF2-40B4-BE49-F238E27FC236}">
-                <a16:creationId xmlns:a16="http://schemas.microsoft.com/office/drawing/2014/main" id="{EE1F047A-C5D1-4413-B2E9-C67D9BA49175}"/>
+                <a16:creationId xmlns:a16="http://schemas.microsoft.com/office/drawing/2014/main" id="{59F5370F-9766-42C3-B5F7-F1A143C226A4}"/>
               </a:ext>
             </a:extLst>
           </p:cNvPr>
@@ -4519,7 +4519,7 @@
           <p:cNvPr id="14" name="">
             <a:extLst xmlns:a="http://schemas.openxmlformats.org/drawingml/2006/main">
               <a:ext uri="{FF2B5EF4-FFF2-40B4-BE49-F238E27FC236}">
-                <a16:creationId xmlns:a16="http://schemas.microsoft.com/office/drawing/2014/main" id="{87CC9AC4-5322-45C1-B0B3-C9963A6CEDEF}"/>
+                <a16:creationId xmlns:a16="http://schemas.microsoft.com/office/drawing/2014/main" id="{8C75D3A2-3E8C-4C71-BABE-1FF4D3B71CEA}"/>
               </a:ext>
             </a:extLst>
           </p:cNvPr>
@@ -4554,7 +4554,7 @@
           <p:cNvPr id="15" name="">
             <a:extLst xmlns:a="http://schemas.openxmlformats.org/drawingml/2006/main">
               <a:ext uri="{FF2B5EF4-FFF2-40B4-BE49-F238E27FC236}">
-                <a16:creationId xmlns:a16="http://schemas.microsoft.com/office/drawing/2014/main" id="{9AEF35A7-E1E1-4FAD-BBDF-CE93D68D7598}"/>
+                <a16:creationId xmlns:a16="http://schemas.microsoft.com/office/drawing/2014/main" id="{9A3D0521-5223-4D91-BC6E-EA79701CA066}"/>
               </a:ext>
             </a:extLst>
           </p:cNvPr>
@@ -4589,7 +4589,7 @@
           <p:cNvPr id="16" name="">
             <a:extLst xmlns:a="http://schemas.openxmlformats.org/drawingml/2006/main">
               <a:ext uri="{FF2B5EF4-FFF2-40B4-BE49-F238E27FC236}">
-                <a16:creationId xmlns:a16="http://schemas.microsoft.com/office/drawing/2014/main" id="{40B9B2BC-33E1-4ACE-A677-66784BD69901}"/>
+                <a16:creationId xmlns:a16="http://schemas.microsoft.com/office/drawing/2014/main" id="{5642AB15-4099-4BAA-B47D-0D486905BFE2}"/>
               </a:ext>
             </a:extLst>
           </p:cNvPr>
@@ -4647,7 +4647,7 @@
           <p:cNvPr id="17" name="">
             <a:extLst xmlns:a="http://schemas.openxmlformats.org/drawingml/2006/main">
               <a:ext uri="{FF2B5EF4-FFF2-40B4-BE49-F238E27FC236}">
-                <a16:creationId xmlns:a16="http://schemas.microsoft.com/office/drawing/2014/main" id="{26354C82-4775-4BA4-B9DB-B41C4C52B3C5}"/>
+                <a16:creationId xmlns:a16="http://schemas.microsoft.com/office/drawing/2014/main" id="{206D3DBC-A48D-4CBE-8B5F-C952EA8A3232}"/>
               </a:ext>
             </a:extLst>
           </p:cNvPr>
@@ -4684,7 +4684,7 @@
           <p:cNvPr id="18" name="">
             <a:extLst xmlns:a="http://schemas.openxmlformats.org/drawingml/2006/main">
               <a:ext uri="{FF2B5EF4-FFF2-40B4-BE49-F238E27FC236}">
-                <a16:creationId xmlns:a16="http://schemas.microsoft.com/office/drawing/2014/main" id="{BCF132CD-4136-461C-A457-1DABEF682CE3}"/>
+                <a16:creationId xmlns:a16="http://schemas.microsoft.com/office/drawing/2014/main" id="{FE5978FE-7BEF-4B0C-899B-110D7F2AE715}"/>
               </a:ext>
             </a:extLst>
           </p:cNvPr>
@@ -4719,7 +4719,7 @@
           <p:cNvPr id="19" name="">
             <a:extLst xmlns:a="http://schemas.openxmlformats.org/drawingml/2006/main">
               <a:ext uri="{FF2B5EF4-FFF2-40B4-BE49-F238E27FC236}">
-                <a16:creationId xmlns:a16="http://schemas.microsoft.com/office/drawing/2014/main" id="{4133AE49-69AD-4FE6-96AE-8B62552A311B}"/>
+                <a16:creationId xmlns:a16="http://schemas.microsoft.com/office/drawing/2014/main" id="{F762E7E9-D3EC-4C92-8E84-3E67FC0D6E25}"/>
               </a:ext>
             </a:extLst>
           </p:cNvPr>
@@ -4777,7 +4777,7 @@
           <p:cNvPr id="20" name="">
             <a:extLst xmlns:a="http://schemas.openxmlformats.org/drawingml/2006/main">
               <a:ext uri="{FF2B5EF4-FFF2-40B4-BE49-F238E27FC236}">
-                <a16:creationId xmlns:a16="http://schemas.microsoft.com/office/drawing/2014/main" id="{6C85BFD0-39DD-4E97-A70F-460BB05BAC4B}"/>
+                <a16:creationId xmlns:a16="http://schemas.microsoft.com/office/drawing/2014/main" id="{5A432C92-7AAC-47D7-A8C9-703D3AFBBF91}"/>
               </a:ext>
             </a:extLst>
           </p:cNvPr>
@@ -4835,7 +4835,7 @@
           <p:cNvPr id="21" name="">
             <a:extLst xmlns:a="http://schemas.openxmlformats.org/drawingml/2006/main">
               <a:ext uri="{FF2B5EF4-FFF2-40B4-BE49-F238E27FC236}">
-                <a16:creationId xmlns:a16="http://schemas.microsoft.com/office/drawing/2014/main" id="{8C63D3E0-8EA7-4E00-AF2B-981F1058DB01}"/>
+                <a16:creationId xmlns:a16="http://schemas.microsoft.com/office/drawing/2014/main" id="{448FBBCF-A636-457F-B033-63DCD2CFCC24}"/>
               </a:ext>
             </a:extLst>
           </p:cNvPr>
@@ -4893,7 +4893,7 @@
           <p:cNvPr id="22" name="">
             <a:extLst xmlns:a="http://schemas.openxmlformats.org/drawingml/2006/main">
               <a:ext uri="{FF2B5EF4-FFF2-40B4-BE49-F238E27FC236}">
-                <a16:creationId xmlns:a16="http://schemas.microsoft.com/office/drawing/2014/main" id="{D8B2769A-31AE-45B5-9C7A-B1DABB7E0DAC}"/>
+                <a16:creationId xmlns:a16="http://schemas.microsoft.com/office/drawing/2014/main" id="{E0BFC8BC-F5FC-4315-96DF-21E93F0DC2DA}"/>
               </a:ext>
             </a:extLst>
           </p:cNvPr>
@@ -4930,7 +4930,7 @@
           <p:cNvPr id="23" name="">
             <a:extLst xmlns:a="http://schemas.openxmlformats.org/drawingml/2006/main">
               <a:ext uri="{FF2B5EF4-FFF2-40B4-BE49-F238E27FC236}">
-                <a16:creationId xmlns:a16="http://schemas.microsoft.com/office/drawing/2014/main" id="{50D894EB-182C-4CE8-85DD-22D4E7AD38B1}"/>
+                <a16:creationId xmlns:a16="http://schemas.microsoft.com/office/drawing/2014/main" id="{D1D8524A-6B18-4CB2-AB3A-76F54F196CE4}"/>
               </a:ext>
             </a:extLst>
           </p:cNvPr>
@@ -4965,7 +4965,7 @@
           <p:cNvPr id="24" name="">
             <a:extLst xmlns:a="http://schemas.openxmlformats.org/drawingml/2006/main">
               <a:ext uri="{FF2B5EF4-FFF2-40B4-BE49-F238E27FC236}">
-                <a16:creationId xmlns:a16="http://schemas.microsoft.com/office/drawing/2014/main" id="{3D82AB2F-A277-40EE-A2FF-65F3D81B3521}"/>
+                <a16:creationId xmlns:a16="http://schemas.microsoft.com/office/drawing/2014/main" id="{AA84394C-E156-4D62-933F-FAE38C2E62F8}"/>
               </a:ext>
             </a:extLst>
           </p:cNvPr>
@@ -5023,7 +5023,7 @@
           <p:cNvPr id="25" name="">
             <a:extLst xmlns:a="http://schemas.openxmlformats.org/drawingml/2006/main">
               <a:ext uri="{FF2B5EF4-FFF2-40B4-BE49-F238E27FC236}">
-                <a16:creationId xmlns:a16="http://schemas.microsoft.com/office/drawing/2014/main" id="{CDFFC842-E45B-41B0-A36B-40D458EC6A33}"/>
+                <a16:creationId xmlns:a16="http://schemas.microsoft.com/office/drawing/2014/main" id="{6B0F8630-413D-4006-9231-E761B9BDC951}"/>
               </a:ext>
             </a:extLst>
           </p:cNvPr>
@@ -5081,7 +5081,7 @@
           <p:cNvPr id="26" name="">
             <a:extLst xmlns:a="http://schemas.openxmlformats.org/drawingml/2006/main">
               <a:ext uri="{FF2B5EF4-FFF2-40B4-BE49-F238E27FC236}">
-                <a16:creationId xmlns:a16="http://schemas.microsoft.com/office/drawing/2014/main" id="{F4080FE7-907C-4F73-A32C-02410EE40C8F}"/>
+                <a16:creationId xmlns:a16="http://schemas.microsoft.com/office/drawing/2014/main" id="{AC2E4BD9-894B-4907-871C-84059219FBE9}"/>
               </a:ext>
             </a:extLst>
           </p:cNvPr>
@@ -5139,7 +5139,7 @@
           <p:cNvPr id="27" name="">
             <a:extLst xmlns:a="http://schemas.openxmlformats.org/drawingml/2006/main">
               <a:ext uri="{FF2B5EF4-FFF2-40B4-BE49-F238E27FC236}">
-                <a16:creationId xmlns:a16="http://schemas.microsoft.com/office/drawing/2014/main" id="{CB4F2EB4-24CD-4F3C-A206-A85E405409B7}"/>
+                <a16:creationId xmlns:a16="http://schemas.microsoft.com/office/drawing/2014/main" id="{F4842518-D8DF-48DD-9308-C2DB14FED0D8}"/>
               </a:ext>
             </a:extLst>
           </p:cNvPr>
@@ -5176,7 +5176,7 @@
           <p:cNvPr id="28" name="">
             <a:extLst xmlns:a="http://schemas.openxmlformats.org/drawingml/2006/main">
               <a:ext uri="{FF2B5EF4-FFF2-40B4-BE49-F238E27FC236}">
-                <a16:creationId xmlns:a16="http://schemas.microsoft.com/office/drawing/2014/main" id="{CE4F6853-C39F-411B-BEAE-9C3CC27394C7}"/>
+                <a16:creationId xmlns:a16="http://schemas.microsoft.com/office/drawing/2014/main" id="{87390ADC-9A3D-4041-90FF-37351D770437}"/>
               </a:ext>
             </a:extLst>
           </p:cNvPr>
@@ -5211,7 +5211,7 @@
           <p:cNvPr id="29" name="">
             <a:extLst xmlns:a="http://schemas.openxmlformats.org/drawingml/2006/main">
               <a:ext uri="{FF2B5EF4-FFF2-40B4-BE49-F238E27FC236}">
-                <a16:creationId xmlns:a16="http://schemas.microsoft.com/office/drawing/2014/main" id="{DA8E5C30-E3AA-4ECD-96A4-337E769D1E5C}"/>
+                <a16:creationId xmlns:a16="http://schemas.microsoft.com/office/drawing/2014/main" id="{95669A5E-E5B2-4514-9EE4-184E11B7D4DA}"/>
               </a:ext>
             </a:extLst>
           </p:cNvPr>
@@ -5269,7 +5269,7 @@
           <p:cNvPr id="30" name="">
             <a:extLst xmlns:a="http://schemas.openxmlformats.org/drawingml/2006/main">
               <a:ext uri="{FF2B5EF4-FFF2-40B4-BE49-F238E27FC236}">
-                <a16:creationId xmlns:a16="http://schemas.microsoft.com/office/drawing/2014/main" id="{46330CBD-E8A5-4D41-80F1-50995FA04038}"/>
+                <a16:creationId xmlns:a16="http://schemas.microsoft.com/office/drawing/2014/main" id="{9A6B4A36-EDA3-4AD5-83B7-76C925848783}"/>
               </a:ext>
             </a:extLst>
           </p:cNvPr>
@@ -5327,7 +5327,7 @@
           <p:cNvPr id="31" name="">
             <a:extLst xmlns:a="http://schemas.openxmlformats.org/drawingml/2006/main">
               <a:ext uri="{FF2B5EF4-FFF2-40B4-BE49-F238E27FC236}">
-                <a16:creationId xmlns:a16="http://schemas.microsoft.com/office/drawing/2014/main" id="{9096E122-3E0D-432F-B8BD-134DFE63143D}"/>
+                <a16:creationId xmlns:a16="http://schemas.microsoft.com/office/drawing/2014/main" id="{06761557-CBBA-4F68-9CEA-1C8E434C57B8}"/>
               </a:ext>
             </a:extLst>
           </p:cNvPr>
@@ -5385,7 +5385,7 @@
           <p:cNvPr id="32" name="">
             <a:extLst xmlns:a="http://schemas.openxmlformats.org/drawingml/2006/main">
               <a:ext uri="{FF2B5EF4-FFF2-40B4-BE49-F238E27FC236}">
-                <a16:creationId xmlns:a16="http://schemas.microsoft.com/office/drawing/2014/main" id="{0D02EE02-19CC-475B-909A-09776A68F067}"/>
+                <a16:creationId xmlns:a16="http://schemas.microsoft.com/office/drawing/2014/main" id="{231CAAC7-8654-4D07-B020-04540E2B1F40}"/>
               </a:ext>
             </a:extLst>
           </p:cNvPr>
@@ -5422,7 +5422,7 @@
           <p:cNvPr id="33" name="">
             <a:extLst xmlns:a="http://schemas.openxmlformats.org/drawingml/2006/main">
               <a:ext uri="{FF2B5EF4-FFF2-40B4-BE49-F238E27FC236}">
-                <a16:creationId xmlns:a16="http://schemas.microsoft.com/office/drawing/2014/main" id="{8CA296CE-7A4E-4D34-861D-D11AFD8DE567}"/>
+                <a16:creationId xmlns:a16="http://schemas.microsoft.com/office/drawing/2014/main" id="{8CAAFB0D-E4F8-4862-AD82-F8DEB037079F}"/>
               </a:ext>
             </a:extLst>
           </p:cNvPr>
@@ -5457,7 +5457,7 @@
           <p:cNvPr id="34" name="">
             <a:extLst xmlns:a="http://schemas.openxmlformats.org/drawingml/2006/main">
               <a:ext uri="{FF2B5EF4-FFF2-40B4-BE49-F238E27FC236}">
-                <a16:creationId xmlns:a16="http://schemas.microsoft.com/office/drawing/2014/main" id="{20AC3745-548E-45BE-9A12-28D77BB4F0ED}"/>
+                <a16:creationId xmlns:a16="http://schemas.microsoft.com/office/drawing/2014/main" id="{E6F0F978-8DC3-4847-89C2-E37ABD11F289}"/>
               </a:ext>
             </a:extLst>
           </p:cNvPr>
@@ -5515,7 +5515,7 @@
           <p:cNvPr id="35" name="">
             <a:extLst xmlns:a="http://schemas.openxmlformats.org/drawingml/2006/main">
               <a:ext uri="{FF2B5EF4-FFF2-40B4-BE49-F238E27FC236}">
-                <a16:creationId xmlns:a16="http://schemas.microsoft.com/office/drawing/2014/main" id="{29ECB9F1-D5F7-4D90-B81F-BAB4ACC39466}"/>
+                <a16:creationId xmlns:a16="http://schemas.microsoft.com/office/drawing/2014/main" id="{C42F1FD4-7404-4B8D-B1FD-52BE0560FAFF}"/>
               </a:ext>
             </a:extLst>
           </p:cNvPr>
@@ -5624,7 +5624,7 @@
           <p:cNvPr id="36" name="">
             <a:extLst xmlns:a="http://schemas.openxmlformats.org/drawingml/2006/main">
               <a:ext uri="{FF2B5EF4-FFF2-40B4-BE49-F238E27FC236}">
-                <a16:creationId xmlns:a16="http://schemas.microsoft.com/office/drawing/2014/main" id="{DBFBD4E9-8D80-41D2-966E-2AC641B85D89}"/>
+                <a16:creationId xmlns:a16="http://schemas.microsoft.com/office/drawing/2014/main" id="{0B4156FD-2140-45F4-9693-546AA090B945}"/>
               </a:ext>
             </a:extLst>
           </p:cNvPr>
@@ -5657,7 +5657,7 @@
           <p:cNvPr id="37" name="">
             <a:extLst xmlns:a="http://schemas.openxmlformats.org/drawingml/2006/main">
               <a:ext uri="{FF2B5EF4-FFF2-40B4-BE49-F238E27FC236}">
-                <a16:creationId xmlns:a16="http://schemas.microsoft.com/office/drawing/2014/main" id="{027F9994-26A8-4694-9244-0C1ADA23B8DD}"/>
+                <a16:creationId xmlns:a16="http://schemas.microsoft.com/office/drawing/2014/main" id="{B16E30BB-31AB-4777-BADE-1B4C5D6D0FEC}"/>
               </a:ext>
             </a:extLst>
           </p:cNvPr>
@@ -5694,7 +5694,7 @@
           <p:cNvPr id="38" name="">
             <a:extLst xmlns:a="http://schemas.openxmlformats.org/drawingml/2006/main">
               <a:ext uri="{FF2B5EF4-FFF2-40B4-BE49-F238E27FC236}">
-                <a16:creationId xmlns:a16="http://schemas.microsoft.com/office/drawing/2014/main" id="{AAB8A65E-311D-4007-8655-BDCF3BB60DB6}"/>
+                <a16:creationId xmlns:a16="http://schemas.microsoft.com/office/drawing/2014/main" id="{5F5E00A4-BAE5-41E9-A056-394CDAF1E37B}"/>
               </a:ext>
             </a:extLst>
           </p:cNvPr>
@@ -5729,7 +5729,7 @@
           <p:cNvPr id="39" name="">
             <a:extLst xmlns:a="http://schemas.openxmlformats.org/drawingml/2006/main">
               <a:ext uri="{FF2B5EF4-FFF2-40B4-BE49-F238E27FC236}">
-                <a16:creationId xmlns:a16="http://schemas.microsoft.com/office/drawing/2014/main" id="{5002BB03-81E5-4699-BED2-2F563FE98749}"/>
+                <a16:creationId xmlns:a16="http://schemas.microsoft.com/office/drawing/2014/main" id="{00457DDB-8C78-45F9-952B-F4722C921565}"/>
               </a:ext>
             </a:extLst>
           </p:cNvPr>
@@ -5787,7 +5787,7 @@
           <p:cNvPr id="40" name="">
             <a:extLst xmlns:a="http://schemas.openxmlformats.org/drawingml/2006/main">
               <a:ext uri="{FF2B5EF4-FFF2-40B4-BE49-F238E27FC236}">
-                <a16:creationId xmlns:a16="http://schemas.microsoft.com/office/drawing/2014/main" id="{CF520FAD-3ECF-4B8D-A5D0-1FD391FB9F76}"/>
+                <a16:creationId xmlns:a16="http://schemas.microsoft.com/office/drawing/2014/main" id="{9C27BAA8-ADAA-4CC1-A4FB-C12DCAC084B6}"/>
               </a:ext>
             </a:extLst>
           </p:cNvPr>
@@ -5879,7 +5879,7 @@
           <p:cNvPr id="41" name="">
             <a:extLst xmlns:a="http://schemas.openxmlformats.org/drawingml/2006/main">
               <a:ext uri="{FF2B5EF4-FFF2-40B4-BE49-F238E27FC236}">
-                <a16:creationId xmlns:a16="http://schemas.microsoft.com/office/drawing/2014/main" id="{8F0F9DDD-B00E-4A1F-9810-3143CC9FF335}"/>
+                <a16:creationId xmlns:a16="http://schemas.microsoft.com/office/drawing/2014/main" id="{C2127C4F-539D-40CF-AB1F-41378E609FC3}"/>
               </a:ext>
             </a:extLst>
           </p:cNvPr>
@@ -5912,7 +5912,7 @@
           <p:cNvPr id="42" name="">
             <a:extLst xmlns:a="http://schemas.openxmlformats.org/drawingml/2006/main">
               <a:ext uri="{FF2B5EF4-FFF2-40B4-BE49-F238E27FC236}">
-                <a16:creationId xmlns:a16="http://schemas.microsoft.com/office/drawing/2014/main" id="{E799D2BB-40B9-41D3-BFD1-9C5C148A47C8}"/>
+                <a16:creationId xmlns:a16="http://schemas.microsoft.com/office/drawing/2014/main" id="{0E22860B-2595-40FE-9C9C-3791A663E21F}"/>
               </a:ext>
             </a:extLst>
           </p:cNvPr>
@@ -5949,7 +5949,7 @@
           <p:cNvPr id="43" name="">
             <a:extLst xmlns:a="http://schemas.openxmlformats.org/drawingml/2006/main">
               <a:ext uri="{FF2B5EF4-FFF2-40B4-BE49-F238E27FC236}">
-                <a16:creationId xmlns:a16="http://schemas.microsoft.com/office/drawing/2014/main" id="{1865265C-0C76-4C3A-8477-D6221D5C1483}"/>
+                <a16:creationId xmlns:a16="http://schemas.microsoft.com/office/drawing/2014/main" id="{A46344C1-642F-4514-A185-9D13D692D8B6}"/>
               </a:ext>
             </a:extLst>
           </p:cNvPr>
@@ -5984,7 +5984,7 @@
           <p:cNvPr id="44" name="">
             <a:extLst xmlns:a="http://schemas.openxmlformats.org/drawingml/2006/main">
               <a:ext uri="{FF2B5EF4-FFF2-40B4-BE49-F238E27FC236}">
-                <a16:creationId xmlns:a16="http://schemas.microsoft.com/office/drawing/2014/main" id="{E76178EA-1CB2-4F9C-949A-0759D4D79C85}"/>
+                <a16:creationId xmlns:a16="http://schemas.microsoft.com/office/drawing/2014/main" id="{49A2EF6D-8259-486E-8555-9AAD2AAF9214}"/>
               </a:ext>
             </a:extLst>
           </p:cNvPr>
@@ -6042,7 +6042,7 @@
           <p:cNvPr id="45" name="">
             <a:extLst xmlns:a="http://schemas.openxmlformats.org/drawingml/2006/main">
               <a:ext uri="{FF2B5EF4-FFF2-40B4-BE49-F238E27FC236}">
-                <a16:creationId xmlns:a16="http://schemas.microsoft.com/office/drawing/2014/main" id="{E027365C-C9A5-4EA7-A920-782FA8C61193}"/>
+                <a16:creationId xmlns:a16="http://schemas.microsoft.com/office/drawing/2014/main" id="{F556A704-2631-4938-AC66-D8971FB3612B}"/>
               </a:ext>
             </a:extLst>
           </p:cNvPr>
@@ -6134,7 +6134,7 @@
           <p:cNvPr id="46" name="">
             <a:extLst xmlns:a="http://schemas.openxmlformats.org/drawingml/2006/main">
               <a:ext uri="{FF2B5EF4-FFF2-40B4-BE49-F238E27FC236}">
-                <a16:creationId xmlns:a16="http://schemas.microsoft.com/office/drawing/2014/main" id="{0E8995D8-D8F3-45E1-83B2-831AE757097B}"/>
+                <a16:creationId xmlns:a16="http://schemas.microsoft.com/office/drawing/2014/main" id="{269A53A2-3FDB-44CE-983E-C733E83BA656}"/>
               </a:ext>
             </a:extLst>
           </p:cNvPr>
@@ -6190,7 +6190,7 @@
     </p:spTree>
     <p:extLst>
       <p:ext uri="{BB962C8B-B14F-4D97-AF65-F5344CB8AC3E}">
-        <p14:creationId xmlns:p14="http://schemas.microsoft.com/office/powerpoint/2010/main" val="1417414538"/>
+        <p14:creationId xmlns:p14="http://schemas.microsoft.com/office/powerpoint/2010/main" val="2047937051"/>
       </p:ext>
     </p:extLst>
   </p:cSld>
@@ -6221,7 +6221,7 @@
           <p:cNvPr id="1" name="Slide Number Placeholder 5">
             <a:extLst xmlns:a="http://schemas.openxmlformats.org/drawingml/2006/main">
               <a:ext uri="{FF2B5EF4-FFF2-40B4-BE49-F238E27FC236}">
-                <a16:creationId xmlns:a16="http://schemas.microsoft.com/office/drawing/2014/main" id="{38BDF79F-9F16-4FEE-B72E-1F506FE9EBEC}"/>
+                <a16:creationId xmlns:a16="http://schemas.microsoft.com/office/drawing/2014/main" id="{039602EF-25C6-4B7F-BD52-B0182DC44CC0}"/>
               </a:ext>
             </a:extLst>
           </p:cNvPr>
@@ -6257,7 +6257,7 @@
           <p:nvPr/>
         </p:nvPicPr>
         <p:blipFill>
-          <a:blip xmlns:r="http://schemas.openxmlformats.org/officeDocument/2006/relationships" xmlns:a="http://schemas.openxmlformats.org/drawingml/2006/main" r:embed="Rc1602807d1134e50"/>
+          <a:blip xmlns:r="http://schemas.openxmlformats.org/officeDocument/2006/relationships" xmlns:a="http://schemas.openxmlformats.org/drawingml/2006/main" r:embed="Ra78046ad3ff148f8"/>
           <a:srcRect xmlns:a="http://schemas.openxmlformats.org/drawingml/2006/main" l="0" t="21875" r="0" b="21875"/>
           <a:stretch xmlns:a="http://schemas.openxmlformats.org/drawingml/2006/main">
             <a:fillRect l="0" t="0" r="0" b="0"/>
@@ -6278,7 +6278,7 @@
           <p:cNvPr id="3" name="">
             <a:extLst xmlns:a="http://schemas.openxmlformats.org/drawingml/2006/main">
               <a:ext uri="{FF2B5EF4-FFF2-40B4-BE49-F238E27FC236}">
-                <a16:creationId xmlns:a16="http://schemas.microsoft.com/office/drawing/2014/main" id="{1E75D1FE-E61B-47A3-AB8B-9A66138CDB10}"/>
+                <a16:creationId xmlns:a16="http://schemas.microsoft.com/office/drawing/2014/main" id="{19C12170-FB7E-45C4-B8E0-5CBDBEA0FF4D}"/>
               </a:ext>
             </a:extLst>
           </p:cNvPr>
@@ -6313,7 +6313,7 @@
           <p:cNvPr id="4" name="">
             <a:extLst xmlns:a="http://schemas.openxmlformats.org/drawingml/2006/main">
               <a:ext uri="{FF2B5EF4-FFF2-40B4-BE49-F238E27FC236}">
-                <a16:creationId xmlns:a16="http://schemas.microsoft.com/office/drawing/2014/main" id="{66BF111C-5567-4892-A7C6-9A9DC1C71984}"/>
+                <a16:creationId xmlns:a16="http://schemas.microsoft.com/office/drawing/2014/main" id="{E9DCB26C-E2DA-4821-9A39-BDDBE8FDF0E2}"/>
               </a:ext>
             </a:extLst>
           </p:cNvPr>
@@ -6348,7 +6348,7 @@
           <p:cNvPr id="5" name="">
             <a:extLst xmlns:a="http://schemas.openxmlformats.org/drawingml/2006/main">
               <a:ext uri="{FF2B5EF4-FFF2-40B4-BE49-F238E27FC236}">
-                <a16:creationId xmlns:a16="http://schemas.microsoft.com/office/drawing/2014/main" id="{C14A8AB7-43F0-4277-8909-1A58EEAA5D19}"/>
+                <a16:creationId xmlns:a16="http://schemas.microsoft.com/office/drawing/2014/main" id="{BF28FF41-1098-4487-9D31-5A07B37D021D}"/>
               </a:ext>
             </a:extLst>
           </p:cNvPr>
@@ -6385,7 +6385,7 @@
           <p:cNvPr id="6" name="">
             <a:extLst xmlns:a="http://schemas.openxmlformats.org/drawingml/2006/main">
               <a:ext uri="{FF2B5EF4-FFF2-40B4-BE49-F238E27FC236}">
-                <a16:creationId xmlns:a16="http://schemas.microsoft.com/office/drawing/2014/main" id="{6D83FE16-FFA9-4FEB-9C8D-290FB4D70671}"/>
+                <a16:creationId xmlns:a16="http://schemas.microsoft.com/office/drawing/2014/main" id="{66D8E83E-857A-4A8D-A355-A7A4B5C9789C}"/>
               </a:ext>
             </a:extLst>
           </p:cNvPr>
@@ -6422,7 +6422,7 @@
           <p:cNvPr id="7" name="">
             <a:extLst xmlns:a="http://schemas.openxmlformats.org/drawingml/2006/main">
               <a:ext uri="{FF2B5EF4-FFF2-40B4-BE49-F238E27FC236}">
-                <a16:creationId xmlns:a16="http://schemas.microsoft.com/office/drawing/2014/main" id="{3CEC46F4-DE77-48FD-B7C1-6DC75249D43D}"/>
+                <a16:creationId xmlns:a16="http://schemas.microsoft.com/office/drawing/2014/main" id="{EAF3A0A4-E5B7-42F6-B8B2-1BE56A5D9BFF}"/>
               </a:ext>
             </a:extLst>
           </p:cNvPr>
@@ -6459,7 +6459,7 @@
           <p:cNvPr id="8" name="">
             <a:extLst xmlns:a="http://schemas.openxmlformats.org/drawingml/2006/main">
               <a:ext uri="{FF2B5EF4-FFF2-40B4-BE49-F238E27FC236}">
-                <a16:creationId xmlns:a16="http://schemas.microsoft.com/office/drawing/2014/main" id="{7961F3A7-8C5A-4F0C-B7D8-3EA31FC61D85}"/>
+                <a16:creationId xmlns:a16="http://schemas.microsoft.com/office/drawing/2014/main" id="{73CF996E-9582-4531-9B0B-C396CFE8E2B4}"/>
               </a:ext>
             </a:extLst>
           </p:cNvPr>
@@ -6496,7 +6496,7 @@
           <p:cNvPr id="9" name="">
             <a:extLst xmlns:a="http://schemas.openxmlformats.org/drawingml/2006/main">
               <a:ext uri="{FF2B5EF4-FFF2-40B4-BE49-F238E27FC236}">
-                <a16:creationId xmlns:a16="http://schemas.microsoft.com/office/drawing/2014/main" id="{F142064F-76D4-4450-9972-EB1E1A70A696}"/>
+                <a16:creationId xmlns:a16="http://schemas.microsoft.com/office/drawing/2014/main" id="{BDC299C0-4569-4CD7-828C-5DE60BB733E9}"/>
               </a:ext>
             </a:extLst>
           </p:cNvPr>
@@ -6554,7 +6554,7 @@
           <p:cNvPr id="10" name="">
             <a:extLst xmlns:a="http://schemas.openxmlformats.org/drawingml/2006/main">
               <a:ext uri="{FF2B5EF4-FFF2-40B4-BE49-F238E27FC236}">
-                <a16:creationId xmlns:a16="http://schemas.microsoft.com/office/drawing/2014/main" id="{D1CF43F0-86E8-417B-8BBD-997A9F2491B8}"/>
+                <a16:creationId xmlns:a16="http://schemas.microsoft.com/office/drawing/2014/main" id="{465ABC3E-60A4-411D-AE40-F060A7D1430A}"/>
               </a:ext>
             </a:extLst>
           </p:cNvPr>
@@ -6612,7 +6612,7 @@
           <p:cNvPr id="11" name="">
             <a:extLst xmlns:a="http://schemas.openxmlformats.org/drawingml/2006/main">
               <a:ext uri="{FF2B5EF4-FFF2-40B4-BE49-F238E27FC236}">
-                <a16:creationId xmlns:a16="http://schemas.microsoft.com/office/drawing/2014/main" id="{2D610C14-4DF2-4B94-B936-0152572087A2}"/>
+                <a16:creationId xmlns:a16="http://schemas.microsoft.com/office/drawing/2014/main" id="{71ADCCC9-ED7B-41A6-84EF-2828A340320C}"/>
               </a:ext>
             </a:extLst>
           </p:cNvPr>
@@ -6647,7 +6647,7 @@
           <p:cNvPr id="12" name="">
             <a:extLst xmlns:a="http://schemas.openxmlformats.org/drawingml/2006/main">
               <a:ext uri="{FF2B5EF4-FFF2-40B4-BE49-F238E27FC236}">
-                <a16:creationId xmlns:a16="http://schemas.microsoft.com/office/drawing/2014/main" id="{BB7BA91A-5960-4122-9600-21DACF5235E2}"/>
+                <a16:creationId xmlns:a16="http://schemas.microsoft.com/office/drawing/2014/main" id="{6DE55BC1-F62B-42E3-A321-7E8D0C683C4D}"/>
               </a:ext>
             </a:extLst>
           </p:cNvPr>
@@ -6680,7 +6680,7 @@
           <p:cNvPr id="13" name="">
             <a:extLst xmlns:a="http://schemas.openxmlformats.org/drawingml/2006/main">
               <a:ext uri="{FF2B5EF4-FFF2-40B4-BE49-F238E27FC236}">
-                <a16:creationId xmlns:a16="http://schemas.microsoft.com/office/drawing/2014/main" id="{5983DB4E-FF79-4AEB-B80F-CF237C3780B4}"/>
+                <a16:creationId xmlns:a16="http://schemas.microsoft.com/office/drawing/2014/main" id="{A9396BBF-59FB-48AA-A3CF-AC50C25D79D9}"/>
               </a:ext>
             </a:extLst>
           </p:cNvPr>
@@ -6755,93 +6755,18 @@
           <p:cNvPr id="14" name="">
             <a:extLst xmlns:a="http://schemas.openxmlformats.org/drawingml/2006/main">
               <a:ext uri="{FF2B5EF4-FFF2-40B4-BE49-F238E27FC236}">
-                <a16:creationId xmlns:a16="http://schemas.microsoft.com/office/drawing/2014/main" id="{AF2CC836-9AAF-4EA7-844B-594C4FAECAF5}"/>
-              </a:ext>
-            </a:extLst>
-          </p:cNvPr>
-          <p:cNvSpPr>
-            <a:spLocks xmlns:a="http://schemas.openxmlformats.org/drawingml/2006/main" noGrp="1"/>
-          </p:cNvSpPr>
-          <p:nvPr/>
-        </p:nvSpPr>
-        <p:spPr>
-          <a:xfrm xmlns:a="http://schemas.openxmlformats.org/drawingml/2006/main">
-            <a:off x="628650" y="2038350"/>
-            <a:ext cx="6858000" cy="628650"/>
-          </a:xfrm>
-          <a:prstGeom xmlns:a="http://schemas.openxmlformats.org/drawingml/2006/main" prst="rect">
-            <a:avLst/>
-          </a:prstGeom>
-          <a:solidFill xmlns:a="http://schemas.openxmlformats.org/drawingml/2006/main">
-            <a:srgbClr val="000000">
-              <a:alpha val="0"/>
-            </a:srgbClr>
-          </a:solidFill>
-          <a:ln xmlns:a="http://schemas.openxmlformats.org/drawingml/2006/main" w="0">
-            <a:solidFill>
-              <a:srgbClr val="000000">
-                <a:alpha val="0"/>
-              </a:srgbClr>
-            </a:solidFill>
-            <a:prstDash val="solid"/>
-          </a:ln>
-        </p:spPr>
-        <p:txBody>
-          <a:bodyPr xmlns:a="http://schemas.openxmlformats.org/drawingml/2006/main" lIns="0" tIns="0" rIns="0" bIns="0" anchor="t"/>
-          <a:lstStyle xmlns:a="http://schemas.openxmlformats.org/drawingml/2006/main"/>
-          <a:p xmlns:a="http://schemas.openxmlformats.org/drawingml/2006/main">
-            <a:pPr algn="l">
-              <a:defRPr sz="1350" b="0">
-                <a:solidFill>
-                  <a:srgbClr val="344146"/>
-                </a:solidFill>
-              </a:defRPr>
-            </a:pPr>
-            <a:r>
-              <a:rPr sz="1350" b="0">
-                <a:solidFill>
-                  <a:srgbClr val="344146"/>
-                </a:solidFill>
-              </a:rPr>
-              <a:t>처음에는 '어느 뇌 영역을 만들 것인가'가</a:t>
-            </a:r>
-          </a:p>
-          <a:p xmlns:a="http://schemas.openxmlformats.org/drawingml/2006/main">
-            <a:pPr algn="l">
-              <a:defRPr sz="1350" b="0">
-                <a:solidFill>
-                  <a:srgbClr val="344146"/>
-                </a:solidFill>
-              </a:defRPr>
-            </a:pPr>
-            <a:r>
-              <a:rPr sz="1350" b="0">
-                <a:solidFill>
-                  <a:srgbClr val="344146"/>
-                </a:solidFill>
-              </a:rPr>
-              <a:t>가장 중요한 비교 기준처럼 보였다.</a:t>
-            </a:r>
-          </a:p>
-        </p:txBody>
-      </p:sp>
-      <p:sp>
-        <p:nvSpPr>
-          <p:cNvPr id="15" name="">
-            <a:extLst xmlns:a="http://schemas.openxmlformats.org/drawingml/2006/main">
-              <a:ext uri="{FF2B5EF4-FFF2-40B4-BE49-F238E27FC236}">
-                <a16:creationId xmlns:a16="http://schemas.microsoft.com/office/drawing/2014/main" id="{6CAF3C73-F4D0-496A-B520-367E081D4979}"/>
-              </a:ext>
-            </a:extLst>
-          </p:cNvPr>
-          <p:cNvSpPr>
-            <a:spLocks xmlns:a="http://schemas.openxmlformats.org/drawingml/2006/main" noGrp="1"/>
-          </p:cNvSpPr>
-          <p:nvPr/>
-        </p:nvSpPr>
-        <p:spPr>
-          <a:xfrm xmlns:a="http://schemas.openxmlformats.org/drawingml/2006/main">
-            <a:off x="4495800" y="2609850"/>
+                <a16:creationId xmlns:a16="http://schemas.microsoft.com/office/drawing/2014/main" id="{CC616DC0-2432-4414-885B-C3E777AA1355}"/>
+              </a:ext>
+            </a:extLst>
+          </p:cNvPr>
+          <p:cNvSpPr>
+            <a:spLocks xmlns:a="http://schemas.openxmlformats.org/drawingml/2006/main" noGrp="1"/>
+          </p:cNvSpPr>
+          <p:nvPr/>
+        </p:nvSpPr>
+        <p:spPr>
+          <a:xfrm xmlns:a="http://schemas.openxmlformats.org/drawingml/2006/main">
+            <a:off x="4495800" y="2971800"/>
             <a:ext cx="2667000" cy="1104900"/>
           </a:xfrm>
           <a:prstGeom xmlns:a="http://schemas.openxmlformats.org/drawingml/2006/main" prst="roundRect">
@@ -6862,56 +6787,56 @@
       </p:sp>
       <p:sp>
         <p:nvSpPr>
+          <p:cNvPr id="15" name="">
+            <a:extLst xmlns:a="http://schemas.openxmlformats.org/drawingml/2006/main">
+              <a:ext uri="{FF2B5EF4-FFF2-40B4-BE49-F238E27FC236}">
+                <a16:creationId xmlns:a16="http://schemas.microsoft.com/office/drawing/2014/main" id="{598DC7BE-777A-4F2D-B2F7-A8EE5D992D0D}"/>
+              </a:ext>
+            </a:extLst>
+          </p:cNvPr>
+          <p:cNvSpPr>
+            <a:spLocks xmlns:a="http://schemas.openxmlformats.org/drawingml/2006/main" noGrp="1"/>
+          </p:cNvSpPr>
+          <p:nvPr/>
+        </p:nvSpPr>
+        <p:spPr>
+          <a:xfrm xmlns:a="http://schemas.openxmlformats.org/drawingml/2006/main">
+            <a:off x="4495800" y="2971800"/>
+            <a:ext cx="66675" cy="1104900"/>
+          </a:xfrm>
+          <a:prstGeom xmlns:a="http://schemas.openxmlformats.org/drawingml/2006/main" prst="rect">
+            <a:avLst/>
+          </a:prstGeom>
+          <a:solidFill xmlns:a="http://schemas.openxmlformats.org/drawingml/2006/main">
+            <a:srgbClr val="0F5B3F"/>
+          </a:solidFill>
+          <a:ln xmlns:a="http://schemas.openxmlformats.org/drawingml/2006/main" w="0">
+            <a:solidFill>
+              <a:srgbClr val="000000">
+                <a:alpha val="0"/>
+              </a:srgbClr>
+            </a:solidFill>
+            <a:prstDash val="solid"/>
+          </a:ln>
+        </p:spPr>
+      </p:sp>
+      <p:sp>
+        <p:nvSpPr>
           <p:cNvPr id="16" name="">
             <a:extLst xmlns:a="http://schemas.openxmlformats.org/drawingml/2006/main">
               <a:ext uri="{FF2B5EF4-FFF2-40B4-BE49-F238E27FC236}">
-                <a16:creationId xmlns:a16="http://schemas.microsoft.com/office/drawing/2014/main" id="{725BBE9A-3047-43F6-B50B-267688FC1E2E}"/>
-              </a:ext>
-            </a:extLst>
-          </p:cNvPr>
-          <p:cNvSpPr>
-            <a:spLocks xmlns:a="http://schemas.openxmlformats.org/drawingml/2006/main" noGrp="1"/>
-          </p:cNvSpPr>
-          <p:nvPr/>
-        </p:nvSpPr>
-        <p:spPr>
-          <a:xfrm xmlns:a="http://schemas.openxmlformats.org/drawingml/2006/main">
-            <a:off x="4495800" y="2609850"/>
-            <a:ext cx="66675" cy="1104900"/>
-          </a:xfrm>
-          <a:prstGeom xmlns:a="http://schemas.openxmlformats.org/drawingml/2006/main" prst="rect">
-            <a:avLst/>
-          </a:prstGeom>
-          <a:solidFill xmlns:a="http://schemas.openxmlformats.org/drawingml/2006/main">
-            <a:srgbClr val="0F5B3F"/>
-          </a:solidFill>
-          <a:ln xmlns:a="http://schemas.openxmlformats.org/drawingml/2006/main" w="0">
-            <a:solidFill>
-              <a:srgbClr val="000000">
-                <a:alpha val="0"/>
-              </a:srgbClr>
-            </a:solidFill>
-            <a:prstDash val="solid"/>
-          </a:ln>
-        </p:spPr>
-      </p:sp>
-      <p:sp>
-        <p:nvSpPr>
-          <p:cNvPr id="17" name="">
-            <a:extLst xmlns:a="http://schemas.openxmlformats.org/drawingml/2006/main">
-              <a:ext uri="{FF2B5EF4-FFF2-40B4-BE49-F238E27FC236}">
-                <a16:creationId xmlns:a16="http://schemas.microsoft.com/office/drawing/2014/main" id="{18FC66C5-CDB0-4D03-A9B8-57755EBC0B2E}"/>
-              </a:ext>
-            </a:extLst>
-          </p:cNvPr>
-          <p:cNvSpPr>
-            <a:spLocks xmlns:a="http://schemas.openxmlformats.org/drawingml/2006/main" noGrp="1"/>
-          </p:cNvSpPr>
-          <p:nvPr/>
-        </p:nvSpPr>
-        <p:spPr>
-          <a:xfrm xmlns:a="http://schemas.openxmlformats.org/drawingml/2006/main">
-            <a:off x="4667250" y="2762250"/>
+                <a16:creationId xmlns:a16="http://schemas.microsoft.com/office/drawing/2014/main" id="{FCA622BA-A68B-4325-B00B-8D0DD30DBFB0}"/>
+              </a:ext>
+            </a:extLst>
+          </p:cNvPr>
+          <p:cNvSpPr>
+            <a:spLocks xmlns:a="http://schemas.openxmlformats.org/drawingml/2006/main" noGrp="1"/>
+          </p:cNvSpPr>
+          <p:nvPr/>
+        </p:nvSpPr>
+        <p:spPr>
+          <a:xfrm xmlns:a="http://schemas.openxmlformats.org/drawingml/2006/main">
+            <a:off x="4667250" y="3124200"/>
             <a:ext cx="609600" cy="228600"/>
           </a:xfrm>
           <a:prstGeom xmlns:a="http://schemas.openxmlformats.org/drawingml/2006/main" prst="rect">
@@ -6951,21 +6876,21 @@
       </p:sp>
       <p:sp>
         <p:nvSpPr>
-          <p:cNvPr id="18" name="">
-            <a:extLst xmlns:a="http://schemas.openxmlformats.org/drawingml/2006/main">
-              <a:ext uri="{FF2B5EF4-FFF2-40B4-BE49-F238E27FC236}">
-                <a16:creationId xmlns:a16="http://schemas.microsoft.com/office/drawing/2014/main" id="{41B6DB8F-2BDF-45AC-81FF-53F93A184848}"/>
-              </a:ext>
-            </a:extLst>
-          </p:cNvPr>
-          <p:cNvSpPr>
-            <a:spLocks xmlns:a="http://schemas.openxmlformats.org/drawingml/2006/main" noGrp="1"/>
-          </p:cNvSpPr>
-          <p:nvPr/>
-        </p:nvSpPr>
-        <p:spPr>
-          <a:xfrm xmlns:a="http://schemas.openxmlformats.org/drawingml/2006/main">
-            <a:off x="4667250" y="3048000"/>
+          <p:cNvPr id="17" name="">
+            <a:extLst xmlns:a="http://schemas.openxmlformats.org/drawingml/2006/main">
+              <a:ext uri="{FF2B5EF4-FFF2-40B4-BE49-F238E27FC236}">
+                <a16:creationId xmlns:a16="http://schemas.microsoft.com/office/drawing/2014/main" id="{EF38F2B6-2B85-4D4E-97BC-53654C99E640}"/>
+              </a:ext>
+            </a:extLst>
+          </p:cNvPr>
+          <p:cNvSpPr>
+            <a:spLocks xmlns:a="http://schemas.openxmlformats.org/drawingml/2006/main" noGrp="1"/>
+          </p:cNvSpPr>
+          <p:nvPr/>
+        </p:nvSpPr>
+        <p:spPr>
+          <a:xfrm xmlns:a="http://schemas.openxmlformats.org/drawingml/2006/main">
+            <a:off x="4667250" y="3409950"/>
             <a:ext cx="2343150" cy="228600"/>
           </a:xfrm>
           <a:prstGeom xmlns:a="http://schemas.openxmlformats.org/drawingml/2006/main" prst="rect">
@@ -7009,21 +6934,21 @@
       </p:sp>
       <p:sp>
         <p:nvSpPr>
-          <p:cNvPr id="19" name="">
-            <a:extLst xmlns:a="http://schemas.openxmlformats.org/drawingml/2006/main">
-              <a:ext uri="{FF2B5EF4-FFF2-40B4-BE49-F238E27FC236}">
-                <a16:creationId xmlns:a16="http://schemas.microsoft.com/office/drawing/2014/main" id="{AA9AF575-B1DA-40BC-8E0D-47BEC68FC39D}"/>
-              </a:ext>
-            </a:extLst>
-          </p:cNvPr>
-          <p:cNvSpPr>
-            <a:spLocks xmlns:a="http://schemas.openxmlformats.org/drawingml/2006/main" noGrp="1"/>
-          </p:cNvSpPr>
-          <p:nvPr/>
-        </p:nvSpPr>
-        <p:spPr>
-          <a:xfrm xmlns:a="http://schemas.openxmlformats.org/drawingml/2006/main">
-            <a:off x="4667250" y="3295650"/>
+          <p:cNvPr id="18" name="">
+            <a:extLst xmlns:a="http://schemas.openxmlformats.org/drawingml/2006/main">
+              <a:ext uri="{FF2B5EF4-FFF2-40B4-BE49-F238E27FC236}">
+                <a16:creationId xmlns:a16="http://schemas.microsoft.com/office/drawing/2014/main" id="{9FCDE945-DFAA-43CD-A215-7CF62EB49A1F}"/>
+              </a:ext>
+            </a:extLst>
+          </p:cNvPr>
+          <p:cNvSpPr>
+            <a:spLocks xmlns:a="http://schemas.openxmlformats.org/drawingml/2006/main" noGrp="1"/>
+          </p:cNvSpPr>
+          <p:nvPr/>
+        </p:nvSpPr>
+        <p:spPr>
+          <a:xfrm xmlns:a="http://schemas.openxmlformats.org/drawingml/2006/main">
+            <a:off x="4667250" y="3657600"/>
             <a:ext cx="2343150" cy="304800"/>
           </a:xfrm>
           <a:prstGeom xmlns:a="http://schemas.openxmlformats.org/drawingml/2006/main" prst="rect">
@@ -7067,21 +6992,21 @@
       </p:sp>
       <p:sp>
         <p:nvSpPr>
-          <p:cNvPr id="20" name="">
-            <a:extLst xmlns:a="http://schemas.openxmlformats.org/drawingml/2006/main">
-              <a:ext uri="{FF2B5EF4-FFF2-40B4-BE49-F238E27FC236}">
-                <a16:creationId xmlns:a16="http://schemas.microsoft.com/office/drawing/2014/main" id="{5686A8D9-F85E-413D-B882-870636204707}"/>
-              </a:ext>
-            </a:extLst>
-          </p:cNvPr>
-          <p:cNvSpPr>
-            <a:spLocks xmlns:a="http://schemas.openxmlformats.org/drawingml/2006/main" noGrp="1"/>
-          </p:cNvSpPr>
-          <p:nvPr/>
-        </p:nvSpPr>
-        <p:spPr>
-          <a:xfrm xmlns:a="http://schemas.openxmlformats.org/drawingml/2006/main">
-            <a:off x="933450" y="1790700"/>
+          <p:cNvPr id="19" name="">
+            <a:extLst xmlns:a="http://schemas.openxmlformats.org/drawingml/2006/main">
+              <a:ext uri="{FF2B5EF4-FFF2-40B4-BE49-F238E27FC236}">
+                <a16:creationId xmlns:a16="http://schemas.microsoft.com/office/drawing/2014/main" id="{2C995225-52D2-492A-9C08-3773A3584075}"/>
+              </a:ext>
+            </a:extLst>
+          </p:cNvPr>
+          <p:cNvSpPr>
+            <a:spLocks xmlns:a="http://schemas.openxmlformats.org/drawingml/2006/main" noGrp="1"/>
+          </p:cNvSpPr>
+          <p:nvPr/>
+        </p:nvSpPr>
+        <p:spPr>
+          <a:xfrm xmlns:a="http://schemas.openxmlformats.org/drawingml/2006/main">
+            <a:off x="933450" y="2247900"/>
             <a:ext cx="1695450" cy="1066800"/>
           </a:xfrm>
           <a:prstGeom xmlns:a="http://schemas.openxmlformats.org/drawingml/2006/main" prst="roundRect">
@@ -7102,56 +7027,56 @@
       </p:sp>
       <p:sp>
         <p:nvSpPr>
+          <p:cNvPr id="20" name="">
+            <a:extLst xmlns:a="http://schemas.openxmlformats.org/drawingml/2006/main">
+              <a:ext uri="{FF2B5EF4-FFF2-40B4-BE49-F238E27FC236}">
+                <a16:creationId xmlns:a16="http://schemas.microsoft.com/office/drawing/2014/main" id="{553E9A5D-0E7D-4CA7-B1B6-95622B0064D0}"/>
+              </a:ext>
+            </a:extLst>
+          </p:cNvPr>
+          <p:cNvSpPr>
+            <a:spLocks xmlns:a="http://schemas.openxmlformats.org/drawingml/2006/main" noGrp="1"/>
+          </p:cNvSpPr>
+          <p:nvPr/>
+        </p:nvSpPr>
+        <p:spPr>
+          <a:xfrm xmlns:a="http://schemas.openxmlformats.org/drawingml/2006/main">
+            <a:off x="933450" y="2247900"/>
+            <a:ext cx="66675" cy="1066800"/>
+          </a:xfrm>
+          <a:prstGeom xmlns:a="http://schemas.openxmlformats.org/drawingml/2006/main" prst="rect">
+            <a:avLst/>
+          </a:prstGeom>
+          <a:solidFill xmlns:a="http://schemas.openxmlformats.org/drawingml/2006/main">
+            <a:srgbClr val="5C8F74"/>
+          </a:solidFill>
+          <a:ln xmlns:a="http://schemas.openxmlformats.org/drawingml/2006/main" w="0">
+            <a:solidFill>
+              <a:srgbClr val="000000">
+                <a:alpha val="0"/>
+              </a:srgbClr>
+            </a:solidFill>
+            <a:prstDash val="solid"/>
+          </a:ln>
+        </p:spPr>
+      </p:sp>
+      <p:sp>
+        <p:nvSpPr>
           <p:cNvPr id="21" name="">
             <a:extLst xmlns:a="http://schemas.openxmlformats.org/drawingml/2006/main">
               <a:ext uri="{FF2B5EF4-FFF2-40B4-BE49-F238E27FC236}">
-                <a16:creationId xmlns:a16="http://schemas.microsoft.com/office/drawing/2014/main" id="{643F7BBC-E7CE-481C-8014-6C11633B4E8F}"/>
-              </a:ext>
-            </a:extLst>
-          </p:cNvPr>
-          <p:cNvSpPr>
-            <a:spLocks xmlns:a="http://schemas.openxmlformats.org/drawingml/2006/main" noGrp="1"/>
-          </p:cNvSpPr>
-          <p:nvPr/>
-        </p:nvSpPr>
-        <p:spPr>
-          <a:xfrm xmlns:a="http://schemas.openxmlformats.org/drawingml/2006/main">
-            <a:off x="933450" y="1790700"/>
-            <a:ext cx="66675" cy="1066800"/>
-          </a:xfrm>
-          <a:prstGeom xmlns:a="http://schemas.openxmlformats.org/drawingml/2006/main" prst="rect">
-            <a:avLst/>
-          </a:prstGeom>
-          <a:solidFill xmlns:a="http://schemas.openxmlformats.org/drawingml/2006/main">
-            <a:srgbClr val="5C8F74"/>
-          </a:solidFill>
-          <a:ln xmlns:a="http://schemas.openxmlformats.org/drawingml/2006/main" w="0">
-            <a:solidFill>
-              <a:srgbClr val="000000">
-                <a:alpha val="0"/>
-              </a:srgbClr>
-            </a:solidFill>
-            <a:prstDash val="solid"/>
-          </a:ln>
-        </p:spPr>
-      </p:sp>
-      <p:sp>
-        <p:nvSpPr>
-          <p:cNvPr id="22" name="">
-            <a:extLst xmlns:a="http://schemas.openxmlformats.org/drawingml/2006/main">
-              <a:ext uri="{FF2B5EF4-FFF2-40B4-BE49-F238E27FC236}">
-                <a16:creationId xmlns:a16="http://schemas.microsoft.com/office/drawing/2014/main" id="{8BA38400-49D0-4D75-A76C-62FB39A931C3}"/>
-              </a:ext>
-            </a:extLst>
-          </p:cNvPr>
-          <p:cNvSpPr>
-            <a:spLocks xmlns:a="http://schemas.openxmlformats.org/drawingml/2006/main" noGrp="1"/>
-          </p:cNvSpPr>
-          <p:nvPr/>
-        </p:nvSpPr>
-        <p:spPr>
-          <a:xfrm xmlns:a="http://schemas.openxmlformats.org/drawingml/2006/main">
-            <a:off x="1104900" y="1943100"/>
+                <a16:creationId xmlns:a16="http://schemas.microsoft.com/office/drawing/2014/main" id="{F885770B-31CE-4F95-9B85-87C1BE95812A}"/>
+              </a:ext>
+            </a:extLst>
+          </p:cNvPr>
+          <p:cNvSpPr>
+            <a:spLocks xmlns:a="http://schemas.openxmlformats.org/drawingml/2006/main" noGrp="1"/>
+          </p:cNvSpPr>
+          <p:nvPr/>
+        </p:nvSpPr>
+        <p:spPr>
+          <a:xfrm xmlns:a="http://schemas.openxmlformats.org/drawingml/2006/main">
+            <a:off x="1104900" y="2400300"/>
             <a:ext cx="647700" cy="228600"/>
           </a:xfrm>
           <a:prstGeom xmlns:a="http://schemas.openxmlformats.org/drawingml/2006/main" prst="rect">
@@ -7191,21 +7116,21 @@
       </p:sp>
       <p:sp>
         <p:nvSpPr>
-          <p:cNvPr id="23" name="">
-            <a:extLst xmlns:a="http://schemas.openxmlformats.org/drawingml/2006/main">
-              <a:ext uri="{FF2B5EF4-FFF2-40B4-BE49-F238E27FC236}">
-                <a16:creationId xmlns:a16="http://schemas.microsoft.com/office/drawing/2014/main" id="{59B2C587-DB53-43D9-B2AB-F1CFCB9102AF}"/>
-              </a:ext>
-            </a:extLst>
-          </p:cNvPr>
-          <p:cNvSpPr>
-            <a:spLocks xmlns:a="http://schemas.openxmlformats.org/drawingml/2006/main" noGrp="1"/>
-          </p:cNvSpPr>
-          <p:nvPr/>
-        </p:nvSpPr>
-        <p:spPr>
-          <a:xfrm xmlns:a="http://schemas.openxmlformats.org/drawingml/2006/main">
-            <a:off x="1104900" y="2228850"/>
+          <p:cNvPr id="22" name="">
+            <a:extLst xmlns:a="http://schemas.openxmlformats.org/drawingml/2006/main">
+              <a:ext uri="{FF2B5EF4-FFF2-40B4-BE49-F238E27FC236}">
+                <a16:creationId xmlns:a16="http://schemas.microsoft.com/office/drawing/2014/main" id="{EDF4B148-C62B-41A5-828E-7A71474CDE43}"/>
+              </a:ext>
+            </a:extLst>
+          </p:cNvPr>
+          <p:cNvSpPr>
+            <a:spLocks xmlns:a="http://schemas.openxmlformats.org/drawingml/2006/main" noGrp="1"/>
+          </p:cNvSpPr>
+          <p:nvPr/>
+        </p:nvSpPr>
+        <p:spPr>
+          <a:xfrm xmlns:a="http://schemas.openxmlformats.org/drawingml/2006/main">
+            <a:off x="1104900" y="2686050"/>
             <a:ext cx="1371600" cy="228600"/>
           </a:xfrm>
           <a:prstGeom xmlns:a="http://schemas.openxmlformats.org/drawingml/2006/main" prst="rect">
@@ -7249,21 +7174,21 @@
       </p:sp>
       <p:sp>
         <p:nvSpPr>
-          <p:cNvPr id="24" name="">
-            <a:extLst xmlns:a="http://schemas.openxmlformats.org/drawingml/2006/main">
-              <a:ext uri="{FF2B5EF4-FFF2-40B4-BE49-F238E27FC236}">
-                <a16:creationId xmlns:a16="http://schemas.microsoft.com/office/drawing/2014/main" id="{0F0BD039-4C7B-4BED-8D89-1B6444379C7F}"/>
-              </a:ext>
-            </a:extLst>
-          </p:cNvPr>
-          <p:cNvSpPr>
-            <a:spLocks xmlns:a="http://schemas.openxmlformats.org/drawingml/2006/main" noGrp="1"/>
-          </p:cNvSpPr>
-          <p:nvPr/>
-        </p:nvSpPr>
-        <p:spPr>
-          <a:xfrm xmlns:a="http://schemas.openxmlformats.org/drawingml/2006/main">
-            <a:off x="1104900" y="2476500"/>
+          <p:cNvPr id="23" name="">
+            <a:extLst xmlns:a="http://schemas.openxmlformats.org/drawingml/2006/main">
+              <a:ext uri="{FF2B5EF4-FFF2-40B4-BE49-F238E27FC236}">
+                <a16:creationId xmlns:a16="http://schemas.microsoft.com/office/drawing/2014/main" id="{9482A286-82F8-485C-9E15-972A3B5BB747}"/>
+              </a:ext>
+            </a:extLst>
+          </p:cNvPr>
+          <p:cNvSpPr>
+            <a:spLocks xmlns:a="http://schemas.openxmlformats.org/drawingml/2006/main" noGrp="1"/>
+          </p:cNvSpPr>
+          <p:nvPr/>
+        </p:nvSpPr>
+        <p:spPr>
+          <a:xfrm xmlns:a="http://schemas.openxmlformats.org/drawingml/2006/main">
+            <a:off x="1104900" y="2933700"/>
             <a:ext cx="1371600" cy="266700"/>
           </a:xfrm>
           <a:prstGeom xmlns:a="http://schemas.openxmlformats.org/drawingml/2006/main" prst="rect">
@@ -7307,21 +7232,21 @@
       </p:sp>
       <p:sp>
         <p:nvSpPr>
-          <p:cNvPr id="25" name="">
-            <a:extLst xmlns:a="http://schemas.openxmlformats.org/drawingml/2006/main">
-              <a:ext uri="{FF2B5EF4-FFF2-40B4-BE49-F238E27FC236}">
-                <a16:creationId xmlns:a16="http://schemas.microsoft.com/office/drawing/2014/main" id="{E113898C-C22F-407A-8E99-8F931A732111}"/>
-              </a:ext>
-            </a:extLst>
-          </p:cNvPr>
-          <p:cNvSpPr>
-            <a:spLocks xmlns:a="http://schemas.openxmlformats.org/drawingml/2006/main" noGrp="1"/>
-          </p:cNvSpPr>
-          <p:nvPr/>
-        </p:nvSpPr>
-        <p:spPr>
-          <a:xfrm xmlns:a="http://schemas.openxmlformats.org/drawingml/2006/main">
-            <a:off x="2819400" y="1219200"/>
+          <p:cNvPr id="24" name="">
+            <a:extLst xmlns:a="http://schemas.openxmlformats.org/drawingml/2006/main">
+              <a:ext uri="{FF2B5EF4-FFF2-40B4-BE49-F238E27FC236}">
+                <a16:creationId xmlns:a16="http://schemas.microsoft.com/office/drawing/2014/main" id="{30EA506D-40BF-4157-9C2B-265037C4A9DE}"/>
+              </a:ext>
+            </a:extLst>
+          </p:cNvPr>
+          <p:cNvSpPr>
+            <a:spLocks xmlns:a="http://schemas.openxmlformats.org/drawingml/2006/main" noGrp="1"/>
+          </p:cNvSpPr>
+          <p:nvPr/>
+        </p:nvSpPr>
+        <p:spPr>
+          <a:xfrm xmlns:a="http://schemas.openxmlformats.org/drawingml/2006/main">
+            <a:off x="2933700" y="1866900"/>
             <a:ext cx="1695450" cy="1066800"/>
           </a:xfrm>
           <a:prstGeom xmlns:a="http://schemas.openxmlformats.org/drawingml/2006/main" prst="roundRect">
@@ -7342,56 +7267,56 @@
       </p:sp>
       <p:sp>
         <p:nvSpPr>
+          <p:cNvPr id="25" name="">
+            <a:extLst xmlns:a="http://schemas.openxmlformats.org/drawingml/2006/main">
+              <a:ext uri="{FF2B5EF4-FFF2-40B4-BE49-F238E27FC236}">
+                <a16:creationId xmlns:a16="http://schemas.microsoft.com/office/drawing/2014/main" id="{FA0D9640-7F24-49AF-A595-4A15A2FFEC59}"/>
+              </a:ext>
+            </a:extLst>
+          </p:cNvPr>
+          <p:cNvSpPr>
+            <a:spLocks xmlns:a="http://schemas.openxmlformats.org/drawingml/2006/main" noGrp="1"/>
+          </p:cNvSpPr>
+          <p:nvPr/>
+        </p:nvSpPr>
+        <p:spPr>
+          <a:xfrm xmlns:a="http://schemas.openxmlformats.org/drawingml/2006/main">
+            <a:off x="2933700" y="1866900"/>
+            <a:ext cx="66675" cy="1066800"/>
+          </a:xfrm>
+          <a:prstGeom xmlns:a="http://schemas.openxmlformats.org/drawingml/2006/main" prst="rect">
+            <a:avLst/>
+          </a:prstGeom>
+          <a:solidFill xmlns:a="http://schemas.openxmlformats.org/drawingml/2006/main">
+            <a:srgbClr val="5C8F74"/>
+          </a:solidFill>
+          <a:ln xmlns:a="http://schemas.openxmlformats.org/drawingml/2006/main" w="0">
+            <a:solidFill>
+              <a:srgbClr val="000000">
+                <a:alpha val="0"/>
+              </a:srgbClr>
+            </a:solidFill>
+            <a:prstDash val="solid"/>
+          </a:ln>
+        </p:spPr>
+      </p:sp>
+      <p:sp>
+        <p:nvSpPr>
           <p:cNvPr id="26" name="">
             <a:extLst xmlns:a="http://schemas.openxmlformats.org/drawingml/2006/main">
               <a:ext uri="{FF2B5EF4-FFF2-40B4-BE49-F238E27FC236}">
-                <a16:creationId xmlns:a16="http://schemas.microsoft.com/office/drawing/2014/main" id="{6CBC081E-23C6-4A02-92D6-1FF63A8E9BAC}"/>
-              </a:ext>
-            </a:extLst>
-          </p:cNvPr>
-          <p:cNvSpPr>
-            <a:spLocks xmlns:a="http://schemas.openxmlformats.org/drawingml/2006/main" noGrp="1"/>
-          </p:cNvSpPr>
-          <p:nvPr/>
-        </p:nvSpPr>
-        <p:spPr>
-          <a:xfrm xmlns:a="http://schemas.openxmlformats.org/drawingml/2006/main">
-            <a:off x="2819400" y="1219200"/>
-            <a:ext cx="66675" cy="1066800"/>
-          </a:xfrm>
-          <a:prstGeom xmlns:a="http://schemas.openxmlformats.org/drawingml/2006/main" prst="rect">
-            <a:avLst/>
-          </a:prstGeom>
-          <a:solidFill xmlns:a="http://schemas.openxmlformats.org/drawingml/2006/main">
-            <a:srgbClr val="5C8F74"/>
-          </a:solidFill>
-          <a:ln xmlns:a="http://schemas.openxmlformats.org/drawingml/2006/main" w="0">
-            <a:solidFill>
-              <a:srgbClr val="000000">
-                <a:alpha val="0"/>
-              </a:srgbClr>
-            </a:solidFill>
-            <a:prstDash val="solid"/>
-          </a:ln>
-        </p:spPr>
-      </p:sp>
-      <p:sp>
-        <p:nvSpPr>
-          <p:cNvPr id="27" name="">
-            <a:extLst xmlns:a="http://schemas.openxmlformats.org/drawingml/2006/main">
-              <a:ext uri="{FF2B5EF4-FFF2-40B4-BE49-F238E27FC236}">
-                <a16:creationId xmlns:a16="http://schemas.microsoft.com/office/drawing/2014/main" id="{FF4116DF-1859-4E31-8972-580E10B142AB}"/>
-              </a:ext>
-            </a:extLst>
-          </p:cNvPr>
-          <p:cNvSpPr>
-            <a:spLocks xmlns:a="http://schemas.openxmlformats.org/drawingml/2006/main" noGrp="1"/>
-          </p:cNvSpPr>
-          <p:nvPr/>
-        </p:nvSpPr>
-        <p:spPr>
-          <a:xfrm xmlns:a="http://schemas.openxmlformats.org/drawingml/2006/main">
-            <a:off x="2990850" y="1371600"/>
+                <a16:creationId xmlns:a16="http://schemas.microsoft.com/office/drawing/2014/main" id="{206B4282-817C-420B-87D6-F893174C71D9}"/>
+              </a:ext>
+            </a:extLst>
+          </p:cNvPr>
+          <p:cNvSpPr>
+            <a:spLocks xmlns:a="http://schemas.openxmlformats.org/drawingml/2006/main" noGrp="1"/>
+          </p:cNvSpPr>
+          <p:nvPr/>
+        </p:nvSpPr>
+        <p:spPr>
+          <a:xfrm xmlns:a="http://schemas.openxmlformats.org/drawingml/2006/main">
+            <a:off x="3105150" y="2019300"/>
             <a:ext cx="647700" cy="228600"/>
           </a:xfrm>
           <a:prstGeom xmlns:a="http://schemas.openxmlformats.org/drawingml/2006/main" prst="rect">
@@ -7431,21 +7356,21 @@
       </p:sp>
       <p:sp>
         <p:nvSpPr>
-          <p:cNvPr id="28" name="">
-            <a:extLst xmlns:a="http://schemas.openxmlformats.org/drawingml/2006/main">
-              <a:ext uri="{FF2B5EF4-FFF2-40B4-BE49-F238E27FC236}">
-                <a16:creationId xmlns:a16="http://schemas.microsoft.com/office/drawing/2014/main" id="{389F2218-A171-44EE-A78A-07CAB3ABE768}"/>
-              </a:ext>
-            </a:extLst>
-          </p:cNvPr>
-          <p:cNvSpPr>
-            <a:spLocks xmlns:a="http://schemas.openxmlformats.org/drawingml/2006/main" noGrp="1"/>
-          </p:cNvSpPr>
-          <p:nvPr/>
-        </p:nvSpPr>
-        <p:spPr>
-          <a:xfrm xmlns:a="http://schemas.openxmlformats.org/drawingml/2006/main">
-            <a:off x="2990850" y="1657350"/>
+          <p:cNvPr id="27" name="">
+            <a:extLst xmlns:a="http://schemas.openxmlformats.org/drawingml/2006/main">
+              <a:ext uri="{FF2B5EF4-FFF2-40B4-BE49-F238E27FC236}">
+                <a16:creationId xmlns:a16="http://schemas.microsoft.com/office/drawing/2014/main" id="{1717B098-73DC-4B86-A566-7E63820D243E}"/>
+              </a:ext>
+            </a:extLst>
+          </p:cNvPr>
+          <p:cNvSpPr>
+            <a:spLocks xmlns:a="http://schemas.openxmlformats.org/drawingml/2006/main" noGrp="1"/>
+          </p:cNvSpPr>
+          <p:nvPr/>
+        </p:nvSpPr>
+        <p:spPr>
+          <a:xfrm xmlns:a="http://schemas.openxmlformats.org/drawingml/2006/main">
+            <a:off x="3105150" y="2305050"/>
             <a:ext cx="1371600" cy="228600"/>
           </a:xfrm>
           <a:prstGeom xmlns:a="http://schemas.openxmlformats.org/drawingml/2006/main" prst="rect">
@@ -7489,21 +7414,21 @@
       </p:sp>
       <p:sp>
         <p:nvSpPr>
-          <p:cNvPr id="29" name="">
-            <a:extLst xmlns:a="http://schemas.openxmlformats.org/drawingml/2006/main">
-              <a:ext uri="{FF2B5EF4-FFF2-40B4-BE49-F238E27FC236}">
-                <a16:creationId xmlns:a16="http://schemas.microsoft.com/office/drawing/2014/main" id="{121C9A7F-F6D5-410C-B03C-165FEEAB56AC}"/>
-              </a:ext>
-            </a:extLst>
-          </p:cNvPr>
-          <p:cNvSpPr>
-            <a:spLocks xmlns:a="http://schemas.openxmlformats.org/drawingml/2006/main" noGrp="1"/>
-          </p:cNvSpPr>
-          <p:nvPr/>
-        </p:nvSpPr>
-        <p:spPr>
-          <a:xfrm xmlns:a="http://schemas.openxmlformats.org/drawingml/2006/main">
-            <a:off x="2990850" y="1905000"/>
+          <p:cNvPr id="28" name="">
+            <a:extLst xmlns:a="http://schemas.openxmlformats.org/drawingml/2006/main">
+              <a:ext uri="{FF2B5EF4-FFF2-40B4-BE49-F238E27FC236}">
+                <a16:creationId xmlns:a16="http://schemas.microsoft.com/office/drawing/2014/main" id="{77D233E6-0688-4EEF-9009-C2CB3643FF5B}"/>
+              </a:ext>
+            </a:extLst>
+          </p:cNvPr>
+          <p:cNvSpPr>
+            <a:spLocks xmlns:a="http://schemas.openxmlformats.org/drawingml/2006/main" noGrp="1"/>
+          </p:cNvSpPr>
+          <p:nvPr/>
+        </p:nvSpPr>
+        <p:spPr>
+          <a:xfrm xmlns:a="http://schemas.openxmlformats.org/drawingml/2006/main">
+            <a:off x="3105150" y="2552700"/>
             <a:ext cx="1371600" cy="266700"/>
           </a:xfrm>
           <a:prstGeom xmlns:a="http://schemas.openxmlformats.org/drawingml/2006/main" prst="rect">
@@ -7564,21 +7489,21 @@
       </p:sp>
       <p:sp>
         <p:nvSpPr>
-          <p:cNvPr id="30" name="">
-            <a:extLst xmlns:a="http://schemas.openxmlformats.org/drawingml/2006/main">
-              <a:ext uri="{FF2B5EF4-FFF2-40B4-BE49-F238E27FC236}">
-                <a16:creationId xmlns:a16="http://schemas.microsoft.com/office/drawing/2014/main" id="{4B860FE3-EAFB-47A5-B373-ACA16302ED15}"/>
-              </a:ext>
-            </a:extLst>
-          </p:cNvPr>
-          <p:cNvSpPr>
-            <a:spLocks xmlns:a="http://schemas.openxmlformats.org/drawingml/2006/main" noGrp="1"/>
-          </p:cNvSpPr>
-          <p:nvPr/>
-        </p:nvSpPr>
-        <p:spPr>
-          <a:xfrm xmlns:a="http://schemas.openxmlformats.org/drawingml/2006/main">
-            <a:off x="7658100" y="1257300"/>
+          <p:cNvPr id="29" name="">
+            <a:extLst xmlns:a="http://schemas.openxmlformats.org/drawingml/2006/main">
+              <a:ext uri="{FF2B5EF4-FFF2-40B4-BE49-F238E27FC236}">
+                <a16:creationId xmlns:a16="http://schemas.microsoft.com/office/drawing/2014/main" id="{1B2A8888-C5BA-4F0C-9C1D-6ED9F70954EF}"/>
+              </a:ext>
+            </a:extLst>
+          </p:cNvPr>
+          <p:cNvSpPr>
+            <a:spLocks xmlns:a="http://schemas.openxmlformats.org/drawingml/2006/main" noGrp="1"/>
+          </p:cNvSpPr>
+          <p:nvPr/>
+        </p:nvSpPr>
+        <p:spPr>
+          <a:xfrm xmlns:a="http://schemas.openxmlformats.org/drawingml/2006/main">
+            <a:off x="7600950" y="1943100"/>
             <a:ext cx="1733550" cy="1066800"/>
           </a:xfrm>
           <a:prstGeom xmlns:a="http://schemas.openxmlformats.org/drawingml/2006/main" prst="roundRect">
@@ -7599,56 +7524,56 @@
       </p:sp>
       <p:sp>
         <p:nvSpPr>
+          <p:cNvPr id="30" name="">
+            <a:extLst xmlns:a="http://schemas.openxmlformats.org/drawingml/2006/main">
+              <a:ext uri="{FF2B5EF4-FFF2-40B4-BE49-F238E27FC236}">
+                <a16:creationId xmlns:a16="http://schemas.microsoft.com/office/drawing/2014/main" id="{61092E9C-F6DA-405C-B3CE-F9B229C380BC}"/>
+              </a:ext>
+            </a:extLst>
+          </p:cNvPr>
+          <p:cNvSpPr>
+            <a:spLocks xmlns:a="http://schemas.openxmlformats.org/drawingml/2006/main" noGrp="1"/>
+          </p:cNvSpPr>
+          <p:nvPr/>
+        </p:nvSpPr>
+        <p:spPr>
+          <a:xfrm xmlns:a="http://schemas.openxmlformats.org/drawingml/2006/main">
+            <a:off x="7600950" y="1943100"/>
+            <a:ext cx="66675" cy="1066800"/>
+          </a:xfrm>
+          <a:prstGeom xmlns:a="http://schemas.openxmlformats.org/drawingml/2006/main" prst="rect">
+            <a:avLst/>
+          </a:prstGeom>
+          <a:solidFill xmlns:a="http://schemas.openxmlformats.org/drawingml/2006/main">
+            <a:srgbClr val="5C8F74"/>
+          </a:solidFill>
+          <a:ln xmlns:a="http://schemas.openxmlformats.org/drawingml/2006/main" w="0">
+            <a:solidFill>
+              <a:srgbClr val="000000">
+                <a:alpha val="0"/>
+              </a:srgbClr>
+            </a:solidFill>
+            <a:prstDash val="solid"/>
+          </a:ln>
+        </p:spPr>
+      </p:sp>
+      <p:sp>
+        <p:nvSpPr>
           <p:cNvPr id="31" name="">
             <a:extLst xmlns:a="http://schemas.openxmlformats.org/drawingml/2006/main">
               <a:ext uri="{FF2B5EF4-FFF2-40B4-BE49-F238E27FC236}">
-                <a16:creationId xmlns:a16="http://schemas.microsoft.com/office/drawing/2014/main" id="{92A096CB-8C5D-4BE8-82CB-5AFCD0CF32A4}"/>
-              </a:ext>
-            </a:extLst>
-          </p:cNvPr>
-          <p:cNvSpPr>
-            <a:spLocks xmlns:a="http://schemas.openxmlformats.org/drawingml/2006/main" noGrp="1"/>
-          </p:cNvSpPr>
-          <p:nvPr/>
-        </p:nvSpPr>
-        <p:spPr>
-          <a:xfrm xmlns:a="http://schemas.openxmlformats.org/drawingml/2006/main">
-            <a:off x="7658100" y="1257300"/>
-            <a:ext cx="66675" cy="1066800"/>
-          </a:xfrm>
-          <a:prstGeom xmlns:a="http://schemas.openxmlformats.org/drawingml/2006/main" prst="rect">
-            <a:avLst/>
-          </a:prstGeom>
-          <a:solidFill xmlns:a="http://schemas.openxmlformats.org/drawingml/2006/main">
-            <a:srgbClr val="5C8F74"/>
-          </a:solidFill>
-          <a:ln xmlns:a="http://schemas.openxmlformats.org/drawingml/2006/main" w="0">
-            <a:solidFill>
-              <a:srgbClr val="000000">
-                <a:alpha val="0"/>
-              </a:srgbClr>
-            </a:solidFill>
-            <a:prstDash val="solid"/>
-          </a:ln>
-        </p:spPr>
-      </p:sp>
-      <p:sp>
-        <p:nvSpPr>
-          <p:cNvPr id="32" name="">
-            <a:extLst xmlns:a="http://schemas.openxmlformats.org/drawingml/2006/main">
-              <a:ext uri="{FF2B5EF4-FFF2-40B4-BE49-F238E27FC236}">
-                <a16:creationId xmlns:a16="http://schemas.microsoft.com/office/drawing/2014/main" id="{B89D60C8-B62B-455C-AC40-DE0B948244C1}"/>
-              </a:ext>
-            </a:extLst>
-          </p:cNvPr>
-          <p:cNvSpPr>
-            <a:spLocks xmlns:a="http://schemas.openxmlformats.org/drawingml/2006/main" noGrp="1"/>
-          </p:cNvSpPr>
-          <p:nvPr/>
-        </p:nvSpPr>
-        <p:spPr>
-          <a:xfrm xmlns:a="http://schemas.openxmlformats.org/drawingml/2006/main">
-            <a:off x="7829550" y="1409700"/>
+                <a16:creationId xmlns:a16="http://schemas.microsoft.com/office/drawing/2014/main" id="{2BB9DA58-0017-4C0F-AD4D-9CDA4F6E1327}"/>
+              </a:ext>
+            </a:extLst>
+          </p:cNvPr>
+          <p:cNvSpPr>
+            <a:spLocks xmlns:a="http://schemas.openxmlformats.org/drawingml/2006/main" noGrp="1"/>
+          </p:cNvSpPr>
+          <p:nvPr/>
+        </p:nvSpPr>
+        <p:spPr>
+          <a:xfrm xmlns:a="http://schemas.openxmlformats.org/drawingml/2006/main">
+            <a:off x="7772400" y="2095500"/>
             <a:ext cx="647700" cy="228600"/>
           </a:xfrm>
           <a:prstGeom xmlns:a="http://schemas.openxmlformats.org/drawingml/2006/main" prst="rect">
@@ -7688,21 +7613,21 @@
       </p:sp>
       <p:sp>
         <p:nvSpPr>
-          <p:cNvPr id="33" name="">
-            <a:extLst xmlns:a="http://schemas.openxmlformats.org/drawingml/2006/main">
-              <a:ext uri="{FF2B5EF4-FFF2-40B4-BE49-F238E27FC236}">
-                <a16:creationId xmlns:a16="http://schemas.microsoft.com/office/drawing/2014/main" id="{0F024ECB-6AFD-42E8-8B15-68D96D28A5DA}"/>
-              </a:ext>
-            </a:extLst>
-          </p:cNvPr>
-          <p:cNvSpPr>
-            <a:spLocks xmlns:a="http://schemas.openxmlformats.org/drawingml/2006/main" noGrp="1"/>
-          </p:cNvSpPr>
-          <p:nvPr/>
-        </p:nvSpPr>
-        <p:spPr>
-          <a:xfrm xmlns:a="http://schemas.openxmlformats.org/drawingml/2006/main">
-            <a:off x="7829550" y="1695450"/>
+          <p:cNvPr id="32" name="">
+            <a:extLst xmlns:a="http://schemas.openxmlformats.org/drawingml/2006/main">
+              <a:ext uri="{FF2B5EF4-FFF2-40B4-BE49-F238E27FC236}">
+                <a16:creationId xmlns:a16="http://schemas.microsoft.com/office/drawing/2014/main" id="{FEDB0960-A9E4-4F30-AD07-2A2406DB6663}"/>
+              </a:ext>
+            </a:extLst>
+          </p:cNvPr>
+          <p:cNvSpPr>
+            <a:spLocks xmlns:a="http://schemas.openxmlformats.org/drawingml/2006/main" noGrp="1"/>
+          </p:cNvSpPr>
+          <p:nvPr/>
+        </p:nvSpPr>
+        <p:spPr>
+          <a:xfrm xmlns:a="http://schemas.openxmlformats.org/drawingml/2006/main">
+            <a:off x="7772400" y="2381250"/>
             <a:ext cx="1409700" cy="228600"/>
           </a:xfrm>
           <a:prstGeom xmlns:a="http://schemas.openxmlformats.org/drawingml/2006/main" prst="rect">
@@ -7746,21 +7671,21 @@
       </p:sp>
       <p:sp>
         <p:nvSpPr>
-          <p:cNvPr id="34" name="">
-            <a:extLst xmlns:a="http://schemas.openxmlformats.org/drawingml/2006/main">
-              <a:ext uri="{FF2B5EF4-FFF2-40B4-BE49-F238E27FC236}">
-                <a16:creationId xmlns:a16="http://schemas.microsoft.com/office/drawing/2014/main" id="{879A5B86-835B-45BC-9B22-1996BC62FA98}"/>
-              </a:ext>
-            </a:extLst>
-          </p:cNvPr>
-          <p:cNvSpPr>
-            <a:spLocks xmlns:a="http://schemas.openxmlformats.org/drawingml/2006/main" noGrp="1"/>
-          </p:cNvSpPr>
-          <p:nvPr/>
-        </p:nvSpPr>
-        <p:spPr>
-          <a:xfrm xmlns:a="http://schemas.openxmlformats.org/drawingml/2006/main">
-            <a:off x="7829550" y="1943100"/>
+          <p:cNvPr id="33" name="">
+            <a:extLst xmlns:a="http://schemas.openxmlformats.org/drawingml/2006/main">
+              <a:ext uri="{FF2B5EF4-FFF2-40B4-BE49-F238E27FC236}">
+                <a16:creationId xmlns:a16="http://schemas.microsoft.com/office/drawing/2014/main" id="{3CD238B1-6E89-46D2-BD6F-64F6A01A39B7}"/>
+              </a:ext>
+            </a:extLst>
+          </p:cNvPr>
+          <p:cNvSpPr>
+            <a:spLocks xmlns:a="http://schemas.openxmlformats.org/drawingml/2006/main" noGrp="1"/>
+          </p:cNvSpPr>
+          <p:nvPr/>
+        </p:nvSpPr>
+        <p:spPr>
+          <a:xfrm xmlns:a="http://schemas.openxmlformats.org/drawingml/2006/main">
+            <a:off x="7772400" y="2628900"/>
             <a:ext cx="1409700" cy="266700"/>
           </a:xfrm>
           <a:prstGeom xmlns:a="http://schemas.openxmlformats.org/drawingml/2006/main" prst="rect">
@@ -7821,21 +7746,21 @@
       </p:sp>
       <p:sp>
         <p:nvSpPr>
-          <p:cNvPr id="35" name="">
-            <a:extLst xmlns:a="http://schemas.openxmlformats.org/drawingml/2006/main">
-              <a:ext uri="{FF2B5EF4-FFF2-40B4-BE49-F238E27FC236}">
-                <a16:creationId xmlns:a16="http://schemas.microsoft.com/office/drawing/2014/main" id="{3371778E-0307-47A4-8145-121F226658C6}"/>
-              </a:ext>
-            </a:extLst>
-          </p:cNvPr>
-          <p:cNvSpPr>
-            <a:spLocks xmlns:a="http://schemas.openxmlformats.org/drawingml/2006/main" noGrp="1"/>
-          </p:cNvSpPr>
-          <p:nvPr/>
-        </p:nvSpPr>
-        <p:spPr>
-          <a:xfrm xmlns:a="http://schemas.openxmlformats.org/drawingml/2006/main">
-            <a:off x="9563100" y="2000250"/>
+          <p:cNvPr id="34" name="">
+            <a:extLst xmlns:a="http://schemas.openxmlformats.org/drawingml/2006/main">
+              <a:ext uri="{FF2B5EF4-FFF2-40B4-BE49-F238E27FC236}">
+                <a16:creationId xmlns:a16="http://schemas.microsoft.com/office/drawing/2014/main" id="{E40242FD-44B7-4A35-B5DD-989C628E0BE5}"/>
+              </a:ext>
+            </a:extLst>
+          </p:cNvPr>
+          <p:cNvSpPr>
+            <a:spLocks xmlns:a="http://schemas.openxmlformats.org/drawingml/2006/main" noGrp="1"/>
+          </p:cNvSpPr>
+          <p:nvPr/>
+        </p:nvSpPr>
+        <p:spPr>
+          <a:xfrm xmlns:a="http://schemas.openxmlformats.org/drawingml/2006/main">
+            <a:off x="9563100" y="2724150"/>
             <a:ext cx="1657350" cy="1066800"/>
           </a:xfrm>
           <a:prstGeom xmlns:a="http://schemas.openxmlformats.org/drawingml/2006/main" prst="roundRect">
@@ -7856,56 +7781,56 @@
       </p:sp>
       <p:sp>
         <p:nvSpPr>
+          <p:cNvPr id="35" name="">
+            <a:extLst xmlns:a="http://schemas.openxmlformats.org/drawingml/2006/main">
+              <a:ext uri="{FF2B5EF4-FFF2-40B4-BE49-F238E27FC236}">
+                <a16:creationId xmlns:a16="http://schemas.microsoft.com/office/drawing/2014/main" id="{FDA3836C-B235-4A41-BA1B-3830644C58A8}"/>
+              </a:ext>
+            </a:extLst>
+          </p:cNvPr>
+          <p:cNvSpPr>
+            <a:spLocks xmlns:a="http://schemas.openxmlformats.org/drawingml/2006/main" noGrp="1"/>
+          </p:cNvSpPr>
+          <p:nvPr/>
+        </p:nvSpPr>
+        <p:spPr>
+          <a:xfrm xmlns:a="http://schemas.openxmlformats.org/drawingml/2006/main">
+            <a:off x="9563100" y="2724150"/>
+            <a:ext cx="66675" cy="1066800"/>
+          </a:xfrm>
+          <a:prstGeom xmlns:a="http://schemas.openxmlformats.org/drawingml/2006/main" prst="rect">
+            <a:avLst/>
+          </a:prstGeom>
+          <a:solidFill xmlns:a="http://schemas.openxmlformats.org/drawingml/2006/main">
+            <a:srgbClr val="5C8F74"/>
+          </a:solidFill>
+          <a:ln xmlns:a="http://schemas.openxmlformats.org/drawingml/2006/main" w="0">
+            <a:solidFill>
+              <a:srgbClr val="000000">
+                <a:alpha val="0"/>
+              </a:srgbClr>
+            </a:solidFill>
+            <a:prstDash val="solid"/>
+          </a:ln>
+        </p:spPr>
+      </p:sp>
+      <p:sp>
+        <p:nvSpPr>
           <p:cNvPr id="36" name="">
             <a:extLst xmlns:a="http://schemas.openxmlformats.org/drawingml/2006/main">
               <a:ext uri="{FF2B5EF4-FFF2-40B4-BE49-F238E27FC236}">
-                <a16:creationId xmlns:a16="http://schemas.microsoft.com/office/drawing/2014/main" id="{742746C0-A7A8-4375-8C37-456D477A56DB}"/>
-              </a:ext>
-            </a:extLst>
-          </p:cNvPr>
-          <p:cNvSpPr>
-            <a:spLocks xmlns:a="http://schemas.openxmlformats.org/drawingml/2006/main" noGrp="1"/>
-          </p:cNvSpPr>
-          <p:nvPr/>
-        </p:nvSpPr>
-        <p:spPr>
-          <a:xfrm xmlns:a="http://schemas.openxmlformats.org/drawingml/2006/main">
-            <a:off x="9563100" y="2000250"/>
-            <a:ext cx="66675" cy="1066800"/>
-          </a:xfrm>
-          <a:prstGeom xmlns:a="http://schemas.openxmlformats.org/drawingml/2006/main" prst="rect">
-            <a:avLst/>
-          </a:prstGeom>
-          <a:solidFill xmlns:a="http://schemas.openxmlformats.org/drawingml/2006/main">
-            <a:srgbClr val="5C8F74"/>
-          </a:solidFill>
-          <a:ln xmlns:a="http://schemas.openxmlformats.org/drawingml/2006/main" w="0">
-            <a:solidFill>
-              <a:srgbClr val="000000">
-                <a:alpha val="0"/>
-              </a:srgbClr>
-            </a:solidFill>
-            <a:prstDash val="solid"/>
-          </a:ln>
-        </p:spPr>
-      </p:sp>
-      <p:sp>
-        <p:nvSpPr>
-          <p:cNvPr id="37" name="">
-            <a:extLst xmlns:a="http://schemas.openxmlformats.org/drawingml/2006/main">
-              <a:ext uri="{FF2B5EF4-FFF2-40B4-BE49-F238E27FC236}">
-                <a16:creationId xmlns:a16="http://schemas.microsoft.com/office/drawing/2014/main" id="{050C3C19-030A-4607-A69B-E562A4E1D9B3}"/>
-              </a:ext>
-            </a:extLst>
-          </p:cNvPr>
-          <p:cNvSpPr>
-            <a:spLocks xmlns:a="http://schemas.openxmlformats.org/drawingml/2006/main" noGrp="1"/>
-          </p:cNvSpPr>
-          <p:nvPr/>
-        </p:nvSpPr>
-        <p:spPr>
-          <a:xfrm xmlns:a="http://schemas.openxmlformats.org/drawingml/2006/main">
-            <a:off x="9734550" y="2152650"/>
+                <a16:creationId xmlns:a16="http://schemas.microsoft.com/office/drawing/2014/main" id="{5B9C8DDD-FB79-4AC8-9DD7-99D12877F52B}"/>
+              </a:ext>
+            </a:extLst>
+          </p:cNvPr>
+          <p:cNvSpPr>
+            <a:spLocks xmlns:a="http://schemas.openxmlformats.org/drawingml/2006/main" noGrp="1"/>
+          </p:cNvSpPr>
+          <p:nvPr/>
+        </p:nvSpPr>
+        <p:spPr>
+          <a:xfrm xmlns:a="http://schemas.openxmlformats.org/drawingml/2006/main">
+            <a:off x="9734550" y="2876550"/>
             <a:ext cx="647700" cy="228600"/>
           </a:xfrm>
           <a:prstGeom xmlns:a="http://schemas.openxmlformats.org/drawingml/2006/main" prst="rect">
@@ -7945,21 +7870,21 @@
       </p:sp>
       <p:sp>
         <p:nvSpPr>
-          <p:cNvPr id="38" name="">
-            <a:extLst xmlns:a="http://schemas.openxmlformats.org/drawingml/2006/main">
-              <a:ext uri="{FF2B5EF4-FFF2-40B4-BE49-F238E27FC236}">
-                <a16:creationId xmlns:a16="http://schemas.microsoft.com/office/drawing/2014/main" id="{6AF8B326-DABD-4279-B2BE-F2E4C192C851}"/>
-              </a:ext>
-            </a:extLst>
-          </p:cNvPr>
-          <p:cNvSpPr>
-            <a:spLocks xmlns:a="http://schemas.openxmlformats.org/drawingml/2006/main" noGrp="1"/>
-          </p:cNvSpPr>
-          <p:nvPr/>
-        </p:nvSpPr>
-        <p:spPr>
-          <a:xfrm xmlns:a="http://schemas.openxmlformats.org/drawingml/2006/main">
-            <a:off x="9734550" y="2438400"/>
+          <p:cNvPr id="37" name="">
+            <a:extLst xmlns:a="http://schemas.openxmlformats.org/drawingml/2006/main">
+              <a:ext uri="{FF2B5EF4-FFF2-40B4-BE49-F238E27FC236}">
+                <a16:creationId xmlns:a16="http://schemas.microsoft.com/office/drawing/2014/main" id="{48788741-1118-44A5-BA13-9BBBFE1F2874}"/>
+              </a:ext>
+            </a:extLst>
+          </p:cNvPr>
+          <p:cNvSpPr>
+            <a:spLocks xmlns:a="http://schemas.openxmlformats.org/drawingml/2006/main" noGrp="1"/>
+          </p:cNvSpPr>
+          <p:nvPr/>
+        </p:nvSpPr>
+        <p:spPr>
+          <a:xfrm xmlns:a="http://schemas.openxmlformats.org/drawingml/2006/main">
+            <a:off x="9734550" y="3162300"/>
             <a:ext cx="1333500" cy="228600"/>
           </a:xfrm>
           <a:prstGeom xmlns:a="http://schemas.openxmlformats.org/drawingml/2006/main" prst="rect">
@@ -8003,21 +7928,21 @@
       </p:sp>
       <p:sp>
         <p:nvSpPr>
-          <p:cNvPr id="39" name="">
-            <a:extLst xmlns:a="http://schemas.openxmlformats.org/drawingml/2006/main">
-              <a:ext uri="{FF2B5EF4-FFF2-40B4-BE49-F238E27FC236}">
-                <a16:creationId xmlns:a16="http://schemas.microsoft.com/office/drawing/2014/main" id="{CBD0CB0C-0F4B-4452-A4B9-486F54DC1FA5}"/>
-              </a:ext>
-            </a:extLst>
-          </p:cNvPr>
-          <p:cNvSpPr>
-            <a:spLocks xmlns:a="http://schemas.openxmlformats.org/drawingml/2006/main" noGrp="1"/>
-          </p:cNvSpPr>
-          <p:nvPr/>
-        </p:nvSpPr>
-        <p:spPr>
-          <a:xfrm xmlns:a="http://schemas.openxmlformats.org/drawingml/2006/main">
-            <a:off x="9734550" y="2686050"/>
+          <p:cNvPr id="38" name="">
+            <a:extLst xmlns:a="http://schemas.openxmlformats.org/drawingml/2006/main">
+              <a:ext uri="{FF2B5EF4-FFF2-40B4-BE49-F238E27FC236}">
+                <a16:creationId xmlns:a16="http://schemas.microsoft.com/office/drawing/2014/main" id="{9E9EF3FF-6496-4E6C-9BD9-A97B9BA63E32}"/>
+              </a:ext>
+            </a:extLst>
+          </p:cNvPr>
+          <p:cNvSpPr>
+            <a:spLocks xmlns:a="http://schemas.openxmlformats.org/drawingml/2006/main" noGrp="1"/>
+          </p:cNvSpPr>
+          <p:nvPr/>
+        </p:nvSpPr>
+        <p:spPr>
+          <a:xfrm xmlns:a="http://schemas.openxmlformats.org/drawingml/2006/main">
+            <a:off x="9734550" y="3409950"/>
             <a:ext cx="1333500" cy="266700"/>
           </a:xfrm>
           <a:prstGeom xmlns:a="http://schemas.openxmlformats.org/drawingml/2006/main" prst="rect">
@@ -8061,21 +7986,21 @@
       </p:sp>
       <p:sp>
         <p:nvSpPr>
-          <p:cNvPr id="40" name="">
-            <a:extLst xmlns:a="http://schemas.openxmlformats.org/drawingml/2006/main">
-              <a:ext uri="{FF2B5EF4-FFF2-40B4-BE49-F238E27FC236}">
-                <a16:creationId xmlns:a16="http://schemas.microsoft.com/office/drawing/2014/main" id="{FA75921A-8A47-4945-8F07-FCE7E9B83311}"/>
-              </a:ext>
-            </a:extLst>
-          </p:cNvPr>
-          <p:cNvSpPr>
-            <a:spLocks xmlns:a="http://schemas.openxmlformats.org/drawingml/2006/main" noGrp="1"/>
-          </p:cNvSpPr>
-          <p:nvPr/>
-        </p:nvSpPr>
-        <p:spPr>
-          <a:xfrm xmlns:a="http://schemas.openxmlformats.org/drawingml/2006/main">
-            <a:off x="9486900" y="3676650"/>
+          <p:cNvPr id="39" name="">
+            <a:extLst xmlns:a="http://schemas.openxmlformats.org/drawingml/2006/main">
+              <a:ext uri="{FF2B5EF4-FFF2-40B4-BE49-F238E27FC236}">
+                <a16:creationId xmlns:a16="http://schemas.microsoft.com/office/drawing/2014/main" id="{75AAB43E-9B55-4900-8BCC-DA7A3DEB5106}"/>
+              </a:ext>
+            </a:extLst>
+          </p:cNvPr>
+          <p:cNvSpPr>
+            <a:spLocks xmlns:a="http://schemas.openxmlformats.org/drawingml/2006/main" noGrp="1"/>
+          </p:cNvSpPr>
+          <p:nvPr/>
+        </p:nvSpPr>
+        <p:spPr>
+          <a:xfrm xmlns:a="http://schemas.openxmlformats.org/drawingml/2006/main">
+            <a:off x="9467850" y="4476750"/>
             <a:ext cx="1733550" cy="1066800"/>
           </a:xfrm>
           <a:prstGeom xmlns:a="http://schemas.openxmlformats.org/drawingml/2006/main" prst="roundRect">
@@ -8096,56 +8021,56 @@
       </p:sp>
       <p:sp>
         <p:nvSpPr>
+          <p:cNvPr id="40" name="">
+            <a:extLst xmlns:a="http://schemas.openxmlformats.org/drawingml/2006/main">
+              <a:ext uri="{FF2B5EF4-FFF2-40B4-BE49-F238E27FC236}">
+                <a16:creationId xmlns:a16="http://schemas.microsoft.com/office/drawing/2014/main" id="{44B24F08-89A9-44B4-94C3-C43C7D741126}"/>
+              </a:ext>
+            </a:extLst>
+          </p:cNvPr>
+          <p:cNvSpPr>
+            <a:spLocks xmlns:a="http://schemas.openxmlformats.org/drawingml/2006/main" noGrp="1"/>
+          </p:cNvSpPr>
+          <p:nvPr/>
+        </p:nvSpPr>
+        <p:spPr>
+          <a:xfrm xmlns:a="http://schemas.openxmlformats.org/drawingml/2006/main">
+            <a:off x="9467850" y="4476750"/>
+            <a:ext cx="66675" cy="1066800"/>
+          </a:xfrm>
+          <a:prstGeom xmlns:a="http://schemas.openxmlformats.org/drawingml/2006/main" prst="rect">
+            <a:avLst/>
+          </a:prstGeom>
+          <a:solidFill xmlns:a="http://schemas.openxmlformats.org/drawingml/2006/main">
+            <a:srgbClr val="5C8F74"/>
+          </a:solidFill>
+          <a:ln xmlns:a="http://schemas.openxmlformats.org/drawingml/2006/main" w="0">
+            <a:solidFill>
+              <a:srgbClr val="000000">
+                <a:alpha val="0"/>
+              </a:srgbClr>
+            </a:solidFill>
+            <a:prstDash val="solid"/>
+          </a:ln>
+        </p:spPr>
+      </p:sp>
+      <p:sp>
+        <p:nvSpPr>
           <p:cNvPr id="41" name="">
             <a:extLst xmlns:a="http://schemas.openxmlformats.org/drawingml/2006/main">
               <a:ext uri="{FF2B5EF4-FFF2-40B4-BE49-F238E27FC236}">
-                <a16:creationId xmlns:a16="http://schemas.microsoft.com/office/drawing/2014/main" id="{6F892A4C-1916-4525-8277-D34D5DFD833B}"/>
-              </a:ext>
-            </a:extLst>
-          </p:cNvPr>
-          <p:cNvSpPr>
-            <a:spLocks xmlns:a="http://schemas.openxmlformats.org/drawingml/2006/main" noGrp="1"/>
-          </p:cNvSpPr>
-          <p:nvPr/>
-        </p:nvSpPr>
-        <p:spPr>
-          <a:xfrm xmlns:a="http://schemas.openxmlformats.org/drawingml/2006/main">
-            <a:off x="9486900" y="3676650"/>
-            <a:ext cx="66675" cy="1066800"/>
-          </a:xfrm>
-          <a:prstGeom xmlns:a="http://schemas.openxmlformats.org/drawingml/2006/main" prst="rect">
-            <a:avLst/>
-          </a:prstGeom>
-          <a:solidFill xmlns:a="http://schemas.openxmlformats.org/drawingml/2006/main">
-            <a:srgbClr val="5C8F74"/>
-          </a:solidFill>
-          <a:ln xmlns:a="http://schemas.openxmlformats.org/drawingml/2006/main" w="0">
-            <a:solidFill>
-              <a:srgbClr val="000000">
-                <a:alpha val="0"/>
-              </a:srgbClr>
-            </a:solidFill>
-            <a:prstDash val="solid"/>
-          </a:ln>
-        </p:spPr>
-      </p:sp>
-      <p:sp>
-        <p:nvSpPr>
-          <p:cNvPr id="42" name="">
-            <a:extLst xmlns:a="http://schemas.openxmlformats.org/drawingml/2006/main">
-              <a:ext uri="{FF2B5EF4-FFF2-40B4-BE49-F238E27FC236}">
-                <a16:creationId xmlns:a16="http://schemas.microsoft.com/office/drawing/2014/main" id="{ADB12641-90D1-4B96-BA35-F07F5934479A}"/>
-              </a:ext>
-            </a:extLst>
-          </p:cNvPr>
-          <p:cNvSpPr>
-            <a:spLocks xmlns:a="http://schemas.openxmlformats.org/drawingml/2006/main" noGrp="1"/>
-          </p:cNvSpPr>
-          <p:nvPr/>
-        </p:nvSpPr>
-        <p:spPr>
-          <a:xfrm xmlns:a="http://schemas.openxmlformats.org/drawingml/2006/main">
-            <a:off x="9658350" y="3829050"/>
+                <a16:creationId xmlns:a16="http://schemas.microsoft.com/office/drawing/2014/main" id="{AD20F91D-F862-465E-BB2A-A7D20A86A824}"/>
+              </a:ext>
+            </a:extLst>
+          </p:cNvPr>
+          <p:cNvSpPr>
+            <a:spLocks xmlns:a="http://schemas.openxmlformats.org/drawingml/2006/main" noGrp="1"/>
+          </p:cNvSpPr>
+          <p:nvPr/>
+        </p:nvSpPr>
+        <p:spPr>
+          <a:xfrm xmlns:a="http://schemas.openxmlformats.org/drawingml/2006/main">
+            <a:off x="9639300" y="4629150"/>
             <a:ext cx="647700" cy="228600"/>
           </a:xfrm>
           <a:prstGeom xmlns:a="http://schemas.openxmlformats.org/drawingml/2006/main" prst="rect">
@@ -8185,21 +8110,21 @@
       </p:sp>
       <p:sp>
         <p:nvSpPr>
-          <p:cNvPr id="43" name="">
-            <a:extLst xmlns:a="http://schemas.openxmlformats.org/drawingml/2006/main">
-              <a:ext uri="{FF2B5EF4-FFF2-40B4-BE49-F238E27FC236}">
-                <a16:creationId xmlns:a16="http://schemas.microsoft.com/office/drawing/2014/main" id="{5F8C90B2-94B9-4401-AA5E-D1D470C64CB5}"/>
-              </a:ext>
-            </a:extLst>
-          </p:cNvPr>
-          <p:cNvSpPr>
-            <a:spLocks xmlns:a="http://schemas.openxmlformats.org/drawingml/2006/main" noGrp="1"/>
-          </p:cNvSpPr>
-          <p:nvPr/>
-        </p:nvSpPr>
-        <p:spPr>
-          <a:xfrm xmlns:a="http://schemas.openxmlformats.org/drawingml/2006/main">
-            <a:off x="9658350" y="4114800"/>
+          <p:cNvPr id="42" name="">
+            <a:extLst xmlns:a="http://schemas.openxmlformats.org/drawingml/2006/main">
+              <a:ext uri="{FF2B5EF4-FFF2-40B4-BE49-F238E27FC236}">
+                <a16:creationId xmlns:a16="http://schemas.microsoft.com/office/drawing/2014/main" id="{42F20228-C38B-4F03-8795-B6412DDF3156}"/>
+              </a:ext>
+            </a:extLst>
+          </p:cNvPr>
+          <p:cNvSpPr>
+            <a:spLocks xmlns:a="http://schemas.openxmlformats.org/drawingml/2006/main" noGrp="1"/>
+          </p:cNvSpPr>
+          <p:nvPr/>
+        </p:nvSpPr>
+        <p:spPr>
+          <a:xfrm xmlns:a="http://schemas.openxmlformats.org/drawingml/2006/main">
+            <a:off x="9639300" y="4914900"/>
             <a:ext cx="1409700" cy="228600"/>
           </a:xfrm>
           <a:prstGeom xmlns:a="http://schemas.openxmlformats.org/drawingml/2006/main" prst="rect">
@@ -8243,21 +8168,21 @@
       </p:sp>
       <p:sp>
         <p:nvSpPr>
-          <p:cNvPr id="44" name="">
-            <a:extLst xmlns:a="http://schemas.openxmlformats.org/drawingml/2006/main">
-              <a:ext uri="{FF2B5EF4-FFF2-40B4-BE49-F238E27FC236}">
-                <a16:creationId xmlns:a16="http://schemas.microsoft.com/office/drawing/2014/main" id="{A24568CC-D9AD-4380-A94E-9966FA83DA1B}"/>
-              </a:ext>
-            </a:extLst>
-          </p:cNvPr>
-          <p:cNvSpPr>
-            <a:spLocks xmlns:a="http://schemas.openxmlformats.org/drawingml/2006/main" noGrp="1"/>
-          </p:cNvSpPr>
-          <p:nvPr/>
-        </p:nvSpPr>
-        <p:spPr>
-          <a:xfrm xmlns:a="http://schemas.openxmlformats.org/drawingml/2006/main">
-            <a:off x="9658350" y="4362450"/>
+          <p:cNvPr id="43" name="">
+            <a:extLst xmlns:a="http://schemas.openxmlformats.org/drawingml/2006/main">
+              <a:ext uri="{FF2B5EF4-FFF2-40B4-BE49-F238E27FC236}">
+                <a16:creationId xmlns:a16="http://schemas.microsoft.com/office/drawing/2014/main" id="{76908E6B-7CDE-4AB0-A793-38B9872E8848}"/>
+              </a:ext>
+            </a:extLst>
+          </p:cNvPr>
+          <p:cNvSpPr>
+            <a:spLocks xmlns:a="http://schemas.openxmlformats.org/drawingml/2006/main" noGrp="1"/>
+          </p:cNvSpPr>
+          <p:nvPr/>
+        </p:nvSpPr>
+        <p:spPr>
+          <a:xfrm xmlns:a="http://schemas.openxmlformats.org/drawingml/2006/main">
+            <a:off x="9639300" y="5162550"/>
             <a:ext cx="1409700" cy="266700"/>
           </a:xfrm>
           <a:prstGeom xmlns:a="http://schemas.openxmlformats.org/drawingml/2006/main" prst="rect">
@@ -8301,21 +8226,21 @@
       </p:sp>
       <p:sp>
         <p:nvSpPr>
-          <p:cNvPr id="45" name="">
-            <a:extLst xmlns:a="http://schemas.openxmlformats.org/drawingml/2006/main">
-              <a:ext uri="{FF2B5EF4-FFF2-40B4-BE49-F238E27FC236}">
-                <a16:creationId xmlns:a16="http://schemas.microsoft.com/office/drawing/2014/main" id="{259B07B4-FB8D-4E09-945A-FA274D32055F}"/>
-              </a:ext>
-            </a:extLst>
-          </p:cNvPr>
-          <p:cNvSpPr>
-            <a:spLocks xmlns:a="http://schemas.openxmlformats.org/drawingml/2006/main" noGrp="1"/>
-          </p:cNvSpPr>
-          <p:nvPr/>
-        </p:nvSpPr>
-        <p:spPr>
-          <a:xfrm xmlns:a="http://schemas.openxmlformats.org/drawingml/2006/main">
-            <a:off x="7239000" y="4743450"/>
+          <p:cNvPr id="44" name="">
+            <a:extLst xmlns:a="http://schemas.openxmlformats.org/drawingml/2006/main">
+              <a:ext uri="{FF2B5EF4-FFF2-40B4-BE49-F238E27FC236}">
+                <a16:creationId xmlns:a16="http://schemas.microsoft.com/office/drawing/2014/main" id="{94362AAF-3D33-444B-9DC1-2279CE3DAA0A}"/>
+              </a:ext>
+            </a:extLst>
+          </p:cNvPr>
+          <p:cNvSpPr>
+            <a:spLocks xmlns:a="http://schemas.openxmlformats.org/drawingml/2006/main" noGrp="1"/>
+          </p:cNvSpPr>
+          <p:nvPr/>
+        </p:nvSpPr>
+        <p:spPr>
+          <a:xfrm xmlns:a="http://schemas.openxmlformats.org/drawingml/2006/main">
+            <a:off x="7105650" y="4933950"/>
             <a:ext cx="1733550" cy="1066800"/>
           </a:xfrm>
           <a:prstGeom xmlns:a="http://schemas.openxmlformats.org/drawingml/2006/main" prst="roundRect">
@@ -8336,56 +8261,56 @@
       </p:sp>
       <p:sp>
         <p:nvSpPr>
+          <p:cNvPr id="45" name="">
+            <a:extLst xmlns:a="http://schemas.openxmlformats.org/drawingml/2006/main">
+              <a:ext uri="{FF2B5EF4-FFF2-40B4-BE49-F238E27FC236}">
+                <a16:creationId xmlns:a16="http://schemas.microsoft.com/office/drawing/2014/main" id="{537F29F7-0F7D-4C15-A749-20424F6DA1E5}"/>
+              </a:ext>
+            </a:extLst>
+          </p:cNvPr>
+          <p:cNvSpPr>
+            <a:spLocks xmlns:a="http://schemas.openxmlformats.org/drawingml/2006/main" noGrp="1"/>
+          </p:cNvSpPr>
+          <p:nvPr/>
+        </p:nvSpPr>
+        <p:spPr>
+          <a:xfrm xmlns:a="http://schemas.openxmlformats.org/drawingml/2006/main">
+            <a:off x="7105650" y="4933950"/>
+            <a:ext cx="66675" cy="1066800"/>
+          </a:xfrm>
+          <a:prstGeom xmlns:a="http://schemas.openxmlformats.org/drawingml/2006/main" prst="rect">
+            <a:avLst/>
+          </a:prstGeom>
+          <a:solidFill xmlns:a="http://schemas.openxmlformats.org/drawingml/2006/main">
+            <a:srgbClr val="5C8F74"/>
+          </a:solidFill>
+          <a:ln xmlns:a="http://schemas.openxmlformats.org/drawingml/2006/main" w="0">
+            <a:solidFill>
+              <a:srgbClr val="000000">
+                <a:alpha val="0"/>
+              </a:srgbClr>
+            </a:solidFill>
+            <a:prstDash val="solid"/>
+          </a:ln>
+        </p:spPr>
+      </p:sp>
+      <p:sp>
+        <p:nvSpPr>
           <p:cNvPr id="46" name="">
             <a:extLst xmlns:a="http://schemas.openxmlformats.org/drawingml/2006/main">
               <a:ext uri="{FF2B5EF4-FFF2-40B4-BE49-F238E27FC236}">
-                <a16:creationId xmlns:a16="http://schemas.microsoft.com/office/drawing/2014/main" id="{D57BFA31-9E8E-43C2-92AD-B14D43D68482}"/>
-              </a:ext>
-            </a:extLst>
-          </p:cNvPr>
-          <p:cNvSpPr>
-            <a:spLocks xmlns:a="http://schemas.openxmlformats.org/drawingml/2006/main" noGrp="1"/>
-          </p:cNvSpPr>
-          <p:nvPr/>
-        </p:nvSpPr>
-        <p:spPr>
-          <a:xfrm xmlns:a="http://schemas.openxmlformats.org/drawingml/2006/main">
-            <a:off x="7239000" y="4743450"/>
-            <a:ext cx="66675" cy="1066800"/>
-          </a:xfrm>
-          <a:prstGeom xmlns:a="http://schemas.openxmlformats.org/drawingml/2006/main" prst="rect">
-            <a:avLst/>
-          </a:prstGeom>
-          <a:solidFill xmlns:a="http://schemas.openxmlformats.org/drawingml/2006/main">
-            <a:srgbClr val="5C8F74"/>
-          </a:solidFill>
-          <a:ln xmlns:a="http://schemas.openxmlformats.org/drawingml/2006/main" w="0">
-            <a:solidFill>
-              <a:srgbClr val="000000">
-                <a:alpha val="0"/>
-              </a:srgbClr>
-            </a:solidFill>
-            <a:prstDash val="solid"/>
-          </a:ln>
-        </p:spPr>
-      </p:sp>
-      <p:sp>
-        <p:nvSpPr>
-          <p:cNvPr id="47" name="">
-            <a:extLst xmlns:a="http://schemas.openxmlformats.org/drawingml/2006/main">
-              <a:ext uri="{FF2B5EF4-FFF2-40B4-BE49-F238E27FC236}">
-                <a16:creationId xmlns:a16="http://schemas.microsoft.com/office/drawing/2014/main" id="{2ED3EA49-893C-45FA-9036-C502F85DCD9B}"/>
-              </a:ext>
-            </a:extLst>
-          </p:cNvPr>
-          <p:cNvSpPr>
-            <a:spLocks xmlns:a="http://schemas.openxmlformats.org/drawingml/2006/main" noGrp="1"/>
-          </p:cNvSpPr>
-          <p:nvPr/>
-        </p:nvSpPr>
-        <p:spPr>
-          <a:xfrm xmlns:a="http://schemas.openxmlformats.org/drawingml/2006/main">
-            <a:off x="7410450" y="4895850"/>
+                <a16:creationId xmlns:a16="http://schemas.microsoft.com/office/drawing/2014/main" id="{F344F720-3FA1-471B-9CB2-81275ABBFAC5}"/>
+              </a:ext>
+            </a:extLst>
+          </p:cNvPr>
+          <p:cNvSpPr>
+            <a:spLocks xmlns:a="http://schemas.openxmlformats.org/drawingml/2006/main" noGrp="1"/>
+          </p:cNvSpPr>
+          <p:nvPr/>
+        </p:nvSpPr>
+        <p:spPr>
+          <a:xfrm xmlns:a="http://schemas.openxmlformats.org/drawingml/2006/main">
+            <a:off x="7277100" y="5086350"/>
             <a:ext cx="647700" cy="228600"/>
           </a:xfrm>
           <a:prstGeom xmlns:a="http://schemas.openxmlformats.org/drawingml/2006/main" prst="rect">
@@ -8425,21 +8350,21 @@
       </p:sp>
       <p:sp>
         <p:nvSpPr>
-          <p:cNvPr id="48" name="">
-            <a:extLst xmlns:a="http://schemas.openxmlformats.org/drawingml/2006/main">
-              <a:ext uri="{FF2B5EF4-FFF2-40B4-BE49-F238E27FC236}">
-                <a16:creationId xmlns:a16="http://schemas.microsoft.com/office/drawing/2014/main" id="{09FAA738-F69C-4085-9812-0C660D2959AD}"/>
-              </a:ext>
-            </a:extLst>
-          </p:cNvPr>
-          <p:cNvSpPr>
-            <a:spLocks xmlns:a="http://schemas.openxmlformats.org/drawingml/2006/main" noGrp="1"/>
-          </p:cNvSpPr>
-          <p:nvPr/>
-        </p:nvSpPr>
-        <p:spPr>
-          <a:xfrm xmlns:a="http://schemas.openxmlformats.org/drawingml/2006/main">
-            <a:off x="7410450" y="5181600"/>
+          <p:cNvPr id="47" name="">
+            <a:extLst xmlns:a="http://schemas.openxmlformats.org/drawingml/2006/main">
+              <a:ext uri="{FF2B5EF4-FFF2-40B4-BE49-F238E27FC236}">
+                <a16:creationId xmlns:a16="http://schemas.microsoft.com/office/drawing/2014/main" id="{645B22C4-33D3-4381-956E-4C649C5E60A1}"/>
+              </a:ext>
+            </a:extLst>
+          </p:cNvPr>
+          <p:cNvSpPr>
+            <a:spLocks xmlns:a="http://schemas.openxmlformats.org/drawingml/2006/main" noGrp="1"/>
+          </p:cNvSpPr>
+          <p:nvPr/>
+        </p:nvSpPr>
+        <p:spPr>
+          <a:xfrm xmlns:a="http://schemas.openxmlformats.org/drawingml/2006/main">
+            <a:off x="7277100" y="5372100"/>
             <a:ext cx="1409700" cy="228600"/>
           </a:xfrm>
           <a:prstGeom xmlns:a="http://schemas.openxmlformats.org/drawingml/2006/main" prst="rect">
@@ -8483,21 +8408,21 @@
       </p:sp>
       <p:sp>
         <p:nvSpPr>
-          <p:cNvPr id="49" name="">
-            <a:extLst xmlns:a="http://schemas.openxmlformats.org/drawingml/2006/main">
-              <a:ext uri="{FF2B5EF4-FFF2-40B4-BE49-F238E27FC236}">
-                <a16:creationId xmlns:a16="http://schemas.microsoft.com/office/drawing/2014/main" id="{563F582D-48E7-4263-A423-C480B35F0947}"/>
-              </a:ext>
-            </a:extLst>
-          </p:cNvPr>
-          <p:cNvSpPr>
-            <a:spLocks xmlns:a="http://schemas.openxmlformats.org/drawingml/2006/main" noGrp="1"/>
-          </p:cNvSpPr>
-          <p:nvPr/>
-        </p:nvSpPr>
-        <p:spPr>
-          <a:xfrm xmlns:a="http://schemas.openxmlformats.org/drawingml/2006/main">
-            <a:off x="7410450" y="5429250"/>
+          <p:cNvPr id="48" name="">
+            <a:extLst xmlns:a="http://schemas.openxmlformats.org/drawingml/2006/main">
+              <a:ext uri="{FF2B5EF4-FFF2-40B4-BE49-F238E27FC236}">
+                <a16:creationId xmlns:a16="http://schemas.microsoft.com/office/drawing/2014/main" id="{43E991FD-31A2-4D0E-AD24-2F7D768A829A}"/>
+              </a:ext>
+            </a:extLst>
+          </p:cNvPr>
+          <p:cNvSpPr>
+            <a:spLocks xmlns:a="http://schemas.openxmlformats.org/drawingml/2006/main" noGrp="1"/>
+          </p:cNvSpPr>
+          <p:nvPr/>
+        </p:nvSpPr>
+        <p:spPr>
+          <a:xfrm xmlns:a="http://schemas.openxmlformats.org/drawingml/2006/main">
+            <a:off x="7277100" y="5619750"/>
             <a:ext cx="1409700" cy="266700"/>
           </a:xfrm>
           <a:prstGeom xmlns:a="http://schemas.openxmlformats.org/drawingml/2006/main" prst="rect">
@@ -8541,21 +8466,21 @@
       </p:sp>
       <p:sp>
         <p:nvSpPr>
-          <p:cNvPr id="50" name="">
-            <a:extLst xmlns:a="http://schemas.openxmlformats.org/drawingml/2006/main">
-              <a:ext uri="{FF2B5EF4-FFF2-40B4-BE49-F238E27FC236}">
-                <a16:creationId xmlns:a16="http://schemas.microsoft.com/office/drawing/2014/main" id="{CE07595E-3A9B-4E32-A888-F1C0CD13C394}"/>
-              </a:ext>
-            </a:extLst>
-          </p:cNvPr>
-          <p:cNvSpPr>
-            <a:spLocks xmlns:a="http://schemas.openxmlformats.org/drawingml/2006/main" noGrp="1"/>
-          </p:cNvSpPr>
-          <p:nvPr/>
-        </p:nvSpPr>
-        <p:spPr>
-          <a:xfrm xmlns:a="http://schemas.openxmlformats.org/drawingml/2006/main">
-            <a:off x="3105150" y="4762500"/>
+          <p:cNvPr id="49" name="">
+            <a:extLst xmlns:a="http://schemas.openxmlformats.org/drawingml/2006/main">
+              <a:ext uri="{FF2B5EF4-FFF2-40B4-BE49-F238E27FC236}">
+                <a16:creationId xmlns:a16="http://schemas.microsoft.com/office/drawing/2014/main" id="{A09C4061-C648-402E-A945-65B07F33E92E}"/>
+              </a:ext>
+            </a:extLst>
+          </p:cNvPr>
+          <p:cNvSpPr>
+            <a:spLocks xmlns:a="http://schemas.openxmlformats.org/drawingml/2006/main" noGrp="1"/>
+          </p:cNvSpPr>
+          <p:nvPr/>
+        </p:nvSpPr>
+        <p:spPr>
+          <a:xfrm xmlns:a="http://schemas.openxmlformats.org/drawingml/2006/main">
+            <a:off x="3276600" y="4953000"/>
             <a:ext cx="1733550" cy="1066800"/>
           </a:xfrm>
           <a:prstGeom xmlns:a="http://schemas.openxmlformats.org/drawingml/2006/main" prst="roundRect">
@@ -8576,56 +8501,56 @@
       </p:sp>
       <p:sp>
         <p:nvSpPr>
+          <p:cNvPr id="50" name="">
+            <a:extLst xmlns:a="http://schemas.openxmlformats.org/drawingml/2006/main">
+              <a:ext uri="{FF2B5EF4-FFF2-40B4-BE49-F238E27FC236}">
+                <a16:creationId xmlns:a16="http://schemas.microsoft.com/office/drawing/2014/main" id="{45FAF38A-9BB8-4778-B2BF-8CCFB4BC2367}"/>
+              </a:ext>
+            </a:extLst>
+          </p:cNvPr>
+          <p:cNvSpPr>
+            <a:spLocks xmlns:a="http://schemas.openxmlformats.org/drawingml/2006/main" noGrp="1"/>
+          </p:cNvSpPr>
+          <p:nvPr/>
+        </p:nvSpPr>
+        <p:spPr>
+          <a:xfrm xmlns:a="http://schemas.openxmlformats.org/drawingml/2006/main">
+            <a:off x="3276600" y="4953000"/>
+            <a:ext cx="66675" cy="1066800"/>
+          </a:xfrm>
+          <a:prstGeom xmlns:a="http://schemas.openxmlformats.org/drawingml/2006/main" prst="rect">
+            <a:avLst/>
+          </a:prstGeom>
+          <a:solidFill xmlns:a="http://schemas.openxmlformats.org/drawingml/2006/main">
+            <a:srgbClr val="5C8F74"/>
+          </a:solidFill>
+          <a:ln xmlns:a="http://schemas.openxmlformats.org/drawingml/2006/main" w="0">
+            <a:solidFill>
+              <a:srgbClr val="000000">
+                <a:alpha val="0"/>
+              </a:srgbClr>
+            </a:solidFill>
+            <a:prstDash val="solid"/>
+          </a:ln>
+        </p:spPr>
+      </p:sp>
+      <p:sp>
+        <p:nvSpPr>
           <p:cNvPr id="51" name="">
             <a:extLst xmlns:a="http://schemas.openxmlformats.org/drawingml/2006/main">
               <a:ext uri="{FF2B5EF4-FFF2-40B4-BE49-F238E27FC236}">
-                <a16:creationId xmlns:a16="http://schemas.microsoft.com/office/drawing/2014/main" id="{CF802DAE-1EC5-4CA6-BBE0-16DFE438FC40}"/>
-              </a:ext>
-            </a:extLst>
-          </p:cNvPr>
-          <p:cNvSpPr>
-            <a:spLocks xmlns:a="http://schemas.openxmlformats.org/drawingml/2006/main" noGrp="1"/>
-          </p:cNvSpPr>
-          <p:nvPr/>
-        </p:nvSpPr>
-        <p:spPr>
-          <a:xfrm xmlns:a="http://schemas.openxmlformats.org/drawingml/2006/main">
-            <a:off x="3105150" y="4762500"/>
-            <a:ext cx="66675" cy="1066800"/>
-          </a:xfrm>
-          <a:prstGeom xmlns:a="http://schemas.openxmlformats.org/drawingml/2006/main" prst="rect">
-            <a:avLst/>
-          </a:prstGeom>
-          <a:solidFill xmlns:a="http://schemas.openxmlformats.org/drawingml/2006/main">
-            <a:srgbClr val="5C8F74"/>
-          </a:solidFill>
-          <a:ln xmlns:a="http://schemas.openxmlformats.org/drawingml/2006/main" w="0">
-            <a:solidFill>
-              <a:srgbClr val="000000">
-                <a:alpha val="0"/>
-              </a:srgbClr>
-            </a:solidFill>
-            <a:prstDash val="solid"/>
-          </a:ln>
-        </p:spPr>
-      </p:sp>
-      <p:sp>
-        <p:nvSpPr>
-          <p:cNvPr id="52" name="">
-            <a:extLst xmlns:a="http://schemas.openxmlformats.org/drawingml/2006/main">
-              <a:ext uri="{FF2B5EF4-FFF2-40B4-BE49-F238E27FC236}">
-                <a16:creationId xmlns:a16="http://schemas.microsoft.com/office/drawing/2014/main" id="{95FFBB06-C7B5-42CF-8DD4-73BB173DF017}"/>
-              </a:ext>
-            </a:extLst>
-          </p:cNvPr>
-          <p:cNvSpPr>
-            <a:spLocks xmlns:a="http://schemas.openxmlformats.org/drawingml/2006/main" noGrp="1"/>
-          </p:cNvSpPr>
-          <p:nvPr/>
-        </p:nvSpPr>
-        <p:spPr>
-          <a:xfrm xmlns:a="http://schemas.openxmlformats.org/drawingml/2006/main">
-            <a:off x="3276600" y="4914900"/>
+                <a16:creationId xmlns:a16="http://schemas.microsoft.com/office/drawing/2014/main" id="{B07B164D-FCB3-4926-A433-95E60D5B83CB}"/>
+              </a:ext>
+            </a:extLst>
+          </p:cNvPr>
+          <p:cNvSpPr>
+            <a:spLocks xmlns:a="http://schemas.openxmlformats.org/drawingml/2006/main" noGrp="1"/>
+          </p:cNvSpPr>
+          <p:nvPr/>
+        </p:nvSpPr>
+        <p:spPr>
+          <a:xfrm xmlns:a="http://schemas.openxmlformats.org/drawingml/2006/main">
+            <a:off x="3448050" y="5105400"/>
             <a:ext cx="647700" cy="228600"/>
           </a:xfrm>
           <a:prstGeom xmlns:a="http://schemas.openxmlformats.org/drawingml/2006/main" prst="rect">
@@ -8665,21 +8590,21 @@
       </p:sp>
       <p:sp>
         <p:nvSpPr>
-          <p:cNvPr id="53" name="">
-            <a:extLst xmlns:a="http://schemas.openxmlformats.org/drawingml/2006/main">
-              <a:ext uri="{FF2B5EF4-FFF2-40B4-BE49-F238E27FC236}">
-                <a16:creationId xmlns:a16="http://schemas.microsoft.com/office/drawing/2014/main" id="{77AEC59C-7C7E-43EB-8618-94A57977FF3E}"/>
-              </a:ext>
-            </a:extLst>
-          </p:cNvPr>
-          <p:cNvSpPr>
-            <a:spLocks xmlns:a="http://schemas.openxmlformats.org/drawingml/2006/main" noGrp="1"/>
-          </p:cNvSpPr>
-          <p:nvPr/>
-        </p:nvSpPr>
-        <p:spPr>
-          <a:xfrm xmlns:a="http://schemas.openxmlformats.org/drawingml/2006/main">
-            <a:off x="3276600" y="5200650"/>
+          <p:cNvPr id="52" name="">
+            <a:extLst xmlns:a="http://schemas.openxmlformats.org/drawingml/2006/main">
+              <a:ext uri="{FF2B5EF4-FFF2-40B4-BE49-F238E27FC236}">
+                <a16:creationId xmlns:a16="http://schemas.microsoft.com/office/drawing/2014/main" id="{D9A32152-ABFF-4187-9891-C65FA92B5A96}"/>
+              </a:ext>
+            </a:extLst>
+          </p:cNvPr>
+          <p:cNvSpPr>
+            <a:spLocks xmlns:a="http://schemas.openxmlformats.org/drawingml/2006/main" noGrp="1"/>
+          </p:cNvSpPr>
+          <p:nvPr/>
+        </p:nvSpPr>
+        <p:spPr>
+          <a:xfrm xmlns:a="http://schemas.openxmlformats.org/drawingml/2006/main">
+            <a:off x="3448050" y="5391150"/>
             <a:ext cx="1409700" cy="228600"/>
           </a:xfrm>
           <a:prstGeom xmlns:a="http://schemas.openxmlformats.org/drawingml/2006/main" prst="rect">
@@ -8723,21 +8648,21 @@
       </p:sp>
       <p:sp>
         <p:nvSpPr>
-          <p:cNvPr id="54" name="">
-            <a:extLst xmlns:a="http://schemas.openxmlformats.org/drawingml/2006/main">
-              <a:ext uri="{FF2B5EF4-FFF2-40B4-BE49-F238E27FC236}">
-                <a16:creationId xmlns:a16="http://schemas.microsoft.com/office/drawing/2014/main" id="{77D3059A-E79F-4E3A-9033-30D7D10A5D0D}"/>
-              </a:ext>
-            </a:extLst>
-          </p:cNvPr>
-          <p:cNvSpPr>
-            <a:spLocks xmlns:a="http://schemas.openxmlformats.org/drawingml/2006/main" noGrp="1"/>
-          </p:cNvSpPr>
-          <p:nvPr/>
-        </p:nvSpPr>
-        <p:spPr>
-          <a:xfrm xmlns:a="http://schemas.openxmlformats.org/drawingml/2006/main">
-            <a:off x="3276600" y="5448300"/>
+          <p:cNvPr id="53" name="">
+            <a:extLst xmlns:a="http://schemas.openxmlformats.org/drawingml/2006/main">
+              <a:ext uri="{FF2B5EF4-FFF2-40B4-BE49-F238E27FC236}">
+                <a16:creationId xmlns:a16="http://schemas.microsoft.com/office/drawing/2014/main" id="{5A1C8AD9-CBE2-4B43-BA09-04C4438FECD5}"/>
+              </a:ext>
+            </a:extLst>
+          </p:cNvPr>
+          <p:cNvSpPr>
+            <a:spLocks xmlns:a="http://schemas.openxmlformats.org/drawingml/2006/main" noGrp="1"/>
+          </p:cNvSpPr>
+          <p:nvPr/>
+        </p:nvSpPr>
+        <p:spPr>
+          <a:xfrm xmlns:a="http://schemas.openxmlformats.org/drawingml/2006/main">
+            <a:off x="3448050" y="5638800"/>
             <a:ext cx="1409700" cy="266700"/>
           </a:xfrm>
           <a:prstGeom xmlns:a="http://schemas.openxmlformats.org/drawingml/2006/main" prst="rect">
@@ -8781,21 +8706,21 @@
       </p:sp>
       <p:sp>
         <p:nvSpPr>
-          <p:cNvPr id="55" name="">
-            <a:extLst xmlns:a="http://schemas.openxmlformats.org/drawingml/2006/main">
-              <a:ext uri="{FF2B5EF4-FFF2-40B4-BE49-F238E27FC236}">
-                <a16:creationId xmlns:a16="http://schemas.microsoft.com/office/drawing/2014/main" id="{1F35ADA7-0526-4D76-9E90-1B82A392F421}"/>
-              </a:ext>
-            </a:extLst>
-          </p:cNvPr>
-          <p:cNvSpPr>
-            <a:spLocks xmlns:a="http://schemas.openxmlformats.org/drawingml/2006/main" noGrp="1"/>
-          </p:cNvSpPr>
-          <p:nvPr/>
-        </p:nvSpPr>
-        <p:spPr>
-          <a:xfrm xmlns:a="http://schemas.openxmlformats.org/drawingml/2006/main">
-            <a:off x="1028700" y="3733800"/>
+          <p:cNvPr id="54" name="">
+            <a:extLst xmlns:a="http://schemas.openxmlformats.org/drawingml/2006/main">
+              <a:ext uri="{FF2B5EF4-FFF2-40B4-BE49-F238E27FC236}">
+                <a16:creationId xmlns:a16="http://schemas.microsoft.com/office/drawing/2014/main" id="{24D95AC9-4E3F-4500-A3E1-B0BC9E27886A}"/>
+              </a:ext>
+            </a:extLst>
+          </p:cNvPr>
+          <p:cNvSpPr>
+            <a:spLocks xmlns:a="http://schemas.openxmlformats.org/drawingml/2006/main" noGrp="1"/>
+          </p:cNvSpPr>
+          <p:nvPr/>
+        </p:nvSpPr>
+        <p:spPr>
+          <a:xfrm xmlns:a="http://schemas.openxmlformats.org/drawingml/2006/main">
+            <a:off x="1047750" y="4095750"/>
             <a:ext cx="1695450" cy="1066800"/>
           </a:xfrm>
           <a:prstGeom xmlns:a="http://schemas.openxmlformats.org/drawingml/2006/main" prst="roundRect">
@@ -8816,56 +8741,56 @@
       </p:sp>
       <p:sp>
         <p:nvSpPr>
+          <p:cNvPr id="55" name="">
+            <a:extLst xmlns:a="http://schemas.openxmlformats.org/drawingml/2006/main">
+              <a:ext uri="{FF2B5EF4-FFF2-40B4-BE49-F238E27FC236}">
+                <a16:creationId xmlns:a16="http://schemas.microsoft.com/office/drawing/2014/main" id="{DD763236-8E51-462E-9DB5-75B2026B59A3}"/>
+              </a:ext>
+            </a:extLst>
+          </p:cNvPr>
+          <p:cNvSpPr>
+            <a:spLocks xmlns:a="http://schemas.openxmlformats.org/drawingml/2006/main" noGrp="1"/>
+          </p:cNvSpPr>
+          <p:nvPr/>
+        </p:nvSpPr>
+        <p:spPr>
+          <a:xfrm xmlns:a="http://schemas.openxmlformats.org/drawingml/2006/main">
+            <a:off x="1047750" y="4095750"/>
+            <a:ext cx="66675" cy="1066800"/>
+          </a:xfrm>
+          <a:prstGeom xmlns:a="http://schemas.openxmlformats.org/drawingml/2006/main" prst="rect">
+            <a:avLst/>
+          </a:prstGeom>
+          <a:solidFill xmlns:a="http://schemas.openxmlformats.org/drawingml/2006/main">
+            <a:srgbClr val="5C8F74"/>
+          </a:solidFill>
+          <a:ln xmlns:a="http://schemas.openxmlformats.org/drawingml/2006/main" w="0">
+            <a:solidFill>
+              <a:srgbClr val="000000">
+                <a:alpha val="0"/>
+              </a:srgbClr>
+            </a:solidFill>
+            <a:prstDash val="solid"/>
+          </a:ln>
+        </p:spPr>
+      </p:sp>
+      <p:sp>
+        <p:nvSpPr>
           <p:cNvPr id="56" name="">
             <a:extLst xmlns:a="http://schemas.openxmlformats.org/drawingml/2006/main">
               <a:ext uri="{FF2B5EF4-FFF2-40B4-BE49-F238E27FC236}">
-                <a16:creationId xmlns:a16="http://schemas.microsoft.com/office/drawing/2014/main" id="{74634BAA-CD6A-41BA-8C1A-50AE0075E98C}"/>
-              </a:ext>
-            </a:extLst>
-          </p:cNvPr>
-          <p:cNvSpPr>
-            <a:spLocks xmlns:a="http://schemas.openxmlformats.org/drawingml/2006/main" noGrp="1"/>
-          </p:cNvSpPr>
-          <p:nvPr/>
-        </p:nvSpPr>
-        <p:spPr>
-          <a:xfrm xmlns:a="http://schemas.openxmlformats.org/drawingml/2006/main">
-            <a:off x="1028700" y="3733800"/>
-            <a:ext cx="66675" cy="1066800"/>
-          </a:xfrm>
-          <a:prstGeom xmlns:a="http://schemas.openxmlformats.org/drawingml/2006/main" prst="rect">
-            <a:avLst/>
-          </a:prstGeom>
-          <a:solidFill xmlns:a="http://schemas.openxmlformats.org/drawingml/2006/main">
-            <a:srgbClr val="5C8F74"/>
-          </a:solidFill>
-          <a:ln xmlns:a="http://schemas.openxmlformats.org/drawingml/2006/main" w="0">
-            <a:solidFill>
-              <a:srgbClr val="000000">
-                <a:alpha val="0"/>
-              </a:srgbClr>
-            </a:solidFill>
-            <a:prstDash val="solid"/>
-          </a:ln>
-        </p:spPr>
-      </p:sp>
-      <p:sp>
-        <p:nvSpPr>
-          <p:cNvPr id="57" name="">
-            <a:extLst xmlns:a="http://schemas.openxmlformats.org/drawingml/2006/main">
-              <a:ext uri="{FF2B5EF4-FFF2-40B4-BE49-F238E27FC236}">
-                <a16:creationId xmlns:a16="http://schemas.microsoft.com/office/drawing/2014/main" id="{F17EA2AA-FE81-45CE-A140-6AA619453DF1}"/>
-              </a:ext>
-            </a:extLst>
-          </p:cNvPr>
-          <p:cNvSpPr>
-            <a:spLocks xmlns:a="http://schemas.openxmlformats.org/drawingml/2006/main" noGrp="1"/>
-          </p:cNvSpPr>
-          <p:nvPr/>
-        </p:nvSpPr>
-        <p:spPr>
-          <a:xfrm xmlns:a="http://schemas.openxmlformats.org/drawingml/2006/main">
-            <a:off x="1200150" y="3886200"/>
+                <a16:creationId xmlns:a16="http://schemas.microsoft.com/office/drawing/2014/main" id="{19170C1C-D85B-4FEA-8468-8BC54BCD2BDE}"/>
+              </a:ext>
+            </a:extLst>
+          </p:cNvPr>
+          <p:cNvSpPr>
+            <a:spLocks xmlns:a="http://schemas.openxmlformats.org/drawingml/2006/main" noGrp="1"/>
+          </p:cNvSpPr>
+          <p:nvPr/>
+        </p:nvSpPr>
+        <p:spPr>
+          <a:xfrm xmlns:a="http://schemas.openxmlformats.org/drawingml/2006/main">
+            <a:off x="1219200" y="4248150"/>
             <a:ext cx="647700" cy="228600"/>
           </a:xfrm>
           <a:prstGeom xmlns:a="http://schemas.openxmlformats.org/drawingml/2006/main" prst="rect">
@@ -8905,21 +8830,21 @@
       </p:sp>
       <p:sp>
         <p:nvSpPr>
-          <p:cNvPr id="58" name="">
-            <a:extLst xmlns:a="http://schemas.openxmlformats.org/drawingml/2006/main">
-              <a:ext uri="{FF2B5EF4-FFF2-40B4-BE49-F238E27FC236}">
-                <a16:creationId xmlns:a16="http://schemas.microsoft.com/office/drawing/2014/main" id="{6689D980-9633-45BD-AC2E-2EB0942402E9}"/>
-              </a:ext>
-            </a:extLst>
-          </p:cNvPr>
-          <p:cNvSpPr>
-            <a:spLocks xmlns:a="http://schemas.openxmlformats.org/drawingml/2006/main" noGrp="1"/>
-          </p:cNvSpPr>
-          <p:nvPr/>
-        </p:nvSpPr>
-        <p:spPr>
-          <a:xfrm xmlns:a="http://schemas.openxmlformats.org/drawingml/2006/main">
-            <a:off x="1200150" y="4171950"/>
+          <p:cNvPr id="57" name="">
+            <a:extLst xmlns:a="http://schemas.openxmlformats.org/drawingml/2006/main">
+              <a:ext uri="{FF2B5EF4-FFF2-40B4-BE49-F238E27FC236}">
+                <a16:creationId xmlns:a16="http://schemas.microsoft.com/office/drawing/2014/main" id="{40BF3FF9-098E-40DC-AA99-92AFAAB2276A}"/>
+              </a:ext>
+            </a:extLst>
+          </p:cNvPr>
+          <p:cNvSpPr>
+            <a:spLocks xmlns:a="http://schemas.openxmlformats.org/drawingml/2006/main" noGrp="1"/>
+          </p:cNvSpPr>
+          <p:nvPr/>
+        </p:nvSpPr>
+        <p:spPr>
+          <a:xfrm xmlns:a="http://schemas.openxmlformats.org/drawingml/2006/main">
+            <a:off x="1219200" y="4533900"/>
             <a:ext cx="1371600" cy="228600"/>
           </a:xfrm>
           <a:prstGeom xmlns:a="http://schemas.openxmlformats.org/drawingml/2006/main" prst="rect">
@@ -8963,21 +8888,21 @@
       </p:sp>
       <p:sp>
         <p:nvSpPr>
-          <p:cNvPr id="59" name="">
-            <a:extLst xmlns:a="http://schemas.openxmlformats.org/drawingml/2006/main">
-              <a:ext uri="{FF2B5EF4-FFF2-40B4-BE49-F238E27FC236}">
-                <a16:creationId xmlns:a16="http://schemas.microsoft.com/office/drawing/2014/main" id="{2B1DAB2C-4BF3-4135-ABD2-4F6FA886C9E6}"/>
-              </a:ext>
-            </a:extLst>
-          </p:cNvPr>
-          <p:cNvSpPr>
-            <a:spLocks xmlns:a="http://schemas.openxmlformats.org/drawingml/2006/main" noGrp="1"/>
-          </p:cNvSpPr>
-          <p:nvPr/>
-        </p:nvSpPr>
-        <p:spPr>
-          <a:xfrm xmlns:a="http://schemas.openxmlformats.org/drawingml/2006/main">
-            <a:off x="1200150" y="4419600"/>
+          <p:cNvPr id="58" name="">
+            <a:extLst xmlns:a="http://schemas.openxmlformats.org/drawingml/2006/main">
+              <a:ext uri="{FF2B5EF4-FFF2-40B4-BE49-F238E27FC236}">
+                <a16:creationId xmlns:a16="http://schemas.microsoft.com/office/drawing/2014/main" id="{EF14C4F5-3A75-4374-BCCE-F400C7524805}"/>
+              </a:ext>
+            </a:extLst>
+          </p:cNvPr>
+          <p:cNvSpPr>
+            <a:spLocks xmlns:a="http://schemas.openxmlformats.org/drawingml/2006/main" noGrp="1"/>
+          </p:cNvSpPr>
+          <p:nvPr/>
+        </p:nvSpPr>
+        <p:spPr>
+          <a:xfrm xmlns:a="http://schemas.openxmlformats.org/drawingml/2006/main">
+            <a:off x="1219200" y="4781550"/>
             <a:ext cx="1371600" cy="266700"/>
           </a:xfrm>
           <a:prstGeom xmlns:a="http://schemas.openxmlformats.org/drawingml/2006/main" prst="rect">
@@ -9021,22 +8946,57 @@
       </p:sp>
       <p:sp>
         <p:nvSpPr>
+          <p:cNvPr id="59" name="">
+            <a:extLst xmlns:a="http://schemas.openxmlformats.org/drawingml/2006/main">
+              <a:ext uri="{FF2B5EF4-FFF2-40B4-BE49-F238E27FC236}">
+                <a16:creationId xmlns:a16="http://schemas.microsoft.com/office/drawing/2014/main" id="{D1015994-93C3-40F6-852D-BDC4A20FD334}"/>
+              </a:ext>
+            </a:extLst>
+          </p:cNvPr>
+          <p:cNvSpPr>
+            <a:spLocks xmlns:a="http://schemas.openxmlformats.org/drawingml/2006/main" noGrp="1"/>
+          </p:cNvSpPr>
+          <p:nvPr/>
+        </p:nvSpPr>
+        <p:spPr>
+          <a:xfrm xmlns:a="http://schemas.openxmlformats.org/drawingml/2006/main" rot="-10176016">
+            <a:off x="1747369" y="3138488"/>
+            <a:ext cx="4115737" cy="28575"/>
+          </a:xfrm>
+          <a:prstGeom xmlns:a="http://schemas.openxmlformats.org/drawingml/2006/main" prst="rect">
+            <a:avLst/>
+          </a:prstGeom>
+          <a:solidFill xmlns:a="http://schemas.openxmlformats.org/drawingml/2006/main">
+            <a:srgbClr val="98A7AD"/>
+          </a:solidFill>
+          <a:ln xmlns:a="http://schemas.openxmlformats.org/drawingml/2006/main" w="0">
+            <a:solidFill>
+              <a:srgbClr val="000000">
+                <a:alpha val="0"/>
+              </a:srgbClr>
+            </a:solidFill>
+            <a:prstDash val="solid"/>
+          </a:ln>
+        </p:spPr>
+      </p:sp>
+      <p:sp>
+        <p:nvSpPr>
           <p:cNvPr id="60" name="">
             <a:extLst xmlns:a="http://schemas.openxmlformats.org/drawingml/2006/main">
               <a:ext uri="{FF2B5EF4-FFF2-40B4-BE49-F238E27FC236}">
-                <a16:creationId xmlns:a16="http://schemas.microsoft.com/office/drawing/2014/main" id="{850D59FE-1099-4141-924D-5DD97803E55B}"/>
-              </a:ext>
-            </a:extLst>
-          </p:cNvPr>
-          <p:cNvSpPr>
-            <a:spLocks xmlns:a="http://schemas.openxmlformats.org/drawingml/2006/main" noGrp="1"/>
-          </p:cNvSpPr>
-          <p:nvPr/>
-        </p:nvSpPr>
-        <p:spPr>
-          <a:xfrm xmlns:a="http://schemas.openxmlformats.org/drawingml/2006/main" rot="-10098103">
-            <a:off x="1738241" y="2728913"/>
-            <a:ext cx="4133993" cy="28575"/>
+                <a16:creationId xmlns:a16="http://schemas.microsoft.com/office/drawing/2014/main" id="{8E51C20D-2932-43A0-985D-6A7A0A1B1734}"/>
+              </a:ext>
+            </a:extLst>
+          </p:cNvPr>
+          <p:cNvSpPr>
+            <a:spLocks xmlns:a="http://schemas.openxmlformats.org/drawingml/2006/main" noGrp="1"/>
+          </p:cNvSpPr>
+          <p:nvPr/>
+        </p:nvSpPr>
+        <p:spPr>
+          <a:xfrm xmlns:a="http://schemas.openxmlformats.org/drawingml/2006/main" rot="-9074423">
+            <a:off x="3637345" y="2947988"/>
+            <a:ext cx="2336034" cy="28575"/>
           </a:xfrm>
           <a:prstGeom xmlns:a="http://schemas.openxmlformats.org/drawingml/2006/main" prst="rect">
             <a:avLst/>
@@ -9059,19 +9019,19 @@
           <p:cNvPr id="61" name="">
             <a:extLst xmlns:a="http://schemas.openxmlformats.org/drawingml/2006/main">
               <a:ext uri="{FF2B5EF4-FFF2-40B4-BE49-F238E27FC236}">
-                <a16:creationId xmlns:a16="http://schemas.microsoft.com/office/drawing/2014/main" id="{DB742A6C-7B5C-4092-B948-FE905E9E6265}"/>
-              </a:ext>
-            </a:extLst>
-          </p:cNvPr>
-          <p:cNvSpPr>
-            <a:spLocks xmlns:a="http://schemas.openxmlformats.org/drawingml/2006/main" noGrp="1"/>
-          </p:cNvSpPr>
-          <p:nvPr/>
-        </p:nvSpPr>
-        <p:spPr>
-          <a:xfrm xmlns:a="http://schemas.openxmlformats.org/drawingml/2006/main" rot="-8813781">
-            <a:off x="3457645" y="2443163"/>
-            <a:ext cx="2581134" cy="28575"/>
+                <a16:creationId xmlns:a16="http://schemas.microsoft.com/office/drawing/2014/main" id="{3B472AFE-F7CE-402F-826C-FDE9829FDF1D}"/>
+              </a:ext>
+            </a:extLst>
+          </p:cNvPr>
+          <p:cNvSpPr>
+            <a:spLocks xmlns:a="http://schemas.openxmlformats.org/drawingml/2006/main" noGrp="1"/>
+          </p:cNvSpPr>
+          <p:nvPr/>
+        </p:nvSpPr>
+        <p:spPr>
+          <a:xfrm xmlns:a="http://schemas.openxmlformats.org/drawingml/2006/main" rot="-1299517">
+            <a:off x="5729088" y="2986088"/>
+            <a:ext cx="2838850" cy="28575"/>
           </a:xfrm>
           <a:prstGeom xmlns:a="http://schemas.openxmlformats.org/drawingml/2006/main" prst="rect">
             <a:avLst/>
@@ -9094,19 +9054,19 @@
           <p:cNvPr id="62" name="">
             <a:extLst xmlns:a="http://schemas.openxmlformats.org/drawingml/2006/main">
               <a:ext uri="{FF2B5EF4-FFF2-40B4-BE49-F238E27FC236}">
-                <a16:creationId xmlns:a16="http://schemas.microsoft.com/office/drawing/2014/main" id="{A814CD95-A237-4BFB-9800-F3A8527AA06A}"/>
-              </a:ext>
-            </a:extLst>
-          </p:cNvPr>
-          <p:cNvSpPr>
-            <a:spLocks xmlns:a="http://schemas.openxmlformats.org/drawingml/2006/main" noGrp="1"/>
-          </p:cNvSpPr>
-          <p:nvPr/>
-        </p:nvSpPr>
-        <p:spPr>
-          <a:xfrm xmlns:a="http://schemas.openxmlformats.org/drawingml/2006/main" rot="-1618112">
-            <a:off x="5664853" y="2462213"/>
-            <a:ext cx="3024469" cy="28575"/>
+                <a16:creationId xmlns:a16="http://schemas.microsoft.com/office/drawing/2014/main" id="{E82B6257-7A6C-47C9-817A-24E2C48A96A9}"/>
+              </a:ext>
+            </a:extLst>
+          </p:cNvPr>
+          <p:cNvSpPr>
+            <a:spLocks xmlns:a="http://schemas.openxmlformats.org/drawingml/2006/main" noGrp="1"/>
+          </p:cNvSpPr>
+          <p:nvPr/>
+        </p:nvSpPr>
+        <p:spPr>
+          <a:xfrm xmlns:a="http://schemas.openxmlformats.org/drawingml/2006/main" rot="-200725">
+            <a:off x="5825406" y="3376613"/>
+            <a:ext cx="4570263" cy="28575"/>
           </a:xfrm>
           <a:prstGeom xmlns:a="http://schemas.openxmlformats.org/drawingml/2006/main" prst="rect">
             <a:avLst/>
@@ -9129,19 +9089,19 @@
           <p:cNvPr id="63" name="">
             <a:extLst xmlns:a="http://schemas.openxmlformats.org/drawingml/2006/main">
               <a:ext uri="{FF2B5EF4-FFF2-40B4-BE49-F238E27FC236}">
-                <a16:creationId xmlns:a16="http://schemas.microsoft.com/office/drawing/2014/main" id="{BB84399F-257B-41BC-BC96-0B752D09872B}"/>
-              </a:ext>
-            </a:extLst>
-          </p:cNvPr>
-          <p:cNvSpPr>
-            <a:spLocks xmlns:a="http://schemas.openxmlformats.org/drawingml/2006/main" noGrp="1"/>
-          </p:cNvSpPr>
-          <p:nvPr/>
-        </p:nvSpPr>
-        <p:spPr>
-          <a:xfrm xmlns:a="http://schemas.openxmlformats.org/drawingml/2006/main" rot="-470713">
-            <a:off x="5807747" y="2833688"/>
-            <a:ext cx="4605581" cy="28575"/>
+                <a16:creationId xmlns:a16="http://schemas.microsoft.com/office/drawing/2014/main" id="{B1EE17F4-3877-4BF1-8ABB-397A25F27B15}"/>
+              </a:ext>
+            </a:extLst>
+          </p:cNvPr>
+          <p:cNvSpPr>
+            <a:spLocks xmlns:a="http://schemas.openxmlformats.org/drawingml/2006/main" noGrp="1"/>
+          </p:cNvSpPr>
+          <p:nvPr/>
+        </p:nvSpPr>
+        <p:spPr>
+          <a:xfrm xmlns:a="http://schemas.openxmlformats.org/drawingml/2006/main" rot="1095183">
+            <a:off x="5709946" y="4252913"/>
+            <a:ext cx="4744033" cy="28575"/>
           </a:xfrm>
           <a:prstGeom xmlns:a="http://schemas.openxmlformats.org/drawingml/2006/main" prst="rect">
             <a:avLst/>
@@ -9164,19 +9124,19 @@
           <p:cNvPr id="64" name="">
             <a:extLst xmlns:a="http://schemas.openxmlformats.org/drawingml/2006/main">
               <a:ext uri="{FF2B5EF4-FFF2-40B4-BE49-F238E27FC236}">
-                <a16:creationId xmlns:a16="http://schemas.microsoft.com/office/drawing/2014/main" id="{DA608194-FC49-4DC9-967A-F6670053BA37}"/>
-              </a:ext>
-            </a:extLst>
-          </p:cNvPr>
-          <p:cNvSpPr>
-            <a:spLocks xmlns:a="http://schemas.openxmlformats.org/drawingml/2006/main" noGrp="1"/>
-          </p:cNvSpPr>
-          <p:nvPr/>
-        </p:nvSpPr>
-        <p:spPr>
-          <a:xfrm xmlns:a="http://schemas.openxmlformats.org/drawingml/2006/main" rot="782319">
-            <a:off x="5769433" y="3671888"/>
-            <a:ext cx="4644109" cy="28575"/>
+                <a16:creationId xmlns:a16="http://schemas.microsoft.com/office/drawing/2014/main" id="{7E8E3551-D06E-4A68-8243-DD5B2E1B9468}"/>
+              </a:ext>
+            </a:extLst>
+          </p:cNvPr>
+          <p:cNvSpPr>
+            <a:spLocks xmlns:a="http://schemas.openxmlformats.org/drawingml/2006/main" noGrp="1"/>
+          </p:cNvSpPr>
+          <p:nvPr/>
+        </p:nvSpPr>
+        <p:spPr>
+          <a:xfrm xmlns:a="http://schemas.openxmlformats.org/drawingml/2006/main" rot="2531853">
+            <a:off x="5454434" y="4481513"/>
+            <a:ext cx="2892857" cy="28575"/>
           </a:xfrm>
           <a:prstGeom xmlns:a="http://schemas.openxmlformats.org/drawingml/2006/main" prst="rect">
             <a:avLst/>
@@ -9199,19 +9159,19 @@
           <p:cNvPr id="65" name="">
             <a:extLst xmlns:a="http://schemas.openxmlformats.org/drawingml/2006/main">
               <a:ext uri="{FF2B5EF4-FFF2-40B4-BE49-F238E27FC236}">
-                <a16:creationId xmlns:a16="http://schemas.microsoft.com/office/drawing/2014/main" id="{A67EDA33-022C-48AE-BD2A-F1FB7C84DDD1}"/>
-              </a:ext>
-            </a:extLst>
-          </p:cNvPr>
-          <p:cNvSpPr>
-            <a:spLocks xmlns:a="http://schemas.openxmlformats.org/drawingml/2006/main" noGrp="1"/>
-          </p:cNvSpPr>
-          <p:nvPr/>
-        </p:nvSpPr>
-        <p:spPr>
-          <a:xfrm xmlns:a="http://schemas.openxmlformats.org/drawingml/2006/main" rot="2573286">
-            <a:off x="5414021" y="4205288"/>
-            <a:ext cx="3107034" cy="28575"/>
+                <a16:creationId xmlns:a16="http://schemas.microsoft.com/office/drawing/2014/main" id="{B3D96BE4-8FC6-455D-86E6-689BCF9998EB}"/>
+              </a:ext>
+            </a:extLst>
+          </p:cNvPr>
+          <p:cNvSpPr>
+            <a:spLocks xmlns:a="http://schemas.openxmlformats.org/drawingml/2006/main" noGrp="1"/>
+          </p:cNvSpPr>
+          <p:nvPr/>
+        </p:nvSpPr>
+        <p:spPr>
+          <a:xfrm xmlns:a="http://schemas.openxmlformats.org/drawingml/2006/main" rot="7840196">
+            <a:off x="3692856" y="4491038"/>
+            <a:ext cx="2586963" cy="28575"/>
           </a:xfrm>
           <a:prstGeom xmlns:a="http://schemas.openxmlformats.org/drawingml/2006/main" prst="rect">
             <a:avLst/>
@@ -9234,19 +9194,19 @@
           <p:cNvPr id="66" name="">
             <a:extLst xmlns:a="http://schemas.openxmlformats.org/drawingml/2006/main">
               <a:ext uri="{FF2B5EF4-FFF2-40B4-BE49-F238E27FC236}">
-                <a16:creationId xmlns:a16="http://schemas.microsoft.com/office/drawing/2014/main" id="{C65CC434-31FD-44E7-99B6-FF42E1159317}"/>
-              </a:ext>
-            </a:extLst>
-          </p:cNvPr>
-          <p:cNvSpPr>
-            <a:spLocks xmlns:a="http://schemas.openxmlformats.org/drawingml/2006/main" noGrp="1"/>
-          </p:cNvSpPr>
-          <p:nvPr/>
-        </p:nvSpPr>
-        <p:spPr>
-          <a:xfrm xmlns:a="http://schemas.openxmlformats.org/drawingml/2006/main" rot="7862444">
-            <a:off x="3486214" y="4214813"/>
-            <a:ext cx="2828797" cy="28575"/>
+                <a16:creationId xmlns:a16="http://schemas.microsoft.com/office/drawing/2014/main" id="{74014837-69A0-44D7-A809-89B708876998}"/>
+              </a:ext>
+            </a:extLst>
+          </p:cNvPr>
+          <p:cNvSpPr>
+            <a:spLocks xmlns:a="http://schemas.openxmlformats.org/drawingml/2006/main" noGrp="1"/>
+          </p:cNvSpPr>
+          <p:nvPr/>
+        </p:nvSpPr>
+        <p:spPr>
+          <a:xfrm xmlns:a="http://schemas.openxmlformats.org/drawingml/2006/main" rot="9858687">
+            <a:off x="1819364" y="4062413"/>
+            <a:ext cx="4086047" cy="28575"/>
           </a:xfrm>
           <a:prstGeom xmlns:a="http://schemas.openxmlformats.org/drawingml/2006/main" prst="rect">
             <a:avLst/>
@@ -9269,42 +9229,7 @@
           <p:cNvPr id="67" name="">
             <a:extLst xmlns:a="http://schemas.openxmlformats.org/drawingml/2006/main">
               <a:ext uri="{FF2B5EF4-FFF2-40B4-BE49-F238E27FC236}">
-                <a16:creationId xmlns:a16="http://schemas.microsoft.com/office/drawing/2014/main" id="{97040B0C-55ED-446F-AE36-8FFE65A02C3E}"/>
-              </a:ext>
-            </a:extLst>
-          </p:cNvPr>
-          <p:cNvSpPr>
-            <a:spLocks xmlns:a="http://schemas.openxmlformats.org/drawingml/2006/main" noGrp="1"/>
-          </p:cNvSpPr>
-          <p:nvPr/>
-        </p:nvSpPr>
-        <p:spPr>
-          <a:xfrm xmlns:a="http://schemas.openxmlformats.org/drawingml/2006/main" rot="9863002">
-            <a:off x="1800667" y="3700463"/>
-            <a:ext cx="4104391" cy="28575"/>
-          </a:xfrm>
-          <a:prstGeom xmlns:a="http://schemas.openxmlformats.org/drawingml/2006/main" prst="rect">
-            <a:avLst/>
-          </a:prstGeom>
-          <a:solidFill xmlns:a="http://schemas.openxmlformats.org/drawingml/2006/main">
-            <a:srgbClr val="98A7AD"/>
-          </a:solidFill>
-          <a:ln xmlns:a="http://schemas.openxmlformats.org/drawingml/2006/main" w="0">
-            <a:solidFill>
-              <a:srgbClr val="000000">
-                <a:alpha val="0"/>
-              </a:srgbClr>
-            </a:solidFill>
-            <a:prstDash val="solid"/>
-          </a:ln>
-        </p:spPr>
-      </p:sp>
-      <p:sp>
-        <p:nvSpPr>
-          <p:cNvPr id="68" name="">
-            <a:extLst xmlns:a="http://schemas.openxmlformats.org/drawingml/2006/main">
-              <a:ext uri="{FF2B5EF4-FFF2-40B4-BE49-F238E27FC236}">
-                <a16:creationId xmlns:a16="http://schemas.microsoft.com/office/drawing/2014/main" id="{4CCFAFD4-977A-4B6C-BEE6-2A27D76B702D}"/>
+                <a16:creationId xmlns:a16="http://schemas.microsoft.com/office/drawing/2014/main" id="{20C5F199-FADD-47C2-82A5-820E344009B6}"/>
               </a:ext>
             </a:extLst>
           </p:cNvPr>
@@ -9355,10 +9280,10 @@
       </p:sp>
       <p:sp>
         <p:nvSpPr>
-          <p:cNvPr id="69" name="">
-            <a:extLst xmlns:a="http://schemas.openxmlformats.org/drawingml/2006/main">
-              <a:ext uri="{FF2B5EF4-FFF2-40B4-BE49-F238E27FC236}">
-                <a16:creationId xmlns:a16="http://schemas.microsoft.com/office/drawing/2014/main" id="{619758D7-F515-4B25-88BD-5D272BF85516}"/>
+          <p:cNvPr id="68" name="">
+            <a:extLst xmlns:a="http://schemas.openxmlformats.org/drawingml/2006/main">
+              <a:ext uri="{FF2B5EF4-FFF2-40B4-BE49-F238E27FC236}">
+                <a16:creationId xmlns:a16="http://schemas.microsoft.com/office/drawing/2014/main" id="{32D5774C-78A4-4B0F-9C73-E1CE58CDDF0A}"/>
               </a:ext>
             </a:extLst>
           </p:cNvPr>
@@ -9409,10 +9334,10 @@
       </p:sp>
       <p:sp>
         <p:nvSpPr>
-          <p:cNvPr id="70" name="">
-            <a:extLst xmlns:a="http://schemas.openxmlformats.org/drawingml/2006/main">
-              <a:ext uri="{FF2B5EF4-FFF2-40B4-BE49-F238E27FC236}">
-                <a16:creationId xmlns:a16="http://schemas.microsoft.com/office/drawing/2014/main" id="{2E246DDA-621E-40D2-A9A6-5B3BE4245DB3}"/>
+          <p:cNvPr id="69" name="">
+            <a:extLst xmlns:a="http://schemas.openxmlformats.org/drawingml/2006/main">
+              <a:ext uri="{FF2B5EF4-FFF2-40B4-BE49-F238E27FC236}">
+                <a16:creationId xmlns:a16="http://schemas.microsoft.com/office/drawing/2014/main" id="{DE1652DE-714C-4776-B855-BC411DA2B8AF}"/>
               </a:ext>
             </a:extLst>
           </p:cNvPr>
@@ -9463,10 +9388,10 @@
       </p:sp>
       <p:sp>
         <p:nvSpPr>
-          <p:cNvPr id="71" name="">
-            <a:extLst xmlns:a="http://schemas.openxmlformats.org/drawingml/2006/main">
-              <a:ext uri="{FF2B5EF4-FFF2-40B4-BE49-F238E27FC236}">
-                <a16:creationId xmlns:a16="http://schemas.microsoft.com/office/drawing/2014/main" id="{C8889D3F-92DC-4A5F-9C52-CF6FCB398BE6}"/>
+          <p:cNvPr id="70" name="">
+            <a:extLst xmlns:a="http://schemas.openxmlformats.org/drawingml/2006/main">
+              <a:ext uri="{FF2B5EF4-FFF2-40B4-BE49-F238E27FC236}">
+                <a16:creationId xmlns:a16="http://schemas.microsoft.com/office/drawing/2014/main" id="{E6D862FA-747D-4010-9912-9863C076240F}"/>
               </a:ext>
             </a:extLst>
           </p:cNvPr>
@@ -9500,10 +9425,10 @@
       </p:sp>
       <p:sp>
         <p:nvSpPr>
-          <p:cNvPr id="72" name="">
-            <a:extLst xmlns:a="http://schemas.openxmlformats.org/drawingml/2006/main">
-              <a:ext uri="{FF2B5EF4-FFF2-40B4-BE49-F238E27FC236}">
-                <a16:creationId xmlns:a16="http://schemas.microsoft.com/office/drawing/2014/main" id="{0A883702-CDCE-4F75-B19F-49555874E619}"/>
+          <p:cNvPr id="71" name="">
+            <a:extLst xmlns:a="http://schemas.openxmlformats.org/drawingml/2006/main">
+              <a:ext uri="{FF2B5EF4-FFF2-40B4-BE49-F238E27FC236}">
+                <a16:creationId xmlns:a16="http://schemas.microsoft.com/office/drawing/2014/main" id="{4C0AEFD5-49FB-4559-A2A9-6FA88F5CA5D8}"/>
               </a:ext>
             </a:extLst>
           </p:cNvPr>
@@ -9535,10 +9460,10 @@
       </p:sp>
       <p:sp>
         <p:nvSpPr>
-          <p:cNvPr id="73" name="">
-            <a:extLst xmlns:a="http://schemas.openxmlformats.org/drawingml/2006/main">
-              <a:ext uri="{FF2B5EF4-FFF2-40B4-BE49-F238E27FC236}">
-                <a16:creationId xmlns:a16="http://schemas.microsoft.com/office/drawing/2014/main" id="{9C007F42-CE0F-4C44-9722-33D5202559A9}"/>
+          <p:cNvPr id="72" name="">
+            <a:extLst xmlns:a="http://schemas.openxmlformats.org/drawingml/2006/main">
+              <a:ext uri="{FF2B5EF4-FFF2-40B4-BE49-F238E27FC236}">
+                <a16:creationId xmlns:a16="http://schemas.microsoft.com/office/drawing/2014/main" id="{963881E8-083B-4196-A639-B85175CF64C7}"/>
               </a:ext>
             </a:extLst>
           </p:cNvPr>
@@ -9593,10 +9518,10 @@
       </p:sp>
       <p:sp>
         <p:nvSpPr>
-          <p:cNvPr id="74" name="">
-            <a:extLst xmlns:a="http://schemas.openxmlformats.org/drawingml/2006/main">
-              <a:ext uri="{FF2B5EF4-FFF2-40B4-BE49-F238E27FC236}">
-                <a16:creationId xmlns:a16="http://schemas.microsoft.com/office/drawing/2014/main" id="{4F93DC28-A4A4-45D6-95E9-5F656BC62A55}"/>
+          <p:cNvPr id="73" name="">
+            <a:extLst xmlns:a="http://schemas.openxmlformats.org/drawingml/2006/main">
+              <a:ext uri="{FF2B5EF4-FFF2-40B4-BE49-F238E27FC236}">
+                <a16:creationId xmlns:a16="http://schemas.microsoft.com/office/drawing/2014/main" id="{AD6DBE48-E21E-40F4-8692-81C44F1C1DB5}"/>
               </a:ext>
             </a:extLst>
           </p:cNvPr>
@@ -9652,7 +9577,7 @@
     </p:spTree>
     <p:extLst>
       <p:ext uri="{BB962C8B-B14F-4D97-AF65-F5344CB8AC3E}">
-        <p14:creationId xmlns:p14="http://schemas.microsoft.com/office/powerpoint/2010/main" val="378878978"/>
+        <p14:creationId xmlns:p14="http://schemas.microsoft.com/office/powerpoint/2010/main" val="2053785506"/>
       </p:ext>
     </p:extLst>
   </p:cSld>
@@ -9683,7 +9608,7 @@
           <p:cNvPr id="1" name="Slide Number Placeholder 5">
             <a:extLst xmlns:a="http://schemas.openxmlformats.org/drawingml/2006/main">
               <a:ext uri="{FF2B5EF4-FFF2-40B4-BE49-F238E27FC236}">
-                <a16:creationId xmlns:a16="http://schemas.microsoft.com/office/drawing/2014/main" id="{38BDF79F-9F16-4FEE-B72E-1F506FE9EBEC}"/>
+                <a16:creationId xmlns:a16="http://schemas.microsoft.com/office/drawing/2014/main" id="{039602EF-25C6-4B7F-BD52-B0182DC44CC0}"/>
               </a:ext>
             </a:extLst>
           </p:cNvPr>
@@ -9719,7 +9644,7 @@
           <p:nvPr/>
         </p:nvPicPr>
         <p:blipFill>
-          <a:blip xmlns:r="http://schemas.openxmlformats.org/officeDocument/2006/relationships" xmlns:a="http://schemas.openxmlformats.org/drawingml/2006/main" r:embed="R7f30c73b723f4756"/>
+          <a:blip xmlns:r="http://schemas.openxmlformats.org/officeDocument/2006/relationships" xmlns:a="http://schemas.openxmlformats.org/drawingml/2006/main" r:embed="R6d972f472e3640ab"/>
           <a:srcRect xmlns:a="http://schemas.openxmlformats.org/drawingml/2006/main" l="0" t="21875" r="0" b="21875"/>
           <a:stretch xmlns:a="http://schemas.openxmlformats.org/drawingml/2006/main">
             <a:fillRect l="0" t="0" r="0" b="0"/>
@@ -9740,7 +9665,7 @@
           <p:cNvPr id="3" name="">
             <a:extLst xmlns:a="http://schemas.openxmlformats.org/drawingml/2006/main">
               <a:ext uri="{FF2B5EF4-FFF2-40B4-BE49-F238E27FC236}">
-                <a16:creationId xmlns:a16="http://schemas.microsoft.com/office/drawing/2014/main" id="{594B5224-990F-4EAF-90CC-D97E1DE42FC3}"/>
+                <a16:creationId xmlns:a16="http://schemas.microsoft.com/office/drawing/2014/main" id="{E75C6FEB-4B78-4487-A8DF-CE7D35DE0BA9}"/>
               </a:ext>
             </a:extLst>
           </p:cNvPr>
@@ -9775,7 +9700,7 @@
           <p:cNvPr id="4" name="">
             <a:extLst xmlns:a="http://schemas.openxmlformats.org/drawingml/2006/main">
               <a:ext uri="{FF2B5EF4-FFF2-40B4-BE49-F238E27FC236}">
-                <a16:creationId xmlns:a16="http://schemas.microsoft.com/office/drawing/2014/main" id="{84BC89D2-C3A5-4D51-BCCC-8625F2A3B51E}"/>
+                <a16:creationId xmlns:a16="http://schemas.microsoft.com/office/drawing/2014/main" id="{CD14C278-75AC-4B75-96BB-7AE3C19B5098}"/>
               </a:ext>
             </a:extLst>
           </p:cNvPr>
@@ -9810,7 +9735,7 @@
           <p:cNvPr id="5" name="">
             <a:extLst xmlns:a="http://schemas.openxmlformats.org/drawingml/2006/main">
               <a:ext uri="{FF2B5EF4-FFF2-40B4-BE49-F238E27FC236}">
-                <a16:creationId xmlns:a16="http://schemas.microsoft.com/office/drawing/2014/main" id="{F88ACF30-5FA9-4F41-ADA0-8FFC30A1A67B}"/>
+                <a16:creationId xmlns:a16="http://schemas.microsoft.com/office/drawing/2014/main" id="{DC841B83-38BA-461B-87C0-3EC34FBFFA5B}"/>
               </a:ext>
             </a:extLst>
           </p:cNvPr>
@@ -9847,7 +9772,7 @@
           <p:cNvPr id="6" name="">
             <a:extLst xmlns:a="http://schemas.openxmlformats.org/drawingml/2006/main">
               <a:ext uri="{FF2B5EF4-FFF2-40B4-BE49-F238E27FC236}">
-                <a16:creationId xmlns:a16="http://schemas.microsoft.com/office/drawing/2014/main" id="{66D9BB22-8FD5-4714-A250-BB193382F090}"/>
+                <a16:creationId xmlns:a16="http://schemas.microsoft.com/office/drawing/2014/main" id="{3EF4D1E0-6B13-4E27-800B-78D181E1FB21}"/>
               </a:ext>
             </a:extLst>
           </p:cNvPr>
@@ -9884,7 +9809,7 @@
           <p:cNvPr id="7" name="">
             <a:extLst xmlns:a="http://schemas.openxmlformats.org/drawingml/2006/main">
               <a:ext uri="{FF2B5EF4-FFF2-40B4-BE49-F238E27FC236}">
-                <a16:creationId xmlns:a16="http://schemas.microsoft.com/office/drawing/2014/main" id="{63C85720-DADE-4C49-90DE-40DAF6007BFB}"/>
+                <a16:creationId xmlns:a16="http://schemas.microsoft.com/office/drawing/2014/main" id="{90946FD1-26A9-4CD6-9097-31AC3BB858E0}"/>
               </a:ext>
             </a:extLst>
           </p:cNvPr>
@@ -9921,7 +9846,7 @@
           <p:cNvPr id="8" name="">
             <a:extLst xmlns:a="http://schemas.openxmlformats.org/drawingml/2006/main">
               <a:ext uri="{FF2B5EF4-FFF2-40B4-BE49-F238E27FC236}">
-                <a16:creationId xmlns:a16="http://schemas.microsoft.com/office/drawing/2014/main" id="{57AB3CE1-7A70-4945-8592-A731181000D3}"/>
+                <a16:creationId xmlns:a16="http://schemas.microsoft.com/office/drawing/2014/main" id="{6D58BF6E-A165-4988-A764-73667D29BCC9}"/>
               </a:ext>
             </a:extLst>
           </p:cNvPr>
@@ -9958,7 +9883,7 @@
           <p:cNvPr id="9" name="">
             <a:extLst xmlns:a="http://schemas.openxmlformats.org/drawingml/2006/main">
               <a:ext uri="{FF2B5EF4-FFF2-40B4-BE49-F238E27FC236}">
-                <a16:creationId xmlns:a16="http://schemas.microsoft.com/office/drawing/2014/main" id="{1DFAF67C-DB41-4CB3-A05E-CC6306057145}"/>
+                <a16:creationId xmlns:a16="http://schemas.microsoft.com/office/drawing/2014/main" id="{2D0149DD-C3AB-4734-B016-81D2B9E84709}"/>
               </a:ext>
             </a:extLst>
           </p:cNvPr>
@@ -10016,7 +9941,7 @@
           <p:cNvPr id="10" name="">
             <a:extLst xmlns:a="http://schemas.openxmlformats.org/drawingml/2006/main">
               <a:ext uri="{FF2B5EF4-FFF2-40B4-BE49-F238E27FC236}">
-                <a16:creationId xmlns:a16="http://schemas.microsoft.com/office/drawing/2014/main" id="{5FDDC3D3-23A8-47C6-ACE2-50DCC2576541}"/>
+                <a16:creationId xmlns:a16="http://schemas.microsoft.com/office/drawing/2014/main" id="{601925F6-375E-41D2-8F0D-18815A6A61EA}"/>
               </a:ext>
             </a:extLst>
           </p:cNvPr>
@@ -10074,7 +9999,7 @@
           <p:cNvPr id="11" name="">
             <a:extLst xmlns:a="http://schemas.openxmlformats.org/drawingml/2006/main">
               <a:ext uri="{FF2B5EF4-FFF2-40B4-BE49-F238E27FC236}">
-                <a16:creationId xmlns:a16="http://schemas.microsoft.com/office/drawing/2014/main" id="{9D519DFD-D654-40F4-A1E8-53AAD124EB0A}"/>
+                <a16:creationId xmlns:a16="http://schemas.microsoft.com/office/drawing/2014/main" id="{841E48E9-A8DB-4B8A-8F0E-19BEA8063BAB}"/>
               </a:ext>
             </a:extLst>
           </p:cNvPr>
@@ -10109,7 +10034,7 @@
           <p:cNvPr id="12" name="">
             <a:extLst xmlns:a="http://schemas.openxmlformats.org/drawingml/2006/main">
               <a:ext uri="{FF2B5EF4-FFF2-40B4-BE49-F238E27FC236}">
-                <a16:creationId xmlns:a16="http://schemas.microsoft.com/office/drawing/2014/main" id="{A63901D5-8F3C-4CA5-95D2-936E5A5E0515}"/>
+                <a16:creationId xmlns:a16="http://schemas.microsoft.com/office/drawing/2014/main" id="{016694C8-A9E1-4794-86D6-40967D8C5DCC}"/>
               </a:ext>
             </a:extLst>
           </p:cNvPr>
@@ -10142,7 +10067,7 @@
           <p:cNvPr id="13" name="">
             <a:extLst xmlns:a="http://schemas.openxmlformats.org/drawingml/2006/main">
               <a:ext uri="{FF2B5EF4-FFF2-40B4-BE49-F238E27FC236}">
-                <a16:creationId xmlns:a16="http://schemas.microsoft.com/office/drawing/2014/main" id="{E79E38CF-FB65-4A1A-A2BC-3B09BAC2F2BE}"/>
+                <a16:creationId xmlns:a16="http://schemas.microsoft.com/office/drawing/2014/main" id="{47D7D9A3-9519-4452-90FD-A35AB0C79C11}"/>
               </a:ext>
             </a:extLst>
           </p:cNvPr>
@@ -10200,7 +10125,7 @@
           <p:cNvPr id="14" name="">
             <a:extLst xmlns:a="http://schemas.openxmlformats.org/drawingml/2006/main">
               <a:ext uri="{FF2B5EF4-FFF2-40B4-BE49-F238E27FC236}">
-                <a16:creationId xmlns:a16="http://schemas.microsoft.com/office/drawing/2014/main" id="{4AB156E6-EBBA-4009-8A03-93FBA25AE54A}"/>
+                <a16:creationId xmlns:a16="http://schemas.microsoft.com/office/drawing/2014/main" id="{2C36012E-20FC-48CB-897E-6EBFBC2D1435}"/>
               </a:ext>
             </a:extLst>
           </p:cNvPr>
@@ -10237,7 +10162,7 @@
           <p:cNvPr id="15" name="">
             <a:extLst xmlns:a="http://schemas.openxmlformats.org/drawingml/2006/main">
               <a:ext uri="{FF2B5EF4-FFF2-40B4-BE49-F238E27FC236}">
-                <a16:creationId xmlns:a16="http://schemas.microsoft.com/office/drawing/2014/main" id="{ADC34777-C9CC-4776-8793-E1DDB2998E71}"/>
+                <a16:creationId xmlns:a16="http://schemas.microsoft.com/office/drawing/2014/main" id="{848BAA8D-67D7-4D93-AFB3-E74A7CE46D58}"/>
               </a:ext>
             </a:extLst>
           </p:cNvPr>
@@ -10272,7 +10197,7 @@
           <p:cNvPr id="16" name="">
             <a:extLst xmlns:a="http://schemas.openxmlformats.org/drawingml/2006/main">
               <a:ext uri="{FF2B5EF4-FFF2-40B4-BE49-F238E27FC236}">
-                <a16:creationId xmlns:a16="http://schemas.microsoft.com/office/drawing/2014/main" id="{19C969C0-3713-4495-8EAD-D43D1A532C86}"/>
+                <a16:creationId xmlns:a16="http://schemas.microsoft.com/office/drawing/2014/main" id="{C4AB6D63-AD4C-4A48-8142-B7B0AA581BF4}"/>
               </a:ext>
             </a:extLst>
           </p:cNvPr>
@@ -10330,7 +10255,7 @@
           <p:cNvPr id="17" name="">
             <a:extLst xmlns:a="http://schemas.openxmlformats.org/drawingml/2006/main">
               <a:ext uri="{FF2B5EF4-FFF2-40B4-BE49-F238E27FC236}">
-                <a16:creationId xmlns:a16="http://schemas.microsoft.com/office/drawing/2014/main" id="{E997DC82-0C3D-4186-A05E-E971BFC38660}"/>
+                <a16:creationId xmlns:a16="http://schemas.microsoft.com/office/drawing/2014/main" id="{33AD2A72-7FDB-420B-96CA-53B623A0E2D4}"/>
               </a:ext>
             </a:extLst>
           </p:cNvPr>
@@ -10456,7 +10381,7 @@
           <p:cNvPr id="18" name="">
             <a:extLst xmlns:a="http://schemas.openxmlformats.org/drawingml/2006/main">
               <a:ext uri="{FF2B5EF4-FFF2-40B4-BE49-F238E27FC236}">
-                <a16:creationId xmlns:a16="http://schemas.microsoft.com/office/drawing/2014/main" id="{0781FA9F-AC82-49CB-A774-D8545DD88A52}"/>
+                <a16:creationId xmlns:a16="http://schemas.microsoft.com/office/drawing/2014/main" id="{2A4757DF-C907-4875-AA27-2712BEC0DCD3}"/>
               </a:ext>
             </a:extLst>
           </p:cNvPr>
@@ -10493,7 +10418,7 @@
           <p:cNvPr id="19" name="">
             <a:extLst xmlns:a="http://schemas.openxmlformats.org/drawingml/2006/main">
               <a:ext uri="{FF2B5EF4-FFF2-40B4-BE49-F238E27FC236}">
-                <a16:creationId xmlns:a16="http://schemas.microsoft.com/office/drawing/2014/main" id="{4AD062A2-2D21-4BD3-9501-F6E7C8F0BFE8}"/>
+                <a16:creationId xmlns:a16="http://schemas.microsoft.com/office/drawing/2014/main" id="{3FA092D6-516E-464C-892B-C511E844C2E3}"/>
               </a:ext>
             </a:extLst>
           </p:cNvPr>
@@ -10528,7 +10453,7 @@
           <p:cNvPr id="20" name="">
             <a:extLst xmlns:a="http://schemas.openxmlformats.org/drawingml/2006/main">
               <a:ext uri="{FF2B5EF4-FFF2-40B4-BE49-F238E27FC236}">
-                <a16:creationId xmlns:a16="http://schemas.microsoft.com/office/drawing/2014/main" id="{1D62C0CF-8B8B-4F25-91E5-9F254B2ADD22}"/>
+                <a16:creationId xmlns:a16="http://schemas.microsoft.com/office/drawing/2014/main" id="{C867B281-D6CA-4C8F-B500-A5CE8B4C0328}"/>
               </a:ext>
             </a:extLst>
           </p:cNvPr>
@@ -10586,7 +10511,7 @@
           <p:cNvPr id="21" name="">
             <a:extLst xmlns:a="http://schemas.openxmlformats.org/drawingml/2006/main">
               <a:ext uri="{FF2B5EF4-FFF2-40B4-BE49-F238E27FC236}">
-                <a16:creationId xmlns:a16="http://schemas.microsoft.com/office/drawing/2014/main" id="{6106DA93-5C57-42E3-9A3B-6A64EF612FD7}"/>
+                <a16:creationId xmlns:a16="http://schemas.microsoft.com/office/drawing/2014/main" id="{C6E380C1-2CC3-44AF-B81D-FC63083F5F50}"/>
               </a:ext>
             </a:extLst>
           </p:cNvPr>
@@ -10712,7 +10637,7 @@
           <p:cNvPr id="22" name="">
             <a:extLst xmlns:a="http://schemas.openxmlformats.org/drawingml/2006/main">
               <a:ext uri="{FF2B5EF4-FFF2-40B4-BE49-F238E27FC236}">
-                <a16:creationId xmlns:a16="http://schemas.microsoft.com/office/drawing/2014/main" id="{41E814F1-6912-4909-A20A-46B78A8EE35C}"/>
+                <a16:creationId xmlns:a16="http://schemas.microsoft.com/office/drawing/2014/main" id="{BC9EDE02-B95F-440B-A8CE-1889E9CB18B1}"/>
               </a:ext>
             </a:extLst>
           </p:cNvPr>
@@ -10749,7 +10674,7 @@
           <p:cNvPr id="23" name="">
             <a:extLst xmlns:a="http://schemas.openxmlformats.org/drawingml/2006/main">
               <a:ext uri="{FF2B5EF4-FFF2-40B4-BE49-F238E27FC236}">
-                <a16:creationId xmlns:a16="http://schemas.microsoft.com/office/drawing/2014/main" id="{E4005AA6-2C70-4BBC-A0D4-0DCDA2283188}"/>
+                <a16:creationId xmlns:a16="http://schemas.microsoft.com/office/drawing/2014/main" id="{6EAF38D1-FC47-41CF-BC52-72B9F191C08E}"/>
               </a:ext>
             </a:extLst>
           </p:cNvPr>
@@ -10784,7 +10709,7 @@
           <p:cNvPr id="24" name="">
             <a:extLst xmlns:a="http://schemas.openxmlformats.org/drawingml/2006/main">
               <a:ext uri="{FF2B5EF4-FFF2-40B4-BE49-F238E27FC236}">
-                <a16:creationId xmlns:a16="http://schemas.microsoft.com/office/drawing/2014/main" id="{014E74C0-4ABB-42FE-A11C-10D0B72BAD76}"/>
+                <a16:creationId xmlns:a16="http://schemas.microsoft.com/office/drawing/2014/main" id="{8523B025-5D02-4CD4-8F09-586EE7D851C2}"/>
               </a:ext>
             </a:extLst>
           </p:cNvPr>
@@ -10842,7 +10767,7 @@
           <p:cNvPr id="25" name="">
             <a:extLst xmlns:a="http://schemas.openxmlformats.org/drawingml/2006/main">
               <a:ext uri="{FF2B5EF4-FFF2-40B4-BE49-F238E27FC236}">
-                <a16:creationId xmlns:a16="http://schemas.microsoft.com/office/drawing/2014/main" id="{81566718-7EC1-4C78-B4C3-77FB61A8D81E}"/>
+                <a16:creationId xmlns:a16="http://schemas.microsoft.com/office/drawing/2014/main" id="{CADFE905-FC72-4DD9-A585-A3693705CE8C}"/>
               </a:ext>
             </a:extLst>
           </p:cNvPr>
@@ -10985,7 +10910,7 @@
           <p:cNvPr id="26" name="">
             <a:extLst xmlns:a="http://schemas.openxmlformats.org/drawingml/2006/main">
               <a:ext uri="{FF2B5EF4-FFF2-40B4-BE49-F238E27FC236}">
-                <a16:creationId xmlns:a16="http://schemas.microsoft.com/office/drawing/2014/main" id="{FF7989B1-E343-4757-A1FD-EA79C947F502}"/>
+                <a16:creationId xmlns:a16="http://schemas.microsoft.com/office/drawing/2014/main" id="{DF71BBB5-640C-49DA-8020-5AD196030EC9}"/>
               </a:ext>
             </a:extLst>
           </p:cNvPr>
@@ -11020,7 +10945,7 @@
           <p:cNvPr id="27" name="">
             <a:extLst xmlns:a="http://schemas.openxmlformats.org/drawingml/2006/main">
               <a:ext uri="{FF2B5EF4-FFF2-40B4-BE49-F238E27FC236}">
-                <a16:creationId xmlns:a16="http://schemas.microsoft.com/office/drawing/2014/main" id="{5FD10802-1AC0-4FAE-AB9F-BFB055A61EAF}"/>
+                <a16:creationId xmlns:a16="http://schemas.microsoft.com/office/drawing/2014/main" id="{3AD552BD-0AD8-4648-8A4E-C9E7AC2D3647}"/>
               </a:ext>
             </a:extLst>
           </p:cNvPr>
@@ -11055,7 +10980,7 @@
           <p:cNvPr id="28" name="">
             <a:extLst xmlns:a="http://schemas.openxmlformats.org/drawingml/2006/main">
               <a:ext uri="{FF2B5EF4-FFF2-40B4-BE49-F238E27FC236}">
-                <a16:creationId xmlns:a16="http://schemas.microsoft.com/office/drawing/2014/main" id="{81F494BE-237B-415C-B632-2D9237566654}"/>
+                <a16:creationId xmlns:a16="http://schemas.microsoft.com/office/drawing/2014/main" id="{A0E24986-3656-455C-854D-6D511D5E4C86}"/>
               </a:ext>
             </a:extLst>
           </p:cNvPr>
@@ -11113,7 +11038,7 @@
           <p:cNvPr id="29" name="">
             <a:extLst xmlns:a="http://schemas.openxmlformats.org/drawingml/2006/main">
               <a:ext uri="{FF2B5EF4-FFF2-40B4-BE49-F238E27FC236}">
-                <a16:creationId xmlns:a16="http://schemas.microsoft.com/office/drawing/2014/main" id="{7AEDCC51-6C84-4099-9590-0F30DDBF05BF}"/>
+                <a16:creationId xmlns:a16="http://schemas.microsoft.com/office/drawing/2014/main" id="{72DEE604-E8B4-41BA-A14F-49C253AF2A6E}"/>
               </a:ext>
             </a:extLst>
           </p:cNvPr>
@@ -11169,7 +11094,7 @@
     </p:spTree>
     <p:extLst>
       <p:ext uri="{BB962C8B-B14F-4D97-AF65-F5344CB8AC3E}">
-        <p14:creationId xmlns:p14="http://schemas.microsoft.com/office/powerpoint/2010/main" val="1300958238"/>
+        <p14:creationId xmlns:p14="http://schemas.microsoft.com/office/powerpoint/2010/main" val="674551120"/>
       </p:ext>
     </p:extLst>
   </p:cSld>
@@ -11200,7 +11125,7 @@
           <p:cNvPr id="1" name="Slide Number Placeholder 5">
             <a:extLst xmlns:a="http://schemas.openxmlformats.org/drawingml/2006/main">
               <a:ext uri="{FF2B5EF4-FFF2-40B4-BE49-F238E27FC236}">
-                <a16:creationId xmlns:a16="http://schemas.microsoft.com/office/drawing/2014/main" id="{38BDF79F-9F16-4FEE-B72E-1F506FE9EBEC}"/>
+                <a16:creationId xmlns:a16="http://schemas.microsoft.com/office/drawing/2014/main" id="{039602EF-25C6-4B7F-BD52-B0182DC44CC0}"/>
               </a:ext>
             </a:extLst>
           </p:cNvPr>
@@ -11236,7 +11161,7 @@
           <p:nvPr/>
         </p:nvPicPr>
         <p:blipFill>
-          <a:blip xmlns:r="http://schemas.openxmlformats.org/officeDocument/2006/relationships" xmlns:a="http://schemas.openxmlformats.org/drawingml/2006/main" r:embed="Rca5ceab256ae4fdf"/>
+          <a:blip xmlns:r="http://schemas.openxmlformats.org/officeDocument/2006/relationships" xmlns:a="http://schemas.openxmlformats.org/drawingml/2006/main" r:embed="Ref2959a582994921"/>
           <a:srcRect xmlns:a="http://schemas.openxmlformats.org/drawingml/2006/main" l="0" t="21875" r="0" b="21875"/>
           <a:stretch xmlns:a="http://schemas.openxmlformats.org/drawingml/2006/main">
             <a:fillRect l="0" t="0" r="0" b="0"/>
@@ -11257,7 +11182,7 @@
           <p:cNvPr id="3" name="">
             <a:extLst xmlns:a="http://schemas.openxmlformats.org/drawingml/2006/main">
               <a:ext uri="{FF2B5EF4-FFF2-40B4-BE49-F238E27FC236}">
-                <a16:creationId xmlns:a16="http://schemas.microsoft.com/office/drawing/2014/main" id="{5DEE6927-0D4C-4978-84FA-CD3D3B2E716F}"/>
+                <a16:creationId xmlns:a16="http://schemas.microsoft.com/office/drawing/2014/main" id="{344860A6-C18C-4B7C-A382-B0A5BBB00416}"/>
               </a:ext>
             </a:extLst>
           </p:cNvPr>
@@ -11292,7 +11217,7 @@
           <p:cNvPr id="4" name="">
             <a:extLst xmlns:a="http://schemas.openxmlformats.org/drawingml/2006/main">
               <a:ext uri="{FF2B5EF4-FFF2-40B4-BE49-F238E27FC236}">
-                <a16:creationId xmlns:a16="http://schemas.microsoft.com/office/drawing/2014/main" id="{85F3797F-0E77-4237-9EF8-0E1B0D3D3F22}"/>
+                <a16:creationId xmlns:a16="http://schemas.microsoft.com/office/drawing/2014/main" id="{C11DAE95-50CF-4C74-9026-1FB04FA553FA}"/>
               </a:ext>
             </a:extLst>
           </p:cNvPr>
@@ -11327,7 +11252,7 @@
           <p:cNvPr id="5" name="">
             <a:extLst xmlns:a="http://schemas.openxmlformats.org/drawingml/2006/main">
               <a:ext uri="{FF2B5EF4-FFF2-40B4-BE49-F238E27FC236}">
-                <a16:creationId xmlns:a16="http://schemas.microsoft.com/office/drawing/2014/main" id="{B2A76673-6364-4C91-8F9B-24C004392D7A}"/>
+                <a16:creationId xmlns:a16="http://schemas.microsoft.com/office/drawing/2014/main" id="{FAE4C6EC-31BC-4C2F-B48B-A034A1E719EC}"/>
               </a:ext>
             </a:extLst>
           </p:cNvPr>
@@ -11364,7 +11289,7 @@
           <p:cNvPr id="6" name="">
             <a:extLst xmlns:a="http://schemas.openxmlformats.org/drawingml/2006/main">
               <a:ext uri="{FF2B5EF4-FFF2-40B4-BE49-F238E27FC236}">
-                <a16:creationId xmlns:a16="http://schemas.microsoft.com/office/drawing/2014/main" id="{31ADB5BC-FFE1-404C-981E-D614CD5D9D99}"/>
+                <a16:creationId xmlns:a16="http://schemas.microsoft.com/office/drawing/2014/main" id="{D4F03467-33AD-42E2-8F3F-DBB64587E7DF}"/>
               </a:ext>
             </a:extLst>
           </p:cNvPr>
@@ -11401,7 +11326,7 @@
           <p:cNvPr id="7" name="">
             <a:extLst xmlns:a="http://schemas.openxmlformats.org/drawingml/2006/main">
               <a:ext uri="{FF2B5EF4-FFF2-40B4-BE49-F238E27FC236}">
-                <a16:creationId xmlns:a16="http://schemas.microsoft.com/office/drawing/2014/main" id="{5AA405A7-61C8-494C-85FC-92D3E07C6BFC}"/>
+                <a16:creationId xmlns:a16="http://schemas.microsoft.com/office/drawing/2014/main" id="{FD4D9E24-2361-4DF4-8188-215C02133618}"/>
               </a:ext>
             </a:extLst>
           </p:cNvPr>
@@ -11438,7 +11363,7 @@
           <p:cNvPr id="8" name="">
             <a:extLst xmlns:a="http://schemas.openxmlformats.org/drawingml/2006/main">
               <a:ext uri="{FF2B5EF4-FFF2-40B4-BE49-F238E27FC236}">
-                <a16:creationId xmlns:a16="http://schemas.microsoft.com/office/drawing/2014/main" id="{F585CF9D-7980-45D6-A8A9-50F94697DE27}"/>
+                <a16:creationId xmlns:a16="http://schemas.microsoft.com/office/drawing/2014/main" id="{B20A314C-5A8B-4AD0-9097-E801A3B323C7}"/>
               </a:ext>
             </a:extLst>
           </p:cNvPr>
@@ -11475,7 +11400,7 @@
           <p:cNvPr id="9" name="">
             <a:extLst xmlns:a="http://schemas.openxmlformats.org/drawingml/2006/main">
               <a:ext uri="{FF2B5EF4-FFF2-40B4-BE49-F238E27FC236}">
-                <a16:creationId xmlns:a16="http://schemas.microsoft.com/office/drawing/2014/main" id="{3F4240D2-5AAF-4778-9142-49D6F6AE233E}"/>
+                <a16:creationId xmlns:a16="http://schemas.microsoft.com/office/drawing/2014/main" id="{46017C19-8730-415B-8299-D0B8FE410F56}"/>
               </a:ext>
             </a:extLst>
           </p:cNvPr>
@@ -11533,7 +11458,7 @@
           <p:cNvPr id="10" name="">
             <a:extLst xmlns:a="http://schemas.openxmlformats.org/drawingml/2006/main">
               <a:ext uri="{FF2B5EF4-FFF2-40B4-BE49-F238E27FC236}">
-                <a16:creationId xmlns:a16="http://schemas.microsoft.com/office/drawing/2014/main" id="{6788B704-197C-4A75-84B8-684A0FB6132D}"/>
+                <a16:creationId xmlns:a16="http://schemas.microsoft.com/office/drawing/2014/main" id="{45758363-6DBE-485E-9BC1-1EA8FB65BDF4}"/>
               </a:ext>
             </a:extLst>
           </p:cNvPr>
@@ -11591,7 +11516,7 @@
           <p:cNvPr id="11" name="">
             <a:extLst xmlns:a="http://schemas.openxmlformats.org/drawingml/2006/main">
               <a:ext uri="{FF2B5EF4-FFF2-40B4-BE49-F238E27FC236}">
-                <a16:creationId xmlns:a16="http://schemas.microsoft.com/office/drawing/2014/main" id="{52C0D622-4894-4AF7-B9FA-ED7FA568D0E5}"/>
+                <a16:creationId xmlns:a16="http://schemas.microsoft.com/office/drawing/2014/main" id="{F0447C38-56BB-4BAF-B3A3-229319E27E67}"/>
               </a:ext>
             </a:extLst>
           </p:cNvPr>
@@ -11626,7 +11551,7 @@
           <p:cNvPr id="12" name="">
             <a:extLst xmlns:a="http://schemas.openxmlformats.org/drawingml/2006/main">
               <a:ext uri="{FF2B5EF4-FFF2-40B4-BE49-F238E27FC236}">
-                <a16:creationId xmlns:a16="http://schemas.microsoft.com/office/drawing/2014/main" id="{D3419526-027B-487F-A204-06738CCBE17C}"/>
+                <a16:creationId xmlns:a16="http://schemas.microsoft.com/office/drawing/2014/main" id="{6B63327B-122D-41E2-85DB-C77BA7DF59EB}"/>
               </a:ext>
             </a:extLst>
           </p:cNvPr>
@@ -11659,7 +11584,7 @@
           <p:cNvPr id="13" name="">
             <a:extLst xmlns:a="http://schemas.openxmlformats.org/drawingml/2006/main">
               <a:ext uri="{FF2B5EF4-FFF2-40B4-BE49-F238E27FC236}">
-                <a16:creationId xmlns:a16="http://schemas.microsoft.com/office/drawing/2014/main" id="{4A9F9148-1B9C-433F-8F5A-CB8849A3F7B0}"/>
+                <a16:creationId xmlns:a16="http://schemas.microsoft.com/office/drawing/2014/main" id="{EDEDA0E0-1E8A-43AA-90C7-6ADF0734CC1D}"/>
               </a:ext>
             </a:extLst>
           </p:cNvPr>
@@ -11717,7 +11642,7 @@
           <p:cNvPr id="14" name="">
             <a:extLst xmlns:a="http://schemas.openxmlformats.org/drawingml/2006/main">
               <a:ext uri="{FF2B5EF4-FFF2-40B4-BE49-F238E27FC236}">
-                <a16:creationId xmlns:a16="http://schemas.microsoft.com/office/drawing/2014/main" id="{0E82C703-B3EC-40FF-ADA1-DA31021D2050}"/>
+                <a16:creationId xmlns:a16="http://schemas.microsoft.com/office/drawing/2014/main" id="{E2DF8570-35B4-4895-AB3C-2CABA8D9DC1E}"/>
               </a:ext>
             </a:extLst>
           </p:cNvPr>
@@ -11752,7 +11677,7 @@
           <p:cNvPr id="15" name="">
             <a:extLst xmlns:a="http://schemas.openxmlformats.org/drawingml/2006/main">
               <a:ext uri="{FF2B5EF4-FFF2-40B4-BE49-F238E27FC236}">
-                <a16:creationId xmlns:a16="http://schemas.microsoft.com/office/drawing/2014/main" id="{DFCA7E41-EB43-44C6-8DE7-FCB37F82D90F}"/>
+                <a16:creationId xmlns:a16="http://schemas.microsoft.com/office/drawing/2014/main" id="{C9C66D18-7AEC-45B2-A16A-B2EB0CD51B20}"/>
               </a:ext>
             </a:extLst>
           </p:cNvPr>
@@ -11787,7 +11712,7 @@
           <p:cNvPr id="16" name="">
             <a:extLst xmlns:a="http://schemas.openxmlformats.org/drawingml/2006/main">
               <a:ext uri="{FF2B5EF4-FFF2-40B4-BE49-F238E27FC236}">
-                <a16:creationId xmlns:a16="http://schemas.microsoft.com/office/drawing/2014/main" id="{E1903D35-DC5B-479E-8403-8A4E1330D95E}"/>
+                <a16:creationId xmlns:a16="http://schemas.microsoft.com/office/drawing/2014/main" id="{491355B3-E8C4-47C2-AC1A-31635460B471}"/>
               </a:ext>
             </a:extLst>
           </p:cNvPr>
@@ -11845,7 +11770,7 @@
           <p:cNvPr id="17" name="">
             <a:extLst xmlns:a="http://schemas.openxmlformats.org/drawingml/2006/main">
               <a:ext uri="{FF2B5EF4-FFF2-40B4-BE49-F238E27FC236}">
-                <a16:creationId xmlns:a16="http://schemas.microsoft.com/office/drawing/2014/main" id="{8AA9943D-5569-4E29-8834-B09A28B91419}"/>
+                <a16:creationId xmlns:a16="http://schemas.microsoft.com/office/drawing/2014/main" id="{DCB77EF7-55AF-4B96-A08D-6C982AD275BE}"/>
               </a:ext>
             </a:extLst>
           </p:cNvPr>
@@ -11882,7 +11807,7 @@
           <p:cNvPr id="18" name="">
             <a:extLst xmlns:a="http://schemas.openxmlformats.org/drawingml/2006/main">
               <a:ext uri="{FF2B5EF4-FFF2-40B4-BE49-F238E27FC236}">
-                <a16:creationId xmlns:a16="http://schemas.microsoft.com/office/drawing/2014/main" id="{BA3ED7ED-2BC4-4471-A47F-4BB897FDE7CD}"/>
+                <a16:creationId xmlns:a16="http://schemas.microsoft.com/office/drawing/2014/main" id="{75B77098-6763-492F-8FB3-3513502005A1}"/>
               </a:ext>
             </a:extLst>
           </p:cNvPr>
@@ -11917,7 +11842,7 @@
           <p:cNvPr id="19" name="">
             <a:extLst xmlns:a="http://schemas.openxmlformats.org/drawingml/2006/main">
               <a:ext uri="{FF2B5EF4-FFF2-40B4-BE49-F238E27FC236}">
-                <a16:creationId xmlns:a16="http://schemas.microsoft.com/office/drawing/2014/main" id="{0A4F4D6E-7FBA-43C9-9256-485CDEEFBAF4}"/>
+                <a16:creationId xmlns:a16="http://schemas.microsoft.com/office/drawing/2014/main" id="{ABA8CA02-FC76-44ED-B36C-7007A062B238}"/>
               </a:ext>
             </a:extLst>
           </p:cNvPr>
@@ -11975,7 +11900,7 @@
           <p:cNvPr id="20" name="">
             <a:extLst xmlns:a="http://schemas.openxmlformats.org/drawingml/2006/main">
               <a:ext uri="{FF2B5EF4-FFF2-40B4-BE49-F238E27FC236}">
-                <a16:creationId xmlns:a16="http://schemas.microsoft.com/office/drawing/2014/main" id="{48DDCAF8-911B-4263-9272-DF15CD9AD8CF}"/>
+                <a16:creationId xmlns:a16="http://schemas.microsoft.com/office/drawing/2014/main" id="{445992A5-B649-4068-AFCB-1B875690675D}"/>
               </a:ext>
             </a:extLst>
           </p:cNvPr>
@@ -12067,7 +11992,7 @@
           <p:cNvPr id="21" name="">
             <a:extLst xmlns:a="http://schemas.openxmlformats.org/drawingml/2006/main">
               <a:ext uri="{FF2B5EF4-FFF2-40B4-BE49-F238E27FC236}">
-                <a16:creationId xmlns:a16="http://schemas.microsoft.com/office/drawing/2014/main" id="{219F346D-6858-40D4-9611-42B1BE43146E}"/>
+                <a16:creationId xmlns:a16="http://schemas.microsoft.com/office/drawing/2014/main" id="{1FA564A2-A678-47EB-9E92-25FD9204930F}"/>
               </a:ext>
             </a:extLst>
           </p:cNvPr>
@@ -12104,7 +12029,7 @@
           <p:cNvPr id="22" name="">
             <a:extLst xmlns:a="http://schemas.openxmlformats.org/drawingml/2006/main">
               <a:ext uri="{FF2B5EF4-FFF2-40B4-BE49-F238E27FC236}">
-                <a16:creationId xmlns:a16="http://schemas.microsoft.com/office/drawing/2014/main" id="{EDA430B5-9823-40BE-B6AA-95CA9CA4B62F}"/>
+                <a16:creationId xmlns:a16="http://schemas.microsoft.com/office/drawing/2014/main" id="{2358E252-8438-45C2-91B8-72F411405564}"/>
               </a:ext>
             </a:extLst>
           </p:cNvPr>
@@ -12139,7 +12064,7 @@
           <p:cNvPr id="23" name="">
             <a:extLst xmlns:a="http://schemas.openxmlformats.org/drawingml/2006/main">
               <a:ext uri="{FF2B5EF4-FFF2-40B4-BE49-F238E27FC236}">
-                <a16:creationId xmlns:a16="http://schemas.microsoft.com/office/drawing/2014/main" id="{26C68748-D83D-4FB5-B3DA-51F34A263702}"/>
+                <a16:creationId xmlns:a16="http://schemas.microsoft.com/office/drawing/2014/main" id="{A088EFEA-FAFD-412E-AB3A-1654D8DA1384}"/>
               </a:ext>
             </a:extLst>
           </p:cNvPr>
@@ -12197,7 +12122,7 @@
           <p:cNvPr id="24" name="">
             <a:extLst xmlns:a="http://schemas.openxmlformats.org/drawingml/2006/main">
               <a:ext uri="{FF2B5EF4-FFF2-40B4-BE49-F238E27FC236}">
-                <a16:creationId xmlns:a16="http://schemas.microsoft.com/office/drawing/2014/main" id="{BF274958-3AF7-4380-9A79-A8A85A4CFC2E}"/>
+                <a16:creationId xmlns:a16="http://schemas.microsoft.com/office/drawing/2014/main" id="{CC350435-43A9-4A3F-854E-0B63FFBC5DA4}"/>
               </a:ext>
             </a:extLst>
           </p:cNvPr>
@@ -12289,7 +12214,7 @@
           <p:cNvPr id="25" name="">
             <a:extLst xmlns:a="http://schemas.openxmlformats.org/drawingml/2006/main">
               <a:ext uri="{FF2B5EF4-FFF2-40B4-BE49-F238E27FC236}">
-                <a16:creationId xmlns:a16="http://schemas.microsoft.com/office/drawing/2014/main" id="{B0DD95A9-C604-48AA-BDD9-7E49D9B98643}"/>
+                <a16:creationId xmlns:a16="http://schemas.microsoft.com/office/drawing/2014/main" id="{CD8E12D5-DB08-4101-A9D6-B312198D9A38}"/>
               </a:ext>
             </a:extLst>
           </p:cNvPr>
@@ -12326,7 +12251,7 @@
           <p:cNvPr id="26" name="">
             <a:extLst xmlns:a="http://schemas.openxmlformats.org/drawingml/2006/main">
               <a:ext uri="{FF2B5EF4-FFF2-40B4-BE49-F238E27FC236}">
-                <a16:creationId xmlns:a16="http://schemas.microsoft.com/office/drawing/2014/main" id="{404D8235-A556-40CF-A7D3-D7BA132E50A8}"/>
+                <a16:creationId xmlns:a16="http://schemas.microsoft.com/office/drawing/2014/main" id="{7330B3DA-0FD4-4672-852A-6AC9FFC002D3}"/>
               </a:ext>
             </a:extLst>
           </p:cNvPr>
@@ -12361,7 +12286,7 @@
           <p:cNvPr id="27" name="">
             <a:extLst xmlns:a="http://schemas.openxmlformats.org/drawingml/2006/main">
               <a:ext uri="{FF2B5EF4-FFF2-40B4-BE49-F238E27FC236}">
-                <a16:creationId xmlns:a16="http://schemas.microsoft.com/office/drawing/2014/main" id="{BA75BF4E-E1A3-475B-9593-BE9385DB2F58}"/>
+                <a16:creationId xmlns:a16="http://schemas.microsoft.com/office/drawing/2014/main" id="{DAD8AB6C-ADFE-452E-8AD7-AC2ADBC9C924}"/>
               </a:ext>
             </a:extLst>
           </p:cNvPr>
@@ -12419,7 +12344,7 @@
           <p:cNvPr id="28" name="">
             <a:extLst xmlns:a="http://schemas.openxmlformats.org/drawingml/2006/main">
               <a:ext uri="{FF2B5EF4-FFF2-40B4-BE49-F238E27FC236}">
-                <a16:creationId xmlns:a16="http://schemas.microsoft.com/office/drawing/2014/main" id="{2AC9B7AE-89DC-47FE-8E30-61256E734CB6}"/>
+                <a16:creationId xmlns:a16="http://schemas.microsoft.com/office/drawing/2014/main" id="{A388E92B-111B-4680-A780-75F3E7F64106}"/>
               </a:ext>
             </a:extLst>
           </p:cNvPr>
@@ -12511,7 +12436,7 @@
           <p:cNvPr id="29" name="">
             <a:extLst xmlns:a="http://schemas.openxmlformats.org/drawingml/2006/main">
               <a:ext uri="{FF2B5EF4-FFF2-40B4-BE49-F238E27FC236}">
-                <a16:creationId xmlns:a16="http://schemas.microsoft.com/office/drawing/2014/main" id="{C149E10E-2497-4FBC-8323-120B453F33DF}"/>
+                <a16:creationId xmlns:a16="http://schemas.microsoft.com/office/drawing/2014/main" id="{A3870517-46CF-480B-9834-83B7CFF72CD9}"/>
               </a:ext>
             </a:extLst>
           </p:cNvPr>
@@ -12565,7 +12490,7 @@
           <p:cNvPr id="30" name="">
             <a:extLst xmlns:a="http://schemas.openxmlformats.org/drawingml/2006/main">
               <a:ext uri="{FF2B5EF4-FFF2-40B4-BE49-F238E27FC236}">
-                <a16:creationId xmlns:a16="http://schemas.microsoft.com/office/drawing/2014/main" id="{F94F13B0-8055-4507-AC32-650F789A7ACA}"/>
+                <a16:creationId xmlns:a16="http://schemas.microsoft.com/office/drawing/2014/main" id="{592FC843-04BF-4824-BF3A-482D26BDA444}"/>
               </a:ext>
             </a:extLst>
           </p:cNvPr>
@@ -12621,7 +12546,7 @@
     </p:spTree>
     <p:extLst>
       <p:ext uri="{BB962C8B-B14F-4D97-AF65-F5344CB8AC3E}">
-        <p14:creationId xmlns:p14="http://schemas.microsoft.com/office/powerpoint/2010/main" val="2081073485"/>
+        <p14:creationId xmlns:p14="http://schemas.microsoft.com/office/powerpoint/2010/main" val="821042884"/>
       </p:ext>
     </p:extLst>
   </p:cSld>
@@ -12652,7 +12577,7 @@
           <p:cNvPr id="1" name="Slide Number Placeholder 5">
             <a:extLst xmlns:a="http://schemas.openxmlformats.org/drawingml/2006/main">
               <a:ext uri="{FF2B5EF4-FFF2-40B4-BE49-F238E27FC236}">
-                <a16:creationId xmlns:a16="http://schemas.microsoft.com/office/drawing/2014/main" id="{38BDF79F-9F16-4FEE-B72E-1F506FE9EBEC}"/>
+                <a16:creationId xmlns:a16="http://schemas.microsoft.com/office/drawing/2014/main" id="{039602EF-25C6-4B7F-BD52-B0182DC44CC0}"/>
               </a:ext>
             </a:extLst>
           </p:cNvPr>
@@ -12688,7 +12613,7 @@
           <p:nvPr/>
         </p:nvPicPr>
         <p:blipFill>
-          <a:blip xmlns:r="http://schemas.openxmlformats.org/officeDocument/2006/relationships" xmlns:a="http://schemas.openxmlformats.org/drawingml/2006/main" r:embed="Rda91e4fb05424552"/>
+          <a:blip xmlns:r="http://schemas.openxmlformats.org/officeDocument/2006/relationships" xmlns:a="http://schemas.openxmlformats.org/drawingml/2006/main" r:embed="R02f131c5990a44f4"/>
           <a:srcRect xmlns:a="http://schemas.openxmlformats.org/drawingml/2006/main" l="0" t="21875" r="0" b="21875"/>
           <a:stretch xmlns:a="http://schemas.openxmlformats.org/drawingml/2006/main">
             <a:fillRect l="0" t="0" r="0" b="0"/>
@@ -12709,7 +12634,7 @@
           <p:cNvPr id="3" name="">
             <a:extLst xmlns:a="http://schemas.openxmlformats.org/drawingml/2006/main">
               <a:ext uri="{FF2B5EF4-FFF2-40B4-BE49-F238E27FC236}">
-                <a16:creationId xmlns:a16="http://schemas.microsoft.com/office/drawing/2014/main" id="{CD294D12-89BB-457C-AD2B-515EF102021D}"/>
+                <a16:creationId xmlns:a16="http://schemas.microsoft.com/office/drawing/2014/main" id="{B3375565-B516-4794-BDA0-45F30E39114C}"/>
               </a:ext>
             </a:extLst>
           </p:cNvPr>
@@ -12744,7 +12669,7 @@
           <p:cNvPr id="4" name="">
             <a:extLst xmlns:a="http://schemas.openxmlformats.org/drawingml/2006/main">
               <a:ext uri="{FF2B5EF4-FFF2-40B4-BE49-F238E27FC236}">
-                <a16:creationId xmlns:a16="http://schemas.microsoft.com/office/drawing/2014/main" id="{9482DCA7-FBDC-4E0C-960D-66E22FC6D1F2}"/>
+                <a16:creationId xmlns:a16="http://schemas.microsoft.com/office/drawing/2014/main" id="{63A94201-87DF-4C31-8C68-8C34B817A1FD}"/>
               </a:ext>
             </a:extLst>
           </p:cNvPr>
@@ -12779,7 +12704,7 @@
           <p:cNvPr id="5" name="">
             <a:extLst xmlns:a="http://schemas.openxmlformats.org/drawingml/2006/main">
               <a:ext uri="{FF2B5EF4-FFF2-40B4-BE49-F238E27FC236}">
-                <a16:creationId xmlns:a16="http://schemas.microsoft.com/office/drawing/2014/main" id="{FD96DD69-E8FA-49A7-97FB-D35E6A6E26EF}"/>
+                <a16:creationId xmlns:a16="http://schemas.microsoft.com/office/drawing/2014/main" id="{0E564263-E8E5-4154-AE52-E2EA499B6171}"/>
               </a:ext>
             </a:extLst>
           </p:cNvPr>
@@ -12816,7 +12741,7 @@
           <p:cNvPr id="6" name="">
             <a:extLst xmlns:a="http://schemas.openxmlformats.org/drawingml/2006/main">
               <a:ext uri="{FF2B5EF4-FFF2-40B4-BE49-F238E27FC236}">
-                <a16:creationId xmlns:a16="http://schemas.microsoft.com/office/drawing/2014/main" id="{014C5B91-33C5-4F69-A39C-7CC66A33119C}"/>
+                <a16:creationId xmlns:a16="http://schemas.microsoft.com/office/drawing/2014/main" id="{75B45DCC-7A3C-4C85-A33F-6EBD91B06E8B}"/>
               </a:ext>
             </a:extLst>
           </p:cNvPr>
@@ -12853,7 +12778,7 @@
           <p:cNvPr id="7" name="">
             <a:extLst xmlns:a="http://schemas.openxmlformats.org/drawingml/2006/main">
               <a:ext uri="{FF2B5EF4-FFF2-40B4-BE49-F238E27FC236}">
-                <a16:creationId xmlns:a16="http://schemas.microsoft.com/office/drawing/2014/main" id="{18317FC8-CDDE-4333-9824-18428509DAC5}"/>
+                <a16:creationId xmlns:a16="http://schemas.microsoft.com/office/drawing/2014/main" id="{D6BB4193-AB3C-4384-9510-8A46F4DE2B6A}"/>
               </a:ext>
             </a:extLst>
           </p:cNvPr>
@@ -12890,7 +12815,7 @@
           <p:cNvPr id="8" name="">
             <a:extLst xmlns:a="http://schemas.openxmlformats.org/drawingml/2006/main">
               <a:ext uri="{FF2B5EF4-FFF2-40B4-BE49-F238E27FC236}">
-                <a16:creationId xmlns:a16="http://schemas.microsoft.com/office/drawing/2014/main" id="{093F996B-17F6-4966-A98A-7D2EA82526E9}"/>
+                <a16:creationId xmlns:a16="http://schemas.microsoft.com/office/drawing/2014/main" id="{0EFBB82F-B99D-4AF7-80AB-696F8F39EDAB}"/>
               </a:ext>
             </a:extLst>
           </p:cNvPr>
@@ -12927,7 +12852,7 @@
           <p:cNvPr id="9" name="">
             <a:extLst xmlns:a="http://schemas.openxmlformats.org/drawingml/2006/main">
               <a:ext uri="{FF2B5EF4-FFF2-40B4-BE49-F238E27FC236}">
-                <a16:creationId xmlns:a16="http://schemas.microsoft.com/office/drawing/2014/main" id="{82EC5712-1C9F-4D80-9130-CF6F7DD55FC4}"/>
+                <a16:creationId xmlns:a16="http://schemas.microsoft.com/office/drawing/2014/main" id="{41ACD285-5F16-4136-A148-38C4B1B0FEFA}"/>
               </a:ext>
             </a:extLst>
           </p:cNvPr>
@@ -12985,7 +12910,7 @@
           <p:cNvPr id="10" name="">
             <a:extLst xmlns:a="http://schemas.openxmlformats.org/drawingml/2006/main">
               <a:ext uri="{FF2B5EF4-FFF2-40B4-BE49-F238E27FC236}">
-                <a16:creationId xmlns:a16="http://schemas.microsoft.com/office/drawing/2014/main" id="{E9DD3B2D-1C31-4F95-9DF9-B15E355FB8B1}"/>
+                <a16:creationId xmlns:a16="http://schemas.microsoft.com/office/drawing/2014/main" id="{4F610114-6671-465C-A6AF-9E80E0FBD624}"/>
               </a:ext>
             </a:extLst>
           </p:cNvPr>
@@ -13043,7 +12968,7 @@
           <p:cNvPr id="11" name="">
             <a:extLst xmlns:a="http://schemas.openxmlformats.org/drawingml/2006/main">
               <a:ext uri="{FF2B5EF4-FFF2-40B4-BE49-F238E27FC236}">
-                <a16:creationId xmlns:a16="http://schemas.microsoft.com/office/drawing/2014/main" id="{DE9ADBB0-7E0C-4970-9EC9-AAA0BFB47CEC}"/>
+                <a16:creationId xmlns:a16="http://schemas.microsoft.com/office/drawing/2014/main" id="{29A6377A-9723-4377-A58B-603022E3DEF1}"/>
               </a:ext>
             </a:extLst>
           </p:cNvPr>
@@ -13078,7 +13003,7 @@
           <p:cNvPr id="12" name="">
             <a:extLst xmlns:a="http://schemas.openxmlformats.org/drawingml/2006/main">
               <a:ext uri="{FF2B5EF4-FFF2-40B4-BE49-F238E27FC236}">
-                <a16:creationId xmlns:a16="http://schemas.microsoft.com/office/drawing/2014/main" id="{3100ECDB-70E8-4EAA-A899-27A9AEB58E6B}"/>
+                <a16:creationId xmlns:a16="http://schemas.microsoft.com/office/drawing/2014/main" id="{3FC5FFF4-2EE6-4EBA-80E0-50486920B4FA}"/>
               </a:ext>
             </a:extLst>
           </p:cNvPr>
@@ -13111,7 +13036,7 @@
           <p:cNvPr id="13" name="">
             <a:extLst xmlns:a="http://schemas.openxmlformats.org/drawingml/2006/main">
               <a:ext uri="{FF2B5EF4-FFF2-40B4-BE49-F238E27FC236}">
-                <a16:creationId xmlns:a16="http://schemas.microsoft.com/office/drawing/2014/main" id="{3E1C1014-2E11-4734-9710-587BD510180F}"/>
+                <a16:creationId xmlns:a16="http://schemas.microsoft.com/office/drawing/2014/main" id="{1D74A65E-0A2E-4975-9215-6824B1CFFE0F}"/>
               </a:ext>
             </a:extLst>
           </p:cNvPr>
@@ -13186,82 +13111,7 @@
           <p:cNvPr id="14" name="">
             <a:extLst xmlns:a="http://schemas.openxmlformats.org/drawingml/2006/main">
               <a:ext uri="{FF2B5EF4-FFF2-40B4-BE49-F238E27FC236}">
-                <a16:creationId xmlns:a16="http://schemas.microsoft.com/office/drawing/2014/main" id="{5E2A9A20-D964-4EA3-9948-F19F35C290E7}"/>
-              </a:ext>
-            </a:extLst>
-          </p:cNvPr>
-          <p:cNvSpPr>
-            <a:spLocks xmlns:a="http://schemas.openxmlformats.org/drawingml/2006/main" noGrp="1"/>
-          </p:cNvSpPr>
-          <p:nvPr/>
-        </p:nvSpPr>
-        <p:spPr>
-          <a:xfrm xmlns:a="http://schemas.openxmlformats.org/drawingml/2006/main">
-            <a:off x="628650" y="2038350"/>
-            <a:ext cx="6858000" cy="628650"/>
-          </a:xfrm>
-          <a:prstGeom xmlns:a="http://schemas.openxmlformats.org/drawingml/2006/main" prst="rect">
-            <a:avLst/>
-          </a:prstGeom>
-          <a:solidFill xmlns:a="http://schemas.openxmlformats.org/drawingml/2006/main">
-            <a:srgbClr val="000000">
-              <a:alpha val="0"/>
-            </a:srgbClr>
-          </a:solidFill>
-          <a:ln xmlns:a="http://schemas.openxmlformats.org/drawingml/2006/main" w="0">
-            <a:solidFill>
-              <a:srgbClr val="000000">
-                <a:alpha val="0"/>
-              </a:srgbClr>
-            </a:solidFill>
-            <a:prstDash val="solid"/>
-          </a:ln>
-        </p:spPr>
-        <p:txBody>
-          <a:bodyPr xmlns:a="http://schemas.openxmlformats.org/drawingml/2006/main" lIns="0" tIns="0" rIns="0" bIns="0" anchor="t"/>
-          <a:lstStyle xmlns:a="http://schemas.openxmlformats.org/drawingml/2006/main"/>
-          <a:p xmlns:a="http://schemas.openxmlformats.org/drawingml/2006/main">
-            <a:pPr algn="l">
-              <a:defRPr sz="1350" b="0">
-                <a:solidFill>
-                  <a:srgbClr val="344146"/>
-                </a:solidFill>
-              </a:defRPr>
-            </a:pPr>
-            <a:r>
-              <a:rPr sz="1350" b="0">
-                <a:solidFill>
-                  <a:srgbClr val="344146"/>
-                </a:solidFill>
-              </a:rPr>
-              <a:t>Round 2-4의 benchmark 논문들이 들어오면서,</a:t>
-            </a:r>
-          </a:p>
-          <a:p xmlns:a="http://schemas.openxmlformats.org/drawingml/2006/main">
-            <a:pPr algn="l">
-              <a:defRPr sz="1350" b="0">
-                <a:solidFill>
-                  <a:srgbClr val="344146"/>
-                </a:solidFill>
-              </a:defRPr>
-            </a:pPr>
-            <a:r>
-              <a:rPr sz="1350" b="0">
-                <a:solidFill>
-                  <a:srgbClr val="344146"/>
-                </a:solidFill>
-              </a:rPr>
-              <a:t>질문 자체가 새 프레임으로 재구성됐다.</a:t>
-            </a:r>
-          </a:p>
-        </p:txBody>
-      </p:sp>
-      <p:sp>
-        <p:nvSpPr>
-          <p:cNvPr id="15" name="">
-            <a:extLst xmlns:a="http://schemas.openxmlformats.org/drawingml/2006/main">
-              <a:ext uri="{FF2B5EF4-FFF2-40B4-BE49-F238E27FC236}">
-                <a16:creationId xmlns:a16="http://schemas.microsoft.com/office/drawing/2014/main" id="{19FE4D58-E19E-42FA-AFFE-D75E5A765CDD}"/>
+                <a16:creationId xmlns:a16="http://schemas.microsoft.com/office/drawing/2014/main" id="{C2924AC5-EAFE-4BB9-8088-D335B654DFE8}"/>
               </a:ext>
             </a:extLst>
           </p:cNvPr>
@@ -13312,10 +13162,10 @@
       </p:sp>
       <p:sp>
         <p:nvSpPr>
-          <p:cNvPr id="16" name="">
-            <a:extLst xmlns:a="http://schemas.openxmlformats.org/drawingml/2006/main">
-              <a:ext uri="{FF2B5EF4-FFF2-40B4-BE49-F238E27FC236}">
-                <a16:creationId xmlns:a16="http://schemas.microsoft.com/office/drawing/2014/main" id="{241EF0C2-1522-46A5-9379-9145E29F76B1}"/>
+          <p:cNvPr id="15" name="">
+            <a:extLst xmlns:a="http://schemas.openxmlformats.org/drawingml/2006/main">
+              <a:ext uri="{FF2B5EF4-FFF2-40B4-BE49-F238E27FC236}">
+                <a16:creationId xmlns:a16="http://schemas.microsoft.com/office/drawing/2014/main" id="{9D4BDA6D-F215-47D5-B0CB-C4220B95E532}"/>
               </a:ext>
             </a:extLst>
           </p:cNvPr>
@@ -13347,10 +13197,10 @@
       </p:sp>
       <p:sp>
         <p:nvSpPr>
-          <p:cNvPr id="17" name="">
-            <a:extLst xmlns:a="http://schemas.openxmlformats.org/drawingml/2006/main">
-              <a:ext uri="{FF2B5EF4-FFF2-40B4-BE49-F238E27FC236}">
-                <a16:creationId xmlns:a16="http://schemas.microsoft.com/office/drawing/2014/main" id="{6122FB66-48D5-40B9-AB52-063505840896}"/>
+          <p:cNvPr id="16" name="">
+            <a:extLst xmlns:a="http://schemas.openxmlformats.org/drawingml/2006/main">
+              <a:ext uri="{FF2B5EF4-FFF2-40B4-BE49-F238E27FC236}">
+                <a16:creationId xmlns:a16="http://schemas.microsoft.com/office/drawing/2014/main" id="{8D63E77F-D8D8-4B63-9952-AFAB065D7974}"/>
               </a:ext>
             </a:extLst>
           </p:cNvPr>
@@ -13382,10 +13232,10 @@
       </p:sp>
       <p:sp>
         <p:nvSpPr>
-          <p:cNvPr id="18" name="">
-            <a:extLst xmlns:a="http://schemas.openxmlformats.org/drawingml/2006/main">
-              <a:ext uri="{FF2B5EF4-FFF2-40B4-BE49-F238E27FC236}">
-                <a16:creationId xmlns:a16="http://schemas.microsoft.com/office/drawing/2014/main" id="{79C5E0A4-226A-4670-8D08-0479D65F400B}"/>
+          <p:cNvPr id="17" name="">
+            <a:extLst xmlns:a="http://schemas.openxmlformats.org/drawingml/2006/main">
+              <a:ext uri="{FF2B5EF4-FFF2-40B4-BE49-F238E27FC236}">
+                <a16:creationId xmlns:a16="http://schemas.microsoft.com/office/drawing/2014/main" id="{0CA43462-2456-4686-BF22-DD55AF426EFE}"/>
               </a:ext>
             </a:extLst>
           </p:cNvPr>
@@ -13436,10 +13286,10 @@
       </p:sp>
       <p:sp>
         <p:nvSpPr>
-          <p:cNvPr id="19" name="">
-            <a:extLst xmlns:a="http://schemas.openxmlformats.org/drawingml/2006/main">
-              <a:ext uri="{FF2B5EF4-FFF2-40B4-BE49-F238E27FC236}">
-                <a16:creationId xmlns:a16="http://schemas.microsoft.com/office/drawing/2014/main" id="{B9AB77F9-83E3-438D-9989-A558FBBF7050}"/>
+          <p:cNvPr id="18" name="">
+            <a:extLst xmlns:a="http://schemas.openxmlformats.org/drawingml/2006/main">
+              <a:ext uri="{FF2B5EF4-FFF2-40B4-BE49-F238E27FC236}">
+                <a16:creationId xmlns:a16="http://schemas.microsoft.com/office/drawing/2014/main" id="{9CC20703-4D3C-462B-A1DB-BD3B6AE83D2A}"/>
               </a:ext>
             </a:extLst>
           </p:cNvPr>
@@ -13494,10 +13344,10 @@
       </p:sp>
       <p:sp>
         <p:nvSpPr>
-          <p:cNvPr id="20" name="">
-            <a:extLst xmlns:a="http://schemas.openxmlformats.org/drawingml/2006/main">
-              <a:ext uri="{FF2B5EF4-FFF2-40B4-BE49-F238E27FC236}">
-                <a16:creationId xmlns:a16="http://schemas.microsoft.com/office/drawing/2014/main" id="{A2E9AC2C-E595-4700-9669-BF6BFB71BBD8}"/>
+          <p:cNvPr id="19" name="">
+            <a:extLst xmlns:a="http://schemas.openxmlformats.org/drawingml/2006/main">
+              <a:ext uri="{FF2B5EF4-FFF2-40B4-BE49-F238E27FC236}">
+                <a16:creationId xmlns:a16="http://schemas.microsoft.com/office/drawing/2014/main" id="{44A4AC25-6F2A-4C03-8BA4-83710CC0B84C}"/>
               </a:ext>
             </a:extLst>
           </p:cNvPr>
@@ -13552,10 +13402,10 @@
       </p:sp>
       <p:sp>
         <p:nvSpPr>
-          <p:cNvPr id="21" name="">
-            <a:extLst xmlns:a="http://schemas.openxmlformats.org/drawingml/2006/main">
-              <a:ext uri="{FF2B5EF4-FFF2-40B4-BE49-F238E27FC236}">
-                <a16:creationId xmlns:a16="http://schemas.microsoft.com/office/drawing/2014/main" id="{9C06971A-9C36-4E2C-85C1-FEF0793CDAFA}"/>
+          <p:cNvPr id="20" name="">
+            <a:extLst xmlns:a="http://schemas.openxmlformats.org/drawingml/2006/main">
+              <a:ext uri="{FF2B5EF4-FFF2-40B4-BE49-F238E27FC236}">
+                <a16:creationId xmlns:a16="http://schemas.microsoft.com/office/drawing/2014/main" id="{FD59CC6E-DE7B-41C3-9B36-7A8C6EA22909}"/>
               </a:ext>
             </a:extLst>
           </p:cNvPr>
@@ -13587,10 +13437,10 @@
       </p:sp>
       <p:sp>
         <p:nvSpPr>
-          <p:cNvPr id="22" name="">
-            <a:extLst xmlns:a="http://schemas.openxmlformats.org/drawingml/2006/main">
-              <a:ext uri="{FF2B5EF4-FFF2-40B4-BE49-F238E27FC236}">
-                <a16:creationId xmlns:a16="http://schemas.microsoft.com/office/drawing/2014/main" id="{2D1DD782-F83A-48F3-B4D3-D7BA9FA0DA11}"/>
+          <p:cNvPr id="21" name="">
+            <a:extLst xmlns:a="http://schemas.openxmlformats.org/drawingml/2006/main">
+              <a:ext uri="{FF2B5EF4-FFF2-40B4-BE49-F238E27FC236}">
+                <a16:creationId xmlns:a16="http://schemas.microsoft.com/office/drawing/2014/main" id="{5B1AAA5E-F768-4512-AB59-A9D5302A6C41}"/>
               </a:ext>
             </a:extLst>
           </p:cNvPr>
@@ -13622,10 +13472,10 @@
       </p:sp>
       <p:sp>
         <p:nvSpPr>
-          <p:cNvPr id="23" name="">
-            <a:extLst xmlns:a="http://schemas.openxmlformats.org/drawingml/2006/main">
-              <a:ext uri="{FF2B5EF4-FFF2-40B4-BE49-F238E27FC236}">
-                <a16:creationId xmlns:a16="http://schemas.microsoft.com/office/drawing/2014/main" id="{3E736DD9-DC8E-4D3B-A4F0-650F790204AD}"/>
+          <p:cNvPr id="22" name="">
+            <a:extLst xmlns:a="http://schemas.openxmlformats.org/drawingml/2006/main">
+              <a:ext uri="{FF2B5EF4-FFF2-40B4-BE49-F238E27FC236}">
+                <a16:creationId xmlns:a16="http://schemas.microsoft.com/office/drawing/2014/main" id="{987198A5-425C-4A91-8988-514F5A672548}"/>
               </a:ext>
             </a:extLst>
           </p:cNvPr>
@@ -13676,10 +13526,10 @@
       </p:sp>
       <p:sp>
         <p:nvSpPr>
-          <p:cNvPr id="24" name="">
-            <a:extLst xmlns:a="http://schemas.openxmlformats.org/drawingml/2006/main">
-              <a:ext uri="{FF2B5EF4-FFF2-40B4-BE49-F238E27FC236}">
-                <a16:creationId xmlns:a16="http://schemas.microsoft.com/office/drawing/2014/main" id="{BF69235A-71DF-4CC3-9300-79352369CFAF}"/>
+          <p:cNvPr id="23" name="">
+            <a:extLst xmlns:a="http://schemas.openxmlformats.org/drawingml/2006/main">
+              <a:ext uri="{FF2B5EF4-FFF2-40B4-BE49-F238E27FC236}">
+                <a16:creationId xmlns:a16="http://schemas.microsoft.com/office/drawing/2014/main" id="{CB5C753E-5DF4-4758-8C97-84B074E3F399}"/>
               </a:ext>
             </a:extLst>
           </p:cNvPr>
@@ -13734,10 +13584,10 @@
       </p:sp>
       <p:sp>
         <p:nvSpPr>
-          <p:cNvPr id="25" name="">
-            <a:extLst xmlns:a="http://schemas.openxmlformats.org/drawingml/2006/main">
-              <a:ext uri="{FF2B5EF4-FFF2-40B4-BE49-F238E27FC236}">
-                <a16:creationId xmlns:a16="http://schemas.microsoft.com/office/drawing/2014/main" id="{A784FD4F-AD19-436A-AD79-E44FADC50561}"/>
+          <p:cNvPr id="24" name="">
+            <a:extLst xmlns:a="http://schemas.openxmlformats.org/drawingml/2006/main">
+              <a:ext uri="{FF2B5EF4-FFF2-40B4-BE49-F238E27FC236}">
+                <a16:creationId xmlns:a16="http://schemas.microsoft.com/office/drawing/2014/main" id="{7AD74671-F2AE-4DF6-951E-8206BF631085}"/>
               </a:ext>
             </a:extLst>
           </p:cNvPr>
@@ -13809,10 +13659,10 @@
       </p:sp>
       <p:sp>
         <p:nvSpPr>
-          <p:cNvPr id="26" name="">
-            <a:extLst xmlns:a="http://schemas.openxmlformats.org/drawingml/2006/main">
-              <a:ext uri="{FF2B5EF4-FFF2-40B4-BE49-F238E27FC236}">
-                <a16:creationId xmlns:a16="http://schemas.microsoft.com/office/drawing/2014/main" id="{1F688F1E-6BC1-4D47-BD9D-FE1B32735F25}"/>
+          <p:cNvPr id="25" name="">
+            <a:extLst xmlns:a="http://schemas.openxmlformats.org/drawingml/2006/main">
+              <a:ext uri="{FF2B5EF4-FFF2-40B4-BE49-F238E27FC236}">
+                <a16:creationId xmlns:a16="http://schemas.microsoft.com/office/drawing/2014/main" id="{3B3852BD-A475-47E9-94CC-5C159AA92979}"/>
               </a:ext>
             </a:extLst>
           </p:cNvPr>
@@ -13844,10 +13694,10 @@
       </p:sp>
       <p:sp>
         <p:nvSpPr>
-          <p:cNvPr id="27" name="">
-            <a:extLst xmlns:a="http://schemas.openxmlformats.org/drawingml/2006/main">
-              <a:ext uri="{FF2B5EF4-FFF2-40B4-BE49-F238E27FC236}">
-                <a16:creationId xmlns:a16="http://schemas.microsoft.com/office/drawing/2014/main" id="{0C8061F6-11D6-4071-9D5F-6BBCB507C9EB}"/>
+          <p:cNvPr id="26" name="">
+            <a:extLst xmlns:a="http://schemas.openxmlformats.org/drawingml/2006/main">
+              <a:ext uri="{FF2B5EF4-FFF2-40B4-BE49-F238E27FC236}">
+                <a16:creationId xmlns:a16="http://schemas.microsoft.com/office/drawing/2014/main" id="{5316336E-3FE7-4E3E-AA75-0D5CDCDEF36C}"/>
               </a:ext>
             </a:extLst>
           </p:cNvPr>
@@ -13879,10 +13729,10 @@
       </p:sp>
       <p:sp>
         <p:nvSpPr>
-          <p:cNvPr id="28" name="">
-            <a:extLst xmlns:a="http://schemas.openxmlformats.org/drawingml/2006/main">
-              <a:ext uri="{FF2B5EF4-FFF2-40B4-BE49-F238E27FC236}">
-                <a16:creationId xmlns:a16="http://schemas.microsoft.com/office/drawing/2014/main" id="{64F7B82C-D6D2-4D9C-ACAF-48C7B76F8A97}"/>
+          <p:cNvPr id="27" name="">
+            <a:extLst xmlns:a="http://schemas.openxmlformats.org/drawingml/2006/main">
+              <a:ext uri="{FF2B5EF4-FFF2-40B4-BE49-F238E27FC236}">
+                <a16:creationId xmlns:a16="http://schemas.microsoft.com/office/drawing/2014/main" id="{6A25A10E-55B5-448E-B300-312502B7F2DF}"/>
               </a:ext>
             </a:extLst>
           </p:cNvPr>
@@ -13933,10 +13783,10 @@
       </p:sp>
       <p:sp>
         <p:nvSpPr>
-          <p:cNvPr id="29" name="">
-            <a:extLst xmlns:a="http://schemas.openxmlformats.org/drawingml/2006/main">
-              <a:ext uri="{FF2B5EF4-FFF2-40B4-BE49-F238E27FC236}">
-                <a16:creationId xmlns:a16="http://schemas.microsoft.com/office/drawing/2014/main" id="{5B603C58-0C03-4965-9D2D-4B56DA422DC7}"/>
+          <p:cNvPr id="28" name="">
+            <a:extLst xmlns:a="http://schemas.openxmlformats.org/drawingml/2006/main">
+              <a:ext uri="{FF2B5EF4-FFF2-40B4-BE49-F238E27FC236}">
+                <a16:creationId xmlns:a16="http://schemas.microsoft.com/office/drawing/2014/main" id="{85D97C19-65E2-4316-B65D-91472804841F}"/>
               </a:ext>
             </a:extLst>
           </p:cNvPr>
@@ -13991,10 +13841,10 @@
       </p:sp>
       <p:sp>
         <p:nvSpPr>
-          <p:cNvPr id="30" name="">
-            <a:extLst xmlns:a="http://schemas.openxmlformats.org/drawingml/2006/main">
-              <a:ext uri="{FF2B5EF4-FFF2-40B4-BE49-F238E27FC236}">
-                <a16:creationId xmlns:a16="http://schemas.microsoft.com/office/drawing/2014/main" id="{1AA15915-B048-48E2-92D4-37C7CDD32FAF}"/>
+          <p:cNvPr id="29" name="">
+            <a:extLst xmlns:a="http://schemas.openxmlformats.org/drawingml/2006/main">
+              <a:ext uri="{FF2B5EF4-FFF2-40B4-BE49-F238E27FC236}">
+                <a16:creationId xmlns:a16="http://schemas.microsoft.com/office/drawing/2014/main" id="{255B7194-B5F6-4B84-85F0-30BCFA9D7D19}"/>
               </a:ext>
             </a:extLst>
           </p:cNvPr>
@@ -14066,10 +13916,10 @@
       </p:sp>
       <p:sp>
         <p:nvSpPr>
-          <p:cNvPr id="31" name="">
-            <a:extLst xmlns:a="http://schemas.openxmlformats.org/drawingml/2006/main">
-              <a:ext uri="{FF2B5EF4-FFF2-40B4-BE49-F238E27FC236}">
-                <a16:creationId xmlns:a16="http://schemas.microsoft.com/office/drawing/2014/main" id="{CC36B0F8-849F-4018-9B6D-45E727F966C4}"/>
+          <p:cNvPr id="30" name="">
+            <a:extLst xmlns:a="http://schemas.openxmlformats.org/drawingml/2006/main">
+              <a:ext uri="{FF2B5EF4-FFF2-40B4-BE49-F238E27FC236}">
+                <a16:creationId xmlns:a16="http://schemas.microsoft.com/office/drawing/2014/main" id="{F215D4CA-0FAA-4549-BBB7-2732D1CCC048}"/>
               </a:ext>
             </a:extLst>
           </p:cNvPr>
@@ -14101,10 +13951,10 @@
       </p:sp>
       <p:sp>
         <p:nvSpPr>
-          <p:cNvPr id="32" name="">
-            <a:extLst xmlns:a="http://schemas.openxmlformats.org/drawingml/2006/main">
-              <a:ext uri="{FF2B5EF4-FFF2-40B4-BE49-F238E27FC236}">
-                <a16:creationId xmlns:a16="http://schemas.microsoft.com/office/drawing/2014/main" id="{52B6C334-F0B8-48F1-83FD-FB161B4E8222}"/>
+          <p:cNvPr id="31" name="">
+            <a:extLst xmlns:a="http://schemas.openxmlformats.org/drawingml/2006/main">
+              <a:ext uri="{FF2B5EF4-FFF2-40B4-BE49-F238E27FC236}">
+                <a16:creationId xmlns:a16="http://schemas.microsoft.com/office/drawing/2014/main" id="{A6D2620E-2AE0-44D9-A4B7-09B5BAEF1368}"/>
               </a:ext>
             </a:extLst>
           </p:cNvPr>
@@ -14136,10 +13986,10 @@
       </p:sp>
       <p:sp>
         <p:nvSpPr>
-          <p:cNvPr id="33" name="">
-            <a:extLst xmlns:a="http://schemas.openxmlformats.org/drawingml/2006/main">
-              <a:ext uri="{FF2B5EF4-FFF2-40B4-BE49-F238E27FC236}">
-                <a16:creationId xmlns:a16="http://schemas.microsoft.com/office/drawing/2014/main" id="{91887849-63AA-4DA0-A48C-F6663173CB18}"/>
+          <p:cNvPr id="32" name="">
+            <a:extLst xmlns:a="http://schemas.openxmlformats.org/drawingml/2006/main">
+              <a:ext uri="{FF2B5EF4-FFF2-40B4-BE49-F238E27FC236}">
+                <a16:creationId xmlns:a16="http://schemas.microsoft.com/office/drawing/2014/main" id="{5A59E63E-11C6-406D-8C33-7E46EC258C74}"/>
               </a:ext>
             </a:extLst>
           </p:cNvPr>
@@ -14190,10 +14040,10 @@
       </p:sp>
       <p:sp>
         <p:nvSpPr>
-          <p:cNvPr id="34" name="">
-            <a:extLst xmlns:a="http://schemas.openxmlformats.org/drawingml/2006/main">
-              <a:ext uri="{FF2B5EF4-FFF2-40B4-BE49-F238E27FC236}">
-                <a16:creationId xmlns:a16="http://schemas.microsoft.com/office/drawing/2014/main" id="{126DF275-D2D4-481D-BF20-43657DEE1FC1}"/>
+          <p:cNvPr id="33" name="">
+            <a:extLst xmlns:a="http://schemas.openxmlformats.org/drawingml/2006/main">
+              <a:ext uri="{FF2B5EF4-FFF2-40B4-BE49-F238E27FC236}">
+                <a16:creationId xmlns:a16="http://schemas.microsoft.com/office/drawing/2014/main" id="{FF343204-DEE9-4B85-87CD-82FCE967C810}"/>
               </a:ext>
             </a:extLst>
           </p:cNvPr>
@@ -14248,10 +14098,10 @@
       </p:sp>
       <p:sp>
         <p:nvSpPr>
-          <p:cNvPr id="35" name="">
-            <a:extLst xmlns:a="http://schemas.openxmlformats.org/drawingml/2006/main">
-              <a:ext uri="{FF2B5EF4-FFF2-40B4-BE49-F238E27FC236}">
-                <a16:creationId xmlns:a16="http://schemas.microsoft.com/office/drawing/2014/main" id="{7890FAA9-7FD2-4462-9100-38F8E3FD9CB1}"/>
+          <p:cNvPr id="34" name="">
+            <a:extLst xmlns:a="http://schemas.openxmlformats.org/drawingml/2006/main">
+              <a:ext uri="{FF2B5EF4-FFF2-40B4-BE49-F238E27FC236}">
+                <a16:creationId xmlns:a16="http://schemas.microsoft.com/office/drawing/2014/main" id="{9D5C61CF-9B8D-4DCB-99BA-BB807455858D}"/>
               </a:ext>
             </a:extLst>
           </p:cNvPr>
@@ -14323,10 +14173,10 @@
       </p:sp>
       <p:sp>
         <p:nvSpPr>
-          <p:cNvPr id="36" name="">
-            <a:extLst xmlns:a="http://schemas.openxmlformats.org/drawingml/2006/main">
-              <a:ext uri="{FF2B5EF4-FFF2-40B4-BE49-F238E27FC236}">
-                <a16:creationId xmlns:a16="http://schemas.microsoft.com/office/drawing/2014/main" id="{3B742E03-3851-427C-8A8C-336C5051C5D3}"/>
+          <p:cNvPr id="35" name="">
+            <a:extLst xmlns:a="http://schemas.openxmlformats.org/drawingml/2006/main">
+              <a:ext uri="{FF2B5EF4-FFF2-40B4-BE49-F238E27FC236}">
+                <a16:creationId xmlns:a16="http://schemas.microsoft.com/office/drawing/2014/main" id="{4C3EDB1A-91FF-4EF1-A7EF-210AC888024E}"/>
               </a:ext>
             </a:extLst>
           </p:cNvPr>
@@ -14358,10 +14208,10 @@
       </p:sp>
       <p:sp>
         <p:nvSpPr>
-          <p:cNvPr id="37" name="">
-            <a:extLst xmlns:a="http://schemas.openxmlformats.org/drawingml/2006/main">
-              <a:ext uri="{FF2B5EF4-FFF2-40B4-BE49-F238E27FC236}">
-                <a16:creationId xmlns:a16="http://schemas.microsoft.com/office/drawing/2014/main" id="{0CA364B5-7705-4768-8858-20F5BE206188}"/>
+          <p:cNvPr id="36" name="">
+            <a:extLst xmlns:a="http://schemas.openxmlformats.org/drawingml/2006/main">
+              <a:ext uri="{FF2B5EF4-FFF2-40B4-BE49-F238E27FC236}">
+                <a16:creationId xmlns:a16="http://schemas.microsoft.com/office/drawing/2014/main" id="{1E84735F-D5B5-4D6D-9305-0BE5ABE27B08}"/>
               </a:ext>
             </a:extLst>
           </p:cNvPr>
@@ -14393,10 +14243,10 @@
       </p:sp>
       <p:sp>
         <p:nvSpPr>
-          <p:cNvPr id="38" name="">
-            <a:extLst xmlns:a="http://schemas.openxmlformats.org/drawingml/2006/main">
-              <a:ext uri="{FF2B5EF4-FFF2-40B4-BE49-F238E27FC236}">
-                <a16:creationId xmlns:a16="http://schemas.microsoft.com/office/drawing/2014/main" id="{32C64406-EA35-4BB2-8434-C6E4131C98D7}"/>
+          <p:cNvPr id="37" name="">
+            <a:extLst xmlns:a="http://schemas.openxmlformats.org/drawingml/2006/main">
+              <a:ext uri="{FF2B5EF4-FFF2-40B4-BE49-F238E27FC236}">
+                <a16:creationId xmlns:a16="http://schemas.microsoft.com/office/drawing/2014/main" id="{AFFE359D-6B09-4B42-A1E4-8409A741692C}"/>
               </a:ext>
             </a:extLst>
           </p:cNvPr>
@@ -14447,10 +14297,10 @@
       </p:sp>
       <p:sp>
         <p:nvSpPr>
-          <p:cNvPr id="39" name="">
-            <a:extLst xmlns:a="http://schemas.openxmlformats.org/drawingml/2006/main">
-              <a:ext uri="{FF2B5EF4-FFF2-40B4-BE49-F238E27FC236}">
-                <a16:creationId xmlns:a16="http://schemas.microsoft.com/office/drawing/2014/main" id="{2DB02456-16C5-4851-B039-B5A918EDC518}"/>
+          <p:cNvPr id="38" name="">
+            <a:extLst xmlns:a="http://schemas.openxmlformats.org/drawingml/2006/main">
+              <a:ext uri="{FF2B5EF4-FFF2-40B4-BE49-F238E27FC236}">
+                <a16:creationId xmlns:a16="http://schemas.microsoft.com/office/drawing/2014/main" id="{1C44B59D-A3B8-469F-9280-D85A5066502E}"/>
               </a:ext>
             </a:extLst>
           </p:cNvPr>
@@ -14505,10 +14355,10 @@
       </p:sp>
       <p:sp>
         <p:nvSpPr>
-          <p:cNvPr id="40" name="">
-            <a:extLst xmlns:a="http://schemas.openxmlformats.org/drawingml/2006/main">
-              <a:ext uri="{FF2B5EF4-FFF2-40B4-BE49-F238E27FC236}">
-                <a16:creationId xmlns:a16="http://schemas.microsoft.com/office/drawing/2014/main" id="{E004849A-6AD4-4A53-B46C-8FCBEDA344AE}"/>
+          <p:cNvPr id="39" name="">
+            <a:extLst xmlns:a="http://schemas.openxmlformats.org/drawingml/2006/main">
+              <a:ext uri="{FF2B5EF4-FFF2-40B4-BE49-F238E27FC236}">
+                <a16:creationId xmlns:a16="http://schemas.microsoft.com/office/drawing/2014/main" id="{9ABEE48F-C97B-431F-938B-88E30C0CDAD5}"/>
               </a:ext>
             </a:extLst>
           </p:cNvPr>
@@ -14563,10 +14413,10 @@
       </p:sp>
       <p:sp>
         <p:nvSpPr>
-          <p:cNvPr id="41" name="">
-            <a:extLst xmlns:a="http://schemas.openxmlformats.org/drawingml/2006/main">
-              <a:ext uri="{FF2B5EF4-FFF2-40B4-BE49-F238E27FC236}">
-                <a16:creationId xmlns:a16="http://schemas.microsoft.com/office/drawing/2014/main" id="{B75EA2E6-668B-421D-9913-A9551503D35A}"/>
+          <p:cNvPr id="40" name="">
+            <a:extLst xmlns:a="http://schemas.openxmlformats.org/drawingml/2006/main">
+              <a:ext uri="{FF2B5EF4-FFF2-40B4-BE49-F238E27FC236}">
+                <a16:creationId xmlns:a16="http://schemas.microsoft.com/office/drawing/2014/main" id="{93B1042F-5791-4E58-9CCD-BA587AF8F67D}"/>
               </a:ext>
             </a:extLst>
           </p:cNvPr>
@@ -14598,10 +14448,10 @@
       </p:sp>
       <p:sp>
         <p:nvSpPr>
-          <p:cNvPr id="42" name="">
-            <a:extLst xmlns:a="http://schemas.openxmlformats.org/drawingml/2006/main">
-              <a:ext uri="{FF2B5EF4-FFF2-40B4-BE49-F238E27FC236}">
-                <a16:creationId xmlns:a16="http://schemas.microsoft.com/office/drawing/2014/main" id="{7DCEC619-7758-4FAC-AB6C-6D5B51628006}"/>
+          <p:cNvPr id="41" name="">
+            <a:extLst xmlns:a="http://schemas.openxmlformats.org/drawingml/2006/main">
+              <a:ext uri="{FF2B5EF4-FFF2-40B4-BE49-F238E27FC236}">
+                <a16:creationId xmlns:a16="http://schemas.microsoft.com/office/drawing/2014/main" id="{7B73A1E9-9B30-4F6B-B495-03C7FE8E71C3}"/>
               </a:ext>
             </a:extLst>
           </p:cNvPr>
@@ -14633,10 +14483,10 @@
       </p:sp>
       <p:sp>
         <p:nvSpPr>
-          <p:cNvPr id="43" name="">
-            <a:extLst xmlns:a="http://schemas.openxmlformats.org/drawingml/2006/main">
-              <a:ext uri="{FF2B5EF4-FFF2-40B4-BE49-F238E27FC236}">
-                <a16:creationId xmlns:a16="http://schemas.microsoft.com/office/drawing/2014/main" id="{F2E0B718-2EE8-46B7-A47A-8827EC3114D5}"/>
+          <p:cNvPr id="42" name="">
+            <a:extLst xmlns:a="http://schemas.openxmlformats.org/drawingml/2006/main">
+              <a:ext uri="{FF2B5EF4-FFF2-40B4-BE49-F238E27FC236}">
+                <a16:creationId xmlns:a16="http://schemas.microsoft.com/office/drawing/2014/main" id="{D4D22C7A-8062-46D7-9D7B-D3EC6CEA49F0}"/>
               </a:ext>
             </a:extLst>
           </p:cNvPr>
@@ -14687,10 +14537,10 @@
       </p:sp>
       <p:sp>
         <p:nvSpPr>
-          <p:cNvPr id="44" name="">
-            <a:extLst xmlns:a="http://schemas.openxmlformats.org/drawingml/2006/main">
-              <a:ext uri="{FF2B5EF4-FFF2-40B4-BE49-F238E27FC236}">
-                <a16:creationId xmlns:a16="http://schemas.microsoft.com/office/drawing/2014/main" id="{29D6D26E-E0D9-483E-9184-CE94EF498588}"/>
+          <p:cNvPr id="43" name="">
+            <a:extLst xmlns:a="http://schemas.openxmlformats.org/drawingml/2006/main">
+              <a:ext uri="{FF2B5EF4-FFF2-40B4-BE49-F238E27FC236}">
+                <a16:creationId xmlns:a16="http://schemas.microsoft.com/office/drawing/2014/main" id="{76B9E1C8-326B-44F1-9AE3-DD2C41EAD3FD}"/>
               </a:ext>
             </a:extLst>
           </p:cNvPr>
@@ -14745,10 +14595,10 @@
       </p:sp>
       <p:sp>
         <p:nvSpPr>
-          <p:cNvPr id="45" name="">
-            <a:extLst xmlns:a="http://schemas.openxmlformats.org/drawingml/2006/main">
-              <a:ext uri="{FF2B5EF4-FFF2-40B4-BE49-F238E27FC236}">
-                <a16:creationId xmlns:a16="http://schemas.microsoft.com/office/drawing/2014/main" id="{018582C1-0C78-4369-99AD-92144B125CBE}"/>
+          <p:cNvPr id="44" name="">
+            <a:extLst xmlns:a="http://schemas.openxmlformats.org/drawingml/2006/main">
+              <a:ext uri="{FF2B5EF4-FFF2-40B4-BE49-F238E27FC236}">
+                <a16:creationId xmlns:a16="http://schemas.microsoft.com/office/drawing/2014/main" id="{D42D5ED3-5A40-440D-9BA9-BB6BE0B014DA}"/>
               </a:ext>
             </a:extLst>
           </p:cNvPr>
@@ -14820,10 +14670,10 @@
       </p:sp>
       <p:sp>
         <p:nvSpPr>
-          <p:cNvPr id="46" name="">
-            <a:extLst xmlns:a="http://schemas.openxmlformats.org/drawingml/2006/main">
-              <a:ext uri="{FF2B5EF4-FFF2-40B4-BE49-F238E27FC236}">
-                <a16:creationId xmlns:a16="http://schemas.microsoft.com/office/drawing/2014/main" id="{F664B76E-B2E6-4450-B188-B1D01B842289}"/>
+          <p:cNvPr id="45" name="">
+            <a:extLst xmlns:a="http://schemas.openxmlformats.org/drawingml/2006/main">
+              <a:ext uri="{FF2B5EF4-FFF2-40B4-BE49-F238E27FC236}">
+                <a16:creationId xmlns:a16="http://schemas.microsoft.com/office/drawing/2014/main" id="{C5D69791-E2DB-4347-88E1-2F1544A9E4EF}"/>
               </a:ext>
             </a:extLst>
           </p:cNvPr>
@@ -14855,10 +14705,10 @@
       </p:sp>
       <p:sp>
         <p:nvSpPr>
-          <p:cNvPr id="47" name="">
-            <a:extLst xmlns:a="http://schemas.openxmlformats.org/drawingml/2006/main">
-              <a:ext uri="{FF2B5EF4-FFF2-40B4-BE49-F238E27FC236}">
-                <a16:creationId xmlns:a16="http://schemas.microsoft.com/office/drawing/2014/main" id="{99E5139C-CE5A-4C98-B18D-232FAB59F781}"/>
+          <p:cNvPr id="46" name="">
+            <a:extLst xmlns:a="http://schemas.openxmlformats.org/drawingml/2006/main">
+              <a:ext uri="{FF2B5EF4-FFF2-40B4-BE49-F238E27FC236}">
+                <a16:creationId xmlns:a16="http://schemas.microsoft.com/office/drawing/2014/main" id="{DD094A1C-4D7E-4A4E-873C-54F1033E1174}"/>
               </a:ext>
             </a:extLst>
           </p:cNvPr>
@@ -14890,10 +14740,10 @@
       </p:sp>
       <p:sp>
         <p:nvSpPr>
-          <p:cNvPr id="48" name="">
-            <a:extLst xmlns:a="http://schemas.openxmlformats.org/drawingml/2006/main">
-              <a:ext uri="{FF2B5EF4-FFF2-40B4-BE49-F238E27FC236}">
-                <a16:creationId xmlns:a16="http://schemas.microsoft.com/office/drawing/2014/main" id="{B7C9A656-35E7-4EB3-BD06-8571E5F7FEC8}"/>
+          <p:cNvPr id="47" name="">
+            <a:extLst xmlns:a="http://schemas.openxmlformats.org/drawingml/2006/main">
+              <a:ext uri="{FF2B5EF4-FFF2-40B4-BE49-F238E27FC236}">
+                <a16:creationId xmlns:a16="http://schemas.microsoft.com/office/drawing/2014/main" id="{C1806124-84FA-4FAA-BF38-C4DEF7D95BE1}"/>
               </a:ext>
             </a:extLst>
           </p:cNvPr>
@@ -14925,10 +14775,10 @@
       </p:sp>
       <p:sp>
         <p:nvSpPr>
-          <p:cNvPr id="49" name="">
-            <a:extLst xmlns:a="http://schemas.openxmlformats.org/drawingml/2006/main">
-              <a:ext uri="{FF2B5EF4-FFF2-40B4-BE49-F238E27FC236}">
-                <a16:creationId xmlns:a16="http://schemas.microsoft.com/office/drawing/2014/main" id="{69486279-B779-4F1C-8731-D1A3435E9A12}"/>
+          <p:cNvPr id="48" name="">
+            <a:extLst xmlns:a="http://schemas.openxmlformats.org/drawingml/2006/main">
+              <a:ext uri="{FF2B5EF4-FFF2-40B4-BE49-F238E27FC236}">
+                <a16:creationId xmlns:a16="http://schemas.microsoft.com/office/drawing/2014/main" id="{00C270EA-1AE6-45F8-9CC3-D0C733BFB283}"/>
               </a:ext>
             </a:extLst>
           </p:cNvPr>
@@ -14960,10 +14810,10 @@
       </p:sp>
       <p:sp>
         <p:nvSpPr>
-          <p:cNvPr id="50" name="">
-            <a:extLst xmlns:a="http://schemas.openxmlformats.org/drawingml/2006/main">
-              <a:ext uri="{FF2B5EF4-FFF2-40B4-BE49-F238E27FC236}">
-                <a16:creationId xmlns:a16="http://schemas.microsoft.com/office/drawing/2014/main" id="{CDE24545-0972-46F0-A477-C208C7C97C81}"/>
+          <p:cNvPr id="49" name="">
+            <a:extLst xmlns:a="http://schemas.openxmlformats.org/drawingml/2006/main">
+              <a:ext uri="{FF2B5EF4-FFF2-40B4-BE49-F238E27FC236}">
+                <a16:creationId xmlns:a16="http://schemas.microsoft.com/office/drawing/2014/main" id="{4D47CBDE-9D7F-4E74-AFA2-EAB286EA3398}"/>
               </a:ext>
             </a:extLst>
           </p:cNvPr>
@@ -14995,10 +14845,10 @@
       </p:sp>
       <p:sp>
         <p:nvSpPr>
-          <p:cNvPr id="51" name="">
-            <a:extLst xmlns:a="http://schemas.openxmlformats.org/drawingml/2006/main">
-              <a:ext uri="{FF2B5EF4-FFF2-40B4-BE49-F238E27FC236}">
-                <a16:creationId xmlns:a16="http://schemas.microsoft.com/office/drawing/2014/main" id="{0B2DB7CE-44ED-4EFF-962B-F517355A6F2A}"/>
+          <p:cNvPr id="50" name="">
+            <a:extLst xmlns:a="http://schemas.openxmlformats.org/drawingml/2006/main">
+              <a:ext uri="{FF2B5EF4-FFF2-40B4-BE49-F238E27FC236}">
+                <a16:creationId xmlns:a16="http://schemas.microsoft.com/office/drawing/2014/main" id="{ADA71BE2-E751-4770-ABAD-606AB5EA536C}"/>
               </a:ext>
             </a:extLst>
           </p:cNvPr>
@@ -15030,10 +14880,10 @@
       </p:sp>
       <p:sp>
         <p:nvSpPr>
-          <p:cNvPr id="52" name="">
-            <a:extLst xmlns:a="http://schemas.openxmlformats.org/drawingml/2006/main">
-              <a:ext uri="{FF2B5EF4-FFF2-40B4-BE49-F238E27FC236}">
-                <a16:creationId xmlns:a16="http://schemas.microsoft.com/office/drawing/2014/main" id="{D682F3DB-644C-4432-9C6F-D04E8E005BD2}"/>
+          <p:cNvPr id="51" name="">
+            <a:extLst xmlns:a="http://schemas.openxmlformats.org/drawingml/2006/main">
+              <a:ext uri="{FF2B5EF4-FFF2-40B4-BE49-F238E27FC236}">
+                <a16:creationId xmlns:a16="http://schemas.microsoft.com/office/drawing/2014/main" id="{6D0843DA-714B-45C0-A2E2-FE02F9F831F4}"/>
               </a:ext>
             </a:extLst>
           </p:cNvPr>
@@ -15088,10 +14938,10 @@
       </p:sp>
       <p:sp>
         <p:nvSpPr>
-          <p:cNvPr id="53" name="">
-            <a:extLst xmlns:a="http://schemas.openxmlformats.org/drawingml/2006/main">
-              <a:ext uri="{FF2B5EF4-FFF2-40B4-BE49-F238E27FC236}">
-                <a16:creationId xmlns:a16="http://schemas.microsoft.com/office/drawing/2014/main" id="{1F099B62-C5C1-4E6F-AC55-0D70557A5942}"/>
+          <p:cNvPr id="52" name="">
+            <a:extLst xmlns:a="http://schemas.openxmlformats.org/drawingml/2006/main">
+              <a:ext uri="{FF2B5EF4-FFF2-40B4-BE49-F238E27FC236}">
+                <a16:creationId xmlns:a16="http://schemas.microsoft.com/office/drawing/2014/main" id="{B81E7447-96BC-47A6-83EA-C82C2ACC0E0B}"/>
               </a:ext>
             </a:extLst>
           </p:cNvPr>
@@ -15123,10 +14973,10 @@
       </p:sp>
       <p:sp>
         <p:nvSpPr>
-          <p:cNvPr id="54" name="">
-            <a:extLst xmlns:a="http://schemas.openxmlformats.org/drawingml/2006/main">
-              <a:ext uri="{FF2B5EF4-FFF2-40B4-BE49-F238E27FC236}">
-                <a16:creationId xmlns:a16="http://schemas.microsoft.com/office/drawing/2014/main" id="{4E308F91-27F3-4C46-B522-0129E8EFDC90}"/>
+          <p:cNvPr id="53" name="">
+            <a:extLst xmlns:a="http://schemas.openxmlformats.org/drawingml/2006/main">
+              <a:ext uri="{FF2B5EF4-FFF2-40B4-BE49-F238E27FC236}">
+                <a16:creationId xmlns:a16="http://schemas.microsoft.com/office/drawing/2014/main" id="{88FE9222-805B-4A03-AA61-545EFE7DB0AB}"/>
               </a:ext>
             </a:extLst>
           </p:cNvPr>
@@ -15181,10 +15031,10 @@
       </p:sp>
       <p:sp>
         <p:nvSpPr>
-          <p:cNvPr id="55" name="">
-            <a:extLst xmlns:a="http://schemas.openxmlformats.org/drawingml/2006/main">
-              <a:ext uri="{FF2B5EF4-FFF2-40B4-BE49-F238E27FC236}">
-                <a16:creationId xmlns:a16="http://schemas.microsoft.com/office/drawing/2014/main" id="{F74730F4-F747-4314-874C-7D9C89A173C8}"/>
+          <p:cNvPr id="54" name="">
+            <a:extLst xmlns:a="http://schemas.openxmlformats.org/drawingml/2006/main">
+              <a:ext uri="{FF2B5EF4-FFF2-40B4-BE49-F238E27FC236}">
+                <a16:creationId xmlns:a16="http://schemas.microsoft.com/office/drawing/2014/main" id="{9C722E66-7656-4947-AA54-35E5EDCF7C13}"/>
               </a:ext>
             </a:extLst>
           </p:cNvPr>
@@ -15218,10 +15068,10 @@
       </p:sp>
       <p:sp>
         <p:nvSpPr>
-          <p:cNvPr id="56" name="">
-            <a:extLst xmlns:a="http://schemas.openxmlformats.org/drawingml/2006/main">
-              <a:ext uri="{FF2B5EF4-FFF2-40B4-BE49-F238E27FC236}">
-                <a16:creationId xmlns:a16="http://schemas.microsoft.com/office/drawing/2014/main" id="{C287B9E1-9753-4912-AE3B-242985B2D81E}"/>
+          <p:cNvPr id="55" name="">
+            <a:extLst xmlns:a="http://schemas.openxmlformats.org/drawingml/2006/main">
+              <a:ext uri="{FF2B5EF4-FFF2-40B4-BE49-F238E27FC236}">
+                <a16:creationId xmlns:a16="http://schemas.microsoft.com/office/drawing/2014/main" id="{02CE4CC1-36DB-4498-9134-A95F876519BF}"/>
               </a:ext>
             </a:extLst>
           </p:cNvPr>
@@ -15253,10 +15103,10 @@
       </p:sp>
       <p:sp>
         <p:nvSpPr>
-          <p:cNvPr id="57" name="">
-            <a:extLst xmlns:a="http://schemas.openxmlformats.org/drawingml/2006/main">
-              <a:ext uri="{FF2B5EF4-FFF2-40B4-BE49-F238E27FC236}">
-                <a16:creationId xmlns:a16="http://schemas.microsoft.com/office/drawing/2014/main" id="{8D153683-9705-4ADD-BEC6-A71649399971}"/>
+          <p:cNvPr id="56" name="">
+            <a:extLst xmlns:a="http://schemas.openxmlformats.org/drawingml/2006/main">
+              <a:ext uri="{FF2B5EF4-FFF2-40B4-BE49-F238E27FC236}">
+                <a16:creationId xmlns:a16="http://schemas.microsoft.com/office/drawing/2014/main" id="{7D129B83-7FC5-412F-A1DD-91DAE9154F95}"/>
               </a:ext>
             </a:extLst>
           </p:cNvPr>
@@ -15311,10 +15161,10 @@
       </p:sp>
       <p:sp>
         <p:nvSpPr>
-          <p:cNvPr id="58" name="">
-            <a:extLst xmlns:a="http://schemas.openxmlformats.org/drawingml/2006/main">
-              <a:ext uri="{FF2B5EF4-FFF2-40B4-BE49-F238E27FC236}">
-                <a16:creationId xmlns:a16="http://schemas.microsoft.com/office/drawing/2014/main" id="{C1FDF736-8F01-4816-91AE-3561F6511A00}"/>
+          <p:cNvPr id="57" name="">
+            <a:extLst xmlns:a="http://schemas.openxmlformats.org/drawingml/2006/main">
+              <a:ext uri="{FF2B5EF4-FFF2-40B4-BE49-F238E27FC236}">
+                <a16:creationId xmlns:a16="http://schemas.microsoft.com/office/drawing/2014/main" id="{2E6B56B7-B4F8-4B4B-BC67-079C43900144}"/>
               </a:ext>
             </a:extLst>
           </p:cNvPr>
@@ -15370,7 +15220,7 @@
     </p:spTree>
     <p:extLst>
       <p:ext uri="{BB962C8B-B14F-4D97-AF65-F5344CB8AC3E}">
-        <p14:creationId xmlns:p14="http://schemas.microsoft.com/office/powerpoint/2010/main" val="282822978"/>
+        <p14:creationId xmlns:p14="http://schemas.microsoft.com/office/powerpoint/2010/main" val="378373916"/>
       </p:ext>
     </p:extLst>
   </p:cSld>
@@ -15401,7 +15251,7 @@
           <p:cNvPr id="1" name="Slide Number Placeholder 5">
             <a:extLst xmlns:a="http://schemas.openxmlformats.org/drawingml/2006/main">
               <a:ext uri="{FF2B5EF4-FFF2-40B4-BE49-F238E27FC236}">
-                <a16:creationId xmlns:a16="http://schemas.microsoft.com/office/drawing/2014/main" id="{38BDF79F-9F16-4FEE-B72E-1F506FE9EBEC}"/>
+                <a16:creationId xmlns:a16="http://schemas.microsoft.com/office/drawing/2014/main" id="{039602EF-25C6-4B7F-BD52-B0182DC44CC0}"/>
               </a:ext>
             </a:extLst>
           </p:cNvPr>
@@ -15437,7 +15287,7 @@
           <p:nvPr/>
         </p:nvPicPr>
         <p:blipFill>
-          <a:blip xmlns:r="http://schemas.openxmlformats.org/officeDocument/2006/relationships" xmlns:a="http://schemas.openxmlformats.org/drawingml/2006/main" r:embed="R57d977ec12ed4227"/>
+          <a:blip xmlns:r="http://schemas.openxmlformats.org/officeDocument/2006/relationships" xmlns:a="http://schemas.openxmlformats.org/drawingml/2006/main" r:embed="R704575609328410d"/>
           <a:srcRect xmlns:a="http://schemas.openxmlformats.org/drawingml/2006/main" l="0" t="21875" r="0" b="21875"/>
           <a:stretch xmlns:a="http://schemas.openxmlformats.org/drawingml/2006/main">
             <a:fillRect l="0" t="0" r="0" b="0"/>
@@ -15458,7 +15308,7 @@
           <p:cNvPr id="3" name="">
             <a:extLst xmlns:a="http://schemas.openxmlformats.org/drawingml/2006/main">
               <a:ext uri="{FF2B5EF4-FFF2-40B4-BE49-F238E27FC236}">
-                <a16:creationId xmlns:a16="http://schemas.microsoft.com/office/drawing/2014/main" id="{EF5B2FFD-362C-4FC6-A498-D78B138C909F}"/>
+                <a16:creationId xmlns:a16="http://schemas.microsoft.com/office/drawing/2014/main" id="{BBF4F99D-8992-43F6-A0C7-5BA853E28CBE}"/>
               </a:ext>
             </a:extLst>
           </p:cNvPr>
@@ -15493,7 +15343,7 @@
           <p:cNvPr id="4" name="">
             <a:extLst xmlns:a="http://schemas.openxmlformats.org/drawingml/2006/main">
               <a:ext uri="{FF2B5EF4-FFF2-40B4-BE49-F238E27FC236}">
-                <a16:creationId xmlns:a16="http://schemas.microsoft.com/office/drawing/2014/main" id="{45362FD2-715C-44D1-89BF-10960BFB871D}"/>
+                <a16:creationId xmlns:a16="http://schemas.microsoft.com/office/drawing/2014/main" id="{78813DF8-0691-4EB4-B2F3-C6B3D36A7090}"/>
               </a:ext>
             </a:extLst>
           </p:cNvPr>
@@ -15528,7 +15378,7 @@
           <p:cNvPr id="5" name="">
             <a:extLst xmlns:a="http://schemas.openxmlformats.org/drawingml/2006/main">
               <a:ext uri="{FF2B5EF4-FFF2-40B4-BE49-F238E27FC236}">
-                <a16:creationId xmlns:a16="http://schemas.microsoft.com/office/drawing/2014/main" id="{70937945-E060-48D6-AEFD-3661DFA77FDF}"/>
+                <a16:creationId xmlns:a16="http://schemas.microsoft.com/office/drawing/2014/main" id="{914A78AD-284C-4A26-BB5D-389819CE424A}"/>
               </a:ext>
             </a:extLst>
           </p:cNvPr>
@@ -15565,7 +15415,7 @@
           <p:cNvPr id="6" name="">
             <a:extLst xmlns:a="http://schemas.openxmlformats.org/drawingml/2006/main">
               <a:ext uri="{FF2B5EF4-FFF2-40B4-BE49-F238E27FC236}">
-                <a16:creationId xmlns:a16="http://schemas.microsoft.com/office/drawing/2014/main" id="{8CF7672A-B8FC-4D68-8DF9-097DC65A941F}"/>
+                <a16:creationId xmlns:a16="http://schemas.microsoft.com/office/drawing/2014/main" id="{C1D1A766-2DD2-4133-A6A6-067E7752EF81}"/>
               </a:ext>
             </a:extLst>
           </p:cNvPr>
@@ -15602,7 +15452,7 @@
           <p:cNvPr id="7" name="">
             <a:extLst xmlns:a="http://schemas.openxmlformats.org/drawingml/2006/main">
               <a:ext uri="{FF2B5EF4-FFF2-40B4-BE49-F238E27FC236}">
-                <a16:creationId xmlns:a16="http://schemas.microsoft.com/office/drawing/2014/main" id="{999F4448-BE64-45D8-B6A5-FDD80AA93F35}"/>
+                <a16:creationId xmlns:a16="http://schemas.microsoft.com/office/drawing/2014/main" id="{2114E0FE-BABB-42FE-9C6F-2F16FCAAB614}"/>
               </a:ext>
             </a:extLst>
           </p:cNvPr>
@@ -15639,7 +15489,7 @@
           <p:cNvPr id="8" name="">
             <a:extLst xmlns:a="http://schemas.openxmlformats.org/drawingml/2006/main">
               <a:ext uri="{FF2B5EF4-FFF2-40B4-BE49-F238E27FC236}">
-                <a16:creationId xmlns:a16="http://schemas.microsoft.com/office/drawing/2014/main" id="{2018F5E5-349D-421F-A8A0-56BA9BF5A082}"/>
+                <a16:creationId xmlns:a16="http://schemas.microsoft.com/office/drawing/2014/main" id="{A3441618-9F4E-4F14-BD97-1CDA8B294717}"/>
               </a:ext>
             </a:extLst>
           </p:cNvPr>
@@ -15676,7 +15526,7 @@
           <p:cNvPr id="9" name="">
             <a:extLst xmlns:a="http://schemas.openxmlformats.org/drawingml/2006/main">
               <a:ext uri="{FF2B5EF4-FFF2-40B4-BE49-F238E27FC236}">
-                <a16:creationId xmlns:a16="http://schemas.microsoft.com/office/drawing/2014/main" id="{EE1FC54F-21A0-49FD-9A39-6668A2BB6A02}"/>
+                <a16:creationId xmlns:a16="http://schemas.microsoft.com/office/drawing/2014/main" id="{60A40853-DF83-4470-9BE7-82CA5D55A848}"/>
               </a:ext>
             </a:extLst>
           </p:cNvPr>
@@ -15734,7 +15584,7 @@
           <p:cNvPr id="10" name="">
             <a:extLst xmlns:a="http://schemas.openxmlformats.org/drawingml/2006/main">
               <a:ext uri="{FF2B5EF4-FFF2-40B4-BE49-F238E27FC236}">
-                <a16:creationId xmlns:a16="http://schemas.microsoft.com/office/drawing/2014/main" id="{E3A54548-AB3D-4B34-AD73-2796C7BA8644}"/>
+                <a16:creationId xmlns:a16="http://schemas.microsoft.com/office/drawing/2014/main" id="{8057BFFE-63FD-483C-B50B-03D5794182AF}"/>
               </a:ext>
             </a:extLst>
           </p:cNvPr>
@@ -15792,7 +15642,7 @@
           <p:cNvPr id="11" name="">
             <a:extLst xmlns:a="http://schemas.openxmlformats.org/drawingml/2006/main">
               <a:ext uri="{FF2B5EF4-FFF2-40B4-BE49-F238E27FC236}">
-                <a16:creationId xmlns:a16="http://schemas.microsoft.com/office/drawing/2014/main" id="{F1AE3A78-3CBE-4209-A7AD-50FDFA4775B7}"/>
+                <a16:creationId xmlns:a16="http://schemas.microsoft.com/office/drawing/2014/main" id="{D3309210-42D8-4BE2-AE54-DA0FCC0E9504}"/>
               </a:ext>
             </a:extLst>
           </p:cNvPr>
@@ -15827,7 +15677,7 @@
           <p:cNvPr id="12" name="">
             <a:extLst xmlns:a="http://schemas.openxmlformats.org/drawingml/2006/main">
               <a:ext uri="{FF2B5EF4-FFF2-40B4-BE49-F238E27FC236}">
-                <a16:creationId xmlns:a16="http://schemas.microsoft.com/office/drawing/2014/main" id="{5B4F5D7E-9CDA-4E29-8600-37074BC150E2}"/>
+                <a16:creationId xmlns:a16="http://schemas.microsoft.com/office/drawing/2014/main" id="{D9CAC868-FA6E-44B9-A005-41605FA06EF0}"/>
               </a:ext>
             </a:extLst>
           </p:cNvPr>
@@ -15860,7 +15710,7 @@
           <p:cNvPr id="13" name="">
             <a:extLst xmlns:a="http://schemas.openxmlformats.org/drawingml/2006/main">
               <a:ext uri="{FF2B5EF4-FFF2-40B4-BE49-F238E27FC236}">
-                <a16:creationId xmlns:a16="http://schemas.microsoft.com/office/drawing/2014/main" id="{1F8D2F0E-ADC4-4AFF-AC70-7DBB2D61A085}"/>
+                <a16:creationId xmlns:a16="http://schemas.microsoft.com/office/drawing/2014/main" id="{968306F3-AB95-4DB5-AAC3-3CE505F308FC}"/>
               </a:ext>
             </a:extLst>
           </p:cNvPr>
@@ -15918,7 +15768,7 @@
           <p:cNvPr id="14" name="">
             <a:extLst xmlns:a="http://schemas.openxmlformats.org/drawingml/2006/main">
               <a:ext uri="{FF2B5EF4-FFF2-40B4-BE49-F238E27FC236}">
-                <a16:creationId xmlns:a16="http://schemas.microsoft.com/office/drawing/2014/main" id="{17E0DC1A-8997-4FBF-B8C5-C1978D78901B}"/>
+                <a16:creationId xmlns:a16="http://schemas.microsoft.com/office/drawing/2014/main" id="{47594F32-D465-4F36-82BB-D5D1FEAC8118}"/>
               </a:ext>
             </a:extLst>
           </p:cNvPr>
@@ -15955,7 +15805,7 @@
           <p:cNvPr id="15" name="">
             <a:extLst xmlns:a="http://schemas.openxmlformats.org/drawingml/2006/main">
               <a:ext uri="{FF2B5EF4-FFF2-40B4-BE49-F238E27FC236}">
-                <a16:creationId xmlns:a16="http://schemas.microsoft.com/office/drawing/2014/main" id="{B9F48D9E-A0E0-4570-9780-9CD6AF15AC05}"/>
+                <a16:creationId xmlns:a16="http://schemas.microsoft.com/office/drawing/2014/main" id="{BEEBD514-70F6-47B8-9AB7-4B592B5DA1D7}"/>
               </a:ext>
             </a:extLst>
           </p:cNvPr>
@@ -15990,7 +15840,7 @@
           <p:cNvPr id="16" name="">
             <a:extLst xmlns:a="http://schemas.openxmlformats.org/drawingml/2006/main">
               <a:ext uri="{FF2B5EF4-FFF2-40B4-BE49-F238E27FC236}">
-                <a16:creationId xmlns:a16="http://schemas.microsoft.com/office/drawing/2014/main" id="{337DBC74-EE0A-4F28-BA67-5C3C03F3F3D3}"/>
+                <a16:creationId xmlns:a16="http://schemas.microsoft.com/office/drawing/2014/main" id="{38622CA4-1D9D-4B1C-B85B-0358D8D94D5A}"/>
               </a:ext>
             </a:extLst>
           </p:cNvPr>
@@ -16048,7 +15898,7 @@
           <p:cNvPr id="17" name="">
             <a:extLst xmlns:a="http://schemas.openxmlformats.org/drawingml/2006/main">
               <a:ext uri="{FF2B5EF4-FFF2-40B4-BE49-F238E27FC236}">
-                <a16:creationId xmlns:a16="http://schemas.microsoft.com/office/drawing/2014/main" id="{25FE4692-8B58-47B7-A307-F1337756CBF6}"/>
+                <a16:creationId xmlns:a16="http://schemas.microsoft.com/office/drawing/2014/main" id="{AFB9ECF2-8D18-4B10-BCAF-B40535B21C0A}"/>
               </a:ext>
             </a:extLst>
           </p:cNvPr>
@@ -16140,7 +15990,7 @@
           <p:cNvPr id="18" name="">
             <a:extLst xmlns:a="http://schemas.openxmlformats.org/drawingml/2006/main">
               <a:ext uri="{FF2B5EF4-FFF2-40B4-BE49-F238E27FC236}">
-                <a16:creationId xmlns:a16="http://schemas.microsoft.com/office/drawing/2014/main" id="{0A080E2F-BDFF-48E4-96E2-91A91A2E7D86}"/>
+                <a16:creationId xmlns:a16="http://schemas.microsoft.com/office/drawing/2014/main" id="{7506DB15-D578-4770-9AA9-588EEE072A08}"/>
               </a:ext>
             </a:extLst>
           </p:cNvPr>
@@ -16177,7 +16027,7 @@
           <p:cNvPr id="19" name="">
             <a:extLst xmlns:a="http://schemas.openxmlformats.org/drawingml/2006/main">
               <a:ext uri="{FF2B5EF4-FFF2-40B4-BE49-F238E27FC236}">
-                <a16:creationId xmlns:a16="http://schemas.microsoft.com/office/drawing/2014/main" id="{9C710924-9967-4B4D-A0E5-30CF671C8EDD}"/>
+                <a16:creationId xmlns:a16="http://schemas.microsoft.com/office/drawing/2014/main" id="{E095E7C9-519F-4E6D-81AA-D842D16ED5F0}"/>
               </a:ext>
             </a:extLst>
           </p:cNvPr>
@@ -16212,7 +16062,7 @@
           <p:cNvPr id="20" name="">
             <a:extLst xmlns:a="http://schemas.openxmlformats.org/drawingml/2006/main">
               <a:ext uri="{FF2B5EF4-FFF2-40B4-BE49-F238E27FC236}">
-                <a16:creationId xmlns:a16="http://schemas.microsoft.com/office/drawing/2014/main" id="{F70D80D4-F639-46CC-ACA8-2C517D43FC69}"/>
+                <a16:creationId xmlns:a16="http://schemas.microsoft.com/office/drawing/2014/main" id="{517756CC-5FF9-40C5-8435-0C22F1B4F508}"/>
               </a:ext>
             </a:extLst>
           </p:cNvPr>
@@ -16270,7 +16120,7 @@
           <p:cNvPr id="21" name="">
             <a:extLst xmlns:a="http://schemas.openxmlformats.org/drawingml/2006/main">
               <a:ext uri="{FF2B5EF4-FFF2-40B4-BE49-F238E27FC236}">
-                <a16:creationId xmlns:a16="http://schemas.microsoft.com/office/drawing/2014/main" id="{C36BEBE7-B496-444B-940E-9597B2B36487}"/>
+                <a16:creationId xmlns:a16="http://schemas.microsoft.com/office/drawing/2014/main" id="{E2F4216D-7FAA-4E88-8B04-B1246BEBB1B6}"/>
               </a:ext>
             </a:extLst>
           </p:cNvPr>
@@ -16362,7 +16212,7 @@
           <p:cNvPr id="22" name="">
             <a:extLst xmlns:a="http://schemas.openxmlformats.org/drawingml/2006/main">
               <a:ext uri="{FF2B5EF4-FFF2-40B4-BE49-F238E27FC236}">
-                <a16:creationId xmlns:a16="http://schemas.microsoft.com/office/drawing/2014/main" id="{9FB2811E-0A9C-45AF-8BC6-2886CD7ACBE7}"/>
+                <a16:creationId xmlns:a16="http://schemas.microsoft.com/office/drawing/2014/main" id="{0D4C4AD0-CDAF-48DA-AAA9-C9F4367E139F}"/>
               </a:ext>
             </a:extLst>
           </p:cNvPr>
@@ -16399,7 +16249,7 @@
           <p:cNvPr id="23" name="">
             <a:extLst xmlns:a="http://schemas.openxmlformats.org/drawingml/2006/main">
               <a:ext uri="{FF2B5EF4-FFF2-40B4-BE49-F238E27FC236}">
-                <a16:creationId xmlns:a16="http://schemas.microsoft.com/office/drawing/2014/main" id="{6ADD634C-EB1B-4F73-907B-607DF77F08DD}"/>
+                <a16:creationId xmlns:a16="http://schemas.microsoft.com/office/drawing/2014/main" id="{2EE03407-726D-48FF-86F4-69EFC8E608AA}"/>
               </a:ext>
             </a:extLst>
           </p:cNvPr>
@@ -16434,7 +16284,7 @@
           <p:cNvPr id="24" name="">
             <a:extLst xmlns:a="http://schemas.openxmlformats.org/drawingml/2006/main">
               <a:ext uri="{FF2B5EF4-FFF2-40B4-BE49-F238E27FC236}">
-                <a16:creationId xmlns:a16="http://schemas.microsoft.com/office/drawing/2014/main" id="{0A4280E9-AA02-496C-BFDF-08B940B8279D}"/>
+                <a16:creationId xmlns:a16="http://schemas.microsoft.com/office/drawing/2014/main" id="{5D8E44A3-7A1D-4959-9694-8ABDD89899E0}"/>
               </a:ext>
             </a:extLst>
           </p:cNvPr>
@@ -16492,7 +16342,7 @@
           <p:cNvPr id="25" name="">
             <a:extLst xmlns:a="http://schemas.openxmlformats.org/drawingml/2006/main">
               <a:ext uri="{FF2B5EF4-FFF2-40B4-BE49-F238E27FC236}">
-                <a16:creationId xmlns:a16="http://schemas.microsoft.com/office/drawing/2014/main" id="{7685E2C3-195C-4064-A7E4-31F3DACFC6D7}"/>
+                <a16:creationId xmlns:a16="http://schemas.microsoft.com/office/drawing/2014/main" id="{38B1BF83-88C0-45B9-821C-16F1D090238A}"/>
               </a:ext>
             </a:extLst>
           </p:cNvPr>
@@ -16584,7 +16434,7 @@
           <p:cNvPr id="26" name="">
             <a:extLst xmlns:a="http://schemas.openxmlformats.org/drawingml/2006/main">
               <a:ext uri="{FF2B5EF4-FFF2-40B4-BE49-F238E27FC236}">
-                <a16:creationId xmlns:a16="http://schemas.microsoft.com/office/drawing/2014/main" id="{AE44771C-D5F5-4FDA-BE17-8EE2E56FE9D1}"/>
+                <a16:creationId xmlns:a16="http://schemas.microsoft.com/office/drawing/2014/main" id="{105B404C-94E0-41F4-A589-1438F728ED15}"/>
               </a:ext>
             </a:extLst>
           </p:cNvPr>
@@ -16621,7 +16471,7 @@
           <p:cNvPr id="27" name="">
             <a:extLst xmlns:a="http://schemas.openxmlformats.org/drawingml/2006/main">
               <a:ext uri="{FF2B5EF4-FFF2-40B4-BE49-F238E27FC236}">
-                <a16:creationId xmlns:a16="http://schemas.microsoft.com/office/drawing/2014/main" id="{D3F4D85E-B97B-4415-A3A3-BE9122E601E1}"/>
+                <a16:creationId xmlns:a16="http://schemas.microsoft.com/office/drawing/2014/main" id="{987B2FB9-1774-45C8-85CA-BCEA63F79B9C}"/>
               </a:ext>
             </a:extLst>
           </p:cNvPr>
@@ -16656,7 +16506,7 @@
           <p:cNvPr id="28" name="">
             <a:extLst xmlns:a="http://schemas.openxmlformats.org/drawingml/2006/main">
               <a:ext uri="{FF2B5EF4-FFF2-40B4-BE49-F238E27FC236}">
-                <a16:creationId xmlns:a16="http://schemas.microsoft.com/office/drawing/2014/main" id="{31ACB868-46AB-454B-BC04-60038059FD34}"/>
+                <a16:creationId xmlns:a16="http://schemas.microsoft.com/office/drawing/2014/main" id="{8682D7A0-CC3E-4EDE-9630-7415D4104D06}"/>
               </a:ext>
             </a:extLst>
           </p:cNvPr>
@@ -16714,7 +16564,7 @@
           <p:cNvPr id="29" name="">
             <a:extLst xmlns:a="http://schemas.openxmlformats.org/drawingml/2006/main">
               <a:ext uri="{FF2B5EF4-FFF2-40B4-BE49-F238E27FC236}">
-                <a16:creationId xmlns:a16="http://schemas.microsoft.com/office/drawing/2014/main" id="{9C222BFF-5AAE-474D-95B8-E70E5EC651AF}"/>
+                <a16:creationId xmlns:a16="http://schemas.microsoft.com/office/drawing/2014/main" id="{E93477E9-4489-4F06-AE0C-1A035A40F0C2}"/>
               </a:ext>
             </a:extLst>
           </p:cNvPr>
@@ -16789,7 +16639,7 @@
           <p:cNvPr id="30" name="">
             <a:extLst xmlns:a="http://schemas.openxmlformats.org/drawingml/2006/main">
               <a:ext uri="{FF2B5EF4-FFF2-40B4-BE49-F238E27FC236}">
-                <a16:creationId xmlns:a16="http://schemas.microsoft.com/office/drawing/2014/main" id="{18A78621-996F-408A-BD2F-E48DFB27E780}"/>
+                <a16:creationId xmlns:a16="http://schemas.microsoft.com/office/drawing/2014/main" id="{DBEDBE72-74CA-4AB1-B66E-45ACE4DAEFF4}"/>
               </a:ext>
             </a:extLst>
           </p:cNvPr>
@@ -16826,7 +16676,7 @@
           <p:cNvPr id="31" name="">
             <a:extLst xmlns:a="http://schemas.openxmlformats.org/drawingml/2006/main">
               <a:ext uri="{FF2B5EF4-FFF2-40B4-BE49-F238E27FC236}">
-                <a16:creationId xmlns:a16="http://schemas.microsoft.com/office/drawing/2014/main" id="{D949192C-4532-4E54-B738-E4ED4A6D0677}"/>
+                <a16:creationId xmlns:a16="http://schemas.microsoft.com/office/drawing/2014/main" id="{BD38325B-824A-4098-830B-71E9E14B7D62}"/>
               </a:ext>
             </a:extLst>
           </p:cNvPr>
@@ -16861,7 +16711,7 @@
           <p:cNvPr id="32" name="">
             <a:extLst xmlns:a="http://schemas.openxmlformats.org/drawingml/2006/main">
               <a:ext uri="{FF2B5EF4-FFF2-40B4-BE49-F238E27FC236}">
-                <a16:creationId xmlns:a16="http://schemas.microsoft.com/office/drawing/2014/main" id="{3E216671-517C-4CBB-B726-7F52C052457D}"/>
+                <a16:creationId xmlns:a16="http://schemas.microsoft.com/office/drawing/2014/main" id="{C54C2227-377A-48B6-9E63-23D305E4ACC6}"/>
               </a:ext>
             </a:extLst>
           </p:cNvPr>
@@ -16919,7 +16769,7 @@
           <p:cNvPr id="33" name="">
             <a:extLst xmlns:a="http://schemas.openxmlformats.org/drawingml/2006/main">
               <a:ext uri="{FF2B5EF4-FFF2-40B4-BE49-F238E27FC236}">
-                <a16:creationId xmlns:a16="http://schemas.microsoft.com/office/drawing/2014/main" id="{FDACCBAD-40CF-4EE2-B560-67EDF08C85B7}"/>
+                <a16:creationId xmlns:a16="http://schemas.microsoft.com/office/drawing/2014/main" id="{E930DEB3-9AC0-4F0A-B6A6-69C75A99CFBE}"/>
               </a:ext>
             </a:extLst>
           </p:cNvPr>
@@ -16994,7 +16844,7 @@
           <p:cNvPr id="34" name="">
             <a:extLst xmlns:a="http://schemas.openxmlformats.org/drawingml/2006/main">
               <a:ext uri="{FF2B5EF4-FFF2-40B4-BE49-F238E27FC236}">
-                <a16:creationId xmlns:a16="http://schemas.microsoft.com/office/drawing/2014/main" id="{EA2FCB23-48EB-47D7-8B63-A24274CCB32D}"/>
+                <a16:creationId xmlns:a16="http://schemas.microsoft.com/office/drawing/2014/main" id="{E44F3264-86EA-4FC8-8DC9-E1AA4CAF2231}"/>
               </a:ext>
             </a:extLst>
           </p:cNvPr>
@@ -17029,7 +16879,7 @@
           <p:cNvPr id="35" name="">
             <a:extLst xmlns:a="http://schemas.openxmlformats.org/drawingml/2006/main">
               <a:ext uri="{FF2B5EF4-FFF2-40B4-BE49-F238E27FC236}">
-                <a16:creationId xmlns:a16="http://schemas.microsoft.com/office/drawing/2014/main" id="{6C89C5D3-F06D-455E-9CE5-02E7393D1D9A}"/>
+                <a16:creationId xmlns:a16="http://schemas.microsoft.com/office/drawing/2014/main" id="{3CAEB5A1-061B-4E1A-B01E-9FADC5DDD229}"/>
               </a:ext>
             </a:extLst>
           </p:cNvPr>
@@ -17064,7 +16914,7 @@
           <p:cNvPr id="36" name="">
             <a:extLst xmlns:a="http://schemas.openxmlformats.org/drawingml/2006/main">
               <a:ext uri="{FF2B5EF4-FFF2-40B4-BE49-F238E27FC236}">
-                <a16:creationId xmlns:a16="http://schemas.microsoft.com/office/drawing/2014/main" id="{F7D79A1D-1653-465C-AF14-ED992B123459}"/>
+                <a16:creationId xmlns:a16="http://schemas.microsoft.com/office/drawing/2014/main" id="{77525EC6-6D12-4BB3-BC53-BD44F7CB5F79}"/>
               </a:ext>
             </a:extLst>
           </p:cNvPr>
@@ -17122,7 +16972,7 @@
           <p:cNvPr id="37" name="">
             <a:extLst xmlns:a="http://schemas.openxmlformats.org/drawingml/2006/main">
               <a:ext uri="{FF2B5EF4-FFF2-40B4-BE49-F238E27FC236}">
-                <a16:creationId xmlns:a16="http://schemas.microsoft.com/office/drawing/2014/main" id="{36CA988D-02FE-458D-8A18-C70D1C2E58EF}"/>
+                <a16:creationId xmlns:a16="http://schemas.microsoft.com/office/drawing/2014/main" id="{37665E57-0BD6-4F7F-A226-24BBFD338545}"/>
               </a:ext>
             </a:extLst>
           </p:cNvPr>
@@ -17178,7 +17028,7 @@
     </p:spTree>
     <p:extLst>
       <p:ext uri="{BB962C8B-B14F-4D97-AF65-F5344CB8AC3E}">
-        <p14:creationId xmlns:p14="http://schemas.microsoft.com/office/powerpoint/2010/main" val="1293279042"/>
+        <p14:creationId xmlns:p14="http://schemas.microsoft.com/office/powerpoint/2010/main" val="163628895"/>
       </p:ext>
     </p:extLst>
   </p:cSld>
@@ -17209,7 +17059,7 @@
           <p:cNvPr id="1" name="Slide Number Placeholder 5">
             <a:extLst xmlns:a="http://schemas.openxmlformats.org/drawingml/2006/main">
               <a:ext uri="{FF2B5EF4-FFF2-40B4-BE49-F238E27FC236}">
-                <a16:creationId xmlns:a16="http://schemas.microsoft.com/office/drawing/2014/main" id="{38BDF79F-9F16-4FEE-B72E-1F506FE9EBEC}"/>
+                <a16:creationId xmlns:a16="http://schemas.microsoft.com/office/drawing/2014/main" id="{039602EF-25C6-4B7F-BD52-B0182DC44CC0}"/>
               </a:ext>
             </a:extLst>
           </p:cNvPr>
@@ -17245,7 +17095,7 @@
           <p:nvPr/>
         </p:nvPicPr>
         <p:blipFill>
-          <a:blip xmlns:r="http://schemas.openxmlformats.org/officeDocument/2006/relationships" xmlns:a="http://schemas.openxmlformats.org/drawingml/2006/main" r:embed="R823d20a8cf224c17"/>
+          <a:blip xmlns:r="http://schemas.openxmlformats.org/officeDocument/2006/relationships" xmlns:a="http://schemas.openxmlformats.org/drawingml/2006/main" r:embed="Rc451ac8462064c46"/>
           <a:srcRect xmlns:a="http://schemas.openxmlformats.org/drawingml/2006/main" l="0" t="21875" r="0" b="21875"/>
           <a:stretch xmlns:a="http://schemas.openxmlformats.org/drawingml/2006/main">
             <a:fillRect l="0" t="0" r="0" b="0"/>
@@ -17266,7 +17116,7 @@
           <p:cNvPr id="3" name="">
             <a:extLst xmlns:a="http://schemas.openxmlformats.org/drawingml/2006/main">
               <a:ext uri="{FF2B5EF4-FFF2-40B4-BE49-F238E27FC236}">
-                <a16:creationId xmlns:a16="http://schemas.microsoft.com/office/drawing/2014/main" id="{03A3B2FC-7E04-4C81-9C19-8F36EAB3664D}"/>
+                <a16:creationId xmlns:a16="http://schemas.microsoft.com/office/drawing/2014/main" id="{DCCED69F-EE83-4FDB-861F-B1EB6141BE41}"/>
               </a:ext>
             </a:extLst>
           </p:cNvPr>
@@ -17301,7 +17151,7 @@
           <p:cNvPr id="4" name="">
             <a:extLst xmlns:a="http://schemas.openxmlformats.org/drawingml/2006/main">
               <a:ext uri="{FF2B5EF4-FFF2-40B4-BE49-F238E27FC236}">
-                <a16:creationId xmlns:a16="http://schemas.microsoft.com/office/drawing/2014/main" id="{8CFB26AB-0E37-4138-ADBF-A67B4EC436EA}"/>
+                <a16:creationId xmlns:a16="http://schemas.microsoft.com/office/drawing/2014/main" id="{43D1E66F-699A-4F20-AA15-3746ECF90090}"/>
               </a:ext>
             </a:extLst>
           </p:cNvPr>
@@ -17336,7 +17186,7 @@
           <p:cNvPr id="5" name="">
             <a:extLst xmlns:a="http://schemas.openxmlformats.org/drawingml/2006/main">
               <a:ext uri="{FF2B5EF4-FFF2-40B4-BE49-F238E27FC236}">
-                <a16:creationId xmlns:a16="http://schemas.microsoft.com/office/drawing/2014/main" id="{078455BF-50A2-4F63-8C37-D70BA49B4101}"/>
+                <a16:creationId xmlns:a16="http://schemas.microsoft.com/office/drawing/2014/main" id="{86188D51-2060-426E-AAD7-8DB2088C59F8}"/>
               </a:ext>
             </a:extLst>
           </p:cNvPr>
@@ -17373,7 +17223,7 @@
           <p:cNvPr id="6" name="">
             <a:extLst xmlns:a="http://schemas.openxmlformats.org/drawingml/2006/main">
               <a:ext uri="{FF2B5EF4-FFF2-40B4-BE49-F238E27FC236}">
-                <a16:creationId xmlns:a16="http://schemas.microsoft.com/office/drawing/2014/main" id="{E24D0F3C-EE6D-4E3B-B8E2-9697D20E460C}"/>
+                <a16:creationId xmlns:a16="http://schemas.microsoft.com/office/drawing/2014/main" id="{F31816BA-55C3-4CED-AEC5-388254836437}"/>
               </a:ext>
             </a:extLst>
           </p:cNvPr>
@@ -17410,7 +17260,7 @@
           <p:cNvPr id="7" name="">
             <a:extLst xmlns:a="http://schemas.openxmlformats.org/drawingml/2006/main">
               <a:ext uri="{FF2B5EF4-FFF2-40B4-BE49-F238E27FC236}">
-                <a16:creationId xmlns:a16="http://schemas.microsoft.com/office/drawing/2014/main" id="{04424ABB-304E-4045-BC3F-224521C5F6E9}"/>
+                <a16:creationId xmlns:a16="http://schemas.microsoft.com/office/drawing/2014/main" id="{96C4FD21-4A59-4037-866E-F74FD2160C10}"/>
               </a:ext>
             </a:extLst>
           </p:cNvPr>
@@ -17447,7 +17297,7 @@
           <p:cNvPr id="8" name="">
             <a:extLst xmlns:a="http://schemas.openxmlformats.org/drawingml/2006/main">
               <a:ext uri="{FF2B5EF4-FFF2-40B4-BE49-F238E27FC236}">
-                <a16:creationId xmlns:a16="http://schemas.microsoft.com/office/drawing/2014/main" id="{88AE7738-7DA7-43BD-A9ED-A0C7C7F50CB2}"/>
+                <a16:creationId xmlns:a16="http://schemas.microsoft.com/office/drawing/2014/main" id="{982B67B0-F82F-4852-9F36-69DD8BC9B20A}"/>
               </a:ext>
             </a:extLst>
           </p:cNvPr>
@@ -17484,7 +17334,7 @@
           <p:cNvPr id="9" name="">
             <a:extLst xmlns:a="http://schemas.openxmlformats.org/drawingml/2006/main">
               <a:ext uri="{FF2B5EF4-FFF2-40B4-BE49-F238E27FC236}">
-                <a16:creationId xmlns:a16="http://schemas.microsoft.com/office/drawing/2014/main" id="{3A6A833B-8FA5-452A-8378-A7C3A71662DA}"/>
+                <a16:creationId xmlns:a16="http://schemas.microsoft.com/office/drawing/2014/main" id="{9D664A0D-DF56-4760-B602-869B28698AA6}"/>
               </a:ext>
             </a:extLst>
           </p:cNvPr>
@@ -17542,7 +17392,7 @@
           <p:cNvPr id="10" name="">
             <a:extLst xmlns:a="http://schemas.openxmlformats.org/drawingml/2006/main">
               <a:ext uri="{FF2B5EF4-FFF2-40B4-BE49-F238E27FC236}">
-                <a16:creationId xmlns:a16="http://schemas.microsoft.com/office/drawing/2014/main" id="{ED198204-E708-43C7-B764-C98D32012781}"/>
+                <a16:creationId xmlns:a16="http://schemas.microsoft.com/office/drawing/2014/main" id="{98DCF808-3467-4E2B-828B-2F92EB5332FA}"/>
               </a:ext>
             </a:extLst>
           </p:cNvPr>
@@ -17600,7 +17450,7 @@
           <p:cNvPr id="11" name="">
             <a:extLst xmlns:a="http://schemas.openxmlformats.org/drawingml/2006/main">
               <a:ext uri="{FF2B5EF4-FFF2-40B4-BE49-F238E27FC236}">
-                <a16:creationId xmlns:a16="http://schemas.microsoft.com/office/drawing/2014/main" id="{FC8E3C39-DD16-485A-9DD6-547BBA485999}"/>
+                <a16:creationId xmlns:a16="http://schemas.microsoft.com/office/drawing/2014/main" id="{1F47ECCD-E8D6-4C03-AD3B-EAEBA5E52CD2}"/>
               </a:ext>
             </a:extLst>
           </p:cNvPr>
@@ -17635,7 +17485,7 @@
           <p:cNvPr id="12" name="">
             <a:extLst xmlns:a="http://schemas.openxmlformats.org/drawingml/2006/main">
               <a:ext uri="{FF2B5EF4-FFF2-40B4-BE49-F238E27FC236}">
-                <a16:creationId xmlns:a16="http://schemas.microsoft.com/office/drawing/2014/main" id="{0F6F60E7-073B-476F-A101-6BCA0F4EE48F}"/>
+                <a16:creationId xmlns:a16="http://schemas.microsoft.com/office/drawing/2014/main" id="{4CD088F0-E48E-4F19-A870-0412E11DD821}"/>
               </a:ext>
             </a:extLst>
           </p:cNvPr>
@@ -17668,7 +17518,7 @@
           <p:cNvPr id="13" name="">
             <a:extLst xmlns:a="http://schemas.openxmlformats.org/drawingml/2006/main">
               <a:ext uri="{FF2B5EF4-FFF2-40B4-BE49-F238E27FC236}">
-                <a16:creationId xmlns:a16="http://schemas.microsoft.com/office/drawing/2014/main" id="{61DBD056-F313-49A1-B952-87F35DDA9C37}"/>
+                <a16:creationId xmlns:a16="http://schemas.microsoft.com/office/drawing/2014/main" id="{200C522F-3FB8-4944-B906-5ABABB9EA8DA}"/>
               </a:ext>
             </a:extLst>
           </p:cNvPr>
@@ -17743,7 +17593,7 @@
           <p:cNvPr id="14" name="">
             <a:extLst xmlns:a="http://schemas.openxmlformats.org/drawingml/2006/main">
               <a:ext uri="{FF2B5EF4-FFF2-40B4-BE49-F238E27FC236}">
-                <a16:creationId xmlns:a16="http://schemas.microsoft.com/office/drawing/2014/main" id="{4D26466D-7BDD-4F5C-958C-E7F4D7433B22}"/>
+                <a16:creationId xmlns:a16="http://schemas.microsoft.com/office/drawing/2014/main" id="{6A6C80C1-C739-43FE-AEBF-EB425545DCFD}"/>
               </a:ext>
             </a:extLst>
           </p:cNvPr>
@@ -17778,7 +17628,7 @@
           <p:cNvPr id="15" name="">
             <a:extLst xmlns:a="http://schemas.openxmlformats.org/drawingml/2006/main">
               <a:ext uri="{FF2B5EF4-FFF2-40B4-BE49-F238E27FC236}">
-                <a16:creationId xmlns:a16="http://schemas.microsoft.com/office/drawing/2014/main" id="{B7A43FCC-789F-4100-9A24-59B27767795B}"/>
+                <a16:creationId xmlns:a16="http://schemas.microsoft.com/office/drawing/2014/main" id="{2A273CF9-A8F0-4F14-BC0D-6DC5BE5EFB30}"/>
               </a:ext>
             </a:extLst>
           </p:cNvPr>
@@ -17813,7 +17663,7 @@
           <p:cNvPr id="16" name="">
             <a:extLst xmlns:a="http://schemas.openxmlformats.org/drawingml/2006/main">
               <a:ext uri="{FF2B5EF4-FFF2-40B4-BE49-F238E27FC236}">
-                <a16:creationId xmlns:a16="http://schemas.microsoft.com/office/drawing/2014/main" id="{80F92F5E-6D94-4F01-A299-77B01217B456}"/>
+                <a16:creationId xmlns:a16="http://schemas.microsoft.com/office/drawing/2014/main" id="{4A8C4BB0-4BCF-4C3A-A42C-67F92B66F03A}"/>
               </a:ext>
             </a:extLst>
           </p:cNvPr>
@@ -17871,7 +17721,7 @@
           <p:cNvPr id="17" name="">
             <a:extLst xmlns:a="http://schemas.openxmlformats.org/drawingml/2006/main">
               <a:ext uri="{FF2B5EF4-FFF2-40B4-BE49-F238E27FC236}">
-                <a16:creationId xmlns:a16="http://schemas.microsoft.com/office/drawing/2014/main" id="{52D3225A-1CCF-4F37-B49A-9F64A5ABC183}"/>
+                <a16:creationId xmlns:a16="http://schemas.microsoft.com/office/drawing/2014/main" id="{2B079319-40F9-41B0-9586-37D0487FB92C}"/>
               </a:ext>
             </a:extLst>
           </p:cNvPr>
@@ -18014,7 +17864,7 @@
           <p:cNvPr id="18" name="">
             <a:extLst xmlns:a="http://schemas.openxmlformats.org/drawingml/2006/main">
               <a:ext uri="{FF2B5EF4-FFF2-40B4-BE49-F238E27FC236}">
-                <a16:creationId xmlns:a16="http://schemas.microsoft.com/office/drawing/2014/main" id="{DBC91E45-9F27-4F02-9DBE-959AF90628BA}"/>
+                <a16:creationId xmlns:a16="http://schemas.microsoft.com/office/drawing/2014/main" id="{BDADD5A4-C03B-4C8F-B90B-2D1301BFE20A}"/>
               </a:ext>
             </a:extLst>
           </p:cNvPr>
@@ -18049,7 +17899,7 @@
           <p:cNvPr id="19" name="">
             <a:extLst xmlns:a="http://schemas.openxmlformats.org/drawingml/2006/main">
               <a:ext uri="{FF2B5EF4-FFF2-40B4-BE49-F238E27FC236}">
-                <a16:creationId xmlns:a16="http://schemas.microsoft.com/office/drawing/2014/main" id="{BF0BA9F4-20DF-4F0E-AF9E-70BA6524B803}"/>
+                <a16:creationId xmlns:a16="http://schemas.microsoft.com/office/drawing/2014/main" id="{1BBA6F37-20C5-4B29-990C-02862DC08C16}"/>
               </a:ext>
             </a:extLst>
           </p:cNvPr>
@@ -18084,7 +17934,7 @@
           <p:cNvPr id="20" name="">
             <a:extLst xmlns:a="http://schemas.openxmlformats.org/drawingml/2006/main">
               <a:ext uri="{FF2B5EF4-FFF2-40B4-BE49-F238E27FC236}">
-                <a16:creationId xmlns:a16="http://schemas.microsoft.com/office/drawing/2014/main" id="{886FFAE2-659C-41B5-90B5-10A922ED307C}"/>
+                <a16:creationId xmlns:a16="http://schemas.microsoft.com/office/drawing/2014/main" id="{B8F9CBF0-F835-492C-9482-64D754FCDBD8}"/>
               </a:ext>
             </a:extLst>
           </p:cNvPr>
@@ -18138,7 +17988,7 @@
           <p:cNvPr id="21" name="">
             <a:extLst xmlns:a="http://schemas.openxmlformats.org/drawingml/2006/main">
               <a:ext uri="{FF2B5EF4-FFF2-40B4-BE49-F238E27FC236}">
-                <a16:creationId xmlns:a16="http://schemas.microsoft.com/office/drawing/2014/main" id="{E4DFCD2A-D6D3-4ED8-A979-835E00F80942}"/>
+                <a16:creationId xmlns:a16="http://schemas.microsoft.com/office/drawing/2014/main" id="{CAC66D58-DB58-4F18-A6E0-AA9698F80D4F}"/>
               </a:ext>
             </a:extLst>
           </p:cNvPr>
@@ -18196,7 +18046,7 @@
           <p:cNvPr id="22" name="">
             <a:extLst xmlns:a="http://schemas.openxmlformats.org/drawingml/2006/main">
               <a:ext uri="{FF2B5EF4-FFF2-40B4-BE49-F238E27FC236}">
-                <a16:creationId xmlns:a16="http://schemas.microsoft.com/office/drawing/2014/main" id="{C0BB9EA2-5673-4FFD-BD26-0D52790295F8}"/>
+                <a16:creationId xmlns:a16="http://schemas.microsoft.com/office/drawing/2014/main" id="{2BC1D16D-EE70-4BA9-A288-5AB436926245}"/>
               </a:ext>
             </a:extLst>
           </p:cNvPr>
@@ -18271,7 +18121,7 @@
           <p:cNvPr id="23" name="">
             <a:extLst xmlns:a="http://schemas.openxmlformats.org/drawingml/2006/main">
               <a:ext uri="{FF2B5EF4-FFF2-40B4-BE49-F238E27FC236}">
-                <a16:creationId xmlns:a16="http://schemas.microsoft.com/office/drawing/2014/main" id="{408DB472-624D-4915-9DE5-9C39146A6C47}"/>
+                <a16:creationId xmlns:a16="http://schemas.microsoft.com/office/drawing/2014/main" id="{20ACBBA8-8042-4C54-A647-8D80A0C3C692}"/>
               </a:ext>
             </a:extLst>
           </p:cNvPr>
@@ -18306,7 +18156,7 @@
           <p:cNvPr id="24" name="">
             <a:extLst xmlns:a="http://schemas.openxmlformats.org/drawingml/2006/main">
               <a:ext uri="{FF2B5EF4-FFF2-40B4-BE49-F238E27FC236}">
-                <a16:creationId xmlns:a16="http://schemas.microsoft.com/office/drawing/2014/main" id="{B2AC93D5-ABF4-4F95-AEDC-B55E331E5265}"/>
+                <a16:creationId xmlns:a16="http://schemas.microsoft.com/office/drawing/2014/main" id="{1C2F4014-F243-4B80-A91B-BA3BAD1E8675}"/>
               </a:ext>
             </a:extLst>
           </p:cNvPr>
@@ -18341,7 +18191,7 @@
           <p:cNvPr id="25" name="">
             <a:extLst xmlns:a="http://schemas.openxmlformats.org/drawingml/2006/main">
               <a:ext uri="{FF2B5EF4-FFF2-40B4-BE49-F238E27FC236}">
-                <a16:creationId xmlns:a16="http://schemas.microsoft.com/office/drawing/2014/main" id="{ABDD2FC6-4478-4CED-A356-D7FA92A17C4B}"/>
+                <a16:creationId xmlns:a16="http://schemas.microsoft.com/office/drawing/2014/main" id="{89426A94-2BB9-48E0-B61F-94A3D0DCDDED}"/>
               </a:ext>
             </a:extLst>
           </p:cNvPr>
@@ -18395,7 +18245,7 @@
           <p:cNvPr id="26" name="">
             <a:extLst xmlns:a="http://schemas.openxmlformats.org/drawingml/2006/main">
               <a:ext uri="{FF2B5EF4-FFF2-40B4-BE49-F238E27FC236}">
-                <a16:creationId xmlns:a16="http://schemas.microsoft.com/office/drawing/2014/main" id="{DF295926-BFC6-4B6F-AE4E-57AFA83A005B}"/>
+                <a16:creationId xmlns:a16="http://schemas.microsoft.com/office/drawing/2014/main" id="{EF846A57-0F2C-4DAA-9153-0E6E886BE54A}"/>
               </a:ext>
             </a:extLst>
           </p:cNvPr>
@@ -18453,7 +18303,7 @@
           <p:cNvPr id="27" name="">
             <a:extLst xmlns:a="http://schemas.openxmlformats.org/drawingml/2006/main">
               <a:ext uri="{FF2B5EF4-FFF2-40B4-BE49-F238E27FC236}">
-                <a16:creationId xmlns:a16="http://schemas.microsoft.com/office/drawing/2014/main" id="{D3165107-9C9B-47FD-AFDA-E87C4147EBEB}"/>
+                <a16:creationId xmlns:a16="http://schemas.microsoft.com/office/drawing/2014/main" id="{CCBEF602-D8E0-468D-92F7-1935F85C292B}"/>
               </a:ext>
             </a:extLst>
           </p:cNvPr>
@@ -18528,7 +18378,7 @@
           <p:cNvPr id="28" name="">
             <a:extLst xmlns:a="http://schemas.openxmlformats.org/drawingml/2006/main">
               <a:ext uri="{FF2B5EF4-FFF2-40B4-BE49-F238E27FC236}">
-                <a16:creationId xmlns:a16="http://schemas.microsoft.com/office/drawing/2014/main" id="{EA95FD51-CDBF-49BC-9A94-EEC1871C4D1E}"/>
+                <a16:creationId xmlns:a16="http://schemas.microsoft.com/office/drawing/2014/main" id="{8B0B007F-232E-496F-8A4A-6DD28574F4D5}"/>
               </a:ext>
             </a:extLst>
           </p:cNvPr>
@@ -18563,7 +18413,7 @@
           <p:cNvPr id="29" name="">
             <a:extLst xmlns:a="http://schemas.openxmlformats.org/drawingml/2006/main">
               <a:ext uri="{FF2B5EF4-FFF2-40B4-BE49-F238E27FC236}">
-                <a16:creationId xmlns:a16="http://schemas.microsoft.com/office/drawing/2014/main" id="{280F5DCF-2239-498D-A67B-3FB1E75646AE}"/>
+                <a16:creationId xmlns:a16="http://schemas.microsoft.com/office/drawing/2014/main" id="{AB64AC18-0789-4980-B6A5-7A1C1298F50F}"/>
               </a:ext>
             </a:extLst>
           </p:cNvPr>
@@ -18598,7 +18448,7 @@
           <p:cNvPr id="30" name="">
             <a:extLst xmlns:a="http://schemas.openxmlformats.org/drawingml/2006/main">
               <a:ext uri="{FF2B5EF4-FFF2-40B4-BE49-F238E27FC236}">
-                <a16:creationId xmlns:a16="http://schemas.microsoft.com/office/drawing/2014/main" id="{1AC75DE0-F7AF-4123-AF88-09827BEAEFB1}"/>
+                <a16:creationId xmlns:a16="http://schemas.microsoft.com/office/drawing/2014/main" id="{07D98BD6-F1FB-469E-8F7F-FC535E885A0E}"/>
               </a:ext>
             </a:extLst>
           </p:cNvPr>
@@ -18652,7 +18502,7 @@
           <p:cNvPr id="31" name="">
             <a:extLst xmlns:a="http://schemas.openxmlformats.org/drawingml/2006/main">
               <a:ext uri="{FF2B5EF4-FFF2-40B4-BE49-F238E27FC236}">
-                <a16:creationId xmlns:a16="http://schemas.microsoft.com/office/drawing/2014/main" id="{2E2B5C77-A65A-4062-AF36-B4F28E193E84}"/>
+                <a16:creationId xmlns:a16="http://schemas.microsoft.com/office/drawing/2014/main" id="{176B2D7C-83FA-4271-84DA-471A899CCF31}"/>
               </a:ext>
             </a:extLst>
           </p:cNvPr>
@@ -18710,7 +18560,7 @@
           <p:cNvPr id="32" name="">
             <a:extLst xmlns:a="http://schemas.openxmlformats.org/drawingml/2006/main">
               <a:ext uri="{FF2B5EF4-FFF2-40B4-BE49-F238E27FC236}">
-                <a16:creationId xmlns:a16="http://schemas.microsoft.com/office/drawing/2014/main" id="{1C354D2F-499D-47BE-88B5-71CF85EE94D7}"/>
+                <a16:creationId xmlns:a16="http://schemas.microsoft.com/office/drawing/2014/main" id="{BFA0DC15-C355-4DFB-AE7E-78F07A959CF7}"/>
               </a:ext>
             </a:extLst>
           </p:cNvPr>
@@ -18785,7 +18635,7 @@
           <p:cNvPr id="33" name="">
             <a:extLst xmlns:a="http://schemas.openxmlformats.org/drawingml/2006/main">
               <a:ext uri="{FF2B5EF4-FFF2-40B4-BE49-F238E27FC236}">
-                <a16:creationId xmlns:a16="http://schemas.microsoft.com/office/drawing/2014/main" id="{472D7274-DE46-4BCE-9C02-3F837D3F8A3A}"/>
+                <a16:creationId xmlns:a16="http://schemas.microsoft.com/office/drawing/2014/main" id="{0819F303-FD63-435D-A8A5-A383D900F635}"/>
               </a:ext>
             </a:extLst>
           </p:cNvPr>
@@ -18820,7 +18670,7 @@
           <p:cNvPr id="34" name="">
             <a:extLst xmlns:a="http://schemas.openxmlformats.org/drawingml/2006/main">
               <a:ext uri="{FF2B5EF4-FFF2-40B4-BE49-F238E27FC236}">
-                <a16:creationId xmlns:a16="http://schemas.microsoft.com/office/drawing/2014/main" id="{0CAB97A9-1A1F-489D-9EA8-8E1013BD2166}"/>
+                <a16:creationId xmlns:a16="http://schemas.microsoft.com/office/drawing/2014/main" id="{B90D2E0C-BE1C-4169-B143-1C9765D79D1E}"/>
               </a:ext>
             </a:extLst>
           </p:cNvPr>
@@ -18855,7 +18705,7 @@
           <p:cNvPr id="35" name="">
             <a:extLst xmlns:a="http://schemas.openxmlformats.org/drawingml/2006/main">
               <a:ext uri="{FF2B5EF4-FFF2-40B4-BE49-F238E27FC236}">
-                <a16:creationId xmlns:a16="http://schemas.microsoft.com/office/drawing/2014/main" id="{F4D17F32-1BD1-49A3-ACC5-BDB609421044}"/>
+                <a16:creationId xmlns:a16="http://schemas.microsoft.com/office/drawing/2014/main" id="{767D2658-6F84-417A-ABFD-3D14E2C7039C}"/>
               </a:ext>
             </a:extLst>
           </p:cNvPr>
@@ -18909,7 +18759,7 @@
           <p:cNvPr id="36" name="">
             <a:extLst xmlns:a="http://schemas.openxmlformats.org/drawingml/2006/main">
               <a:ext uri="{FF2B5EF4-FFF2-40B4-BE49-F238E27FC236}">
-                <a16:creationId xmlns:a16="http://schemas.microsoft.com/office/drawing/2014/main" id="{EBC79638-64C9-4B6D-9AD8-70D624576800}"/>
+                <a16:creationId xmlns:a16="http://schemas.microsoft.com/office/drawing/2014/main" id="{87197484-689E-4195-816F-382C7D3E8025}"/>
               </a:ext>
             </a:extLst>
           </p:cNvPr>
@@ -18967,7 +18817,7 @@
           <p:cNvPr id="37" name="">
             <a:extLst xmlns:a="http://schemas.openxmlformats.org/drawingml/2006/main">
               <a:ext uri="{FF2B5EF4-FFF2-40B4-BE49-F238E27FC236}">
-                <a16:creationId xmlns:a16="http://schemas.microsoft.com/office/drawing/2014/main" id="{A0A10920-BFE5-47ED-9C8E-AA84D98F83AE}"/>
+                <a16:creationId xmlns:a16="http://schemas.microsoft.com/office/drawing/2014/main" id="{E0C903F0-4C85-4ABA-A9A3-128958C2187B}"/>
               </a:ext>
             </a:extLst>
           </p:cNvPr>
@@ -19042,7 +18892,7 @@
           <p:cNvPr id="38" name="">
             <a:extLst xmlns:a="http://schemas.openxmlformats.org/drawingml/2006/main">
               <a:ext uri="{FF2B5EF4-FFF2-40B4-BE49-F238E27FC236}">
-                <a16:creationId xmlns:a16="http://schemas.microsoft.com/office/drawing/2014/main" id="{EA58FB64-5617-43D0-965B-79DFC17E06AA}"/>
+                <a16:creationId xmlns:a16="http://schemas.microsoft.com/office/drawing/2014/main" id="{B550F261-323B-41D1-AE02-8ADE86F0BBB9}"/>
               </a:ext>
             </a:extLst>
           </p:cNvPr>
@@ -19077,7 +18927,7 @@
           <p:cNvPr id="39" name="">
             <a:extLst xmlns:a="http://schemas.openxmlformats.org/drawingml/2006/main">
               <a:ext uri="{FF2B5EF4-FFF2-40B4-BE49-F238E27FC236}">
-                <a16:creationId xmlns:a16="http://schemas.microsoft.com/office/drawing/2014/main" id="{4A230E98-3D73-4B09-9436-2C51719E71C5}"/>
+                <a16:creationId xmlns:a16="http://schemas.microsoft.com/office/drawing/2014/main" id="{BEF4B98B-D112-4C66-9743-84E4A83C046D}"/>
               </a:ext>
             </a:extLst>
           </p:cNvPr>
@@ -19112,7 +18962,7 @@
           <p:cNvPr id="40" name="">
             <a:extLst xmlns:a="http://schemas.openxmlformats.org/drawingml/2006/main">
               <a:ext uri="{FF2B5EF4-FFF2-40B4-BE49-F238E27FC236}">
-                <a16:creationId xmlns:a16="http://schemas.microsoft.com/office/drawing/2014/main" id="{CF463AF9-74E4-4BEE-98FF-9B2A3140F7A1}"/>
+                <a16:creationId xmlns:a16="http://schemas.microsoft.com/office/drawing/2014/main" id="{51810BD3-7047-440B-BF3D-64B381B5EBA3}"/>
               </a:ext>
             </a:extLst>
           </p:cNvPr>
@@ -19166,7 +19016,7 @@
           <p:cNvPr id="41" name="">
             <a:extLst xmlns:a="http://schemas.openxmlformats.org/drawingml/2006/main">
               <a:ext uri="{FF2B5EF4-FFF2-40B4-BE49-F238E27FC236}">
-                <a16:creationId xmlns:a16="http://schemas.microsoft.com/office/drawing/2014/main" id="{127C7D8E-85B9-4E82-9373-1C9D38EC4558}"/>
+                <a16:creationId xmlns:a16="http://schemas.microsoft.com/office/drawing/2014/main" id="{4596F983-6DF9-4BCA-A9CD-A4AA4DA0B765}"/>
               </a:ext>
             </a:extLst>
           </p:cNvPr>
@@ -19224,7 +19074,7 @@
           <p:cNvPr id="42" name="">
             <a:extLst xmlns:a="http://schemas.openxmlformats.org/drawingml/2006/main">
               <a:ext uri="{FF2B5EF4-FFF2-40B4-BE49-F238E27FC236}">
-                <a16:creationId xmlns:a16="http://schemas.microsoft.com/office/drawing/2014/main" id="{FD9A9ECF-DD95-4BC9-8683-9E2D38A6EB07}"/>
+                <a16:creationId xmlns:a16="http://schemas.microsoft.com/office/drawing/2014/main" id="{C788D9F4-EA33-453E-BE84-ED1B11A90CCE}"/>
               </a:ext>
             </a:extLst>
           </p:cNvPr>
@@ -19299,7 +19149,7 @@
           <p:cNvPr id="43" name="">
             <a:extLst xmlns:a="http://schemas.openxmlformats.org/drawingml/2006/main">
               <a:ext uri="{FF2B5EF4-FFF2-40B4-BE49-F238E27FC236}">
-                <a16:creationId xmlns:a16="http://schemas.microsoft.com/office/drawing/2014/main" id="{CC5BF9CB-35AC-4B93-A197-D0DBE0126F34}"/>
+                <a16:creationId xmlns:a16="http://schemas.microsoft.com/office/drawing/2014/main" id="{204D9DBA-5B97-42EE-9851-9E17C0CE3781}"/>
               </a:ext>
             </a:extLst>
           </p:cNvPr>
@@ -19334,7 +19184,7 @@
           <p:cNvPr id="44" name="">
             <a:extLst xmlns:a="http://schemas.openxmlformats.org/drawingml/2006/main">
               <a:ext uri="{FF2B5EF4-FFF2-40B4-BE49-F238E27FC236}">
-                <a16:creationId xmlns:a16="http://schemas.microsoft.com/office/drawing/2014/main" id="{FBF11DAC-439D-4BEE-A4ED-656D383ED65E}"/>
+                <a16:creationId xmlns:a16="http://schemas.microsoft.com/office/drawing/2014/main" id="{E081D9EB-902B-49F8-B5FD-E0FD5D7FB9A4}"/>
               </a:ext>
             </a:extLst>
           </p:cNvPr>
@@ -19369,7 +19219,7 @@
           <p:cNvPr id="45" name="">
             <a:extLst xmlns:a="http://schemas.openxmlformats.org/drawingml/2006/main">
               <a:ext uri="{FF2B5EF4-FFF2-40B4-BE49-F238E27FC236}">
-                <a16:creationId xmlns:a16="http://schemas.microsoft.com/office/drawing/2014/main" id="{72AE383F-900D-4F3F-A312-1B108C725E84}"/>
+                <a16:creationId xmlns:a16="http://schemas.microsoft.com/office/drawing/2014/main" id="{CF488EE7-39AB-451D-9857-8FF32D6AF70C}"/>
               </a:ext>
             </a:extLst>
           </p:cNvPr>
@@ -19423,7 +19273,7 @@
           <p:cNvPr id="46" name="">
             <a:extLst xmlns:a="http://schemas.openxmlformats.org/drawingml/2006/main">
               <a:ext uri="{FF2B5EF4-FFF2-40B4-BE49-F238E27FC236}">
-                <a16:creationId xmlns:a16="http://schemas.microsoft.com/office/drawing/2014/main" id="{668E09D5-68C1-492A-A853-574C19C30D0F}"/>
+                <a16:creationId xmlns:a16="http://schemas.microsoft.com/office/drawing/2014/main" id="{1EB240D0-5E36-45EB-BC4D-E4B0C378DC23}"/>
               </a:ext>
             </a:extLst>
           </p:cNvPr>
@@ -19481,7 +19331,7 @@
           <p:cNvPr id="47" name="">
             <a:extLst xmlns:a="http://schemas.openxmlformats.org/drawingml/2006/main">
               <a:ext uri="{FF2B5EF4-FFF2-40B4-BE49-F238E27FC236}">
-                <a16:creationId xmlns:a16="http://schemas.microsoft.com/office/drawing/2014/main" id="{F115606E-9F0C-4A08-B9AB-956D8C2E37A7}"/>
+                <a16:creationId xmlns:a16="http://schemas.microsoft.com/office/drawing/2014/main" id="{610EC00D-E908-41C8-9544-BB6AB10AC911}"/>
               </a:ext>
             </a:extLst>
           </p:cNvPr>
@@ -19556,7 +19406,7 @@
           <p:cNvPr id="48" name="">
             <a:extLst xmlns:a="http://schemas.openxmlformats.org/drawingml/2006/main">
               <a:ext uri="{FF2B5EF4-FFF2-40B4-BE49-F238E27FC236}">
-                <a16:creationId xmlns:a16="http://schemas.microsoft.com/office/drawing/2014/main" id="{95EB6663-BC62-43A2-B3A0-CBA838599936}"/>
+                <a16:creationId xmlns:a16="http://schemas.microsoft.com/office/drawing/2014/main" id="{5E25C97C-1764-404B-9687-538D4E267443}"/>
               </a:ext>
             </a:extLst>
           </p:cNvPr>
@@ -19612,7 +19462,7 @@
     </p:spTree>
     <p:extLst>
       <p:ext uri="{BB962C8B-B14F-4D97-AF65-F5344CB8AC3E}">
-        <p14:creationId xmlns:p14="http://schemas.microsoft.com/office/powerpoint/2010/main" val="215761826"/>
+        <p14:creationId xmlns:p14="http://schemas.microsoft.com/office/powerpoint/2010/main" val="1404052377"/>
       </p:ext>
     </p:extLst>
   </p:cSld>
@@ -19643,7 +19493,7 @@
           <p:cNvPr id="1" name="Slide Number Placeholder 5">
             <a:extLst xmlns:a="http://schemas.openxmlformats.org/drawingml/2006/main">
               <a:ext uri="{FF2B5EF4-FFF2-40B4-BE49-F238E27FC236}">
-                <a16:creationId xmlns:a16="http://schemas.microsoft.com/office/drawing/2014/main" id="{38BDF79F-9F16-4FEE-B72E-1F506FE9EBEC}"/>
+                <a16:creationId xmlns:a16="http://schemas.microsoft.com/office/drawing/2014/main" id="{039602EF-25C6-4B7F-BD52-B0182DC44CC0}"/>
               </a:ext>
             </a:extLst>
           </p:cNvPr>
@@ -19679,7 +19529,7 @@
           <p:nvPr/>
         </p:nvPicPr>
         <p:blipFill>
-          <a:blip xmlns:r="http://schemas.openxmlformats.org/officeDocument/2006/relationships" xmlns:a="http://schemas.openxmlformats.org/drawingml/2006/main" r:embed="Re98304e6cc95476f"/>
+          <a:blip xmlns:r="http://schemas.openxmlformats.org/officeDocument/2006/relationships" xmlns:a="http://schemas.openxmlformats.org/drawingml/2006/main" r:embed="R3d24de698da14e50"/>
           <a:srcRect xmlns:a="http://schemas.openxmlformats.org/drawingml/2006/main" l="0" t="21875" r="0" b="21875"/>
           <a:stretch xmlns:a="http://schemas.openxmlformats.org/drawingml/2006/main">
             <a:fillRect l="0" t="0" r="0" b="0"/>
@@ -19700,7 +19550,7 @@
           <p:cNvPr id="3" name="">
             <a:extLst xmlns:a="http://schemas.openxmlformats.org/drawingml/2006/main">
               <a:ext uri="{FF2B5EF4-FFF2-40B4-BE49-F238E27FC236}">
-                <a16:creationId xmlns:a16="http://schemas.microsoft.com/office/drawing/2014/main" id="{8A03BA67-B894-4C2A-873F-5D6CE90C2D79}"/>
+                <a16:creationId xmlns:a16="http://schemas.microsoft.com/office/drawing/2014/main" id="{FCAFA055-E56D-4DF6-9D96-CEB87F662A20}"/>
               </a:ext>
             </a:extLst>
           </p:cNvPr>
@@ -19735,7 +19585,7 @@
           <p:cNvPr id="4" name="">
             <a:extLst xmlns:a="http://schemas.openxmlformats.org/drawingml/2006/main">
               <a:ext uri="{FF2B5EF4-FFF2-40B4-BE49-F238E27FC236}">
-                <a16:creationId xmlns:a16="http://schemas.microsoft.com/office/drawing/2014/main" id="{9A2014B0-0DF3-431F-A91F-E1008DA7E24E}"/>
+                <a16:creationId xmlns:a16="http://schemas.microsoft.com/office/drawing/2014/main" id="{4C165882-8C9E-4388-80BD-64863CCB9978}"/>
               </a:ext>
             </a:extLst>
           </p:cNvPr>
@@ -19770,7 +19620,7 @@
           <p:cNvPr id="5" name="">
             <a:extLst xmlns:a="http://schemas.openxmlformats.org/drawingml/2006/main">
               <a:ext uri="{FF2B5EF4-FFF2-40B4-BE49-F238E27FC236}">
-                <a16:creationId xmlns:a16="http://schemas.microsoft.com/office/drawing/2014/main" id="{F96DA863-5216-4F04-BCE9-AC6324FAE1AD}"/>
+                <a16:creationId xmlns:a16="http://schemas.microsoft.com/office/drawing/2014/main" id="{EF74869F-5021-4248-8196-2D370269CA4D}"/>
               </a:ext>
             </a:extLst>
           </p:cNvPr>
@@ -19807,7 +19657,7 @@
           <p:cNvPr id="6" name="">
             <a:extLst xmlns:a="http://schemas.openxmlformats.org/drawingml/2006/main">
               <a:ext uri="{FF2B5EF4-FFF2-40B4-BE49-F238E27FC236}">
-                <a16:creationId xmlns:a16="http://schemas.microsoft.com/office/drawing/2014/main" id="{B629AB18-35E1-4F24-BDDC-ACABFCF5C685}"/>
+                <a16:creationId xmlns:a16="http://schemas.microsoft.com/office/drawing/2014/main" id="{299EB236-2966-400D-963E-9A62B2902EDE}"/>
               </a:ext>
             </a:extLst>
           </p:cNvPr>
@@ -19844,7 +19694,7 @@
           <p:cNvPr id="7" name="">
             <a:extLst xmlns:a="http://schemas.openxmlformats.org/drawingml/2006/main">
               <a:ext uri="{FF2B5EF4-FFF2-40B4-BE49-F238E27FC236}">
-                <a16:creationId xmlns:a16="http://schemas.microsoft.com/office/drawing/2014/main" id="{477932E1-8F66-4074-893A-DFB725E1A9DF}"/>
+                <a16:creationId xmlns:a16="http://schemas.microsoft.com/office/drawing/2014/main" id="{C4E3278E-9E89-4B82-A1C1-F24B0D69CA55}"/>
               </a:ext>
             </a:extLst>
           </p:cNvPr>
@@ -19881,7 +19731,7 @@
           <p:cNvPr id="8" name="">
             <a:extLst xmlns:a="http://schemas.openxmlformats.org/drawingml/2006/main">
               <a:ext uri="{FF2B5EF4-FFF2-40B4-BE49-F238E27FC236}">
-                <a16:creationId xmlns:a16="http://schemas.microsoft.com/office/drawing/2014/main" id="{F7057823-6AD3-4F3F-A60A-3A5B85EB1753}"/>
+                <a16:creationId xmlns:a16="http://schemas.microsoft.com/office/drawing/2014/main" id="{51A84E5D-720D-46E2-9ADD-B9ED57B4D0E3}"/>
               </a:ext>
             </a:extLst>
           </p:cNvPr>
@@ -19918,7 +19768,7 @@
           <p:cNvPr id="9" name="">
             <a:extLst xmlns:a="http://schemas.openxmlformats.org/drawingml/2006/main">
               <a:ext uri="{FF2B5EF4-FFF2-40B4-BE49-F238E27FC236}">
-                <a16:creationId xmlns:a16="http://schemas.microsoft.com/office/drawing/2014/main" id="{0CA0DCC7-54E8-424D-8399-A5AD2A1FFF01}"/>
+                <a16:creationId xmlns:a16="http://schemas.microsoft.com/office/drawing/2014/main" id="{E4929268-C3C3-4417-BD06-30CDD79011DA}"/>
               </a:ext>
             </a:extLst>
           </p:cNvPr>
@@ -19976,7 +19826,7 @@
           <p:cNvPr id="10" name="">
             <a:extLst xmlns:a="http://schemas.openxmlformats.org/drawingml/2006/main">
               <a:ext uri="{FF2B5EF4-FFF2-40B4-BE49-F238E27FC236}">
-                <a16:creationId xmlns:a16="http://schemas.microsoft.com/office/drawing/2014/main" id="{0B5B9862-5664-4467-8C0B-D98DA3715513}"/>
+                <a16:creationId xmlns:a16="http://schemas.microsoft.com/office/drawing/2014/main" id="{CAB5239C-9A97-4F0F-B5F7-0CB6ED78D7B1}"/>
               </a:ext>
             </a:extLst>
           </p:cNvPr>
@@ -20034,7 +19884,7 @@
           <p:cNvPr id="11" name="">
             <a:extLst xmlns:a="http://schemas.openxmlformats.org/drawingml/2006/main">
               <a:ext uri="{FF2B5EF4-FFF2-40B4-BE49-F238E27FC236}">
-                <a16:creationId xmlns:a16="http://schemas.microsoft.com/office/drawing/2014/main" id="{C03C2B40-4732-407A-8FF9-2BC5FE921742}"/>
+                <a16:creationId xmlns:a16="http://schemas.microsoft.com/office/drawing/2014/main" id="{EFF3ED34-1B17-4AEE-8516-D2F90BD24CE3}"/>
               </a:ext>
             </a:extLst>
           </p:cNvPr>
@@ -20069,7 +19919,7 @@
           <p:cNvPr id="12" name="">
             <a:extLst xmlns:a="http://schemas.openxmlformats.org/drawingml/2006/main">
               <a:ext uri="{FF2B5EF4-FFF2-40B4-BE49-F238E27FC236}">
-                <a16:creationId xmlns:a16="http://schemas.microsoft.com/office/drawing/2014/main" id="{1A5F7612-426A-4A66-8D1D-613DF56B3AE1}"/>
+                <a16:creationId xmlns:a16="http://schemas.microsoft.com/office/drawing/2014/main" id="{BD87742B-8E46-4A9E-A441-191A3626B22E}"/>
               </a:ext>
             </a:extLst>
           </p:cNvPr>
@@ -20102,7 +19952,7 @@
           <p:cNvPr id="13" name="">
             <a:extLst xmlns:a="http://schemas.openxmlformats.org/drawingml/2006/main">
               <a:ext uri="{FF2B5EF4-FFF2-40B4-BE49-F238E27FC236}">
-                <a16:creationId xmlns:a16="http://schemas.microsoft.com/office/drawing/2014/main" id="{D9ED6F4B-133E-44F9-9CD8-8E663E2FD2FA}"/>
+                <a16:creationId xmlns:a16="http://schemas.microsoft.com/office/drawing/2014/main" id="{0DE97B2E-E40A-4315-842B-4C6E475718A2}"/>
               </a:ext>
             </a:extLst>
           </p:cNvPr>
@@ -20160,7 +20010,7 @@
           <p:cNvPr id="14" name="">
             <a:extLst xmlns:a="http://schemas.openxmlformats.org/drawingml/2006/main">
               <a:ext uri="{FF2B5EF4-FFF2-40B4-BE49-F238E27FC236}">
-                <a16:creationId xmlns:a16="http://schemas.microsoft.com/office/drawing/2014/main" id="{01D12F6D-C45B-4F0D-81D1-0AF8AE37D072}"/>
+                <a16:creationId xmlns:a16="http://schemas.microsoft.com/office/drawing/2014/main" id="{28DBFBEA-6C94-46D0-A145-B8E028993E22}"/>
               </a:ext>
             </a:extLst>
           </p:cNvPr>
@@ -20197,7 +20047,7 @@
           <p:cNvPr id="15" name="">
             <a:extLst xmlns:a="http://schemas.openxmlformats.org/drawingml/2006/main">
               <a:ext uri="{FF2B5EF4-FFF2-40B4-BE49-F238E27FC236}">
-                <a16:creationId xmlns:a16="http://schemas.microsoft.com/office/drawing/2014/main" id="{F73D4000-DDFF-42FE-AB3A-5DA655170701}"/>
+                <a16:creationId xmlns:a16="http://schemas.microsoft.com/office/drawing/2014/main" id="{A27B1142-D1BB-49D7-B534-6F54037F6B8F}"/>
               </a:ext>
             </a:extLst>
           </p:cNvPr>
@@ -20232,7 +20082,7 @@
           <p:cNvPr id="16" name="">
             <a:extLst xmlns:a="http://schemas.openxmlformats.org/drawingml/2006/main">
               <a:ext uri="{FF2B5EF4-FFF2-40B4-BE49-F238E27FC236}">
-                <a16:creationId xmlns:a16="http://schemas.microsoft.com/office/drawing/2014/main" id="{6BB4AD58-37CB-4092-8617-D9621AC11D74}"/>
+                <a16:creationId xmlns:a16="http://schemas.microsoft.com/office/drawing/2014/main" id="{94A35FB7-7959-4153-A64B-5AA2E10AB473}"/>
               </a:ext>
             </a:extLst>
           </p:cNvPr>
@@ -20290,7 +20140,7 @@
           <p:cNvPr id="17" name="">
             <a:extLst xmlns:a="http://schemas.openxmlformats.org/drawingml/2006/main">
               <a:ext uri="{FF2B5EF4-FFF2-40B4-BE49-F238E27FC236}">
-                <a16:creationId xmlns:a16="http://schemas.microsoft.com/office/drawing/2014/main" id="{42389042-5B39-4419-BD2A-7986B0E17C6C}"/>
+                <a16:creationId xmlns:a16="http://schemas.microsoft.com/office/drawing/2014/main" id="{BEC392AD-1253-4AAA-A67D-8854FD29A978}"/>
               </a:ext>
             </a:extLst>
           </p:cNvPr>
@@ -20382,7 +20232,7 @@
           <p:cNvPr id="18" name="">
             <a:extLst xmlns:a="http://schemas.openxmlformats.org/drawingml/2006/main">
               <a:ext uri="{FF2B5EF4-FFF2-40B4-BE49-F238E27FC236}">
-                <a16:creationId xmlns:a16="http://schemas.microsoft.com/office/drawing/2014/main" id="{E5A854FC-1325-477D-89D6-3D1085E2CDC3}"/>
+                <a16:creationId xmlns:a16="http://schemas.microsoft.com/office/drawing/2014/main" id="{F48DE20A-A0AE-4250-8498-394348E510CE}"/>
               </a:ext>
             </a:extLst>
           </p:cNvPr>
@@ -20419,7 +20269,7 @@
           <p:cNvPr id="19" name="">
             <a:extLst xmlns:a="http://schemas.openxmlformats.org/drawingml/2006/main">
               <a:ext uri="{FF2B5EF4-FFF2-40B4-BE49-F238E27FC236}">
-                <a16:creationId xmlns:a16="http://schemas.microsoft.com/office/drawing/2014/main" id="{97C268CF-78FE-43F7-A86A-03BCF5C1775D}"/>
+                <a16:creationId xmlns:a16="http://schemas.microsoft.com/office/drawing/2014/main" id="{6DE0C986-5629-4DF4-916A-54D202415A05}"/>
               </a:ext>
             </a:extLst>
           </p:cNvPr>
@@ -20454,7 +20304,7 @@
           <p:cNvPr id="20" name="">
             <a:extLst xmlns:a="http://schemas.openxmlformats.org/drawingml/2006/main">
               <a:ext uri="{FF2B5EF4-FFF2-40B4-BE49-F238E27FC236}">
-                <a16:creationId xmlns:a16="http://schemas.microsoft.com/office/drawing/2014/main" id="{29FD1B36-5EF8-4A26-9690-DC79E71BE031}"/>
+                <a16:creationId xmlns:a16="http://schemas.microsoft.com/office/drawing/2014/main" id="{4FF6D685-8D31-43A5-AECD-A7A2D1567616}"/>
               </a:ext>
             </a:extLst>
           </p:cNvPr>
@@ -20512,7 +20362,7 @@
           <p:cNvPr id="21" name="">
             <a:extLst xmlns:a="http://schemas.openxmlformats.org/drawingml/2006/main">
               <a:ext uri="{FF2B5EF4-FFF2-40B4-BE49-F238E27FC236}">
-                <a16:creationId xmlns:a16="http://schemas.microsoft.com/office/drawing/2014/main" id="{449F23E7-B896-4111-AC8D-2E070D9D74DB}"/>
+                <a16:creationId xmlns:a16="http://schemas.microsoft.com/office/drawing/2014/main" id="{8F4B24D4-7C84-408E-A83F-9FEE5DF99BF7}"/>
               </a:ext>
             </a:extLst>
           </p:cNvPr>
@@ -20587,7 +20437,7 @@
           <p:cNvPr id="22" name="">
             <a:extLst xmlns:a="http://schemas.openxmlformats.org/drawingml/2006/main">
               <a:ext uri="{FF2B5EF4-FFF2-40B4-BE49-F238E27FC236}">
-                <a16:creationId xmlns:a16="http://schemas.microsoft.com/office/drawing/2014/main" id="{5E312C2C-1528-49C2-AF99-1C0AF1D9B5C5}"/>
+                <a16:creationId xmlns:a16="http://schemas.microsoft.com/office/drawing/2014/main" id="{AF243AFC-CFFA-42AE-8283-A374C4C6EBA7}"/>
               </a:ext>
             </a:extLst>
           </p:cNvPr>
@@ -20624,7 +20474,7 @@
           <p:cNvPr id="23" name="">
             <a:extLst xmlns:a="http://schemas.openxmlformats.org/drawingml/2006/main">
               <a:ext uri="{FF2B5EF4-FFF2-40B4-BE49-F238E27FC236}">
-                <a16:creationId xmlns:a16="http://schemas.microsoft.com/office/drawing/2014/main" id="{77A34212-C0F3-413F-AAEE-64CAC96E01D7}"/>
+                <a16:creationId xmlns:a16="http://schemas.microsoft.com/office/drawing/2014/main" id="{5AB7C88E-CE48-43AB-8A5B-5B66B41C5CC7}"/>
               </a:ext>
             </a:extLst>
           </p:cNvPr>
@@ -20659,7 +20509,7 @@
           <p:cNvPr id="24" name="">
             <a:extLst xmlns:a="http://schemas.openxmlformats.org/drawingml/2006/main">
               <a:ext uri="{FF2B5EF4-FFF2-40B4-BE49-F238E27FC236}">
-                <a16:creationId xmlns:a16="http://schemas.microsoft.com/office/drawing/2014/main" id="{3DDBBB5F-D4B6-4463-BCE8-724F1AE575C5}"/>
+                <a16:creationId xmlns:a16="http://schemas.microsoft.com/office/drawing/2014/main" id="{FF72740D-41D4-40FC-A8C1-9EFAC52AF66C}"/>
               </a:ext>
             </a:extLst>
           </p:cNvPr>
@@ -20717,7 +20567,7 @@
           <p:cNvPr id="25" name="">
             <a:extLst xmlns:a="http://schemas.openxmlformats.org/drawingml/2006/main">
               <a:ext uri="{FF2B5EF4-FFF2-40B4-BE49-F238E27FC236}">
-                <a16:creationId xmlns:a16="http://schemas.microsoft.com/office/drawing/2014/main" id="{52FB4B09-7525-4F8B-9338-25E07FD53356}"/>
+                <a16:creationId xmlns:a16="http://schemas.microsoft.com/office/drawing/2014/main" id="{CC77FDAA-5F5B-43EB-8066-CB65D9DEBBC8}"/>
               </a:ext>
             </a:extLst>
           </p:cNvPr>
@@ -20809,7 +20659,7 @@
           <p:cNvPr id="26" name="">
             <a:extLst xmlns:a="http://schemas.openxmlformats.org/drawingml/2006/main">
               <a:ext uri="{FF2B5EF4-FFF2-40B4-BE49-F238E27FC236}">
-                <a16:creationId xmlns:a16="http://schemas.microsoft.com/office/drawing/2014/main" id="{DA980EBD-03BB-429D-AF2F-05B0C63417F2}"/>
+                <a16:creationId xmlns:a16="http://schemas.microsoft.com/office/drawing/2014/main" id="{96143916-8EE0-4E3A-90C9-E412D9EA0A86}"/>
               </a:ext>
             </a:extLst>
           </p:cNvPr>
@@ -20846,7 +20696,7 @@
           <p:cNvPr id="27" name="">
             <a:extLst xmlns:a="http://schemas.openxmlformats.org/drawingml/2006/main">
               <a:ext uri="{FF2B5EF4-FFF2-40B4-BE49-F238E27FC236}">
-                <a16:creationId xmlns:a16="http://schemas.microsoft.com/office/drawing/2014/main" id="{427697C4-B73A-4839-AC83-6F1A4C226C3B}"/>
+                <a16:creationId xmlns:a16="http://schemas.microsoft.com/office/drawing/2014/main" id="{2180E2D4-EA57-4C26-A025-B1C82BCF1634}"/>
               </a:ext>
             </a:extLst>
           </p:cNvPr>
@@ -20881,7 +20731,7 @@
           <p:cNvPr id="28" name="">
             <a:extLst xmlns:a="http://schemas.openxmlformats.org/drawingml/2006/main">
               <a:ext uri="{FF2B5EF4-FFF2-40B4-BE49-F238E27FC236}">
-                <a16:creationId xmlns:a16="http://schemas.microsoft.com/office/drawing/2014/main" id="{9B9A0C58-AEBD-4694-8DE7-26BA7C20C836}"/>
+                <a16:creationId xmlns:a16="http://schemas.microsoft.com/office/drawing/2014/main" id="{AD717648-5E6F-4719-823A-11986E628EB1}"/>
               </a:ext>
             </a:extLst>
           </p:cNvPr>
@@ -20939,7 +20789,7 @@
           <p:cNvPr id="29" name="">
             <a:extLst xmlns:a="http://schemas.openxmlformats.org/drawingml/2006/main">
               <a:ext uri="{FF2B5EF4-FFF2-40B4-BE49-F238E27FC236}">
-                <a16:creationId xmlns:a16="http://schemas.microsoft.com/office/drawing/2014/main" id="{4EC3E7AF-113D-4A49-824D-BD67E67D7232}"/>
+                <a16:creationId xmlns:a16="http://schemas.microsoft.com/office/drawing/2014/main" id="{EF95DA78-6790-4C16-816B-786E174D0959}"/>
               </a:ext>
             </a:extLst>
           </p:cNvPr>
@@ -20974,7 +20824,7 @@
           <p:cNvPr id="30" name="">
             <a:extLst xmlns:a="http://schemas.openxmlformats.org/drawingml/2006/main">
               <a:ext uri="{FF2B5EF4-FFF2-40B4-BE49-F238E27FC236}">
-                <a16:creationId xmlns:a16="http://schemas.microsoft.com/office/drawing/2014/main" id="{D9CE5809-E7FF-4400-9F55-84E47A0E0985}"/>
+                <a16:creationId xmlns:a16="http://schemas.microsoft.com/office/drawing/2014/main" id="{928CB17B-0B7E-4873-96C4-ABEF517EF57B}"/>
               </a:ext>
             </a:extLst>
           </p:cNvPr>
@@ -21009,7 +20859,7 @@
           <p:cNvPr id="31" name="">
             <a:extLst xmlns:a="http://schemas.openxmlformats.org/drawingml/2006/main">
               <a:ext uri="{FF2B5EF4-FFF2-40B4-BE49-F238E27FC236}">
-                <a16:creationId xmlns:a16="http://schemas.microsoft.com/office/drawing/2014/main" id="{218A7CF8-E4E1-4FFB-9795-002AA4FC02FC}"/>
+                <a16:creationId xmlns:a16="http://schemas.microsoft.com/office/drawing/2014/main" id="{9147CE73-3A42-4106-A028-0FEE6A0A264C}"/>
               </a:ext>
             </a:extLst>
           </p:cNvPr>
@@ -21067,7 +20917,7 @@
           <p:cNvPr id="32" name="">
             <a:extLst xmlns:a="http://schemas.openxmlformats.org/drawingml/2006/main">
               <a:ext uri="{FF2B5EF4-FFF2-40B4-BE49-F238E27FC236}">
-                <a16:creationId xmlns:a16="http://schemas.microsoft.com/office/drawing/2014/main" id="{73BC0608-1B18-4777-A0B5-487C4ABD145B}"/>
+                <a16:creationId xmlns:a16="http://schemas.microsoft.com/office/drawing/2014/main" id="{AF9AA590-007B-4BE3-99C0-04C56269A049}"/>
               </a:ext>
             </a:extLst>
           </p:cNvPr>
@@ -21123,7 +20973,7 @@
     </p:spTree>
     <p:extLst>
       <p:ext uri="{BB962C8B-B14F-4D97-AF65-F5344CB8AC3E}">
-        <p14:creationId xmlns:p14="http://schemas.microsoft.com/office/powerpoint/2010/main" val="171149207"/>
+        <p14:creationId xmlns:p14="http://schemas.microsoft.com/office/powerpoint/2010/main" val="913823447"/>
       </p:ext>
     </p:extLst>
   </p:cSld>

--- a/collections/organoid/presentation/brain-organoid-question-journey/outputs/output.pptx
+++ b/collections/organoid/presentation/brain-organoid-question-journey/outputs/output.pptx
@@ -2,24 +2,24 @@
 <file path=ppt/presentation.xml><?xml version="1.0" encoding="utf-8"?>
 <p:presentation xmlns:p="http://schemas.openxmlformats.org/presentationml/2006/main">
   <p:sldMasterIdLst>
-    <p:sldMasterId xmlns:r="http://schemas.openxmlformats.org/officeDocument/2006/relationships" id="2147483648" r:id="R847d3bcdd1614e66"/>
+    <p:sldMasterId xmlns:r="http://schemas.openxmlformats.org/officeDocument/2006/relationships" id="2147483648" r:id="R9d5f23c3fb244cc5"/>
   </p:sldMasterIdLst>
   <p:notesMasterIdLst>
-    <p:notesMasterId xmlns:r="http://schemas.openxmlformats.org/officeDocument/2006/relationships" r:id="Rda5afccd0fca4d0f"/>
+    <p:notesMasterId xmlns:r="http://schemas.openxmlformats.org/officeDocument/2006/relationships" r:id="R08ccb8f0aa7c4714"/>
   </p:notesMasterIdLst>
   <p:sldIdLst>
-    <p:sldId xmlns:r="http://schemas.openxmlformats.org/officeDocument/2006/relationships" id="256" r:id="R3f4954ee3aa04c7d"/>
-    <p:sldId xmlns:r="http://schemas.openxmlformats.org/officeDocument/2006/relationships" id="257" r:id="Rd6871358db4c4813"/>
-    <p:sldId xmlns:r="http://schemas.openxmlformats.org/officeDocument/2006/relationships" id="258" r:id="Rd7717332ed294255"/>
-    <p:sldId xmlns:r="http://schemas.openxmlformats.org/officeDocument/2006/relationships" id="259" r:id="Rc6d31ae0612c4837"/>
-    <p:sldId xmlns:r="http://schemas.openxmlformats.org/officeDocument/2006/relationships" id="260" r:id="Ref446fc2b3614ce0"/>
-    <p:sldId xmlns:r="http://schemas.openxmlformats.org/officeDocument/2006/relationships" id="261" r:id="R589186b350a8403e"/>
-    <p:sldId xmlns:r="http://schemas.openxmlformats.org/officeDocument/2006/relationships" id="262" r:id="Rd1de63512095426c"/>
-    <p:sldId xmlns:r="http://schemas.openxmlformats.org/officeDocument/2006/relationships" id="263" r:id="R38a14acfe0124ec6"/>
-    <p:sldId xmlns:r="http://schemas.openxmlformats.org/officeDocument/2006/relationships" id="264" r:id="R4f2a0c4cc5a44940"/>
-    <p:sldId xmlns:r="http://schemas.openxmlformats.org/officeDocument/2006/relationships" id="265" r:id="R7f2318b395944c75"/>
-    <p:sldId xmlns:r="http://schemas.openxmlformats.org/officeDocument/2006/relationships" id="266" r:id="Rfee722d2439c4a28"/>
-    <p:sldId xmlns:r="http://schemas.openxmlformats.org/officeDocument/2006/relationships" id="267" r:id="R8cf7a4b8b4014f73"/>
+    <p:sldId xmlns:r="http://schemas.openxmlformats.org/officeDocument/2006/relationships" id="256" r:id="R59c04cdb98bb4e76"/>
+    <p:sldId xmlns:r="http://schemas.openxmlformats.org/officeDocument/2006/relationships" id="257" r:id="Re43cd2630277410c"/>
+    <p:sldId xmlns:r="http://schemas.openxmlformats.org/officeDocument/2006/relationships" id="258" r:id="R850cccb3155340c9"/>
+    <p:sldId xmlns:r="http://schemas.openxmlformats.org/officeDocument/2006/relationships" id="259" r:id="R44c3a14260a94b1f"/>
+    <p:sldId xmlns:r="http://schemas.openxmlformats.org/officeDocument/2006/relationships" id="260" r:id="Rd863f9937c1742be"/>
+    <p:sldId xmlns:r="http://schemas.openxmlformats.org/officeDocument/2006/relationships" id="261" r:id="R4f5ce802c25b416c"/>
+    <p:sldId xmlns:r="http://schemas.openxmlformats.org/officeDocument/2006/relationships" id="262" r:id="R86969ac528e94134"/>
+    <p:sldId xmlns:r="http://schemas.openxmlformats.org/officeDocument/2006/relationships" id="263" r:id="R4e9798e2c3f243a7"/>
+    <p:sldId xmlns:r="http://schemas.openxmlformats.org/officeDocument/2006/relationships" id="264" r:id="Ra03f0ca77dce4f87"/>
+    <p:sldId xmlns:r="http://schemas.openxmlformats.org/officeDocument/2006/relationships" id="265" r:id="Rda58534a370d4182"/>
+    <p:sldId xmlns:r="http://schemas.openxmlformats.org/officeDocument/2006/relationships" id="266" r:id="R8355f16126db44c6"/>
+    <p:sldId xmlns:r="http://schemas.openxmlformats.org/officeDocument/2006/relationships" id="267" r:id="R4a8ff96e7f67477f"/>
   </p:sldIdLst>
   <p:sldSz cx="12192000" cy="6858000"/>
   <p:notesSz cx="6858000" cy="9144000"/>
@@ -1905,7 +1905,7 @@
           <p:cNvPr id="1" name="Title 1">
             <a:extLst xmlns:a="http://schemas.openxmlformats.org/drawingml/2006/main">
               <a:ext uri="{FF2B5EF4-FFF2-40B4-BE49-F238E27FC236}">
-                <a16:creationId xmlns:a16="http://schemas.microsoft.com/office/drawing/2014/main" id="{8FC4AEA5-B41F-42B9-B500-0EED2D48D740}"/>
+                <a16:creationId xmlns:a16="http://schemas.microsoft.com/office/drawing/2014/main" id="{B594F4D4-7053-413B-AA06-E9FB569EB34A}"/>
               </a:ext>
             </a:extLst>
           </p:cNvPr>
@@ -1936,7 +1936,7 @@
           <p:cNvPr id="2" name="Subtitle 2">
             <a:extLst xmlns:a="http://schemas.openxmlformats.org/drawingml/2006/main">
               <a:ext uri="{FF2B5EF4-FFF2-40B4-BE49-F238E27FC236}">
-                <a16:creationId xmlns:a16="http://schemas.microsoft.com/office/drawing/2014/main" id="{8E51C56C-03C2-40B2-BF8D-A06F4BDBE6C6}"/>
+                <a16:creationId xmlns:a16="http://schemas.microsoft.com/office/drawing/2014/main" id="{9C04EAD1-CBDD-4069-A4BA-AA4ECC609695}"/>
               </a:ext>
             </a:extLst>
           </p:cNvPr>
@@ -1999,7 +1999,7 @@
           <p:cNvPr id="3" name="Date Placeholder 3">
             <a:extLst xmlns:a="http://schemas.openxmlformats.org/drawingml/2006/main">
               <a:ext uri="{FF2B5EF4-FFF2-40B4-BE49-F238E27FC236}">
-                <a16:creationId xmlns:a16="http://schemas.microsoft.com/office/drawing/2014/main" id="{C6CC3A52-91BA-40E5-8D1B-EEBE7F7565E2}"/>
+                <a16:creationId xmlns:a16="http://schemas.microsoft.com/office/drawing/2014/main" id="{9A0EA56D-F042-4F53-B965-BDDD6EEC1F21}"/>
               </a:ext>
             </a:extLst>
           </p:cNvPr>
@@ -2020,7 +2020,7 @@
           <p:cNvPr id="4" name="Footer Placeholder 4">
             <a:extLst xmlns:a="http://schemas.openxmlformats.org/drawingml/2006/main">
               <a:ext uri="{FF2B5EF4-FFF2-40B4-BE49-F238E27FC236}">
-                <a16:creationId xmlns:a16="http://schemas.microsoft.com/office/drawing/2014/main" id="{86316F20-4004-4DA3-AEB9-4325640F0499}"/>
+                <a16:creationId xmlns:a16="http://schemas.microsoft.com/office/drawing/2014/main" id="{9AE38D5D-2DA4-4A1B-89C3-83D6AD8F91A4}"/>
               </a:ext>
             </a:extLst>
           </p:cNvPr>
@@ -2041,7 +2041,7 @@
           <p:cNvPr id="5" name="Slide Number Placeholder 5">
             <a:extLst xmlns:a="http://schemas.openxmlformats.org/drawingml/2006/main">
               <a:ext uri="{FF2B5EF4-FFF2-40B4-BE49-F238E27FC236}">
-                <a16:creationId xmlns:a16="http://schemas.microsoft.com/office/drawing/2014/main" id="{960B6032-F217-4E1A-A5DD-55BD6786A62D}"/>
+                <a16:creationId xmlns:a16="http://schemas.microsoft.com/office/drawing/2014/main" id="{821508BF-91E3-4E78-84B3-DCBD229C8660}"/>
               </a:ext>
             </a:extLst>
           </p:cNvPr>
@@ -2084,7 +2084,7 @@
           <p:cNvPr id="1" name="Slide Number Placeholder 5">
             <a:extLst xmlns:a="http://schemas.openxmlformats.org/drawingml/2006/main">
               <a:ext uri="{FF2B5EF4-FFF2-40B4-BE49-F238E27FC236}">
-                <a16:creationId xmlns:a16="http://schemas.microsoft.com/office/drawing/2014/main" id="{73DB2CFF-7DE9-4FC0-AD72-6ACFF3EC343D}"/>
+                <a16:creationId xmlns:a16="http://schemas.microsoft.com/office/drawing/2014/main" id="{62CAA3AB-91E2-4307-BCD7-126A01FC7DD5}"/>
               </a:ext>
             </a:extLst>
           </p:cNvPr>
@@ -2123,7 +2123,7 @@
   </p:cSld>
   <p:clrMap bg1="lt1" tx1="dk1" bg2="lt2" tx2="dk2" accent1="accent1" accent2="accent2" accent3="accent3" accent4="accent4" accent5="accent5" accent6="accent6" hlink="hlink" folHlink="folHlink"/>
   <p:sldLayoutIdLst>
-    <p:sldLayoutId xmlns:r="http://schemas.openxmlformats.org/officeDocument/2006/relationships" id="2147483649" r:id="R29fb2ca2a0534560"/>
+    <p:sldLayoutId xmlns:r="http://schemas.openxmlformats.org/officeDocument/2006/relationships" id="2147483649" r:id="R3f567348ddb84e00"/>
   </p:sldLayoutIdLst>
   <p:txStyles>
     <p:titleStyle>
@@ -2429,7 +2429,7 @@
           <p:cNvPr id="1" name="Slide Number Placeholder 5">
             <a:extLst xmlns:a="http://schemas.openxmlformats.org/drawingml/2006/main">
               <a:ext uri="{FF2B5EF4-FFF2-40B4-BE49-F238E27FC236}">
-                <a16:creationId xmlns:a16="http://schemas.microsoft.com/office/drawing/2014/main" id="{960B6032-F217-4E1A-A5DD-55BD6786A62D}"/>
+                <a16:creationId xmlns:a16="http://schemas.microsoft.com/office/drawing/2014/main" id="{821508BF-91E3-4E78-84B3-DCBD229C8660}"/>
               </a:ext>
             </a:extLst>
           </p:cNvPr>
@@ -2465,7 +2465,7 @@
           <p:nvPr/>
         </p:nvPicPr>
         <p:blipFill>
-          <a:blip xmlns:r="http://schemas.openxmlformats.org/officeDocument/2006/relationships" xmlns:a="http://schemas.openxmlformats.org/drawingml/2006/main" r:embed="R49b208c5f124437c"/>
+          <a:blip xmlns:r="http://schemas.openxmlformats.org/officeDocument/2006/relationships" xmlns:a="http://schemas.openxmlformats.org/drawingml/2006/main" r:embed="R95fcabfdd68a4c73"/>
           <a:srcRect xmlns:a="http://schemas.openxmlformats.org/drawingml/2006/main" l="0" t="21875" r="0" b="21875"/>
           <a:stretch xmlns:a="http://schemas.openxmlformats.org/drawingml/2006/main">
             <a:fillRect l="0" t="0" r="0" b="0"/>
@@ -2486,7 +2486,7 @@
           <p:cNvPr id="3" name="">
             <a:extLst xmlns:a="http://schemas.openxmlformats.org/drawingml/2006/main">
               <a:ext uri="{FF2B5EF4-FFF2-40B4-BE49-F238E27FC236}">
-                <a16:creationId xmlns:a16="http://schemas.microsoft.com/office/drawing/2014/main" id="{9909BEA2-8E39-4FA3-8E67-36A46ABEA9B3}"/>
+                <a16:creationId xmlns:a16="http://schemas.microsoft.com/office/drawing/2014/main" id="{4135203F-E698-4D19-9ED9-AA9E7F389468}"/>
               </a:ext>
             </a:extLst>
           </p:cNvPr>
@@ -2521,7 +2521,7 @@
           <p:cNvPr id="4" name="">
             <a:extLst xmlns:a="http://schemas.openxmlformats.org/drawingml/2006/main">
               <a:ext uri="{FF2B5EF4-FFF2-40B4-BE49-F238E27FC236}">
-                <a16:creationId xmlns:a16="http://schemas.microsoft.com/office/drawing/2014/main" id="{C03DACC1-CC47-4A42-B6AD-B61EAC7B25B6}"/>
+                <a16:creationId xmlns:a16="http://schemas.microsoft.com/office/drawing/2014/main" id="{F002336D-5AD2-4ADD-9262-822687A62145}"/>
               </a:ext>
             </a:extLst>
           </p:cNvPr>
@@ -2556,7 +2556,7 @@
           <p:cNvPr id="5" name="">
             <a:extLst xmlns:a="http://schemas.openxmlformats.org/drawingml/2006/main">
               <a:ext uri="{FF2B5EF4-FFF2-40B4-BE49-F238E27FC236}">
-                <a16:creationId xmlns:a16="http://schemas.microsoft.com/office/drawing/2014/main" id="{9C174583-5BE4-46FE-8472-2797E9682499}"/>
+                <a16:creationId xmlns:a16="http://schemas.microsoft.com/office/drawing/2014/main" id="{E60CE9B8-B881-4A5E-852B-50DFE5D4C899}"/>
               </a:ext>
             </a:extLst>
           </p:cNvPr>
@@ -2593,7 +2593,7 @@
           <p:cNvPr id="6" name="">
             <a:extLst xmlns:a="http://schemas.openxmlformats.org/drawingml/2006/main">
               <a:ext uri="{FF2B5EF4-FFF2-40B4-BE49-F238E27FC236}">
-                <a16:creationId xmlns:a16="http://schemas.microsoft.com/office/drawing/2014/main" id="{956E8B7C-5FEA-4425-AB0B-4125DAB527EF}"/>
+                <a16:creationId xmlns:a16="http://schemas.microsoft.com/office/drawing/2014/main" id="{00E68DD0-4A9D-48EE-9CA9-11594A5923B9}"/>
               </a:ext>
             </a:extLst>
           </p:cNvPr>
@@ -2630,7 +2630,7 @@
           <p:cNvPr id="7" name="">
             <a:extLst xmlns:a="http://schemas.openxmlformats.org/drawingml/2006/main">
               <a:ext uri="{FF2B5EF4-FFF2-40B4-BE49-F238E27FC236}">
-                <a16:creationId xmlns:a16="http://schemas.microsoft.com/office/drawing/2014/main" id="{19D093F4-3099-4E78-85DF-C891759F3539}"/>
+                <a16:creationId xmlns:a16="http://schemas.microsoft.com/office/drawing/2014/main" id="{2400C212-CD8B-4A34-A88B-B75F0D6D7DCE}"/>
               </a:ext>
             </a:extLst>
           </p:cNvPr>
@@ -2667,7 +2667,7 @@
           <p:cNvPr id="8" name="">
             <a:extLst xmlns:a="http://schemas.openxmlformats.org/drawingml/2006/main">
               <a:ext uri="{FF2B5EF4-FFF2-40B4-BE49-F238E27FC236}">
-                <a16:creationId xmlns:a16="http://schemas.microsoft.com/office/drawing/2014/main" id="{5BD035D1-3D52-4817-A334-F5CF415A338D}"/>
+                <a16:creationId xmlns:a16="http://schemas.microsoft.com/office/drawing/2014/main" id="{7B134B4A-E7E5-4705-AC43-C9BAEDCCF8C1}"/>
               </a:ext>
             </a:extLst>
           </p:cNvPr>
@@ -2704,7 +2704,7 @@
           <p:cNvPr id="9" name="">
             <a:extLst xmlns:a="http://schemas.openxmlformats.org/drawingml/2006/main">
               <a:ext uri="{FF2B5EF4-FFF2-40B4-BE49-F238E27FC236}">
-                <a16:creationId xmlns:a16="http://schemas.microsoft.com/office/drawing/2014/main" id="{11CC69E2-7557-4976-9FAF-8A1F6D853C03}"/>
+                <a16:creationId xmlns:a16="http://schemas.microsoft.com/office/drawing/2014/main" id="{CD752D20-5207-4A92-A34C-CE7DEEADC505}"/>
               </a:ext>
             </a:extLst>
           </p:cNvPr>
@@ -2739,7 +2739,7 @@
           <p:cNvPr id="10" name="">
             <a:extLst xmlns:a="http://schemas.openxmlformats.org/drawingml/2006/main">
               <a:ext uri="{FF2B5EF4-FFF2-40B4-BE49-F238E27FC236}">
-                <a16:creationId xmlns:a16="http://schemas.microsoft.com/office/drawing/2014/main" id="{35EE29E2-A78D-49E4-BC8B-EEE2201932DC}"/>
+                <a16:creationId xmlns:a16="http://schemas.microsoft.com/office/drawing/2014/main" id="{EC69A68A-A88F-4DE3-AEEE-D5E0C5E44BBC}"/>
               </a:ext>
             </a:extLst>
           </p:cNvPr>
@@ -2797,7 +2797,7 @@
           <p:cNvPr id="11" name="">
             <a:extLst xmlns:a="http://schemas.openxmlformats.org/drawingml/2006/main">
               <a:ext uri="{FF2B5EF4-FFF2-40B4-BE49-F238E27FC236}">
-                <a16:creationId xmlns:a16="http://schemas.microsoft.com/office/drawing/2014/main" id="{6C854A85-5DCD-452A-8DA9-5309E1464A2A}"/>
+                <a16:creationId xmlns:a16="http://schemas.microsoft.com/office/drawing/2014/main" id="{E7941980-7445-4161-AF3D-D1FA45EEB487}"/>
               </a:ext>
             </a:extLst>
           </p:cNvPr>
@@ -2872,7 +2872,7 @@
           <p:cNvPr id="12" name="">
             <a:extLst xmlns:a="http://schemas.openxmlformats.org/drawingml/2006/main">
               <a:ext uri="{FF2B5EF4-FFF2-40B4-BE49-F238E27FC236}">
-                <a16:creationId xmlns:a16="http://schemas.microsoft.com/office/drawing/2014/main" id="{B3E64873-65FC-4728-AD84-EACF5AE79473}"/>
+                <a16:creationId xmlns:a16="http://schemas.microsoft.com/office/drawing/2014/main" id="{23443940-25C1-473E-B83A-9D790F00148F}"/>
               </a:ext>
             </a:extLst>
           </p:cNvPr>
@@ -2947,7 +2947,7 @@
           <p:cNvPr id="13" name="">
             <a:extLst xmlns:a="http://schemas.openxmlformats.org/drawingml/2006/main">
               <a:ext uri="{FF2B5EF4-FFF2-40B4-BE49-F238E27FC236}">
-                <a16:creationId xmlns:a16="http://schemas.microsoft.com/office/drawing/2014/main" id="{9F83193E-A811-4D66-981D-82937BF89F0C}"/>
+                <a16:creationId xmlns:a16="http://schemas.microsoft.com/office/drawing/2014/main" id="{6F2D9D53-E184-40D5-AFA9-228AAD70F461}"/>
               </a:ext>
             </a:extLst>
           </p:cNvPr>
@@ -2984,7 +2984,7 @@
           <p:cNvPr id="14" name="">
             <a:extLst xmlns:a="http://schemas.openxmlformats.org/drawingml/2006/main">
               <a:ext uri="{FF2B5EF4-FFF2-40B4-BE49-F238E27FC236}">
-                <a16:creationId xmlns:a16="http://schemas.microsoft.com/office/drawing/2014/main" id="{CDF59371-5E08-489C-9EDA-383AF7624C44}"/>
+                <a16:creationId xmlns:a16="http://schemas.microsoft.com/office/drawing/2014/main" id="{EBAEC967-ACFE-4E53-B3E3-2E4511DB46F7}"/>
               </a:ext>
             </a:extLst>
           </p:cNvPr>
@@ -3042,7 +3042,7 @@
           <p:cNvPr id="15" name="">
             <a:extLst xmlns:a="http://schemas.openxmlformats.org/drawingml/2006/main">
               <a:ext uri="{FF2B5EF4-FFF2-40B4-BE49-F238E27FC236}">
-                <a16:creationId xmlns:a16="http://schemas.microsoft.com/office/drawing/2014/main" id="{FC8B7456-3A6B-4E4F-A8E8-4CED96CD176F}"/>
+                <a16:creationId xmlns:a16="http://schemas.microsoft.com/office/drawing/2014/main" id="{7EAA2DD1-1CD7-4B6C-B1E8-0A2F6D0B6AC2}"/>
               </a:ext>
             </a:extLst>
           </p:cNvPr>
@@ -3077,19 +3077,19 @@
           <p:cNvPr id="16" name="">
             <a:extLst xmlns:a="http://schemas.openxmlformats.org/drawingml/2006/main">
               <a:ext uri="{FF2B5EF4-FFF2-40B4-BE49-F238E27FC236}">
-                <a16:creationId xmlns:a16="http://schemas.microsoft.com/office/drawing/2014/main" id="{F7925053-28BE-4B52-A288-6477F6D3604D}"/>
-              </a:ext>
-            </a:extLst>
-          </p:cNvPr>
-          <p:cNvSpPr>
-            <a:spLocks xmlns:a="http://schemas.openxmlformats.org/drawingml/2006/main" noGrp="1"/>
-          </p:cNvSpPr>
-          <p:nvPr/>
-        </p:nvSpPr>
-        <p:spPr>
-          <a:xfrm xmlns:a="http://schemas.openxmlformats.org/drawingml/2006/main">
-            <a:off x="8020050" y="1200150"/>
-            <a:ext cx="66675" cy="1104900"/>
+                <a16:creationId xmlns:a16="http://schemas.microsoft.com/office/drawing/2014/main" id="{1C4BD8C6-BE38-4BD5-8BC5-54DAAABCBAAF}"/>
+              </a:ext>
+            </a:extLst>
+          </p:cNvPr>
+          <p:cNvSpPr>
+            <a:spLocks xmlns:a="http://schemas.openxmlformats.org/drawingml/2006/main" noGrp="1"/>
+          </p:cNvSpPr>
+          <p:nvPr/>
+        </p:nvSpPr>
+        <p:spPr>
+          <a:xfrm xmlns:a="http://schemas.openxmlformats.org/drawingml/2006/main">
+            <a:off x="8067675" y="1247775"/>
+            <a:ext cx="47625" cy="1009650"/>
           </a:xfrm>
           <a:prstGeom xmlns:a="http://schemas.openxmlformats.org/drawingml/2006/main" prst="rect">
             <a:avLst/>
@@ -3112,7 +3112,7 @@
           <p:cNvPr id="17" name="">
             <a:extLst xmlns:a="http://schemas.openxmlformats.org/drawingml/2006/main">
               <a:ext uri="{FF2B5EF4-FFF2-40B4-BE49-F238E27FC236}">
-                <a16:creationId xmlns:a16="http://schemas.microsoft.com/office/drawing/2014/main" id="{EF7CD295-6E84-409E-B446-A2A152CFA43A}"/>
+                <a16:creationId xmlns:a16="http://schemas.microsoft.com/office/drawing/2014/main" id="{D33EDC71-79A8-4931-B4CA-86057250E3FC}"/>
               </a:ext>
             </a:extLst>
           </p:cNvPr>
@@ -3166,7 +3166,7 @@
           <p:cNvPr id="18" name="">
             <a:extLst xmlns:a="http://schemas.openxmlformats.org/drawingml/2006/main">
               <a:ext uri="{FF2B5EF4-FFF2-40B4-BE49-F238E27FC236}">
-                <a16:creationId xmlns:a16="http://schemas.microsoft.com/office/drawing/2014/main" id="{2AE6C30A-6286-4F47-A26F-67C0DA9C2CB8}"/>
+                <a16:creationId xmlns:a16="http://schemas.microsoft.com/office/drawing/2014/main" id="{BEF1D92C-E63F-451C-A480-03978193D812}"/>
               </a:ext>
             </a:extLst>
           </p:cNvPr>
@@ -3224,7 +3224,7 @@
           <p:cNvPr id="19" name="">
             <a:extLst xmlns:a="http://schemas.openxmlformats.org/drawingml/2006/main">
               <a:ext uri="{FF2B5EF4-FFF2-40B4-BE49-F238E27FC236}">
-                <a16:creationId xmlns:a16="http://schemas.microsoft.com/office/drawing/2014/main" id="{5A4E3C6B-A710-4859-8ECB-4B0C6E4ECA35}"/>
+                <a16:creationId xmlns:a16="http://schemas.microsoft.com/office/drawing/2014/main" id="{319C1CF3-F704-4E39-A329-17C738548D79}"/>
               </a:ext>
             </a:extLst>
           </p:cNvPr>
@@ -3299,7 +3299,7 @@
           <p:cNvPr id="20" name="">
             <a:extLst xmlns:a="http://schemas.openxmlformats.org/drawingml/2006/main">
               <a:ext uri="{FF2B5EF4-FFF2-40B4-BE49-F238E27FC236}">
-                <a16:creationId xmlns:a16="http://schemas.microsoft.com/office/drawing/2014/main" id="{7C40DB72-1F92-442D-B739-96A2EF56D1BB}"/>
+                <a16:creationId xmlns:a16="http://schemas.microsoft.com/office/drawing/2014/main" id="{B89F2617-D745-4667-AA30-C989158B3EDD}"/>
               </a:ext>
             </a:extLst>
           </p:cNvPr>
@@ -3334,19 +3334,19 @@
           <p:cNvPr id="21" name="">
             <a:extLst xmlns:a="http://schemas.openxmlformats.org/drawingml/2006/main">
               <a:ext uri="{FF2B5EF4-FFF2-40B4-BE49-F238E27FC236}">
-                <a16:creationId xmlns:a16="http://schemas.microsoft.com/office/drawing/2014/main" id="{756D53BA-A318-4B4B-AC90-186D5266F059}"/>
-              </a:ext>
-            </a:extLst>
-          </p:cNvPr>
-          <p:cNvSpPr>
-            <a:spLocks xmlns:a="http://schemas.openxmlformats.org/drawingml/2006/main" noGrp="1"/>
-          </p:cNvSpPr>
-          <p:nvPr/>
-        </p:nvSpPr>
-        <p:spPr>
-          <a:xfrm xmlns:a="http://schemas.openxmlformats.org/drawingml/2006/main">
-            <a:off x="9296400" y="2667000"/>
-            <a:ext cx="66675" cy="1104900"/>
+                <a16:creationId xmlns:a16="http://schemas.microsoft.com/office/drawing/2014/main" id="{F673671E-8E5E-4CF4-A581-607848400CBB}"/>
+              </a:ext>
+            </a:extLst>
+          </p:cNvPr>
+          <p:cNvSpPr>
+            <a:spLocks xmlns:a="http://schemas.openxmlformats.org/drawingml/2006/main" noGrp="1"/>
+          </p:cNvSpPr>
+          <p:nvPr/>
+        </p:nvSpPr>
+        <p:spPr>
+          <a:xfrm xmlns:a="http://schemas.openxmlformats.org/drawingml/2006/main">
+            <a:off x="9344025" y="2714625"/>
+            <a:ext cx="47625" cy="1009650"/>
           </a:xfrm>
           <a:prstGeom xmlns:a="http://schemas.openxmlformats.org/drawingml/2006/main" prst="rect">
             <a:avLst/>
@@ -3369,7 +3369,7 @@
           <p:cNvPr id="22" name="">
             <a:extLst xmlns:a="http://schemas.openxmlformats.org/drawingml/2006/main">
               <a:ext uri="{FF2B5EF4-FFF2-40B4-BE49-F238E27FC236}">
-                <a16:creationId xmlns:a16="http://schemas.microsoft.com/office/drawing/2014/main" id="{0F0E8F94-A82B-45A3-AB1B-710E5F0F1DF0}"/>
+                <a16:creationId xmlns:a16="http://schemas.microsoft.com/office/drawing/2014/main" id="{85883388-EE98-4ABA-B710-B12A85F8283E}"/>
               </a:ext>
             </a:extLst>
           </p:cNvPr>
@@ -3423,7 +3423,7 @@
           <p:cNvPr id="23" name="">
             <a:extLst xmlns:a="http://schemas.openxmlformats.org/drawingml/2006/main">
               <a:ext uri="{FF2B5EF4-FFF2-40B4-BE49-F238E27FC236}">
-                <a16:creationId xmlns:a16="http://schemas.microsoft.com/office/drawing/2014/main" id="{E425D37B-D1BB-4E8C-9816-E5E4614E3CAF}"/>
+                <a16:creationId xmlns:a16="http://schemas.microsoft.com/office/drawing/2014/main" id="{B69E5FDD-FA9F-4DCD-8AED-8003A1551617}"/>
               </a:ext>
             </a:extLst>
           </p:cNvPr>
@@ -3481,7 +3481,7 @@
           <p:cNvPr id="24" name="">
             <a:extLst xmlns:a="http://schemas.openxmlformats.org/drawingml/2006/main">
               <a:ext uri="{FF2B5EF4-FFF2-40B4-BE49-F238E27FC236}">
-                <a16:creationId xmlns:a16="http://schemas.microsoft.com/office/drawing/2014/main" id="{114ED0B1-FE71-423E-A61E-A07435B733FC}"/>
+                <a16:creationId xmlns:a16="http://schemas.microsoft.com/office/drawing/2014/main" id="{3AF96F0F-8C4E-4FE9-AE39-5FB50D4824AF}"/>
               </a:ext>
             </a:extLst>
           </p:cNvPr>
@@ -3556,7 +3556,7 @@
           <p:cNvPr id="25" name="">
             <a:extLst xmlns:a="http://schemas.openxmlformats.org/drawingml/2006/main">
               <a:ext uri="{FF2B5EF4-FFF2-40B4-BE49-F238E27FC236}">
-                <a16:creationId xmlns:a16="http://schemas.microsoft.com/office/drawing/2014/main" id="{977156B3-15AE-499E-BF21-D22B66EF0CA0}"/>
+                <a16:creationId xmlns:a16="http://schemas.microsoft.com/office/drawing/2014/main" id="{C6D61AFA-D7FE-4725-A91D-D17ABBB5D7D1}"/>
               </a:ext>
             </a:extLst>
           </p:cNvPr>
@@ -3591,19 +3591,19 @@
           <p:cNvPr id="26" name="">
             <a:extLst xmlns:a="http://schemas.openxmlformats.org/drawingml/2006/main">
               <a:ext uri="{FF2B5EF4-FFF2-40B4-BE49-F238E27FC236}">
-                <a16:creationId xmlns:a16="http://schemas.microsoft.com/office/drawing/2014/main" id="{E2D5F9AB-8E81-4FCD-85A1-1083C60834E1}"/>
-              </a:ext>
-            </a:extLst>
-          </p:cNvPr>
-          <p:cNvSpPr>
-            <a:spLocks xmlns:a="http://schemas.openxmlformats.org/drawingml/2006/main" noGrp="1"/>
-          </p:cNvSpPr>
-          <p:nvPr/>
-        </p:nvSpPr>
-        <p:spPr>
-          <a:xfrm xmlns:a="http://schemas.openxmlformats.org/drawingml/2006/main">
-            <a:off x="8001000" y="4191000"/>
-            <a:ext cx="66675" cy="1104900"/>
+                <a16:creationId xmlns:a16="http://schemas.microsoft.com/office/drawing/2014/main" id="{D746FE9E-CC90-4F3B-9D81-5DFCBB28E910}"/>
+              </a:ext>
+            </a:extLst>
+          </p:cNvPr>
+          <p:cNvSpPr>
+            <a:spLocks xmlns:a="http://schemas.openxmlformats.org/drawingml/2006/main" noGrp="1"/>
+          </p:cNvSpPr>
+          <p:nvPr/>
+        </p:nvSpPr>
+        <p:spPr>
+          <a:xfrm xmlns:a="http://schemas.openxmlformats.org/drawingml/2006/main">
+            <a:off x="8048625" y="4238625"/>
+            <a:ext cx="47625" cy="1009650"/>
           </a:xfrm>
           <a:prstGeom xmlns:a="http://schemas.openxmlformats.org/drawingml/2006/main" prst="rect">
             <a:avLst/>
@@ -3626,7 +3626,7 @@
           <p:cNvPr id="27" name="">
             <a:extLst xmlns:a="http://schemas.openxmlformats.org/drawingml/2006/main">
               <a:ext uri="{FF2B5EF4-FFF2-40B4-BE49-F238E27FC236}">
-                <a16:creationId xmlns:a16="http://schemas.microsoft.com/office/drawing/2014/main" id="{57A020F1-0693-469D-894E-A6D33941EB4F}"/>
+                <a16:creationId xmlns:a16="http://schemas.microsoft.com/office/drawing/2014/main" id="{5F01CB18-5DCF-4966-8D83-8D44440DD3A1}"/>
               </a:ext>
             </a:extLst>
           </p:cNvPr>
@@ -3680,7 +3680,7 @@
           <p:cNvPr id="28" name="">
             <a:extLst xmlns:a="http://schemas.openxmlformats.org/drawingml/2006/main">
               <a:ext uri="{FF2B5EF4-FFF2-40B4-BE49-F238E27FC236}">
-                <a16:creationId xmlns:a16="http://schemas.microsoft.com/office/drawing/2014/main" id="{9CB4DD8C-3056-42C6-807A-0C68E680045B}"/>
+                <a16:creationId xmlns:a16="http://schemas.microsoft.com/office/drawing/2014/main" id="{38A82BF3-59FF-4FD5-8EF0-C576631AF9A6}"/>
               </a:ext>
             </a:extLst>
           </p:cNvPr>
@@ -3738,7 +3738,7 @@
           <p:cNvPr id="29" name="">
             <a:extLst xmlns:a="http://schemas.openxmlformats.org/drawingml/2006/main">
               <a:ext uri="{FF2B5EF4-FFF2-40B4-BE49-F238E27FC236}">
-                <a16:creationId xmlns:a16="http://schemas.microsoft.com/office/drawing/2014/main" id="{D2455DB4-B51B-4C8A-9003-29DFD25740A2}"/>
+                <a16:creationId xmlns:a16="http://schemas.microsoft.com/office/drawing/2014/main" id="{3825E9B4-D853-4F9D-B1E9-5413BB4D1330}"/>
               </a:ext>
             </a:extLst>
           </p:cNvPr>
@@ -3813,7 +3813,7 @@
           <p:cNvPr id="30" name="">
             <a:extLst xmlns:a="http://schemas.openxmlformats.org/drawingml/2006/main">
               <a:ext uri="{FF2B5EF4-FFF2-40B4-BE49-F238E27FC236}">
-                <a16:creationId xmlns:a16="http://schemas.microsoft.com/office/drawing/2014/main" id="{B7523DA6-3BDB-46ED-AECA-B27F91B6BEDD}"/>
+                <a16:creationId xmlns:a16="http://schemas.microsoft.com/office/drawing/2014/main" id="{F44F6050-7037-49F6-A12E-C7F54943E160}"/>
               </a:ext>
             </a:extLst>
           </p:cNvPr>
@@ -3848,19 +3848,19 @@
           <p:cNvPr id="31" name="">
             <a:extLst xmlns:a="http://schemas.openxmlformats.org/drawingml/2006/main">
               <a:ext uri="{FF2B5EF4-FFF2-40B4-BE49-F238E27FC236}">
-                <a16:creationId xmlns:a16="http://schemas.microsoft.com/office/drawing/2014/main" id="{03B98442-DC14-4ACE-8B93-40D94CD1D60D}"/>
-              </a:ext>
-            </a:extLst>
-          </p:cNvPr>
-          <p:cNvSpPr>
-            <a:spLocks xmlns:a="http://schemas.openxmlformats.org/drawingml/2006/main" noGrp="1"/>
-          </p:cNvSpPr>
-          <p:nvPr/>
-        </p:nvSpPr>
-        <p:spPr>
-          <a:xfrm xmlns:a="http://schemas.openxmlformats.org/drawingml/2006/main">
-            <a:off x="7391400" y="2609850"/>
-            <a:ext cx="66675" cy="990600"/>
+                <a16:creationId xmlns:a16="http://schemas.microsoft.com/office/drawing/2014/main" id="{B859E255-CDBF-4CC8-8A36-9D74BB969747}"/>
+              </a:ext>
+            </a:extLst>
+          </p:cNvPr>
+          <p:cNvSpPr>
+            <a:spLocks xmlns:a="http://schemas.openxmlformats.org/drawingml/2006/main" noGrp="1"/>
+          </p:cNvSpPr>
+          <p:nvPr/>
+        </p:nvSpPr>
+        <p:spPr>
+          <a:xfrm xmlns:a="http://schemas.openxmlformats.org/drawingml/2006/main">
+            <a:off x="7439025" y="2657475"/>
+            <a:ext cx="47625" cy="895350"/>
           </a:xfrm>
           <a:prstGeom xmlns:a="http://schemas.openxmlformats.org/drawingml/2006/main" prst="rect">
             <a:avLst/>
@@ -3883,7 +3883,7 @@
           <p:cNvPr id="32" name="">
             <a:extLst xmlns:a="http://schemas.openxmlformats.org/drawingml/2006/main">
               <a:ext uri="{FF2B5EF4-FFF2-40B4-BE49-F238E27FC236}">
-                <a16:creationId xmlns:a16="http://schemas.microsoft.com/office/drawing/2014/main" id="{03D04A94-90F2-4C5D-81DC-6662D02F9EF8}"/>
+                <a16:creationId xmlns:a16="http://schemas.microsoft.com/office/drawing/2014/main" id="{9F0FA9D2-C3B3-4313-9D01-FDA1EA49FA0B}"/>
               </a:ext>
             </a:extLst>
           </p:cNvPr>
@@ -3937,7 +3937,7 @@
           <p:cNvPr id="33" name="">
             <a:extLst xmlns:a="http://schemas.openxmlformats.org/drawingml/2006/main">
               <a:ext uri="{FF2B5EF4-FFF2-40B4-BE49-F238E27FC236}">
-                <a16:creationId xmlns:a16="http://schemas.microsoft.com/office/drawing/2014/main" id="{0437AFD6-8FCC-41E6-9E02-9CCA73C323DA}"/>
+                <a16:creationId xmlns:a16="http://schemas.microsoft.com/office/drawing/2014/main" id="{C57FF973-A83F-4FDC-A266-9244E2AED488}"/>
               </a:ext>
             </a:extLst>
           </p:cNvPr>
@@ -3995,7 +3995,7 @@
           <p:cNvPr id="34" name="">
             <a:extLst xmlns:a="http://schemas.openxmlformats.org/drawingml/2006/main">
               <a:ext uri="{FF2B5EF4-FFF2-40B4-BE49-F238E27FC236}">
-                <a16:creationId xmlns:a16="http://schemas.microsoft.com/office/drawing/2014/main" id="{F8D62C4F-93D0-47A5-BF2F-02060E9420F1}"/>
+                <a16:creationId xmlns:a16="http://schemas.microsoft.com/office/drawing/2014/main" id="{1FACE5B2-DFAB-42C6-8AD7-270A4CB16DC8}"/>
               </a:ext>
             </a:extLst>
           </p:cNvPr>
@@ -4053,7 +4053,7 @@
           <p:cNvPr id="35" name="">
             <a:extLst xmlns:a="http://schemas.openxmlformats.org/drawingml/2006/main">
               <a:ext uri="{FF2B5EF4-FFF2-40B4-BE49-F238E27FC236}">
-                <a16:creationId xmlns:a16="http://schemas.microsoft.com/office/drawing/2014/main" id="{6A26E50A-D6FC-4A48-9B8D-C86B9102D163}"/>
+                <a16:creationId xmlns:a16="http://schemas.microsoft.com/office/drawing/2014/main" id="{1334168C-A6D6-43CB-961F-FE7564216903}"/>
               </a:ext>
             </a:extLst>
           </p:cNvPr>
@@ -4088,7 +4088,7 @@
           <p:cNvPr id="36" name="">
             <a:extLst xmlns:a="http://schemas.openxmlformats.org/drawingml/2006/main">
               <a:ext uri="{FF2B5EF4-FFF2-40B4-BE49-F238E27FC236}">
-                <a16:creationId xmlns:a16="http://schemas.microsoft.com/office/drawing/2014/main" id="{FC6079C7-3B79-4CA5-8B11-2108DA9A31C7}"/>
+                <a16:creationId xmlns:a16="http://schemas.microsoft.com/office/drawing/2014/main" id="{D84867D3-2FB7-4D2D-A937-C713BA877B99}"/>
               </a:ext>
             </a:extLst>
           </p:cNvPr>
@@ -4123,7 +4123,7 @@
           <p:cNvPr id="37" name="">
             <a:extLst xmlns:a="http://schemas.openxmlformats.org/drawingml/2006/main">
               <a:ext uri="{FF2B5EF4-FFF2-40B4-BE49-F238E27FC236}">
-                <a16:creationId xmlns:a16="http://schemas.microsoft.com/office/drawing/2014/main" id="{01A1C408-E299-442F-96AA-EB41C1529EEC}"/>
+                <a16:creationId xmlns:a16="http://schemas.microsoft.com/office/drawing/2014/main" id="{76975BD1-441D-4269-9798-A31545D49925}"/>
               </a:ext>
             </a:extLst>
           </p:cNvPr>
@@ -4158,7 +4158,7 @@
           <p:cNvPr id="38" name="">
             <a:extLst xmlns:a="http://schemas.openxmlformats.org/drawingml/2006/main">
               <a:ext uri="{FF2B5EF4-FFF2-40B4-BE49-F238E27FC236}">
-                <a16:creationId xmlns:a16="http://schemas.microsoft.com/office/drawing/2014/main" id="{71FB5E0B-F860-4C46-A950-3FAABEA656EA}"/>
+                <a16:creationId xmlns:a16="http://schemas.microsoft.com/office/drawing/2014/main" id="{10CC3D05-F315-4095-9AFB-F22242C53630}"/>
               </a:ext>
             </a:extLst>
           </p:cNvPr>
@@ -4212,7 +4212,7 @@
           <p:cNvPr id="39" name="">
             <a:extLst xmlns:a="http://schemas.openxmlformats.org/drawingml/2006/main">
               <a:ext uri="{FF2B5EF4-FFF2-40B4-BE49-F238E27FC236}">
-                <a16:creationId xmlns:a16="http://schemas.microsoft.com/office/drawing/2014/main" id="{D4BE354C-5D30-44B7-B53C-03045EECFD2A}"/>
+                <a16:creationId xmlns:a16="http://schemas.microsoft.com/office/drawing/2014/main" id="{CDE9561F-97F2-4C93-902F-E9E8D5749B1D}"/>
               </a:ext>
             </a:extLst>
           </p:cNvPr>
@@ -4266,7 +4266,7 @@
           <p:cNvPr id="40" name="">
             <a:extLst xmlns:a="http://schemas.openxmlformats.org/drawingml/2006/main">
               <a:ext uri="{FF2B5EF4-FFF2-40B4-BE49-F238E27FC236}">
-                <a16:creationId xmlns:a16="http://schemas.microsoft.com/office/drawing/2014/main" id="{CD2356DD-5828-4F21-8B00-06B7BD889679}"/>
+                <a16:creationId xmlns:a16="http://schemas.microsoft.com/office/drawing/2014/main" id="{6A4F81BD-0428-4B49-9B45-8C0C10C9C3EF}"/>
               </a:ext>
             </a:extLst>
           </p:cNvPr>
@@ -4322,7 +4322,7 @@
     </p:spTree>
     <p:extLst>
       <p:ext uri="{BB962C8B-B14F-4D97-AF65-F5344CB8AC3E}">
-        <p14:creationId xmlns:p14="http://schemas.microsoft.com/office/powerpoint/2010/main" val="1650614639"/>
+        <p14:creationId xmlns:p14="http://schemas.microsoft.com/office/powerpoint/2010/main" val="721257982"/>
       </p:ext>
     </p:extLst>
   </p:cSld>
@@ -4353,7 +4353,7 @@
           <p:cNvPr id="1" name="Slide Number Placeholder 5">
             <a:extLst xmlns:a="http://schemas.openxmlformats.org/drawingml/2006/main">
               <a:ext uri="{FF2B5EF4-FFF2-40B4-BE49-F238E27FC236}">
-                <a16:creationId xmlns:a16="http://schemas.microsoft.com/office/drawing/2014/main" id="{960B6032-F217-4E1A-A5DD-55BD6786A62D}"/>
+                <a16:creationId xmlns:a16="http://schemas.microsoft.com/office/drawing/2014/main" id="{821508BF-91E3-4E78-84B3-DCBD229C8660}"/>
               </a:ext>
             </a:extLst>
           </p:cNvPr>
@@ -4389,7 +4389,7 @@
           <p:nvPr/>
         </p:nvPicPr>
         <p:blipFill>
-          <a:blip xmlns:r="http://schemas.openxmlformats.org/officeDocument/2006/relationships" xmlns:a="http://schemas.openxmlformats.org/drawingml/2006/main" r:embed="R24c5b4d5b9464b99"/>
+          <a:blip xmlns:r="http://schemas.openxmlformats.org/officeDocument/2006/relationships" xmlns:a="http://schemas.openxmlformats.org/drawingml/2006/main" r:embed="R03a9e792bcc64ca9"/>
           <a:srcRect xmlns:a="http://schemas.openxmlformats.org/drawingml/2006/main" l="0" t="21875" r="0" b="21875"/>
           <a:stretch xmlns:a="http://schemas.openxmlformats.org/drawingml/2006/main">
             <a:fillRect l="0" t="0" r="0" b="0"/>
@@ -4410,7 +4410,7 @@
           <p:cNvPr id="3" name="">
             <a:extLst xmlns:a="http://schemas.openxmlformats.org/drawingml/2006/main">
               <a:ext uri="{FF2B5EF4-FFF2-40B4-BE49-F238E27FC236}">
-                <a16:creationId xmlns:a16="http://schemas.microsoft.com/office/drawing/2014/main" id="{C7A596AD-4198-48B0-80FF-0D0440B25489}"/>
+                <a16:creationId xmlns:a16="http://schemas.microsoft.com/office/drawing/2014/main" id="{C090206B-885B-49A4-87F9-56001D15FFE9}"/>
               </a:ext>
             </a:extLst>
           </p:cNvPr>
@@ -4445,7 +4445,7 @@
           <p:cNvPr id="4" name="">
             <a:extLst xmlns:a="http://schemas.openxmlformats.org/drawingml/2006/main">
               <a:ext uri="{FF2B5EF4-FFF2-40B4-BE49-F238E27FC236}">
-                <a16:creationId xmlns:a16="http://schemas.microsoft.com/office/drawing/2014/main" id="{F6D7A45A-4A77-439A-B8B7-C760DAC8605E}"/>
+                <a16:creationId xmlns:a16="http://schemas.microsoft.com/office/drawing/2014/main" id="{CE630618-38E2-4A04-8BD7-D2E34ADFAEF2}"/>
               </a:ext>
             </a:extLst>
           </p:cNvPr>
@@ -4480,7 +4480,7 @@
           <p:cNvPr id="5" name="">
             <a:extLst xmlns:a="http://schemas.openxmlformats.org/drawingml/2006/main">
               <a:ext uri="{FF2B5EF4-FFF2-40B4-BE49-F238E27FC236}">
-                <a16:creationId xmlns:a16="http://schemas.microsoft.com/office/drawing/2014/main" id="{690571F6-F1D8-4BF9-B4A2-9A7C15C9A2C0}"/>
+                <a16:creationId xmlns:a16="http://schemas.microsoft.com/office/drawing/2014/main" id="{4C6E6C54-E008-49AF-B1AD-25ABCA4D407E}"/>
               </a:ext>
             </a:extLst>
           </p:cNvPr>
@@ -4517,7 +4517,7 @@
           <p:cNvPr id="6" name="">
             <a:extLst xmlns:a="http://schemas.openxmlformats.org/drawingml/2006/main">
               <a:ext uri="{FF2B5EF4-FFF2-40B4-BE49-F238E27FC236}">
-                <a16:creationId xmlns:a16="http://schemas.microsoft.com/office/drawing/2014/main" id="{D4B77F69-E22A-4B10-9504-69C45679DE4D}"/>
+                <a16:creationId xmlns:a16="http://schemas.microsoft.com/office/drawing/2014/main" id="{F4CAC02F-7DD5-49ED-BD52-6D07FABCAF21}"/>
               </a:ext>
             </a:extLst>
           </p:cNvPr>
@@ -4554,7 +4554,7 @@
           <p:cNvPr id="7" name="">
             <a:extLst xmlns:a="http://schemas.openxmlformats.org/drawingml/2006/main">
               <a:ext uri="{FF2B5EF4-FFF2-40B4-BE49-F238E27FC236}">
-                <a16:creationId xmlns:a16="http://schemas.microsoft.com/office/drawing/2014/main" id="{D9BB5190-4FAE-4FA1-BC64-0AA271BC9218}"/>
+                <a16:creationId xmlns:a16="http://schemas.microsoft.com/office/drawing/2014/main" id="{DEF273E2-F613-450F-BEED-416797A72D31}"/>
               </a:ext>
             </a:extLst>
           </p:cNvPr>
@@ -4591,7 +4591,7 @@
           <p:cNvPr id="8" name="">
             <a:extLst xmlns:a="http://schemas.openxmlformats.org/drawingml/2006/main">
               <a:ext uri="{FF2B5EF4-FFF2-40B4-BE49-F238E27FC236}">
-                <a16:creationId xmlns:a16="http://schemas.microsoft.com/office/drawing/2014/main" id="{C36729A7-718F-4FA1-B2C0-B2193E463904}"/>
+                <a16:creationId xmlns:a16="http://schemas.microsoft.com/office/drawing/2014/main" id="{BBAEAA45-E7A8-4F43-A567-9A84F16EE8C8}"/>
               </a:ext>
             </a:extLst>
           </p:cNvPr>
@@ -4628,7 +4628,7 @@
           <p:cNvPr id="9" name="">
             <a:extLst xmlns:a="http://schemas.openxmlformats.org/drawingml/2006/main">
               <a:ext uri="{FF2B5EF4-FFF2-40B4-BE49-F238E27FC236}">
-                <a16:creationId xmlns:a16="http://schemas.microsoft.com/office/drawing/2014/main" id="{6EE6BBDC-B9DB-4A62-B75A-11456C45D23D}"/>
+                <a16:creationId xmlns:a16="http://schemas.microsoft.com/office/drawing/2014/main" id="{BB98C368-514D-49EF-9B03-CA2F28AB936D}"/>
               </a:ext>
             </a:extLst>
           </p:cNvPr>
@@ -4686,7 +4686,7 @@
           <p:cNvPr id="10" name="">
             <a:extLst xmlns:a="http://schemas.openxmlformats.org/drawingml/2006/main">
               <a:ext uri="{FF2B5EF4-FFF2-40B4-BE49-F238E27FC236}">
-                <a16:creationId xmlns:a16="http://schemas.microsoft.com/office/drawing/2014/main" id="{0ADA5FCA-F15D-4F99-9531-FB6035023374}"/>
+                <a16:creationId xmlns:a16="http://schemas.microsoft.com/office/drawing/2014/main" id="{D095EBEB-D630-4598-860A-85029EB03516}"/>
               </a:ext>
             </a:extLst>
           </p:cNvPr>
@@ -4744,7 +4744,7 @@
           <p:cNvPr id="11" name="">
             <a:extLst xmlns:a="http://schemas.openxmlformats.org/drawingml/2006/main">
               <a:ext uri="{FF2B5EF4-FFF2-40B4-BE49-F238E27FC236}">
-                <a16:creationId xmlns:a16="http://schemas.microsoft.com/office/drawing/2014/main" id="{E33917A0-8418-4B25-AC35-D2211DF29F7D}"/>
+                <a16:creationId xmlns:a16="http://schemas.microsoft.com/office/drawing/2014/main" id="{A83C7A56-B01E-452B-944A-40D6092C827B}"/>
               </a:ext>
             </a:extLst>
           </p:cNvPr>
@@ -4779,7 +4779,7 @@
           <p:cNvPr id="12" name="">
             <a:extLst xmlns:a="http://schemas.openxmlformats.org/drawingml/2006/main">
               <a:ext uri="{FF2B5EF4-FFF2-40B4-BE49-F238E27FC236}">
-                <a16:creationId xmlns:a16="http://schemas.microsoft.com/office/drawing/2014/main" id="{27C0257F-A743-4B04-ACAB-4F5ACF6D03F6}"/>
+                <a16:creationId xmlns:a16="http://schemas.microsoft.com/office/drawing/2014/main" id="{AB755F0D-47EE-478E-BF83-21B250F03F23}"/>
               </a:ext>
             </a:extLst>
           </p:cNvPr>
@@ -4812,7 +4812,7 @@
           <p:cNvPr id="13" name="">
             <a:extLst xmlns:a="http://schemas.openxmlformats.org/drawingml/2006/main">
               <a:ext uri="{FF2B5EF4-FFF2-40B4-BE49-F238E27FC236}">
-                <a16:creationId xmlns:a16="http://schemas.microsoft.com/office/drawing/2014/main" id="{9158C1E2-2FD1-45DB-A916-8F07960034B9}"/>
+                <a16:creationId xmlns:a16="http://schemas.microsoft.com/office/drawing/2014/main" id="{A48E631F-75E0-4E5D-9F9C-243930E76F2B}"/>
               </a:ext>
             </a:extLst>
           </p:cNvPr>
@@ -4887,7 +4887,7 @@
           <p:cNvPr id="14" name="">
             <a:extLst xmlns:a="http://schemas.openxmlformats.org/drawingml/2006/main">
               <a:ext uri="{FF2B5EF4-FFF2-40B4-BE49-F238E27FC236}">
-                <a16:creationId xmlns:a16="http://schemas.microsoft.com/office/drawing/2014/main" id="{6D5ADEEF-6BF3-4F80-8D84-E45BFAFD5D0F}"/>
+                <a16:creationId xmlns:a16="http://schemas.microsoft.com/office/drawing/2014/main" id="{14566768-CE95-4E50-88D3-1976B67E604F}"/>
               </a:ext>
             </a:extLst>
           </p:cNvPr>
@@ -4922,19 +4922,19 @@
           <p:cNvPr id="15" name="">
             <a:extLst xmlns:a="http://schemas.openxmlformats.org/drawingml/2006/main">
               <a:ext uri="{FF2B5EF4-FFF2-40B4-BE49-F238E27FC236}">
-                <a16:creationId xmlns:a16="http://schemas.microsoft.com/office/drawing/2014/main" id="{4685831A-343C-4284-81C5-E3944507D5D7}"/>
-              </a:ext>
-            </a:extLst>
-          </p:cNvPr>
-          <p:cNvSpPr>
-            <a:spLocks xmlns:a="http://schemas.openxmlformats.org/drawingml/2006/main" noGrp="1"/>
-          </p:cNvSpPr>
-          <p:nvPr/>
-        </p:nvSpPr>
-        <p:spPr>
-          <a:xfrm xmlns:a="http://schemas.openxmlformats.org/drawingml/2006/main">
-            <a:off x="628650" y="2076450"/>
-            <a:ext cx="2857500" cy="76200"/>
+                <a16:creationId xmlns:a16="http://schemas.microsoft.com/office/drawing/2014/main" id="{CFA0D215-B8A3-4D8A-A018-F8082487700A}"/>
+              </a:ext>
+            </a:extLst>
+          </p:cNvPr>
+          <p:cNvSpPr>
+            <a:spLocks xmlns:a="http://schemas.openxmlformats.org/drawingml/2006/main" noGrp="1"/>
+          </p:cNvSpPr>
+          <p:nvPr/>
+        </p:nvSpPr>
+        <p:spPr>
+          <a:xfrm xmlns:a="http://schemas.openxmlformats.org/drawingml/2006/main">
+            <a:off x="685800" y="2133600"/>
+            <a:ext cx="2743200" cy="57150"/>
           </a:xfrm>
           <a:prstGeom xmlns:a="http://schemas.openxmlformats.org/drawingml/2006/main" prst="rect">
             <a:avLst/>
@@ -4957,7 +4957,7 @@
           <p:cNvPr id="16" name="">
             <a:extLst xmlns:a="http://schemas.openxmlformats.org/drawingml/2006/main">
               <a:ext uri="{FF2B5EF4-FFF2-40B4-BE49-F238E27FC236}">
-                <a16:creationId xmlns:a16="http://schemas.microsoft.com/office/drawing/2014/main" id="{871BBA1B-32CF-4527-83C8-FA2147563ED8}"/>
+                <a16:creationId xmlns:a16="http://schemas.microsoft.com/office/drawing/2014/main" id="{290714FC-6E44-4942-9621-EE10EA75EEBA}"/>
               </a:ext>
             </a:extLst>
           </p:cNvPr>
@@ -5015,7 +5015,7 @@
           <p:cNvPr id="17" name="">
             <a:extLst xmlns:a="http://schemas.openxmlformats.org/drawingml/2006/main">
               <a:ext uri="{FF2B5EF4-FFF2-40B4-BE49-F238E27FC236}">
-                <a16:creationId xmlns:a16="http://schemas.microsoft.com/office/drawing/2014/main" id="{246BDDD2-0E6A-4FE3-9189-B51E4CF1FD49}"/>
+                <a16:creationId xmlns:a16="http://schemas.microsoft.com/office/drawing/2014/main" id="{3EB95513-A959-476A-ADC1-67BC00887658}"/>
               </a:ext>
             </a:extLst>
           </p:cNvPr>
@@ -5158,7 +5158,7 @@
           <p:cNvPr id="18" name="">
             <a:extLst xmlns:a="http://schemas.openxmlformats.org/drawingml/2006/main">
               <a:ext uri="{FF2B5EF4-FFF2-40B4-BE49-F238E27FC236}">
-                <a16:creationId xmlns:a16="http://schemas.microsoft.com/office/drawing/2014/main" id="{73B26408-2A38-49E7-A1FD-DE071E94F8CC}"/>
+                <a16:creationId xmlns:a16="http://schemas.microsoft.com/office/drawing/2014/main" id="{C2A8236C-C152-4481-BDB6-98C3B25B2FC3}"/>
               </a:ext>
             </a:extLst>
           </p:cNvPr>
@@ -5193,19 +5193,19 @@
           <p:cNvPr id="19" name="">
             <a:extLst xmlns:a="http://schemas.openxmlformats.org/drawingml/2006/main">
               <a:ext uri="{FF2B5EF4-FFF2-40B4-BE49-F238E27FC236}">
-                <a16:creationId xmlns:a16="http://schemas.microsoft.com/office/drawing/2014/main" id="{85DA6675-C00F-4736-860D-289364F9C792}"/>
-              </a:ext>
-            </a:extLst>
-          </p:cNvPr>
-          <p:cNvSpPr>
-            <a:spLocks xmlns:a="http://schemas.openxmlformats.org/drawingml/2006/main" noGrp="1"/>
-          </p:cNvSpPr>
-          <p:nvPr/>
-        </p:nvSpPr>
-        <p:spPr>
-          <a:xfrm xmlns:a="http://schemas.openxmlformats.org/drawingml/2006/main">
-            <a:off x="3848100" y="2114550"/>
-            <a:ext cx="66675" cy="1257300"/>
+                <a16:creationId xmlns:a16="http://schemas.microsoft.com/office/drawing/2014/main" id="{601EFACC-FCE5-48F8-98DD-EE4705A35F09}"/>
+              </a:ext>
+            </a:extLst>
+          </p:cNvPr>
+          <p:cNvSpPr>
+            <a:spLocks xmlns:a="http://schemas.openxmlformats.org/drawingml/2006/main" noGrp="1"/>
+          </p:cNvSpPr>
+          <p:nvPr/>
+        </p:nvSpPr>
+        <p:spPr>
+          <a:xfrm xmlns:a="http://schemas.openxmlformats.org/drawingml/2006/main">
+            <a:off x="3895725" y="2162175"/>
+            <a:ext cx="47625" cy="1162050"/>
           </a:xfrm>
           <a:prstGeom xmlns:a="http://schemas.openxmlformats.org/drawingml/2006/main" prst="rect">
             <a:avLst/>
@@ -5228,7 +5228,7 @@
           <p:cNvPr id="20" name="">
             <a:extLst xmlns:a="http://schemas.openxmlformats.org/drawingml/2006/main">
               <a:ext uri="{FF2B5EF4-FFF2-40B4-BE49-F238E27FC236}">
-                <a16:creationId xmlns:a16="http://schemas.microsoft.com/office/drawing/2014/main" id="{4445D70C-9EA1-44C2-955B-15B2A1AF81BB}"/>
+                <a16:creationId xmlns:a16="http://schemas.microsoft.com/office/drawing/2014/main" id="{9FC27201-7147-4468-850E-C43655CD1567}"/>
               </a:ext>
             </a:extLst>
           </p:cNvPr>
@@ -5282,7 +5282,7 @@
           <p:cNvPr id="21" name="">
             <a:extLst xmlns:a="http://schemas.openxmlformats.org/drawingml/2006/main">
               <a:ext uri="{FF2B5EF4-FFF2-40B4-BE49-F238E27FC236}">
-                <a16:creationId xmlns:a16="http://schemas.microsoft.com/office/drawing/2014/main" id="{F8052575-F369-4932-8FF1-89219DE495D0}"/>
+                <a16:creationId xmlns:a16="http://schemas.microsoft.com/office/drawing/2014/main" id="{862B034F-C636-448E-AB2A-8FDFA5A3900E}"/>
               </a:ext>
             </a:extLst>
           </p:cNvPr>
@@ -5340,7 +5340,7 @@
           <p:cNvPr id="22" name="">
             <a:extLst xmlns:a="http://schemas.openxmlformats.org/drawingml/2006/main">
               <a:ext uri="{FF2B5EF4-FFF2-40B4-BE49-F238E27FC236}">
-                <a16:creationId xmlns:a16="http://schemas.microsoft.com/office/drawing/2014/main" id="{7E7991AB-39C0-489C-9C5C-751E86071104}"/>
+                <a16:creationId xmlns:a16="http://schemas.microsoft.com/office/drawing/2014/main" id="{BA918CF9-9B47-42D0-ACEC-9B5326B2FA06}"/>
               </a:ext>
             </a:extLst>
           </p:cNvPr>
@@ -5415,7 +5415,7 @@
           <p:cNvPr id="23" name="">
             <a:extLst xmlns:a="http://schemas.openxmlformats.org/drawingml/2006/main">
               <a:ext uri="{FF2B5EF4-FFF2-40B4-BE49-F238E27FC236}">
-                <a16:creationId xmlns:a16="http://schemas.microsoft.com/office/drawing/2014/main" id="{3FEA6351-E9AE-470A-97D0-48EEA5DF1026}"/>
+                <a16:creationId xmlns:a16="http://schemas.microsoft.com/office/drawing/2014/main" id="{15249BC5-70E7-4141-9F95-7532F8817966}"/>
               </a:ext>
             </a:extLst>
           </p:cNvPr>
@@ -5450,19 +5450,19 @@
           <p:cNvPr id="24" name="">
             <a:extLst xmlns:a="http://schemas.openxmlformats.org/drawingml/2006/main">
               <a:ext uri="{FF2B5EF4-FFF2-40B4-BE49-F238E27FC236}">
-                <a16:creationId xmlns:a16="http://schemas.microsoft.com/office/drawing/2014/main" id="{D8E3B962-4EA0-4CB8-94F5-EAF977110A36}"/>
-              </a:ext>
-            </a:extLst>
-          </p:cNvPr>
-          <p:cNvSpPr>
-            <a:spLocks xmlns:a="http://schemas.openxmlformats.org/drawingml/2006/main" noGrp="1"/>
-          </p:cNvSpPr>
-          <p:nvPr/>
-        </p:nvSpPr>
-        <p:spPr>
-          <a:xfrm xmlns:a="http://schemas.openxmlformats.org/drawingml/2006/main">
-            <a:off x="6572250" y="2114550"/>
-            <a:ext cx="66675" cy="1257300"/>
+                <a16:creationId xmlns:a16="http://schemas.microsoft.com/office/drawing/2014/main" id="{FB4C32C6-9C50-4BB3-8A5C-5E303E938582}"/>
+              </a:ext>
+            </a:extLst>
+          </p:cNvPr>
+          <p:cNvSpPr>
+            <a:spLocks xmlns:a="http://schemas.openxmlformats.org/drawingml/2006/main" noGrp="1"/>
+          </p:cNvSpPr>
+          <p:nvPr/>
+        </p:nvSpPr>
+        <p:spPr>
+          <a:xfrm xmlns:a="http://schemas.openxmlformats.org/drawingml/2006/main">
+            <a:off x="6619875" y="2162175"/>
+            <a:ext cx="47625" cy="1162050"/>
           </a:xfrm>
           <a:prstGeom xmlns:a="http://schemas.openxmlformats.org/drawingml/2006/main" prst="rect">
             <a:avLst/>
@@ -5485,7 +5485,7 @@
           <p:cNvPr id="25" name="">
             <a:extLst xmlns:a="http://schemas.openxmlformats.org/drawingml/2006/main">
               <a:ext uri="{FF2B5EF4-FFF2-40B4-BE49-F238E27FC236}">
-                <a16:creationId xmlns:a16="http://schemas.microsoft.com/office/drawing/2014/main" id="{3872C247-A658-440B-9364-7573018DD639}"/>
+                <a16:creationId xmlns:a16="http://schemas.microsoft.com/office/drawing/2014/main" id="{F4B176F1-4CE1-4A8A-973C-720445D9B2A6}"/>
               </a:ext>
             </a:extLst>
           </p:cNvPr>
@@ -5539,7 +5539,7 @@
           <p:cNvPr id="26" name="">
             <a:extLst xmlns:a="http://schemas.openxmlformats.org/drawingml/2006/main">
               <a:ext uri="{FF2B5EF4-FFF2-40B4-BE49-F238E27FC236}">
-                <a16:creationId xmlns:a16="http://schemas.microsoft.com/office/drawing/2014/main" id="{01C05C80-2F87-405A-BA7E-F73EE0E9E9EA}"/>
+                <a16:creationId xmlns:a16="http://schemas.microsoft.com/office/drawing/2014/main" id="{E50A460D-4F07-4CD9-9C96-4BBB81C75849}"/>
               </a:ext>
             </a:extLst>
           </p:cNvPr>
@@ -5597,7 +5597,7 @@
           <p:cNvPr id="27" name="">
             <a:extLst xmlns:a="http://schemas.openxmlformats.org/drawingml/2006/main">
               <a:ext uri="{FF2B5EF4-FFF2-40B4-BE49-F238E27FC236}">
-                <a16:creationId xmlns:a16="http://schemas.microsoft.com/office/drawing/2014/main" id="{E1C939AB-D13B-4417-8748-BD9679C4C0CD}"/>
+                <a16:creationId xmlns:a16="http://schemas.microsoft.com/office/drawing/2014/main" id="{B36FC948-407C-4F7D-B563-B339142D7E60}"/>
               </a:ext>
             </a:extLst>
           </p:cNvPr>
@@ -5672,7 +5672,7 @@
           <p:cNvPr id="28" name="">
             <a:extLst xmlns:a="http://schemas.openxmlformats.org/drawingml/2006/main">
               <a:ext uri="{FF2B5EF4-FFF2-40B4-BE49-F238E27FC236}">
-                <a16:creationId xmlns:a16="http://schemas.microsoft.com/office/drawing/2014/main" id="{43AE5D66-0000-42A9-BD4B-FE633C270FAA}"/>
+                <a16:creationId xmlns:a16="http://schemas.microsoft.com/office/drawing/2014/main" id="{B0AC76B9-DCE0-41F2-96E4-09F91EAD034E}"/>
               </a:ext>
             </a:extLst>
           </p:cNvPr>
@@ -5707,19 +5707,19 @@
           <p:cNvPr id="29" name="">
             <a:extLst xmlns:a="http://schemas.openxmlformats.org/drawingml/2006/main">
               <a:ext uri="{FF2B5EF4-FFF2-40B4-BE49-F238E27FC236}">
-                <a16:creationId xmlns:a16="http://schemas.microsoft.com/office/drawing/2014/main" id="{E7603683-5A2E-4A69-A045-F6F533CBC32D}"/>
-              </a:ext>
-            </a:extLst>
-          </p:cNvPr>
-          <p:cNvSpPr>
-            <a:spLocks xmlns:a="http://schemas.openxmlformats.org/drawingml/2006/main" noGrp="1"/>
-          </p:cNvSpPr>
-          <p:nvPr/>
-        </p:nvSpPr>
-        <p:spPr>
-          <a:xfrm xmlns:a="http://schemas.openxmlformats.org/drawingml/2006/main">
-            <a:off x="9296400" y="2114550"/>
-            <a:ext cx="66675" cy="1257300"/>
+                <a16:creationId xmlns:a16="http://schemas.microsoft.com/office/drawing/2014/main" id="{75738BC3-9EFA-48B4-947E-9FE958D74A1B}"/>
+              </a:ext>
+            </a:extLst>
+          </p:cNvPr>
+          <p:cNvSpPr>
+            <a:spLocks xmlns:a="http://schemas.openxmlformats.org/drawingml/2006/main" noGrp="1"/>
+          </p:cNvSpPr>
+          <p:nvPr/>
+        </p:nvSpPr>
+        <p:spPr>
+          <a:xfrm xmlns:a="http://schemas.openxmlformats.org/drawingml/2006/main">
+            <a:off x="9344025" y="2162175"/>
+            <a:ext cx="47625" cy="1162050"/>
           </a:xfrm>
           <a:prstGeom xmlns:a="http://schemas.openxmlformats.org/drawingml/2006/main" prst="rect">
             <a:avLst/>
@@ -5742,7 +5742,7 @@
           <p:cNvPr id="30" name="">
             <a:extLst xmlns:a="http://schemas.openxmlformats.org/drawingml/2006/main">
               <a:ext uri="{FF2B5EF4-FFF2-40B4-BE49-F238E27FC236}">
-                <a16:creationId xmlns:a16="http://schemas.microsoft.com/office/drawing/2014/main" id="{263FF0FB-1231-4B72-B223-CC09C1768656}"/>
+                <a16:creationId xmlns:a16="http://schemas.microsoft.com/office/drawing/2014/main" id="{4CD06E01-89F8-40D6-A7D7-CBFDEF0B3CB9}"/>
               </a:ext>
             </a:extLst>
           </p:cNvPr>
@@ -5796,7 +5796,7 @@
           <p:cNvPr id="31" name="">
             <a:extLst xmlns:a="http://schemas.openxmlformats.org/drawingml/2006/main">
               <a:ext uri="{FF2B5EF4-FFF2-40B4-BE49-F238E27FC236}">
-                <a16:creationId xmlns:a16="http://schemas.microsoft.com/office/drawing/2014/main" id="{7175DB21-E662-458A-B2EA-9A8EB6F7FC69}"/>
+                <a16:creationId xmlns:a16="http://schemas.microsoft.com/office/drawing/2014/main" id="{429F62EA-B903-4FFB-90AE-999C32E0589D}"/>
               </a:ext>
             </a:extLst>
           </p:cNvPr>
@@ -5854,7 +5854,7 @@
           <p:cNvPr id="32" name="">
             <a:extLst xmlns:a="http://schemas.openxmlformats.org/drawingml/2006/main">
               <a:ext uri="{FF2B5EF4-FFF2-40B4-BE49-F238E27FC236}">
-                <a16:creationId xmlns:a16="http://schemas.microsoft.com/office/drawing/2014/main" id="{94BAA104-43CE-4D5A-A02A-1583994DFD9A}"/>
+                <a16:creationId xmlns:a16="http://schemas.microsoft.com/office/drawing/2014/main" id="{32643431-C328-47EB-81B5-C16C7CBDAA5B}"/>
               </a:ext>
             </a:extLst>
           </p:cNvPr>
@@ -5929,7 +5929,7 @@
           <p:cNvPr id="33" name="">
             <a:extLst xmlns:a="http://schemas.openxmlformats.org/drawingml/2006/main">
               <a:ext uri="{FF2B5EF4-FFF2-40B4-BE49-F238E27FC236}">
-                <a16:creationId xmlns:a16="http://schemas.microsoft.com/office/drawing/2014/main" id="{BB541B52-98BA-4F15-BBA7-2CAAF84ED03B}"/>
+                <a16:creationId xmlns:a16="http://schemas.microsoft.com/office/drawing/2014/main" id="{3290A54D-C059-49E2-8D1F-F9789F275193}"/>
               </a:ext>
             </a:extLst>
           </p:cNvPr>
@@ -5964,19 +5964,19 @@
           <p:cNvPr id="34" name="">
             <a:extLst xmlns:a="http://schemas.openxmlformats.org/drawingml/2006/main">
               <a:ext uri="{FF2B5EF4-FFF2-40B4-BE49-F238E27FC236}">
-                <a16:creationId xmlns:a16="http://schemas.microsoft.com/office/drawing/2014/main" id="{D3BC4080-1227-4CE7-93F7-9C71F6D0984E}"/>
-              </a:ext>
-            </a:extLst>
-          </p:cNvPr>
-          <p:cNvSpPr>
-            <a:spLocks xmlns:a="http://schemas.openxmlformats.org/drawingml/2006/main" noGrp="1"/>
-          </p:cNvSpPr>
-          <p:nvPr/>
-        </p:nvSpPr>
-        <p:spPr>
-          <a:xfrm xmlns:a="http://schemas.openxmlformats.org/drawingml/2006/main">
-            <a:off x="3848100" y="3924300"/>
-            <a:ext cx="66675" cy="1257300"/>
+                <a16:creationId xmlns:a16="http://schemas.microsoft.com/office/drawing/2014/main" id="{D92DE7DA-95B4-4ECE-95AE-74465A3E666F}"/>
+              </a:ext>
+            </a:extLst>
+          </p:cNvPr>
+          <p:cNvSpPr>
+            <a:spLocks xmlns:a="http://schemas.openxmlformats.org/drawingml/2006/main" noGrp="1"/>
+          </p:cNvSpPr>
+          <p:nvPr/>
+        </p:nvSpPr>
+        <p:spPr>
+          <a:xfrm xmlns:a="http://schemas.openxmlformats.org/drawingml/2006/main">
+            <a:off x="3895725" y="3971925"/>
+            <a:ext cx="47625" cy="1162050"/>
           </a:xfrm>
           <a:prstGeom xmlns:a="http://schemas.openxmlformats.org/drawingml/2006/main" prst="rect">
             <a:avLst/>
@@ -5999,7 +5999,7 @@
           <p:cNvPr id="35" name="">
             <a:extLst xmlns:a="http://schemas.openxmlformats.org/drawingml/2006/main">
               <a:ext uri="{FF2B5EF4-FFF2-40B4-BE49-F238E27FC236}">
-                <a16:creationId xmlns:a16="http://schemas.microsoft.com/office/drawing/2014/main" id="{EA492787-D2A8-4633-9739-103016811D54}"/>
+                <a16:creationId xmlns:a16="http://schemas.microsoft.com/office/drawing/2014/main" id="{0E6E3534-F705-403F-A19A-7B0319122791}"/>
               </a:ext>
             </a:extLst>
           </p:cNvPr>
@@ -6053,7 +6053,7 @@
           <p:cNvPr id="36" name="">
             <a:extLst xmlns:a="http://schemas.openxmlformats.org/drawingml/2006/main">
               <a:ext uri="{FF2B5EF4-FFF2-40B4-BE49-F238E27FC236}">
-                <a16:creationId xmlns:a16="http://schemas.microsoft.com/office/drawing/2014/main" id="{FA1C0A33-0EC0-4182-97AB-69845CCDD0CA}"/>
+                <a16:creationId xmlns:a16="http://schemas.microsoft.com/office/drawing/2014/main" id="{9945486C-2AE1-45F0-8F4F-9AF64D26B3D7}"/>
               </a:ext>
             </a:extLst>
           </p:cNvPr>
@@ -6111,7 +6111,7 @@
           <p:cNvPr id="37" name="">
             <a:extLst xmlns:a="http://schemas.openxmlformats.org/drawingml/2006/main">
               <a:ext uri="{FF2B5EF4-FFF2-40B4-BE49-F238E27FC236}">
-                <a16:creationId xmlns:a16="http://schemas.microsoft.com/office/drawing/2014/main" id="{9F6401CC-A86A-46DE-89DA-F5F8A1A4AD48}"/>
+                <a16:creationId xmlns:a16="http://schemas.microsoft.com/office/drawing/2014/main" id="{6F841BF1-1C2D-4BB2-8D1B-4624257CC4E8}"/>
               </a:ext>
             </a:extLst>
           </p:cNvPr>
@@ -6186,7 +6186,7 @@
           <p:cNvPr id="38" name="">
             <a:extLst xmlns:a="http://schemas.openxmlformats.org/drawingml/2006/main">
               <a:ext uri="{FF2B5EF4-FFF2-40B4-BE49-F238E27FC236}">
-                <a16:creationId xmlns:a16="http://schemas.microsoft.com/office/drawing/2014/main" id="{C984D756-AD52-4C0B-B9AE-596583AD9BEA}"/>
+                <a16:creationId xmlns:a16="http://schemas.microsoft.com/office/drawing/2014/main" id="{12191C65-6305-4773-9A31-E7A31227FC17}"/>
               </a:ext>
             </a:extLst>
           </p:cNvPr>
@@ -6221,19 +6221,19 @@
           <p:cNvPr id="39" name="">
             <a:extLst xmlns:a="http://schemas.openxmlformats.org/drawingml/2006/main">
               <a:ext uri="{FF2B5EF4-FFF2-40B4-BE49-F238E27FC236}">
-                <a16:creationId xmlns:a16="http://schemas.microsoft.com/office/drawing/2014/main" id="{9F914EFD-DA10-484B-B0C4-D6CE7F47F6B9}"/>
-              </a:ext>
-            </a:extLst>
-          </p:cNvPr>
-          <p:cNvSpPr>
-            <a:spLocks xmlns:a="http://schemas.openxmlformats.org/drawingml/2006/main" noGrp="1"/>
-          </p:cNvSpPr>
-          <p:nvPr/>
-        </p:nvSpPr>
-        <p:spPr>
-          <a:xfrm xmlns:a="http://schemas.openxmlformats.org/drawingml/2006/main">
-            <a:off x="6572250" y="3924300"/>
-            <a:ext cx="66675" cy="1257300"/>
+                <a16:creationId xmlns:a16="http://schemas.microsoft.com/office/drawing/2014/main" id="{FD06B8F0-4F4A-4A9D-A8CC-228B32D7B011}"/>
+              </a:ext>
+            </a:extLst>
+          </p:cNvPr>
+          <p:cNvSpPr>
+            <a:spLocks xmlns:a="http://schemas.openxmlformats.org/drawingml/2006/main" noGrp="1"/>
+          </p:cNvSpPr>
+          <p:nvPr/>
+        </p:nvSpPr>
+        <p:spPr>
+          <a:xfrm xmlns:a="http://schemas.openxmlformats.org/drawingml/2006/main">
+            <a:off x="6619875" y="3971925"/>
+            <a:ext cx="47625" cy="1162050"/>
           </a:xfrm>
           <a:prstGeom xmlns:a="http://schemas.openxmlformats.org/drawingml/2006/main" prst="rect">
             <a:avLst/>
@@ -6256,7 +6256,7 @@
           <p:cNvPr id="40" name="">
             <a:extLst xmlns:a="http://schemas.openxmlformats.org/drawingml/2006/main">
               <a:ext uri="{FF2B5EF4-FFF2-40B4-BE49-F238E27FC236}">
-                <a16:creationId xmlns:a16="http://schemas.microsoft.com/office/drawing/2014/main" id="{4641A93F-6615-4163-8A98-0BC91C8C7F54}"/>
+                <a16:creationId xmlns:a16="http://schemas.microsoft.com/office/drawing/2014/main" id="{75E692B1-C672-47D7-A6F5-8C184FFB82FA}"/>
               </a:ext>
             </a:extLst>
           </p:cNvPr>
@@ -6310,7 +6310,7 @@
           <p:cNvPr id="41" name="">
             <a:extLst xmlns:a="http://schemas.openxmlformats.org/drawingml/2006/main">
               <a:ext uri="{FF2B5EF4-FFF2-40B4-BE49-F238E27FC236}">
-                <a16:creationId xmlns:a16="http://schemas.microsoft.com/office/drawing/2014/main" id="{C508E38A-EA99-4C28-9F6F-8EE3950FCEB5}"/>
+                <a16:creationId xmlns:a16="http://schemas.microsoft.com/office/drawing/2014/main" id="{D05C581A-B066-4D42-B89B-AC2D3EB58777}"/>
               </a:ext>
             </a:extLst>
           </p:cNvPr>
@@ -6368,7 +6368,7 @@
           <p:cNvPr id="42" name="">
             <a:extLst xmlns:a="http://schemas.openxmlformats.org/drawingml/2006/main">
               <a:ext uri="{FF2B5EF4-FFF2-40B4-BE49-F238E27FC236}">
-                <a16:creationId xmlns:a16="http://schemas.microsoft.com/office/drawing/2014/main" id="{F6F1D4FF-1D1A-458B-989D-401EE51FE7EB}"/>
+                <a16:creationId xmlns:a16="http://schemas.microsoft.com/office/drawing/2014/main" id="{1780D057-0E44-48D7-B328-730F0D168444}"/>
               </a:ext>
             </a:extLst>
           </p:cNvPr>
@@ -6443,7 +6443,7 @@
           <p:cNvPr id="43" name="">
             <a:extLst xmlns:a="http://schemas.openxmlformats.org/drawingml/2006/main">
               <a:ext uri="{FF2B5EF4-FFF2-40B4-BE49-F238E27FC236}">
-                <a16:creationId xmlns:a16="http://schemas.microsoft.com/office/drawing/2014/main" id="{9FD63DF9-97E8-4B08-AEB8-63F76C816DFD}"/>
+                <a16:creationId xmlns:a16="http://schemas.microsoft.com/office/drawing/2014/main" id="{FB0D0291-5949-414B-86F5-EFEF2925819E}"/>
               </a:ext>
             </a:extLst>
           </p:cNvPr>
@@ -6478,19 +6478,19 @@
           <p:cNvPr id="44" name="">
             <a:extLst xmlns:a="http://schemas.openxmlformats.org/drawingml/2006/main">
               <a:ext uri="{FF2B5EF4-FFF2-40B4-BE49-F238E27FC236}">
-                <a16:creationId xmlns:a16="http://schemas.microsoft.com/office/drawing/2014/main" id="{42354D64-F273-4207-ACB0-E4705F055384}"/>
-              </a:ext>
-            </a:extLst>
-          </p:cNvPr>
-          <p:cNvSpPr>
-            <a:spLocks xmlns:a="http://schemas.openxmlformats.org/drawingml/2006/main" noGrp="1"/>
-          </p:cNvSpPr>
-          <p:nvPr/>
-        </p:nvSpPr>
-        <p:spPr>
-          <a:xfrm xmlns:a="http://schemas.openxmlformats.org/drawingml/2006/main">
-            <a:off x="9296400" y="3924300"/>
-            <a:ext cx="66675" cy="1257300"/>
+                <a16:creationId xmlns:a16="http://schemas.microsoft.com/office/drawing/2014/main" id="{8516B33C-0726-4487-8121-19C8F6343A98}"/>
+              </a:ext>
+            </a:extLst>
+          </p:cNvPr>
+          <p:cNvSpPr>
+            <a:spLocks xmlns:a="http://schemas.openxmlformats.org/drawingml/2006/main" noGrp="1"/>
+          </p:cNvSpPr>
+          <p:nvPr/>
+        </p:nvSpPr>
+        <p:spPr>
+          <a:xfrm xmlns:a="http://schemas.openxmlformats.org/drawingml/2006/main">
+            <a:off x="9344025" y="3971925"/>
+            <a:ext cx="47625" cy="1162050"/>
           </a:xfrm>
           <a:prstGeom xmlns:a="http://schemas.openxmlformats.org/drawingml/2006/main" prst="rect">
             <a:avLst/>
@@ -6513,7 +6513,7 @@
           <p:cNvPr id="45" name="">
             <a:extLst xmlns:a="http://schemas.openxmlformats.org/drawingml/2006/main">
               <a:ext uri="{FF2B5EF4-FFF2-40B4-BE49-F238E27FC236}">
-                <a16:creationId xmlns:a16="http://schemas.microsoft.com/office/drawing/2014/main" id="{7E05032D-D08C-4CB3-AD78-AE568AD591A6}"/>
+                <a16:creationId xmlns:a16="http://schemas.microsoft.com/office/drawing/2014/main" id="{E87FA2F6-CB1F-4CD9-85F6-13CDBA6DF8BC}"/>
               </a:ext>
             </a:extLst>
           </p:cNvPr>
@@ -6567,7 +6567,7 @@
           <p:cNvPr id="46" name="">
             <a:extLst xmlns:a="http://schemas.openxmlformats.org/drawingml/2006/main">
               <a:ext uri="{FF2B5EF4-FFF2-40B4-BE49-F238E27FC236}">
-                <a16:creationId xmlns:a16="http://schemas.microsoft.com/office/drawing/2014/main" id="{EEC9E956-55C0-474B-92C1-88E8170BD69C}"/>
+                <a16:creationId xmlns:a16="http://schemas.microsoft.com/office/drawing/2014/main" id="{19ED3336-5F22-4262-9C07-4425BABE5F0E}"/>
               </a:ext>
             </a:extLst>
           </p:cNvPr>
@@ -6625,7 +6625,7 @@
           <p:cNvPr id="47" name="">
             <a:extLst xmlns:a="http://schemas.openxmlformats.org/drawingml/2006/main">
               <a:ext uri="{FF2B5EF4-FFF2-40B4-BE49-F238E27FC236}">
-                <a16:creationId xmlns:a16="http://schemas.microsoft.com/office/drawing/2014/main" id="{20591A73-FA7B-4402-867B-CE07735667B5}"/>
+                <a16:creationId xmlns:a16="http://schemas.microsoft.com/office/drawing/2014/main" id="{E0265174-9959-4E40-9878-0B0A0FFFD198}"/>
               </a:ext>
             </a:extLst>
           </p:cNvPr>
@@ -6700,7 +6700,7 @@
           <p:cNvPr id="48" name="">
             <a:extLst xmlns:a="http://schemas.openxmlformats.org/drawingml/2006/main">
               <a:ext uri="{FF2B5EF4-FFF2-40B4-BE49-F238E27FC236}">
-                <a16:creationId xmlns:a16="http://schemas.microsoft.com/office/drawing/2014/main" id="{6D366893-9473-4C8E-BA9C-D16AE7EF20FC}"/>
+                <a16:creationId xmlns:a16="http://schemas.microsoft.com/office/drawing/2014/main" id="{A0CD3C8F-18E3-4E20-97CB-A4712CB636C1}"/>
               </a:ext>
             </a:extLst>
           </p:cNvPr>
@@ -6756,7 +6756,7 @@
     </p:spTree>
     <p:extLst>
       <p:ext uri="{BB962C8B-B14F-4D97-AF65-F5344CB8AC3E}">
-        <p14:creationId xmlns:p14="http://schemas.microsoft.com/office/powerpoint/2010/main" val="787067506"/>
+        <p14:creationId xmlns:p14="http://schemas.microsoft.com/office/powerpoint/2010/main" val="1747143341"/>
       </p:ext>
     </p:extLst>
   </p:cSld>
@@ -6787,7 +6787,7 @@
           <p:cNvPr id="1" name="Slide Number Placeholder 5">
             <a:extLst xmlns:a="http://schemas.openxmlformats.org/drawingml/2006/main">
               <a:ext uri="{FF2B5EF4-FFF2-40B4-BE49-F238E27FC236}">
-                <a16:creationId xmlns:a16="http://schemas.microsoft.com/office/drawing/2014/main" id="{960B6032-F217-4E1A-A5DD-55BD6786A62D}"/>
+                <a16:creationId xmlns:a16="http://schemas.microsoft.com/office/drawing/2014/main" id="{821508BF-91E3-4E78-84B3-DCBD229C8660}"/>
               </a:ext>
             </a:extLst>
           </p:cNvPr>
@@ -6823,7 +6823,7 @@
           <p:nvPr/>
         </p:nvPicPr>
         <p:blipFill>
-          <a:blip xmlns:r="http://schemas.openxmlformats.org/officeDocument/2006/relationships" xmlns:a="http://schemas.openxmlformats.org/drawingml/2006/main" r:embed="Rbba9e852e65c4b15"/>
+          <a:blip xmlns:r="http://schemas.openxmlformats.org/officeDocument/2006/relationships" xmlns:a="http://schemas.openxmlformats.org/drawingml/2006/main" r:embed="R55a429a8104b4a62"/>
           <a:srcRect xmlns:a="http://schemas.openxmlformats.org/drawingml/2006/main" l="0" t="21875" r="0" b="21875"/>
           <a:stretch xmlns:a="http://schemas.openxmlformats.org/drawingml/2006/main">
             <a:fillRect l="0" t="0" r="0" b="0"/>
@@ -6844,7 +6844,7 @@
           <p:cNvPr id="3" name="">
             <a:extLst xmlns:a="http://schemas.openxmlformats.org/drawingml/2006/main">
               <a:ext uri="{FF2B5EF4-FFF2-40B4-BE49-F238E27FC236}">
-                <a16:creationId xmlns:a16="http://schemas.microsoft.com/office/drawing/2014/main" id="{A52D9098-2D43-4E28-B538-1A6DD387E9C3}"/>
+                <a16:creationId xmlns:a16="http://schemas.microsoft.com/office/drawing/2014/main" id="{952230EC-2926-4373-9A13-11DA5981AA44}"/>
               </a:ext>
             </a:extLst>
           </p:cNvPr>
@@ -6879,7 +6879,7 @@
           <p:cNvPr id="4" name="">
             <a:extLst xmlns:a="http://schemas.openxmlformats.org/drawingml/2006/main">
               <a:ext uri="{FF2B5EF4-FFF2-40B4-BE49-F238E27FC236}">
-                <a16:creationId xmlns:a16="http://schemas.microsoft.com/office/drawing/2014/main" id="{3A9BF062-74B9-49CE-B1C5-09FF8FF52CB1}"/>
+                <a16:creationId xmlns:a16="http://schemas.microsoft.com/office/drawing/2014/main" id="{60E6F7F5-02C7-40D1-A1B8-2FE657025465}"/>
               </a:ext>
             </a:extLst>
           </p:cNvPr>
@@ -6914,7 +6914,7 @@
           <p:cNvPr id="5" name="">
             <a:extLst xmlns:a="http://schemas.openxmlformats.org/drawingml/2006/main">
               <a:ext uri="{FF2B5EF4-FFF2-40B4-BE49-F238E27FC236}">
-                <a16:creationId xmlns:a16="http://schemas.microsoft.com/office/drawing/2014/main" id="{3BA89900-2B8E-4CE8-AC90-3EEB91C28D80}"/>
+                <a16:creationId xmlns:a16="http://schemas.microsoft.com/office/drawing/2014/main" id="{33490542-ADDF-4C85-9DF6-5C8E59FAA2A8}"/>
               </a:ext>
             </a:extLst>
           </p:cNvPr>
@@ -6951,7 +6951,7 @@
           <p:cNvPr id="6" name="">
             <a:extLst xmlns:a="http://schemas.openxmlformats.org/drawingml/2006/main">
               <a:ext uri="{FF2B5EF4-FFF2-40B4-BE49-F238E27FC236}">
-                <a16:creationId xmlns:a16="http://schemas.microsoft.com/office/drawing/2014/main" id="{32C55214-CA06-491D-924E-ED2147FF5B0F}"/>
+                <a16:creationId xmlns:a16="http://schemas.microsoft.com/office/drawing/2014/main" id="{2DD9C5F6-7393-488C-BF7D-307F049F70E2}"/>
               </a:ext>
             </a:extLst>
           </p:cNvPr>
@@ -6988,7 +6988,7 @@
           <p:cNvPr id="7" name="">
             <a:extLst xmlns:a="http://schemas.openxmlformats.org/drawingml/2006/main">
               <a:ext uri="{FF2B5EF4-FFF2-40B4-BE49-F238E27FC236}">
-                <a16:creationId xmlns:a16="http://schemas.microsoft.com/office/drawing/2014/main" id="{E64D7267-3F5E-4470-A40E-F5745C90FAD7}"/>
+                <a16:creationId xmlns:a16="http://schemas.microsoft.com/office/drawing/2014/main" id="{F5C5D73C-83F1-4923-BD03-EC3A114D77A0}"/>
               </a:ext>
             </a:extLst>
           </p:cNvPr>
@@ -7025,7 +7025,7 @@
           <p:cNvPr id="8" name="">
             <a:extLst xmlns:a="http://schemas.openxmlformats.org/drawingml/2006/main">
               <a:ext uri="{FF2B5EF4-FFF2-40B4-BE49-F238E27FC236}">
-                <a16:creationId xmlns:a16="http://schemas.microsoft.com/office/drawing/2014/main" id="{31685AC0-E1C4-4D00-86A3-205D1E68E06B}"/>
+                <a16:creationId xmlns:a16="http://schemas.microsoft.com/office/drawing/2014/main" id="{68FC44BF-416E-453A-8779-6381B105D148}"/>
               </a:ext>
             </a:extLst>
           </p:cNvPr>
@@ -7062,7 +7062,7 @@
           <p:cNvPr id="9" name="">
             <a:extLst xmlns:a="http://schemas.openxmlformats.org/drawingml/2006/main">
               <a:ext uri="{FF2B5EF4-FFF2-40B4-BE49-F238E27FC236}">
-                <a16:creationId xmlns:a16="http://schemas.microsoft.com/office/drawing/2014/main" id="{E2252E4B-4D0E-44EB-8C7D-DFDBEE942DDD}"/>
+                <a16:creationId xmlns:a16="http://schemas.microsoft.com/office/drawing/2014/main" id="{C1CBA0DE-F33D-4C6A-BACE-FC271A5EC844}"/>
               </a:ext>
             </a:extLst>
           </p:cNvPr>
@@ -7120,7 +7120,7 @@
           <p:cNvPr id="10" name="">
             <a:extLst xmlns:a="http://schemas.openxmlformats.org/drawingml/2006/main">
               <a:ext uri="{FF2B5EF4-FFF2-40B4-BE49-F238E27FC236}">
-                <a16:creationId xmlns:a16="http://schemas.microsoft.com/office/drawing/2014/main" id="{ADD5F0F7-796E-4926-9990-6D771D9569EB}"/>
+                <a16:creationId xmlns:a16="http://schemas.microsoft.com/office/drawing/2014/main" id="{CE9893DB-C1CD-498E-9D01-69F6D95C68A9}"/>
               </a:ext>
             </a:extLst>
           </p:cNvPr>
@@ -7178,7 +7178,7 @@
           <p:cNvPr id="11" name="">
             <a:extLst xmlns:a="http://schemas.openxmlformats.org/drawingml/2006/main">
               <a:ext uri="{FF2B5EF4-FFF2-40B4-BE49-F238E27FC236}">
-                <a16:creationId xmlns:a16="http://schemas.microsoft.com/office/drawing/2014/main" id="{D243EB5E-D3F1-43EA-B397-6B3A38CD8E2D}"/>
+                <a16:creationId xmlns:a16="http://schemas.microsoft.com/office/drawing/2014/main" id="{D8E04E29-556D-4CE3-A5EC-605CA9893DBF}"/>
               </a:ext>
             </a:extLst>
           </p:cNvPr>
@@ -7213,7 +7213,7 @@
           <p:cNvPr id="12" name="">
             <a:extLst xmlns:a="http://schemas.openxmlformats.org/drawingml/2006/main">
               <a:ext uri="{FF2B5EF4-FFF2-40B4-BE49-F238E27FC236}">
-                <a16:creationId xmlns:a16="http://schemas.microsoft.com/office/drawing/2014/main" id="{3A2782DC-9CBE-492C-AC01-61720E8D1270}"/>
+                <a16:creationId xmlns:a16="http://schemas.microsoft.com/office/drawing/2014/main" id="{0157BCBF-0D7A-4158-80F2-6F13FF1825AC}"/>
               </a:ext>
             </a:extLst>
           </p:cNvPr>
@@ -7246,7 +7246,7 @@
           <p:cNvPr id="13" name="">
             <a:extLst xmlns:a="http://schemas.openxmlformats.org/drawingml/2006/main">
               <a:ext uri="{FF2B5EF4-FFF2-40B4-BE49-F238E27FC236}">
-                <a16:creationId xmlns:a16="http://schemas.microsoft.com/office/drawing/2014/main" id="{3BB6EC63-E057-43E6-96C1-6FEEA1DBB27E}"/>
+                <a16:creationId xmlns:a16="http://schemas.microsoft.com/office/drawing/2014/main" id="{1F7B0E0F-9B1A-4ABE-92EA-21156651B7B9}"/>
               </a:ext>
             </a:extLst>
           </p:cNvPr>
@@ -7321,7 +7321,7 @@
           <p:cNvPr id="14" name="">
             <a:extLst xmlns:a="http://schemas.openxmlformats.org/drawingml/2006/main">
               <a:ext uri="{FF2B5EF4-FFF2-40B4-BE49-F238E27FC236}">
-                <a16:creationId xmlns:a16="http://schemas.microsoft.com/office/drawing/2014/main" id="{9D6387BF-8E1F-4375-ABB7-47D92096A12A}"/>
+                <a16:creationId xmlns:a16="http://schemas.microsoft.com/office/drawing/2014/main" id="{E3236730-E948-46D5-977D-7C744856DD72}"/>
               </a:ext>
             </a:extLst>
           </p:cNvPr>
@@ -7358,19 +7358,19 @@
           <p:cNvPr id="15" name="">
             <a:extLst xmlns:a="http://schemas.openxmlformats.org/drawingml/2006/main">
               <a:ext uri="{FF2B5EF4-FFF2-40B4-BE49-F238E27FC236}">
-                <a16:creationId xmlns:a16="http://schemas.microsoft.com/office/drawing/2014/main" id="{45005616-496A-4F15-B37F-853D58EB7AB2}"/>
-              </a:ext>
-            </a:extLst>
-          </p:cNvPr>
-          <p:cNvSpPr>
-            <a:spLocks xmlns:a="http://schemas.openxmlformats.org/drawingml/2006/main" noGrp="1"/>
-          </p:cNvSpPr>
-          <p:nvPr/>
-        </p:nvSpPr>
-        <p:spPr>
-          <a:xfrm xmlns:a="http://schemas.openxmlformats.org/drawingml/2006/main">
-            <a:off x="704850" y="2209800"/>
-            <a:ext cx="3162300" cy="76200"/>
+                <a16:creationId xmlns:a16="http://schemas.microsoft.com/office/drawing/2014/main" id="{50361F0B-77A8-4BEB-AE0C-A0BB82B39528}"/>
+              </a:ext>
+            </a:extLst>
+          </p:cNvPr>
+          <p:cNvSpPr>
+            <a:spLocks xmlns:a="http://schemas.openxmlformats.org/drawingml/2006/main" noGrp="1"/>
+          </p:cNvSpPr>
+          <p:nvPr/>
+        </p:nvSpPr>
+        <p:spPr>
+          <a:xfrm xmlns:a="http://schemas.openxmlformats.org/drawingml/2006/main">
+            <a:off x="762000" y="2266950"/>
+            <a:ext cx="3048000" cy="57150"/>
           </a:xfrm>
           <a:prstGeom xmlns:a="http://schemas.openxmlformats.org/drawingml/2006/main" prst="rect">
             <a:avLst/>
@@ -7393,7 +7393,7 @@
           <p:cNvPr id="16" name="">
             <a:extLst xmlns:a="http://schemas.openxmlformats.org/drawingml/2006/main">
               <a:ext uri="{FF2B5EF4-FFF2-40B4-BE49-F238E27FC236}">
-                <a16:creationId xmlns:a16="http://schemas.microsoft.com/office/drawing/2014/main" id="{217BD277-8141-42A4-BB8F-4B4D4F35D359}"/>
+                <a16:creationId xmlns:a16="http://schemas.microsoft.com/office/drawing/2014/main" id="{FF5C96E2-0EFF-4E8E-90E5-5DC995712A11}"/>
               </a:ext>
             </a:extLst>
           </p:cNvPr>
@@ -7451,7 +7451,7 @@
           <p:cNvPr id="17" name="">
             <a:extLst xmlns:a="http://schemas.openxmlformats.org/drawingml/2006/main">
               <a:ext uri="{FF2B5EF4-FFF2-40B4-BE49-F238E27FC236}">
-                <a16:creationId xmlns:a16="http://schemas.microsoft.com/office/drawing/2014/main" id="{06EBAC93-49C6-405E-AA7F-34C7BC650910}"/>
+                <a16:creationId xmlns:a16="http://schemas.microsoft.com/office/drawing/2014/main" id="{A4C729C8-4E3D-4C8E-B33F-F62046A6C8EC}"/>
               </a:ext>
             </a:extLst>
           </p:cNvPr>
@@ -7560,7 +7560,7 @@
           <p:cNvPr id="18" name="">
             <a:extLst xmlns:a="http://schemas.openxmlformats.org/drawingml/2006/main">
               <a:ext uri="{FF2B5EF4-FFF2-40B4-BE49-F238E27FC236}">
-                <a16:creationId xmlns:a16="http://schemas.microsoft.com/office/drawing/2014/main" id="{A05B4609-BC6D-4216-A967-0FBF48A148B1}"/>
+                <a16:creationId xmlns:a16="http://schemas.microsoft.com/office/drawing/2014/main" id="{9EA1337F-4FD2-455A-970B-363F28A6B86C}"/>
               </a:ext>
             </a:extLst>
           </p:cNvPr>
@@ -7593,7 +7593,7 @@
           <p:cNvPr id="19" name="">
             <a:extLst xmlns:a="http://schemas.openxmlformats.org/drawingml/2006/main">
               <a:ext uri="{FF2B5EF4-FFF2-40B4-BE49-F238E27FC236}">
-                <a16:creationId xmlns:a16="http://schemas.microsoft.com/office/drawing/2014/main" id="{95C35A51-1565-48AD-9E1F-0BE99DD5246C}"/>
+                <a16:creationId xmlns:a16="http://schemas.microsoft.com/office/drawing/2014/main" id="{EA668988-77B6-4926-93EE-FDDCB9C4F5E7}"/>
               </a:ext>
             </a:extLst>
           </p:cNvPr>
@@ -7630,19 +7630,19 @@
           <p:cNvPr id="20" name="">
             <a:extLst xmlns:a="http://schemas.openxmlformats.org/drawingml/2006/main">
               <a:ext uri="{FF2B5EF4-FFF2-40B4-BE49-F238E27FC236}">
-                <a16:creationId xmlns:a16="http://schemas.microsoft.com/office/drawing/2014/main" id="{BBB38B7A-706E-4394-B210-F1F688DBB8E2}"/>
-              </a:ext>
-            </a:extLst>
-          </p:cNvPr>
-          <p:cNvSpPr>
-            <a:spLocks xmlns:a="http://schemas.openxmlformats.org/drawingml/2006/main" noGrp="1"/>
-          </p:cNvSpPr>
-          <p:nvPr/>
-        </p:nvSpPr>
-        <p:spPr>
-          <a:xfrm xmlns:a="http://schemas.openxmlformats.org/drawingml/2006/main">
-            <a:off x="4762500" y="2209800"/>
-            <a:ext cx="3162300" cy="76200"/>
+                <a16:creationId xmlns:a16="http://schemas.microsoft.com/office/drawing/2014/main" id="{0307687A-9FF9-4D6E-9FA3-0E88122C0C11}"/>
+              </a:ext>
+            </a:extLst>
+          </p:cNvPr>
+          <p:cNvSpPr>
+            <a:spLocks xmlns:a="http://schemas.openxmlformats.org/drawingml/2006/main" noGrp="1"/>
+          </p:cNvSpPr>
+          <p:nvPr/>
+        </p:nvSpPr>
+        <p:spPr>
+          <a:xfrm xmlns:a="http://schemas.openxmlformats.org/drawingml/2006/main">
+            <a:off x="4819650" y="2266950"/>
+            <a:ext cx="3048000" cy="57150"/>
           </a:xfrm>
           <a:prstGeom xmlns:a="http://schemas.openxmlformats.org/drawingml/2006/main" prst="rect">
             <a:avLst/>
@@ -7665,7 +7665,7 @@
           <p:cNvPr id="21" name="">
             <a:extLst xmlns:a="http://schemas.openxmlformats.org/drawingml/2006/main">
               <a:ext uri="{FF2B5EF4-FFF2-40B4-BE49-F238E27FC236}">
-                <a16:creationId xmlns:a16="http://schemas.microsoft.com/office/drawing/2014/main" id="{388CC5E5-03F7-4DF2-BD81-A13AAA33F208}"/>
+                <a16:creationId xmlns:a16="http://schemas.microsoft.com/office/drawing/2014/main" id="{C90474FA-1F73-49BA-A7E8-7158A0734E14}"/>
               </a:ext>
             </a:extLst>
           </p:cNvPr>
@@ -7723,7 +7723,7 @@
           <p:cNvPr id="22" name="">
             <a:extLst xmlns:a="http://schemas.openxmlformats.org/drawingml/2006/main">
               <a:ext uri="{FF2B5EF4-FFF2-40B4-BE49-F238E27FC236}">
-                <a16:creationId xmlns:a16="http://schemas.microsoft.com/office/drawing/2014/main" id="{D1DD6816-FDF1-4A42-B68F-AC3E4DD5EEA2}"/>
+                <a16:creationId xmlns:a16="http://schemas.microsoft.com/office/drawing/2014/main" id="{3FD80DB5-EC63-49B5-BD45-D3AD44BE19C6}"/>
               </a:ext>
             </a:extLst>
           </p:cNvPr>
@@ -7815,7 +7815,7 @@
           <p:cNvPr id="23" name="">
             <a:extLst xmlns:a="http://schemas.openxmlformats.org/drawingml/2006/main">
               <a:ext uri="{FF2B5EF4-FFF2-40B4-BE49-F238E27FC236}">
-                <a16:creationId xmlns:a16="http://schemas.microsoft.com/office/drawing/2014/main" id="{913D0341-05E4-4438-824A-92CA1C3CEFE7}"/>
+                <a16:creationId xmlns:a16="http://schemas.microsoft.com/office/drawing/2014/main" id="{ABA45EDC-C2CD-40B1-BF76-F8F161588161}"/>
               </a:ext>
             </a:extLst>
           </p:cNvPr>
@@ -7848,7 +7848,7 @@
           <p:cNvPr id="24" name="">
             <a:extLst xmlns:a="http://schemas.openxmlformats.org/drawingml/2006/main">
               <a:ext uri="{FF2B5EF4-FFF2-40B4-BE49-F238E27FC236}">
-                <a16:creationId xmlns:a16="http://schemas.microsoft.com/office/drawing/2014/main" id="{9F6390D0-8126-4229-81A4-59032DA927D4}"/>
+                <a16:creationId xmlns:a16="http://schemas.microsoft.com/office/drawing/2014/main" id="{F19BC522-95A2-4D10-B971-474B16DF5A17}"/>
               </a:ext>
             </a:extLst>
           </p:cNvPr>
@@ -7885,19 +7885,19 @@
           <p:cNvPr id="25" name="">
             <a:extLst xmlns:a="http://schemas.openxmlformats.org/drawingml/2006/main">
               <a:ext uri="{FF2B5EF4-FFF2-40B4-BE49-F238E27FC236}">
-                <a16:creationId xmlns:a16="http://schemas.microsoft.com/office/drawing/2014/main" id="{A1AB046F-84FA-433D-9BFE-235AFD61CC72}"/>
-              </a:ext>
-            </a:extLst>
-          </p:cNvPr>
-          <p:cNvSpPr>
-            <a:spLocks xmlns:a="http://schemas.openxmlformats.org/drawingml/2006/main" noGrp="1"/>
-          </p:cNvSpPr>
-          <p:nvPr/>
-        </p:nvSpPr>
-        <p:spPr>
-          <a:xfrm xmlns:a="http://schemas.openxmlformats.org/drawingml/2006/main">
-            <a:off x="8820150" y="2209800"/>
-            <a:ext cx="2667000" cy="76200"/>
+                <a16:creationId xmlns:a16="http://schemas.microsoft.com/office/drawing/2014/main" id="{D83D6569-1440-4D5D-959D-A29757960CB4}"/>
+              </a:ext>
+            </a:extLst>
+          </p:cNvPr>
+          <p:cNvSpPr>
+            <a:spLocks xmlns:a="http://schemas.openxmlformats.org/drawingml/2006/main" noGrp="1"/>
+          </p:cNvSpPr>
+          <p:nvPr/>
+        </p:nvSpPr>
+        <p:spPr>
+          <a:xfrm xmlns:a="http://schemas.openxmlformats.org/drawingml/2006/main">
+            <a:off x="8877300" y="2266950"/>
+            <a:ext cx="2552700" cy="57150"/>
           </a:xfrm>
           <a:prstGeom xmlns:a="http://schemas.openxmlformats.org/drawingml/2006/main" prst="rect">
             <a:avLst/>
@@ -7920,7 +7920,7 @@
           <p:cNvPr id="26" name="">
             <a:extLst xmlns:a="http://schemas.openxmlformats.org/drawingml/2006/main">
               <a:ext uri="{FF2B5EF4-FFF2-40B4-BE49-F238E27FC236}">
-                <a16:creationId xmlns:a16="http://schemas.microsoft.com/office/drawing/2014/main" id="{2BD8FDE3-2F26-4B8A-AE22-48259EAB548C}"/>
+                <a16:creationId xmlns:a16="http://schemas.microsoft.com/office/drawing/2014/main" id="{8817F1A5-7D89-4777-820E-9B5BB081D7B5}"/>
               </a:ext>
             </a:extLst>
           </p:cNvPr>
@@ -7978,7 +7978,7 @@
           <p:cNvPr id="27" name="">
             <a:extLst xmlns:a="http://schemas.openxmlformats.org/drawingml/2006/main">
               <a:ext uri="{FF2B5EF4-FFF2-40B4-BE49-F238E27FC236}">
-                <a16:creationId xmlns:a16="http://schemas.microsoft.com/office/drawing/2014/main" id="{C1A75C71-4558-43EF-B3F3-C8395F6C19DD}"/>
+                <a16:creationId xmlns:a16="http://schemas.microsoft.com/office/drawing/2014/main" id="{6C6D2C3A-471E-413A-A278-A60B885BBB28}"/>
               </a:ext>
             </a:extLst>
           </p:cNvPr>
@@ -8070,7 +8070,7 @@
           <p:cNvPr id="28" name="">
             <a:extLst xmlns:a="http://schemas.openxmlformats.org/drawingml/2006/main">
               <a:ext uri="{FF2B5EF4-FFF2-40B4-BE49-F238E27FC236}">
-                <a16:creationId xmlns:a16="http://schemas.microsoft.com/office/drawing/2014/main" id="{BD59825F-D55E-4B1E-8A59-69662D2B4F4D}"/>
+                <a16:creationId xmlns:a16="http://schemas.microsoft.com/office/drawing/2014/main" id="{6AE76FE0-AF64-4D27-B67F-E8994364ADEC}"/>
               </a:ext>
             </a:extLst>
           </p:cNvPr>
@@ -8105,19 +8105,19 @@
           <p:cNvPr id="29" name="">
             <a:extLst xmlns:a="http://schemas.openxmlformats.org/drawingml/2006/main">
               <a:ext uri="{FF2B5EF4-FFF2-40B4-BE49-F238E27FC236}">
-                <a16:creationId xmlns:a16="http://schemas.microsoft.com/office/drawing/2014/main" id="{3A5674C4-3B09-4D9E-92F3-B9D3A67F337B}"/>
-              </a:ext>
-            </a:extLst>
-          </p:cNvPr>
-          <p:cNvSpPr>
-            <a:spLocks xmlns:a="http://schemas.openxmlformats.org/drawingml/2006/main" noGrp="1"/>
-          </p:cNvSpPr>
-          <p:nvPr/>
-        </p:nvSpPr>
-        <p:spPr>
-          <a:xfrm xmlns:a="http://schemas.openxmlformats.org/drawingml/2006/main">
-            <a:off x="723900" y="5029200"/>
-            <a:ext cx="76200" cy="819150"/>
+                <a16:creationId xmlns:a16="http://schemas.microsoft.com/office/drawing/2014/main" id="{AFFD26AC-802D-4C70-9420-FB597967DC4C}"/>
+              </a:ext>
+            </a:extLst>
+          </p:cNvPr>
+          <p:cNvSpPr>
+            <a:spLocks xmlns:a="http://schemas.openxmlformats.org/drawingml/2006/main" noGrp="1"/>
+          </p:cNvSpPr>
+          <p:nvPr/>
+        </p:nvSpPr>
+        <p:spPr>
+          <a:xfrm xmlns:a="http://schemas.openxmlformats.org/drawingml/2006/main">
+            <a:off x="771525" y="5076825"/>
+            <a:ext cx="57150" cy="723900"/>
           </a:xfrm>
           <a:prstGeom xmlns:a="http://schemas.openxmlformats.org/drawingml/2006/main" prst="rect">
             <a:avLst/>
@@ -8140,7 +8140,7 @@
           <p:cNvPr id="30" name="">
             <a:extLst xmlns:a="http://schemas.openxmlformats.org/drawingml/2006/main">
               <a:ext uri="{FF2B5EF4-FFF2-40B4-BE49-F238E27FC236}">
-                <a16:creationId xmlns:a16="http://schemas.microsoft.com/office/drawing/2014/main" id="{9BBF5409-3A31-40E4-8133-D60FDB4D3319}"/>
+                <a16:creationId xmlns:a16="http://schemas.microsoft.com/office/drawing/2014/main" id="{0967D56F-6A63-4341-A25C-FF8A51870AE7}"/>
               </a:ext>
             </a:extLst>
           </p:cNvPr>
@@ -8198,7 +8198,7 @@
           <p:cNvPr id="31" name="">
             <a:extLst xmlns:a="http://schemas.openxmlformats.org/drawingml/2006/main">
               <a:ext uri="{FF2B5EF4-FFF2-40B4-BE49-F238E27FC236}">
-                <a16:creationId xmlns:a16="http://schemas.microsoft.com/office/drawing/2014/main" id="{FECC0E2F-6AF3-4BE0-951D-EF074EB9E3B9}"/>
+                <a16:creationId xmlns:a16="http://schemas.microsoft.com/office/drawing/2014/main" id="{BF9CA981-0DD6-4B90-924A-58F3445FBB1B}"/>
               </a:ext>
             </a:extLst>
           </p:cNvPr>
@@ -8254,7 +8254,7 @@
     </p:spTree>
     <p:extLst>
       <p:ext uri="{BB962C8B-B14F-4D97-AF65-F5344CB8AC3E}">
-        <p14:creationId xmlns:p14="http://schemas.microsoft.com/office/powerpoint/2010/main" val="1370780609"/>
+        <p14:creationId xmlns:p14="http://schemas.microsoft.com/office/powerpoint/2010/main" val="1787582743"/>
       </p:ext>
     </p:extLst>
   </p:cSld>
@@ -8285,7 +8285,7 @@
           <p:cNvPr id="1" name="Slide Number Placeholder 5">
             <a:extLst xmlns:a="http://schemas.openxmlformats.org/drawingml/2006/main">
               <a:ext uri="{FF2B5EF4-FFF2-40B4-BE49-F238E27FC236}">
-                <a16:creationId xmlns:a16="http://schemas.microsoft.com/office/drawing/2014/main" id="{960B6032-F217-4E1A-A5DD-55BD6786A62D}"/>
+                <a16:creationId xmlns:a16="http://schemas.microsoft.com/office/drawing/2014/main" id="{821508BF-91E3-4E78-84B3-DCBD229C8660}"/>
               </a:ext>
             </a:extLst>
           </p:cNvPr>
@@ -8321,7 +8321,7 @@
           <p:nvPr/>
         </p:nvPicPr>
         <p:blipFill>
-          <a:blip xmlns:r="http://schemas.openxmlformats.org/officeDocument/2006/relationships" xmlns:a="http://schemas.openxmlformats.org/drawingml/2006/main" r:embed="R3cfa3a8900a841c8"/>
+          <a:blip xmlns:r="http://schemas.openxmlformats.org/officeDocument/2006/relationships" xmlns:a="http://schemas.openxmlformats.org/drawingml/2006/main" r:embed="R83ce7e75ba5a41cb"/>
           <a:srcRect xmlns:a="http://schemas.openxmlformats.org/drawingml/2006/main" l="0" t="21875" r="0" b="21875"/>
           <a:stretch xmlns:a="http://schemas.openxmlformats.org/drawingml/2006/main">
             <a:fillRect l="0" t="0" r="0" b="0"/>
@@ -8342,7 +8342,7 @@
           <p:cNvPr id="3" name="">
             <a:extLst xmlns:a="http://schemas.openxmlformats.org/drawingml/2006/main">
               <a:ext uri="{FF2B5EF4-FFF2-40B4-BE49-F238E27FC236}">
-                <a16:creationId xmlns:a16="http://schemas.microsoft.com/office/drawing/2014/main" id="{C80F7C23-607F-40E5-BFE5-A38764698413}"/>
+                <a16:creationId xmlns:a16="http://schemas.microsoft.com/office/drawing/2014/main" id="{BAB9F881-6422-4547-AA6E-C05F8E98B474}"/>
               </a:ext>
             </a:extLst>
           </p:cNvPr>
@@ -8377,7 +8377,7 @@
           <p:cNvPr id="4" name="">
             <a:extLst xmlns:a="http://schemas.openxmlformats.org/drawingml/2006/main">
               <a:ext uri="{FF2B5EF4-FFF2-40B4-BE49-F238E27FC236}">
-                <a16:creationId xmlns:a16="http://schemas.microsoft.com/office/drawing/2014/main" id="{29B5BD61-F9EC-4029-A669-AEF0FCE0215F}"/>
+                <a16:creationId xmlns:a16="http://schemas.microsoft.com/office/drawing/2014/main" id="{185835C4-95A7-4D1F-A151-4D4056C69FB5}"/>
               </a:ext>
             </a:extLst>
           </p:cNvPr>
@@ -8412,7 +8412,7 @@
           <p:cNvPr id="5" name="">
             <a:extLst xmlns:a="http://schemas.openxmlformats.org/drawingml/2006/main">
               <a:ext uri="{FF2B5EF4-FFF2-40B4-BE49-F238E27FC236}">
-                <a16:creationId xmlns:a16="http://schemas.microsoft.com/office/drawing/2014/main" id="{87228B47-3A71-435A-A01B-3E8EF4513923}"/>
+                <a16:creationId xmlns:a16="http://schemas.microsoft.com/office/drawing/2014/main" id="{D3ECED67-1EC9-45CB-BD1D-A00FF5B9D9C6}"/>
               </a:ext>
             </a:extLst>
           </p:cNvPr>
@@ -8449,7 +8449,7 @@
           <p:cNvPr id="6" name="">
             <a:extLst xmlns:a="http://schemas.openxmlformats.org/drawingml/2006/main">
               <a:ext uri="{FF2B5EF4-FFF2-40B4-BE49-F238E27FC236}">
-                <a16:creationId xmlns:a16="http://schemas.microsoft.com/office/drawing/2014/main" id="{CB44074F-8F39-4D52-A86D-709F9AE64B94}"/>
+                <a16:creationId xmlns:a16="http://schemas.microsoft.com/office/drawing/2014/main" id="{9E31B7EF-593C-421B-99F9-1B1EA7E71802}"/>
               </a:ext>
             </a:extLst>
           </p:cNvPr>
@@ -8486,7 +8486,7 @@
           <p:cNvPr id="7" name="">
             <a:extLst xmlns:a="http://schemas.openxmlformats.org/drawingml/2006/main">
               <a:ext uri="{FF2B5EF4-FFF2-40B4-BE49-F238E27FC236}">
-                <a16:creationId xmlns:a16="http://schemas.microsoft.com/office/drawing/2014/main" id="{F6010B32-3508-4015-B92A-8F0C6889A27D}"/>
+                <a16:creationId xmlns:a16="http://schemas.microsoft.com/office/drawing/2014/main" id="{1DFDEA9F-25BA-4CA1-8777-4960F5AFA8BC}"/>
               </a:ext>
             </a:extLst>
           </p:cNvPr>
@@ -8523,7 +8523,7 @@
           <p:cNvPr id="8" name="">
             <a:extLst xmlns:a="http://schemas.openxmlformats.org/drawingml/2006/main">
               <a:ext uri="{FF2B5EF4-FFF2-40B4-BE49-F238E27FC236}">
-                <a16:creationId xmlns:a16="http://schemas.microsoft.com/office/drawing/2014/main" id="{7B3E7D01-DB4E-4C5B-860E-24B844186E89}"/>
+                <a16:creationId xmlns:a16="http://schemas.microsoft.com/office/drawing/2014/main" id="{1BC3AAE2-42FE-4AA3-9918-813C1957CC4E}"/>
               </a:ext>
             </a:extLst>
           </p:cNvPr>
@@ -8560,7 +8560,7 @@
           <p:cNvPr id="9" name="">
             <a:extLst xmlns:a="http://schemas.openxmlformats.org/drawingml/2006/main">
               <a:ext uri="{FF2B5EF4-FFF2-40B4-BE49-F238E27FC236}">
-                <a16:creationId xmlns:a16="http://schemas.microsoft.com/office/drawing/2014/main" id="{8213490E-2373-4845-85BE-91259D48EA7F}"/>
+                <a16:creationId xmlns:a16="http://schemas.microsoft.com/office/drawing/2014/main" id="{1D07CF24-FBF8-4F41-98ED-BB5694072A63}"/>
               </a:ext>
             </a:extLst>
           </p:cNvPr>
@@ -8618,7 +8618,7 @@
           <p:cNvPr id="10" name="">
             <a:extLst xmlns:a="http://schemas.openxmlformats.org/drawingml/2006/main">
               <a:ext uri="{FF2B5EF4-FFF2-40B4-BE49-F238E27FC236}">
-                <a16:creationId xmlns:a16="http://schemas.microsoft.com/office/drawing/2014/main" id="{7FA503CE-5228-41DE-81ED-12424AA536E6}"/>
+                <a16:creationId xmlns:a16="http://schemas.microsoft.com/office/drawing/2014/main" id="{7AA1A5C0-A672-4462-A293-AEB1848EF53C}"/>
               </a:ext>
             </a:extLst>
           </p:cNvPr>
@@ -8676,7 +8676,7 @@
           <p:cNvPr id="11" name="">
             <a:extLst xmlns:a="http://schemas.openxmlformats.org/drawingml/2006/main">
               <a:ext uri="{FF2B5EF4-FFF2-40B4-BE49-F238E27FC236}">
-                <a16:creationId xmlns:a16="http://schemas.microsoft.com/office/drawing/2014/main" id="{6A0C2324-CCAF-4880-9AA0-65B6F646996B}"/>
+                <a16:creationId xmlns:a16="http://schemas.microsoft.com/office/drawing/2014/main" id="{BD7928CE-A26E-469B-8F18-CDE0900CB37E}"/>
               </a:ext>
             </a:extLst>
           </p:cNvPr>
@@ -8711,7 +8711,7 @@
           <p:cNvPr id="12" name="">
             <a:extLst xmlns:a="http://schemas.openxmlformats.org/drawingml/2006/main">
               <a:ext uri="{FF2B5EF4-FFF2-40B4-BE49-F238E27FC236}">
-                <a16:creationId xmlns:a16="http://schemas.microsoft.com/office/drawing/2014/main" id="{A785EBB7-8132-4114-AD55-2E0256F25359}"/>
+                <a16:creationId xmlns:a16="http://schemas.microsoft.com/office/drawing/2014/main" id="{98D4D901-9A90-4335-8452-275474670011}"/>
               </a:ext>
             </a:extLst>
           </p:cNvPr>
@@ -8744,7 +8744,7 @@
           <p:cNvPr id="13" name="">
             <a:extLst xmlns:a="http://schemas.openxmlformats.org/drawingml/2006/main">
               <a:ext uri="{FF2B5EF4-FFF2-40B4-BE49-F238E27FC236}">
-                <a16:creationId xmlns:a16="http://schemas.microsoft.com/office/drawing/2014/main" id="{F4454808-891E-4091-9B0D-B8E9D39A9602}"/>
+                <a16:creationId xmlns:a16="http://schemas.microsoft.com/office/drawing/2014/main" id="{68B98703-462B-4554-9BE7-CF02465DE8B1}"/>
               </a:ext>
             </a:extLst>
           </p:cNvPr>
@@ -8802,7 +8802,7 @@
           <p:cNvPr id="14" name="">
             <a:extLst xmlns:a="http://schemas.openxmlformats.org/drawingml/2006/main">
               <a:ext uri="{FF2B5EF4-FFF2-40B4-BE49-F238E27FC236}">
-                <a16:creationId xmlns:a16="http://schemas.microsoft.com/office/drawing/2014/main" id="{0A46A9B8-0761-4839-9694-DFEFF6816DE4}"/>
+                <a16:creationId xmlns:a16="http://schemas.microsoft.com/office/drawing/2014/main" id="{E48F7597-F743-4F17-81ED-E0D97C721C26}"/>
               </a:ext>
             </a:extLst>
           </p:cNvPr>
@@ -8839,19 +8839,19 @@
           <p:cNvPr id="15" name="">
             <a:extLst xmlns:a="http://schemas.openxmlformats.org/drawingml/2006/main">
               <a:ext uri="{FF2B5EF4-FFF2-40B4-BE49-F238E27FC236}">
-                <a16:creationId xmlns:a16="http://schemas.microsoft.com/office/drawing/2014/main" id="{7B3E52C1-5905-44FB-9C64-BFB8F5D01792}"/>
-              </a:ext>
-            </a:extLst>
-          </p:cNvPr>
-          <p:cNvSpPr>
-            <a:spLocks xmlns:a="http://schemas.openxmlformats.org/drawingml/2006/main" noGrp="1"/>
-          </p:cNvSpPr>
-          <p:nvPr/>
-        </p:nvSpPr>
-        <p:spPr>
-          <a:xfrm xmlns:a="http://schemas.openxmlformats.org/drawingml/2006/main">
-            <a:off x="704850" y="2095500"/>
-            <a:ext cx="3143250" cy="76200"/>
+                <a16:creationId xmlns:a16="http://schemas.microsoft.com/office/drawing/2014/main" id="{8F25A314-CE46-45FB-A540-7E40A1C32B38}"/>
+              </a:ext>
+            </a:extLst>
+          </p:cNvPr>
+          <p:cNvSpPr>
+            <a:spLocks xmlns:a="http://schemas.openxmlformats.org/drawingml/2006/main" noGrp="1"/>
+          </p:cNvSpPr>
+          <p:nvPr/>
+        </p:nvSpPr>
+        <p:spPr>
+          <a:xfrm xmlns:a="http://schemas.openxmlformats.org/drawingml/2006/main">
+            <a:off x="762000" y="2152650"/>
+            <a:ext cx="3028950" cy="57150"/>
           </a:xfrm>
           <a:prstGeom xmlns:a="http://schemas.openxmlformats.org/drawingml/2006/main" prst="rect">
             <a:avLst/>
@@ -8874,7 +8874,7 @@
           <p:cNvPr id="16" name="">
             <a:extLst xmlns:a="http://schemas.openxmlformats.org/drawingml/2006/main">
               <a:ext uri="{FF2B5EF4-FFF2-40B4-BE49-F238E27FC236}">
-                <a16:creationId xmlns:a16="http://schemas.microsoft.com/office/drawing/2014/main" id="{5F19D6AD-4A2A-45DD-A53F-47A4912CCFDD}"/>
+                <a16:creationId xmlns:a16="http://schemas.microsoft.com/office/drawing/2014/main" id="{B8058516-A541-48BE-8390-8643C3842469}"/>
               </a:ext>
             </a:extLst>
           </p:cNvPr>
@@ -8932,7 +8932,7 @@
           <p:cNvPr id="17" name="">
             <a:extLst xmlns:a="http://schemas.openxmlformats.org/drawingml/2006/main">
               <a:ext uri="{FF2B5EF4-FFF2-40B4-BE49-F238E27FC236}">
-                <a16:creationId xmlns:a16="http://schemas.microsoft.com/office/drawing/2014/main" id="{7FFC5497-975C-4365-8D6E-85A962ABD59A}"/>
+                <a16:creationId xmlns:a16="http://schemas.microsoft.com/office/drawing/2014/main" id="{1A4817CB-C49C-4CEB-BFF8-2D59FEDCC66D}"/>
               </a:ext>
             </a:extLst>
           </p:cNvPr>
@@ -9024,7 +9024,7 @@
           <p:cNvPr id="18" name="">
             <a:extLst xmlns:a="http://schemas.openxmlformats.org/drawingml/2006/main">
               <a:ext uri="{FF2B5EF4-FFF2-40B4-BE49-F238E27FC236}">
-                <a16:creationId xmlns:a16="http://schemas.microsoft.com/office/drawing/2014/main" id="{FA56A61D-B9FB-4A26-977E-B86633972B79}"/>
+                <a16:creationId xmlns:a16="http://schemas.microsoft.com/office/drawing/2014/main" id="{D38BB4BB-789E-4F70-8357-4DA568DADC00}"/>
               </a:ext>
             </a:extLst>
           </p:cNvPr>
@@ -9061,19 +9061,19 @@
           <p:cNvPr id="19" name="">
             <a:extLst xmlns:a="http://schemas.openxmlformats.org/drawingml/2006/main">
               <a:ext uri="{FF2B5EF4-FFF2-40B4-BE49-F238E27FC236}">
-                <a16:creationId xmlns:a16="http://schemas.microsoft.com/office/drawing/2014/main" id="{8FB0021A-A814-47DE-8DD3-42CB7D8E4385}"/>
-              </a:ext>
-            </a:extLst>
-          </p:cNvPr>
-          <p:cNvSpPr>
-            <a:spLocks xmlns:a="http://schemas.openxmlformats.org/drawingml/2006/main" noGrp="1"/>
-          </p:cNvSpPr>
-          <p:nvPr/>
-        </p:nvSpPr>
-        <p:spPr>
-          <a:xfrm xmlns:a="http://schemas.openxmlformats.org/drawingml/2006/main">
-            <a:off x="4095750" y="2095500"/>
-            <a:ext cx="3143250" cy="76200"/>
+                <a16:creationId xmlns:a16="http://schemas.microsoft.com/office/drawing/2014/main" id="{B1A4D87A-D7D4-4141-8E97-76B0742F4911}"/>
+              </a:ext>
+            </a:extLst>
+          </p:cNvPr>
+          <p:cNvSpPr>
+            <a:spLocks xmlns:a="http://schemas.openxmlformats.org/drawingml/2006/main" noGrp="1"/>
+          </p:cNvSpPr>
+          <p:nvPr/>
+        </p:nvSpPr>
+        <p:spPr>
+          <a:xfrm xmlns:a="http://schemas.openxmlformats.org/drawingml/2006/main">
+            <a:off x="4152900" y="2152650"/>
+            <a:ext cx="3028950" cy="57150"/>
           </a:xfrm>
           <a:prstGeom xmlns:a="http://schemas.openxmlformats.org/drawingml/2006/main" prst="rect">
             <a:avLst/>
@@ -9096,7 +9096,7 @@
           <p:cNvPr id="20" name="">
             <a:extLst xmlns:a="http://schemas.openxmlformats.org/drawingml/2006/main">
               <a:ext uri="{FF2B5EF4-FFF2-40B4-BE49-F238E27FC236}">
-                <a16:creationId xmlns:a16="http://schemas.microsoft.com/office/drawing/2014/main" id="{987CA3A3-7176-427E-99FB-0F37BB309C8C}"/>
+                <a16:creationId xmlns:a16="http://schemas.microsoft.com/office/drawing/2014/main" id="{436298B0-3DE0-4F8F-93E3-79EBBBDFDB66}"/>
               </a:ext>
             </a:extLst>
           </p:cNvPr>
@@ -9154,7 +9154,7 @@
           <p:cNvPr id="21" name="">
             <a:extLst xmlns:a="http://schemas.openxmlformats.org/drawingml/2006/main">
               <a:ext uri="{FF2B5EF4-FFF2-40B4-BE49-F238E27FC236}">
-                <a16:creationId xmlns:a16="http://schemas.microsoft.com/office/drawing/2014/main" id="{5FB5EB20-1902-4791-AABD-6C9ABB31E146}"/>
+                <a16:creationId xmlns:a16="http://schemas.microsoft.com/office/drawing/2014/main" id="{D4E84F0D-A05B-48D8-B8B2-4656FFA4EB5E}"/>
               </a:ext>
             </a:extLst>
           </p:cNvPr>
@@ -9229,7 +9229,7 @@
           <p:cNvPr id="22" name="">
             <a:extLst xmlns:a="http://schemas.openxmlformats.org/drawingml/2006/main">
               <a:ext uri="{FF2B5EF4-FFF2-40B4-BE49-F238E27FC236}">
-                <a16:creationId xmlns:a16="http://schemas.microsoft.com/office/drawing/2014/main" id="{5E6E42FE-BB9A-4800-93F1-824FF3268EAA}"/>
+                <a16:creationId xmlns:a16="http://schemas.microsoft.com/office/drawing/2014/main" id="{B2118F55-65FA-4213-8FEE-7B9F93536AE0}"/>
               </a:ext>
             </a:extLst>
           </p:cNvPr>
@@ -9266,19 +9266,19 @@
           <p:cNvPr id="23" name="">
             <a:extLst xmlns:a="http://schemas.openxmlformats.org/drawingml/2006/main">
               <a:ext uri="{FF2B5EF4-FFF2-40B4-BE49-F238E27FC236}">
-                <a16:creationId xmlns:a16="http://schemas.microsoft.com/office/drawing/2014/main" id="{E50FE5DC-CB9D-4DE9-A434-B1A3C156D61A}"/>
-              </a:ext>
-            </a:extLst>
-          </p:cNvPr>
-          <p:cNvSpPr>
-            <a:spLocks xmlns:a="http://schemas.openxmlformats.org/drawingml/2006/main" noGrp="1"/>
-          </p:cNvSpPr>
-          <p:nvPr/>
-        </p:nvSpPr>
-        <p:spPr>
-          <a:xfrm xmlns:a="http://schemas.openxmlformats.org/drawingml/2006/main">
-            <a:off x="7486650" y="2095500"/>
-            <a:ext cx="4000500" cy="76200"/>
+                <a16:creationId xmlns:a16="http://schemas.microsoft.com/office/drawing/2014/main" id="{2AAFEF4F-42D1-4332-8382-15B73EE80F46}"/>
+              </a:ext>
+            </a:extLst>
+          </p:cNvPr>
+          <p:cNvSpPr>
+            <a:spLocks xmlns:a="http://schemas.openxmlformats.org/drawingml/2006/main" noGrp="1"/>
+          </p:cNvSpPr>
+          <p:nvPr/>
+        </p:nvSpPr>
+        <p:spPr>
+          <a:xfrm xmlns:a="http://schemas.openxmlformats.org/drawingml/2006/main">
+            <a:off x="7543800" y="2152650"/>
+            <a:ext cx="3886200" cy="57150"/>
           </a:xfrm>
           <a:prstGeom xmlns:a="http://schemas.openxmlformats.org/drawingml/2006/main" prst="rect">
             <a:avLst/>
@@ -9301,7 +9301,7 @@
           <p:cNvPr id="24" name="">
             <a:extLst xmlns:a="http://schemas.openxmlformats.org/drawingml/2006/main">
               <a:ext uri="{FF2B5EF4-FFF2-40B4-BE49-F238E27FC236}">
-                <a16:creationId xmlns:a16="http://schemas.microsoft.com/office/drawing/2014/main" id="{664D9052-8036-4ADF-960C-21C59CD403C3}"/>
+                <a16:creationId xmlns:a16="http://schemas.microsoft.com/office/drawing/2014/main" id="{A623D73F-8FAD-4798-9A78-F62ED26F35CB}"/>
               </a:ext>
             </a:extLst>
           </p:cNvPr>
@@ -9359,7 +9359,7 @@
           <p:cNvPr id="25" name="">
             <a:extLst xmlns:a="http://schemas.openxmlformats.org/drawingml/2006/main">
               <a:ext uri="{FF2B5EF4-FFF2-40B4-BE49-F238E27FC236}">
-                <a16:creationId xmlns:a16="http://schemas.microsoft.com/office/drawing/2014/main" id="{B0FEEE6B-A432-49FF-B30A-F2B408DCD560}"/>
+                <a16:creationId xmlns:a16="http://schemas.microsoft.com/office/drawing/2014/main" id="{12D32045-5C27-4D3D-963E-3ADCAF901456}"/>
               </a:ext>
             </a:extLst>
           </p:cNvPr>
@@ -9451,7 +9451,7 @@
           <p:cNvPr id="26" name="">
             <a:extLst xmlns:a="http://schemas.openxmlformats.org/drawingml/2006/main">
               <a:ext uri="{FF2B5EF4-FFF2-40B4-BE49-F238E27FC236}">
-                <a16:creationId xmlns:a16="http://schemas.microsoft.com/office/drawing/2014/main" id="{4B6DB613-C5DE-496E-A2B9-4BDE98865BF3}"/>
+                <a16:creationId xmlns:a16="http://schemas.microsoft.com/office/drawing/2014/main" id="{D418F945-6B6B-45ED-BB7D-5F595DDE6FF2}"/>
               </a:ext>
             </a:extLst>
           </p:cNvPr>
@@ -9488,19 +9488,19 @@
           <p:cNvPr id="27" name="">
             <a:extLst xmlns:a="http://schemas.openxmlformats.org/drawingml/2006/main">
               <a:ext uri="{FF2B5EF4-FFF2-40B4-BE49-F238E27FC236}">
-                <a16:creationId xmlns:a16="http://schemas.microsoft.com/office/drawing/2014/main" id="{D0360A30-945B-4449-8A81-058DD8EEC58E}"/>
-              </a:ext>
-            </a:extLst>
-          </p:cNvPr>
-          <p:cNvSpPr>
-            <a:spLocks xmlns:a="http://schemas.openxmlformats.org/drawingml/2006/main" noGrp="1"/>
-          </p:cNvSpPr>
-          <p:nvPr/>
-        </p:nvSpPr>
-        <p:spPr>
-          <a:xfrm xmlns:a="http://schemas.openxmlformats.org/drawingml/2006/main">
-            <a:off x="704850" y="4095750"/>
-            <a:ext cx="76200" cy="819150"/>
+                <a16:creationId xmlns:a16="http://schemas.microsoft.com/office/drawing/2014/main" id="{FBD05D49-7D11-475C-B206-654039570BDE}"/>
+              </a:ext>
+            </a:extLst>
+          </p:cNvPr>
+          <p:cNvSpPr>
+            <a:spLocks xmlns:a="http://schemas.openxmlformats.org/drawingml/2006/main" noGrp="1"/>
+          </p:cNvSpPr>
+          <p:nvPr/>
+        </p:nvSpPr>
+        <p:spPr>
+          <a:xfrm xmlns:a="http://schemas.openxmlformats.org/drawingml/2006/main">
+            <a:off x="752475" y="4143375"/>
+            <a:ext cx="57150" cy="723900"/>
           </a:xfrm>
           <a:prstGeom xmlns:a="http://schemas.openxmlformats.org/drawingml/2006/main" prst="rect">
             <a:avLst/>
@@ -9523,7 +9523,7 @@
           <p:cNvPr id="28" name="">
             <a:extLst xmlns:a="http://schemas.openxmlformats.org/drawingml/2006/main">
               <a:ext uri="{FF2B5EF4-FFF2-40B4-BE49-F238E27FC236}">
-                <a16:creationId xmlns:a16="http://schemas.microsoft.com/office/drawing/2014/main" id="{2211CF0A-81FD-47F4-80F8-999D7FEEE8DB}"/>
+                <a16:creationId xmlns:a16="http://schemas.microsoft.com/office/drawing/2014/main" id="{4977C987-4274-4BFC-9478-57DE14A87BE9}"/>
               </a:ext>
             </a:extLst>
           </p:cNvPr>
@@ -9581,7 +9581,7 @@
           <p:cNvPr id="29" name="">
             <a:extLst xmlns:a="http://schemas.openxmlformats.org/drawingml/2006/main">
               <a:ext uri="{FF2B5EF4-FFF2-40B4-BE49-F238E27FC236}">
-                <a16:creationId xmlns:a16="http://schemas.microsoft.com/office/drawing/2014/main" id="{37D964C8-26D9-4AA5-A0B3-65559AF1FEFC}"/>
+                <a16:creationId xmlns:a16="http://schemas.microsoft.com/office/drawing/2014/main" id="{63DE9235-DB6E-4EE6-9473-F5FABFD521C4}"/>
               </a:ext>
             </a:extLst>
           </p:cNvPr>
@@ -9616,19 +9616,19 @@
           <p:cNvPr id="30" name="">
             <a:extLst xmlns:a="http://schemas.openxmlformats.org/drawingml/2006/main">
               <a:ext uri="{FF2B5EF4-FFF2-40B4-BE49-F238E27FC236}">
-                <a16:creationId xmlns:a16="http://schemas.microsoft.com/office/drawing/2014/main" id="{E99ED512-14F4-4FAA-A7D0-D94A93C7417C}"/>
-              </a:ext>
-            </a:extLst>
-          </p:cNvPr>
-          <p:cNvSpPr>
-            <a:spLocks xmlns:a="http://schemas.openxmlformats.org/drawingml/2006/main" noGrp="1"/>
-          </p:cNvSpPr>
-          <p:nvPr/>
-        </p:nvSpPr>
-        <p:spPr>
-          <a:xfrm xmlns:a="http://schemas.openxmlformats.org/drawingml/2006/main">
-            <a:off x="704850" y="5257800"/>
-            <a:ext cx="76200" cy="781050"/>
+                <a16:creationId xmlns:a16="http://schemas.microsoft.com/office/drawing/2014/main" id="{17E6150B-8027-41C5-B7AA-65BB9E3A9395}"/>
+              </a:ext>
+            </a:extLst>
+          </p:cNvPr>
+          <p:cNvSpPr>
+            <a:spLocks xmlns:a="http://schemas.openxmlformats.org/drawingml/2006/main" noGrp="1"/>
+          </p:cNvSpPr>
+          <p:nvPr/>
+        </p:nvSpPr>
+        <p:spPr>
+          <a:xfrm xmlns:a="http://schemas.openxmlformats.org/drawingml/2006/main">
+            <a:off x="752475" y="5305425"/>
+            <a:ext cx="57150" cy="685800"/>
           </a:xfrm>
           <a:prstGeom xmlns:a="http://schemas.openxmlformats.org/drawingml/2006/main" prst="rect">
             <a:avLst/>
@@ -9651,7 +9651,7 @@
           <p:cNvPr id="31" name="">
             <a:extLst xmlns:a="http://schemas.openxmlformats.org/drawingml/2006/main">
               <a:ext uri="{FF2B5EF4-FFF2-40B4-BE49-F238E27FC236}">
-                <a16:creationId xmlns:a16="http://schemas.microsoft.com/office/drawing/2014/main" id="{EA26BDC7-A583-4388-AC5B-79CAE587ED4A}"/>
+                <a16:creationId xmlns:a16="http://schemas.microsoft.com/office/drawing/2014/main" id="{48D69EBE-1C8B-4CC8-9D65-04E7D2A2645E}"/>
               </a:ext>
             </a:extLst>
           </p:cNvPr>
@@ -9709,7 +9709,7 @@
           <p:cNvPr id="32" name="">
             <a:extLst xmlns:a="http://schemas.openxmlformats.org/drawingml/2006/main">
               <a:ext uri="{FF2B5EF4-FFF2-40B4-BE49-F238E27FC236}">
-                <a16:creationId xmlns:a16="http://schemas.microsoft.com/office/drawing/2014/main" id="{C936665F-3FD5-448D-9EB0-EB408B7E3295}"/>
+                <a16:creationId xmlns:a16="http://schemas.microsoft.com/office/drawing/2014/main" id="{F097BD25-2CD7-46D5-BB57-8BA74C40100D}"/>
               </a:ext>
             </a:extLst>
           </p:cNvPr>
@@ -9765,7 +9765,7 @@
     </p:spTree>
     <p:extLst>
       <p:ext uri="{BB962C8B-B14F-4D97-AF65-F5344CB8AC3E}">
-        <p14:creationId xmlns:p14="http://schemas.microsoft.com/office/powerpoint/2010/main" val="291009755"/>
+        <p14:creationId xmlns:p14="http://schemas.microsoft.com/office/powerpoint/2010/main" val="2109635069"/>
       </p:ext>
     </p:extLst>
   </p:cSld>
@@ -9796,7 +9796,7 @@
           <p:cNvPr id="1" name="Slide Number Placeholder 5">
             <a:extLst xmlns:a="http://schemas.openxmlformats.org/drawingml/2006/main">
               <a:ext uri="{FF2B5EF4-FFF2-40B4-BE49-F238E27FC236}">
-                <a16:creationId xmlns:a16="http://schemas.microsoft.com/office/drawing/2014/main" id="{960B6032-F217-4E1A-A5DD-55BD6786A62D}"/>
+                <a16:creationId xmlns:a16="http://schemas.microsoft.com/office/drawing/2014/main" id="{821508BF-91E3-4E78-84B3-DCBD229C8660}"/>
               </a:ext>
             </a:extLst>
           </p:cNvPr>
@@ -9832,7 +9832,7 @@
           <p:nvPr/>
         </p:nvPicPr>
         <p:blipFill>
-          <a:blip xmlns:r="http://schemas.openxmlformats.org/officeDocument/2006/relationships" xmlns:a="http://schemas.openxmlformats.org/drawingml/2006/main" r:embed="R63754e9a39ce484f"/>
+          <a:blip xmlns:r="http://schemas.openxmlformats.org/officeDocument/2006/relationships" xmlns:a="http://schemas.openxmlformats.org/drawingml/2006/main" r:embed="R77c6129897444ff4"/>
           <a:srcRect xmlns:a="http://schemas.openxmlformats.org/drawingml/2006/main" l="0" t="21875" r="0" b="21875"/>
           <a:stretch xmlns:a="http://schemas.openxmlformats.org/drawingml/2006/main">
             <a:fillRect l="0" t="0" r="0" b="0"/>
@@ -9853,7 +9853,7 @@
           <p:cNvPr id="3" name="">
             <a:extLst xmlns:a="http://schemas.openxmlformats.org/drawingml/2006/main">
               <a:ext uri="{FF2B5EF4-FFF2-40B4-BE49-F238E27FC236}">
-                <a16:creationId xmlns:a16="http://schemas.microsoft.com/office/drawing/2014/main" id="{66CE7EEE-F4F6-47A1-A6CA-9C4773A5C97C}"/>
+                <a16:creationId xmlns:a16="http://schemas.microsoft.com/office/drawing/2014/main" id="{ACC65EC4-058D-4D51-B287-0F141C694AA2}"/>
               </a:ext>
             </a:extLst>
           </p:cNvPr>
@@ -9888,7 +9888,7 @@
           <p:cNvPr id="4" name="">
             <a:extLst xmlns:a="http://schemas.openxmlformats.org/drawingml/2006/main">
               <a:ext uri="{FF2B5EF4-FFF2-40B4-BE49-F238E27FC236}">
-                <a16:creationId xmlns:a16="http://schemas.microsoft.com/office/drawing/2014/main" id="{F45A954C-03B2-4AC4-B777-79FE466FE9C7}"/>
+                <a16:creationId xmlns:a16="http://schemas.microsoft.com/office/drawing/2014/main" id="{859696A5-B064-4FC3-9152-D680851FF701}"/>
               </a:ext>
             </a:extLst>
           </p:cNvPr>
@@ -9923,7 +9923,7 @@
           <p:cNvPr id="5" name="">
             <a:extLst xmlns:a="http://schemas.openxmlformats.org/drawingml/2006/main">
               <a:ext uri="{FF2B5EF4-FFF2-40B4-BE49-F238E27FC236}">
-                <a16:creationId xmlns:a16="http://schemas.microsoft.com/office/drawing/2014/main" id="{2E448196-CEAF-415C-AAFE-CF3DCCDF9266}"/>
+                <a16:creationId xmlns:a16="http://schemas.microsoft.com/office/drawing/2014/main" id="{AB3754C4-39E4-446E-849B-AB4B03298F72}"/>
               </a:ext>
             </a:extLst>
           </p:cNvPr>
@@ -9960,7 +9960,7 @@
           <p:cNvPr id="6" name="">
             <a:extLst xmlns:a="http://schemas.openxmlformats.org/drawingml/2006/main">
               <a:ext uri="{FF2B5EF4-FFF2-40B4-BE49-F238E27FC236}">
-                <a16:creationId xmlns:a16="http://schemas.microsoft.com/office/drawing/2014/main" id="{022DBB12-858A-47C8-9E72-A19AF4680364}"/>
+                <a16:creationId xmlns:a16="http://schemas.microsoft.com/office/drawing/2014/main" id="{61029B04-3CFE-4F04-A734-94454A1190AC}"/>
               </a:ext>
             </a:extLst>
           </p:cNvPr>
@@ -9997,7 +9997,7 @@
           <p:cNvPr id="7" name="">
             <a:extLst xmlns:a="http://schemas.openxmlformats.org/drawingml/2006/main">
               <a:ext uri="{FF2B5EF4-FFF2-40B4-BE49-F238E27FC236}">
-                <a16:creationId xmlns:a16="http://schemas.microsoft.com/office/drawing/2014/main" id="{68D5C93B-5B3E-46EC-9C0F-D6E37A9D5E77}"/>
+                <a16:creationId xmlns:a16="http://schemas.microsoft.com/office/drawing/2014/main" id="{26C5313D-84DE-4694-8AA4-DAD001AF778A}"/>
               </a:ext>
             </a:extLst>
           </p:cNvPr>
@@ -10034,7 +10034,7 @@
           <p:cNvPr id="8" name="">
             <a:extLst xmlns:a="http://schemas.openxmlformats.org/drawingml/2006/main">
               <a:ext uri="{FF2B5EF4-FFF2-40B4-BE49-F238E27FC236}">
-                <a16:creationId xmlns:a16="http://schemas.microsoft.com/office/drawing/2014/main" id="{83B9587C-F6A6-4C9E-BC31-E3C685C7D94F}"/>
+                <a16:creationId xmlns:a16="http://schemas.microsoft.com/office/drawing/2014/main" id="{CFB5DC2C-0AC0-4AA1-8A90-61CA7A2447F2}"/>
               </a:ext>
             </a:extLst>
           </p:cNvPr>
@@ -10071,7 +10071,7 @@
           <p:cNvPr id="9" name="">
             <a:extLst xmlns:a="http://schemas.openxmlformats.org/drawingml/2006/main">
               <a:ext uri="{FF2B5EF4-FFF2-40B4-BE49-F238E27FC236}">
-                <a16:creationId xmlns:a16="http://schemas.microsoft.com/office/drawing/2014/main" id="{2111658D-765B-47E7-8A90-B65C76395B14}"/>
+                <a16:creationId xmlns:a16="http://schemas.microsoft.com/office/drawing/2014/main" id="{E18C55A5-E630-4360-9BC9-8CDEF161171C}"/>
               </a:ext>
             </a:extLst>
           </p:cNvPr>
@@ -10129,7 +10129,7 @@
           <p:cNvPr id="10" name="">
             <a:extLst xmlns:a="http://schemas.openxmlformats.org/drawingml/2006/main">
               <a:ext uri="{FF2B5EF4-FFF2-40B4-BE49-F238E27FC236}">
-                <a16:creationId xmlns:a16="http://schemas.microsoft.com/office/drawing/2014/main" id="{E22B001E-7A0B-44D0-824E-C4CE71D9A525}"/>
+                <a16:creationId xmlns:a16="http://schemas.microsoft.com/office/drawing/2014/main" id="{305A3FC6-A67F-4EBE-9090-6A65FBDEBC8F}"/>
               </a:ext>
             </a:extLst>
           </p:cNvPr>
@@ -10187,7 +10187,7 @@
           <p:cNvPr id="11" name="">
             <a:extLst xmlns:a="http://schemas.openxmlformats.org/drawingml/2006/main">
               <a:ext uri="{FF2B5EF4-FFF2-40B4-BE49-F238E27FC236}">
-                <a16:creationId xmlns:a16="http://schemas.microsoft.com/office/drawing/2014/main" id="{7B70BE86-0C12-4097-A420-5B58F02758AE}"/>
+                <a16:creationId xmlns:a16="http://schemas.microsoft.com/office/drawing/2014/main" id="{1ED6BD71-A8F9-48CB-90C1-4AA2B53E5576}"/>
               </a:ext>
             </a:extLst>
           </p:cNvPr>
@@ -10222,7 +10222,7 @@
           <p:cNvPr id="12" name="">
             <a:extLst xmlns:a="http://schemas.openxmlformats.org/drawingml/2006/main">
               <a:ext uri="{FF2B5EF4-FFF2-40B4-BE49-F238E27FC236}">
-                <a16:creationId xmlns:a16="http://schemas.microsoft.com/office/drawing/2014/main" id="{1B867FCE-C685-40F7-B136-D7914F00BBE5}"/>
+                <a16:creationId xmlns:a16="http://schemas.microsoft.com/office/drawing/2014/main" id="{9A58EB6D-8881-413F-A0F8-A668FBBF39E4}"/>
               </a:ext>
             </a:extLst>
           </p:cNvPr>
@@ -10255,7 +10255,7 @@
           <p:cNvPr id="13" name="">
             <a:extLst xmlns:a="http://schemas.openxmlformats.org/drawingml/2006/main">
               <a:ext uri="{FF2B5EF4-FFF2-40B4-BE49-F238E27FC236}">
-                <a16:creationId xmlns:a16="http://schemas.microsoft.com/office/drawing/2014/main" id="{B964319A-E8FD-468F-95F0-461A18AA2810}"/>
+                <a16:creationId xmlns:a16="http://schemas.microsoft.com/office/drawing/2014/main" id="{25EBE1EE-831C-4758-87CD-6CA922FB0D6D}"/>
               </a:ext>
             </a:extLst>
           </p:cNvPr>
@@ -10330,7 +10330,7 @@
           <p:cNvPr id="14" name="">
             <a:extLst xmlns:a="http://schemas.openxmlformats.org/drawingml/2006/main">
               <a:ext uri="{FF2B5EF4-FFF2-40B4-BE49-F238E27FC236}">
-                <a16:creationId xmlns:a16="http://schemas.microsoft.com/office/drawing/2014/main" id="{9AF1D996-610E-4AA7-A121-C295E45C35A5}"/>
+                <a16:creationId xmlns:a16="http://schemas.microsoft.com/office/drawing/2014/main" id="{2014B76A-394E-444C-93D9-AC807BB765BF}"/>
               </a:ext>
             </a:extLst>
           </p:cNvPr>
@@ -10365,19 +10365,19 @@
           <p:cNvPr id="15" name="">
             <a:extLst xmlns:a="http://schemas.openxmlformats.org/drawingml/2006/main">
               <a:ext uri="{FF2B5EF4-FFF2-40B4-BE49-F238E27FC236}">
-                <a16:creationId xmlns:a16="http://schemas.microsoft.com/office/drawing/2014/main" id="{882F32A6-8939-4C98-BACC-014629DEA278}"/>
-              </a:ext>
-            </a:extLst>
-          </p:cNvPr>
-          <p:cNvSpPr>
-            <a:spLocks xmlns:a="http://schemas.openxmlformats.org/drawingml/2006/main" noGrp="1"/>
-          </p:cNvSpPr>
-          <p:nvPr/>
-        </p:nvSpPr>
-        <p:spPr>
-          <a:xfrm xmlns:a="http://schemas.openxmlformats.org/drawingml/2006/main">
-            <a:off x="7772400" y="990600"/>
-            <a:ext cx="76200" cy="876300"/>
+                <a16:creationId xmlns:a16="http://schemas.microsoft.com/office/drawing/2014/main" id="{C6C98D76-5DBE-4689-8520-5932796254A9}"/>
+              </a:ext>
+            </a:extLst>
+          </p:cNvPr>
+          <p:cNvSpPr>
+            <a:spLocks xmlns:a="http://schemas.openxmlformats.org/drawingml/2006/main" noGrp="1"/>
+          </p:cNvSpPr>
+          <p:nvPr/>
+        </p:nvSpPr>
+        <p:spPr>
+          <a:xfrm xmlns:a="http://schemas.openxmlformats.org/drawingml/2006/main">
+            <a:off x="7820025" y="1038225"/>
+            <a:ext cx="57150" cy="781050"/>
           </a:xfrm>
           <a:prstGeom xmlns:a="http://schemas.openxmlformats.org/drawingml/2006/main" prst="rect">
             <a:avLst/>
@@ -10400,7 +10400,7 @@
           <p:cNvPr id="16" name="">
             <a:extLst xmlns:a="http://schemas.openxmlformats.org/drawingml/2006/main">
               <a:ext uri="{FF2B5EF4-FFF2-40B4-BE49-F238E27FC236}">
-                <a16:creationId xmlns:a16="http://schemas.microsoft.com/office/drawing/2014/main" id="{32C47D1D-BA99-460F-8B0B-0D0A20E8BE8F}"/>
+                <a16:creationId xmlns:a16="http://schemas.microsoft.com/office/drawing/2014/main" id="{8767C49D-4926-4323-864C-6924882B11FE}"/>
               </a:ext>
             </a:extLst>
           </p:cNvPr>
@@ -10458,7 +10458,7 @@
           <p:cNvPr id="17" name="">
             <a:extLst xmlns:a="http://schemas.openxmlformats.org/drawingml/2006/main">
               <a:ext uri="{FF2B5EF4-FFF2-40B4-BE49-F238E27FC236}">
-                <a16:creationId xmlns:a16="http://schemas.microsoft.com/office/drawing/2014/main" id="{B3C91D6B-FAD2-4F04-94F2-12C1AE0E5F18}"/>
+                <a16:creationId xmlns:a16="http://schemas.microsoft.com/office/drawing/2014/main" id="{A5F28CED-E394-4364-ACEC-970740BFD260}"/>
               </a:ext>
             </a:extLst>
           </p:cNvPr>
@@ -10495,19 +10495,19 @@
           <p:cNvPr id="18" name="">
             <a:extLst xmlns:a="http://schemas.openxmlformats.org/drawingml/2006/main">
               <a:ext uri="{FF2B5EF4-FFF2-40B4-BE49-F238E27FC236}">
-                <a16:creationId xmlns:a16="http://schemas.microsoft.com/office/drawing/2014/main" id="{10A514A2-2AC2-4912-A720-9423E09D6290}"/>
-              </a:ext>
-            </a:extLst>
-          </p:cNvPr>
-          <p:cNvSpPr>
-            <a:spLocks xmlns:a="http://schemas.openxmlformats.org/drawingml/2006/main" noGrp="1"/>
-          </p:cNvSpPr>
-          <p:nvPr/>
-        </p:nvSpPr>
-        <p:spPr>
-          <a:xfrm xmlns:a="http://schemas.openxmlformats.org/drawingml/2006/main">
-            <a:off x="609600" y="2209800"/>
-            <a:ext cx="3276600" cy="76200"/>
+                <a16:creationId xmlns:a16="http://schemas.microsoft.com/office/drawing/2014/main" id="{4055DDA3-CF99-4947-BA18-FF6298CA8BC1}"/>
+              </a:ext>
+            </a:extLst>
+          </p:cNvPr>
+          <p:cNvSpPr>
+            <a:spLocks xmlns:a="http://schemas.openxmlformats.org/drawingml/2006/main" noGrp="1"/>
+          </p:cNvSpPr>
+          <p:nvPr/>
+        </p:nvSpPr>
+        <p:spPr>
+          <a:xfrm xmlns:a="http://schemas.openxmlformats.org/drawingml/2006/main">
+            <a:off x="666750" y="2266950"/>
+            <a:ext cx="3162300" cy="57150"/>
           </a:xfrm>
           <a:prstGeom xmlns:a="http://schemas.openxmlformats.org/drawingml/2006/main" prst="rect">
             <a:avLst/>
@@ -10530,7 +10530,7 @@
           <p:cNvPr id="19" name="">
             <a:extLst xmlns:a="http://schemas.openxmlformats.org/drawingml/2006/main">
               <a:ext uri="{FF2B5EF4-FFF2-40B4-BE49-F238E27FC236}">
-                <a16:creationId xmlns:a16="http://schemas.microsoft.com/office/drawing/2014/main" id="{8B46A040-DF38-4713-ACA7-7DBD3AA7AA78}"/>
+                <a16:creationId xmlns:a16="http://schemas.microsoft.com/office/drawing/2014/main" id="{3882ABA8-34C7-419B-ACA6-8DD58B8A120B}"/>
               </a:ext>
             </a:extLst>
           </p:cNvPr>
@@ -10588,7 +10588,7 @@
           <p:cNvPr id="20" name="">
             <a:extLst xmlns:a="http://schemas.openxmlformats.org/drawingml/2006/main">
               <a:ext uri="{FF2B5EF4-FFF2-40B4-BE49-F238E27FC236}">
-                <a16:creationId xmlns:a16="http://schemas.microsoft.com/office/drawing/2014/main" id="{504C72DD-7ED2-4326-AF70-A230516FA712}"/>
+                <a16:creationId xmlns:a16="http://schemas.microsoft.com/office/drawing/2014/main" id="{D6DD3F03-4864-4B9C-8243-510BB19830E5}"/>
               </a:ext>
             </a:extLst>
           </p:cNvPr>
@@ -10646,7 +10646,7 @@
           <p:cNvPr id="21" name="">
             <a:extLst xmlns:a="http://schemas.openxmlformats.org/drawingml/2006/main">
               <a:ext uri="{FF2B5EF4-FFF2-40B4-BE49-F238E27FC236}">
-                <a16:creationId xmlns:a16="http://schemas.microsoft.com/office/drawing/2014/main" id="{C2D15B55-DBF9-4426-9871-C320555C1648}"/>
+                <a16:creationId xmlns:a16="http://schemas.microsoft.com/office/drawing/2014/main" id="{ED47A85A-6F88-4230-94A9-C1802B1731AA}"/>
               </a:ext>
             </a:extLst>
           </p:cNvPr>
@@ -10704,7 +10704,7 @@
           <p:cNvPr id="22" name="">
             <a:extLst xmlns:a="http://schemas.openxmlformats.org/drawingml/2006/main">
               <a:ext uri="{FF2B5EF4-FFF2-40B4-BE49-F238E27FC236}">
-                <a16:creationId xmlns:a16="http://schemas.microsoft.com/office/drawing/2014/main" id="{2822D3DB-E3B9-4811-ABF4-7AA0BA9A276C}"/>
+                <a16:creationId xmlns:a16="http://schemas.microsoft.com/office/drawing/2014/main" id="{67F2EA5E-822A-46D1-B528-AA87E49A11FF}"/>
               </a:ext>
             </a:extLst>
           </p:cNvPr>
@@ -10741,19 +10741,19 @@
           <p:cNvPr id="23" name="">
             <a:extLst xmlns:a="http://schemas.openxmlformats.org/drawingml/2006/main">
               <a:ext uri="{FF2B5EF4-FFF2-40B4-BE49-F238E27FC236}">
-                <a16:creationId xmlns:a16="http://schemas.microsoft.com/office/drawing/2014/main" id="{2A4CB105-5525-44E6-9151-B4FE28DDEB59}"/>
-              </a:ext>
-            </a:extLst>
-          </p:cNvPr>
-          <p:cNvSpPr>
-            <a:spLocks xmlns:a="http://schemas.openxmlformats.org/drawingml/2006/main" noGrp="1"/>
-          </p:cNvSpPr>
-          <p:nvPr/>
-        </p:nvSpPr>
-        <p:spPr>
-          <a:xfrm xmlns:a="http://schemas.openxmlformats.org/drawingml/2006/main">
-            <a:off x="4114800" y="2209800"/>
-            <a:ext cx="3276600" cy="76200"/>
+                <a16:creationId xmlns:a16="http://schemas.microsoft.com/office/drawing/2014/main" id="{D3898373-E979-4E08-BB34-6C76048FBEBB}"/>
+              </a:ext>
+            </a:extLst>
+          </p:cNvPr>
+          <p:cNvSpPr>
+            <a:spLocks xmlns:a="http://schemas.openxmlformats.org/drawingml/2006/main" noGrp="1"/>
+          </p:cNvSpPr>
+          <p:nvPr/>
+        </p:nvSpPr>
+        <p:spPr>
+          <a:xfrm xmlns:a="http://schemas.openxmlformats.org/drawingml/2006/main">
+            <a:off x="4171950" y="2266950"/>
+            <a:ext cx="3162300" cy="57150"/>
           </a:xfrm>
           <a:prstGeom xmlns:a="http://schemas.openxmlformats.org/drawingml/2006/main" prst="rect">
             <a:avLst/>
@@ -10776,7 +10776,7 @@
           <p:cNvPr id="24" name="">
             <a:extLst xmlns:a="http://schemas.openxmlformats.org/drawingml/2006/main">
               <a:ext uri="{FF2B5EF4-FFF2-40B4-BE49-F238E27FC236}">
-                <a16:creationId xmlns:a16="http://schemas.microsoft.com/office/drawing/2014/main" id="{A202D921-A730-4C63-8FF7-9DCE4A8082D5}"/>
+                <a16:creationId xmlns:a16="http://schemas.microsoft.com/office/drawing/2014/main" id="{0F9DB7B8-993A-4466-BC01-F1EA61CAF81D}"/>
               </a:ext>
             </a:extLst>
           </p:cNvPr>
@@ -10834,7 +10834,7 @@
           <p:cNvPr id="25" name="">
             <a:extLst xmlns:a="http://schemas.openxmlformats.org/drawingml/2006/main">
               <a:ext uri="{FF2B5EF4-FFF2-40B4-BE49-F238E27FC236}">
-                <a16:creationId xmlns:a16="http://schemas.microsoft.com/office/drawing/2014/main" id="{5B23EEC7-9BF6-4D9D-84AF-EC869A0FA949}"/>
+                <a16:creationId xmlns:a16="http://schemas.microsoft.com/office/drawing/2014/main" id="{CE2DD017-1B51-49DD-A5F6-E43C7176996B}"/>
               </a:ext>
             </a:extLst>
           </p:cNvPr>
@@ -10892,7 +10892,7 @@
           <p:cNvPr id="26" name="">
             <a:extLst xmlns:a="http://schemas.openxmlformats.org/drawingml/2006/main">
               <a:ext uri="{FF2B5EF4-FFF2-40B4-BE49-F238E27FC236}">
-                <a16:creationId xmlns:a16="http://schemas.microsoft.com/office/drawing/2014/main" id="{E5ED2C78-5812-4ED2-93ED-4B713506E5CD}"/>
+                <a16:creationId xmlns:a16="http://schemas.microsoft.com/office/drawing/2014/main" id="{536070D3-86F2-45E7-A60A-0227BF1E4C49}"/>
               </a:ext>
             </a:extLst>
           </p:cNvPr>
@@ -10950,7 +10950,7 @@
           <p:cNvPr id="27" name="">
             <a:extLst xmlns:a="http://schemas.openxmlformats.org/drawingml/2006/main">
               <a:ext uri="{FF2B5EF4-FFF2-40B4-BE49-F238E27FC236}">
-                <a16:creationId xmlns:a16="http://schemas.microsoft.com/office/drawing/2014/main" id="{3A9907DF-7690-4518-BE89-C1FF6D9D9264}"/>
+                <a16:creationId xmlns:a16="http://schemas.microsoft.com/office/drawing/2014/main" id="{3C223EF0-EBE7-448A-B4CC-A9455CAC184F}"/>
               </a:ext>
             </a:extLst>
           </p:cNvPr>
@@ -10987,19 +10987,19 @@
           <p:cNvPr id="28" name="">
             <a:extLst xmlns:a="http://schemas.openxmlformats.org/drawingml/2006/main">
               <a:ext uri="{FF2B5EF4-FFF2-40B4-BE49-F238E27FC236}">
-                <a16:creationId xmlns:a16="http://schemas.microsoft.com/office/drawing/2014/main" id="{EE64B56C-FAAE-4450-A6BB-E98286AD6CC8}"/>
-              </a:ext>
-            </a:extLst>
-          </p:cNvPr>
-          <p:cNvSpPr>
-            <a:spLocks xmlns:a="http://schemas.openxmlformats.org/drawingml/2006/main" noGrp="1"/>
-          </p:cNvSpPr>
-          <p:nvPr/>
-        </p:nvSpPr>
-        <p:spPr>
-          <a:xfrm xmlns:a="http://schemas.openxmlformats.org/drawingml/2006/main">
-            <a:off x="7620000" y="2209800"/>
-            <a:ext cx="3276600" cy="76200"/>
+                <a16:creationId xmlns:a16="http://schemas.microsoft.com/office/drawing/2014/main" id="{E048FC8A-C892-4398-92B8-D9A75D8A053C}"/>
+              </a:ext>
+            </a:extLst>
+          </p:cNvPr>
+          <p:cNvSpPr>
+            <a:spLocks xmlns:a="http://schemas.openxmlformats.org/drawingml/2006/main" noGrp="1"/>
+          </p:cNvSpPr>
+          <p:nvPr/>
+        </p:nvSpPr>
+        <p:spPr>
+          <a:xfrm xmlns:a="http://schemas.openxmlformats.org/drawingml/2006/main">
+            <a:off x="7677150" y="2266950"/>
+            <a:ext cx="3162300" cy="57150"/>
           </a:xfrm>
           <a:prstGeom xmlns:a="http://schemas.openxmlformats.org/drawingml/2006/main" prst="rect">
             <a:avLst/>
@@ -11022,7 +11022,7 @@
           <p:cNvPr id="29" name="">
             <a:extLst xmlns:a="http://schemas.openxmlformats.org/drawingml/2006/main">
               <a:ext uri="{FF2B5EF4-FFF2-40B4-BE49-F238E27FC236}">
-                <a16:creationId xmlns:a16="http://schemas.microsoft.com/office/drawing/2014/main" id="{4EAE4334-60D4-4AEF-A088-49FAA7423144}"/>
+                <a16:creationId xmlns:a16="http://schemas.microsoft.com/office/drawing/2014/main" id="{CBF976F3-0B7D-4B5A-B684-28A572FDD210}"/>
               </a:ext>
             </a:extLst>
           </p:cNvPr>
@@ -11080,7 +11080,7 @@
           <p:cNvPr id="30" name="">
             <a:extLst xmlns:a="http://schemas.openxmlformats.org/drawingml/2006/main">
               <a:ext uri="{FF2B5EF4-FFF2-40B4-BE49-F238E27FC236}">
-                <a16:creationId xmlns:a16="http://schemas.microsoft.com/office/drawing/2014/main" id="{0767D156-44CE-4BD7-9682-C08BFEF65A87}"/>
+                <a16:creationId xmlns:a16="http://schemas.microsoft.com/office/drawing/2014/main" id="{874B01D2-13C5-48FB-9172-97964590A431}"/>
               </a:ext>
             </a:extLst>
           </p:cNvPr>
@@ -11138,7 +11138,7 @@
           <p:cNvPr id="31" name="">
             <a:extLst xmlns:a="http://schemas.openxmlformats.org/drawingml/2006/main">
               <a:ext uri="{FF2B5EF4-FFF2-40B4-BE49-F238E27FC236}">
-                <a16:creationId xmlns:a16="http://schemas.microsoft.com/office/drawing/2014/main" id="{A1C9EF4C-05D2-4D7A-B46A-12D38627CC7C}"/>
+                <a16:creationId xmlns:a16="http://schemas.microsoft.com/office/drawing/2014/main" id="{03C8C4AA-4913-40B0-9BB0-E5F87894A407}"/>
               </a:ext>
             </a:extLst>
           </p:cNvPr>
@@ -11196,7 +11196,7 @@
           <p:cNvPr id="32" name="">
             <a:extLst xmlns:a="http://schemas.openxmlformats.org/drawingml/2006/main">
               <a:ext uri="{FF2B5EF4-FFF2-40B4-BE49-F238E27FC236}">
-                <a16:creationId xmlns:a16="http://schemas.microsoft.com/office/drawing/2014/main" id="{5A15FB48-F857-4E41-A13C-A68F7A556578}"/>
+                <a16:creationId xmlns:a16="http://schemas.microsoft.com/office/drawing/2014/main" id="{9962B511-D671-4D8D-8DC8-57B014136C30}"/>
               </a:ext>
             </a:extLst>
           </p:cNvPr>
@@ -11233,19 +11233,19 @@
           <p:cNvPr id="33" name="">
             <a:extLst xmlns:a="http://schemas.openxmlformats.org/drawingml/2006/main">
               <a:ext uri="{FF2B5EF4-FFF2-40B4-BE49-F238E27FC236}">
-                <a16:creationId xmlns:a16="http://schemas.microsoft.com/office/drawing/2014/main" id="{10A081C0-590F-4EC8-8694-2F97A8D13D02}"/>
-              </a:ext>
-            </a:extLst>
-          </p:cNvPr>
-          <p:cNvSpPr>
-            <a:spLocks xmlns:a="http://schemas.openxmlformats.org/drawingml/2006/main" noGrp="1"/>
-          </p:cNvSpPr>
-          <p:nvPr/>
-        </p:nvSpPr>
-        <p:spPr>
-          <a:xfrm xmlns:a="http://schemas.openxmlformats.org/drawingml/2006/main">
-            <a:off x="781050" y="3867150"/>
-            <a:ext cx="2990850" cy="76200"/>
+                <a16:creationId xmlns:a16="http://schemas.microsoft.com/office/drawing/2014/main" id="{BC20C889-9AED-4276-A80B-BE3ADE777355}"/>
+              </a:ext>
+            </a:extLst>
+          </p:cNvPr>
+          <p:cNvSpPr>
+            <a:spLocks xmlns:a="http://schemas.openxmlformats.org/drawingml/2006/main" noGrp="1"/>
+          </p:cNvSpPr>
+          <p:nvPr/>
+        </p:nvSpPr>
+        <p:spPr>
+          <a:xfrm xmlns:a="http://schemas.openxmlformats.org/drawingml/2006/main">
+            <a:off x="838200" y="3924300"/>
+            <a:ext cx="2876550" cy="57150"/>
           </a:xfrm>
           <a:prstGeom xmlns:a="http://schemas.openxmlformats.org/drawingml/2006/main" prst="rect">
             <a:avLst/>
@@ -11268,7 +11268,7 @@
           <p:cNvPr id="34" name="">
             <a:extLst xmlns:a="http://schemas.openxmlformats.org/drawingml/2006/main">
               <a:ext uri="{FF2B5EF4-FFF2-40B4-BE49-F238E27FC236}">
-                <a16:creationId xmlns:a16="http://schemas.microsoft.com/office/drawing/2014/main" id="{6E41C2A5-2B8D-4066-A996-C9CB5E497AC8}"/>
+                <a16:creationId xmlns:a16="http://schemas.microsoft.com/office/drawing/2014/main" id="{CEA28CE8-F1E8-4652-A0E8-9BEE9BE86AC0}"/>
               </a:ext>
             </a:extLst>
           </p:cNvPr>
@@ -11326,7 +11326,7 @@
           <p:cNvPr id="35" name="">
             <a:extLst xmlns:a="http://schemas.openxmlformats.org/drawingml/2006/main">
               <a:ext uri="{FF2B5EF4-FFF2-40B4-BE49-F238E27FC236}">
-                <a16:creationId xmlns:a16="http://schemas.microsoft.com/office/drawing/2014/main" id="{634774AB-0B67-4F0F-B718-F2662339B54C}"/>
+                <a16:creationId xmlns:a16="http://schemas.microsoft.com/office/drawing/2014/main" id="{4DF73D21-92A8-4B86-BACE-ECCBBB644C99}"/>
               </a:ext>
             </a:extLst>
           </p:cNvPr>
@@ -11435,7 +11435,7 @@
           <p:cNvPr id="36" name="">
             <a:extLst xmlns:a="http://schemas.openxmlformats.org/drawingml/2006/main">
               <a:ext uri="{FF2B5EF4-FFF2-40B4-BE49-F238E27FC236}">
-                <a16:creationId xmlns:a16="http://schemas.microsoft.com/office/drawing/2014/main" id="{0B6FE4DE-3CCA-462C-9BED-E432548602E0}"/>
+                <a16:creationId xmlns:a16="http://schemas.microsoft.com/office/drawing/2014/main" id="{62527602-52EB-45A5-B421-9BDF6232A100}"/>
               </a:ext>
             </a:extLst>
           </p:cNvPr>
@@ -11468,7 +11468,7 @@
           <p:cNvPr id="37" name="">
             <a:extLst xmlns:a="http://schemas.openxmlformats.org/drawingml/2006/main">
               <a:ext uri="{FF2B5EF4-FFF2-40B4-BE49-F238E27FC236}">
-                <a16:creationId xmlns:a16="http://schemas.microsoft.com/office/drawing/2014/main" id="{DD291F99-B66D-4D6C-85F1-43B6E7A9017B}"/>
+                <a16:creationId xmlns:a16="http://schemas.microsoft.com/office/drawing/2014/main" id="{15A30D3A-DD7B-4B86-924B-C791ACB95E25}"/>
               </a:ext>
             </a:extLst>
           </p:cNvPr>
@@ -11505,19 +11505,19 @@
           <p:cNvPr id="38" name="">
             <a:extLst xmlns:a="http://schemas.openxmlformats.org/drawingml/2006/main">
               <a:ext uri="{FF2B5EF4-FFF2-40B4-BE49-F238E27FC236}">
-                <a16:creationId xmlns:a16="http://schemas.microsoft.com/office/drawing/2014/main" id="{2CE07656-2C69-4EE8-B3FA-BA49AC16AA88}"/>
-              </a:ext>
-            </a:extLst>
-          </p:cNvPr>
-          <p:cNvSpPr>
-            <a:spLocks xmlns:a="http://schemas.openxmlformats.org/drawingml/2006/main" noGrp="1"/>
-          </p:cNvSpPr>
-          <p:nvPr/>
-        </p:nvSpPr>
-        <p:spPr>
-          <a:xfrm xmlns:a="http://schemas.openxmlformats.org/drawingml/2006/main">
-            <a:off x="4819650" y="3867150"/>
-            <a:ext cx="2990850" cy="76200"/>
+                <a16:creationId xmlns:a16="http://schemas.microsoft.com/office/drawing/2014/main" id="{4F636B83-8542-4106-ACB5-1576C7D1D705}"/>
+              </a:ext>
+            </a:extLst>
+          </p:cNvPr>
+          <p:cNvSpPr>
+            <a:spLocks xmlns:a="http://schemas.openxmlformats.org/drawingml/2006/main" noGrp="1"/>
+          </p:cNvSpPr>
+          <p:nvPr/>
+        </p:nvSpPr>
+        <p:spPr>
+          <a:xfrm xmlns:a="http://schemas.openxmlformats.org/drawingml/2006/main">
+            <a:off x="4876800" y="3924300"/>
+            <a:ext cx="2876550" cy="57150"/>
           </a:xfrm>
           <a:prstGeom xmlns:a="http://schemas.openxmlformats.org/drawingml/2006/main" prst="rect">
             <a:avLst/>
@@ -11540,7 +11540,7 @@
           <p:cNvPr id="39" name="">
             <a:extLst xmlns:a="http://schemas.openxmlformats.org/drawingml/2006/main">
               <a:ext uri="{FF2B5EF4-FFF2-40B4-BE49-F238E27FC236}">
-                <a16:creationId xmlns:a16="http://schemas.microsoft.com/office/drawing/2014/main" id="{66A45591-B444-4C5A-B67B-E6194C88B6CE}"/>
+                <a16:creationId xmlns:a16="http://schemas.microsoft.com/office/drawing/2014/main" id="{E581D4C2-CB78-44FC-AB4C-1255323618EF}"/>
               </a:ext>
             </a:extLst>
           </p:cNvPr>
@@ -11598,7 +11598,7 @@
           <p:cNvPr id="40" name="">
             <a:extLst xmlns:a="http://schemas.openxmlformats.org/drawingml/2006/main">
               <a:ext uri="{FF2B5EF4-FFF2-40B4-BE49-F238E27FC236}">
-                <a16:creationId xmlns:a16="http://schemas.microsoft.com/office/drawing/2014/main" id="{BAB4684C-A620-4C9C-997F-9FF18A917E2E}"/>
+                <a16:creationId xmlns:a16="http://schemas.microsoft.com/office/drawing/2014/main" id="{A2759FAD-6A45-4000-9B09-91B688C5D46B}"/>
               </a:ext>
             </a:extLst>
           </p:cNvPr>
@@ -11690,7 +11690,7 @@
           <p:cNvPr id="41" name="">
             <a:extLst xmlns:a="http://schemas.openxmlformats.org/drawingml/2006/main">
               <a:ext uri="{FF2B5EF4-FFF2-40B4-BE49-F238E27FC236}">
-                <a16:creationId xmlns:a16="http://schemas.microsoft.com/office/drawing/2014/main" id="{8A31A46B-CC41-4232-8293-36479FDCE664}"/>
+                <a16:creationId xmlns:a16="http://schemas.microsoft.com/office/drawing/2014/main" id="{803F3182-4600-41A7-8C24-5D144992A56A}"/>
               </a:ext>
             </a:extLst>
           </p:cNvPr>
@@ -11723,7 +11723,7 @@
           <p:cNvPr id="42" name="">
             <a:extLst xmlns:a="http://schemas.openxmlformats.org/drawingml/2006/main">
               <a:ext uri="{FF2B5EF4-FFF2-40B4-BE49-F238E27FC236}">
-                <a16:creationId xmlns:a16="http://schemas.microsoft.com/office/drawing/2014/main" id="{60174BDE-0F89-430E-B0C9-798208D56EE0}"/>
+                <a16:creationId xmlns:a16="http://schemas.microsoft.com/office/drawing/2014/main" id="{0ABAEC01-6EB3-4B88-B019-95558316B755}"/>
               </a:ext>
             </a:extLst>
           </p:cNvPr>
@@ -11760,19 +11760,19 @@
           <p:cNvPr id="43" name="">
             <a:extLst xmlns:a="http://schemas.openxmlformats.org/drawingml/2006/main">
               <a:ext uri="{FF2B5EF4-FFF2-40B4-BE49-F238E27FC236}">
-                <a16:creationId xmlns:a16="http://schemas.microsoft.com/office/drawing/2014/main" id="{2BF45242-B531-4CD0-AFD8-91CFBE7A9FD7}"/>
-              </a:ext>
-            </a:extLst>
-          </p:cNvPr>
-          <p:cNvSpPr>
-            <a:spLocks xmlns:a="http://schemas.openxmlformats.org/drawingml/2006/main" noGrp="1"/>
-          </p:cNvSpPr>
-          <p:nvPr/>
-        </p:nvSpPr>
-        <p:spPr>
-          <a:xfrm xmlns:a="http://schemas.openxmlformats.org/drawingml/2006/main">
-            <a:off x="8858250" y="3867150"/>
-            <a:ext cx="2438400" cy="76200"/>
+                <a16:creationId xmlns:a16="http://schemas.microsoft.com/office/drawing/2014/main" id="{9988100E-A804-4C8F-8BF3-325CE3EB1367}"/>
+              </a:ext>
+            </a:extLst>
+          </p:cNvPr>
+          <p:cNvSpPr>
+            <a:spLocks xmlns:a="http://schemas.openxmlformats.org/drawingml/2006/main" noGrp="1"/>
+          </p:cNvSpPr>
+          <p:nvPr/>
+        </p:nvSpPr>
+        <p:spPr>
+          <a:xfrm xmlns:a="http://schemas.openxmlformats.org/drawingml/2006/main">
+            <a:off x="8915400" y="3924300"/>
+            <a:ext cx="2324100" cy="57150"/>
           </a:xfrm>
           <a:prstGeom xmlns:a="http://schemas.openxmlformats.org/drawingml/2006/main" prst="rect">
             <a:avLst/>
@@ -11795,7 +11795,7 @@
           <p:cNvPr id="44" name="">
             <a:extLst xmlns:a="http://schemas.openxmlformats.org/drawingml/2006/main">
               <a:ext uri="{FF2B5EF4-FFF2-40B4-BE49-F238E27FC236}">
-                <a16:creationId xmlns:a16="http://schemas.microsoft.com/office/drawing/2014/main" id="{4D6DD7A0-584B-402E-BF92-FE553689158D}"/>
+                <a16:creationId xmlns:a16="http://schemas.microsoft.com/office/drawing/2014/main" id="{671D9F60-BF80-4961-8719-682F78415D12}"/>
               </a:ext>
             </a:extLst>
           </p:cNvPr>
@@ -11853,7 +11853,7 @@
           <p:cNvPr id="45" name="">
             <a:extLst xmlns:a="http://schemas.openxmlformats.org/drawingml/2006/main">
               <a:ext uri="{FF2B5EF4-FFF2-40B4-BE49-F238E27FC236}">
-                <a16:creationId xmlns:a16="http://schemas.microsoft.com/office/drawing/2014/main" id="{7B6E5A41-A113-410F-B793-0F0EA868B897}"/>
+                <a16:creationId xmlns:a16="http://schemas.microsoft.com/office/drawing/2014/main" id="{AE332DA5-8C18-4DD6-A4DE-A83452311784}"/>
               </a:ext>
             </a:extLst>
           </p:cNvPr>
@@ -11945,7 +11945,7 @@
           <p:cNvPr id="46" name="">
             <a:extLst xmlns:a="http://schemas.openxmlformats.org/drawingml/2006/main">
               <a:ext uri="{FF2B5EF4-FFF2-40B4-BE49-F238E27FC236}">
-                <a16:creationId xmlns:a16="http://schemas.microsoft.com/office/drawing/2014/main" id="{07445EF4-0664-49EF-904E-AD522435C8FF}"/>
+                <a16:creationId xmlns:a16="http://schemas.microsoft.com/office/drawing/2014/main" id="{1638D1A4-B268-4F9B-86F5-EC23A911CC48}"/>
               </a:ext>
             </a:extLst>
           </p:cNvPr>
@@ -12001,7 +12001,7 @@
     </p:spTree>
     <p:extLst>
       <p:ext uri="{BB962C8B-B14F-4D97-AF65-F5344CB8AC3E}">
-        <p14:creationId xmlns:p14="http://schemas.microsoft.com/office/powerpoint/2010/main" val="554991216"/>
+        <p14:creationId xmlns:p14="http://schemas.microsoft.com/office/powerpoint/2010/main" val="113637826"/>
       </p:ext>
     </p:extLst>
   </p:cSld>
@@ -12032,7 +12032,7 @@
           <p:cNvPr id="1" name="Slide Number Placeholder 5">
             <a:extLst xmlns:a="http://schemas.openxmlformats.org/drawingml/2006/main">
               <a:ext uri="{FF2B5EF4-FFF2-40B4-BE49-F238E27FC236}">
-                <a16:creationId xmlns:a16="http://schemas.microsoft.com/office/drawing/2014/main" id="{960B6032-F217-4E1A-A5DD-55BD6786A62D}"/>
+                <a16:creationId xmlns:a16="http://schemas.microsoft.com/office/drawing/2014/main" id="{821508BF-91E3-4E78-84B3-DCBD229C8660}"/>
               </a:ext>
             </a:extLst>
           </p:cNvPr>
@@ -12068,7 +12068,7 @@
           <p:nvPr/>
         </p:nvPicPr>
         <p:blipFill>
-          <a:blip xmlns:r="http://schemas.openxmlformats.org/officeDocument/2006/relationships" xmlns:a="http://schemas.openxmlformats.org/drawingml/2006/main" r:embed="R6186c426edf94ef0"/>
+          <a:blip xmlns:r="http://schemas.openxmlformats.org/officeDocument/2006/relationships" xmlns:a="http://schemas.openxmlformats.org/drawingml/2006/main" r:embed="Rdbae293d94904d67"/>
           <a:srcRect xmlns:a="http://schemas.openxmlformats.org/drawingml/2006/main" l="0" t="21875" r="0" b="21875"/>
           <a:stretch xmlns:a="http://schemas.openxmlformats.org/drawingml/2006/main">
             <a:fillRect l="0" t="0" r="0" b="0"/>
@@ -12089,7 +12089,7 @@
           <p:cNvPr id="3" name="">
             <a:extLst xmlns:a="http://schemas.openxmlformats.org/drawingml/2006/main">
               <a:ext uri="{FF2B5EF4-FFF2-40B4-BE49-F238E27FC236}">
-                <a16:creationId xmlns:a16="http://schemas.microsoft.com/office/drawing/2014/main" id="{BBADDA07-805C-4628-A04F-D6D611D1C51C}"/>
+                <a16:creationId xmlns:a16="http://schemas.microsoft.com/office/drawing/2014/main" id="{E0B3D9B3-A1F3-44BB-914C-3C4A1285A1E5}"/>
               </a:ext>
             </a:extLst>
           </p:cNvPr>
@@ -12124,7 +12124,7 @@
           <p:cNvPr id="4" name="">
             <a:extLst xmlns:a="http://schemas.openxmlformats.org/drawingml/2006/main">
               <a:ext uri="{FF2B5EF4-FFF2-40B4-BE49-F238E27FC236}">
-                <a16:creationId xmlns:a16="http://schemas.microsoft.com/office/drawing/2014/main" id="{CAAA951B-F612-478A-BBAA-106B567912A0}"/>
+                <a16:creationId xmlns:a16="http://schemas.microsoft.com/office/drawing/2014/main" id="{8CE0FCA8-C0DF-412E-84C7-3E257338FE88}"/>
               </a:ext>
             </a:extLst>
           </p:cNvPr>
@@ -12159,7 +12159,7 @@
           <p:cNvPr id="5" name="">
             <a:extLst xmlns:a="http://schemas.openxmlformats.org/drawingml/2006/main">
               <a:ext uri="{FF2B5EF4-FFF2-40B4-BE49-F238E27FC236}">
-                <a16:creationId xmlns:a16="http://schemas.microsoft.com/office/drawing/2014/main" id="{6BCB8C2B-F5B6-4CBB-A313-619342040A09}"/>
+                <a16:creationId xmlns:a16="http://schemas.microsoft.com/office/drawing/2014/main" id="{8B5DE45A-F75D-4E24-8770-3F2E3A8054C1}"/>
               </a:ext>
             </a:extLst>
           </p:cNvPr>
@@ -12196,7 +12196,7 @@
           <p:cNvPr id="6" name="">
             <a:extLst xmlns:a="http://schemas.openxmlformats.org/drawingml/2006/main">
               <a:ext uri="{FF2B5EF4-FFF2-40B4-BE49-F238E27FC236}">
-                <a16:creationId xmlns:a16="http://schemas.microsoft.com/office/drawing/2014/main" id="{DE98389E-1359-443E-AF56-A0D0316147E8}"/>
+                <a16:creationId xmlns:a16="http://schemas.microsoft.com/office/drawing/2014/main" id="{A0BD5025-7669-415C-857C-BC93BBB4B49F}"/>
               </a:ext>
             </a:extLst>
           </p:cNvPr>
@@ -12233,7 +12233,7 @@
           <p:cNvPr id="7" name="">
             <a:extLst xmlns:a="http://schemas.openxmlformats.org/drawingml/2006/main">
               <a:ext uri="{FF2B5EF4-FFF2-40B4-BE49-F238E27FC236}">
-                <a16:creationId xmlns:a16="http://schemas.microsoft.com/office/drawing/2014/main" id="{3FAA1D11-F9B0-4B1E-B726-C36BCC0E63F4}"/>
+                <a16:creationId xmlns:a16="http://schemas.microsoft.com/office/drawing/2014/main" id="{B9C89542-4EFA-4755-BB1A-CA493D9FEFA4}"/>
               </a:ext>
             </a:extLst>
           </p:cNvPr>
@@ -12270,7 +12270,7 @@
           <p:cNvPr id="8" name="">
             <a:extLst xmlns:a="http://schemas.openxmlformats.org/drawingml/2006/main">
               <a:ext uri="{FF2B5EF4-FFF2-40B4-BE49-F238E27FC236}">
-                <a16:creationId xmlns:a16="http://schemas.microsoft.com/office/drawing/2014/main" id="{927A2780-F12A-46D5-9690-364EE05B8C8B}"/>
+                <a16:creationId xmlns:a16="http://schemas.microsoft.com/office/drawing/2014/main" id="{98D07353-606A-429A-87A9-9F1D1D345A89}"/>
               </a:ext>
             </a:extLst>
           </p:cNvPr>
@@ -12307,7 +12307,7 @@
           <p:cNvPr id="9" name="">
             <a:extLst xmlns:a="http://schemas.openxmlformats.org/drawingml/2006/main">
               <a:ext uri="{FF2B5EF4-FFF2-40B4-BE49-F238E27FC236}">
-                <a16:creationId xmlns:a16="http://schemas.microsoft.com/office/drawing/2014/main" id="{EDC0B428-3CC3-48AE-BD42-EC26EED45068}"/>
+                <a16:creationId xmlns:a16="http://schemas.microsoft.com/office/drawing/2014/main" id="{D3CD2E60-6223-41B5-AD10-F6B8F80542C7}"/>
               </a:ext>
             </a:extLst>
           </p:cNvPr>
@@ -12365,7 +12365,7 @@
           <p:cNvPr id="10" name="">
             <a:extLst xmlns:a="http://schemas.openxmlformats.org/drawingml/2006/main">
               <a:ext uri="{FF2B5EF4-FFF2-40B4-BE49-F238E27FC236}">
-                <a16:creationId xmlns:a16="http://schemas.microsoft.com/office/drawing/2014/main" id="{3CDEC644-87DA-44D2-8F3A-1849C7D42FE9}"/>
+                <a16:creationId xmlns:a16="http://schemas.microsoft.com/office/drawing/2014/main" id="{51C5CCEE-7F25-4D7C-ACBF-F272AFF10CDC}"/>
               </a:ext>
             </a:extLst>
           </p:cNvPr>
@@ -12423,7 +12423,7 @@
           <p:cNvPr id="11" name="">
             <a:extLst xmlns:a="http://schemas.openxmlformats.org/drawingml/2006/main">
               <a:ext uri="{FF2B5EF4-FFF2-40B4-BE49-F238E27FC236}">
-                <a16:creationId xmlns:a16="http://schemas.microsoft.com/office/drawing/2014/main" id="{BA946781-BFCE-489B-A792-D2AB371E890E}"/>
+                <a16:creationId xmlns:a16="http://schemas.microsoft.com/office/drawing/2014/main" id="{222F04D1-B718-4FDB-ACAB-6A7C7AB89148}"/>
               </a:ext>
             </a:extLst>
           </p:cNvPr>
@@ -12458,7 +12458,7 @@
           <p:cNvPr id="12" name="">
             <a:extLst xmlns:a="http://schemas.openxmlformats.org/drawingml/2006/main">
               <a:ext uri="{FF2B5EF4-FFF2-40B4-BE49-F238E27FC236}">
-                <a16:creationId xmlns:a16="http://schemas.microsoft.com/office/drawing/2014/main" id="{84BBD1E4-278F-43F3-9131-1FDFC81B1290}"/>
+                <a16:creationId xmlns:a16="http://schemas.microsoft.com/office/drawing/2014/main" id="{6549A890-69D2-4CA4-A584-5F14AB83F3FF}"/>
               </a:ext>
             </a:extLst>
           </p:cNvPr>
@@ -12491,7 +12491,7 @@
           <p:cNvPr id="13" name="">
             <a:extLst xmlns:a="http://schemas.openxmlformats.org/drawingml/2006/main">
               <a:ext uri="{FF2B5EF4-FFF2-40B4-BE49-F238E27FC236}">
-                <a16:creationId xmlns:a16="http://schemas.microsoft.com/office/drawing/2014/main" id="{E47974B2-85D7-47A4-A0F9-4F24E496B629}"/>
+                <a16:creationId xmlns:a16="http://schemas.microsoft.com/office/drawing/2014/main" id="{664D7953-A5AD-4D73-9611-19C53E37A385}"/>
               </a:ext>
             </a:extLst>
           </p:cNvPr>
@@ -12566,7 +12566,7 @@
           <p:cNvPr id="14" name="">
             <a:extLst xmlns:a="http://schemas.openxmlformats.org/drawingml/2006/main">
               <a:ext uri="{FF2B5EF4-FFF2-40B4-BE49-F238E27FC236}">
-                <a16:creationId xmlns:a16="http://schemas.microsoft.com/office/drawing/2014/main" id="{67A4C78A-EB2C-4941-85AB-9817A1E76BAF}"/>
+                <a16:creationId xmlns:a16="http://schemas.microsoft.com/office/drawing/2014/main" id="{3675DDEB-55FE-4680-B2DC-114E99E115A2}"/>
               </a:ext>
             </a:extLst>
           </p:cNvPr>
@@ -12603,19 +12603,19 @@
           <p:cNvPr id="15" name="">
             <a:extLst xmlns:a="http://schemas.openxmlformats.org/drawingml/2006/main">
               <a:ext uri="{FF2B5EF4-FFF2-40B4-BE49-F238E27FC236}">
-                <a16:creationId xmlns:a16="http://schemas.microsoft.com/office/drawing/2014/main" id="{C100F514-BFDB-4ABE-8D43-58D003EBA558}"/>
-              </a:ext>
-            </a:extLst>
-          </p:cNvPr>
-          <p:cNvSpPr>
-            <a:spLocks xmlns:a="http://schemas.openxmlformats.org/drawingml/2006/main" noGrp="1"/>
-          </p:cNvSpPr>
-          <p:nvPr/>
-        </p:nvSpPr>
-        <p:spPr>
-          <a:xfrm xmlns:a="http://schemas.openxmlformats.org/drawingml/2006/main">
-            <a:off x="685800" y="2171700"/>
-            <a:ext cx="3276600" cy="76200"/>
+                <a16:creationId xmlns:a16="http://schemas.microsoft.com/office/drawing/2014/main" id="{D333A0B2-8E81-4849-BBB7-BED0F4E9232E}"/>
+              </a:ext>
+            </a:extLst>
+          </p:cNvPr>
+          <p:cNvSpPr>
+            <a:spLocks xmlns:a="http://schemas.openxmlformats.org/drawingml/2006/main" noGrp="1"/>
+          </p:cNvSpPr>
+          <p:nvPr/>
+        </p:nvSpPr>
+        <p:spPr>
+          <a:xfrm xmlns:a="http://schemas.openxmlformats.org/drawingml/2006/main">
+            <a:off x="742950" y="2228850"/>
+            <a:ext cx="3162300" cy="57150"/>
           </a:xfrm>
           <a:prstGeom xmlns:a="http://schemas.openxmlformats.org/drawingml/2006/main" prst="rect">
             <a:avLst/>
@@ -12638,7 +12638,7 @@
           <p:cNvPr id="16" name="">
             <a:extLst xmlns:a="http://schemas.openxmlformats.org/drawingml/2006/main">
               <a:ext uri="{FF2B5EF4-FFF2-40B4-BE49-F238E27FC236}">
-                <a16:creationId xmlns:a16="http://schemas.microsoft.com/office/drawing/2014/main" id="{EA50583C-D9CD-4989-8646-5D98063B94E8}"/>
+                <a16:creationId xmlns:a16="http://schemas.microsoft.com/office/drawing/2014/main" id="{69B385C7-D9B5-4D26-9243-6A7BAA445E93}"/>
               </a:ext>
             </a:extLst>
           </p:cNvPr>
@@ -12696,7 +12696,7 @@
           <p:cNvPr id="17" name="">
             <a:extLst xmlns:a="http://schemas.openxmlformats.org/drawingml/2006/main">
               <a:ext uri="{FF2B5EF4-FFF2-40B4-BE49-F238E27FC236}">
-                <a16:creationId xmlns:a16="http://schemas.microsoft.com/office/drawing/2014/main" id="{6D15A9D7-A8EA-4A57-BF1B-05B5FA7620CD}"/>
+                <a16:creationId xmlns:a16="http://schemas.microsoft.com/office/drawing/2014/main" id="{D1FE0E59-AD52-4933-BFEB-4BBA3EF17606}"/>
               </a:ext>
             </a:extLst>
           </p:cNvPr>
@@ -12754,7 +12754,7 @@
           <p:cNvPr id="18" name="">
             <a:extLst xmlns:a="http://schemas.openxmlformats.org/drawingml/2006/main">
               <a:ext uri="{FF2B5EF4-FFF2-40B4-BE49-F238E27FC236}">
-                <a16:creationId xmlns:a16="http://schemas.microsoft.com/office/drawing/2014/main" id="{CF500B4E-061A-43E1-A30E-6A32F6E54EAA}"/>
+                <a16:creationId xmlns:a16="http://schemas.microsoft.com/office/drawing/2014/main" id="{A9A5066A-F192-43C6-9E2A-42E9713FBE1A}"/>
               </a:ext>
             </a:extLst>
           </p:cNvPr>
@@ -12812,7 +12812,7 @@
           <p:cNvPr id="19" name="">
             <a:extLst xmlns:a="http://schemas.openxmlformats.org/drawingml/2006/main">
               <a:ext uri="{FF2B5EF4-FFF2-40B4-BE49-F238E27FC236}">
-                <a16:creationId xmlns:a16="http://schemas.microsoft.com/office/drawing/2014/main" id="{34B31D07-8A76-4D2F-9138-68E2DEF314F3}"/>
+                <a16:creationId xmlns:a16="http://schemas.microsoft.com/office/drawing/2014/main" id="{B4E2547D-DBE0-48A1-8A6E-4DFB9F32016E}"/>
               </a:ext>
             </a:extLst>
           </p:cNvPr>
@@ -12849,19 +12849,19 @@
           <p:cNvPr id="20" name="">
             <a:extLst xmlns:a="http://schemas.openxmlformats.org/drawingml/2006/main">
               <a:ext uri="{FF2B5EF4-FFF2-40B4-BE49-F238E27FC236}">
-                <a16:creationId xmlns:a16="http://schemas.microsoft.com/office/drawing/2014/main" id="{1069CA20-0D73-498F-901C-FAA456335E9F}"/>
-              </a:ext>
-            </a:extLst>
-          </p:cNvPr>
-          <p:cNvSpPr>
-            <a:spLocks xmlns:a="http://schemas.openxmlformats.org/drawingml/2006/main" noGrp="1"/>
-          </p:cNvSpPr>
-          <p:nvPr/>
-        </p:nvSpPr>
-        <p:spPr>
-          <a:xfrm xmlns:a="http://schemas.openxmlformats.org/drawingml/2006/main">
-            <a:off x="4191000" y="2171700"/>
-            <a:ext cx="3276600" cy="76200"/>
+                <a16:creationId xmlns:a16="http://schemas.microsoft.com/office/drawing/2014/main" id="{47884E3A-2064-4F6A-93E2-7D02C0485A86}"/>
+              </a:ext>
+            </a:extLst>
+          </p:cNvPr>
+          <p:cNvSpPr>
+            <a:spLocks xmlns:a="http://schemas.openxmlformats.org/drawingml/2006/main" noGrp="1"/>
+          </p:cNvSpPr>
+          <p:nvPr/>
+        </p:nvSpPr>
+        <p:spPr>
+          <a:xfrm xmlns:a="http://schemas.openxmlformats.org/drawingml/2006/main">
+            <a:off x="4248150" y="2228850"/>
+            <a:ext cx="3162300" cy="57150"/>
           </a:xfrm>
           <a:prstGeom xmlns:a="http://schemas.openxmlformats.org/drawingml/2006/main" prst="rect">
             <a:avLst/>
@@ -12884,7 +12884,7 @@
           <p:cNvPr id="21" name="">
             <a:extLst xmlns:a="http://schemas.openxmlformats.org/drawingml/2006/main">
               <a:ext uri="{FF2B5EF4-FFF2-40B4-BE49-F238E27FC236}">
-                <a16:creationId xmlns:a16="http://schemas.microsoft.com/office/drawing/2014/main" id="{29C442FF-0E4E-451B-BD45-C5B230EC6C31}"/>
+                <a16:creationId xmlns:a16="http://schemas.microsoft.com/office/drawing/2014/main" id="{D096A2D9-EC04-4F8B-9CB9-B8BA5F9579A2}"/>
               </a:ext>
             </a:extLst>
           </p:cNvPr>
@@ -12942,7 +12942,7 @@
           <p:cNvPr id="22" name="">
             <a:extLst xmlns:a="http://schemas.openxmlformats.org/drawingml/2006/main">
               <a:ext uri="{FF2B5EF4-FFF2-40B4-BE49-F238E27FC236}">
-                <a16:creationId xmlns:a16="http://schemas.microsoft.com/office/drawing/2014/main" id="{1D157564-A395-4CDE-BA07-EA7AAFCCBF6C}"/>
+                <a16:creationId xmlns:a16="http://schemas.microsoft.com/office/drawing/2014/main" id="{D76E4668-F47E-4082-B69E-66D7EA34EA5C}"/>
               </a:ext>
             </a:extLst>
           </p:cNvPr>
@@ -13000,7 +13000,7 @@
           <p:cNvPr id="23" name="">
             <a:extLst xmlns:a="http://schemas.openxmlformats.org/drawingml/2006/main">
               <a:ext uri="{FF2B5EF4-FFF2-40B4-BE49-F238E27FC236}">
-                <a16:creationId xmlns:a16="http://schemas.microsoft.com/office/drawing/2014/main" id="{BDE1570A-0094-4A55-B55D-31868D5D1B82}"/>
+                <a16:creationId xmlns:a16="http://schemas.microsoft.com/office/drawing/2014/main" id="{53787DC9-6F43-4AF1-B28D-7B10E26B5B88}"/>
               </a:ext>
             </a:extLst>
           </p:cNvPr>
@@ -13058,7 +13058,7 @@
           <p:cNvPr id="24" name="">
             <a:extLst xmlns:a="http://schemas.openxmlformats.org/drawingml/2006/main">
               <a:ext uri="{FF2B5EF4-FFF2-40B4-BE49-F238E27FC236}">
-                <a16:creationId xmlns:a16="http://schemas.microsoft.com/office/drawing/2014/main" id="{510CEF63-BE4C-4AD6-8EB9-3AA8DF8CBDB9}"/>
+                <a16:creationId xmlns:a16="http://schemas.microsoft.com/office/drawing/2014/main" id="{6E41B26D-D282-43FB-A30A-055289E1F116}"/>
               </a:ext>
             </a:extLst>
           </p:cNvPr>
@@ -13095,19 +13095,19 @@
           <p:cNvPr id="25" name="">
             <a:extLst xmlns:a="http://schemas.openxmlformats.org/drawingml/2006/main">
               <a:ext uri="{FF2B5EF4-FFF2-40B4-BE49-F238E27FC236}">
-                <a16:creationId xmlns:a16="http://schemas.microsoft.com/office/drawing/2014/main" id="{F4BEB666-0370-4AB6-B063-0DD796E71F20}"/>
-              </a:ext>
-            </a:extLst>
-          </p:cNvPr>
-          <p:cNvSpPr>
-            <a:spLocks xmlns:a="http://schemas.openxmlformats.org/drawingml/2006/main" noGrp="1"/>
-          </p:cNvSpPr>
-          <p:nvPr/>
-        </p:nvSpPr>
-        <p:spPr>
-          <a:xfrm xmlns:a="http://schemas.openxmlformats.org/drawingml/2006/main">
-            <a:off x="7696200" y="2171700"/>
-            <a:ext cx="3276600" cy="76200"/>
+                <a16:creationId xmlns:a16="http://schemas.microsoft.com/office/drawing/2014/main" id="{A8009134-7666-4F1B-9CBB-483CE06AB96B}"/>
+              </a:ext>
+            </a:extLst>
+          </p:cNvPr>
+          <p:cNvSpPr>
+            <a:spLocks xmlns:a="http://schemas.openxmlformats.org/drawingml/2006/main" noGrp="1"/>
+          </p:cNvSpPr>
+          <p:nvPr/>
+        </p:nvSpPr>
+        <p:spPr>
+          <a:xfrm xmlns:a="http://schemas.openxmlformats.org/drawingml/2006/main">
+            <a:off x="7753350" y="2228850"/>
+            <a:ext cx="3162300" cy="57150"/>
           </a:xfrm>
           <a:prstGeom xmlns:a="http://schemas.openxmlformats.org/drawingml/2006/main" prst="rect">
             <a:avLst/>
@@ -13130,7 +13130,7 @@
           <p:cNvPr id="26" name="">
             <a:extLst xmlns:a="http://schemas.openxmlformats.org/drawingml/2006/main">
               <a:ext uri="{FF2B5EF4-FFF2-40B4-BE49-F238E27FC236}">
-                <a16:creationId xmlns:a16="http://schemas.microsoft.com/office/drawing/2014/main" id="{BAC83238-CC65-4F83-BD15-234330276745}"/>
+                <a16:creationId xmlns:a16="http://schemas.microsoft.com/office/drawing/2014/main" id="{C59BD3EB-ED18-4C8C-AA59-88161B497095}"/>
               </a:ext>
             </a:extLst>
           </p:cNvPr>
@@ -13188,7 +13188,7 @@
           <p:cNvPr id="27" name="">
             <a:extLst xmlns:a="http://schemas.openxmlformats.org/drawingml/2006/main">
               <a:ext uri="{FF2B5EF4-FFF2-40B4-BE49-F238E27FC236}">
-                <a16:creationId xmlns:a16="http://schemas.microsoft.com/office/drawing/2014/main" id="{DAE78191-C963-48A3-B079-9655F73FCC77}"/>
+                <a16:creationId xmlns:a16="http://schemas.microsoft.com/office/drawing/2014/main" id="{DD2DDDB6-7854-45D9-915E-169C915942BD}"/>
               </a:ext>
             </a:extLst>
           </p:cNvPr>
@@ -13246,7 +13246,7 @@
           <p:cNvPr id="28" name="">
             <a:extLst xmlns:a="http://schemas.openxmlformats.org/drawingml/2006/main">
               <a:ext uri="{FF2B5EF4-FFF2-40B4-BE49-F238E27FC236}">
-                <a16:creationId xmlns:a16="http://schemas.microsoft.com/office/drawing/2014/main" id="{8E7F6C1B-D872-4DB1-9C29-00FD9CF14290}"/>
+                <a16:creationId xmlns:a16="http://schemas.microsoft.com/office/drawing/2014/main" id="{FAD5EC4A-3A8E-4230-A185-5F685272A3A5}"/>
               </a:ext>
             </a:extLst>
           </p:cNvPr>
@@ -13304,7 +13304,7 @@
           <p:cNvPr id="29" name="">
             <a:extLst xmlns:a="http://schemas.openxmlformats.org/drawingml/2006/main">
               <a:ext uri="{FF2B5EF4-FFF2-40B4-BE49-F238E27FC236}">
-                <a16:creationId xmlns:a16="http://schemas.microsoft.com/office/drawing/2014/main" id="{61A3AD93-1DDE-42A4-9654-8FD1B96227E3}"/>
+                <a16:creationId xmlns:a16="http://schemas.microsoft.com/office/drawing/2014/main" id="{E8BF4855-E7DC-472C-AE1E-F683D9BEDDBC}"/>
               </a:ext>
             </a:extLst>
           </p:cNvPr>
@@ -13341,19 +13341,19 @@
           <p:cNvPr id="30" name="">
             <a:extLst xmlns:a="http://schemas.openxmlformats.org/drawingml/2006/main">
               <a:ext uri="{FF2B5EF4-FFF2-40B4-BE49-F238E27FC236}">
-                <a16:creationId xmlns:a16="http://schemas.microsoft.com/office/drawing/2014/main" id="{F7751F21-412C-4211-9271-A4D4720269D6}"/>
-              </a:ext>
-            </a:extLst>
-          </p:cNvPr>
-          <p:cNvSpPr>
-            <a:spLocks xmlns:a="http://schemas.openxmlformats.org/drawingml/2006/main" noGrp="1"/>
-          </p:cNvSpPr>
-          <p:nvPr/>
-        </p:nvSpPr>
-        <p:spPr>
-          <a:xfrm xmlns:a="http://schemas.openxmlformats.org/drawingml/2006/main">
-            <a:off x="781050" y="3771900"/>
-            <a:ext cx="3143250" cy="76200"/>
+                <a16:creationId xmlns:a16="http://schemas.microsoft.com/office/drawing/2014/main" id="{C3EF6258-1B3D-4EBA-9982-73B770599AF3}"/>
+              </a:ext>
+            </a:extLst>
+          </p:cNvPr>
+          <p:cNvSpPr>
+            <a:spLocks xmlns:a="http://schemas.openxmlformats.org/drawingml/2006/main" noGrp="1"/>
+          </p:cNvSpPr>
+          <p:nvPr/>
+        </p:nvSpPr>
+        <p:spPr>
+          <a:xfrm xmlns:a="http://schemas.openxmlformats.org/drawingml/2006/main">
+            <a:off x="838200" y="3829050"/>
+            <a:ext cx="3028950" cy="57150"/>
           </a:xfrm>
           <a:prstGeom xmlns:a="http://schemas.openxmlformats.org/drawingml/2006/main" prst="rect">
             <a:avLst/>
@@ -13376,7 +13376,7 @@
           <p:cNvPr id="31" name="">
             <a:extLst xmlns:a="http://schemas.openxmlformats.org/drawingml/2006/main">
               <a:ext uri="{FF2B5EF4-FFF2-40B4-BE49-F238E27FC236}">
-                <a16:creationId xmlns:a16="http://schemas.microsoft.com/office/drawing/2014/main" id="{4D011E76-39A8-499F-B7EE-9B9FE67FCD08}"/>
+                <a16:creationId xmlns:a16="http://schemas.microsoft.com/office/drawing/2014/main" id="{D946F6B4-3A9E-4465-A153-C1B50A920B5F}"/>
               </a:ext>
             </a:extLst>
           </p:cNvPr>
@@ -13434,7 +13434,7 @@
           <p:cNvPr id="32" name="">
             <a:extLst xmlns:a="http://schemas.openxmlformats.org/drawingml/2006/main">
               <a:ext uri="{FF2B5EF4-FFF2-40B4-BE49-F238E27FC236}">
-                <a16:creationId xmlns:a16="http://schemas.microsoft.com/office/drawing/2014/main" id="{7BB912A1-C9A2-4CE8-9831-69EE48A3EE80}"/>
+                <a16:creationId xmlns:a16="http://schemas.microsoft.com/office/drawing/2014/main" id="{CF993867-C577-4634-AFAE-36E14B570358}"/>
               </a:ext>
             </a:extLst>
           </p:cNvPr>
@@ -13560,7 +13560,7 @@
           <p:cNvPr id="33" name="">
             <a:extLst xmlns:a="http://schemas.openxmlformats.org/drawingml/2006/main">
               <a:ext uri="{FF2B5EF4-FFF2-40B4-BE49-F238E27FC236}">
-                <a16:creationId xmlns:a16="http://schemas.microsoft.com/office/drawing/2014/main" id="{663EEF13-7B78-4FD9-8984-717160601AE6}"/>
+                <a16:creationId xmlns:a16="http://schemas.microsoft.com/office/drawing/2014/main" id="{ED789CE5-E431-4892-AE0E-3B5E3AF3AAC8}"/>
               </a:ext>
             </a:extLst>
           </p:cNvPr>
@@ -13597,19 +13597,19 @@
           <p:cNvPr id="34" name="">
             <a:extLst xmlns:a="http://schemas.openxmlformats.org/drawingml/2006/main">
               <a:ext uri="{FF2B5EF4-FFF2-40B4-BE49-F238E27FC236}">
-                <a16:creationId xmlns:a16="http://schemas.microsoft.com/office/drawing/2014/main" id="{F0A5201D-AAD7-4E36-AC0F-6F8D90DDD5FE}"/>
-              </a:ext>
-            </a:extLst>
-          </p:cNvPr>
-          <p:cNvSpPr>
-            <a:spLocks xmlns:a="http://schemas.openxmlformats.org/drawingml/2006/main" noGrp="1"/>
-          </p:cNvSpPr>
-          <p:nvPr/>
-        </p:nvSpPr>
-        <p:spPr>
-          <a:xfrm xmlns:a="http://schemas.openxmlformats.org/drawingml/2006/main">
-            <a:off x="4514850" y="3771900"/>
-            <a:ext cx="3143250" cy="76200"/>
+                <a16:creationId xmlns:a16="http://schemas.microsoft.com/office/drawing/2014/main" id="{079D33E6-64C9-49FB-B4A0-862664C0E255}"/>
+              </a:ext>
+            </a:extLst>
+          </p:cNvPr>
+          <p:cNvSpPr>
+            <a:spLocks xmlns:a="http://schemas.openxmlformats.org/drawingml/2006/main" noGrp="1"/>
+          </p:cNvSpPr>
+          <p:nvPr/>
+        </p:nvSpPr>
+        <p:spPr>
+          <a:xfrm xmlns:a="http://schemas.openxmlformats.org/drawingml/2006/main">
+            <a:off x="4572000" y="3829050"/>
+            <a:ext cx="3028950" cy="57150"/>
           </a:xfrm>
           <a:prstGeom xmlns:a="http://schemas.openxmlformats.org/drawingml/2006/main" prst="rect">
             <a:avLst/>
@@ -13632,7 +13632,7 @@
           <p:cNvPr id="35" name="">
             <a:extLst xmlns:a="http://schemas.openxmlformats.org/drawingml/2006/main">
               <a:ext uri="{FF2B5EF4-FFF2-40B4-BE49-F238E27FC236}">
-                <a16:creationId xmlns:a16="http://schemas.microsoft.com/office/drawing/2014/main" id="{957D200E-5664-487B-84ED-096424E36D7D}"/>
+                <a16:creationId xmlns:a16="http://schemas.microsoft.com/office/drawing/2014/main" id="{F3E5AA6C-A387-43D9-85EF-599364501439}"/>
               </a:ext>
             </a:extLst>
           </p:cNvPr>
@@ -13690,7 +13690,7 @@
           <p:cNvPr id="36" name="">
             <a:extLst xmlns:a="http://schemas.openxmlformats.org/drawingml/2006/main">
               <a:ext uri="{FF2B5EF4-FFF2-40B4-BE49-F238E27FC236}">
-                <a16:creationId xmlns:a16="http://schemas.microsoft.com/office/drawing/2014/main" id="{99F90D8F-903D-401B-944D-E4EB99FC3BC3}"/>
+                <a16:creationId xmlns:a16="http://schemas.microsoft.com/office/drawing/2014/main" id="{5D38648F-9AF6-4AC8-862D-D9DFD69B6D6A}"/>
               </a:ext>
             </a:extLst>
           </p:cNvPr>
@@ -13799,7 +13799,7 @@
           <p:cNvPr id="37" name="">
             <a:extLst xmlns:a="http://schemas.openxmlformats.org/drawingml/2006/main">
               <a:ext uri="{FF2B5EF4-FFF2-40B4-BE49-F238E27FC236}">
-                <a16:creationId xmlns:a16="http://schemas.microsoft.com/office/drawing/2014/main" id="{413E4071-3456-44FA-BDC2-3990314E732A}"/>
+                <a16:creationId xmlns:a16="http://schemas.microsoft.com/office/drawing/2014/main" id="{3A5EC72D-35A1-471B-8358-2850BB73BBB6}"/>
               </a:ext>
             </a:extLst>
           </p:cNvPr>
@@ -13836,19 +13836,19 @@
           <p:cNvPr id="38" name="">
             <a:extLst xmlns:a="http://schemas.openxmlformats.org/drawingml/2006/main">
               <a:ext uri="{FF2B5EF4-FFF2-40B4-BE49-F238E27FC236}">
-                <a16:creationId xmlns:a16="http://schemas.microsoft.com/office/drawing/2014/main" id="{3FBF780F-9F83-44D8-ACD2-F2290A43E7A7}"/>
-              </a:ext>
-            </a:extLst>
-          </p:cNvPr>
-          <p:cNvSpPr>
-            <a:spLocks xmlns:a="http://schemas.openxmlformats.org/drawingml/2006/main" noGrp="1"/>
-          </p:cNvSpPr>
-          <p:nvPr/>
-        </p:nvSpPr>
-        <p:spPr>
-          <a:xfrm xmlns:a="http://schemas.openxmlformats.org/drawingml/2006/main">
-            <a:off x="8248650" y="3771900"/>
-            <a:ext cx="3143250" cy="76200"/>
+                <a16:creationId xmlns:a16="http://schemas.microsoft.com/office/drawing/2014/main" id="{93884BB2-2A45-437C-9078-13463D521615}"/>
+              </a:ext>
+            </a:extLst>
+          </p:cNvPr>
+          <p:cNvSpPr>
+            <a:spLocks xmlns:a="http://schemas.openxmlformats.org/drawingml/2006/main" noGrp="1"/>
+          </p:cNvSpPr>
+          <p:nvPr/>
+        </p:nvSpPr>
+        <p:spPr>
+          <a:xfrm xmlns:a="http://schemas.openxmlformats.org/drawingml/2006/main">
+            <a:off x="8305800" y="3829050"/>
+            <a:ext cx="3028950" cy="57150"/>
           </a:xfrm>
           <a:prstGeom xmlns:a="http://schemas.openxmlformats.org/drawingml/2006/main" prst="rect">
             <a:avLst/>
@@ -13871,7 +13871,7 @@
           <p:cNvPr id="39" name="">
             <a:extLst xmlns:a="http://schemas.openxmlformats.org/drawingml/2006/main">
               <a:ext uri="{FF2B5EF4-FFF2-40B4-BE49-F238E27FC236}">
-                <a16:creationId xmlns:a16="http://schemas.microsoft.com/office/drawing/2014/main" id="{3CB63DCF-2D4A-4C84-9BB3-72C063B6D54B}"/>
+                <a16:creationId xmlns:a16="http://schemas.microsoft.com/office/drawing/2014/main" id="{180DDC3A-8059-435D-A123-DA1710E73132}"/>
               </a:ext>
             </a:extLst>
           </p:cNvPr>
@@ -13929,7 +13929,7 @@
           <p:cNvPr id="40" name="">
             <a:extLst xmlns:a="http://schemas.openxmlformats.org/drawingml/2006/main">
               <a:ext uri="{FF2B5EF4-FFF2-40B4-BE49-F238E27FC236}">
-                <a16:creationId xmlns:a16="http://schemas.microsoft.com/office/drawing/2014/main" id="{FE9F2178-C56C-4AEF-BBEE-6A2DE7F840E6}"/>
+                <a16:creationId xmlns:a16="http://schemas.microsoft.com/office/drawing/2014/main" id="{BCF4D525-814D-4C4A-B472-1626E21DDE6E}"/>
               </a:ext>
             </a:extLst>
           </p:cNvPr>
@@ -14038,7 +14038,7 @@
           <p:cNvPr id="41" name="">
             <a:extLst xmlns:a="http://schemas.openxmlformats.org/drawingml/2006/main">
               <a:ext uri="{FF2B5EF4-FFF2-40B4-BE49-F238E27FC236}">
-                <a16:creationId xmlns:a16="http://schemas.microsoft.com/office/drawing/2014/main" id="{C9D5D454-AF62-4561-9C25-01950D873522}"/>
+                <a16:creationId xmlns:a16="http://schemas.microsoft.com/office/drawing/2014/main" id="{49F3FFC7-B104-4D5A-8686-7176CFDCEAF1}"/>
               </a:ext>
             </a:extLst>
           </p:cNvPr>
@@ -14094,7 +14094,7 @@
     </p:spTree>
     <p:extLst>
       <p:ext uri="{BB962C8B-B14F-4D97-AF65-F5344CB8AC3E}">
-        <p14:creationId xmlns:p14="http://schemas.microsoft.com/office/powerpoint/2010/main" val="1418075695"/>
+        <p14:creationId xmlns:p14="http://schemas.microsoft.com/office/powerpoint/2010/main" val="1237867467"/>
       </p:ext>
     </p:extLst>
   </p:cSld>
@@ -14125,7 +14125,7 @@
           <p:cNvPr id="1" name="Slide Number Placeholder 5">
             <a:extLst xmlns:a="http://schemas.openxmlformats.org/drawingml/2006/main">
               <a:ext uri="{FF2B5EF4-FFF2-40B4-BE49-F238E27FC236}">
-                <a16:creationId xmlns:a16="http://schemas.microsoft.com/office/drawing/2014/main" id="{960B6032-F217-4E1A-A5DD-55BD6786A62D}"/>
+                <a16:creationId xmlns:a16="http://schemas.microsoft.com/office/drawing/2014/main" id="{821508BF-91E3-4E78-84B3-DCBD229C8660}"/>
               </a:ext>
             </a:extLst>
           </p:cNvPr>
@@ -14161,7 +14161,7 @@
           <p:nvPr/>
         </p:nvPicPr>
         <p:blipFill>
-          <a:blip xmlns:r="http://schemas.openxmlformats.org/officeDocument/2006/relationships" xmlns:a="http://schemas.openxmlformats.org/drawingml/2006/main" r:embed="Rf79f4cfefa964cb8"/>
+          <a:blip xmlns:r="http://schemas.openxmlformats.org/officeDocument/2006/relationships" xmlns:a="http://schemas.openxmlformats.org/drawingml/2006/main" r:embed="Re2c25d33617e48fb"/>
           <a:srcRect xmlns:a="http://schemas.openxmlformats.org/drawingml/2006/main" l="0" t="21875" r="0" b="21875"/>
           <a:stretch xmlns:a="http://schemas.openxmlformats.org/drawingml/2006/main">
             <a:fillRect l="0" t="0" r="0" b="0"/>
@@ -14182,7 +14182,7 @@
           <p:cNvPr id="3" name="">
             <a:extLst xmlns:a="http://schemas.openxmlformats.org/drawingml/2006/main">
               <a:ext uri="{FF2B5EF4-FFF2-40B4-BE49-F238E27FC236}">
-                <a16:creationId xmlns:a16="http://schemas.microsoft.com/office/drawing/2014/main" id="{37C828D8-4C9A-40C2-9148-EB1F36B9C5FD}"/>
+                <a16:creationId xmlns:a16="http://schemas.microsoft.com/office/drawing/2014/main" id="{85F830A1-B52F-46B3-ADE1-625936B0E395}"/>
               </a:ext>
             </a:extLst>
           </p:cNvPr>
@@ -14217,7 +14217,7 @@
           <p:cNvPr id="4" name="">
             <a:extLst xmlns:a="http://schemas.openxmlformats.org/drawingml/2006/main">
               <a:ext uri="{FF2B5EF4-FFF2-40B4-BE49-F238E27FC236}">
-                <a16:creationId xmlns:a16="http://schemas.microsoft.com/office/drawing/2014/main" id="{3C823A6D-4F16-4BD3-8B6C-E099624FB101}"/>
+                <a16:creationId xmlns:a16="http://schemas.microsoft.com/office/drawing/2014/main" id="{8C6F1B92-DEE9-41A0-A4B2-DE5D7BA73F19}"/>
               </a:ext>
             </a:extLst>
           </p:cNvPr>
@@ -14252,7 +14252,7 @@
           <p:cNvPr id="5" name="">
             <a:extLst xmlns:a="http://schemas.openxmlformats.org/drawingml/2006/main">
               <a:ext uri="{FF2B5EF4-FFF2-40B4-BE49-F238E27FC236}">
-                <a16:creationId xmlns:a16="http://schemas.microsoft.com/office/drawing/2014/main" id="{75CB78A2-9938-4D58-9017-F2EABB4795F3}"/>
+                <a16:creationId xmlns:a16="http://schemas.microsoft.com/office/drawing/2014/main" id="{05AF92C3-7100-4F5B-A334-717559CD7317}"/>
               </a:ext>
             </a:extLst>
           </p:cNvPr>
@@ -14289,7 +14289,7 @@
           <p:cNvPr id="6" name="">
             <a:extLst xmlns:a="http://schemas.openxmlformats.org/drawingml/2006/main">
               <a:ext uri="{FF2B5EF4-FFF2-40B4-BE49-F238E27FC236}">
-                <a16:creationId xmlns:a16="http://schemas.microsoft.com/office/drawing/2014/main" id="{EAAE4EDD-9FCD-4FC3-8B5B-8E6E7C25A0F3}"/>
+                <a16:creationId xmlns:a16="http://schemas.microsoft.com/office/drawing/2014/main" id="{91FDD3FB-B4A1-4AB6-93B6-EAD1BA33E6A7}"/>
               </a:ext>
             </a:extLst>
           </p:cNvPr>
@@ -14326,7 +14326,7 @@
           <p:cNvPr id="7" name="">
             <a:extLst xmlns:a="http://schemas.openxmlformats.org/drawingml/2006/main">
               <a:ext uri="{FF2B5EF4-FFF2-40B4-BE49-F238E27FC236}">
-                <a16:creationId xmlns:a16="http://schemas.microsoft.com/office/drawing/2014/main" id="{0C8EE016-D2F8-42FB-8310-1D1E45AC13E1}"/>
+                <a16:creationId xmlns:a16="http://schemas.microsoft.com/office/drawing/2014/main" id="{BA448CC0-4FDD-4FBD-8D0B-C99279F0D511}"/>
               </a:ext>
             </a:extLst>
           </p:cNvPr>
@@ -14363,7 +14363,7 @@
           <p:cNvPr id="8" name="">
             <a:extLst xmlns:a="http://schemas.openxmlformats.org/drawingml/2006/main">
               <a:ext uri="{FF2B5EF4-FFF2-40B4-BE49-F238E27FC236}">
-                <a16:creationId xmlns:a16="http://schemas.microsoft.com/office/drawing/2014/main" id="{48372DDF-0918-45D7-9739-8524A79577E0}"/>
+                <a16:creationId xmlns:a16="http://schemas.microsoft.com/office/drawing/2014/main" id="{3FF93357-503B-46FB-A417-E05CAEC0B70B}"/>
               </a:ext>
             </a:extLst>
           </p:cNvPr>
@@ -14400,7 +14400,7 @@
           <p:cNvPr id="9" name="">
             <a:extLst xmlns:a="http://schemas.openxmlformats.org/drawingml/2006/main">
               <a:ext uri="{FF2B5EF4-FFF2-40B4-BE49-F238E27FC236}">
-                <a16:creationId xmlns:a16="http://schemas.microsoft.com/office/drawing/2014/main" id="{DFFB46BC-0F5C-42AE-9D23-38D56027CC65}"/>
+                <a16:creationId xmlns:a16="http://schemas.microsoft.com/office/drawing/2014/main" id="{28EB9D4A-E3AD-4345-AD06-2F9BB11CD72F}"/>
               </a:ext>
             </a:extLst>
           </p:cNvPr>
@@ -14458,7 +14458,7 @@
           <p:cNvPr id="10" name="">
             <a:extLst xmlns:a="http://schemas.openxmlformats.org/drawingml/2006/main">
               <a:ext uri="{FF2B5EF4-FFF2-40B4-BE49-F238E27FC236}">
-                <a16:creationId xmlns:a16="http://schemas.microsoft.com/office/drawing/2014/main" id="{38418286-85F6-49F4-92B2-3BE5ED698B51}"/>
+                <a16:creationId xmlns:a16="http://schemas.microsoft.com/office/drawing/2014/main" id="{BCDEAA0B-0A07-4ED1-88E7-93FEFD79167B}"/>
               </a:ext>
             </a:extLst>
           </p:cNvPr>
@@ -14516,7 +14516,7 @@
           <p:cNvPr id="11" name="">
             <a:extLst xmlns:a="http://schemas.openxmlformats.org/drawingml/2006/main">
               <a:ext uri="{FF2B5EF4-FFF2-40B4-BE49-F238E27FC236}">
-                <a16:creationId xmlns:a16="http://schemas.microsoft.com/office/drawing/2014/main" id="{9C75DCF2-286F-4ACD-8188-8A85E09CCCAD}"/>
+                <a16:creationId xmlns:a16="http://schemas.microsoft.com/office/drawing/2014/main" id="{F55E2B99-B97E-4BDF-AABB-735AFA264609}"/>
               </a:ext>
             </a:extLst>
           </p:cNvPr>
@@ -14551,7 +14551,7 @@
           <p:cNvPr id="12" name="">
             <a:extLst xmlns:a="http://schemas.openxmlformats.org/drawingml/2006/main">
               <a:ext uri="{FF2B5EF4-FFF2-40B4-BE49-F238E27FC236}">
-                <a16:creationId xmlns:a16="http://schemas.microsoft.com/office/drawing/2014/main" id="{0AA1558C-8712-42AC-B02F-B0D95C4E1191}"/>
+                <a16:creationId xmlns:a16="http://schemas.microsoft.com/office/drawing/2014/main" id="{5B4E95C6-D9C3-40D3-8A8C-40F64977BD72}"/>
               </a:ext>
             </a:extLst>
           </p:cNvPr>
@@ -14584,7 +14584,7 @@
           <p:cNvPr id="13" name="">
             <a:extLst xmlns:a="http://schemas.openxmlformats.org/drawingml/2006/main">
               <a:ext uri="{FF2B5EF4-FFF2-40B4-BE49-F238E27FC236}">
-                <a16:creationId xmlns:a16="http://schemas.microsoft.com/office/drawing/2014/main" id="{32F6AC6A-814D-48F6-BB7D-8199424A84A8}"/>
+                <a16:creationId xmlns:a16="http://schemas.microsoft.com/office/drawing/2014/main" id="{ACFDF1E2-524A-47FE-B92C-026958DD54A3}"/>
               </a:ext>
             </a:extLst>
           </p:cNvPr>
@@ -14659,7 +14659,7 @@
           <p:cNvPr id="14" name="">
             <a:extLst xmlns:a="http://schemas.openxmlformats.org/drawingml/2006/main">
               <a:ext uri="{FF2B5EF4-FFF2-40B4-BE49-F238E27FC236}">
-                <a16:creationId xmlns:a16="http://schemas.microsoft.com/office/drawing/2014/main" id="{9968924B-30C2-4C0B-A4F4-DB85D543F1D3}"/>
+                <a16:creationId xmlns:a16="http://schemas.microsoft.com/office/drawing/2014/main" id="{EECB16AC-EAC1-437D-BB16-B4BF4B12AC90}"/>
               </a:ext>
             </a:extLst>
           </p:cNvPr>
@@ -14694,19 +14694,19 @@
           <p:cNvPr id="15" name="">
             <a:extLst xmlns:a="http://schemas.openxmlformats.org/drawingml/2006/main">
               <a:ext uri="{FF2B5EF4-FFF2-40B4-BE49-F238E27FC236}">
-                <a16:creationId xmlns:a16="http://schemas.microsoft.com/office/drawing/2014/main" id="{218A22DB-85F1-4FD7-A4BA-DF9DDB47CFD9}"/>
-              </a:ext>
-            </a:extLst>
-          </p:cNvPr>
-          <p:cNvSpPr>
-            <a:spLocks xmlns:a="http://schemas.openxmlformats.org/drawingml/2006/main" noGrp="1"/>
-          </p:cNvSpPr>
-          <p:nvPr/>
-        </p:nvSpPr>
-        <p:spPr>
-          <a:xfrm xmlns:a="http://schemas.openxmlformats.org/drawingml/2006/main">
-            <a:off x="4495800" y="2971800"/>
-            <a:ext cx="66675" cy="1104900"/>
+                <a16:creationId xmlns:a16="http://schemas.microsoft.com/office/drawing/2014/main" id="{6E76B2A5-B3D5-45C3-9296-38C8893774F5}"/>
+              </a:ext>
+            </a:extLst>
+          </p:cNvPr>
+          <p:cNvSpPr>
+            <a:spLocks xmlns:a="http://schemas.openxmlformats.org/drawingml/2006/main" noGrp="1"/>
+          </p:cNvSpPr>
+          <p:nvPr/>
+        </p:nvSpPr>
+        <p:spPr>
+          <a:xfrm xmlns:a="http://schemas.openxmlformats.org/drawingml/2006/main">
+            <a:off x="4543425" y="3019425"/>
+            <a:ext cx="47625" cy="1009650"/>
           </a:xfrm>
           <a:prstGeom xmlns:a="http://schemas.openxmlformats.org/drawingml/2006/main" prst="rect">
             <a:avLst/>
@@ -14729,7 +14729,7 @@
           <p:cNvPr id="16" name="">
             <a:extLst xmlns:a="http://schemas.openxmlformats.org/drawingml/2006/main">
               <a:ext uri="{FF2B5EF4-FFF2-40B4-BE49-F238E27FC236}">
-                <a16:creationId xmlns:a16="http://schemas.microsoft.com/office/drawing/2014/main" id="{0742B5BB-55A9-4121-AC51-830EB6D8892D}"/>
+                <a16:creationId xmlns:a16="http://schemas.microsoft.com/office/drawing/2014/main" id="{B498026B-AF79-4D0E-A9B1-0D068908E2AF}"/>
               </a:ext>
             </a:extLst>
           </p:cNvPr>
@@ -14783,7 +14783,7 @@
           <p:cNvPr id="17" name="">
             <a:extLst xmlns:a="http://schemas.openxmlformats.org/drawingml/2006/main">
               <a:ext uri="{FF2B5EF4-FFF2-40B4-BE49-F238E27FC236}">
-                <a16:creationId xmlns:a16="http://schemas.microsoft.com/office/drawing/2014/main" id="{99AC48DE-235D-463A-B411-A22B53068785}"/>
+                <a16:creationId xmlns:a16="http://schemas.microsoft.com/office/drawing/2014/main" id="{B5B490C8-7F85-46D5-9C62-DA1B9DC5D4B8}"/>
               </a:ext>
             </a:extLst>
           </p:cNvPr>
@@ -14841,7 +14841,7 @@
           <p:cNvPr id="18" name="">
             <a:extLst xmlns:a="http://schemas.openxmlformats.org/drawingml/2006/main">
               <a:ext uri="{FF2B5EF4-FFF2-40B4-BE49-F238E27FC236}">
-                <a16:creationId xmlns:a16="http://schemas.microsoft.com/office/drawing/2014/main" id="{7D3832B5-F923-47E6-8CEF-C9D44C8630B3}"/>
+                <a16:creationId xmlns:a16="http://schemas.microsoft.com/office/drawing/2014/main" id="{357FD728-C17A-4311-8780-918593AA3D20}"/>
               </a:ext>
             </a:extLst>
           </p:cNvPr>
@@ -14899,7 +14899,7 @@
           <p:cNvPr id="19" name="">
             <a:extLst xmlns:a="http://schemas.openxmlformats.org/drawingml/2006/main">
               <a:ext uri="{FF2B5EF4-FFF2-40B4-BE49-F238E27FC236}">
-                <a16:creationId xmlns:a16="http://schemas.microsoft.com/office/drawing/2014/main" id="{1B926333-83D2-4142-9898-A38F41E37198}"/>
+                <a16:creationId xmlns:a16="http://schemas.microsoft.com/office/drawing/2014/main" id="{3C3685CC-D5A3-4F9B-A008-459D677FF9B2}"/>
               </a:ext>
             </a:extLst>
           </p:cNvPr>
@@ -14934,19 +14934,19 @@
           <p:cNvPr id="20" name="">
             <a:extLst xmlns:a="http://schemas.openxmlformats.org/drawingml/2006/main">
               <a:ext uri="{FF2B5EF4-FFF2-40B4-BE49-F238E27FC236}">
-                <a16:creationId xmlns:a16="http://schemas.microsoft.com/office/drawing/2014/main" id="{31175FAC-5F41-44B4-BC8A-257E8AA63427}"/>
-              </a:ext>
-            </a:extLst>
-          </p:cNvPr>
-          <p:cNvSpPr>
-            <a:spLocks xmlns:a="http://schemas.openxmlformats.org/drawingml/2006/main" noGrp="1"/>
-          </p:cNvSpPr>
-          <p:nvPr/>
-        </p:nvSpPr>
-        <p:spPr>
-          <a:xfrm xmlns:a="http://schemas.openxmlformats.org/drawingml/2006/main">
-            <a:off x="933450" y="2247900"/>
-            <a:ext cx="66675" cy="1066800"/>
+                <a16:creationId xmlns:a16="http://schemas.microsoft.com/office/drawing/2014/main" id="{58204CDC-C681-461A-B9AE-F66E656A0916}"/>
+              </a:ext>
+            </a:extLst>
+          </p:cNvPr>
+          <p:cNvSpPr>
+            <a:spLocks xmlns:a="http://schemas.openxmlformats.org/drawingml/2006/main" noGrp="1"/>
+          </p:cNvSpPr>
+          <p:nvPr/>
+        </p:nvSpPr>
+        <p:spPr>
+          <a:xfrm xmlns:a="http://schemas.openxmlformats.org/drawingml/2006/main">
+            <a:off x="981075" y="2295525"/>
+            <a:ext cx="47625" cy="971550"/>
           </a:xfrm>
           <a:prstGeom xmlns:a="http://schemas.openxmlformats.org/drawingml/2006/main" prst="rect">
             <a:avLst/>
@@ -14969,7 +14969,7 @@
           <p:cNvPr id="21" name="">
             <a:extLst xmlns:a="http://schemas.openxmlformats.org/drawingml/2006/main">
               <a:ext uri="{FF2B5EF4-FFF2-40B4-BE49-F238E27FC236}">
-                <a16:creationId xmlns:a16="http://schemas.microsoft.com/office/drawing/2014/main" id="{5D5527DC-DC94-4A92-86F5-C09E436AA16F}"/>
+                <a16:creationId xmlns:a16="http://schemas.microsoft.com/office/drawing/2014/main" id="{47C6ECB4-5553-43C0-8C8D-41D125B2A895}"/>
               </a:ext>
             </a:extLst>
           </p:cNvPr>
@@ -15023,7 +15023,7 @@
           <p:cNvPr id="22" name="">
             <a:extLst xmlns:a="http://schemas.openxmlformats.org/drawingml/2006/main">
               <a:ext uri="{FF2B5EF4-FFF2-40B4-BE49-F238E27FC236}">
-                <a16:creationId xmlns:a16="http://schemas.microsoft.com/office/drawing/2014/main" id="{0CE190B0-4812-4B0F-989B-186A354CEC25}"/>
+                <a16:creationId xmlns:a16="http://schemas.microsoft.com/office/drawing/2014/main" id="{51A1538A-3CBE-4B30-BB56-3C203C44FF2F}"/>
               </a:ext>
             </a:extLst>
           </p:cNvPr>
@@ -15081,7 +15081,7 @@
           <p:cNvPr id="23" name="">
             <a:extLst xmlns:a="http://schemas.openxmlformats.org/drawingml/2006/main">
               <a:ext uri="{FF2B5EF4-FFF2-40B4-BE49-F238E27FC236}">
-                <a16:creationId xmlns:a16="http://schemas.microsoft.com/office/drawing/2014/main" id="{B75765F6-5302-4376-B772-3C1629B5E5C4}"/>
+                <a16:creationId xmlns:a16="http://schemas.microsoft.com/office/drawing/2014/main" id="{D5DC7F29-12EB-4819-B4AE-7F176D4DC485}"/>
               </a:ext>
             </a:extLst>
           </p:cNvPr>
@@ -15139,7 +15139,7 @@
           <p:cNvPr id="24" name="">
             <a:extLst xmlns:a="http://schemas.openxmlformats.org/drawingml/2006/main">
               <a:ext uri="{FF2B5EF4-FFF2-40B4-BE49-F238E27FC236}">
-                <a16:creationId xmlns:a16="http://schemas.microsoft.com/office/drawing/2014/main" id="{90ED235D-D0F6-4D39-A757-D54E179F9B1F}"/>
+                <a16:creationId xmlns:a16="http://schemas.microsoft.com/office/drawing/2014/main" id="{D21AC2A4-11B5-4B60-AFFF-C58F64509328}"/>
               </a:ext>
             </a:extLst>
           </p:cNvPr>
@@ -15174,19 +15174,19 @@
           <p:cNvPr id="25" name="">
             <a:extLst xmlns:a="http://schemas.openxmlformats.org/drawingml/2006/main">
               <a:ext uri="{FF2B5EF4-FFF2-40B4-BE49-F238E27FC236}">
-                <a16:creationId xmlns:a16="http://schemas.microsoft.com/office/drawing/2014/main" id="{38CCA31A-0223-42BB-A296-BBF7E453DED5}"/>
-              </a:ext>
-            </a:extLst>
-          </p:cNvPr>
-          <p:cNvSpPr>
-            <a:spLocks xmlns:a="http://schemas.openxmlformats.org/drawingml/2006/main" noGrp="1"/>
-          </p:cNvSpPr>
-          <p:nvPr/>
-        </p:nvSpPr>
-        <p:spPr>
-          <a:xfrm xmlns:a="http://schemas.openxmlformats.org/drawingml/2006/main">
-            <a:off x="2933700" y="1866900"/>
-            <a:ext cx="66675" cy="1066800"/>
+                <a16:creationId xmlns:a16="http://schemas.microsoft.com/office/drawing/2014/main" id="{91429D49-EC71-4F9D-B81D-CE007490F8F2}"/>
+              </a:ext>
+            </a:extLst>
+          </p:cNvPr>
+          <p:cNvSpPr>
+            <a:spLocks xmlns:a="http://schemas.openxmlformats.org/drawingml/2006/main" noGrp="1"/>
+          </p:cNvSpPr>
+          <p:nvPr/>
+        </p:nvSpPr>
+        <p:spPr>
+          <a:xfrm xmlns:a="http://schemas.openxmlformats.org/drawingml/2006/main">
+            <a:off x="2981325" y="1914525"/>
+            <a:ext cx="47625" cy="971550"/>
           </a:xfrm>
           <a:prstGeom xmlns:a="http://schemas.openxmlformats.org/drawingml/2006/main" prst="rect">
             <a:avLst/>
@@ -15209,7 +15209,7 @@
           <p:cNvPr id="26" name="">
             <a:extLst xmlns:a="http://schemas.openxmlformats.org/drawingml/2006/main">
               <a:ext uri="{FF2B5EF4-FFF2-40B4-BE49-F238E27FC236}">
-                <a16:creationId xmlns:a16="http://schemas.microsoft.com/office/drawing/2014/main" id="{86E044A1-7AFB-4FF9-9D31-F561D54AC357}"/>
+                <a16:creationId xmlns:a16="http://schemas.microsoft.com/office/drawing/2014/main" id="{27273D1B-1D7C-4B6F-A265-2B443E75F854}"/>
               </a:ext>
             </a:extLst>
           </p:cNvPr>
@@ -15263,7 +15263,7 @@
           <p:cNvPr id="27" name="">
             <a:extLst xmlns:a="http://schemas.openxmlformats.org/drawingml/2006/main">
               <a:ext uri="{FF2B5EF4-FFF2-40B4-BE49-F238E27FC236}">
-                <a16:creationId xmlns:a16="http://schemas.microsoft.com/office/drawing/2014/main" id="{030CCF7F-64E6-4058-B819-AABD6CB583B3}"/>
+                <a16:creationId xmlns:a16="http://schemas.microsoft.com/office/drawing/2014/main" id="{B7AF2AEC-FF4B-4493-B649-C7A9DC08822E}"/>
               </a:ext>
             </a:extLst>
           </p:cNvPr>
@@ -15321,7 +15321,7 @@
           <p:cNvPr id="28" name="">
             <a:extLst xmlns:a="http://schemas.openxmlformats.org/drawingml/2006/main">
               <a:ext uri="{FF2B5EF4-FFF2-40B4-BE49-F238E27FC236}">
-                <a16:creationId xmlns:a16="http://schemas.microsoft.com/office/drawing/2014/main" id="{C4B72CAB-6F1E-4B7F-A231-CE4F0860D337}"/>
+                <a16:creationId xmlns:a16="http://schemas.microsoft.com/office/drawing/2014/main" id="{47B1329D-6EED-425C-847F-B9AF313751A0}"/>
               </a:ext>
             </a:extLst>
           </p:cNvPr>
@@ -15396,7 +15396,7 @@
           <p:cNvPr id="29" name="">
             <a:extLst xmlns:a="http://schemas.openxmlformats.org/drawingml/2006/main">
               <a:ext uri="{FF2B5EF4-FFF2-40B4-BE49-F238E27FC236}">
-                <a16:creationId xmlns:a16="http://schemas.microsoft.com/office/drawing/2014/main" id="{2F37C11F-F575-4499-AA10-C2FF3D7E9A2B}"/>
+                <a16:creationId xmlns:a16="http://schemas.microsoft.com/office/drawing/2014/main" id="{2A50C413-2E50-4A3F-8994-B358AF23B7AC}"/>
               </a:ext>
             </a:extLst>
           </p:cNvPr>
@@ -15431,19 +15431,19 @@
           <p:cNvPr id="30" name="">
             <a:extLst xmlns:a="http://schemas.openxmlformats.org/drawingml/2006/main">
               <a:ext uri="{FF2B5EF4-FFF2-40B4-BE49-F238E27FC236}">
-                <a16:creationId xmlns:a16="http://schemas.microsoft.com/office/drawing/2014/main" id="{9A5DFABC-637D-4FC4-88F6-688BB1C623B2}"/>
-              </a:ext>
-            </a:extLst>
-          </p:cNvPr>
-          <p:cNvSpPr>
-            <a:spLocks xmlns:a="http://schemas.openxmlformats.org/drawingml/2006/main" noGrp="1"/>
-          </p:cNvSpPr>
-          <p:nvPr/>
-        </p:nvSpPr>
-        <p:spPr>
-          <a:xfrm xmlns:a="http://schemas.openxmlformats.org/drawingml/2006/main">
-            <a:off x="7600950" y="1943100"/>
-            <a:ext cx="66675" cy="1066800"/>
+                <a16:creationId xmlns:a16="http://schemas.microsoft.com/office/drawing/2014/main" id="{F44E93E2-AC62-417E-A4D9-C44E5B7C3CE5}"/>
+              </a:ext>
+            </a:extLst>
+          </p:cNvPr>
+          <p:cNvSpPr>
+            <a:spLocks xmlns:a="http://schemas.openxmlformats.org/drawingml/2006/main" noGrp="1"/>
+          </p:cNvSpPr>
+          <p:nvPr/>
+        </p:nvSpPr>
+        <p:spPr>
+          <a:xfrm xmlns:a="http://schemas.openxmlformats.org/drawingml/2006/main">
+            <a:off x="7648575" y="1990725"/>
+            <a:ext cx="47625" cy="971550"/>
           </a:xfrm>
           <a:prstGeom xmlns:a="http://schemas.openxmlformats.org/drawingml/2006/main" prst="rect">
             <a:avLst/>
@@ -15466,7 +15466,7 @@
           <p:cNvPr id="31" name="">
             <a:extLst xmlns:a="http://schemas.openxmlformats.org/drawingml/2006/main">
               <a:ext uri="{FF2B5EF4-FFF2-40B4-BE49-F238E27FC236}">
-                <a16:creationId xmlns:a16="http://schemas.microsoft.com/office/drawing/2014/main" id="{773BC545-7F4F-4251-A45B-FD094705A040}"/>
+                <a16:creationId xmlns:a16="http://schemas.microsoft.com/office/drawing/2014/main" id="{2BC30686-329B-40FB-A685-D8616259A29B}"/>
               </a:ext>
             </a:extLst>
           </p:cNvPr>
@@ -15520,7 +15520,7 @@
           <p:cNvPr id="32" name="">
             <a:extLst xmlns:a="http://schemas.openxmlformats.org/drawingml/2006/main">
               <a:ext uri="{FF2B5EF4-FFF2-40B4-BE49-F238E27FC236}">
-                <a16:creationId xmlns:a16="http://schemas.microsoft.com/office/drawing/2014/main" id="{6FB681CE-9804-4CA0-A02F-A269878682CC}"/>
+                <a16:creationId xmlns:a16="http://schemas.microsoft.com/office/drawing/2014/main" id="{417E6FD5-036E-44FC-87CB-F3824D5D471E}"/>
               </a:ext>
             </a:extLst>
           </p:cNvPr>
@@ -15578,7 +15578,7 @@
           <p:cNvPr id="33" name="">
             <a:extLst xmlns:a="http://schemas.openxmlformats.org/drawingml/2006/main">
               <a:ext uri="{FF2B5EF4-FFF2-40B4-BE49-F238E27FC236}">
-                <a16:creationId xmlns:a16="http://schemas.microsoft.com/office/drawing/2014/main" id="{8E826880-2248-4F01-A05F-3CDA2B05AB86}"/>
+                <a16:creationId xmlns:a16="http://schemas.microsoft.com/office/drawing/2014/main" id="{9B5BD373-A972-436B-A188-D9BF266E029A}"/>
               </a:ext>
             </a:extLst>
           </p:cNvPr>
@@ -15653,7 +15653,7 @@
           <p:cNvPr id="34" name="">
             <a:extLst xmlns:a="http://schemas.openxmlformats.org/drawingml/2006/main">
               <a:ext uri="{FF2B5EF4-FFF2-40B4-BE49-F238E27FC236}">
-                <a16:creationId xmlns:a16="http://schemas.microsoft.com/office/drawing/2014/main" id="{5677B733-B38A-42EE-8AEC-5351BF6DBA8A}"/>
+                <a16:creationId xmlns:a16="http://schemas.microsoft.com/office/drawing/2014/main" id="{CC42C6EB-950D-409E-9339-13FD07C3FD5B}"/>
               </a:ext>
             </a:extLst>
           </p:cNvPr>
@@ -15688,19 +15688,19 @@
           <p:cNvPr id="35" name="">
             <a:extLst xmlns:a="http://schemas.openxmlformats.org/drawingml/2006/main">
               <a:ext uri="{FF2B5EF4-FFF2-40B4-BE49-F238E27FC236}">
-                <a16:creationId xmlns:a16="http://schemas.microsoft.com/office/drawing/2014/main" id="{D0391B85-55DE-4CC9-8713-5B338018097A}"/>
-              </a:ext>
-            </a:extLst>
-          </p:cNvPr>
-          <p:cNvSpPr>
-            <a:spLocks xmlns:a="http://schemas.openxmlformats.org/drawingml/2006/main" noGrp="1"/>
-          </p:cNvSpPr>
-          <p:nvPr/>
-        </p:nvSpPr>
-        <p:spPr>
-          <a:xfrm xmlns:a="http://schemas.openxmlformats.org/drawingml/2006/main">
-            <a:off x="9563100" y="2724150"/>
-            <a:ext cx="66675" cy="1066800"/>
+                <a16:creationId xmlns:a16="http://schemas.microsoft.com/office/drawing/2014/main" id="{2A2F96BA-CB5F-409B-815A-D467377367C2}"/>
+              </a:ext>
+            </a:extLst>
+          </p:cNvPr>
+          <p:cNvSpPr>
+            <a:spLocks xmlns:a="http://schemas.openxmlformats.org/drawingml/2006/main" noGrp="1"/>
+          </p:cNvSpPr>
+          <p:nvPr/>
+        </p:nvSpPr>
+        <p:spPr>
+          <a:xfrm xmlns:a="http://schemas.openxmlformats.org/drawingml/2006/main">
+            <a:off x="9610725" y="2771775"/>
+            <a:ext cx="47625" cy="971550"/>
           </a:xfrm>
           <a:prstGeom xmlns:a="http://schemas.openxmlformats.org/drawingml/2006/main" prst="rect">
             <a:avLst/>
@@ -15723,7 +15723,7 @@
           <p:cNvPr id="36" name="">
             <a:extLst xmlns:a="http://schemas.openxmlformats.org/drawingml/2006/main">
               <a:ext uri="{FF2B5EF4-FFF2-40B4-BE49-F238E27FC236}">
-                <a16:creationId xmlns:a16="http://schemas.microsoft.com/office/drawing/2014/main" id="{99B2331E-CEFE-4796-9A3F-F438771D2E7A}"/>
+                <a16:creationId xmlns:a16="http://schemas.microsoft.com/office/drawing/2014/main" id="{39323A3A-6FDE-4013-AADB-A898DC845738}"/>
               </a:ext>
             </a:extLst>
           </p:cNvPr>
@@ -15777,7 +15777,7 @@
           <p:cNvPr id="37" name="">
             <a:extLst xmlns:a="http://schemas.openxmlformats.org/drawingml/2006/main">
               <a:ext uri="{FF2B5EF4-FFF2-40B4-BE49-F238E27FC236}">
-                <a16:creationId xmlns:a16="http://schemas.microsoft.com/office/drawing/2014/main" id="{45CB587F-A1FF-4439-885E-E2B9DDF72382}"/>
+                <a16:creationId xmlns:a16="http://schemas.microsoft.com/office/drawing/2014/main" id="{6B74E63E-E255-4CB0-A2C1-6D828D8F45F4}"/>
               </a:ext>
             </a:extLst>
           </p:cNvPr>
@@ -15835,7 +15835,7 @@
           <p:cNvPr id="38" name="">
             <a:extLst xmlns:a="http://schemas.openxmlformats.org/drawingml/2006/main">
               <a:ext uri="{FF2B5EF4-FFF2-40B4-BE49-F238E27FC236}">
-                <a16:creationId xmlns:a16="http://schemas.microsoft.com/office/drawing/2014/main" id="{182EC11D-5065-481B-B128-75EF6556211D}"/>
+                <a16:creationId xmlns:a16="http://schemas.microsoft.com/office/drawing/2014/main" id="{6EF32FAE-E80C-4C4F-8002-E82C242E4041}"/>
               </a:ext>
             </a:extLst>
           </p:cNvPr>
@@ -15893,7 +15893,7 @@
           <p:cNvPr id="39" name="">
             <a:extLst xmlns:a="http://schemas.openxmlformats.org/drawingml/2006/main">
               <a:ext uri="{FF2B5EF4-FFF2-40B4-BE49-F238E27FC236}">
-                <a16:creationId xmlns:a16="http://schemas.microsoft.com/office/drawing/2014/main" id="{DB230D65-EE16-4B5B-8AB4-FC7436D9D2D6}"/>
+                <a16:creationId xmlns:a16="http://schemas.microsoft.com/office/drawing/2014/main" id="{6C4D1EC4-75F1-418D-9EAB-F88460CAF0BC}"/>
               </a:ext>
             </a:extLst>
           </p:cNvPr>
@@ -15928,19 +15928,19 @@
           <p:cNvPr id="40" name="">
             <a:extLst xmlns:a="http://schemas.openxmlformats.org/drawingml/2006/main">
               <a:ext uri="{FF2B5EF4-FFF2-40B4-BE49-F238E27FC236}">
-                <a16:creationId xmlns:a16="http://schemas.microsoft.com/office/drawing/2014/main" id="{47496CB2-DD86-4A91-9AFC-233FF2B73948}"/>
-              </a:ext>
-            </a:extLst>
-          </p:cNvPr>
-          <p:cNvSpPr>
-            <a:spLocks xmlns:a="http://schemas.openxmlformats.org/drawingml/2006/main" noGrp="1"/>
-          </p:cNvSpPr>
-          <p:nvPr/>
-        </p:nvSpPr>
-        <p:spPr>
-          <a:xfrm xmlns:a="http://schemas.openxmlformats.org/drawingml/2006/main">
-            <a:off x="9467850" y="4476750"/>
-            <a:ext cx="66675" cy="1066800"/>
+                <a16:creationId xmlns:a16="http://schemas.microsoft.com/office/drawing/2014/main" id="{F0D2E7DC-CA1F-4D42-B8D9-7FDA4ACEB452}"/>
+              </a:ext>
+            </a:extLst>
+          </p:cNvPr>
+          <p:cNvSpPr>
+            <a:spLocks xmlns:a="http://schemas.openxmlformats.org/drawingml/2006/main" noGrp="1"/>
+          </p:cNvSpPr>
+          <p:nvPr/>
+        </p:nvSpPr>
+        <p:spPr>
+          <a:xfrm xmlns:a="http://schemas.openxmlformats.org/drawingml/2006/main">
+            <a:off x="9515475" y="4524375"/>
+            <a:ext cx="47625" cy="971550"/>
           </a:xfrm>
           <a:prstGeom xmlns:a="http://schemas.openxmlformats.org/drawingml/2006/main" prst="rect">
             <a:avLst/>
@@ -15963,7 +15963,7 @@
           <p:cNvPr id="41" name="">
             <a:extLst xmlns:a="http://schemas.openxmlformats.org/drawingml/2006/main">
               <a:ext uri="{FF2B5EF4-FFF2-40B4-BE49-F238E27FC236}">
-                <a16:creationId xmlns:a16="http://schemas.microsoft.com/office/drawing/2014/main" id="{D93CC876-AE7E-4C65-9431-8E309E9950FB}"/>
+                <a16:creationId xmlns:a16="http://schemas.microsoft.com/office/drawing/2014/main" id="{A8F10F98-8389-4462-95EE-E859C8C19DEF}"/>
               </a:ext>
             </a:extLst>
           </p:cNvPr>
@@ -16017,7 +16017,7 @@
           <p:cNvPr id="42" name="">
             <a:extLst xmlns:a="http://schemas.openxmlformats.org/drawingml/2006/main">
               <a:ext uri="{FF2B5EF4-FFF2-40B4-BE49-F238E27FC236}">
-                <a16:creationId xmlns:a16="http://schemas.microsoft.com/office/drawing/2014/main" id="{DC83CFD6-F44C-4F31-905C-D4382B7F6255}"/>
+                <a16:creationId xmlns:a16="http://schemas.microsoft.com/office/drawing/2014/main" id="{8A49CCD2-784F-4DBB-928D-A222249D184C}"/>
               </a:ext>
             </a:extLst>
           </p:cNvPr>
@@ -16075,7 +16075,7 @@
           <p:cNvPr id="43" name="">
             <a:extLst xmlns:a="http://schemas.openxmlformats.org/drawingml/2006/main">
               <a:ext uri="{FF2B5EF4-FFF2-40B4-BE49-F238E27FC236}">
-                <a16:creationId xmlns:a16="http://schemas.microsoft.com/office/drawing/2014/main" id="{42BB1039-7CF2-4AE3-82E1-6678E8691934}"/>
+                <a16:creationId xmlns:a16="http://schemas.microsoft.com/office/drawing/2014/main" id="{CD8B06D4-E75C-484E-B855-FE16F947C26B}"/>
               </a:ext>
             </a:extLst>
           </p:cNvPr>
@@ -16133,7 +16133,7 @@
           <p:cNvPr id="44" name="">
             <a:extLst xmlns:a="http://schemas.openxmlformats.org/drawingml/2006/main">
               <a:ext uri="{FF2B5EF4-FFF2-40B4-BE49-F238E27FC236}">
-                <a16:creationId xmlns:a16="http://schemas.microsoft.com/office/drawing/2014/main" id="{255306FD-0ED8-4081-ACEA-1259268CF73E}"/>
+                <a16:creationId xmlns:a16="http://schemas.microsoft.com/office/drawing/2014/main" id="{D4AEBA5C-386E-428E-9C58-3170D27BE2FA}"/>
               </a:ext>
             </a:extLst>
           </p:cNvPr>
@@ -16168,19 +16168,19 @@
           <p:cNvPr id="45" name="">
             <a:extLst xmlns:a="http://schemas.openxmlformats.org/drawingml/2006/main">
               <a:ext uri="{FF2B5EF4-FFF2-40B4-BE49-F238E27FC236}">
-                <a16:creationId xmlns:a16="http://schemas.microsoft.com/office/drawing/2014/main" id="{C7099966-8923-4424-A2C5-496BAF1D3C96}"/>
-              </a:ext>
-            </a:extLst>
-          </p:cNvPr>
-          <p:cNvSpPr>
-            <a:spLocks xmlns:a="http://schemas.openxmlformats.org/drawingml/2006/main" noGrp="1"/>
-          </p:cNvSpPr>
-          <p:nvPr/>
-        </p:nvSpPr>
-        <p:spPr>
-          <a:xfrm xmlns:a="http://schemas.openxmlformats.org/drawingml/2006/main">
-            <a:off x="7105650" y="4933950"/>
-            <a:ext cx="66675" cy="1066800"/>
+                <a16:creationId xmlns:a16="http://schemas.microsoft.com/office/drawing/2014/main" id="{A059F9F3-54DD-4532-B732-F00C2AD66F79}"/>
+              </a:ext>
+            </a:extLst>
+          </p:cNvPr>
+          <p:cNvSpPr>
+            <a:spLocks xmlns:a="http://schemas.openxmlformats.org/drawingml/2006/main" noGrp="1"/>
+          </p:cNvSpPr>
+          <p:nvPr/>
+        </p:nvSpPr>
+        <p:spPr>
+          <a:xfrm xmlns:a="http://schemas.openxmlformats.org/drawingml/2006/main">
+            <a:off x="7153275" y="4981575"/>
+            <a:ext cx="47625" cy="971550"/>
           </a:xfrm>
           <a:prstGeom xmlns:a="http://schemas.openxmlformats.org/drawingml/2006/main" prst="rect">
             <a:avLst/>
@@ -16203,7 +16203,7 @@
           <p:cNvPr id="46" name="">
             <a:extLst xmlns:a="http://schemas.openxmlformats.org/drawingml/2006/main">
               <a:ext uri="{FF2B5EF4-FFF2-40B4-BE49-F238E27FC236}">
-                <a16:creationId xmlns:a16="http://schemas.microsoft.com/office/drawing/2014/main" id="{7C785D6A-8EA6-4604-B01F-E34A389B06CE}"/>
+                <a16:creationId xmlns:a16="http://schemas.microsoft.com/office/drawing/2014/main" id="{FA9E4222-967C-4436-9ACD-CFC2C69B2116}"/>
               </a:ext>
             </a:extLst>
           </p:cNvPr>
@@ -16257,7 +16257,7 @@
           <p:cNvPr id="47" name="">
             <a:extLst xmlns:a="http://schemas.openxmlformats.org/drawingml/2006/main">
               <a:ext uri="{FF2B5EF4-FFF2-40B4-BE49-F238E27FC236}">
-                <a16:creationId xmlns:a16="http://schemas.microsoft.com/office/drawing/2014/main" id="{F1E8B33B-DF3C-41C1-B8AD-305F352FF289}"/>
+                <a16:creationId xmlns:a16="http://schemas.microsoft.com/office/drawing/2014/main" id="{2FB41341-0C97-4982-B076-11A0799C98F3}"/>
               </a:ext>
             </a:extLst>
           </p:cNvPr>
@@ -16315,7 +16315,7 @@
           <p:cNvPr id="48" name="">
             <a:extLst xmlns:a="http://schemas.openxmlformats.org/drawingml/2006/main">
               <a:ext uri="{FF2B5EF4-FFF2-40B4-BE49-F238E27FC236}">
-                <a16:creationId xmlns:a16="http://schemas.microsoft.com/office/drawing/2014/main" id="{E27FEE1D-84A2-4CEA-8F31-CA5B6FA56842}"/>
+                <a16:creationId xmlns:a16="http://schemas.microsoft.com/office/drawing/2014/main" id="{21291009-4293-4BB0-9CAB-12B7B3859CFB}"/>
               </a:ext>
             </a:extLst>
           </p:cNvPr>
@@ -16373,7 +16373,7 @@
           <p:cNvPr id="49" name="">
             <a:extLst xmlns:a="http://schemas.openxmlformats.org/drawingml/2006/main">
               <a:ext uri="{FF2B5EF4-FFF2-40B4-BE49-F238E27FC236}">
-                <a16:creationId xmlns:a16="http://schemas.microsoft.com/office/drawing/2014/main" id="{A5BFCF7E-04C6-4829-B73F-F419696747EA}"/>
+                <a16:creationId xmlns:a16="http://schemas.microsoft.com/office/drawing/2014/main" id="{77DC9F20-319E-467D-A701-3715410362C3}"/>
               </a:ext>
             </a:extLst>
           </p:cNvPr>
@@ -16408,19 +16408,19 @@
           <p:cNvPr id="50" name="">
             <a:extLst xmlns:a="http://schemas.openxmlformats.org/drawingml/2006/main">
               <a:ext uri="{FF2B5EF4-FFF2-40B4-BE49-F238E27FC236}">
-                <a16:creationId xmlns:a16="http://schemas.microsoft.com/office/drawing/2014/main" id="{DFE5ED10-58F9-4C5D-B6B6-B51C028EDCFA}"/>
-              </a:ext>
-            </a:extLst>
-          </p:cNvPr>
-          <p:cNvSpPr>
-            <a:spLocks xmlns:a="http://schemas.openxmlformats.org/drawingml/2006/main" noGrp="1"/>
-          </p:cNvSpPr>
-          <p:nvPr/>
-        </p:nvSpPr>
-        <p:spPr>
-          <a:xfrm xmlns:a="http://schemas.openxmlformats.org/drawingml/2006/main">
-            <a:off x="3276600" y="4953000"/>
-            <a:ext cx="66675" cy="1066800"/>
+                <a16:creationId xmlns:a16="http://schemas.microsoft.com/office/drawing/2014/main" id="{5850A301-5DFC-4154-BF1D-A8EFC83948D4}"/>
+              </a:ext>
+            </a:extLst>
+          </p:cNvPr>
+          <p:cNvSpPr>
+            <a:spLocks xmlns:a="http://schemas.openxmlformats.org/drawingml/2006/main" noGrp="1"/>
+          </p:cNvSpPr>
+          <p:nvPr/>
+        </p:nvSpPr>
+        <p:spPr>
+          <a:xfrm xmlns:a="http://schemas.openxmlformats.org/drawingml/2006/main">
+            <a:off x="3324225" y="5000625"/>
+            <a:ext cx="47625" cy="971550"/>
           </a:xfrm>
           <a:prstGeom xmlns:a="http://schemas.openxmlformats.org/drawingml/2006/main" prst="rect">
             <a:avLst/>
@@ -16443,7 +16443,7 @@
           <p:cNvPr id="51" name="">
             <a:extLst xmlns:a="http://schemas.openxmlformats.org/drawingml/2006/main">
               <a:ext uri="{FF2B5EF4-FFF2-40B4-BE49-F238E27FC236}">
-                <a16:creationId xmlns:a16="http://schemas.microsoft.com/office/drawing/2014/main" id="{84CC7349-15A4-4003-8DE5-46E325CFC923}"/>
+                <a16:creationId xmlns:a16="http://schemas.microsoft.com/office/drawing/2014/main" id="{D698420A-7D20-494D-A9D5-1AB179E9F82B}"/>
               </a:ext>
             </a:extLst>
           </p:cNvPr>
@@ -16497,7 +16497,7 @@
           <p:cNvPr id="52" name="">
             <a:extLst xmlns:a="http://schemas.openxmlformats.org/drawingml/2006/main">
               <a:ext uri="{FF2B5EF4-FFF2-40B4-BE49-F238E27FC236}">
-                <a16:creationId xmlns:a16="http://schemas.microsoft.com/office/drawing/2014/main" id="{67BD8205-8ADA-425C-97C8-91B5C06735D1}"/>
+                <a16:creationId xmlns:a16="http://schemas.microsoft.com/office/drawing/2014/main" id="{314E4C9B-755B-445A-949D-98201CBE5BDB}"/>
               </a:ext>
             </a:extLst>
           </p:cNvPr>
@@ -16555,7 +16555,7 @@
           <p:cNvPr id="53" name="">
             <a:extLst xmlns:a="http://schemas.openxmlformats.org/drawingml/2006/main">
               <a:ext uri="{FF2B5EF4-FFF2-40B4-BE49-F238E27FC236}">
-                <a16:creationId xmlns:a16="http://schemas.microsoft.com/office/drawing/2014/main" id="{BFC13015-75A0-4BF9-9003-8A35C8E61880}"/>
+                <a16:creationId xmlns:a16="http://schemas.microsoft.com/office/drawing/2014/main" id="{04A6D925-BD6A-4ECF-97FD-068ED51CF83E}"/>
               </a:ext>
             </a:extLst>
           </p:cNvPr>
@@ -16613,7 +16613,7 @@
           <p:cNvPr id="54" name="">
             <a:extLst xmlns:a="http://schemas.openxmlformats.org/drawingml/2006/main">
               <a:ext uri="{FF2B5EF4-FFF2-40B4-BE49-F238E27FC236}">
-                <a16:creationId xmlns:a16="http://schemas.microsoft.com/office/drawing/2014/main" id="{465C97E5-DA9D-4E18-BB5D-31E03144E7A7}"/>
+                <a16:creationId xmlns:a16="http://schemas.microsoft.com/office/drawing/2014/main" id="{2C87A010-9EC3-41B2-B9EC-9A399BBAE162}"/>
               </a:ext>
             </a:extLst>
           </p:cNvPr>
@@ -16648,19 +16648,19 @@
           <p:cNvPr id="55" name="">
             <a:extLst xmlns:a="http://schemas.openxmlformats.org/drawingml/2006/main">
               <a:ext uri="{FF2B5EF4-FFF2-40B4-BE49-F238E27FC236}">
-                <a16:creationId xmlns:a16="http://schemas.microsoft.com/office/drawing/2014/main" id="{414D2130-7AFE-4CFA-9546-5083DF75172D}"/>
-              </a:ext>
-            </a:extLst>
-          </p:cNvPr>
-          <p:cNvSpPr>
-            <a:spLocks xmlns:a="http://schemas.openxmlformats.org/drawingml/2006/main" noGrp="1"/>
-          </p:cNvSpPr>
-          <p:nvPr/>
-        </p:nvSpPr>
-        <p:spPr>
-          <a:xfrm xmlns:a="http://schemas.openxmlformats.org/drawingml/2006/main">
-            <a:off x="1047750" y="4095750"/>
-            <a:ext cx="66675" cy="1066800"/>
+                <a16:creationId xmlns:a16="http://schemas.microsoft.com/office/drawing/2014/main" id="{ADF1849F-7EC3-447B-B6D8-137F7FFE0B40}"/>
+              </a:ext>
+            </a:extLst>
+          </p:cNvPr>
+          <p:cNvSpPr>
+            <a:spLocks xmlns:a="http://schemas.openxmlformats.org/drawingml/2006/main" noGrp="1"/>
+          </p:cNvSpPr>
+          <p:nvPr/>
+        </p:nvSpPr>
+        <p:spPr>
+          <a:xfrm xmlns:a="http://schemas.openxmlformats.org/drawingml/2006/main">
+            <a:off x="1095375" y="4143375"/>
+            <a:ext cx="47625" cy="971550"/>
           </a:xfrm>
           <a:prstGeom xmlns:a="http://schemas.openxmlformats.org/drawingml/2006/main" prst="rect">
             <a:avLst/>
@@ -16683,7 +16683,7 @@
           <p:cNvPr id="56" name="">
             <a:extLst xmlns:a="http://schemas.openxmlformats.org/drawingml/2006/main">
               <a:ext uri="{FF2B5EF4-FFF2-40B4-BE49-F238E27FC236}">
-                <a16:creationId xmlns:a16="http://schemas.microsoft.com/office/drawing/2014/main" id="{3AA36332-3B18-48CD-A76A-54A8E307EF9B}"/>
+                <a16:creationId xmlns:a16="http://schemas.microsoft.com/office/drawing/2014/main" id="{388F35AE-5912-4916-8146-A2C29F9539B6}"/>
               </a:ext>
             </a:extLst>
           </p:cNvPr>
@@ -16737,7 +16737,7 @@
           <p:cNvPr id="57" name="">
             <a:extLst xmlns:a="http://schemas.openxmlformats.org/drawingml/2006/main">
               <a:ext uri="{FF2B5EF4-FFF2-40B4-BE49-F238E27FC236}">
-                <a16:creationId xmlns:a16="http://schemas.microsoft.com/office/drawing/2014/main" id="{57CD7D1B-E946-494F-A1B3-7A392BFF385E}"/>
+                <a16:creationId xmlns:a16="http://schemas.microsoft.com/office/drawing/2014/main" id="{24B83E07-2B1B-4747-A5C2-E0E321E27E26}"/>
               </a:ext>
             </a:extLst>
           </p:cNvPr>
@@ -16795,7 +16795,7 @@
           <p:cNvPr id="58" name="">
             <a:extLst xmlns:a="http://schemas.openxmlformats.org/drawingml/2006/main">
               <a:ext uri="{FF2B5EF4-FFF2-40B4-BE49-F238E27FC236}">
-                <a16:creationId xmlns:a16="http://schemas.microsoft.com/office/drawing/2014/main" id="{6463D982-6BB0-474C-8ACF-5C61DBF1E19F}"/>
+                <a16:creationId xmlns:a16="http://schemas.microsoft.com/office/drawing/2014/main" id="{6BD549E6-42B7-4C62-BCCF-6975A33D302E}"/>
               </a:ext>
             </a:extLst>
           </p:cNvPr>
@@ -16853,7 +16853,7 @@
           <p:cNvPr id="59" name="">
             <a:extLst xmlns:a="http://schemas.openxmlformats.org/drawingml/2006/main">
               <a:ext uri="{FF2B5EF4-FFF2-40B4-BE49-F238E27FC236}">
-                <a16:creationId xmlns:a16="http://schemas.microsoft.com/office/drawing/2014/main" id="{3D6EB891-C02C-4BE2-B7B9-A0A094E7DA3B}"/>
+                <a16:creationId xmlns:a16="http://schemas.microsoft.com/office/drawing/2014/main" id="{A6BE04CD-A395-4EB4-AED1-6767F532A174}"/>
               </a:ext>
             </a:extLst>
           </p:cNvPr>
@@ -16888,7 +16888,7 @@
           <p:cNvPr id="60" name="">
             <a:extLst xmlns:a="http://schemas.openxmlformats.org/drawingml/2006/main">
               <a:ext uri="{FF2B5EF4-FFF2-40B4-BE49-F238E27FC236}">
-                <a16:creationId xmlns:a16="http://schemas.microsoft.com/office/drawing/2014/main" id="{8530B424-3562-4C91-A694-BC432E979D76}"/>
+                <a16:creationId xmlns:a16="http://schemas.microsoft.com/office/drawing/2014/main" id="{3043DAC4-D41F-4860-A920-5A6468EC2752}"/>
               </a:ext>
             </a:extLst>
           </p:cNvPr>
@@ -16923,7 +16923,7 @@
           <p:cNvPr id="61" name="">
             <a:extLst xmlns:a="http://schemas.openxmlformats.org/drawingml/2006/main">
               <a:ext uri="{FF2B5EF4-FFF2-40B4-BE49-F238E27FC236}">
-                <a16:creationId xmlns:a16="http://schemas.microsoft.com/office/drawing/2014/main" id="{33C30191-E269-434F-A884-0DAE64E4F5EB}"/>
+                <a16:creationId xmlns:a16="http://schemas.microsoft.com/office/drawing/2014/main" id="{B114F453-1242-4CD7-B6AB-F0F708053757}"/>
               </a:ext>
             </a:extLst>
           </p:cNvPr>
@@ -16958,7 +16958,7 @@
           <p:cNvPr id="62" name="">
             <a:extLst xmlns:a="http://schemas.openxmlformats.org/drawingml/2006/main">
               <a:ext uri="{FF2B5EF4-FFF2-40B4-BE49-F238E27FC236}">
-                <a16:creationId xmlns:a16="http://schemas.microsoft.com/office/drawing/2014/main" id="{508B8957-11EA-4537-9835-DBD2FB2B56A6}"/>
+                <a16:creationId xmlns:a16="http://schemas.microsoft.com/office/drawing/2014/main" id="{AAF40435-E445-49C0-A3A6-9383C83A2475}"/>
               </a:ext>
             </a:extLst>
           </p:cNvPr>
@@ -16993,7 +16993,7 @@
           <p:cNvPr id="63" name="">
             <a:extLst xmlns:a="http://schemas.openxmlformats.org/drawingml/2006/main">
               <a:ext uri="{FF2B5EF4-FFF2-40B4-BE49-F238E27FC236}">
-                <a16:creationId xmlns:a16="http://schemas.microsoft.com/office/drawing/2014/main" id="{3DFEA9C3-6788-4458-9A4D-4489C0E1431A}"/>
+                <a16:creationId xmlns:a16="http://schemas.microsoft.com/office/drawing/2014/main" id="{3AD22275-6D2B-40CE-A383-80315E54ACE9}"/>
               </a:ext>
             </a:extLst>
           </p:cNvPr>
@@ -17028,7 +17028,7 @@
           <p:cNvPr id="64" name="">
             <a:extLst xmlns:a="http://schemas.openxmlformats.org/drawingml/2006/main">
               <a:ext uri="{FF2B5EF4-FFF2-40B4-BE49-F238E27FC236}">
-                <a16:creationId xmlns:a16="http://schemas.microsoft.com/office/drawing/2014/main" id="{FB16FB1B-A64D-4EE4-8776-C62AA3B0A20A}"/>
+                <a16:creationId xmlns:a16="http://schemas.microsoft.com/office/drawing/2014/main" id="{CA4DA60A-EE20-4092-9117-7106A4D9104E}"/>
               </a:ext>
             </a:extLst>
           </p:cNvPr>
@@ -17063,7 +17063,7 @@
           <p:cNvPr id="65" name="">
             <a:extLst xmlns:a="http://schemas.openxmlformats.org/drawingml/2006/main">
               <a:ext uri="{FF2B5EF4-FFF2-40B4-BE49-F238E27FC236}">
-                <a16:creationId xmlns:a16="http://schemas.microsoft.com/office/drawing/2014/main" id="{34AA7423-884A-4E82-8F48-728315B73125}"/>
+                <a16:creationId xmlns:a16="http://schemas.microsoft.com/office/drawing/2014/main" id="{1212DC02-437E-4352-8E87-B978D8281138}"/>
               </a:ext>
             </a:extLst>
           </p:cNvPr>
@@ -17098,7 +17098,7 @@
           <p:cNvPr id="66" name="">
             <a:extLst xmlns:a="http://schemas.openxmlformats.org/drawingml/2006/main">
               <a:ext uri="{FF2B5EF4-FFF2-40B4-BE49-F238E27FC236}">
-                <a16:creationId xmlns:a16="http://schemas.microsoft.com/office/drawing/2014/main" id="{53060813-A46C-4115-87A5-2BB6598F05C8}"/>
+                <a16:creationId xmlns:a16="http://schemas.microsoft.com/office/drawing/2014/main" id="{7765F66E-5AB3-4CF6-BA1A-182814942076}"/>
               </a:ext>
             </a:extLst>
           </p:cNvPr>
@@ -17133,7 +17133,7 @@
           <p:cNvPr id="67" name="">
             <a:extLst xmlns:a="http://schemas.openxmlformats.org/drawingml/2006/main">
               <a:ext uri="{FF2B5EF4-FFF2-40B4-BE49-F238E27FC236}">
-                <a16:creationId xmlns:a16="http://schemas.microsoft.com/office/drawing/2014/main" id="{CD62A36D-6DA6-4323-AF51-48CF931036F2}"/>
+                <a16:creationId xmlns:a16="http://schemas.microsoft.com/office/drawing/2014/main" id="{65E0B8D6-7FC9-440F-9E24-6CC6A1D8604B}"/>
               </a:ext>
             </a:extLst>
           </p:cNvPr>
@@ -17187,7 +17187,7 @@
           <p:cNvPr id="68" name="">
             <a:extLst xmlns:a="http://schemas.openxmlformats.org/drawingml/2006/main">
               <a:ext uri="{FF2B5EF4-FFF2-40B4-BE49-F238E27FC236}">
-                <a16:creationId xmlns:a16="http://schemas.microsoft.com/office/drawing/2014/main" id="{8E8A3962-09F5-4224-BC3D-433F4B653CFB}"/>
+                <a16:creationId xmlns:a16="http://schemas.microsoft.com/office/drawing/2014/main" id="{E3DBBE9B-50E8-430E-A12E-D46046E77169}"/>
               </a:ext>
             </a:extLst>
           </p:cNvPr>
@@ -17241,7 +17241,7 @@
           <p:cNvPr id="69" name="">
             <a:extLst xmlns:a="http://schemas.openxmlformats.org/drawingml/2006/main">
               <a:ext uri="{FF2B5EF4-FFF2-40B4-BE49-F238E27FC236}">
-                <a16:creationId xmlns:a16="http://schemas.microsoft.com/office/drawing/2014/main" id="{DBFA1CAF-8F99-43F2-893A-DC270CDC1F49}"/>
+                <a16:creationId xmlns:a16="http://schemas.microsoft.com/office/drawing/2014/main" id="{A55EBB1C-05E7-4C40-B7F9-147DBB9FA9B5}"/>
               </a:ext>
             </a:extLst>
           </p:cNvPr>
@@ -17295,7 +17295,7 @@
           <p:cNvPr id="70" name="">
             <a:extLst xmlns:a="http://schemas.openxmlformats.org/drawingml/2006/main">
               <a:ext uri="{FF2B5EF4-FFF2-40B4-BE49-F238E27FC236}">
-                <a16:creationId xmlns:a16="http://schemas.microsoft.com/office/drawing/2014/main" id="{83EE99B6-A8EC-457B-A497-68152A507DAE}"/>
+                <a16:creationId xmlns:a16="http://schemas.microsoft.com/office/drawing/2014/main" id="{6E787CA5-012E-4836-BB80-1F6496515F3B}"/>
               </a:ext>
             </a:extLst>
           </p:cNvPr>
@@ -17332,19 +17332,19 @@
           <p:cNvPr id="71" name="">
             <a:extLst xmlns:a="http://schemas.openxmlformats.org/drawingml/2006/main">
               <a:ext uri="{FF2B5EF4-FFF2-40B4-BE49-F238E27FC236}">
-                <a16:creationId xmlns:a16="http://schemas.microsoft.com/office/drawing/2014/main" id="{24F34D83-8E26-4615-BE75-FC177D078DD7}"/>
-              </a:ext>
-            </a:extLst>
-          </p:cNvPr>
-          <p:cNvSpPr>
-            <a:spLocks xmlns:a="http://schemas.openxmlformats.org/drawingml/2006/main" noGrp="1"/>
-          </p:cNvSpPr>
-          <p:nvPr/>
-        </p:nvSpPr>
-        <p:spPr>
-          <a:xfrm xmlns:a="http://schemas.openxmlformats.org/drawingml/2006/main">
-            <a:off x="6915150" y="5905500"/>
-            <a:ext cx="76200" cy="552450"/>
+                <a16:creationId xmlns:a16="http://schemas.microsoft.com/office/drawing/2014/main" id="{4740F9C1-1412-42A9-A253-A73C4FF189B1}"/>
+              </a:ext>
+            </a:extLst>
+          </p:cNvPr>
+          <p:cNvSpPr>
+            <a:spLocks xmlns:a="http://schemas.openxmlformats.org/drawingml/2006/main" noGrp="1"/>
+          </p:cNvSpPr>
+          <p:nvPr/>
+        </p:nvSpPr>
+        <p:spPr>
+          <a:xfrm xmlns:a="http://schemas.openxmlformats.org/drawingml/2006/main">
+            <a:off x="6962775" y="5953125"/>
+            <a:ext cx="57150" cy="457200"/>
           </a:xfrm>
           <a:prstGeom xmlns:a="http://schemas.openxmlformats.org/drawingml/2006/main" prst="rect">
             <a:avLst/>
@@ -17367,7 +17367,7 @@
           <p:cNvPr id="72" name="">
             <a:extLst xmlns:a="http://schemas.openxmlformats.org/drawingml/2006/main">
               <a:ext uri="{FF2B5EF4-FFF2-40B4-BE49-F238E27FC236}">
-                <a16:creationId xmlns:a16="http://schemas.microsoft.com/office/drawing/2014/main" id="{C0D0641D-C6FF-4107-B44C-ECEFCC6F4241}"/>
+                <a16:creationId xmlns:a16="http://schemas.microsoft.com/office/drawing/2014/main" id="{8F625846-7CEA-4B38-AD14-790917D88193}"/>
               </a:ext>
             </a:extLst>
           </p:cNvPr>
@@ -17425,7 +17425,7 @@
           <p:cNvPr id="73" name="">
             <a:extLst xmlns:a="http://schemas.openxmlformats.org/drawingml/2006/main">
               <a:ext uri="{FF2B5EF4-FFF2-40B4-BE49-F238E27FC236}">
-                <a16:creationId xmlns:a16="http://schemas.microsoft.com/office/drawing/2014/main" id="{E50C0194-12D4-4BE1-80E9-F555E4C2AB85}"/>
+                <a16:creationId xmlns:a16="http://schemas.microsoft.com/office/drawing/2014/main" id="{34D5919E-297F-46E8-8D38-4B3B8FD694D5}"/>
               </a:ext>
             </a:extLst>
           </p:cNvPr>
@@ -17481,7 +17481,7 @@
     </p:spTree>
     <p:extLst>
       <p:ext uri="{BB962C8B-B14F-4D97-AF65-F5344CB8AC3E}">
-        <p14:creationId xmlns:p14="http://schemas.microsoft.com/office/powerpoint/2010/main" val="1910036487"/>
+        <p14:creationId xmlns:p14="http://schemas.microsoft.com/office/powerpoint/2010/main" val="1685945174"/>
       </p:ext>
     </p:extLst>
   </p:cSld>
@@ -17512,7 +17512,7 @@
           <p:cNvPr id="1" name="Slide Number Placeholder 5">
             <a:extLst xmlns:a="http://schemas.openxmlformats.org/drawingml/2006/main">
               <a:ext uri="{FF2B5EF4-FFF2-40B4-BE49-F238E27FC236}">
-                <a16:creationId xmlns:a16="http://schemas.microsoft.com/office/drawing/2014/main" id="{960B6032-F217-4E1A-A5DD-55BD6786A62D}"/>
+                <a16:creationId xmlns:a16="http://schemas.microsoft.com/office/drawing/2014/main" id="{821508BF-91E3-4E78-84B3-DCBD229C8660}"/>
               </a:ext>
             </a:extLst>
           </p:cNvPr>
@@ -17548,7 +17548,7 @@
           <p:nvPr/>
         </p:nvPicPr>
         <p:blipFill>
-          <a:blip xmlns:r="http://schemas.openxmlformats.org/officeDocument/2006/relationships" xmlns:a="http://schemas.openxmlformats.org/drawingml/2006/main" r:embed="R00898658f32c42b0"/>
+          <a:blip xmlns:r="http://schemas.openxmlformats.org/officeDocument/2006/relationships" xmlns:a="http://schemas.openxmlformats.org/drawingml/2006/main" r:embed="R1846e2eaf49c4c4e"/>
           <a:srcRect xmlns:a="http://schemas.openxmlformats.org/drawingml/2006/main" l="0" t="21875" r="0" b="21875"/>
           <a:stretch xmlns:a="http://schemas.openxmlformats.org/drawingml/2006/main">
             <a:fillRect l="0" t="0" r="0" b="0"/>
@@ -17569,7 +17569,7 @@
           <p:cNvPr id="3" name="">
             <a:extLst xmlns:a="http://schemas.openxmlformats.org/drawingml/2006/main">
               <a:ext uri="{FF2B5EF4-FFF2-40B4-BE49-F238E27FC236}">
-                <a16:creationId xmlns:a16="http://schemas.microsoft.com/office/drawing/2014/main" id="{A964C79B-28EB-4C11-B463-8829D1DBC34F}"/>
+                <a16:creationId xmlns:a16="http://schemas.microsoft.com/office/drawing/2014/main" id="{8E8B2F91-0A97-41F5-805F-BF2501023068}"/>
               </a:ext>
             </a:extLst>
           </p:cNvPr>
@@ -17604,7 +17604,7 @@
           <p:cNvPr id="4" name="">
             <a:extLst xmlns:a="http://schemas.openxmlformats.org/drawingml/2006/main">
               <a:ext uri="{FF2B5EF4-FFF2-40B4-BE49-F238E27FC236}">
-                <a16:creationId xmlns:a16="http://schemas.microsoft.com/office/drawing/2014/main" id="{07BFF6FA-5924-4F20-8C1F-BA5EDEF6D1E6}"/>
+                <a16:creationId xmlns:a16="http://schemas.microsoft.com/office/drawing/2014/main" id="{ADB7D0D6-CFAB-4996-B9C3-07A7F611D0BB}"/>
               </a:ext>
             </a:extLst>
           </p:cNvPr>
@@ -17639,7 +17639,7 @@
           <p:cNvPr id="5" name="">
             <a:extLst xmlns:a="http://schemas.openxmlformats.org/drawingml/2006/main">
               <a:ext uri="{FF2B5EF4-FFF2-40B4-BE49-F238E27FC236}">
-                <a16:creationId xmlns:a16="http://schemas.microsoft.com/office/drawing/2014/main" id="{293A4111-3C9C-488E-A0D4-83BBE830F658}"/>
+                <a16:creationId xmlns:a16="http://schemas.microsoft.com/office/drawing/2014/main" id="{7BC7978E-E9FD-4F23-B812-39E037998672}"/>
               </a:ext>
             </a:extLst>
           </p:cNvPr>
@@ -17676,7 +17676,7 @@
           <p:cNvPr id="6" name="">
             <a:extLst xmlns:a="http://schemas.openxmlformats.org/drawingml/2006/main">
               <a:ext uri="{FF2B5EF4-FFF2-40B4-BE49-F238E27FC236}">
-                <a16:creationId xmlns:a16="http://schemas.microsoft.com/office/drawing/2014/main" id="{546DBB45-57A6-406E-AA1C-E3C333BEAB12}"/>
+                <a16:creationId xmlns:a16="http://schemas.microsoft.com/office/drawing/2014/main" id="{60AF29AB-F9A9-4E3D-9125-F635779A4BF0}"/>
               </a:ext>
             </a:extLst>
           </p:cNvPr>
@@ -17713,7 +17713,7 @@
           <p:cNvPr id="7" name="">
             <a:extLst xmlns:a="http://schemas.openxmlformats.org/drawingml/2006/main">
               <a:ext uri="{FF2B5EF4-FFF2-40B4-BE49-F238E27FC236}">
-                <a16:creationId xmlns:a16="http://schemas.microsoft.com/office/drawing/2014/main" id="{980F8583-31E5-43F3-9778-04F042276042}"/>
+                <a16:creationId xmlns:a16="http://schemas.microsoft.com/office/drawing/2014/main" id="{547DD3CA-450B-400D-9574-C07965E29768}"/>
               </a:ext>
             </a:extLst>
           </p:cNvPr>
@@ -17750,7 +17750,7 @@
           <p:cNvPr id="8" name="">
             <a:extLst xmlns:a="http://schemas.openxmlformats.org/drawingml/2006/main">
               <a:ext uri="{FF2B5EF4-FFF2-40B4-BE49-F238E27FC236}">
-                <a16:creationId xmlns:a16="http://schemas.microsoft.com/office/drawing/2014/main" id="{0C24EB52-922D-494E-B38D-072948A7AF95}"/>
+                <a16:creationId xmlns:a16="http://schemas.microsoft.com/office/drawing/2014/main" id="{D8B18764-EE6D-42B4-800A-370A2E5B9DD4}"/>
               </a:ext>
             </a:extLst>
           </p:cNvPr>
@@ -17787,7 +17787,7 @@
           <p:cNvPr id="9" name="">
             <a:extLst xmlns:a="http://schemas.openxmlformats.org/drawingml/2006/main">
               <a:ext uri="{FF2B5EF4-FFF2-40B4-BE49-F238E27FC236}">
-                <a16:creationId xmlns:a16="http://schemas.microsoft.com/office/drawing/2014/main" id="{5D6D9024-34CE-4182-9D69-5530115D01B0}"/>
+                <a16:creationId xmlns:a16="http://schemas.microsoft.com/office/drawing/2014/main" id="{EA6CF537-0232-4E2E-BEAC-587F276201D9}"/>
               </a:ext>
             </a:extLst>
           </p:cNvPr>
@@ -17845,7 +17845,7 @@
           <p:cNvPr id="10" name="">
             <a:extLst xmlns:a="http://schemas.openxmlformats.org/drawingml/2006/main">
               <a:ext uri="{FF2B5EF4-FFF2-40B4-BE49-F238E27FC236}">
-                <a16:creationId xmlns:a16="http://schemas.microsoft.com/office/drawing/2014/main" id="{65E0DA6A-7322-4884-9CCF-894453891616}"/>
+                <a16:creationId xmlns:a16="http://schemas.microsoft.com/office/drawing/2014/main" id="{7D641C38-48A6-4AF8-A619-89CD14E42E53}"/>
               </a:ext>
             </a:extLst>
           </p:cNvPr>
@@ -17903,7 +17903,7 @@
           <p:cNvPr id="11" name="">
             <a:extLst xmlns:a="http://schemas.openxmlformats.org/drawingml/2006/main">
               <a:ext uri="{FF2B5EF4-FFF2-40B4-BE49-F238E27FC236}">
-                <a16:creationId xmlns:a16="http://schemas.microsoft.com/office/drawing/2014/main" id="{9751DD0B-37B9-474E-B574-931CAC82E21C}"/>
+                <a16:creationId xmlns:a16="http://schemas.microsoft.com/office/drawing/2014/main" id="{7426FD63-CD0E-4039-AAF9-34280F67D50B}"/>
               </a:ext>
             </a:extLst>
           </p:cNvPr>
@@ -17938,7 +17938,7 @@
           <p:cNvPr id="12" name="">
             <a:extLst xmlns:a="http://schemas.openxmlformats.org/drawingml/2006/main">
               <a:ext uri="{FF2B5EF4-FFF2-40B4-BE49-F238E27FC236}">
-                <a16:creationId xmlns:a16="http://schemas.microsoft.com/office/drawing/2014/main" id="{AAF6DAFD-94A0-42D1-A7E7-18D4B5236A9C}"/>
+                <a16:creationId xmlns:a16="http://schemas.microsoft.com/office/drawing/2014/main" id="{BB03BA19-F47B-46FD-A3A3-5FEACF84B068}"/>
               </a:ext>
             </a:extLst>
           </p:cNvPr>
@@ -17971,7 +17971,7 @@
           <p:cNvPr id="13" name="">
             <a:extLst xmlns:a="http://schemas.openxmlformats.org/drawingml/2006/main">
               <a:ext uri="{FF2B5EF4-FFF2-40B4-BE49-F238E27FC236}">
-                <a16:creationId xmlns:a16="http://schemas.microsoft.com/office/drawing/2014/main" id="{463A3720-DEFF-4980-8C59-B0A0050D52CA}"/>
+                <a16:creationId xmlns:a16="http://schemas.microsoft.com/office/drawing/2014/main" id="{18EE5782-F268-45A9-9970-33A68B7B7D5F}"/>
               </a:ext>
             </a:extLst>
           </p:cNvPr>
@@ -18029,7 +18029,7 @@
           <p:cNvPr id="14" name="">
             <a:extLst xmlns:a="http://schemas.openxmlformats.org/drawingml/2006/main">
               <a:ext uri="{FF2B5EF4-FFF2-40B4-BE49-F238E27FC236}">
-                <a16:creationId xmlns:a16="http://schemas.microsoft.com/office/drawing/2014/main" id="{79FDDFFB-1D40-4BB3-B613-A7C4739B79D3}"/>
+                <a16:creationId xmlns:a16="http://schemas.microsoft.com/office/drawing/2014/main" id="{7F4B6C0E-8DAB-47AD-BF06-8CB515C7EFBA}"/>
               </a:ext>
             </a:extLst>
           </p:cNvPr>
@@ -18066,19 +18066,19 @@
           <p:cNvPr id="15" name="">
             <a:extLst xmlns:a="http://schemas.openxmlformats.org/drawingml/2006/main">
               <a:ext uri="{FF2B5EF4-FFF2-40B4-BE49-F238E27FC236}">
-                <a16:creationId xmlns:a16="http://schemas.microsoft.com/office/drawing/2014/main" id="{7C1664E2-D1A6-4B46-9B2C-39B0FB06CB5A}"/>
-              </a:ext>
-            </a:extLst>
-          </p:cNvPr>
-          <p:cNvSpPr>
-            <a:spLocks xmlns:a="http://schemas.openxmlformats.org/drawingml/2006/main" noGrp="1"/>
-          </p:cNvSpPr>
-          <p:nvPr/>
-        </p:nvSpPr>
-        <p:spPr>
-          <a:xfrm xmlns:a="http://schemas.openxmlformats.org/drawingml/2006/main">
-            <a:off x="742950" y="2209800"/>
-            <a:ext cx="3314700" cy="76200"/>
+                <a16:creationId xmlns:a16="http://schemas.microsoft.com/office/drawing/2014/main" id="{43B6F928-F8CC-455C-9BFE-69F51A913508}"/>
+              </a:ext>
+            </a:extLst>
+          </p:cNvPr>
+          <p:cNvSpPr>
+            <a:spLocks xmlns:a="http://schemas.openxmlformats.org/drawingml/2006/main" noGrp="1"/>
+          </p:cNvSpPr>
+          <p:nvPr/>
+        </p:nvSpPr>
+        <p:spPr>
+          <a:xfrm xmlns:a="http://schemas.openxmlformats.org/drawingml/2006/main">
+            <a:off x="800100" y="2266950"/>
+            <a:ext cx="3200400" cy="57150"/>
           </a:xfrm>
           <a:prstGeom xmlns:a="http://schemas.openxmlformats.org/drawingml/2006/main" prst="rect">
             <a:avLst/>
@@ -18101,7 +18101,7 @@
           <p:cNvPr id="16" name="">
             <a:extLst xmlns:a="http://schemas.openxmlformats.org/drawingml/2006/main">
               <a:ext uri="{FF2B5EF4-FFF2-40B4-BE49-F238E27FC236}">
-                <a16:creationId xmlns:a16="http://schemas.microsoft.com/office/drawing/2014/main" id="{8D08C849-4F50-4EBE-88BA-DEF80F18D3B3}"/>
+                <a16:creationId xmlns:a16="http://schemas.microsoft.com/office/drawing/2014/main" id="{FA2088E7-4A37-4032-8673-2CF84EC59295}"/>
               </a:ext>
             </a:extLst>
           </p:cNvPr>
@@ -18159,7 +18159,7 @@
           <p:cNvPr id="17" name="">
             <a:extLst xmlns:a="http://schemas.openxmlformats.org/drawingml/2006/main">
               <a:ext uri="{FF2B5EF4-FFF2-40B4-BE49-F238E27FC236}">
-                <a16:creationId xmlns:a16="http://schemas.microsoft.com/office/drawing/2014/main" id="{FF1CF18D-EFEF-46D1-B0B6-2F9A45D3A9A5}"/>
+                <a16:creationId xmlns:a16="http://schemas.microsoft.com/office/drawing/2014/main" id="{5B7CBC81-DE08-4660-921D-1534A4F73745}"/>
               </a:ext>
             </a:extLst>
           </p:cNvPr>
@@ -18285,7 +18285,7 @@
           <p:cNvPr id="18" name="">
             <a:extLst xmlns:a="http://schemas.openxmlformats.org/drawingml/2006/main">
               <a:ext uri="{FF2B5EF4-FFF2-40B4-BE49-F238E27FC236}">
-                <a16:creationId xmlns:a16="http://schemas.microsoft.com/office/drawing/2014/main" id="{0B2CBA24-9D3A-4F62-85C7-43ABBFFD0310}"/>
+                <a16:creationId xmlns:a16="http://schemas.microsoft.com/office/drawing/2014/main" id="{5B69BED1-45BE-4A1F-A5FC-FAEF26D55C4B}"/>
               </a:ext>
             </a:extLst>
           </p:cNvPr>
@@ -18322,19 +18322,19 @@
           <p:cNvPr id="19" name="">
             <a:extLst xmlns:a="http://schemas.openxmlformats.org/drawingml/2006/main">
               <a:ext uri="{FF2B5EF4-FFF2-40B4-BE49-F238E27FC236}">
-                <a16:creationId xmlns:a16="http://schemas.microsoft.com/office/drawing/2014/main" id="{7CE4A45E-105C-47AC-BE31-A3A88558159B}"/>
-              </a:ext>
-            </a:extLst>
-          </p:cNvPr>
-          <p:cNvSpPr>
-            <a:spLocks xmlns:a="http://schemas.openxmlformats.org/drawingml/2006/main" noGrp="1"/>
-          </p:cNvSpPr>
-          <p:nvPr/>
-        </p:nvSpPr>
-        <p:spPr>
-          <a:xfrm xmlns:a="http://schemas.openxmlformats.org/drawingml/2006/main">
-            <a:off x="4438650" y="2209800"/>
-            <a:ext cx="3314700" cy="76200"/>
+                <a16:creationId xmlns:a16="http://schemas.microsoft.com/office/drawing/2014/main" id="{A3115452-4459-444F-A20B-416D293C192B}"/>
+              </a:ext>
+            </a:extLst>
+          </p:cNvPr>
+          <p:cNvSpPr>
+            <a:spLocks xmlns:a="http://schemas.openxmlformats.org/drawingml/2006/main" noGrp="1"/>
+          </p:cNvSpPr>
+          <p:nvPr/>
+        </p:nvSpPr>
+        <p:spPr>
+          <a:xfrm xmlns:a="http://schemas.openxmlformats.org/drawingml/2006/main">
+            <a:off x="4495800" y="2266950"/>
+            <a:ext cx="3200400" cy="57150"/>
           </a:xfrm>
           <a:prstGeom xmlns:a="http://schemas.openxmlformats.org/drawingml/2006/main" prst="rect">
             <a:avLst/>
@@ -18357,7 +18357,7 @@
           <p:cNvPr id="20" name="">
             <a:extLst xmlns:a="http://schemas.openxmlformats.org/drawingml/2006/main">
               <a:ext uri="{FF2B5EF4-FFF2-40B4-BE49-F238E27FC236}">
-                <a16:creationId xmlns:a16="http://schemas.microsoft.com/office/drawing/2014/main" id="{97497732-AFB4-4B24-8555-9A8BA7E69157}"/>
+                <a16:creationId xmlns:a16="http://schemas.microsoft.com/office/drawing/2014/main" id="{07C3DBE1-A5DF-4CAD-AB22-D4DF622057E8}"/>
               </a:ext>
             </a:extLst>
           </p:cNvPr>
@@ -18415,7 +18415,7 @@
           <p:cNvPr id="21" name="">
             <a:extLst xmlns:a="http://schemas.openxmlformats.org/drawingml/2006/main">
               <a:ext uri="{FF2B5EF4-FFF2-40B4-BE49-F238E27FC236}">
-                <a16:creationId xmlns:a16="http://schemas.microsoft.com/office/drawing/2014/main" id="{AA5B1627-DF42-40DE-B6E8-F8CA86654882}"/>
+                <a16:creationId xmlns:a16="http://schemas.microsoft.com/office/drawing/2014/main" id="{2712609C-DC14-41E6-8F1E-26CCC800DE51}"/>
               </a:ext>
             </a:extLst>
           </p:cNvPr>
@@ -18541,7 +18541,7 @@
           <p:cNvPr id="22" name="">
             <a:extLst xmlns:a="http://schemas.openxmlformats.org/drawingml/2006/main">
               <a:ext uri="{FF2B5EF4-FFF2-40B4-BE49-F238E27FC236}">
-                <a16:creationId xmlns:a16="http://schemas.microsoft.com/office/drawing/2014/main" id="{E39D8A4D-6AD1-4992-A05D-0C34FC2B0D6A}"/>
+                <a16:creationId xmlns:a16="http://schemas.microsoft.com/office/drawing/2014/main" id="{2A94D741-3E82-41CA-8EC0-5BF608AC3860}"/>
               </a:ext>
             </a:extLst>
           </p:cNvPr>
@@ -18578,19 +18578,19 @@
           <p:cNvPr id="23" name="">
             <a:extLst xmlns:a="http://schemas.openxmlformats.org/drawingml/2006/main">
               <a:ext uri="{FF2B5EF4-FFF2-40B4-BE49-F238E27FC236}">
-                <a16:creationId xmlns:a16="http://schemas.microsoft.com/office/drawing/2014/main" id="{A6011B1A-6D2A-4B88-8B39-2A708A994928}"/>
-              </a:ext>
-            </a:extLst>
-          </p:cNvPr>
-          <p:cNvSpPr>
-            <a:spLocks xmlns:a="http://schemas.openxmlformats.org/drawingml/2006/main" noGrp="1"/>
-          </p:cNvSpPr>
-          <p:nvPr/>
-        </p:nvSpPr>
-        <p:spPr>
-          <a:xfrm xmlns:a="http://schemas.openxmlformats.org/drawingml/2006/main">
-            <a:off x="8134350" y="2209800"/>
-            <a:ext cx="3314700" cy="76200"/>
+                <a16:creationId xmlns:a16="http://schemas.microsoft.com/office/drawing/2014/main" id="{AC0F53A9-EBE0-472E-82E2-6E0AE6E1853B}"/>
+              </a:ext>
+            </a:extLst>
+          </p:cNvPr>
+          <p:cNvSpPr>
+            <a:spLocks xmlns:a="http://schemas.openxmlformats.org/drawingml/2006/main" noGrp="1"/>
+          </p:cNvSpPr>
+          <p:nvPr/>
+        </p:nvSpPr>
+        <p:spPr>
+          <a:xfrm xmlns:a="http://schemas.openxmlformats.org/drawingml/2006/main">
+            <a:off x="8191500" y="2266950"/>
+            <a:ext cx="3200400" cy="57150"/>
           </a:xfrm>
           <a:prstGeom xmlns:a="http://schemas.openxmlformats.org/drawingml/2006/main" prst="rect">
             <a:avLst/>
@@ -18613,7 +18613,7 @@
           <p:cNvPr id="24" name="">
             <a:extLst xmlns:a="http://schemas.openxmlformats.org/drawingml/2006/main">
               <a:ext uri="{FF2B5EF4-FFF2-40B4-BE49-F238E27FC236}">
-                <a16:creationId xmlns:a16="http://schemas.microsoft.com/office/drawing/2014/main" id="{3BC1295B-80F4-4CCE-A993-BFAAE681BDDC}"/>
+                <a16:creationId xmlns:a16="http://schemas.microsoft.com/office/drawing/2014/main" id="{D40D890F-2B0B-4A65-92C1-1EA808827DC8}"/>
               </a:ext>
             </a:extLst>
           </p:cNvPr>
@@ -18671,7 +18671,7 @@
           <p:cNvPr id="25" name="">
             <a:extLst xmlns:a="http://schemas.openxmlformats.org/drawingml/2006/main">
               <a:ext uri="{FF2B5EF4-FFF2-40B4-BE49-F238E27FC236}">
-                <a16:creationId xmlns:a16="http://schemas.microsoft.com/office/drawing/2014/main" id="{E85E39D4-24BA-4598-B29D-F2DC908D7EF0}"/>
+                <a16:creationId xmlns:a16="http://schemas.microsoft.com/office/drawing/2014/main" id="{00CD57F8-5288-4D48-ADAE-1447E8940FAA}"/>
               </a:ext>
             </a:extLst>
           </p:cNvPr>
@@ -18814,7 +18814,7 @@
           <p:cNvPr id="26" name="">
             <a:extLst xmlns:a="http://schemas.openxmlformats.org/drawingml/2006/main">
               <a:ext uri="{FF2B5EF4-FFF2-40B4-BE49-F238E27FC236}">
-                <a16:creationId xmlns:a16="http://schemas.microsoft.com/office/drawing/2014/main" id="{3DC97F70-929D-4590-A01D-85D28A3079CA}"/>
+                <a16:creationId xmlns:a16="http://schemas.microsoft.com/office/drawing/2014/main" id="{90E35C17-C3D6-4F2B-A9B0-355F633901D7}"/>
               </a:ext>
             </a:extLst>
           </p:cNvPr>
@@ -18849,19 +18849,19 @@
           <p:cNvPr id="27" name="">
             <a:extLst xmlns:a="http://schemas.openxmlformats.org/drawingml/2006/main">
               <a:ext uri="{FF2B5EF4-FFF2-40B4-BE49-F238E27FC236}">
-                <a16:creationId xmlns:a16="http://schemas.microsoft.com/office/drawing/2014/main" id="{225E5458-A892-4E56-ACAE-10594BAABE09}"/>
-              </a:ext>
-            </a:extLst>
-          </p:cNvPr>
-          <p:cNvSpPr>
-            <a:spLocks xmlns:a="http://schemas.openxmlformats.org/drawingml/2006/main" noGrp="1"/>
-          </p:cNvSpPr>
-          <p:nvPr/>
-        </p:nvSpPr>
-        <p:spPr>
-          <a:xfrm xmlns:a="http://schemas.openxmlformats.org/drawingml/2006/main">
-            <a:off x="857250" y="5353050"/>
-            <a:ext cx="76200" cy="704850"/>
+                <a16:creationId xmlns:a16="http://schemas.microsoft.com/office/drawing/2014/main" id="{D96A606E-451E-4A17-A737-B7D24BB69406}"/>
+              </a:ext>
+            </a:extLst>
+          </p:cNvPr>
+          <p:cNvSpPr>
+            <a:spLocks xmlns:a="http://schemas.openxmlformats.org/drawingml/2006/main" noGrp="1"/>
+          </p:cNvSpPr>
+          <p:nvPr/>
+        </p:nvSpPr>
+        <p:spPr>
+          <a:xfrm xmlns:a="http://schemas.openxmlformats.org/drawingml/2006/main">
+            <a:off x="904875" y="5400675"/>
+            <a:ext cx="57150" cy="609600"/>
           </a:xfrm>
           <a:prstGeom xmlns:a="http://schemas.openxmlformats.org/drawingml/2006/main" prst="rect">
             <a:avLst/>
@@ -18884,7 +18884,7 @@
           <p:cNvPr id="28" name="">
             <a:extLst xmlns:a="http://schemas.openxmlformats.org/drawingml/2006/main">
               <a:ext uri="{FF2B5EF4-FFF2-40B4-BE49-F238E27FC236}">
-                <a16:creationId xmlns:a16="http://schemas.microsoft.com/office/drawing/2014/main" id="{6B6C4965-0299-4339-BB34-FE8BAC5936C0}"/>
+                <a16:creationId xmlns:a16="http://schemas.microsoft.com/office/drawing/2014/main" id="{801239D8-F7B3-4F38-8E23-0C3F2D489E3B}"/>
               </a:ext>
             </a:extLst>
           </p:cNvPr>
@@ -18942,7 +18942,7 @@
           <p:cNvPr id="29" name="">
             <a:extLst xmlns:a="http://schemas.openxmlformats.org/drawingml/2006/main">
               <a:ext uri="{FF2B5EF4-FFF2-40B4-BE49-F238E27FC236}">
-                <a16:creationId xmlns:a16="http://schemas.microsoft.com/office/drawing/2014/main" id="{63AF5F92-D140-4F33-90A0-9CA043995CF8}"/>
+                <a16:creationId xmlns:a16="http://schemas.microsoft.com/office/drawing/2014/main" id="{A37A00D7-2FAE-46A3-8125-504BC3ED1D25}"/>
               </a:ext>
             </a:extLst>
           </p:cNvPr>
@@ -18998,7 +18998,7 @@
     </p:spTree>
     <p:extLst>
       <p:ext uri="{BB962C8B-B14F-4D97-AF65-F5344CB8AC3E}">
-        <p14:creationId xmlns:p14="http://schemas.microsoft.com/office/powerpoint/2010/main" val="1764280472"/>
+        <p14:creationId xmlns:p14="http://schemas.microsoft.com/office/powerpoint/2010/main" val="2006811059"/>
       </p:ext>
     </p:extLst>
   </p:cSld>
@@ -19029,7 +19029,7 @@
           <p:cNvPr id="1" name="Slide Number Placeholder 5">
             <a:extLst xmlns:a="http://schemas.openxmlformats.org/drawingml/2006/main">
               <a:ext uri="{FF2B5EF4-FFF2-40B4-BE49-F238E27FC236}">
-                <a16:creationId xmlns:a16="http://schemas.microsoft.com/office/drawing/2014/main" id="{960B6032-F217-4E1A-A5DD-55BD6786A62D}"/>
+                <a16:creationId xmlns:a16="http://schemas.microsoft.com/office/drawing/2014/main" id="{821508BF-91E3-4E78-84B3-DCBD229C8660}"/>
               </a:ext>
             </a:extLst>
           </p:cNvPr>
@@ -19065,7 +19065,7 @@
           <p:nvPr/>
         </p:nvPicPr>
         <p:blipFill>
-          <a:blip xmlns:r="http://schemas.openxmlformats.org/officeDocument/2006/relationships" xmlns:a="http://schemas.openxmlformats.org/drawingml/2006/main" r:embed="R92a295a7cf1e4004"/>
+          <a:blip xmlns:r="http://schemas.openxmlformats.org/officeDocument/2006/relationships" xmlns:a="http://schemas.openxmlformats.org/drawingml/2006/main" r:embed="R82533a4f1c0742c2"/>
           <a:srcRect xmlns:a="http://schemas.openxmlformats.org/drawingml/2006/main" l="0" t="21875" r="0" b="21875"/>
           <a:stretch xmlns:a="http://schemas.openxmlformats.org/drawingml/2006/main">
             <a:fillRect l="0" t="0" r="0" b="0"/>
@@ -19086,7 +19086,7 @@
           <p:cNvPr id="3" name="">
             <a:extLst xmlns:a="http://schemas.openxmlformats.org/drawingml/2006/main">
               <a:ext uri="{FF2B5EF4-FFF2-40B4-BE49-F238E27FC236}">
-                <a16:creationId xmlns:a16="http://schemas.microsoft.com/office/drawing/2014/main" id="{7437ECB0-377E-4D5F-9D4C-CAA53CE31D5F}"/>
+                <a16:creationId xmlns:a16="http://schemas.microsoft.com/office/drawing/2014/main" id="{8997A331-F7ED-4F55-A35B-A9CC14428B75}"/>
               </a:ext>
             </a:extLst>
           </p:cNvPr>
@@ -19121,7 +19121,7 @@
           <p:cNvPr id="4" name="">
             <a:extLst xmlns:a="http://schemas.openxmlformats.org/drawingml/2006/main">
               <a:ext uri="{FF2B5EF4-FFF2-40B4-BE49-F238E27FC236}">
-                <a16:creationId xmlns:a16="http://schemas.microsoft.com/office/drawing/2014/main" id="{3799903C-1FD9-4FB8-8DBC-70549F79201A}"/>
+                <a16:creationId xmlns:a16="http://schemas.microsoft.com/office/drawing/2014/main" id="{8ED04F50-4404-47E5-95DE-CC44977F8E72}"/>
               </a:ext>
             </a:extLst>
           </p:cNvPr>
@@ -19156,7 +19156,7 @@
           <p:cNvPr id="5" name="">
             <a:extLst xmlns:a="http://schemas.openxmlformats.org/drawingml/2006/main">
               <a:ext uri="{FF2B5EF4-FFF2-40B4-BE49-F238E27FC236}">
-                <a16:creationId xmlns:a16="http://schemas.microsoft.com/office/drawing/2014/main" id="{BBDF354D-3DCB-469F-BEAD-16542CAD037B}"/>
+                <a16:creationId xmlns:a16="http://schemas.microsoft.com/office/drawing/2014/main" id="{609235C7-C023-4F41-B119-389DC4DEC11D}"/>
               </a:ext>
             </a:extLst>
           </p:cNvPr>
@@ -19193,7 +19193,7 @@
           <p:cNvPr id="6" name="">
             <a:extLst xmlns:a="http://schemas.openxmlformats.org/drawingml/2006/main">
               <a:ext uri="{FF2B5EF4-FFF2-40B4-BE49-F238E27FC236}">
-                <a16:creationId xmlns:a16="http://schemas.microsoft.com/office/drawing/2014/main" id="{73E5D6A3-EAFD-4532-B71B-0C3B92666CF8}"/>
+                <a16:creationId xmlns:a16="http://schemas.microsoft.com/office/drawing/2014/main" id="{44541279-6D7C-4F2B-8903-F84CAC14F883}"/>
               </a:ext>
             </a:extLst>
           </p:cNvPr>
@@ -19230,7 +19230,7 @@
           <p:cNvPr id="7" name="">
             <a:extLst xmlns:a="http://schemas.openxmlformats.org/drawingml/2006/main">
               <a:ext uri="{FF2B5EF4-FFF2-40B4-BE49-F238E27FC236}">
-                <a16:creationId xmlns:a16="http://schemas.microsoft.com/office/drawing/2014/main" id="{E257723C-303C-44E8-9CC0-28D8E4BA011F}"/>
+                <a16:creationId xmlns:a16="http://schemas.microsoft.com/office/drawing/2014/main" id="{06ADBAF5-431F-45C3-8A77-62ACF922E183}"/>
               </a:ext>
             </a:extLst>
           </p:cNvPr>
@@ -19267,7 +19267,7 @@
           <p:cNvPr id="8" name="">
             <a:extLst xmlns:a="http://schemas.openxmlformats.org/drawingml/2006/main">
               <a:ext uri="{FF2B5EF4-FFF2-40B4-BE49-F238E27FC236}">
-                <a16:creationId xmlns:a16="http://schemas.microsoft.com/office/drawing/2014/main" id="{25DB5E96-21A0-4AA8-825D-85340154165F}"/>
+                <a16:creationId xmlns:a16="http://schemas.microsoft.com/office/drawing/2014/main" id="{00DCFE12-7D1B-4CAB-AC64-2F6DDBD8F72E}"/>
               </a:ext>
             </a:extLst>
           </p:cNvPr>
@@ -19304,7 +19304,7 @@
           <p:cNvPr id="9" name="">
             <a:extLst xmlns:a="http://schemas.openxmlformats.org/drawingml/2006/main">
               <a:ext uri="{FF2B5EF4-FFF2-40B4-BE49-F238E27FC236}">
-                <a16:creationId xmlns:a16="http://schemas.microsoft.com/office/drawing/2014/main" id="{D79B0084-AD7C-4F27-BD5D-A0749F543F1A}"/>
+                <a16:creationId xmlns:a16="http://schemas.microsoft.com/office/drawing/2014/main" id="{FDE5B5FB-6AA6-410D-BEB0-96491A9E0316}"/>
               </a:ext>
             </a:extLst>
           </p:cNvPr>
@@ -19362,7 +19362,7 @@
           <p:cNvPr id="10" name="">
             <a:extLst xmlns:a="http://schemas.openxmlformats.org/drawingml/2006/main">
               <a:ext uri="{FF2B5EF4-FFF2-40B4-BE49-F238E27FC236}">
-                <a16:creationId xmlns:a16="http://schemas.microsoft.com/office/drawing/2014/main" id="{F14FDBC4-10C4-420E-83D7-B8C42C994B1E}"/>
+                <a16:creationId xmlns:a16="http://schemas.microsoft.com/office/drawing/2014/main" id="{8B3A45E3-47EF-44CD-A025-83101D9B3789}"/>
               </a:ext>
             </a:extLst>
           </p:cNvPr>
@@ -19420,7 +19420,7 @@
           <p:cNvPr id="11" name="">
             <a:extLst xmlns:a="http://schemas.openxmlformats.org/drawingml/2006/main">
               <a:ext uri="{FF2B5EF4-FFF2-40B4-BE49-F238E27FC236}">
-                <a16:creationId xmlns:a16="http://schemas.microsoft.com/office/drawing/2014/main" id="{945FB7ED-C3D4-4871-AFB7-F38EB9DE8BFD}"/>
+                <a16:creationId xmlns:a16="http://schemas.microsoft.com/office/drawing/2014/main" id="{BE10A77D-6EEA-41ED-BE02-788B9A2E2235}"/>
               </a:ext>
             </a:extLst>
           </p:cNvPr>
@@ -19455,7 +19455,7 @@
           <p:cNvPr id="12" name="">
             <a:extLst xmlns:a="http://schemas.openxmlformats.org/drawingml/2006/main">
               <a:ext uri="{FF2B5EF4-FFF2-40B4-BE49-F238E27FC236}">
-                <a16:creationId xmlns:a16="http://schemas.microsoft.com/office/drawing/2014/main" id="{7CC946FE-F56E-4672-B12A-C6D55D3AC741}"/>
+                <a16:creationId xmlns:a16="http://schemas.microsoft.com/office/drawing/2014/main" id="{DB38882A-FE28-49A8-9646-44656EE1E4EE}"/>
               </a:ext>
             </a:extLst>
           </p:cNvPr>
@@ -19488,7 +19488,7 @@
           <p:cNvPr id="13" name="">
             <a:extLst xmlns:a="http://schemas.openxmlformats.org/drawingml/2006/main">
               <a:ext uri="{FF2B5EF4-FFF2-40B4-BE49-F238E27FC236}">
-                <a16:creationId xmlns:a16="http://schemas.microsoft.com/office/drawing/2014/main" id="{D1A982F2-7BCF-4072-A4D6-26BD90C7D6E3}"/>
+                <a16:creationId xmlns:a16="http://schemas.microsoft.com/office/drawing/2014/main" id="{0EF8F0E9-3A68-4BC5-AEB6-24F53118CE22}"/>
               </a:ext>
             </a:extLst>
           </p:cNvPr>
@@ -19546,7 +19546,7 @@
           <p:cNvPr id="14" name="">
             <a:extLst xmlns:a="http://schemas.openxmlformats.org/drawingml/2006/main">
               <a:ext uri="{FF2B5EF4-FFF2-40B4-BE49-F238E27FC236}">
-                <a16:creationId xmlns:a16="http://schemas.microsoft.com/office/drawing/2014/main" id="{BD0C08B5-34FC-4F60-A4FB-CBF7AFB3F826}"/>
+                <a16:creationId xmlns:a16="http://schemas.microsoft.com/office/drawing/2014/main" id="{8FD983C7-D0FC-42C4-B3F7-67C2541F0D88}"/>
               </a:ext>
             </a:extLst>
           </p:cNvPr>
@@ -19581,19 +19581,19 @@
           <p:cNvPr id="15" name="">
             <a:extLst xmlns:a="http://schemas.openxmlformats.org/drawingml/2006/main">
               <a:ext uri="{FF2B5EF4-FFF2-40B4-BE49-F238E27FC236}">
-                <a16:creationId xmlns:a16="http://schemas.microsoft.com/office/drawing/2014/main" id="{E2A9D9E1-5EC8-4AD5-8C31-0D91B4F34567}"/>
-              </a:ext>
-            </a:extLst>
-          </p:cNvPr>
-          <p:cNvSpPr>
-            <a:spLocks xmlns:a="http://schemas.openxmlformats.org/drawingml/2006/main" noGrp="1"/>
-          </p:cNvSpPr>
-          <p:nvPr/>
-        </p:nvSpPr>
-        <p:spPr>
-          <a:xfrm xmlns:a="http://schemas.openxmlformats.org/drawingml/2006/main">
-            <a:off x="800100" y="2133600"/>
-            <a:ext cx="76200" cy="971550"/>
+                <a16:creationId xmlns:a16="http://schemas.microsoft.com/office/drawing/2014/main" id="{DCA1B17A-EFFE-414C-B98D-8EF6DF6B0779}"/>
+              </a:ext>
+            </a:extLst>
+          </p:cNvPr>
+          <p:cNvSpPr>
+            <a:spLocks xmlns:a="http://schemas.openxmlformats.org/drawingml/2006/main" noGrp="1"/>
+          </p:cNvSpPr>
+          <p:nvPr/>
+        </p:nvSpPr>
+        <p:spPr>
+          <a:xfrm xmlns:a="http://schemas.openxmlformats.org/drawingml/2006/main">
+            <a:off x="847725" y="2181225"/>
+            <a:ext cx="57150" cy="876300"/>
           </a:xfrm>
           <a:prstGeom xmlns:a="http://schemas.openxmlformats.org/drawingml/2006/main" prst="rect">
             <a:avLst/>
@@ -19616,7 +19616,7 @@
           <p:cNvPr id="16" name="">
             <a:extLst xmlns:a="http://schemas.openxmlformats.org/drawingml/2006/main">
               <a:ext uri="{FF2B5EF4-FFF2-40B4-BE49-F238E27FC236}">
-                <a16:creationId xmlns:a16="http://schemas.microsoft.com/office/drawing/2014/main" id="{3AC94F09-FA96-4100-8B40-8FFE601195CA}"/>
+                <a16:creationId xmlns:a16="http://schemas.microsoft.com/office/drawing/2014/main" id="{615C837C-B2B9-4E4F-A0EF-23A5D9698947}"/>
               </a:ext>
             </a:extLst>
           </p:cNvPr>
@@ -19674,7 +19674,7 @@
           <p:cNvPr id="17" name="">
             <a:extLst xmlns:a="http://schemas.openxmlformats.org/drawingml/2006/main">
               <a:ext uri="{FF2B5EF4-FFF2-40B4-BE49-F238E27FC236}">
-                <a16:creationId xmlns:a16="http://schemas.microsoft.com/office/drawing/2014/main" id="{144474F9-B7BC-40C0-B2D0-59146CAB7EC8}"/>
+                <a16:creationId xmlns:a16="http://schemas.microsoft.com/office/drawing/2014/main" id="{3346162E-BA06-4608-957C-B13FCBA7606D}"/>
               </a:ext>
             </a:extLst>
           </p:cNvPr>
@@ -19711,19 +19711,19 @@
           <p:cNvPr id="18" name="">
             <a:extLst xmlns:a="http://schemas.openxmlformats.org/drawingml/2006/main">
               <a:ext uri="{FF2B5EF4-FFF2-40B4-BE49-F238E27FC236}">
-                <a16:creationId xmlns:a16="http://schemas.microsoft.com/office/drawing/2014/main" id="{93EAEB98-01C1-4FE0-A2B0-52EC4B117CED}"/>
-              </a:ext>
-            </a:extLst>
-          </p:cNvPr>
-          <p:cNvSpPr>
-            <a:spLocks xmlns:a="http://schemas.openxmlformats.org/drawingml/2006/main" noGrp="1"/>
-          </p:cNvSpPr>
-          <p:nvPr/>
-        </p:nvSpPr>
-        <p:spPr>
-          <a:xfrm xmlns:a="http://schemas.openxmlformats.org/drawingml/2006/main">
-            <a:off x="800100" y="3638550"/>
-            <a:ext cx="3143250" cy="76200"/>
+                <a16:creationId xmlns:a16="http://schemas.microsoft.com/office/drawing/2014/main" id="{063A13F6-ACD5-4E0C-A0D1-55FAAC755BC5}"/>
+              </a:ext>
+            </a:extLst>
+          </p:cNvPr>
+          <p:cNvSpPr>
+            <a:spLocks xmlns:a="http://schemas.openxmlformats.org/drawingml/2006/main" noGrp="1"/>
+          </p:cNvSpPr>
+          <p:nvPr/>
+        </p:nvSpPr>
+        <p:spPr>
+          <a:xfrm xmlns:a="http://schemas.openxmlformats.org/drawingml/2006/main">
+            <a:off x="857250" y="3695700"/>
+            <a:ext cx="3028950" cy="57150"/>
           </a:xfrm>
           <a:prstGeom xmlns:a="http://schemas.openxmlformats.org/drawingml/2006/main" prst="rect">
             <a:avLst/>
@@ -19746,7 +19746,7 @@
           <p:cNvPr id="19" name="">
             <a:extLst xmlns:a="http://schemas.openxmlformats.org/drawingml/2006/main">
               <a:ext uri="{FF2B5EF4-FFF2-40B4-BE49-F238E27FC236}">
-                <a16:creationId xmlns:a16="http://schemas.microsoft.com/office/drawing/2014/main" id="{3D856F37-8100-4FD4-9EB6-B3E92780B603}"/>
+                <a16:creationId xmlns:a16="http://schemas.microsoft.com/office/drawing/2014/main" id="{4A944755-D49D-4066-8A23-1AB64517E3DD}"/>
               </a:ext>
             </a:extLst>
           </p:cNvPr>
@@ -19804,7 +19804,7 @@
           <p:cNvPr id="20" name="">
             <a:extLst xmlns:a="http://schemas.openxmlformats.org/drawingml/2006/main">
               <a:ext uri="{FF2B5EF4-FFF2-40B4-BE49-F238E27FC236}">
-                <a16:creationId xmlns:a16="http://schemas.microsoft.com/office/drawing/2014/main" id="{979D01B7-06EA-490B-8EBE-C4F1A6752A67}"/>
+                <a16:creationId xmlns:a16="http://schemas.microsoft.com/office/drawing/2014/main" id="{98A303C6-C7FC-4ED9-95BF-E6F7A054BD33}"/>
               </a:ext>
             </a:extLst>
           </p:cNvPr>
@@ -19896,7 +19896,7 @@
           <p:cNvPr id="21" name="">
             <a:extLst xmlns:a="http://schemas.openxmlformats.org/drawingml/2006/main">
               <a:ext uri="{FF2B5EF4-FFF2-40B4-BE49-F238E27FC236}">
-                <a16:creationId xmlns:a16="http://schemas.microsoft.com/office/drawing/2014/main" id="{5602BB10-E443-42C8-8F65-ED4AF3BCD364}"/>
+                <a16:creationId xmlns:a16="http://schemas.microsoft.com/office/drawing/2014/main" id="{7EF83724-1653-47C0-9612-FF9FE2B769E3}"/>
               </a:ext>
             </a:extLst>
           </p:cNvPr>
@@ -19933,19 +19933,19 @@
           <p:cNvPr id="22" name="">
             <a:extLst xmlns:a="http://schemas.openxmlformats.org/drawingml/2006/main">
               <a:ext uri="{FF2B5EF4-FFF2-40B4-BE49-F238E27FC236}">
-                <a16:creationId xmlns:a16="http://schemas.microsoft.com/office/drawing/2014/main" id="{9AB6F014-7214-4CF2-A805-B769C180DCBE}"/>
-              </a:ext>
-            </a:extLst>
-          </p:cNvPr>
-          <p:cNvSpPr>
-            <a:spLocks xmlns:a="http://schemas.openxmlformats.org/drawingml/2006/main" noGrp="1"/>
-          </p:cNvSpPr>
-          <p:nvPr/>
-        </p:nvSpPr>
-        <p:spPr>
-          <a:xfrm xmlns:a="http://schemas.openxmlformats.org/drawingml/2006/main">
-            <a:off x="4514850" y="3638550"/>
-            <a:ext cx="3143250" cy="76200"/>
+                <a16:creationId xmlns:a16="http://schemas.microsoft.com/office/drawing/2014/main" id="{B1DFE731-8A47-4C83-80F4-E59F486D67EB}"/>
+              </a:ext>
+            </a:extLst>
+          </p:cNvPr>
+          <p:cNvSpPr>
+            <a:spLocks xmlns:a="http://schemas.openxmlformats.org/drawingml/2006/main" noGrp="1"/>
+          </p:cNvSpPr>
+          <p:nvPr/>
+        </p:nvSpPr>
+        <p:spPr>
+          <a:xfrm xmlns:a="http://schemas.openxmlformats.org/drawingml/2006/main">
+            <a:off x="4572000" y="3695700"/>
+            <a:ext cx="3028950" cy="57150"/>
           </a:xfrm>
           <a:prstGeom xmlns:a="http://schemas.openxmlformats.org/drawingml/2006/main" prst="rect">
             <a:avLst/>
@@ -19968,7 +19968,7 @@
           <p:cNvPr id="23" name="">
             <a:extLst xmlns:a="http://schemas.openxmlformats.org/drawingml/2006/main">
               <a:ext uri="{FF2B5EF4-FFF2-40B4-BE49-F238E27FC236}">
-                <a16:creationId xmlns:a16="http://schemas.microsoft.com/office/drawing/2014/main" id="{7B4E071A-2435-48B3-93BF-1DEFA153F26A}"/>
+                <a16:creationId xmlns:a16="http://schemas.microsoft.com/office/drawing/2014/main" id="{4EDFFA91-93D2-43B1-A587-7456D938887C}"/>
               </a:ext>
             </a:extLst>
           </p:cNvPr>
@@ -20026,7 +20026,7 @@
           <p:cNvPr id="24" name="">
             <a:extLst xmlns:a="http://schemas.openxmlformats.org/drawingml/2006/main">
               <a:ext uri="{FF2B5EF4-FFF2-40B4-BE49-F238E27FC236}">
-                <a16:creationId xmlns:a16="http://schemas.microsoft.com/office/drawing/2014/main" id="{FDA55EE3-D0C0-4B16-AE51-4DBBA0D9E6B0}"/>
+                <a16:creationId xmlns:a16="http://schemas.microsoft.com/office/drawing/2014/main" id="{3872002D-7B5A-4196-90A9-5000119B7566}"/>
               </a:ext>
             </a:extLst>
           </p:cNvPr>
@@ -20118,7 +20118,7 @@
           <p:cNvPr id="25" name="">
             <a:extLst xmlns:a="http://schemas.openxmlformats.org/drawingml/2006/main">
               <a:ext uri="{FF2B5EF4-FFF2-40B4-BE49-F238E27FC236}">
-                <a16:creationId xmlns:a16="http://schemas.microsoft.com/office/drawing/2014/main" id="{8AC0DABD-AFCB-4F22-85DB-6EF1E56FD641}"/>
+                <a16:creationId xmlns:a16="http://schemas.microsoft.com/office/drawing/2014/main" id="{B7104D2D-8C1B-4C7E-B693-EA77CF95D692}"/>
               </a:ext>
             </a:extLst>
           </p:cNvPr>
@@ -20155,19 +20155,19 @@
           <p:cNvPr id="26" name="">
             <a:extLst xmlns:a="http://schemas.openxmlformats.org/drawingml/2006/main">
               <a:ext uri="{FF2B5EF4-FFF2-40B4-BE49-F238E27FC236}">
-                <a16:creationId xmlns:a16="http://schemas.microsoft.com/office/drawing/2014/main" id="{4B1A3E64-9D48-4585-936E-C4212CBD4A46}"/>
-              </a:ext>
-            </a:extLst>
-          </p:cNvPr>
-          <p:cNvSpPr>
-            <a:spLocks xmlns:a="http://schemas.openxmlformats.org/drawingml/2006/main" noGrp="1"/>
-          </p:cNvSpPr>
-          <p:nvPr/>
-        </p:nvSpPr>
-        <p:spPr>
-          <a:xfrm xmlns:a="http://schemas.openxmlformats.org/drawingml/2006/main">
-            <a:off x="8229600" y="3638550"/>
-            <a:ext cx="3143250" cy="76200"/>
+                <a16:creationId xmlns:a16="http://schemas.microsoft.com/office/drawing/2014/main" id="{9EFE221E-6209-49EC-973E-04C323B874C5}"/>
+              </a:ext>
+            </a:extLst>
+          </p:cNvPr>
+          <p:cNvSpPr>
+            <a:spLocks xmlns:a="http://schemas.openxmlformats.org/drawingml/2006/main" noGrp="1"/>
+          </p:cNvSpPr>
+          <p:nvPr/>
+        </p:nvSpPr>
+        <p:spPr>
+          <a:xfrm xmlns:a="http://schemas.openxmlformats.org/drawingml/2006/main">
+            <a:off x="8286750" y="3695700"/>
+            <a:ext cx="3028950" cy="57150"/>
           </a:xfrm>
           <a:prstGeom xmlns:a="http://schemas.openxmlformats.org/drawingml/2006/main" prst="rect">
             <a:avLst/>
@@ -20190,7 +20190,7 @@
           <p:cNvPr id="27" name="">
             <a:extLst xmlns:a="http://schemas.openxmlformats.org/drawingml/2006/main">
               <a:ext uri="{FF2B5EF4-FFF2-40B4-BE49-F238E27FC236}">
-                <a16:creationId xmlns:a16="http://schemas.microsoft.com/office/drawing/2014/main" id="{88E77A21-DBF1-4DE8-AC96-7485A04087B8}"/>
+                <a16:creationId xmlns:a16="http://schemas.microsoft.com/office/drawing/2014/main" id="{1406D03C-D7B6-4F91-8747-51245C4973E2}"/>
               </a:ext>
             </a:extLst>
           </p:cNvPr>
@@ -20248,7 +20248,7 @@
           <p:cNvPr id="28" name="">
             <a:extLst xmlns:a="http://schemas.openxmlformats.org/drawingml/2006/main">
               <a:ext uri="{FF2B5EF4-FFF2-40B4-BE49-F238E27FC236}">
-                <a16:creationId xmlns:a16="http://schemas.microsoft.com/office/drawing/2014/main" id="{9DDBC69B-ADFE-4B68-81D3-E1060EDDC162}"/>
+                <a16:creationId xmlns:a16="http://schemas.microsoft.com/office/drawing/2014/main" id="{1654B727-8023-486F-AA16-23C70DE9AC6A}"/>
               </a:ext>
             </a:extLst>
           </p:cNvPr>
@@ -20340,7 +20340,7 @@
           <p:cNvPr id="29" name="">
             <a:extLst xmlns:a="http://schemas.openxmlformats.org/drawingml/2006/main">
               <a:ext uri="{FF2B5EF4-FFF2-40B4-BE49-F238E27FC236}">
-                <a16:creationId xmlns:a16="http://schemas.microsoft.com/office/drawing/2014/main" id="{879EA4A0-89F4-4251-8EC1-1D620004135C}"/>
+                <a16:creationId xmlns:a16="http://schemas.microsoft.com/office/drawing/2014/main" id="{D4A5B8CC-7F65-4B95-A604-254A469BF05D}"/>
               </a:ext>
             </a:extLst>
           </p:cNvPr>
@@ -20394,7 +20394,7 @@
           <p:cNvPr id="30" name="">
             <a:extLst xmlns:a="http://schemas.openxmlformats.org/drawingml/2006/main">
               <a:ext uri="{FF2B5EF4-FFF2-40B4-BE49-F238E27FC236}">
-                <a16:creationId xmlns:a16="http://schemas.microsoft.com/office/drawing/2014/main" id="{4B4D0BCA-00C1-49A8-9896-FFD01BAD5364}"/>
+                <a16:creationId xmlns:a16="http://schemas.microsoft.com/office/drawing/2014/main" id="{CB2E9EF9-9914-4BA7-B1D9-A949C756AB9D}"/>
               </a:ext>
             </a:extLst>
           </p:cNvPr>
@@ -20450,7 +20450,7 @@
     </p:spTree>
     <p:extLst>
       <p:ext uri="{BB962C8B-B14F-4D97-AF65-F5344CB8AC3E}">
-        <p14:creationId xmlns:p14="http://schemas.microsoft.com/office/powerpoint/2010/main" val="1817249768"/>
+        <p14:creationId xmlns:p14="http://schemas.microsoft.com/office/powerpoint/2010/main" val="2047330770"/>
       </p:ext>
     </p:extLst>
   </p:cSld>
@@ -20481,7 +20481,7 @@
           <p:cNvPr id="1" name="Slide Number Placeholder 5">
             <a:extLst xmlns:a="http://schemas.openxmlformats.org/drawingml/2006/main">
               <a:ext uri="{FF2B5EF4-FFF2-40B4-BE49-F238E27FC236}">
-                <a16:creationId xmlns:a16="http://schemas.microsoft.com/office/drawing/2014/main" id="{960B6032-F217-4E1A-A5DD-55BD6786A62D}"/>
+                <a16:creationId xmlns:a16="http://schemas.microsoft.com/office/drawing/2014/main" id="{821508BF-91E3-4E78-84B3-DCBD229C8660}"/>
               </a:ext>
             </a:extLst>
           </p:cNvPr>
@@ -20517,7 +20517,7 @@
           <p:nvPr/>
         </p:nvPicPr>
         <p:blipFill>
-          <a:blip xmlns:r="http://schemas.openxmlformats.org/officeDocument/2006/relationships" xmlns:a="http://schemas.openxmlformats.org/drawingml/2006/main" r:embed="Rf87c8d21b2574782"/>
+          <a:blip xmlns:r="http://schemas.openxmlformats.org/officeDocument/2006/relationships" xmlns:a="http://schemas.openxmlformats.org/drawingml/2006/main" r:embed="R9e066834ffc94efc"/>
           <a:srcRect xmlns:a="http://schemas.openxmlformats.org/drawingml/2006/main" l="0" t="21875" r="0" b="21875"/>
           <a:stretch xmlns:a="http://schemas.openxmlformats.org/drawingml/2006/main">
             <a:fillRect l="0" t="0" r="0" b="0"/>
@@ -20538,7 +20538,7 @@
           <p:cNvPr id="3" name="">
             <a:extLst xmlns:a="http://schemas.openxmlformats.org/drawingml/2006/main">
               <a:ext uri="{FF2B5EF4-FFF2-40B4-BE49-F238E27FC236}">
-                <a16:creationId xmlns:a16="http://schemas.microsoft.com/office/drawing/2014/main" id="{7B7CC3DF-3975-45F5-8A71-624927BABF62}"/>
+                <a16:creationId xmlns:a16="http://schemas.microsoft.com/office/drawing/2014/main" id="{125A3700-8D23-4725-98B9-C96681BD15A3}"/>
               </a:ext>
             </a:extLst>
           </p:cNvPr>
@@ -20573,7 +20573,7 @@
           <p:cNvPr id="4" name="">
             <a:extLst xmlns:a="http://schemas.openxmlformats.org/drawingml/2006/main">
               <a:ext uri="{FF2B5EF4-FFF2-40B4-BE49-F238E27FC236}">
-                <a16:creationId xmlns:a16="http://schemas.microsoft.com/office/drawing/2014/main" id="{CFF2400E-5711-49BB-989E-E6E1363A760D}"/>
+                <a16:creationId xmlns:a16="http://schemas.microsoft.com/office/drawing/2014/main" id="{224B2E21-8F80-4BC9-A239-2CF5BD16F193}"/>
               </a:ext>
             </a:extLst>
           </p:cNvPr>
@@ -20608,7 +20608,7 @@
           <p:cNvPr id="5" name="">
             <a:extLst xmlns:a="http://schemas.openxmlformats.org/drawingml/2006/main">
               <a:ext uri="{FF2B5EF4-FFF2-40B4-BE49-F238E27FC236}">
-                <a16:creationId xmlns:a16="http://schemas.microsoft.com/office/drawing/2014/main" id="{114C5466-717D-4D53-B936-A2316A35B62D}"/>
+                <a16:creationId xmlns:a16="http://schemas.microsoft.com/office/drawing/2014/main" id="{684AF2C6-4CE5-4A5D-A061-1AA7BB428AD0}"/>
               </a:ext>
             </a:extLst>
           </p:cNvPr>
@@ -20645,7 +20645,7 @@
           <p:cNvPr id="6" name="">
             <a:extLst xmlns:a="http://schemas.openxmlformats.org/drawingml/2006/main">
               <a:ext uri="{FF2B5EF4-FFF2-40B4-BE49-F238E27FC236}">
-                <a16:creationId xmlns:a16="http://schemas.microsoft.com/office/drawing/2014/main" id="{811DE3CE-E0F7-4555-B05C-D1D842E73237}"/>
+                <a16:creationId xmlns:a16="http://schemas.microsoft.com/office/drawing/2014/main" id="{64D5D436-E8CF-4849-A808-A4D257D02A9D}"/>
               </a:ext>
             </a:extLst>
           </p:cNvPr>
@@ -20682,7 +20682,7 @@
           <p:cNvPr id="7" name="">
             <a:extLst xmlns:a="http://schemas.openxmlformats.org/drawingml/2006/main">
               <a:ext uri="{FF2B5EF4-FFF2-40B4-BE49-F238E27FC236}">
-                <a16:creationId xmlns:a16="http://schemas.microsoft.com/office/drawing/2014/main" id="{27599490-AA32-4EB7-98D4-CEA1FA92DF13}"/>
+                <a16:creationId xmlns:a16="http://schemas.microsoft.com/office/drawing/2014/main" id="{F8B64131-BFA0-4122-9713-129778394C43}"/>
               </a:ext>
             </a:extLst>
           </p:cNvPr>
@@ -20719,7 +20719,7 @@
           <p:cNvPr id="8" name="">
             <a:extLst xmlns:a="http://schemas.openxmlformats.org/drawingml/2006/main">
               <a:ext uri="{FF2B5EF4-FFF2-40B4-BE49-F238E27FC236}">
-                <a16:creationId xmlns:a16="http://schemas.microsoft.com/office/drawing/2014/main" id="{1B32CEB4-8E42-42AA-A65C-050DF6A4E6E0}"/>
+                <a16:creationId xmlns:a16="http://schemas.microsoft.com/office/drawing/2014/main" id="{2D5285CC-06B5-4316-AA9F-5A947EB587CE}"/>
               </a:ext>
             </a:extLst>
           </p:cNvPr>
@@ -20756,7 +20756,7 @@
           <p:cNvPr id="9" name="">
             <a:extLst xmlns:a="http://schemas.openxmlformats.org/drawingml/2006/main">
               <a:ext uri="{FF2B5EF4-FFF2-40B4-BE49-F238E27FC236}">
-                <a16:creationId xmlns:a16="http://schemas.microsoft.com/office/drawing/2014/main" id="{05683BC1-EA67-428D-BD64-BFC1AD4E95C6}"/>
+                <a16:creationId xmlns:a16="http://schemas.microsoft.com/office/drawing/2014/main" id="{A5863B54-1A56-4C05-AEBF-01EE4E378028}"/>
               </a:ext>
             </a:extLst>
           </p:cNvPr>
@@ -20814,7 +20814,7 @@
           <p:cNvPr id="10" name="">
             <a:extLst xmlns:a="http://schemas.openxmlformats.org/drawingml/2006/main">
               <a:ext uri="{FF2B5EF4-FFF2-40B4-BE49-F238E27FC236}">
-                <a16:creationId xmlns:a16="http://schemas.microsoft.com/office/drawing/2014/main" id="{5E4641B8-3A88-4C25-AD69-62007BAA44C9}"/>
+                <a16:creationId xmlns:a16="http://schemas.microsoft.com/office/drawing/2014/main" id="{DA268A0B-6C12-4EFE-816A-4D23F2F87777}"/>
               </a:ext>
             </a:extLst>
           </p:cNvPr>
@@ -20872,7 +20872,7 @@
           <p:cNvPr id="11" name="">
             <a:extLst xmlns:a="http://schemas.openxmlformats.org/drawingml/2006/main">
               <a:ext uri="{FF2B5EF4-FFF2-40B4-BE49-F238E27FC236}">
-                <a16:creationId xmlns:a16="http://schemas.microsoft.com/office/drawing/2014/main" id="{C76314B7-9621-4D19-BE08-C56367F1BA89}"/>
+                <a16:creationId xmlns:a16="http://schemas.microsoft.com/office/drawing/2014/main" id="{C010A9C3-A85D-4BAB-9D17-E0174B0980A9}"/>
               </a:ext>
             </a:extLst>
           </p:cNvPr>
@@ -20907,7 +20907,7 @@
           <p:cNvPr id="12" name="">
             <a:extLst xmlns:a="http://schemas.openxmlformats.org/drawingml/2006/main">
               <a:ext uri="{FF2B5EF4-FFF2-40B4-BE49-F238E27FC236}">
-                <a16:creationId xmlns:a16="http://schemas.microsoft.com/office/drawing/2014/main" id="{5B25BBF1-7AD0-41DC-BB01-96B124D4FF02}"/>
+                <a16:creationId xmlns:a16="http://schemas.microsoft.com/office/drawing/2014/main" id="{2EAF8926-03C7-4DDE-BA05-F25CA4B4BA0A}"/>
               </a:ext>
             </a:extLst>
           </p:cNvPr>
@@ -20940,7 +20940,7 @@
           <p:cNvPr id="13" name="">
             <a:extLst xmlns:a="http://schemas.openxmlformats.org/drawingml/2006/main">
               <a:ext uri="{FF2B5EF4-FFF2-40B4-BE49-F238E27FC236}">
-                <a16:creationId xmlns:a16="http://schemas.microsoft.com/office/drawing/2014/main" id="{1EEA67FC-A7D7-4826-B3F2-E802EC869CF7}"/>
+                <a16:creationId xmlns:a16="http://schemas.microsoft.com/office/drawing/2014/main" id="{99585C38-B1A4-4EBE-83E1-DF5BAE988906}"/>
               </a:ext>
             </a:extLst>
           </p:cNvPr>
@@ -21015,7 +21015,7 @@
           <p:cNvPr id="14" name="">
             <a:extLst xmlns:a="http://schemas.openxmlformats.org/drawingml/2006/main">
               <a:ext uri="{FF2B5EF4-FFF2-40B4-BE49-F238E27FC236}">
-                <a16:creationId xmlns:a16="http://schemas.microsoft.com/office/drawing/2014/main" id="{3026B199-C859-4E76-86DE-B87840903EA5}"/>
+                <a16:creationId xmlns:a16="http://schemas.microsoft.com/office/drawing/2014/main" id="{ABCE2983-BFEB-418D-8F00-403E8DFED29C}"/>
               </a:ext>
             </a:extLst>
           </p:cNvPr>
@@ -21069,7 +21069,7 @@
           <p:cNvPr id="15" name="">
             <a:extLst xmlns:a="http://schemas.openxmlformats.org/drawingml/2006/main">
               <a:ext uri="{FF2B5EF4-FFF2-40B4-BE49-F238E27FC236}">
-                <a16:creationId xmlns:a16="http://schemas.microsoft.com/office/drawing/2014/main" id="{9FFDC121-6B43-473D-9A52-189A9A560319}"/>
+                <a16:creationId xmlns:a16="http://schemas.microsoft.com/office/drawing/2014/main" id="{7CA189B4-5B58-4AA1-8146-1CEA797C8D78}"/>
               </a:ext>
             </a:extLst>
           </p:cNvPr>
@@ -21104,19 +21104,19 @@
           <p:cNvPr id="16" name="">
             <a:extLst xmlns:a="http://schemas.openxmlformats.org/drawingml/2006/main">
               <a:ext uri="{FF2B5EF4-FFF2-40B4-BE49-F238E27FC236}">
-                <a16:creationId xmlns:a16="http://schemas.microsoft.com/office/drawing/2014/main" id="{2A4C3CD8-EE83-49A7-BA20-82BB6412D2A1}"/>
-              </a:ext>
-            </a:extLst>
-          </p:cNvPr>
-          <p:cNvSpPr>
-            <a:spLocks xmlns:a="http://schemas.openxmlformats.org/drawingml/2006/main" noGrp="1"/>
-          </p:cNvSpPr>
-          <p:nvPr/>
-        </p:nvSpPr>
-        <p:spPr>
-          <a:xfrm xmlns:a="http://schemas.openxmlformats.org/drawingml/2006/main">
-            <a:off x="4343400" y="2609850"/>
-            <a:ext cx="66675" cy="1181100"/>
+                <a16:creationId xmlns:a16="http://schemas.microsoft.com/office/drawing/2014/main" id="{B5E2B769-B9C7-4E53-98A2-209C318ADE41}"/>
+              </a:ext>
+            </a:extLst>
+          </p:cNvPr>
+          <p:cNvSpPr>
+            <a:spLocks xmlns:a="http://schemas.openxmlformats.org/drawingml/2006/main" noGrp="1"/>
+          </p:cNvSpPr>
+          <p:nvPr/>
+        </p:nvSpPr>
+        <p:spPr>
+          <a:xfrm xmlns:a="http://schemas.openxmlformats.org/drawingml/2006/main">
+            <a:off x="4391025" y="2657475"/>
+            <a:ext cx="47625" cy="1085850"/>
           </a:xfrm>
           <a:prstGeom xmlns:a="http://schemas.openxmlformats.org/drawingml/2006/main" prst="rect">
             <a:avLst/>
@@ -21139,7 +21139,7 @@
           <p:cNvPr id="17" name="">
             <a:extLst xmlns:a="http://schemas.openxmlformats.org/drawingml/2006/main">
               <a:ext uri="{FF2B5EF4-FFF2-40B4-BE49-F238E27FC236}">
-                <a16:creationId xmlns:a16="http://schemas.microsoft.com/office/drawing/2014/main" id="{3AC5B2CE-36E8-4801-B253-8E1BA489EB40}"/>
+                <a16:creationId xmlns:a16="http://schemas.microsoft.com/office/drawing/2014/main" id="{C988C17A-41AD-429B-B991-1CE26028DE34}"/>
               </a:ext>
             </a:extLst>
           </p:cNvPr>
@@ -21193,7 +21193,7 @@
           <p:cNvPr id="18" name="">
             <a:extLst xmlns:a="http://schemas.openxmlformats.org/drawingml/2006/main">
               <a:ext uri="{FF2B5EF4-FFF2-40B4-BE49-F238E27FC236}">
-                <a16:creationId xmlns:a16="http://schemas.microsoft.com/office/drawing/2014/main" id="{818498CA-A218-4837-B4A8-E26FA9785A09}"/>
+                <a16:creationId xmlns:a16="http://schemas.microsoft.com/office/drawing/2014/main" id="{D91758B5-9B8F-4263-A857-906879E1ACBB}"/>
               </a:ext>
             </a:extLst>
           </p:cNvPr>
@@ -21251,7 +21251,7 @@
           <p:cNvPr id="19" name="">
             <a:extLst xmlns:a="http://schemas.openxmlformats.org/drawingml/2006/main">
               <a:ext uri="{FF2B5EF4-FFF2-40B4-BE49-F238E27FC236}">
-                <a16:creationId xmlns:a16="http://schemas.microsoft.com/office/drawing/2014/main" id="{6D1373D9-BA2D-4B31-A913-FA7E7A8D0147}"/>
+                <a16:creationId xmlns:a16="http://schemas.microsoft.com/office/drawing/2014/main" id="{FCE56D77-3CB2-4B8B-92F2-B88E0A0F58DE}"/>
               </a:ext>
             </a:extLst>
           </p:cNvPr>
@@ -21309,7 +21309,7 @@
           <p:cNvPr id="20" name="">
             <a:extLst xmlns:a="http://schemas.openxmlformats.org/drawingml/2006/main">
               <a:ext uri="{FF2B5EF4-FFF2-40B4-BE49-F238E27FC236}">
-                <a16:creationId xmlns:a16="http://schemas.microsoft.com/office/drawing/2014/main" id="{915840FD-9A55-47F1-B3D3-5389327AEA30}"/>
+                <a16:creationId xmlns:a16="http://schemas.microsoft.com/office/drawing/2014/main" id="{CEB54C8A-FCC4-4631-A4A0-8300394292E0}"/>
               </a:ext>
             </a:extLst>
           </p:cNvPr>
@@ -21344,19 +21344,19 @@
           <p:cNvPr id="21" name="">
             <a:extLst xmlns:a="http://schemas.openxmlformats.org/drawingml/2006/main">
               <a:ext uri="{FF2B5EF4-FFF2-40B4-BE49-F238E27FC236}">
-                <a16:creationId xmlns:a16="http://schemas.microsoft.com/office/drawing/2014/main" id="{26250718-7B87-4BCE-AAFF-C7AF98E03B33}"/>
-              </a:ext>
-            </a:extLst>
-          </p:cNvPr>
-          <p:cNvSpPr>
-            <a:spLocks xmlns:a="http://schemas.openxmlformats.org/drawingml/2006/main" noGrp="1"/>
-          </p:cNvSpPr>
-          <p:nvPr/>
-        </p:nvSpPr>
-        <p:spPr>
-          <a:xfrm xmlns:a="http://schemas.openxmlformats.org/drawingml/2006/main">
-            <a:off x="971550" y="2000250"/>
-            <a:ext cx="66675" cy="1143000"/>
+                <a16:creationId xmlns:a16="http://schemas.microsoft.com/office/drawing/2014/main" id="{A01A40DF-E91F-40A8-A234-7E49220E4CE7}"/>
+              </a:ext>
+            </a:extLst>
+          </p:cNvPr>
+          <p:cNvSpPr>
+            <a:spLocks xmlns:a="http://schemas.openxmlformats.org/drawingml/2006/main" noGrp="1"/>
+          </p:cNvSpPr>
+          <p:nvPr/>
+        </p:nvSpPr>
+        <p:spPr>
+          <a:xfrm xmlns:a="http://schemas.openxmlformats.org/drawingml/2006/main">
+            <a:off x="1019175" y="2047875"/>
+            <a:ext cx="47625" cy="1047750"/>
           </a:xfrm>
           <a:prstGeom xmlns:a="http://schemas.openxmlformats.org/drawingml/2006/main" prst="rect">
             <a:avLst/>
@@ -21379,7 +21379,7 @@
           <p:cNvPr id="22" name="">
             <a:extLst xmlns:a="http://schemas.openxmlformats.org/drawingml/2006/main">
               <a:ext uri="{FF2B5EF4-FFF2-40B4-BE49-F238E27FC236}">
-                <a16:creationId xmlns:a16="http://schemas.microsoft.com/office/drawing/2014/main" id="{8067C3E5-A4F7-495C-BEFA-37AD2CC84B18}"/>
+                <a16:creationId xmlns:a16="http://schemas.microsoft.com/office/drawing/2014/main" id="{B3A5C3F6-EDCC-4A45-82CC-7DF3E0A49D63}"/>
               </a:ext>
             </a:extLst>
           </p:cNvPr>
@@ -21433,7 +21433,7 @@
           <p:cNvPr id="23" name="">
             <a:extLst xmlns:a="http://schemas.openxmlformats.org/drawingml/2006/main">
               <a:ext uri="{FF2B5EF4-FFF2-40B4-BE49-F238E27FC236}">
-                <a16:creationId xmlns:a16="http://schemas.microsoft.com/office/drawing/2014/main" id="{23207B98-DAB2-4F10-869E-58E177F1326C}"/>
+                <a16:creationId xmlns:a16="http://schemas.microsoft.com/office/drawing/2014/main" id="{EE12F20C-A454-42C8-B86E-B08E8B765148}"/>
               </a:ext>
             </a:extLst>
           </p:cNvPr>
@@ -21491,7 +21491,7 @@
           <p:cNvPr id="24" name="">
             <a:extLst xmlns:a="http://schemas.openxmlformats.org/drawingml/2006/main">
               <a:ext uri="{FF2B5EF4-FFF2-40B4-BE49-F238E27FC236}">
-                <a16:creationId xmlns:a16="http://schemas.microsoft.com/office/drawing/2014/main" id="{BA4218DA-065B-44C5-8F02-222237D8DDDE}"/>
+                <a16:creationId xmlns:a16="http://schemas.microsoft.com/office/drawing/2014/main" id="{9E61305A-6614-40D2-9C95-B8DA44D32564}"/>
               </a:ext>
             </a:extLst>
           </p:cNvPr>
@@ -21566,7 +21566,7 @@
           <p:cNvPr id="25" name="">
             <a:extLst xmlns:a="http://schemas.openxmlformats.org/drawingml/2006/main">
               <a:ext uri="{FF2B5EF4-FFF2-40B4-BE49-F238E27FC236}">
-                <a16:creationId xmlns:a16="http://schemas.microsoft.com/office/drawing/2014/main" id="{91355A50-B23E-41CA-A2D2-05014CEFC620}"/>
+                <a16:creationId xmlns:a16="http://schemas.microsoft.com/office/drawing/2014/main" id="{0F52EAD7-4188-4355-98CB-590C7E8C9139}"/>
               </a:ext>
             </a:extLst>
           </p:cNvPr>
@@ -21601,19 +21601,19 @@
           <p:cNvPr id="26" name="">
             <a:extLst xmlns:a="http://schemas.openxmlformats.org/drawingml/2006/main">
               <a:ext uri="{FF2B5EF4-FFF2-40B4-BE49-F238E27FC236}">
-                <a16:creationId xmlns:a16="http://schemas.microsoft.com/office/drawing/2014/main" id="{40094F64-4733-4954-ACE5-F0BF69451D1D}"/>
-              </a:ext>
-            </a:extLst>
-          </p:cNvPr>
-          <p:cNvSpPr>
-            <a:spLocks xmlns:a="http://schemas.openxmlformats.org/drawingml/2006/main" noGrp="1"/>
-          </p:cNvSpPr>
-          <p:nvPr/>
-        </p:nvSpPr>
-        <p:spPr>
-          <a:xfrm xmlns:a="http://schemas.openxmlformats.org/drawingml/2006/main">
-            <a:off x="1562100" y="3924300"/>
-            <a:ext cx="66675" cy="1143000"/>
+                <a16:creationId xmlns:a16="http://schemas.microsoft.com/office/drawing/2014/main" id="{7EDF99CB-0F75-467C-9FBC-39227244177E}"/>
+              </a:ext>
+            </a:extLst>
+          </p:cNvPr>
+          <p:cNvSpPr>
+            <a:spLocks xmlns:a="http://schemas.openxmlformats.org/drawingml/2006/main" noGrp="1"/>
+          </p:cNvSpPr>
+          <p:nvPr/>
+        </p:nvSpPr>
+        <p:spPr>
+          <a:xfrm xmlns:a="http://schemas.openxmlformats.org/drawingml/2006/main">
+            <a:off x="1609725" y="3971925"/>
+            <a:ext cx="47625" cy="1047750"/>
           </a:xfrm>
           <a:prstGeom xmlns:a="http://schemas.openxmlformats.org/drawingml/2006/main" prst="rect">
             <a:avLst/>
@@ -21636,7 +21636,7 @@
           <p:cNvPr id="27" name="">
             <a:extLst xmlns:a="http://schemas.openxmlformats.org/drawingml/2006/main">
               <a:ext uri="{FF2B5EF4-FFF2-40B4-BE49-F238E27FC236}">
-                <a16:creationId xmlns:a16="http://schemas.microsoft.com/office/drawing/2014/main" id="{0646A686-CCD7-4711-BD72-992BAFAE1B8B}"/>
+                <a16:creationId xmlns:a16="http://schemas.microsoft.com/office/drawing/2014/main" id="{90F96437-348F-4A86-AB7A-2B3D01785393}"/>
               </a:ext>
             </a:extLst>
           </p:cNvPr>
@@ -21690,7 +21690,7 @@
           <p:cNvPr id="28" name="">
             <a:extLst xmlns:a="http://schemas.openxmlformats.org/drawingml/2006/main">
               <a:ext uri="{FF2B5EF4-FFF2-40B4-BE49-F238E27FC236}">
-                <a16:creationId xmlns:a16="http://schemas.microsoft.com/office/drawing/2014/main" id="{A2E292A4-5282-486A-B765-75F3B7389A55}"/>
+                <a16:creationId xmlns:a16="http://schemas.microsoft.com/office/drawing/2014/main" id="{B3B04DFC-AA15-41AE-98E8-855CB744CA66}"/>
               </a:ext>
             </a:extLst>
           </p:cNvPr>
@@ -21748,7 +21748,7 @@
           <p:cNvPr id="29" name="">
             <a:extLst xmlns:a="http://schemas.openxmlformats.org/drawingml/2006/main">
               <a:ext uri="{FF2B5EF4-FFF2-40B4-BE49-F238E27FC236}">
-                <a16:creationId xmlns:a16="http://schemas.microsoft.com/office/drawing/2014/main" id="{DBDA3B97-72B5-49D3-AF0F-7CB8C128855F}"/>
+                <a16:creationId xmlns:a16="http://schemas.microsoft.com/office/drawing/2014/main" id="{7F273D6A-DE7A-435C-A7D1-5BBDB6BFB533}"/>
               </a:ext>
             </a:extLst>
           </p:cNvPr>
@@ -21823,7 +21823,7 @@
           <p:cNvPr id="30" name="">
             <a:extLst xmlns:a="http://schemas.openxmlformats.org/drawingml/2006/main">
               <a:ext uri="{FF2B5EF4-FFF2-40B4-BE49-F238E27FC236}">
-                <a16:creationId xmlns:a16="http://schemas.microsoft.com/office/drawing/2014/main" id="{1BA160CA-8C61-4041-941F-1180D2BB6967}"/>
+                <a16:creationId xmlns:a16="http://schemas.microsoft.com/office/drawing/2014/main" id="{DF5A4458-3C84-4D3E-B6B2-EBF9E0DA2526}"/>
               </a:ext>
             </a:extLst>
           </p:cNvPr>
@@ -21858,19 +21858,19 @@
           <p:cNvPr id="31" name="">
             <a:extLst xmlns:a="http://schemas.openxmlformats.org/drawingml/2006/main">
               <a:ext uri="{FF2B5EF4-FFF2-40B4-BE49-F238E27FC236}">
-                <a16:creationId xmlns:a16="http://schemas.microsoft.com/office/drawing/2014/main" id="{A15F59E7-1276-4A5B-B641-F1FBBC38B9CA}"/>
-              </a:ext>
-            </a:extLst>
-          </p:cNvPr>
-          <p:cNvSpPr>
-            <a:spLocks xmlns:a="http://schemas.openxmlformats.org/drawingml/2006/main" noGrp="1"/>
-          </p:cNvSpPr>
-          <p:nvPr/>
-        </p:nvSpPr>
-        <p:spPr>
-          <a:xfrm xmlns:a="http://schemas.openxmlformats.org/drawingml/2006/main">
-            <a:off x="8191500" y="1562100"/>
-            <a:ext cx="66675" cy="1219200"/>
+                <a16:creationId xmlns:a16="http://schemas.microsoft.com/office/drawing/2014/main" id="{E2C3E8A3-C1C8-41B4-BCC0-AFA5CAAB7404}"/>
+              </a:ext>
+            </a:extLst>
+          </p:cNvPr>
+          <p:cNvSpPr>
+            <a:spLocks xmlns:a="http://schemas.openxmlformats.org/drawingml/2006/main" noGrp="1"/>
+          </p:cNvSpPr>
+          <p:nvPr/>
+        </p:nvSpPr>
+        <p:spPr>
+          <a:xfrm xmlns:a="http://schemas.openxmlformats.org/drawingml/2006/main">
+            <a:off x="8239125" y="1609725"/>
+            <a:ext cx="47625" cy="1123950"/>
           </a:xfrm>
           <a:prstGeom xmlns:a="http://schemas.openxmlformats.org/drawingml/2006/main" prst="rect">
             <a:avLst/>
@@ -21893,7 +21893,7 @@
           <p:cNvPr id="32" name="">
             <a:extLst xmlns:a="http://schemas.openxmlformats.org/drawingml/2006/main">
               <a:ext uri="{FF2B5EF4-FFF2-40B4-BE49-F238E27FC236}">
-                <a16:creationId xmlns:a16="http://schemas.microsoft.com/office/drawing/2014/main" id="{27D2CCFF-BD11-49FA-9DDC-5C62B8303C8C}"/>
+                <a16:creationId xmlns:a16="http://schemas.microsoft.com/office/drawing/2014/main" id="{7B464AED-D9C2-4BF4-A341-D70F1846478D}"/>
               </a:ext>
             </a:extLst>
           </p:cNvPr>
@@ -21947,7 +21947,7 @@
           <p:cNvPr id="33" name="">
             <a:extLst xmlns:a="http://schemas.openxmlformats.org/drawingml/2006/main">
               <a:ext uri="{FF2B5EF4-FFF2-40B4-BE49-F238E27FC236}">
-                <a16:creationId xmlns:a16="http://schemas.microsoft.com/office/drawing/2014/main" id="{95D7F305-F4FF-4AA7-9BFB-05B862BC2567}"/>
+                <a16:creationId xmlns:a16="http://schemas.microsoft.com/office/drawing/2014/main" id="{2748FC99-D7C4-4754-9258-9CD18AB3657B}"/>
               </a:ext>
             </a:extLst>
           </p:cNvPr>
@@ -22005,7 +22005,7 @@
           <p:cNvPr id="34" name="">
             <a:extLst xmlns:a="http://schemas.openxmlformats.org/drawingml/2006/main">
               <a:ext uri="{FF2B5EF4-FFF2-40B4-BE49-F238E27FC236}">
-                <a16:creationId xmlns:a16="http://schemas.microsoft.com/office/drawing/2014/main" id="{267EB8F7-4153-4431-BE50-9B05F312073A}"/>
+                <a16:creationId xmlns:a16="http://schemas.microsoft.com/office/drawing/2014/main" id="{2CD6B731-E7FA-40F1-B205-4336C1CAC185}"/>
               </a:ext>
             </a:extLst>
           </p:cNvPr>
@@ -22080,7 +22080,7 @@
           <p:cNvPr id="35" name="">
             <a:extLst xmlns:a="http://schemas.openxmlformats.org/drawingml/2006/main">
               <a:ext uri="{FF2B5EF4-FFF2-40B4-BE49-F238E27FC236}">
-                <a16:creationId xmlns:a16="http://schemas.microsoft.com/office/drawing/2014/main" id="{704CB99D-23DD-4CFC-9BA9-959245F8E9D9}"/>
+                <a16:creationId xmlns:a16="http://schemas.microsoft.com/office/drawing/2014/main" id="{E13B7440-C02F-4EC7-8EFD-189C62192BA5}"/>
               </a:ext>
             </a:extLst>
           </p:cNvPr>
@@ -22115,19 +22115,19 @@
           <p:cNvPr id="36" name="">
             <a:extLst xmlns:a="http://schemas.openxmlformats.org/drawingml/2006/main">
               <a:ext uri="{FF2B5EF4-FFF2-40B4-BE49-F238E27FC236}">
-                <a16:creationId xmlns:a16="http://schemas.microsoft.com/office/drawing/2014/main" id="{DDACC15A-AC51-4E2E-860B-9BB3A07546A3}"/>
-              </a:ext>
-            </a:extLst>
-          </p:cNvPr>
-          <p:cNvSpPr>
-            <a:spLocks xmlns:a="http://schemas.openxmlformats.org/drawingml/2006/main" noGrp="1"/>
-          </p:cNvSpPr>
-          <p:nvPr/>
-        </p:nvSpPr>
-        <p:spPr>
-          <a:xfrm xmlns:a="http://schemas.openxmlformats.org/drawingml/2006/main">
-            <a:off x="8858250" y="3200400"/>
-            <a:ext cx="66675" cy="1219200"/>
+                <a16:creationId xmlns:a16="http://schemas.microsoft.com/office/drawing/2014/main" id="{BA543EF9-5C5B-4C79-B6D3-4D987E29399B}"/>
+              </a:ext>
+            </a:extLst>
+          </p:cNvPr>
+          <p:cNvSpPr>
+            <a:spLocks xmlns:a="http://schemas.openxmlformats.org/drawingml/2006/main" noGrp="1"/>
+          </p:cNvSpPr>
+          <p:nvPr/>
+        </p:nvSpPr>
+        <p:spPr>
+          <a:xfrm xmlns:a="http://schemas.openxmlformats.org/drawingml/2006/main">
+            <a:off x="8905875" y="3248025"/>
+            <a:ext cx="47625" cy="1123950"/>
           </a:xfrm>
           <a:prstGeom xmlns:a="http://schemas.openxmlformats.org/drawingml/2006/main" prst="rect">
             <a:avLst/>
@@ -22150,7 +22150,7 @@
           <p:cNvPr id="37" name="">
             <a:extLst xmlns:a="http://schemas.openxmlformats.org/drawingml/2006/main">
               <a:ext uri="{FF2B5EF4-FFF2-40B4-BE49-F238E27FC236}">
-                <a16:creationId xmlns:a16="http://schemas.microsoft.com/office/drawing/2014/main" id="{D9EC5FDB-DEF1-41B1-BFB4-77F2D3FEFF69}"/>
+                <a16:creationId xmlns:a16="http://schemas.microsoft.com/office/drawing/2014/main" id="{5AD0FC12-FFBF-4E35-BA98-15E83B08762A}"/>
               </a:ext>
             </a:extLst>
           </p:cNvPr>
@@ -22204,7 +22204,7 @@
           <p:cNvPr id="38" name="">
             <a:extLst xmlns:a="http://schemas.openxmlformats.org/drawingml/2006/main">
               <a:ext uri="{FF2B5EF4-FFF2-40B4-BE49-F238E27FC236}">
-                <a16:creationId xmlns:a16="http://schemas.microsoft.com/office/drawing/2014/main" id="{8CB7BD49-5018-4782-8FC3-605E04DC28C1}"/>
+                <a16:creationId xmlns:a16="http://schemas.microsoft.com/office/drawing/2014/main" id="{89C290EC-621D-43B9-82CD-1E99EF6B652C}"/>
               </a:ext>
             </a:extLst>
           </p:cNvPr>
@@ -22262,7 +22262,7 @@
           <p:cNvPr id="39" name="">
             <a:extLst xmlns:a="http://schemas.openxmlformats.org/drawingml/2006/main">
               <a:ext uri="{FF2B5EF4-FFF2-40B4-BE49-F238E27FC236}">
-                <a16:creationId xmlns:a16="http://schemas.microsoft.com/office/drawing/2014/main" id="{72280B30-88F0-4246-8F6E-D3B6AC7A9638}"/>
+                <a16:creationId xmlns:a16="http://schemas.microsoft.com/office/drawing/2014/main" id="{31F8EA1D-81CF-4441-A188-78D82294DE75}"/>
               </a:ext>
             </a:extLst>
           </p:cNvPr>
@@ -22320,7 +22320,7 @@
           <p:cNvPr id="40" name="">
             <a:extLst xmlns:a="http://schemas.openxmlformats.org/drawingml/2006/main">
               <a:ext uri="{FF2B5EF4-FFF2-40B4-BE49-F238E27FC236}">
-                <a16:creationId xmlns:a16="http://schemas.microsoft.com/office/drawing/2014/main" id="{92488128-E9EB-4E76-A99D-0F798FADDD67}"/>
+                <a16:creationId xmlns:a16="http://schemas.microsoft.com/office/drawing/2014/main" id="{4C545E09-4AD1-438E-9542-643FABD75D0B}"/>
               </a:ext>
             </a:extLst>
           </p:cNvPr>
@@ -22355,19 +22355,19 @@
           <p:cNvPr id="41" name="">
             <a:extLst xmlns:a="http://schemas.openxmlformats.org/drawingml/2006/main">
               <a:ext uri="{FF2B5EF4-FFF2-40B4-BE49-F238E27FC236}">
-                <a16:creationId xmlns:a16="http://schemas.microsoft.com/office/drawing/2014/main" id="{E482C5C9-BFE9-4C03-8687-F0B09BCD7868}"/>
-              </a:ext>
-            </a:extLst>
-          </p:cNvPr>
-          <p:cNvSpPr>
-            <a:spLocks xmlns:a="http://schemas.openxmlformats.org/drawingml/2006/main" noGrp="1"/>
-          </p:cNvSpPr>
-          <p:nvPr/>
-        </p:nvSpPr>
-        <p:spPr>
-          <a:xfrm xmlns:a="http://schemas.openxmlformats.org/drawingml/2006/main">
-            <a:off x="7981950" y="4857750"/>
-            <a:ext cx="66675" cy="1047750"/>
+                <a16:creationId xmlns:a16="http://schemas.microsoft.com/office/drawing/2014/main" id="{69EF7A7C-95DE-4F52-847A-EB7E661CAAC5}"/>
+              </a:ext>
+            </a:extLst>
+          </p:cNvPr>
+          <p:cNvSpPr>
+            <a:spLocks xmlns:a="http://schemas.openxmlformats.org/drawingml/2006/main" noGrp="1"/>
+          </p:cNvSpPr>
+          <p:nvPr/>
+        </p:nvSpPr>
+        <p:spPr>
+          <a:xfrm xmlns:a="http://schemas.openxmlformats.org/drawingml/2006/main">
+            <a:off x="8029575" y="4905375"/>
+            <a:ext cx="47625" cy="952500"/>
           </a:xfrm>
           <a:prstGeom xmlns:a="http://schemas.openxmlformats.org/drawingml/2006/main" prst="rect">
             <a:avLst/>
@@ -22390,7 +22390,7 @@
           <p:cNvPr id="42" name="">
             <a:extLst xmlns:a="http://schemas.openxmlformats.org/drawingml/2006/main">
               <a:ext uri="{FF2B5EF4-FFF2-40B4-BE49-F238E27FC236}">
-                <a16:creationId xmlns:a16="http://schemas.microsoft.com/office/drawing/2014/main" id="{CBB14847-2492-4E54-B2D6-9FF37BEC0ADD}"/>
+                <a16:creationId xmlns:a16="http://schemas.microsoft.com/office/drawing/2014/main" id="{1F038F2F-B4FA-4608-A2D8-E66C9EF52C67}"/>
               </a:ext>
             </a:extLst>
           </p:cNvPr>
@@ -22444,7 +22444,7 @@
           <p:cNvPr id="43" name="">
             <a:extLst xmlns:a="http://schemas.openxmlformats.org/drawingml/2006/main">
               <a:ext uri="{FF2B5EF4-FFF2-40B4-BE49-F238E27FC236}">
-                <a16:creationId xmlns:a16="http://schemas.microsoft.com/office/drawing/2014/main" id="{1CA0E6F5-8DF4-42F2-9252-C0752F0DE024}"/>
+                <a16:creationId xmlns:a16="http://schemas.microsoft.com/office/drawing/2014/main" id="{6155B6F0-D65E-4B50-9824-C1AE8B412628}"/>
               </a:ext>
             </a:extLst>
           </p:cNvPr>
@@ -22502,7 +22502,7 @@
           <p:cNvPr id="44" name="">
             <a:extLst xmlns:a="http://schemas.openxmlformats.org/drawingml/2006/main">
               <a:ext uri="{FF2B5EF4-FFF2-40B4-BE49-F238E27FC236}">
-                <a16:creationId xmlns:a16="http://schemas.microsoft.com/office/drawing/2014/main" id="{7406B519-950A-47F3-A67B-766544CA781B}"/>
+                <a16:creationId xmlns:a16="http://schemas.microsoft.com/office/drawing/2014/main" id="{90F93CD9-0BCD-4873-905D-3CED4F033412}"/>
               </a:ext>
             </a:extLst>
           </p:cNvPr>
@@ -22577,7 +22577,7 @@
           <p:cNvPr id="45" name="">
             <a:extLst xmlns:a="http://schemas.openxmlformats.org/drawingml/2006/main">
               <a:ext uri="{FF2B5EF4-FFF2-40B4-BE49-F238E27FC236}">
-                <a16:creationId xmlns:a16="http://schemas.microsoft.com/office/drawing/2014/main" id="{EC32C468-9789-4035-8824-091ADBB6735A}"/>
+                <a16:creationId xmlns:a16="http://schemas.microsoft.com/office/drawing/2014/main" id="{C51802D3-252C-48B9-AC56-2390EEA8AB1C}"/>
               </a:ext>
             </a:extLst>
           </p:cNvPr>
@@ -22612,7 +22612,7 @@
           <p:cNvPr id="46" name="">
             <a:extLst xmlns:a="http://schemas.openxmlformats.org/drawingml/2006/main">
               <a:ext uri="{FF2B5EF4-FFF2-40B4-BE49-F238E27FC236}">
-                <a16:creationId xmlns:a16="http://schemas.microsoft.com/office/drawing/2014/main" id="{5524E218-E880-45E0-B0A4-BB7A66A41139}"/>
+                <a16:creationId xmlns:a16="http://schemas.microsoft.com/office/drawing/2014/main" id="{B19B87B3-76FF-4BF9-9697-A0E29DB9A260}"/>
               </a:ext>
             </a:extLst>
           </p:cNvPr>
@@ -22647,7 +22647,7 @@
           <p:cNvPr id="47" name="">
             <a:extLst xmlns:a="http://schemas.openxmlformats.org/drawingml/2006/main">
               <a:ext uri="{FF2B5EF4-FFF2-40B4-BE49-F238E27FC236}">
-                <a16:creationId xmlns:a16="http://schemas.microsoft.com/office/drawing/2014/main" id="{0BFA2E85-BC55-4795-84D8-B430B3314921}"/>
+                <a16:creationId xmlns:a16="http://schemas.microsoft.com/office/drawing/2014/main" id="{7ACD2C6D-F892-4900-8756-2FA9B9660ADC}"/>
               </a:ext>
             </a:extLst>
           </p:cNvPr>
@@ -22682,7 +22682,7 @@
           <p:cNvPr id="48" name="">
             <a:extLst xmlns:a="http://schemas.openxmlformats.org/drawingml/2006/main">
               <a:ext uri="{FF2B5EF4-FFF2-40B4-BE49-F238E27FC236}">
-                <a16:creationId xmlns:a16="http://schemas.microsoft.com/office/drawing/2014/main" id="{6787406D-15B8-4C14-A4DF-53B8C53A4C48}"/>
+                <a16:creationId xmlns:a16="http://schemas.microsoft.com/office/drawing/2014/main" id="{27E47690-C0D2-4910-9714-E25213BFECA8}"/>
               </a:ext>
             </a:extLst>
           </p:cNvPr>
@@ -22717,7 +22717,7 @@
           <p:cNvPr id="49" name="">
             <a:extLst xmlns:a="http://schemas.openxmlformats.org/drawingml/2006/main">
               <a:ext uri="{FF2B5EF4-FFF2-40B4-BE49-F238E27FC236}">
-                <a16:creationId xmlns:a16="http://schemas.microsoft.com/office/drawing/2014/main" id="{E2F19318-D4FC-42EB-A4B8-65EFA5A458E2}"/>
+                <a16:creationId xmlns:a16="http://schemas.microsoft.com/office/drawing/2014/main" id="{E157E7E5-F9FC-4A27-94F5-EDC08477E230}"/>
               </a:ext>
             </a:extLst>
           </p:cNvPr>
@@ -22752,7 +22752,7 @@
           <p:cNvPr id="50" name="">
             <a:extLst xmlns:a="http://schemas.openxmlformats.org/drawingml/2006/main">
               <a:ext uri="{FF2B5EF4-FFF2-40B4-BE49-F238E27FC236}">
-                <a16:creationId xmlns:a16="http://schemas.microsoft.com/office/drawing/2014/main" id="{8B8D8C74-336D-4727-AEEA-D64D2AB67937}"/>
+                <a16:creationId xmlns:a16="http://schemas.microsoft.com/office/drawing/2014/main" id="{1D9C8354-5021-464F-A660-F31A803C2987}"/>
               </a:ext>
             </a:extLst>
           </p:cNvPr>
@@ -22787,7 +22787,7 @@
           <p:cNvPr id="51" name="">
             <a:extLst xmlns:a="http://schemas.openxmlformats.org/drawingml/2006/main">
               <a:ext uri="{FF2B5EF4-FFF2-40B4-BE49-F238E27FC236}">
-                <a16:creationId xmlns:a16="http://schemas.microsoft.com/office/drawing/2014/main" id="{E6CCEB6C-E529-43F0-ABFC-AFE6F5C1EFF9}"/>
+                <a16:creationId xmlns:a16="http://schemas.microsoft.com/office/drawing/2014/main" id="{8F2FB8E5-F8B2-4158-B10F-B300C51EEE63}"/>
               </a:ext>
             </a:extLst>
           </p:cNvPr>
@@ -22845,7 +22845,7 @@
           <p:cNvPr id="52" name="">
             <a:extLst xmlns:a="http://schemas.openxmlformats.org/drawingml/2006/main">
               <a:ext uri="{FF2B5EF4-FFF2-40B4-BE49-F238E27FC236}">
-                <a16:creationId xmlns:a16="http://schemas.microsoft.com/office/drawing/2014/main" id="{513A7E0D-6F24-4AE5-9448-5C99C008C46B}"/>
+                <a16:creationId xmlns:a16="http://schemas.microsoft.com/office/drawing/2014/main" id="{CCED1B1E-1670-4FFA-AC21-417B0C173E75}"/>
               </a:ext>
             </a:extLst>
           </p:cNvPr>
@@ -22880,7 +22880,7 @@
           <p:cNvPr id="53" name="">
             <a:extLst xmlns:a="http://schemas.openxmlformats.org/drawingml/2006/main">
               <a:ext uri="{FF2B5EF4-FFF2-40B4-BE49-F238E27FC236}">
-                <a16:creationId xmlns:a16="http://schemas.microsoft.com/office/drawing/2014/main" id="{F74A1D88-F5E3-4354-AD72-9174F2B8DEE1}"/>
+                <a16:creationId xmlns:a16="http://schemas.microsoft.com/office/drawing/2014/main" id="{791E1527-6CF3-483D-9FF6-AD89EC0895C6}"/>
               </a:ext>
             </a:extLst>
           </p:cNvPr>
@@ -22938,7 +22938,7 @@
           <p:cNvPr id="54" name="">
             <a:extLst xmlns:a="http://schemas.openxmlformats.org/drawingml/2006/main">
               <a:ext uri="{FF2B5EF4-FFF2-40B4-BE49-F238E27FC236}">
-                <a16:creationId xmlns:a16="http://schemas.microsoft.com/office/drawing/2014/main" id="{7A3EAB38-D976-4D33-9ECE-D06C87274DBF}"/>
+                <a16:creationId xmlns:a16="http://schemas.microsoft.com/office/drawing/2014/main" id="{8A63AEAE-886B-4F5E-9C3B-ECDE5EA059D8}"/>
               </a:ext>
             </a:extLst>
           </p:cNvPr>
@@ -22975,19 +22975,19 @@
           <p:cNvPr id="55" name="">
             <a:extLst xmlns:a="http://schemas.openxmlformats.org/drawingml/2006/main">
               <a:ext uri="{FF2B5EF4-FFF2-40B4-BE49-F238E27FC236}">
-                <a16:creationId xmlns:a16="http://schemas.microsoft.com/office/drawing/2014/main" id="{72155949-9D2E-4F57-A554-CDB56128B2BD}"/>
-              </a:ext>
-            </a:extLst>
-          </p:cNvPr>
-          <p:cNvSpPr>
-            <a:spLocks xmlns:a="http://schemas.openxmlformats.org/drawingml/2006/main" noGrp="1"/>
-          </p:cNvSpPr>
-          <p:nvPr/>
-        </p:nvSpPr>
-        <p:spPr>
-          <a:xfrm xmlns:a="http://schemas.openxmlformats.org/drawingml/2006/main">
-            <a:off x="6057900" y="5905500"/>
-            <a:ext cx="76200" cy="552450"/>
+                <a16:creationId xmlns:a16="http://schemas.microsoft.com/office/drawing/2014/main" id="{8F14BB60-1E74-4761-BC13-C88D6616FE9F}"/>
+              </a:ext>
+            </a:extLst>
+          </p:cNvPr>
+          <p:cNvSpPr>
+            <a:spLocks xmlns:a="http://schemas.openxmlformats.org/drawingml/2006/main" noGrp="1"/>
+          </p:cNvSpPr>
+          <p:nvPr/>
+        </p:nvSpPr>
+        <p:spPr>
+          <a:xfrm xmlns:a="http://schemas.openxmlformats.org/drawingml/2006/main">
+            <a:off x="6105525" y="5953125"/>
+            <a:ext cx="57150" cy="457200"/>
           </a:xfrm>
           <a:prstGeom xmlns:a="http://schemas.openxmlformats.org/drawingml/2006/main" prst="rect">
             <a:avLst/>
@@ -23010,7 +23010,7 @@
           <p:cNvPr id="56" name="">
             <a:extLst xmlns:a="http://schemas.openxmlformats.org/drawingml/2006/main">
               <a:ext uri="{FF2B5EF4-FFF2-40B4-BE49-F238E27FC236}">
-                <a16:creationId xmlns:a16="http://schemas.microsoft.com/office/drawing/2014/main" id="{9A1580A5-20FD-49C6-B649-AB3068C7D2F5}"/>
+                <a16:creationId xmlns:a16="http://schemas.microsoft.com/office/drawing/2014/main" id="{669E1434-AF0F-4C55-9AC5-15106BDE6303}"/>
               </a:ext>
             </a:extLst>
           </p:cNvPr>
@@ -23068,7 +23068,7 @@
           <p:cNvPr id="57" name="">
             <a:extLst xmlns:a="http://schemas.openxmlformats.org/drawingml/2006/main">
               <a:ext uri="{FF2B5EF4-FFF2-40B4-BE49-F238E27FC236}">
-                <a16:creationId xmlns:a16="http://schemas.microsoft.com/office/drawing/2014/main" id="{488A1E75-44B4-48BD-B004-24AB10F77BAC}"/>
+                <a16:creationId xmlns:a16="http://schemas.microsoft.com/office/drawing/2014/main" id="{B0A40E9D-093C-4F79-95E1-46E08596A736}"/>
               </a:ext>
             </a:extLst>
           </p:cNvPr>
@@ -23124,7 +23124,7 @@
     </p:spTree>
     <p:extLst>
       <p:ext uri="{BB962C8B-B14F-4D97-AF65-F5344CB8AC3E}">
-        <p14:creationId xmlns:p14="http://schemas.microsoft.com/office/powerpoint/2010/main" val="1353326507"/>
+        <p14:creationId xmlns:p14="http://schemas.microsoft.com/office/powerpoint/2010/main" val="1452701621"/>
       </p:ext>
     </p:extLst>
   </p:cSld>
@@ -23155,7 +23155,7 @@
           <p:cNvPr id="1" name="Slide Number Placeholder 5">
             <a:extLst xmlns:a="http://schemas.openxmlformats.org/drawingml/2006/main">
               <a:ext uri="{FF2B5EF4-FFF2-40B4-BE49-F238E27FC236}">
-                <a16:creationId xmlns:a16="http://schemas.microsoft.com/office/drawing/2014/main" id="{960B6032-F217-4E1A-A5DD-55BD6786A62D}"/>
+                <a16:creationId xmlns:a16="http://schemas.microsoft.com/office/drawing/2014/main" id="{821508BF-91E3-4E78-84B3-DCBD229C8660}"/>
               </a:ext>
             </a:extLst>
           </p:cNvPr>
@@ -23191,7 +23191,7 @@
           <p:nvPr/>
         </p:nvPicPr>
         <p:blipFill>
-          <a:blip xmlns:r="http://schemas.openxmlformats.org/officeDocument/2006/relationships" xmlns:a="http://schemas.openxmlformats.org/drawingml/2006/main" r:embed="R3ff038c27401436f"/>
+          <a:blip xmlns:r="http://schemas.openxmlformats.org/officeDocument/2006/relationships" xmlns:a="http://schemas.openxmlformats.org/drawingml/2006/main" r:embed="R7dc9c9e4be7b4005"/>
           <a:srcRect xmlns:a="http://schemas.openxmlformats.org/drawingml/2006/main" l="0" t="21875" r="0" b="21875"/>
           <a:stretch xmlns:a="http://schemas.openxmlformats.org/drawingml/2006/main">
             <a:fillRect l="0" t="0" r="0" b="0"/>
@@ -23212,7 +23212,7 @@
           <p:cNvPr id="3" name="">
             <a:extLst xmlns:a="http://schemas.openxmlformats.org/drawingml/2006/main">
               <a:ext uri="{FF2B5EF4-FFF2-40B4-BE49-F238E27FC236}">
-                <a16:creationId xmlns:a16="http://schemas.microsoft.com/office/drawing/2014/main" id="{37C0A5B3-3001-49E5-8E28-62C0BC9812CC}"/>
+                <a16:creationId xmlns:a16="http://schemas.microsoft.com/office/drawing/2014/main" id="{1EE6513C-032F-4295-83E4-6A5527FA59F0}"/>
               </a:ext>
             </a:extLst>
           </p:cNvPr>
@@ -23247,7 +23247,7 @@
           <p:cNvPr id="4" name="">
             <a:extLst xmlns:a="http://schemas.openxmlformats.org/drawingml/2006/main">
               <a:ext uri="{FF2B5EF4-FFF2-40B4-BE49-F238E27FC236}">
-                <a16:creationId xmlns:a16="http://schemas.microsoft.com/office/drawing/2014/main" id="{EA061724-D958-4361-8EC9-DC735E7CCC5A}"/>
+                <a16:creationId xmlns:a16="http://schemas.microsoft.com/office/drawing/2014/main" id="{78610F57-B1BD-4FCB-AC6F-D02DD75C015E}"/>
               </a:ext>
             </a:extLst>
           </p:cNvPr>
@@ -23282,7 +23282,7 @@
           <p:cNvPr id="5" name="">
             <a:extLst xmlns:a="http://schemas.openxmlformats.org/drawingml/2006/main">
               <a:ext uri="{FF2B5EF4-FFF2-40B4-BE49-F238E27FC236}">
-                <a16:creationId xmlns:a16="http://schemas.microsoft.com/office/drawing/2014/main" id="{AD3674FD-A324-4E71-85D4-DB14F54DE6FE}"/>
+                <a16:creationId xmlns:a16="http://schemas.microsoft.com/office/drawing/2014/main" id="{463E0690-8E42-47C6-AA8A-9A84601ED919}"/>
               </a:ext>
             </a:extLst>
           </p:cNvPr>
@@ -23319,7 +23319,7 @@
           <p:cNvPr id="6" name="">
             <a:extLst xmlns:a="http://schemas.openxmlformats.org/drawingml/2006/main">
               <a:ext uri="{FF2B5EF4-FFF2-40B4-BE49-F238E27FC236}">
-                <a16:creationId xmlns:a16="http://schemas.microsoft.com/office/drawing/2014/main" id="{5C9ED4C1-2CBF-459B-B2A3-748CB61308F6}"/>
+                <a16:creationId xmlns:a16="http://schemas.microsoft.com/office/drawing/2014/main" id="{26EE496C-91EE-4507-BA41-620A502A6B57}"/>
               </a:ext>
             </a:extLst>
           </p:cNvPr>
@@ -23356,7 +23356,7 @@
           <p:cNvPr id="7" name="">
             <a:extLst xmlns:a="http://schemas.openxmlformats.org/drawingml/2006/main">
               <a:ext uri="{FF2B5EF4-FFF2-40B4-BE49-F238E27FC236}">
-                <a16:creationId xmlns:a16="http://schemas.microsoft.com/office/drawing/2014/main" id="{2C93C675-C29A-47D6-A95E-24AF8B9A239A}"/>
+                <a16:creationId xmlns:a16="http://schemas.microsoft.com/office/drawing/2014/main" id="{1E6E88FD-CFDD-4533-A24B-E419EFE2301C}"/>
               </a:ext>
             </a:extLst>
           </p:cNvPr>
@@ -23393,7 +23393,7 @@
           <p:cNvPr id="8" name="">
             <a:extLst xmlns:a="http://schemas.openxmlformats.org/drawingml/2006/main">
               <a:ext uri="{FF2B5EF4-FFF2-40B4-BE49-F238E27FC236}">
-                <a16:creationId xmlns:a16="http://schemas.microsoft.com/office/drawing/2014/main" id="{2144EA5E-EF57-4E47-8F62-B02738BBC46C}"/>
+                <a16:creationId xmlns:a16="http://schemas.microsoft.com/office/drawing/2014/main" id="{BD002ACF-D3D4-4690-94C5-BC24553992B2}"/>
               </a:ext>
             </a:extLst>
           </p:cNvPr>
@@ -23430,7 +23430,7 @@
           <p:cNvPr id="9" name="">
             <a:extLst xmlns:a="http://schemas.openxmlformats.org/drawingml/2006/main">
               <a:ext uri="{FF2B5EF4-FFF2-40B4-BE49-F238E27FC236}">
-                <a16:creationId xmlns:a16="http://schemas.microsoft.com/office/drawing/2014/main" id="{3C652369-0534-4D72-9988-4AD43F7C2DE0}"/>
+                <a16:creationId xmlns:a16="http://schemas.microsoft.com/office/drawing/2014/main" id="{9CACEF77-A55B-4409-978E-7009E67CE1A6}"/>
               </a:ext>
             </a:extLst>
           </p:cNvPr>
@@ -23488,7 +23488,7 @@
           <p:cNvPr id="10" name="">
             <a:extLst xmlns:a="http://schemas.openxmlformats.org/drawingml/2006/main">
               <a:ext uri="{FF2B5EF4-FFF2-40B4-BE49-F238E27FC236}">
-                <a16:creationId xmlns:a16="http://schemas.microsoft.com/office/drawing/2014/main" id="{AF906821-3274-47D2-879E-A765EDF27DC4}"/>
+                <a16:creationId xmlns:a16="http://schemas.microsoft.com/office/drawing/2014/main" id="{8444F6E1-78AA-4AC4-B5C0-B09CC1FCB835}"/>
               </a:ext>
             </a:extLst>
           </p:cNvPr>
@@ -23546,7 +23546,7 @@
           <p:cNvPr id="11" name="">
             <a:extLst xmlns:a="http://schemas.openxmlformats.org/drawingml/2006/main">
               <a:ext uri="{FF2B5EF4-FFF2-40B4-BE49-F238E27FC236}">
-                <a16:creationId xmlns:a16="http://schemas.microsoft.com/office/drawing/2014/main" id="{5C403A5B-0F8E-48B1-92A8-DE383A156FE7}"/>
+                <a16:creationId xmlns:a16="http://schemas.microsoft.com/office/drawing/2014/main" id="{732F21EA-99B6-41B1-81E7-AFD1A955B794}"/>
               </a:ext>
             </a:extLst>
           </p:cNvPr>
@@ -23581,7 +23581,7 @@
           <p:cNvPr id="12" name="">
             <a:extLst xmlns:a="http://schemas.openxmlformats.org/drawingml/2006/main">
               <a:ext uri="{FF2B5EF4-FFF2-40B4-BE49-F238E27FC236}">
-                <a16:creationId xmlns:a16="http://schemas.microsoft.com/office/drawing/2014/main" id="{F3110198-4FB8-413D-B449-630BAEA24388}"/>
+                <a16:creationId xmlns:a16="http://schemas.microsoft.com/office/drawing/2014/main" id="{B0989534-8783-49BD-A476-01BB650091C9}"/>
               </a:ext>
             </a:extLst>
           </p:cNvPr>
@@ -23614,7 +23614,7 @@
           <p:cNvPr id="13" name="">
             <a:extLst xmlns:a="http://schemas.openxmlformats.org/drawingml/2006/main">
               <a:ext uri="{FF2B5EF4-FFF2-40B4-BE49-F238E27FC236}">
-                <a16:creationId xmlns:a16="http://schemas.microsoft.com/office/drawing/2014/main" id="{E8833FF9-FF1A-4B5C-BB8E-CE445B7AD35E}"/>
+                <a16:creationId xmlns:a16="http://schemas.microsoft.com/office/drawing/2014/main" id="{470C0455-423A-4383-8A6C-3CB4C01E4D91}"/>
               </a:ext>
             </a:extLst>
           </p:cNvPr>
@@ -23689,7 +23689,7 @@
           <p:cNvPr id="14" name="">
             <a:extLst xmlns:a="http://schemas.openxmlformats.org/drawingml/2006/main">
               <a:ext uri="{FF2B5EF4-FFF2-40B4-BE49-F238E27FC236}">
-                <a16:creationId xmlns:a16="http://schemas.microsoft.com/office/drawing/2014/main" id="{5769F0E5-92DE-4D55-8FEC-5C4962685E16}"/>
+                <a16:creationId xmlns:a16="http://schemas.microsoft.com/office/drawing/2014/main" id="{BC2E87CE-2484-4BFF-9C41-C6FADDF8F642}"/>
               </a:ext>
             </a:extLst>
           </p:cNvPr>
@@ -23724,19 +23724,19 @@
           <p:cNvPr id="15" name="">
             <a:extLst xmlns:a="http://schemas.openxmlformats.org/drawingml/2006/main">
               <a:ext uri="{FF2B5EF4-FFF2-40B4-BE49-F238E27FC236}">
-                <a16:creationId xmlns:a16="http://schemas.microsoft.com/office/drawing/2014/main" id="{FFC78A64-3BA5-4BEB-A242-D81655895698}"/>
-              </a:ext>
-            </a:extLst>
-          </p:cNvPr>
-          <p:cNvSpPr>
-            <a:spLocks xmlns:a="http://schemas.openxmlformats.org/drawingml/2006/main" noGrp="1"/>
-          </p:cNvSpPr>
-          <p:nvPr/>
-        </p:nvSpPr>
-        <p:spPr>
-          <a:xfrm xmlns:a="http://schemas.openxmlformats.org/drawingml/2006/main">
-            <a:off x="742950" y="2000250"/>
-            <a:ext cx="76200" cy="819150"/>
+                <a16:creationId xmlns:a16="http://schemas.microsoft.com/office/drawing/2014/main" id="{201E9DE1-C062-47E1-8FF6-C3585E4097B4}"/>
+              </a:ext>
+            </a:extLst>
+          </p:cNvPr>
+          <p:cNvSpPr>
+            <a:spLocks xmlns:a="http://schemas.openxmlformats.org/drawingml/2006/main" noGrp="1"/>
+          </p:cNvSpPr>
+          <p:nvPr/>
+        </p:nvSpPr>
+        <p:spPr>
+          <a:xfrm xmlns:a="http://schemas.openxmlformats.org/drawingml/2006/main">
+            <a:off x="790575" y="2047875"/>
+            <a:ext cx="57150" cy="723900"/>
           </a:xfrm>
           <a:prstGeom xmlns:a="http://schemas.openxmlformats.org/drawingml/2006/main" prst="rect">
             <a:avLst/>
@@ -23759,7 +23759,7 @@
           <p:cNvPr id="16" name="">
             <a:extLst xmlns:a="http://schemas.openxmlformats.org/drawingml/2006/main">
               <a:ext uri="{FF2B5EF4-FFF2-40B4-BE49-F238E27FC236}">
-                <a16:creationId xmlns:a16="http://schemas.microsoft.com/office/drawing/2014/main" id="{019DFC28-7443-4105-9398-ED29686CA418}"/>
+                <a16:creationId xmlns:a16="http://schemas.microsoft.com/office/drawing/2014/main" id="{C7A2CDDF-92B8-4B06-A971-3CD0556B6C3F}"/>
               </a:ext>
             </a:extLst>
           </p:cNvPr>
@@ -23817,7 +23817,7 @@
           <p:cNvPr id="17" name="">
             <a:extLst xmlns:a="http://schemas.openxmlformats.org/drawingml/2006/main">
               <a:ext uri="{FF2B5EF4-FFF2-40B4-BE49-F238E27FC236}">
-                <a16:creationId xmlns:a16="http://schemas.microsoft.com/office/drawing/2014/main" id="{D0F6DABD-DFAF-4DB8-9116-3017429B688A}"/>
+                <a16:creationId xmlns:a16="http://schemas.microsoft.com/office/drawing/2014/main" id="{212EA124-0C6D-4E82-857A-31208E63C9C2}"/>
               </a:ext>
             </a:extLst>
           </p:cNvPr>
@@ -23854,19 +23854,19 @@
           <p:cNvPr id="18" name="">
             <a:extLst xmlns:a="http://schemas.openxmlformats.org/drawingml/2006/main">
               <a:ext uri="{FF2B5EF4-FFF2-40B4-BE49-F238E27FC236}">
-                <a16:creationId xmlns:a16="http://schemas.microsoft.com/office/drawing/2014/main" id="{AD5873CD-65F1-4C0E-8CFB-2E312A0743D6}"/>
-              </a:ext>
-            </a:extLst>
-          </p:cNvPr>
-          <p:cNvSpPr>
-            <a:spLocks xmlns:a="http://schemas.openxmlformats.org/drawingml/2006/main" noGrp="1"/>
-          </p:cNvSpPr>
-          <p:nvPr/>
-        </p:nvSpPr>
-        <p:spPr>
-          <a:xfrm xmlns:a="http://schemas.openxmlformats.org/drawingml/2006/main">
-            <a:off x="876300" y="3276600"/>
-            <a:ext cx="4629150" cy="76200"/>
+                <a16:creationId xmlns:a16="http://schemas.microsoft.com/office/drawing/2014/main" id="{9EDCD5AF-D9FA-4BCC-9BB9-7390381832D4}"/>
+              </a:ext>
+            </a:extLst>
+          </p:cNvPr>
+          <p:cNvSpPr>
+            <a:spLocks xmlns:a="http://schemas.openxmlformats.org/drawingml/2006/main" noGrp="1"/>
+          </p:cNvSpPr>
+          <p:nvPr/>
+        </p:nvSpPr>
+        <p:spPr>
+          <a:xfrm xmlns:a="http://schemas.openxmlformats.org/drawingml/2006/main">
+            <a:off x="933450" y="3333750"/>
+            <a:ext cx="4514850" cy="57150"/>
           </a:xfrm>
           <a:prstGeom xmlns:a="http://schemas.openxmlformats.org/drawingml/2006/main" prst="rect">
             <a:avLst/>
@@ -23889,7 +23889,7 @@
           <p:cNvPr id="19" name="">
             <a:extLst xmlns:a="http://schemas.openxmlformats.org/drawingml/2006/main">
               <a:ext uri="{FF2B5EF4-FFF2-40B4-BE49-F238E27FC236}">
-                <a16:creationId xmlns:a16="http://schemas.microsoft.com/office/drawing/2014/main" id="{1FEC39B1-4D7C-40AD-A119-5FD294F0BD16}"/>
+                <a16:creationId xmlns:a16="http://schemas.microsoft.com/office/drawing/2014/main" id="{8E4B862E-CEA6-40B3-9FA1-E39221F8AA7C}"/>
               </a:ext>
             </a:extLst>
           </p:cNvPr>
@@ -23947,7 +23947,7 @@
           <p:cNvPr id="20" name="">
             <a:extLst xmlns:a="http://schemas.openxmlformats.org/drawingml/2006/main">
               <a:ext uri="{FF2B5EF4-FFF2-40B4-BE49-F238E27FC236}">
-                <a16:creationId xmlns:a16="http://schemas.microsoft.com/office/drawing/2014/main" id="{93F1EF7A-95A9-4BD8-8378-BF72056E8CA9}"/>
+                <a16:creationId xmlns:a16="http://schemas.microsoft.com/office/drawing/2014/main" id="{5F91277C-0396-47B7-ACA6-CB27272B11B7}"/>
               </a:ext>
             </a:extLst>
           </p:cNvPr>
@@ -24039,7 +24039,7 @@
           <p:cNvPr id="21" name="">
             <a:extLst xmlns:a="http://schemas.openxmlformats.org/drawingml/2006/main">
               <a:ext uri="{FF2B5EF4-FFF2-40B4-BE49-F238E27FC236}">
-                <a16:creationId xmlns:a16="http://schemas.microsoft.com/office/drawing/2014/main" id="{E1EDAFD3-C8D7-457B-9B8B-78DEE766E246}"/>
+                <a16:creationId xmlns:a16="http://schemas.microsoft.com/office/drawing/2014/main" id="{91481650-523F-4CF1-AF40-8E32B58DD8D5}"/>
               </a:ext>
             </a:extLst>
           </p:cNvPr>
@@ -24076,19 +24076,19 @@
           <p:cNvPr id="22" name="">
             <a:extLst xmlns:a="http://schemas.openxmlformats.org/drawingml/2006/main">
               <a:ext uri="{FF2B5EF4-FFF2-40B4-BE49-F238E27FC236}">
-                <a16:creationId xmlns:a16="http://schemas.microsoft.com/office/drawing/2014/main" id="{60605FE5-FDE2-495A-A88D-D1D6BAE2CE0B}"/>
-              </a:ext>
-            </a:extLst>
-          </p:cNvPr>
-          <p:cNvSpPr>
-            <a:spLocks xmlns:a="http://schemas.openxmlformats.org/drawingml/2006/main" noGrp="1"/>
-          </p:cNvSpPr>
-          <p:nvPr/>
-        </p:nvSpPr>
-        <p:spPr>
-          <a:xfrm xmlns:a="http://schemas.openxmlformats.org/drawingml/2006/main">
-            <a:off x="6667500" y="3276600"/>
-            <a:ext cx="4629150" cy="76200"/>
+                <a16:creationId xmlns:a16="http://schemas.microsoft.com/office/drawing/2014/main" id="{B7DC8406-B4A3-4DF4-B589-5289E6D96C76}"/>
+              </a:ext>
+            </a:extLst>
+          </p:cNvPr>
+          <p:cNvSpPr>
+            <a:spLocks xmlns:a="http://schemas.openxmlformats.org/drawingml/2006/main" noGrp="1"/>
+          </p:cNvSpPr>
+          <p:nvPr/>
+        </p:nvSpPr>
+        <p:spPr>
+          <a:xfrm xmlns:a="http://schemas.openxmlformats.org/drawingml/2006/main">
+            <a:off x="6724650" y="3333750"/>
+            <a:ext cx="4514850" cy="57150"/>
           </a:xfrm>
           <a:prstGeom xmlns:a="http://schemas.openxmlformats.org/drawingml/2006/main" prst="rect">
             <a:avLst/>
@@ -24111,7 +24111,7 @@
           <p:cNvPr id="23" name="">
             <a:extLst xmlns:a="http://schemas.openxmlformats.org/drawingml/2006/main">
               <a:ext uri="{FF2B5EF4-FFF2-40B4-BE49-F238E27FC236}">
-                <a16:creationId xmlns:a16="http://schemas.microsoft.com/office/drawing/2014/main" id="{DEED19F6-0E80-4E76-8505-EA4DF4BFD64B}"/>
+                <a16:creationId xmlns:a16="http://schemas.microsoft.com/office/drawing/2014/main" id="{E46AEC25-26E8-44AA-89F4-B71921DD7E03}"/>
               </a:ext>
             </a:extLst>
           </p:cNvPr>
@@ -24169,7 +24169,7 @@
           <p:cNvPr id="24" name="">
             <a:extLst xmlns:a="http://schemas.openxmlformats.org/drawingml/2006/main">
               <a:ext uri="{FF2B5EF4-FFF2-40B4-BE49-F238E27FC236}">
-                <a16:creationId xmlns:a16="http://schemas.microsoft.com/office/drawing/2014/main" id="{7AC83465-A985-4A2A-B939-948C31E510DC}"/>
+                <a16:creationId xmlns:a16="http://schemas.microsoft.com/office/drawing/2014/main" id="{F8E21D70-923A-4588-B711-106DD7E90244}"/>
               </a:ext>
             </a:extLst>
           </p:cNvPr>
@@ -24278,7 +24278,7 @@
           <p:cNvPr id="25" name="">
             <a:extLst xmlns:a="http://schemas.openxmlformats.org/drawingml/2006/main">
               <a:ext uri="{FF2B5EF4-FFF2-40B4-BE49-F238E27FC236}">
-                <a16:creationId xmlns:a16="http://schemas.microsoft.com/office/drawing/2014/main" id="{88D117A6-710E-4976-9D07-E300D60C6479}"/>
+                <a16:creationId xmlns:a16="http://schemas.microsoft.com/office/drawing/2014/main" id="{BA86B7A1-CAD8-48D2-A828-0B1EBC83360B}"/>
               </a:ext>
             </a:extLst>
           </p:cNvPr>
@@ -24311,7 +24311,7 @@
           <p:cNvPr id="26" name="">
             <a:extLst xmlns:a="http://schemas.openxmlformats.org/drawingml/2006/main">
               <a:ext uri="{FF2B5EF4-FFF2-40B4-BE49-F238E27FC236}">
-                <a16:creationId xmlns:a16="http://schemas.microsoft.com/office/drawing/2014/main" id="{EA418AA9-3DFC-4463-B899-74C8A4626888}"/>
+                <a16:creationId xmlns:a16="http://schemas.microsoft.com/office/drawing/2014/main" id="{4060898C-2D2B-46AA-8E1F-94C100446FDD}"/>
               </a:ext>
             </a:extLst>
           </p:cNvPr>
@@ -24365,7 +24365,7 @@
           <p:cNvPr id="27" name="">
             <a:extLst xmlns:a="http://schemas.openxmlformats.org/drawingml/2006/main">
               <a:ext uri="{FF2B5EF4-FFF2-40B4-BE49-F238E27FC236}">
-                <a16:creationId xmlns:a16="http://schemas.microsoft.com/office/drawing/2014/main" id="{45EEE04C-68EC-4952-8EFB-9C34941CB240}"/>
+                <a16:creationId xmlns:a16="http://schemas.microsoft.com/office/drawing/2014/main" id="{67E72423-C532-40C2-B81D-1A716F6F203A}"/>
               </a:ext>
             </a:extLst>
           </p:cNvPr>
@@ -24421,7 +24421,7 @@
     </p:spTree>
     <p:extLst>
       <p:ext uri="{BB962C8B-B14F-4D97-AF65-F5344CB8AC3E}">
-        <p14:creationId xmlns:p14="http://schemas.microsoft.com/office/powerpoint/2010/main" val="153437803"/>
+        <p14:creationId xmlns:p14="http://schemas.microsoft.com/office/powerpoint/2010/main" val="808700728"/>
       </p:ext>
     </p:extLst>
   </p:cSld>
@@ -24452,7 +24452,7 @@
           <p:cNvPr id="1" name="Slide Number Placeholder 5">
             <a:extLst xmlns:a="http://schemas.openxmlformats.org/drawingml/2006/main">
               <a:ext uri="{FF2B5EF4-FFF2-40B4-BE49-F238E27FC236}">
-                <a16:creationId xmlns:a16="http://schemas.microsoft.com/office/drawing/2014/main" id="{960B6032-F217-4E1A-A5DD-55BD6786A62D}"/>
+                <a16:creationId xmlns:a16="http://schemas.microsoft.com/office/drawing/2014/main" id="{821508BF-91E3-4E78-84B3-DCBD229C8660}"/>
               </a:ext>
             </a:extLst>
           </p:cNvPr>
@@ -24488,7 +24488,7 @@
           <p:nvPr/>
         </p:nvPicPr>
         <p:blipFill>
-          <a:blip xmlns:r="http://schemas.openxmlformats.org/officeDocument/2006/relationships" xmlns:a="http://schemas.openxmlformats.org/drawingml/2006/main" r:embed="Rbf053fbd68824788"/>
+          <a:blip xmlns:r="http://schemas.openxmlformats.org/officeDocument/2006/relationships" xmlns:a="http://schemas.openxmlformats.org/drawingml/2006/main" r:embed="R3e61cab364154a35"/>
           <a:srcRect xmlns:a="http://schemas.openxmlformats.org/drawingml/2006/main" l="0" t="21875" r="0" b="21875"/>
           <a:stretch xmlns:a="http://schemas.openxmlformats.org/drawingml/2006/main">
             <a:fillRect l="0" t="0" r="0" b="0"/>
@@ -24509,7 +24509,7 @@
           <p:cNvPr id="3" name="">
             <a:extLst xmlns:a="http://schemas.openxmlformats.org/drawingml/2006/main">
               <a:ext uri="{FF2B5EF4-FFF2-40B4-BE49-F238E27FC236}">
-                <a16:creationId xmlns:a16="http://schemas.microsoft.com/office/drawing/2014/main" id="{B56E641A-7C4B-42F9-A70B-B4BD3A8B1D94}"/>
+                <a16:creationId xmlns:a16="http://schemas.microsoft.com/office/drawing/2014/main" id="{656A6253-E556-40BA-BE3F-124296DD255C}"/>
               </a:ext>
             </a:extLst>
           </p:cNvPr>
@@ -24544,7 +24544,7 @@
           <p:cNvPr id="4" name="">
             <a:extLst xmlns:a="http://schemas.openxmlformats.org/drawingml/2006/main">
               <a:ext uri="{FF2B5EF4-FFF2-40B4-BE49-F238E27FC236}">
-                <a16:creationId xmlns:a16="http://schemas.microsoft.com/office/drawing/2014/main" id="{67956381-CF0D-4A1B-A02A-63950CF27469}"/>
+                <a16:creationId xmlns:a16="http://schemas.microsoft.com/office/drawing/2014/main" id="{468322F4-4ED7-4B36-9FB7-44BE1FBF6FD3}"/>
               </a:ext>
             </a:extLst>
           </p:cNvPr>
@@ -24579,7 +24579,7 @@
           <p:cNvPr id="5" name="">
             <a:extLst xmlns:a="http://schemas.openxmlformats.org/drawingml/2006/main">
               <a:ext uri="{FF2B5EF4-FFF2-40B4-BE49-F238E27FC236}">
-                <a16:creationId xmlns:a16="http://schemas.microsoft.com/office/drawing/2014/main" id="{B729E932-F9D4-47B9-9D47-3C7299A6F6CD}"/>
+                <a16:creationId xmlns:a16="http://schemas.microsoft.com/office/drawing/2014/main" id="{F4C778DD-2938-4232-A16C-EFAE108E43BC}"/>
               </a:ext>
             </a:extLst>
           </p:cNvPr>
@@ -24616,7 +24616,7 @@
           <p:cNvPr id="6" name="">
             <a:extLst xmlns:a="http://schemas.openxmlformats.org/drawingml/2006/main">
               <a:ext uri="{FF2B5EF4-FFF2-40B4-BE49-F238E27FC236}">
-                <a16:creationId xmlns:a16="http://schemas.microsoft.com/office/drawing/2014/main" id="{95FB93A9-42B4-4C74-AB89-615E4979E5C9}"/>
+                <a16:creationId xmlns:a16="http://schemas.microsoft.com/office/drawing/2014/main" id="{B4D58B5F-A4C3-4A19-BC72-89A0C571B4F6}"/>
               </a:ext>
             </a:extLst>
           </p:cNvPr>
@@ -24653,7 +24653,7 @@
           <p:cNvPr id="7" name="">
             <a:extLst xmlns:a="http://schemas.openxmlformats.org/drawingml/2006/main">
               <a:ext uri="{FF2B5EF4-FFF2-40B4-BE49-F238E27FC236}">
-                <a16:creationId xmlns:a16="http://schemas.microsoft.com/office/drawing/2014/main" id="{7303D7D1-F99D-4BC9-81F5-640F6EAA828A}"/>
+                <a16:creationId xmlns:a16="http://schemas.microsoft.com/office/drawing/2014/main" id="{BED0F2D0-38C7-49AD-B50F-3E68763A0D68}"/>
               </a:ext>
             </a:extLst>
           </p:cNvPr>
@@ -24690,7 +24690,7 @@
           <p:cNvPr id="8" name="">
             <a:extLst xmlns:a="http://schemas.openxmlformats.org/drawingml/2006/main">
               <a:ext uri="{FF2B5EF4-FFF2-40B4-BE49-F238E27FC236}">
-                <a16:creationId xmlns:a16="http://schemas.microsoft.com/office/drawing/2014/main" id="{20049261-E5F1-4D18-94FC-22D4761C5EB7}"/>
+                <a16:creationId xmlns:a16="http://schemas.microsoft.com/office/drawing/2014/main" id="{14D17EA6-52C6-491C-A9BC-AACD43FDAB7A}"/>
               </a:ext>
             </a:extLst>
           </p:cNvPr>
@@ -24727,7 +24727,7 @@
           <p:cNvPr id="9" name="">
             <a:extLst xmlns:a="http://schemas.openxmlformats.org/drawingml/2006/main">
               <a:ext uri="{FF2B5EF4-FFF2-40B4-BE49-F238E27FC236}">
-                <a16:creationId xmlns:a16="http://schemas.microsoft.com/office/drawing/2014/main" id="{18F60417-01FE-4775-A976-700748DC212A}"/>
+                <a16:creationId xmlns:a16="http://schemas.microsoft.com/office/drawing/2014/main" id="{7816107B-B4CD-40A3-9876-D8BB0B4B6301}"/>
               </a:ext>
             </a:extLst>
           </p:cNvPr>
@@ -24785,7 +24785,7 @@
           <p:cNvPr id="10" name="">
             <a:extLst xmlns:a="http://schemas.openxmlformats.org/drawingml/2006/main">
               <a:ext uri="{FF2B5EF4-FFF2-40B4-BE49-F238E27FC236}">
-                <a16:creationId xmlns:a16="http://schemas.microsoft.com/office/drawing/2014/main" id="{70700D39-9AAE-45C3-B367-E851F592A029}"/>
+                <a16:creationId xmlns:a16="http://schemas.microsoft.com/office/drawing/2014/main" id="{0A0A160A-5C40-410B-B497-2E1F85980B59}"/>
               </a:ext>
             </a:extLst>
           </p:cNvPr>
@@ -24843,7 +24843,7 @@
           <p:cNvPr id="11" name="">
             <a:extLst xmlns:a="http://schemas.openxmlformats.org/drawingml/2006/main">
               <a:ext uri="{FF2B5EF4-FFF2-40B4-BE49-F238E27FC236}">
-                <a16:creationId xmlns:a16="http://schemas.microsoft.com/office/drawing/2014/main" id="{6EB864DD-0385-4896-963C-C78E84AAAABA}"/>
+                <a16:creationId xmlns:a16="http://schemas.microsoft.com/office/drawing/2014/main" id="{61928987-0904-4AF7-B0B6-9C5293974BEE}"/>
               </a:ext>
             </a:extLst>
           </p:cNvPr>
@@ -24878,7 +24878,7 @@
           <p:cNvPr id="12" name="">
             <a:extLst xmlns:a="http://schemas.openxmlformats.org/drawingml/2006/main">
               <a:ext uri="{FF2B5EF4-FFF2-40B4-BE49-F238E27FC236}">
-                <a16:creationId xmlns:a16="http://schemas.microsoft.com/office/drawing/2014/main" id="{6EBDB0BA-9160-4551-979E-E68889A1C0F0}"/>
+                <a16:creationId xmlns:a16="http://schemas.microsoft.com/office/drawing/2014/main" id="{DD8A2B2C-E118-4F1A-88D0-10A3421B7662}"/>
               </a:ext>
             </a:extLst>
           </p:cNvPr>
@@ -24911,7 +24911,7 @@
           <p:cNvPr id="13" name="">
             <a:extLst xmlns:a="http://schemas.openxmlformats.org/drawingml/2006/main">
               <a:ext uri="{FF2B5EF4-FFF2-40B4-BE49-F238E27FC236}">
-                <a16:creationId xmlns:a16="http://schemas.microsoft.com/office/drawing/2014/main" id="{B3329B81-9F4E-4906-B7A2-BBEA6004BA94}"/>
+                <a16:creationId xmlns:a16="http://schemas.microsoft.com/office/drawing/2014/main" id="{F525F956-9FB8-4266-8731-32A45A613D25}"/>
               </a:ext>
             </a:extLst>
           </p:cNvPr>
@@ -24969,7 +24969,7 @@
           <p:cNvPr id="14" name="">
             <a:extLst xmlns:a="http://schemas.openxmlformats.org/drawingml/2006/main">
               <a:ext uri="{FF2B5EF4-FFF2-40B4-BE49-F238E27FC236}">
-                <a16:creationId xmlns:a16="http://schemas.microsoft.com/office/drawing/2014/main" id="{49746E7F-42BF-4992-9ACE-325F8D2E7731}"/>
+                <a16:creationId xmlns:a16="http://schemas.microsoft.com/office/drawing/2014/main" id="{65B4E764-5EBE-4E84-86B4-456948E1E427}"/>
               </a:ext>
             </a:extLst>
           </p:cNvPr>
@@ -25006,19 +25006,19 @@
           <p:cNvPr id="15" name="">
             <a:extLst xmlns:a="http://schemas.openxmlformats.org/drawingml/2006/main">
               <a:ext uri="{FF2B5EF4-FFF2-40B4-BE49-F238E27FC236}">
-                <a16:creationId xmlns:a16="http://schemas.microsoft.com/office/drawing/2014/main" id="{6CE174A4-2B59-4BC7-9F0B-D09E6FC33043}"/>
-              </a:ext>
-            </a:extLst>
-          </p:cNvPr>
-          <p:cNvSpPr>
-            <a:spLocks xmlns:a="http://schemas.openxmlformats.org/drawingml/2006/main" noGrp="1"/>
-          </p:cNvSpPr>
-          <p:nvPr/>
-        </p:nvSpPr>
-        <p:spPr>
-          <a:xfrm xmlns:a="http://schemas.openxmlformats.org/drawingml/2006/main">
-            <a:off x="685800" y="2095500"/>
-            <a:ext cx="3352800" cy="76200"/>
+                <a16:creationId xmlns:a16="http://schemas.microsoft.com/office/drawing/2014/main" id="{D5CA1698-6372-4367-A131-E5E3F4FA21B9}"/>
+              </a:ext>
+            </a:extLst>
+          </p:cNvPr>
+          <p:cNvSpPr>
+            <a:spLocks xmlns:a="http://schemas.openxmlformats.org/drawingml/2006/main" noGrp="1"/>
+          </p:cNvSpPr>
+          <p:nvPr/>
+        </p:nvSpPr>
+        <p:spPr>
+          <a:xfrm xmlns:a="http://schemas.openxmlformats.org/drawingml/2006/main">
+            <a:off x="742950" y="2152650"/>
+            <a:ext cx="3238500" cy="57150"/>
           </a:xfrm>
           <a:prstGeom xmlns:a="http://schemas.openxmlformats.org/drawingml/2006/main" prst="rect">
             <a:avLst/>
@@ -25041,7 +25041,7 @@
           <p:cNvPr id="16" name="">
             <a:extLst xmlns:a="http://schemas.openxmlformats.org/drawingml/2006/main">
               <a:ext uri="{FF2B5EF4-FFF2-40B4-BE49-F238E27FC236}">
-                <a16:creationId xmlns:a16="http://schemas.microsoft.com/office/drawing/2014/main" id="{B05E0454-6EA9-4EBF-8DA8-C4C7192F4348}"/>
+                <a16:creationId xmlns:a16="http://schemas.microsoft.com/office/drawing/2014/main" id="{4E2CE8CB-CED9-4FB9-9276-081039518CF9}"/>
               </a:ext>
             </a:extLst>
           </p:cNvPr>
@@ -25099,7 +25099,7 @@
           <p:cNvPr id="17" name="">
             <a:extLst xmlns:a="http://schemas.openxmlformats.org/drawingml/2006/main">
               <a:ext uri="{FF2B5EF4-FFF2-40B4-BE49-F238E27FC236}">
-                <a16:creationId xmlns:a16="http://schemas.microsoft.com/office/drawing/2014/main" id="{C4649313-56AA-496B-824E-D50E245B20B4}"/>
+                <a16:creationId xmlns:a16="http://schemas.microsoft.com/office/drawing/2014/main" id="{07047A2E-CD82-416D-A7CE-D0CD59460C9E}"/>
               </a:ext>
             </a:extLst>
           </p:cNvPr>
@@ -25191,7 +25191,7 @@
           <p:cNvPr id="18" name="">
             <a:extLst xmlns:a="http://schemas.openxmlformats.org/drawingml/2006/main">
               <a:ext uri="{FF2B5EF4-FFF2-40B4-BE49-F238E27FC236}">
-                <a16:creationId xmlns:a16="http://schemas.microsoft.com/office/drawing/2014/main" id="{0184974A-FF09-4584-B12A-034D7DDD35E8}"/>
+                <a16:creationId xmlns:a16="http://schemas.microsoft.com/office/drawing/2014/main" id="{94315ED1-2756-48FA-8987-5B46E5ECE0E6}"/>
               </a:ext>
             </a:extLst>
           </p:cNvPr>
@@ -25228,19 +25228,19 @@
           <p:cNvPr id="19" name="">
             <a:extLst xmlns:a="http://schemas.openxmlformats.org/drawingml/2006/main">
               <a:ext uri="{FF2B5EF4-FFF2-40B4-BE49-F238E27FC236}">
-                <a16:creationId xmlns:a16="http://schemas.microsoft.com/office/drawing/2014/main" id="{E23F92AF-FD7D-4B0F-BDB8-9D53A9310974}"/>
-              </a:ext>
-            </a:extLst>
-          </p:cNvPr>
-          <p:cNvSpPr>
-            <a:spLocks xmlns:a="http://schemas.openxmlformats.org/drawingml/2006/main" noGrp="1"/>
-          </p:cNvSpPr>
-          <p:nvPr/>
-        </p:nvSpPr>
-        <p:spPr>
-          <a:xfrm xmlns:a="http://schemas.openxmlformats.org/drawingml/2006/main">
-            <a:off x="4419600" y="2095500"/>
-            <a:ext cx="3352800" cy="76200"/>
+                <a16:creationId xmlns:a16="http://schemas.microsoft.com/office/drawing/2014/main" id="{A3D751BB-5026-4C46-88A6-4C4F3E0FBA6A}"/>
+              </a:ext>
+            </a:extLst>
+          </p:cNvPr>
+          <p:cNvSpPr>
+            <a:spLocks xmlns:a="http://schemas.openxmlformats.org/drawingml/2006/main" noGrp="1"/>
+          </p:cNvSpPr>
+          <p:nvPr/>
+        </p:nvSpPr>
+        <p:spPr>
+          <a:xfrm xmlns:a="http://schemas.openxmlformats.org/drawingml/2006/main">
+            <a:off x="4476750" y="2152650"/>
+            <a:ext cx="3238500" cy="57150"/>
           </a:xfrm>
           <a:prstGeom xmlns:a="http://schemas.openxmlformats.org/drawingml/2006/main" prst="rect">
             <a:avLst/>
@@ -25263,7 +25263,7 @@
           <p:cNvPr id="20" name="">
             <a:extLst xmlns:a="http://schemas.openxmlformats.org/drawingml/2006/main">
               <a:ext uri="{FF2B5EF4-FFF2-40B4-BE49-F238E27FC236}">
-                <a16:creationId xmlns:a16="http://schemas.microsoft.com/office/drawing/2014/main" id="{20E675AA-309E-4CB9-807E-88B206D99A31}"/>
+                <a16:creationId xmlns:a16="http://schemas.microsoft.com/office/drawing/2014/main" id="{AB6F301B-993E-49B6-AC04-7105C3BEE2F4}"/>
               </a:ext>
             </a:extLst>
           </p:cNvPr>
@@ -25321,7 +25321,7 @@
           <p:cNvPr id="21" name="">
             <a:extLst xmlns:a="http://schemas.openxmlformats.org/drawingml/2006/main">
               <a:ext uri="{FF2B5EF4-FFF2-40B4-BE49-F238E27FC236}">
-                <a16:creationId xmlns:a16="http://schemas.microsoft.com/office/drawing/2014/main" id="{4910533A-A2E1-44BF-98D7-CF068B07D858}"/>
+                <a16:creationId xmlns:a16="http://schemas.microsoft.com/office/drawing/2014/main" id="{A1AA2EE1-0D24-4279-AB16-6B2F4B9BC764}"/>
               </a:ext>
             </a:extLst>
           </p:cNvPr>
@@ -25413,7 +25413,7 @@
           <p:cNvPr id="22" name="">
             <a:extLst xmlns:a="http://schemas.openxmlformats.org/drawingml/2006/main">
               <a:ext uri="{FF2B5EF4-FFF2-40B4-BE49-F238E27FC236}">
-                <a16:creationId xmlns:a16="http://schemas.microsoft.com/office/drawing/2014/main" id="{73D257DD-637A-4942-B3A2-190BA6AE5B1B}"/>
+                <a16:creationId xmlns:a16="http://schemas.microsoft.com/office/drawing/2014/main" id="{CD47AF5D-F89D-40DA-93E4-F6D3BF63FE50}"/>
               </a:ext>
             </a:extLst>
           </p:cNvPr>
@@ -25450,19 +25450,19 @@
           <p:cNvPr id="23" name="">
             <a:extLst xmlns:a="http://schemas.openxmlformats.org/drawingml/2006/main">
               <a:ext uri="{FF2B5EF4-FFF2-40B4-BE49-F238E27FC236}">
-                <a16:creationId xmlns:a16="http://schemas.microsoft.com/office/drawing/2014/main" id="{CF1B0FCC-0D6C-4779-A734-BBADED6CEAA4}"/>
-              </a:ext>
-            </a:extLst>
-          </p:cNvPr>
-          <p:cNvSpPr>
-            <a:spLocks xmlns:a="http://schemas.openxmlformats.org/drawingml/2006/main" noGrp="1"/>
-          </p:cNvSpPr>
-          <p:nvPr/>
-        </p:nvSpPr>
-        <p:spPr>
-          <a:xfrm xmlns:a="http://schemas.openxmlformats.org/drawingml/2006/main">
-            <a:off x="8153400" y="2095500"/>
-            <a:ext cx="3352800" cy="76200"/>
+                <a16:creationId xmlns:a16="http://schemas.microsoft.com/office/drawing/2014/main" id="{715880A0-BF34-4B11-88DB-8EAA5DBDB5DD}"/>
+              </a:ext>
+            </a:extLst>
+          </p:cNvPr>
+          <p:cNvSpPr>
+            <a:spLocks xmlns:a="http://schemas.openxmlformats.org/drawingml/2006/main" noGrp="1"/>
+          </p:cNvSpPr>
+          <p:nvPr/>
+        </p:nvSpPr>
+        <p:spPr>
+          <a:xfrm xmlns:a="http://schemas.openxmlformats.org/drawingml/2006/main">
+            <a:off x="8210550" y="2152650"/>
+            <a:ext cx="3238500" cy="57150"/>
           </a:xfrm>
           <a:prstGeom xmlns:a="http://schemas.openxmlformats.org/drawingml/2006/main" prst="rect">
             <a:avLst/>
@@ -25485,7 +25485,7 @@
           <p:cNvPr id="24" name="">
             <a:extLst xmlns:a="http://schemas.openxmlformats.org/drawingml/2006/main">
               <a:ext uri="{FF2B5EF4-FFF2-40B4-BE49-F238E27FC236}">
-                <a16:creationId xmlns:a16="http://schemas.microsoft.com/office/drawing/2014/main" id="{8CDA3606-C969-4E62-94D7-694C9A2296E2}"/>
+                <a16:creationId xmlns:a16="http://schemas.microsoft.com/office/drawing/2014/main" id="{876FC3C3-4BD9-4428-9C2D-786846568C84}"/>
               </a:ext>
             </a:extLst>
           </p:cNvPr>
@@ -25543,7 +25543,7 @@
           <p:cNvPr id="25" name="">
             <a:extLst xmlns:a="http://schemas.openxmlformats.org/drawingml/2006/main">
               <a:ext uri="{FF2B5EF4-FFF2-40B4-BE49-F238E27FC236}">
-                <a16:creationId xmlns:a16="http://schemas.microsoft.com/office/drawing/2014/main" id="{8D246FE2-4E66-4C71-B17C-8E0567F6B4D6}"/>
+                <a16:creationId xmlns:a16="http://schemas.microsoft.com/office/drawing/2014/main" id="{DCF8B8C3-D60F-4512-9DE7-2D61074C1A70}"/>
               </a:ext>
             </a:extLst>
           </p:cNvPr>
@@ -25635,7 +25635,7 @@
           <p:cNvPr id="26" name="">
             <a:extLst xmlns:a="http://schemas.openxmlformats.org/drawingml/2006/main">
               <a:ext uri="{FF2B5EF4-FFF2-40B4-BE49-F238E27FC236}">
-                <a16:creationId xmlns:a16="http://schemas.microsoft.com/office/drawing/2014/main" id="{A146F6B0-3B79-4D46-8F10-12FCB71B4B0E}"/>
+                <a16:creationId xmlns:a16="http://schemas.microsoft.com/office/drawing/2014/main" id="{B1F1694A-E662-4B31-AC01-BC1405111C6F}"/>
               </a:ext>
             </a:extLst>
           </p:cNvPr>
@@ -25672,19 +25672,19 @@
           <p:cNvPr id="27" name="">
             <a:extLst xmlns:a="http://schemas.openxmlformats.org/drawingml/2006/main">
               <a:ext uri="{FF2B5EF4-FFF2-40B4-BE49-F238E27FC236}">
-                <a16:creationId xmlns:a16="http://schemas.microsoft.com/office/drawing/2014/main" id="{782B439B-EBA4-4D82-A73F-E845FDED8CF7}"/>
-              </a:ext>
-            </a:extLst>
-          </p:cNvPr>
-          <p:cNvSpPr>
-            <a:spLocks xmlns:a="http://schemas.openxmlformats.org/drawingml/2006/main" noGrp="1"/>
-          </p:cNvSpPr>
-          <p:nvPr/>
-        </p:nvSpPr>
-        <p:spPr>
-          <a:xfrm xmlns:a="http://schemas.openxmlformats.org/drawingml/2006/main">
-            <a:off x="1371600" y="3790950"/>
-            <a:ext cx="4400550" cy="76200"/>
+                <a16:creationId xmlns:a16="http://schemas.microsoft.com/office/drawing/2014/main" id="{D2103044-4D5B-4A15-9752-3132C46BD814}"/>
+              </a:ext>
+            </a:extLst>
+          </p:cNvPr>
+          <p:cNvSpPr>
+            <a:spLocks xmlns:a="http://schemas.openxmlformats.org/drawingml/2006/main" noGrp="1"/>
+          </p:cNvSpPr>
+          <p:nvPr/>
+        </p:nvSpPr>
+        <p:spPr>
+          <a:xfrm xmlns:a="http://schemas.openxmlformats.org/drawingml/2006/main">
+            <a:off x="1428750" y="3848100"/>
+            <a:ext cx="4286250" cy="57150"/>
           </a:xfrm>
           <a:prstGeom xmlns:a="http://schemas.openxmlformats.org/drawingml/2006/main" prst="rect">
             <a:avLst/>
@@ -25707,7 +25707,7 @@
           <p:cNvPr id="28" name="">
             <a:extLst xmlns:a="http://schemas.openxmlformats.org/drawingml/2006/main">
               <a:ext uri="{FF2B5EF4-FFF2-40B4-BE49-F238E27FC236}">
-                <a16:creationId xmlns:a16="http://schemas.microsoft.com/office/drawing/2014/main" id="{75548353-4574-41AE-BEF6-9DBB39FD1D69}"/>
+                <a16:creationId xmlns:a16="http://schemas.microsoft.com/office/drawing/2014/main" id="{BC50FA7B-E262-42E1-8D94-905E8E50AF13}"/>
               </a:ext>
             </a:extLst>
           </p:cNvPr>
@@ -25765,7 +25765,7 @@
           <p:cNvPr id="29" name="">
             <a:extLst xmlns:a="http://schemas.openxmlformats.org/drawingml/2006/main">
               <a:ext uri="{FF2B5EF4-FFF2-40B4-BE49-F238E27FC236}">
-                <a16:creationId xmlns:a16="http://schemas.microsoft.com/office/drawing/2014/main" id="{B8319447-569E-4CC2-9F95-E355D9D5C3F8}"/>
+                <a16:creationId xmlns:a16="http://schemas.microsoft.com/office/drawing/2014/main" id="{0CCFC469-1A1A-472A-9662-F3EC59F9DC57}"/>
               </a:ext>
             </a:extLst>
           </p:cNvPr>
@@ -25840,7 +25840,7 @@
           <p:cNvPr id="30" name="">
             <a:extLst xmlns:a="http://schemas.openxmlformats.org/drawingml/2006/main">
               <a:ext uri="{FF2B5EF4-FFF2-40B4-BE49-F238E27FC236}">
-                <a16:creationId xmlns:a16="http://schemas.microsoft.com/office/drawing/2014/main" id="{3B52DB75-0A80-447D-95CF-B79D38309109}"/>
+                <a16:creationId xmlns:a16="http://schemas.microsoft.com/office/drawing/2014/main" id="{168B1781-FCB8-48DB-AF55-952A714558B9}"/>
               </a:ext>
             </a:extLst>
           </p:cNvPr>
@@ -25877,19 +25877,19 @@
           <p:cNvPr id="31" name="">
             <a:extLst xmlns:a="http://schemas.openxmlformats.org/drawingml/2006/main">
               <a:ext uri="{FF2B5EF4-FFF2-40B4-BE49-F238E27FC236}">
-                <a16:creationId xmlns:a16="http://schemas.microsoft.com/office/drawing/2014/main" id="{DC505630-7505-44CD-BE37-51FB73855722}"/>
-              </a:ext>
-            </a:extLst>
-          </p:cNvPr>
-          <p:cNvSpPr>
-            <a:spLocks xmlns:a="http://schemas.openxmlformats.org/drawingml/2006/main" noGrp="1"/>
-          </p:cNvSpPr>
-          <p:nvPr/>
-        </p:nvSpPr>
-        <p:spPr>
-          <a:xfrm xmlns:a="http://schemas.openxmlformats.org/drawingml/2006/main">
-            <a:off x="6438900" y="3790950"/>
-            <a:ext cx="4400550" cy="76200"/>
+                <a16:creationId xmlns:a16="http://schemas.microsoft.com/office/drawing/2014/main" id="{4CD1A700-F2A1-42E5-B34C-B644A285E5D0}"/>
+              </a:ext>
+            </a:extLst>
+          </p:cNvPr>
+          <p:cNvSpPr>
+            <a:spLocks xmlns:a="http://schemas.openxmlformats.org/drawingml/2006/main" noGrp="1"/>
+          </p:cNvSpPr>
+          <p:nvPr/>
+        </p:nvSpPr>
+        <p:spPr>
+          <a:xfrm xmlns:a="http://schemas.openxmlformats.org/drawingml/2006/main">
+            <a:off x="6496050" y="3848100"/>
+            <a:ext cx="4286250" cy="57150"/>
           </a:xfrm>
           <a:prstGeom xmlns:a="http://schemas.openxmlformats.org/drawingml/2006/main" prst="rect">
             <a:avLst/>
@@ -25912,7 +25912,7 @@
           <p:cNvPr id="32" name="">
             <a:extLst xmlns:a="http://schemas.openxmlformats.org/drawingml/2006/main">
               <a:ext uri="{FF2B5EF4-FFF2-40B4-BE49-F238E27FC236}">
-                <a16:creationId xmlns:a16="http://schemas.microsoft.com/office/drawing/2014/main" id="{0EE4481E-6D9F-425F-8C79-7DF842AC6157}"/>
+                <a16:creationId xmlns:a16="http://schemas.microsoft.com/office/drawing/2014/main" id="{085013D8-17A0-4C62-B9BE-1BB21217A953}"/>
               </a:ext>
             </a:extLst>
           </p:cNvPr>
@@ -25970,7 +25970,7 @@
           <p:cNvPr id="33" name="">
             <a:extLst xmlns:a="http://schemas.openxmlformats.org/drawingml/2006/main">
               <a:ext uri="{FF2B5EF4-FFF2-40B4-BE49-F238E27FC236}">
-                <a16:creationId xmlns:a16="http://schemas.microsoft.com/office/drawing/2014/main" id="{970F7CEA-91FF-47A3-A856-9C37A011501A}"/>
+                <a16:creationId xmlns:a16="http://schemas.microsoft.com/office/drawing/2014/main" id="{17C0F41F-74B4-4A74-88FE-65DDEC5B9F86}"/>
               </a:ext>
             </a:extLst>
           </p:cNvPr>
@@ -26045,7 +26045,7 @@
           <p:cNvPr id="34" name="">
             <a:extLst xmlns:a="http://schemas.openxmlformats.org/drawingml/2006/main">
               <a:ext uri="{FF2B5EF4-FFF2-40B4-BE49-F238E27FC236}">
-                <a16:creationId xmlns:a16="http://schemas.microsoft.com/office/drawing/2014/main" id="{1EF9B889-196D-4215-86F8-A612533DF73E}"/>
+                <a16:creationId xmlns:a16="http://schemas.microsoft.com/office/drawing/2014/main" id="{54047C12-7449-49AB-BFFB-42DFFBDD53FD}"/>
               </a:ext>
             </a:extLst>
           </p:cNvPr>
@@ -26080,19 +26080,19 @@
           <p:cNvPr id="35" name="">
             <a:extLst xmlns:a="http://schemas.openxmlformats.org/drawingml/2006/main">
               <a:ext uri="{FF2B5EF4-FFF2-40B4-BE49-F238E27FC236}">
-                <a16:creationId xmlns:a16="http://schemas.microsoft.com/office/drawing/2014/main" id="{7AFFF3E5-57CE-4FD2-8C01-59B87FF0AFDF}"/>
-              </a:ext>
-            </a:extLst>
-          </p:cNvPr>
-          <p:cNvSpPr>
-            <a:spLocks xmlns:a="http://schemas.openxmlformats.org/drawingml/2006/main" noGrp="1"/>
-          </p:cNvSpPr>
-          <p:nvPr/>
-        </p:nvSpPr>
-        <p:spPr>
-          <a:xfrm xmlns:a="http://schemas.openxmlformats.org/drawingml/2006/main">
-            <a:off x="2038350" y="5581650"/>
-            <a:ext cx="76200" cy="609600"/>
+                <a16:creationId xmlns:a16="http://schemas.microsoft.com/office/drawing/2014/main" id="{E1DD22AF-27E9-41D3-B35E-431DCA164B48}"/>
+              </a:ext>
+            </a:extLst>
+          </p:cNvPr>
+          <p:cNvSpPr>
+            <a:spLocks xmlns:a="http://schemas.openxmlformats.org/drawingml/2006/main" noGrp="1"/>
+          </p:cNvSpPr>
+          <p:nvPr/>
+        </p:nvSpPr>
+        <p:spPr>
+          <a:xfrm xmlns:a="http://schemas.openxmlformats.org/drawingml/2006/main">
+            <a:off x="2085975" y="5629275"/>
+            <a:ext cx="57150" cy="514350"/>
           </a:xfrm>
           <a:prstGeom xmlns:a="http://schemas.openxmlformats.org/drawingml/2006/main" prst="rect">
             <a:avLst/>
@@ -26115,7 +26115,7 @@
           <p:cNvPr id="36" name="">
             <a:extLst xmlns:a="http://schemas.openxmlformats.org/drawingml/2006/main">
               <a:ext uri="{FF2B5EF4-FFF2-40B4-BE49-F238E27FC236}">
-                <a16:creationId xmlns:a16="http://schemas.microsoft.com/office/drawing/2014/main" id="{4FB74BBB-C939-49AF-AD23-2FA3CE1452F7}"/>
+                <a16:creationId xmlns:a16="http://schemas.microsoft.com/office/drawing/2014/main" id="{8C2257F2-B485-4643-8DC0-8250BF310F81}"/>
               </a:ext>
             </a:extLst>
           </p:cNvPr>
@@ -26173,7 +26173,7 @@
           <p:cNvPr id="37" name="">
             <a:extLst xmlns:a="http://schemas.openxmlformats.org/drawingml/2006/main">
               <a:ext uri="{FF2B5EF4-FFF2-40B4-BE49-F238E27FC236}">
-                <a16:creationId xmlns:a16="http://schemas.microsoft.com/office/drawing/2014/main" id="{C090045A-CC9C-4DBE-A732-E449B772851E}"/>
+                <a16:creationId xmlns:a16="http://schemas.microsoft.com/office/drawing/2014/main" id="{92E0BC1C-9BE0-41C8-943D-AA783C24255C}"/>
               </a:ext>
             </a:extLst>
           </p:cNvPr>
@@ -26229,7 +26229,7 @@
     </p:spTree>
     <p:extLst>
       <p:ext uri="{BB962C8B-B14F-4D97-AF65-F5344CB8AC3E}">
-        <p14:creationId xmlns:p14="http://schemas.microsoft.com/office/powerpoint/2010/main" val="509341327"/>
+        <p14:creationId xmlns:p14="http://schemas.microsoft.com/office/powerpoint/2010/main" val="250517712"/>
       </p:ext>
     </p:extLst>
   </p:cSld>

--- a/collections/organoid/presentation/brain-organoid-question-journey/outputs/output.pptx
+++ b/collections/organoid/presentation/brain-organoid-question-journey/outputs/output.pptx
@@ -2,24 +2,24 @@
 <file path=ppt/presentation.xml><?xml version="1.0" encoding="utf-8"?>
 <p:presentation xmlns:p="http://schemas.openxmlformats.org/presentationml/2006/main">
   <p:sldMasterIdLst>
-    <p:sldMasterId xmlns:r="http://schemas.openxmlformats.org/officeDocument/2006/relationships" id="2147483648" r:id="R9d5f23c3fb244cc5"/>
+    <p:sldMasterId xmlns:r="http://schemas.openxmlformats.org/officeDocument/2006/relationships" id="2147483648" r:id="Ra720de4a084f4755"/>
   </p:sldMasterIdLst>
   <p:notesMasterIdLst>
-    <p:notesMasterId xmlns:r="http://schemas.openxmlformats.org/officeDocument/2006/relationships" r:id="R08ccb8f0aa7c4714"/>
+    <p:notesMasterId xmlns:r="http://schemas.openxmlformats.org/officeDocument/2006/relationships" r:id="R76e9172c755447dd"/>
   </p:notesMasterIdLst>
   <p:sldIdLst>
-    <p:sldId xmlns:r="http://schemas.openxmlformats.org/officeDocument/2006/relationships" id="256" r:id="R59c04cdb98bb4e76"/>
-    <p:sldId xmlns:r="http://schemas.openxmlformats.org/officeDocument/2006/relationships" id="257" r:id="Re43cd2630277410c"/>
-    <p:sldId xmlns:r="http://schemas.openxmlformats.org/officeDocument/2006/relationships" id="258" r:id="R850cccb3155340c9"/>
-    <p:sldId xmlns:r="http://schemas.openxmlformats.org/officeDocument/2006/relationships" id="259" r:id="R44c3a14260a94b1f"/>
-    <p:sldId xmlns:r="http://schemas.openxmlformats.org/officeDocument/2006/relationships" id="260" r:id="Rd863f9937c1742be"/>
-    <p:sldId xmlns:r="http://schemas.openxmlformats.org/officeDocument/2006/relationships" id="261" r:id="R4f5ce802c25b416c"/>
-    <p:sldId xmlns:r="http://schemas.openxmlformats.org/officeDocument/2006/relationships" id="262" r:id="R86969ac528e94134"/>
-    <p:sldId xmlns:r="http://schemas.openxmlformats.org/officeDocument/2006/relationships" id="263" r:id="R4e9798e2c3f243a7"/>
-    <p:sldId xmlns:r="http://schemas.openxmlformats.org/officeDocument/2006/relationships" id="264" r:id="Ra03f0ca77dce4f87"/>
-    <p:sldId xmlns:r="http://schemas.openxmlformats.org/officeDocument/2006/relationships" id="265" r:id="Rda58534a370d4182"/>
-    <p:sldId xmlns:r="http://schemas.openxmlformats.org/officeDocument/2006/relationships" id="266" r:id="R8355f16126db44c6"/>
-    <p:sldId xmlns:r="http://schemas.openxmlformats.org/officeDocument/2006/relationships" id="267" r:id="R4a8ff96e7f67477f"/>
+    <p:sldId xmlns:r="http://schemas.openxmlformats.org/officeDocument/2006/relationships" id="256" r:id="R706598e340ab4774"/>
+    <p:sldId xmlns:r="http://schemas.openxmlformats.org/officeDocument/2006/relationships" id="257" r:id="Rf151b712f4924a42"/>
+    <p:sldId xmlns:r="http://schemas.openxmlformats.org/officeDocument/2006/relationships" id="258" r:id="Rba5018f0c18c4f2e"/>
+    <p:sldId xmlns:r="http://schemas.openxmlformats.org/officeDocument/2006/relationships" id="259" r:id="Raa0650c5e6b54bb0"/>
+    <p:sldId xmlns:r="http://schemas.openxmlformats.org/officeDocument/2006/relationships" id="260" r:id="Rd7aa1865fa7f4e98"/>
+    <p:sldId xmlns:r="http://schemas.openxmlformats.org/officeDocument/2006/relationships" id="261" r:id="R25e1ddfab04a466f"/>
+    <p:sldId xmlns:r="http://schemas.openxmlformats.org/officeDocument/2006/relationships" id="262" r:id="R23f84669911c4111"/>
+    <p:sldId xmlns:r="http://schemas.openxmlformats.org/officeDocument/2006/relationships" id="263" r:id="Re4f7d62a1da24a2e"/>
+    <p:sldId xmlns:r="http://schemas.openxmlformats.org/officeDocument/2006/relationships" id="264" r:id="R8cb5aae19a764d09"/>
+    <p:sldId xmlns:r="http://schemas.openxmlformats.org/officeDocument/2006/relationships" id="265" r:id="R7679f6f03c6f44f1"/>
+    <p:sldId xmlns:r="http://schemas.openxmlformats.org/officeDocument/2006/relationships" id="266" r:id="R138a8f5a0d8448b6"/>
+    <p:sldId xmlns:r="http://schemas.openxmlformats.org/officeDocument/2006/relationships" id="267" r:id="Refceca85e91f4fb0"/>
   </p:sldIdLst>
   <p:sldSz cx="12192000" cy="6858000"/>
   <p:notesSz cx="6858000" cy="9144000"/>
@@ -1905,7 +1905,7 @@
           <p:cNvPr id="1" name="Title 1">
             <a:extLst xmlns:a="http://schemas.openxmlformats.org/drawingml/2006/main">
               <a:ext uri="{FF2B5EF4-FFF2-40B4-BE49-F238E27FC236}">
-                <a16:creationId xmlns:a16="http://schemas.microsoft.com/office/drawing/2014/main" id="{B594F4D4-7053-413B-AA06-E9FB569EB34A}"/>
+                <a16:creationId xmlns:a16="http://schemas.microsoft.com/office/drawing/2014/main" id="{ECC3B110-96BF-440A-A1B6-CBD5345734F3}"/>
               </a:ext>
             </a:extLst>
           </p:cNvPr>
@@ -1936,7 +1936,7 @@
           <p:cNvPr id="2" name="Subtitle 2">
             <a:extLst xmlns:a="http://schemas.openxmlformats.org/drawingml/2006/main">
               <a:ext uri="{FF2B5EF4-FFF2-40B4-BE49-F238E27FC236}">
-                <a16:creationId xmlns:a16="http://schemas.microsoft.com/office/drawing/2014/main" id="{9C04EAD1-CBDD-4069-A4BA-AA4ECC609695}"/>
+                <a16:creationId xmlns:a16="http://schemas.microsoft.com/office/drawing/2014/main" id="{29F5EAB8-9E93-44B6-9A8F-677A9BD04D04}"/>
               </a:ext>
             </a:extLst>
           </p:cNvPr>
@@ -1999,7 +1999,7 @@
           <p:cNvPr id="3" name="Date Placeholder 3">
             <a:extLst xmlns:a="http://schemas.openxmlformats.org/drawingml/2006/main">
               <a:ext uri="{FF2B5EF4-FFF2-40B4-BE49-F238E27FC236}">
-                <a16:creationId xmlns:a16="http://schemas.microsoft.com/office/drawing/2014/main" id="{9A0EA56D-F042-4F53-B965-BDDD6EEC1F21}"/>
+                <a16:creationId xmlns:a16="http://schemas.microsoft.com/office/drawing/2014/main" id="{26BD9A40-0D29-4897-A413-E6B2E6BBFE8C}"/>
               </a:ext>
             </a:extLst>
           </p:cNvPr>
@@ -2020,7 +2020,7 @@
           <p:cNvPr id="4" name="Footer Placeholder 4">
             <a:extLst xmlns:a="http://schemas.openxmlformats.org/drawingml/2006/main">
               <a:ext uri="{FF2B5EF4-FFF2-40B4-BE49-F238E27FC236}">
-                <a16:creationId xmlns:a16="http://schemas.microsoft.com/office/drawing/2014/main" id="{9AE38D5D-2DA4-4A1B-89C3-83D6AD8F91A4}"/>
+                <a16:creationId xmlns:a16="http://schemas.microsoft.com/office/drawing/2014/main" id="{EDBB824B-FD9D-4EC1-92AF-BEFAFB3D13A3}"/>
               </a:ext>
             </a:extLst>
           </p:cNvPr>
@@ -2041,7 +2041,7 @@
           <p:cNvPr id="5" name="Slide Number Placeholder 5">
             <a:extLst xmlns:a="http://schemas.openxmlformats.org/drawingml/2006/main">
               <a:ext uri="{FF2B5EF4-FFF2-40B4-BE49-F238E27FC236}">
-                <a16:creationId xmlns:a16="http://schemas.microsoft.com/office/drawing/2014/main" id="{821508BF-91E3-4E78-84B3-DCBD229C8660}"/>
+                <a16:creationId xmlns:a16="http://schemas.microsoft.com/office/drawing/2014/main" id="{11DAD1DA-DD27-4C25-AFB7-E057ACC56EC0}"/>
               </a:ext>
             </a:extLst>
           </p:cNvPr>
@@ -2084,7 +2084,7 @@
           <p:cNvPr id="1" name="Slide Number Placeholder 5">
             <a:extLst xmlns:a="http://schemas.openxmlformats.org/drawingml/2006/main">
               <a:ext uri="{FF2B5EF4-FFF2-40B4-BE49-F238E27FC236}">
-                <a16:creationId xmlns:a16="http://schemas.microsoft.com/office/drawing/2014/main" id="{62CAA3AB-91E2-4307-BCD7-126A01FC7DD5}"/>
+                <a16:creationId xmlns:a16="http://schemas.microsoft.com/office/drawing/2014/main" id="{E3B211BA-1583-47AF-A4CA-25141E837EC6}"/>
               </a:ext>
             </a:extLst>
           </p:cNvPr>
@@ -2123,7 +2123,7 @@
   </p:cSld>
   <p:clrMap bg1="lt1" tx1="dk1" bg2="lt2" tx2="dk2" accent1="accent1" accent2="accent2" accent3="accent3" accent4="accent4" accent5="accent5" accent6="accent6" hlink="hlink" folHlink="folHlink"/>
   <p:sldLayoutIdLst>
-    <p:sldLayoutId xmlns:r="http://schemas.openxmlformats.org/officeDocument/2006/relationships" id="2147483649" r:id="R3f567348ddb84e00"/>
+    <p:sldLayoutId xmlns:r="http://schemas.openxmlformats.org/officeDocument/2006/relationships" id="2147483649" r:id="R2c25b305d1b64e69"/>
   </p:sldLayoutIdLst>
   <p:txStyles>
     <p:titleStyle>
@@ -2429,7 +2429,7 @@
           <p:cNvPr id="1" name="Slide Number Placeholder 5">
             <a:extLst xmlns:a="http://schemas.openxmlformats.org/drawingml/2006/main">
               <a:ext uri="{FF2B5EF4-FFF2-40B4-BE49-F238E27FC236}">
-                <a16:creationId xmlns:a16="http://schemas.microsoft.com/office/drawing/2014/main" id="{821508BF-91E3-4E78-84B3-DCBD229C8660}"/>
+                <a16:creationId xmlns:a16="http://schemas.microsoft.com/office/drawing/2014/main" id="{11DAD1DA-DD27-4C25-AFB7-E057ACC56EC0}"/>
               </a:ext>
             </a:extLst>
           </p:cNvPr>
@@ -2465,7 +2465,7 @@
           <p:nvPr/>
         </p:nvPicPr>
         <p:blipFill>
-          <a:blip xmlns:r="http://schemas.openxmlformats.org/officeDocument/2006/relationships" xmlns:a="http://schemas.openxmlformats.org/drawingml/2006/main" r:embed="R95fcabfdd68a4c73"/>
+          <a:blip xmlns:r="http://schemas.openxmlformats.org/officeDocument/2006/relationships" xmlns:a="http://schemas.openxmlformats.org/drawingml/2006/main" r:embed="R4a5e0179826d4513"/>
           <a:srcRect xmlns:a="http://schemas.openxmlformats.org/drawingml/2006/main" l="0" t="21875" r="0" b="21875"/>
           <a:stretch xmlns:a="http://schemas.openxmlformats.org/drawingml/2006/main">
             <a:fillRect l="0" t="0" r="0" b="0"/>
@@ -2486,7 +2486,7 @@
           <p:cNvPr id="3" name="">
             <a:extLst xmlns:a="http://schemas.openxmlformats.org/drawingml/2006/main">
               <a:ext uri="{FF2B5EF4-FFF2-40B4-BE49-F238E27FC236}">
-                <a16:creationId xmlns:a16="http://schemas.microsoft.com/office/drawing/2014/main" id="{4135203F-E698-4D19-9ED9-AA9E7F389468}"/>
+                <a16:creationId xmlns:a16="http://schemas.microsoft.com/office/drawing/2014/main" id="{77339EF0-8F1E-49C0-AA20-AB70083193BB}"/>
               </a:ext>
             </a:extLst>
           </p:cNvPr>
@@ -2521,7 +2521,7 @@
           <p:cNvPr id="4" name="">
             <a:extLst xmlns:a="http://schemas.openxmlformats.org/drawingml/2006/main">
               <a:ext uri="{FF2B5EF4-FFF2-40B4-BE49-F238E27FC236}">
-                <a16:creationId xmlns:a16="http://schemas.microsoft.com/office/drawing/2014/main" id="{F002336D-5AD2-4ADD-9262-822687A62145}"/>
+                <a16:creationId xmlns:a16="http://schemas.microsoft.com/office/drawing/2014/main" id="{E1E90DB7-7C6E-4CA9-B74D-C96B63075758}"/>
               </a:ext>
             </a:extLst>
           </p:cNvPr>
@@ -2556,7 +2556,7 @@
           <p:cNvPr id="5" name="">
             <a:extLst xmlns:a="http://schemas.openxmlformats.org/drawingml/2006/main">
               <a:ext uri="{FF2B5EF4-FFF2-40B4-BE49-F238E27FC236}">
-                <a16:creationId xmlns:a16="http://schemas.microsoft.com/office/drawing/2014/main" id="{E60CE9B8-B881-4A5E-852B-50DFE5D4C899}"/>
+                <a16:creationId xmlns:a16="http://schemas.microsoft.com/office/drawing/2014/main" id="{0F421652-C795-4D0C-AFAE-D290A4EE3A13}"/>
               </a:ext>
             </a:extLst>
           </p:cNvPr>
@@ -2593,7 +2593,7 @@
           <p:cNvPr id="6" name="">
             <a:extLst xmlns:a="http://schemas.openxmlformats.org/drawingml/2006/main">
               <a:ext uri="{FF2B5EF4-FFF2-40B4-BE49-F238E27FC236}">
-                <a16:creationId xmlns:a16="http://schemas.microsoft.com/office/drawing/2014/main" id="{00E68DD0-4A9D-48EE-9CA9-11594A5923B9}"/>
+                <a16:creationId xmlns:a16="http://schemas.microsoft.com/office/drawing/2014/main" id="{9CB5977C-0EA1-44AC-B755-7306A61E9120}"/>
               </a:ext>
             </a:extLst>
           </p:cNvPr>
@@ -2630,7 +2630,7 @@
           <p:cNvPr id="7" name="">
             <a:extLst xmlns:a="http://schemas.openxmlformats.org/drawingml/2006/main">
               <a:ext uri="{FF2B5EF4-FFF2-40B4-BE49-F238E27FC236}">
-                <a16:creationId xmlns:a16="http://schemas.microsoft.com/office/drawing/2014/main" id="{2400C212-CD8B-4A34-A88B-B75F0D6D7DCE}"/>
+                <a16:creationId xmlns:a16="http://schemas.microsoft.com/office/drawing/2014/main" id="{4263FC6D-6119-4C7D-A5AA-41DA7C26F210}"/>
               </a:ext>
             </a:extLst>
           </p:cNvPr>
@@ -2667,7 +2667,7 @@
           <p:cNvPr id="8" name="">
             <a:extLst xmlns:a="http://schemas.openxmlformats.org/drawingml/2006/main">
               <a:ext uri="{FF2B5EF4-FFF2-40B4-BE49-F238E27FC236}">
-                <a16:creationId xmlns:a16="http://schemas.microsoft.com/office/drawing/2014/main" id="{7B134B4A-E7E5-4705-AC43-C9BAEDCCF8C1}"/>
+                <a16:creationId xmlns:a16="http://schemas.microsoft.com/office/drawing/2014/main" id="{A696CBEF-BE49-4E98-AA90-A7990C6FBD55}"/>
               </a:ext>
             </a:extLst>
           </p:cNvPr>
@@ -2704,7 +2704,7 @@
           <p:cNvPr id="9" name="">
             <a:extLst xmlns:a="http://schemas.openxmlformats.org/drawingml/2006/main">
               <a:ext uri="{FF2B5EF4-FFF2-40B4-BE49-F238E27FC236}">
-                <a16:creationId xmlns:a16="http://schemas.microsoft.com/office/drawing/2014/main" id="{CD752D20-5207-4A92-A34C-CE7DEEADC505}"/>
+                <a16:creationId xmlns:a16="http://schemas.microsoft.com/office/drawing/2014/main" id="{C0E0E9BB-2157-4012-B01A-277177FA9844}"/>
               </a:ext>
             </a:extLst>
           </p:cNvPr>
@@ -2739,7 +2739,7 @@
           <p:cNvPr id="10" name="">
             <a:extLst xmlns:a="http://schemas.openxmlformats.org/drawingml/2006/main">
               <a:ext uri="{FF2B5EF4-FFF2-40B4-BE49-F238E27FC236}">
-                <a16:creationId xmlns:a16="http://schemas.microsoft.com/office/drawing/2014/main" id="{EC69A68A-A88F-4DE3-AEEE-D5E0C5E44BBC}"/>
+                <a16:creationId xmlns:a16="http://schemas.microsoft.com/office/drawing/2014/main" id="{FD976BF8-754B-44F4-9DB1-A41466A50AC4}"/>
               </a:ext>
             </a:extLst>
           </p:cNvPr>
@@ -2797,7 +2797,7 @@
           <p:cNvPr id="11" name="">
             <a:extLst xmlns:a="http://schemas.openxmlformats.org/drawingml/2006/main">
               <a:ext uri="{FF2B5EF4-FFF2-40B4-BE49-F238E27FC236}">
-                <a16:creationId xmlns:a16="http://schemas.microsoft.com/office/drawing/2014/main" id="{E7941980-7445-4161-AF3D-D1FA45EEB487}"/>
+                <a16:creationId xmlns:a16="http://schemas.microsoft.com/office/drawing/2014/main" id="{624584EA-83F8-4D56-B030-984AA4014673}"/>
               </a:ext>
             </a:extLst>
           </p:cNvPr>
@@ -2872,7 +2872,7 @@
           <p:cNvPr id="12" name="">
             <a:extLst xmlns:a="http://schemas.openxmlformats.org/drawingml/2006/main">
               <a:ext uri="{FF2B5EF4-FFF2-40B4-BE49-F238E27FC236}">
-                <a16:creationId xmlns:a16="http://schemas.microsoft.com/office/drawing/2014/main" id="{23443940-25C1-473E-B83A-9D790F00148F}"/>
+                <a16:creationId xmlns:a16="http://schemas.microsoft.com/office/drawing/2014/main" id="{90017FA9-3222-4781-8123-1E68877C4F88}"/>
               </a:ext>
             </a:extLst>
           </p:cNvPr>
@@ -2947,7 +2947,7 @@
           <p:cNvPr id="13" name="">
             <a:extLst xmlns:a="http://schemas.openxmlformats.org/drawingml/2006/main">
               <a:ext uri="{FF2B5EF4-FFF2-40B4-BE49-F238E27FC236}">
-                <a16:creationId xmlns:a16="http://schemas.microsoft.com/office/drawing/2014/main" id="{6F2D9D53-E184-40D5-AFA9-228AAD70F461}"/>
+                <a16:creationId xmlns:a16="http://schemas.microsoft.com/office/drawing/2014/main" id="{7DC74DB7-240D-4EB0-B65E-165F70538A6E}"/>
               </a:ext>
             </a:extLst>
           </p:cNvPr>
@@ -2984,7 +2984,7 @@
           <p:cNvPr id="14" name="">
             <a:extLst xmlns:a="http://schemas.openxmlformats.org/drawingml/2006/main">
               <a:ext uri="{FF2B5EF4-FFF2-40B4-BE49-F238E27FC236}">
-                <a16:creationId xmlns:a16="http://schemas.microsoft.com/office/drawing/2014/main" id="{EBAEC967-ACFE-4E53-B3E3-2E4511DB46F7}"/>
+                <a16:creationId xmlns:a16="http://schemas.microsoft.com/office/drawing/2014/main" id="{F51B54BB-F896-410C-B679-45317198576A}"/>
               </a:ext>
             </a:extLst>
           </p:cNvPr>
@@ -3042,7 +3042,7 @@
           <p:cNvPr id="15" name="">
             <a:extLst xmlns:a="http://schemas.openxmlformats.org/drawingml/2006/main">
               <a:ext uri="{FF2B5EF4-FFF2-40B4-BE49-F238E27FC236}">
-                <a16:creationId xmlns:a16="http://schemas.microsoft.com/office/drawing/2014/main" id="{7EAA2DD1-1CD7-4B6C-B1E8-0A2F6D0B6AC2}"/>
+                <a16:creationId xmlns:a16="http://schemas.microsoft.com/office/drawing/2014/main" id="{A35F55F9-A16E-41AB-A46C-74A7497B4540}"/>
               </a:ext>
             </a:extLst>
           </p:cNvPr>
@@ -3077,7 +3077,7 @@
           <p:cNvPr id="16" name="">
             <a:extLst xmlns:a="http://schemas.openxmlformats.org/drawingml/2006/main">
               <a:ext uri="{FF2B5EF4-FFF2-40B4-BE49-F238E27FC236}">
-                <a16:creationId xmlns:a16="http://schemas.microsoft.com/office/drawing/2014/main" id="{1C4BD8C6-BE38-4BD5-8BC5-54DAAABCBAAF}"/>
+                <a16:creationId xmlns:a16="http://schemas.microsoft.com/office/drawing/2014/main" id="{7C9690DE-6E36-422A-B665-1610B27D5F92}"/>
               </a:ext>
             </a:extLst>
           </p:cNvPr>
@@ -3112,7 +3112,7 @@
           <p:cNvPr id="17" name="">
             <a:extLst xmlns:a="http://schemas.openxmlformats.org/drawingml/2006/main">
               <a:ext uri="{FF2B5EF4-FFF2-40B4-BE49-F238E27FC236}">
-                <a16:creationId xmlns:a16="http://schemas.microsoft.com/office/drawing/2014/main" id="{D33EDC71-79A8-4931-B4CA-86057250E3FC}"/>
+                <a16:creationId xmlns:a16="http://schemas.microsoft.com/office/drawing/2014/main" id="{201A1D4E-6207-48CF-A878-C534EBFC9391}"/>
               </a:ext>
             </a:extLst>
           </p:cNvPr>
@@ -3166,7 +3166,7 @@
           <p:cNvPr id="18" name="">
             <a:extLst xmlns:a="http://schemas.openxmlformats.org/drawingml/2006/main">
               <a:ext uri="{FF2B5EF4-FFF2-40B4-BE49-F238E27FC236}">
-                <a16:creationId xmlns:a16="http://schemas.microsoft.com/office/drawing/2014/main" id="{BEF1D92C-E63F-451C-A480-03978193D812}"/>
+                <a16:creationId xmlns:a16="http://schemas.microsoft.com/office/drawing/2014/main" id="{0707ACEE-CB88-4FE1-8B86-F8AD4F556F02}"/>
               </a:ext>
             </a:extLst>
           </p:cNvPr>
@@ -3224,7 +3224,7 @@
           <p:cNvPr id="19" name="">
             <a:extLst xmlns:a="http://schemas.openxmlformats.org/drawingml/2006/main">
               <a:ext uri="{FF2B5EF4-FFF2-40B4-BE49-F238E27FC236}">
-                <a16:creationId xmlns:a16="http://schemas.microsoft.com/office/drawing/2014/main" id="{319C1CF3-F704-4E39-A329-17C738548D79}"/>
+                <a16:creationId xmlns:a16="http://schemas.microsoft.com/office/drawing/2014/main" id="{0CE1A79B-C8FB-4FB6-92CE-231B997E3177}"/>
               </a:ext>
             </a:extLst>
           </p:cNvPr>
@@ -3299,7 +3299,7 @@
           <p:cNvPr id="20" name="">
             <a:extLst xmlns:a="http://schemas.openxmlformats.org/drawingml/2006/main">
               <a:ext uri="{FF2B5EF4-FFF2-40B4-BE49-F238E27FC236}">
-                <a16:creationId xmlns:a16="http://schemas.microsoft.com/office/drawing/2014/main" id="{B89F2617-D745-4667-AA30-C989158B3EDD}"/>
+                <a16:creationId xmlns:a16="http://schemas.microsoft.com/office/drawing/2014/main" id="{ED06CEF5-37F7-42CC-A4EB-1C6D1814DC8C}"/>
               </a:ext>
             </a:extLst>
           </p:cNvPr>
@@ -3334,7 +3334,7 @@
           <p:cNvPr id="21" name="">
             <a:extLst xmlns:a="http://schemas.openxmlformats.org/drawingml/2006/main">
               <a:ext uri="{FF2B5EF4-FFF2-40B4-BE49-F238E27FC236}">
-                <a16:creationId xmlns:a16="http://schemas.microsoft.com/office/drawing/2014/main" id="{F673671E-8E5E-4CF4-A581-607848400CBB}"/>
+                <a16:creationId xmlns:a16="http://schemas.microsoft.com/office/drawing/2014/main" id="{98B54306-4633-45D7-97E0-70F57C759700}"/>
               </a:ext>
             </a:extLst>
           </p:cNvPr>
@@ -3369,7 +3369,7 @@
           <p:cNvPr id="22" name="">
             <a:extLst xmlns:a="http://schemas.openxmlformats.org/drawingml/2006/main">
               <a:ext uri="{FF2B5EF4-FFF2-40B4-BE49-F238E27FC236}">
-                <a16:creationId xmlns:a16="http://schemas.microsoft.com/office/drawing/2014/main" id="{85883388-EE98-4ABA-B710-B12A85F8283E}"/>
+                <a16:creationId xmlns:a16="http://schemas.microsoft.com/office/drawing/2014/main" id="{86EFA5F7-04F6-45AA-836B-35168A23A427}"/>
               </a:ext>
             </a:extLst>
           </p:cNvPr>
@@ -3423,7 +3423,7 @@
           <p:cNvPr id="23" name="">
             <a:extLst xmlns:a="http://schemas.openxmlformats.org/drawingml/2006/main">
               <a:ext uri="{FF2B5EF4-FFF2-40B4-BE49-F238E27FC236}">
-                <a16:creationId xmlns:a16="http://schemas.microsoft.com/office/drawing/2014/main" id="{B69E5FDD-FA9F-4DCD-8AED-8003A1551617}"/>
+                <a16:creationId xmlns:a16="http://schemas.microsoft.com/office/drawing/2014/main" id="{72C92222-0B5E-414C-B5DA-189656526C75}"/>
               </a:ext>
             </a:extLst>
           </p:cNvPr>
@@ -3481,7 +3481,7 @@
           <p:cNvPr id="24" name="">
             <a:extLst xmlns:a="http://schemas.openxmlformats.org/drawingml/2006/main">
               <a:ext uri="{FF2B5EF4-FFF2-40B4-BE49-F238E27FC236}">
-                <a16:creationId xmlns:a16="http://schemas.microsoft.com/office/drawing/2014/main" id="{3AF96F0F-8C4E-4FE9-AE39-5FB50D4824AF}"/>
+                <a16:creationId xmlns:a16="http://schemas.microsoft.com/office/drawing/2014/main" id="{7FF59A00-372A-4682-B2CC-2C9C290A4918}"/>
               </a:ext>
             </a:extLst>
           </p:cNvPr>
@@ -3556,7 +3556,7 @@
           <p:cNvPr id="25" name="">
             <a:extLst xmlns:a="http://schemas.openxmlformats.org/drawingml/2006/main">
               <a:ext uri="{FF2B5EF4-FFF2-40B4-BE49-F238E27FC236}">
-                <a16:creationId xmlns:a16="http://schemas.microsoft.com/office/drawing/2014/main" id="{C6D61AFA-D7FE-4725-A91D-D17ABBB5D7D1}"/>
+                <a16:creationId xmlns:a16="http://schemas.microsoft.com/office/drawing/2014/main" id="{252783C7-6DFC-4DA7-9500-EEB240153661}"/>
               </a:ext>
             </a:extLst>
           </p:cNvPr>
@@ -3591,7 +3591,7 @@
           <p:cNvPr id="26" name="">
             <a:extLst xmlns:a="http://schemas.openxmlformats.org/drawingml/2006/main">
               <a:ext uri="{FF2B5EF4-FFF2-40B4-BE49-F238E27FC236}">
-                <a16:creationId xmlns:a16="http://schemas.microsoft.com/office/drawing/2014/main" id="{D746FE9E-CC90-4F3B-9D81-5DFCBB28E910}"/>
+                <a16:creationId xmlns:a16="http://schemas.microsoft.com/office/drawing/2014/main" id="{B7C29A70-87D4-4A71-9A05-9EA01401BEA1}"/>
               </a:ext>
             </a:extLst>
           </p:cNvPr>
@@ -3626,7 +3626,7 @@
           <p:cNvPr id="27" name="">
             <a:extLst xmlns:a="http://schemas.openxmlformats.org/drawingml/2006/main">
               <a:ext uri="{FF2B5EF4-FFF2-40B4-BE49-F238E27FC236}">
-                <a16:creationId xmlns:a16="http://schemas.microsoft.com/office/drawing/2014/main" id="{5F01CB18-5DCF-4966-8D83-8D44440DD3A1}"/>
+                <a16:creationId xmlns:a16="http://schemas.microsoft.com/office/drawing/2014/main" id="{E711E8A7-C1B8-4764-A335-8BB85142CF29}"/>
               </a:ext>
             </a:extLst>
           </p:cNvPr>
@@ -3680,7 +3680,7 @@
           <p:cNvPr id="28" name="">
             <a:extLst xmlns:a="http://schemas.openxmlformats.org/drawingml/2006/main">
               <a:ext uri="{FF2B5EF4-FFF2-40B4-BE49-F238E27FC236}">
-                <a16:creationId xmlns:a16="http://schemas.microsoft.com/office/drawing/2014/main" id="{38A82BF3-59FF-4FD5-8EF0-C576631AF9A6}"/>
+                <a16:creationId xmlns:a16="http://schemas.microsoft.com/office/drawing/2014/main" id="{81A49393-3949-4C9B-844A-86B085ED23CA}"/>
               </a:ext>
             </a:extLst>
           </p:cNvPr>
@@ -3738,7 +3738,7 @@
           <p:cNvPr id="29" name="">
             <a:extLst xmlns:a="http://schemas.openxmlformats.org/drawingml/2006/main">
               <a:ext uri="{FF2B5EF4-FFF2-40B4-BE49-F238E27FC236}">
-                <a16:creationId xmlns:a16="http://schemas.microsoft.com/office/drawing/2014/main" id="{3825E9B4-D853-4F9D-B1E9-5413BB4D1330}"/>
+                <a16:creationId xmlns:a16="http://schemas.microsoft.com/office/drawing/2014/main" id="{FE218DBA-DC67-4031-B959-2FF0C09237B4}"/>
               </a:ext>
             </a:extLst>
           </p:cNvPr>
@@ -3813,7 +3813,7 @@
           <p:cNvPr id="30" name="">
             <a:extLst xmlns:a="http://schemas.openxmlformats.org/drawingml/2006/main">
               <a:ext uri="{FF2B5EF4-FFF2-40B4-BE49-F238E27FC236}">
-                <a16:creationId xmlns:a16="http://schemas.microsoft.com/office/drawing/2014/main" id="{F44F6050-7037-49F6-A12E-C7F54943E160}"/>
+                <a16:creationId xmlns:a16="http://schemas.microsoft.com/office/drawing/2014/main" id="{642E8CAB-A9F7-49B5-B474-2138F24B5FF4}"/>
               </a:ext>
             </a:extLst>
           </p:cNvPr>
@@ -3848,7 +3848,7 @@
           <p:cNvPr id="31" name="">
             <a:extLst xmlns:a="http://schemas.openxmlformats.org/drawingml/2006/main">
               <a:ext uri="{FF2B5EF4-FFF2-40B4-BE49-F238E27FC236}">
-                <a16:creationId xmlns:a16="http://schemas.microsoft.com/office/drawing/2014/main" id="{B859E255-CDBF-4CC8-8A36-9D74BB969747}"/>
+                <a16:creationId xmlns:a16="http://schemas.microsoft.com/office/drawing/2014/main" id="{40FEB741-0BD1-484C-A361-F0E7620550C3}"/>
               </a:ext>
             </a:extLst>
           </p:cNvPr>
@@ -3883,7 +3883,7 @@
           <p:cNvPr id="32" name="">
             <a:extLst xmlns:a="http://schemas.openxmlformats.org/drawingml/2006/main">
               <a:ext uri="{FF2B5EF4-FFF2-40B4-BE49-F238E27FC236}">
-                <a16:creationId xmlns:a16="http://schemas.microsoft.com/office/drawing/2014/main" id="{9F0FA9D2-C3B3-4313-9D01-FDA1EA49FA0B}"/>
+                <a16:creationId xmlns:a16="http://schemas.microsoft.com/office/drawing/2014/main" id="{FBD4AA92-CABF-4530-B0A2-BBBA95CD1452}"/>
               </a:ext>
             </a:extLst>
           </p:cNvPr>
@@ -3937,7 +3937,7 @@
           <p:cNvPr id="33" name="">
             <a:extLst xmlns:a="http://schemas.openxmlformats.org/drawingml/2006/main">
               <a:ext uri="{FF2B5EF4-FFF2-40B4-BE49-F238E27FC236}">
-                <a16:creationId xmlns:a16="http://schemas.microsoft.com/office/drawing/2014/main" id="{C57FF973-A83F-4FDC-A266-9244E2AED488}"/>
+                <a16:creationId xmlns:a16="http://schemas.microsoft.com/office/drawing/2014/main" id="{E9DC7D06-779F-436E-BAC4-57AAFDDCB4E5}"/>
               </a:ext>
             </a:extLst>
           </p:cNvPr>
@@ -3995,7 +3995,7 @@
           <p:cNvPr id="34" name="">
             <a:extLst xmlns:a="http://schemas.openxmlformats.org/drawingml/2006/main">
               <a:ext uri="{FF2B5EF4-FFF2-40B4-BE49-F238E27FC236}">
-                <a16:creationId xmlns:a16="http://schemas.microsoft.com/office/drawing/2014/main" id="{1FACE5B2-DFAB-42C6-8AD7-270A4CB16DC8}"/>
+                <a16:creationId xmlns:a16="http://schemas.microsoft.com/office/drawing/2014/main" id="{FFEC52A0-C393-4EC9-AB22-79CFA92640FF}"/>
               </a:ext>
             </a:extLst>
           </p:cNvPr>
@@ -4053,7 +4053,7 @@
           <p:cNvPr id="35" name="">
             <a:extLst xmlns:a="http://schemas.openxmlformats.org/drawingml/2006/main">
               <a:ext uri="{FF2B5EF4-FFF2-40B4-BE49-F238E27FC236}">
-                <a16:creationId xmlns:a16="http://schemas.microsoft.com/office/drawing/2014/main" id="{1334168C-A6D6-43CB-961F-FE7564216903}"/>
+                <a16:creationId xmlns:a16="http://schemas.microsoft.com/office/drawing/2014/main" id="{ED61FC1C-1CDB-4DEB-BC25-73D2A73BF2A4}"/>
               </a:ext>
             </a:extLst>
           </p:cNvPr>
@@ -4088,7 +4088,7 @@
           <p:cNvPr id="36" name="">
             <a:extLst xmlns:a="http://schemas.openxmlformats.org/drawingml/2006/main">
               <a:ext uri="{FF2B5EF4-FFF2-40B4-BE49-F238E27FC236}">
-                <a16:creationId xmlns:a16="http://schemas.microsoft.com/office/drawing/2014/main" id="{D84867D3-2FB7-4D2D-A937-C713BA877B99}"/>
+                <a16:creationId xmlns:a16="http://schemas.microsoft.com/office/drawing/2014/main" id="{04156535-8226-4246-862A-5F99B9CAC964}"/>
               </a:ext>
             </a:extLst>
           </p:cNvPr>
@@ -4123,7 +4123,7 @@
           <p:cNvPr id="37" name="">
             <a:extLst xmlns:a="http://schemas.openxmlformats.org/drawingml/2006/main">
               <a:ext uri="{FF2B5EF4-FFF2-40B4-BE49-F238E27FC236}">
-                <a16:creationId xmlns:a16="http://schemas.microsoft.com/office/drawing/2014/main" id="{76975BD1-441D-4269-9798-A31545D49925}"/>
+                <a16:creationId xmlns:a16="http://schemas.microsoft.com/office/drawing/2014/main" id="{3A193531-8B89-458C-A18F-E94B08A801CC}"/>
               </a:ext>
             </a:extLst>
           </p:cNvPr>
@@ -4158,7 +4158,7 @@
           <p:cNvPr id="38" name="">
             <a:extLst xmlns:a="http://schemas.openxmlformats.org/drawingml/2006/main">
               <a:ext uri="{FF2B5EF4-FFF2-40B4-BE49-F238E27FC236}">
-                <a16:creationId xmlns:a16="http://schemas.microsoft.com/office/drawing/2014/main" id="{10CC3D05-F315-4095-9AFB-F22242C53630}"/>
+                <a16:creationId xmlns:a16="http://schemas.microsoft.com/office/drawing/2014/main" id="{B541EDDF-FBDF-4495-8B72-D85B93719533}"/>
               </a:ext>
             </a:extLst>
           </p:cNvPr>
@@ -4212,7 +4212,7 @@
           <p:cNvPr id="39" name="">
             <a:extLst xmlns:a="http://schemas.openxmlformats.org/drawingml/2006/main">
               <a:ext uri="{FF2B5EF4-FFF2-40B4-BE49-F238E27FC236}">
-                <a16:creationId xmlns:a16="http://schemas.microsoft.com/office/drawing/2014/main" id="{CDE9561F-97F2-4C93-902F-E9E8D5749B1D}"/>
+                <a16:creationId xmlns:a16="http://schemas.microsoft.com/office/drawing/2014/main" id="{59BF53CB-18BC-4A04-937C-891FC0F725FE}"/>
               </a:ext>
             </a:extLst>
           </p:cNvPr>
@@ -4266,7 +4266,7 @@
           <p:cNvPr id="40" name="">
             <a:extLst xmlns:a="http://schemas.openxmlformats.org/drawingml/2006/main">
               <a:ext uri="{FF2B5EF4-FFF2-40B4-BE49-F238E27FC236}">
-                <a16:creationId xmlns:a16="http://schemas.microsoft.com/office/drawing/2014/main" id="{6A4F81BD-0428-4B49-9B45-8C0C10C9C3EF}"/>
+                <a16:creationId xmlns:a16="http://schemas.microsoft.com/office/drawing/2014/main" id="{04E28CDB-6AF1-460B-BCC7-4695FE294912}"/>
               </a:ext>
             </a:extLst>
           </p:cNvPr>
@@ -4322,7 +4322,7 @@
     </p:spTree>
     <p:extLst>
       <p:ext uri="{BB962C8B-B14F-4D97-AF65-F5344CB8AC3E}">
-        <p14:creationId xmlns:p14="http://schemas.microsoft.com/office/powerpoint/2010/main" val="721257982"/>
+        <p14:creationId xmlns:p14="http://schemas.microsoft.com/office/powerpoint/2010/main" val="257606857"/>
       </p:ext>
     </p:extLst>
   </p:cSld>
@@ -4353,7 +4353,7 @@
           <p:cNvPr id="1" name="Slide Number Placeholder 5">
             <a:extLst xmlns:a="http://schemas.openxmlformats.org/drawingml/2006/main">
               <a:ext uri="{FF2B5EF4-FFF2-40B4-BE49-F238E27FC236}">
-                <a16:creationId xmlns:a16="http://schemas.microsoft.com/office/drawing/2014/main" id="{821508BF-91E3-4E78-84B3-DCBD229C8660}"/>
+                <a16:creationId xmlns:a16="http://schemas.microsoft.com/office/drawing/2014/main" id="{11DAD1DA-DD27-4C25-AFB7-E057ACC56EC0}"/>
               </a:ext>
             </a:extLst>
           </p:cNvPr>
@@ -4389,7 +4389,7 @@
           <p:nvPr/>
         </p:nvPicPr>
         <p:blipFill>
-          <a:blip xmlns:r="http://schemas.openxmlformats.org/officeDocument/2006/relationships" xmlns:a="http://schemas.openxmlformats.org/drawingml/2006/main" r:embed="R03a9e792bcc64ca9"/>
+          <a:blip xmlns:r="http://schemas.openxmlformats.org/officeDocument/2006/relationships" xmlns:a="http://schemas.openxmlformats.org/drawingml/2006/main" r:embed="R424ef6cffc1642c7"/>
           <a:srcRect xmlns:a="http://schemas.openxmlformats.org/drawingml/2006/main" l="0" t="21875" r="0" b="21875"/>
           <a:stretch xmlns:a="http://schemas.openxmlformats.org/drawingml/2006/main">
             <a:fillRect l="0" t="0" r="0" b="0"/>
@@ -4410,7 +4410,7 @@
           <p:cNvPr id="3" name="">
             <a:extLst xmlns:a="http://schemas.openxmlformats.org/drawingml/2006/main">
               <a:ext uri="{FF2B5EF4-FFF2-40B4-BE49-F238E27FC236}">
-                <a16:creationId xmlns:a16="http://schemas.microsoft.com/office/drawing/2014/main" id="{C090206B-885B-49A4-87F9-56001D15FFE9}"/>
+                <a16:creationId xmlns:a16="http://schemas.microsoft.com/office/drawing/2014/main" id="{623F2AFF-CC7E-4AC0-AB3B-DC2829B510CE}"/>
               </a:ext>
             </a:extLst>
           </p:cNvPr>
@@ -4445,7 +4445,7 @@
           <p:cNvPr id="4" name="">
             <a:extLst xmlns:a="http://schemas.openxmlformats.org/drawingml/2006/main">
               <a:ext uri="{FF2B5EF4-FFF2-40B4-BE49-F238E27FC236}">
-                <a16:creationId xmlns:a16="http://schemas.microsoft.com/office/drawing/2014/main" id="{CE630618-38E2-4A04-8BD7-D2E34ADFAEF2}"/>
+                <a16:creationId xmlns:a16="http://schemas.microsoft.com/office/drawing/2014/main" id="{7204AA75-EFC1-4ED5-82C5-B311E6946706}"/>
               </a:ext>
             </a:extLst>
           </p:cNvPr>
@@ -4480,7 +4480,7 @@
           <p:cNvPr id="5" name="">
             <a:extLst xmlns:a="http://schemas.openxmlformats.org/drawingml/2006/main">
               <a:ext uri="{FF2B5EF4-FFF2-40B4-BE49-F238E27FC236}">
-                <a16:creationId xmlns:a16="http://schemas.microsoft.com/office/drawing/2014/main" id="{4C6E6C54-E008-49AF-B1AD-25ABCA4D407E}"/>
+                <a16:creationId xmlns:a16="http://schemas.microsoft.com/office/drawing/2014/main" id="{B7A9F4FF-0DEE-4649-9DA9-D9EE575F9178}"/>
               </a:ext>
             </a:extLst>
           </p:cNvPr>
@@ -4517,7 +4517,7 @@
           <p:cNvPr id="6" name="">
             <a:extLst xmlns:a="http://schemas.openxmlformats.org/drawingml/2006/main">
               <a:ext uri="{FF2B5EF4-FFF2-40B4-BE49-F238E27FC236}">
-                <a16:creationId xmlns:a16="http://schemas.microsoft.com/office/drawing/2014/main" id="{F4CAC02F-7DD5-49ED-BD52-6D07FABCAF21}"/>
+                <a16:creationId xmlns:a16="http://schemas.microsoft.com/office/drawing/2014/main" id="{F6F3F18B-4C9B-45DB-B551-EF438B2BA6C4}"/>
               </a:ext>
             </a:extLst>
           </p:cNvPr>
@@ -4554,7 +4554,7 @@
           <p:cNvPr id="7" name="">
             <a:extLst xmlns:a="http://schemas.openxmlformats.org/drawingml/2006/main">
               <a:ext uri="{FF2B5EF4-FFF2-40B4-BE49-F238E27FC236}">
-                <a16:creationId xmlns:a16="http://schemas.microsoft.com/office/drawing/2014/main" id="{DEF273E2-F613-450F-BEED-416797A72D31}"/>
+                <a16:creationId xmlns:a16="http://schemas.microsoft.com/office/drawing/2014/main" id="{CEBD44D9-2D14-4AD0-B1D8-0707EDF91C88}"/>
               </a:ext>
             </a:extLst>
           </p:cNvPr>
@@ -4591,7 +4591,7 @@
           <p:cNvPr id="8" name="">
             <a:extLst xmlns:a="http://schemas.openxmlformats.org/drawingml/2006/main">
               <a:ext uri="{FF2B5EF4-FFF2-40B4-BE49-F238E27FC236}">
-                <a16:creationId xmlns:a16="http://schemas.microsoft.com/office/drawing/2014/main" id="{BBAEAA45-E7A8-4F43-A567-9A84F16EE8C8}"/>
+                <a16:creationId xmlns:a16="http://schemas.microsoft.com/office/drawing/2014/main" id="{D7B94C80-F256-424D-8F67-9A2F43606FD2}"/>
               </a:ext>
             </a:extLst>
           </p:cNvPr>
@@ -4628,7 +4628,7 @@
           <p:cNvPr id="9" name="">
             <a:extLst xmlns:a="http://schemas.openxmlformats.org/drawingml/2006/main">
               <a:ext uri="{FF2B5EF4-FFF2-40B4-BE49-F238E27FC236}">
-                <a16:creationId xmlns:a16="http://schemas.microsoft.com/office/drawing/2014/main" id="{BB98C368-514D-49EF-9B03-CA2F28AB936D}"/>
+                <a16:creationId xmlns:a16="http://schemas.microsoft.com/office/drawing/2014/main" id="{35A4C472-5364-42FC-88A9-E5D599B6C190}"/>
               </a:ext>
             </a:extLst>
           </p:cNvPr>
@@ -4686,7 +4686,7 @@
           <p:cNvPr id="10" name="">
             <a:extLst xmlns:a="http://schemas.openxmlformats.org/drawingml/2006/main">
               <a:ext uri="{FF2B5EF4-FFF2-40B4-BE49-F238E27FC236}">
-                <a16:creationId xmlns:a16="http://schemas.microsoft.com/office/drawing/2014/main" id="{D095EBEB-D630-4598-860A-85029EB03516}"/>
+                <a16:creationId xmlns:a16="http://schemas.microsoft.com/office/drawing/2014/main" id="{719F0A68-7B70-4EBA-A9F4-74B048F7B9DE}"/>
               </a:ext>
             </a:extLst>
           </p:cNvPr>
@@ -4744,7 +4744,7 @@
           <p:cNvPr id="11" name="">
             <a:extLst xmlns:a="http://schemas.openxmlformats.org/drawingml/2006/main">
               <a:ext uri="{FF2B5EF4-FFF2-40B4-BE49-F238E27FC236}">
-                <a16:creationId xmlns:a16="http://schemas.microsoft.com/office/drawing/2014/main" id="{A83C7A56-B01E-452B-944A-40D6092C827B}"/>
+                <a16:creationId xmlns:a16="http://schemas.microsoft.com/office/drawing/2014/main" id="{FC83B0EE-043B-4647-9CF6-FFD79112508B}"/>
               </a:ext>
             </a:extLst>
           </p:cNvPr>
@@ -4779,7 +4779,7 @@
           <p:cNvPr id="12" name="">
             <a:extLst xmlns:a="http://schemas.openxmlformats.org/drawingml/2006/main">
               <a:ext uri="{FF2B5EF4-FFF2-40B4-BE49-F238E27FC236}">
-                <a16:creationId xmlns:a16="http://schemas.microsoft.com/office/drawing/2014/main" id="{AB755F0D-47EE-478E-BF83-21B250F03F23}"/>
+                <a16:creationId xmlns:a16="http://schemas.microsoft.com/office/drawing/2014/main" id="{0E462C1B-0B47-45C5-B8D9-9CB360F41E59}"/>
               </a:ext>
             </a:extLst>
           </p:cNvPr>
@@ -4812,7 +4812,7 @@
           <p:cNvPr id="13" name="">
             <a:extLst xmlns:a="http://schemas.openxmlformats.org/drawingml/2006/main">
               <a:ext uri="{FF2B5EF4-FFF2-40B4-BE49-F238E27FC236}">
-                <a16:creationId xmlns:a16="http://schemas.microsoft.com/office/drawing/2014/main" id="{A48E631F-75E0-4E5D-9F9C-243930E76F2B}"/>
+                <a16:creationId xmlns:a16="http://schemas.microsoft.com/office/drawing/2014/main" id="{000D2091-C43C-45E1-BB8F-87ACCF395DE7}"/>
               </a:ext>
             </a:extLst>
           </p:cNvPr>
@@ -4887,7 +4887,7 @@
           <p:cNvPr id="14" name="">
             <a:extLst xmlns:a="http://schemas.openxmlformats.org/drawingml/2006/main">
               <a:ext uri="{FF2B5EF4-FFF2-40B4-BE49-F238E27FC236}">
-                <a16:creationId xmlns:a16="http://schemas.microsoft.com/office/drawing/2014/main" id="{14566768-CE95-4E50-88D3-1976B67E604F}"/>
+                <a16:creationId xmlns:a16="http://schemas.microsoft.com/office/drawing/2014/main" id="{A39A005D-642F-497E-BE84-298709F61668}"/>
               </a:ext>
             </a:extLst>
           </p:cNvPr>
@@ -4922,7 +4922,7 @@
           <p:cNvPr id="15" name="">
             <a:extLst xmlns:a="http://schemas.openxmlformats.org/drawingml/2006/main">
               <a:ext uri="{FF2B5EF4-FFF2-40B4-BE49-F238E27FC236}">
-                <a16:creationId xmlns:a16="http://schemas.microsoft.com/office/drawing/2014/main" id="{CFA0D215-B8A3-4D8A-A018-F8082487700A}"/>
+                <a16:creationId xmlns:a16="http://schemas.microsoft.com/office/drawing/2014/main" id="{618071BB-5319-4D38-996E-0B0EBA6A44E2}"/>
               </a:ext>
             </a:extLst>
           </p:cNvPr>
@@ -4957,7 +4957,7 @@
           <p:cNvPr id="16" name="">
             <a:extLst xmlns:a="http://schemas.openxmlformats.org/drawingml/2006/main">
               <a:ext uri="{FF2B5EF4-FFF2-40B4-BE49-F238E27FC236}">
-                <a16:creationId xmlns:a16="http://schemas.microsoft.com/office/drawing/2014/main" id="{290714FC-6E44-4942-9621-EE10EA75EEBA}"/>
+                <a16:creationId xmlns:a16="http://schemas.microsoft.com/office/drawing/2014/main" id="{5E1CD931-8B0F-4B6F-8E28-03C319472D9B}"/>
               </a:ext>
             </a:extLst>
           </p:cNvPr>
@@ -5015,7 +5015,7 @@
           <p:cNvPr id="17" name="">
             <a:extLst xmlns:a="http://schemas.openxmlformats.org/drawingml/2006/main">
               <a:ext uri="{FF2B5EF4-FFF2-40B4-BE49-F238E27FC236}">
-                <a16:creationId xmlns:a16="http://schemas.microsoft.com/office/drawing/2014/main" id="{3EB95513-A959-476A-ADC1-67BC00887658}"/>
+                <a16:creationId xmlns:a16="http://schemas.microsoft.com/office/drawing/2014/main" id="{6F562108-5CDD-4039-BB04-7B2341DF6AD0}"/>
               </a:ext>
             </a:extLst>
           </p:cNvPr>
@@ -5158,7 +5158,7 @@
           <p:cNvPr id="18" name="">
             <a:extLst xmlns:a="http://schemas.openxmlformats.org/drawingml/2006/main">
               <a:ext uri="{FF2B5EF4-FFF2-40B4-BE49-F238E27FC236}">
-                <a16:creationId xmlns:a16="http://schemas.microsoft.com/office/drawing/2014/main" id="{C2A8236C-C152-4481-BDB6-98C3B25B2FC3}"/>
+                <a16:creationId xmlns:a16="http://schemas.microsoft.com/office/drawing/2014/main" id="{D4EA852D-A9E8-42AE-B16C-4A154163D93A}"/>
               </a:ext>
             </a:extLst>
           </p:cNvPr>
@@ -5193,7 +5193,7 @@
           <p:cNvPr id="19" name="">
             <a:extLst xmlns:a="http://schemas.openxmlformats.org/drawingml/2006/main">
               <a:ext uri="{FF2B5EF4-FFF2-40B4-BE49-F238E27FC236}">
-                <a16:creationId xmlns:a16="http://schemas.microsoft.com/office/drawing/2014/main" id="{601EFACC-FCE5-48F8-98DD-EE4705A35F09}"/>
+                <a16:creationId xmlns:a16="http://schemas.microsoft.com/office/drawing/2014/main" id="{57DCBBD3-69D6-48D3-8E4A-595D04778CB9}"/>
               </a:ext>
             </a:extLst>
           </p:cNvPr>
@@ -5228,7 +5228,7 @@
           <p:cNvPr id="20" name="">
             <a:extLst xmlns:a="http://schemas.openxmlformats.org/drawingml/2006/main">
               <a:ext uri="{FF2B5EF4-FFF2-40B4-BE49-F238E27FC236}">
-                <a16:creationId xmlns:a16="http://schemas.microsoft.com/office/drawing/2014/main" id="{9FC27201-7147-4468-850E-C43655CD1567}"/>
+                <a16:creationId xmlns:a16="http://schemas.microsoft.com/office/drawing/2014/main" id="{4A7EC523-EBD3-49E7-BA22-02A43D490ECF}"/>
               </a:ext>
             </a:extLst>
           </p:cNvPr>
@@ -5282,7 +5282,7 @@
           <p:cNvPr id="21" name="">
             <a:extLst xmlns:a="http://schemas.openxmlformats.org/drawingml/2006/main">
               <a:ext uri="{FF2B5EF4-FFF2-40B4-BE49-F238E27FC236}">
-                <a16:creationId xmlns:a16="http://schemas.microsoft.com/office/drawing/2014/main" id="{862B034F-C636-448E-AB2A-8FDFA5A3900E}"/>
+                <a16:creationId xmlns:a16="http://schemas.microsoft.com/office/drawing/2014/main" id="{D6A976FB-41E3-43D6-89A7-F29BE0943CF8}"/>
               </a:ext>
             </a:extLst>
           </p:cNvPr>
@@ -5340,7 +5340,7 @@
           <p:cNvPr id="22" name="">
             <a:extLst xmlns:a="http://schemas.openxmlformats.org/drawingml/2006/main">
               <a:ext uri="{FF2B5EF4-FFF2-40B4-BE49-F238E27FC236}">
-                <a16:creationId xmlns:a16="http://schemas.microsoft.com/office/drawing/2014/main" id="{BA918CF9-9B47-42D0-ACEC-9B5326B2FA06}"/>
+                <a16:creationId xmlns:a16="http://schemas.microsoft.com/office/drawing/2014/main" id="{4007E99E-1559-4516-BBBE-B2E32D56753D}"/>
               </a:ext>
             </a:extLst>
           </p:cNvPr>
@@ -5415,7 +5415,7 @@
           <p:cNvPr id="23" name="">
             <a:extLst xmlns:a="http://schemas.openxmlformats.org/drawingml/2006/main">
               <a:ext uri="{FF2B5EF4-FFF2-40B4-BE49-F238E27FC236}">
-                <a16:creationId xmlns:a16="http://schemas.microsoft.com/office/drawing/2014/main" id="{15249BC5-70E7-4141-9F95-7532F8817966}"/>
+                <a16:creationId xmlns:a16="http://schemas.microsoft.com/office/drawing/2014/main" id="{4CE63FCB-302A-4D6D-A56A-C51911049D08}"/>
               </a:ext>
             </a:extLst>
           </p:cNvPr>
@@ -5450,7 +5450,7 @@
           <p:cNvPr id="24" name="">
             <a:extLst xmlns:a="http://schemas.openxmlformats.org/drawingml/2006/main">
               <a:ext uri="{FF2B5EF4-FFF2-40B4-BE49-F238E27FC236}">
-                <a16:creationId xmlns:a16="http://schemas.microsoft.com/office/drawing/2014/main" id="{FB4C32C6-9C50-4BB3-8A5C-5E303E938582}"/>
+                <a16:creationId xmlns:a16="http://schemas.microsoft.com/office/drawing/2014/main" id="{B1F58676-E345-4A08-ABA0-567E2837CD8B}"/>
               </a:ext>
             </a:extLst>
           </p:cNvPr>
@@ -5485,7 +5485,7 @@
           <p:cNvPr id="25" name="">
             <a:extLst xmlns:a="http://schemas.openxmlformats.org/drawingml/2006/main">
               <a:ext uri="{FF2B5EF4-FFF2-40B4-BE49-F238E27FC236}">
-                <a16:creationId xmlns:a16="http://schemas.microsoft.com/office/drawing/2014/main" id="{F4B176F1-4CE1-4A8A-973C-720445D9B2A6}"/>
+                <a16:creationId xmlns:a16="http://schemas.microsoft.com/office/drawing/2014/main" id="{1D041E46-E249-4B52-BD30-D7EC3700AEFD}"/>
               </a:ext>
             </a:extLst>
           </p:cNvPr>
@@ -5539,7 +5539,7 @@
           <p:cNvPr id="26" name="">
             <a:extLst xmlns:a="http://schemas.openxmlformats.org/drawingml/2006/main">
               <a:ext uri="{FF2B5EF4-FFF2-40B4-BE49-F238E27FC236}">
-                <a16:creationId xmlns:a16="http://schemas.microsoft.com/office/drawing/2014/main" id="{E50A460D-4F07-4CD9-9C96-4BBB81C75849}"/>
+                <a16:creationId xmlns:a16="http://schemas.microsoft.com/office/drawing/2014/main" id="{3E0A5A79-591F-4B72-8434-EB1891B9FB30}"/>
               </a:ext>
             </a:extLst>
           </p:cNvPr>
@@ -5597,7 +5597,7 @@
           <p:cNvPr id="27" name="">
             <a:extLst xmlns:a="http://schemas.openxmlformats.org/drawingml/2006/main">
               <a:ext uri="{FF2B5EF4-FFF2-40B4-BE49-F238E27FC236}">
-                <a16:creationId xmlns:a16="http://schemas.microsoft.com/office/drawing/2014/main" id="{B36FC948-407C-4F7D-B563-B339142D7E60}"/>
+                <a16:creationId xmlns:a16="http://schemas.microsoft.com/office/drawing/2014/main" id="{9F092E6A-A0CD-40CC-9E19-7D7BD6E7DB6B}"/>
               </a:ext>
             </a:extLst>
           </p:cNvPr>
@@ -5672,7 +5672,7 @@
           <p:cNvPr id="28" name="">
             <a:extLst xmlns:a="http://schemas.openxmlformats.org/drawingml/2006/main">
               <a:ext uri="{FF2B5EF4-FFF2-40B4-BE49-F238E27FC236}">
-                <a16:creationId xmlns:a16="http://schemas.microsoft.com/office/drawing/2014/main" id="{B0AC76B9-DCE0-41F2-96E4-09F91EAD034E}"/>
+                <a16:creationId xmlns:a16="http://schemas.microsoft.com/office/drawing/2014/main" id="{F428376F-D6E1-4201-90E1-A60C46786BC5}"/>
               </a:ext>
             </a:extLst>
           </p:cNvPr>
@@ -5707,7 +5707,7 @@
           <p:cNvPr id="29" name="">
             <a:extLst xmlns:a="http://schemas.openxmlformats.org/drawingml/2006/main">
               <a:ext uri="{FF2B5EF4-FFF2-40B4-BE49-F238E27FC236}">
-                <a16:creationId xmlns:a16="http://schemas.microsoft.com/office/drawing/2014/main" id="{75738BC3-9EFA-48B4-947E-9FE958D74A1B}"/>
+                <a16:creationId xmlns:a16="http://schemas.microsoft.com/office/drawing/2014/main" id="{BAC12E30-6BBF-4FCB-85DD-EB2876A71351}"/>
               </a:ext>
             </a:extLst>
           </p:cNvPr>
@@ -5742,7 +5742,7 @@
           <p:cNvPr id="30" name="">
             <a:extLst xmlns:a="http://schemas.openxmlformats.org/drawingml/2006/main">
               <a:ext uri="{FF2B5EF4-FFF2-40B4-BE49-F238E27FC236}">
-                <a16:creationId xmlns:a16="http://schemas.microsoft.com/office/drawing/2014/main" id="{4CD06E01-89F8-40D6-A7D7-CBFDEF0B3CB9}"/>
+                <a16:creationId xmlns:a16="http://schemas.microsoft.com/office/drawing/2014/main" id="{0BB3EB25-A308-4505-8069-150550964851}"/>
               </a:ext>
             </a:extLst>
           </p:cNvPr>
@@ -5796,7 +5796,7 @@
           <p:cNvPr id="31" name="">
             <a:extLst xmlns:a="http://schemas.openxmlformats.org/drawingml/2006/main">
               <a:ext uri="{FF2B5EF4-FFF2-40B4-BE49-F238E27FC236}">
-                <a16:creationId xmlns:a16="http://schemas.microsoft.com/office/drawing/2014/main" id="{429F62EA-B903-4FFB-90AE-999C32E0589D}"/>
+                <a16:creationId xmlns:a16="http://schemas.microsoft.com/office/drawing/2014/main" id="{884B20DA-2E3C-4EF0-94B4-A62097EED93E}"/>
               </a:ext>
             </a:extLst>
           </p:cNvPr>
@@ -5854,7 +5854,7 @@
           <p:cNvPr id="32" name="">
             <a:extLst xmlns:a="http://schemas.openxmlformats.org/drawingml/2006/main">
               <a:ext uri="{FF2B5EF4-FFF2-40B4-BE49-F238E27FC236}">
-                <a16:creationId xmlns:a16="http://schemas.microsoft.com/office/drawing/2014/main" id="{32643431-C328-47EB-81B5-C16C7CBDAA5B}"/>
+                <a16:creationId xmlns:a16="http://schemas.microsoft.com/office/drawing/2014/main" id="{3DD76DCC-7E1B-414B-AEC4-5C1CF567093B}"/>
               </a:ext>
             </a:extLst>
           </p:cNvPr>
@@ -5929,7 +5929,7 @@
           <p:cNvPr id="33" name="">
             <a:extLst xmlns:a="http://schemas.openxmlformats.org/drawingml/2006/main">
               <a:ext uri="{FF2B5EF4-FFF2-40B4-BE49-F238E27FC236}">
-                <a16:creationId xmlns:a16="http://schemas.microsoft.com/office/drawing/2014/main" id="{3290A54D-C059-49E2-8D1F-F9789F275193}"/>
+                <a16:creationId xmlns:a16="http://schemas.microsoft.com/office/drawing/2014/main" id="{E91319EF-38C6-45BA-89BB-4FFC7ADE685C}"/>
               </a:ext>
             </a:extLst>
           </p:cNvPr>
@@ -5964,7 +5964,7 @@
           <p:cNvPr id="34" name="">
             <a:extLst xmlns:a="http://schemas.openxmlformats.org/drawingml/2006/main">
               <a:ext uri="{FF2B5EF4-FFF2-40B4-BE49-F238E27FC236}">
-                <a16:creationId xmlns:a16="http://schemas.microsoft.com/office/drawing/2014/main" id="{D92DE7DA-95B4-4ECE-95AE-74465A3E666F}"/>
+                <a16:creationId xmlns:a16="http://schemas.microsoft.com/office/drawing/2014/main" id="{BB5F76A5-F66A-4421-B3C4-0E5772F13C14}"/>
               </a:ext>
             </a:extLst>
           </p:cNvPr>
@@ -5999,7 +5999,7 @@
           <p:cNvPr id="35" name="">
             <a:extLst xmlns:a="http://schemas.openxmlformats.org/drawingml/2006/main">
               <a:ext uri="{FF2B5EF4-FFF2-40B4-BE49-F238E27FC236}">
-                <a16:creationId xmlns:a16="http://schemas.microsoft.com/office/drawing/2014/main" id="{0E6E3534-F705-403F-A19A-7B0319122791}"/>
+                <a16:creationId xmlns:a16="http://schemas.microsoft.com/office/drawing/2014/main" id="{DB251601-555A-4362-8623-B3FD1AE0E768}"/>
               </a:ext>
             </a:extLst>
           </p:cNvPr>
@@ -6053,7 +6053,7 @@
           <p:cNvPr id="36" name="">
             <a:extLst xmlns:a="http://schemas.openxmlformats.org/drawingml/2006/main">
               <a:ext uri="{FF2B5EF4-FFF2-40B4-BE49-F238E27FC236}">
-                <a16:creationId xmlns:a16="http://schemas.microsoft.com/office/drawing/2014/main" id="{9945486C-2AE1-45F0-8F4F-9AF64D26B3D7}"/>
+                <a16:creationId xmlns:a16="http://schemas.microsoft.com/office/drawing/2014/main" id="{1793DA0B-89FD-4F3E-B8D5-158D48C640EE}"/>
               </a:ext>
             </a:extLst>
           </p:cNvPr>
@@ -6111,7 +6111,7 @@
           <p:cNvPr id="37" name="">
             <a:extLst xmlns:a="http://schemas.openxmlformats.org/drawingml/2006/main">
               <a:ext uri="{FF2B5EF4-FFF2-40B4-BE49-F238E27FC236}">
-                <a16:creationId xmlns:a16="http://schemas.microsoft.com/office/drawing/2014/main" id="{6F841BF1-1C2D-4BB2-8D1B-4624257CC4E8}"/>
+                <a16:creationId xmlns:a16="http://schemas.microsoft.com/office/drawing/2014/main" id="{53C14694-FC53-4A6C-B537-A0858096A52E}"/>
               </a:ext>
             </a:extLst>
           </p:cNvPr>
@@ -6186,7 +6186,7 @@
           <p:cNvPr id="38" name="">
             <a:extLst xmlns:a="http://schemas.openxmlformats.org/drawingml/2006/main">
               <a:ext uri="{FF2B5EF4-FFF2-40B4-BE49-F238E27FC236}">
-                <a16:creationId xmlns:a16="http://schemas.microsoft.com/office/drawing/2014/main" id="{12191C65-6305-4773-9A31-E7A31227FC17}"/>
+                <a16:creationId xmlns:a16="http://schemas.microsoft.com/office/drawing/2014/main" id="{D7BAA1E0-7EEA-4CC0-BBFB-ADCE039FDE86}"/>
               </a:ext>
             </a:extLst>
           </p:cNvPr>
@@ -6221,7 +6221,7 @@
           <p:cNvPr id="39" name="">
             <a:extLst xmlns:a="http://schemas.openxmlformats.org/drawingml/2006/main">
               <a:ext uri="{FF2B5EF4-FFF2-40B4-BE49-F238E27FC236}">
-                <a16:creationId xmlns:a16="http://schemas.microsoft.com/office/drawing/2014/main" id="{FD06B8F0-4F4A-4A9D-A8CC-228B32D7B011}"/>
+                <a16:creationId xmlns:a16="http://schemas.microsoft.com/office/drawing/2014/main" id="{D28B03EA-6C2F-427A-8C05-17FCA9F12F67}"/>
               </a:ext>
             </a:extLst>
           </p:cNvPr>
@@ -6256,7 +6256,7 @@
           <p:cNvPr id="40" name="">
             <a:extLst xmlns:a="http://schemas.openxmlformats.org/drawingml/2006/main">
               <a:ext uri="{FF2B5EF4-FFF2-40B4-BE49-F238E27FC236}">
-                <a16:creationId xmlns:a16="http://schemas.microsoft.com/office/drawing/2014/main" id="{75E692B1-C672-47D7-A6F5-8C184FFB82FA}"/>
+                <a16:creationId xmlns:a16="http://schemas.microsoft.com/office/drawing/2014/main" id="{77291D1D-910F-46C3-B472-3A9B4F565DAF}"/>
               </a:ext>
             </a:extLst>
           </p:cNvPr>
@@ -6310,7 +6310,7 @@
           <p:cNvPr id="41" name="">
             <a:extLst xmlns:a="http://schemas.openxmlformats.org/drawingml/2006/main">
               <a:ext uri="{FF2B5EF4-FFF2-40B4-BE49-F238E27FC236}">
-                <a16:creationId xmlns:a16="http://schemas.microsoft.com/office/drawing/2014/main" id="{D05C581A-B066-4D42-B89B-AC2D3EB58777}"/>
+                <a16:creationId xmlns:a16="http://schemas.microsoft.com/office/drawing/2014/main" id="{2246C00D-59EE-4051-8AF7-51BF38AC0A41}"/>
               </a:ext>
             </a:extLst>
           </p:cNvPr>
@@ -6368,7 +6368,7 @@
           <p:cNvPr id="42" name="">
             <a:extLst xmlns:a="http://schemas.openxmlformats.org/drawingml/2006/main">
               <a:ext uri="{FF2B5EF4-FFF2-40B4-BE49-F238E27FC236}">
-                <a16:creationId xmlns:a16="http://schemas.microsoft.com/office/drawing/2014/main" id="{1780D057-0E44-48D7-B328-730F0D168444}"/>
+                <a16:creationId xmlns:a16="http://schemas.microsoft.com/office/drawing/2014/main" id="{C977EB38-FD83-4A0F-83DB-EB02A3C88DC2}"/>
               </a:ext>
             </a:extLst>
           </p:cNvPr>
@@ -6443,7 +6443,7 @@
           <p:cNvPr id="43" name="">
             <a:extLst xmlns:a="http://schemas.openxmlformats.org/drawingml/2006/main">
               <a:ext uri="{FF2B5EF4-FFF2-40B4-BE49-F238E27FC236}">
-                <a16:creationId xmlns:a16="http://schemas.microsoft.com/office/drawing/2014/main" id="{FB0D0291-5949-414B-86F5-EFEF2925819E}"/>
+                <a16:creationId xmlns:a16="http://schemas.microsoft.com/office/drawing/2014/main" id="{F168BD5F-1630-4092-81B3-F1356D8222C4}"/>
               </a:ext>
             </a:extLst>
           </p:cNvPr>
@@ -6478,7 +6478,7 @@
           <p:cNvPr id="44" name="">
             <a:extLst xmlns:a="http://schemas.openxmlformats.org/drawingml/2006/main">
               <a:ext uri="{FF2B5EF4-FFF2-40B4-BE49-F238E27FC236}">
-                <a16:creationId xmlns:a16="http://schemas.microsoft.com/office/drawing/2014/main" id="{8516B33C-0726-4487-8121-19C8F6343A98}"/>
+                <a16:creationId xmlns:a16="http://schemas.microsoft.com/office/drawing/2014/main" id="{0F1138DF-5D54-498E-AA5C-C6486FD7DFE7}"/>
               </a:ext>
             </a:extLst>
           </p:cNvPr>
@@ -6513,7 +6513,7 @@
           <p:cNvPr id="45" name="">
             <a:extLst xmlns:a="http://schemas.openxmlformats.org/drawingml/2006/main">
               <a:ext uri="{FF2B5EF4-FFF2-40B4-BE49-F238E27FC236}">
-                <a16:creationId xmlns:a16="http://schemas.microsoft.com/office/drawing/2014/main" id="{E87FA2F6-CB1F-4CD9-85F6-13CDBA6DF8BC}"/>
+                <a16:creationId xmlns:a16="http://schemas.microsoft.com/office/drawing/2014/main" id="{19759746-2104-43DD-950B-8BC88684D74F}"/>
               </a:ext>
             </a:extLst>
           </p:cNvPr>
@@ -6567,7 +6567,7 @@
           <p:cNvPr id="46" name="">
             <a:extLst xmlns:a="http://schemas.openxmlformats.org/drawingml/2006/main">
               <a:ext uri="{FF2B5EF4-FFF2-40B4-BE49-F238E27FC236}">
-                <a16:creationId xmlns:a16="http://schemas.microsoft.com/office/drawing/2014/main" id="{19ED3336-5F22-4262-9C07-4425BABE5F0E}"/>
+                <a16:creationId xmlns:a16="http://schemas.microsoft.com/office/drawing/2014/main" id="{133541D2-24CC-45CC-B259-09045F1202DF}"/>
               </a:ext>
             </a:extLst>
           </p:cNvPr>
@@ -6625,7 +6625,7 @@
           <p:cNvPr id="47" name="">
             <a:extLst xmlns:a="http://schemas.openxmlformats.org/drawingml/2006/main">
               <a:ext uri="{FF2B5EF4-FFF2-40B4-BE49-F238E27FC236}">
-                <a16:creationId xmlns:a16="http://schemas.microsoft.com/office/drawing/2014/main" id="{E0265174-9959-4E40-9878-0B0A0FFFD198}"/>
+                <a16:creationId xmlns:a16="http://schemas.microsoft.com/office/drawing/2014/main" id="{B6113F9F-DB8E-4561-8F95-D0DA215308EC}"/>
               </a:ext>
             </a:extLst>
           </p:cNvPr>
@@ -6700,7 +6700,7 @@
           <p:cNvPr id="48" name="">
             <a:extLst xmlns:a="http://schemas.openxmlformats.org/drawingml/2006/main">
               <a:ext uri="{FF2B5EF4-FFF2-40B4-BE49-F238E27FC236}">
-                <a16:creationId xmlns:a16="http://schemas.microsoft.com/office/drawing/2014/main" id="{A0CD3C8F-18E3-4E20-97CB-A4712CB636C1}"/>
+                <a16:creationId xmlns:a16="http://schemas.microsoft.com/office/drawing/2014/main" id="{16AF91F6-85A2-4A0D-B5CD-3F5C14F4DC66}"/>
               </a:ext>
             </a:extLst>
           </p:cNvPr>
@@ -6756,7 +6756,7 @@
     </p:spTree>
     <p:extLst>
       <p:ext uri="{BB962C8B-B14F-4D97-AF65-F5344CB8AC3E}">
-        <p14:creationId xmlns:p14="http://schemas.microsoft.com/office/powerpoint/2010/main" val="1747143341"/>
+        <p14:creationId xmlns:p14="http://schemas.microsoft.com/office/powerpoint/2010/main" val="1089379924"/>
       </p:ext>
     </p:extLst>
   </p:cSld>
@@ -6787,7 +6787,7 @@
           <p:cNvPr id="1" name="Slide Number Placeholder 5">
             <a:extLst xmlns:a="http://schemas.openxmlformats.org/drawingml/2006/main">
               <a:ext uri="{FF2B5EF4-FFF2-40B4-BE49-F238E27FC236}">
-                <a16:creationId xmlns:a16="http://schemas.microsoft.com/office/drawing/2014/main" id="{821508BF-91E3-4E78-84B3-DCBD229C8660}"/>
+                <a16:creationId xmlns:a16="http://schemas.microsoft.com/office/drawing/2014/main" id="{11DAD1DA-DD27-4C25-AFB7-E057ACC56EC0}"/>
               </a:ext>
             </a:extLst>
           </p:cNvPr>
@@ -6823,7 +6823,7 @@
           <p:nvPr/>
         </p:nvPicPr>
         <p:blipFill>
-          <a:blip xmlns:r="http://schemas.openxmlformats.org/officeDocument/2006/relationships" xmlns:a="http://schemas.openxmlformats.org/drawingml/2006/main" r:embed="R55a429a8104b4a62"/>
+          <a:blip xmlns:r="http://schemas.openxmlformats.org/officeDocument/2006/relationships" xmlns:a="http://schemas.openxmlformats.org/drawingml/2006/main" r:embed="Rf02569a7d8d44dfb"/>
           <a:srcRect xmlns:a="http://schemas.openxmlformats.org/drawingml/2006/main" l="0" t="21875" r="0" b="21875"/>
           <a:stretch xmlns:a="http://schemas.openxmlformats.org/drawingml/2006/main">
             <a:fillRect l="0" t="0" r="0" b="0"/>
@@ -6844,7 +6844,7 @@
           <p:cNvPr id="3" name="">
             <a:extLst xmlns:a="http://schemas.openxmlformats.org/drawingml/2006/main">
               <a:ext uri="{FF2B5EF4-FFF2-40B4-BE49-F238E27FC236}">
-                <a16:creationId xmlns:a16="http://schemas.microsoft.com/office/drawing/2014/main" id="{952230EC-2926-4373-9A13-11DA5981AA44}"/>
+                <a16:creationId xmlns:a16="http://schemas.microsoft.com/office/drawing/2014/main" id="{024F02A7-94FD-4A54-B686-8B5736DB7C8A}"/>
               </a:ext>
             </a:extLst>
           </p:cNvPr>
@@ -6879,7 +6879,7 @@
           <p:cNvPr id="4" name="">
             <a:extLst xmlns:a="http://schemas.openxmlformats.org/drawingml/2006/main">
               <a:ext uri="{FF2B5EF4-FFF2-40B4-BE49-F238E27FC236}">
-                <a16:creationId xmlns:a16="http://schemas.microsoft.com/office/drawing/2014/main" id="{60E6F7F5-02C7-40D1-A1B8-2FE657025465}"/>
+                <a16:creationId xmlns:a16="http://schemas.microsoft.com/office/drawing/2014/main" id="{FCD14E91-D61A-4599-9998-A104C630DD1F}"/>
               </a:ext>
             </a:extLst>
           </p:cNvPr>
@@ -6914,7 +6914,7 @@
           <p:cNvPr id="5" name="">
             <a:extLst xmlns:a="http://schemas.openxmlformats.org/drawingml/2006/main">
               <a:ext uri="{FF2B5EF4-FFF2-40B4-BE49-F238E27FC236}">
-                <a16:creationId xmlns:a16="http://schemas.microsoft.com/office/drawing/2014/main" id="{33490542-ADDF-4C85-9DF6-5C8E59FAA2A8}"/>
+                <a16:creationId xmlns:a16="http://schemas.microsoft.com/office/drawing/2014/main" id="{600DC0BE-6E9F-4378-9F80-99288E71A352}"/>
               </a:ext>
             </a:extLst>
           </p:cNvPr>
@@ -6951,7 +6951,7 @@
           <p:cNvPr id="6" name="">
             <a:extLst xmlns:a="http://schemas.openxmlformats.org/drawingml/2006/main">
               <a:ext uri="{FF2B5EF4-FFF2-40B4-BE49-F238E27FC236}">
-                <a16:creationId xmlns:a16="http://schemas.microsoft.com/office/drawing/2014/main" id="{2DD9C5F6-7393-488C-BF7D-307F049F70E2}"/>
+                <a16:creationId xmlns:a16="http://schemas.microsoft.com/office/drawing/2014/main" id="{C1933CF6-35AA-4C79-94B7-98E3F39B4C9C}"/>
               </a:ext>
             </a:extLst>
           </p:cNvPr>
@@ -6988,7 +6988,7 @@
           <p:cNvPr id="7" name="">
             <a:extLst xmlns:a="http://schemas.openxmlformats.org/drawingml/2006/main">
               <a:ext uri="{FF2B5EF4-FFF2-40B4-BE49-F238E27FC236}">
-                <a16:creationId xmlns:a16="http://schemas.microsoft.com/office/drawing/2014/main" id="{F5C5D73C-83F1-4923-BD03-EC3A114D77A0}"/>
+                <a16:creationId xmlns:a16="http://schemas.microsoft.com/office/drawing/2014/main" id="{E59D628C-83C0-4D35-9195-DB6E0211F423}"/>
               </a:ext>
             </a:extLst>
           </p:cNvPr>
@@ -7025,7 +7025,7 @@
           <p:cNvPr id="8" name="">
             <a:extLst xmlns:a="http://schemas.openxmlformats.org/drawingml/2006/main">
               <a:ext uri="{FF2B5EF4-FFF2-40B4-BE49-F238E27FC236}">
-                <a16:creationId xmlns:a16="http://schemas.microsoft.com/office/drawing/2014/main" id="{68FC44BF-416E-453A-8779-6381B105D148}"/>
+                <a16:creationId xmlns:a16="http://schemas.microsoft.com/office/drawing/2014/main" id="{79E34280-A68C-43F8-877E-811279204D90}"/>
               </a:ext>
             </a:extLst>
           </p:cNvPr>
@@ -7062,7 +7062,7 @@
           <p:cNvPr id="9" name="">
             <a:extLst xmlns:a="http://schemas.openxmlformats.org/drawingml/2006/main">
               <a:ext uri="{FF2B5EF4-FFF2-40B4-BE49-F238E27FC236}">
-                <a16:creationId xmlns:a16="http://schemas.microsoft.com/office/drawing/2014/main" id="{C1CBA0DE-F33D-4C6A-BACE-FC271A5EC844}"/>
+                <a16:creationId xmlns:a16="http://schemas.microsoft.com/office/drawing/2014/main" id="{3DE211F5-9452-4333-8CBD-A6917DDFC314}"/>
               </a:ext>
             </a:extLst>
           </p:cNvPr>
@@ -7120,7 +7120,7 @@
           <p:cNvPr id="10" name="">
             <a:extLst xmlns:a="http://schemas.openxmlformats.org/drawingml/2006/main">
               <a:ext uri="{FF2B5EF4-FFF2-40B4-BE49-F238E27FC236}">
-                <a16:creationId xmlns:a16="http://schemas.microsoft.com/office/drawing/2014/main" id="{CE9893DB-C1CD-498E-9D01-69F6D95C68A9}"/>
+                <a16:creationId xmlns:a16="http://schemas.microsoft.com/office/drawing/2014/main" id="{6B8F693F-398D-4508-8C04-310676F7CF8B}"/>
               </a:ext>
             </a:extLst>
           </p:cNvPr>
@@ -7178,7 +7178,7 @@
           <p:cNvPr id="11" name="">
             <a:extLst xmlns:a="http://schemas.openxmlformats.org/drawingml/2006/main">
               <a:ext uri="{FF2B5EF4-FFF2-40B4-BE49-F238E27FC236}">
-                <a16:creationId xmlns:a16="http://schemas.microsoft.com/office/drawing/2014/main" id="{D8E04E29-556D-4CE3-A5EC-605CA9893DBF}"/>
+                <a16:creationId xmlns:a16="http://schemas.microsoft.com/office/drawing/2014/main" id="{FF36470D-EDA4-4DAD-884D-44B8A522E2B9}"/>
               </a:ext>
             </a:extLst>
           </p:cNvPr>
@@ -7213,7 +7213,7 @@
           <p:cNvPr id="12" name="">
             <a:extLst xmlns:a="http://schemas.openxmlformats.org/drawingml/2006/main">
               <a:ext uri="{FF2B5EF4-FFF2-40B4-BE49-F238E27FC236}">
-                <a16:creationId xmlns:a16="http://schemas.microsoft.com/office/drawing/2014/main" id="{0157BCBF-0D7A-4158-80F2-6F13FF1825AC}"/>
+                <a16:creationId xmlns:a16="http://schemas.microsoft.com/office/drawing/2014/main" id="{73A2341A-B00F-41D1-AFF7-E18DAD5847BA}"/>
               </a:ext>
             </a:extLst>
           </p:cNvPr>
@@ -7246,7 +7246,7 @@
           <p:cNvPr id="13" name="">
             <a:extLst xmlns:a="http://schemas.openxmlformats.org/drawingml/2006/main">
               <a:ext uri="{FF2B5EF4-FFF2-40B4-BE49-F238E27FC236}">
-                <a16:creationId xmlns:a16="http://schemas.microsoft.com/office/drawing/2014/main" id="{1F7B0E0F-9B1A-4ABE-92EA-21156651B7B9}"/>
+                <a16:creationId xmlns:a16="http://schemas.microsoft.com/office/drawing/2014/main" id="{10DB85DB-E798-4FF5-8ABA-986CEEDDAA98}"/>
               </a:ext>
             </a:extLst>
           </p:cNvPr>
@@ -7321,7 +7321,7 @@
           <p:cNvPr id="14" name="">
             <a:extLst xmlns:a="http://schemas.openxmlformats.org/drawingml/2006/main">
               <a:ext uri="{FF2B5EF4-FFF2-40B4-BE49-F238E27FC236}">
-                <a16:creationId xmlns:a16="http://schemas.microsoft.com/office/drawing/2014/main" id="{E3236730-E948-46D5-977D-7C744856DD72}"/>
+                <a16:creationId xmlns:a16="http://schemas.microsoft.com/office/drawing/2014/main" id="{83DDCBDE-1CE0-4053-9BC2-A683219B70C0}"/>
               </a:ext>
             </a:extLst>
           </p:cNvPr>
@@ -7358,7 +7358,7 @@
           <p:cNvPr id="15" name="">
             <a:extLst xmlns:a="http://schemas.openxmlformats.org/drawingml/2006/main">
               <a:ext uri="{FF2B5EF4-FFF2-40B4-BE49-F238E27FC236}">
-                <a16:creationId xmlns:a16="http://schemas.microsoft.com/office/drawing/2014/main" id="{50361F0B-77A8-4BEB-AE0C-A0BB82B39528}"/>
+                <a16:creationId xmlns:a16="http://schemas.microsoft.com/office/drawing/2014/main" id="{7293095A-6B90-4E83-8C7B-DB75DFB8B43D}"/>
               </a:ext>
             </a:extLst>
           </p:cNvPr>
@@ -7393,7 +7393,7 @@
           <p:cNvPr id="16" name="">
             <a:extLst xmlns:a="http://schemas.openxmlformats.org/drawingml/2006/main">
               <a:ext uri="{FF2B5EF4-FFF2-40B4-BE49-F238E27FC236}">
-                <a16:creationId xmlns:a16="http://schemas.microsoft.com/office/drawing/2014/main" id="{FF5C96E2-0EFF-4E8E-90E5-5DC995712A11}"/>
+                <a16:creationId xmlns:a16="http://schemas.microsoft.com/office/drawing/2014/main" id="{E835AEEC-113B-4175-BC3B-FAAD1F7FA286}"/>
               </a:ext>
             </a:extLst>
           </p:cNvPr>
@@ -7451,7 +7451,7 @@
           <p:cNvPr id="17" name="">
             <a:extLst xmlns:a="http://schemas.openxmlformats.org/drawingml/2006/main">
               <a:ext uri="{FF2B5EF4-FFF2-40B4-BE49-F238E27FC236}">
-                <a16:creationId xmlns:a16="http://schemas.microsoft.com/office/drawing/2014/main" id="{A4C729C8-4E3D-4C8E-B33F-F62046A6C8EC}"/>
+                <a16:creationId xmlns:a16="http://schemas.microsoft.com/office/drawing/2014/main" id="{2E74AFA9-C5BE-4E6F-9DBF-A6289362A6B9}"/>
               </a:ext>
             </a:extLst>
           </p:cNvPr>
@@ -7560,7 +7560,7 @@
           <p:cNvPr id="18" name="">
             <a:extLst xmlns:a="http://schemas.openxmlformats.org/drawingml/2006/main">
               <a:ext uri="{FF2B5EF4-FFF2-40B4-BE49-F238E27FC236}">
-                <a16:creationId xmlns:a16="http://schemas.microsoft.com/office/drawing/2014/main" id="{9EA1337F-4FD2-455A-970B-363F28A6B86C}"/>
+                <a16:creationId xmlns:a16="http://schemas.microsoft.com/office/drawing/2014/main" id="{757387DE-C5A8-4912-80E6-3A718B059F53}"/>
               </a:ext>
             </a:extLst>
           </p:cNvPr>
@@ -7593,7 +7593,7 @@
           <p:cNvPr id="19" name="">
             <a:extLst xmlns:a="http://schemas.openxmlformats.org/drawingml/2006/main">
               <a:ext uri="{FF2B5EF4-FFF2-40B4-BE49-F238E27FC236}">
-                <a16:creationId xmlns:a16="http://schemas.microsoft.com/office/drawing/2014/main" id="{EA668988-77B6-4926-93EE-FDDCB9C4F5E7}"/>
+                <a16:creationId xmlns:a16="http://schemas.microsoft.com/office/drawing/2014/main" id="{16534786-5A0B-4B1C-AF92-A09120D140DA}"/>
               </a:ext>
             </a:extLst>
           </p:cNvPr>
@@ -7630,7 +7630,7 @@
           <p:cNvPr id="20" name="">
             <a:extLst xmlns:a="http://schemas.openxmlformats.org/drawingml/2006/main">
               <a:ext uri="{FF2B5EF4-FFF2-40B4-BE49-F238E27FC236}">
-                <a16:creationId xmlns:a16="http://schemas.microsoft.com/office/drawing/2014/main" id="{0307687A-9FF9-4D6E-9FA3-0E88122C0C11}"/>
+                <a16:creationId xmlns:a16="http://schemas.microsoft.com/office/drawing/2014/main" id="{91E0A471-DC98-4821-B7E6-B9345718BA62}"/>
               </a:ext>
             </a:extLst>
           </p:cNvPr>
@@ -7665,7 +7665,7 @@
           <p:cNvPr id="21" name="">
             <a:extLst xmlns:a="http://schemas.openxmlformats.org/drawingml/2006/main">
               <a:ext uri="{FF2B5EF4-FFF2-40B4-BE49-F238E27FC236}">
-                <a16:creationId xmlns:a16="http://schemas.microsoft.com/office/drawing/2014/main" id="{C90474FA-1F73-49BA-A7E8-7158A0734E14}"/>
+                <a16:creationId xmlns:a16="http://schemas.microsoft.com/office/drawing/2014/main" id="{6FD67013-6B8F-4367-9300-E3992435FD73}"/>
               </a:ext>
             </a:extLst>
           </p:cNvPr>
@@ -7723,7 +7723,7 @@
           <p:cNvPr id="22" name="">
             <a:extLst xmlns:a="http://schemas.openxmlformats.org/drawingml/2006/main">
               <a:ext uri="{FF2B5EF4-FFF2-40B4-BE49-F238E27FC236}">
-                <a16:creationId xmlns:a16="http://schemas.microsoft.com/office/drawing/2014/main" id="{3FD80DB5-EC63-49B5-BD45-D3AD44BE19C6}"/>
+                <a16:creationId xmlns:a16="http://schemas.microsoft.com/office/drawing/2014/main" id="{4FC787B4-9624-4ACA-8F51-8BF1B9BF08E3}"/>
               </a:ext>
             </a:extLst>
           </p:cNvPr>
@@ -7815,7 +7815,7 @@
           <p:cNvPr id="23" name="">
             <a:extLst xmlns:a="http://schemas.openxmlformats.org/drawingml/2006/main">
               <a:ext uri="{FF2B5EF4-FFF2-40B4-BE49-F238E27FC236}">
-                <a16:creationId xmlns:a16="http://schemas.microsoft.com/office/drawing/2014/main" id="{ABA45EDC-C2CD-40B1-BF76-F8F161588161}"/>
+                <a16:creationId xmlns:a16="http://schemas.microsoft.com/office/drawing/2014/main" id="{C2617551-BF59-4210-9337-63715BE8D4CF}"/>
               </a:ext>
             </a:extLst>
           </p:cNvPr>
@@ -7848,7 +7848,7 @@
           <p:cNvPr id="24" name="">
             <a:extLst xmlns:a="http://schemas.openxmlformats.org/drawingml/2006/main">
               <a:ext uri="{FF2B5EF4-FFF2-40B4-BE49-F238E27FC236}">
-                <a16:creationId xmlns:a16="http://schemas.microsoft.com/office/drawing/2014/main" id="{F19BC522-95A2-4D10-B971-474B16DF5A17}"/>
+                <a16:creationId xmlns:a16="http://schemas.microsoft.com/office/drawing/2014/main" id="{65D195EE-9070-4C42-A770-037440E8F812}"/>
               </a:ext>
             </a:extLst>
           </p:cNvPr>
@@ -7885,7 +7885,7 @@
           <p:cNvPr id="25" name="">
             <a:extLst xmlns:a="http://schemas.openxmlformats.org/drawingml/2006/main">
               <a:ext uri="{FF2B5EF4-FFF2-40B4-BE49-F238E27FC236}">
-                <a16:creationId xmlns:a16="http://schemas.microsoft.com/office/drawing/2014/main" id="{D83D6569-1440-4D5D-959D-A29757960CB4}"/>
+                <a16:creationId xmlns:a16="http://schemas.microsoft.com/office/drawing/2014/main" id="{1DEBD550-FB08-4A0A-B89E-031612C1EB96}"/>
               </a:ext>
             </a:extLst>
           </p:cNvPr>
@@ -7920,7 +7920,7 @@
           <p:cNvPr id="26" name="">
             <a:extLst xmlns:a="http://schemas.openxmlformats.org/drawingml/2006/main">
               <a:ext uri="{FF2B5EF4-FFF2-40B4-BE49-F238E27FC236}">
-                <a16:creationId xmlns:a16="http://schemas.microsoft.com/office/drawing/2014/main" id="{8817F1A5-7D89-4777-820E-9B5BB081D7B5}"/>
+                <a16:creationId xmlns:a16="http://schemas.microsoft.com/office/drawing/2014/main" id="{AB60BCF1-CDA8-450C-9BCE-03CF44EB574E}"/>
               </a:ext>
             </a:extLst>
           </p:cNvPr>
@@ -7978,7 +7978,7 @@
           <p:cNvPr id="27" name="">
             <a:extLst xmlns:a="http://schemas.openxmlformats.org/drawingml/2006/main">
               <a:ext uri="{FF2B5EF4-FFF2-40B4-BE49-F238E27FC236}">
-                <a16:creationId xmlns:a16="http://schemas.microsoft.com/office/drawing/2014/main" id="{6C6D2C3A-471E-413A-A278-A60B885BBB28}"/>
+                <a16:creationId xmlns:a16="http://schemas.microsoft.com/office/drawing/2014/main" id="{01B6E976-E079-4B94-9D63-7B13664E6B50}"/>
               </a:ext>
             </a:extLst>
           </p:cNvPr>
@@ -8070,7 +8070,7 @@
           <p:cNvPr id="28" name="">
             <a:extLst xmlns:a="http://schemas.openxmlformats.org/drawingml/2006/main">
               <a:ext uri="{FF2B5EF4-FFF2-40B4-BE49-F238E27FC236}">
-                <a16:creationId xmlns:a16="http://schemas.microsoft.com/office/drawing/2014/main" id="{6AE76FE0-AF64-4D27-B67F-E8994364ADEC}"/>
+                <a16:creationId xmlns:a16="http://schemas.microsoft.com/office/drawing/2014/main" id="{AD992D86-75EB-4010-B7D2-6EABFFED092A}"/>
               </a:ext>
             </a:extLst>
           </p:cNvPr>
@@ -8105,7 +8105,7 @@
           <p:cNvPr id="29" name="">
             <a:extLst xmlns:a="http://schemas.openxmlformats.org/drawingml/2006/main">
               <a:ext uri="{FF2B5EF4-FFF2-40B4-BE49-F238E27FC236}">
-                <a16:creationId xmlns:a16="http://schemas.microsoft.com/office/drawing/2014/main" id="{AFFD26AC-802D-4C70-9420-FB597967DC4C}"/>
+                <a16:creationId xmlns:a16="http://schemas.microsoft.com/office/drawing/2014/main" id="{D7DBA247-5D5F-447C-9634-0E4C809D8C6D}"/>
               </a:ext>
             </a:extLst>
           </p:cNvPr>
@@ -8140,7 +8140,7 @@
           <p:cNvPr id="30" name="">
             <a:extLst xmlns:a="http://schemas.openxmlformats.org/drawingml/2006/main">
               <a:ext uri="{FF2B5EF4-FFF2-40B4-BE49-F238E27FC236}">
-                <a16:creationId xmlns:a16="http://schemas.microsoft.com/office/drawing/2014/main" id="{0967D56F-6A63-4341-A25C-FF8A51870AE7}"/>
+                <a16:creationId xmlns:a16="http://schemas.microsoft.com/office/drawing/2014/main" id="{930A3888-3BC8-4C99-A0E0-4B165DF86433}"/>
               </a:ext>
             </a:extLst>
           </p:cNvPr>
@@ -8198,7 +8198,7 @@
           <p:cNvPr id="31" name="">
             <a:extLst xmlns:a="http://schemas.openxmlformats.org/drawingml/2006/main">
               <a:ext uri="{FF2B5EF4-FFF2-40B4-BE49-F238E27FC236}">
-                <a16:creationId xmlns:a16="http://schemas.microsoft.com/office/drawing/2014/main" id="{BF9CA981-0DD6-4B90-924A-58F3445FBB1B}"/>
+                <a16:creationId xmlns:a16="http://schemas.microsoft.com/office/drawing/2014/main" id="{DAC37E43-FC2D-48A4-819A-2F97F0C2DC44}"/>
               </a:ext>
             </a:extLst>
           </p:cNvPr>
@@ -8254,7 +8254,7 @@
     </p:spTree>
     <p:extLst>
       <p:ext uri="{BB962C8B-B14F-4D97-AF65-F5344CB8AC3E}">
-        <p14:creationId xmlns:p14="http://schemas.microsoft.com/office/powerpoint/2010/main" val="1787582743"/>
+        <p14:creationId xmlns:p14="http://schemas.microsoft.com/office/powerpoint/2010/main" val="1781088976"/>
       </p:ext>
     </p:extLst>
   </p:cSld>
@@ -8285,7 +8285,7 @@
           <p:cNvPr id="1" name="Slide Number Placeholder 5">
             <a:extLst xmlns:a="http://schemas.openxmlformats.org/drawingml/2006/main">
               <a:ext uri="{FF2B5EF4-FFF2-40B4-BE49-F238E27FC236}">
-                <a16:creationId xmlns:a16="http://schemas.microsoft.com/office/drawing/2014/main" id="{821508BF-91E3-4E78-84B3-DCBD229C8660}"/>
+                <a16:creationId xmlns:a16="http://schemas.microsoft.com/office/drawing/2014/main" id="{11DAD1DA-DD27-4C25-AFB7-E057ACC56EC0}"/>
               </a:ext>
             </a:extLst>
           </p:cNvPr>
@@ -8321,7 +8321,7 @@
           <p:nvPr/>
         </p:nvPicPr>
         <p:blipFill>
-          <a:blip xmlns:r="http://schemas.openxmlformats.org/officeDocument/2006/relationships" xmlns:a="http://schemas.openxmlformats.org/drawingml/2006/main" r:embed="R83ce7e75ba5a41cb"/>
+          <a:blip xmlns:r="http://schemas.openxmlformats.org/officeDocument/2006/relationships" xmlns:a="http://schemas.openxmlformats.org/drawingml/2006/main" r:embed="R0e02595e97b74128"/>
           <a:srcRect xmlns:a="http://schemas.openxmlformats.org/drawingml/2006/main" l="0" t="21875" r="0" b="21875"/>
           <a:stretch xmlns:a="http://schemas.openxmlformats.org/drawingml/2006/main">
             <a:fillRect l="0" t="0" r="0" b="0"/>
@@ -8342,7 +8342,7 @@
           <p:cNvPr id="3" name="">
             <a:extLst xmlns:a="http://schemas.openxmlformats.org/drawingml/2006/main">
               <a:ext uri="{FF2B5EF4-FFF2-40B4-BE49-F238E27FC236}">
-                <a16:creationId xmlns:a16="http://schemas.microsoft.com/office/drawing/2014/main" id="{BAB9F881-6422-4547-AA6E-C05F8E98B474}"/>
+                <a16:creationId xmlns:a16="http://schemas.microsoft.com/office/drawing/2014/main" id="{7F53D66D-E3F3-4C3E-B061-D5C8F654B40C}"/>
               </a:ext>
             </a:extLst>
           </p:cNvPr>
@@ -8377,7 +8377,7 @@
           <p:cNvPr id="4" name="">
             <a:extLst xmlns:a="http://schemas.openxmlformats.org/drawingml/2006/main">
               <a:ext uri="{FF2B5EF4-FFF2-40B4-BE49-F238E27FC236}">
-                <a16:creationId xmlns:a16="http://schemas.microsoft.com/office/drawing/2014/main" id="{185835C4-95A7-4D1F-A151-4D4056C69FB5}"/>
+                <a16:creationId xmlns:a16="http://schemas.microsoft.com/office/drawing/2014/main" id="{33680555-CAD7-4C48-AAD8-238494A9B859}"/>
               </a:ext>
             </a:extLst>
           </p:cNvPr>
@@ -8412,7 +8412,7 @@
           <p:cNvPr id="5" name="">
             <a:extLst xmlns:a="http://schemas.openxmlformats.org/drawingml/2006/main">
               <a:ext uri="{FF2B5EF4-FFF2-40B4-BE49-F238E27FC236}">
-                <a16:creationId xmlns:a16="http://schemas.microsoft.com/office/drawing/2014/main" id="{D3ECED67-1EC9-45CB-BD1D-A00FF5B9D9C6}"/>
+                <a16:creationId xmlns:a16="http://schemas.microsoft.com/office/drawing/2014/main" id="{1EAF1C36-53AD-4680-9978-657F3F7D7402}"/>
               </a:ext>
             </a:extLst>
           </p:cNvPr>
@@ -8449,7 +8449,7 @@
           <p:cNvPr id="6" name="">
             <a:extLst xmlns:a="http://schemas.openxmlformats.org/drawingml/2006/main">
               <a:ext uri="{FF2B5EF4-FFF2-40B4-BE49-F238E27FC236}">
-                <a16:creationId xmlns:a16="http://schemas.microsoft.com/office/drawing/2014/main" id="{9E31B7EF-593C-421B-99F9-1B1EA7E71802}"/>
+                <a16:creationId xmlns:a16="http://schemas.microsoft.com/office/drawing/2014/main" id="{81B2AC8D-3924-4194-8A8F-B6AB0C93505E}"/>
               </a:ext>
             </a:extLst>
           </p:cNvPr>
@@ -8486,7 +8486,7 @@
           <p:cNvPr id="7" name="">
             <a:extLst xmlns:a="http://schemas.openxmlformats.org/drawingml/2006/main">
               <a:ext uri="{FF2B5EF4-FFF2-40B4-BE49-F238E27FC236}">
-                <a16:creationId xmlns:a16="http://schemas.microsoft.com/office/drawing/2014/main" id="{1DFDEA9F-25BA-4CA1-8777-4960F5AFA8BC}"/>
+                <a16:creationId xmlns:a16="http://schemas.microsoft.com/office/drawing/2014/main" id="{0812CB29-5BD1-4027-B0DA-EB4885B8EF0F}"/>
               </a:ext>
             </a:extLst>
           </p:cNvPr>
@@ -8523,7 +8523,7 @@
           <p:cNvPr id="8" name="">
             <a:extLst xmlns:a="http://schemas.openxmlformats.org/drawingml/2006/main">
               <a:ext uri="{FF2B5EF4-FFF2-40B4-BE49-F238E27FC236}">
-                <a16:creationId xmlns:a16="http://schemas.microsoft.com/office/drawing/2014/main" id="{1BC3AAE2-42FE-4AA3-9918-813C1957CC4E}"/>
+                <a16:creationId xmlns:a16="http://schemas.microsoft.com/office/drawing/2014/main" id="{BC7B471B-E036-454B-941E-6EE2B7776F91}"/>
               </a:ext>
             </a:extLst>
           </p:cNvPr>
@@ -8560,7 +8560,7 @@
           <p:cNvPr id="9" name="">
             <a:extLst xmlns:a="http://schemas.openxmlformats.org/drawingml/2006/main">
               <a:ext uri="{FF2B5EF4-FFF2-40B4-BE49-F238E27FC236}">
-                <a16:creationId xmlns:a16="http://schemas.microsoft.com/office/drawing/2014/main" id="{1D07CF24-FBF8-4F41-98ED-BB5694072A63}"/>
+                <a16:creationId xmlns:a16="http://schemas.microsoft.com/office/drawing/2014/main" id="{B7B2CDE8-D13C-4D1E-BAF5-54CBF7266671}"/>
               </a:ext>
             </a:extLst>
           </p:cNvPr>
@@ -8618,7 +8618,7 @@
           <p:cNvPr id="10" name="">
             <a:extLst xmlns:a="http://schemas.openxmlformats.org/drawingml/2006/main">
               <a:ext uri="{FF2B5EF4-FFF2-40B4-BE49-F238E27FC236}">
-                <a16:creationId xmlns:a16="http://schemas.microsoft.com/office/drawing/2014/main" id="{7AA1A5C0-A672-4462-A293-AEB1848EF53C}"/>
+                <a16:creationId xmlns:a16="http://schemas.microsoft.com/office/drawing/2014/main" id="{8AF36DA3-8200-427E-AE9C-6B1899BCB132}"/>
               </a:ext>
             </a:extLst>
           </p:cNvPr>
@@ -8676,7 +8676,7 @@
           <p:cNvPr id="11" name="">
             <a:extLst xmlns:a="http://schemas.openxmlformats.org/drawingml/2006/main">
               <a:ext uri="{FF2B5EF4-FFF2-40B4-BE49-F238E27FC236}">
-                <a16:creationId xmlns:a16="http://schemas.microsoft.com/office/drawing/2014/main" id="{BD7928CE-A26E-469B-8F18-CDE0900CB37E}"/>
+                <a16:creationId xmlns:a16="http://schemas.microsoft.com/office/drawing/2014/main" id="{070D3F0C-7DC8-4D23-BA65-CD3AD9EB5574}"/>
               </a:ext>
             </a:extLst>
           </p:cNvPr>
@@ -8711,7 +8711,7 @@
           <p:cNvPr id="12" name="">
             <a:extLst xmlns:a="http://schemas.openxmlformats.org/drawingml/2006/main">
               <a:ext uri="{FF2B5EF4-FFF2-40B4-BE49-F238E27FC236}">
-                <a16:creationId xmlns:a16="http://schemas.microsoft.com/office/drawing/2014/main" id="{98D4D901-9A90-4335-8452-275474670011}"/>
+                <a16:creationId xmlns:a16="http://schemas.microsoft.com/office/drawing/2014/main" id="{9F0074EE-6428-465B-8C7F-BAE1F8C17CDB}"/>
               </a:ext>
             </a:extLst>
           </p:cNvPr>
@@ -8744,7 +8744,7 @@
           <p:cNvPr id="13" name="">
             <a:extLst xmlns:a="http://schemas.openxmlformats.org/drawingml/2006/main">
               <a:ext uri="{FF2B5EF4-FFF2-40B4-BE49-F238E27FC236}">
-                <a16:creationId xmlns:a16="http://schemas.microsoft.com/office/drawing/2014/main" id="{68B98703-462B-4554-9BE7-CF02465DE8B1}"/>
+                <a16:creationId xmlns:a16="http://schemas.microsoft.com/office/drawing/2014/main" id="{C66115A8-75B6-4F69-B8FD-740BA6B9C576}"/>
               </a:ext>
             </a:extLst>
           </p:cNvPr>
@@ -8802,7 +8802,7 @@
           <p:cNvPr id="14" name="">
             <a:extLst xmlns:a="http://schemas.openxmlformats.org/drawingml/2006/main">
               <a:ext uri="{FF2B5EF4-FFF2-40B4-BE49-F238E27FC236}">
-                <a16:creationId xmlns:a16="http://schemas.microsoft.com/office/drawing/2014/main" id="{E48F7597-F743-4F17-81ED-E0D97C721C26}"/>
+                <a16:creationId xmlns:a16="http://schemas.microsoft.com/office/drawing/2014/main" id="{84A04D33-DE35-430E-BBD2-D329C7C25D98}"/>
               </a:ext>
             </a:extLst>
           </p:cNvPr>
@@ -8839,7 +8839,7 @@
           <p:cNvPr id="15" name="">
             <a:extLst xmlns:a="http://schemas.openxmlformats.org/drawingml/2006/main">
               <a:ext uri="{FF2B5EF4-FFF2-40B4-BE49-F238E27FC236}">
-                <a16:creationId xmlns:a16="http://schemas.microsoft.com/office/drawing/2014/main" id="{8F25A314-CE46-45FB-A540-7E40A1C32B38}"/>
+                <a16:creationId xmlns:a16="http://schemas.microsoft.com/office/drawing/2014/main" id="{4941AA70-50FC-4AB2-8B26-9053DAF2C4AA}"/>
               </a:ext>
             </a:extLst>
           </p:cNvPr>
@@ -8874,7 +8874,7 @@
           <p:cNvPr id="16" name="">
             <a:extLst xmlns:a="http://schemas.openxmlformats.org/drawingml/2006/main">
               <a:ext uri="{FF2B5EF4-FFF2-40B4-BE49-F238E27FC236}">
-                <a16:creationId xmlns:a16="http://schemas.microsoft.com/office/drawing/2014/main" id="{B8058516-A541-48BE-8390-8643C3842469}"/>
+                <a16:creationId xmlns:a16="http://schemas.microsoft.com/office/drawing/2014/main" id="{9CD0976B-3D07-4751-BB17-4313839957AC}"/>
               </a:ext>
             </a:extLst>
           </p:cNvPr>
@@ -8932,7 +8932,7 @@
           <p:cNvPr id="17" name="">
             <a:extLst xmlns:a="http://schemas.openxmlformats.org/drawingml/2006/main">
               <a:ext uri="{FF2B5EF4-FFF2-40B4-BE49-F238E27FC236}">
-                <a16:creationId xmlns:a16="http://schemas.microsoft.com/office/drawing/2014/main" id="{1A4817CB-C49C-4CEB-BFF8-2D59FEDCC66D}"/>
+                <a16:creationId xmlns:a16="http://schemas.microsoft.com/office/drawing/2014/main" id="{A86DBF77-AB36-4D10-A742-3B29E5782D8C}"/>
               </a:ext>
             </a:extLst>
           </p:cNvPr>
@@ -9024,7 +9024,7 @@
           <p:cNvPr id="18" name="">
             <a:extLst xmlns:a="http://schemas.openxmlformats.org/drawingml/2006/main">
               <a:ext uri="{FF2B5EF4-FFF2-40B4-BE49-F238E27FC236}">
-                <a16:creationId xmlns:a16="http://schemas.microsoft.com/office/drawing/2014/main" id="{D38BB4BB-789E-4F70-8357-4DA568DADC00}"/>
+                <a16:creationId xmlns:a16="http://schemas.microsoft.com/office/drawing/2014/main" id="{3A569AD4-BA6C-4967-AED6-87CF8926DB53}"/>
               </a:ext>
             </a:extLst>
           </p:cNvPr>
@@ -9061,7 +9061,7 @@
           <p:cNvPr id="19" name="">
             <a:extLst xmlns:a="http://schemas.openxmlformats.org/drawingml/2006/main">
               <a:ext uri="{FF2B5EF4-FFF2-40B4-BE49-F238E27FC236}">
-                <a16:creationId xmlns:a16="http://schemas.microsoft.com/office/drawing/2014/main" id="{B1A4D87A-D7D4-4141-8E97-76B0742F4911}"/>
+                <a16:creationId xmlns:a16="http://schemas.microsoft.com/office/drawing/2014/main" id="{F7FC9D16-8567-4FB2-9380-A2E38B0F4E32}"/>
               </a:ext>
             </a:extLst>
           </p:cNvPr>
@@ -9096,7 +9096,7 @@
           <p:cNvPr id="20" name="">
             <a:extLst xmlns:a="http://schemas.openxmlformats.org/drawingml/2006/main">
               <a:ext uri="{FF2B5EF4-FFF2-40B4-BE49-F238E27FC236}">
-                <a16:creationId xmlns:a16="http://schemas.microsoft.com/office/drawing/2014/main" id="{436298B0-3DE0-4F8F-93E3-79EBBBDFDB66}"/>
+                <a16:creationId xmlns:a16="http://schemas.microsoft.com/office/drawing/2014/main" id="{E71306CB-F701-457E-B306-37E7EB503021}"/>
               </a:ext>
             </a:extLst>
           </p:cNvPr>
@@ -9154,7 +9154,7 @@
           <p:cNvPr id="21" name="">
             <a:extLst xmlns:a="http://schemas.openxmlformats.org/drawingml/2006/main">
               <a:ext uri="{FF2B5EF4-FFF2-40B4-BE49-F238E27FC236}">
-                <a16:creationId xmlns:a16="http://schemas.microsoft.com/office/drawing/2014/main" id="{D4E84F0D-A05B-48D8-B8B2-4656FFA4EB5E}"/>
+                <a16:creationId xmlns:a16="http://schemas.microsoft.com/office/drawing/2014/main" id="{9B591EB6-1E6A-42F5-9948-9E50B4548137}"/>
               </a:ext>
             </a:extLst>
           </p:cNvPr>
@@ -9229,7 +9229,7 @@
           <p:cNvPr id="22" name="">
             <a:extLst xmlns:a="http://schemas.openxmlformats.org/drawingml/2006/main">
               <a:ext uri="{FF2B5EF4-FFF2-40B4-BE49-F238E27FC236}">
-                <a16:creationId xmlns:a16="http://schemas.microsoft.com/office/drawing/2014/main" id="{B2118F55-65FA-4213-8FEE-7B9F93536AE0}"/>
+                <a16:creationId xmlns:a16="http://schemas.microsoft.com/office/drawing/2014/main" id="{D293AD78-B07C-4CBA-BB97-0F5AC346829E}"/>
               </a:ext>
             </a:extLst>
           </p:cNvPr>
@@ -9266,7 +9266,7 @@
           <p:cNvPr id="23" name="">
             <a:extLst xmlns:a="http://schemas.openxmlformats.org/drawingml/2006/main">
               <a:ext uri="{FF2B5EF4-FFF2-40B4-BE49-F238E27FC236}">
-                <a16:creationId xmlns:a16="http://schemas.microsoft.com/office/drawing/2014/main" id="{2AAFEF4F-42D1-4332-8382-15B73EE80F46}"/>
+                <a16:creationId xmlns:a16="http://schemas.microsoft.com/office/drawing/2014/main" id="{E4A67430-18BF-49F3-8E08-EB91734A3BE2}"/>
               </a:ext>
             </a:extLst>
           </p:cNvPr>
@@ -9301,7 +9301,7 @@
           <p:cNvPr id="24" name="">
             <a:extLst xmlns:a="http://schemas.openxmlformats.org/drawingml/2006/main">
               <a:ext uri="{FF2B5EF4-FFF2-40B4-BE49-F238E27FC236}">
-                <a16:creationId xmlns:a16="http://schemas.microsoft.com/office/drawing/2014/main" id="{A623D73F-8FAD-4798-9A78-F62ED26F35CB}"/>
+                <a16:creationId xmlns:a16="http://schemas.microsoft.com/office/drawing/2014/main" id="{531C992F-3485-4D83-BCA7-886103207AD2}"/>
               </a:ext>
             </a:extLst>
           </p:cNvPr>
@@ -9359,7 +9359,7 @@
           <p:cNvPr id="25" name="">
             <a:extLst xmlns:a="http://schemas.openxmlformats.org/drawingml/2006/main">
               <a:ext uri="{FF2B5EF4-FFF2-40B4-BE49-F238E27FC236}">
-                <a16:creationId xmlns:a16="http://schemas.microsoft.com/office/drawing/2014/main" id="{12D32045-5C27-4D3D-963E-3ADCAF901456}"/>
+                <a16:creationId xmlns:a16="http://schemas.microsoft.com/office/drawing/2014/main" id="{84DFB4E9-A017-46D7-ADEC-47EFC76112CD}"/>
               </a:ext>
             </a:extLst>
           </p:cNvPr>
@@ -9451,7 +9451,7 @@
           <p:cNvPr id="26" name="">
             <a:extLst xmlns:a="http://schemas.openxmlformats.org/drawingml/2006/main">
               <a:ext uri="{FF2B5EF4-FFF2-40B4-BE49-F238E27FC236}">
-                <a16:creationId xmlns:a16="http://schemas.microsoft.com/office/drawing/2014/main" id="{D418F945-6B6B-45ED-BB7D-5F595DDE6FF2}"/>
+                <a16:creationId xmlns:a16="http://schemas.microsoft.com/office/drawing/2014/main" id="{7F19D017-AE81-4F02-A2EC-A9A8E016EF0E}"/>
               </a:ext>
             </a:extLst>
           </p:cNvPr>
@@ -9488,7 +9488,7 @@
           <p:cNvPr id="27" name="">
             <a:extLst xmlns:a="http://schemas.openxmlformats.org/drawingml/2006/main">
               <a:ext uri="{FF2B5EF4-FFF2-40B4-BE49-F238E27FC236}">
-                <a16:creationId xmlns:a16="http://schemas.microsoft.com/office/drawing/2014/main" id="{FBD05D49-7D11-475C-B206-654039570BDE}"/>
+                <a16:creationId xmlns:a16="http://schemas.microsoft.com/office/drawing/2014/main" id="{AFDB7B60-BBB7-4F60-90FA-9CB49491A63E}"/>
               </a:ext>
             </a:extLst>
           </p:cNvPr>
@@ -9523,7 +9523,7 @@
           <p:cNvPr id="28" name="">
             <a:extLst xmlns:a="http://schemas.openxmlformats.org/drawingml/2006/main">
               <a:ext uri="{FF2B5EF4-FFF2-40B4-BE49-F238E27FC236}">
-                <a16:creationId xmlns:a16="http://schemas.microsoft.com/office/drawing/2014/main" id="{4977C987-4274-4BFC-9478-57DE14A87BE9}"/>
+                <a16:creationId xmlns:a16="http://schemas.microsoft.com/office/drawing/2014/main" id="{405407C2-B24C-41C6-A01A-108C8E038CF7}"/>
               </a:ext>
             </a:extLst>
           </p:cNvPr>
@@ -9581,7 +9581,7 @@
           <p:cNvPr id="29" name="">
             <a:extLst xmlns:a="http://schemas.openxmlformats.org/drawingml/2006/main">
               <a:ext uri="{FF2B5EF4-FFF2-40B4-BE49-F238E27FC236}">
-                <a16:creationId xmlns:a16="http://schemas.microsoft.com/office/drawing/2014/main" id="{63DE9235-DB6E-4EE6-9473-F5FABFD521C4}"/>
+                <a16:creationId xmlns:a16="http://schemas.microsoft.com/office/drawing/2014/main" id="{D371EF37-7057-490F-9E84-2D592D7D68E6}"/>
               </a:ext>
             </a:extLst>
           </p:cNvPr>
@@ -9616,7 +9616,7 @@
           <p:cNvPr id="30" name="">
             <a:extLst xmlns:a="http://schemas.openxmlformats.org/drawingml/2006/main">
               <a:ext uri="{FF2B5EF4-FFF2-40B4-BE49-F238E27FC236}">
-                <a16:creationId xmlns:a16="http://schemas.microsoft.com/office/drawing/2014/main" id="{17E6150B-8027-41C5-B7AA-65BB9E3A9395}"/>
+                <a16:creationId xmlns:a16="http://schemas.microsoft.com/office/drawing/2014/main" id="{B6102812-2C9F-426B-84CC-9BF39CFBB990}"/>
               </a:ext>
             </a:extLst>
           </p:cNvPr>
@@ -9651,7 +9651,7 @@
           <p:cNvPr id="31" name="">
             <a:extLst xmlns:a="http://schemas.openxmlformats.org/drawingml/2006/main">
               <a:ext uri="{FF2B5EF4-FFF2-40B4-BE49-F238E27FC236}">
-                <a16:creationId xmlns:a16="http://schemas.microsoft.com/office/drawing/2014/main" id="{48D69EBE-1C8B-4CC8-9D65-04E7D2A2645E}"/>
+                <a16:creationId xmlns:a16="http://schemas.microsoft.com/office/drawing/2014/main" id="{6C46254E-FB68-4DE1-B6C8-056A76A81F4F}"/>
               </a:ext>
             </a:extLst>
           </p:cNvPr>
@@ -9709,7 +9709,7 @@
           <p:cNvPr id="32" name="">
             <a:extLst xmlns:a="http://schemas.openxmlformats.org/drawingml/2006/main">
               <a:ext uri="{FF2B5EF4-FFF2-40B4-BE49-F238E27FC236}">
-                <a16:creationId xmlns:a16="http://schemas.microsoft.com/office/drawing/2014/main" id="{F097BD25-2CD7-46D5-BB57-8BA74C40100D}"/>
+                <a16:creationId xmlns:a16="http://schemas.microsoft.com/office/drawing/2014/main" id="{F7BEA0F5-E8C0-47E8-8B41-7B7EEBFFFD86}"/>
               </a:ext>
             </a:extLst>
           </p:cNvPr>
@@ -9765,7 +9765,7 @@
     </p:spTree>
     <p:extLst>
       <p:ext uri="{BB962C8B-B14F-4D97-AF65-F5344CB8AC3E}">
-        <p14:creationId xmlns:p14="http://schemas.microsoft.com/office/powerpoint/2010/main" val="2109635069"/>
+        <p14:creationId xmlns:p14="http://schemas.microsoft.com/office/powerpoint/2010/main" val="1939443377"/>
       </p:ext>
     </p:extLst>
   </p:cSld>
@@ -9796,7 +9796,7 @@
           <p:cNvPr id="1" name="Slide Number Placeholder 5">
             <a:extLst xmlns:a="http://schemas.openxmlformats.org/drawingml/2006/main">
               <a:ext uri="{FF2B5EF4-FFF2-40B4-BE49-F238E27FC236}">
-                <a16:creationId xmlns:a16="http://schemas.microsoft.com/office/drawing/2014/main" id="{821508BF-91E3-4E78-84B3-DCBD229C8660}"/>
+                <a16:creationId xmlns:a16="http://schemas.microsoft.com/office/drawing/2014/main" id="{11DAD1DA-DD27-4C25-AFB7-E057ACC56EC0}"/>
               </a:ext>
             </a:extLst>
           </p:cNvPr>
@@ -9832,7 +9832,7 @@
           <p:nvPr/>
         </p:nvPicPr>
         <p:blipFill>
-          <a:blip xmlns:r="http://schemas.openxmlformats.org/officeDocument/2006/relationships" xmlns:a="http://schemas.openxmlformats.org/drawingml/2006/main" r:embed="R77c6129897444ff4"/>
+          <a:blip xmlns:r="http://schemas.openxmlformats.org/officeDocument/2006/relationships" xmlns:a="http://schemas.openxmlformats.org/drawingml/2006/main" r:embed="Ra0304f5dd0e24df6"/>
           <a:srcRect xmlns:a="http://schemas.openxmlformats.org/drawingml/2006/main" l="0" t="21875" r="0" b="21875"/>
           <a:stretch xmlns:a="http://schemas.openxmlformats.org/drawingml/2006/main">
             <a:fillRect l="0" t="0" r="0" b="0"/>
@@ -9853,7 +9853,7 @@
           <p:cNvPr id="3" name="">
             <a:extLst xmlns:a="http://schemas.openxmlformats.org/drawingml/2006/main">
               <a:ext uri="{FF2B5EF4-FFF2-40B4-BE49-F238E27FC236}">
-                <a16:creationId xmlns:a16="http://schemas.microsoft.com/office/drawing/2014/main" id="{ACC65EC4-058D-4D51-B287-0F141C694AA2}"/>
+                <a16:creationId xmlns:a16="http://schemas.microsoft.com/office/drawing/2014/main" id="{E893E64E-6129-45DA-988E-2B377CED734B}"/>
               </a:ext>
             </a:extLst>
           </p:cNvPr>
@@ -9888,7 +9888,7 @@
           <p:cNvPr id="4" name="">
             <a:extLst xmlns:a="http://schemas.openxmlformats.org/drawingml/2006/main">
               <a:ext uri="{FF2B5EF4-FFF2-40B4-BE49-F238E27FC236}">
-                <a16:creationId xmlns:a16="http://schemas.microsoft.com/office/drawing/2014/main" id="{859696A5-B064-4FC3-9152-D680851FF701}"/>
+                <a16:creationId xmlns:a16="http://schemas.microsoft.com/office/drawing/2014/main" id="{5107458C-4998-40C0-8C8B-050621CD7BE3}"/>
               </a:ext>
             </a:extLst>
           </p:cNvPr>
@@ -9923,7 +9923,7 @@
           <p:cNvPr id="5" name="">
             <a:extLst xmlns:a="http://schemas.openxmlformats.org/drawingml/2006/main">
               <a:ext uri="{FF2B5EF4-FFF2-40B4-BE49-F238E27FC236}">
-                <a16:creationId xmlns:a16="http://schemas.microsoft.com/office/drawing/2014/main" id="{AB3754C4-39E4-446E-849B-AB4B03298F72}"/>
+                <a16:creationId xmlns:a16="http://schemas.microsoft.com/office/drawing/2014/main" id="{83580B83-D042-4367-B994-63229681735D}"/>
               </a:ext>
             </a:extLst>
           </p:cNvPr>
@@ -9960,7 +9960,7 @@
           <p:cNvPr id="6" name="">
             <a:extLst xmlns:a="http://schemas.openxmlformats.org/drawingml/2006/main">
               <a:ext uri="{FF2B5EF4-FFF2-40B4-BE49-F238E27FC236}">
-                <a16:creationId xmlns:a16="http://schemas.microsoft.com/office/drawing/2014/main" id="{61029B04-3CFE-4F04-A734-94454A1190AC}"/>
+                <a16:creationId xmlns:a16="http://schemas.microsoft.com/office/drawing/2014/main" id="{0E50165C-39E9-4D7F-A687-D37B38733E1C}"/>
               </a:ext>
             </a:extLst>
           </p:cNvPr>
@@ -9997,7 +9997,7 @@
           <p:cNvPr id="7" name="">
             <a:extLst xmlns:a="http://schemas.openxmlformats.org/drawingml/2006/main">
               <a:ext uri="{FF2B5EF4-FFF2-40B4-BE49-F238E27FC236}">
-                <a16:creationId xmlns:a16="http://schemas.microsoft.com/office/drawing/2014/main" id="{26C5313D-84DE-4694-8AA4-DAD001AF778A}"/>
+                <a16:creationId xmlns:a16="http://schemas.microsoft.com/office/drawing/2014/main" id="{8E333A1D-83BD-46F5-A535-DFE4BF1D1C56}"/>
               </a:ext>
             </a:extLst>
           </p:cNvPr>
@@ -10034,7 +10034,7 @@
           <p:cNvPr id="8" name="">
             <a:extLst xmlns:a="http://schemas.openxmlformats.org/drawingml/2006/main">
               <a:ext uri="{FF2B5EF4-FFF2-40B4-BE49-F238E27FC236}">
-                <a16:creationId xmlns:a16="http://schemas.microsoft.com/office/drawing/2014/main" id="{CFB5DC2C-0AC0-4AA1-8A90-61CA7A2447F2}"/>
+                <a16:creationId xmlns:a16="http://schemas.microsoft.com/office/drawing/2014/main" id="{A3CD26A6-36C3-408C-A8CD-E1E008E7814D}"/>
               </a:ext>
             </a:extLst>
           </p:cNvPr>
@@ -10071,7 +10071,7 @@
           <p:cNvPr id="9" name="">
             <a:extLst xmlns:a="http://schemas.openxmlformats.org/drawingml/2006/main">
               <a:ext uri="{FF2B5EF4-FFF2-40B4-BE49-F238E27FC236}">
-                <a16:creationId xmlns:a16="http://schemas.microsoft.com/office/drawing/2014/main" id="{E18C55A5-E630-4360-9BC9-8CDEF161171C}"/>
+                <a16:creationId xmlns:a16="http://schemas.microsoft.com/office/drawing/2014/main" id="{83D28E01-5DBF-4D35-97A8-10C56F48E6FD}"/>
               </a:ext>
             </a:extLst>
           </p:cNvPr>
@@ -10129,7 +10129,7 @@
           <p:cNvPr id="10" name="">
             <a:extLst xmlns:a="http://schemas.openxmlformats.org/drawingml/2006/main">
               <a:ext uri="{FF2B5EF4-FFF2-40B4-BE49-F238E27FC236}">
-                <a16:creationId xmlns:a16="http://schemas.microsoft.com/office/drawing/2014/main" id="{305A3FC6-A67F-4EBE-9090-6A65FBDEBC8F}"/>
+                <a16:creationId xmlns:a16="http://schemas.microsoft.com/office/drawing/2014/main" id="{0FAD8CDE-9AF7-4D2C-AB81-AD7ABE9F57B9}"/>
               </a:ext>
             </a:extLst>
           </p:cNvPr>
@@ -10187,7 +10187,7 @@
           <p:cNvPr id="11" name="">
             <a:extLst xmlns:a="http://schemas.openxmlformats.org/drawingml/2006/main">
               <a:ext uri="{FF2B5EF4-FFF2-40B4-BE49-F238E27FC236}">
-                <a16:creationId xmlns:a16="http://schemas.microsoft.com/office/drawing/2014/main" id="{1ED6BD71-A8F9-48CB-90C1-4AA2B53E5576}"/>
+                <a16:creationId xmlns:a16="http://schemas.microsoft.com/office/drawing/2014/main" id="{EF7E2534-E92C-4244-AF04-55C78993184C}"/>
               </a:ext>
             </a:extLst>
           </p:cNvPr>
@@ -10222,7 +10222,7 @@
           <p:cNvPr id="12" name="">
             <a:extLst xmlns:a="http://schemas.openxmlformats.org/drawingml/2006/main">
               <a:ext uri="{FF2B5EF4-FFF2-40B4-BE49-F238E27FC236}">
-                <a16:creationId xmlns:a16="http://schemas.microsoft.com/office/drawing/2014/main" id="{9A58EB6D-8881-413F-A0F8-A668FBBF39E4}"/>
+                <a16:creationId xmlns:a16="http://schemas.microsoft.com/office/drawing/2014/main" id="{2FE12EF6-F5AA-4987-8A0F-E5EB8170CB05}"/>
               </a:ext>
             </a:extLst>
           </p:cNvPr>
@@ -10255,7 +10255,7 @@
           <p:cNvPr id="13" name="">
             <a:extLst xmlns:a="http://schemas.openxmlformats.org/drawingml/2006/main">
               <a:ext uri="{FF2B5EF4-FFF2-40B4-BE49-F238E27FC236}">
-                <a16:creationId xmlns:a16="http://schemas.microsoft.com/office/drawing/2014/main" id="{25EBE1EE-831C-4758-87CD-6CA922FB0D6D}"/>
+                <a16:creationId xmlns:a16="http://schemas.microsoft.com/office/drawing/2014/main" id="{BBFACD09-599A-43A7-8CE6-DAB820C8C25C}"/>
               </a:ext>
             </a:extLst>
           </p:cNvPr>
@@ -10330,7 +10330,7 @@
           <p:cNvPr id="14" name="">
             <a:extLst xmlns:a="http://schemas.openxmlformats.org/drawingml/2006/main">
               <a:ext uri="{FF2B5EF4-FFF2-40B4-BE49-F238E27FC236}">
-                <a16:creationId xmlns:a16="http://schemas.microsoft.com/office/drawing/2014/main" id="{2014B76A-394E-444C-93D9-AC807BB765BF}"/>
+                <a16:creationId xmlns:a16="http://schemas.microsoft.com/office/drawing/2014/main" id="{5B5A5C34-60CC-457E-98AB-E8997F0AB420}"/>
               </a:ext>
             </a:extLst>
           </p:cNvPr>
@@ -10365,7 +10365,7 @@
           <p:cNvPr id="15" name="">
             <a:extLst xmlns:a="http://schemas.openxmlformats.org/drawingml/2006/main">
               <a:ext uri="{FF2B5EF4-FFF2-40B4-BE49-F238E27FC236}">
-                <a16:creationId xmlns:a16="http://schemas.microsoft.com/office/drawing/2014/main" id="{C6C98D76-5DBE-4689-8520-5932796254A9}"/>
+                <a16:creationId xmlns:a16="http://schemas.microsoft.com/office/drawing/2014/main" id="{CC111975-E0A9-41F2-B173-ACD7BF2C950A}"/>
               </a:ext>
             </a:extLst>
           </p:cNvPr>
@@ -10400,7 +10400,7 @@
           <p:cNvPr id="16" name="">
             <a:extLst xmlns:a="http://schemas.openxmlformats.org/drawingml/2006/main">
               <a:ext uri="{FF2B5EF4-FFF2-40B4-BE49-F238E27FC236}">
-                <a16:creationId xmlns:a16="http://schemas.microsoft.com/office/drawing/2014/main" id="{8767C49D-4926-4323-864C-6924882B11FE}"/>
+                <a16:creationId xmlns:a16="http://schemas.microsoft.com/office/drawing/2014/main" id="{EC700934-E756-4964-B3FB-7247A4093027}"/>
               </a:ext>
             </a:extLst>
           </p:cNvPr>
@@ -10458,7 +10458,7 @@
           <p:cNvPr id="17" name="">
             <a:extLst xmlns:a="http://schemas.openxmlformats.org/drawingml/2006/main">
               <a:ext uri="{FF2B5EF4-FFF2-40B4-BE49-F238E27FC236}">
-                <a16:creationId xmlns:a16="http://schemas.microsoft.com/office/drawing/2014/main" id="{A5F28CED-E394-4364-ACEC-970740BFD260}"/>
+                <a16:creationId xmlns:a16="http://schemas.microsoft.com/office/drawing/2014/main" id="{348368ED-BB4F-4627-8B31-DA7E7A5FD6C0}"/>
               </a:ext>
             </a:extLst>
           </p:cNvPr>
@@ -10495,7 +10495,7 @@
           <p:cNvPr id="18" name="">
             <a:extLst xmlns:a="http://schemas.openxmlformats.org/drawingml/2006/main">
               <a:ext uri="{FF2B5EF4-FFF2-40B4-BE49-F238E27FC236}">
-                <a16:creationId xmlns:a16="http://schemas.microsoft.com/office/drawing/2014/main" id="{4055DDA3-CF99-4947-BA18-FF6298CA8BC1}"/>
+                <a16:creationId xmlns:a16="http://schemas.microsoft.com/office/drawing/2014/main" id="{8D78B38D-92F5-4661-A8BE-262CE62FED55}"/>
               </a:ext>
             </a:extLst>
           </p:cNvPr>
@@ -10530,7 +10530,7 @@
           <p:cNvPr id="19" name="">
             <a:extLst xmlns:a="http://schemas.openxmlformats.org/drawingml/2006/main">
               <a:ext uri="{FF2B5EF4-FFF2-40B4-BE49-F238E27FC236}">
-                <a16:creationId xmlns:a16="http://schemas.microsoft.com/office/drawing/2014/main" id="{3882ABA8-34C7-419B-ACA6-8DD58B8A120B}"/>
+                <a16:creationId xmlns:a16="http://schemas.microsoft.com/office/drawing/2014/main" id="{EED22E06-12E6-4149-9415-1CD6A8F1C689}"/>
               </a:ext>
             </a:extLst>
           </p:cNvPr>
@@ -10588,7 +10588,7 @@
           <p:cNvPr id="20" name="">
             <a:extLst xmlns:a="http://schemas.openxmlformats.org/drawingml/2006/main">
               <a:ext uri="{FF2B5EF4-FFF2-40B4-BE49-F238E27FC236}">
-                <a16:creationId xmlns:a16="http://schemas.microsoft.com/office/drawing/2014/main" id="{D6DD3F03-4864-4B9C-8243-510BB19830E5}"/>
+                <a16:creationId xmlns:a16="http://schemas.microsoft.com/office/drawing/2014/main" id="{7DA682C3-CCF0-4BDF-9A36-5C99ED78AD68}"/>
               </a:ext>
             </a:extLst>
           </p:cNvPr>
@@ -10646,7 +10646,7 @@
           <p:cNvPr id="21" name="">
             <a:extLst xmlns:a="http://schemas.openxmlformats.org/drawingml/2006/main">
               <a:ext uri="{FF2B5EF4-FFF2-40B4-BE49-F238E27FC236}">
-                <a16:creationId xmlns:a16="http://schemas.microsoft.com/office/drawing/2014/main" id="{ED47A85A-6F88-4230-94A9-C1802B1731AA}"/>
+                <a16:creationId xmlns:a16="http://schemas.microsoft.com/office/drawing/2014/main" id="{D00459A7-6C47-4146-B239-BFAFC5764081}"/>
               </a:ext>
             </a:extLst>
           </p:cNvPr>
@@ -10704,7 +10704,7 @@
           <p:cNvPr id="22" name="">
             <a:extLst xmlns:a="http://schemas.openxmlformats.org/drawingml/2006/main">
               <a:ext uri="{FF2B5EF4-FFF2-40B4-BE49-F238E27FC236}">
-                <a16:creationId xmlns:a16="http://schemas.microsoft.com/office/drawing/2014/main" id="{67F2EA5E-822A-46D1-B528-AA87E49A11FF}"/>
+                <a16:creationId xmlns:a16="http://schemas.microsoft.com/office/drawing/2014/main" id="{BDC9CAA2-C883-4C8C-84D8-A97EFBF3F1F7}"/>
               </a:ext>
             </a:extLst>
           </p:cNvPr>
@@ -10741,7 +10741,7 @@
           <p:cNvPr id="23" name="">
             <a:extLst xmlns:a="http://schemas.openxmlformats.org/drawingml/2006/main">
               <a:ext uri="{FF2B5EF4-FFF2-40B4-BE49-F238E27FC236}">
-                <a16:creationId xmlns:a16="http://schemas.microsoft.com/office/drawing/2014/main" id="{D3898373-E979-4E08-BB34-6C76048FBEBB}"/>
+                <a16:creationId xmlns:a16="http://schemas.microsoft.com/office/drawing/2014/main" id="{5EE9DD3A-833A-4876-926E-7031099BF309}"/>
               </a:ext>
             </a:extLst>
           </p:cNvPr>
@@ -10776,7 +10776,7 @@
           <p:cNvPr id="24" name="">
             <a:extLst xmlns:a="http://schemas.openxmlformats.org/drawingml/2006/main">
               <a:ext uri="{FF2B5EF4-FFF2-40B4-BE49-F238E27FC236}">
-                <a16:creationId xmlns:a16="http://schemas.microsoft.com/office/drawing/2014/main" id="{0F9DB7B8-993A-4466-BC01-F1EA61CAF81D}"/>
+                <a16:creationId xmlns:a16="http://schemas.microsoft.com/office/drawing/2014/main" id="{AAFFEA89-20F8-4EFC-AE09-734ED955A21E}"/>
               </a:ext>
             </a:extLst>
           </p:cNvPr>
@@ -10834,7 +10834,7 @@
           <p:cNvPr id="25" name="">
             <a:extLst xmlns:a="http://schemas.openxmlformats.org/drawingml/2006/main">
               <a:ext uri="{FF2B5EF4-FFF2-40B4-BE49-F238E27FC236}">
-                <a16:creationId xmlns:a16="http://schemas.microsoft.com/office/drawing/2014/main" id="{CE2DD017-1B51-49DD-A5F6-E43C7176996B}"/>
+                <a16:creationId xmlns:a16="http://schemas.microsoft.com/office/drawing/2014/main" id="{34AA8A49-C335-4C59-9545-90630E04D909}"/>
               </a:ext>
             </a:extLst>
           </p:cNvPr>
@@ -10892,7 +10892,7 @@
           <p:cNvPr id="26" name="">
             <a:extLst xmlns:a="http://schemas.openxmlformats.org/drawingml/2006/main">
               <a:ext uri="{FF2B5EF4-FFF2-40B4-BE49-F238E27FC236}">
-                <a16:creationId xmlns:a16="http://schemas.microsoft.com/office/drawing/2014/main" id="{536070D3-86F2-45E7-A60A-0227BF1E4C49}"/>
+                <a16:creationId xmlns:a16="http://schemas.microsoft.com/office/drawing/2014/main" id="{4FDC5D70-EDA6-40BF-A737-BE2E3AF33837}"/>
               </a:ext>
             </a:extLst>
           </p:cNvPr>
@@ -10950,7 +10950,7 @@
           <p:cNvPr id="27" name="">
             <a:extLst xmlns:a="http://schemas.openxmlformats.org/drawingml/2006/main">
               <a:ext uri="{FF2B5EF4-FFF2-40B4-BE49-F238E27FC236}">
-                <a16:creationId xmlns:a16="http://schemas.microsoft.com/office/drawing/2014/main" id="{3C223EF0-EBE7-448A-B4CC-A9455CAC184F}"/>
+                <a16:creationId xmlns:a16="http://schemas.microsoft.com/office/drawing/2014/main" id="{42B082B9-D4E3-4881-A420-3025A11F8C03}"/>
               </a:ext>
             </a:extLst>
           </p:cNvPr>
@@ -10987,7 +10987,7 @@
           <p:cNvPr id="28" name="">
             <a:extLst xmlns:a="http://schemas.openxmlformats.org/drawingml/2006/main">
               <a:ext uri="{FF2B5EF4-FFF2-40B4-BE49-F238E27FC236}">
-                <a16:creationId xmlns:a16="http://schemas.microsoft.com/office/drawing/2014/main" id="{E048FC8A-C892-4398-92B8-D9A75D8A053C}"/>
+                <a16:creationId xmlns:a16="http://schemas.microsoft.com/office/drawing/2014/main" id="{0500AF2B-3AE3-4C8C-84AE-45686BD1868F}"/>
               </a:ext>
             </a:extLst>
           </p:cNvPr>
@@ -11022,7 +11022,7 @@
           <p:cNvPr id="29" name="">
             <a:extLst xmlns:a="http://schemas.openxmlformats.org/drawingml/2006/main">
               <a:ext uri="{FF2B5EF4-FFF2-40B4-BE49-F238E27FC236}">
-                <a16:creationId xmlns:a16="http://schemas.microsoft.com/office/drawing/2014/main" id="{CBF976F3-0B7D-4B5A-B684-28A572FDD210}"/>
+                <a16:creationId xmlns:a16="http://schemas.microsoft.com/office/drawing/2014/main" id="{4A6D9000-6BF3-49A4-B49F-8FC0E1C53597}"/>
               </a:ext>
             </a:extLst>
           </p:cNvPr>
@@ -11080,7 +11080,7 @@
           <p:cNvPr id="30" name="">
             <a:extLst xmlns:a="http://schemas.openxmlformats.org/drawingml/2006/main">
               <a:ext uri="{FF2B5EF4-FFF2-40B4-BE49-F238E27FC236}">
-                <a16:creationId xmlns:a16="http://schemas.microsoft.com/office/drawing/2014/main" id="{874B01D2-13C5-48FB-9172-97964590A431}"/>
+                <a16:creationId xmlns:a16="http://schemas.microsoft.com/office/drawing/2014/main" id="{9717394E-86F4-49B9-95C3-DB5C2A3329DB}"/>
               </a:ext>
             </a:extLst>
           </p:cNvPr>
@@ -11138,7 +11138,7 @@
           <p:cNvPr id="31" name="">
             <a:extLst xmlns:a="http://schemas.openxmlformats.org/drawingml/2006/main">
               <a:ext uri="{FF2B5EF4-FFF2-40B4-BE49-F238E27FC236}">
-                <a16:creationId xmlns:a16="http://schemas.microsoft.com/office/drawing/2014/main" id="{03C8C4AA-4913-40B0-9BB0-E5F87894A407}"/>
+                <a16:creationId xmlns:a16="http://schemas.microsoft.com/office/drawing/2014/main" id="{DA7A41A6-9D7A-4682-BD8D-20B9ED9150FD}"/>
               </a:ext>
             </a:extLst>
           </p:cNvPr>
@@ -11196,7 +11196,7 @@
           <p:cNvPr id="32" name="">
             <a:extLst xmlns:a="http://schemas.openxmlformats.org/drawingml/2006/main">
               <a:ext uri="{FF2B5EF4-FFF2-40B4-BE49-F238E27FC236}">
-                <a16:creationId xmlns:a16="http://schemas.microsoft.com/office/drawing/2014/main" id="{9962B511-D671-4D8D-8DC8-57B014136C30}"/>
+                <a16:creationId xmlns:a16="http://schemas.microsoft.com/office/drawing/2014/main" id="{BAF80B8A-1081-40DD-94F3-ECC9D29F8D35}"/>
               </a:ext>
             </a:extLst>
           </p:cNvPr>
@@ -11233,7 +11233,7 @@
           <p:cNvPr id="33" name="">
             <a:extLst xmlns:a="http://schemas.openxmlformats.org/drawingml/2006/main">
               <a:ext uri="{FF2B5EF4-FFF2-40B4-BE49-F238E27FC236}">
-                <a16:creationId xmlns:a16="http://schemas.microsoft.com/office/drawing/2014/main" id="{BC20C889-9AED-4276-A80B-BE3ADE777355}"/>
+                <a16:creationId xmlns:a16="http://schemas.microsoft.com/office/drawing/2014/main" id="{D8CB177D-D25D-49DF-A7A3-C6D2CA72FCA8}"/>
               </a:ext>
             </a:extLst>
           </p:cNvPr>
@@ -11268,7 +11268,7 @@
           <p:cNvPr id="34" name="">
             <a:extLst xmlns:a="http://schemas.openxmlformats.org/drawingml/2006/main">
               <a:ext uri="{FF2B5EF4-FFF2-40B4-BE49-F238E27FC236}">
-                <a16:creationId xmlns:a16="http://schemas.microsoft.com/office/drawing/2014/main" id="{CEA28CE8-F1E8-4652-A0E8-9BEE9BE86AC0}"/>
+                <a16:creationId xmlns:a16="http://schemas.microsoft.com/office/drawing/2014/main" id="{1EBFD550-D799-4E62-BBAE-CC02337BB2E4}"/>
               </a:ext>
             </a:extLst>
           </p:cNvPr>
@@ -11326,7 +11326,7 @@
           <p:cNvPr id="35" name="">
             <a:extLst xmlns:a="http://schemas.openxmlformats.org/drawingml/2006/main">
               <a:ext uri="{FF2B5EF4-FFF2-40B4-BE49-F238E27FC236}">
-                <a16:creationId xmlns:a16="http://schemas.microsoft.com/office/drawing/2014/main" id="{4DF73D21-92A8-4B86-BACE-ECCBBB644C99}"/>
+                <a16:creationId xmlns:a16="http://schemas.microsoft.com/office/drawing/2014/main" id="{6EDDDA34-F8B3-4F5D-8039-7D3AC38D17ED}"/>
               </a:ext>
             </a:extLst>
           </p:cNvPr>
@@ -11435,7 +11435,7 @@
           <p:cNvPr id="36" name="">
             <a:extLst xmlns:a="http://schemas.openxmlformats.org/drawingml/2006/main">
               <a:ext uri="{FF2B5EF4-FFF2-40B4-BE49-F238E27FC236}">
-                <a16:creationId xmlns:a16="http://schemas.microsoft.com/office/drawing/2014/main" id="{62527602-52EB-45A5-B421-9BDF6232A100}"/>
+                <a16:creationId xmlns:a16="http://schemas.microsoft.com/office/drawing/2014/main" id="{CEB7D67D-6261-4F3E-B6B9-92F8136908D2}"/>
               </a:ext>
             </a:extLst>
           </p:cNvPr>
@@ -11468,7 +11468,7 @@
           <p:cNvPr id="37" name="">
             <a:extLst xmlns:a="http://schemas.openxmlformats.org/drawingml/2006/main">
               <a:ext uri="{FF2B5EF4-FFF2-40B4-BE49-F238E27FC236}">
-                <a16:creationId xmlns:a16="http://schemas.microsoft.com/office/drawing/2014/main" id="{15A30D3A-DD7B-4B86-924B-C791ACB95E25}"/>
+                <a16:creationId xmlns:a16="http://schemas.microsoft.com/office/drawing/2014/main" id="{8B5B25B2-5BDD-455E-80AB-A578CDE574B9}"/>
               </a:ext>
             </a:extLst>
           </p:cNvPr>
@@ -11505,7 +11505,7 @@
           <p:cNvPr id="38" name="">
             <a:extLst xmlns:a="http://schemas.openxmlformats.org/drawingml/2006/main">
               <a:ext uri="{FF2B5EF4-FFF2-40B4-BE49-F238E27FC236}">
-                <a16:creationId xmlns:a16="http://schemas.microsoft.com/office/drawing/2014/main" id="{4F636B83-8542-4106-ACB5-1576C7D1D705}"/>
+                <a16:creationId xmlns:a16="http://schemas.microsoft.com/office/drawing/2014/main" id="{51504DE1-0571-4B0B-9490-6041D3FB3010}"/>
               </a:ext>
             </a:extLst>
           </p:cNvPr>
@@ -11540,7 +11540,7 @@
           <p:cNvPr id="39" name="">
             <a:extLst xmlns:a="http://schemas.openxmlformats.org/drawingml/2006/main">
               <a:ext uri="{FF2B5EF4-FFF2-40B4-BE49-F238E27FC236}">
-                <a16:creationId xmlns:a16="http://schemas.microsoft.com/office/drawing/2014/main" id="{E581D4C2-CB78-44FC-AB4C-1255323618EF}"/>
+                <a16:creationId xmlns:a16="http://schemas.microsoft.com/office/drawing/2014/main" id="{0376D61F-027E-4D4F-9184-4931C012F6DF}"/>
               </a:ext>
             </a:extLst>
           </p:cNvPr>
@@ -11598,7 +11598,7 @@
           <p:cNvPr id="40" name="">
             <a:extLst xmlns:a="http://schemas.openxmlformats.org/drawingml/2006/main">
               <a:ext uri="{FF2B5EF4-FFF2-40B4-BE49-F238E27FC236}">
-                <a16:creationId xmlns:a16="http://schemas.microsoft.com/office/drawing/2014/main" id="{A2759FAD-6A45-4000-9B09-91B688C5D46B}"/>
+                <a16:creationId xmlns:a16="http://schemas.microsoft.com/office/drawing/2014/main" id="{950F11A0-3F50-45C2-B480-3319E83059B4}"/>
               </a:ext>
             </a:extLst>
           </p:cNvPr>
@@ -11690,7 +11690,7 @@
           <p:cNvPr id="41" name="">
             <a:extLst xmlns:a="http://schemas.openxmlformats.org/drawingml/2006/main">
               <a:ext uri="{FF2B5EF4-FFF2-40B4-BE49-F238E27FC236}">
-                <a16:creationId xmlns:a16="http://schemas.microsoft.com/office/drawing/2014/main" id="{803F3182-4600-41A7-8C24-5D144992A56A}"/>
+                <a16:creationId xmlns:a16="http://schemas.microsoft.com/office/drawing/2014/main" id="{77A9AFD6-AE46-41FA-B05C-6078B3F525EF}"/>
               </a:ext>
             </a:extLst>
           </p:cNvPr>
@@ -11723,7 +11723,7 @@
           <p:cNvPr id="42" name="">
             <a:extLst xmlns:a="http://schemas.openxmlformats.org/drawingml/2006/main">
               <a:ext uri="{FF2B5EF4-FFF2-40B4-BE49-F238E27FC236}">
-                <a16:creationId xmlns:a16="http://schemas.microsoft.com/office/drawing/2014/main" id="{0ABAEC01-6EB3-4B88-B019-95558316B755}"/>
+                <a16:creationId xmlns:a16="http://schemas.microsoft.com/office/drawing/2014/main" id="{0130B438-0D26-451C-9E5E-F129C9698561}"/>
               </a:ext>
             </a:extLst>
           </p:cNvPr>
@@ -11760,7 +11760,7 @@
           <p:cNvPr id="43" name="">
             <a:extLst xmlns:a="http://schemas.openxmlformats.org/drawingml/2006/main">
               <a:ext uri="{FF2B5EF4-FFF2-40B4-BE49-F238E27FC236}">
-                <a16:creationId xmlns:a16="http://schemas.microsoft.com/office/drawing/2014/main" id="{9988100E-A804-4C8F-8BF3-325CE3EB1367}"/>
+                <a16:creationId xmlns:a16="http://schemas.microsoft.com/office/drawing/2014/main" id="{889733F1-229D-484A-8097-18AF38A9216A}"/>
               </a:ext>
             </a:extLst>
           </p:cNvPr>
@@ -11795,7 +11795,7 @@
           <p:cNvPr id="44" name="">
             <a:extLst xmlns:a="http://schemas.openxmlformats.org/drawingml/2006/main">
               <a:ext uri="{FF2B5EF4-FFF2-40B4-BE49-F238E27FC236}">
-                <a16:creationId xmlns:a16="http://schemas.microsoft.com/office/drawing/2014/main" id="{671D9F60-BF80-4961-8719-682F78415D12}"/>
+                <a16:creationId xmlns:a16="http://schemas.microsoft.com/office/drawing/2014/main" id="{5EE9C989-196F-4EFF-9FFB-45319CC94C0A}"/>
               </a:ext>
             </a:extLst>
           </p:cNvPr>
@@ -11853,7 +11853,7 @@
           <p:cNvPr id="45" name="">
             <a:extLst xmlns:a="http://schemas.openxmlformats.org/drawingml/2006/main">
               <a:ext uri="{FF2B5EF4-FFF2-40B4-BE49-F238E27FC236}">
-                <a16:creationId xmlns:a16="http://schemas.microsoft.com/office/drawing/2014/main" id="{AE332DA5-8C18-4DD6-A4DE-A83452311784}"/>
+                <a16:creationId xmlns:a16="http://schemas.microsoft.com/office/drawing/2014/main" id="{C8A4ACE1-CE31-47D9-BF4D-E329B4106179}"/>
               </a:ext>
             </a:extLst>
           </p:cNvPr>
@@ -11945,7 +11945,7 @@
           <p:cNvPr id="46" name="">
             <a:extLst xmlns:a="http://schemas.openxmlformats.org/drawingml/2006/main">
               <a:ext uri="{FF2B5EF4-FFF2-40B4-BE49-F238E27FC236}">
-                <a16:creationId xmlns:a16="http://schemas.microsoft.com/office/drawing/2014/main" id="{1638D1A4-B268-4F9B-86F5-EC23A911CC48}"/>
+                <a16:creationId xmlns:a16="http://schemas.microsoft.com/office/drawing/2014/main" id="{A267C33E-A382-4509-AAE3-9CB5D6033830}"/>
               </a:ext>
             </a:extLst>
           </p:cNvPr>
@@ -12001,7 +12001,7 @@
     </p:spTree>
     <p:extLst>
       <p:ext uri="{BB962C8B-B14F-4D97-AF65-F5344CB8AC3E}">
-        <p14:creationId xmlns:p14="http://schemas.microsoft.com/office/powerpoint/2010/main" val="113637826"/>
+        <p14:creationId xmlns:p14="http://schemas.microsoft.com/office/powerpoint/2010/main" val="150236197"/>
       </p:ext>
     </p:extLst>
   </p:cSld>
@@ -12032,7 +12032,7 @@
           <p:cNvPr id="1" name="Slide Number Placeholder 5">
             <a:extLst xmlns:a="http://schemas.openxmlformats.org/drawingml/2006/main">
               <a:ext uri="{FF2B5EF4-FFF2-40B4-BE49-F238E27FC236}">
-                <a16:creationId xmlns:a16="http://schemas.microsoft.com/office/drawing/2014/main" id="{821508BF-91E3-4E78-84B3-DCBD229C8660}"/>
+                <a16:creationId xmlns:a16="http://schemas.microsoft.com/office/drawing/2014/main" id="{11DAD1DA-DD27-4C25-AFB7-E057ACC56EC0}"/>
               </a:ext>
             </a:extLst>
           </p:cNvPr>
@@ -12068,7 +12068,7 @@
           <p:nvPr/>
         </p:nvPicPr>
         <p:blipFill>
-          <a:blip xmlns:r="http://schemas.openxmlformats.org/officeDocument/2006/relationships" xmlns:a="http://schemas.openxmlformats.org/drawingml/2006/main" r:embed="Rdbae293d94904d67"/>
+          <a:blip xmlns:r="http://schemas.openxmlformats.org/officeDocument/2006/relationships" xmlns:a="http://schemas.openxmlformats.org/drawingml/2006/main" r:embed="Ra9dd5dbe3f0b4712"/>
           <a:srcRect xmlns:a="http://schemas.openxmlformats.org/drawingml/2006/main" l="0" t="21875" r="0" b="21875"/>
           <a:stretch xmlns:a="http://schemas.openxmlformats.org/drawingml/2006/main">
             <a:fillRect l="0" t="0" r="0" b="0"/>
@@ -12089,7 +12089,7 @@
           <p:cNvPr id="3" name="">
             <a:extLst xmlns:a="http://schemas.openxmlformats.org/drawingml/2006/main">
               <a:ext uri="{FF2B5EF4-FFF2-40B4-BE49-F238E27FC236}">
-                <a16:creationId xmlns:a16="http://schemas.microsoft.com/office/drawing/2014/main" id="{E0B3D9B3-A1F3-44BB-914C-3C4A1285A1E5}"/>
+                <a16:creationId xmlns:a16="http://schemas.microsoft.com/office/drawing/2014/main" id="{3C4E4F89-053C-42E3-BBE7-AEB7B10E07E4}"/>
               </a:ext>
             </a:extLst>
           </p:cNvPr>
@@ -12124,7 +12124,7 @@
           <p:cNvPr id="4" name="">
             <a:extLst xmlns:a="http://schemas.openxmlformats.org/drawingml/2006/main">
               <a:ext uri="{FF2B5EF4-FFF2-40B4-BE49-F238E27FC236}">
-                <a16:creationId xmlns:a16="http://schemas.microsoft.com/office/drawing/2014/main" id="{8CE0FCA8-C0DF-412E-84C7-3E257338FE88}"/>
+                <a16:creationId xmlns:a16="http://schemas.microsoft.com/office/drawing/2014/main" id="{9EB6CE44-88FD-4113-B29B-CE0A4E0BF2B4}"/>
               </a:ext>
             </a:extLst>
           </p:cNvPr>
@@ -12159,7 +12159,7 @@
           <p:cNvPr id="5" name="">
             <a:extLst xmlns:a="http://schemas.openxmlformats.org/drawingml/2006/main">
               <a:ext uri="{FF2B5EF4-FFF2-40B4-BE49-F238E27FC236}">
-                <a16:creationId xmlns:a16="http://schemas.microsoft.com/office/drawing/2014/main" id="{8B5DE45A-F75D-4E24-8770-3F2E3A8054C1}"/>
+                <a16:creationId xmlns:a16="http://schemas.microsoft.com/office/drawing/2014/main" id="{F6FAD442-3F6A-40FC-812C-0AC8C5D1B821}"/>
               </a:ext>
             </a:extLst>
           </p:cNvPr>
@@ -12196,7 +12196,7 @@
           <p:cNvPr id="6" name="">
             <a:extLst xmlns:a="http://schemas.openxmlformats.org/drawingml/2006/main">
               <a:ext uri="{FF2B5EF4-FFF2-40B4-BE49-F238E27FC236}">
-                <a16:creationId xmlns:a16="http://schemas.microsoft.com/office/drawing/2014/main" id="{A0BD5025-7669-415C-857C-BC93BBB4B49F}"/>
+                <a16:creationId xmlns:a16="http://schemas.microsoft.com/office/drawing/2014/main" id="{C2673F55-E503-4B06-B4F2-E330EAF668A9}"/>
               </a:ext>
             </a:extLst>
           </p:cNvPr>
@@ -12233,7 +12233,7 @@
           <p:cNvPr id="7" name="">
             <a:extLst xmlns:a="http://schemas.openxmlformats.org/drawingml/2006/main">
               <a:ext uri="{FF2B5EF4-FFF2-40B4-BE49-F238E27FC236}">
-                <a16:creationId xmlns:a16="http://schemas.microsoft.com/office/drawing/2014/main" id="{B9C89542-4EFA-4755-BB1A-CA493D9FEFA4}"/>
+                <a16:creationId xmlns:a16="http://schemas.microsoft.com/office/drawing/2014/main" id="{FBA00386-8697-4553-8174-CD6CC5A5BA89}"/>
               </a:ext>
             </a:extLst>
           </p:cNvPr>
@@ -12270,7 +12270,7 @@
           <p:cNvPr id="8" name="">
             <a:extLst xmlns:a="http://schemas.openxmlformats.org/drawingml/2006/main">
               <a:ext uri="{FF2B5EF4-FFF2-40B4-BE49-F238E27FC236}">
-                <a16:creationId xmlns:a16="http://schemas.microsoft.com/office/drawing/2014/main" id="{98D07353-606A-429A-87A9-9F1D1D345A89}"/>
+                <a16:creationId xmlns:a16="http://schemas.microsoft.com/office/drawing/2014/main" id="{D6D566E1-41FE-4576-B7A7-C00932F8B1F7}"/>
               </a:ext>
             </a:extLst>
           </p:cNvPr>
@@ -12307,7 +12307,7 @@
           <p:cNvPr id="9" name="">
             <a:extLst xmlns:a="http://schemas.openxmlformats.org/drawingml/2006/main">
               <a:ext uri="{FF2B5EF4-FFF2-40B4-BE49-F238E27FC236}">
-                <a16:creationId xmlns:a16="http://schemas.microsoft.com/office/drawing/2014/main" id="{D3CD2E60-6223-41B5-AD10-F6B8F80542C7}"/>
+                <a16:creationId xmlns:a16="http://schemas.microsoft.com/office/drawing/2014/main" id="{F5A06E7D-B0FB-4616-9BFC-3CDEB1DA9896}"/>
               </a:ext>
             </a:extLst>
           </p:cNvPr>
@@ -12365,7 +12365,7 @@
           <p:cNvPr id="10" name="">
             <a:extLst xmlns:a="http://schemas.openxmlformats.org/drawingml/2006/main">
               <a:ext uri="{FF2B5EF4-FFF2-40B4-BE49-F238E27FC236}">
-                <a16:creationId xmlns:a16="http://schemas.microsoft.com/office/drawing/2014/main" id="{51C5CCEE-7F25-4D7C-ACBF-F272AFF10CDC}"/>
+                <a16:creationId xmlns:a16="http://schemas.microsoft.com/office/drawing/2014/main" id="{594178A3-8BAF-4AB1-B54C-737E1390F80E}"/>
               </a:ext>
             </a:extLst>
           </p:cNvPr>
@@ -12423,7 +12423,7 @@
           <p:cNvPr id="11" name="">
             <a:extLst xmlns:a="http://schemas.openxmlformats.org/drawingml/2006/main">
               <a:ext uri="{FF2B5EF4-FFF2-40B4-BE49-F238E27FC236}">
-                <a16:creationId xmlns:a16="http://schemas.microsoft.com/office/drawing/2014/main" id="{222F04D1-B718-4FDB-ACAB-6A7C7AB89148}"/>
+                <a16:creationId xmlns:a16="http://schemas.microsoft.com/office/drawing/2014/main" id="{3B6F4D70-A10A-4F27-A581-16C9A082A0DD}"/>
               </a:ext>
             </a:extLst>
           </p:cNvPr>
@@ -12458,7 +12458,7 @@
           <p:cNvPr id="12" name="">
             <a:extLst xmlns:a="http://schemas.openxmlformats.org/drawingml/2006/main">
               <a:ext uri="{FF2B5EF4-FFF2-40B4-BE49-F238E27FC236}">
-                <a16:creationId xmlns:a16="http://schemas.microsoft.com/office/drawing/2014/main" id="{6549A890-69D2-4CA4-A584-5F14AB83F3FF}"/>
+                <a16:creationId xmlns:a16="http://schemas.microsoft.com/office/drawing/2014/main" id="{9EA16861-73E4-40CE-8BA2-B5FE49EF6FBA}"/>
               </a:ext>
             </a:extLst>
           </p:cNvPr>
@@ -12491,7 +12491,7 @@
           <p:cNvPr id="13" name="">
             <a:extLst xmlns:a="http://schemas.openxmlformats.org/drawingml/2006/main">
               <a:ext uri="{FF2B5EF4-FFF2-40B4-BE49-F238E27FC236}">
-                <a16:creationId xmlns:a16="http://schemas.microsoft.com/office/drawing/2014/main" id="{664D7953-A5AD-4D73-9611-19C53E37A385}"/>
+                <a16:creationId xmlns:a16="http://schemas.microsoft.com/office/drawing/2014/main" id="{8D56011E-DE74-4C9D-967C-70BC4D13DD78}"/>
               </a:ext>
             </a:extLst>
           </p:cNvPr>
@@ -12566,7 +12566,7 @@
           <p:cNvPr id="14" name="">
             <a:extLst xmlns:a="http://schemas.openxmlformats.org/drawingml/2006/main">
               <a:ext uri="{FF2B5EF4-FFF2-40B4-BE49-F238E27FC236}">
-                <a16:creationId xmlns:a16="http://schemas.microsoft.com/office/drawing/2014/main" id="{3675DDEB-55FE-4680-B2DC-114E99E115A2}"/>
+                <a16:creationId xmlns:a16="http://schemas.microsoft.com/office/drawing/2014/main" id="{A858BB7F-C28D-4BF7-B096-9E360ED6A5F6}"/>
               </a:ext>
             </a:extLst>
           </p:cNvPr>
@@ -12603,7 +12603,7 @@
           <p:cNvPr id="15" name="">
             <a:extLst xmlns:a="http://schemas.openxmlformats.org/drawingml/2006/main">
               <a:ext uri="{FF2B5EF4-FFF2-40B4-BE49-F238E27FC236}">
-                <a16:creationId xmlns:a16="http://schemas.microsoft.com/office/drawing/2014/main" id="{D333A0B2-8E81-4849-BBB7-BED0F4E9232E}"/>
+                <a16:creationId xmlns:a16="http://schemas.microsoft.com/office/drawing/2014/main" id="{9B30471F-D138-4AC0-87DB-2C86D77996DD}"/>
               </a:ext>
             </a:extLst>
           </p:cNvPr>
@@ -12638,7 +12638,7 @@
           <p:cNvPr id="16" name="">
             <a:extLst xmlns:a="http://schemas.openxmlformats.org/drawingml/2006/main">
               <a:ext uri="{FF2B5EF4-FFF2-40B4-BE49-F238E27FC236}">
-                <a16:creationId xmlns:a16="http://schemas.microsoft.com/office/drawing/2014/main" id="{69B385C7-D9B5-4D26-9243-6A7BAA445E93}"/>
+                <a16:creationId xmlns:a16="http://schemas.microsoft.com/office/drawing/2014/main" id="{9721CA5C-3306-4B7B-B4EA-C65B428FAB3D}"/>
               </a:ext>
             </a:extLst>
           </p:cNvPr>
@@ -12696,7 +12696,7 @@
           <p:cNvPr id="17" name="">
             <a:extLst xmlns:a="http://schemas.openxmlformats.org/drawingml/2006/main">
               <a:ext uri="{FF2B5EF4-FFF2-40B4-BE49-F238E27FC236}">
-                <a16:creationId xmlns:a16="http://schemas.microsoft.com/office/drawing/2014/main" id="{D1FE0E59-AD52-4933-BFEB-4BBA3EF17606}"/>
+                <a16:creationId xmlns:a16="http://schemas.microsoft.com/office/drawing/2014/main" id="{49D82C79-4C96-4117-80CC-23ACAABD5F67}"/>
               </a:ext>
             </a:extLst>
           </p:cNvPr>
@@ -12754,7 +12754,7 @@
           <p:cNvPr id="18" name="">
             <a:extLst xmlns:a="http://schemas.openxmlformats.org/drawingml/2006/main">
               <a:ext uri="{FF2B5EF4-FFF2-40B4-BE49-F238E27FC236}">
-                <a16:creationId xmlns:a16="http://schemas.microsoft.com/office/drawing/2014/main" id="{A9A5066A-F192-43C6-9E2A-42E9713FBE1A}"/>
+                <a16:creationId xmlns:a16="http://schemas.microsoft.com/office/drawing/2014/main" id="{02624F2E-E019-4BA2-B59E-B2DBCA9A6808}"/>
               </a:ext>
             </a:extLst>
           </p:cNvPr>
@@ -12812,7 +12812,7 @@
           <p:cNvPr id="19" name="">
             <a:extLst xmlns:a="http://schemas.openxmlformats.org/drawingml/2006/main">
               <a:ext uri="{FF2B5EF4-FFF2-40B4-BE49-F238E27FC236}">
-                <a16:creationId xmlns:a16="http://schemas.microsoft.com/office/drawing/2014/main" id="{B4E2547D-DBE0-48A1-8A6E-4DFB9F32016E}"/>
+                <a16:creationId xmlns:a16="http://schemas.microsoft.com/office/drawing/2014/main" id="{E22260D2-72C8-4F19-8269-D8DB3E6560DF}"/>
               </a:ext>
             </a:extLst>
           </p:cNvPr>
@@ -12849,7 +12849,7 @@
           <p:cNvPr id="20" name="">
             <a:extLst xmlns:a="http://schemas.openxmlformats.org/drawingml/2006/main">
               <a:ext uri="{FF2B5EF4-FFF2-40B4-BE49-F238E27FC236}">
-                <a16:creationId xmlns:a16="http://schemas.microsoft.com/office/drawing/2014/main" id="{47884E3A-2064-4F6A-93E2-7D02C0485A86}"/>
+                <a16:creationId xmlns:a16="http://schemas.microsoft.com/office/drawing/2014/main" id="{241BA0B5-BEB4-42AE-B78E-E5DA25508E67}"/>
               </a:ext>
             </a:extLst>
           </p:cNvPr>
@@ -12884,7 +12884,7 @@
           <p:cNvPr id="21" name="">
             <a:extLst xmlns:a="http://schemas.openxmlformats.org/drawingml/2006/main">
               <a:ext uri="{FF2B5EF4-FFF2-40B4-BE49-F238E27FC236}">
-                <a16:creationId xmlns:a16="http://schemas.microsoft.com/office/drawing/2014/main" id="{D096A2D9-EC04-4F8B-9CB9-B8BA5F9579A2}"/>
+                <a16:creationId xmlns:a16="http://schemas.microsoft.com/office/drawing/2014/main" id="{DC9B0BCC-FC2C-4D01-AB2C-49AEF69BB3FC}"/>
               </a:ext>
             </a:extLst>
           </p:cNvPr>
@@ -12942,7 +12942,7 @@
           <p:cNvPr id="22" name="">
             <a:extLst xmlns:a="http://schemas.openxmlformats.org/drawingml/2006/main">
               <a:ext uri="{FF2B5EF4-FFF2-40B4-BE49-F238E27FC236}">
-                <a16:creationId xmlns:a16="http://schemas.microsoft.com/office/drawing/2014/main" id="{D76E4668-F47E-4082-B69E-66D7EA34EA5C}"/>
+                <a16:creationId xmlns:a16="http://schemas.microsoft.com/office/drawing/2014/main" id="{887E3D04-76B9-42CA-B701-6138BCCAF4C2}"/>
               </a:ext>
             </a:extLst>
           </p:cNvPr>
@@ -13000,7 +13000,7 @@
           <p:cNvPr id="23" name="">
             <a:extLst xmlns:a="http://schemas.openxmlformats.org/drawingml/2006/main">
               <a:ext uri="{FF2B5EF4-FFF2-40B4-BE49-F238E27FC236}">
-                <a16:creationId xmlns:a16="http://schemas.microsoft.com/office/drawing/2014/main" id="{53787DC9-6F43-4AF1-B28D-7B10E26B5B88}"/>
+                <a16:creationId xmlns:a16="http://schemas.microsoft.com/office/drawing/2014/main" id="{0673D2AE-BD96-4ABD-A6E2-C4EF72413A5C}"/>
               </a:ext>
             </a:extLst>
           </p:cNvPr>
@@ -13058,7 +13058,7 @@
           <p:cNvPr id="24" name="">
             <a:extLst xmlns:a="http://schemas.openxmlformats.org/drawingml/2006/main">
               <a:ext uri="{FF2B5EF4-FFF2-40B4-BE49-F238E27FC236}">
-                <a16:creationId xmlns:a16="http://schemas.microsoft.com/office/drawing/2014/main" id="{6E41B26D-D282-43FB-A30A-055289E1F116}"/>
+                <a16:creationId xmlns:a16="http://schemas.microsoft.com/office/drawing/2014/main" id="{27E524B7-1245-48A0-985B-79E68D0FA0B7}"/>
               </a:ext>
             </a:extLst>
           </p:cNvPr>
@@ -13095,7 +13095,7 @@
           <p:cNvPr id="25" name="">
             <a:extLst xmlns:a="http://schemas.openxmlformats.org/drawingml/2006/main">
               <a:ext uri="{FF2B5EF4-FFF2-40B4-BE49-F238E27FC236}">
-                <a16:creationId xmlns:a16="http://schemas.microsoft.com/office/drawing/2014/main" id="{A8009134-7666-4F1B-9CBB-483CE06AB96B}"/>
+                <a16:creationId xmlns:a16="http://schemas.microsoft.com/office/drawing/2014/main" id="{F57B177C-7164-41BE-8810-ACE5AFEFBC21}"/>
               </a:ext>
             </a:extLst>
           </p:cNvPr>
@@ -13130,7 +13130,7 @@
           <p:cNvPr id="26" name="">
             <a:extLst xmlns:a="http://schemas.openxmlformats.org/drawingml/2006/main">
               <a:ext uri="{FF2B5EF4-FFF2-40B4-BE49-F238E27FC236}">
-                <a16:creationId xmlns:a16="http://schemas.microsoft.com/office/drawing/2014/main" id="{C59BD3EB-ED18-4C8C-AA59-88161B497095}"/>
+                <a16:creationId xmlns:a16="http://schemas.microsoft.com/office/drawing/2014/main" id="{5FBA155E-66CA-47FF-ADD1-480B246620B9}"/>
               </a:ext>
             </a:extLst>
           </p:cNvPr>
@@ -13188,7 +13188,7 @@
           <p:cNvPr id="27" name="">
             <a:extLst xmlns:a="http://schemas.openxmlformats.org/drawingml/2006/main">
               <a:ext uri="{FF2B5EF4-FFF2-40B4-BE49-F238E27FC236}">
-                <a16:creationId xmlns:a16="http://schemas.microsoft.com/office/drawing/2014/main" id="{DD2DDDB6-7854-45D9-915E-169C915942BD}"/>
+                <a16:creationId xmlns:a16="http://schemas.microsoft.com/office/drawing/2014/main" id="{FB404FE6-8743-41E2-9A68-16052E3292A4}"/>
               </a:ext>
             </a:extLst>
           </p:cNvPr>
@@ -13246,7 +13246,7 @@
           <p:cNvPr id="28" name="">
             <a:extLst xmlns:a="http://schemas.openxmlformats.org/drawingml/2006/main">
               <a:ext uri="{FF2B5EF4-FFF2-40B4-BE49-F238E27FC236}">
-                <a16:creationId xmlns:a16="http://schemas.microsoft.com/office/drawing/2014/main" id="{FAD5EC4A-3A8E-4230-A185-5F685272A3A5}"/>
+                <a16:creationId xmlns:a16="http://schemas.microsoft.com/office/drawing/2014/main" id="{5DCEAAE7-BF74-4536-ACEA-38EF7D442C8A}"/>
               </a:ext>
             </a:extLst>
           </p:cNvPr>
@@ -13304,7 +13304,7 @@
           <p:cNvPr id="29" name="">
             <a:extLst xmlns:a="http://schemas.openxmlformats.org/drawingml/2006/main">
               <a:ext uri="{FF2B5EF4-FFF2-40B4-BE49-F238E27FC236}">
-                <a16:creationId xmlns:a16="http://schemas.microsoft.com/office/drawing/2014/main" id="{E8BF4855-E7DC-472C-AE1E-F683D9BEDDBC}"/>
+                <a16:creationId xmlns:a16="http://schemas.microsoft.com/office/drawing/2014/main" id="{8C5B0C55-C2A3-4DE9-B4C6-9EF888265533}"/>
               </a:ext>
             </a:extLst>
           </p:cNvPr>
@@ -13341,7 +13341,7 @@
           <p:cNvPr id="30" name="">
             <a:extLst xmlns:a="http://schemas.openxmlformats.org/drawingml/2006/main">
               <a:ext uri="{FF2B5EF4-FFF2-40B4-BE49-F238E27FC236}">
-                <a16:creationId xmlns:a16="http://schemas.microsoft.com/office/drawing/2014/main" id="{C3EF6258-1B3D-4EBA-9982-73B770599AF3}"/>
+                <a16:creationId xmlns:a16="http://schemas.microsoft.com/office/drawing/2014/main" id="{40AF74D7-0BB3-49B1-97D9-D0227DBA3DFE}"/>
               </a:ext>
             </a:extLst>
           </p:cNvPr>
@@ -13376,7 +13376,7 @@
           <p:cNvPr id="31" name="">
             <a:extLst xmlns:a="http://schemas.openxmlformats.org/drawingml/2006/main">
               <a:ext uri="{FF2B5EF4-FFF2-40B4-BE49-F238E27FC236}">
-                <a16:creationId xmlns:a16="http://schemas.microsoft.com/office/drawing/2014/main" id="{D946F6B4-3A9E-4465-A153-C1B50A920B5F}"/>
+                <a16:creationId xmlns:a16="http://schemas.microsoft.com/office/drawing/2014/main" id="{1D274B15-D79F-455C-BD50-74EDA75EF169}"/>
               </a:ext>
             </a:extLst>
           </p:cNvPr>
@@ -13434,7 +13434,7 @@
           <p:cNvPr id="32" name="">
             <a:extLst xmlns:a="http://schemas.openxmlformats.org/drawingml/2006/main">
               <a:ext uri="{FF2B5EF4-FFF2-40B4-BE49-F238E27FC236}">
-                <a16:creationId xmlns:a16="http://schemas.microsoft.com/office/drawing/2014/main" id="{CF993867-C577-4634-AFAE-36E14B570358}"/>
+                <a16:creationId xmlns:a16="http://schemas.microsoft.com/office/drawing/2014/main" id="{50D3E824-639B-48F4-BA11-E5921BE55712}"/>
               </a:ext>
             </a:extLst>
           </p:cNvPr>
@@ -13560,7 +13560,7 @@
           <p:cNvPr id="33" name="">
             <a:extLst xmlns:a="http://schemas.openxmlformats.org/drawingml/2006/main">
               <a:ext uri="{FF2B5EF4-FFF2-40B4-BE49-F238E27FC236}">
-                <a16:creationId xmlns:a16="http://schemas.microsoft.com/office/drawing/2014/main" id="{ED789CE5-E431-4892-AE0E-3B5E3AF3AAC8}"/>
+                <a16:creationId xmlns:a16="http://schemas.microsoft.com/office/drawing/2014/main" id="{DBA6429A-3A1E-4C3A-BF7A-E184EA59A547}"/>
               </a:ext>
             </a:extLst>
           </p:cNvPr>
@@ -13597,7 +13597,7 @@
           <p:cNvPr id="34" name="">
             <a:extLst xmlns:a="http://schemas.openxmlformats.org/drawingml/2006/main">
               <a:ext uri="{FF2B5EF4-FFF2-40B4-BE49-F238E27FC236}">
-                <a16:creationId xmlns:a16="http://schemas.microsoft.com/office/drawing/2014/main" id="{079D33E6-64C9-49FB-B4A0-862664C0E255}"/>
+                <a16:creationId xmlns:a16="http://schemas.microsoft.com/office/drawing/2014/main" id="{4D6619E3-D7D7-49BE-9273-2DCC775B0171}"/>
               </a:ext>
             </a:extLst>
           </p:cNvPr>
@@ -13632,7 +13632,7 @@
           <p:cNvPr id="35" name="">
             <a:extLst xmlns:a="http://schemas.openxmlformats.org/drawingml/2006/main">
               <a:ext uri="{FF2B5EF4-FFF2-40B4-BE49-F238E27FC236}">
-                <a16:creationId xmlns:a16="http://schemas.microsoft.com/office/drawing/2014/main" id="{F3E5AA6C-A387-43D9-85EF-599364501439}"/>
+                <a16:creationId xmlns:a16="http://schemas.microsoft.com/office/drawing/2014/main" id="{4A483BD2-4192-4E7D-B7D4-5C0AAC03B61A}"/>
               </a:ext>
             </a:extLst>
           </p:cNvPr>
@@ -13690,7 +13690,7 @@
           <p:cNvPr id="36" name="">
             <a:extLst xmlns:a="http://schemas.openxmlformats.org/drawingml/2006/main">
               <a:ext uri="{FF2B5EF4-FFF2-40B4-BE49-F238E27FC236}">
-                <a16:creationId xmlns:a16="http://schemas.microsoft.com/office/drawing/2014/main" id="{5D38648F-9AF6-4AC8-862D-D9DFD69B6D6A}"/>
+                <a16:creationId xmlns:a16="http://schemas.microsoft.com/office/drawing/2014/main" id="{96C53DBA-BEE9-4999-9118-416C05844DDC}"/>
               </a:ext>
             </a:extLst>
           </p:cNvPr>
@@ -13799,7 +13799,7 @@
           <p:cNvPr id="37" name="">
             <a:extLst xmlns:a="http://schemas.openxmlformats.org/drawingml/2006/main">
               <a:ext uri="{FF2B5EF4-FFF2-40B4-BE49-F238E27FC236}">
-                <a16:creationId xmlns:a16="http://schemas.microsoft.com/office/drawing/2014/main" id="{3A5EC72D-35A1-471B-8358-2850BB73BBB6}"/>
+                <a16:creationId xmlns:a16="http://schemas.microsoft.com/office/drawing/2014/main" id="{C934437D-F2F5-4385-81D5-873450F96C36}"/>
               </a:ext>
             </a:extLst>
           </p:cNvPr>
@@ -13836,7 +13836,7 @@
           <p:cNvPr id="38" name="">
             <a:extLst xmlns:a="http://schemas.openxmlformats.org/drawingml/2006/main">
               <a:ext uri="{FF2B5EF4-FFF2-40B4-BE49-F238E27FC236}">
-                <a16:creationId xmlns:a16="http://schemas.microsoft.com/office/drawing/2014/main" id="{93884BB2-2A45-437C-9078-13463D521615}"/>
+                <a16:creationId xmlns:a16="http://schemas.microsoft.com/office/drawing/2014/main" id="{40B0D508-131F-455F-A87A-78B6607D6313}"/>
               </a:ext>
             </a:extLst>
           </p:cNvPr>
@@ -13871,7 +13871,7 @@
           <p:cNvPr id="39" name="">
             <a:extLst xmlns:a="http://schemas.openxmlformats.org/drawingml/2006/main">
               <a:ext uri="{FF2B5EF4-FFF2-40B4-BE49-F238E27FC236}">
-                <a16:creationId xmlns:a16="http://schemas.microsoft.com/office/drawing/2014/main" id="{180DDC3A-8059-435D-A123-DA1710E73132}"/>
+                <a16:creationId xmlns:a16="http://schemas.microsoft.com/office/drawing/2014/main" id="{51E39ADE-AF2E-4D2F-B029-F71D91E1CE8A}"/>
               </a:ext>
             </a:extLst>
           </p:cNvPr>
@@ -13929,7 +13929,7 @@
           <p:cNvPr id="40" name="">
             <a:extLst xmlns:a="http://schemas.openxmlformats.org/drawingml/2006/main">
               <a:ext uri="{FF2B5EF4-FFF2-40B4-BE49-F238E27FC236}">
-                <a16:creationId xmlns:a16="http://schemas.microsoft.com/office/drawing/2014/main" id="{BCF4D525-814D-4C4A-B472-1626E21DDE6E}"/>
+                <a16:creationId xmlns:a16="http://schemas.microsoft.com/office/drawing/2014/main" id="{7DA479DE-6363-4C30-8441-79C6F836B199}"/>
               </a:ext>
             </a:extLst>
           </p:cNvPr>
@@ -14038,7 +14038,7 @@
           <p:cNvPr id="41" name="">
             <a:extLst xmlns:a="http://schemas.openxmlformats.org/drawingml/2006/main">
               <a:ext uri="{FF2B5EF4-FFF2-40B4-BE49-F238E27FC236}">
-                <a16:creationId xmlns:a16="http://schemas.microsoft.com/office/drawing/2014/main" id="{49F3FFC7-B104-4D5A-8686-7176CFDCEAF1}"/>
+                <a16:creationId xmlns:a16="http://schemas.microsoft.com/office/drawing/2014/main" id="{8BB1D1B8-056E-48E4-B3A4-7BB9E3A4D38F}"/>
               </a:ext>
             </a:extLst>
           </p:cNvPr>
@@ -14094,7 +14094,7 @@
     </p:spTree>
     <p:extLst>
       <p:ext uri="{BB962C8B-B14F-4D97-AF65-F5344CB8AC3E}">
-        <p14:creationId xmlns:p14="http://schemas.microsoft.com/office/powerpoint/2010/main" val="1237867467"/>
+        <p14:creationId xmlns:p14="http://schemas.microsoft.com/office/powerpoint/2010/main" val="134510111"/>
       </p:ext>
     </p:extLst>
   </p:cSld>
@@ -14125,7 +14125,7 @@
           <p:cNvPr id="1" name="Slide Number Placeholder 5">
             <a:extLst xmlns:a="http://schemas.openxmlformats.org/drawingml/2006/main">
               <a:ext uri="{FF2B5EF4-FFF2-40B4-BE49-F238E27FC236}">
-                <a16:creationId xmlns:a16="http://schemas.microsoft.com/office/drawing/2014/main" id="{821508BF-91E3-4E78-84B3-DCBD229C8660}"/>
+                <a16:creationId xmlns:a16="http://schemas.microsoft.com/office/drawing/2014/main" id="{11DAD1DA-DD27-4C25-AFB7-E057ACC56EC0}"/>
               </a:ext>
             </a:extLst>
           </p:cNvPr>
@@ -14161,7 +14161,7 @@
           <p:nvPr/>
         </p:nvPicPr>
         <p:blipFill>
-          <a:blip xmlns:r="http://schemas.openxmlformats.org/officeDocument/2006/relationships" xmlns:a="http://schemas.openxmlformats.org/drawingml/2006/main" r:embed="Re2c25d33617e48fb"/>
+          <a:blip xmlns:r="http://schemas.openxmlformats.org/officeDocument/2006/relationships" xmlns:a="http://schemas.openxmlformats.org/drawingml/2006/main" r:embed="Rb701a0bc86634413"/>
           <a:srcRect xmlns:a="http://schemas.openxmlformats.org/drawingml/2006/main" l="0" t="21875" r="0" b="21875"/>
           <a:stretch xmlns:a="http://schemas.openxmlformats.org/drawingml/2006/main">
             <a:fillRect l="0" t="0" r="0" b="0"/>
@@ -14182,7 +14182,7 @@
           <p:cNvPr id="3" name="">
             <a:extLst xmlns:a="http://schemas.openxmlformats.org/drawingml/2006/main">
               <a:ext uri="{FF2B5EF4-FFF2-40B4-BE49-F238E27FC236}">
-                <a16:creationId xmlns:a16="http://schemas.microsoft.com/office/drawing/2014/main" id="{85F830A1-B52F-46B3-ADE1-625936B0E395}"/>
+                <a16:creationId xmlns:a16="http://schemas.microsoft.com/office/drawing/2014/main" id="{F85B3A74-CFEE-4B4B-BA34-3FE18FE7A39B}"/>
               </a:ext>
             </a:extLst>
           </p:cNvPr>
@@ -14217,7 +14217,7 @@
           <p:cNvPr id="4" name="">
             <a:extLst xmlns:a="http://schemas.openxmlformats.org/drawingml/2006/main">
               <a:ext uri="{FF2B5EF4-FFF2-40B4-BE49-F238E27FC236}">
-                <a16:creationId xmlns:a16="http://schemas.microsoft.com/office/drawing/2014/main" id="{8C6F1B92-DEE9-41A0-A4B2-DE5D7BA73F19}"/>
+                <a16:creationId xmlns:a16="http://schemas.microsoft.com/office/drawing/2014/main" id="{D2B568E6-C8D2-4B51-9FFF-7A666CFC4BF6}"/>
               </a:ext>
             </a:extLst>
           </p:cNvPr>
@@ -14252,7 +14252,7 @@
           <p:cNvPr id="5" name="">
             <a:extLst xmlns:a="http://schemas.openxmlformats.org/drawingml/2006/main">
               <a:ext uri="{FF2B5EF4-FFF2-40B4-BE49-F238E27FC236}">
-                <a16:creationId xmlns:a16="http://schemas.microsoft.com/office/drawing/2014/main" id="{05AF92C3-7100-4F5B-A334-717559CD7317}"/>
+                <a16:creationId xmlns:a16="http://schemas.microsoft.com/office/drawing/2014/main" id="{B697BBF5-645A-4EDB-95D1-EBBCC7F167AF}"/>
               </a:ext>
             </a:extLst>
           </p:cNvPr>
@@ -14289,7 +14289,7 @@
           <p:cNvPr id="6" name="">
             <a:extLst xmlns:a="http://schemas.openxmlformats.org/drawingml/2006/main">
               <a:ext uri="{FF2B5EF4-FFF2-40B4-BE49-F238E27FC236}">
-                <a16:creationId xmlns:a16="http://schemas.microsoft.com/office/drawing/2014/main" id="{91FDD3FB-B4A1-4AB6-93B6-EAD1BA33E6A7}"/>
+                <a16:creationId xmlns:a16="http://schemas.microsoft.com/office/drawing/2014/main" id="{D86B6496-099A-418D-AABE-215CB6880197}"/>
               </a:ext>
             </a:extLst>
           </p:cNvPr>
@@ -14326,7 +14326,7 @@
           <p:cNvPr id="7" name="">
             <a:extLst xmlns:a="http://schemas.openxmlformats.org/drawingml/2006/main">
               <a:ext uri="{FF2B5EF4-FFF2-40B4-BE49-F238E27FC236}">
-                <a16:creationId xmlns:a16="http://schemas.microsoft.com/office/drawing/2014/main" id="{BA448CC0-4FDD-4FBD-8D0B-C99279F0D511}"/>
+                <a16:creationId xmlns:a16="http://schemas.microsoft.com/office/drawing/2014/main" id="{53DBD1D7-5B12-4EB7-9403-CC197A8DA979}"/>
               </a:ext>
             </a:extLst>
           </p:cNvPr>
@@ -14363,7 +14363,7 @@
           <p:cNvPr id="8" name="">
             <a:extLst xmlns:a="http://schemas.openxmlformats.org/drawingml/2006/main">
               <a:ext uri="{FF2B5EF4-FFF2-40B4-BE49-F238E27FC236}">
-                <a16:creationId xmlns:a16="http://schemas.microsoft.com/office/drawing/2014/main" id="{3FF93357-503B-46FB-A417-E05CAEC0B70B}"/>
+                <a16:creationId xmlns:a16="http://schemas.microsoft.com/office/drawing/2014/main" id="{AA81F857-8EB9-4753-B292-222178A42FF8}"/>
               </a:ext>
             </a:extLst>
           </p:cNvPr>
@@ -14400,7 +14400,7 @@
           <p:cNvPr id="9" name="">
             <a:extLst xmlns:a="http://schemas.openxmlformats.org/drawingml/2006/main">
               <a:ext uri="{FF2B5EF4-FFF2-40B4-BE49-F238E27FC236}">
-                <a16:creationId xmlns:a16="http://schemas.microsoft.com/office/drawing/2014/main" id="{28EB9D4A-E3AD-4345-AD06-2F9BB11CD72F}"/>
+                <a16:creationId xmlns:a16="http://schemas.microsoft.com/office/drawing/2014/main" id="{0D5A3FCB-EB87-4167-95B6-3E1444C05F55}"/>
               </a:ext>
             </a:extLst>
           </p:cNvPr>
@@ -14458,7 +14458,7 @@
           <p:cNvPr id="10" name="">
             <a:extLst xmlns:a="http://schemas.openxmlformats.org/drawingml/2006/main">
               <a:ext uri="{FF2B5EF4-FFF2-40B4-BE49-F238E27FC236}">
-                <a16:creationId xmlns:a16="http://schemas.microsoft.com/office/drawing/2014/main" id="{BCDEAA0B-0A07-4ED1-88E7-93FEFD79167B}"/>
+                <a16:creationId xmlns:a16="http://schemas.microsoft.com/office/drawing/2014/main" id="{DA4A6AC2-1C0E-41BC-BE2D-2FD93BBC7E13}"/>
               </a:ext>
             </a:extLst>
           </p:cNvPr>
@@ -14516,7 +14516,7 @@
           <p:cNvPr id="11" name="">
             <a:extLst xmlns:a="http://schemas.openxmlformats.org/drawingml/2006/main">
               <a:ext uri="{FF2B5EF4-FFF2-40B4-BE49-F238E27FC236}">
-                <a16:creationId xmlns:a16="http://schemas.microsoft.com/office/drawing/2014/main" id="{F55E2B99-B97E-4BDF-AABB-735AFA264609}"/>
+                <a16:creationId xmlns:a16="http://schemas.microsoft.com/office/drawing/2014/main" id="{A614AD8C-9446-4524-894A-FE6736E5424D}"/>
               </a:ext>
             </a:extLst>
           </p:cNvPr>
@@ -14551,7 +14551,7 @@
           <p:cNvPr id="12" name="">
             <a:extLst xmlns:a="http://schemas.openxmlformats.org/drawingml/2006/main">
               <a:ext uri="{FF2B5EF4-FFF2-40B4-BE49-F238E27FC236}">
-                <a16:creationId xmlns:a16="http://schemas.microsoft.com/office/drawing/2014/main" id="{5B4E95C6-D9C3-40D3-8A8C-40F64977BD72}"/>
+                <a16:creationId xmlns:a16="http://schemas.microsoft.com/office/drawing/2014/main" id="{D3435FA6-DA60-4D8E-8D74-157EA7250B63}"/>
               </a:ext>
             </a:extLst>
           </p:cNvPr>
@@ -14584,7 +14584,7 @@
           <p:cNvPr id="13" name="">
             <a:extLst xmlns:a="http://schemas.openxmlformats.org/drawingml/2006/main">
               <a:ext uri="{FF2B5EF4-FFF2-40B4-BE49-F238E27FC236}">
-                <a16:creationId xmlns:a16="http://schemas.microsoft.com/office/drawing/2014/main" id="{ACFDF1E2-524A-47FE-B92C-026958DD54A3}"/>
+                <a16:creationId xmlns:a16="http://schemas.microsoft.com/office/drawing/2014/main" id="{21B2A585-4DB7-45B9-82BB-12A43818D9AE}"/>
               </a:ext>
             </a:extLst>
           </p:cNvPr>
@@ -14659,7 +14659,7 @@
           <p:cNvPr id="14" name="">
             <a:extLst xmlns:a="http://schemas.openxmlformats.org/drawingml/2006/main">
               <a:ext uri="{FF2B5EF4-FFF2-40B4-BE49-F238E27FC236}">
-                <a16:creationId xmlns:a16="http://schemas.microsoft.com/office/drawing/2014/main" id="{EECB16AC-EAC1-437D-BB16-B4BF4B12AC90}"/>
+                <a16:creationId xmlns:a16="http://schemas.microsoft.com/office/drawing/2014/main" id="{64666229-7EE7-4F05-B618-E88FEE88B2D5}"/>
               </a:ext>
             </a:extLst>
           </p:cNvPr>
@@ -14694,7 +14694,7 @@
           <p:cNvPr id="15" name="">
             <a:extLst xmlns:a="http://schemas.openxmlformats.org/drawingml/2006/main">
               <a:ext uri="{FF2B5EF4-FFF2-40B4-BE49-F238E27FC236}">
-                <a16:creationId xmlns:a16="http://schemas.microsoft.com/office/drawing/2014/main" id="{6E76B2A5-B3D5-45C3-9296-38C8893774F5}"/>
+                <a16:creationId xmlns:a16="http://schemas.microsoft.com/office/drawing/2014/main" id="{03442357-BCA3-42C6-854A-CB39EE742C9D}"/>
               </a:ext>
             </a:extLst>
           </p:cNvPr>
@@ -14729,7 +14729,7 @@
           <p:cNvPr id="16" name="">
             <a:extLst xmlns:a="http://schemas.openxmlformats.org/drawingml/2006/main">
               <a:ext uri="{FF2B5EF4-FFF2-40B4-BE49-F238E27FC236}">
-                <a16:creationId xmlns:a16="http://schemas.microsoft.com/office/drawing/2014/main" id="{B498026B-AF79-4D0E-A9B1-0D068908E2AF}"/>
+                <a16:creationId xmlns:a16="http://schemas.microsoft.com/office/drawing/2014/main" id="{888E989F-A41A-49E4-9699-9D8140A742DF}"/>
               </a:ext>
             </a:extLst>
           </p:cNvPr>
@@ -14783,7 +14783,7 @@
           <p:cNvPr id="17" name="">
             <a:extLst xmlns:a="http://schemas.openxmlformats.org/drawingml/2006/main">
               <a:ext uri="{FF2B5EF4-FFF2-40B4-BE49-F238E27FC236}">
-                <a16:creationId xmlns:a16="http://schemas.microsoft.com/office/drawing/2014/main" id="{B5B490C8-7F85-46D5-9C62-DA1B9DC5D4B8}"/>
+                <a16:creationId xmlns:a16="http://schemas.microsoft.com/office/drawing/2014/main" id="{9AA7D190-2724-4DFE-BF05-C95E8648644A}"/>
               </a:ext>
             </a:extLst>
           </p:cNvPr>
@@ -14841,7 +14841,7 @@
           <p:cNvPr id="18" name="">
             <a:extLst xmlns:a="http://schemas.openxmlformats.org/drawingml/2006/main">
               <a:ext uri="{FF2B5EF4-FFF2-40B4-BE49-F238E27FC236}">
-                <a16:creationId xmlns:a16="http://schemas.microsoft.com/office/drawing/2014/main" id="{357FD728-C17A-4311-8780-918593AA3D20}"/>
+                <a16:creationId xmlns:a16="http://schemas.microsoft.com/office/drawing/2014/main" id="{65933066-28F1-45DD-BEBD-62CA3D6F5496}"/>
               </a:ext>
             </a:extLst>
           </p:cNvPr>
@@ -14899,7 +14899,7 @@
           <p:cNvPr id="19" name="">
             <a:extLst xmlns:a="http://schemas.openxmlformats.org/drawingml/2006/main">
               <a:ext uri="{FF2B5EF4-FFF2-40B4-BE49-F238E27FC236}">
-                <a16:creationId xmlns:a16="http://schemas.microsoft.com/office/drawing/2014/main" id="{3C3685CC-D5A3-4F9B-A008-459D677FF9B2}"/>
+                <a16:creationId xmlns:a16="http://schemas.microsoft.com/office/drawing/2014/main" id="{5EE22EA8-105A-4238-87BC-E41CF7B4E646}"/>
               </a:ext>
             </a:extLst>
           </p:cNvPr>
@@ -14934,7 +14934,7 @@
           <p:cNvPr id="20" name="">
             <a:extLst xmlns:a="http://schemas.openxmlformats.org/drawingml/2006/main">
               <a:ext uri="{FF2B5EF4-FFF2-40B4-BE49-F238E27FC236}">
-                <a16:creationId xmlns:a16="http://schemas.microsoft.com/office/drawing/2014/main" id="{58204CDC-C681-461A-B9AE-F66E656A0916}"/>
+                <a16:creationId xmlns:a16="http://schemas.microsoft.com/office/drawing/2014/main" id="{B3CB1E16-E632-4273-A521-12587BEDE2C4}"/>
               </a:ext>
             </a:extLst>
           </p:cNvPr>
@@ -14969,7 +14969,7 @@
           <p:cNvPr id="21" name="">
             <a:extLst xmlns:a="http://schemas.openxmlformats.org/drawingml/2006/main">
               <a:ext uri="{FF2B5EF4-FFF2-40B4-BE49-F238E27FC236}">
-                <a16:creationId xmlns:a16="http://schemas.microsoft.com/office/drawing/2014/main" id="{47C6ECB4-5553-43C0-8C8D-41D125B2A895}"/>
+                <a16:creationId xmlns:a16="http://schemas.microsoft.com/office/drawing/2014/main" id="{AB6F4D34-90C7-4D29-8119-A15089249835}"/>
               </a:ext>
             </a:extLst>
           </p:cNvPr>
@@ -15023,7 +15023,7 @@
           <p:cNvPr id="22" name="">
             <a:extLst xmlns:a="http://schemas.openxmlformats.org/drawingml/2006/main">
               <a:ext uri="{FF2B5EF4-FFF2-40B4-BE49-F238E27FC236}">
-                <a16:creationId xmlns:a16="http://schemas.microsoft.com/office/drawing/2014/main" id="{51A1538A-3CBE-4B30-BB56-3C203C44FF2F}"/>
+                <a16:creationId xmlns:a16="http://schemas.microsoft.com/office/drawing/2014/main" id="{BF1AB3E3-93B9-45C8-B6F5-AD75FB5043D6}"/>
               </a:ext>
             </a:extLst>
           </p:cNvPr>
@@ -15081,7 +15081,7 @@
           <p:cNvPr id="23" name="">
             <a:extLst xmlns:a="http://schemas.openxmlformats.org/drawingml/2006/main">
               <a:ext uri="{FF2B5EF4-FFF2-40B4-BE49-F238E27FC236}">
-                <a16:creationId xmlns:a16="http://schemas.microsoft.com/office/drawing/2014/main" id="{D5DC7F29-12EB-4819-B4AE-7F176D4DC485}"/>
+                <a16:creationId xmlns:a16="http://schemas.microsoft.com/office/drawing/2014/main" id="{8EEE65B7-74A6-48D5-8DA8-707726E82D03}"/>
               </a:ext>
             </a:extLst>
           </p:cNvPr>
@@ -15139,7 +15139,7 @@
           <p:cNvPr id="24" name="">
             <a:extLst xmlns:a="http://schemas.openxmlformats.org/drawingml/2006/main">
               <a:ext uri="{FF2B5EF4-FFF2-40B4-BE49-F238E27FC236}">
-                <a16:creationId xmlns:a16="http://schemas.microsoft.com/office/drawing/2014/main" id="{D21AC2A4-11B5-4B60-AFFF-C58F64509328}"/>
+                <a16:creationId xmlns:a16="http://schemas.microsoft.com/office/drawing/2014/main" id="{BEB4B4F3-AB83-4831-9418-F9AD8E50A8FC}"/>
               </a:ext>
             </a:extLst>
           </p:cNvPr>
@@ -15174,7 +15174,7 @@
           <p:cNvPr id="25" name="">
             <a:extLst xmlns:a="http://schemas.openxmlformats.org/drawingml/2006/main">
               <a:ext uri="{FF2B5EF4-FFF2-40B4-BE49-F238E27FC236}">
-                <a16:creationId xmlns:a16="http://schemas.microsoft.com/office/drawing/2014/main" id="{91429D49-EC71-4F9D-B81D-CE007490F8F2}"/>
+                <a16:creationId xmlns:a16="http://schemas.microsoft.com/office/drawing/2014/main" id="{CA30BCC3-8CCA-483E-9695-833DFD5396E4}"/>
               </a:ext>
             </a:extLst>
           </p:cNvPr>
@@ -15209,7 +15209,7 @@
           <p:cNvPr id="26" name="">
             <a:extLst xmlns:a="http://schemas.openxmlformats.org/drawingml/2006/main">
               <a:ext uri="{FF2B5EF4-FFF2-40B4-BE49-F238E27FC236}">
-                <a16:creationId xmlns:a16="http://schemas.microsoft.com/office/drawing/2014/main" id="{27273D1B-1D7C-4B6F-A265-2B443E75F854}"/>
+                <a16:creationId xmlns:a16="http://schemas.microsoft.com/office/drawing/2014/main" id="{EFC6A08E-DCBA-48FA-8ECF-21068CFC128C}"/>
               </a:ext>
             </a:extLst>
           </p:cNvPr>
@@ -15263,7 +15263,7 @@
           <p:cNvPr id="27" name="">
             <a:extLst xmlns:a="http://schemas.openxmlformats.org/drawingml/2006/main">
               <a:ext uri="{FF2B5EF4-FFF2-40B4-BE49-F238E27FC236}">
-                <a16:creationId xmlns:a16="http://schemas.microsoft.com/office/drawing/2014/main" id="{B7AF2AEC-FF4B-4493-B649-C7A9DC08822E}"/>
+                <a16:creationId xmlns:a16="http://schemas.microsoft.com/office/drawing/2014/main" id="{55B8C646-C849-4804-82F1-A7BD485EA5D5}"/>
               </a:ext>
             </a:extLst>
           </p:cNvPr>
@@ -15321,7 +15321,7 @@
           <p:cNvPr id="28" name="">
             <a:extLst xmlns:a="http://schemas.openxmlformats.org/drawingml/2006/main">
               <a:ext uri="{FF2B5EF4-FFF2-40B4-BE49-F238E27FC236}">
-                <a16:creationId xmlns:a16="http://schemas.microsoft.com/office/drawing/2014/main" id="{47B1329D-6EED-425C-847F-B9AF313751A0}"/>
+                <a16:creationId xmlns:a16="http://schemas.microsoft.com/office/drawing/2014/main" id="{6AB41991-BF0C-4C01-8809-133773978BC4}"/>
               </a:ext>
             </a:extLst>
           </p:cNvPr>
@@ -15396,7 +15396,7 @@
           <p:cNvPr id="29" name="">
             <a:extLst xmlns:a="http://schemas.openxmlformats.org/drawingml/2006/main">
               <a:ext uri="{FF2B5EF4-FFF2-40B4-BE49-F238E27FC236}">
-                <a16:creationId xmlns:a16="http://schemas.microsoft.com/office/drawing/2014/main" id="{2A50C413-2E50-4A3F-8994-B358AF23B7AC}"/>
+                <a16:creationId xmlns:a16="http://schemas.microsoft.com/office/drawing/2014/main" id="{F183C3E4-FE4A-4990-8D13-217E9A2630A0}"/>
               </a:ext>
             </a:extLst>
           </p:cNvPr>
@@ -15431,7 +15431,7 @@
           <p:cNvPr id="30" name="">
             <a:extLst xmlns:a="http://schemas.openxmlformats.org/drawingml/2006/main">
               <a:ext uri="{FF2B5EF4-FFF2-40B4-BE49-F238E27FC236}">
-                <a16:creationId xmlns:a16="http://schemas.microsoft.com/office/drawing/2014/main" id="{F44E93E2-AC62-417E-A4D9-C44E5B7C3CE5}"/>
+                <a16:creationId xmlns:a16="http://schemas.microsoft.com/office/drawing/2014/main" id="{6E217F74-478A-415A-A1FE-BD451F6A2F40}"/>
               </a:ext>
             </a:extLst>
           </p:cNvPr>
@@ -15466,7 +15466,7 @@
           <p:cNvPr id="31" name="">
             <a:extLst xmlns:a="http://schemas.openxmlformats.org/drawingml/2006/main">
               <a:ext uri="{FF2B5EF4-FFF2-40B4-BE49-F238E27FC236}">
-                <a16:creationId xmlns:a16="http://schemas.microsoft.com/office/drawing/2014/main" id="{2BC30686-329B-40FB-A685-D8616259A29B}"/>
+                <a16:creationId xmlns:a16="http://schemas.microsoft.com/office/drawing/2014/main" id="{253AA591-9C87-4821-AF51-C4453A330B65}"/>
               </a:ext>
             </a:extLst>
           </p:cNvPr>
@@ -15520,7 +15520,7 @@
           <p:cNvPr id="32" name="">
             <a:extLst xmlns:a="http://schemas.openxmlformats.org/drawingml/2006/main">
               <a:ext uri="{FF2B5EF4-FFF2-40B4-BE49-F238E27FC236}">
-                <a16:creationId xmlns:a16="http://schemas.microsoft.com/office/drawing/2014/main" id="{417E6FD5-036E-44FC-87CB-F3824D5D471E}"/>
+                <a16:creationId xmlns:a16="http://schemas.microsoft.com/office/drawing/2014/main" id="{C653E060-2E89-4CDB-9F3F-608EBD830495}"/>
               </a:ext>
             </a:extLst>
           </p:cNvPr>
@@ -15578,7 +15578,7 @@
           <p:cNvPr id="33" name="">
             <a:extLst xmlns:a="http://schemas.openxmlformats.org/drawingml/2006/main">
               <a:ext uri="{FF2B5EF4-FFF2-40B4-BE49-F238E27FC236}">
-                <a16:creationId xmlns:a16="http://schemas.microsoft.com/office/drawing/2014/main" id="{9B5BD373-A972-436B-A188-D9BF266E029A}"/>
+                <a16:creationId xmlns:a16="http://schemas.microsoft.com/office/drawing/2014/main" id="{382AC8AA-2478-42E0-8D44-4419C204346B}"/>
               </a:ext>
             </a:extLst>
           </p:cNvPr>
@@ -15653,7 +15653,7 @@
           <p:cNvPr id="34" name="">
             <a:extLst xmlns:a="http://schemas.openxmlformats.org/drawingml/2006/main">
               <a:ext uri="{FF2B5EF4-FFF2-40B4-BE49-F238E27FC236}">
-                <a16:creationId xmlns:a16="http://schemas.microsoft.com/office/drawing/2014/main" id="{CC42C6EB-950D-409E-9339-13FD07C3FD5B}"/>
+                <a16:creationId xmlns:a16="http://schemas.microsoft.com/office/drawing/2014/main" id="{A5A97EBF-040B-4B47-B7AE-78942B9162C5}"/>
               </a:ext>
             </a:extLst>
           </p:cNvPr>
@@ -15688,7 +15688,7 @@
           <p:cNvPr id="35" name="">
             <a:extLst xmlns:a="http://schemas.openxmlformats.org/drawingml/2006/main">
               <a:ext uri="{FF2B5EF4-FFF2-40B4-BE49-F238E27FC236}">
-                <a16:creationId xmlns:a16="http://schemas.microsoft.com/office/drawing/2014/main" id="{2A2F96BA-CB5F-409B-815A-D467377367C2}"/>
+                <a16:creationId xmlns:a16="http://schemas.microsoft.com/office/drawing/2014/main" id="{FE10C075-CC77-41AD-9C5F-406A2A595B35}"/>
               </a:ext>
             </a:extLst>
           </p:cNvPr>
@@ -15723,7 +15723,7 @@
           <p:cNvPr id="36" name="">
             <a:extLst xmlns:a="http://schemas.openxmlformats.org/drawingml/2006/main">
               <a:ext uri="{FF2B5EF4-FFF2-40B4-BE49-F238E27FC236}">
-                <a16:creationId xmlns:a16="http://schemas.microsoft.com/office/drawing/2014/main" id="{39323A3A-6FDE-4013-AADB-A898DC845738}"/>
+                <a16:creationId xmlns:a16="http://schemas.microsoft.com/office/drawing/2014/main" id="{978589DF-D7B1-4006-B34E-E827407C855B}"/>
               </a:ext>
             </a:extLst>
           </p:cNvPr>
@@ -15777,7 +15777,7 @@
           <p:cNvPr id="37" name="">
             <a:extLst xmlns:a="http://schemas.openxmlformats.org/drawingml/2006/main">
               <a:ext uri="{FF2B5EF4-FFF2-40B4-BE49-F238E27FC236}">
-                <a16:creationId xmlns:a16="http://schemas.microsoft.com/office/drawing/2014/main" id="{6B74E63E-E255-4CB0-A2C1-6D828D8F45F4}"/>
+                <a16:creationId xmlns:a16="http://schemas.microsoft.com/office/drawing/2014/main" id="{D977B69E-201D-47CA-93DB-A29448EDEB06}"/>
               </a:ext>
             </a:extLst>
           </p:cNvPr>
@@ -15835,7 +15835,7 @@
           <p:cNvPr id="38" name="">
             <a:extLst xmlns:a="http://schemas.openxmlformats.org/drawingml/2006/main">
               <a:ext uri="{FF2B5EF4-FFF2-40B4-BE49-F238E27FC236}">
-                <a16:creationId xmlns:a16="http://schemas.microsoft.com/office/drawing/2014/main" id="{6EF32FAE-E80C-4C4F-8002-E82C242E4041}"/>
+                <a16:creationId xmlns:a16="http://schemas.microsoft.com/office/drawing/2014/main" id="{F118572C-3FC4-4E32-AAB9-766621F33413}"/>
               </a:ext>
             </a:extLst>
           </p:cNvPr>
@@ -15893,7 +15893,7 @@
           <p:cNvPr id="39" name="">
             <a:extLst xmlns:a="http://schemas.openxmlformats.org/drawingml/2006/main">
               <a:ext uri="{FF2B5EF4-FFF2-40B4-BE49-F238E27FC236}">
-                <a16:creationId xmlns:a16="http://schemas.microsoft.com/office/drawing/2014/main" id="{6C4D1EC4-75F1-418D-9EAB-F88460CAF0BC}"/>
+                <a16:creationId xmlns:a16="http://schemas.microsoft.com/office/drawing/2014/main" id="{1E44855E-E5C7-41D4-B3CB-6F8791697ABA}"/>
               </a:ext>
             </a:extLst>
           </p:cNvPr>
@@ -15928,7 +15928,7 @@
           <p:cNvPr id="40" name="">
             <a:extLst xmlns:a="http://schemas.openxmlformats.org/drawingml/2006/main">
               <a:ext uri="{FF2B5EF4-FFF2-40B4-BE49-F238E27FC236}">
-                <a16:creationId xmlns:a16="http://schemas.microsoft.com/office/drawing/2014/main" id="{F0D2E7DC-CA1F-4D42-B8D9-7FDA4ACEB452}"/>
+                <a16:creationId xmlns:a16="http://schemas.microsoft.com/office/drawing/2014/main" id="{5081984D-48BB-4D50-8D18-7FD118EB6569}"/>
               </a:ext>
             </a:extLst>
           </p:cNvPr>
@@ -15963,7 +15963,7 @@
           <p:cNvPr id="41" name="">
             <a:extLst xmlns:a="http://schemas.openxmlformats.org/drawingml/2006/main">
               <a:ext uri="{FF2B5EF4-FFF2-40B4-BE49-F238E27FC236}">
-                <a16:creationId xmlns:a16="http://schemas.microsoft.com/office/drawing/2014/main" id="{A8F10F98-8389-4462-95EE-E859C8C19DEF}"/>
+                <a16:creationId xmlns:a16="http://schemas.microsoft.com/office/drawing/2014/main" id="{A63D93E0-FBBE-4108-916E-35114985C825}"/>
               </a:ext>
             </a:extLst>
           </p:cNvPr>
@@ -16017,7 +16017,7 @@
           <p:cNvPr id="42" name="">
             <a:extLst xmlns:a="http://schemas.openxmlformats.org/drawingml/2006/main">
               <a:ext uri="{FF2B5EF4-FFF2-40B4-BE49-F238E27FC236}">
-                <a16:creationId xmlns:a16="http://schemas.microsoft.com/office/drawing/2014/main" id="{8A49CCD2-784F-4DBB-928D-A222249D184C}"/>
+                <a16:creationId xmlns:a16="http://schemas.microsoft.com/office/drawing/2014/main" id="{CC65BB16-78FD-4687-8E5D-D902E144FCA1}"/>
               </a:ext>
             </a:extLst>
           </p:cNvPr>
@@ -16075,7 +16075,7 @@
           <p:cNvPr id="43" name="">
             <a:extLst xmlns:a="http://schemas.openxmlformats.org/drawingml/2006/main">
               <a:ext uri="{FF2B5EF4-FFF2-40B4-BE49-F238E27FC236}">
-                <a16:creationId xmlns:a16="http://schemas.microsoft.com/office/drawing/2014/main" id="{CD8B06D4-E75C-484E-B855-FE16F947C26B}"/>
+                <a16:creationId xmlns:a16="http://schemas.microsoft.com/office/drawing/2014/main" id="{BC697E51-820E-44BA-9AB3-9544AB00E718}"/>
               </a:ext>
             </a:extLst>
           </p:cNvPr>
@@ -16133,7 +16133,7 @@
           <p:cNvPr id="44" name="">
             <a:extLst xmlns:a="http://schemas.openxmlformats.org/drawingml/2006/main">
               <a:ext uri="{FF2B5EF4-FFF2-40B4-BE49-F238E27FC236}">
-                <a16:creationId xmlns:a16="http://schemas.microsoft.com/office/drawing/2014/main" id="{D4AEBA5C-386E-428E-9C58-3170D27BE2FA}"/>
+                <a16:creationId xmlns:a16="http://schemas.microsoft.com/office/drawing/2014/main" id="{FC6876BD-DA9C-4606-9D39-E633CF2CF251}"/>
               </a:ext>
             </a:extLst>
           </p:cNvPr>
@@ -16168,7 +16168,7 @@
           <p:cNvPr id="45" name="">
             <a:extLst xmlns:a="http://schemas.openxmlformats.org/drawingml/2006/main">
               <a:ext uri="{FF2B5EF4-FFF2-40B4-BE49-F238E27FC236}">
-                <a16:creationId xmlns:a16="http://schemas.microsoft.com/office/drawing/2014/main" id="{A059F9F3-54DD-4532-B732-F00C2AD66F79}"/>
+                <a16:creationId xmlns:a16="http://schemas.microsoft.com/office/drawing/2014/main" id="{4DB284B9-BA32-46AA-8BD2-7E37124BE622}"/>
               </a:ext>
             </a:extLst>
           </p:cNvPr>
@@ -16203,7 +16203,7 @@
           <p:cNvPr id="46" name="">
             <a:extLst xmlns:a="http://schemas.openxmlformats.org/drawingml/2006/main">
               <a:ext uri="{FF2B5EF4-FFF2-40B4-BE49-F238E27FC236}">
-                <a16:creationId xmlns:a16="http://schemas.microsoft.com/office/drawing/2014/main" id="{FA9E4222-967C-4436-9ACD-CFC2C69B2116}"/>
+                <a16:creationId xmlns:a16="http://schemas.microsoft.com/office/drawing/2014/main" id="{1C46C24F-E6DC-4D44-96B0-FF4E26B4E991}"/>
               </a:ext>
             </a:extLst>
           </p:cNvPr>
@@ -16257,7 +16257,7 @@
           <p:cNvPr id="47" name="">
             <a:extLst xmlns:a="http://schemas.openxmlformats.org/drawingml/2006/main">
               <a:ext uri="{FF2B5EF4-FFF2-40B4-BE49-F238E27FC236}">
-                <a16:creationId xmlns:a16="http://schemas.microsoft.com/office/drawing/2014/main" id="{2FB41341-0C97-4982-B076-11A0799C98F3}"/>
+                <a16:creationId xmlns:a16="http://schemas.microsoft.com/office/drawing/2014/main" id="{AE4AD6D5-CA02-4E18-9C30-251B15C03726}"/>
               </a:ext>
             </a:extLst>
           </p:cNvPr>
@@ -16315,7 +16315,7 @@
           <p:cNvPr id="48" name="">
             <a:extLst xmlns:a="http://schemas.openxmlformats.org/drawingml/2006/main">
               <a:ext uri="{FF2B5EF4-FFF2-40B4-BE49-F238E27FC236}">
-                <a16:creationId xmlns:a16="http://schemas.microsoft.com/office/drawing/2014/main" id="{21291009-4293-4BB0-9CAB-12B7B3859CFB}"/>
+                <a16:creationId xmlns:a16="http://schemas.microsoft.com/office/drawing/2014/main" id="{4DE25325-CD49-4EA2-A80F-A7236A5F3B2E}"/>
               </a:ext>
             </a:extLst>
           </p:cNvPr>
@@ -16373,7 +16373,7 @@
           <p:cNvPr id="49" name="">
             <a:extLst xmlns:a="http://schemas.openxmlformats.org/drawingml/2006/main">
               <a:ext uri="{FF2B5EF4-FFF2-40B4-BE49-F238E27FC236}">
-                <a16:creationId xmlns:a16="http://schemas.microsoft.com/office/drawing/2014/main" id="{77DC9F20-319E-467D-A701-3715410362C3}"/>
+                <a16:creationId xmlns:a16="http://schemas.microsoft.com/office/drawing/2014/main" id="{666D59E1-9ACC-485C-B326-1AC27D86344E}"/>
               </a:ext>
             </a:extLst>
           </p:cNvPr>
@@ -16408,7 +16408,7 @@
           <p:cNvPr id="50" name="">
             <a:extLst xmlns:a="http://schemas.openxmlformats.org/drawingml/2006/main">
               <a:ext uri="{FF2B5EF4-FFF2-40B4-BE49-F238E27FC236}">
-                <a16:creationId xmlns:a16="http://schemas.microsoft.com/office/drawing/2014/main" id="{5850A301-5DFC-4154-BF1D-A8EFC83948D4}"/>
+                <a16:creationId xmlns:a16="http://schemas.microsoft.com/office/drawing/2014/main" id="{BE1C07BC-5D33-41EC-A484-C89647366BF9}"/>
               </a:ext>
             </a:extLst>
           </p:cNvPr>
@@ -16443,7 +16443,7 @@
           <p:cNvPr id="51" name="">
             <a:extLst xmlns:a="http://schemas.openxmlformats.org/drawingml/2006/main">
               <a:ext uri="{FF2B5EF4-FFF2-40B4-BE49-F238E27FC236}">
-                <a16:creationId xmlns:a16="http://schemas.microsoft.com/office/drawing/2014/main" id="{D698420A-7D20-494D-A9D5-1AB179E9F82B}"/>
+                <a16:creationId xmlns:a16="http://schemas.microsoft.com/office/drawing/2014/main" id="{367E2A4E-C9E3-4CB5-B468-1BC0B69973A5}"/>
               </a:ext>
             </a:extLst>
           </p:cNvPr>
@@ -16497,7 +16497,7 @@
           <p:cNvPr id="52" name="">
             <a:extLst xmlns:a="http://schemas.openxmlformats.org/drawingml/2006/main">
               <a:ext uri="{FF2B5EF4-FFF2-40B4-BE49-F238E27FC236}">
-                <a16:creationId xmlns:a16="http://schemas.microsoft.com/office/drawing/2014/main" id="{314E4C9B-755B-445A-949D-98201CBE5BDB}"/>
+                <a16:creationId xmlns:a16="http://schemas.microsoft.com/office/drawing/2014/main" id="{D8000B4C-2689-4EA5-B15A-75D93A78147C}"/>
               </a:ext>
             </a:extLst>
           </p:cNvPr>
@@ -16555,7 +16555,7 @@
           <p:cNvPr id="53" name="">
             <a:extLst xmlns:a="http://schemas.openxmlformats.org/drawingml/2006/main">
               <a:ext uri="{FF2B5EF4-FFF2-40B4-BE49-F238E27FC236}">
-                <a16:creationId xmlns:a16="http://schemas.microsoft.com/office/drawing/2014/main" id="{04A6D925-BD6A-4ECF-97FD-068ED51CF83E}"/>
+                <a16:creationId xmlns:a16="http://schemas.microsoft.com/office/drawing/2014/main" id="{0A3AF0DE-2E7D-4AC1-A1C3-B0B3BA659ACA}"/>
               </a:ext>
             </a:extLst>
           </p:cNvPr>
@@ -16613,7 +16613,7 @@
           <p:cNvPr id="54" name="">
             <a:extLst xmlns:a="http://schemas.openxmlformats.org/drawingml/2006/main">
               <a:ext uri="{FF2B5EF4-FFF2-40B4-BE49-F238E27FC236}">
-                <a16:creationId xmlns:a16="http://schemas.microsoft.com/office/drawing/2014/main" id="{2C87A010-9EC3-41B2-B9EC-9A399BBAE162}"/>
+                <a16:creationId xmlns:a16="http://schemas.microsoft.com/office/drawing/2014/main" id="{05C3BDF2-5CB2-409C-BBDE-D9A92E3BBADE}"/>
               </a:ext>
             </a:extLst>
           </p:cNvPr>
@@ -16648,7 +16648,7 @@
           <p:cNvPr id="55" name="">
             <a:extLst xmlns:a="http://schemas.openxmlformats.org/drawingml/2006/main">
               <a:ext uri="{FF2B5EF4-FFF2-40B4-BE49-F238E27FC236}">
-                <a16:creationId xmlns:a16="http://schemas.microsoft.com/office/drawing/2014/main" id="{ADF1849F-7EC3-447B-B6D8-137F7FFE0B40}"/>
+                <a16:creationId xmlns:a16="http://schemas.microsoft.com/office/drawing/2014/main" id="{64D262AA-E6F0-4018-B2FA-245244B106A7}"/>
               </a:ext>
             </a:extLst>
           </p:cNvPr>
@@ -16683,7 +16683,7 @@
           <p:cNvPr id="56" name="">
             <a:extLst xmlns:a="http://schemas.openxmlformats.org/drawingml/2006/main">
               <a:ext uri="{FF2B5EF4-FFF2-40B4-BE49-F238E27FC236}">
-                <a16:creationId xmlns:a16="http://schemas.microsoft.com/office/drawing/2014/main" id="{388F35AE-5912-4916-8146-A2C29F9539B6}"/>
+                <a16:creationId xmlns:a16="http://schemas.microsoft.com/office/drawing/2014/main" id="{F492311A-A9B0-4C6D-A4B2-6318BFE8EA81}"/>
               </a:ext>
             </a:extLst>
           </p:cNvPr>
@@ -16737,7 +16737,7 @@
           <p:cNvPr id="57" name="">
             <a:extLst xmlns:a="http://schemas.openxmlformats.org/drawingml/2006/main">
               <a:ext uri="{FF2B5EF4-FFF2-40B4-BE49-F238E27FC236}">
-                <a16:creationId xmlns:a16="http://schemas.microsoft.com/office/drawing/2014/main" id="{24B83E07-2B1B-4747-A5C2-E0E321E27E26}"/>
+                <a16:creationId xmlns:a16="http://schemas.microsoft.com/office/drawing/2014/main" id="{009A82CD-E6C9-4B89-A83B-1DB3F49B0F3D}"/>
               </a:ext>
             </a:extLst>
           </p:cNvPr>
@@ -16795,7 +16795,7 @@
           <p:cNvPr id="58" name="">
             <a:extLst xmlns:a="http://schemas.openxmlformats.org/drawingml/2006/main">
               <a:ext uri="{FF2B5EF4-FFF2-40B4-BE49-F238E27FC236}">
-                <a16:creationId xmlns:a16="http://schemas.microsoft.com/office/drawing/2014/main" id="{6BD549E6-42B7-4C62-BCCF-6975A33D302E}"/>
+                <a16:creationId xmlns:a16="http://schemas.microsoft.com/office/drawing/2014/main" id="{97D60F9E-BE36-444E-B7DF-742222E95A3C}"/>
               </a:ext>
             </a:extLst>
           </p:cNvPr>
@@ -16853,7 +16853,7 @@
           <p:cNvPr id="59" name="">
             <a:extLst xmlns:a="http://schemas.openxmlformats.org/drawingml/2006/main">
               <a:ext uri="{FF2B5EF4-FFF2-40B4-BE49-F238E27FC236}">
-                <a16:creationId xmlns:a16="http://schemas.microsoft.com/office/drawing/2014/main" id="{A6BE04CD-A395-4EB4-AED1-6767F532A174}"/>
+                <a16:creationId xmlns:a16="http://schemas.microsoft.com/office/drawing/2014/main" id="{7EE4BA6A-B072-45ED-B0CB-BB8572DF1B46}"/>
               </a:ext>
             </a:extLst>
           </p:cNvPr>
@@ -16888,7 +16888,7 @@
           <p:cNvPr id="60" name="">
             <a:extLst xmlns:a="http://schemas.openxmlformats.org/drawingml/2006/main">
               <a:ext uri="{FF2B5EF4-FFF2-40B4-BE49-F238E27FC236}">
-                <a16:creationId xmlns:a16="http://schemas.microsoft.com/office/drawing/2014/main" id="{3043DAC4-D41F-4860-A920-5A6468EC2752}"/>
+                <a16:creationId xmlns:a16="http://schemas.microsoft.com/office/drawing/2014/main" id="{6DF4F8E3-2127-4E4A-8B33-8B721DDBBC19}"/>
               </a:ext>
             </a:extLst>
           </p:cNvPr>
@@ -16923,7 +16923,7 @@
           <p:cNvPr id="61" name="">
             <a:extLst xmlns:a="http://schemas.openxmlformats.org/drawingml/2006/main">
               <a:ext uri="{FF2B5EF4-FFF2-40B4-BE49-F238E27FC236}">
-                <a16:creationId xmlns:a16="http://schemas.microsoft.com/office/drawing/2014/main" id="{B114F453-1242-4CD7-B6AB-F0F708053757}"/>
+                <a16:creationId xmlns:a16="http://schemas.microsoft.com/office/drawing/2014/main" id="{FBD6A8EB-5A07-4E2E-84B1-CAED25F2C854}"/>
               </a:ext>
             </a:extLst>
           </p:cNvPr>
@@ -16958,7 +16958,7 @@
           <p:cNvPr id="62" name="">
             <a:extLst xmlns:a="http://schemas.openxmlformats.org/drawingml/2006/main">
               <a:ext uri="{FF2B5EF4-FFF2-40B4-BE49-F238E27FC236}">
-                <a16:creationId xmlns:a16="http://schemas.microsoft.com/office/drawing/2014/main" id="{AAF40435-E445-49C0-A3A6-9383C83A2475}"/>
+                <a16:creationId xmlns:a16="http://schemas.microsoft.com/office/drawing/2014/main" id="{C289921E-3F3B-487F-A37F-1DC4F4227352}"/>
               </a:ext>
             </a:extLst>
           </p:cNvPr>
@@ -16993,7 +16993,7 @@
           <p:cNvPr id="63" name="">
             <a:extLst xmlns:a="http://schemas.openxmlformats.org/drawingml/2006/main">
               <a:ext uri="{FF2B5EF4-FFF2-40B4-BE49-F238E27FC236}">
-                <a16:creationId xmlns:a16="http://schemas.microsoft.com/office/drawing/2014/main" id="{3AD22275-6D2B-40CE-A383-80315E54ACE9}"/>
+                <a16:creationId xmlns:a16="http://schemas.microsoft.com/office/drawing/2014/main" id="{B5F0A8B7-7D64-4F21-8195-442BBC70114C}"/>
               </a:ext>
             </a:extLst>
           </p:cNvPr>
@@ -17028,7 +17028,7 @@
           <p:cNvPr id="64" name="">
             <a:extLst xmlns:a="http://schemas.openxmlformats.org/drawingml/2006/main">
               <a:ext uri="{FF2B5EF4-FFF2-40B4-BE49-F238E27FC236}">
-                <a16:creationId xmlns:a16="http://schemas.microsoft.com/office/drawing/2014/main" id="{CA4DA60A-EE20-4092-9117-7106A4D9104E}"/>
+                <a16:creationId xmlns:a16="http://schemas.microsoft.com/office/drawing/2014/main" id="{5469886D-9A5D-4E2F-90D3-209BDC87FAD7}"/>
               </a:ext>
             </a:extLst>
           </p:cNvPr>
@@ -17063,7 +17063,7 @@
           <p:cNvPr id="65" name="">
             <a:extLst xmlns:a="http://schemas.openxmlformats.org/drawingml/2006/main">
               <a:ext uri="{FF2B5EF4-FFF2-40B4-BE49-F238E27FC236}">
-                <a16:creationId xmlns:a16="http://schemas.microsoft.com/office/drawing/2014/main" id="{1212DC02-437E-4352-8E87-B978D8281138}"/>
+                <a16:creationId xmlns:a16="http://schemas.microsoft.com/office/drawing/2014/main" id="{5433F1B9-25A3-4681-8F84-1DDC0B131EC1}"/>
               </a:ext>
             </a:extLst>
           </p:cNvPr>
@@ -17098,7 +17098,7 @@
           <p:cNvPr id="66" name="">
             <a:extLst xmlns:a="http://schemas.openxmlformats.org/drawingml/2006/main">
               <a:ext uri="{FF2B5EF4-FFF2-40B4-BE49-F238E27FC236}">
-                <a16:creationId xmlns:a16="http://schemas.microsoft.com/office/drawing/2014/main" id="{7765F66E-5AB3-4CF6-BA1A-182814942076}"/>
+                <a16:creationId xmlns:a16="http://schemas.microsoft.com/office/drawing/2014/main" id="{AB60C332-3BA6-4620-B57D-34DF2E047617}"/>
               </a:ext>
             </a:extLst>
           </p:cNvPr>
@@ -17133,7 +17133,7 @@
           <p:cNvPr id="67" name="">
             <a:extLst xmlns:a="http://schemas.openxmlformats.org/drawingml/2006/main">
               <a:ext uri="{FF2B5EF4-FFF2-40B4-BE49-F238E27FC236}">
-                <a16:creationId xmlns:a16="http://schemas.microsoft.com/office/drawing/2014/main" id="{65E0B8D6-7FC9-440F-9E24-6CC6A1D8604B}"/>
+                <a16:creationId xmlns:a16="http://schemas.microsoft.com/office/drawing/2014/main" id="{58D5172B-9B6F-404E-8473-B3B08AB0E528}"/>
               </a:ext>
             </a:extLst>
           </p:cNvPr>
@@ -17187,7 +17187,7 @@
           <p:cNvPr id="68" name="">
             <a:extLst xmlns:a="http://schemas.openxmlformats.org/drawingml/2006/main">
               <a:ext uri="{FF2B5EF4-FFF2-40B4-BE49-F238E27FC236}">
-                <a16:creationId xmlns:a16="http://schemas.microsoft.com/office/drawing/2014/main" id="{E3DBBE9B-50E8-430E-A12E-D46046E77169}"/>
+                <a16:creationId xmlns:a16="http://schemas.microsoft.com/office/drawing/2014/main" id="{BEA39ACB-1A37-4E19-AA62-9443009FBFA6}"/>
               </a:ext>
             </a:extLst>
           </p:cNvPr>
@@ -17241,7 +17241,7 @@
           <p:cNvPr id="69" name="">
             <a:extLst xmlns:a="http://schemas.openxmlformats.org/drawingml/2006/main">
               <a:ext uri="{FF2B5EF4-FFF2-40B4-BE49-F238E27FC236}">
-                <a16:creationId xmlns:a16="http://schemas.microsoft.com/office/drawing/2014/main" id="{A55EBB1C-05E7-4C40-B7F9-147DBB9FA9B5}"/>
+                <a16:creationId xmlns:a16="http://schemas.microsoft.com/office/drawing/2014/main" id="{63283397-4C07-4A63-90FF-B593B531ED5B}"/>
               </a:ext>
             </a:extLst>
           </p:cNvPr>
@@ -17295,7 +17295,7 @@
           <p:cNvPr id="70" name="">
             <a:extLst xmlns:a="http://schemas.openxmlformats.org/drawingml/2006/main">
               <a:ext uri="{FF2B5EF4-FFF2-40B4-BE49-F238E27FC236}">
-                <a16:creationId xmlns:a16="http://schemas.microsoft.com/office/drawing/2014/main" id="{6E787CA5-012E-4836-BB80-1F6496515F3B}"/>
+                <a16:creationId xmlns:a16="http://schemas.microsoft.com/office/drawing/2014/main" id="{F0967354-21D5-4424-8689-435150DC7FAB}"/>
               </a:ext>
             </a:extLst>
           </p:cNvPr>
@@ -17332,7 +17332,7 @@
           <p:cNvPr id="71" name="">
             <a:extLst xmlns:a="http://schemas.openxmlformats.org/drawingml/2006/main">
               <a:ext uri="{FF2B5EF4-FFF2-40B4-BE49-F238E27FC236}">
-                <a16:creationId xmlns:a16="http://schemas.microsoft.com/office/drawing/2014/main" id="{4740F9C1-1412-42A9-A253-A73C4FF189B1}"/>
+                <a16:creationId xmlns:a16="http://schemas.microsoft.com/office/drawing/2014/main" id="{054785D3-32F8-42A3-A3C3-859705188FE4}"/>
               </a:ext>
             </a:extLst>
           </p:cNvPr>
@@ -17367,7 +17367,7 @@
           <p:cNvPr id="72" name="">
             <a:extLst xmlns:a="http://schemas.openxmlformats.org/drawingml/2006/main">
               <a:ext uri="{FF2B5EF4-FFF2-40B4-BE49-F238E27FC236}">
-                <a16:creationId xmlns:a16="http://schemas.microsoft.com/office/drawing/2014/main" id="{8F625846-7CEA-4B38-AD14-790917D88193}"/>
+                <a16:creationId xmlns:a16="http://schemas.microsoft.com/office/drawing/2014/main" id="{222B734B-39F4-4339-8DA9-789CF6C32028}"/>
               </a:ext>
             </a:extLst>
           </p:cNvPr>
@@ -17425,7 +17425,7 @@
           <p:cNvPr id="73" name="">
             <a:extLst xmlns:a="http://schemas.openxmlformats.org/drawingml/2006/main">
               <a:ext uri="{FF2B5EF4-FFF2-40B4-BE49-F238E27FC236}">
-                <a16:creationId xmlns:a16="http://schemas.microsoft.com/office/drawing/2014/main" id="{34D5919E-297F-46E8-8D38-4B3B8FD694D5}"/>
+                <a16:creationId xmlns:a16="http://schemas.microsoft.com/office/drawing/2014/main" id="{CD551C1D-D9F3-4847-B74E-77DD4EA77061}"/>
               </a:ext>
             </a:extLst>
           </p:cNvPr>
@@ -17481,7 +17481,7 @@
     </p:spTree>
     <p:extLst>
       <p:ext uri="{BB962C8B-B14F-4D97-AF65-F5344CB8AC3E}">
-        <p14:creationId xmlns:p14="http://schemas.microsoft.com/office/powerpoint/2010/main" val="1685945174"/>
+        <p14:creationId xmlns:p14="http://schemas.microsoft.com/office/powerpoint/2010/main" val="311376420"/>
       </p:ext>
     </p:extLst>
   </p:cSld>
@@ -17512,7 +17512,7 @@
           <p:cNvPr id="1" name="Slide Number Placeholder 5">
             <a:extLst xmlns:a="http://schemas.openxmlformats.org/drawingml/2006/main">
               <a:ext uri="{FF2B5EF4-FFF2-40B4-BE49-F238E27FC236}">
-                <a16:creationId xmlns:a16="http://schemas.microsoft.com/office/drawing/2014/main" id="{821508BF-91E3-4E78-84B3-DCBD229C8660}"/>
+                <a16:creationId xmlns:a16="http://schemas.microsoft.com/office/drawing/2014/main" id="{11DAD1DA-DD27-4C25-AFB7-E057ACC56EC0}"/>
               </a:ext>
             </a:extLst>
           </p:cNvPr>
@@ -17548,7 +17548,7 @@
           <p:nvPr/>
         </p:nvPicPr>
         <p:blipFill>
-          <a:blip xmlns:r="http://schemas.openxmlformats.org/officeDocument/2006/relationships" xmlns:a="http://schemas.openxmlformats.org/drawingml/2006/main" r:embed="R1846e2eaf49c4c4e"/>
+          <a:blip xmlns:r="http://schemas.openxmlformats.org/officeDocument/2006/relationships" xmlns:a="http://schemas.openxmlformats.org/drawingml/2006/main" r:embed="R329e59ab59594c65"/>
           <a:srcRect xmlns:a="http://schemas.openxmlformats.org/drawingml/2006/main" l="0" t="21875" r="0" b="21875"/>
           <a:stretch xmlns:a="http://schemas.openxmlformats.org/drawingml/2006/main">
             <a:fillRect l="0" t="0" r="0" b="0"/>
@@ -17569,7 +17569,7 @@
           <p:cNvPr id="3" name="">
             <a:extLst xmlns:a="http://schemas.openxmlformats.org/drawingml/2006/main">
               <a:ext uri="{FF2B5EF4-FFF2-40B4-BE49-F238E27FC236}">
-                <a16:creationId xmlns:a16="http://schemas.microsoft.com/office/drawing/2014/main" id="{8E8B2F91-0A97-41F5-805F-BF2501023068}"/>
+                <a16:creationId xmlns:a16="http://schemas.microsoft.com/office/drawing/2014/main" id="{38DFB42F-9CA0-4646-AC82-86FC81F224D4}"/>
               </a:ext>
             </a:extLst>
           </p:cNvPr>
@@ -17604,7 +17604,7 @@
           <p:cNvPr id="4" name="">
             <a:extLst xmlns:a="http://schemas.openxmlformats.org/drawingml/2006/main">
               <a:ext uri="{FF2B5EF4-FFF2-40B4-BE49-F238E27FC236}">
-                <a16:creationId xmlns:a16="http://schemas.microsoft.com/office/drawing/2014/main" id="{ADB7D0D6-CFAB-4996-B9C3-07A7F611D0BB}"/>
+                <a16:creationId xmlns:a16="http://schemas.microsoft.com/office/drawing/2014/main" id="{80485A3C-5F47-4265-8A9D-03FF4DF53974}"/>
               </a:ext>
             </a:extLst>
           </p:cNvPr>
@@ -17639,7 +17639,7 @@
           <p:cNvPr id="5" name="">
             <a:extLst xmlns:a="http://schemas.openxmlformats.org/drawingml/2006/main">
               <a:ext uri="{FF2B5EF4-FFF2-40B4-BE49-F238E27FC236}">
-                <a16:creationId xmlns:a16="http://schemas.microsoft.com/office/drawing/2014/main" id="{7BC7978E-E9FD-4F23-B812-39E037998672}"/>
+                <a16:creationId xmlns:a16="http://schemas.microsoft.com/office/drawing/2014/main" id="{4AB7A3CC-19C9-4EC9-9EEA-FE236C631218}"/>
               </a:ext>
             </a:extLst>
           </p:cNvPr>
@@ -17676,7 +17676,7 @@
           <p:cNvPr id="6" name="">
             <a:extLst xmlns:a="http://schemas.openxmlformats.org/drawingml/2006/main">
               <a:ext uri="{FF2B5EF4-FFF2-40B4-BE49-F238E27FC236}">
-                <a16:creationId xmlns:a16="http://schemas.microsoft.com/office/drawing/2014/main" id="{60AF29AB-F9A9-4E3D-9125-F635779A4BF0}"/>
+                <a16:creationId xmlns:a16="http://schemas.microsoft.com/office/drawing/2014/main" id="{03C3AE54-34BA-4094-9624-A620DCDC14A2}"/>
               </a:ext>
             </a:extLst>
           </p:cNvPr>
@@ -17713,7 +17713,7 @@
           <p:cNvPr id="7" name="">
             <a:extLst xmlns:a="http://schemas.openxmlformats.org/drawingml/2006/main">
               <a:ext uri="{FF2B5EF4-FFF2-40B4-BE49-F238E27FC236}">
-                <a16:creationId xmlns:a16="http://schemas.microsoft.com/office/drawing/2014/main" id="{547DD3CA-450B-400D-9574-C07965E29768}"/>
+                <a16:creationId xmlns:a16="http://schemas.microsoft.com/office/drawing/2014/main" id="{8109BB89-D6CE-4135-9B6D-E9D029AA9397}"/>
               </a:ext>
             </a:extLst>
           </p:cNvPr>
@@ -17750,7 +17750,7 @@
           <p:cNvPr id="8" name="">
             <a:extLst xmlns:a="http://schemas.openxmlformats.org/drawingml/2006/main">
               <a:ext uri="{FF2B5EF4-FFF2-40B4-BE49-F238E27FC236}">
-                <a16:creationId xmlns:a16="http://schemas.microsoft.com/office/drawing/2014/main" id="{D8B18764-EE6D-42B4-800A-370A2E5B9DD4}"/>
+                <a16:creationId xmlns:a16="http://schemas.microsoft.com/office/drawing/2014/main" id="{6C5261E8-A128-4735-9481-E4F023D4CAAF}"/>
               </a:ext>
             </a:extLst>
           </p:cNvPr>
@@ -17787,7 +17787,7 @@
           <p:cNvPr id="9" name="">
             <a:extLst xmlns:a="http://schemas.openxmlformats.org/drawingml/2006/main">
               <a:ext uri="{FF2B5EF4-FFF2-40B4-BE49-F238E27FC236}">
-                <a16:creationId xmlns:a16="http://schemas.microsoft.com/office/drawing/2014/main" id="{EA6CF537-0232-4E2E-BEAC-587F276201D9}"/>
+                <a16:creationId xmlns:a16="http://schemas.microsoft.com/office/drawing/2014/main" id="{6A0875DD-A20A-4A42-9B3A-918D0B3F9190}"/>
               </a:ext>
             </a:extLst>
           </p:cNvPr>
@@ -17845,7 +17845,7 @@
           <p:cNvPr id="10" name="">
             <a:extLst xmlns:a="http://schemas.openxmlformats.org/drawingml/2006/main">
               <a:ext uri="{FF2B5EF4-FFF2-40B4-BE49-F238E27FC236}">
-                <a16:creationId xmlns:a16="http://schemas.microsoft.com/office/drawing/2014/main" id="{7D641C38-48A6-4AF8-A619-89CD14E42E53}"/>
+                <a16:creationId xmlns:a16="http://schemas.microsoft.com/office/drawing/2014/main" id="{AE7912AA-9BD9-4C74-A3F2-56CB641D3557}"/>
               </a:ext>
             </a:extLst>
           </p:cNvPr>
@@ -17903,7 +17903,7 @@
           <p:cNvPr id="11" name="">
             <a:extLst xmlns:a="http://schemas.openxmlformats.org/drawingml/2006/main">
               <a:ext uri="{FF2B5EF4-FFF2-40B4-BE49-F238E27FC236}">
-                <a16:creationId xmlns:a16="http://schemas.microsoft.com/office/drawing/2014/main" id="{7426FD63-CD0E-4039-AAF9-34280F67D50B}"/>
+                <a16:creationId xmlns:a16="http://schemas.microsoft.com/office/drawing/2014/main" id="{C2DC1DEA-2C4D-4ED3-B401-32FBC6722DDC}"/>
               </a:ext>
             </a:extLst>
           </p:cNvPr>
@@ -17938,7 +17938,7 @@
           <p:cNvPr id="12" name="">
             <a:extLst xmlns:a="http://schemas.openxmlformats.org/drawingml/2006/main">
               <a:ext uri="{FF2B5EF4-FFF2-40B4-BE49-F238E27FC236}">
-                <a16:creationId xmlns:a16="http://schemas.microsoft.com/office/drawing/2014/main" id="{BB03BA19-F47B-46FD-A3A3-5FEACF84B068}"/>
+                <a16:creationId xmlns:a16="http://schemas.microsoft.com/office/drawing/2014/main" id="{B1319827-9EA7-4E32-9508-E2799F65497A}"/>
               </a:ext>
             </a:extLst>
           </p:cNvPr>
@@ -17971,7 +17971,7 @@
           <p:cNvPr id="13" name="">
             <a:extLst xmlns:a="http://schemas.openxmlformats.org/drawingml/2006/main">
               <a:ext uri="{FF2B5EF4-FFF2-40B4-BE49-F238E27FC236}">
-                <a16:creationId xmlns:a16="http://schemas.microsoft.com/office/drawing/2014/main" id="{18EE5782-F268-45A9-9970-33A68B7B7D5F}"/>
+                <a16:creationId xmlns:a16="http://schemas.microsoft.com/office/drawing/2014/main" id="{3A89235A-AF9A-4C4A-9DEB-C9CE87DE3030}"/>
               </a:ext>
             </a:extLst>
           </p:cNvPr>
@@ -18029,7 +18029,7 @@
           <p:cNvPr id="14" name="">
             <a:extLst xmlns:a="http://schemas.openxmlformats.org/drawingml/2006/main">
               <a:ext uri="{FF2B5EF4-FFF2-40B4-BE49-F238E27FC236}">
-                <a16:creationId xmlns:a16="http://schemas.microsoft.com/office/drawing/2014/main" id="{7F4B6C0E-8DAB-47AD-BF06-8CB515C7EFBA}"/>
+                <a16:creationId xmlns:a16="http://schemas.microsoft.com/office/drawing/2014/main" id="{C03245BC-4239-4344-9094-00CB5D0BA954}"/>
               </a:ext>
             </a:extLst>
           </p:cNvPr>
@@ -18066,7 +18066,7 @@
           <p:cNvPr id="15" name="">
             <a:extLst xmlns:a="http://schemas.openxmlformats.org/drawingml/2006/main">
               <a:ext uri="{FF2B5EF4-FFF2-40B4-BE49-F238E27FC236}">
-                <a16:creationId xmlns:a16="http://schemas.microsoft.com/office/drawing/2014/main" id="{43B6F928-F8CC-455C-9BFE-69F51A913508}"/>
+                <a16:creationId xmlns:a16="http://schemas.microsoft.com/office/drawing/2014/main" id="{FB994BC7-7190-49F7-9C5E-E79EB9CDCD6F}"/>
               </a:ext>
             </a:extLst>
           </p:cNvPr>
@@ -18101,7 +18101,7 @@
           <p:cNvPr id="16" name="">
             <a:extLst xmlns:a="http://schemas.openxmlformats.org/drawingml/2006/main">
               <a:ext uri="{FF2B5EF4-FFF2-40B4-BE49-F238E27FC236}">
-                <a16:creationId xmlns:a16="http://schemas.microsoft.com/office/drawing/2014/main" id="{FA2088E7-4A37-4032-8673-2CF84EC59295}"/>
+                <a16:creationId xmlns:a16="http://schemas.microsoft.com/office/drawing/2014/main" id="{793632C9-DA3F-49C2-888A-620AC9DB7A8E}"/>
               </a:ext>
             </a:extLst>
           </p:cNvPr>
@@ -18159,7 +18159,7 @@
           <p:cNvPr id="17" name="">
             <a:extLst xmlns:a="http://schemas.openxmlformats.org/drawingml/2006/main">
               <a:ext uri="{FF2B5EF4-FFF2-40B4-BE49-F238E27FC236}">
-                <a16:creationId xmlns:a16="http://schemas.microsoft.com/office/drawing/2014/main" id="{5B7CBC81-DE08-4660-921D-1534A4F73745}"/>
+                <a16:creationId xmlns:a16="http://schemas.microsoft.com/office/drawing/2014/main" id="{E8ABEAED-F93A-495A-BEDD-8689C3267E40}"/>
               </a:ext>
             </a:extLst>
           </p:cNvPr>
@@ -18285,7 +18285,7 @@
           <p:cNvPr id="18" name="">
             <a:extLst xmlns:a="http://schemas.openxmlformats.org/drawingml/2006/main">
               <a:ext uri="{FF2B5EF4-FFF2-40B4-BE49-F238E27FC236}">
-                <a16:creationId xmlns:a16="http://schemas.microsoft.com/office/drawing/2014/main" id="{5B69BED1-45BE-4A1F-A5FC-FAEF26D55C4B}"/>
+                <a16:creationId xmlns:a16="http://schemas.microsoft.com/office/drawing/2014/main" id="{326BA598-6F5A-418C-B9F4-AF8888976775}"/>
               </a:ext>
             </a:extLst>
           </p:cNvPr>
@@ -18322,7 +18322,7 @@
           <p:cNvPr id="19" name="">
             <a:extLst xmlns:a="http://schemas.openxmlformats.org/drawingml/2006/main">
               <a:ext uri="{FF2B5EF4-FFF2-40B4-BE49-F238E27FC236}">
-                <a16:creationId xmlns:a16="http://schemas.microsoft.com/office/drawing/2014/main" id="{A3115452-4459-444F-A20B-416D293C192B}"/>
+                <a16:creationId xmlns:a16="http://schemas.microsoft.com/office/drawing/2014/main" id="{5F36BAFD-148A-410B-B2CF-F22502874373}"/>
               </a:ext>
             </a:extLst>
           </p:cNvPr>
@@ -18357,7 +18357,7 @@
           <p:cNvPr id="20" name="">
             <a:extLst xmlns:a="http://schemas.openxmlformats.org/drawingml/2006/main">
               <a:ext uri="{FF2B5EF4-FFF2-40B4-BE49-F238E27FC236}">
-                <a16:creationId xmlns:a16="http://schemas.microsoft.com/office/drawing/2014/main" id="{07C3DBE1-A5DF-4CAD-AB22-D4DF622057E8}"/>
+                <a16:creationId xmlns:a16="http://schemas.microsoft.com/office/drawing/2014/main" id="{381532CF-9238-44E3-A972-75AEBAEB256D}"/>
               </a:ext>
             </a:extLst>
           </p:cNvPr>
@@ -18415,7 +18415,7 @@
           <p:cNvPr id="21" name="">
             <a:extLst xmlns:a="http://schemas.openxmlformats.org/drawingml/2006/main">
               <a:ext uri="{FF2B5EF4-FFF2-40B4-BE49-F238E27FC236}">
-                <a16:creationId xmlns:a16="http://schemas.microsoft.com/office/drawing/2014/main" id="{2712609C-DC14-41E6-8F1E-26CCC800DE51}"/>
+                <a16:creationId xmlns:a16="http://schemas.microsoft.com/office/drawing/2014/main" id="{A61D2A84-09A7-49A5-B4FB-1913C300A702}"/>
               </a:ext>
             </a:extLst>
           </p:cNvPr>
@@ -18541,7 +18541,7 @@
           <p:cNvPr id="22" name="">
             <a:extLst xmlns:a="http://schemas.openxmlformats.org/drawingml/2006/main">
               <a:ext uri="{FF2B5EF4-FFF2-40B4-BE49-F238E27FC236}">
-                <a16:creationId xmlns:a16="http://schemas.microsoft.com/office/drawing/2014/main" id="{2A94D741-3E82-41CA-8EC0-5BF608AC3860}"/>
+                <a16:creationId xmlns:a16="http://schemas.microsoft.com/office/drawing/2014/main" id="{868A69CE-22C8-4249-B894-B673AEA61337}"/>
               </a:ext>
             </a:extLst>
           </p:cNvPr>
@@ -18578,7 +18578,7 @@
           <p:cNvPr id="23" name="">
             <a:extLst xmlns:a="http://schemas.openxmlformats.org/drawingml/2006/main">
               <a:ext uri="{FF2B5EF4-FFF2-40B4-BE49-F238E27FC236}">
-                <a16:creationId xmlns:a16="http://schemas.microsoft.com/office/drawing/2014/main" id="{AC0F53A9-EBE0-472E-82E2-6E0AE6E1853B}"/>
+                <a16:creationId xmlns:a16="http://schemas.microsoft.com/office/drawing/2014/main" id="{7C350B84-2EAE-4325-B343-59689DBC848C}"/>
               </a:ext>
             </a:extLst>
           </p:cNvPr>
@@ -18613,7 +18613,7 @@
           <p:cNvPr id="24" name="">
             <a:extLst xmlns:a="http://schemas.openxmlformats.org/drawingml/2006/main">
               <a:ext uri="{FF2B5EF4-FFF2-40B4-BE49-F238E27FC236}">
-                <a16:creationId xmlns:a16="http://schemas.microsoft.com/office/drawing/2014/main" id="{D40D890F-2B0B-4A65-92C1-1EA808827DC8}"/>
+                <a16:creationId xmlns:a16="http://schemas.microsoft.com/office/drawing/2014/main" id="{3276E26E-4974-487C-AF09-7B98C0D49262}"/>
               </a:ext>
             </a:extLst>
           </p:cNvPr>
@@ -18671,7 +18671,7 @@
           <p:cNvPr id="25" name="">
             <a:extLst xmlns:a="http://schemas.openxmlformats.org/drawingml/2006/main">
               <a:ext uri="{FF2B5EF4-FFF2-40B4-BE49-F238E27FC236}">
-                <a16:creationId xmlns:a16="http://schemas.microsoft.com/office/drawing/2014/main" id="{00CD57F8-5288-4D48-ADAE-1447E8940FAA}"/>
+                <a16:creationId xmlns:a16="http://schemas.microsoft.com/office/drawing/2014/main" id="{9B4DFB25-C75D-4C99-A7AB-4BB80919DB1F}"/>
               </a:ext>
             </a:extLst>
           </p:cNvPr>
@@ -18814,7 +18814,7 @@
           <p:cNvPr id="26" name="">
             <a:extLst xmlns:a="http://schemas.openxmlformats.org/drawingml/2006/main">
               <a:ext uri="{FF2B5EF4-FFF2-40B4-BE49-F238E27FC236}">
-                <a16:creationId xmlns:a16="http://schemas.microsoft.com/office/drawing/2014/main" id="{90E35C17-C3D6-4F2B-A9B0-355F633901D7}"/>
+                <a16:creationId xmlns:a16="http://schemas.microsoft.com/office/drawing/2014/main" id="{53B3B8B2-ACE3-4189-BC7C-23970644534D}"/>
               </a:ext>
             </a:extLst>
           </p:cNvPr>
@@ -18849,7 +18849,7 @@
           <p:cNvPr id="27" name="">
             <a:extLst xmlns:a="http://schemas.openxmlformats.org/drawingml/2006/main">
               <a:ext uri="{FF2B5EF4-FFF2-40B4-BE49-F238E27FC236}">
-                <a16:creationId xmlns:a16="http://schemas.microsoft.com/office/drawing/2014/main" id="{D96A606E-451E-4A17-A737-B7D24BB69406}"/>
+                <a16:creationId xmlns:a16="http://schemas.microsoft.com/office/drawing/2014/main" id="{A38AE0B8-BAAD-4148-9221-56368CC69B8A}"/>
               </a:ext>
             </a:extLst>
           </p:cNvPr>
@@ -18884,7 +18884,7 @@
           <p:cNvPr id="28" name="">
             <a:extLst xmlns:a="http://schemas.openxmlformats.org/drawingml/2006/main">
               <a:ext uri="{FF2B5EF4-FFF2-40B4-BE49-F238E27FC236}">
-                <a16:creationId xmlns:a16="http://schemas.microsoft.com/office/drawing/2014/main" id="{801239D8-F7B3-4F38-8E23-0C3F2D489E3B}"/>
+                <a16:creationId xmlns:a16="http://schemas.microsoft.com/office/drawing/2014/main" id="{6D468864-A74B-4B58-A182-770B723FBCB2}"/>
               </a:ext>
             </a:extLst>
           </p:cNvPr>
@@ -18942,7 +18942,7 @@
           <p:cNvPr id="29" name="">
             <a:extLst xmlns:a="http://schemas.openxmlformats.org/drawingml/2006/main">
               <a:ext uri="{FF2B5EF4-FFF2-40B4-BE49-F238E27FC236}">
-                <a16:creationId xmlns:a16="http://schemas.microsoft.com/office/drawing/2014/main" id="{A37A00D7-2FAE-46A3-8125-504BC3ED1D25}"/>
+                <a16:creationId xmlns:a16="http://schemas.microsoft.com/office/drawing/2014/main" id="{B21FBAA6-8F40-44CB-980A-0050F2302BA3}"/>
               </a:ext>
             </a:extLst>
           </p:cNvPr>
@@ -18998,7 +18998,7 @@
     </p:spTree>
     <p:extLst>
       <p:ext uri="{BB962C8B-B14F-4D97-AF65-F5344CB8AC3E}">
-        <p14:creationId xmlns:p14="http://schemas.microsoft.com/office/powerpoint/2010/main" val="2006811059"/>
+        <p14:creationId xmlns:p14="http://schemas.microsoft.com/office/powerpoint/2010/main" val="1908229589"/>
       </p:ext>
     </p:extLst>
   </p:cSld>
@@ -19029,7 +19029,7 @@
           <p:cNvPr id="1" name="Slide Number Placeholder 5">
             <a:extLst xmlns:a="http://schemas.openxmlformats.org/drawingml/2006/main">
               <a:ext uri="{FF2B5EF4-FFF2-40B4-BE49-F238E27FC236}">
-                <a16:creationId xmlns:a16="http://schemas.microsoft.com/office/drawing/2014/main" id="{821508BF-91E3-4E78-84B3-DCBD229C8660}"/>
+                <a16:creationId xmlns:a16="http://schemas.microsoft.com/office/drawing/2014/main" id="{11DAD1DA-DD27-4C25-AFB7-E057ACC56EC0}"/>
               </a:ext>
             </a:extLst>
           </p:cNvPr>
@@ -19065,7 +19065,7 @@
           <p:nvPr/>
         </p:nvPicPr>
         <p:blipFill>
-          <a:blip xmlns:r="http://schemas.openxmlformats.org/officeDocument/2006/relationships" xmlns:a="http://schemas.openxmlformats.org/drawingml/2006/main" r:embed="R82533a4f1c0742c2"/>
+          <a:blip xmlns:r="http://schemas.openxmlformats.org/officeDocument/2006/relationships" xmlns:a="http://schemas.openxmlformats.org/drawingml/2006/main" r:embed="R0f8ad99d1a8745c6"/>
           <a:srcRect xmlns:a="http://schemas.openxmlformats.org/drawingml/2006/main" l="0" t="21875" r="0" b="21875"/>
           <a:stretch xmlns:a="http://schemas.openxmlformats.org/drawingml/2006/main">
             <a:fillRect l="0" t="0" r="0" b="0"/>
@@ -19086,7 +19086,7 @@
           <p:cNvPr id="3" name="">
             <a:extLst xmlns:a="http://schemas.openxmlformats.org/drawingml/2006/main">
               <a:ext uri="{FF2B5EF4-FFF2-40B4-BE49-F238E27FC236}">
-                <a16:creationId xmlns:a16="http://schemas.microsoft.com/office/drawing/2014/main" id="{8997A331-F7ED-4F55-A35B-A9CC14428B75}"/>
+                <a16:creationId xmlns:a16="http://schemas.microsoft.com/office/drawing/2014/main" id="{9F0977C2-42C1-4880-A998-206E6565BF45}"/>
               </a:ext>
             </a:extLst>
           </p:cNvPr>
@@ -19121,7 +19121,7 @@
           <p:cNvPr id="4" name="">
             <a:extLst xmlns:a="http://schemas.openxmlformats.org/drawingml/2006/main">
               <a:ext uri="{FF2B5EF4-FFF2-40B4-BE49-F238E27FC236}">
-                <a16:creationId xmlns:a16="http://schemas.microsoft.com/office/drawing/2014/main" id="{8ED04F50-4404-47E5-95DE-CC44977F8E72}"/>
+                <a16:creationId xmlns:a16="http://schemas.microsoft.com/office/drawing/2014/main" id="{1816F542-96DA-4B15-8C14-A9D64CB170F7}"/>
               </a:ext>
             </a:extLst>
           </p:cNvPr>
@@ -19156,7 +19156,7 @@
           <p:cNvPr id="5" name="">
             <a:extLst xmlns:a="http://schemas.openxmlformats.org/drawingml/2006/main">
               <a:ext uri="{FF2B5EF4-FFF2-40B4-BE49-F238E27FC236}">
-                <a16:creationId xmlns:a16="http://schemas.microsoft.com/office/drawing/2014/main" id="{609235C7-C023-4F41-B119-389DC4DEC11D}"/>
+                <a16:creationId xmlns:a16="http://schemas.microsoft.com/office/drawing/2014/main" id="{44B806AE-0834-4853-BEA8-BC1D2B975895}"/>
               </a:ext>
             </a:extLst>
           </p:cNvPr>
@@ -19193,7 +19193,7 @@
           <p:cNvPr id="6" name="">
             <a:extLst xmlns:a="http://schemas.openxmlformats.org/drawingml/2006/main">
               <a:ext uri="{FF2B5EF4-FFF2-40B4-BE49-F238E27FC236}">
-                <a16:creationId xmlns:a16="http://schemas.microsoft.com/office/drawing/2014/main" id="{44541279-6D7C-4F2B-8903-F84CAC14F883}"/>
+                <a16:creationId xmlns:a16="http://schemas.microsoft.com/office/drawing/2014/main" id="{251CFA0A-BFDE-4ECA-808D-316C38023870}"/>
               </a:ext>
             </a:extLst>
           </p:cNvPr>
@@ -19230,7 +19230,7 @@
           <p:cNvPr id="7" name="">
             <a:extLst xmlns:a="http://schemas.openxmlformats.org/drawingml/2006/main">
               <a:ext uri="{FF2B5EF4-FFF2-40B4-BE49-F238E27FC236}">
-                <a16:creationId xmlns:a16="http://schemas.microsoft.com/office/drawing/2014/main" id="{06ADBAF5-431F-45C3-8A77-62ACF922E183}"/>
+                <a16:creationId xmlns:a16="http://schemas.microsoft.com/office/drawing/2014/main" id="{CCB71084-1E93-42A8-9D0C-A40654ECE769}"/>
               </a:ext>
             </a:extLst>
           </p:cNvPr>
@@ -19267,7 +19267,7 @@
           <p:cNvPr id="8" name="">
             <a:extLst xmlns:a="http://schemas.openxmlformats.org/drawingml/2006/main">
               <a:ext uri="{FF2B5EF4-FFF2-40B4-BE49-F238E27FC236}">
-                <a16:creationId xmlns:a16="http://schemas.microsoft.com/office/drawing/2014/main" id="{00DCFE12-7D1B-4CAB-AC64-2F6DDBD8F72E}"/>
+                <a16:creationId xmlns:a16="http://schemas.microsoft.com/office/drawing/2014/main" id="{1FAC7D28-EC08-4287-8798-38BE74D816CD}"/>
               </a:ext>
             </a:extLst>
           </p:cNvPr>
@@ -19304,7 +19304,7 @@
           <p:cNvPr id="9" name="">
             <a:extLst xmlns:a="http://schemas.openxmlformats.org/drawingml/2006/main">
               <a:ext uri="{FF2B5EF4-FFF2-40B4-BE49-F238E27FC236}">
-                <a16:creationId xmlns:a16="http://schemas.microsoft.com/office/drawing/2014/main" id="{FDE5B5FB-6AA6-410D-BEB0-96491A9E0316}"/>
+                <a16:creationId xmlns:a16="http://schemas.microsoft.com/office/drawing/2014/main" id="{98A5631E-DA51-4C25-B2E6-69D03C180F72}"/>
               </a:ext>
             </a:extLst>
           </p:cNvPr>
@@ -19362,7 +19362,7 @@
           <p:cNvPr id="10" name="">
             <a:extLst xmlns:a="http://schemas.openxmlformats.org/drawingml/2006/main">
               <a:ext uri="{FF2B5EF4-FFF2-40B4-BE49-F238E27FC236}">
-                <a16:creationId xmlns:a16="http://schemas.microsoft.com/office/drawing/2014/main" id="{8B3A45E3-47EF-44CD-A025-83101D9B3789}"/>
+                <a16:creationId xmlns:a16="http://schemas.microsoft.com/office/drawing/2014/main" id="{22C76B1D-7F1B-44AB-AEAA-30E658CD6C74}"/>
               </a:ext>
             </a:extLst>
           </p:cNvPr>
@@ -19420,7 +19420,7 @@
           <p:cNvPr id="11" name="">
             <a:extLst xmlns:a="http://schemas.openxmlformats.org/drawingml/2006/main">
               <a:ext uri="{FF2B5EF4-FFF2-40B4-BE49-F238E27FC236}">
-                <a16:creationId xmlns:a16="http://schemas.microsoft.com/office/drawing/2014/main" id="{BE10A77D-6EEA-41ED-BE02-788B9A2E2235}"/>
+                <a16:creationId xmlns:a16="http://schemas.microsoft.com/office/drawing/2014/main" id="{20B07F4B-C85D-4F0A-A804-08C261425006}"/>
               </a:ext>
             </a:extLst>
           </p:cNvPr>
@@ -19455,7 +19455,7 @@
           <p:cNvPr id="12" name="">
             <a:extLst xmlns:a="http://schemas.openxmlformats.org/drawingml/2006/main">
               <a:ext uri="{FF2B5EF4-FFF2-40B4-BE49-F238E27FC236}">
-                <a16:creationId xmlns:a16="http://schemas.microsoft.com/office/drawing/2014/main" id="{DB38882A-FE28-49A8-9646-44656EE1E4EE}"/>
+                <a16:creationId xmlns:a16="http://schemas.microsoft.com/office/drawing/2014/main" id="{7BE56CA7-E680-460D-BCE8-CFFED2DE7C0D}"/>
               </a:ext>
             </a:extLst>
           </p:cNvPr>
@@ -19488,7 +19488,7 @@
           <p:cNvPr id="13" name="">
             <a:extLst xmlns:a="http://schemas.openxmlformats.org/drawingml/2006/main">
               <a:ext uri="{FF2B5EF4-FFF2-40B4-BE49-F238E27FC236}">
-                <a16:creationId xmlns:a16="http://schemas.microsoft.com/office/drawing/2014/main" id="{0EF8F0E9-3A68-4BC5-AEB6-24F53118CE22}"/>
+                <a16:creationId xmlns:a16="http://schemas.microsoft.com/office/drawing/2014/main" id="{068D5EB0-F9E5-4023-A10D-A36CCF415FBC}"/>
               </a:ext>
             </a:extLst>
           </p:cNvPr>
@@ -19546,7 +19546,7 @@
           <p:cNvPr id="14" name="">
             <a:extLst xmlns:a="http://schemas.openxmlformats.org/drawingml/2006/main">
               <a:ext uri="{FF2B5EF4-FFF2-40B4-BE49-F238E27FC236}">
-                <a16:creationId xmlns:a16="http://schemas.microsoft.com/office/drawing/2014/main" id="{8FD983C7-D0FC-42C4-B3F7-67C2541F0D88}"/>
+                <a16:creationId xmlns:a16="http://schemas.microsoft.com/office/drawing/2014/main" id="{DBBF4DB4-BF92-48EA-9D98-E1D60EBEF4F4}"/>
               </a:ext>
             </a:extLst>
           </p:cNvPr>
@@ -19581,7 +19581,7 @@
           <p:cNvPr id="15" name="">
             <a:extLst xmlns:a="http://schemas.openxmlformats.org/drawingml/2006/main">
               <a:ext uri="{FF2B5EF4-FFF2-40B4-BE49-F238E27FC236}">
-                <a16:creationId xmlns:a16="http://schemas.microsoft.com/office/drawing/2014/main" id="{DCA1B17A-EFFE-414C-B98D-8EF6DF6B0779}"/>
+                <a16:creationId xmlns:a16="http://schemas.microsoft.com/office/drawing/2014/main" id="{A32C9EC9-A9AA-4684-AAEA-753456FE8A60}"/>
               </a:ext>
             </a:extLst>
           </p:cNvPr>
@@ -19616,7 +19616,7 @@
           <p:cNvPr id="16" name="">
             <a:extLst xmlns:a="http://schemas.openxmlformats.org/drawingml/2006/main">
               <a:ext uri="{FF2B5EF4-FFF2-40B4-BE49-F238E27FC236}">
-                <a16:creationId xmlns:a16="http://schemas.microsoft.com/office/drawing/2014/main" id="{615C837C-B2B9-4E4F-A0EF-23A5D9698947}"/>
+                <a16:creationId xmlns:a16="http://schemas.microsoft.com/office/drawing/2014/main" id="{45B6E6FB-09F8-46EA-8138-3FE2CFDA8CFF}"/>
               </a:ext>
             </a:extLst>
           </p:cNvPr>
@@ -19674,7 +19674,7 @@
           <p:cNvPr id="17" name="">
             <a:extLst xmlns:a="http://schemas.openxmlformats.org/drawingml/2006/main">
               <a:ext uri="{FF2B5EF4-FFF2-40B4-BE49-F238E27FC236}">
-                <a16:creationId xmlns:a16="http://schemas.microsoft.com/office/drawing/2014/main" id="{3346162E-BA06-4608-957C-B13FCBA7606D}"/>
+                <a16:creationId xmlns:a16="http://schemas.microsoft.com/office/drawing/2014/main" id="{AC5E9173-2A5A-4DF7-9254-F6924658F072}"/>
               </a:ext>
             </a:extLst>
           </p:cNvPr>
@@ -19711,7 +19711,7 @@
           <p:cNvPr id="18" name="">
             <a:extLst xmlns:a="http://schemas.openxmlformats.org/drawingml/2006/main">
               <a:ext uri="{FF2B5EF4-FFF2-40B4-BE49-F238E27FC236}">
-                <a16:creationId xmlns:a16="http://schemas.microsoft.com/office/drawing/2014/main" id="{063A13F6-ACD5-4E0C-A0D1-55FAAC755BC5}"/>
+                <a16:creationId xmlns:a16="http://schemas.microsoft.com/office/drawing/2014/main" id="{9CD082E5-3FD9-4863-A90B-1B7774F4D95B}"/>
               </a:ext>
             </a:extLst>
           </p:cNvPr>
@@ -19746,7 +19746,7 @@
           <p:cNvPr id="19" name="">
             <a:extLst xmlns:a="http://schemas.openxmlformats.org/drawingml/2006/main">
               <a:ext uri="{FF2B5EF4-FFF2-40B4-BE49-F238E27FC236}">
-                <a16:creationId xmlns:a16="http://schemas.microsoft.com/office/drawing/2014/main" id="{4A944755-D49D-4066-8A23-1AB64517E3DD}"/>
+                <a16:creationId xmlns:a16="http://schemas.microsoft.com/office/drawing/2014/main" id="{B7016E13-23AA-495E-8C46-755630133615}"/>
               </a:ext>
             </a:extLst>
           </p:cNvPr>
@@ -19804,7 +19804,7 @@
           <p:cNvPr id="20" name="">
             <a:extLst xmlns:a="http://schemas.openxmlformats.org/drawingml/2006/main">
               <a:ext uri="{FF2B5EF4-FFF2-40B4-BE49-F238E27FC236}">
-                <a16:creationId xmlns:a16="http://schemas.microsoft.com/office/drawing/2014/main" id="{98A303C6-C7FC-4ED9-95BF-E6F7A054BD33}"/>
+                <a16:creationId xmlns:a16="http://schemas.microsoft.com/office/drawing/2014/main" id="{83BEEFD4-333D-4617-92A4-B1B00CDDEC38}"/>
               </a:ext>
             </a:extLst>
           </p:cNvPr>
@@ -19896,7 +19896,7 @@
           <p:cNvPr id="21" name="">
             <a:extLst xmlns:a="http://schemas.openxmlformats.org/drawingml/2006/main">
               <a:ext uri="{FF2B5EF4-FFF2-40B4-BE49-F238E27FC236}">
-                <a16:creationId xmlns:a16="http://schemas.microsoft.com/office/drawing/2014/main" id="{7EF83724-1653-47C0-9612-FF9FE2B769E3}"/>
+                <a16:creationId xmlns:a16="http://schemas.microsoft.com/office/drawing/2014/main" id="{F88960FB-2334-443B-A63B-41A7D45B8BF4}"/>
               </a:ext>
             </a:extLst>
           </p:cNvPr>
@@ -19933,7 +19933,7 @@
           <p:cNvPr id="22" name="">
             <a:extLst xmlns:a="http://schemas.openxmlformats.org/drawingml/2006/main">
               <a:ext uri="{FF2B5EF4-FFF2-40B4-BE49-F238E27FC236}">
-                <a16:creationId xmlns:a16="http://schemas.microsoft.com/office/drawing/2014/main" id="{B1DFE731-8A47-4C83-80F4-E59F486D67EB}"/>
+                <a16:creationId xmlns:a16="http://schemas.microsoft.com/office/drawing/2014/main" id="{C5B61865-0735-4F7D-950E-A01985D11CCA}"/>
               </a:ext>
             </a:extLst>
           </p:cNvPr>
@@ -19968,7 +19968,7 @@
           <p:cNvPr id="23" name="">
             <a:extLst xmlns:a="http://schemas.openxmlformats.org/drawingml/2006/main">
               <a:ext uri="{FF2B5EF4-FFF2-40B4-BE49-F238E27FC236}">
-                <a16:creationId xmlns:a16="http://schemas.microsoft.com/office/drawing/2014/main" id="{4EDFFA91-93D2-43B1-A587-7456D938887C}"/>
+                <a16:creationId xmlns:a16="http://schemas.microsoft.com/office/drawing/2014/main" id="{E71C35B0-7652-45BD-9086-360A7705E6AB}"/>
               </a:ext>
             </a:extLst>
           </p:cNvPr>
@@ -20026,7 +20026,7 @@
           <p:cNvPr id="24" name="">
             <a:extLst xmlns:a="http://schemas.openxmlformats.org/drawingml/2006/main">
               <a:ext uri="{FF2B5EF4-FFF2-40B4-BE49-F238E27FC236}">
-                <a16:creationId xmlns:a16="http://schemas.microsoft.com/office/drawing/2014/main" id="{3872002D-7B5A-4196-90A9-5000119B7566}"/>
+                <a16:creationId xmlns:a16="http://schemas.microsoft.com/office/drawing/2014/main" id="{DC34EDE8-9647-4B33-AD83-B269EE100FC6}"/>
               </a:ext>
             </a:extLst>
           </p:cNvPr>
@@ -20118,7 +20118,7 @@
           <p:cNvPr id="25" name="">
             <a:extLst xmlns:a="http://schemas.openxmlformats.org/drawingml/2006/main">
               <a:ext uri="{FF2B5EF4-FFF2-40B4-BE49-F238E27FC236}">
-                <a16:creationId xmlns:a16="http://schemas.microsoft.com/office/drawing/2014/main" id="{B7104D2D-8C1B-4C7E-B693-EA77CF95D692}"/>
+                <a16:creationId xmlns:a16="http://schemas.microsoft.com/office/drawing/2014/main" id="{6EAF2159-C976-4FEC-B8AB-94CFED0AA5D7}"/>
               </a:ext>
             </a:extLst>
           </p:cNvPr>
@@ -20155,7 +20155,7 @@
           <p:cNvPr id="26" name="">
             <a:extLst xmlns:a="http://schemas.openxmlformats.org/drawingml/2006/main">
               <a:ext uri="{FF2B5EF4-FFF2-40B4-BE49-F238E27FC236}">
-                <a16:creationId xmlns:a16="http://schemas.microsoft.com/office/drawing/2014/main" id="{9EFE221E-6209-49EC-973E-04C323B874C5}"/>
+                <a16:creationId xmlns:a16="http://schemas.microsoft.com/office/drawing/2014/main" id="{1F31083E-5840-436E-B6D4-3B876DE5E768}"/>
               </a:ext>
             </a:extLst>
           </p:cNvPr>
@@ -20190,7 +20190,7 @@
           <p:cNvPr id="27" name="">
             <a:extLst xmlns:a="http://schemas.openxmlformats.org/drawingml/2006/main">
               <a:ext uri="{FF2B5EF4-FFF2-40B4-BE49-F238E27FC236}">
-                <a16:creationId xmlns:a16="http://schemas.microsoft.com/office/drawing/2014/main" id="{1406D03C-D7B6-4F91-8747-51245C4973E2}"/>
+                <a16:creationId xmlns:a16="http://schemas.microsoft.com/office/drawing/2014/main" id="{AC32B0BE-DE5D-4FF9-B858-10E5DB9D2598}"/>
               </a:ext>
             </a:extLst>
           </p:cNvPr>
@@ -20248,7 +20248,7 @@
           <p:cNvPr id="28" name="">
             <a:extLst xmlns:a="http://schemas.openxmlformats.org/drawingml/2006/main">
               <a:ext uri="{FF2B5EF4-FFF2-40B4-BE49-F238E27FC236}">
-                <a16:creationId xmlns:a16="http://schemas.microsoft.com/office/drawing/2014/main" id="{1654B727-8023-486F-AA16-23C70DE9AC6A}"/>
+                <a16:creationId xmlns:a16="http://schemas.microsoft.com/office/drawing/2014/main" id="{07D64BF5-D088-4B9D-B4F3-189E9F5FE7BB}"/>
               </a:ext>
             </a:extLst>
           </p:cNvPr>
@@ -20340,7 +20340,7 @@
           <p:cNvPr id="29" name="">
             <a:extLst xmlns:a="http://schemas.openxmlformats.org/drawingml/2006/main">
               <a:ext uri="{FF2B5EF4-FFF2-40B4-BE49-F238E27FC236}">
-                <a16:creationId xmlns:a16="http://schemas.microsoft.com/office/drawing/2014/main" id="{D4A5B8CC-7F65-4B95-A604-254A469BF05D}"/>
+                <a16:creationId xmlns:a16="http://schemas.microsoft.com/office/drawing/2014/main" id="{BFC4F915-19FB-49A6-8EED-BA3E91DD4231}"/>
               </a:ext>
             </a:extLst>
           </p:cNvPr>
@@ -20394,7 +20394,7 @@
           <p:cNvPr id="30" name="">
             <a:extLst xmlns:a="http://schemas.openxmlformats.org/drawingml/2006/main">
               <a:ext uri="{FF2B5EF4-FFF2-40B4-BE49-F238E27FC236}">
-                <a16:creationId xmlns:a16="http://schemas.microsoft.com/office/drawing/2014/main" id="{CB2E9EF9-9914-4BA7-B1D9-A949C756AB9D}"/>
+                <a16:creationId xmlns:a16="http://schemas.microsoft.com/office/drawing/2014/main" id="{30A34E63-EC3A-4CEC-9C08-631A0599612C}"/>
               </a:ext>
             </a:extLst>
           </p:cNvPr>
@@ -20450,7 +20450,7 @@
     </p:spTree>
     <p:extLst>
       <p:ext uri="{BB962C8B-B14F-4D97-AF65-F5344CB8AC3E}">
-        <p14:creationId xmlns:p14="http://schemas.microsoft.com/office/powerpoint/2010/main" val="2047330770"/>
+        <p14:creationId xmlns:p14="http://schemas.microsoft.com/office/powerpoint/2010/main" val="448471026"/>
       </p:ext>
     </p:extLst>
   </p:cSld>
@@ -20481,7 +20481,7 @@
           <p:cNvPr id="1" name="Slide Number Placeholder 5">
             <a:extLst xmlns:a="http://schemas.openxmlformats.org/drawingml/2006/main">
               <a:ext uri="{FF2B5EF4-FFF2-40B4-BE49-F238E27FC236}">
-                <a16:creationId xmlns:a16="http://schemas.microsoft.com/office/drawing/2014/main" id="{821508BF-91E3-4E78-84B3-DCBD229C8660}"/>
+                <a16:creationId xmlns:a16="http://schemas.microsoft.com/office/drawing/2014/main" id="{11DAD1DA-DD27-4C25-AFB7-E057ACC56EC0}"/>
               </a:ext>
             </a:extLst>
           </p:cNvPr>
@@ -20517,7 +20517,7 @@
           <p:nvPr/>
         </p:nvPicPr>
         <p:blipFill>
-          <a:blip xmlns:r="http://schemas.openxmlformats.org/officeDocument/2006/relationships" xmlns:a="http://schemas.openxmlformats.org/drawingml/2006/main" r:embed="R9e066834ffc94efc"/>
+          <a:blip xmlns:r="http://schemas.openxmlformats.org/officeDocument/2006/relationships" xmlns:a="http://schemas.openxmlformats.org/drawingml/2006/main" r:embed="R3d2b7887ebd74606"/>
           <a:srcRect xmlns:a="http://schemas.openxmlformats.org/drawingml/2006/main" l="0" t="21875" r="0" b="21875"/>
           <a:stretch xmlns:a="http://schemas.openxmlformats.org/drawingml/2006/main">
             <a:fillRect l="0" t="0" r="0" b="0"/>
@@ -20538,7 +20538,7 @@
           <p:cNvPr id="3" name="">
             <a:extLst xmlns:a="http://schemas.openxmlformats.org/drawingml/2006/main">
               <a:ext uri="{FF2B5EF4-FFF2-40B4-BE49-F238E27FC236}">
-                <a16:creationId xmlns:a16="http://schemas.microsoft.com/office/drawing/2014/main" id="{125A3700-8D23-4725-98B9-C96681BD15A3}"/>
+                <a16:creationId xmlns:a16="http://schemas.microsoft.com/office/drawing/2014/main" id="{A06564FF-1348-4116-A98C-0BCDA66EC083}"/>
               </a:ext>
             </a:extLst>
           </p:cNvPr>
@@ -20573,7 +20573,7 @@
           <p:cNvPr id="4" name="">
             <a:extLst xmlns:a="http://schemas.openxmlformats.org/drawingml/2006/main">
               <a:ext uri="{FF2B5EF4-FFF2-40B4-BE49-F238E27FC236}">
-                <a16:creationId xmlns:a16="http://schemas.microsoft.com/office/drawing/2014/main" id="{224B2E21-8F80-4BC9-A239-2CF5BD16F193}"/>
+                <a16:creationId xmlns:a16="http://schemas.microsoft.com/office/drawing/2014/main" id="{767E2C77-6F2D-445D-89AD-80CE3251E1C0}"/>
               </a:ext>
             </a:extLst>
           </p:cNvPr>
@@ -20608,7 +20608,7 @@
           <p:cNvPr id="5" name="">
             <a:extLst xmlns:a="http://schemas.openxmlformats.org/drawingml/2006/main">
               <a:ext uri="{FF2B5EF4-FFF2-40B4-BE49-F238E27FC236}">
-                <a16:creationId xmlns:a16="http://schemas.microsoft.com/office/drawing/2014/main" id="{684AF2C6-4CE5-4A5D-A061-1AA7BB428AD0}"/>
+                <a16:creationId xmlns:a16="http://schemas.microsoft.com/office/drawing/2014/main" id="{8D0BDBBF-8A63-4E22-843A-15260B64E7FB}"/>
               </a:ext>
             </a:extLst>
           </p:cNvPr>
@@ -20645,7 +20645,7 @@
           <p:cNvPr id="6" name="">
             <a:extLst xmlns:a="http://schemas.openxmlformats.org/drawingml/2006/main">
               <a:ext uri="{FF2B5EF4-FFF2-40B4-BE49-F238E27FC236}">
-                <a16:creationId xmlns:a16="http://schemas.microsoft.com/office/drawing/2014/main" id="{64D5D436-E8CF-4849-A808-A4D257D02A9D}"/>
+                <a16:creationId xmlns:a16="http://schemas.microsoft.com/office/drawing/2014/main" id="{7F394D0A-4E02-4921-B157-41BAB85BD06B}"/>
               </a:ext>
             </a:extLst>
           </p:cNvPr>
@@ -20682,7 +20682,7 @@
           <p:cNvPr id="7" name="">
             <a:extLst xmlns:a="http://schemas.openxmlformats.org/drawingml/2006/main">
               <a:ext uri="{FF2B5EF4-FFF2-40B4-BE49-F238E27FC236}">
-                <a16:creationId xmlns:a16="http://schemas.microsoft.com/office/drawing/2014/main" id="{F8B64131-BFA0-4122-9713-129778394C43}"/>
+                <a16:creationId xmlns:a16="http://schemas.microsoft.com/office/drawing/2014/main" id="{8B4A0466-1C24-4D5F-8DCD-9D04E7B499B2}"/>
               </a:ext>
             </a:extLst>
           </p:cNvPr>
@@ -20719,7 +20719,7 @@
           <p:cNvPr id="8" name="">
             <a:extLst xmlns:a="http://schemas.openxmlformats.org/drawingml/2006/main">
               <a:ext uri="{FF2B5EF4-FFF2-40B4-BE49-F238E27FC236}">
-                <a16:creationId xmlns:a16="http://schemas.microsoft.com/office/drawing/2014/main" id="{2D5285CC-06B5-4316-AA9F-5A947EB587CE}"/>
+                <a16:creationId xmlns:a16="http://schemas.microsoft.com/office/drawing/2014/main" id="{289F16A8-6A18-42DF-979B-2F156E114102}"/>
               </a:ext>
             </a:extLst>
           </p:cNvPr>
@@ -20756,7 +20756,7 @@
           <p:cNvPr id="9" name="">
             <a:extLst xmlns:a="http://schemas.openxmlformats.org/drawingml/2006/main">
               <a:ext uri="{FF2B5EF4-FFF2-40B4-BE49-F238E27FC236}">
-                <a16:creationId xmlns:a16="http://schemas.microsoft.com/office/drawing/2014/main" id="{A5863B54-1A56-4C05-AEBF-01EE4E378028}"/>
+                <a16:creationId xmlns:a16="http://schemas.microsoft.com/office/drawing/2014/main" id="{768F11F9-C320-4BB4-85C0-1ED0B99E518D}"/>
               </a:ext>
             </a:extLst>
           </p:cNvPr>
@@ -20814,7 +20814,7 @@
           <p:cNvPr id="10" name="">
             <a:extLst xmlns:a="http://schemas.openxmlformats.org/drawingml/2006/main">
               <a:ext uri="{FF2B5EF4-FFF2-40B4-BE49-F238E27FC236}">
-                <a16:creationId xmlns:a16="http://schemas.microsoft.com/office/drawing/2014/main" id="{DA268A0B-6C12-4EFE-816A-4D23F2F87777}"/>
+                <a16:creationId xmlns:a16="http://schemas.microsoft.com/office/drawing/2014/main" id="{DE0BFAD4-309E-454D-89E0-431EBB8365A1}"/>
               </a:ext>
             </a:extLst>
           </p:cNvPr>
@@ -20872,7 +20872,7 @@
           <p:cNvPr id="11" name="">
             <a:extLst xmlns:a="http://schemas.openxmlformats.org/drawingml/2006/main">
               <a:ext uri="{FF2B5EF4-FFF2-40B4-BE49-F238E27FC236}">
-                <a16:creationId xmlns:a16="http://schemas.microsoft.com/office/drawing/2014/main" id="{C010A9C3-A85D-4BAB-9D17-E0174B0980A9}"/>
+                <a16:creationId xmlns:a16="http://schemas.microsoft.com/office/drawing/2014/main" id="{786861FC-1593-4522-83E6-4EE1A83E1A62}"/>
               </a:ext>
             </a:extLst>
           </p:cNvPr>
@@ -20907,7 +20907,7 @@
           <p:cNvPr id="12" name="">
             <a:extLst xmlns:a="http://schemas.openxmlformats.org/drawingml/2006/main">
               <a:ext uri="{FF2B5EF4-FFF2-40B4-BE49-F238E27FC236}">
-                <a16:creationId xmlns:a16="http://schemas.microsoft.com/office/drawing/2014/main" id="{2EAF8926-03C7-4DDE-BA05-F25CA4B4BA0A}"/>
+                <a16:creationId xmlns:a16="http://schemas.microsoft.com/office/drawing/2014/main" id="{F973365A-29D9-4398-BFD3-23217288122D}"/>
               </a:ext>
             </a:extLst>
           </p:cNvPr>
@@ -20940,7 +20940,7 @@
           <p:cNvPr id="13" name="">
             <a:extLst xmlns:a="http://schemas.openxmlformats.org/drawingml/2006/main">
               <a:ext uri="{FF2B5EF4-FFF2-40B4-BE49-F238E27FC236}">
-                <a16:creationId xmlns:a16="http://schemas.microsoft.com/office/drawing/2014/main" id="{99585C38-B1A4-4EBE-83E1-DF5BAE988906}"/>
+                <a16:creationId xmlns:a16="http://schemas.microsoft.com/office/drawing/2014/main" id="{D288E78C-B0C1-4853-A752-4DA4F8AD1B58}"/>
               </a:ext>
             </a:extLst>
           </p:cNvPr>
@@ -21015,7 +21015,7 @@
           <p:cNvPr id="14" name="">
             <a:extLst xmlns:a="http://schemas.openxmlformats.org/drawingml/2006/main">
               <a:ext uri="{FF2B5EF4-FFF2-40B4-BE49-F238E27FC236}">
-                <a16:creationId xmlns:a16="http://schemas.microsoft.com/office/drawing/2014/main" id="{ABCE2983-BFEB-418D-8F00-403E8DFED29C}"/>
+                <a16:creationId xmlns:a16="http://schemas.microsoft.com/office/drawing/2014/main" id="{06088249-37F0-431B-A508-824220E624E7}"/>
               </a:ext>
             </a:extLst>
           </p:cNvPr>
@@ -21069,7 +21069,7 @@
           <p:cNvPr id="15" name="">
             <a:extLst xmlns:a="http://schemas.openxmlformats.org/drawingml/2006/main">
               <a:ext uri="{FF2B5EF4-FFF2-40B4-BE49-F238E27FC236}">
-                <a16:creationId xmlns:a16="http://schemas.microsoft.com/office/drawing/2014/main" id="{7CA189B4-5B58-4AA1-8146-1CEA797C8D78}"/>
+                <a16:creationId xmlns:a16="http://schemas.microsoft.com/office/drawing/2014/main" id="{843EC3E2-407D-4E86-969D-6E016EEC4C91}"/>
               </a:ext>
             </a:extLst>
           </p:cNvPr>
@@ -21104,7 +21104,7 @@
           <p:cNvPr id="16" name="">
             <a:extLst xmlns:a="http://schemas.openxmlformats.org/drawingml/2006/main">
               <a:ext uri="{FF2B5EF4-FFF2-40B4-BE49-F238E27FC236}">
-                <a16:creationId xmlns:a16="http://schemas.microsoft.com/office/drawing/2014/main" id="{B5E2B769-B9C7-4E53-98A2-209C318ADE41}"/>
+                <a16:creationId xmlns:a16="http://schemas.microsoft.com/office/drawing/2014/main" id="{B4D62313-DAA7-4992-BB4E-DC8CD6F2F31D}"/>
               </a:ext>
             </a:extLst>
           </p:cNvPr>
@@ -21139,7 +21139,7 @@
           <p:cNvPr id="17" name="">
             <a:extLst xmlns:a="http://schemas.openxmlformats.org/drawingml/2006/main">
               <a:ext uri="{FF2B5EF4-FFF2-40B4-BE49-F238E27FC236}">
-                <a16:creationId xmlns:a16="http://schemas.microsoft.com/office/drawing/2014/main" id="{C988C17A-41AD-429B-B991-1CE26028DE34}"/>
+                <a16:creationId xmlns:a16="http://schemas.microsoft.com/office/drawing/2014/main" id="{029CED18-8BF2-41E7-B26A-8AA561D68CFD}"/>
               </a:ext>
             </a:extLst>
           </p:cNvPr>
@@ -21193,7 +21193,7 @@
           <p:cNvPr id="18" name="">
             <a:extLst xmlns:a="http://schemas.openxmlformats.org/drawingml/2006/main">
               <a:ext uri="{FF2B5EF4-FFF2-40B4-BE49-F238E27FC236}">
-                <a16:creationId xmlns:a16="http://schemas.microsoft.com/office/drawing/2014/main" id="{D91758B5-9B8F-4263-A857-906879E1ACBB}"/>
+                <a16:creationId xmlns:a16="http://schemas.microsoft.com/office/drawing/2014/main" id="{823EBF75-ADA0-49E9-8CF0-A749E8861E3A}"/>
               </a:ext>
             </a:extLst>
           </p:cNvPr>
@@ -21251,7 +21251,7 @@
           <p:cNvPr id="19" name="">
             <a:extLst xmlns:a="http://schemas.openxmlformats.org/drawingml/2006/main">
               <a:ext uri="{FF2B5EF4-FFF2-40B4-BE49-F238E27FC236}">
-                <a16:creationId xmlns:a16="http://schemas.microsoft.com/office/drawing/2014/main" id="{FCE56D77-3CB2-4B8B-92F2-B88E0A0F58DE}"/>
+                <a16:creationId xmlns:a16="http://schemas.microsoft.com/office/drawing/2014/main" id="{B75419FC-584F-420A-A32B-F086CCB622B1}"/>
               </a:ext>
             </a:extLst>
           </p:cNvPr>
@@ -21309,7 +21309,7 @@
           <p:cNvPr id="20" name="">
             <a:extLst xmlns:a="http://schemas.openxmlformats.org/drawingml/2006/main">
               <a:ext uri="{FF2B5EF4-FFF2-40B4-BE49-F238E27FC236}">
-                <a16:creationId xmlns:a16="http://schemas.microsoft.com/office/drawing/2014/main" id="{CEB54C8A-FCC4-4631-A4A0-8300394292E0}"/>
+                <a16:creationId xmlns:a16="http://schemas.microsoft.com/office/drawing/2014/main" id="{06A41DA2-900C-49DA-BF47-314EBC5DB802}"/>
               </a:ext>
             </a:extLst>
           </p:cNvPr>
@@ -21344,7 +21344,7 @@
           <p:cNvPr id="21" name="">
             <a:extLst xmlns:a="http://schemas.openxmlformats.org/drawingml/2006/main">
               <a:ext uri="{FF2B5EF4-FFF2-40B4-BE49-F238E27FC236}">
-                <a16:creationId xmlns:a16="http://schemas.microsoft.com/office/drawing/2014/main" id="{A01A40DF-E91F-40A8-A234-7E49220E4CE7}"/>
+                <a16:creationId xmlns:a16="http://schemas.microsoft.com/office/drawing/2014/main" id="{330D31A2-E3C2-41A3-B740-AFD499B583B2}"/>
               </a:ext>
             </a:extLst>
           </p:cNvPr>
@@ -21379,7 +21379,7 @@
           <p:cNvPr id="22" name="">
             <a:extLst xmlns:a="http://schemas.openxmlformats.org/drawingml/2006/main">
               <a:ext uri="{FF2B5EF4-FFF2-40B4-BE49-F238E27FC236}">
-                <a16:creationId xmlns:a16="http://schemas.microsoft.com/office/drawing/2014/main" id="{B3A5C3F6-EDCC-4A45-82CC-7DF3E0A49D63}"/>
+                <a16:creationId xmlns:a16="http://schemas.microsoft.com/office/drawing/2014/main" id="{086CB6A7-5C46-4B04-90A2-360BC4BA3001}"/>
               </a:ext>
             </a:extLst>
           </p:cNvPr>
@@ -21433,7 +21433,7 @@
           <p:cNvPr id="23" name="">
             <a:extLst xmlns:a="http://schemas.openxmlformats.org/drawingml/2006/main">
               <a:ext uri="{FF2B5EF4-FFF2-40B4-BE49-F238E27FC236}">
-                <a16:creationId xmlns:a16="http://schemas.microsoft.com/office/drawing/2014/main" id="{EE12F20C-A454-42C8-B86E-B08E8B765148}"/>
+                <a16:creationId xmlns:a16="http://schemas.microsoft.com/office/drawing/2014/main" id="{0B57FDE3-C099-4EB5-8056-E729936F25C4}"/>
               </a:ext>
             </a:extLst>
           </p:cNvPr>
@@ -21491,7 +21491,7 @@
           <p:cNvPr id="24" name="">
             <a:extLst xmlns:a="http://schemas.openxmlformats.org/drawingml/2006/main">
               <a:ext uri="{FF2B5EF4-FFF2-40B4-BE49-F238E27FC236}">
-                <a16:creationId xmlns:a16="http://schemas.microsoft.com/office/drawing/2014/main" id="{9E61305A-6614-40D2-9C95-B8DA44D32564}"/>
+                <a16:creationId xmlns:a16="http://schemas.microsoft.com/office/drawing/2014/main" id="{F241C912-4B31-4E87-A31F-DE0FE59F1BAA}"/>
               </a:ext>
             </a:extLst>
           </p:cNvPr>
@@ -21566,7 +21566,7 @@
           <p:cNvPr id="25" name="">
             <a:extLst xmlns:a="http://schemas.openxmlformats.org/drawingml/2006/main">
               <a:ext uri="{FF2B5EF4-FFF2-40B4-BE49-F238E27FC236}">
-                <a16:creationId xmlns:a16="http://schemas.microsoft.com/office/drawing/2014/main" id="{0F52EAD7-4188-4355-98CB-590C7E8C9139}"/>
+                <a16:creationId xmlns:a16="http://schemas.microsoft.com/office/drawing/2014/main" id="{CDD78B5E-3775-47BA-BFE9-BBEE1C03774E}"/>
               </a:ext>
             </a:extLst>
           </p:cNvPr>
@@ -21601,7 +21601,7 @@
           <p:cNvPr id="26" name="">
             <a:extLst xmlns:a="http://schemas.openxmlformats.org/drawingml/2006/main">
               <a:ext uri="{FF2B5EF4-FFF2-40B4-BE49-F238E27FC236}">
-                <a16:creationId xmlns:a16="http://schemas.microsoft.com/office/drawing/2014/main" id="{7EDF99CB-0F75-467C-9FBC-39227244177E}"/>
+                <a16:creationId xmlns:a16="http://schemas.microsoft.com/office/drawing/2014/main" id="{0F9F2749-492D-4CA0-BF28-A6FDA3C1A4C3}"/>
               </a:ext>
             </a:extLst>
           </p:cNvPr>
@@ -21636,7 +21636,7 @@
           <p:cNvPr id="27" name="">
             <a:extLst xmlns:a="http://schemas.openxmlformats.org/drawingml/2006/main">
               <a:ext uri="{FF2B5EF4-FFF2-40B4-BE49-F238E27FC236}">
-                <a16:creationId xmlns:a16="http://schemas.microsoft.com/office/drawing/2014/main" id="{90F96437-348F-4A86-AB7A-2B3D01785393}"/>
+                <a16:creationId xmlns:a16="http://schemas.microsoft.com/office/drawing/2014/main" id="{48256A6B-EFAA-4D80-BB3C-0313C2C5707C}"/>
               </a:ext>
             </a:extLst>
           </p:cNvPr>
@@ -21690,7 +21690,7 @@
           <p:cNvPr id="28" name="">
             <a:extLst xmlns:a="http://schemas.openxmlformats.org/drawingml/2006/main">
               <a:ext uri="{FF2B5EF4-FFF2-40B4-BE49-F238E27FC236}">
-                <a16:creationId xmlns:a16="http://schemas.microsoft.com/office/drawing/2014/main" id="{B3B04DFC-AA15-41AE-98E8-855CB744CA66}"/>
+                <a16:creationId xmlns:a16="http://schemas.microsoft.com/office/drawing/2014/main" id="{3B8E8555-6EAA-42C0-B18D-67B65517B887}"/>
               </a:ext>
             </a:extLst>
           </p:cNvPr>
@@ -21748,7 +21748,7 @@
           <p:cNvPr id="29" name="">
             <a:extLst xmlns:a="http://schemas.openxmlformats.org/drawingml/2006/main">
               <a:ext uri="{FF2B5EF4-FFF2-40B4-BE49-F238E27FC236}">
-                <a16:creationId xmlns:a16="http://schemas.microsoft.com/office/drawing/2014/main" id="{7F273D6A-DE7A-435C-A7D1-5BBDB6BFB533}"/>
+                <a16:creationId xmlns:a16="http://schemas.microsoft.com/office/drawing/2014/main" id="{1459E4BB-CB19-4015-9514-D65C9C51DD2B}"/>
               </a:ext>
             </a:extLst>
           </p:cNvPr>
@@ -21823,7 +21823,7 @@
           <p:cNvPr id="30" name="">
             <a:extLst xmlns:a="http://schemas.openxmlformats.org/drawingml/2006/main">
               <a:ext uri="{FF2B5EF4-FFF2-40B4-BE49-F238E27FC236}">
-                <a16:creationId xmlns:a16="http://schemas.microsoft.com/office/drawing/2014/main" id="{DF5A4458-3C84-4D3E-B6B2-EBF9E0DA2526}"/>
+                <a16:creationId xmlns:a16="http://schemas.microsoft.com/office/drawing/2014/main" id="{691D5B5B-A94D-4963-B6C8-45EB3791022F}"/>
               </a:ext>
             </a:extLst>
           </p:cNvPr>
@@ -21858,7 +21858,7 @@
           <p:cNvPr id="31" name="">
             <a:extLst xmlns:a="http://schemas.openxmlformats.org/drawingml/2006/main">
               <a:ext uri="{FF2B5EF4-FFF2-40B4-BE49-F238E27FC236}">
-                <a16:creationId xmlns:a16="http://schemas.microsoft.com/office/drawing/2014/main" id="{E2C3E8A3-C1C8-41B4-BCC0-AFA5CAAB7404}"/>
+                <a16:creationId xmlns:a16="http://schemas.microsoft.com/office/drawing/2014/main" id="{204E33DA-B886-4A62-93FB-2F760807E911}"/>
               </a:ext>
             </a:extLst>
           </p:cNvPr>
@@ -21893,7 +21893,7 @@
           <p:cNvPr id="32" name="">
             <a:extLst xmlns:a="http://schemas.openxmlformats.org/drawingml/2006/main">
               <a:ext uri="{FF2B5EF4-FFF2-40B4-BE49-F238E27FC236}">
-                <a16:creationId xmlns:a16="http://schemas.microsoft.com/office/drawing/2014/main" id="{7B464AED-D9C2-4BF4-A341-D70F1846478D}"/>
+                <a16:creationId xmlns:a16="http://schemas.microsoft.com/office/drawing/2014/main" id="{19848CE3-0AEC-4F6C-B243-F9F9A66387C8}"/>
               </a:ext>
             </a:extLst>
           </p:cNvPr>
@@ -21947,7 +21947,7 @@
           <p:cNvPr id="33" name="">
             <a:extLst xmlns:a="http://schemas.openxmlformats.org/drawingml/2006/main">
               <a:ext uri="{FF2B5EF4-FFF2-40B4-BE49-F238E27FC236}">
-                <a16:creationId xmlns:a16="http://schemas.microsoft.com/office/drawing/2014/main" id="{2748FC99-D7C4-4754-9258-9CD18AB3657B}"/>
+                <a16:creationId xmlns:a16="http://schemas.microsoft.com/office/drawing/2014/main" id="{3EC4C30C-8D2C-4196-830F-05D970703F1D}"/>
               </a:ext>
             </a:extLst>
           </p:cNvPr>
@@ -22005,7 +22005,7 @@
           <p:cNvPr id="34" name="">
             <a:extLst xmlns:a="http://schemas.openxmlformats.org/drawingml/2006/main">
               <a:ext uri="{FF2B5EF4-FFF2-40B4-BE49-F238E27FC236}">
-                <a16:creationId xmlns:a16="http://schemas.microsoft.com/office/drawing/2014/main" id="{2CD6B731-E7FA-40F1-B205-4336C1CAC185}"/>
+                <a16:creationId xmlns:a16="http://schemas.microsoft.com/office/drawing/2014/main" id="{EEDBCF0A-380B-4E95-A37A-42A08DA8D1D3}"/>
               </a:ext>
             </a:extLst>
           </p:cNvPr>
@@ -22080,7 +22080,7 @@
           <p:cNvPr id="35" name="">
             <a:extLst xmlns:a="http://schemas.openxmlformats.org/drawingml/2006/main">
               <a:ext uri="{FF2B5EF4-FFF2-40B4-BE49-F238E27FC236}">
-                <a16:creationId xmlns:a16="http://schemas.microsoft.com/office/drawing/2014/main" id="{E13B7440-C02F-4EC7-8EFD-189C62192BA5}"/>
+                <a16:creationId xmlns:a16="http://schemas.microsoft.com/office/drawing/2014/main" id="{22CD506D-F641-41DD-88DC-FCA00E9D8611}"/>
               </a:ext>
             </a:extLst>
           </p:cNvPr>
@@ -22115,7 +22115,7 @@
           <p:cNvPr id="36" name="">
             <a:extLst xmlns:a="http://schemas.openxmlformats.org/drawingml/2006/main">
               <a:ext uri="{FF2B5EF4-FFF2-40B4-BE49-F238E27FC236}">
-                <a16:creationId xmlns:a16="http://schemas.microsoft.com/office/drawing/2014/main" id="{BA543EF9-5C5B-4C79-B6D3-4D987E29399B}"/>
+                <a16:creationId xmlns:a16="http://schemas.microsoft.com/office/drawing/2014/main" id="{5920AE66-3884-451B-8F9D-1BAB4E3C3A2E}"/>
               </a:ext>
             </a:extLst>
           </p:cNvPr>
@@ -22150,7 +22150,7 @@
           <p:cNvPr id="37" name="">
             <a:extLst xmlns:a="http://schemas.openxmlformats.org/drawingml/2006/main">
               <a:ext uri="{FF2B5EF4-FFF2-40B4-BE49-F238E27FC236}">
-                <a16:creationId xmlns:a16="http://schemas.microsoft.com/office/drawing/2014/main" id="{5AD0FC12-FFBF-4E35-BA98-15E83B08762A}"/>
+                <a16:creationId xmlns:a16="http://schemas.microsoft.com/office/drawing/2014/main" id="{15403CA1-32C6-463B-9507-998239D9E13A}"/>
               </a:ext>
             </a:extLst>
           </p:cNvPr>
@@ -22204,7 +22204,7 @@
           <p:cNvPr id="38" name="">
             <a:extLst xmlns:a="http://schemas.openxmlformats.org/drawingml/2006/main">
               <a:ext uri="{FF2B5EF4-FFF2-40B4-BE49-F238E27FC236}">
-                <a16:creationId xmlns:a16="http://schemas.microsoft.com/office/drawing/2014/main" id="{89C290EC-621D-43B9-82CD-1E99EF6B652C}"/>
+                <a16:creationId xmlns:a16="http://schemas.microsoft.com/office/drawing/2014/main" id="{6F79E876-D539-4D5F-B7C4-42359F3752E2}"/>
               </a:ext>
             </a:extLst>
           </p:cNvPr>
@@ -22262,7 +22262,7 @@
           <p:cNvPr id="39" name="">
             <a:extLst xmlns:a="http://schemas.openxmlformats.org/drawingml/2006/main">
               <a:ext uri="{FF2B5EF4-FFF2-40B4-BE49-F238E27FC236}">
-                <a16:creationId xmlns:a16="http://schemas.microsoft.com/office/drawing/2014/main" id="{31F8EA1D-81CF-4441-A188-78D82294DE75}"/>
+                <a16:creationId xmlns:a16="http://schemas.microsoft.com/office/drawing/2014/main" id="{6562B66C-F791-416F-90F6-C51F50814C9F}"/>
               </a:ext>
             </a:extLst>
           </p:cNvPr>
@@ -22320,7 +22320,7 @@
           <p:cNvPr id="40" name="">
             <a:extLst xmlns:a="http://schemas.openxmlformats.org/drawingml/2006/main">
               <a:ext uri="{FF2B5EF4-FFF2-40B4-BE49-F238E27FC236}">
-                <a16:creationId xmlns:a16="http://schemas.microsoft.com/office/drawing/2014/main" id="{4C545E09-4AD1-438E-9542-643FABD75D0B}"/>
+                <a16:creationId xmlns:a16="http://schemas.microsoft.com/office/drawing/2014/main" id="{7E6AB907-563F-416C-81BC-7A1C2637B8C4}"/>
               </a:ext>
             </a:extLst>
           </p:cNvPr>
@@ -22355,7 +22355,7 @@
           <p:cNvPr id="41" name="">
             <a:extLst xmlns:a="http://schemas.openxmlformats.org/drawingml/2006/main">
               <a:ext uri="{FF2B5EF4-FFF2-40B4-BE49-F238E27FC236}">
-                <a16:creationId xmlns:a16="http://schemas.microsoft.com/office/drawing/2014/main" id="{69EF7A7C-95DE-4F52-847A-EB7E661CAAC5}"/>
+                <a16:creationId xmlns:a16="http://schemas.microsoft.com/office/drawing/2014/main" id="{A4B501BC-938D-4FCB-B152-8B3100163BAB}"/>
               </a:ext>
             </a:extLst>
           </p:cNvPr>
@@ -22390,7 +22390,7 @@
           <p:cNvPr id="42" name="">
             <a:extLst xmlns:a="http://schemas.openxmlformats.org/drawingml/2006/main">
               <a:ext uri="{FF2B5EF4-FFF2-40B4-BE49-F238E27FC236}">
-                <a16:creationId xmlns:a16="http://schemas.microsoft.com/office/drawing/2014/main" id="{1F038F2F-B4FA-4608-A2D8-E66C9EF52C67}"/>
+                <a16:creationId xmlns:a16="http://schemas.microsoft.com/office/drawing/2014/main" id="{FF491E50-0B03-4462-981B-23E38BFCF817}"/>
               </a:ext>
             </a:extLst>
           </p:cNvPr>
@@ -22444,7 +22444,7 @@
           <p:cNvPr id="43" name="">
             <a:extLst xmlns:a="http://schemas.openxmlformats.org/drawingml/2006/main">
               <a:ext uri="{FF2B5EF4-FFF2-40B4-BE49-F238E27FC236}">
-                <a16:creationId xmlns:a16="http://schemas.microsoft.com/office/drawing/2014/main" id="{6155B6F0-D65E-4B50-9824-C1AE8B412628}"/>
+                <a16:creationId xmlns:a16="http://schemas.microsoft.com/office/drawing/2014/main" id="{5464E2BA-EBB5-4466-B5B0-CD83CDE87DF7}"/>
               </a:ext>
             </a:extLst>
           </p:cNvPr>
@@ -22502,7 +22502,7 @@
           <p:cNvPr id="44" name="">
             <a:extLst xmlns:a="http://schemas.openxmlformats.org/drawingml/2006/main">
               <a:ext uri="{FF2B5EF4-FFF2-40B4-BE49-F238E27FC236}">
-                <a16:creationId xmlns:a16="http://schemas.microsoft.com/office/drawing/2014/main" id="{90F93CD9-0BCD-4873-905D-3CED4F033412}"/>
+                <a16:creationId xmlns:a16="http://schemas.microsoft.com/office/drawing/2014/main" id="{63920550-CEED-4767-BF7F-E82E102E718B}"/>
               </a:ext>
             </a:extLst>
           </p:cNvPr>
@@ -22577,7 +22577,7 @@
           <p:cNvPr id="45" name="">
             <a:extLst xmlns:a="http://schemas.openxmlformats.org/drawingml/2006/main">
               <a:ext uri="{FF2B5EF4-FFF2-40B4-BE49-F238E27FC236}">
-                <a16:creationId xmlns:a16="http://schemas.microsoft.com/office/drawing/2014/main" id="{C51802D3-252C-48B9-AC56-2390EEA8AB1C}"/>
+                <a16:creationId xmlns:a16="http://schemas.microsoft.com/office/drawing/2014/main" id="{0C10FABC-B120-4C5A-97C7-720D26E62A0A}"/>
               </a:ext>
             </a:extLst>
           </p:cNvPr>
@@ -22612,7 +22612,7 @@
           <p:cNvPr id="46" name="">
             <a:extLst xmlns:a="http://schemas.openxmlformats.org/drawingml/2006/main">
               <a:ext uri="{FF2B5EF4-FFF2-40B4-BE49-F238E27FC236}">
-                <a16:creationId xmlns:a16="http://schemas.microsoft.com/office/drawing/2014/main" id="{B19B87B3-76FF-4BF9-9697-A0E29DB9A260}"/>
+                <a16:creationId xmlns:a16="http://schemas.microsoft.com/office/drawing/2014/main" id="{7F875B4C-A895-41E0-BB9F-DC533D761AAD}"/>
               </a:ext>
             </a:extLst>
           </p:cNvPr>
@@ -22647,7 +22647,7 @@
           <p:cNvPr id="47" name="">
             <a:extLst xmlns:a="http://schemas.openxmlformats.org/drawingml/2006/main">
               <a:ext uri="{FF2B5EF4-FFF2-40B4-BE49-F238E27FC236}">
-                <a16:creationId xmlns:a16="http://schemas.microsoft.com/office/drawing/2014/main" id="{7ACD2C6D-F892-4900-8756-2FA9B9660ADC}"/>
+                <a16:creationId xmlns:a16="http://schemas.microsoft.com/office/drawing/2014/main" id="{072048F9-B990-4644-BC8A-9AA5D1C207AB}"/>
               </a:ext>
             </a:extLst>
           </p:cNvPr>
@@ -22682,7 +22682,7 @@
           <p:cNvPr id="48" name="">
             <a:extLst xmlns:a="http://schemas.openxmlformats.org/drawingml/2006/main">
               <a:ext uri="{FF2B5EF4-FFF2-40B4-BE49-F238E27FC236}">
-                <a16:creationId xmlns:a16="http://schemas.microsoft.com/office/drawing/2014/main" id="{27E47690-C0D2-4910-9714-E25213BFECA8}"/>
+                <a16:creationId xmlns:a16="http://schemas.microsoft.com/office/drawing/2014/main" id="{83C34EE9-1F43-4332-A656-7B233F57CB75}"/>
               </a:ext>
             </a:extLst>
           </p:cNvPr>
@@ -22717,7 +22717,7 @@
           <p:cNvPr id="49" name="">
             <a:extLst xmlns:a="http://schemas.openxmlformats.org/drawingml/2006/main">
               <a:ext uri="{FF2B5EF4-FFF2-40B4-BE49-F238E27FC236}">
-                <a16:creationId xmlns:a16="http://schemas.microsoft.com/office/drawing/2014/main" id="{E157E7E5-F9FC-4A27-94F5-EDC08477E230}"/>
+                <a16:creationId xmlns:a16="http://schemas.microsoft.com/office/drawing/2014/main" id="{9CBEC728-ED42-4A82-8345-9552D86192EF}"/>
               </a:ext>
             </a:extLst>
           </p:cNvPr>
@@ -22752,7 +22752,7 @@
           <p:cNvPr id="50" name="">
             <a:extLst xmlns:a="http://schemas.openxmlformats.org/drawingml/2006/main">
               <a:ext uri="{FF2B5EF4-FFF2-40B4-BE49-F238E27FC236}">
-                <a16:creationId xmlns:a16="http://schemas.microsoft.com/office/drawing/2014/main" id="{1D9C8354-5021-464F-A660-F31A803C2987}"/>
+                <a16:creationId xmlns:a16="http://schemas.microsoft.com/office/drawing/2014/main" id="{5A2E8AFC-3793-4E34-A4D2-43D1F3E17A55}"/>
               </a:ext>
             </a:extLst>
           </p:cNvPr>
@@ -22787,7 +22787,7 @@
           <p:cNvPr id="51" name="">
             <a:extLst xmlns:a="http://schemas.openxmlformats.org/drawingml/2006/main">
               <a:ext uri="{FF2B5EF4-FFF2-40B4-BE49-F238E27FC236}">
-                <a16:creationId xmlns:a16="http://schemas.microsoft.com/office/drawing/2014/main" id="{8F2FB8E5-F8B2-4158-B10F-B300C51EEE63}"/>
+                <a16:creationId xmlns:a16="http://schemas.microsoft.com/office/drawing/2014/main" id="{010F8844-770E-4319-8906-71A3430E4BAA}"/>
               </a:ext>
             </a:extLst>
           </p:cNvPr>
@@ -22845,7 +22845,7 @@
           <p:cNvPr id="52" name="">
             <a:extLst xmlns:a="http://schemas.openxmlformats.org/drawingml/2006/main">
               <a:ext uri="{FF2B5EF4-FFF2-40B4-BE49-F238E27FC236}">
-                <a16:creationId xmlns:a16="http://schemas.microsoft.com/office/drawing/2014/main" id="{CCED1B1E-1670-4FFA-AC21-417B0C173E75}"/>
+                <a16:creationId xmlns:a16="http://schemas.microsoft.com/office/drawing/2014/main" id="{DFBEF597-C654-4149-AAF3-343200BE5AFD}"/>
               </a:ext>
             </a:extLst>
           </p:cNvPr>
@@ -22880,7 +22880,7 @@
           <p:cNvPr id="53" name="">
             <a:extLst xmlns:a="http://schemas.openxmlformats.org/drawingml/2006/main">
               <a:ext uri="{FF2B5EF4-FFF2-40B4-BE49-F238E27FC236}">
-                <a16:creationId xmlns:a16="http://schemas.microsoft.com/office/drawing/2014/main" id="{791E1527-6CF3-483D-9FF6-AD89EC0895C6}"/>
+                <a16:creationId xmlns:a16="http://schemas.microsoft.com/office/drawing/2014/main" id="{4BC6D6D1-AD32-4568-A423-6BEBD0013DA4}"/>
               </a:ext>
             </a:extLst>
           </p:cNvPr>
@@ -22938,7 +22938,7 @@
           <p:cNvPr id="54" name="">
             <a:extLst xmlns:a="http://schemas.openxmlformats.org/drawingml/2006/main">
               <a:ext uri="{FF2B5EF4-FFF2-40B4-BE49-F238E27FC236}">
-                <a16:creationId xmlns:a16="http://schemas.microsoft.com/office/drawing/2014/main" id="{8A63AEAE-886B-4F5E-9C3B-ECDE5EA059D8}"/>
+                <a16:creationId xmlns:a16="http://schemas.microsoft.com/office/drawing/2014/main" id="{F9909AA2-985E-49C0-BA79-6764180ADD0A}"/>
               </a:ext>
             </a:extLst>
           </p:cNvPr>
@@ -22975,7 +22975,7 @@
           <p:cNvPr id="55" name="">
             <a:extLst xmlns:a="http://schemas.openxmlformats.org/drawingml/2006/main">
               <a:ext uri="{FF2B5EF4-FFF2-40B4-BE49-F238E27FC236}">
-                <a16:creationId xmlns:a16="http://schemas.microsoft.com/office/drawing/2014/main" id="{8F14BB60-1E74-4761-BC13-C88D6616FE9F}"/>
+                <a16:creationId xmlns:a16="http://schemas.microsoft.com/office/drawing/2014/main" id="{639E0E94-927C-435B-86AD-C11666BEDDBB}"/>
               </a:ext>
             </a:extLst>
           </p:cNvPr>
@@ -23010,7 +23010,7 @@
           <p:cNvPr id="56" name="">
             <a:extLst xmlns:a="http://schemas.openxmlformats.org/drawingml/2006/main">
               <a:ext uri="{FF2B5EF4-FFF2-40B4-BE49-F238E27FC236}">
-                <a16:creationId xmlns:a16="http://schemas.microsoft.com/office/drawing/2014/main" id="{669E1434-AF0F-4C55-9AC5-15106BDE6303}"/>
+                <a16:creationId xmlns:a16="http://schemas.microsoft.com/office/drawing/2014/main" id="{A6425D93-FF10-4AE7-9CC7-8B39AC38B3C5}"/>
               </a:ext>
             </a:extLst>
           </p:cNvPr>
@@ -23068,7 +23068,7 @@
           <p:cNvPr id="57" name="">
             <a:extLst xmlns:a="http://schemas.openxmlformats.org/drawingml/2006/main">
               <a:ext uri="{FF2B5EF4-FFF2-40B4-BE49-F238E27FC236}">
-                <a16:creationId xmlns:a16="http://schemas.microsoft.com/office/drawing/2014/main" id="{B0A40E9D-093C-4F79-95E1-46E08596A736}"/>
+                <a16:creationId xmlns:a16="http://schemas.microsoft.com/office/drawing/2014/main" id="{D57EEF40-D496-482E-A658-BCFC7E139D7A}"/>
               </a:ext>
             </a:extLst>
           </p:cNvPr>
@@ -23124,7 +23124,7 @@
     </p:spTree>
     <p:extLst>
       <p:ext uri="{BB962C8B-B14F-4D97-AF65-F5344CB8AC3E}">
-        <p14:creationId xmlns:p14="http://schemas.microsoft.com/office/powerpoint/2010/main" val="1452701621"/>
+        <p14:creationId xmlns:p14="http://schemas.microsoft.com/office/powerpoint/2010/main" val="1286943054"/>
       </p:ext>
     </p:extLst>
   </p:cSld>
@@ -23155,7 +23155,7 @@
           <p:cNvPr id="1" name="Slide Number Placeholder 5">
             <a:extLst xmlns:a="http://schemas.openxmlformats.org/drawingml/2006/main">
               <a:ext uri="{FF2B5EF4-FFF2-40B4-BE49-F238E27FC236}">
-                <a16:creationId xmlns:a16="http://schemas.microsoft.com/office/drawing/2014/main" id="{821508BF-91E3-4E78-84B3-DCBD229C8660}"/>
+                <a16:creationId xmlns:a16="http://schemas.microsoft.com/office/drawing/2014/main" id="{11DAD1DA-DD27-4C25-AFB7-E057ACC56EC0}"/>
               </a:ext>
             </a:extLst>
           </p:cNvPr>
@@ -23191,7 +23191,7 @@
           <p:nvPr/>
         </p:nvPicPr>
         <p:blipFill>
-          <a:blip xmlns:r="http://schemas.openxmlformats.org/officeDocument/2006/relationships" xmlns:a="http://schemas.openxmlformats.org/drawingml/2006/main" r:embed="R7dc9c9e4be7b4005"/>
+          <a:blip xmlns:r="http://schemas.openxmlformats.org/officeDocument/2006/relationships" xmlns:a="http://schemas.openxmlformats.org/drawingml/2006/main" r:embed="R77907492fdcc4418"/>
           <a:srcRect xmlns:a="http://schemas.openxmlformats.org/drawingml/2006/main" l="0" t="21875" r="0" b="21875"/>
           <a:stretch xmlns:a="http://schemas.openxmlformats.org/drawingml/2006/main">
             <a:fillRect l="0" t="0" r="0" b="0"/>
@@ -23212,7 +23212,7 @@
           <p:cNvPr id="3" name="">
             <a:extLst xmlns:a="http://schemas.openxmlformats.org/drawingml/2006/main">
               <a:ext uri="{FF2B5EF4-FFF2-40B4-BE49-F238E27FC236}">
-                <a16:creationId xmlns:a16="http://schemas.microsoft.com/office/drawing/2014/main" id="{1EE6513C-032F-4295-83E4-6A5527FA59F0}"/>
+                <a16:creationId xmlns:a16="http://schemas.microsoft.com/office/drawing/2014/main" id="{EBCECFEB-BAE1-4047-A719-F9D245A3F623}"/>
               </a:ext>
             </a:extLst>
           </p:cNvPr>
@@ -23247,7 +23247,7 @@
           <p:cNvPr id="4" name="">
             <a:extLst xmlns:a="http://schemas.openxmlformats.org/drawingml/2006/main">
               <a:ext uri="{FF2B5EF4-FFF2-40B4-BE49-F238E27FC236}">
-                <a16:creationId xmlns:a16="http://schemas.microsoft.com/office/drawing/2014/main" id="{78610F57-B1BD-4FCB-AC6F-D02DD75C015E}"/>
+                <a16:creationId xmlns:a16="http://schemas.microsoft.com/office/drawing/2014/main" id="{E9518692-F04D-44E7-BB72-FE49ADE53CE2}"/>
               </a:ext>
             </a:extLst>
           </p:cNvPr>
@@ -23282,7 +23282,7 @@
           <p:cNvPr id="5" name="">
             <a:extLst xmlns:a="http://schemas.openxmlformats.org/drawingml/2006/main">
               <a:ext uri="{FF2B5EF4-FFF2-40B4-BE49-F238E27FC236}">
-                <a16:creationId xmlns:a16="http://schemas.microsoft.com/office/drawing/2014/main" id="{463E0690-8E42-47C6-AA8A-9A84601ED919}"/>
+                <a16:creationId xmlns:a16="http://schemas.microsoft.com/office/drawing/2014/main" id="{60C96497-32CB-46EB-9358-07ED7C62C24A}"/>
               </a:ext>
             </a:extLst>
           </p:cNvPr>
@@ -23319,7 +23319,7 @@
           <p:cNvPr id="6" name="">
             <a:extLst xmlns:a="http://schemas.openxmlformats.org/drawingml/2006/main">
               <a:ext uri="{FF2B5EF4-FFF2-40B4-BE49-F238E27FC236}">
-                <a16:creationId xmlns:a16="http://schemas.microsoft.com/office/drawing/2014/main" id="{26EE496C-91EE-4507-BA41-620A502A6B57}"/>
+                <a16:creationId xmlns:a16="http://schemas.microsoft.com/office/drawing/2014/main" id="{42EB4150-8A37-4902-95EC-C4AB2C969BDC}"/>
               </a:ext>
             </a:extLst>
           </p:cNvPr>
@@ -23356,7 +23356,7 @@
           <p:cNvPr id="7" name="">
             <a:extLst xmlns:a="http://schemas.openxmlformats.org/drawingml/2006/main">
               <a:ext uri="{FF2B5EF4-FFF2-40B4-BE49-F238E27FC236}">
-                <a16:creationId xmlns:a16="http://schemas.microsoft.com/office/drawing/2014/main" id="{1E6E88FD-CFDD-4533-A24B-E419EFE2301C}"/>
+                <a16:creationId xmlns:a16="http://schemas.microsoft.com/office/drawing/2014/main" id="{D63694F7-3E9C-4AA2-A102-2D503E776B01}"/>
               </a:ext>
             </a:extLst>
           </p:cNvPr>
@@ -23393,7 +23393,7 @@
           <p:cNvPr id="8" name="">
             <a:extLst xmlns:a="http://schemas.openxmlformats.org/drawingml/2006/main">
               <a:ext uri="{FF2B5EF4-FFF2-40B4-BE49-F238E27FC236}">
-                <a16:creationId xmlns:a16="http://schemas.microsoft.com/office/drawing/2014/main" id="{BD002ACF-D3D4-4690-94C5-BC24553992B2}"/>
+                <a16:creationId xmlns:a16="http://schemas.microsoft.com/office/drawing/2014/main" id="{44050DC5-57FF-41A4-9920-F1C0141533EB}"/>
               </a:ext>
             </a:extLst>
           </p:cNvPr>
@@ -23430,7 +23430,7 @@
           <p:cNvPr id="9" name="">
             <a:extLst xmlns:a="http://schemas.openxmlformats.org/drawingml/2006/main">
               <a:ext uri="{FF2B5EF4-FFF2-40B4-BE49-F238E27FC236}">
-                <a16:creationId xmlns:a16="http://schemas.microsoft.com/office/drawing/2014/main" id="{9CACEF77-A55B-4409-978E-7009E67CE1A6}"/>
+                <a16:creationId xmlns:a16="http://schemas.microsoft.com/office/drawing/2014/main" id="{03A505DE-4FCF-4EEF-96BB-22D83BEC3FCC}"/>
               </a:ext>
             </a:extLst>
           </p:cNvPr>
@@ -23488,7 +23488,7 @@
           <p:cNvPr id="10" name="">
             <a:extLst xmlns:a="http://schemas.openxmlformats.org/drawingml/2006/main">
               <a:ext uri="{FF2B5EF4-FFF2-40B4-BE49-F238E27FC236}">
-                <a16:creationId xmlns:a16="http://schemas.microsoft.com/office/drawing/2014/main" id="{8444F6E1-78AA-4AC4-B5C0-B09CC1FCB835}"/>
+                <a16:creationId xmlns:a16="http://schemas.microsoft.com/office/drawing/2014/main" id="{4E91D3B5-613F-4AD2-9B49-6BD7670BB379}"/>
               </a:ext>
             </a:extLst>
           </p:cNvPr>
@@ -23546,7 +23546,7 @@
           <p:cNvPr id="11" name="">
             <a:extLst xmlns:a="http://schemas.openxmlformats.org/drawingml/2006/main">
               <a:ext uri="{FF2B5EF4-FFF2-40B4-BE49-F238E27FC236}">
-                <a16:creationId xmlns:a16="http://schemas.microsoft.com/office/drawing/2014/main" id="{732F21EA-99B6-41B1-81E7-AFD1A955B794}"/>
+                <a16:creationId xmlns:a16="http://schemas.microsoft.com/office/drawing/2014/main" id="{D3CFDAC5-9954-489C-9D35-235ECA3527EB}"/>
               </a:ext>
             </a:extLst>
           </p:cNvPr>
@@ -23581,7 +23581,7 @@
           <p:cNvPr id="12" name="">
             <a:extLst xmlns:a="http://schemas.openxmlformats.org/drawingml/2006/main">
               <a:ext uri="{FF2B5EF4-FFF2-40B4-BE49-F238E27FC236}">
-                <a16:creationId xmlns:a16="http://schemas.microsoft.com/office/drawing/2014/main" id="{B0989534-8783-49BD-A476-01BB650091C9}"/>
+                <a16:creationId xmlns:a16="http://schemas.microsoft.com/office/drawing/2014/main" id="{8CE8CD85-8AB8-49DF-8AFC-FE6F0B2AC5DC}"/>
               </a:ext>
             </a:extLst>
           </p:cNvPr>
@@ -23614,7 +23614,7 @@
           <p:cNvPr id="13" name="">
             <a:extLst xmlns:a="http://schemas.openxmlformats.org/drawingml/2006/main">
               <a:ext uri="{FF2B5EF4-FFF2-40B4-BE49-F238E27FC236}">
-                <a16:creationId xmlns:a16="http://schemas.microsoft.com/office/drawing/2014/main" id="{470C0455-423A-4383-8A6C-3CB4C01E4D91}"/>
+                <a16:creationId xmlns:a16="http://schemas.microsoft.com/office/drawing/2014/main" id="{61CAC047-80AF-43EC-9139-1ACB1168DF1F}"/>
               </a:ext>
             </a:extLst>
           </p:cNvPr>
@@ -23689,7 +23689,7 @@
           <p:cNvPr id="14" name="">
             <a:extLst xmlns:a="http://schemas.openxmlformats.org/drawingml/2006/main">
               <a:ext uri="{FF2B5EF4-FFF2-40B4-BE49-F238E27FC236}">
-                <a16:creationId xmlns:a16="http://schemas.microsoft.com/office/drawing/2014/main" id="{BC2E87CE-2484-4BFF-9C41-C6FADDF8F642}"/>
+                <a16:creationId xmlns:a16="http://schemas.microsoft.com/office/drawing/2014/main" id="{9C4FD56F-5E58-4873-8A6C-32828A1DF110}"/>
               </a:ext>
             </a:extLst>
           </p:cNvPr>
@@ -23724,7 +23724,7 @@
           <p:cNvPr id="15" name="">
             <a:extLst xmlns:a="http://schemas.openxmlformats.org/drawingml/2006/main">
               <a:ext uri="{FF2B5EF4-FFF2-40B4-BE49-F238E27FC236}">
-                <a16:creationId xmlns:a16="http://schemas.microsoft.com/office/drawing/2014/main" id="{201E9DE1-C062-47E1-8FF6-C3585E4097B4}"/>
+                <a16:creationId xmlns:a16="http://schemas.microsoft.com/office/drawing/2014/main" id="{994627BF-470D-4FD0-B8D2-2E7963A4E651}"/>
               </a:ext>
             </a:extLst>
           </p:cNvPr>
@@ -23759,7 +23759,7 @@
           <p:cNvPr id="16" name="">
             <a:extLst xmlns:a="http://schemas.openxmlformats.org/drawingml/2006/main">
               <a:ext uri="{FF2B5EF4-FFF2-40B4-BE49-F238E27FC236}">
-                <a16:creationId xmlns:a16="http://schemas.microsoft.com/office/drawing/2014/main" id="{C7A2CDDF-92B8-4B06-A971-3CD0556B6C3F}"/>
+                <a16:creationId xmlns:a16="http://schemas.microsoft.com/office/drawing/2014/main" id="{E0381D60-8070-42BA-A24C-4845B4647092}"/>
               </a:ext>
             </a:extLst>
           </p:cNvPr>
@@ -23817,7 +23817,7 @@
           <p:cNvPr id="17" name="">
             <a:extLst xmlns:a="http://schemas.openxmlformats.org/drawingml/2006/main">
               <a:ext uri="{FF2B5EF4-FFF2-40B4-BE49-F238E27FC236}">
-                <a16:creationId xmlns:a16="http://schemas.microsoft.com/office/drawing/2014/main" id="{212EA124-0C6D-4E82-857A-31208E63C9C2}"/>
+                <a16:creationId xmlns:a16="http://schemas.microsoft.com/office/drawing/2014/main" id="{5393955F-2214-459A-8714-80D95AF4C931}"/>
               </a:ext>
             </a:extLst>
           </p:cNvPr>
@@ -23854,7 +23854,7 @@
           <p:cNvPr id="18" name="">
             <a:extLst xmlns:a="http://schemas.openxmlformats.org/drawingml/2006/main">
               <a:ext uri="{FF2B5EF4-FFF2-40B4-BE49-F238E27FC236}">
-                <a16:creationId xmlns:a16="http://schemas.microsoft.com/office/drawing/2014/main" id="{9EDCD5AF-D9FA-4BCC-9BB9-7390381832D4}"/>
+                <a16:creationId xmlns:a16="http://schemas.microsoft.com/office/drawing/2014/main" id="{C485C26F-7378-49EB-A61F-E0E9BD2D8D00}"/>
               </a:ext>
             </a:extLst>
           </p:cNvPr>
@@ -23889,7 +23889,7 @@
           <p:cNvPr id="19" name="">
             <a:extLst xmlns:a="http://schemas.openxmlformats.org/drawingml/2006/main">
               <a:ext uri="{FF2B5EF4-FFF2-40B4-BE49-F238E27FC236}">
-                <a16:creationId xmlns:a16="http://schemas.microsoft.com/office/drawing/2014/main" id="{8E4B862E-CEA6-40B3-9FA1-E39221F8AA7C}"/>
+                <a16:creationId xmlns:a16="http://schemas.microsoft.com/office/drawing/2014/main" id="{6F42EF5A-98B0-4B88-BEB6-3408FF0BA091}"/>
               </a:ext>
             </a:extLst>
           </p:cNvPr>
@@ -23947,7 +23947,7 @@
           <p:cNvPr id="20" name="">
             <a:extLst xmlns:a="http://schemas.openxmlformats.org/drawingml/2006/main">
               <a:ext uri="{FF2B5EF4-FFF2-40B4-BE49-F238E27FC236}">
-                <a16:creationId xmlns:a16="http://schemas.microsoft.com/office/drawing/2014/main" id="{5F91277C-0396-47B7-ACA6-CB27272B11B7}"/>
+                <a16:creationId xmlns:a16="http://schemas.microsoft.com/office/drawing/2014/main" id="{69E6B4B7-4724-451E-B358-DBBD0F17264B}"/>
               </a:ext>
             </a:extLst>
           </p:cNvPr>
@@ -24039,7 +24039,7 @@
           <p:cNvPr id="21" name="">
             <a:extLst xmlns:a="http://schemas.openxmlformats.org/drawingml/2006/main">
               <a:ext uri="{FF2B5EF4-FFF2-40B4-BE49-F238E27FC236}">
-                <a16:creationId xmlns:a16="http://schemas.microsoft.com/office/drawing/2014/main" id="{91481650-523F-4CF1-AF40-8E32B58DD8D5}"/>
+                <a16:creationId xmlns:a16="http://schemas.microsoft.com/office/drawing/2014/main" id="{932E77E7-F8C6-4E3F-93BE-B27CB3E38190}"/>
               </a:ext>
             </a:extLst>
           </p:cNvPr>
@@ -24076,7 +24076,7 @@
           <p:cNvPr id="22" name="">
             <a:extLst xmlns:a="http://schemas.openxmlformats.org/drawingml/2006/main">
               <a:ext uri="{FF2B5EF4-FFF2-40B4-BE49-F238E27FC236}">
-                <a16:creationId xmlns:a16="http://schemas.microsoft.com/office/drawing/2014/main" id="{B7DC8406-B4A3-4DF4-B589-5289E6D96C76}"/>
+                <a16:creationId xmlns:a16="http://schemas.microsoft.com/office/drawing/2014/main" id="{D1C00CAD-F9FB-45F2-8DF6-15270B4018C6}"/>
               </a:ext>
             </a:extLst>
           </p:cNvPr>
@@ -24111,7 +24111,7 @@
           <p:cNvPr id="23" name="">
             <a:extLst xmlns:a="http://schemas.openxmlformats.org/drawingml/2006/main">
               <a:ext uri="{FF2B5EF4-FFF2-40B4-BE49-F238E27FC236}">
-                <a16:creationId xmlns:a16="http://schemas.microsoft.com/office/drawing/2014/main" id="{E46AEC25-26E8-44AA-89F4-B71921DD7E03}"/>
+                <a16:creationId xmlns:a16="http://schemas.microsoft.com/office/drawing/2014/main" id="{BDF0BA20-C0EC-44CD-9791-0E0AD5FB22FA}"/>
               </a:ext>
             </a:extLst>
           </p:cNvPr>
@@ -24169,7 +24169,7 @@
           <p:cNvPr id="24" name="">
             <a:extLst xmlns:a="http://schemas.openxmlformats.org/drawingml/2006/main">
               <a:ext uri="{FF2B5EF4-FFF2-40B4-BE49-F238E27FC236}">
-                <a16:creationId xmlns:a16="http://schemas.microsoft.com/office/drawing/2014/main" id="{F8E21D70-923A-4588-B711-106DD7E90244}"/>
+                <a16:creationId xmlns:a16="http://schemas.microsoft.com/office/drawing/2014/main" id="{AEA41F58-B439-48AE-AF23-40812F8349E6}"/>
               </a:ext>
             </a:extLst>
           </p:cNvPr>
@@ -24278,7 +24278,7 @@
           <p:cNvPr id="25" name="">
             <a:extLst xmlns:a="http://schemas.openxmlformats.org/drawingml/2006/main">
               <a:ext uri="{FF2B5EF4-FFF2-40B4-BE49-F238E27FC236}">
-                <a16:creationId xmlns:a16="http://schemas.microsoft.com/office/drawing/2014/main" id="{BA86B7A1-CAD8-48D2-A828-0B1EBC83360B}"/>
+                <a16:creationId xmlns:a16="http://schemas.microsoft.com/office/drawing/2014/main" id="{AF3B37D5-E846-4A6A-BFA4-D7F69EF915D8}"/>
               </a:ext>
             </a:extLst>
           </p:cNvPr>
@@ -24311,7 +24311,7 @@
           <p:cNvPr id="26" name="">
             <a:extLst xmlns:a="http://schemas.openxmlformats.org/drawingml/2006/main">
               <a:ext uri="{FF2B5EF4-FFF2-40B4-BE49-F238E27FC236}">
-                <a16:creationId xmlns:a16="http://schemas.microsoft.com/office/drawing/2014/main" id="{4060898C-2D2B-46AA-8E1F-94C100446FDD}"/>
+                <a16:creationId xmlns:a16="http://schemas.microsoft.com/office/drawing/2014/main" id="{FD913233-8FDF-41B7-8506-071476041082}"/>
               </a:ext>
             </a:extLst>
           </p:cNvPr>
@@ -24365,7 +24365,7 @@
           <p:cNvPr id="27" name="">
             <a:extLst xmlns:a="http://schemas.openxmlformats.org/drawingml/2006/main">
               <a:ext uri="{FF2B5EF4-FFF2-40B4-BE49-F238E27FC236}">
-                <a16:creationId xmlns:a16="http://schemas.microsoft.com/office/drawing/2014/main" id="{67E72423-C532-40C2-B81D-1A716F6F203A}"/>
+                <a16:creationId xmlns:a16="http://schemas.microsoft.com/office/drawing/2014/main" id="{8ACAE309-7149-4A2E-BAB1-8D7EBE5EF725}"/>
               </a:ext>
             </a:extLst>
           </p:cNvPr>
@@ -24421,7 +24421,7 @@
     </p:spTree>
     <p:extLst>
       <p:ext uri="{BB962C8B-B14F-4D97-AF65-F5344CB8AC3E}">
-        <p14:creationId xmlns:p14="http://schemas.microsoft.com/office/powerpoint/2010/main" val="808700728"/>
+        <p14:creationId xmlns:p14="http://schemas.microsoft.com/office/powerpoint/2010/main" val="671196923"/>
       </p:ext>
     </p:extLst>
   </p:cSld>
@@ -24452,7 +24452,7 @@
           <p:cNvPr id="1" name="Slide Number Placeholder 5">
             <a:extLst xmlns:a="http://schemas.openxmlformats.org/drawingml/2006/main">
               <a:ext uri="{FF2B5EF4-FFF2-40B4-BE49-F238E27FC236}">
-                <a16:creationId xmlns:a16="http://schemas.microsoft.com/office/drawing/2014/main" id="{821508BF-91E3-4E78-84B3-DCBD229C8660}"/>
+                <a16:creationId xmlns:a16="http://schemas.microsoft.com/office/drawing/2014/main" id="{11DAD1DA-DD27-4C25-AFB7-E057ACC56EC0}"/>
               </a:ext>
             </a:extLst>
           </p:cNvPr>
@@ -24488,7 +24488,7 @@
           <p:nvPr/>
         </p:nvPicPr>
         <p:blipFill>
-          <a:blip xmlns:r="http://schemas.openxmlformats.org/officeDocument/2006/relationships" xmlns:a="http://schemas.openxmlformats.org/drawingml/2006/main" r:embed="R3e61cab364154a35"/>
+          <a:blip xmlns:r="http://schemas.openxmlformats.org/officeDocument/2006/relationships" xmlns:a="http://schemas.openxmlformats.org/drawingml/2006/main" r:embed="R21db6cc0b8e444dd"/>
           <a:srcRect xmlns:a="http://schemas.openxmlformats.org/drawingml/2006/main" l="0" t="21875" r="0" b="21875"/>
           <a:stretch xmlns:a="http://schemas.openxmlformats.org/drawingml/2006/main">
             <a:fillRect l="0" t="0" r="0" b="0"/>
@@ -24509,7 +24509,7 @@
           <p:cNvPr id="3" name="">
             <a:extLst xmlns:a="http://schemas.openxmlformats.org/drawingml/2006/main">
               <a:ext uri="{FF2B5EF4-FFF2-40B4-BE49-F238E27FC236}">
-                <a16:creationId xmlns:a16="http://schemas.microsoft.com/office/drawing/2014/main" id="{656A6253-E556-40BA-BE3F-124296DD255C}"/>
+                <a16:creationId xmlns:a16="http://schemas.microsoft.com/office/drawing/2014/main" id="{37E93583-1522-4598-841A-EB636765C1C5}"/>
               </a:ext>
             </a:extLst>
           </p:cNvPr>
@@ -24544,7 +24544,7 @@
           <p:cNvPr id="4" name="">
             <a:extLst xmlns:a="http://schemas.openxmlformats.org/drawingml/2006/main">
               <a:ext uri="{FF2B5EF4-FFF2-40B4-BE49-F238E27FC236}">
-                <a16:creationId xmlns:a16="http://schemas.microsoft.com/office/drawing/2014/main" id="{468322F4-4ED7-4B36-9FB7-44BE1FBF6FD3}"/>
+                <a16:creationId xmlns:a16="http://schemas.microsoft.com/office/drawing/2014/main" id="{E8A2BD58-47D2-467D-9683-C1A44FFB0F00}"/>
               </a:ext>
             </a:extLst>
           </p:cNvPr>
@@ -24579,7 +24579,7 @@
           <p:cNvPr id="5" name="">
             <a:extLst xmlns:a="http://schemas.openxmlformats.org/drawingml/2006/main">
               <a:ext uri="{FF2B5EF4-FFF2-40B4-BE49-F238E27FC236}">
-                <a16:creationId xmlns:a16="http://schemas.microsoft.com/office/drawing/2014/main" id="{F4C778DD-2938-4232-A16C-EFAE108E43BC}"/>
+                <a16:creationId xmlns:a16="http://schemas.microsoft.com/office/drawing/2014/main" id="{47A7DFB9-1BE4-442F-9611-796DD53EA31B}"/>
               </a:ext>
             </a:extLst>
           </p:cNvPr>
@@ -24616,7 +24616,7 @@
           <p:cNvPr id="6" name="">
             <a:extLst xmlns:a="http://schemas.openxmlformats.org/drawingml/2006/main">
               <a:ext uri="{FF2B5EF4-FFF2-40B4-BE49-F238E27FC236}">
-                <a16:creationId xmlns:a16="http://schemas.microsoft.com/office/drawing/2014/main" id="{B4D58B5F-A4C3-4A19-BC72-89A0C571B4F6}"/>
+                <a16:creationId xmlns:a16="http://schemas.microsoft.com/office/drawing/2014/main" id="{508E146D-526E-46D5-8107-F465A14B4C05}"/>
               </a:ext>
             </a:extLst>
           </p:cNvPr>
@@ -24653,7 +24653,7 @@
           <p:cNvPr id="7" name="">
             <a:extLst xmlns:a="http://schemas.openxmlformats.org/drawingml/2006/main">
               <a:ext uri="{FF2B5EF4-FFF2-40B4-BE49-F238E27FC236}">
-                <a16:creationId xmlns:a16="http://schemas.microsoft.com/office/drawing/2014/main" id="{BED0F2D0-38C7-49AD-B50F-3E68763A0D68}"/>
+                <a16:creationId xmlns:a16="http://schemas.microsoft.com/office/drawing/2014/main" id="{B5A07D5C-A4F1-4F01-965A-5C419776387A}"/>
               </a:ext>
             </a:extLst>
           </p:cNvPr>
@@ -24690,7 +24690,7 @@
           <p:cNvPr id="8" name="">
             <a:extLst xmlns:a="http://schemas.openxmlformats.org/drawingml/2006/main">
               <a:ext uri="{FF2B5EF4-FFF2-40B4-BE49-F238E27FC236}">
-                <a16:creationId xmlns:a16="http://schemas.microsoft.com/office/drawing/2014/main" id="{14D17EA6-52C6-491C-A9BC-AACD43FDAB7A}"/>
+                <a16:creationId xmlns:a16="http://schemas.microsoft.com/office/drawing/2014/main" id="{EDBA643C-F7B4-4A7F-ABB9-A170FF5504E3}"/>
               </a:ext>
             </a:extLst>
           </p:cNvPr>
@@ -24727,7 +24727,7 @@
           <p:cNvPr id="9" name="">
             <a:extLst xmlns:a="http://schemas.openxmlformats.org/drawingml/2006/main">
               <a:ext uri="{FF2B5EF4-FFF2-40B4-BE49-F238E27FC236}">
-                <a16:creationId xmlns:a16="http://schemas.microsoft.com/office/drawing/2014/main" id="{7816107B-B4CD-40A3-9876-D8BB0B4B6301}"/>
+                <a16:creationId xmlns:a16="http://schemas.microsoft.com/office/drawing/2014/main" id="{92D8CEB7-32B4-4050-B538-89EF9B6AB117}"/>
               </a:ext>
             </a:extLst>
           </p:cNvPr>
@@ -24785,7 +24785,7 @@
           <p:cNvPr id="10" name="">
             <a:extLst xmlns:a="http://schemas.openxmlformats.org/drawingml/2006/main">
               <a:ext uri="{FF2B5EF4-FFF2-40B4-BE49-F238E27FC236}">
-                <a16:creationId xmlns:a16="http://schemas.microsoft.com/office/drawing/2014/main" id="{0A0A160A-5C40-410B-B497-2E1F85980B59}"/>
+                <a16:creationId xmlns:a16="http://schemas.microsoft.com/office/drawing/2014/main" id="{6F709C5D-41E9-43C9-A120-45559BDD6932}"/>
               </a:ext>
             </a:extLst>
           </p:cNvPr>
@@ -24843,7 +24843,7 @@
           <p:cNvPr id="11" name="">
             <a:extLst xmlns:a="http://schemas.openxmlformats.org/drawingml/2006/main">
               <a:ext uri="{FF2B5EF4-FFF2-40B4-BE49-F238E27FC236}">
-                <a16:creationId xmlns:a16="http://schemas.microsoft.com/office/drawing/2014/main" id="{61928987-0904-4AF7-B0B6-9C5293974BEE}"/>
+                <a16:creationId xmlns:a16="http://schemas.microsoft.com/office/drawing/2014/main" id="{207181AE-9FDC-4117-B4CC-2AF59F83FB68}"/>
               </a:ext>
             </a:extLst>
           </p:cNvPr>
@@ -24878,7 +24878,7 @@
           <p:cNvPr id="12" name="">
             <a:extLst xmlns:a="http://schemas.openxmlformats.org/drawingml/2006/main">
               <a:ext uri="{FF2B5EF4-FFF2-40B4-BE49-F238E27FC236}">
-                <a16:creationId xmlns:a16="http://schemas.microsoft.com/office/drawing/2014/main" id="{DD8A2B2C-E118-4F1A-88D0-10A3421B7662}"/>
+                <a16:creationId xmlns:a16="http://schemas.microsoft.com/office/drawing/2014/main" id="{2900F7C5-E8CE-43F4-B49F-9D5002815441}"/>
               </a:ext>
             </a:extLst>
           </p:cNvPr>
@@ -24911,7 +24911,7 @@
           <p:cNvPr id="13" name="">
             <a:extLst xmlns:a="http://schemas.openxmlformats.org/drawingml/2006/main">
               <a:ext uri="{FF2B5EF4-FFF2-40B4-BE49-F238E27FC236}">
-                <a16:creationId xmlns:a16="http://schemas.microsoft.com/office/drawing/2014/main" id="{F525F956-9FB8-4266-8731-32A45A613D25}"/>
+                <a16:creationId xmlns:a16="http://schemas.microsoft.com/office/drawing/2014/main" id="{4F4BE5B6-1F12-4F70-A046-4E8E9D09B31E}"/>
               </a:ext>
             </a:extLst>
           </p:cNvPr>
@@ -24969,7 +24969,7 @@
           <p:cNvPr id="14" name="">
             <a:extLst xmlns:a="http://schemas.openxmlformats.org/drawingml/2006/main">
               <a:ext uri="{FF2B5EF4-FFF2-40B4-BE49-F238E27FC236}">
-                <a16:creationId xmlns:a16="http://schemas.microsoft.com/office/drawing/2014/main" id="{65B4E764-5EBE-4E84-86B4-456948E1E427}"/>
+                <a16:creationId xmlns:a16="http://schemas.microsoft.com/office/drawing/2014/main" id="{B600317A-C6A2-449B-820B-4B0AEC172C86}"/>
               </a:ext>
             </a:extLst>
           </p:cNvPr>
@@ -25006,7 +25006,7 @@
           <p:cNvPr id="15" name="">
             <a:extLst xmlns:a="http://schemas.openxmlformats.org/drawingml/2006/main">
               <a:ext uri="{FF2B5EF4-FFF2-40B4-BE49-F238E27FC236}">
-                <a16:creationId xmlns:a16="http://schemas.microsoft.com/office/drawing/2014/main" id="{D5CA1698-6372-4367-A131-E5E3F4FA21B9}"/>
+                <a16:creationId xmlns:a16="http://schemas.microsoft.com/office/drawing/2014/main" id="{A2A2B636-90A7-4168-B489-682AFFB0B89B}"/>
               </a:ext>
             </a:extLst>
           </p:cNvPr>
@@ -25041,7 +25041,7 @@
           <p:cNvPr id="16" name="">
             <a:extLst xmlns:a="http://schemas.openxmlformats.org/drawingml/2006/main">
               <a:ext uri="{FF2B5EF4-FFF2-40B4-BE49-F238E27FC236}">
-                <a16:creationId xmlns:a16="http://schemas.microsoft.com/office/drawing/2014/main" id="{4E2CE8CB-CED9-4FB9-9276-081039518CF9}"/>
+                <a16:creationId xmlns:a16="http://schemas.microsoft.com/office/drawing/2014/main" id="{446BAF00-EC77-4BA3-90A6-04D15AE72946}"/>
               </a:ext>
             </a:extLst>
           </p:cNvPr>
@@ -25099,7 +25099,7 @@
           <p:cNvPr id="17" name="">
             <a:extLst xmlns:a="http://schemas.openxmlformats.org/drawingml/2006/main">
               <a:ext uri="{FF2B5EF4-FFF2-40B4-BE49-F238E27FC236}">
-                <a16:creationId xmlns:a16="http://schemas.microsoft.com/office/drawing/2014/main" id="{07047A2E-CD82-416D-A7CE-D0CD59460C9E}"/>
+                <a16:creationId xmlns:a16="http://schemas.microsoft.com/office/drawing/2014/main" id="{6D309E83-0AF4-4B10-BDAD-A8262B3AF120}"/>
               </a:ext>
             </a:extLst>
           </p:cNvPr>
@@ -25191,7 +25191,7 @@
           <p:cNvPr id="18" name="">
             <a:extLst xmlns:a="http://schemas.openxmlformats.org/drawingml/2006/main">
               <a:ext uri="{FF2B5EF4-FFF2-40B4-BE49-F238E27FC236}">
-                <a16:creationId xmlns:a16="http://schemas.microsoft.com/office/drawing/2014/main" id="{94315ED1-2756-48FA-8987-5B46E5ECE0E6}"/>
+                <a16:creationId xmlns:a16="http://schemas.microsoft.com/office/drawing/2014/main" id="{B0E2C8C1-5F47-4C46-9A73-6EECA8BDC322}"/>
               </a:ext>
             </a:extLst>
           </p:cNvPr>
@@ -25228,7 +25228,7 @@
           <p:cNvPr id="19" name="">
             <a:extLst xmlns:a="http://schemas.openxmlformats.org/drawingml/2006/main">
               <a:ext uri="{FF2B5EF4-FFF2-40B4-BE49-F238E27FC236}">
-                <a16:creationId xmlns:a16="http://schemas.microsoft.com/office/drawing/2014/main" id="{A3D751BB-5026-4C46-88A6-4C4F3E0FBA6A}"/>
+                <a16:creationId xmlns:a16="http://schemas.microsoft.com/office/drawing/2014/main" id="{74F4D1F5-1DBB-4A14-9D5C-DA2F37225C81}"/>
               </a:ext>
             </a:extLst>
           </p:cNvPr>
@@ -25263,7 +25263,7 @@
           <p:cNvPr id="20" name="">
             <a:extLst xmlns:a="http://schemas.openxmlformats.org/drawingml/2006/main">
               <a:ext uri="{FF2B5EF4-FFF2-40B4-BE49-F238E27FC236}">
-                <a16:creationId xmlns:a16="http://schemas.microsoft.com/office/drawing/2014/main" id="{AB6F301B-993E-49B6-AC04-7105C3BEE2F4}"/>
+                <a16:creationId xmlns:a16="http://schemas.microsoft.com/office/drawing/2014/main" id="{6E42B7B8-9CD5-4A48-B930-7CC9BBC1F721}"/>
               </a:ext>
             </a:extLst>
           </p:cNvPr>
@@ -25321,7 +25321,7 @@
           <p:cNvPr id="21" name="">
             <a:extLst xmlns:a="http://schemas.openxmlformats.org/drawingml/2006/main">
               <a:ext uri="{FF2B5EF4-FFF2-40B4-BE49-F238E27FC236}">
-                <a16:creationId xmlns:a16="http://schemas.microsoft.com/office/drawing/2014/main" id="{A1AA2EE1-0D24-4279-AB16-6B2F4B9BC764}"/>
+                <a16:creationId xmlns:a16="http://schemas.microsoft.com/office/drawing/2014/main" id="{4C1E231D-1825-4205-933A-8E279B3ACF48}"/>
               </a:ext>
             </a:extLst>
           </p:cNvPr>
@@ -25413,7 +25413,7 @@
           <p:cNvPr id="22" name="">
             <a:extLst xmlns:a="http://schemas.openxmlformats.org/drawingml/2006/main">
               <a:ext uri="{FF2B5EF4-FFF2-40B4-BE49-F238E27FC236}">
-                <a16:creationId xmlns:a16="http://schemas.microsoft.com/office/drawing/2014/main" id="{CD47AF5D-F89D-40DA-93E4-F6D3BF63FE50}"/>
+                <a16:creationId xmlns:a16="http://schemas.microsoft.com/office/drawing/2014/main" id="{BBD3F051-147A-4814-8654-84F96770726F}"/>
               </a:ext>
             </a:extLst>
           </p:cNvPr>
@@ -25450,7 +25450,7 @@
           <p:cNvPr id="23" name="">
             <a:extLst xmlns:a="http://schemas.openxmlformats.org/drawingml/2006/main">
               <a:ext uri="{FF2B5EF4-FFF2-40B4-BE49-F238E27FC236}">
-                <a16:creationId xmlns:a16="http://schemas.microsoft.com/office/drawing/2014/main" id="{715880A0-BF34-4B11-88DB-8EAA5DBDB5DD}"/>
+                <a16:creationId xmlns:a16="http://schemas.microsoft.com/office/drawing/2014/main" id="{2BBE7E66-4487-4ABC-88AB-1A8882E8580D}"/>
               </a:ext>
             </a:extLst>
           </p:cNvPr>
@@ -25485,7 +25485,7 @@
           <p:cNvPr id="24" name="">
             <a:extLst xmlns:a="http://schemas.openxmlformats.org/drawingml/2006/main">
               <a:ext uri="{FF2B5EF4-FFF2-40B4-BE49-F238E27FC236}">
-                <a16:creationId xmlns:a16="http://schemas.microsoft.com/office/drawing/2014/main" id="{876FC3C3-4BD9-4428-9C2D-786846568C84}"/>
+                <a16:creationId xmlns:a16="http://schemas.microsoft.com/office/drawing/2014/main" id="{D846A6E3-3B87-46EE-8BF8-564430C4F01D}"/>
               </a:ext>
             </a:extLst>
           </p:cNvPr>
@@ -25543,7 +25543,7 @@
           <p:cNvPr id="25" name="">
             <a:extLst xmlns:a="http://schemas.openxmlformats.org/drawingml/2006/main">
               <a:ext uri="{FF2B5EF4-FFF2-40B4-BE49-F238E27FC236}">
-                <a16:creationId xmlns:a16="http://schemas.microsoft.com/office/drawing/2014/main" id="{DCF8B8C3-D60F-4512-9DE7-2D61074C1A70}"/>
+                <a16:creationId xmlns:a16="http://schemas.microsoft.com/office/drawing/2014/main" id="{142747C3-2D70-40D7-8ACB-B511592DC291}"/>
               </a:ext>
             </a:extLst>
           </p:cNvPr>
@@ -25635,7 +25635,7 @@
           <p:cNvPr id="26" name="">
             <a:extLst xmlns:a="http://schemas.openxmlformats.org/drawingml/2006/main">
               <a:ext uri="{FF2B5EF4-FFF2-40B4-BE49-F238E27FC236}">
-                <a16:creationId xmlns:a16="http://schemas.microsoft.com/office/drawing/2014/main" id="{B1F1694A-E662-4B31-AC01-BC1405111C6F}"/>
+                <a16:creationId xmlns:a16="http://schemas.microsoft.com/office/drawing/2014/main" id="{14EDBB0B-B688-403F-8977-80F835948139}"/>
               </a:ext>
             </a:extLst>
           </p:cNvPr>
@@ -25672,7 +25672,7 @@
           <p:cNvPr id="27" name="">
             <a:extLst xmlns:a="http://schemas.openxmlformats.org/drawingml/2006/main">
               <a:ext uri="{FF2B5EF4-FFF2-40B4-BE49-F238E27FC236}">
-                <a16:creationId xmlns:a16="http://schemas.microsoft.com/office/drawing/2014/main" id="{D2103044-4D5B-4A15-9752-3132C46BD814}"/>
+                <a16:creationId xmlns:a16="http://schemas.microsoft.com/office/drawing/2014/main" id="{A2FA5E82-9C40-447B-90FA-BE6F9FA34FB4}"/>
               </a:ext>
             </a:extLst>
           </p:cNvPr>
@@ -25707,7 +25707,7 @@
           <p:cNvPr id="28" name="">
             <a:extLst xmlns:a="http://schemas.openxmlformats.org/drawingml/2006/main">
               <a:ext uri="{FF2B5EF4-FFF2-40B4-BE49-F238E27FC236}">
-                <a16:creationId xmlns:a16="http://schemas.microsoft.com/office/drawing/2014/main" id="{BC50FA7B-E262-42E1-8D94-905E8E50AF13}"/>
+                <a16:creationId xmlns:a16="http://schemas.microsoft.com/office/drawing/2014/main" id="{26605C0A-5379-4119-938B-D64BC2587FDA}"/>
               </a:ext>
             </a:extLst>
           </p:cNvPr>
@@ -25765,7 +25765,7 @@
           <p:cNvPr id="29" name="">
             <a:extLst xmlns:a="http://schemas.openxmlformats.org/drawingml/2006/main">
               <a:ext uri="{FF2B5EF4-FFF2-40B4-BE49-F238E27FC236}">
-                <a16:creationId xmlns:a16="http://schemas.microsoft.com/office/drawing/2014/main" id="{0CCFC469-1A1A-472A-9662-F3EC59F9DC57}"/>
+                <a16:creationId xmlns:a16="http://schemas.microsoft.com/office/drawing/2014/main" id="{8767F25F-8ACB-49A2-8AE8-2333BB8DFD0E}"/>
               </a:ext>
             </a:extLst>
           </p:cNvPr>
@@ -25840,7 +25840,7 @@
           <p:cNvPr id="30" name="">
             <a:extLst xmlns:a="http://schemas.openxmlformats.org/drawingml/2006/main">
               <a:ext uri="{FF2B5EF4-FFF2-40B4-BE49-F238E27FC236}">
-                <a16:creationId xmlns:a16="http://schemas.microsoft.com/office/drawing/2014/main" id="{168B1781-FCB8-48DB-AF55-952A714558B9}"/>
+                <a16:creationId xmlns:a16="http://schemas.microsoft.com/office/drawing/2014/main" id="{7A04B3B3-3697-4DB5-9B71-819C5E3CBA9B}"/>
               </a:ext>
             </a:extLst>
           </p:cNvPr>
@@ -25877,7 +25877,7 @@
           <p:cNvPr id="31" name="">
             <a:extLst xmlns:a="http://schemas.openxmlformats.org/drawingml/2006/main">
               <a:ext uri="{FF2B5EF4-FFF2-40B4-BE49-F238E27FC236}">
-                <a16:creationId xmlns:a16="http://schemas.microsoft.com/office/drawing/2014/main" id="{4CD1A700-F2A1-42E5-B34C-B644A285E5D0}"/>
+                <a16:creationId xmlns:a16="http://schemas.microsoft.com/office/drawing/2014/main" id="{D452D033-54C7-4AC2-8390-87E7C8AD3999}"/>
               </a:ext>
             </a:extLst>
           </p:cNvPr>
@@ -25912,7 +25912,7 @@
           <p:cNvPr id="32" name="">
             <a:extLst xmlns:a="http://schemas.openxmlformats.org/drawingml/2006/main">
               <a:ext uri="{FF2B5EF4-FFF2-40B4-BE49-F238E27FC236}">
-                <a16:creationId xmlns:a16="http://schemas.microsoft.com/office/drawing/2014/main" id="{085013D8-17A0-4C62-B9BE-1BB21217A953}"/>
+                <a16:creationId xmlns:a16="http://schemas.microsoft.com/office/drawing/2014/main" id="{1F16021D-005E-4557-8A34-85E41748BC40}"/>
               </a:ext>
             </a:extLst>
           </p:cNvPr>
@@ -25970,7 +25970,7 @@
           <p:cNvPr id="33" name="">
             <a:extLst xmlns:a="http://schemas.openxmlformats.org/drawingml/2006/main">
               <a:ext uri="{FF2B5EF4-FFF2-40B4-BE49-F238E27FC236}">
-                <a16:creationId xmlns:a16="http://schemas.microsoft.com/office/drawing/2014/main" id="{17C0F41F-74B4-4A74-88FE-65DDEC5B9F86}"/>
+                <a16:creationId xmlns:a16="http://schemas.microsoft.com/office/drawing/2014/main" id="{C4DDF110-23CB-45A2-9304-EC2B02D01A9A}"/>
               </a:ext>
             </a:extLst>
           </p:cNvPr>
@@ -26045,7 +26045,7 @@
           <p:cNvPr id="34" name="">
             <a:extLst xmlns:a="http://schemas.openxmlformats.org/drawingml/2006/main">
               <a:ext uri="{FF2B5EF4-FFF2-40B4-BE49-F238E27FC236}">
-                <a16:creationId xmlns:a16="http://schemas.microsoft.com/office/drawing/2014/main" id="{54047C12-7449-49AB-BFFB-42DFFBDD53FD}"/>
+                <a16:creationId xmlns:a16="http://schemas.microsoft.com/office/drawing/2014/main" id="{000AE5DF-EA8D-4BD0-946E-9CEB2679AC84}"/>
               </a:ext>
             </a:extLst>
           </p:cNvPr>
@@ -26080,7 +26080,7 @@
           <p:cNvPr id="35" name="">
             <a:extLst xmlns:a="http://schemas.openxmlformats.org/drawingml/2006/main">
               <a:ext uri="{FF2B5EF4-FFF2-40B4-BE49-F238E27FC236}">
-                <a16:creationId xmlns:a16="http://schemas.microsoft.com/office/drawing/2014/main" id="{E1DD22AF-27E9-41D3-B35E-431DCA164B48}"/>
+                <a16:creationId xmlns:a16="http://schemas.microsoft.com/office/drawing/2014/main" id="{9FB62016-7B66-4504-8ECD-84B0966273E6}"/>
               </a:ext>
             </a:extLst>
           </p:cNvPr>
@@ -26115,7 +26115,7 @@
           <p:cNvPr id="36" name="">
             <a:extLst xmlns:a="http://schemas.openxmlformats.org/drawingml/2006/main">
               <a:ext uri="{FF2B5EF4-FFF2-40B4-BE49-F238E27FC236}">
-                <a16:creationId xmlns:a16="http://schemas.microsoft.com/office/drawing/2014/main" id="{8C2257F2-B485-4643-8DC0-8250BF310F81}"/>
+                <a16:creationId xmlns:a16="http://schemas.microsoft.com/office/drawing/2014/main" id="{B01EBE91-1CFC-49FA-9DD8-F98B4E097D51}"/>
               </a:ext>
             </a:extLst>
           </p:cNvPr>
@@ -26173,7 +26173,7 @@
           <p:cNvPr id="37" name="">
             <a:extLst xmlns:a="http://schemas.openxmlformats.org/drawingml/2006/main">
               <a:ext uri="{FF2B5EF4-FFF2-40B4-BE49-F238E27FC236}">
-                <a16:creationId xmlns:a16="http://schemas.microsoft.com/office/drawing/2014/main" id="{92E0BC1C-9BE0-41C8-943D-AA783C24255C}"/>
+                <a16:creationId xmlns:a16="http://schemas.microsoft.com/office/drawing/2014/main" id="{85A548BC-909D-4B73-883F-7B8FA7335611}"/>
               </a:ext>
             </a:extLst>
           </p:cNvPr>
@@ -26229,7 +26229,7 @@
     </p:spTree>
     <p:extLst>
       <p:ext uri="{BB962C8B-B14F-4D97-AF65-F5344CB8AC3E}">
-        <p14:creationId xmlns:p14="http://schemas.microsoft.com/office/powerpoint/2010/main" val="250517712"/>
+        <p14:creationId xmlns:p14="http://schemas.microsoft.com/office/powerpoint/2010/main" val="1114534989"/>
       </p:ext>
     </p:extLst>
   </p:cSld>

--- a/collections/organoid/presentation/brain-organoid-question-journey/outputs/output.pptx
+++ b/collections/organoid/presentation/brain-organoid-question-journey/outputs/output.pptx
@@ -2,24 +2,24 @@
 <file path=ppt/presentation.xml><?xml version="1.0" encoding="utf-8"?>
 <p:presentation xmlns:p="http://schemas.openxmlformats.org/presentationml/2006/main">
   <p:sldMasterIdLst>
-    <p:sldMasterId xmlns:r="http://schemas.openxmlformats.org/officeDocument/2006/relationships" id="2147483648" r:id="R8cff4b57ee774926"/>
+    <p:sldMasterId xmlns:r="http://schemas.openxmlformats.org/officeDocument/2006/relationships" id="2147483648" r:id="R42cd8106476044c2"/>
   </p:sldMasterIdLst>
   <p:notesMasterIdLst>
-    <p:notesMasterId xmlns:r="http://schemas.openxmlformats.org/officeDocument/2006/relationships" r:id="R2fd26eaa1b944b92"/>
+    <p:notesMasterId xmlns:r="http://schemas.openxmlformats.org/officeDocument/2006/relationships" r:id="R581d68f7b7bd4d37"/>
   </p:notesMasterIdLst>
   <p:sldIdLst>
-    <p:sldId xmlns:r="http://schemas.openxmlformats.org/officeDocument/2006/relationships" id="256" r:id="R717709684dc14626"/>
-    <p:sldId xmlns:r="http://schemas.openxmlformats.org/officeDocument/2006/relationships" id="257" r:id="R4def07aeeb1742c8"/>
-    <p:sldId xmlns:r="http://schemas.openxmlformats.org/officeDocument/2006/relationships" id="258" r:id="Rcd000e6ba0854f90"/>
-    <p:sldId xmlns:r="http://schemas.openxmlformats.org/officeDocument/2006/relationships" id="259" r:id="R8575e12be5f04314"/>
-    <p:sldId xmlns:r="http://schemas.openxmlformats.org/officeDocument/2006/relationships" id="260" r:id="R149e19e4c85148e7"/>
-    <p:sldId xmlns:r="http://schemas.openxmlformats.org/officeDocument/2006/relationships" id="261" r:id="R3a48b15967b4462b"/>
-    <p:sldId xmlns:r="http://schemas.openxmlformats.org/officeDocument/2006/relationships" id="262" r:id="R0b3bc42a62644a39"/>
-    <p:sldId xmlns:r="http://schemas.openxmlformats.org/officeDocument/2006/relationships" id="263" r:id="Rd4d0336c1cb34d22"/>
-    <p:sldId xmlns:r="http://schemas.openxmlformats.org/officeDocument/2006/relationships" id="264" r:id="Rc4230a2c35b746e1"/>
-    <p:sldId xmlns:r="http://schemas.openxmlformats.org/officeDocument/2006/relationships" id="265" r:id="Rff3f4a8abf504140"/>
-    <p:sldId xmlns:r="http://schemas.openxmlformats.org/officeDocument/2006/relationships" id="266" r:id="Rf4882302669e4c2b"/>
-    <p:sldId xmlns:r="http://schemas.openxmlformats.org/officeDocument/2006/relationships" id="267" r:id="R5844611e18d649f6"/>
+    <p:sldId xmlns:r="http://schemas.openxmlformats.org/officeDocument/2006/relationships" id="256" r:id="Red2de704d0b343cf"/>
+    <p:sldId xmlns:r="http://schemas.openxmlformats.org/officeDocument/2006/relationships" id="257" r:id="R323670421495409d"/>
+    <p:sldId xmlns:r="http://schemas.openxmlformats.org/officeDocument/2006/relationships" id="258" r:id="Rdcc959b2d3044939"/>
+    <p:sldId xmlns:r="http://schemas.openxmlformats.org/officeDocument/2006/relationships" id="259" r:id="R96bb5c60221342d4"/>
+    <p:sldId xmlns:r="http://schemas.openxmlformats.org/officeDocument/2006/relationships" id="260" r:id="R9fa8cb2c731e42ff"/>
+    <p:sldId xmlns:r="http://schemas.openxmlformats.org/officeDocument/2006/relationships" id="261" r:id="R959bf8efd2504c68"/>
+    <p:sldId xmlns:r="http://schemas.openxmlformats.org/officeDocument/2006/relationships" id="262" r:id="R3ded1b02455a4e72"/>
+    <p:sldId xmlns:r="http://schemas.openxmlformats.org/officeDocument/2006/relationships" id="263" r:id="R91b52064a5db4ffd"/>
+    <p:sldId xmlns:r="http://schemas.openxmlformats.org/officeDocument/2006/relationships" id="264" r:id="Rb8443296857a4762"/>
+    <p:sldId xmlns:r="http://schemas.openxmlformats.org/officeDocument/2006/relationships" id="265" r:id="Rdf33b4fc733c4d49"/>
+    <p:sldId xmlns:r="http://schemas.openxmlformats.org/officeDocument/2006/relationships" id="266" r:id="R7626f40f07124a03"/>
+    <p:sldId xmlns:r="http://schemas.openxmlformats.org/officeDocument/2006/relationships" id="267" r:id="R791628791b7842c1"/>
   </p:sldIdLst>
   <p:sldSz cx="12192000" cy="6858000"/>
   <p:notesSz cx="6858000" cy="9144000"/>
@@ -1880,7 +1880,7 @@
           <p:cNvPr id="1" name="Title 1">
             <a:extLst xmlns:a="http://schemas.openxmlformats.org/drawingml/2006/main">
               <a:ext uri="{FF2B5EF4-FFF2-40B4-BE49-F238E27FC236}">
-                <a16:creationId xmlns:a16="http://schemas.microsoft.com/office/drawing/2014/main" id="{EF6BE441-61BA-4088-9F5C-DD19EC4B6F90}"/>
+                <a16:creationId xmlns:a16="http://schemas.microsoft.com/office/drawing/2014/main" id="{E984C53E-73FF-47C3-BCC4-CD33EEB688C4}"/>
               </a:ext>
             </a:extLst>
           </p:cNvPr>
@@ -1911,7 +1911,7 @@
           <p:cNvPr id="2" name="Subtitle 2">
             <a:extLst xmlns:a="http://schemas.openxmlformats.org/drawingml/2006/main">
               <a:ext uri="{FF2B5EF4-FFF2-40B4-BE49-F238E27FC236}">
-                <a16:creationId xmlns:a16="http://schemas.microsoft.com/office/drawing/2014/main" id="{A0356292-C6B7-4899-BBB4-90F977A58EBE}"/>
+                <a16:creationId xmlns:a16="http://schemas.microsoft.com/office/drawing/2014/main" id="{445E72D9-EF75-47FD-90F3-2978A0053B3E}"/>
               </a:ext>
             </a:extLst>
           </p:cNvPr>
@@ -1974,7 +1974,7 @@
           <p:cNvPr id="3" name="Date Placeholder 3">
             <a:extLst xmlns:a="http://schemas.openxmlformats.org/drawingml/2006/main">
               <a:ext uri="{FF2B5EF4-FFF2-40B4-BE49-F238E27FC236}">
-                <a16:creationId xmlns:a16="http://schemas.microsoft.com/office/drawing/2014/main" id="{47355F26-4ED3-483E-B86F-D5840B2104F0}"/>
+                <a16:creationId xmlns:a16="http://schemas.microsoft.com/office/drawing/2014/main" id="{32BF8197-0EF5-405A-9788-3103C40335C2}"/>
               </a:ext>
             </a:extLst>
           </p:cNvPr>
@@ -1995,7 +1995,7 @@
           <p:cNvPr id="4" name="Footer Placeholder 4">
             <a:extLst xmlns:a="http://schemas.openxmlformats.org/drawingml/2006/main">
               <a:ext uri="{FF2B5EF4-FFF2-40B4-BE49-F238E27FC236}">
-                <a16:creationId xmlns:a16="http://schemas.microsoft.com/office/drawing/2014/main" id="{12C92803-04DF-4118-A1D7-FCAE22C7500A}"/>
+                <a16:creationId xmlns:a16="http://schemas.microsoft.com/office/drawing/2014/main" id="{C92BC197-5FDD-48EB-8886-4BD8BD7EA07A}"/>
               </a:ext>
             </a:extLst>
           </p:cNvPr>
@@ -2016,7 +2016,7 @@
           <p:cNvPr id="5" name="Slide Number Placeholder 5">
             <a:extLst xmlns:a="http://schemas.openxmlformats.org/drawingml/2006/main">
               <a:ext uri="{FF2B5EF4-FFF2-40B4-BE49-F238E27FC236}">
-                <a16:creationId xmlns:a16="http://schemas.microsoft.com/office/drawing/2014/main" id="{C5A324B5-703D-4DE1-A920-5C56CD46E34C}"/>
+                <a16:creationId xmlns:a16="http://schemas.microsoft.com/office/drawing/2014/main" id="{E12CE447-476B-4BAE-A1FF-E669E79965E6}"/>
               </a:ext>
             </a:extLst>
           </p:cNvPr>
@@ -2059,7 +2059,7 @@
           <p:cNvPr id="1" name="Slide Number Placeholder 5">
             <a:extLst xmlns:a="http://schemas.openxmlformats.org/drawingml/2006/main">
               <a:ext uri="{FF2B5EF4-FFF2-40B4-BE49-F238E27FC236}">
-                <a16:creationId xmlns:a16="http://schemas.microsoft.com/office/drawing/2014/main" id="{1152E6E4-4B97-457E-82E1-D5191517F1CC}"/>
+                <a16:creationId xmlns:a16="http://schemas.microsoft.com/office/drawing/2014/main" id="{EFCA763A-768B-4E94-96C4-73A5DD2AF43D}"/>
               </a:ext>
             </a:extLst>
           </p:cNvPr>
@@ -2098,7 +2098,7 @@
   </p:cSld>
   <p:clrMap bg1="lt1" tx1="dk1" bg2="lt2" tx2="dk2" accent1="accent1" accent2="accent2" accent3="accent3" accent4="accent4" accent5="accent5" accent6="accent6" hlink="hlink" folHlink="folHlink"/>
   <p:sldLayoutIdLst>
-    <p:sldLayoutId xmlns:r="http://schemas.openxmlformats.org/officeDocument/2006/relationships" id="2147483649" r:id="R8a2e12e4aa66409f"/>
+    <p:sldLayoutId xmlns:r="http://schemas.openxmlformats.org/officeDocument/2006/relationships" id="2147483649" r:id="R296c6e276f144e4d"/>
   </p:sldLayoutIdLst>
   <p:txStyles>
     <p:titleStyle>
@@ -2404,7 +2404,7 @@
           <p:cNvPr id="1" name="Slide Number Placeholder 5">
             <a:extLst xmlns:a="http://schemas.openxmlformats.org/drawingml/2006/main">
               <a:ext uri="{FF2B5EF4-FFF2-40B4-BE49-F238E27FC236}">
-                <a16:creationId xmlns:a16="http://schemas.microsoft.com/office/drawing/2014/main" id="{C5A324B5-703D-4DE1-A920-5C56CD46E34C}"/>
+                <a16:creationId xmlns:a16="http://schemas.microsoft.com/office/drawing/2014/main" id="{E12CE447-476B-4BAE-A1FF-E669E79965E6}"/>
               </a:ext>
             </a:extLst>
           </p:cNvPr>
@@ -2440,7 +2440,7 @@
           <p:nvPr/>
         </p:nvPicPr>
         <p:blipFill>
-          <a:blip xmlns:r="http://schemas.openxmlformats.org/officeDocument/2006/relationships" xmlns:a="http://schemas.openxmlformats.org/drawingml/2006/main" r:embed="R01ea6a5199474ab8"/>
+          <a:blip xmlns:r="http://schemas.openxmlformats.org/officeDocument/2006/relationships" xmlns:a="http://schemas.openxmlformats.org/drawingml/2006/main" r:embed="Ra9dfebe3f5164d58"/>
           <a:srcRect xmlns:a="http://schemas.openxmlformats.org/drawingml/2006/main" l="0" t="21875" r="0" b="21875"/>
           <a:stretch xmlns:a="http://schemas.openxmlformats.org/drawingml/2006/main">
             <a:fillRect l="0" t="0" r="0" b="0"/>
@@ -2461,7 +2461,7 @@
           <p:cNvPr id="3" name="">
             <a:extLst xmlns:a="http://schemas.openxmlformats.org/drawingml/2006/main">
               <a:ext uri="{FF2B5EF4-FFF2-40B4-BE49-F238E27FC236}">
-                <a16:creationId xmlns:a16="http://schemas.microsoft.com/office/drawing/2014/main" id="{A84F78F3-0FE0-42F4-8EBF-499BAA20D6F4}"/>
+                <a16:creationId xmlns:a16="http://schemas.microsoft.com/office/drawing/2014/main" id="{24F74158-27A2-4528-AC4C-F53A59EA4118}"/>
               </a:ext>
             </a:extLst>
           </p:cNvPr>
@@ -2496,7 +2496,7 @@
           <p:cNvPr id="4" name="">
             <a:extLst xmlns:a="http://schemas.openxmlformats.org/drawingml/2006/main">
               <a:ext uri="{FF2B5EF4-FFF2-40B4-BE49-F238E27FC236}">
-                <a16:creationId xmlns:a16="http://schemas.microsoft.com/office/drawing/2014/main" id="{F8C4AC1D-CCCC-4889-A0A9-1BB024BEB691}"/>
+                <a16:creationId xmlns:a16="http://schemas.microsoft.com/office/drawing/2014/main" id="{EEEDC98F-D4B7-41DC-9495-F1D2EA54EF5C}"/>
               </a:ext>
             </a:extLst>
           </p:cNvPr>
@@ -2531,7 +2531,7 @@
           <p:cNvPr id="5" name="">
             <a:extLst xmlns:a="http://schemas.openxmlformats.org/drawingml/2006/main">
               <a:ext uri="{FF2B5EF4-FFF2-40B4-BE49-F238E27FC236}">
-                <a16:creationId xmlns:a16="http://schemas.microsoft.com/office/drawing/2014/main" id="{F5EAFD7A-2D7F-4689-A027-F06BFDBC5519}"/>
+                <a16:creationId xmlns:a16="http://schemas.microsoft.com/office/drawing/2014/main" id="{579073B7-8261-41B6-BB39-89AA8F6E11D9}"/>
               </a:ext>
             </a:extLst>
           </p:cNvPr>
@@ -2568,7 +2568,7 @@
           <p:cNvPr id="6" name="">
             <a:extLst xmlns:a="http://schemas.openxmlformats.org/drawingml/2006/main">
               <a:ext uri="{FF2B5EF4-FFF2-40B4-BE49-F238E27FC236}">
-                <a16:creationId xmlns:a16="http://schemas.microsoft.com/office/drawing/2014/main" id="{1F55D9D5-9CD8-4BE6-8098-2617846AA819}"/>
+                <a16:creationId xmlns:a16="http://schemas.microsoft.com/office/drawing/2014/main" id="{963E9C87-817A-4608-A097-A44E2F5EECD1}"/>
               </a:ext>
             </a:extLst>
           </p:cNvPr>
@@ -2605,7 +2605,7 @@
           <p:cNvPr id="7" name="">
             <a:extLst xmlns:a="http://schemas.openxmlformats.org/drawingml/2006/main">
               <a:ext uri="{FF2B5EF4-FFF2-40B4-BE49-F238E27FC236}">
-                <a16:creationId xmlns:a16="http://schemas.microsoft.com/office/drawing/2014/main" id="{EB2EC122-510E-47CE-B82A-6C05D81ED7D5}"/>
+                <a16:creationId xmlns:a16="http://schemas.microsoft.com/office/drawing/2014/main" id="{75BB9787-7EB3-49F5-9063-4784F16F8162}"/>
               </a:ext>
             </a:extLst>
           </p:cNvPr>
@@ -2642,7 +2642,7 @@
           <p:cNvPr id="8" name="">
             <a:extLst xmlns:a="http://schemas.openxmlformats.org/drawingml/2006/main">
               <a:ext uri="{FF2B5EF4-FFF2-40B4-BE49-F238E27FC236}">
-                <a16:creationId xmlns:a16="http://schemas.microsoft.com/office/drawing/2014/main" id="{D92E38D4-1CDA-44C9-AE36-6BC72BC091A8}"/>
+                <a16:creationId xmlns:a16="http://schemas.microsoft.com/office/drawing/2014/main" id="{B1864EFD-A2F6-4E52-8A1A-80D2BC0B88F2}"/>
               </a:ext>
             </a:extLst>
           </p:cNvPr>
@@ -2679,7 +2679,7 @@
           <p:cNvPr id="9" name="">
             <a:extLst xmlns:a="http://schemas.openxmlformats.org/drawingml/2006/main">
               <a:ext uri="{FF2B5EF4-FFF2-40B4-BE49-F238E27FC236}">
-                <a16:creationId xmlns:a16="http://schemas.microsoft.com/office/drawing/2014/main" id="{76AD1A94-C5FF-4255-B940-59D084099EE4}"/>
+                <a16:creationId xmlns:a16="http://schemas.microsoft.com/office/drawing/2014/main" id="{AF2FE664-AAC2-4150-8EDB-E741797E735D}"/>
               </a:ext>
             </a:extLst>
           </p:cNvPr>
@@ -2714,7 +2714,7 @@
           <p:cNvPr id="10" name="">
             <a:extLst xmlns:a="http://schemas.openxmlformats.org/drawingml/2006/main">
               <a:ext uri="{FF2B5EF4-FFF2-40B4-BE49-F238E27FC236}">
-                <a16:creationId xmlns:a16="http://schemas.microsoft.com/office/drawing/2014/main" id="{549DAB5F-2BF3-45D9-95E3-9297D737ADF9}"/>
+                <a16:creationId xmlns:a16="http://schemas.microsoft.com/office/drawing/2014/main" id="{C7DEE1ED-F31A-4C6C-BC2A-E2FE26E2272C}"/>
               </a:ext>
             </a:extLst>
           </p:cNvPr>
@@ -2772,7 +2772,7 @@
           <p:cNvPr id="11" name="">
             <a:extLst xmlns:a="http://schemas.openxmlformats.org/drawingml/2006/main">
               <a:ext uri="{FF2B5EF4-FFF2-40B4-BE49-F238E27FC236}">
-                <a16:creationId xmlns:a16="http://schemas.microsoft.com/office/drawing/2014/main" id="{6D8BD306-8ADB-49EB-9CE8-F16AD77FABC9}"/>
+                <a16:creationId xmlns:a16="http://schemas.microsoft.com/office/drawing/2014/main" id="{CD481D7A-AE49-4EE4-87D2-3611EBB99977}"/>
               </a:ext>
             </a:extLst>
           </p:cNvPr>
@@ -2847,7 +2847,7 @@
           <p:cNvPr id="12" name="">
             <a:extLst xmlns:a="http://schemas.openxmlformats.org/drawingml/2006/main">
               <a:ext uri="{FF2B5EF4-FFF2-40B4-BE49-F238E27FC236}">
-                <a16:creationId xmlns:a16="http://schemas.microsoft.com/office/drawing/2014/main" id="{7C43CB43-856E-4B4C-A1BE-756796E4B7C2}"/>
+                <a16:creationId xmlns:a16="http://schemas.microsoft.com/office/drawing/2014/main" id="{230848AB-D272-4F06-9F6F-4D3E384BA491}"/>
               </a:ext>
             </a:extLst>
           </p:cNvPr>
@@ -2922,7 +2922,7 @@
           <p:cNvPr id="13" name="">
             <a:extLst xmlns:a="http://schemas.openxmlformats.org/drawingml/2006/main">
               <a:ext uri="{FF2B5EF4-FFF2-40B4-BE49-F238E27FC236}">
-                <a16:creationId xmlns:a16="http://schemas.microsoft.com/office/drawing/2014/main" id="{5D7FAB69-99DF-42C1-95D1-C8284760A0CC}"/>
+                <a16:creationId xmlns:a16="http://schemas.microsoft.com/office/drawing/2014/main" id="{06E96802-70D9-4CCD-9004-65ED763DCC5A}"/>
               </a:ext>
             </a:extLst>
           </p:cNvPr>
@@ -2959,7 +2959,7 @@
           <p:cNvPr id="14" name="">
             <a:extLst xmlns:a="http://schemas.openxmlformats.org/drawingml/2006/main">
               <a:ext uri="{FF2B5EF4-FFF2-40B4-BE49-F238E27FC236}">
-                <a16:creationId xmlns:a16="http://schemas.microsoft.com/office/drawing/2014/main" id="{BABAB57D-A67A-4FA7-A2B1-B597F9455757}"/>
+                <a16:creationId xmlns:a16="http://schemas.microsoft.com/office/drawing/2014/main" id="{9F67B23D-D9C9-48EB-B690-30376987F23D}"/>
               </a:ext>
             </a:extLst>
           </p:cNvPr>
@@ -3017,7 +3017,7 @@
           <p:cNvPr id="15" name="">
             <a:extLst xmlns:a="http://schemas.openxmlformats.org/drawingml/2006/main">
               <a:ext uri="{FF2B5EF4-FFF2-40B4-BE49-F238E27FC236}">
-                <a16:creationId xmlns:a16="http://schemas.microsoft.com/office/drawing/2014/main" id="{9A23EF34-3EC7-4175-A996-A8C9D280A957}"/>
+                <a16:creationId xmlns:a16="http://schemas.microsoft.com/office/drawing/2014/main" id="{2ABAA598-E3F6-4C3A-A2B5-65C58D494FF0}"/>
               </a:ext>
             </a:extLst>
           </p:cNvPr>
@@ -3052,7 +3052,7 @@
           <p:cNvPr id="16" name="">
             <a:extLst xmlns:a="http://schemas.openxmlformats.org/drawingml/2006/main">
               <a:ext uri="{FF2B5EF4-FFF2-40B4-BE49-F238E27FC236}">
-                <a16:creationId xmlns:a16="http://schemas.microsoft.com/office/drawing/2014/main" id="{6BA0043B-18C2-4254-84C6-B99850622D5D}"/>
+                <a16:creationId xmlns:a16="http://schemas.microsoft.com/office/drawing/2014/main" id="{27029C60-BBC5-449D-BF37-4D44386C83AC}"/>
               </a:ext>
             </a:extLst>
           </p:cNvPr>
@@ -3087,7 +3087,7 @@
           <p:cNvPr id="17" name="">
             <a:extLst xmlns:a="http://schemas.openxmlformats.org/drawingml/2006/main">
               <a:ext uri="{FF2B5EF4-FFF2-40B4-BE49-F238E27FC236}">
-                <a16:creationId xmlns:a16="http://schemas.microsoft.com/office/drawing/2014/main" id="{669943D0-09A4-439C-B30A-4C10B33C48C9}"/>
+                <a16:creationId xmlns:a16="http://schemas.microsoft.com/office/drawing/2014/main" id="{44814FFA-4386-4976-B345-64DEADC69202}"/>
               </a:ext>
             </a:extLst>
           </p:cNvPr>
@@ -3141,7 +3141,7 @@
           <p:cNvPr id="18" name="">
             <a:extLst xmlns:a="http://schemas.openxmlformats.org/drawingml/2006/main">
               <a:ext uri="{FF2B5EF4-FFF2-40B4-BE49-F238E27FC236}">
-                <a16:creationId xmlns:a16="http://schemas.microsoft.com/office/drawing/2014/main" id="{2A8D2B14-78D4-4790-AC9D-9893B7AA3621}"/>
+                <a16:creationId xmlns:a16="http://schemas.microsoft.com/office/drawing/2014/main" id="{03B62286-81A8-4E57-8F06-435F69C7F99A}"/>
               </a:ext>
             </a:extLst>
           </p:cNvPr>
@@ -3199,7 +3199,7 @@
           <p:cNvPr id="19" name="">
             <a:extLst xmlns:a="http://schemas.openxmlformats.org/drawingml/2006/main">
               <a:ext uri="{FF2B5EF4-FFF2-40B4-BE49-F238E27FC236}">
-                <a16:creationId xmlns:a16="http://schemas.microsoft.com/office/drawing/2014/main" id="{9557133F-133A-412A-BBA3-FE3F8BFB872F}"/>
+                <a16:creationId xmlns:a16="http://schemas.microsoft.com/office/drawing/2014/main" id="{B2DCEBFA-2603-4F8D-A026-729AA62772CF}"/>
               </a:ext>
             </a:extLst>
           </p:cNvPr>
@@ -3274,7 +3274,7 @@
           <p:cNvPr id="20" name="">
             <a:extLst xmlns:a="http://schemas.openxmlformats.org/drawingml/2006/main">
               <a:ext uri="{FF2B5EF4-FFF2-40B4-BE49-F238E27FC236}">
-                <a16:creationId xmlns:a16="http://schemas.microsoft.com/office/drawing/2014/main" id="{FB9EC977-F915-40B5-A194-F82D4822182E}"/>
+                <a16:creationId xmlns:a16="http://schemas.microsoft.com/office/drawing/2014/main" id="{48DF6715-AFE9-47FA-87BE-574D2C9E6F7A}"/>
               </a:ext>
             </a:extLst>
           </p:cNvPr>
@@ -3309,7 +3309,7 @@
           <p:cNvPr id="21" name="">
             <a:extLst xmlns:a="http://schemas.openxmlformats.org/drawingml/2006/main">
               <a:ext uri="{FF2B5EF4-FFF2-40B4-BE49-F238E27FC236}">
-                <a16:creationId xmlns:a16="http://schemas.microsoft.com/office/drawing/2014/main" id="{1F9F363E-AA81-4057-B3AE-B5B1C14F36BC}"/>
+                <a16:creationId xmlns:a16="http://schemas.microsoft.com/office/drawing/2014/main" id="{27B8BA6C-A49A-4AC3-8C96-CE6D4850A50C}"/>
               </a:ext>
             </a:extLst>
           </p:cNvPr>
@@ -3344,7 +3344,7 @@
           <p:cNvPr id="22" name="">
             <a:extLst xmlns:a="http://schemas.openxmlformats.org/drawingml/2006/main">
               <a:ext uri="{FF2B5EF4-FFF2-40B4-BE49-F238E27FC236}">
-                <a16:creationId xmlns:a16="http://schemas.microsoft.com/office/drawing/2014/main" id="{F46F95B5-D10E-412E-B2FA-D23C350771B6}"/>
+                <a16:creationId xmlns:a16="http://schemas.microsoft.com/office/drawing/2014/main" id="{ADA6661D-6794-427D-BF38-E84D2B77B103}"/>
               </a:ext>
             </a:extLst>
           </p:cNvPr>
@@ -3398,7 +3398,7 @@
           <p:cNvPr id="23" name="">
             <a:extLst xmlns:a="http://schemas.openxmlformats.org/drawingml/2006/main">
               <a:ext uri="{FF2B5EF4-FFF2-40B4-BE49-F238E27FC236}">
-                <a16:creationId xmlns:a16="http://schemas.microsoft.com/office/drawing/2014/main" id="{E0AC814E-2733-43D1-83EB-0DBF68B672E0}"/>
+                <a16:creationId xmlns:a16="http://schemas.microsoft.com/office/drawing/2014/main" id="{D82C0B55-E8E9-48F0-8C6E-8D413BDD0E9B}"/>
               </a:ext>
             </a:extLst>
           </p:cNvPr>
@@ -3456,7 +3456,7 @@
           <p:cNvPr id="24" name="">
             <a:extLst xmlns:a="http://schemas.openxmlformats.org/drawingml/2006/main">
               <a:ext uri="{FF2B5EF4-FFF2-40B4-BE49-F238E27FC236}">
-                <a16:creationId xmlns:a16="http://schemas.microsoft.com/office/drawing/2014/main" id="{AF379492-A9EB-4101-81BF-62BC3F3E6408}"/>
+                <a16:creationId xmlns:a16="http://schemas.microsoft.com/office/drawing/2014/main" id="{B45CC6DC-BCE5-4770-B7CC-B0C70AB0DDCD}"/>
               </a:ext>
             </a:extLst>
           </p:cNvPr>
@@ -3531,7 +3531,7 @@
           <p:cNvPr id="25" name="">
             <a:extLst xmlns:a="http://schemas.openxmlformats.org/drawingml/2006/main">
               <a:ext uri="{FF2B5EF4-FFF2-40B4-BE49-F238E27FC236}">
-                <a16:creationId xmlns:a16="http://schemas.microsoft.com/office/drawing/2014/main" id="{31CBE313-FDA5-4A8E-BC7F-FA9C318E0667}"/>
+                <a16:creationId xmlns:a16="http://schemas.microsoft.com/office/drawing/2014/main" id="{4C5225BB-C083-4254-ACEE-E4820AA78B3A}"/>
               </a:ext>
             </a:extLst>
           </p:cNvPr>
@@ -3566,7 +3566,7 @@
           <p:cNvPr id="26" name="">
             <a:extLst xmlns:a="http://schemas.openxmlformats.org/drawingml/2006/main">
               <a:ext uri="{FF2B5EF4-FFF2-40B4-BE49-F238E27FC236}">
-                <a16:creationId xmlns:a16="http://schemas.microsoft.com/office/drawing/2014/main" id="{93E1075B-EC78-422C-816F-48131BDD7D4E}"/>
+                <a16:creationId xmlns:a16="http://schemas.microsoft.com/office/drawing/2014/main" id="{53548352-02C0-4531-A017-4BFF9173D178}"/>
               </a:ext>
             </a:extLst>
           </p:cNvPr>
@@ -3601,7 +3601,7 @@
           <p:cNvPr id="27" name="">
             <a:extLst xmlns:a="http://schemas.openxmlformats.org/drawingml/2006/main">
               <a:ext uri="{FF2B5EF4-FFF2-40B4-BE49-F238E27FC236}">
-                <a16:creationId xmlns:a16="http://schemas.microsoft.com/office/drawing/2014/main" id="{8985E300-B97E-4D96-87FD-135D88821B38}"/>
+                <a16:creationId xmlns:a16="http://schemas.microsoft.com/office/drawing/2014/main" id="{3A7FF1A6-4F9B-439A-9482-BFB5F921C164}"/>
               </a:ext>
             </a:extLst>
           </p:cNvPr>
@@ -3655,7 +3655,7 @@
           <p:cNvPr id="28" name="">
             <a:extLst xmlns:a="http://schemas.openxmlformats.org/drawingml/2006/main">
               <a:ext uri="{FF2B5EF4-FFF2-40B4-BE49-F238E27FC236}">
-                <a16:creationId xmlns:a16="http://schemas.microsoft.com/office/drawing/2014/main" id="{040E00BB-4B11-4C5E-84EB-A89EB8E89714}"/>
+                <a16:creationId xmlns:a16="http://schemas.microsoft.com/office/drawing/2014/main" id="{FDD96450-04B1-4450-A255-B3F90ADAA3F0}"/>
               </a:ext>
             </a:extLst>
           </p:cNvPr>
@@ -3713,7 +3713,7 @@
           <p:cNvPr id="29" name="">
             <a:extLst xmlns:a="http://schemas.openxmlformats.org/drawingml/2006/main">
               <a:ext uri="{FF2B5EF4-FFF2-40B4-BE49-F238E27FC236}">
-                <a16:creationId xmlns:a16="http://schemas.microsoft.com/office/drawing/2014/main" id="{D925AC5E-F927-4652-A9C5-5814640AC2DC}"/>
+                <a16:creationId xmlns:a16="http://schemas.microsoft.com/office/drawing/2014/main" id="{59D1D6AD-61CE-48FC-B208-9E4AD8E88E72}"/>
               </a:ext>
             </a:extLst>
           </p:cNvPr>
@@ -3788,7 +3788,7 @@
           <p:cNvPr id="30" name="">
             <a:extLst xmlns:a="http://schemas.openxmlformats.org/drawingml/2006/main">
               <a:ext uri="{FF2B5EF4-FFF2-40B4-BE49-F238E27FC236}">
-                <a16:creationId xmlns:a16="http://schemas.microsoft.com/office/drawing/2014/main" id="{EBCD4D08-EEBE-4CB3-A155-6BD4EE4BD459}"/>
+                <a16:creationId xmlns:a16="http://schemas.microsoft.com/office/drawing/2014/main" id="{3AF87737-3E64-43EF-924B-CB0DFA2A8243}"/>
               </a:ext>
             </a:extLst>
           </p:cNvPr>
@@ -3823,7 +3823,7 @@
           <p:cNvPr id="31" name="">
             <a:extLst xmlns:a="http://schemas.openxmlformats.org/drawingml/2006/main">
               <a:ext uri="{FF2B5EF4-FFF2-40B4-BE49-F238E27FC236}">
-                <a16:creationId xmlns:a16="http://schemas.microsoft.com/office/drawing/2014/main" id="{17E368A8-78F0-49A6-8D62-328DB67EB845}"/>
+                <a16:creationId xmlns:a16="http://schemas.microsoft.com/office/drawing/2014/main" id="{094573C2-8358-42AC-B79A-0B5B3BACBD8A}"/>
               </a:ext>
             </a:extLst>
           </p:cNvPr>
@@ -3858,7 +3858,7 @@
           <p:cNvPr id="32" name="">
             <a:extLst xmlns:a="http://schemas.openxmlformats.org/drawingml/2006/main">
               <a:ext uri="{FF2B5EF4-FFF2-40B4-BE49-F238E27FC236}">
-                <a16:creationId xmlns:a16="http://schemas.microsoft.com/office/drawing/2014/main" id="{B6661046-78FE-4649-A67A-A218317501A8}"/>
+                <a16:creationId xmlns:a16="http://schemas.microsoft.com/office/drawing/2014/main" id="{10B01B08-299D-4619-ADAB-769A96531F33}"/>
               </a:ext>
             </a:extLst>
           </p:cNvPr>
@@ -3912,7 +3912,7 @@
           <p:cNvPr id="33" name="">
             <a:extLst xmlns:a="http://schemas.openxmlformats.org/drawingml/2006/main">
               <a:ext uri="{FF2B5EF4-FFF2-40B4-BE49-F238E27FC236}">
-                <a16:creationId xmlns:a16="http://schemas.microsoft.com/office/drawing/2014/main" id="{7580BE87-B184-429F-B9AD-85EDF060F3E2}"/>
+                <a16:creationId xmlns:a16="http://schemas.microsoft.com/office/drawing/2014/main" id="{A4EC46A9-F2EA-4861-8551-D7821DC9BE2D}"/>
               </a:ext>
             </a:extLst>
           </p:cNvPr>
@@ -3970,7 +3970,7 @@
           <p:cNvPr id="34" name="">
             <a:extLst xmlns:a="http://schemas.openxmlformats.org/drawingml/2006/main">
               <a:ext uri="{FF2B5EF4-FFF2-40B4-BE49-F238E27FC236}">
-                <a16:creationId xmlns:a16="http://schemas.microsoft.com/office/drawing/2014/main" id="{CB2FF5A2-49D7-48DF-A60D-0D5A31A2761A}"/>
+                <a16:creationId xmlns:a16="http://schemas.microsoft.com/office/drawing/2014/main" id="{D2E32441-4FC4-4E7F-A75E-93C7BD78577C}"/>
               </a:ext>
             </a:extLst>
           </p:cNvPr>
@@ -4028,7 +4028,7 @@
           <p:cNvPr id="35" name="">
             <a:extLst xmlns:a="http://schemas.openxmlformats.org/drawingml/2006/main">
               <a:ext uri="{FF2B5EF4-FFF2-40B4-BE49-F238E27FC236}">
-                <a16:creationId xmlns:a16="http://schemas.microsoft.com/office/drawing/2014/main" id="{9A276DC7-2894-4F31-8BDE-9EF91BE763BC}"/>
+                <a16:creationId xmlns:a16="http://schemas.microsoft.com/office/drawing/2014/main" id="{6997A693-E7FB-40F5-B2BE-20C1D425DAEC}"/>
               </a:ext>
             </a:extLst>
           </p:cNvPr>
@@ -4063,7 +4063,7 @@
           <p:cNvPr id="36" name="">
             <a:extLst xmlns:a="http://schemas.openxmlformats.org/drawingml/2006/main">
               <a:ext uri="{FF2B5EF4-FFF2-40B4-BE49-F238E27FC236}">
-                <a16:creationId xmlns:a16="http://schemas.microsoft.com/office/drawing/2014/main" id="{9CB3132C-F277-46B6-BC78-DDA7A51C4055}"/>
+                <a16:creationId xmlns:a16="http://schemas.microsoft.com/office/drawing/2014/main" id="{7FE7DAD8-9073-48B5-8A00-C40BC6FAFA01}"/>
               </a:ext>
             </a:extLst>
           </p:cNvPr>
@@ -4098,7 +4098,7 @@
           <p:cNvPr id="37" name="">
             <a:extLst xmlns:a="http://schemas.openxmlformats.org/drawingml/2006/main">
               <a:ext uri="{FF2B5EF4-FFF2-40B4-BE49-F238E27FC236}">
-                <a16:creationId xmlns:a16="http://schemas.microsoft.com/office/drawing/2014/main" id="{D010A617-B865-4DD6-86B0-32C8F5D38B06}"/>
+                <a16:creationId xmlns:a16="http://schemas.microsoft.com/office/drawing/2014/main" id="{9D3A45F3-1CAF-4E19-9B61-33F037CB9E24}"/>
               </a:ext>
             </a:extLst>
           </p:cNvPr>
@@ -4133,7 +4133,7 @@
           <p:cNvPr id="38" name="">
             <a:extLst xmlns:a="http://schemas.openxmlformats.org/drawingml/2006/main">
               <a:ext uri="{FF2B5EF4-FFF2-40B4-BE49-F238E27FC236}">
-                <a16:creationId xmlns:a16="http://schemas.microsoft.com/office/drawing/2014/main" id="{D431290C-37F2-40E8-8F86-042AA0214146}"/>
+                <a16:creationId xmlns:a16="http://schemas.microsoft.com/office/drawing/2014/main" id="{E59BAF55-3911-4E87-BEE5-0100242B8E3D}"/>
               </a:ext>
             </a:extLst>
           </p:cNvPr>
@@ -4145,7 +4145,7 @@
         <p:spPr>
           <a:xfrm xmlns:a="http://schemas.openxmlformats.org/drawingml/2006/main">
             <a:off x="819150" y="5448300"/>
-            <a:ext cx="1104900" cy="266700"/>
+            <a:ext cx="990600" cy="266700"/>
           </a:xfrm>
           <a:prstGeom xmlns:a="http://schemas.openxmlformats.org/drawingml/2006/main" prst="rect">
             <a:avLst/>
@@ -4177,7 +4177,7 @@
                   <a:srgbClr val="7A5A14"/>
                 </a:solidFill>
               </a:rPr>
-              <a:t>15 min talk</a:t>
+              <a:t>LLM-wiki</a:t>
             </a:r>
           </a:p>
         </p:txBody>
@@ -4187,19 +4187,19 @@
           <p:cNvPr id="39" name="">
             <a:extLst xmlns:a="http://schemas.openxmlformats.org/drawingml/2006/main">
               <a:ext uri="{FF2B5EF4-FFF2-40B4-BE49-F238E27FC236}">
-                <a16:creationId xmlns:a16="http://schemas.microsoft.com/office/drawing/2014/main" id="{31000469-8C2A-4143-8D8A-91C2540E3F8C}"/>
-              </a:ext>
-            </a:extLst>
-          </p:cNvPr>
-          <p:cNvSpPr>
-            <a:spLocks xmlns:a="http://schemas.openxmlformats.org/drawingml/2006/main" noGrp="1"/>
-          </p:cNvSpPr>
-          <p:nvPr/>
-        </p:nvSpPr>
-        <p:spPr>
-          <a:xfrm xmlns:a="http://schemas.openxmlformats.org/drawingml/2006/main">
-            <a:off x="2038350" y="5448300"/>
-            <a:ext cx="1562100" cy="266700"/>
+                <a16:creationId xmlns:a16="http://schemas.microsoft.com/office/drawing/2014/main" id="{9B7431D5-B87A-421F-91A5-0F5DAD4EB2FF}"/>
+              </a:ext>
+            </a:extLst>
+          </p:cNvPr>
+          <p:cNvSpPr>
+            <a:spLocks xmlns:a="http://schemas.openxmlformats.org/drawingml/2006/main" noGrp="1"/>
+          </p:cNvSpPr>
+          <p:nvPr/>
+        </p:nvSpPr>
+        <p:spPr>
+          <a:xfrm xmlns:a="http://schemas.openxmlformats.org/drawingml/2006/main">
+            <a:off x="1924050" y="5448300"/>
+            <a:ext cx="1257300" cy="266700"/>
           </a:xfrm>
           <a:prstGeom xmlns:a="http://schemas.openxmlformats.org/drawingml/2006/main" prst="rect">
             <a:avLst/>
@@ -4231,7 +4231,7 @@
                   <a:srgbClr val="0F5B3F"/>
                 </a:solidFill>
               </a:rPr>
-              <a:t>question journey</a:t>
+              <a:t>brain branch</a:t>
             </a:r>
           </a:p>
         </p:txBody>
@@ -4241,7 +4241,7 @@
           <p:cNvPr id="40" name="">
             <a:extLst xmlns:a="http://schemas.openxmlformats.org/drawingml/2006/main">
               <a:ext uri="{FF2B5EF4-FFF2-40B4-BE49-F238E27FC236}">
-                <a16:creationId xmlns:a16="http://schemas.microsoft.com/office/drawing/2014/main" id="{69031CFD-35A3-4F02-9777-B497817748CB}"/>
+                <a16:creationId xmlns:a16="http://schemas.microsoft.com/office/drawing/2014/main" id="{C96E2656-8A07-45DE-B6F3-1226AD1B8CE9}"/>
               </a:ext>
             </a:extLst>
           </p:cNvPr>
@@ -4289,7 +4289,7 @@
                   <a:srgbClr val="6A767C"/>
                 </a:solidFill>
               </a:rPr>
-              <a:t>발표 구조: 출발 질문 -&gt; 한계 발견 -&gt; 질문 재정의 -&gt; 최종 선택 규칙</a:t>
+              <a:t>흐름: LLM-wiki 운영 -&gt; subregion 질문 -&gt; benchmark -&gt; readout-first rule</a:t>
             </a:r>
           </a:p>
         </p:txBody>
@@ -4297,7 +4297,7 @@
     </p:spTree>
     <p:extLst>
       <p:ext uri="{BB962C8B-B14F-4D97-AF65-F5344CB8AC3E}">
-        <p14:creationId xmlns:p14="http://schemas.microsoft.com/office/powerpoint/2010/main" val="1464981873"/>
+        <p14:creationId xmlns:p14="http://schemas.microsoft.com/office/powerpoint/2010/main" val="779714260"/>
       </p:ext>
     </p:extLst>
   </p:cSld>
@@ -4328,7 +4328,7 @@
           <p:cNvPr id="1" name="Slide Number Placeholder 5">
             <a:extLst xmlns:a="http://schemas.openxmlformats.org/drawingml/2006/main">
               <a:ext uri="{FF2B5EF4-FFF2-40B4-BE49-F238E27FC236}">
-                <a16:creationId xmlns:a16="http://schemas.microsoft.com/office/drawing/2014/main" id="{C5A324B5-703D-4DE1-A920-5C56CD46E34C}"/>
+                <a16:creationId xmlns:a16="http://schemas.microsoft.com/office/drawing/2014/main" id="{E12CE447-476B-4BAE-A1FF-E669E79965E6}"/>
               </a:ext>
             </a:extLst>
           </p:cNvPr>
@@ -4364,7 +4364,7 @@
           <p:nvPr/>
         </p:nvPicPr>
         <p:blipFill>
-          <a:blip xmlns:r="http://schemas.openxmlformats.org/officeDocument/2006/relationships" xmlns:a="http://schemas.openxmlformats.org/drawingml/2006/main" r:embed="R7ce89d589fea49cc"/>
+          <a:blip xmlns:r="http://schemas.openxmlformats.org/officeDocument/2006/relationships" xmlns:a="http://schemas.openxmlformats.org/drawingml/2006/main" r:embed="Ra3610326cacf46f5"/>
           <a:srcRect xmlns:a="http://schemas.openxmlformats.org/drawingml/2006/main" l="0" t="21875" r="0" b="21875"/>
           <a:stretch xmlns:a="http://schemas.openxmlformats.org/drawingml/2006/main">
             <a:fillRect l="0" t="0" r="0" b="0"/>
@@ -4385,7 +4385,7 @@
           <p:cNvPr id="3" name="">
             <a:extLst xmlns:a="http://schemas.openxmlformats.org/drawingml/2006/main">
               <a:ext uri="{FF2B5EF4-FFF2-40B4-BE49-F238E27FC236}">
-                <a16:creationId xmlns:a16="http://schemas.microsoft.com/office/drawing/2014/main" id="{EE839F70-26AD-4636-924A-C4531E551277}"/>
+                <a16:creationId xmlns:a16="http://schemas.microsoft.com/office/drawing/2014/main" id="{6956BC0F-7971-4457-B954-C616E28E1611}"/>
               </a:ext>
             </a:extLst>
           </p:cNvPr>
@@ -4420,7 +4420,7 @@
           <p:cNvPr id="4" name="">
             <a:extLst xmlns:a="http://schemas.openxmlformats.org/drawingml/2006/main">
               <a:ext uri="{FF2B5EF4-FFF2-40B4-BE49-F238E27FC236}">
-                <a16:creationId xmlns:a16="http://schemas.microsoft.com/office/drawing/2014/main" id="{BCB667D2-16D0-4722-8794-540C5FCCBBCC}"/>
+                <a16:creationId xmlns:a16="http://schemas.microsoft.com/office/drawing/2014/main" id="{5264BAB2-84B6-436D-9ADE-5F0561432059}"/>
               </a:ext>
             </a:extLst>
           </p:cNvPr>
@@ -4455,7 +4455,7 @@
           <p:cNvPr id="5" name="">
             <a:extLst xmlns:a="http://schemas.openxmlformats.org/drawingml/2006/main">
               <a:ext uri="{FF2B5EF4-FFF2-40B4-BE49-F238E27FC236}">
-                <a16:creationId xmlns:a16="http://schemas.microsoft.com/office/drawing/2014/main" id="{B1234DB7-7FAC-44BF-9E3B-E4510ED259B3}"/>
+                <a16:creationId xmlns:a16="http://schemas.microsoft.com/office/drawing/2014/main" id="{0A0C9BFF-D65E-45A2-AAEE-7940D739C0AE}"/>
               </a:ext>
             </a:extLst>
           </p:cNvPr>
@@ -4492,7 +4492,7 @@
           <p:cNvPr id="6" name="">
             <a:extLst xmlns:a="http://schemas.openxmlformats.org/drawingml/2006/main">
               <a:ext uri="{FF2B5EF4-FFF2-40B4-BE49-F238E27FC236}">
-                <a16:creationId xmlns:a16="http://schemas.microsoft.com/office/drawing/2014/main" id="{DCFC3784-00F5-46A1-AAD2-22206E178128}"/>
+                <a16:creationId xmlns:a16="http://schemas.microsoft.com/office/drawing/2014/main" id="{CA1AD432-EEAB-4DF4-AEFD-71C6415C77D4}"/>
               </a:ext>
             </a:extLst>
           </p:cNvPr>
@@ -4529,7 +4529,7 @@
           <p:cNvPr id="7" name="">
             <a:extLst xmlns:a="http://schemas.openxmlformats.org/drawingml/2006/main">
               <a:ext uri="{FF2B5EF4-FFF2-40B4-BE49-F238E27FC236}">
-                <a16:creationId xmlns:a16="http://schemas.microsoft.com/office/drawing/2014/main" id="{DAA411E2-39A5-44BD-8F90-86CCEECB1E2E}"/>
+                <a16:creationId xmlns:a16="http://schemas.microsoft.com/office/drawing/2014/main" id="{E897191F-1EAD-47B0-B702-9837419DE286}"/>
               </a:ext>
             </a:extLst>
           </p:cNvPr>
@@ -4566,7 +4566,7 @@
           <p:cNvPr id="8" name="">
             <a:extLst xmlns:a="http://schemas.openxmlformats.org/drawingml/2006/main">
               <a:ext uri="{FF2B5EF4-FFF2-40B4-BE49-F238E27FC236}">
-                <a16:creationId xmlns:a16="http://schemas.microsoft.com/office/drawing/2014/main" id="{CD56F337-8820-4FC4-9A4D-E09FC15FA4B5}"/>
+                <a16:creationId xmlns:a16="http://schemas.microsoft.com/office/drawing/2014/main" id="{435DCA43-07B6-437F-9C7C-CA5352376EBA}"/>
               </a:ext>
             </a:extLst>
           </p:cNvPr>
@@ -4603,7 +4603,7 @@
           <p:cNvPr id="9" name="">
             <a:extLst xmlns:a="http://schemas.openxmlformats.org/drawingml/2006/main">
               <a:ext uri="{FF2B5EF4-FFF2-40B4-BE49-F238E27FC236}">
-                <a16:creationId xmlns:a16="http://schemas.microsoft.com/office/drawing/2014/main" id="{4D70B2FD-3BCE-43C7-BAFC-84661D700670}"/>
+                <a16:creationId xmlns:a16="http://schemas.microsoft.com/office/drawing/2014/main" id="{8578DF86-6C0A-4230-9442-B1147A9F18EE}"/>
               </a:ext>
             </a:extLst>
           </p:cNvPr>
@@ -4661,7 +4661,7 @@
           <p:cNvPr id="10" name="">
             <a:extLst xmlns:a="http://schemas.openxmlformats.org/drawingml/2006/main">
               <a:ext uri="{FF2B5EF4-FFF2-40B4-BE49-F238E27FC236}">
-                <a16:creationId xmlns:a16="http://schemas.microsoft.com/office/drawing/2014/main" id="{9700FBBE-B140-43EF-8D7A-6F5630AE98D6}"/>
+                <a16:creationId xmlns:a16="http://schemas.microsoft.com/office/drawing/2014/main" id="{11797080-E472-456C-A2A4-EC0D82BF21B0}"/>
               </a:ext>
             </a:extLst>
           </p:cNvPr>
@@ -4719,7 +4719,7 @@
           <p:cNvPr id="11" name="">
             <a:extLst xmlns:a="http://schemas.openxmlformats.org/drawingml/2006/main">
               <a:ext uri="{FF2B5EF4-FFF2-40B4-BE49-F238E27FC236}">
-                <a16:creationId xmlns:a16="http://schemas.microsoft.com/office/drawing/2014/main" id="{FEB33465-FB66-49B0-97E7-A78DE46D4628}"/>
+                <a16:creationId xmlns:a16="http://schemas.microsoft.com/office/drawing/2014/main" id="{DCDEAAA6-FFE8-440D-BC2A-BA2400BD1EFC}"/>
               </a:ext>
             </a:extLst>
           </p:cNvPr>
@@ -4754,7 +4754,7 @@
           <p:cNvPr id="12" name="">
             <a:extLst xmlns:a="http://schemas.openxmlformats.org/drawingml/2006/main">
               <a:ext uri="{FF2B5EF4-FFF2-40B4-BE49-F238E27FC236}">
-                <a16:creationId xmlns:a16="http://schemas.microsoft.com/office/drawing/2014/main" id="{EE326095-1563-4210-8A81-68692BF6E196}"/>
+                <a16:creationId xmlns:a16="http://schemas.microsoft.com/office/drawing/2014/main" id="{B4FB6497-5B6B-4142-AE33-1EE6824D0EAA}"/>
               </a:ext>
             </a:extLst>
           </p:cNvPr>
@@ -4787,7 +4787,7 @@
           <p:cNvPr id="13" name="">
             <a:extLst xmlns:a="http://schemas.openxmlformats.org/drawingml/2006/main">
               <a:ext uri="{FF2B5EF4-FFF2-40B4-BE49-F238E27FC236}">
-                <a16:creationId xmlns:a16="http://schemas.microsoft.com/office/drawing/2014/main" id="{00FF0C1B-110A-4D98-870F-5300067C3BEB}"/>
+                <a16:creationId xmlns:a16="http://schemas.microsoft.com/office/drawing/2014/main" id="{AE0BEA8A-627A-4540-BCEA-70E1601824CD}"/>
               </a:ext>
             </a:extLst>
           </p:cNvPr>
@@ -4862,7 +4862,7 @@
           <p:cNvPr id="14" name="">
             <a:extLst xmlns:a="http://schemas.openxmlformats.org/drawingml/2006/main">
               <a:ext uri="{FF2B5EF4-FFF2-40B4-BE49-F238E27FC236}">
-                <a16:creationId xmlns:a16="http://schemas.microsoft.com/office/drawing/2014/main" id="{22170AF3-5916-43F3-820A-80EF1580FF4B}"/>
+                <a16:creationId xmlns:a16="http://schemas.microsoft.com/office/drawing/2014/main" id="{0D9F5C67-4D06-4962-A02B-B2DEF6DC2560}"/>
               </a:ext>
             </a:extLst>
           </p:cNvPr>
@@ -4899,7 +4899,7 @@
           <p:cNvPr id="15" name="">
             <a:extLst xmlns:a="http://schemas.openxmlformats.org/drawingml/2006/main">
               <a:ext uri="{FF2B5EF4-FFF2-40B4-BE49-F238E27FC236}">
-                <a16:creationId xmlns:a16="http://schemas.microsoft.com/office/drawing/2014/main" id="{F3AAC3AA-BD74-4229-80EB-B399EE0B74B2}"/>
+                <a16:creationId xmlns:a16="http://schemas.microsoft.com/office/drawing/2014/main" id="{B2797F29-3082-43BF-B39D-FDFFE6B8BB25}"/>
               </a:ext>
             </a:extLst>
           </p:cNvPr>
@@ -4934,7 +4934,7 @@
           <p:cNvPr id="16" name="">
             <a:extLst xmlns:a="http://schemas.openxmlformats.org/drawingml/2006/main">
               <a:ext uri="{FF2B5EF4-FFF2-40B4-BE49-F238E27FC236}">
-                <a16:creationId xmlns:a16="http://schemas.microsoft.com/office/drawing/2014/main" id="{B4609F9F-BC48-4C97-B5E9-9A906E000B73}"/>
+                <a16:creationId xmlns:a16="http://schemas.microsoft.com/office/drawing/2014/main" id="{1344D1EF-2EFB-42A1-9C0F-FBC7AEAAC878}"/>
               </a:ext>
             </a:extLst>
           </p:cNvPr>
@@ -4992,7 +4992,7 @@
           <p:cNvPr id="17" name="">
             <a:extLst xmlns:a="http://schemas.openxmlformats.org/drawingml/2006/main">
               <a:ext uri="{FF2B5EF4-FFF2-40B4-BE49-F238E27FC236}">
-                <a16:creationId xmlns:a16="http://schemas.microsoft.com/office/drawing/2014/main" id="{6D06162B-787E-4388-8ECB-D054895BB99F}"/>
+                <a16:creationId xmlns:a16="http://schemas.microsoft.com/office/drawing/2014/main" id="{134246AF-1392-4DEA-B373-5DFB9F63C18F}"/>
               </a:ext>
             </a:extLst>
           </p:cNvPr>
@@ -5084,7 +5084,7 @@
           <p:cNvPr id="18" name="">
             <a:extLst xmlns:a="http://schemas.openxmlformats.org/drawingml/2006/main">
               <a:ext uri="{FF2B5EF4-FFF2-40B4-BE49-F238E27FC236}">
-                <a16:creationId xmlns:a16="http://schemas.microsoft.com/office/drawing/2014/main" id="{085B9B93-6C3C-44B3-A2C7-42E36CE94DEB}"/>
+                <a16:creationId xmlns:a16="http://schemas.microsoft.com/office/drawing/2014/main" id="{05A4C597-E516-4A1F-9E0F-D4B3C77B9D65}"/>
               </a:ext>
             </a:extLst>
           </p:cNvPr>
@@ -5121,7 +5121,7 @@
           <p:cNvPr id="19" name="">
             <a:extLst xmlns:a="http://schemas.openxmlformats.org/drawingml/2006/main">
               <a:ext uri="{FF2B5EF4-FFF2-40B4-BE49-F238E27FC236}">
-                <a16:creationId xmlns:a16="http://schemas.microsoft.com/office/drawing/2014/main" id="{688DB952-77AB-4308-85AF-EC907B473248}"/>
+                <a16:creationId xmlns:a16="http://schemas.microsoft.com/office/drawing/2014/main" id="{928F6EA5-D76F-4F52-8F71-511BABC6F66B}"/>
               </a:ext>
             </a:extLst>
           </p:cNvPr>
@@ -5156,7 +5156,7 @@
           <p:cNvPr id="20" name="">
             <a:extLst xmlns:a="http://schemas.openxmlformats.org/drawingml/2006/main">
               <a:ext uri="{FF2B5EF4-FFF2-40B4-BE49-F238E27FC236}">
-                <a16:creationId xmlns:a16="http://schemas.microsoft.com/office/drawing/2014/main" id="{0C984A9E-4798-421F-86E0-0205A2847B7F}"/>
+                <a16:creationId xmlns:a16="http://schemas.microsoft.com/office/drawing/2014/main" id="{F60EDD69-CC40-4599-A732-C1B1CFE4C1F5}"/>
               </a:ext>
             </a:extLst>
           </p:cNvPr>
@@ -5214,7 +5214,7 @@
           <p:cNvPr id="21" name="">
             <a:extLst xmlns:a="http://schemas.openxmlformats.org/drawingml/2006/main">
               <a:ext uri="{FF2B5EF4-FFF2-40B4-BE49-F238E27FC236}">
-                <a16:creationId xmlns:a16="http://schemas.microsoft.com/office/drawing/2014/main" id="{0E4B4AC0-A3F8-4C8C-8D05-1A74675D8443}"/>
+                <a16:creationId xmlns:a16="http://schemas.microsoft.com/office/drawing/2014/main" id="{ED1A6053-2448-4E1E-BC07-BAF4259885DD}"/>
               </a:ext>
             </a:extLst>
           </p:cNvPr>
@@ -5306,7 +5306,7 @@
           <p:cNvPr id="22" name="">
             <a:extLst xmlns:a="http://schemas.openxmlformats.org/drawingml/2006/main">
               <a:ext uri="{FF2B5EF4-FFF2-40B4-BE49-F238E27FC236}">
-                <a16:creationId xmlns:a16="http://schemas.microsoft.com/office/drawing/2014/main" id="{4E8D4894-5F50-44CD-91D3-3118E6AE674B}"/>
+                <a16:creationId xmlns:a16="http://schemas.microsoft.com/office/drawing/2014/main" id="{C04640D6-015F-421B-8D4F-679660949209}"/>
               </a:ext>
             </a:extLst>
           </p:cNvPr>
@@ -5343,7 +5343,7 @@
           <p:cNvPr id="23" name="">
             <a:extLst xmlns:a="http://schemas.openxmlformats.org/drawingml/2006/main">
               <a:ext uri="{FF2B5EF4-FFF2-40B4-BE49-F238E27FC236}">
-                <a16:creationId xmlns:a16="http://schemas.microsoft.com/office/drawing/2014/main" id="{28FECF2F-D78C-45B7-8EE7-D7158E7B657A}"/>
+                <a16:creationId xmlns:a16="http://schemas.microsoft.com/office/drawing/2014/main" id="{62AC9757-2935-48B4-AA79-596C940503D5}"/>
               </a:ext>
             </a:extLst>
           </p:cNvPr>
@@ -5378,7 +5378,7 @@
           <p:cNvPr id="24" name="">
             <a:extLst xmlns:a="http://schemas.openxmlformats.org/drawingml/2006/main">
               <a:ext uri="{FF2B5EF4-FFF2-40B4-BE49-F238E27FC236}">
-                <a16:creationId xmlns:a16="http://schemas.microsoft.com/office/drawing/2014/main" id="{8BAC9702-ED78-4340-9A27-A9898619EC4E}"/>
+                <a16:creationId xmlns:a16="http://schemas.microsoft.com/office/drawing/2014/main" id="{31390366-C997-4E8F-B848-5FDC44871B44}"/>
               </a:ext>
             </a:extLst>
           </p:cNvPr>
@@ -5436,7 +5436,7 @@
           <p:cNvPr id="25" name="">
             <a:extLst xmlns:a="http://schemas.openxmlformats.org/drawingml/2006/main">
               <a:ext uri="{FF2B5EF4-FFF2-40B4-BE49-F238E27FC236}">
-                <a16:creationId xmlns:a16="http://schemas.microsoft.com/office/drawing/2014/main" id="{5F5CA2AA-D7FE-48EA-8CFE-D5F7EA0775F9}"/>
+                <a16:creationId xmlns:a16="http://schemas.microsoft.com/office/drawing/2014/main" id="{9B8CC9E8-2B7F-4D23-B0D1-F401AD4A03FB}"/>
               </a:ext>
             </a:extLst>
           </p:cNvPr>
@@ -5528,7 +5528,7 @@
           <p:cNvPr id="26" name="">
             <a:extLst xmlns:a="http://schemas.openxmlformats.org/drawingml/2006/main">
               <a:ext uri="{FF2B5EF4-FFF2-40B4-BE49-F238E27FC236}">
-                <a16:creationId xmlns:a16="http://schemas.microsoft.com/office/drawing/2014/main" id="{C299C63B-34CB-42E8-A656-663492606118}"/>
+                <a16:creationId xmlns:a16="http://schemas.microsoft.com/office/drawing/2014/main" id="{FC3D7DDE-3C37-4E31-BB70-4120809DC8C9}"/>
               </a:ext>
             </a:extLst>
           </p:cNvPr>
@@ -5565,7 +5565,7 @@
           <p:cNvPr id="27" name="">
             <a:extLst xmlns:a="http://schemas.openxmlformats.org/drawingml/2006/main">
               <a:ext uri="{FF2B5EF4-FFF2-40B4-BE49-F238E27FC236}">
-                <a16:creationId xmlns:a16="http://schemas.microsoft.com/office/drawing/2014/main" id="{0CAACB53-BCDA-46FD-AE5B-DC80337947B5}"/>
+                <a16:creationId xmlns:a16="http://schemas.microsoft.com/office/drawing/2014/main" id="{82BB3830-8E41-425C-AB6A-6AA71DDF621C}"/>
               </a:ext>
             </a:extLst>
           </p:cNvPr>
@@ -5600,7 +5600,7 @@
           <p:cNvPr id="28" name="">
             <a:extLst xmlns:a="http://schemas.openxmlformats.org/drawingml/2006/main">
               <a:ext uri="{FF2B5EF4-FFF2-40B4-BE49-F238E27FC236}">
-                <a16:creationId xmlns:a16="http://schemas.microsoft.com/office/drawing/2014/main" id="{FA144622-5D3C-4966-9FE5-E66230124759}"/>
+                <a16:creationId xmlns:a16="http://schemas.microsoft.com/office/drawing/2014/main" id="{1CD61796-2E2D-4AD9-9348-2F2702DBD5B9}"/>
               </a:ext>
             </a:extLst>
           </p:cNvPr>
@@ -5658,7 +5658,7 @@
           <p:cNvPr id="29" name="">
             <a:extLst xmlns:a="http://schemas.openxmlformats.org/drawingml/2006/main">
               <a:ext uri="{FF2B5EF4-FFF2-40B4-BE49-F238E27FC236}">
-                <a16:creationId xmlns:a16="http://schemas.microsoft.com/office/drawing/2014/main" id="{7295B26B-D5B0-4F32-9CCF-080768626ABA}"/>
+                <a16:creationId xmlns:a16="http://schemas.microsoft.com/office/drawing/2014/main" id="{417128D8-4258-44EE-A4FA-A1066AE49B91}"/>
               </a:ext>
             </a:extLst>
           </p:cNvPr>
@@ -5733,7 +5733,7 @@
           <p:cNvPr id="30" name="">
             <a:extLst xmlns:a="http://schemas.openxmlformats.org/drawingml/2006/main">
               <a:ext uri="{FF2B5EF4-FFF2-40B4-BE49-F238E27FC236}">
-                <a16:creationId xmlns:a16="http://schemas.microsoft.com/office/drawing/2014/main" id="{3B7E2732-E2A0-4CD2-B917-84916739130B}"/>
+                <a16:creationId xmlns:a16="http://schemas.microsoft.com/office/drawing/2014/main" id="{C52394EC-0670-41A7-87D0-E98B185B7BD7}"/>
               </a:ext>
             </a:extLst>
           </p:cNvPr>
@@ -5770,7 +5770,7 @@
           <p:cNvPr id="31" name="">
             <a:extLst xmlns:a="http://schemas.openxmlformats.org/drawingml/2006/main">
               <a:ext uri="{FF2B5EF4-FFF2-40B4-BE49-F238E27FC236}">
-                <a16:creationId xmlns:a16="http://schemas.microsoft.com/office/drawing/2014/main" id="{F3905A18-3E3A-47F2-BB5A-F6777F00AB09}"/>
+                <a16:creationId xmlns:a16="http://schemas.microsoft.com/office/drawing/2014/main" id="{3CB55DB7-AA4C-45E9-A3A1-6E62EF679DF0}"/>
               </a:ext>
             </a:extLst>
           </p:cNvPr>
@@ -5805,7 +5805,7 @@
           <p:cNvPr id="32" name="">
             <a:extLst xmlns:a="http://schemas.openxmlformats.org/drawingml/2006/main">
               <a:ext uri="{FF2B5EF4-FFF2-40B4-BE49-F238E27FC236}">
-                <a16:creationId xmlns:a16="http://schemas.microsoft.com/office/drawing/2014/main" id="{F9C73579-3A6D-4143-A380-800F93E4C35E}"/>
+                <a16:creationId xmlns:a16="http://schemas.microsoft.com/office/drawing/2014/main" id="{501F7918-CC4F-4F09-B056-6678F6EE6443}"/>
               </a:ext>
             </a:extLst>
           </p:cNvPr>
@@ -5863,7 +5863,7 @@
           <p:cNvPr id="33" name="">
             <a:extLst xmlns:a="http://schemas.openxmlformats.org/drawingml/2006/main">
               <a:ext uri="{FF2B5EF4-FFF2-40B4-BE49-F238E27FC236}">
-                <a16:creationId xmlns:a16="http://schemas.microsoft.com/office/drawing/2014/main" id="{CFCD5245-9CA7-498B-A0CD-D7536A3D3562}"/>
+                <a16:creationId xmlns:a16="http://schemas.microsoft.com/office/drawing/2014/main" id="{5606EC4B-786F-41D0-9800-8F542662B54E}"/>
               </a:ext>
             </a:extLst>
           </p:cNvPr>
@@ -5938,7 +5938,7 @@
           <p:cNvPr id="34" name="">
             <a:extLst xmlns:a="http://schemas.openxmlformats.org/drawingml/2006/main">
               <a:ext uri="{FF2B5EF4-FFF2-40B4-BE49-F238E27FC236}">
-                <a16:creationId xmlns:a16="http://schemas.microsoft.com/office/drawing/2014/main" id="{B590F931-1705-467E-9A84-A3DF2D9317D5}"/>
+                <a16:creationId xmlns:a16="http://schemas.microsoft.com/office/drawing/2014/main" id="{1907A304-3B5E-4AEB-B074-176A3ECD9632}"/>
               </a:ext>
             </a:extLst>
           </p:cNvPr>
@@ -5973,7 +5973,7 @@
           <p:cNvPr id="35" name="">
             <a:extLst xmlns:a="http://schemas.openxmlformats.org/drawingml/2006/main">
               <a:ext uri="{FF2B5EF4-FFF2-40B4-BE49-F238E27FC236}">
-                <a16:creationId xmlns:a16="http://schemas.microsoft.com/office/drawing/2014/main" id="{63D238C3-92BF-4915-B1F6-BA1E34427453}"/>
+                <a16:creationId xmlns:a16="http://schemas.microsoft.com/office/drawing/2014/main" id="{ABC98EFA-7954-40F8-BB58-72C960AF46DE}"/>
               </a:ext>
             </a:extLst>
           </p:cNvPr>
@@ -6008,7 +6008,7 @@
           <p:cNvPr id="36" name="">
             <a:extLst xmlns:a="http://schemas.openxmlformats.org/drawingml/2006/main">
               <a:ext uri="{FF2B5EF4-FFF2-40B4-BE49-F238E27FC236}">
-                <a16:creationId xmlns:a16="http://schemas.microsoft.com/office/drawing/2014/main" id="{2AD828A5-A1DB-49F7-AC58-E398DB307E9F}"/>
+                <a16:creationId xmlns:a16="http://schemas.microsoft.com/office/drawing/2014/main" id="{DA6A8A0E-8013-43D4-92A1-C2EAEEA45CAE}"/>
               </a:ext>
             </a:extLst>
           </p:cNvPr>
@@ -6066,7 +6066,7 @@
           <p:cNvPr id="37" name="">
             <a:extLst xmlns:a="http://schemas.openxmlformats.org/drawingml/2006/main">
               <a:ext uri="{FF2B5EF4-FFF2-40B4-BE49-F238E27FC236}">
-                <a16:creationId xmlns:a16="http://schemas.microsoft.com/office/drawing/2014/main" id="{52F95EAF-3E14-4EAE-A6AD-CFA8237EF148}"/>
+                <a16:creationId xmlns:a16="http://schemas.microsoft.com/office/drawing/2014/main" id="{9485E434-3817-461A-935C-BF8263B9751D}"/>
               </a:ext>
             </a:extLst>
           </p:cNvPr>
@@ -6122,7 +6122,7 @@
     </p:spTree>
     <p:extLst>
       <p:ext uri="{BB962C8B-B14F-4D97-AF65-F5344CB8AC3E}">
-        <p14:creationId xmlns:p14="http://schemas.microsoft.com/office/powerpoint/2010/main" val="1034592955"/>
+        <p14:creationId xmlns:p14="http://schemas.microsoft.com/office/powerpoint/2010/main" val="1782805291"/>
       </p:ext>
     </p:extLst>
   </p:cSld>
@@ -6153,7 +6153,7 @@
           <p:cNvPr id="1" name="Slide Number Placeholder 5">
             <a:extLst xmlns:a="http://schemas.openxmlformats.org/drawingml/2006/main">
               <a:ext uri="{FF2B5EF4-FFF2-40B4-BE49-F238E27FC236}">
-                <a16:creationId xmlns:a16="http://schemas.microsoft.com/office/drawing/2014/main" id="{C5A324B5-703D-4DE1-A920-5C56CD46E34C}"/>
+                <a16:creationId xmlns:a16="http://schemas.microsoft.com/office/drawing/2014/main" id="{E12CE447-476B-4BAE-A1FF-E669E79965E6}"/>
               </a:ext>
             </a:extLst>
           </p:cNvPr>
@@ -6189,7 +6189,7 @@
           <p:nvPr/>
         </p:nvPicPr>
         <p:blipFill>
-          <a:blip xmlns:r="http://schemas.openxmlformats.org/officeDocument/2006/relationships" xmlns:a="http://schemas.openxmlformats.org/drawingml/2006/main" r:embed="Reee44c2ace5b48b7"/>
+          <a:blip xmlns:r="http://schemas.openxmlformats.org/officeDocument/2006/relationships" xmlns:a="http://schemas.openxmlformats.org/drawingml/2006/main" r:embed="R5cf176069fa3486b"/>
           <a:srcRect xmlns:a="http://schemas.openxmlformats.org/drawingml/2006/main" l="0" t="21875" r="0" b="21875"/>
           <a:stretch xmlns:a="http://schemas.openxmlformats.org/drawingml/2006/main">
             <a:fillRect l="0" t="0" r="0" b="0"/>
@@ -6210,7 +6210,7 @@
           <p:cNvPr id="3" name="">
             <a:extLst xmlns:a="http://schemas.openxmlformats.org/drawingml/2006/main">
               <a:ext uri="{FF2B5EF4-FFF2-40B4-BE49-F238E27FC236}">
-                <a16:creationId xmlns:a16="http://schemas.microsoft.com/office/drawing/2014/main" id="{E6415012-93CE-419D-8963-5660A4D4D8B8}"/>
+                <a16:creationId xmlns:a16="http://schemas.microsoft.com/office/drawing/2014/main" id="{05FE0591-4EBF-456F-8AC7-839659264A1C}"/>
               </a:ext>
             </a:extLst>
           </p:cNvPr>
@@ -6245,7 +6245,7 @@
           <p:cNvPr id="4" name="">
             <a:extLst xmlns:a="http://schemas.openxmlformats.org/drawingml/2006/main">
               <a:ext uri="{FF2B5EF4-FFF2-40B4-BE49-F238E27FC236}">
-                <a16:creationId xmlns:a16="http://schemas.microsoft.com/office/drawing/2014/main" id="{92626966-6A44-4F64-A0E0-F086DF933677}"/>
+                <a16:creationId xmlns:a16="http://schemas.microsoft.com/office/drawing/2014/main" id="{53E1A65E-7774-444E-9A39-67D67554D12B}"/>
               </a:ext>
             </a:extLst>
           </p:cNvPr>
@@ -6280,7 +6280,7 @@
           <p:cNvPr id="5" name="">
             <a:extLst xmlns:a="http://schemas.openxmlformats.org/drawingml/2006/main">
               <a:ext uri="{FF2B5EF4-FFF2-40B4-BE49-F238E27FC236}">
-                <a16:creationId xmlns:a16="http://schemas.microsoft.com/office/drawing/2014/main" id="{ECF81256-4E17-4D80-9ACB-429AA9840B23}"/>
+                <a16:creationId xmlns:a16="http://schemas.microsoft.com/office/drawing/2014/main" id="{71880B04-6F7E-4879-BB47-32E946BAF024}"/>
               </a:ext>
             </a:extLst>
           </p:cNvPr>
@@ -6317,7 +6317,7 @@
           <p:cNvPr id="6" name="">
             <a:extLst xmlns:a="http://schemas.openxmlformats.org/drawingml/2006/main">
               <a:ext uri="{FF2B5EF4-FFF2-40B4-BE49-F238E27FC236}">
-                <a16:creationId xmlns:a16="http://schemas.microsoft.com/office/drawing/2014/main" id="{1B46640F-5BDA-4076-B7F2-8DC624DFF839}"/>
+                <a16:creationId xmlns:a16="http://schemas.microsoft.com/office/drawing/2014/main" id="{CB584B2F-A9FC-4A16-B060-B73EF2BAD8EE}"/>
               </a:ext>
             </a:extLst>
           </p:cNvPr>
@@ -6354,7 +6354,7 @@
           <p:cNvPr id="7" name="">
             <a:extLst xmlns:a="http://schemas.openxmlformats.org/drawingml/2006/main">
               <a:ext uri="{FF2B5EF4-FFF2-40B4-BE49-F238E27FC236}">
-                <a16:creationId xmlns:a16="http://schemas.microsoft.com/office/drawing/2014/main" id="{93C83A10-A72E-46D4-83D4-9BA9E23F6713}"/>
+                <a16:creationId xmlns:a16="http://schemas.microsoft.com/office/drawing/2014/main" id="{A52FBEFA-C7EF-482C-8527-3799D8585ADB}"/>
               </a:ext>
             </a:extLst>
           </p:cNvPr>
@@ -6391,7 +6391,7 @@
           <p:cNvPr id="8" name="">
             <a:extLst xmlns:a="http://schemas.openxmlformats.org/drawingml/2006/main">
               <a:ext uri="{FF2B5EF4-FFF2-40B4-BE49-F238E27FC236}">
-                <a16:creationId xmlns:a16="http://schemas.microsoft.com/office/drawing/2014/main" id="{E11E8CB7-054F-4F11-9EE1-65BBB637104B}"/>
+                <a16:creationId xmlns:a16="http://schemas.microsoft.com/office/drawing/2014/main" id="{A2E7140B-585D-4EEE-8070-FA653D212BE0}"/>
               </a:ext>
             </a:extLst>
           </p:cNvPr>
@@ -6428,7 +6428,7 @@
           <p:cNvPr id="9" name="">
             <a:extLst xmlns:a="http://schemas.openxmlformats.org/drawingml/2006/main">
               <a:ext uri="{FF2B5EF4-FFF2-40B4-BE49-F238E27FC236}">
-                <a16:creationId xmlns:a16="http://schemas.microsoft.com/office/drawing/2014/main" id="{0251E736-6239-4BEA-9F35-4686A47F9ADE}"/>
+                <a16:creationId xmlns:a16="http://schemas.microsoft.com/office/drawing/2014/main" id="{DF1BFB32-E0E7-4507-81E2-5529271D5CDD}"/>
               </a:ext>
             </a:extLst>
           </p:cNvPr>
@@ -6486,7 +6486,7 @@
           <p:cNvPr id="10" name="">
             <a:extLst xmlns:a="http://schemas.openxmlformats.org/drawingml/2006/main">
               <a:ext uri="{FF2B5EF4-FFF2-40B4-BE49-F238E27FC236}">
-                <a16:creationId xmlns:a16="http://schemas.microsoft.com/office/drawing/2014/main" id="{A0F7E5C4-AE7F-4673-8E41-04EC8E2A0212}"/>
+                <a16:creationId xmlns:a16="http://schemas.microsoft.com/office/drawing/2014/main" id="{ABBD20BE-7227-4841-9AC6-7A1470A28E53}"/>
               </a:ext>
             </a:extLst>
           </p:cNvPr>
@@ -6544,7 +6544,7 @@
           <p:cNvPr id="11" name="">
             <a:extLst xmlns:a="http://schemas.openxmlformats.org/drawingml/2006/main">
               <a:ext uri="{FF2B5EF4-FFF2-40B4-BE49-F238E27FC236}">
-                <a16:creationId xmlns:a16="http://schemas.microsoft.com/office/drawing/2014/main" id="{ED51146E-F65F-4AFA-8092-5C5F0668FDAA}"/>
+                <a16:creationId xmlns:a16="http://schemas.microsoft.com/office/drawing/2014/main" id="{2B893AD9-81D5-4D8A-B47C-BB10191F0347}"/>
               </a:ext>
             </a:extLst>
           </p:cNvPr>
@@ -6579,7 +6579,7 @@
           <p:cNvPr id="12" name="">
             <a:extLst xmlns:a="http://schemas.openxmlformats.org/drawingml/2006/main">
               <a:ext uri="{FF2B5EF4-FFF2-40B4-BE49-F238E27FC236}">
-                <a16:creationId xmlns:a16="http://schemas.microsoft.com/office/drawing/2014/main" id="{707F5BB0-CEC1-49B9-B424-C575767E7720}"/>
+                <a16:creationId xmlns:a16="http://schemas.microsoft.com/office/drawing/2014/main" id="{C0F4889B-3840-4689-AE10-00199D88CD74}"/>
               </a:ext>
             </a:extLst>
           </p:cNvPr>
@@ -6612,7 +6612,7 @@
           <p:cNvPr id="13" name="">
             <a:extLst xmlns:a="http://schemas.openxmlformats.org/drawingml/2006/main">
               <a:ext uri="{FF2B5EF4-FFF2-40B4-BE49-F238E27FC236}">
-                <a16:creationId xmlns:a16="http://schemas.microsoft.com/office/drawing/2014/main" id="{DDBD6A73-A34F-4779-A0E3-6A17A18BA0E0}"/>
+                <a16:creationId xmlns:a16="http://schemas.microsoft.com/office/drawing/2014/main" id="{7BA2165B-E9EF-46D6-A41D-A8D9A5FCCC53}"/>
               </a:ext>
             </a:extLst>
           </p:cNvPr>
@@ -6687,7 +6687,7 @@
           <p:cNvPr id="14" name="">
             <a:extLst xmlns:a="http://schemas.openxmlformats.org/drawingml/2006/main">
               <a:ext uri="{FF2B5EF4-FFF2-40B4-BE49-F238E27FC236}">
-                <a16:creationId xmlns:a16="http://schemas.microsoft.com/office/drawing/2014/main" id="{3FCCE651-3340-430A-867C-454953EA75D4}"/>
+                <a16:creationId xmlns:a16="http://schemas.microsoft.com/office/drawing/2014/main" id="{C1B5517D-02D5-42B3-B174-D5CA690E9283}"/>
               </a:ext>
             </a:extLst>
           </p:cNvPr>
@@ -6722,7 +6722,7 @@
           <p:cNvPr id="15" name="">
             <a:extLst xmlns:a="http://schemas.openxmlformats.org/drawingml/2006/main">
               <a:ext uri="{FF2B5EF4-FFF2-40B4-BE49-F238E27FC236}">
-                <a16:creationId xmlns:a16="http://schemas.microsoft.com/office/drawing/2014/main" id="{D7854F1C-541E-4795-BB7D-7CEC38D97B57}"/>
+                <a16:creationId xmlns:a16="http://schemas.microsoft.com/office/drawing/2014/main" id="{1A1E0697-767B-4998-9C26-C7ACFB0011E8}"/>
               </a:ext>
             </a:extLst>
           </p:cNvPr>
@@ -6757,7 +6757,7 @@
           <p:cNvPr id="16" name="">
             <a:extLst xmlns:a="http://schemas.openxmlformats.org/drawingml/2006/main">
               <a:ext uri="{FF2B5EF4-FFF2-40B4-BE49-F238E27FC236}">
-                <a16:creationId xmlns:a16="http://schemas.microsoft.com/office/drawing/2014/main" id="{C6C1C7B5-9B33-4FCB-AD15-5B7931439FF2}"/>
+                <a16:creationId xmlns:a16="http://schemas.microsoft.com/office/drawing/2014/main" id="{3F525599-6856-4836-894C-3722D0C14D9E}"/>
               </a:ext>
             </a:extLst>
           </p:cNvPr>
@@ -6815,7 +6815,7 @@
           <p:cNvPr id="17" name="">
             <a:extLst xmlns:a="http://schemas.openxmlformats.org/drawingml/2006/main">
               <a:ext uri="{FF2B5EF4-FFF2-40B4-BE49-F238E27FC236}">
-                <a16:creationId xmlns:a16="http://schemas.microsoft.com/office/drawing/2014/main" id="{E7652316-9406-418D-9A47-8F15A442D2B5}"/>
+                <a16:creationId xmlns:a16="http://schemas.microsoft.com/office/drawing/2014/main" id="{BF7D4763-7271-4AB9-8D3C-B622AB701222}"/>
               </a:ext>
             </a:extLst>
           </p:cNvPr>
@@ -6907,7 +6907,7 @@
           <p:cNvPr id="18" name="">
             <a:extLst xmlns:a="http://schemas.openxmlformats.org/drawingml/2006/main">
               <a:ext uri="{FF2B5EF4-FFF2-40B4-BE49-F238E27FC236}">
-                <a16:creationId xmlns:a16="http://schemas.microsoft.com/office/drawing/2014/main" id="{C5C0CD3A-43F5-42D6-BD9D-B308EA68EDB4}"/>
+                <a16:creationId xmlns:a16="http://schemas.microsoft.com/office/drawing/2014/main" id="{E0D65D5E-B585-4054-B53B-00D146C2C58E}"/>
               </a:ext>
             </a:extLst>
           </p:cNvPr>
@@ -6944,7 +6944,7 @@
           <p:cNvPr id="19" name="">
             <a:extLst xmlns:a="http://schemas.openxmlformats.org/drawingml/2006/main">
               <a:ext uri="{FF2B5EF4-FFF2-40B4-BE49-F238E27FC236}">
-                <a16:creationId xmlns:a16="http://schemas.microsoft.com/office/drawing/2014/main" id="{C3D7DFA0-E29D-40E3-83E1-3BE6240D2BFC}"/>
+                <a16:creationId xmlns:a16="http://schemas.microsoft.com/office/drawing/2014/main" id="{A84996C3-66B5-44EF-9CC8-367026EC2707}"/>
               </a:ext>
             </a:extLst>
           </p:cNvPr>
@@ -6979,7 +6979,7 @@
           <p:cNvPr id="20" name="">
             <a:extLst xmlns:a="http://schemas.openxmlformats.org/drawingml/2006/main">
               <a:ext uri="{FF2B5EF4-FFF2-40B4-BE49-F238E27FC236}">
-                <a16:creationId xmlns:a16="http://schemas.microsoft.com/office/drawing/2014/main" id="{2462642F-1698-4D4F-A78A-31644144CC0A}"/>
+                <a16:creationId xmlns:a16="http://schemas.microsoft.com/office/drawing/2014/main" id="{485F01DB-35A1-4E7A-95B2-B6F415815E88}"/>
               </a:ext>
             </a:extLst>
           </p:cNvPr>
@@ -7037,7 +7037,7 @@
           <p:cNvPr id="21" name="">
             <a:extLst xmlns:a="http://schemas.openxmlformats.org/drawingml/2006/main">
               <a:ext uri="{FF2B5EF4-FFF2-40B4-BE49-F238E27FC236}">
-                <a16:creationId xmlns:a16="http://schemas.microsoft.com/office/drawing/2014/main" id="{5E5E52F4-651B-4023-A898-CD1101607EF0}"/>
+                <a16:creationId xmlns:a16="http://schemas.microsoft.com/office/drawing/2014/main" id="{8A89806E-05DB-4813-97B8-D077B3BDC34B}"/>
               </a:ext>
             </a:extLst>
           </p:cNvPr>
@@ -7112,7 +7112,7 @@
           <p:cNvPr id="22" name="">
             <a:extLst xmlns:a="http://schemas.openxmlformats.org/drawingml/2006/main">
               <a:ext uri="{FF2B5EF4-FFF2-40B4-BE49-F238E27FC236}">
-                <a16:creationId xmlns:a16="http://schemas.microsoft.com/office/drawing/2014/main" id="{DFD08784-2FCA-4381-9FA6-E790B413FEF8}"/>
+                <a16:creationId xmlns:a16="http://schemas.microsoft.com/office/drawing/2014/main" id="{080179DE-3D04-4C22-85C0-155F7E46CAD0}"/>
               </a:ext>
             </a:extLst>
           </p:cNvPr>
@@ -7149,7 +7149,7 @@
           <p:cNvPr id="23" name="">
             <a:extLst xmlns:a="http://schemas.openxmlformats.org/drawingml/2006/main">
               <a:ext uri="{FF2B5EF4-FFF2-40B4-BE49-F238E27FC236}">
-                <a16:creationId xmlns:a16="http://schemas.microsoft.com/office/drawing/2014/main" id="{E1A98BB8-C7D5-437E-9BB2-2603587F619C}"/>
+                <a16:creationId xmlns:a16="http://schemas.microsoft.com/office/drawing/2014/main" id="{12685967-B6B6-4D18-9B10-C0378A607448}"/>
               </a:ext>
             </a:extLst>
           </p:cNvPr>
@@ -7184,7 +7184,7 @@
           <p:cNvPr id="24" name="">
             <a:extLst xmlns:a="http://schemas.openxmlformats.org/drawingml/2006/main">
               <a:ext uri="{FF2B5EF4-FFF2-40B4-BE49-F238E27FC236}">
-                <a16:creationId xmlns:a16="http://schemas.microsoft.com/office/drawing/2014/main" id="{E7701DAB-176C-4F1A-A54F-4EC43B8DF16B}"/>
+                <a16:creationId xmlns:a16="http://schemas.microsoft.com/office/drawing/2014/main" id="{688BE405-ADA1-4032-B931-01AA03C0AD52}"/>
               </a:ext>
             </a:extLst>
           </p:cNvPr>
@@ -7242,7 +7242,7 @@
           <p:cNvPr id="25" name="">
             <a:extLst xmlns:a="http://schemas.openxmlformats.org/drawingml/2006/main">
               <a:ext uri="{FF2B5EF4-FFF2-40B4-BE49-F238E27FC236}">
-                <a16:creationId xmlns:a16="http://schemas.microsoft.com/office/drawing/2014/main" id="{4025825A-1E18-4D1E-8053-FC1122777C36}"/>
+                <a16:creationId xmlns:a16="http://schemas.microsoft.com/office/drawing/2014/main" id="{B6195A30-CA7F-4D81-93B2-2D66CE07777A}"/>
               </a:ext>
             </a:extLst>
           </p:cNvPr>
@@ -7317,7 +7317,7 @@
           <p:cNvPr id="26" name="">
             <a:extLst xmlns:a="http://schemas.openxmlformats.org/drawingml/2006/main">
               <a:ext uri="{FF2B5EF4-FFF2-40B4-BE49-F238E27FC236}">
-                <a16:creationId xmlns:a16="http://schemas.microsoft.com/office/drawing/2014/main" id="{8BC51728-040A-4647-94AA-EC0159B2242E}"/>
+                <a16:creationId xmlns:a16="http://schemas.microsoft.com/office/drawing/2014/main" id="{72192983-648D-47BB-89BB-4E240B79DC4C}"/>
               </a:ext>
             </a:extLst>
           </p:cNvPr>
@@ -7352,7 +7352,7 @@
           <p:cNvPr id="27" name="">
             <a:extLst xmlns:a="http://schemas.openxmlformats.org/drawingml/2006/main">
               <a:ext uri="{FF2B5EF4-FFF2-40B4-BE49-F238E27FC236}">
-                <a16:creationId xmlns:a16="http://schemas.microsoft.com/office/drawing/2014/main" id="{21807D95-707A-4D37-9056-87136B12CFE3}"/>
+                <a16:creationId xmlns:a16="http://schemas.microsoft.com/office/drawing/2014/main" id="{15700A4B-6841-4F61-8C83-D0565F51BD5B}"/>
               </a:ext>
             </a:extLst>
           </p:cNvPr>
@@ -7387,7 +7387,7 @@
           <p:cNvPr id="28" name="">
             <a:extLst xmlns:a="http://schemas.openxmlformats.org/drawingml/2006/main">
               <a:ext uri="{FF2B5EF4-FFF2-40B4-BE49-F238E27FC236}">
-                <a16:creationId xmlns:a16="http://schemas.microsoft.com/office/drawing/2014/main" id="{D7B3F8CD-2C18-4D77-877F-B759271BA50B}"/>
+                <a16:creationId xmlns:a16="http://schemas.microsoft.com/office/drawing/2014/main" id="{6746FB12-B3CC-4939-B356-0B8EB84236B0}"/>
               </a:ext>
             </a:extLst>
           </p:cNvPr>
@@ -7445,7 +7445,7 @@
           <p:cNvPr id="29" name="">
             <a:extLst xmlns:a="http://schemas.openxmlformats.org/drawingml/2006/main">
               <a:ext uri="{FF2B5EF4-FFF2-40B4-BE49-F238E27FC236}">
-                <a16:creationId xmlns:a16="http://schemas.microsoft.com/office/drawing/2014/main" id="{0C318382-F0F4-4C16-9CB1-226502764E2B}"/>
+                <a16:creationId xmlns:a16="http://schemas.microsoft.com/office/drawing/2014/main" id="{B9B22DEA-F9E3-4D78-B9CA-C1F46244C4AB}"/>
               </a:ext>
             </a:extLst>
           </p:cNvPr>
@@ -7503,7 +7503,7 @@
           <p:cNvPr id="30" name="">
             <a:extLst xmlns:a="http://schemas.openxmlformats.org/drawingml/2006/main">
               <a:ext uri="{FF2B5EF4-FFF2-40B4-BE49-F238E27FC236}">
-                <a16:creationId xmlns:a16="http://schemas.microsoft.com/office/drawing/2014/main" id="{748299AC-8E26-4A8C-A11A-E73051B72810}"/>
+                <a16:creationId xmlns:a16="http://schemas.microsoft.com/office/drawing/2014/main" id="{98FC0606-F49D-4CF5-9171-A2D513400360}"/>
               </a:ext>
             </a:extLst>
           </p:cNvPr>
@@ -7538,7 +7538,7 @@
           <p:cNvPr id="31" name="">
             <a:extLst xmlns:a="http://schemas.openxmlformats.org/drawingml/2006/main">
               <a:ext uri="{FF2B5EF4-FFF2-40B4-BE49-F238E27FC236}">
-                <a16:creationId xmlns:a16="http://schemas.microsoft.com/office/drawing/2014/main" id="{8620376C-1A2F-4807-A55A-7D569E2E3467}"/>
+                <a16:creationId xmlns:a16="http://schemas.microsoft.com/office/drawing/2014/main" id="{49E0466E-BD81-4330-B3F8-3FC897C2CBB5}"/>
               </a:ext>
             </a:extLst>
           </p:cNvPr>
@@ -7596,7 +7596,7 @@
           <p:cNvPr id="32" name="">
             <a:extLst xmlns:a="http://schemas.openxmlformats.org/drawingml/2006/main">
               <a:ext uri="{FF2B5EF4-FFF2-40B4-BE49-F238E27FC236}">
-                <a16:creationId xmlns:a16="http://schemas.microsoft.com/office/drawing/2014/main" id="{BAC7CE47-1FBD-4437-A507-6FF64C66303F}"/>
+                <a16:creationId xmlns:a16="http://schemas.microsoft.com/office/drawing/2014/main" id="{B88DE70F-B4F5-445F-AB6B-D3A5D6D704E8}"/>
               </a:ext>
             </a:extLst>
           </p:cNvPr>
@@ -7654,7 +7654,7 @@
           <p:cNvPr id="33" name="">
             <a:extLst xmlns:a="http://schemas.openxmlformats.org/drawingml/2006/main">
               <a:ext uri="{FF2B5EF4-FFF2-40B4-BE49-F238E27FC236}">
-                <a16:creationId xmlns:a16="http://schemas.microsoft.com/office/drawing/2014/main" id="{0BF795FA-2AB2-402C-8341-33180E69A23D}"/>
+                <a16:creationId xmlns:a16="http://schemas.microsoft.com/office/drawing/2014/main" id="{3C86D310-FF81-48EB-A668-1085D89C7EFD}"/>
               </a:ext>
             </a:extLst>
           </p:cNvPr>
@@ -7710,7 +7710,7 @@
     </p:spTree>
     <p:extLst>
       <p:ext uri="{BB962C8B-B14F-4D97-AF65-F5344CB8AC3E}">
-        <p14:creationId xmlns:p14="http://schemas.microsoft.com/office/powerpoint/2010/main" val="751935747"/>
+        <p14:creationId xmlns:p14="http://schemas.microsoft.com/office/powerpoint/2010/main" val="1334124735"/>
       </p:ext>
     </p:extLst>
   </p:cSld>
@@ -7741,7 +7741,7 @@
           <p:cNvPr id="1" name="Slide Number Placeholder 5">
             <a:extLst xmlns:a="http://schemas.openxmlformats.org/drawingml/2006/main">
               <a:ext uri="{FF2B5EF4-FFF2-40B4-BE49-F238E27FC236}">
-                <a16:creationId xmlns:a16="http://schemas.microsoft.com/office/drawing/2014/main" id="{C5A324B5-703D-4DE1-A920-5C56CD46E34C}"/>
+                <a16:creationId xmlns:a16="http://schemas.microsoft.com/office/drawing/2014/main" id="{E12CE447-476B-4BAE-A1FF-E669E79965E6}"/>
               </a:ext>
             </a:extLst>
           </p:cNvPr>
@@ -7777,7 +7777,7 @@
           <p:nvPr/>
         </p:nvPicPr>
         <p:blipFill>
-          <a:blip xmlns:r="http://schemas.openxmlformats.org/officeDocument/2006/relationships" xmlns:a="http://schemas.openxmlformats.org/drawingml/2006/main" r:embed="R1d6812a3b8b9464a"/>
+          <a:blip xmlns:r="http://schemas.openxmlformats.org/officeDocument/2006/relationships" xmlns:a="http://schemas.openxmlformats.org/drawingml/2006/main" r:embed="Rf5fefd5a0f61438b"/>
           <a:srcRect xmlns:a="http://schemas.openxmlformats.org/drawingml/2006/main" l="0" t="21875" r="0" b="21875"/>
           <a:stretch xmlns:a="http://schemas.openxmlformats.org/drawingml/2006/main">
             <a:fillRect l="0" t="0" r="0" b="0"/>
@@ -7798,7 +7798,7 @@
           <p:cNvPr id="3" name="">
             <a:extLst xmlns:a="http://schemas.openxmlformats.org/drawingml/2006/main">
               <a:ext uri="{FF2B5EF4-FFF2-40B4-BE49-F238E27FC236}">
-                <a16:creationId xmlns:a16="http://schemas.microsoft.com/office/drawing/2014/main" id="{61B2F2FE-D45E-4F28-8207-98FD5FDD3AC6}"/>
+                <a16:creationId xmlns:a16="http://schemas.microsoft.com/office/drawing/2014/main" id="{9384C98C-857B-44F1-8730-842DD6CF5344}"/>
               </a:ext>
             </a:extLst>
           </p:cNvPr>
@@ -7833,7 +7833,7 @@
           <p:cNvPr id="4" name="">
             <a:extLst xmlns:a="http://schemas.openxmlformats.org/drawingml/2006/main">
               <a:ext uri="{FF2B5EF4-FFF2-40B4-BE49-F238E27FC236}">
-                <a16:creationId xmlns:a16="http://schemas.microsoft.com/office/drawing/2014/main" id="{7959BEDD-BB45-4594-B509-1B3C33A56CFE}"/>
+                <a16:creationId xmlns:a16="http://schemas.microsoft.com/office/drawing/2014/main" id="{D674D4FC-FFC7-4ABB-9406-1E580C6EA1C0}"/>
               </a:ext>
             </a:extLst>
           </p:cNvPr>
@@ -7868,7 +7868,7 @@
           <p:cNvPr id="5" name="">
             <a:extLst xmlns:a="http://schemas.openxmlformats.org/drawingml/2006/main">
               <a:ext uri="{FF2B5EF4-FFF2-40B4-BE49-F238E27FC236}">
-                <a16:creationId xmlns:a16="http://schemas.microsoft.com/office/drawing/2014/main" id="{17D64DE0-A02E-4316-B61D-10346678C851}"/>
+                <a16:creationId xmlns:a16="http://schemas.microsoft.com/office/drawing/2014/main" id="{C420D122-7475-4611-8B91-7969E183BC8A}"/>
               </a:ext>
             </a:extLst>
           </p:cNvPr>
@@ -7905,7 +7905,7 @@
           <p:cNvPr id="6" name="">
             <a:extLst xmlns:a="http://schemas.openxmlformats.org/drawingml/2006/main">
               <a:ext uri="{FF2B5EF4-FFF2-40B4-BE49-F238E27FC236}">
-                <a16:creationId xmlns:a16="http://schemas.microsoft.com/office/drawing/2014/main" id="{AB646430-18B3-4305-9232-7FF46E50C256}"/>
+                <a16:creationId xmlns:a16="http://schemas.microsoft.com/office/drawing/2014/main" id="{F714CD26-F999-4CFC-BF53-65E57786D881}"/>
               </a:ext>
             </a:extLst>
           </p:cNvPr>
@@ -7942,7 +7942,7 @@
           <p:cNvPr id="7" name="">
             <a:extLst xmlns:a="http://schemas.openxmlformats.org/drawingml/2006/main">
               <a:ext uri="{FF2B5EF4-FFF2-40B4-BE49-F238E27FC236}">
-                <a16:creationId xmlns:a16="http://schemas.microsoft.com/office/drawing/2014/main" id="{FDB720F7-2A5A-422E-8757-5A878BC7BB72}"/>
+                <a16:creationId xmlns:a16="http://schemas.microsoft.com/office/drawing/2014/main" id="{02D6D254-8613-4E69-9273-8735EA4E55E9}"/>
               </a:ext>
             </a:extLst>
           </p:cNvPr>
@@ -7979,7 +7979,7 @@
           <p:cNvPr id="8" name="">
             <a:extLst xmlns:a="http://schemas.openxmlformats.org/drawingml/2006/main">
               <a:ext uri="{FF2B5EF4-FFF2-40B4-BE49-F238E27FC236}">
-                <a16:creationId xmlns:a16="http://schemas.microsoft.com/office/drawing/2014/main" id="{2399A639-A4BA-4DAB-ACCC-327AA5299386}"/>
+                <a16:creationId xmlns:a16="http://schemas.microsoft.com/office/drawing/2014/main" id="{0591ADF7-41AF-41F4-9340-7444EB809B0C}"/>
               </a:ext>
             </a:extLst>
           </p:cNvPr>
@@ -8016,7 +8016,7 @@
           <p:cNvPr id="9" name="">
             <a:extLst xmlns:a="http://schemas.openxmlformats.org/drawingml/2006/main">
               <a:ext uri="{FF2B5EF4-FFF2-40B4-BE49-F238E27FC236}">
-                <a16:creationId xmlns:a16="http://schemas.microsoft.com/office/drawing/2014/main" id="{C0A2039F-D8D0-490E-9BB1-DBE84AF7F2D1}"/>
+                <a16:creationId xmlns:a16="http://schemas.microsoft.com/office/drawing/2014/main" id="{D9DC9BC4-0E6C-4EE2-BC5A-436B80B9535C}"/>
               </a:ext>
             </a:extLst>
           </p:cNvPr>
@@ -8074,7 +8074,7 @@
           <p:cNvPr id="10" name="">
             <a:extLst xmlns:a="http://schemas.openxmlformats.org/drawingml/2006/main">
               <a:ext uri="{FF2B5EF4-FFF2-40B4-BE49-F238E27FC236}">
-                <a16:creationId xmlns:a16="http://schemas.microsoft.com/office/drawing/2014/main" id="{45C244AB-0B59-43E5-B5EC-F76E79FB8DFC}"/>
+                <a16:creationId xmlns:a16="http://schemas.microsoft.com/office/drawing/2014/main" id="{7CE02FFF-EEEA-40A7-A81C-C67523107C97}"/>
               </a:ext>
             </a:extLst>
           </p:cNvPr>
@@ -8132,7 +8132,7 @@
           <p:cNvPr id="11" name="">
             <a:extLst xmlns:a="http://schemas.openxmlformats.org/drawingml/2006/main">
               <a:ext uri="{FF2B5EF4-FFF2-40B4-BE49-F238E27FC236}">
-                <a16:creationId xmlns:a16="http://schemas.microsoft.com/office/drawing/2014/main" id="{7BE741BC-1DC6-4436-A22F-1C6BC89BC0A6}"/>
+                <a16:creationId xmlns:a16="http://schemas.microsoft.com/office/drawing/2014/main" id="{5501C4DE-1AB1-49EE-8F4D-EEE3056FB8DB}"/>
               </a:ext>
             </a:extLst>
           </p:cNvPr>
@@ -8167,7 +8167,7 @@
           <p:cNvPr id="12" name="">
             <a:extLst xmlns:a="http://schemas.openxmlformats.org/drawingml/2006/main">
               <a:ext uri="{FF2B5EF4-FFF2-40B4-BE49-F238E27FC236}">
-                <a16:creationId xmlns:a16="http://schemas.microsoft.com/office/drawing/2014/main" id="{E57007D5-B23F-4F57-9F56-F8260D413C2F}"/>
+                <a16:creationId xmlns:a16="http://schemas.microsoft.com/office/drawing/2014/main" id="{194F14CF-00C9-4026-86A4-3BB98A44D8DD}"/>
               </a:ext>
             </a:extLst>
           </p:cNvPr>
@@ -8200,7 +8200,7 @@
           <p:cNvPr id="13" name="">
             <a:extLst xmlns:a="http://schemas.openxmlformats.org/drawingml/2006/main">
               <a:ext uri="{FF2B5EF4-FFF2-40B4-BE49-F238E27FC236}">
-                <a16:creationId xmlns:a16="http://schemas.microsoft.com/office/drawing/2014/main" id="{24DED332-EC8F-4056-9BF5-4E280D55EA2D}"/>
+                <a16:creationId xmlns:a16="http://schemas.microsoft.com/office/drawing/2014/main" id="{4D74C4C6-B265-47A0-86B9-465FA1616555}"/>
               </a:ext>
             </a:extLst>
           </p:cNvPr>
@@ -8275,7 +8275,7 @@
           <p:cNvPr id="14" name="">
             <a:extLst xmlns:a="http://schemas.openxmlformats.org/drawingml/2006/main">
               <a:ext uri="{FF2B5EF4-FFF2-40B4-BE49-F238E27FC236}">
-                <a16:creationId xmlns:a16="http://schemas.microsoft.com/office/drawing/2014/main" id="{6616EE7A-29E9-49A9-B9C3-94D1BFA5316A}"/>
+                <a16:creationId xmlns:a16="http://schemas.microsoft.com/office/drawing/2014/main" id="{FC204420-6ADF-4D67-994B-BA6B4007DDDE}"/>
               </a:ext>
             </a:extLst>
           </p:cNvPr>
@@ -8312,7 +8312,7 @@
           <p:cNvPr id="15" name="">
             <a:extLst xmlns:a="http://schemas.openxmlformats.org/drawingml/2006/main">
               <a:ext uri="{FF2B5EF4-FFF2-40B4-BE49-F238E27FC236}">
-                <a16:creationId xmlns:a16="http://schemas.microsoft.com/office/drawing/2014/main" id="{2CB5823A-65DE-4AC6-A67C-F076881D20AB}"/>
+                <a16:creationId xmlns:a16="http://schemas.microsoft.com/office/drawing/2014/main" id="{9209A18E-E9B6-45DD-A455-1ED8AE0E0ADE}"/>
               </a:ext>
             </a:extLst>
           </p:cNvPr>
@@ -8347,7 +8347,7 @@
           <p:cNvPr id="16" name="">
             <a:extLst xmlns:a="http://schemas.openxmlformats.org/drawingml/2006/main">
               <a:ext uri="{FF2B5EF4-FFF2-40B4-BE49-F238E27FC236}">
-                <a16:creationId xmlns:a16="http://schemas.microsoft.com/office/drawing/2014/main" id="{5E64E7AA-3DCA-471A-B191-EE78BDFE688B}"/>
+                <a16:creationId xmlns:a16="http://schemas.microsoft.com/office/drawing/2014/main" id="{53114F34-ECD2-47AE-9750-7EFCD885A2A2}"/>
               </a:ext>
             </a:extLst>
           </p:cNvPr>
@@ -8405,7 +8405,7 @@
           <p:cNvPr id="17" name="">
             <a:extLst xmlns:a="http://schemas.openxmlformats.org/drawingml/2006/main">
               <a:ext uri="{FF2B5EF4-FFF2-40B4-BE49-F238E27FC236}">
-                <a16:creationId xmlns:a16="http://schemas.microsoft.com/office/drawing/2014/main" id="{2B9952A4-C291-4474-8422-69F17DB59045}"/>
+                <a16:creationId xmlns:a16="http://schemas.microsoft.com/office/drawing/2014/main" id="{E9762C3E-5BFE-4E89-9858-4F96FCA60DA1}"/>
               </a:ext>
             </a:extLst>
           </p:cNvPr>
@@ -8497,7 +8497,7 @@
           <p:cNvPr id="18" name="">
             <a:extLst xmlns:a="http://schemas.openxmlformats.org/drawingml/2006/main">
               <a:ext uri="{FF2B5EF4-FFF2-40B4-BE49-F238E27FC236}">
-                <a16:creationId xmlns:a16="http://schemas.microsoft.com/office/drawing/2014/main" id="{662A3FE3-3267-4CC2-B09F-6522B3B07365}"/>
+                <a16:creationId xmlns:a16="http://schemas.microsoft.com/office/drawing/2014/main" id="{70B5254B-ACCD-4D1C-9F67-2AA61F079F11}"/>
               </a:ext>
             </a:extLst>
           </p:cNvPr>
@@ -8534,7 +8534,7 @@
           <p:cNvPr id="19" name="">
             <a:extLst xmlns:a="http://schemas.openxmlformats.org/drawingml/2006/main">
               <a:ext uri="{FF2B5EF4-FFF2-40B4-BE49-F238E27FC236}">
-                <a16:creationId xmlns:a16="http://schemas.microsoft.com/office/drawing/2014/main" id="{3A421F04-87AF-4F4A-8F2D-B2859542A882}"/>
+                <a16:creationId xmlns:a16="http://schemas.microsoft.com/office/drawing/2014/main" id="{4B43475D-2D26-4759-86E7-44C3E684D0B3}"/>
               </a:ext>
             </a:extLst>
           </p:cNvPr>
@@ -8569,7 +8569,7 @@
           <p:cNvPr id="20" name="">
             <a:extLst xmlns:a="http://schemas.openxmlformats.org/drawingml/2006/main">
               <a:ext uri="{FF2B5EF4-FFF2-40B4-BE49-F238E27FC236}">
-                <a16:creationId xmlns:a16="http://schemas.microsoft.com/office/drawing/2014/main" id="{6106E394-51E1-446F-B0E4-546B8231BBD2}"/>
+                <a16:creationId xmlns:a16="http://schemas.microsoft.com/office/drawing/2014/main" id="{A82723D2-9D1C-41E6-B378-B4726A082954}"/>
               </a:ext>
             </a:extLst>
           </p:cNvPr>
@@ -8627,7 +8627,7 @@
           <p:cNvPr id="21" name="">
             <a:extLst xmlns:a="http://schemas.openxmlformats.org/drawingml/2006/main">
               <a:ext uri="{FF2B5EF4-FFF2-40B4-BE49-F238E27FC236}">
-                <a16:creationId xmlns:a16="http://schemas.microsoft.com/office/drawing/2014/main" id="{E7B54CAA-7662-4797-962A-649C569EE18D}"/>
+                <a16:creationId xmlns:a16="http://schemas.microsoft.com/office/drawing/2014/main" id="{3FD1B59D-F125-4B43-BE10-F3573BCFE656}"/>
               </a:ext>
             </a:extLst>
           </p:cNvPr>
@@ -8719,7 +8719,7 @@
           <p:cNvPr id="22" name="">
             <a:extLst xmlns:a="http://schemas.openxmlformats.org/drawingml/2006/main">
               <a:ext uri="{FF2B5EF4-FFF2-40B4-BE49-F238E27FC236}">
-                <a16:creationId xmlns:a16="http://schemas.microsoft.com/office/drawing/2014/main" id="{D2503BE2-7F93-474F-A496-6C46CEF25EAA}"/>
+                <a16:creationId xmlns:a16="http://schemas.microsoft.com/office/drawing/2014/main" id="{EE253744-BD0D-4069-894C-EA795F9ECD3E}"/>
               </a:ext>
             </a:extLst>
           </p:cNvPr>
@@ -8756,7 +8756,7 @@
           <p:cNvPr id="23" name="">
             <a:extLst xmlns:a="http://schemas.openxmlformats.org/drawingml/2006/main">
               <a:ext uri="{FF2B5EF4-FFF2-40B4-BE49-F238E27FC236}">
-                <a16:creationId xmlns:a16="http://schemas.microsoft.com/office/drawing/2014/main" id="{668B35FA-AEE1-4133-ADD7-DD23D2951851}"/>
+                <a16:creationId xmlns:a16="http://schemas.microsoft.com/office/drawing/2014/main" id="{2D707A71-4E3F-46E1-9732-88E0B9141339}"/>
               </a:ext>
             </a:extLst>
           </p:cNvPr>
@@ -8791,7 +8791,7 @@
           <p:cNvPr id="24" name="">
             <a:extLst xmlns:a="http://schemas.openxmlformats.org/drawingml/2006/main">
               <a:ext uri="{FF2B5EF4-FFF2-40B4-BE49-F238E27FC236}">
-                <a16:creationId xmlns:a16="http://schemas.microsoft.com/office/drawing/2014/main" id="{B4A3851C-8F00-4BDF-8A4C-8AB2C5384126}"/>
+                <a16:creationId xmlns:a16="http://schemas.microsoft.com/office/drawing/2014/main" id="{7282EE9B-4BF9-44D8-8AEF-641926AABD04}"/>
               </a:ext>
             </a:extLst>
           </p:cNvPr>
@@ -8849,7 +8849,7 @@
           <p:cNvPr id="25" name="">
             <a:extLst xmlns:a="http://schemas.openxmlformats.org/drawingml/2006/main">
               <a:ext uri="{FF2B5EF4-FFF2-40B4-BE49-F238E27FC236}">
-                <a16:creationId xmlns:a16="http://schemas.microsoft.com/office/drawing/2014/main" id="{03DD5F7A-C3BF-4B1D-ADB1-B3EBCD4E0F00}"/>
+                <a16:creationId xmlns:a16="http://schemas.microsoft.com/office/drawing/2014/main" id="{CFA31F5B-056A-422E-95CB-57290A037C35}"/>
               </a:ext>
             </a:extLst>
           </p:cNvPr>
@@ -8941,7 +8941,7 @@
           <p:cNvPr id="26" name="">
             <a:extLst xmlns:a="http://schemas.openxmlformats.org/drawingml/2006/main">
               <a:ext uri="{FF2B5EF4-FFF2-40B4-BE49-F238E27FC236}">
-                <a16:creationId xmlns:a16="http://schemas.microsoft.com/office/drawing/2014/main" id="{8953D308-2021-4BE5-87D8-7F13B5B87093}"/>
+                <a16:creationId xmlns:a16="http://schemas.microsoft.com/office/drawing/2014/main" id="{12E5A192-4B27-4910-8DD0-684A70251EF5}"/>
               </a:ext>
             </a:extLst>
           </p:cNvPr>
@@ -8978,7 +8978,7 @@
           <p:cNvPr id="27" name="">
             <a:extLst xmlns:a="http://schemas.openxmlformats.org/drawingml/2006/main">
               <a:ext uri="{FF2B5EF4-FFF2-40B4-BE49-F238E27FC236}">
-                <a16:creationId xmlns:a16="http://schemas.microsoft.com/office/drawing/2014/main" id="{13846B14-87AF-4A6A-AE9F-0CE2FED9520A}"/>
+                <a16:creationId xmlns:a16="http://schemas.microsoft.com/office/drawing/2014/main" id="{08D5E5B2-93AF-452B-A5F3-944FA8AAA5C1}"/>
               </a:ext>
             </a:extLst>
           </p:cNvPr>
@@ -9013,7 +9013,7 @@
           <p:cNvPr id="28" name="">
             <a:extLst xmlns:a="http://schemas.openxmlformats.org/drawingml/2006/main">
               <a:ext uri="{FF2B5EF4-FFF2-40B4-BE49-F238E27FC236}">
-                <a16:creationId xmlns:a16="http://schemas.microsoft.com/office/drawing/2014/main" id="{7B127880-AC1A-4A32-B764-FAF5AC5D7180}"/>
+                <a16:creationId xmlns:a16="http://schemas.microsoft.com/office/drawing/2014/main" id="{A929C73F-2793-418F-BEE5-39B8C6370CCB}"/>
               </a:ext>
             </a:extLst>
           </p:cNvPr>
@@ -9071,7 +9071,7 @@
           <p:cNvPr id="29" name="">
             <a:extLst xmlns:a="http://schemas.openxmlformats.org/drawingml/2006/main">
               <a:ext uri="{FF2B5EF4-FFF2-40B4-BE49-F238E27FC236}">
-                <a16:creationId xmlns:a16="http://schemas.microsoft.com/office/drawing/2014/main" id="{B87DDA68-AD73-41C1-9F4C-00724DFA959A}"/>
+                <a16:creationId xmlns:a16="http://schemas.microsoft.com/office/drawing/2014/main" id="{BB262265-C31E-47B6-9962-D26263C9AE0A}"/>
               </a:ext>
             </a:extLst>
           </p:cNvPr>
@@ -9106,7 +9106,7 @@
           <p:cNvPr id="30" name="">
             <a:extLst xmlns:a="http://schemas.openxmlformats.org/drawingml/2006/main">
               <a:ext uri="{FF2B5EF4-FFF2-40B4-BE49-F238E27FC236}">
-                <a16:creationId xmlns:a16="http://schemas.microsoft.com/office/drawing/2014/main" id="{47D88000-761D-4B38-9433-03A513A6373F}"/>
+                <a16:creationId xmlns:a16="http://schemas.microsoft.com/office/drawing/2014/main" id="{3ADDA5AA-8322-4516-9F4C-BCDA73BF404D}"/>
               </a:ext>
             </a:extLst>
           </p:cNvPr>
@@ -9141,7 +9141,7 @@
           <p:cNvPr id="31" name="">
             <a:extLst xmlns:a="http://schemas.openxmlformats.org/drawingml/2006/main">
               <a:ext uri="{FF2B5EF4-FFF2-40B4-BE49-F238E27FC236}">
-                <a16:creationId xmlns:a16="http://schemas.microsoft.com/office/drawing/2014/main" id="{0ECC065B-57BE-455A-8B29-56728A3C6E7E}"/>
+                <a16:creationId xmlns:a16="http://schemas.microsoft.com/office/drawing/2014/main" id="{41B1CFEB-7923-4272-A48D-63C5016A8136}"/>
               </a:ext>
             </a:extLst>
           </p:cNvPr>
@@ -9199,7 +9199,7 @@
           <p:cNvPr id="32" name="">
             <a:extLst xmlns:a="http://schemas.openxmlformats.org/drawingml/2006/main">
               <a:ext uri="{FF2B5EF4-FFF2-40B4-BE49-F238E27FC236}">
-                <a16:creationId xmlns:a16="http://schemas.microsoft.com/office/drawing/2014/main" id="{FFA2C25A-CE07-4A84-B57F-40E90621391D}"/>
+                <a16:creationId xmlns:a16="http://schemas.microsoft.com/office/drawing/2014/main" id="{9ED95CE8-3833-4EDB-8C64-4EC18ED39753}"/>
               </a:ext>
             </a:extLst>
           </p:cNvPr>
@@ -9255,7 +9255,7 @@
     </p:spTree>
     <p:extLst>
       <p:ext uri="{BB962C8B-B14F-4D97-AF65-F5344CB8AC3E}">
-        <p14:creationId xmlns:p14="http://schemas.microsoft.com/office/powerpoint/2010/main" val="99417897"/>
+        <p14:creationId xmlns:p14="http://schemas.microsoft.com/office/powerpoint/2010/main" val="812584234"/>
       </p:ext>
     </p:extLst>
   </p:cSld>
@@ -9286,7 +9286,7 @@
           <p:cNvPr id="1" name="Slide Number Placeholder 5">
             <a:extLst xmlns:a="http://schemas.openxmlformats.org/drawingml/2006/main">
               <a:ext uri="{FF2B5EF4-FFF2-40B4-BE49-F238E27FC236}">
-                <a16:creationId xmlns:a16="http://schemas.microsoft.com/office/drawing/2014/main" id="{C5A324B5-703D-4DE1-A920-5C56CD46E34C}"/>
+                <a16:creationId xmlns:a16="http://schemas.microsoft.com/office/drawing/2014/main" id="{E12CE447-476B-4BAE-A1FF-E669E79965E6}"/>
               </a:ext>
             </a:extLst>
           </p:cNvPr>
@@ -9322,7 +9322,7 @@
           <p:nvPr/>
         </p:nvPicPr>
         <p:blipFill>
-          <a:blip xmlns:r="http://schemas.openxmlformats.org/officeDocument/2006/relationships" xmlns:a="http://schemas.openxmlformats.org/drawingml/2006/main" r:embed="R0e7ce579abfa434b"/>
+          <a:blip xmlns:r="http://schemas.openxmlformats.org/officeDocument/2006/relationships" xmlns:a="http://schemas.openxmlformats.org/drawingml/2006/main" r:embed="R7fdde2bcaa84465d"/>
           <a:srcRect xmlns:a="http://schemas.openxmlformats.org/drawingml/2006/main" l="0" t="21875" r="0" b="21875"/>
           <a:stretch xmlns:a="http://schemas.openxmlformats.org/drawingml/2006/main">
             <a:fillRect l="0" t="0" r="0" b="0"/>
@@ -9343,7 +9343,7 @@
           <p:cNvPr id="3" name="">
             <a:extLst xmlns:a="http://schemas.openxmlformats.org/drawingml/2006/main">
               <a:ext uri="{FF2B5EF4-FFF2-40B4-BE49-F238E27FC236}">
-                <a16:creationId xmlns:a16="http://schemas.microsoft.com/office/drawing/2014/main" id="{DDF047B0-BD97-4FB1-949F-A75CD910C2F4}"/>
+                <a16:creationId xmlns:a16="http://schemas.microsoft.com/office/drawing/2014/main" id="{F8A3BDA3-164C-4348-967A-151849033020}"/>
               </a:ext>
             </a:extLst>
           </p:cNvPr>
@@ -9378,7 +9378,7 @@
           <p:cNvPr id="4" name="">
             <a:extLst xmlns:a="http://schemas.openxmlformats.org/drawingml/2006/main">
               <a:ext uri="{FF2B5EF4-FFF2-40B4-BE49-F238E27FC236}">
-                <a16:creationId xmlns:a16="http://schemas.microsoft.com/office/drawing/2014/main" id="{2E327F05-6E32-4292-9696-4F0A795E889D}"/>
+                <a16:creationId xmlns:a16="http://schemas.microsoft.com/office/drawing/2014/main" id="{B989BD80-9A48-4456-BFD6-5D50361B952D}"/>
               </a:ext>
             </a:extLst>
           </p:cNvPr>
@@ -9413,7 +9413,7 @@
           <p:cNvPr id="5" name="">
             <a:extLst xmlns:a="http://schemas.openxmlformats.org/drawingml/2006/main">
               <a:ext uri="{FF2B5EF4-FFF2-40B4-BE49-F238E27FC236}">
-                <a16:creationId xmlns:a16="http://schemas.microsoft.com/office/drawing/2014/main" id="{4461BA9D-DB25-4DF4-A5C5-3A778BF31F82}"/>
+                <a16:creationId xmlns:a16="http://schemas.microsoft.com/office/drawing/2014/main" id="{19F73437-AC02-4D5A-8E1F-7E3E10EF9F7E}"/>
               </a:ext>
             </a:extLst>
           </p:cNvPr>
@@ -9450,7 +9450,7 @@
           <p:cNvPr id="6" name="">
             <a:extLst xmlns:a="http://schemas.openxmlformats.org/drawingml/2006/main">
               <a:ext uri="{FF2B5EF4-FFF2-40B4-BE49-F238E27FC236}">
-                <a16:creationId xmlns:a16="http://schemas.microsoft.com/office/drawing/2014/main" id="{0F91BCC9-4B84-43A8-AAA9-6C8F9C6E14D5}"/>
+                <a16:creationId xmlns:a16="http://schemas.microsoft.com/office/drawing/2014/main" id="{DBD224AD-07FC-4280-A326-81AE245899D6}"/>
               </a:ext>
             </a:extLst>
           </p:cNvPr>
@@ -9487,7 +9487,7 @@
           <p:cNvPr id="7" name="">
             <a:extLst xmlns:a="http://schemas.openxmlformats.org/drawingml/2006/main">
               <a:ext uri="{FF2B5EF4-FFF2-40B4-BE49-F238E27FC236}">
-                <a16:creationId xmlns:a16="http://schemas.microsoft.com/office/drawing/2014/main" id="{C4C9DC7C-C5E6-4C2A-BEA7-745C94D8FD51}"/>
+                <a16:creationId xmlns:a16="http://schemas.microsoft.com/office/drawing/2014/main" id="{F3E4CD8B-ACEF-48A2-A82C-52B0F59A9129}"/>
               </a:ext>
             </a:extLst>
           </p:cNvPr>
@@ -9524,7 +9524,7 @@
           <p:cNvPr id="8" name="">
             <a:extLst xmlns:a="http://schemas.openxmlformats.org/drawingml/2006/main">
               <a:ext uri="{FF2B5EF4-FFF2-40B4-BE49-F238E27FC236}">
-                <a16:creationId xmlns:a16="http://schemas.microsoft.com/office/drawing/2014/main" id="{05B8CCD5-242D-4FC5-A877-A686480633BA}"/>
+                <a16:creationId xmlns:a16="http://schemas.microsoft.com/office/drawing/2014/main" id="{C810F4EA-692C-4BFC-B5E8-3D32FB9E1BB6}"/>
               </a:ext>
             </a:extLst>
           </p:cNvPr>
@@ -9561,7 +9561,7 @@
           <p:cNvPr id="9" name="">
             <a:extLst xmlns:a="http://schemas.openxmlformats.org/drawingml/2006/main">
               <a:ext uri="{FF2B5EF4-FFF2-40B4-BE49-F238E27FC236}">
-                <a16:creationId xmlns:a16="http://schemas.microsoft.com/office/drawing/2014/main" id="{488BB663-9821-4F3F-9787-81E1B5110488}"/>
+                <a16:creationId xmlns:a16="http://schemas.microsoft.com/office/drawing/2014/main" id="{6B014754-AD80-4A21-815C-E0EB354FF22B}"/>
               </a:ext>
             </a:extLst>
           </p:cNvPr>
@@ -9619,7 +9619,7 @@
           <p:cNvPr id="10" name="">
             <a:extLst xmlns:a="http://schemas.openxmlformats.org/drawingml/2006/main">
               <a:ext uri="{FF2B5EF4-FFF2-40B4-BE49-F238E27FC236}">
-                <a16:creationId xmlns:a16="http://schemas.microsoft.com/office/drawing/2014/main" id="{4F106679-F6B4-4D70-83E8-13A6A605C6A6}"/>
+                <a16:creationId xmlns:a16="http://schemas.microsoft.com/office/drawing/2014/main" id="{4C46C21C-1DA6-4AD7-A8D4-594B588FE722}"/>
               </a:ext>
             </a:extLst>
           </p:cNvPr>
@@ -9677,7 +9677,7 @@
           <p:cNvPr id="11" name="">
             <a:extLst xmlns:a="http://schemas.openxmlformats.org/drawingml/2006/main">
               <a:ext uri="{FF2B5EF4-FFF2-40B4-BE49-F238E27FC236}">
-                <a16:creationId xmlns:a16="http://schemas.microsoft.com/office/drawing/2014/main" id="{8BEC2E9F-13C0-4026-9D12-4E6DBB68E5A0}"/>
+                <a16:creationId xmlns:a16="http://schemas.microsoft.com/office/drawing/2014/main" id="{96655942-F299-484D-B577-A2699FB22AC7}"/>
               </a:ext>
             </a:extLst>
           </p:cNvPr>
@@ -9712,7 +9712,7 @@
           <p:cNvPr id="12" name="">
             <a:extLst xmlns:a="http://schemas.openxmlformats.org/drawingml/2006/main">
               <a:ext uri="{FF2B5EF4-FFF2-40B4-BE49-F238E27FC236}">
-                <a16:creationId xmlns:a16="http://schemas.microsoft.com/office/drawing/2014/main" id="{51737D00-E93F-4B61-9FB6-F0E5543EDB10}"/>
+                <a16:creationId xmlns:a16="http://schemas.microsoft.com/office/drawing/2014/main" id="{80D40DFE-A5B5-4A93-BD11-A21FB5DB31AD}"/>
               </a:ext>
             </a:extLst>
           </p:cNvPr>
@@ -9745,7 +9745,7 @@
           <p:cNvPr id="13" name="">
             <a:extLst xmlns:a="http://schemas.openxmlformats.org/drawingml/2006/main">
               <a:ext uri="{FF2B5EF4-FFF2-40B4-BE49-F238E27FC236}">
-                <a16:creationId xmlns:a16="http://schemas.microsoft.com/office/drawing/2014/main" id="{A4F00738-7BCC-45DB-A342-10A7C76A719A}"/>
+                <a16:creationId xmlns:a16="http://schemas.microsoft.com/office/drawing/2014/main" id="{931C6D8F-3120-4711-A56B-D6C5898A1D63}"/>
               </a:ext>
             </a:extLst>
           </p:cNvPr>
@@ -9820,7 +9820,7 @@
           <p:cNvPr id="14" name="">
             <a:extLst xmlns:a="http://schemas.openxmlformats.org/drawingml/2006/main">
               <a:ext uri="{FF2B5EF4-FFF2-40B4-BE49-F238E27FC236}">
-                <a16:creationId xmlns:a16="http://schemas.microsoft.com/office/drawing/2014/main" id="{08D42142-3319-4FA2-8C89-C0D3EC14146E}"/>
+                <a16:creationId xmlns:a16="http://schemas.microsoft.com/office/drawing/2014/main" id="{C693D743-A8BE-4AFC-8E1C-5A4957D736F0}"/>
               </a:ext>
             </a:extLst>
           </p:cNvPr>
@@ -9855,7 +9855,7 @@
           <p:cNvPr id="15" name="">
             <a:extLst xmlns:a="http://schemas.openxmlformats.org/drawingml/2006/main">
               <a:ext uri="{FF2B5EF4-FFF2-40B4-BE49-F238E27FC236}">
-                <a16:creationId xmlns:a16="http://schemas.microsoft.com/office/drawing/2014/main" id="{E4C860FF-F82B-45FA-B0F9-06CD44E39E0A}"/>
+                <a16:creationId xmlns:a16="http://schemas.microsoft.com/office/drawing/2014/main" id="{DF852EBA-8860-4B61-8325-F2F7BECD1C6F}"/>
               </a:ext>
             </a:extLst>
           </p:cNvPr>
@@ -9890,7 +9890,7 @@
           <p:cNvPr id="16" name="">
             <a:extLst xmlns:a="http://schemas.openxmlformats.org/drawingml/2006/main">
               <a:ext uri="{FF2B5EF4-FFF2-40B4-BE49-F238E27FC236}">
-                <a16:creationId xmlns:a16="http://schemas.microsoft.com/office/drawing/2014/main" id="{A180CEC6-176B-4771-B296-E6FE5ED79BDF}"/>
+                <a16:creationId xmlns:a16="http://schemas.microsoft.com/office/drawing/2014/main" id="{D60B118E-E968-4552-A15E-2E27E9E9DE35}"/>
               </a:ext>
             </a:extLst>
           </p:cNvPr>
@@ -9948,7 +9948,7 @@
           <p:cNvPr id="17" name="">
             <a:extLst xmlns:a="http://schemas.openxmlformats.org/drawingml/2006/main">
               <a:ext uri="{FF2B5EF4-FFF2-40B4-BE49-F238E27FC236}">
-                <a16:creationId xmlns:a16="http://schemas.microsoft.com/office/drawing/2014/main" id="{0D3C555A-8731-4340-B9F4-6C494C42B973}"/>
+                <a16:creationId xmlns:a16="http://schemas.microsoft.com/office/drawing/2014/main" id="{55C7226F-0481-4462-92D1-14C71601BF62}"/>
               </a:ext>
             </a:extLst>
           </p:cNvPr>
@@ -9985,7 +9985,7 @@
           <p:cNvPr id="18" name="">
             <a:extLst xmlns:a="http://schemas.openxmlformats.org/drawingml/2006/main">
               <a:ext uri="{FF2B5EF4-FFF2-40B4-BE49-F238E27FC236}">
-                <a16:creationId xmlns:a16="http://schemas.microsoft.com/office/drawing/2014/main" id="{25BA4AD0-3216-4F08-AFF1-F9AC24937619}"/>
+                <a16:creationId xmlns:a16="http://schemas.microsoft.com/office/drawing/2014/main" id="{7D529E99-A171-447D-9481-A2B956D8030A}"/>
               </a:ext>
             </a:extLst>
           </p:cNvPr>
@@ -10020,7 +10020,7 @@
           <p:cNvPr id="19" name="">
             <a:extLst xmlns:a="http://schemas.openxmlformats.org/drawingml/2006/main">
               <a:ext uri="{FF2B5EF4-FFF2-40B4-BE49-F238E27FC236}">
-                <a16:creationId xmlns:a16="http://schemas.microsoft.com/office/drawing/2014/main" id="{08C902E2-EA23-4271-9330-D8470AC0BF02}"/>
+                <a16:creationId xmlns:a16="http://schemas.microsoft.com/office/drawing/2014/main" id="{1D1828DA-6B7C-44F6-8AEF-F22F68E64F92}"/>
               </a:ext>
             </a:extLst>
           </p:cNvPr>
@@ -10078,7 +10078,7 @@
           <p:cNvPr id="20" name="">
             <a:extLst xmlns:a="http://schemas.openxmlformats.org/drawingml/2006/main">
               <a:ext uri="{FF2B5EF4-FFF2-40B4-BE49-F238E27FC236}">
-                <a16:creationId xmlns:a16="http://schemas.microsoft.com/office/drawing/2014/main" id="{90D3B9E6-59F8-4578-B777-809BC7A8DA82}"/>
+                <a16:creationId xmlns:a16="http://schemas.microsoft.com/office/drawing/2014/main" id="{3D6F4A8C-62E6-43C9-B993-F96F0ACF1F6F}"/>
               </a:ext>
             </a:extLst>
           </p:cNvPr>
@@ -10204,7 +10204,7 @@
           <p:cNvPr id="21" name="">
             <a:extLst xmlns:a="http://schemas.openxmlformats.org/drawingml/2006/main">
               <a:ext uri="{FF2B5EF4-FFF2-40B4-BE49-F238E27FC236}">
-                <a16:creationId xmlns:a16="http://schemas.microsoft.com/office/drawing/2014/main" id="{2225EF23-6A5A-468B-92A3-B99C21528727}"/>
+                <a16:creationId xmlns:a16="http://schemas.microsoft.com/office/drawing/2014/main" id="{E14FD467-79BE-496D-990D-28AE914E00F0}"/>
               </a:ext>
             </a:extLst>
           </p:cNvPr>
@@ -10241,7 +10241,7 @@
           <p:cNvPr id="22" name="">
             <a:extLst xmlns:a="http://schemas.openxmlformats.org/drawingml/2006/main">
               <a:ext uri="{FF2B5EF4-FFF2-40B4-BE49-F238E27FC236}">
-                <a16:creationId xmlns:a16="http://schemas.microsoft.com/office/drawing/2014/main" id="{BCF72D9E-37EA-4ABD-AF01-F9BBBDAEC973}"/>
+                <a16:creationId xmlns:a16="http://schemas.microsoft.com/office/drawing/2014/main" id="{BBBA4C57-1F54-4578-B8F9-0A3E6F400B24}"/>
               </a:ext>
             </a:extLst>
           </p:cNvPr>
@@ -10276,7 +10276,7 @@
           <p:cNvPr id="23" name="">
             <a:extLst xmlns:a="http://schemas.openxmlformats.org/drawingml/2006/main">
               <a:ext uri="{FF2B5EF4-FFF2-40B4-BE49-F238E27FC236}">
-                <a16:creationId xmlns:a16="http://schemas.microsoft.com/office/drawing/2014/main" id="{F6870F87-FD10-4F27-B615-DDB18A4672FC}"/>
+                <a16:creationId xmlns:a16="http://schemas.microsoft.com/office/drawing/2014/main" id="{B6F745D5-D36F-4F23-A539-691074D1BC26}"/>
               </a:ext>
             </a:extLst>
           </p:cNvPr>
@@ -10334,7 +10334,7 @@
           <p:cNvPr id="24" name="">
             <a:extLst xmlns:a="http://schemas.openxmlformats.org/drawingml/2006/main">
               <a:ext uri="{FF2B5EF4-FFF2-40B4-BE49-F238E27FC236}">
-                <a16:creationId xmlns:a16="http://schemas.microsoft.com/office/drawing/2014/main" id="{4EA00D9B-5D08-4A39-B79C-184EA11EA058}"/>
+                <a16:creationId xmlns:a16="http://schemas.microsoft.com/office/drawing/2014/main" id="{F439B610-1D93-41B8-BC76-81D853C99D89}"/>
               </a:ext>
             </a:extLst>
           </p:cNvPr>
@@ -10443,7 +10443,7 @@
           <p:cNvPr id="25" name="">
             <a:extLst xmlns:a="http://schemas.openxmlformats.org/drawingml/2006/main">
               <a:ext uri="{FF2B5EF4-FFF2-40B4-BE49-F238E27FC236}">
-                <a16:creationId xmlns:a16="http://schemas.microsoft.com/office/drawing/2014/main" id="{69448C08-0606-4C79-938B-B6C69A57A842}"/>
+                <a16:creationId xmlns:a16="http://schemas.microsoft.com/office/drawing/2014/main" id="{7F2D40E3-8D8D-4478-AA9B-E712EEEF84E8}"/>
               </a:ext>
             </a:extLst>
           </p:cNvPr>
@@ -10480,7 +10480,7 @@
           <p:cNvPr id="26" name="">
             <a:extLst xmlns:a="http://schemas.openxmlformats.org/drawingml/2006/main">
               <a:ext uri="{FF2B5EF4-FFF2-40B4-BE49-F238E27FC236}">
-                <a16:creationId xmlns:a16="http://schemas.microsoft.com/office/drawing/2014/main" id="{6357F5A5-98C5-43C0-AD0C-C4948D5667B2}"/>
+                <a16:creationId xmlns:a16="http://schemas.microsoft.com/office/drawing/2014/main" id="{03450718-6289-4910-B027-ACB1BF949EB5}"/>
               </a:ext>
             </a:extLst>
           </p:cNvPr>
@@ -10515,7 +10515,7 @@
           <p:cNvPr id="27" name="">
             <a:extLst xmlns:a="http://schemas.openxmlformats.org/drawingml/2006/main">
               <a:ext uri="{FF2B5EF4-FFF2-40B4-BE49-F238E27FC236}">
-                <a16:creationId xmlns:a16="http://schemas.microsoft.com/office/drawing/2014/main" id="{729D0B0C-48BD-42C0-9CA4-40FABEB1FE92}"/>
+                <a16:creationId xmlns:a16="http://schemas.microsoft.com/office/drawing/2014/main" id="{51F33D46-6EA7-4768-83CB-FB59E8028736}"/>
               </a:ext>
             </a:extLst>
           </p:cNvPr>
@@ -10573,7 +10573,7 @@
           <p:cNvPr id="28" name="">
             <a:extLst xmlns:a="http://schemas.openxmlformats.org/drawingml/2006/main">
               <a:ext uri="{FF2B5EF4-FFF2-40B4-BE49-F238E27FC236}">
-                <a16:creationId xmlns:a16="http://schemas.microsoft.com/office/drawing/2014/main" id="{9CDA8C75-B166-4140-96CF-FA754CA6077A}"/>
+                <a16:creationId xmlns:a16="http://schemas.microsoft.com/office/drawing/2014/main" id="{FD1405D4-C34A-44D1-8976-61D9BAD8C899}"/>
               </a:ext>
             </a:extLst>
           </p:cNvPr>
@@ -10682,7 +10682,7 @@
           <p:cNvPr id="29" name="">
             <a:extLst xmlns:a="http://schemas.openxmlformats.org/drawingml/2006/main">
               <a:ext uri="{FF2B5EF4-FFF2-40B4-BE49-F238E27FC236}">
-                <a16:creationId xmlns:a16="http://schemas.microsoft.com/office/drawing/2014/main" id="{562BC306-3FD4-449F-8042-E34E8E195FE0}"/>
+                <a16:creationId xmlns:a16="http://schemas.microsoft.com/office/drawing/2014/main" id="{A74820F1-A166-48D9-8D42-A62CB801A981}"/>
               </a:ext>
             </a:extLst>
           </p:cNvPr>
@@ -10719,7 +10719,7 @@
           <p:cNvPr id="30" name="">
             <a:extLst xmlns:a="http://schemas.openxmlformats.org/drawingml/2006/main">
               <a:ext uri="{FF2B5EF4-FFF2-40B4-BE49-F238E27FC236}">
-                <a16:creationId xmlns:a16="http://schemas.microsoft.com/office/drawing/2014/main" id="{942E9819-8EEB-43F4-B9B7-374859C0D2CF}"/>
+                <a16:creationId xmlns:a16="http://schemas.microsoft.com/office/drawing/2014/main" id="{2D044B2C-CBCF-46A1-90E6-0974D3D021AC}"/>
               </a:ext>
             </a:extLst>
           </p:cNvPr>
@@ -10754,7 +10754,7 @@
           <p:cNvPr id="31" name="">
             <a:extLst xmlns:a="http://schemas.openxmlformats.org/drawingml/2006/main">
               <a:ext uri="{FF2B5EF4-FFF2-40B4-BE49-F238E27FC236}">
-                <a16:creationId xmlns:a16="http://schemas.microsoft.com/office/drawing/2014/main" id="{252D5C5B-7DFC-4847-9652-2116CDF028F1}"/>
+                <a16:creationId xmlns:a16="http://schemas.microsoft.com/office/drawing/2014/main" id="{F2A9465A-FB7E-4CD9-8208-574CCED5AA93}"/>
               </a:ext>
             </a:extLst>
           </p:cNvPr>
@@ -10812,7 +10812,7 @@
           <p:cNvPr id="32" name="">
             <a:extLst xmlns:a="http://schemas.openxmlformats.org/drawingml/2006/main">
               <a:ext uri="{FF2B5EF4-FFF2-40B4-BE49-F238E27FC236}">
-                <a16:creationId xmlns:a16="http://schemas.microsoft.com/office/drawing/2014/main" id="{3EFEEC5B-CAB9-4282-9263-5AC502228566}"/>
+                <a16:creationId xmlns:a16="http://schemas.microsoft.com/office/drawing/2014/main" id="{4D46B4E7-F4E1-422D-950A-6C9082351D84}"/>
               </a:ext>
             </a:extLst>
           </p:cNvPr>
@@ -10921,7 +10921,7 @@
           <p:cNvPr id="33" name="">
             <a:extLst xmlns:a="http://schemas.openxmlformats.org/drawingml/2006/main">
               <a:ext uri="{FF2B5EF4-FFF2-40B4-BE49-F238E27FC236}">
-                <a16:creationId xmlns:a16="http://schemas.microsoft.com/office/drawing/2014/main" id="{4D65464F-007B-4FB3-9715-83D167711C15}"/>
+                <a16:creationId xmlns:a16="http://schemas.microsoft.com/office/drawing/2014/main" id="{9212EB29-B888-49AC-889C-8ABD933A38A8}"/>
               </a:ext>
             </a:extLst>
           </p:cNvPr>
@@ -10975,7 +10975,7 @@
           <p:cNvPr id="34" name="">
             <a:extLst xmlns:a="http://schemas.openxmlformats.org/drawingml/2006/main">
               <a:ext uri="{FF2B5EF4-FFF2-40B4-BE49-F238E27FC236}">
-                <a16:creationId xmlns:a16="http://schemas.microsoft.com/office/drawing/2014/main" id="{BE7195E9-33E3-4B8B-9DCE-494CD8E0011F}"/>
+                <a16:creationId xmlns:a16="http://schemas.microsoft.com/office/drawing/2014/main" id="{ABDB2FF6-7079-425F-9BAE-AE7C9DDA8777}"/>
               </a:ext>
             </a:extLst>
           </p:cNvPr>
@@ -11008,7 +11008,7 @@
           <p:cNvPr id="35" name="">
             <a:extLst xmlns:a="http://schemas.openxmlformats.org/drawingml/2006/main">
               <a:ext uri="{FF2B5EF4-FFF2-40B4-BE49-F238E27FC236}">
-                <a16:creationId xmlns:a16="http://schemas.microsoft.com/office/drawing/2014/main" id="{C51EF0EE-BB50-4922-93FB-B9EEDEECC31B}"/>
+                <a16:creationId xmlns:a16="http://schemas.microsoft.com/office/drawing/2014/main" id="{A04A5203-CE74-4E6E-9BF6-E88886974334}"/>
               </a:ext>
             </a:extLst>
           </p:cNvPr>
@@ -11062,7 +11062,7 @@
           <p:cNvPr id="36" name="">
             <a:extLst xmlns:a="http://schemas.openxmlformats.org/drawingml/2006/main">
               <a:ext uri="{FF2B5EF4-FFF2-40B4-BE49-F238E27FC236}">
-                <a16:creationId xmlns:a16="http://schemas.microsoft.com/office/drawing/2014/main" id="{4C0242FD-F93D-4712-AC6B-DF041A289DBC}"/>
+                <a16:creationId xmlns:a16="http://schemas.microsoft.com/office/drawing/2014/main" id="{CA8EDD70-14B4-409B-9F80-89A96BF5868A}"/>
               </a:ext>
             </a:extLst>
           </p:cNvPr>
@@ -11095,7 +11095,7 @@
           <p:cNvPr id="37" name="">
             <a:extLst xmlns:a="http://schemas.openxmlformats.org/drawingml/2006/main">
               <a:ext uri="{FF2B5EF4-FFF2-40B4-BE49-F238E27FC236}">
-                <a16:creationId xmlns:a16="http://schemas.microsoft.com/office/drawing/2014/main" id="{D6A4F2D4-C854-4B66-BCE6-2ECBFAFB5B4D}"/>
+                <a16:creationId xmlns:a16="http://schemas.microsoft.com/office/drawing/2014/main" id="{0E5997D5-4180-43F0-97E2-0DB2AA0D02B5}"/>
               </a:ext>
             </a:extLst>
           </p:cNvPr>
@@ -11149,7 +11149,7 @@
           <p:cNvPr id="38" name="">
             <a:extLst xmlns:a="http://schemas.openxmlformats.org/drawingml/2006/main">
               <a:ext uri="{FF2B5EF4-FFF2-40B4-BE49-F238E27FC236}">
-                <a16:creationId xmlns:a16="http://schemas.microsoft.com/office/drawing/2014/main" id="{2E63A4A7-9836-4C60-BCE4-0E9A3DFBF3B6}"/>
+                <a16:creationId xmlns:a16="http://schemas.microsoft.com/office/drawing/2014/main" id="{7FE86AE0-C9EB-47E4-B081-BAB93661FBAF}"/>
               </a:ext>
             </a:extLst>
           </p:cNvPr>
@@ -11182,7 +11182,7 @@
           <p:cNvPr id="39" name="">
             <a:extLst xmlns:a="http://schemas.openxmlformats.org/drawingml/2006/main">
               <a:ext uri="{FF2B5EF4-FFF2-40B4-BE49-F238E27FC236}">
-                <a16:creationId xmlns:a16="http://schemas.microsoft.com/office/drawing/2014/main" id="{11142204-8FA1-4A6E-887A-6A788F991D46}"/>
+                <a16:creationId xmlns:a16="http://schemas.microsoft.com/office/drawing/2014/main" id="{837864E7-C0F5-4CEC-A310-A7B639444E6F}"/>
               </a:ext>
             </a:extLst>
           </p:cNvPr>
@@ -11236,7 +11236,7 @@
           <p:cNvPr id="40" name="">
             <a:extLst xmlns:a="http://schemas.openxmlformats.org/drawingml/2006/main">
               <a:ext uri="{FF2B5EF4-FFF2-40B4-BE49-F238E27FC236}">
-                <a16:creationId xmlns:a16="http://schemas.microsoft.com/office/drawing/2014/main" id="{8D7B9C03-49F3-46B9-80CE-ED6E79D2F7DF}"/>
+                <a16:creationId xmlns:a16="http://schemas.microsoft.com/office/drawing/2014/main" id="{E00D854F-CF2F-410F-9E88-BE89E727DC57}"/>
               </a:ext>
             </a:extLst>
           </p:cNvPr>
@@ -11292,7 +11292,7 @@
     </p:spTree>
     <p:extLst>
       <p:ext uri="{BB962C8B-B14F-4D97-AF65-F5344CB8AC3E}">
-        <p14:creationId xmlns:p14="http://schemas.microsoft.com/office/powerpoint/2010/main" val="1927756945"/>
+        <p14:creationId xmlns:p14="http://schemas.microsoft.com/office/powerpoint/2010/main" val="739240916"/>
       </p:ext>
     </p:extLst>
   </p:cSld>
@@ -11323,7 +11323,7 @@
           <p:cNvPr id="1" name="Slide Number Placeholder 5">
             <a:extLst xmlns:a="http://schemas.openxmlformats.org/drawingml/2006/main">
               <a:ext uri="{FF2B5EF4-FFF2-40B4-BE49-F238E27FC236}">
-                <a16:creationId xmlns:a16="http://schemas.microsoft.com/office/drawing/2014/main" id="{C5A324B5-703D-4DE1-A920-5C56CD46E34C}"/>
+                <a16:creationId xmlns:a16="http://schemas.microsoft.com/office/drawing/2014/main" id="{E12CE447-476B-4BAE-A1FF-E669E79965E6}"/>
               </a:ext>
             </a:extLst>
           </p:cNvPr>
@@ -11359,7 +11359,7 @@
           <p:nvPr/>
         </p:nvPicPr>
         <p:blipFill>
-          <a:blip xmlns:r="http://schemas.openxmlformats.org/officeDocument/2006/relationships" xmlns:a="http://schemas.openxmlformats.org/drawingml/2006/main" r:embed="Rc884012f1a7a44fc"/>
+          <a:blip xmlns:r="http://schemas.openxmlformats.org/officeDocument/2006/relationships" xmlns:a="http://schemas.openxmlformats.org/drawingml/2006/main" r:embed="R51662ef22ae54aae"/>
           <a:srcRect xmlns:a="http://schemas.openxmlformats.org/drawingml/2006/main" l="0" t="21875" r="0" b="21875"/>
           <a:stretch xmlns:a="http://schemas.openxmlformats.org/drawingml/2006/main">
             <a:fillRect l="0" t="0" r="0" b="0"/>
@@ -11380,7 +11380,7 @@
           <p:cNvPr id="3" name="">
             <a:extLst xmlns:a="http://schemas.openxmlformats.org/drawingml/2006/main">
               <a:ext uri="{FF2B5EF4-FFF2-40B4-BE49-F238E27FC236}">
-                <a16:creationId xmlns:a16="http://schemas.microsoft.com/office/drawing/2014/main" id="{32662D91-CC16-4BA9-9F77-3352D9287FCA}"/>
+                <a16:creationId xmlns:a16="http://schemas.microsoft.com/office/drawing/2014/main" id="{06D18CE6-4C0D-4415-83B2-E2E382F332BB}"/>
               </a:ext>
             </a:extLst>
           </p:cNvPr>
@@ -11415,7 +11415,7 @@
           <p:cNvPr id="4" name="">
             <a:extLst xmlns:a="http://schemas.openxmlformats.org/drawingml/2006/main">
               <a:ext uri="{FF2B5EF4-FFF2-40B4-BE49-F238E27FC236}">
-                <a16:creationId xmlns:a16="http://schemas.microsoft.com/office/drawing/2014/main" id="{362F377D-EA6F-41A8-BE2F-4CACECD93FE0}"/>
+                <a16:creationId xmlns:a16="http://schemas.microsoft.com/office/drawing/2014/main" id="{627D553A-B099-4940-86EB-C985A9209950}"/>
               </a:ext>
             </a:extLst>
           </p:cNvPr>
@@ -11450,7 +11450,7 @@
           <p:cNvPr id="5" name="">
             <a:extLst xmlns:a="http://schemas.openxmlformats.org/drawingml/2006/main">
               <a:ext uri="{FF2B5EF4-FFF2-40B4-BE49-F238E27FC236}">
-                <a16:creationId xmlns:a16="http://schemas.microsoft.com/office/drawing/2014/main" id="{6C6F955B-6AEE-4408-BAF3-1CB3E2D67D0E}"/>
+                <a16:creationId xmlns:a16="http://schemas.microsoft.com/office/drawing/2014/main" id="{409B5C03-9E5A-40F5-9DF2-E636B6A79CD7}"/>
               </a:ext>
             </a:extLst>
           </p:cNvPr>
@@ -11487,7 +11487,7 @@
           <p:cNvPr id="6" name="">
             <a:extLst xmlns:a="http://schemas.openxmlformats.org/drawingml/2006/main">
               <a:ext uri="{FF2B5EF4-FFF2-40B4-BE49-F238E27FC236}">
-                <a16:creationId xmlns:a16="http://schemas.microsoft.com/office/drawing/2014/main" id="{5E23E7A4-2781-4E0A-ABB7-EFEC3557FC8F}"/>
+                <a16:creationId xmlns:a16="http://schemas.microsoft.com/office/drawing/2014/main" id="{7D2D13BD-DAE5-4A8A-9458-32C619A27A71}"/>
               </a:ext>
             </a:extLst>
           </p:cNvPr>
@@ -11524,7 +11524,7 @@
           <p:cNvPr id="7" name="">
             <a:extLst xmlns:a="http://schemas.openxmlformats.org/drawingml/2006/main">
               <a:ext uri="{FF2B5EF4-FFF2-40B4-BE49-F238E27FC236}">
-                <a16:creationId xmlns:a16="http://schemas.microsoft.com/office/drawing/2014/main" id="{61D86E52-6A98-4679-A129-44EDBC28C260}"/>
+                <a16:creationId xmlns:a16="http://schemas.microsoft.com/office/drawing/2014/main" id="{E304AF91-058B-4E0F-B6D2-49B08A472EC4}"/>
               </a:ext>
             </a:extLst>
           </p:cNvPr>
@@ -11561,7 +11561,7 @@
           <p:cNvPr id="8" name="">
             <a:extLst xmlns:a="http://schemas.openxmlformats.org/drawingml/2006/main">
               <a:ext uri="{FF2B5EF4-FFF2-40B4-BE49-F238E27FC236}">
-                <a16:creationId xmlns:a16="http://schemas.microsoft.com/office/drawing/2014/main" id="{B959B027-F796-4924-A652-F8DDD7EA26F1}"/>
+                <a16:creationId xmlns:a16="http://schemas.microsoft.com/office/drawing/2014/main" id="{48CFCE25-6705-4DEE-8C48-C3A7C7469D58}"/>
               </a:ext>
             </a:extLst>
           </p:cNvPr>
@@ -11598,7 +11598,7 @@
           <p:cNvPr id="9" name="">
             <a:extLst xmlns:a="http://schemas.openxmlformats.org/drawingml/2006/main">
               <a:ext uri="{FF2B5EF4-FFF2-40B4-BE49-F238E27FC236}">
-                <a16:creationId xmlns:a16="http://schemas.microsoft.com/office/drawing/2014/main" id="{46667764-4C5D-4AA1-8B1B-78133CC6360F}"/>
+                <a16:creationId xmlns:a16="http://schemas.microsoft.com/office/drawing/2014/main" id="{0F662108-2B6A-449B-AFA7-8A54267A8580}"/>
               </a:ext>
             </a:extLst>
           </p:cNvPr>
@@ -11656,7 +11656,7 @@
           <p:cNvPr id="10" name="">
             <a:extLst xmlns:a="http://schemas.openxmlformats.org/drawingml/2006/main">
               <a:ext uri="{FF2B5EF4-FFF2-40B4-BE49-F238E27FC236}">
-                <a16:creationId xmlns:a16="http://schemas.microsoft.com/office/drawing/2014/main" id="{56E0C1F7-CDF0-4823-BF2F-C5D93438C2FB}"/>
+                <a16:creationId xmlns:a16="http://schemas.microsoft.com/office/drawing/2014/main" id="{F504E3B5-79AF-4024-AF6E-5458E6B18A8E}"/>
               </a:ext>
             </a:extLst>
           </p:cNvPr>
@@ -11714,7 +11714,7 @@
           <p:cNvPr id="11" name="">
             <a:extLst xmlns:a="http://schemas.openxmlformats.org/drawingml/2006/main">
               <a:ext uri="{FF2B5EF4-FFF2-40B4-BE49-F238E27FC236}">
-                <a16:creationId xmlns:a16="http://schemas.microsoft.com/office/drawing/2014/main" id="{24669CBD-F850-4AE3-9042-24A33D44EC9F}"/>
+                <a16:creationId xmlns:a16="http://schemas.microsoft.com/office/drawing/2014/main" id="{86856388-A3C8-4670-B4AF-A32589215E7A}"/>
               </a:ext>
             </a:extLst>
           </p:cNvPr>
@@ -11749,7 +11749,7 @@
           <p:cNvPr id="12" name="">
             <a:extLst xmlns:a="http://schemas.openxmlformats.org/drawingml/2006/main">
               <a:ext uri="{FF2B5EF4-FFF2-40B4-BE49-F238E27FC236}">
-                <a16:creationId xmlns:a16="http://schemas.microsoft.com/office/drawing/2014/main" id="{02AB1B6E-AB1E-4BFE-A34F-AEF7FAA6281B}"/>
+                <a16:creationId xmlns:a16="http://schemas.microsoft.com/office/drawing/2014/main" id="{F0C7C468-F504-498A-A603-3DC259FC8E79}"/>
               </a:ext>
             </a:extLst>
           </p:cNvPr>
@@ -11782,7 +11782,7 @@
           <p:cNvPr id="13" name="">
             <a:extLst xmlns:a="http://schemas.openxmlformats.org/drawingml/2006/main">
               <a:ext uri="{FF2B5EF4-FFF2-40B4-BE49-F238E27FC236}">
-                <a16:creationId xmlns:a16="http://schemas.microsoft.com/office/drawing/2014/main" id="{D7910122-8DE8-48A3-80A6-E5FD059CAE44}"/>
+                <a16:creationId xmlns:a16="http://schemas.microsoft.com/office/drawing/2014/main" id="{73F9E196-E330-4195-9685-A6BCFC0E0C08}"/>
               </a:ext>
             </a:extLst>
           </p:cNvPr>
@@ -11857,7 +11857,7 @@
           <p:cNvPr id="14" name="">
             <a:extLst xmlns:a="http://schemas.openxmlformats.org/drawingml/2006/main">
               <a:ext uri="{FF2B5EF4-FFF2-40B4-BE49-F238E27FC236}">
-                <a16:creationId xmlns:a16="http://schemas.microsoft.com/office/drawing/2014/main" id="{CABBF6F4-ADD4-4B43-9661-3897F3BCE601}"/>
+                <a16:creationId xmlns:a16="http://schemas.microsoft.com/office/drawing/2014/main" id="{61750C2E-A4E9-4BC3-A538-E061671AEB77}"/>
               </a:ext>
             </a:extLst>
           </p:cNvPr>
@@ -11892,7 +11892,7 @@
           <p:cNvPr id="15" name="">
             <a:extLst xmlns:a="http://schemas.openxmlformats.org/drawingml/2006/main">
               <a:ext uri="{FF2B5EF4-FFF2-40B4-BE49-F238E27FC236}">
-                <a16:creationId xmlns:a16="http://schemas.microsoft.com/office/drawing/2014/main" id="{D4787C24-ABE2-4499-BBC9-5C64D938A822}"/>
+                <a16:creationId xmlns:a16="http://schemas.microsoft.com/office/drawing/2014/main" id="{1929C17C-1BDE-42B6-9336-575A831E42EF}"/>
               </a:ext>
             </a:extLst>
           </p:cNvPr>
@@ -11927,7 +11927,7 @@
           <p:cNvPr id="16" name="">
             <a:extLst xmlns:a="http://schemas.openxmlformats.org/drawingml/2006/main">
               <a:ext uri="{FF2B5EF4-FFF2-40B4-BE49-F238E27FC236}">
-                <a16:creationId xmlns:a16="http://schemas.microsoft.com/office/drawing/2014/main" id="{F6156ACD-8946-4E51-9F5D-A58FA19B322B}"/>
+                <a16:creationId xmlns:a16="http://schemas.microsoft.com/office/drawing/2014/main" id="{1D04031E-401B-4CA0-8DFB-B238B5D04FF6}"/>
               </a:ext>
             </a:extLst>
           </p:cNvPr>
@@ -11985,7 +11985,7 @@
           <p:cNvPr id="17" name="">
             <a:extLst xmlns:a="http://schemas.openxmlformats.org/drawingml/2006/main">
               <a:ext uri="{FF2B5EF4-FFF2-40B4-BE49-F238E27FC236}">
-                <a16:creationId xmlns:a16="http://schemas.microsoft.com/office/drawing/2014/main" id="{9C5C89C2-19E0-4D4B-8B51-15342EAEC15B}"/>
+                <a16:creationId xmlns:a16="http://schemas.microsoft.com/office/drawing/2014/main" id="{C4F5742D-965A-4DCD-B493-5CEAF49467BE}"/>
               </a:ext>
             </a:extLst>
           </p:cNvPr>
@@ -12022,7 +12022,7 @@
           <p:cNvPr id="18" name="">
             <a:extLst xmlns:a="http://schemas.openxmlformats.org/drawingml/2006/main">
               <a:ext uri="{FF2B5EF4-FFF2-40B4-BE49-F238E27FC236}">
-                <a16:creationId xmlns:a16="http://schemas.microsoft.com/office/drawing/2014/main" id="{FA8A512E-EF05-4BDD-892F-B3EB952928B9}"/>
+                <a16:creationId xmlns:a16="http://schemas.microsoft.com/office/drawing/2014/main" id="{C162741C-46CA-41BE-B816-49B6E66429DB}"/>
               </a:ext>
             </a:extLst>
           </p:cNvPr>
@@ -12057,7 +12057,7 @@
           <p:cNvPr id="19" name="">
             <a:extLst xmlns:a="http://schemas.openxmlformats.org/drawingml/2006/main">
               <a:ext uri="{FF2B5EF4-FFF2-40B4-BE49-F238E27FC236}">
-                <a16:creationId xmlns:a16="http://schemas.microsoft.com/office/drawing/2014/main" id="{7A9AA7F4-8209-444D-A0DF-FE805C4B2F18}"/>
+                <a16:creationId xmlns:a16="http://schemas.microsoft.com/office/drawing/2014/main" id="{606A782E-A49C-4693-9277-50BFD57FB61E}"/>
               </a:ext>
             </a:extLst>
           </p:cNvPr>
@@ -12115,7 +12115,7 @@
           <p:cNvPr id="20" name="">
             <a:extLst xmlns:a="http://schemas.openxmlformats.org/drawingml/2006/main">
               <a:ext uri="{FF2B5EF4-FFF2-40B4-BE49-F238E27FC236}">
-                <a16:creationId xmlns:a16="http://schemas.microsoft.com/office/drawing/2014/main" id="{0F59BD76-EBE7-4812-9737-5AA08258CDE1}"/>
+                <a16:creationId xmlns:a16="http://schemas.microsoft.com/office/drawing/2014/main" id="{AA64EA51-D710-4E0D-B864-0D5071399AE3}"/>
               </a:ext>
             </a:extLst>
           </p:cNvPr>
@@ -12224,7 +12224,7 @@
           <p:cNvPr id="21" name="">
             <a:extLst xmlns:a="http://schemas.openxmlformats.org/drawingml/2006/main">
               <a:ext uri="{FF2B5EF4-FFF2-40B4-BE49-F238E27FC236}">
-                <a16:creationId xmlns:a16="http://schemas.microsoft.com/office/drawing/2014/main" id="{97B66CED-1BAD-45C1-89E9-B55E658A3122}"/>
+                <a16:creationId xmlns:a16="http://schemas.microsoft.com/office/drawing/2014/main" id="{7793E34E-76BB-4618-AFC5-43F94E6D8686}"/>
               </a:ext>
             </a:extLst>
           </p:cNvPr>
@@ -12261,7 +12261,7 @@
           <p:cNvPr id="22" name="">
             <a:extLst xmlns:a="http://schemas.openxmlformats.org/drawingml/2006/main">
               <a:ext uri="{FF2B5EF4-FFF2-40B4-BE49-F238E27FC236}">
-                <a16:creationId xmlns:a16="http://schemas.microsoft.com/office/drawing/2014/main" id="{0D7F9FBC-8E74-4523-8CAA-BBA42D3051A2}"/>
+                <a16:creationId xmlns:a16="http://schemas.microsoft.com/office/drawing/2014/main" id="{93C03E04-D76C-43C3-AEC5-E844B2048548}"/>
               </a:ext>
             </a:extLst>
           </p:cNvPr>
@@ -12296,7 +12296,7 @@
           <p:cNvPr id="23" name="">
             <a:extLst xmlns:a="http://schemas.openxmlformats.org/drawingml/2006/main">
               <a:ext uri="{FF2B5EF4-FFF2-40B4-BE49-F238E27FC236}">
-                <a16:creationId xmlns:a16="http://schemas.microsoft.com/office/drawing/2014/main" id="{1E3B8964-8534-4CE4-B8B1-315A85209D35}"/>
+                <a16:creationId xmlns:a16="http://schemas.microsoft.com/office/drawing/2014/main" id="{B51EB596-1212-4A4D-BA74-DF3F94FAF25E}"/>
               </a:ext>
             </a:extLst>
           </p:cNvPr>
@@ -12354,7 +12354,7 @@
           <p:cNvPr id="24" name="">
             <a:extLst xmlns:a="http://schemas.openxmlformats.org/drawingml/2006/main">
               <a:ext uri="{FF2B5EF4-FFF2-40B4-BE49-F238E27FC236}">
-                <a16:creationId xmlns:a16="http://schemas.microsoft.com/office/drawing/2014/main" id="{0092F6D5-4F83-494E-A3DB-4857DDA49BCF}"/>
+                <a16:creationId xmlns:a16="http://schemas.microsoft.com/office/drawing/2014/main" id="{E979F6BC-0559-42C0-AE5E-5287E7977577}"/>
               </a:ext>
             </a:extLst>
           </p:cNvPr>
@@ -12463,7 +12463,7 @@
           <p:cNvPr id="25" name="">
             <a:extLst xmlns:a="http://schemas.openxmlformats.org/drawingml/2006/main">
               <a:ext uri="{FF2B5EF4-FFF2-40B4-BE49-F238E27FC236}">
-                <a16:creationId xmlns:a16="http://schemas.microsoft.com/office/drawing/2014/main" id="{3699BAAC-1341-4C31-9868-85C3F79DE255}"/>
+                <a16:creationId xmlns:a16="http://schemas.microsoft.com/office/drawing/2014/main" id="{C133ADE3-D919-4773-B4BF-6D0CA3D4827D}"/>
               </a:ext>
             </a:extLst>
           </p:cNvPr>
@@ -12500,7 +12500,7 @@
           <p:cNvPr id="26" name="">
             <a:extLst xmlns:a="http://schemas.openxmlformats.org/drawingml/2006/main">
               <a:ext uri="{FF2B5EF4-FFF2-40B4-BE49-F238E27FC236}">
-                <a16:creationId xmlns:a16="http://schemas.microsoft.com/office/drawing/2014/main" id="{4CAC300B-EB8F-4CCD-8C7B-65765CFC6BB4}"/>
+                <a16:creationId xmlns:a16="http://schemas.microsoft.com/office/drawing/2014/main" id="{2B7DC544-7156-4D40-925B-CB8DFE86EC3E}"/>
               </a:ext>
             </a:extLst>
           </p:cNvPr>
@@ -12535,7 +12535,7 @@
           <p:cNvPr id="27" name="">
             <a:extLst xmlns:a="http://schemas.openxmlformats.org/drawingml/2006/main">
               <a:ext uri="{FF2B5EF4-FFF2-40B4-BE49-F238E27FC236}">
-                <a16:creationId xmlns:a16="http://schemas.microsoft.com/office/drawing/2014/main" id="{29D07B63-1BBB-4D6D-B274-720E6FC11F2F}"/>
+                <a16:creationId xmlns:a16="http://schemas.microsoft.com/office/drawing/2014/main" id="{6A6C197D-466E-4AF4-8848-8EB9A9BE357A}"/>
               </a:ext>
             </a:extLst>
           </p:cNvPr>
@@ -12593,7 +12593,7 @@
           <p:cNvPr id="28" name="">
             <a:extLst xmlns:a="http://schemas.openxmlformats.org/drawingml/2006/main">
               <a:ext uri="{FF2B5EF4-FFF2-40B4-BE49-F238E27FC236}">
-                <a16:creationId xmlns:a16="http://schemas.microsoft.com/office/drawing/2014/main" id="{4D5097AB-BF9A-4903-AE50-30150CCF5ED8}"/>
+                <a16:creationId xmlns:a16="http://schemas.microsoft.com/office/drawing/2014/main" id="{59DBB416-20FE-45FD-860A-979CED5079D1}"/>
               </a:ext>
             </a:extLst>
           </p:cNvPr>
@@ -12702,7 +12702,7 @@
           <p:cNvPr id="29" name="">
             <a:extLst xmlns:a="http://schemas.openxmlformats.org/drawingml/2006/main">
               <a:ext uri="{FF2B5EF4-FFF2-40B4-BE49-F238E27FC236}">
-                <a16:creationId xmlns:a16="http://schemas.microsoft.com/office/drawing/2014/main" id="{B8CB9F7D-5EF6-4CD9-AEE8-B7243E0CE221}"/>
+                <a16:creationId xmlns:a16="http://schemas.microsoft.com/office/drawing/2014/main" id="{FEEE00CC-6220-4594-9B9C-825F29C70903}"/>
               </a:ext>
             </a:extLst>
           </p:cNvPr>
@@ -12739,7 +12739,7 @@
           <p:cNvPr id="30" name="">
             <a:extLst xmlns:a="http://schemas.openxmlformats.org/drawingml/2006/main">
               <a:ext uri="{FF2B5EF4-FFF2-40B4-BE49-F238E27FC236}">
-                <a16:creationId xmlns:a16="http://schemas.microsoft.com/office/drawing/2014/main" id="{4DE1EFD8-2511-44B2-AB54-B5E807847EF9}"/>
+                <a16:creationId xmlns:a16="http://schemas.microsoft.com/office/drawing/2014/main" id="{EE64DE0D-24A2-4C21-A8F0-A2FA4611A612}"/>
               </a:ext>
             </a:extLst>
           </p:cNvPr>
@@ -12774,7 +12774,7 @@
           <p:cNvPr id="31" name="">
             <a:extLst xmlns:a="http://schemas.openxmlformats.org/drawingml/2006/main">
               <a:ext uri="{FF2B5EF4-FFF2-40B4-BE49-F238E27FC236}">
-                <a16:creationId xmlns:a16="http://schemas.microsoft.com/office/drawing/2014/main" id="{83B4A6E9-6BB6-46CA-9886-0EB5664D4B04}"/>
+                <a16:creationId xmlns:a16="http://schemas.microsoft.com/office/drawing/2014/main" id="{FECE3605-E843-4848-B316-A9D7AA6373C3}"/>
               </a:ext>
             </a:extLst>
           </p:cNvPr>
@@ -12832,7 +12832,7 @@
           <p:cNvPr id="32" name="">
             <a:extLst xmlns:a="http://schemas.openxmlformats.org/drawingml/2006/main">
               <a:ext uri="{FF2B5EF4-FFF2-40B4-BE49-F238E27FC236}">
-                <a16:creationId xmlns:a16="http://schemas.microsoft.com/office/drawing/2014/main" id="{1A6EE750-1E9E-460A-AC2C-B1240BCED3C8}"/>
+                <a16:creationId xmlns:a16="http://schemas.microsoft.com/office/drawing/2014/main" id="{371C49AA-87C0-4BED-B39F-D268F60D0FD6}"/>
               </a:ext>
             </a:extLst>
           </p:cNvPr>
@@ -12941,7 +12941,7 @@
           <p:cNvPr id="33" name="">
             <a:extLst xmlns:a="http://schemas.openxmlformats.org/drawingml/2006/main">
               <a:ext uri="{FF2B5EF4-FFF2-40B4-BE49-F238E27FC236}">
-                <a16:creationId xmlns:a16="http://schemas.microsoft.com/office/drawing/2014/main" id="{3D55D282-11CF-41B4-A093-44202E20BBB5}"/>
+                <a16:creationId xmlns:a16="http://schemas.microsoft.com/office/drawing/2014/main" id="{F4725FEA-8A5A-42EF-92D3-8406C8F530E4}"/>
               </a:ext>
             </a:extLst>
           </p:cNvPr>
@@ -12995,7 +12995,7 @@
           <p:cNvPr id="34" name="">
             <a:extLst xmlns:a="http://schemas.openxmlformats.org/drawingml/2006/main">
               <a:ext uri="{FF2B5EF4-FFF2-40B4-BE49-F238E27FC236}">
-                <a16:creationId xmlns:a16="http://schemas.microsoft.com/office/drawing/2014/main" id="{7CB18FCF-190C-4044-8E9A-153BE5B8F080}"/>
+                <a16:creationId xmlns:a16="http://schemas.microsoft.com/office/drawing/2014/main" id="{CACA3172-57A6-4B6F-9265-36682497B6FD}"/>
               </a:ext>
             </a:extLst>
           </p:cNvPr>
@@ -13028,7 +13028,7 @@
           <p:cNvPr id="35" name="">
             <a:extLst xmlns:a="http://schemas.openxmlformats.org/drawingml/2006/main">
               <a:ext uri="{FF2B5EF4-FFF2-40B4-BE49-F238E27FC236}">
-                <a16:creationId xmlns:a16="http://schemas.microsoft.com/office/drawing/2014/main" id="{19011405-99DA-446B-BAB7-3659CFA487A3}"/>
+                <a16:creationId xmlns:a16="http://schemas.microsoft.com/office/drawing/2014/main" id="{811D0E9F-DA18-4D91-AD54-031F0AECC8B9}"/>
               </a:ext>
             </a:extLst>
           </p:cNvPr>
@@ -13082,7 +13082,7 @@
           <p:cNvPr id="36" name="">
             <a:extLst xmlns:a="http://schemas.openxmlformats.org/drawingml/2006/main">
               <a:ext uri="{FF2B5EF4-FFF2-40B4-BE49-F238E27FC236}">
-                <a16:creationId xmlns:a16="http://schemas.microsoft.com/office/drawing/2014/main" id="{C56314CD-BFCD-4841-BC9F-03433DF6A59A}"/>
+                <a16:creationId xmlns:a16="http://schemas.microsoft.com/office/drawing/2014/main" id="{6ECDD42F-DE88-44B0-9A5D-0A25627B21EC}"/>
               </a:ext>
             </a:extLst>
           </p:cNvPr>
@@ -13115,7 +13115,7 @@
           <p:cNvPr id="37" name="">
             <a:extLst xmlns:a="http://schemas.openxmlformats.org/drawingml/2006/main">
               <a:ext uri="{FF2B5EF4-FFF2-40B4-BE49-F238E27FC236}">
-                <a16:creationId xmlns:a16="http://schemas.microsoft.com/office/drawing/2014/main" id="{A0DF561B-A7BA-423F-9594-4FE8A7F7B261}"/>
+                <a16:creationId xmlns:a16="http://schemas.microsoft.com/office/drawing/2014/main" id="{373C9C87-4385-4867-B1EC-83D3736787B6}"/>
               </a:ext>
             </a:extLst>
           </p:cNvPr>
@@ -13169,7 +13169,7 @@
           <p:cNvPr id="38" name="">
             <a:extLst xmlns:a="http://schemas.openxmlformats.org/drawingml/2006/main">
               <a:ext uri="{FF2B5EF4-FFF2-40B4-BE49-F238E27FC236}">
-                <a16:creationId xmlns:a16="http://schemas.microsoft.com/office/drawing/2014/main" id="{2B03E13C-0C86-45CE-9FC6-3F1164F36858}"/>
+                <a16:creationId xmlns:a16="http://schemas.microsoft.com/office/drawing/2014/main" id="{7846CE5A-71A4-49C8-ACFC-AF3EABD11329}"/>
               </a:ext>
             </a:extLst>
           </p:cNvPr>
@@ -13202,7 +13202,7 @@
           <p:cNvPr id="39" name="">
             <a:extLst xmlns:a="http://schemas.openxmlformats.org/drawingml/2006/main">
               <a:ext uri="{FF2B5EF4-FFF2-40B4-BE49-F238E27FC236}">
-                <a16:creationId xmlns:a16="http://schemas.microsoft.com/office/drawing/2014/main" id="{F1408503-F784-409B-B584-15BBB0BCB965}"/>
+                <a16:creationId xmlns:a16="http://schemas.microsoft.com/office/drawing/2014/main" id="{BFF65069-7B56-402A-AD83-ECCEB27D7199}"/>
               </a:ext>
             </a:extLst>
           </p:cNvPr>
@@ -13256,7 +13256,7 @@
           <p:cNvPr id="40" name="">
             <a:extLst xmlns:a="http://schemas.openxmlformats.org/drawingml/2006/main">
               <a:ext uri="{FF2B5EF4-FFF2-40B4-BE49-F238E27FC236}">
-                <a16:creationId xmlns:a16="http://schemas.microsoft.com/office/drawing/2014/main" id="{ABB4E55C-F368-4D3B-AB90-C720F4A72B48}"/>
+                <a16:creationId xmlns:a16="http://schemas.microsoft.com/office/drawing/2014/main" id="{68752777-C132-4F5F-B011-8B16558D1E8B}"/>
               </a:ext>
             </a:extLst>
           </p:cNvPr>
@@ -13312,7 +13312,7 @@
     </p:spTree>
     <p:extLst>
       <p:ext uri="{BB962C8B-B14F-4D97-AF65-F5344CB8AC3E}">
-        <p14:creationId xmlns:p14="http://schemas.microsoft.com/office/powerpoint/2010/main" val="657065476"/>
+        <p14:creationId xmlns:p14="http://schemas.microsoft.com/office/powerpoint/2010/main" val="1394357154"/>
       </p:ext>
     </p:extLst>
   </p:cSld>
@@ -13343,7 +13343,7 @@
           <p:cNvPr id="1" name="Slide Number Placeholder 5">
             <a:extLst xmlns:a="http://schemas.openxmlformats.org/drawingml/2006/main">
               <a:ext uri="{FF2B5EF4-FFF2-40B4-BE49-F238E27FC236}">
-                <a16:creationId xmlns:a16="http://schemas.microsoft.com/office/drawing/2014/main" id="{C5A324B5-703D-4DE1-A920-5C56CD46E34C}"/>
+                <a16:creationId xmlns:a16="http://schemas.microsoft.com/office/drawing/2014/main" id="{E12CE447-476B-4BAE-A1FF-E669E79965E6}"/>
               </a:ext>
             </a:extLst>
           </p:cNvPr>
@@ -13379,7 +13379,7 @@
           <p:nvPr/>
         </p:nvPicPr>
         <p:blipFill>
-          <a:blip xmlns:r="http://schemas.openxmlformats.org/officeDocument/2006/relationships" xmlns:a="http://schemas.openxmlformats.org/drawingml/2006/main" r:embed="R5ac2505a1bf54d95"/>
+          <a:blip xmlns:r="http://schemas.openxmlformats.org/officeDocument/2006/relationships" xmlns:a="http://schemas.openxmlformats.org/drawingml/2006/main" r:embed="R203812fe74f849a7"/>
           <a:srcRect xmlns:a="http://schemas.openxmlformats.org/drawingml/2006/main" l="0" t="21875" r="0" b="21875"/>
           <a:stretch xmlns:a="http://schemas.openxmlformats.org/drawingml/2006/main">
             <a:fillRect l="0" t="0" r="0" b="0"/>
@@ -13400,7 +13400,7 @@
           <p:cNvPr id="3" name="">
             <a:extLst xmlns:a="http://schemas.openxmlformats.org/drawingml/2006/main">
               <a:ext uri="{FF2B5EF4-FFF2-40B4-BE49-F238E27FC236}">
-                <a16:creationId xmlns:a16="http://schemas.microsoft.com/office/drawing/2014/main" id="{B0176DA0-CB94-4D45-B2FD-83FAAE336ADC}"/>
+                <a16:creationId xmlns:a16="http://schemas.microsoft.com/office/drawing/2014/main" id="{A11CAA33-5EA0-4A45-BCD5-8CD7D73E3548}"/>
               </a:ext>
             </a:extLst>
           </p:cNvPr>
@@ -13435,7 +13435,7 @@
           <p:cNvPr id="4" name="">
             <a:extLst xmlns:a="http://schemas.openxmlformats.org/drawingml/2006/main">
               <a:ext uri="{FF2B5EF4-FFF2-40B4-BE49-F238E27FC236}">
-                <a16:creationId xmlns:a16="http://schemas.microsoft.com/office/drawing/2014/main" id="{6927C78D-1C19-43E7-A9A9-C24F229832C8}"/>
+                <a16:creationId xmlns:a16="http://schemas.microsoft.com/office/drawing/2014/main" id="{F3F14A8D-B64A-4829-8A9F-5BB5C4DFAF7F}"/>
               </a:ext>
             </a:extLst>
           </p:cNvPr>
@@ -13470,7 +13470,7 @@
           <p:cNvPr id="5" name="">
             <a:extLst xmlns:a="http://schemas.openxmlformats.org/drawingml/2006/main">
               <a:ext uri="{FF2B5EF4-FFF2-40B4-BE49-F238E27FC236}">
-                <a16:creationId xmlns:a16="http://schemas.microsoft.com/office/drawing/2014/main" id="{665400EB-13AA-4F36-A6A0-6B5FF7C8E12E}"/>
+                <a16:creationId xmlns:a16="http://schemas.microsoft.com/office/drawing/2014/main" id="{537B1EB2-451A-4699-8250-C8FE5928B42D}"/>
               </a:ext>
             </a:extLst>
           </p:cNvPr>
@@ -13507,7 +13507,7 @@
           <p:cNvPr id="6" name="">
             <a:extLst xmlns:a="http://schemas.openxmlformats.org/drawingml/2006/main">
               <a:ext uri="{FF2B5EF4-FFF2-40B4-BE49-F238E27FC236}">
-                <a16:creationId xmlns:a16="http://schemas.microsoft.com/office/drawing/2014/main" id="{F7092360-00C3-4DD7-B539-D43FA5852356}"/>
+                <a16:creationId xmlns:a16="http://schemas.microsoft.com/office/drawing/2014/main" id="{6CD9E060-CC3C-4AA6-8C91-985578BE0349}"/>
               </a:ext>
             </a:extLst>
           </p:cNvPr>
@@ -13544,7 +13544,7 @@
           <p:cNvPr id="7" name="">
             <a:extLst xmlns:a="http://schemas.openxmlformats.org/drawingml/2006/main">
               <a:ext uri="{FF2B5EF4-FFF2-40B4-BE49-F238E27FC236}">
-                <a16:creationId xmlns:a16="http://schemas.microsoft.com/office/drawing/2014/main" id="{2BF73D49-DFB1-4856-8EDE-11C2335CC4E9}"/>
+                <a16:creationId xmlns:a16="http://schemas.microsoft.com/office/drawing/2014/main" id="{1D8143B9-7917-460C-8DD4-4EF606227B9D}"/>
               </a:ext>
             </a:extLst>
           </p:cNvPr>
@@ -13581,7 +13581,7 @@
           <p:cNvPr id="8" name="">
             <a:extLst xmlns:a="http://schemas.openxmlformats.org/drawingml/2006/main">
               <a:ext uri="{FF2B5EF4-FFF2-40B4-BE49-F238E27FC236}">
-                <a16:creationId xmlns:a16="http://schemas.microsoft.com/office/drawing/2014/main" id="{250125A6-EBA8-46D6-BB49-9D3F23E9ED1C}"/>
+                <a16:creationId xmlns:a16="http://schemas.microsoft.com/office/drawing/2014/main" id="{CDCC7253-DECC-4808-9FD7-B2AB2C2BD343}"/>
               </a:ext>
             </a:extLst>
           </p:cNvPr>
@@ -13618,7 +13618,7 @@
           <p:cNvPr id="9" name="">
             <a:extLst xmlns:a="http://schemas.openxmlformats.org/drawingml/2006/main">
               <a:ext uri="{FF2B5EF4-FFF2-40B4-BE49-F238E27FC236}">
-                <a16:creationId xmlns:a16="http://schemas.microsoft.com/office/drawing/2014/main" id="{A267F57E-8669-4375-BB82-9C55AFA3B4FC}"/>
+                <a16:creationId xmlns:a16="http://schemas.microsoft.com/office/drawing/2014/main" id="{A3ECED39-FF42-49A5-AC22-BAC2957C6060}"/>
               </a:ext>
             </a:extLst>
           </p:cNvPr>
@@ -13676,7 +13676,7 @@
           <p:cNvPr id="10" name="">
             <a:extLst xmlns:a="http://schemas.openxmlformats.org/drawingml/2006/main">
               <a:ext uri="{FF2B5EF4-FFF2-40B4-BE49-F238E27FC236}">
-                <a16:creationId xmlns:a16="http://schemas.microsoft.com/office/drawing/2014/main" id="{90AD5F5B-033F-4783-BBCA-4C7595EB6A8D}"/>
+                <a16:creationId xmlns:a16="http://schemas.microsoft.com/office/drawing/2014/main" id="{592907F2-785B-4EC2-B2BF-F4B07AD6AF2E}"/>
               </a:ext>
             </a:extLst>
           </p:cNvPr>
@@ -13734,7 +13734,7 @@
           <p:cNvPr id="11" name="">
             <a:extLst xmlns:a="http://schemas.openxmlformats.org/drawingml/2006/main">
               <a:ext uri="{FF2B5EF4-FFF2-40B4-BE49-F238E27FC236}">
-                <a16:creationId xmlns:a16="http://schemas.microsoft.com/office/drawing/2014/main" id="{7CA47789-0948-4065-A810-E572F7449B89}"/>
+                <a16:creationId xmlns:a16="http://schemas.microsoft.com/office/drawing/2014/main" id="{91E2F72D-F54C-412A-8549-A9C859033B0B}"/>
               </a:ext>
             </a:extLst>
           </p:cNvPr>
@@ -13769,7 +13769,7 @@
           <p:cNvPr id="12" name="">
             <a:extLst xmlns:a="http://schemas.openxmlformats.org/drawingml/2006/main">
               <a:ext uri="{FF2B5EF4-FFF2-40B4-BE49-F238E27FC236}">
-                <a16:creationId xmlns:a16="http://schemas.microsoft.com/office/drawing/2014/main" id="{C426C54D-298F-4CD7-908D-9B460B91446A}"/>
+                <a16:creationId xmlns:a16="http://schemas.microsoft.com/office/drawing/2014/main" id="{62338E28-16F0-4DBF-86BF-C8D14CBAF63D}"/>
               </a:ext>
             </a:extLst>
           </p:cNvPr>
@@ -13802,7 +13802,7 @@
           <p:cNvPr id="13" name="">
             <a:extLst xmlns:a="http://schemas.openxmlformats.org/drawingml/2006/main">
               <a:ext uri="{FF2B5EF4-FFF2-40B4-BE49-F238E27FC236}">
-                <a16:creationId xmlns:a16="http://schemas.microsoft.com/office/drawing/2014/main" id="{F7B24E1E-675F-4434-B927-574FD6F08AAA}"/>
+                <a16:creationId xmlns:a16="http://schemas.microsoft.com/office/drawing/2014/main" id="{6FD86669-4F43-43EA-9945-A2F643F0B993}"/>
               </a:ext>
             </a:extLst>
           </p:cNvPr>
@@ -13877,7 +13877,7 @@
           <p:cNvPr id="14" name="">
             <a:extLst xmlns:a="http://schemas.openxmlformats.org/drawingml/2006/main">
               <a:ext uri="{FF2B5EF4-FFF2-40B4-BE49-F238E27FC236}">
-                <a16:creationId xmlns:a16="http://schemas.microsoft.com/office/drawing/2014/main" id="{F7213B3A-AB04-4B57-B4B6-C5B5C07B2698}"/>
+                <a16:creationId xmlns:a16="http://schemas.microsoft.com/office/drawing/2014/main" id="{E5E94A83-2065-44D3-A5C2-9C047A0E988D}"/>
               </a:ext>
             </a:extLst>
           </p:cNvPr>
@@ -13914,7 +13914,7 @@
           <p:cNvPr id="15" name="">
             <a:extLst xmlns:a="http://schemas.openxmlformats.org/drawingml/2006/main">
               <a:ext uri="{FF2B5EF4-FFF2-40B4-BE49-F238E27FC236}">
-                <a16:creationId xmlns:a16="http://schemas.microsoft.com/office/drawing/2014/main" id="{A4BD73D5-33FA-43E1-A8F1-2766EA47A339}"/>
+                <a16:creationId xmlns:a16="http://schemas.microsoft.com/office/drawing/2014/main" id="{5D1AF7E6-B777-4AD9-84FE-B4FE92E28301}"/>
               </a:ext>
             </a:extLst>
           </p:cNvPr>
@@ -13949,7 +13949,7 @@
           <p:cNvPr id="16" name="">
             <a:extLst xmlns:a="http://schemas.openxmlformats.org/drawingml/2006/main">
               <a:ext uri="{FF2B5EF4-FFF2-40B4-BE49-F238E27FC236}">
-                <a16:creationId xmlns:a16="http://schemas.microsoft.com/office/drawing/2014/main" id="{E680CC7A-2EEC-4CBE-BFA4-6105EA9B9EF9}"/>
+                <a16:creationId xmlns:a16="http://schemas.microsoft.com/office/drawing/2014/main" id="{C1F5BC5D-67F4-476F-BC39-49042DD35074}"/>
               </a:ext>
             </a:extLst>
           </p:cNvPr>
@@ -14007,7 +14007,7 @@
           <p:cNvPr id="17" name="">
             <a:extLst xmlns:a="http://schemas.openxmlformats.org/drawingml/2006/main">
               <a:ext uri="{FF2B5EF4-FFF2-40B4-BE49-F238E27FC236}">
-                <a16:creationId xmlns:a16="http://schemas.microsoft.com/office/drawing/2014/main" id="{45723F24-6935-4A6A-B3DB-02C301BCC8B7}"/>
+                <a16:creationId xmlns:a16="http://schemas.microsoft.com/office/drawing/2014/main" id="{77FB79B9-2473-4358-9082-124A81237859}"/>
               </a:ext>
             </a:extLst>
           </p:cNvPr>
@@ -14116,7 +14116,7 @@
           <p:cNvPr id="18" name="">
             <a:extLst xmlns:a="http://schemas.openxmlformats.org/drawingml/2006/main">
               <a:ext uri="{FF2B5EF4-FFF2-40B4-BE49-F238E27FC236}">
-                <a16:creationId xmlns:a16="http://schemas.microsoft.com/office/drawing/2014/main" id="{E59EDBA6-0024-4973-BAD1-8D1597DED986}"/>
+                <a16:creationId xmlns:a16="http://schemas.microsoft.com/office/drawing/2014/main" id="{5DB06B90-B995-4AF4-8BD0-D9B3B05C8E1C}"/>
               </a:ext>
             </a:extLst>
           </p:cNvPr>
@@ -14149,7 +14149,7 @@
           <p:cNvPr id="19" name="">
             <a:extLst xmlns:a="http://schemas.openxmlformats.org/drawingml/2006/main">
               <a:ext uri="{FF2B5EF4-FFF2-40B4-BE49-F238E27FC236}">
-                <a16:creationId xmlns:a16="http://schemas.microsoft.com/office/drawing/2014/main" id="{5E61E24B-DC60-4380-8BB9-6AF372CCDD61}"/>
+                <a16:creationId xmlns:a16="http://schemas.microsoft.com/office/drawing/2014/main" id="{32E8CFD5-D802-40C9-819E-DA20FE63DDB4}"/>
               </a:ext>
             </a:extLst>
           </p:cNvPr>
@@ -14186,7 +14186,7 @@
           <p:cNvPr id="20" name="">
             <a:extLst xmlns:a="http://schemas.openxmlformats.org/drawingml/2006/main">
               <a:ext uri="{FF2B5EF4-FFF2-40B4-BE49-F238E27FC236}">
-                <a16:creationId xmlns:a16="http://schemas.microsoft.com/office/drawing/2014/main" id="{E35C5716-FDA8-482B-8F52-2DD2BFB9FBC3}"/>
+                <a16:creationId xmlns:a16="http://schemas.microsoft.com/office/drawing/2014/main" id="{176DF6F3-4529-4CE9-AC4D-EF47822FCDDA}"/>
               </a:ext>
             </a:extLst>
           </p:cNvPr>
@@ -14221,7 +14221,7 @@
           <p:cNvPr id="21" name="">
             <a:extLst xmlns:a="http://schemas.openxmlformats.org/drawingml/2006/main">
               <a:ext uri="{FF2B5EF4-FFF2-40B4-BE49-F238E27FC236}">
-                <a16:creationId xmlns:a16="http://schemas.microsoft.com/office/drawing/2014/main" id="{637DCC7B-B0E2-4444-9F3C-0FCC9C6C957E}"/>
+                <a16:creationId xmlns:a16="http://schemas.microsoft.com/office/drawing/2014/main" id="{CB87B3A2-1056-4F58-A51C-3279C0E47B8E}"/>
               </a:ext>
             </a:extLst>
           </p:cNvPr>
@@ -14279,7 +14279,7 @@
           <p:cNvPr id="22" name="">
             <a:extLst xmlns:a="http://schemas.openxmlformats.org/drawingml/2006/main">
               <a:ext uri="{FF2B5EF4-FFF2-40B4-BE49-F238E27FC236}">
-                <a16:creationId xmlns:a16="http://schemas.microsoft.com/office/drawing/2014/main" id="{6F08D250-0BF9-41C3-AA3E-9A4D61909DF1}"/>
+                <a16:creationId xmlns:a16="http://schemas.microsoft.com/office/drawing/2014/main" id="{08F41C24-A61E-4E29-A5E6-2BA8885CC5CF}"/>
               </a:ext>
             </a:extLst>
           </p:cNvPr>
@@ -14388,7 +14388,7 @@
           <p:cNvPr id="23" name="">
             <a:extLst xmlns:a="http://schemas.openxmlformats.org/drawingml/2006/main">
               <a:ext uri="{FF2B5EF4-FFF2-40B4-BE49-F238E27FC236}">
-                <a16:creationId xmlns:a16="http://schemas.microsoft.com/office/drawing/2014/main" id="{E77F8F86-64D9-4A03-9AFF-72A1B5FE3FC0}"/>
+                <a16:creationId xmlns:a16="http://schemas.microsoft.com/office/drawing/2014/main" id="{E06257DF-BEAB-4C74-8AC9-5A2013CC2BA4}"/>
               </a:ext>
             </a:extLst>
           </p:cNvPr>
@@ -14421,7 +14421,7 @@
           <p:cNvPr id="24" name="">
             <a:extLst xmlns:a="http://schemas.openxmlformats.org/drawingml/2006/main">
               <a:ext uri="{FF2B5EF4-FFF2-40B4-BE49-F238E27FC236}">
-                <a16:creationId xmlns:a16="http://schemas.microsoft.com/office/drawing/2014/main" id="{5B19AC11-8A8C-4AC7-946A-81E3687275DE}"/>
+                <a16:creationId xmlns:a16="http://schemas.microsoft.com/office/drawing/2014/main" id="{CB9F27A0-B788-4E48-B211-5C69678C4EBF}"/>
               </a:ext>
             </a:extLst>
           </p:cNvPr>
@@ -14458,7 +14458,7 @@
           <p:cNvPr id="25" name="">
             <a:extLst xmlns:a="http://schemas.openxmlformats.org/drawingml/2006/main">
               <a:ext uri="{FF2B5EF4-FFF2-40B4-BE49-F238E27FC236}">
-                <a16:creationId xmlns:a16="http://schemas.microsoft.com/office/drawing/2014/main" id="{3C35DB87-1DAE-495F-9554-3F7CF50A7281}"/>
+                <a16:creationId xmlns:a16="http://schemas.microsoft.com/office/drawing/2014/main" id="{FFA7F26A-DAC4-4B2C-98E2-9BB2A1DCF1F7}"/>
               </a:ext>
             </a:extLst>
           </p:cNvPr>
@@ -14493,7 +14493,7 @@
           <p:cNvPr id="26" name="">
             <a:extLst xmlns:a="http://schemas.openxmlformats.org/drawingml/2006/main">
               <a:ext uri="{FF2B5EF4-FFF2-40B4-BE49-F238E27FC236}">
-                <a16:creationId xmlns:a16="http://schemas.microsoft.com/office/drawing/2014/main" id="{C847720D-698C-4B95-8B72-4F4BB513F5C6}"/>
+                <a16:creationId xmlns:a16="http://schemas.microsoft.com/office/drawing/2014/main" id="{AD189B84-D955-48CA-ACF3-4F182B28DD04}"/>
               </a:ext>
             </a:extLst>
           </p:cNvPr>
@@ -14551,7 +14551,7 @@
           <p:cNvPr id="27" name="">
             <a:extLst xmlns:a="http://schemas.openxmlformats.org/drawingml/2006/main">
               <a:ext uri="{FF2B5EF4-FFF2-40B4-BE49-F238E27FC236}">
-                <a16:creationId xmlns:a16="http://schemas.microsoft.com/office/drawing/2014/main" id="{12A67CFA-0FA8-4E69-8746-3352D9546D71}"/>
+                <a16:creationId xmlns:a16="http://schemas.microsoft.com/office/drawing/2014/main" id="{9773D69F-FB95-46A1-8BA6-67BE6BD506F9}"/>
               </a:ext>
             </a:extLst>
           </p:cNvPr>
@@ -14643,7 +14643,7 @@
           <p:cNvPr id="28" name="">
             <a:extLst xmlns:a="http://schemas.openxmlformats.org/drawingml/2006/main">
               <a:ext uri="{FF2B5EF4-FFF2-40B4-BE49-F238E27FC236}">
-                <a16:creationId xmlns:a16="http://schemas.microsoft.com/office/drawing/2014/main" id="{555C44C3-A32C-4CAF-94C6-A81CD34BA484}"/>
+                <a16:creationId xmlns:a16="http://schemas.microsoft.com/office/drawing/2014/main" id="{62A27BF9-1237-42CF-9155-DC39A8C12A42}"/>
               </a:ext>
             </a:extLst>
           </p:cNvPr>
@@ -14678,7 +14678,7 @@
           <p:cNvPr id="29" name="">
             <a:extLst xmlns:a="http://schemas.openxmlformats.org/drawingml/2006/main">
               <a:ext uri="{FF2B5EF4-FFF2-40B4-BE49-F238E27FC236}">
-                <a16:creationId xmlns:a16="http://schemas.microsoft.com/office/drawing/2014/main" id="{0C6EE6FA-2580-4E58-92A8-4AF9D2BEC5AD}"/>
+                <a16:creationId xmlns:a16="http://schemas.microsoft.com/office/drawing/2014/main" id="{8440B62C-4558-4FCC-BD2F-1EB153B31AF9}"/>
               </a:ext>
             </a:extLst>
           </p:cNvPr>
@@ -14713,7 +14713,7 @@
           <p:cNvPr id="30" name="">
             <a:extLst xmlns:a="http://schemas.openxmlformats.org/drawingml/2006/main">
               <a:ext uri="{FF2B5EF4-FFF2-40B4-BE49-F238E27FC236}">
-                <a16:creationId xmlns:a16="http://schemas.microsoft.com/office/drawing/2014/main" id="{6A074246-2878-42F2-B089-F8FEDD5EE8E3}"/>
+                <a16:creationId xmlns:a16="http://schemas.microsoft.com/office/drawing/2014/main" id="{2035AB98-EAA3-4B06-B2C4-7250E2064B2C}"/>
               </a:ext>
             </a:extLst>
           </p:cNvPr>
@@ -14771,7 +14771,7 @@
           <p:cNvPr id="31" name="">
             <a:extLst xmlns:a="http://schemas.openxmlformats.org/drawingml/2006/main">
               <a:ext uri="{FF2B5EF4-FFF2-40B4-BE49-F238E27FC236}">
-                <a16:creationId xmlns:a16="http://schemas.microsoft.com/office/drawing/2014/main" id="{B4810F55-A541-447F-A71F-7DB5C9780238}"/>
+                <a16:creationId xmlns:a16="http://schemas.microsoft.com/office/drawing/2014/main" id="{12C1452E-2D2F-47A5-B221-D2DB671FED75}"/>
               </a:ext>
             </a:extLst>
           </p:cNvPr>
@@ -14827,7 +14827,7 @@
     </p:spTree>
     <p:extLst>
       <p:ext uri="{BB962C8B-B14F-4D97-AF65-F5344CB8AC3E}">
-        <p14:creationId xmlns:p14="http://schemas.microsoft.com/office/powerpoint/2010/main" val="159160505"/>
+        <p14:creationId xmlns:p14="http://schemas.microsoft.com/office/powerpoint/2010/main" val="1908421148"/>
       </p:ext>
     </p:extLst>
   </p:cSld>
@@ -14858,7 +14858,7 @@
           <p:cNvPr id="1" name="Slide Number Placeholder 5">
             <a:extLst xmlns:a="http://schemas.openxmlformats.org/drawingml/2006/main">
               <a:ext uri="{FF2B5EF4-FFF2-40B4-BE49-F238E27FC236}">
-                <a16:creationId xmlns:a16="http://schemas.microsoft.com/office/drawing/2014/main" id="{C5A324B5-703D-4DE1-A920-5C56CD46E34C}"/>
+                <a16:creationId xmlns:a16="http://schemas.microsoft.com/office/drawing/2014/main" id="{E12CE447-476B-4BAE-A1FF-E669E79965E6}"/>
               </a:ext>
             </a:extLst>
           </p:cNvPr>
@@ -14894,7 +14894,7 @@
           <p:nvPr/>
         </p:nvPicPr>
         <p:blipFill>
-          <a:blip xmlns:r="http://schemas.openxmlformats.org/officeDocument/2006/relationships" xmlns:a="http://schemas.openxmlformats.org/drawingml/2006/main" r:embed="R557a5ae816884c30"/>
+          <a:blip xmlns:r="http://schemas.openxmlformats.org/officeDocument/2006/relationships" xmlns:a="http://schemas.openxmlformats.org/drawingml/2006/main" r:embed="R2336609a21444d95"/>
           <a:srcRect xmlns:a="http://schemas.openxmlformats.org/drawingml/2006/main" l="0" t="21875" r="0" b="21875"/>
           <a:stretch xmlns:a="http://schemas.openxmlformats.org/drawingml/2006/main">
             <a:fillRect l="0" t="0" r="0" b="0"/>
@@ -14915,7 +14915,7 @@
           <p:cNvPr id="3" name="">
             <a:extLst xmlns:a="http://schemas.openxmlformats.org/drawingml/2006/main">
               <a:ext uri="{FF2B5EF4-FFF2-40B4-BE49-F238E27FC236}">
-                <a16:creationId xmlns:a16="http://schemas.microsoft.com/office/drawing/2014/main" id="{863D9984-C04E-4B2F-AFC3-82E6C94A8EB9}"/>
+                <a16:creationId xmlns:a16="http://schemas.microsoft.com/office/drawing/2014/main" id="{30CA5D47-C4E0-4A8E-8F69-C675713A3AFC}"/>
               </a:ext>
             </a:extLst>
           </p:cNvPr>
@@ -14950,7 +14950,7 @@
           <p:cNvPr id="4" name="">
             <a:extLst xmlns:a="http://schemas.openxmlformats.org/drawingml/2006/main">
               <a:ext uri="{FF2B5EF4-FFF2-40B4-BE49-F238E27FC236}">
-                <a16:creationId xmlns:a16="http://schemas.microsoft.com/office/drawing/2014/main" id="{47632623-F1D3-4547-A15C-9781F58C26C1}"/>
+                <a16:creationId xmlns:a16="http://schemas.microsoft.com/office/drawing/2014/main" id="{A76A70C4-38AD-493B-9C7F-C6403F2118F6}"/>
               </a:ext>
             </a:extLst>
           </p:cNvPr>
@@ -14985,7 +14985,7 @@
           <p:cNvPr id="5" name="">
             <a:extLst xmlns:a="http://schemas.openxmlformats.org/drawingml/2006/main">
               <a:ext uri="{FF2B5EF4-FFF2-40B4-BE49-F238E27FC236}">
-                <a16:creationId xmlns:a16="http://schemas.microsoft.com/office/drawing/2014/main" id="{FEFF29E7-5A0C-484A-8413-D17DDCD72398}"/>
+                <a16:creationId xmlns:a16="http://schemas.microsoft.com/office/drawing/2014/main" id="{E11F7184-FC2F-4DBB-8C82-917A76F8F6E7}"/>
               </a:ext>
             </a:extLst>
           </p:cNvPr>
@@ -15022,7 +15022,7 @@
           <p:cNvPr id="6" name="">
             <a:extLst xmlns:a="http://schemas.openxmlformats.org/drawingml/2006/main">
               <a:ext uri="{FF2B5EF4-FFF2-40B4-BE49-F238E27FC236}">
-                <a16:creationId xmlns:a16="http://schemas.microsoft.com/office/drawing/2014/main" id="{43B71630-46D2-45ED-8B30-78C05C8A97E7}"/>
+                <a16:creationId xmlns:a16="http://schemas.microsoft.com/office/drawing/2014/main" id="{5EC8B7CF-629E-44AA-AECD-58D981B218F6}"/>
               </a:ext>
             </a:extLst>
           </p:cNvPr>
@@ -15059,7 +15059,7 @@
           <p:cNvPr id="7" name="">
             <a:extLst xmlns:a="http://schemas.openxmlformats.org/drawingml/2006/main">
               <a:ext uri="{FF2B5EF4-FFF2-40B4-BE49-F238E27FC236}">
-                <a16:creationId xmlns:a16="http://schemas.microsoft.com/office/drawing/2014/main" id="{62F62BB9-2552-44AA-B081-5AE82F40A275}"/>
+                <a16:creationId xmlns:a16="http://schemas.microsoft.com/office/drawing/2014/main" id="{7BB2938C-FEAD-4422-A33A-D017EA940132}"/>
               </a:ext>
             </a:extLst>
           </p:cNvPr>
@@ -15096,7 +15096,7 @@
           <p:cNvPr id="8" name="">
             <a:extLst xmlns:a="http://schemas.openxmlformats.org/drawingml/2006/main">
               <a:ext uri="{FF2B5EF4-FFF2-40B4-BE49-F238E27FC236}">
-                <a16:creationId xmlns:a16="http://schemas.microsoft.com/office/drawing/2014/main" id="{B2E3A9A4-7DEA-49C6-9807-10BC1CD0D7DB}"/>
+                <a16:creationId xmlns:a16="http://schemas.microsoft.com/office/drawing/2014/main" id="{35D0A677-A012-44A0-B3D6-652C23B24AA0}"/>
               </a:ext>
             </a:extLst>
           </p:cNvPr>
@@ -15133,7 +15133,7 @@
           <p:cNvPr id="9" name="">
             <a:extLst xmlns:a="http://schemas.openxmlformats.org/drawingml/2006/main">
               <a:ext uri="{FF2B5EF4-FFF2-40B4-BE49-F238E27FC236}">
-                <a16:creationId xmlns:a16="http://schemas.microsoft.com/office/drawing/2014/main" id="{3E3E4714-78B3-4630-971F-4B7ED6498E23}"/>
+                <a16:creationId xmlns:a16="http://schemas.microsoft.com/office/drawing/2014/main" id="{29D9D992-C308-4EA1-83A8-EB0E015C4837}"/>
               </a:ext>
             </a:extLst>
           </p:cNvPr>
@@ -15191,7 +15191,7 @@
           <p:cNvPr id="10" name="">
             <a:extLst xmlns:a="http://schemas.openxmlformats.org/drawingml/2006/main">
               <a:ext uri="{FF2B5EF4-FFF2-40B4-BE49-F238E27FC236}">
-                <a16:creationId xmlns:a16="http://schemas.microsoft.com/office/drawing/2014/main" id="{08524345-1E28-48F4-999F-54B3F1FF0B58}"/>
+                <a16:creationId xmlns:a16="http://schemas.microsoft.com/office/drawing/2014/main" id="{01DCC677-AA51-4D35-BB4E-13D1D82E3471}"/>
               </a:ext>
             </a:extLst>
           </p:cNvPr>
@@ -15249,7 +15249,7 @@
           <p:cNvPr id="11" name="">
             <a:extLst xmlns:a="http://schemas.openxmlformats.org/drawingml/2006/main">
               <a:ext uri="{FF2B5EF4-FFF2-40B4-BE49-F238E27FC236}">
-                <a16:creationId xmlns:a16="http://schemas.microsoft.com/office/drawing/2014/main" id="{0D4FC634-9291-4348-BA16-893CABFA1A3E}"/>
+                <a16:creationId xmlns:a16="http://schemas.microsoft.com/office/drawing/2014/main" id="{39F1F3A0-C083-46D8-A510-D8B1F79F8BD6}"/>
               </a:ext>
             </a:extLst>
           </p:cNvPr>
@@ -15284,7 +15284,7 @@
           <p:cNvPr id="12" name="">
             <a:extLst xmlns:a="http://schemas.openxmlformats.org/drawingml/2006/main">
               <a:ext uri="{FF2B5EF4-FFF2-40B4-BE49-F238E27FC236}">
-                <a16:creationId xmlns:a16="http://schemas.microsoft.com/office/drawing/2014/main" id="{A205963A-7D47-4474-855A-28451B35729E}"/>
+                <a16:creationId xmlns:a16="http://schemas.microsoft.com/office/drawing/2014/main" id="{5F4AF19C-DA5C-4241-BD5C-B7468ECC4917}"/>
               </a:ext>
             </a:extLst>
           </p:cNvPr>
@@ -15317,7 +15317,7 @@
           <p:cNvPr id="13" name="">
             <a:extLst xmlns:a="http://schemas.openxmlformats.org/drawingml/2006/main">
               <a:ext uri="{FF2B5EF4-FFF2-40B4-BE49-F238E27FC236}">
-                <a16:creationId xmlns:a16="http://schemas.microsoft.com/office/drawing/2014/main" id="{395EB8D1-E04C-4C12-92F0-9CE834DBB7ED}"/>
+                <a16:creationId xmlns:a16="http://schemas.microsoft.com/office/drawing/2014/main" id="{CEE212F1-B5A8-499F-9A81-0FDB54EBA1CE}"/>
               </a:ext>
             </a:extLst>
           </p:cNvPr>
@@ -15392,7 +15392,7 @@
           <p:cNvPr id="14" name="">
             <a:extLst xmlns:a="http://schemas.openxmlformats.org/drawingml/2006/main">
               <a:ext uri="{FF2B5EF4-FFF2-40B4-BE49-F238E27FC236}">
-                <a16:creationId xmlns:a16="http://schemas.microsoft.com/office/drawing/2014/main" id="{A332C973-F6CA-452D-A1F2-C3D7E7FCAA27}"/>
+                <a16:creationId xmlns:a16="http://schemas.microsoft.com/office/drawing/2014/main" id="{10C24E03-0283-4611-A45D-9A49F134D6FB}"/>
               </a:ext>
             </a:extLst>
           </p:cNvPr>
@@ -15429,7 +15429,7 @@
           <p:cNvPr id="15" name="">
             <a:extLst xmlns:a="http://schemas.openxmlformats.org/drawingml/2006/main">
               <a:ext uri="{FF2B5EF4-FFF2-40B4-BE49-F238E27FC236}">
-                <a16:creationId xmlns:a16="http://schemas.microsoft.com/office/drawing/2014/main" id="{74FFFC3B-6234-4976-AC3F-83FB0A46881A}"/>
+                <a16:creationId xmlns:a16="http://schemas.microsoft.com/office/drawing/2014/main" id="{63098BCC-4D2E-4D15-94C7-C16B708EEDC8}"/>
               </a:ext>
             </a:extLst>
           </p:cNvPr>
@@ -15464,7 +15464,7 @@
           <p:cNvPr id="16" name="">
             <a:extLst xmlns:a="http://schemas.openxmlformats.org/drawingml/2006/main">
               <a:ext uri="{FF2B5EF4-FFF2-40B4-BE49-F238E27FC236}">
-                <a16:creationId xmlns:a16="http://schemas.microsoft.com/office/drawing/2014/main" id="{6A8CC2E8-DC5E-459F-A5F1-39733FF996D3}"/>
+                <a16:creationId xmlns:a16="http://schemas.microsoft.com/office/drawing/2014/main" id="{9433C0D1-C0D1-4A68-8C20-E1098E813F80}"/>
               </a:ext>
             </a:extLst>
           </p:cNvPr>
@@ -15522,7 +15522,7 @@
           <p:cNvPr id="17" name="">
             <a:extLst xmlns:a="http://schemas.openxmlformats.org/drawingml/2006/main">
               <a:ext uri="{FF2B5EF4-FFF2-40B4-BE49-F238E27FC236}">
-                <a16:creationId xmlns:a16="http://schemas.microsoft.com/office/drawing/2014/main" id="{CA17FD2E-1859-4C84-BD96-D4EB2A72F5D2}"/>
+                <a16:creationId xmlns:a16="http://schemas.microsoft.com/office/drawing/2014/main" id="{C79CCD4C-46FD-4391-B582-342048F8FD7A}"/>
               </a:ext>
             </a:extLst>
           </p:cNvPr>
@@ -15614,7 +15614,7 @@
           <p:cNvPr id="18" name="">
             <a:extLst xmlns:a="http://schemas.openxmlformats.org/drawingml/2006/main">
               <a:ext uri="{FF2B5EF4-FFF2-40B4-BE49-F238E27FC236}">
-                <a16:creationId xmlns:a16="http://schemas.microsoft.com/office/drawing/2014/main" id="{C2E68F0F-B1A4-4191-8B07-3196AA8C29E7}"/>
+                <a16:creationId xmlns:a16="http://schemas.microsoft.com/office/drawing/2014/main" id="{23A9897D-91C4-44BE-A66D-D0DCC8E9195A}"/>
               </a:ext>
             </a:extLst>
           </p:cNvPr>
@@ -15651,7 +15651,7 @@
           <p:cNvPr id="19" name="">
             <a:extLst xmlns:a="http://schemas.openxmlformats.org/drawingml/2006/main">
               <a:ext uri="{FF2B5EF4-FFF2-40B4-BE49-F238E27FC236}">
-                <a16:creationId xmlns:a16="http://schemas.microsoft.com/office/drawing/2014/main" id="{172A3708-29C4-4B44-834B-416BF1DC1897}"/>
+                <a16:creationId xmlns:a16="http://schemas.microsoft.com/office/drawing/2014/main" id="{A1CCE9CF-910F-4EFB-93C6-C104BDDFC8D7}"/>
               </a:ext>
             </a:extLst>
           </p:cNvPr>
@@ -15686,7 +15686,7 @@
           <p:cNvPr id="20" name="">
             <a:extLst xmlns:a="http://schemas.openxmlformats.org/drawingml/2006/main">
               <a:ext uri="{FF2B5EF4-FFF2-40B4-BE49-F238E27FC236}">
-                <a16:creationId xmlns:a16="http://schemas.microsoft.com/office/drawing/2014/main" id="{F99E9EDD-4FD7-49AF-A5E6-3D3987AFAE80}"/>
+                <a16:creationId xmlns:a16="http://schemas.microsoft.com/office/drawing/2014/main" id="{E2CB9F38-CB71-4C30-8CAD-67A4A0FE1824}"/>
               </a:ext>
             </a:extLst>
           </p:cNvPr>
@@ -15744,7 +15744,7 @@
           <p:cNvPr id="21" name="">
             <a:extLst xmlns:a="http://schemas.openxmlformats.org/drawingml/2006/main">
               <a:ext uri="{FF2B5EF4-FFF2-40B4-BE49-F238E27FC236}">
-                <a16:creationId xmlns:a16="http://schemas.microsoft.com/office/drawing/2014/main" id="{5F16CE58-7A02-4CE9-94D7-1F680026A3D1}"/>
+                <a16:creationId xmlns:a16="http://schemas.microsoft.com/office/drawing/2014/main" id="{D930F14A-BC8E-4E9C-8E51-23631C186561}"/>
               </a:ext>
             </a:extLst>
           </p:cNvPr>
@@ -15836,7 +15836,7 @@
           <p:cNvPr id="22" name="">
             <a:extLst xmlns:a="http://schemas.openxmlformats.org/drawingml/2006/main">
               <a:ext uri="{FF2B5EF4-FFF2-40B4-BE49-F238E27FC236}">
-                <a16:creationId xmlns:a16="http://schemas.microsoft.com/office/drawing/2014/main" id="{D05E2398-A52E-471C-BE53-672390926094}"/>
+                <a16:creationId xmlns:a16="http://schemas.microsoft.com/office/drawing/2014/main" id="{0C8A54C4-EC7C-41D7-B062-0564E6D3D345}"/>
               </a:ext>
             </a:extLst>
           </p:cNvPr>
@@ -15873,7 +15873,7 @@
           <p:cNvPr id="23" name="">
             <a:extLst xmlns:a="http://schemas.openxmlformats.org/drawingml/2006/main">
               <a:ext uri="{FF2B5EF4-FFF2-40B4-BE49-F238E27FC236}">
-                <a16:creationId xmlns:a16="http://schemas.microsoft.com/office/drawing/2014/main" id="{FD5F3443-7C29-4062-A317-E95701EE5D9C}"/>
+                <a16:creationId xmlns:a16="http://schemas.microsoft.com/office/drawing/2014/main" id="{EF944F62-B7A9-4C76-80E5-136515B698F0}"/>
               </a:ext>
             </a:extLst>
           </p:cNvPr>
@@ -15908,7 +15908,7 @@
           <p:cNvPr id="24" name="">
             <a:extLst xmlns:a="http://schemas.openxmlformats.org/drawingml/2006/main">
               <a:ext uri="{FF2B5EF4-FFF2-40B4-BE49-F238E27FC236}">
-                <a16:creationId xmlns:a16="http://schemas.microsoft.com/office/drawing/2014/main" id="{E3B24FDA-3CB2-4801-AEDE-EDD7F4D224A0}"/>
+                <a16:creationId xmlns:a16="http://schemas.microsoft.com/office/drawing/2014/main" id="{9A341710-5718-4153-91E2-9447732121C3}"/>
               </a:ext>
             </a:extLst>
           </p:cNvPr>
@@ -15966,7 +15966,7 @@
           <p:cNvPr id="25" name="">
             <a:extLst xmlns:a="http://schemas.openxmlformats.org/drawingml/2006/main">
               <a:ext uri="{FF2B5EF4-FFF2-40B4-BE49-F238E27FC236}">
-                <a16:creationId xmlns:a16="http://schemas.microsoft.com/office/drawing/2014/main" id="{B8D74735-560F-4D56-B6D5-1888F97CA4C7}"/>
+                <a16:creationId xmlns:a16="http://schemas.microsoft.com/office/drawing/2014/main" id="{AC5A20A5-9A6B-4FE6-9B2B-52D6C7B9299E}"/>
               </a:ext>
             </a:extLst>
           </p:cNvPr>
@@ -16041,7 +16041,7 @@
           <p:cNvPr id="26" name="">
             <a:extLst xmlns:a="http://schemas.openxmlformats.org/drawingml/2006/main">
               <a:ext uri="{FF2B5EF4-FFF2-40B4-BE49-F238E27FC236}">
-                <a16:creationId xmlns:a16="http://schemas.microsoft.com/office/drawing/2014/main" id="{2CB4D230-FD4B-4CEE-A3FC-4EFD15196DD4}"/>
+                <a16:creationId xmlns:a16="http://schemas.microsoft.com/office/drawing/2014/main" id="{02225F26-2534-43B4-8E02-C5B10FC2461D}"/>
               </a:ext>
             </a:extLst>
           </p:cNvPr>
@@ -16076,7 +16076,7 @@
           <p:cNvPr id="27" name="">
             <a:extLst xmlns:a="http://schemas.openxmlformats.org/drawingml/2006/main">
               <a:ext uri="{FF2B5EF4-FFF2-40B4-BE49-F238E27FC236}">
-                <a16:creationId xmlns:a16="http://schemas.microsoft.com/office/drawing/2014/main" id="{DD6E0FDC-DDDB-4D68-A6AA-EEADE81A7ECC}"/>
+                <a16:creationId xmlns:a16="http://schemas.microsoft.com/office/drawing/2014/main" id="{FF3A20F7-7166-4626-AF4C-F6B974A6FD88}"/>
               </a:ext>
             </a:extLst>
           </p:cNvPr>
@@ -16111,7 +16111,7 @@
           <p:cNvPr id="28" name="">
             <a:extLst xmlns:a="http://schemas.openxmlformats.org/drawingml/2006/main">
               <a:ext uri="{FF2B5EF4-FFF2-40B4-BE49-F238E27FC236}">
-                <a16:creationId xmlns:a16="http://schemas.microsoft.com/office/drawing/2014/main" id="{F21200E9-3A22-43D3-963D-AD5869151DF3}"/>
+                <a16:creationId xmlns:a16="http://schemas.microsoft.com/office/drawing/2014/main" id="{16D284DE-607A-40C1-B78A-98BF6414C63C}"/>
               </a:ext>
             </a:extLst>
           </p:cNvPr>
@@ -16169,7 +16169,7 @@
           <p:cNvPr id="29" name="">
             <a:extLst xmlns:a="http://schemas.openxmlformats.org/drawingml/2006/main">
               <a:ext uri="{FF2B5EF4-FFF2-40B4-BE49-F238E27FC236}">
-                <a16:creationId xmlns:a16="http://schemas.microsoft.com/office/drawing/2014/main" id="{6E56D51A-7F31-44DF-B4EA-94FE54C8DCC2}"/>
+                <a16:creationId xmlns:a16="http://schemas.microsoft.com/office/drawing/2014/main" id="{4DD2F103-22B9-4905-8DD9-B667DF5142FC}"/>
               </a:ext>
             </a:extLst>
           </p:cNvPr>
@@ -16227,7 +16227,7 @@
           <p:cNvPr id="30" name="">
             <a:extLst xmlns:a="http://schemas.openxmlformats.org/drawingml/2006/main">
               <a:ext uri="{FF2B5EF4-FFF2-40B4-BE49-F238E27FC236}">
-                <a16:creationId xmlns:a16="http://schemas.microsoft.com/office/drawing/2014/main" id="{8F36BBB0-A0F9-405C-83AD-8F30AC550B5E}"/>
+                <a16:creationId xmlns:a16="http://schemas.microsoft.com/office/drawing/2014/main" id="{10481A7D-810F-4083-8058-5DB035718985}"/>
               </a:ext>
             </a:extLst>
           </p:cNvPr>
@@ -16262,7 +16262,7 @@
           <p:cNvPr id="31" name="">
             <a:extLst xmlns:a="http://schemas.openxmlformats.org/drawingml/2006/main">
               <a:ext uri="{FF2B5EF4-FFF2-40B4-BE49-F238E27FC236}">
-                <a16:creationId xmlns:a16="http://schemas.microsoft.com/office/drawing/2014/main" id="{757A48BB-462D-48F8-9435-2F21B104BF69}"/>
+                <a16:creationId xmlns:a16="http://schemas.microsoft.com/office/drawing/2014/main" id="{47C24B9F-5584-4FFF-88F6-4AD081A1F027}"/>
               </a:ext>
             </a:extLst>
           </p:cNvPr>
@@ -16320,7 +16320,7 @@
           <p:cNvPr id="32" name="">
             <a:extLst xmlns:a="http://schemas.openxmlformats.org/drawingml/2006/main">
               <a:ext uri="{FF2B5EF4-FFF2-40B4-BE49-F238E27FC236}">
-                <a16:creationId xmlns:a16="http://schemas.microsoft.com/office/drawing/2014/main" id="{14471FF4-6734-4AB1-8486-C47CC675472B}"/>
+                <a16:creationId xmlns:a16="http://schemas.microsoft.com/office/drawing/2014/main" id="{5E234A58-F897-42F0-B49F-C3B3886FD69F}"/>
               </a:ext>
             </a:extLst>
           </p:cNvPr>
@@ -16378,7 +16378,7 @@
           <p:cNvPr id="33" name="">
             <a:extLst xmlns:a="http://schemas.openxmlformats.org/drawingml/2006/main">
               <a:ext uri="{FF2B5EF4-FFF2-40B4-BE49-F238E27FC236}">
-                <a16:creationId xmlns:a16="http://schemas.microsoft.com/office/drawing/2014/main" id="{ECEA90C6-4F7D-4829-B31E-1469AB748743}"/>
+                <a16:creationId xmlns:a16="http://schemas.microsoft.com/office/drawing/2014/main" id="{1B9D13BC-ACB0-4CD9-9184-DDADDA4174A4}"/>
               </a:ext>
             </a:extLst>
           </p:cNvPr>
@@ -16434,7 +16434,7 @@
     </p:spTree>
     <p:extLst>
       <p:ext uri="{BB962C8B-B14F-4D97-AF65-F5344CB8AC3E}">
-        <p14:creationId xmlns:p14="http://schemas.microsoft.com/office/powerpoint/2010/main" val="927262257"/>
+        <p14:creationId xmlns:p14="http://schemas.microsoft.com/office/powerpoint/2010/main" val="1981200296"/>
       </p:ext>
     </p:extLst>
   </p:cSld>
@@ -16465,7 +16465,7 @@
           <p:cNvPr id="1" name="Slide Number Placeholder 5">
             <a:extLst xmlns:a="http://schemas.openxmlformats.org/drawingml/2006/main">
               <a:ext uri="{FF2B5EF4-FFF2-40B4-BE49-F238E27FC236}">
-                <a16:creationId xmlns:a16="http://schemas.microsoft.com/office/drawing/2014/main" id="{C5A324B5-703D-4DE1-A920-5C56CD46E34C}"/>
+                <a16:creationId xmlns:a16="http://schemas.microsoft.com/office/drawing/2014/main" id="{E12CE447-476B-4BAE-A1FF-E669E79965E6}"/>
               </a:ext>
             </a:extLst>
           </p:cNvPr>
@@ -16501,7 +16501,7 @@
           <p:nvPr/>
         </p:nvPicPr>
         <p:blipFill>
-          <a:blip xmlns:r="http://schemas.openxmlformats.org/officeDocument/2006/relationships" xmlns:a="http://schemas.openxmlformats.org/drawingml/2006/main" r:embed="Ra0197854dfb34d72"/>
+          <a:blip xmlns:r="http://schemas.openxmlformats.org/officeDocument/2006/relationships" xmlns:a="http://schemas.openxmlformats.org/drawingml/2006/main" r:embed="R7af939c822d740e5"/>
           <a:srcRect xmlns:a="http://schemas.openxmlformats.org/drawingml/2006/main" l="0" t="21875" r="0" b="21875"/>
           <a:stretch xmlns:a="http://schemas.openxmlformats.org/drawingml/2006/main">
             <a:fillRect l="0" t="0" r="0" b="0"/>
@@ -16522,7 +16522,7 @@
           <p:cNvPr id="3" name="">
             <a:extLst xmlns:a="http://schemas.openxmlformats.org/drawingml/2006/main">
               <a:ext uri="{FF2B5EF4-FFF2-40B4-BE49-F238E27FC236}">
-                <a16:creationId xmlns:a16="http://schemas.microsoft.com/office/drawing/2014/main" id="{BFA0D2E2-0B2A-45DC-B946-DEE407162D36}"/>
+                <a16:creationId xmlns:a16="http://schemas.microsoft.com/office/drawing/2014/main" id="{66ABB4A3-709F-4CFF-8E7B-0B8343E00882}"/>
               </a:ext>
             </a:extLst>
           </p:cNvPr>
@@ -16557,7 +16557,7 @@
           <p:cNvPr id="4" name="">
             <a:extLst xmlns:a="http://schemas.openxmlformats.org/drawingml/2006/main">
               <a:ext uri="{FF2B5EF4-FFF2-40B4-BE49-F238E27FC236}">
-                <a16:creationId xmlns:a16="http://schemas.microsoft.com/office/drawing/2014/main" id="{A30C6255-3D6B-4AF1-AD1C-80CA1FA80DF5}"/>
+                <a16:creationId xmlns:a16="http://schemas.microsoft.com/office/drawing/2014/main" id="{4E68818B-5A51-4D94-B4DC-086B41846A73}"/>
               </a:ext>
             </a:extLst>
           </p:cNvPr>
@@ -16592,7 +16592,7 @@
           <p:cNvPr id="5" name="">
             <a:extLst xmlns:a="http://schemas.openxmlformats.org/drawingml/2006/main">
               <a:ext uri="{FF2B5EF4-FFF2-40B4-BE49-F238E27FC236}">
-                <a16:creationId xmlns:a16="http://schemas.microsoft.com/office/drawing/2014/main" id="{8A92944E-8826-4688-83ED-1E8EA5523001}"/>
+                <a16:creationId xmlns:a16="http://schemas.microsoft.com/office/drawing/2014/main" id="{120C6A25-FD81-423E-B678-F09496111C7F}"/>
               </a:ext>
             </a:extLst>
           </p:cNvPr>
@@ -16629,7 +16629,7 @@
           <p:cNvPr id="6" name="">
             <a:extLst xmlns:a="http://schemas.openxmlformats.org/drawingml/2006/main">
               <a:ext uri="{FF2B5EF4-FFF2-40B4-BE49-F238E27FC236}">
-                <a16:creationId xmlns:a16="http://schemas.microsoft.com/office/drawing/2014/main" id="{19507A67-F143-473B-8DB4-5FEC2E063B27}"/>
+                <a16:creationId xmlns:a16="http://schemas.microsoft.com/office/drawing/2014/main" id="{4BD4A9D5-7F40-4935-A1BD-EE28A951771F}"/>
               </a:ext>
             </a:extLst>
           </p:cNvPr>
@@ -16666,7 +16666,7 @@
           <p:cNvPr id="7" name="">
             <a:extLst xmlns:a="http://schemas.openxmlformats.org/drawingml/2006/main">
               <a:ext uri="{FF2B5EF4-FFF2-40B4-BE49-F238E27FC236}">
-                <a16:creationId xmlns:a16="http://schemas.microsoft.com/office/drawing/2014/main" id="{76EC90BC-7281-4544-ADBC-42601215D2AA}"/>
+                <a16:creationId xmlns:a16="http://schemas.microsoft.com/office/drawing/2014/main" id="{E2202ED4-8414-4CCF-B662-9A2EEA900B95}"/>
               </a:ext>
             </a:extLst>
           </p:cNvPr>
@@ -16703,7 +16703,7 @@
           <p:cNvPr id="8" name="">
             <a:extLst xmlns:a="http://schemas.openxmlformats.org/drawingml/2006/main">
               <a:ext uri="{FF2B5EF4-FFF2-40B4-BE49-F238E27FC236}">
-                <a16:creationId xmlns:a16="http://schemas.microsoft.com/office/drawing/2014/main" id="{C86B5D6F-F681-4086-A9DF-AAB0C662DBB3}"/>
+                <a16:creationId xmlns:a16="http://schemas.microsoft.com/office/drawing/2014/main" id="{CA60DBA4-F83A-4E70-8601-073DC52695C0}"/>
               </a:ext>
             </a:extLst>
           </p:cNvPr>
@@ -16740,7 +16740,7 @@
           <p:cNvPr id="9" name="">
             <a:extLst xmlns:a="http://schemas.openxmlformats.org/drawingml/2006/main">
               <a:ext uri="{FF2B5EF4-FFF2-40B4-BE49-F238E27FC236}">
-                <a16:creationId xmlns:a16="http://schemas.microsoft.com/office/drawing/2014/main" id="{05CE1304-2484-44A7-BA02-204412C92DEE}"/>
+                <a16:creationId xmlns:a16="http://schemas.microsoft.com/office/drawing/2014/main" id="{72385720-2918-4945-9480-0AD3A024E583}"/>
               </a:ext>
             </a:extLst>
           </p:cNvPr>
@@ -16798,7 +16798,7 @@
           <p:cNvPr id="10" name="">
             <a:extLst xmlns:a="http://schemas.openxmlformats.org/drawingml/2006/main">
               <a:ext uri="{FF2B5EF4-FFF2-40B4-BE49-F238E27FC236}">
-                <a16:creationId xmlns:a16="http://schemas.microsoft.com/office/drawing/2014/main" id="{E82529E7-E1EB-4CA7-8129-F824AEFB7D32}"/>
+                <a16:creationId xmlns:a16="http://schemas.microsoft.com/office/drawing/2014/main" id="{9EDEED1D-4B84-478A-88E2-06CA363DD609}"/>
               </a:ext>
             </a:extLst>
           </p:cNvPr>
@@ -16856,7 +16856,7 @@
           <p:cNvPr id="11" name="">
             <a:extLst xmlns:a="http://schemas.openxmlformats.org/drawingml/2006/main">
               <a:ext uri="{FF2B5EF4-FFF2-40B4-BE49-F238E27FC236}">
-                <a16:creationId xmlns:a16="http://schemas.microsoft.com/office/drawing/2014/main" id="{49C7CF1C-FE7C-4696-BF5C-AE00216B8793}"/>
+                <a16:creationId xmlns:a16="http://schemas.microsoft.com/office/drawing/2014/main" id="{AFE0D3B6-3486-4DE0-A9F8-8AF0A65064AD}"/>
               </a:ext>
             </a:extLst>
           </p:cNvPr>
@@ -16891,7 +16891,7 @@
           <p:cNvPr id="12" name="">
             <a:extLst xmlns:a="http://schemas.openxmlformats.org/drawingml/2006/main">
               <a:ext uri="{FF2B5EF4-FFF2-40B4-BE49-F238E27FC236}">
-                <a16:creationId xmlns:a16="http://schemas.microsoft.com/office/drawing/2014/main" id="{853DA2A9-8B4B-4BF0-8B75-1E87A95D8799}"/>
+                <a16:creationId xmlns:a16="http://schemas.microsoft.com/office/drawing/2014/main" id="{71AF5ED5-902D-4828-8E53-3BAABDCED272}"/>
               </a:ext>
             </a:extLst>
           </p:cNvPr>
@@ -16924,7 +16924,7 @@
           <p:cNvPr id="13" name="">
             <a:extLst xmlns:a="http://schemas.openxmlformats.org/drawingml/2006/main">
               <a:ext uri="{FF2B5EF4-FFF2-40B4-BE49-F238E27FC236}">
-                <a16:creationId xmlns:a16="http://schemas.microsoft.com/office/drawing/2014/main" id="{2A1A6403-D6B4-4342-914B-90307BC29DB4}"/>
+                <a16:creationId xmlns:a16="http://schemas.microsoft.com/office/drawing/2014/main" id="{D55737C5-A7C9-44BC-9638-F0DD2970C5DA}"/>
               </a:ext>
             </a:extLst>
           </p:cNvPr>
@@ -16999,7 +16999,7 @@
           <p:cNvPr id="14" name="">
             <a:extLst xmlns:a="http://schemas.openxmlformats.org/drawingml/2006/main">
               <a:ext uri="{FF2B5EF4-FFF2-40B4-BE49-F238E27FC236}">
-                <a16:creationId xmlns:a16="http://schemas.microsoft.com/office/drawing/2014/main" id="{8AAB9ED8-EE75-4115-BE76-027FF38A19EF}"/>
+                <a16:creationId xmlns:a16="http://schemas.microsoft.com/office/drawing/2014/main" id="{D7EE6A33-0C3F-400E-A348-2C6FA08BBE74}"/>
               </a:ext>
             </a:extLst>
           </p:cNvPr>
@@ -17036,7 +17036,7 @@
           <p:cNvPr id="15" name="">
             <a:extLst xmlns:a="http://schemas.openxmlformats.org/drawingml/2006/main">
               <a:ext uri="{FF2B5EF4-FFF2-40B4-BE49-F238E27FC236}">
-                <a16:creationId xmlns:a16="http://schemas.microsoft.com/office/drawing/2014/main" id="{C311E37F-45E5-4062-A1C2-2B835B607F41}"/>
+                <a16:creationId xmlns:a16="http://schemas.microsoft.com/office/drawing/2014/main" id="{FD8B4411-8D49-4D0F-A7A6-4D1871B03831}"/>
               </a:ext>
             </a:extLst>
           </p:cNvPr>
@@ -17071,7 +17071,7 @@
           <p:cNvPr id="16" name="">
             <a:extLst xmlns:a="http://schemas.openxmlformats.org/drawingml/2006/main">
               <a:ext uri="{FF2B5EF4-FFF2-40B4-BE49-F238E27FC236}">
-                <a16:creationId xmlns:a16="http://schemas.microsoft.com/office/drawing/2014/main" id="{3759F061-939F-41BA-B0AA-F4A9B8AAFD97}"/>
+                <a16:creationId xmlns:a16="http://schemas.microsoft.com/office/drawing/2014/main" id="{769FC0FD-A793-430A-A358-C7F7B4094FA3}"/>
               </a:ext>
             </a:extLst>
           </p:cNvPr>
@@ -17129,7 +17129,7 @@
           <p:cNvPr id="17" name="">
             <a:extLst xmlns:a="http://schemas.openxmlformats.org/drawingml/2006/main">
               <a:ext uri="{FF2B5EF4-FFF2-40B4-BE49-F238E27FC236}">
-                <a16:creationId xmlns:a16="http://schemas.microsoft.com/office/drawing/2014/main" id="{30F07CD5-CFEC-4D49-A563-D58E340BF40B}"/>
+                <a16:creationId xmlns:a16="http://schemas.microsoft.com/office/drawing/2014/main" id="{2C37BAFF-B46A-4AAF-BD09-787DA4F490AB}"/>
               </a:ext>
             </a:extLst>
           </p:cNvPr>
@@ -17255,7 +17255,7 @@
           <p:cNvPr id="18" name="">
             <a:extLst xmlns:a="http://schemas.openxmlformats.org/drawingml/2006/main">
               <a:ext uri="{FF2B5EF4-FFF2-40B4-BE49-F238E27FC236}">
-                <a16:creationId xmlns:a16="http://schemas.microsoft.com/office/drawing/2014/main" id="{D84BE2B0-F85E-4617-851B-900F34B4FAE8}"/>
+                <a16:creationId xmlns:a16="http://schemas.microsoft.com/office/drawing/2014/main" id="{CF839CA2-73CE-47CE-9FE4-363B0CECE580}"/>
               </a:ext>
             </a:extLst>
           </p:cNvPr>
@@ -17292,7 +17292,7 @@
           <p:cNvPr id="19" name="">
             <a:extLst xmlns:a="http://schemas.openxmlformats.org/drawingml/2006/main">
               <a:ext uri="{FF2B5EF4-FFF2-40B4-BE49-F238E27FC236}">
-                <a16:creationId xmlns:a16="http://schemas.microsoft.com/office/drawing/2014/main" id="{28F1CA94-F7FB-4F8A-ACC1-B71A512C1BC8}"/>
+                <a16:creationId xmlns:a16="http://schemas.microsoft.com/office/drawing/2014/main" id="{49292B6F-41CD-49CB-8EFB-FB2CF3AEF941}"/>
               </a:ext>
             </a:extLst>
           </p:cNvPr>
@@ -17327,7 +17327,7 @@
           <p:cNvPr id="20" name="">
             <a:extLst xmlns:a="http://schemas.openxmlformats.org/drawingml/2006/main">
               <a:ext uri="{FF2B5EF4-FFF2-40B4-BE49-F238E27FC236}">
-                <a16:creationId xmlns:a16="http://schemas.microsoft.com/office/drawing/2014/main" id="{62EFE705-0D47-4A0F-A994-D750C77B88AB}"/>
+                <a16:creationId xmlns:a16="http://schemas.microsoft.com/office/drawing/2014/main" id="{F739D388-3C6B-4C7E-ADF8-CC296E3415F4}"/>
               </a:ext>
             </a:extLst>
           </p:cNvPr>
@@ -17385,7 +17385,7 @@
           <p:cNvPr id="21" name="">
             <a:extLst xmlns:a="http://schemas.openxmlformats.org/drawingml/2006/main">
               <a:ext uri="{FF2B5EF4-FFF2-40B4-BE49-F238E27FC236}">
-                <a16:creationId xmlns:a16="http://schemas.microsoft.com/office/drawing/2014/main" id="{600710A0-176B-4E58-9198-6311EF2B083E}"/>
+                <a16:creationId xmlns:a16="http://schemas.microsoft.com/office/drawing/2014/main" id="{BE7FED42-3CD0-42CC-91DC-CE8C61DFF20D}"/>
               </a:ext>
             </a:extLst>
           </p:cNvPr>
@@ -17511,7 +17511,7 @@
           <p:cNvPr id="22" name="">
             <a:extLst xmlns:a="http://schemas.openxmlformats.org/drawingml/2006/main">
               <a:ext uri="{FF2B5EF4-FFF2-40B4-BE49-F238E27FC236}">
-                <a16:creationId xmlns:a16="http://schemas.microsoft.com/office/drawing/2014/main" id="{708EEDEC-150F-4B53-8242-DA79E099C839}"/>
+                <a16:creationId xmlns:a16="http://schemas.microsoft.com/office/drawing/2014/main" id="{D57D7BFF-43C3-426F-BF4E-60C4BEBCAD61}"/>
               </a:ext>
             </a:extLst>
           </p:cNvPr>
@@ -17548,7 +17548,7 @@
           <p:cNvPr id="23" name="">
             <a:extLst xmlns:a="http://schemas.openxmlformats.org/drawingml/2006/main">
               <a:ext uri="{FF2B5EF4-FFF2-40B4-BE49-F238E27FC236}">
-                <a16:creationId xmlns:a16="http://schemas.microsoft.com/office/drawing/2014/main" id="{5B1449BC-E6C0-4B4B-937F-2CE68EE50B12}"/>
+                <a16:creationId xmlns:a16="http://schemas.microsoft.com/office/drawing/2014/main" id="{435B6FBC-5AB2-4FF0-8084-6D11D3E91BFB}"/>
               </a:ext>
             </a:extLst>
           </p:cNvPr>
@@ -17583,7 +17583,7 @@
           <p:cNvPr id="24" name="">
             <a:extLst xmlns:a="http://schemas.openxmlformats.org/drawingml/2006/main">
               <a:ext uri="{FF2B5EF4-FFF2-40B4-BE49-F238E27FC236}">
-                <a16:creationId xmlns:a16="http://schemas.microsoft.com/office/drawing/2014/main" id="{0DD39425-013A-4523-8DA5-FF7D79C6E0C9}"/>
+                <a16:creationId xmlns:a16="http://schemas.microsoft.com/office/drawing/2014/main" id="{45C214DA-F06A-431F-8136-276DC2F21F75}"/>
               </a:ext>
             </a:extLst>
           </p:cNvPr>
@@ -17641,7 +17641,7 @@
           <p:cNvPr id="25" name="">
             <a:extLst xmlns:a="http://schemas.openxmlformats.org/drawingml/2006/main">
               <a:ext uri="{FF2B5EF4-FFF2-40B4-BE49-F238E27FC236}">
-                <a16:creationId xmlns:a16="http://schemas.microsoft.com/office/drawing/2014/main" id="{1645ED6C-7480-4150-9C0B-A5D471854284}"/>
+                <a16:creationId xmlns:a16="http://schemas.microsoft.com/office/drawing/2014/main" id="{BEFE507B-A861-412D-A502-45441CDD598B}"/>
               </a:ext>
             </a:extLst>
           </p:cNvPr>
@@ -17784,7 +17784,7 @@
           <p:cNvPr id="26" name="">
             <a:extLst xmlns:a="http://schemas.openxmlformats.org/drawingml/2006/main">
               <a:ext uri="{FF2B5EF4-FFF2-40B4-BE49-F238E27FC236}">
-                <a16:creationId xmlns:a16="http://schemas.microsoft.com/office/drawing/2014/main" id="{112CEC19-D78A-4526-90B2-8DF63089A926}"/>
+                <a16:creationId xmlns:a16="http://schemas.microsoft.com/office/drawing/2014/main" id="{8E1980B6-AA43-4C8C-9EA0-08BFA8931FBF}"/>
               </a:ext>
             </a:extLst>
           </p:cNvPr>
@@ -17819,7 +17819,7 @@
           <p:cNvPr id="27" name="">
             <a:extLst xmlns:a="http://schemas.openxmlformats.org/drawingml/2006/main">
               <a:ext uri="{FF2B5EF4-FFF2-40B4-BE49-F238E27FC236}">
-                <a16:creationId xmlns:a16="http://schemas.microsoft.com/office/drawing/2014/main" id="{64FADB35-955C-47C2-AB46-1E1E4C26A722}"/>
+                <a16:creationId xmlns:a16="http://schemas.microsoft.com/office/drawing/2014/main" id="{1BCBDE02-712D-4135-9DFC-9A49072B768A}"/>
               </a:ext>
             </a:extLst>
           </p:cNvPr>
@@ -17854,7 +17854,7 @@
           <p:cNvPr id="28" name="">
             <a:extLst xmlns:a="http://schemas.openxmlformats.org/drawingml/2006/main">
               <a:ext uri="{FF2B5EF4-FFF2-40B4-BE49-F238E27FC236}">
-                <a16:creationId xmlns:a16="http://schemas.microsoft.com/office/drawing/2014/main" id="{913C5D34-E7C0-448D-A5CD-AD115D1B6D5D}"/>
+                <a16:creationId xmlns:a16="http://schemas.microsoft.com/office/drawing/2014/main" id="{D367BCA0-3C63-4F9E-A93F-71A59454B15B}"/>
               </a:ext>
             </a:extLst>
           </p:cNvPr>
@@ -17912,7 +17912,7 @@
           <p:cNvPr id="29" name="">
             <a:extLst xmlns:a="http://schemas.openxmlformats.org/drawingml/2006/main">
               <a:ext uri="{FF2B5EF4-FFF2-40B4-BE49-F238E27FC236}">
-                <a16:creationId xmlns:a16="http://schemas.microsoft.com/office/drawing/2014/main" id="{FB1007FA-0C02-4D0E-868A-4B35E2AC0ED9}"/>
+                <a16:creationId xmlns:a16="http://schemas.microsoft.com/office/drawing/2014/main" id="{A02BEB14-A4DE-48AB-BDA2-53F2C7408465}"/>
               </a:ext>
             </a:extLst>
           </p:cNvPr>
@@ -17968,7 +17968,7 @@
     </p:spTree>
     <p:extLst>
       <p:ext uri="{BB962C8B-B14F-4D97-AF65-F5344CB8AC3E}">
-        <p14:creationId xmlns:p14="http://schemas.microsoft.com/office/powerpoint/2010/main" val="2006858898"/>
+        <p14:creationId xmlns:p14="http://schemas.microsoft.com/office/powerpoint/2010/main" val="1262752408"/>
       </p:ext>
     </p:extLst>
   </p:cSld>
@@ -17999,7 +17999,7 @@
           <p:cNvPr id="1" name="Slide Number Placeholder 5">
             <a:extLst xmlns:a="http://schemas.openxmlformats.org/drawingml/2006/main">
               <a:ext uri="{FF2B5EF4-FFF2-40B4-BE49-F238E27FC236}">
-                <a16:creationId xmlns:a16="http://schemas.microsoft.com/office/drawing/2014/main" id="{C5A324B5-703D-4DE1-A920-5C56CD46E34C}"/>
+                <a16:creationId xmlns:a16="http://schemas.microsoft.com/office/drawing/2014/main" id="{E12CE447-476B-4BAE-A1FF-E669E79965E6}"/>
               </a:ext>
             </a:extLst>
           </p:cNvPr>
@@ -18035,7 +18035,7 @@
           <p:nvPr/>
         </p:nvPicPr>
         <p:blipFill>
-          <a:blip xmlns:r="http://schemas.openxmlformats.org/officeDocument/2006/relationships" xmlns:a="http://schemas.openxmlformats.org/drawingml/2006/main" r:embed="R1dedcff105f94e16"/>
+          <a:blip xmlns:r="http://schemas.openxmlformats.org/officeDocument/2006/relationships" xmlns:a="http://schemas.openxmlformats.org/drawingml/2006/main" r:embed="R269a7dfc5c2d45b8"/>
           <a:srcRect xmlns:a="http://schemas.openxmlformats.org/drawingml/2006/main" l="0" t="21875" r="0" b="21875"/>
           <a:stretch xmlns:a="http://schemas.openxmlformats.org/drawingml/2006/main">
             <a:fillRect l="0" t="0" r="0" b="0"/>
@@ -18056,7 +18056,7 @@
           <p:cNvPr id="3" name="">
             <a:extLst xmlns:a="http://schemas.openxmlformats.org/drawingml/2006/main">
               <a:ext uri="{FF2B5EF4-FFF2-40B4-BE49-F238E27FC236}">
-                <a16:creationId xmlns:a16="http://schemas.microsoft.com/office/drawing/2014/main" id="{AA651BDD-34A9-4D0D-BAAC-36FAFEF87800}"/>
+                <a16:creationId xmlns:a16="http://schemas.microsoft.com/office/drawing/2014/main" id="{76818D23-B15D-45D3-91C3-6EC89210A6B2}"/>
               </a:ext>
             </a:extLst>
           </p:cNvPr>
@@ -18091,7 +18091,7 @@
           <p:cNvPr id="4" name="">
             <a:extLst xmlns:a="http://schemas.openxmlformats.org/drawingml/2006/main">
               <a:ext uri="{FF2B5EF4-FFF2-40B4-BE49-F238E27FC236}">
-                <a16:creationId xmlns:a16="http://schemas.microsoft.com/office/drawing/2014/main" id="{CA987624-E1AB-4977-8313-163E86980EF6}"/>
+                <a16:creationId xmlns:a16="http://schemas.microsoft.com/office/drawing/2014/main" id="{C1743759-0C0B-473B-913F-9E911D5C28A6}"/>
               </a:ext>
             </a:extLst>
           </p:cNvPr>
@@ -18126,7 +18126,7 @@
           <p:cNvPr id="5" name="">
             <a:extLst xmlns:a="http://schemas.openxmlformats.org/drawingml/2006/main">
               <a:ext uri="{FF2B5EF4-FFF2-40B4-BE49-F238E27FC236}">
-                <a16:creationId xmlns:a16="http://schemas.microsoft.com/office/drawing/2014/main" id="{E984F2C4-BC3A-41A1-A552-E3164B238FCB}"/>
+                <a16:creationId xmlns:a16="http://schemas.microsoft.com/office/drawing/2014/main" id="{8C12B079-E22C-4C5F-9B56-2CFB12C4CC52}"/>
               </a:ext>
             </a:extLst>
           </p:cNvPr>
@@ -18163,7 +18163,7 @@
           <p:cNvPr id="6" name="">
             <a:extLst xmlns:a="http://schemas.openxmlformats.org/drawingml/2006/main">
               <a:ext uri="{FF2B5EF4-FFF2-40B4-BE49-F238E27FC236}">
-                <a16:creationId xmlns:a16="http://schemas.microsoft.com/office/drawing/2014/main" id="{D59B79DB-10B3-4BF9-A942-9E139B0AAF2C}"/>
+                <a16:creationId xmlns:a16="http://schemas.microsoft.com/office/drawing/2014/main" id="{713C69E6-4859-456C-AEEA-F29410A66050}"/>
               </a:ext>
             </a:extLst>
           </p:cNvPr>
@@ -18200,7 +18200,7 @@
           <p:cNvPr id="7" name="">
             <a:extLst xmlns:a="http://schemas.openxmlformats.org/drawingml/2006/main">
               <a:ext uri="{FF2B5EF4-FFF2-40B4-BE49-F238E27FC236}">
-                <a16:creationId xmlns:a16="http://schemas.microsoft.com/office/drawing/2014/main" id="{796C8285-CB20-4B3D-9926-9E0A24070BD4}"/>
+                <a16:creationId xmlns:a16="http://schemas.microsoft.com/office/drawing/2014/main" id="{E2DD8F25-174A-4274-8FE3-040759AC5DDD}"/>
               </a:ext>
             </a:extLst>
           </p:cNvPr>
@@ -18237,7 +18237,7 @@
           <p:cNvPr id="8" name="">
             <a:extLst xmlns:a="http://schemas.openxmlformats.org/drawingml/2006/main">
               <a:ext uri="{FF2B5EF4-FFF2-40B4-BE49-F238E27FC236}">
-                <a16:creationId xmlns:a16="http://schemas.microsoft.com/office/drawing/2014/main" id="{E32AD0B5-1EA0-495C-BE51-99FFA911832C}"/>
+                <a16:creationId xmlns:a16="http://schemas.microsoft.com/office/drawing/2014/main" id="{041953D7-B75B-47A3-BBA8-7C150D8D3472}"/>
               </a:ext>
             </a:extLst>
           </p:cNvPr>
@@ -18274,7 +18274,7 @@
           <p:cNvPr id="9" name="">
             <a:extLst xmlns:a="http://schemas.openxmlformats.org/drawingml/2006/main">
               <a:ext uri="{FF2B5EF4-FFF2-40B4-BE49-F238E27FC236}">
-                <a16:creationId xmlns:a16="http://schemas.microsoft.com/office/drawing/2014/main" id="{006ABBBE-1D5D-4E02-AC0B-35CE34FE3550}"/>
+                <a16:creationId xmlns:a16="http://schemas.microsoft.com/office/drawing/2014/main" id="{68BC78A3-27CE-4AA5-8A29-CA353E819674}"/>
               </a:ext>
             </a:extLst>
           </p:cNvPr>
@@ -18332,7 +18332,7 @@
           <p:cNvPr id="10" name="">
             <a:extLst xmlns:a="http://schemas.openxmlformats.org/drawingml/2006/main">
               <a:ext uri="{FF2B5EF4-FFF2-40B4-BE49-F238E27FC236}">
-                <a16:creationId xmlns:a16="http://schemas.microsoft.com/office/drawing/2014/main" id="{FDFD3504-5A2D-4B78-898D-FF4FBD123420}"/>
+                <a16:creationId xmlns:a16="http://schemas.microsoft.com/office/drawing/2014/main" id="{9155F077-AD21-46F6-AADC-609B3646D8C7}"/>
               </a:ext>
             </a:extLst>
           </p:cNvPr>
@@ -18390,7 +18390,7 @@
           <p:cNvPr id="11" name="">
             <a:extLst xmlns:a="http://schemas.openxmlformats.org/drawingml/2006/main">
               <a:ext uri="{FF2B5EF4-FFF2-40B4-BE49-F238E27FC236}">
-                <a16:creationId xmlns:a16="http://schemas.microsoft.com/office/drawing/2014/main" id="{F5D9998A-1DF6-44AD-9841-A428942517F2}"/>
+                <a16:creationId xmlns:a16="http://schemas.microsoft.com/office/drawing/2014/main" id="{B4AADD52-C3BE-4CB3-95F0-BF794213F42B}"/>
               </a:ext>
             </a:extLst>
           </p:cNvPr>
@@ -18425,7 +18425,7 @@
           <p:cNvPr id="12" name="">
             <a:extLst xmlns:a="http://schemas.openxmlformats.org/drawingml/2006/main">
               <a:ext uri="{FF2B5EF4-FFF2-40B4-BE49-F238E27FC236}">
-                <a16:creationId xmlns:a16="http://schemas.microsoft.com/office/drawing/2014/main" id="{D6087E92-13B5-49B4-9315-1EA9FA9974D8}"/>
+                <a16:creationId xmlns:a16="http://schemas.microsoft.com/office/drawing/2014/main" id="{AA933734-6B89-4C0C-8D34-DB324689A0C2}"/>
               </a:ext>
             </a:extLst>
           </p:cNvPr>
@@ -18458,7 +18458,7 @@
           <p:cNvPr id="13" name="">
             <a:extLst xmlns:a="http://schemas.openxmlformats.org/drawingml/2006/main">
               <a:ext uri="{FF2B5EF4-FFF2-40B4-BE49-F238E27FC236}">
-                <a16:creationId xmlns:a16="http://schemas.microsoft.com/office/drawing/2014/main" id="{75C7CA2E-0BFD-42B0-8858-C01677894132}"/>
+                <a16:creationId xmlns:a16="http://schemas.microsoft.com/office/drawing/2014/main" id="{298ADF0E-E3A7-4E0B-B0BB-54344DAD2571}"/>
               </a:ext>
             </a:extLst>
           </p:cNvPr>
@@ -18533,7 +18533,7 @@
           <p:cNvPr id="14" name="">
             <a:extLst xmlns:a="http://schemas.openxmlformats.org/drawingml/2006/main">
               <a:ext uri="{FF2B5EF4-FFF2-40B4-BE49-F238E27FC236}">
-                <a16:creationId xmlns:a16="http://schemas.microsoft.com/office/drawing/2014/main" id="{34FA060D-3F25-4919-9F7A-55828F3CFDC9}"/>
+                <a16:creationId xmlns:a16="http://schemas.microsoft.com/office/drawing/2014/main" id="{C5D288F8-147B-4287-8449-E30D8090C15E}"/>
               </a:ext>
             </a:extLst>
           </p:cNvPr>
@@ -18568,7 +18568,7 @@
           <p:cNvPr id="15" name="">
             <a:extLst xmlns:a="http://schemas.openxmlformats.org/drawingml/2006/main">
               <a:ext uri="{FF2B5EF4-FFF2-40B4-BE49-F238E27FC236}">
-                <a16:creationId xmlns:a16="http://schemas.microsoft.com/office/drawing/2014/main" id="{EEFB58D6-182E-45B5-BB03-6DA521DDD0C3}"/>
+                <a16:creationId xmlns:a16="http://schemas.microsoft.com/office/drawing/2014/main" id="{2F94D1A6-6670-415A-A016-CAE08EF1A11F}"/>
               </a:ext>
             </a:extLst>
           </p:cNvPr>
@@ -18603,7 +18603,7 @@
           <p:cNvPr id="16" name="">
             <a:extLst xmlns:a="http://schemas.openxmlformats.org/drawingml/2006/main">
               <a:ext uri="{FF2B5EF4-FFF2-40B4-BE49-F238E27FC236}">
-                <a16:creationId xmlns:a16="http://schemas.microsoft.com/office/drawing/2014/main" id="{B458A3A1-421B-4764-8E7E-E412B796BE7E}"/>
+                <a16:creationId xmlns:a16="http://schemas.microsoft.com/office/drawing/2014/main" id="{2C358938-31CA-412F-9F3C-C7311E38B0F7}"/>
               </a:ext>
             </a:extLst>
           </p:cNvPr>
@@ -18661,7 +18661,7 @@
           <p:cNvPr id="17" name="">
             <a:extLst xmlns:a="http://schemas.openxmlformats.org/drawingml/2006/main">
               <a:ext uri="{FF2B5EF4-FFF2-40B4-BE49-F238E27FC236}">
-                <a16:creationId xmlns:a16="http://schemas.microsoft.com/office/drawing/2014/main" id="{FB9BE67B-CC57-4DD3-8ED5-1058C4C4FA13}"/>
+                <a16:creationId xmlns:a16="http://schemas.microsoft.com/office/drawing/2014/main" id="{784DCA01-9A89-4543-B3DB-990F24A91D43}"/>
               </a:ext>
             </a:extLst>
           </p:cNvPr>
@@ -18698,7 +18698,7 @@
           <p:cNvPr id="18" name="">
             <a:extLst xmlns:a="http://schemas.openxmlformats.org/drawingml/2006/main">
               <a:ext uri="{FF2B5EF4-FFF2-40B4-BE49-F238E27FC236}">
-                <a16:creationId xmlns:a16="http://schemas.microsoft.com/office/drawing/2014/main" id="{5796A4BF-DC93-4BC2-899D-81A2993B0081}"/>
+                <a16:creationId xmlns:a16="http://schemas.microsoft.com/office/drawing/2014/main" id="{7D2725EE-FF75-4014-B06C-6B8A0F2F50C2}"/>
               </a:ext>
             </a:extLst>
           </p:cNvPr>
@@ -18733,7 +18733,7 @@
           <p:cNvPr id="19" name="">
             <a:extLst xmlns:a="http://schemas.openxmlformats.org/drawingml/2006/main">
               <a:ext uri="{FF2B5EF4-FFF2-40B4-BE49-F238E27FC236}">
-                <a16:creationId xmlns:a16="http://schemas.microsoft.com/office/drawing/2014/main" id="{11465F05-DA54-4253-B1C4-D1ACF8B9C0F1}"/>
+                <a16:creationId xmlns:a16="http://schemas.microsoft.com/office/drawing/2014/main" id="{093D5E45-AC07-486B-AD4B-91C6E9955B6E}"/>
               </a:ext>
             </a:extLst>
           </p:cNvPr>
@@ -18791,7 +18791,7 @@
           <p:cNvPr id="20" name="">
             <a:extLst xmlns:a="http://schemas.openxmlformats.org/drawingml/2006/main">
               <a:ext uri="{FF2B5EF4-FFF2-40B4-BE49-F238E27FC236}">
-                <a16:creationId xmlns:a16="http://schemas.microsoft.com/office/drawing/2014/main" id="{502568BF-5BAB-49A7-8C4D-553E0F99BC6E}"/>
+                <a16:creationId xmlns:a16="http://schemas.microsoft.com/office/drawing/2014/main" id="{7E4077C2-8818-4729-9F63-902AFD12E6D9}"/>
               </a:ext>
             </a:extLst>
           </p:cNvPr>
@@ -18883,7 +18883,7 @@
           <p:cNvPr id="21" name="">
             <a:extLst xmlns:a="http://schemas.openxmlformats.org/drawingml/2006/main">
               <a:ext uri="{FF2B5EF4-FFF2-40B4-BE49-F238E27FC236}">
-                <a16:creationId xmlns:a16="http://schemas.microsoft.com/office/drawing/2014/main" id="{C4E53400-E878-47E1-A6DD-13AEBE15ECC8}"/>
+                <a16:creationId xmlns:a16="http://schemas.microsoft.com/office/drawing/2014/main" id="{0DFE64DF-5A1D-46F2-8E80-FAF3026DD5E8}"/>
               </a:ext>
             </a:extLst>
           </p:cNvPr>
@@ -18920,7 +18920,7 @@
           <p:cNvPr id="22" name="">
             <a:extLst xmlns:a="http://schemas.openxmlformats.org/drawingml/2006/main">
               <a:ext uri="{FF2B5EF4-FFF2-40B4-BE49-F238E27FC236}">
-                <a16:creationId xmlns:a16="http://schemas.microsoft.com/office/drawing/2014/main" id="{128111A1-497D-480F-AAE2-ABE50D1F21B1}"/>
+                <a16:creationId xmlns:a16="http://schemas.microsoft.com/office/drawing/2014/main" id="{3324517A-759D-4354-8E55-BDA95BC489EB}"/>
               </a:ext>
             </a:extLst>
           </p:cNvPr>
@@ -18955,7 +18955,7 @@
           <p:cNvPr id="23" name="">
             <a:extLst xmlns:a="http://schemas.openxmlformats.org/drawingml/2006/main">
               <a:ext uri="{FF2B5EF4-FFF2-40B4-BE49-F238E27FC236}">
-                <a16:creationId xmlns:a16="http://schemas.microsoft.com/office/drawing/2014/main" id="{1F0B772D-661C-4011-B4FD-693257D380B3}"/>
+                <a16:creationId xmlns:a16="http://schemas.microsoft.com/office/drawing/2014/main" id="{87901807-40CE-49FC-B2E6-E4357D6EFC97}"/>
               </a:ext>
             </a:extLst>
           </p:cNvPr>
@@ -19013,7 +19013,7 @@
           <p:cNvPr id="24" name="">
             <a:extLst xmlns:a="http://schemas.openxmlformats.org/drawingml/2006/main">
               <a:ext uri="{FF2B5EF4-FFF2-40B4-BE49-F238E27FC236}">
-                <a16:creationId xmlns:a16="http://schemas.microsoft.com/office/drawing/2014/main" id="{ACCFA194-6581-4D29-A573-5DB3A1F1B247}"/>
+                <a16:creationId xmlns:a16="http://schemas.microsoft.com/office/drawing/2014/main" id="{DD53FCA9-6302-4A69-A545-47EB4ED2825E}"/>
               </a:ext>
             </a:extLst>
           </p:cNvPr>
@@ -19105,7 +19105,7 @@
           <p:cNvPr id="25" name="">
             <a:extLst xmlns:a="http://schemas.openxmlformats.org/drawingml/2006/main">
               <a:ext uri="{FF2B5EF4-FFF2-40B4-BE49-F238E27FC236}">
-                <a16:creationId xmlns:a16="http://schemas.microsoft.com/office/drawing/2014/main" id="{5A7B3066-2BEF-4C92-A2EC-6598E18DA483}"/>
+                <a16:creationId xmlns:a16="http://schemas.microsoft.com/office/drawing/2014/main" id="{FF503D38-B0F1-4CC8-9AE4-19C82CD60729}"/>
               </a:ext>
             </a:extLst>
           </p:cNvPr>
@@ -19142,7 +19142,7 @@
           <p:cNvPr id="26" name="">
             <a:extLst xmlns:a="http://schemas.openxmlformats.org/drawingml/2006/main">
               <a:ext uri="{FF2B5EF4-FFF2-40B4-BE49-F238E27FC236}">
-                <a16:creationId xmlns:a16="http://schemas.microsoft.com/office/drawing/2014/main" id="{4750FD4E-1238-4E8F-9745-0301ABB41157}"/>
+                <a16:creationId xmlns:a16="http://schemas.microsoft.com/office/drawing/2014/main" id="{24702C47-6650-4A42-9B5D-41B779CDA719}"/>
               </a:ext>
             </a:extLst>
           </p:cNvPr>
@@ -19177,7 +19177,7 @@
           <p:cNvPr id="27" name="">
             <a:extLst xmlns:a="http://schemas.openxmlformats.org/drawingml/2006/main">
               <a:ext uri="{FF2B5EF4-FFF2-40B4-BE49-F238E27FC236}">
-                <a16:creationId xmlns:a16="http://schemas.microsoft.com/office/drawing/2014/main" id="{79EB2EC0-84FC-4C5A-870F-8745C0A5B2DF}"/>
+                <a16:creationId xmlns:a16="http://schemas.microsoft.com/office/drawing/2014/main" id="{D054D9D2-02FF-475F-9B61-7823E7C2B6DA}"/>
               </a:ext>
             </a:extLst>
           </p:cNvPr>
@@ -19235,7 +19235,7 @@
           <p:cNvPr id="28" name="">
             <a:extLst xmlns:a="http://schemas.openxmlformats.org/drawingml/2006/main">
               <a:ext uri="{FF2B5EF4-FFF2-40B4-BE49-F238E27FC236}">
-                <a16:creationId xmlns:a16="http://schemas.microsoft.com/office/drawing/2014/main" id="{96593E35-CB61-4BC7-85E3-84FCA7908C5C}"/>
+                <a16:creationId xmlns:a16="http://schemas.microsoft.com/office/drawing/2014/main" id="{18EE8F0E-1BCF-463D-BB1C-F9658FA37535}"/>
               </a:ext>
             </a:extLst>
           </p:cNvPr>
@@ -19327,7 +19327,7 @@
           <p:cNvPr id="29" name="">
             <a:extLst xmlns:a="http://schemas.openxmlformats.org/drawingml/2006/main">
               <a:ext uri="{FF2B5EF4-FFF2-40B4-BE49-F238E27FC236}">
-                <a16:creationId xmlns:a16="http://schemas.microsoft.com/office/drawing/2014/main" id="{52D63802-DC76-4326-A466-9B5FCDC0B622}"/>
+                <a16:creationId xmlns:a16="http://schemas.microsoft.com/office/drawing/2014/main" id="{02EBD374-0999-498D-84E1-09049394767D}"/>
               </a:ext>
             </a:extLst>
           </p:cNvPr>
@@ -19381,7 +19381,7 @@
           <p:cNvPr id="30" name="">
             <a:extLst xmlns:a="http://schemas.openxmlformats.org/drawingml/2006/main">
               <a:ext uri="{FF2B5EF4-FFF2-40B4-BE49-F238E27FC236}">
-                <a16:creationId xmlns:a16="http://schemas.microsoft.com/office/drawing/2014/main" id="{13B1BF04-7479-4698-B482-BF138831D449}"/>
+                <a16:creationId xmlns:a16="http://schemas.microsoft.com/office/drawing/2014/main" id="{598F1EA4-3123-48D2-AF91-5089EA0F1827}"/>
               </a:ext>
             </a:extLst>
           </p:cNvPr>
@@ -19437,7 +19437,7 @@
     </p:spTree>
     <p:extLst>
       <p:ext uri="{BB962C8B-B14F-4D97-AF65-F5344CB8AC3E}">
-        <p14:creationId xmlns:p14="http://schemas.microsoft.com/office/powerpoint/2010/main" val="134257553"/>
+        <p14:creationId xmlns:p14="http://schemas.microsoft.com/office/powerpoint/2010/main" val="1768761511"/>
       </p:ext>
     </p:extLst>
   </p:cSld>
@@ -19468,7 +19468,7 @@
           <p:cNvPr id="1" name="Slide Number Placeholder 5">
             <a:extLst xmlns:a="http://schemas.openxmlformats.org/drawingml/2006/main">
               <a:ext uri="{FF2B5EF4-FFF2-40B4-BE49-F238E27FC236}">
-                <a16:creationId xmlns:a16="http://schemas.microsoft.com/office/drawing/2014/main" id="{C5A324B5-703D-4DE1-A920-5C56CD46E34C}"/>
+                <a16:creationId xmlns:a16="http://schemas.microsoft.com/office/drawing/2014/main" id="{E12CE447-476B-4BAE-A1FF-E669E79965E6}"/>
               </a:ext>
             </a:extLst>
           </p:cNvPr>
@@ -19504,7 +19504,7 @@
           <p:nvPr/>
         </p:nvPicPr>
         <p:blipFill>
-          <a:blip xmlns:r="http://schemas.openxmlformats.org/officeDocument/2006/relationships" xmlns:a="http://schemas.openxmlformats.org/drawingml/2006/main" r:embed="R97a9d3a0c9bf405e"/>
+          <a:blip xmlns:r="http://schemas.openxmlformats.org/officeDocument/2006/relationships" xmlns:a="http://schemas.openxmlformats.org/drawingml/2006/main" r:embed="Rce274e8403d24e64"/>
           <a:srcRect xmlns:a="http://schemas.openxmlformats.org/drawingml/2006/main" l="0" t="21875" r="0" b="21875"/>
           <a:stretch xmlns:a="http://schemas.openxmlformats.org/drawingml/2006/main">
             <a:fillRect l="0" t="0" r="0" b="0"/>
@@ -19525,7 +19525,7 @@
           <p:cNvPr id="3" name="">
             <a:extLst xmlns:a="http://schemas.openxmlformats.org/drawingml/2006/main">
               <a:ext uri="{FF2B5EF4-FFF2-40B4-BE49-F238E27FC236}">
-                <a16:creationId xmlns:a16="http://schemas.microsoft.com/office/drawing/2014/main" id="{3ED40EF8-A044-4A27-93A1-8DD4A2CDDA36}"/>
+                <a16:creationId xmlns:a16="http://schemas.microsoft.com/office/drawing/2014/main" id="{EA23B219-1FDC-421B-A3A6-64ABD1CBE6A8}"/>
               </a:ext>
             </a:extLst>
           </p:cNvPr>
@@ -19560,7 +19560,7 @@
           <p:cNvPr id="4" name="">
             <a:extLst xmlns:a="http://schemas.openxmlformats.org/drawingml/2006/main">
               <a:ext uri="{FF2B5EF4-FFF2-40B4-BE49-F238E27FC236}">
-                <a16:creationId xmlns:a16="http://schemas.microsoft.com/office/drawing/2014/main" id="{34BE7815-B288-4279-93D6-9503359827F4}"/>
+                <a16:creationId xmlns:a16="http://schemas.microsoft.com/office/drawing/2014/main" id="{B74A005E-E8ED-4469-9794-57228C889436}"/>
               </a:ext>
             </a:extLst>
           </p:cNvPr>
@@ -19595,7 +19595,7 @@
           <p:cNvPr id="5" name="">
             <a:extLst xmlns:a="http://schemas.openxmlformats.org/drawingml/2006/main">
               <a:ext uri="{FF2B5EF4-FFF2-40B4-BE49-F238E27FC236}">
-                <a16:creationId xmlns:a16="http://schemas.microsoft.com/office/drawing/2014/main" id="{D5B7E861-892A-4950-B127-ACA0FD500AC4}"/>
+                <a16:creationId xmlns:a16="http://schemas.microsoft.com/office/drawing/2014/main" id="{CA2B3121-D3E5-47CB-994D-BFA93004F5EF}"/>
               </a:ext>
             </a:extLst>
           </p:cNvPr>
@@ -19632,7 +19632,7 @@
           <p:cNvPr id="6" name="">
             <a:extLst xmlns:a="http://schemas.openxmlformats.org/drawingml/2006/main">
               <a:ext uri="{FF2B5EF4-FFF2-40B4-BE49-F238E27FC236}">
-                <a16:creationId xmlns:a16="http://schemas.microsoft.com/office/drawing/2014/main" id="{187D8410-DAD0-49B7-8226-8F31FA4E5B37}"/>
+                <a16:creationId xmlns:a16="http://schemas.microsoft.com/office/drawing/2014/main" id="{EFCBF658-7ADE-45E5-BD97-62E313A95546}"/>
               </a:ext>
             </a:extLst>
           </p:cNvPr>
@@ -19669,7 +19669,7 @@
           <p:cNvPr id="7" name="">
             <a:extLst xmlns:a="http://schemas.openxmlformats.org/drawingml/2006/main">
               <a:ext uri="{FF2B5EF4-FFF2-40B4-BE49-F238E27FC236}">
-                <a16:creationId xmlns:a16="http://schemas.microsoft.com/office/drawing/2014/main" id="{0C4FDDD1-7832-495D-87B7-96DAF8BA00BE}"/>
+                <a16:creationId xmlns:a16="http://schemas.microsoft.com/office/drawing/2014/main" id="{7806656D-238C-456E-A5FB-7FDA4B94D16C}"/>
               </a:ext>
             </a:extLst>
           </p:cNvPr>
@@ -19706,7 +19706,7 @@
           <p:cNvPr id="8" name="">
             <a:extLst xmlns:a="http://schemas.openxmlformats.org/drawingml/2006/main">
               <a:ext uri="{FF2B5EF4-FFF2-40B4-BE49-F238E27FC236}">
-                <a16:creationId xmlns:a16="http://schemas.microsoft.com/office/drawing/2014/main" id="{D2331B4B-F071-44F8-AD6B-4C486AFA9D49}"/>
+                <a16:creationId xmlns:a16="http://schemas.microsoft.com/office/drawing/2014/main" id="{B2B2ED55-5B5C-4352-AE3F-7C04459E60F8}"/>
               </a:ext>
             </a:extLst>
           </p:cNvPr>
@@ -19743,7 +19743,7 @@
           <p:cNvPr id="9" name="">
             <a:extLst xmlns:a="http://schemas.openxmlformats.org/drawingml/2006/main">
               <a:ext uri="{FF2B5EF4-FFF2-40B4-BE49-F238E27FC236}">
-                <a16:creationId xmlns:a16="http://schemas.microsoft.com/office/drawing/2014/main" id="{81D4DB5D-46CD-4056-AFC7-EB34FC3167D4}"/>
+                <a16:creationId xmlns:a16="http://schemas.microsoft.com/office/drawing/2014/main" id="{5A91ABC1-5415-43D7-BC18-C7D4E22B19D1}"/>
               </a:ext>
             </a:extLst>
           </p:cNvPr>
@@ -19801,7 +19801,7 @@
           <p:cNvPr id="10" name="">
             <a:extLst xmlns:a="http://schemas.openxmlformats.org/drawingml/2006/main">
               <a:ext uri="{FF2B5EF4-FFF2-40B4-BE49-F238E27FC236}">
-                <a16:creationId xmlns:a16="http://schemas.microsoft.com/office/drawing/2014/main" id="{E90CFB92-0D23-47A0-9EB1-5F8A21DE14F4}"/>
+                <a16:creationId xmlns:a16="http://schemas.microsoft.com/office/drawing/2014/main" id="{DFE9AC40-4785-42AF-9F7A-688AB1249C09}"/>
               </a:ext>
             </a:extLst>
           </p:cNvPr>
@@ -19859,7 +19859,7 @@
           <p:cNvPr id="11" name="">
             <a:extLst xmlns:a="http://schemas.openxmlformats.org/drawingml/2006/main">
               <a:ext uri="{FF2B5EF4-FFF2-40B4-BE49-F238E27FC236}">
-                <a16:creationId xmlns:a16="http://schemas.microsoft.com/office/drawing/2014/main" id="{BE4501B5-0B42-4220-8A63-6F5C92F3250F}"/>
+                <a16:creationId xmlns:a16="http://schemas.microsoft.com/office/drawing/2014/main" id="{3BDD6A73-E0B0-4FCC-BE22-0FC1B528C5F5}"/>
               </a:ext>
             </a:extLst>
           </p:cNvPr>
@@ -19894,7 +19894,7 @@
           <p:cNvPr id="12" name="">
             <a:extLst xmlns:a="http://schemas.openxmlformats.org/drawingml/2006/main">
               <a:ext uri="{FF2B5EF4-FFF2-40B4-BE49-F238E27FC236}">
-                <a16:creationId xmlns:a16="http://schemas.microsoft.com/office/drawing/2014/main" id="{828A8D4A-97EB-41B9-B3DD-A6EA8C2B969F}"/>
+                <a16:creationId xmlns:a16="http://schemas.microsoft.com/office/drawing/2014/main" id="{19C987E3-7886-4931-826A-FFD357BE7838}"/>
               </a:ext>
             </a:extLst>
           </p:cNvPr>
@@ -19927,7 +19927,7 @@
           <p:cNvPr id="13" name="">
             <a:extLst xmlns:a="http://schemas.openxmlformats.org/drawingml/2006/main">
               <a:ext uri="{FF2B5EF4-FFF2-40B4-BE49-F238E27FC236}">
-                <a16:creationId xmlns:a16="http://schemas.microsoft.com/office/drawing/2014/main" id="{B85E2E45-FE28-4A07-A37A-D5C05C91B5E8}"/>
+                <a16:creationId xmlns:a16="http://schemas.microsoft.com/office/drawing/2014/main" id="{97EFDC21-BD97-4906-ADA6-C2714EDEE16D}"/>
               </a:ext>
             </a:extLst>
           </p:cNvPr>
@@ -20002,7 +20002,7 @@
           <p:cNvPr id="14" name="">
             <a:extLst xmlns:a="http://schemas.openxmlformats.org/drawingml/2006/main">
               <a:ext uri="{FF2B5EF4-FFF2-40B4-BE49-F238E27FC236}">
-                <a16:creationId xmlns:a16="http://schemas.microsoft.com/office/drawing/2014/main" id="{96638370-C9EE-4D6A-B1DA-D39D4BB324FA}"/>
+                <a16:creationId xmlns:a16="http://schemas.microsoft.com/office/drawing/2014/main" id="{24B9D0DA-A1F4-41E4-A89C-95330AEB1DCC}"/>
               </a:ext>
             </a:extLst>
           </p:cNvPr>
@@ -20039,7 +20039,7 @@
           <p:cNvPr id="15" name="">
             <a:extLst xmlns:a="http://schemas.openxmlformats.org/drawingml/2006/main">
               <a:ext uri="{FF2B5EF4-FFF2-40B4-BE49-F238E27FC236}">
-                <a16:creationId xmlns:a16="http://schemas.microsoft.com/office/drawing/2014/main" id="{86AA4EF5-4E5E-42C1-97B5-E54B5BAE72AF}"/>
+                <a16:creationId xmlns:a16="http://schemas.microsoft.com/office/drawing/2014/main" id="{9C824847-677B-48B5-9F34-A421429AA0D5}"/>
               </a:ext>
             </a:extLst>
           </p:cNvPr>
@@ -20074,7 +20074,7 @@
           <p:cNvPr id="16" name="">
             <a:extLst xmlns:a="http://schemas.openxmlformats.org/drawingml/2006/main">
               <a:ext uri="{FF2B5EF4-FFF2-40B4-BE49-F238E27FC236}">
-                <a16:creationId xmlns:a16="http://schemas.microsoft.com/office/drawing/2014/main" id="{CF5BE442-CEF4-4A60-8678-B285A85CF07B}"/>
+                <a16:creationId xmlns:a16="http://schemas.microsoft.com/office/drawing/2014/main" id="{9E1A3FA7-525A-4E31-91F1-86350AE785DD}"/>
               </a:ext>
             </a:extLst>
           </p:cNvPr>
@@ -20132,7 +20132,7 @@
           <p:cNvPr id="17" name="">
             <a:extLst xmlns:a="http://schemas.openxmlformats.org/drawingml/2006/main">
               <a:ext uri="{FF2B5EF4-FFF2-40B4-BE49-F238E27FC236}">
-                <a16:creationId xmlns:a16="http://schemas.microsoft.com/office/drawing/2014/main" id="{9FBA5160-0529-416D-BCC2-76E3E9C2C32C}"/>
+                <a16:creationId xmlns:a16="http://schemas.microsoft.com/office/drawing/2014/main" id="{9AC9B2E5-95BF-4770-B7E9-1A8959D2274E}"/>
               </a:ext>
             </a:extLst>
           </p:cNvPr>
@@ -20224,7 +20224,7 @@
           <p:cNvPr id="18" name="">
             <a:extLst xmlns:a="http://schemas.openxmlformats.org/drawingml/2006/main">
               <a:ext uri="{FF2B5EF4-FFF2-40B4-BE49-F238E27FC236}">
-                <a16:creationId xmlns:a16="http://schemas.microsoft.com/office/drawing/2014/main" id="{04F8E94D-0915-43FD-A303-101B6B2AA808}"/>
+                <a16:creationId xmlns:a16="http://schemas.microsoft.com/office/drawing/2014/main" id="{9DFAB654-CA3E-40CA-899D-6375A353E31F}"/>
               </a:ext>
             </a:extLst>
           </p:cNvPr>
@@ -20261,7 +20261,7 @@
           <p:cNvPr id="19" name="">
             <a:extLst xmlns:a="http://schemas.openxmlformats.org/drawingml/2006/main">
               <a:ext uri="{FF2B5EF4-FFF2-40B4-BE49-F238E27FC236}">
-                <a16:creationId xmlns:a16="http://schemas.microsoft.com/office/drawing/2014/main" id="{ACC33DEB-7E64-4526-B6DA-0D625EB6B0CD}"/>
+                <a16:creationId xmlns:a16="http://schemas.microsoft.com/office/drawing/2014/main" id="{BD6EAD98-AE58-4C3A-8EEB-CE8AC3316800}"/>
               </a:ext>
             </a:extLst>
           </p:cNvPr>
@@ -20296,7 +20296,7 @@
           <p:cNvPr id="20" name="">
             <a:extLst xmlns:a="http://schemas.openxmlformats.org/drawingml/2006/main">
               <a:ext uri="{FF2B5EF4-FFF2-40B4-BE49-F238E27FC236}">
-                <a16:creationId xmlns:a16="http://schemas.microsoft.com/office/drawing/2014/main" id="{2DA53F90-5998-4DF4-B09F-9241CB1F136E}"/>
+                <a16:creationId xmlns:a16="http://schemas.microsoft.com/office/drawing/2014/main" id="{16892F0C-0EDA-4E4A-B102-FA246BC41414}"/>
               </a:ext>
             </a:extLst>
           </p:cNvPr>
@@ -20354,7 +20354,7 @@
           <p:cNvPr id="21" name="">
             <a:extLst xmlns:a="http://schemas.openxmlformats.org/drawingml/2006/main">
               <a:ext uri="{FF2B5EF4-FFF2-40B4-BE49-F238E27FC236}">
-                <a16:creationId xmlns:a16="http://schemas.microsoft.com/office/drawing/2014/main" id="{DE415BB1-96AF-46CB-ABA3-5F28A2AF0777}"/>
+                <a16:creationId xmlns:a16="http://schemas.microsoft.com/office/drawing/2014/main" id="{B6B531BA-7A49-4A0D-B0ED-CDBF5E7CD6E7}"/>
               </a:ext>
             </a:extLst>
           </p:cNvPr>
@@ -20429,7 +20429,7 @@
           <p:cNvPr id="22" name="">
             <a:extLst xmlns:a="http://schemas.openxmlformats.org/drawingml/2006/main">
               <a:ext uri="{FF2B5EF4-FFF2-40B4-BE49-F238E27FC236}">
-                <a16:creationId xmlns:a16="http://schemas.microsoft.com/office/drawing/2014/main" id="{0B7A7164-98DF-4916-BE99-72F414A510B6}"/>
+                <a16:creationId xmlns:a16="http://schemas.microsoft.com/office/drawing/2014/main" id="{562B0672-1921-4DE5-BEF8-298143783999}"/>
               </a:ext>
             </a:extLst>
           </p:cNvPr>
@@ -20466,7 +20466,7 @@
           <p:cNvPr id="23" name="">
             <a:extLst xmlns:a="http://schemas.openxmlformats.org/drawingml/2006/main">
               <a:ext uri="{FF2B5EF4-FFF2-40B4-BE49-F238E27FC236}">
-                <a16:creationId xmlns:a16="http://schemas.microsoft.com/office/drawing/2014/main" id="{E377B1D2-5DD5-49E6-9CD1-AED35A06AC47}"/>
+                <a16:creationId xmlns:a16="http://schemas.microsoft.com/office/drawing/2014/main" id="{19512C37-FEC4-4201-8F13-0EA9F1542DB7}"/>
               </a:ext>
             </a:extLst>
           </p:cNvPr>
@@ -20501,7 +20501,7 @@
           <p:cNvPr id="24" name="">
             <a:extLst xmlns:a="http://schemas.openxmlformats.org/drawingml/2006/main">
               <a:ext uri="{FF2B5EF4-FFF2-40B4-BE49-F238E27FC236}">
-                <a16:creationId xmlns:a16="http://schemas.microsoft.com/office/drawing/2014/main" id="{C6F8EEDE-660F-41F1-BB18-85905EA7A74F}"/>
+                <a16:creationId xmlns:a16="http://schemas.microsoft.com/office/drawing/2014/main" id="{A4BB9A12-4E8D-4D4B-A7BC-54E06DEE4C1B}"/>
               </a:ext>
             </a:extLst>
           </p:cNvPr>
@@ -20559,7 +20559,7 @@
           <p:cNvPr id="25" name="">
             <a:extLst xmlns:a="http://schemas.openxmlformats.org/drawingml/2006/main">
               <a:ext uri="{FF2B5EF4-FFF2-40B4-BE49-F238E27FC236}">
-                <a16:creationId xmlns:a16="http://schemas.microsoft.com/office/drawing/2014/main" id="{F86DBB6B-F2F9-4EE6-91B0-CEC7234D30AC}"/>
+                <a16:creationId xmlns:a16="http://schemas.microsoft.com/office/drawing/2014/main" id="{59139619-2F79-4016-AC4C-7133824505A6}"/>
               </a:ext>
             </a:extLst>
           </p:cNvPr>
@@ -20634,7 +20634,7 @@
           <p:cNvPr id="26" name="">
             <a:extLst xmlns:a="http://schemas.openxmlformats.org/drawingml/2006/main">
               <a:ext uri="{FF2B5EF4-FFF2-40B4-BE49-F238E27FC236}">
-                <a16:creationId xmlns:a16="http://schemas.microsoft.com/office/drawing/2014/main" id="{369C52FE-1970-45CC-A799-4BB15356344A}"/>
+                <a16:creationId xmlns:a16="http://schemas.microsoft.com/office/drawing/2014/main" id="{D63F14EB-D6D6-4A99-8D40-B9E8CAB1AEC8}"/>
               </a:ext>
             </a:extLst>
           </p:cNvPr>
@@ -20669,7 +20669,7 @@
           <p:cNvPr id="27" name="">
             <a:extLst xmlns:a="http://schemas.openxmlformats.org/drawingml/2006/main">
               <a:ext uri="{FF2B5EF4-FFF2-40B4-BE49-F238E27FC236}">
-                <a16:creationId xmlns:a16="http://schemas.microsoft.com/office/drawing/2014/main" id="{07E9419D-44EB-419B-89D0-195A343DFA02}"/>
+                <a16:creationId xmlns:a16="http://schemas.microsoft.com/office/drawing/2014/main" id="{DA4CFE49-BEFD-43B2-AB48-FA924D6A0A42}"/>
               </a:ext>
             </a:extLst>
           </p:cNvPr>
@@ -20704,7 +20704,7 @@
           <p:cNvPr id="28" name="">
             <a:extLst xmlns:a="http://schemas.openxmlformats.org/drawingml/2006/main">
               <a:ext uri="{FF2B5EF4-FFF2-40B4-BE49-F238E27FC236}">
-                <a16:creationId xmlns:a16="http://schemas.microsoft.com/office/drawing/2014/main" id="{BE2B81BC-A45F-4D08-8E1B-0FE993406F43}"/>
+                <a16:creationId xmlns:a16="http://schemas.microsoft.com/office/drawing/2014/main" id="{CDB9CC04-AC8C-40E1-AC6A-95EB544FF7DC}"/>
               </a:ext>
             </a:extLst>
           </p:cNvPr>
@@ -20762,7 +20762,7 @@
           <p:cNvPr id="29" name="">
             <a:extLst xmlns:a="http://schemas.openxmlformats.org/drawingml/2006/main">
               <a:ext uri="{FF2B5EF4-FFF2-40B4-BE49-F238E27FC236}">
-                <a16:creationId xmlns:a16="http://schemas.microsoft.com/office/drawing/2014/main" id="{EA09FA2B-25F6-43E8-8E01-3EE8D54C26F2}"/>
+                <a16:creationId xmlns:a16="http://schemas.microsoft.com/office/drawing/2014/main" id="{CA1DCFD2-3529-4B0B-9C3A-FB93082EA81B}"/>
               </a:ext>
             </a:extLst>
           </p:cNvPr>
@@ -20820,7 +20820,7 @@
           <p:cNvPr id="30" name="">
             <a:extLst xmlns:a="http://schemas.openxmlformats.org/drawingml/2006/main">
               <a:ext uri="{FF2B5EF4-FFF2-40B4-BE49-F238E27FC236}">
-                <a16:creationId xmlns:a16="http://schemas.microsoft.com/office/drawing/2014/main" id="{9EB601E4-FA2C-4E27-BA0D-0DD43DE4D343}"/>
+                <a16:creationId xmlns:a16="http://schemas.microsoft.com/office/drawing/2014/main" id="{DAFAD79D-C3B3-408D-A469-889BA5D7C32E}"/>
               </a:ext>
             </a:extLst>
           </p:cNvPr>
@@ -20855,7 +20855,7 @@
           <p:cNvPr id="31" name="">
             <a:extLst xmlns:a="http://schemas.openxmlformats.org/drawingml/2006/main">
               <a:ext uri="{FF2B5EF4-FFF2-40B4-BE49-F238E27FC236}">
-                <a16:creationId xmlns:a16="http://schemas.microsoft.com/office/drawing/2014/main" id="{A3F28CE0-1C3D-4C0B-9110-0D814E591303}"/>
+                <a16:creationId xmlns:a16="http://schemas.microsoft.com/office/drawing/2014/main" id="{F7878BAA-B863-471A-B790-4B38C3E23F59}"/>
               </a:ext>
             </a:extLst>
           </p:cNvPr>
@@ -20913,7 +20913,7 @@
           <p:cNvPr id="32" name="">
             <a:extLst xmlns:a="http://schemas.openxmlformats.org/drawingml/2006/main">
               <a:ext uri="{FF2B5EF4-FFF2-40B4-BE49-F238E27FC236}">
-                <a16:creationId xmlns:a16="http://schemas.microsoft.com/office/drawing/2014/main" id="{807B55EB-14E9-40B7-913E-509B99AC8E48}"/>
+                <a16:creationId xmlns:a16="http://schemas.microsoft.com/office/drawing/2014/main" id="{59BD7354-D222-4042-8006-85271BE459A0}"/>
               </a:ext>
             </a:extLst>
           </p:cNvPr>
@@ -20971,7 +20971,7 @@
           <p:cNvPr id="33" name="">
             <a:extLst xmlns:a="http://schemas.openxmlformats.org/drawingml/2006/main">
               <a:ext uri="{FF2B5EF4-FFF2-40B4-BE49-F238E27FC236}">
-                <a16:creationId xmlns:a16="http://schemas.microsoft.com/office/drawing/2014/main" id="{B8D1CAD0-9770-49E2-8E9F-314A67963A39}"/>
+                <a16:creationId xmlns:a16="http://schemas.microsoft.com/office/drawing/2014/main" id="{FC2BDAFD-AAA5-46D4-82A6-1D417BBA2E93}"/>
               </a:ext>
             </a:extLst>
           </p:cNvPr>
@@ -21027,7 +21027,7 @@
     </p:spTree>
     <p:extLst>
       <p:ext uri="{BB962C8B-B14F-4D97-AF65-F5344CB8AC3E}">
-        <p14:creationId xmlns:p14="http://schemas.microsoft.com/office/powerpoint/2010/main" val="1930331160"/>
+        <p14:creationId xmlns:p14="http://schemas.microsoft.com/office/powerpoint/2010/main" val="968263222"/>
       </p:ext>
     </p:extLst>
   </p:cSld>
@@ -21058,7 +21058,7 @@
           <p:cNvPr id="1" name="Slide Number Placeholder 5">
             <a:extLst xmlns:a="http://schemas.openxmlformats.org/drawingml/2006/main">
               <a:ext uri="{FF2B5EF4-FFF2-40B4-BE49-F238E27FC236}">
-                <a16:creationId xmlns:a16="http://schemas.microsoft.com/office/drawing/2014/main" id="{C5A324B5-703D-4DE1-A920-5C56CD46E34C}"/>
+                <a16:creationId xmlns:a16="http://schemas.microsoft.com/office/drawing/2014/main" id="{E12CE447-476B-4BAE-A1FF-E669E79965E6}"/>
               </a:ext>
             </a:extLst>
           </p:cNvPr>
@@ -21094,7 +21094,7 @@
           <p:nvPr/>
         </p:nvPicPr>
         <p:blipFill>
-          <a:blip xmlns:r="http://schemas.openxmlformats.org/officeDocument/2006/relationships" xmlns:a="http://schemas.openxmlformats.org/drawingml/2006/main" r:embed="Ra93379ac45db4fd3"/>
+          <a:blip xmlns:r="http://schemas.openxmlformats.org/officeDocument/2006/relationships" xmlns:a="http://schemas.openxmlformats.org/drawingml/2006/main" r:embed="Rb81ea05725de443f"/>
           <a:srcRect xmlns:a="http://schemas.openxmlformats.org/drawingml/2006/main" l="0" t="21875" r="0" b="21875"/>
           <a:stretch xmlns:a="http://schemas.openxmlformats.org/drawingml/2006/main">
             <a:fillRect l="0" t="0" r="0" b="0"/>
@@ -21115,7 +21115,7 @@
           <p:cNvPr id="3" name="">
             <a:extLst xmlns:a="http://schemas.openxmlformats.org/drawingml/2006/main">
               <a:ext uri="{FF2B5EF4-FFF2-40B4-BE49-F238E27FC236}">
-                <a16:creationId xmlns:a16="http://schemas.microsoft.com/office/drawing/2014/main" id="{39FD8399-878E-46BF-B7BE-04FC3E6E095A}"/>
+                <a16:creationId xmlns:a16="http://schemas.microsoft.com/office/drawing/2014/main" id="{C95BBB47-9165-4794-8BEB-BC0ADD34FB9F}"/>
               </a:ext>
             </a:extLst>
           </p:cNvPr>
@@ -21150,7 +21150,7 @@
           <p:cNvPr id="4" name="">
             <a:extLst xmlns:a="http://schemas.openxmlformats.org/drawingml/2006/main">
               <a:ext uri="{FF2B5EF4-FFF2-40B4-BE49-F238E27FC236}">
-                <a16:creationId xmlns:a16="http://schemas.microsoft.com/office/drawing/2014/main" id="{81988EED-6C18-4895-A11E-5B91C0F44B94}"/>
+                <a16:creationId xmlns:a16="http://schemas.microsoft.com/office/drawing/2014/main" id="{2306754F-0257-49FF-97D6-C311E98B1F67}"/>
               </a:ext>
             </a:extLst>
           </p:cNvPr>
@@ -21185,7 +21185,7 @@
           <p:cNvPr id="5" name="">
             <a:extLst xmlns:a="http://schemas.openxmlformats.org/drawingml/2006/main">
               <a:ext uri="{FF2B5EF4-FFF2-40B4-BE49-F238E27FC236}">
-                <a16:creationId xmlns:a16="http://schemas.microsoft.com/office/drawing/2014/main" id="{FA1793DC-BA29-49E7-A213-9122821B450D}"/>
+                <a16:creationId xmlns:a16="http://schemas.microsoft.com/office/drawing/2014/main" id="{238C9EE0-BB03-4B18-AA48-AF191A3916B7}"/>
               </a:ext>
             </a:extLst>
           </p:cNvPr>
@@ -21222,7 +21222,7 @@
           <p:cNvPr id="6" name="">
             <a:extLst xmlns:a="http://schemas.openxmlformats.org/drawingml/2006/main">
               <a:ext uri="{FF2B5EF4-FFF2-40B4-BE49-F238E27FC236}">
-                <a16:creationId xmlns:a16="http://schemas.microsoft.com/office/drawing/2014/main" id="{C84F53D4-A9F8-4401-AE49-4890F594E76E}"/>
+                <a16:creationId xmlns:a16="http://schemas.microsoft.com/office/drawing/2014/main" id="{9A0E4700-6338-46A4-9FA9-E898E2D7AAEF}"/>
               </a:ext>
             </a:extLst>
           </p:cNvPr>
@@ -21259,7 +21259,7 @@
           <p:cNvPr id="7" name="">
             <a:extLst xmlns:a="http://schemas.openxmlformats.org/drawingml/2006/main">
               <a:ext uri="{FF2B5EF4-FFF2-40B4-BE49-F238E27FC236}">
-                <a16:creationId xmlns:a16="http://schemas.microsoft.com/office/drawing/2014/main" id="{E4B8EBF0-7301-482B-B3B1-4D4C2EA1E556}"/>
+                <a16:creationId xmlns:a16="http://schemas.microsoft.com/office/drawing/2014/main" id="{34931C99-AD58-4211-8B11-9F498A613F71}"/>
               </a:ext>
             </a:extLst>
           </p:cNvPr>
@@ -21296,7 +21296,7 @@
           <p:cNvPr id="8" name="">
             <a:extLst xmlns:a="http://schemas.openxmlformats.org/drawingml/2006/main">
               <a:ext uri="{FF2B5EF4-FFF2-40B4-BE49-F238E27FC236}">
-                <a16:creationId xmlns:a16="http://schemas.microsoft.com/office/drawing/2014/main" id="{80C74EBA-563C-4419-8293-6E982BA6CEA3}"/>
+                <a16:creationId xmlns:a16="http://schemas.microsoft.com/office/drawing/2014/main" id="{DDA7DC33-B406-46DE-843A-1B722FAA09A5}"/>
               </a:ext>
             </a:extLst>
           </p:cNvPr>
@@ -21333,7 +21333,7 @@
           <p:cNvPr id="9" name="">
             <a:extLst xmlns:a="http://schemas.openxmlformats.org/drawingml/2006/main">
               <a:ext uri="{FF2B5EF4-FFF2-40B4-BE49-F238E27FC236}">
-                <a16:creationId xmlns:a16="http://schemas.microsoft.com/office/drawing/2014/main" id="{BDD70E91-9C99-4A49-B315-474499E52E66}"/>
+                <a16:creationId xmlns:a16="http://schemas.microsoft.com/office/drawing/2014/main" id="{06511CF3-1DF8-4365-9A13-255833BD7E8F}"/>
               </a:ext>
             </a:extLst>
           </p:cNvPr>
@@ -21391,7 +21391,7 @@
           <p:cNvPr id="10" name="">
             <a:extLst xmlns:a="http://schemas.openxmlformats.org/drawingml/2006/main">
               <a:ext uri="{FF2B5EF4-FFF2-40B4-BE49-F238E27FC236}">
-                <a16:creationId xmlns:a16="http://schemas.microsoft.com/office/drawing/2014/main" id="{A28877E1-4964-488B-A620-BA6B2E8E89BA}"/>
+                <a16:creationId xmlns:a16="http://schemas.microsoft.com/office/drawing/2014/main" id="{0CA5DE55-61FB-47BB-9797-CDB6589C6CD1}"/>
               </a:ext>
             </a:extLst>
           </p:cNvPr>
@@ -21449,7 +21449,7 @@
           <p:cNvPr id="11" name="">
             <a:extLst xmlns:a="http://schemas.openxmlformats.org/drawingml/2006/main">
               <a:ext uri="{FF2B5EF4-FFF2-40B4-BE49-F238E27FC236}">
-                <a16:creationId xmlns:a16="http://schemas.microsoft.com/office/drawing/2014/main" id="{69F91392-A850-4155-956E-BB69F062330C}"/>
+                <a16:creationId xmlns:a16="http://schemas.microsoft.com/office/drawing/2014/main" id="{F9C8BDA7-52E6-49D2-B818-005F10B4492C}"/>
               </a:ext>
             </a:extLst>
           </p:cNvPr>
@@ -21484,7 +21484,7 @@
           <p:cNvPr id="12" name="">
             <a:extLst xmlns:a="http://schemas.openxmlformats.org/drawingml/2006/main">
               <a:ext uri="{FF2B5EF4-FFF2-40B4-BE49-F238E27FC236}">
-                <a16:creationId xmlns:a16="http://schemas.microsoft.com/office/drawing/2014/main" id="{CE206BFC-2C1B-4337-AEB5-B7C042A179B7}"/>
+                <a16:creationId xmlns:a16="http://schemas.microsoft.com/office/drawing/2014/main" id="{0744AFA6-9497-4453-870C-1C93ACDABABF}"/>
               </a:ext>
             </a:extLst>
           </p:cNvPr>
@@ -21517,7 +21517,7 @@
           <p:cNvPr id="13" name="">
             <a:extLst xmlns:a="http://schemas.openxmlformats.org/drawingml/2006/main">
               <a:ext uri="{FF2B5EF4-FFF2-40B4-BE49-F238E27FC236}">
-                <a16:creationId xmlns:a16="http://schemas.microsoft.com/office/drawing/2014/main" id="{ABC8187B-7231-4AF2-AA1D-C5AF7C6EAFAD}"/>
+                <a16:creationId xmlns:a16="http://schemas.microsoft.com/office/drawing/2014/main" id="{C31D58EF-7466-4155-86A5-11239B066E2E}"/>
               </a:ext>
             </a:extLst>
           </p:cNvPr>
@@ -21592,7 +21592,7 @@
           <p:cNvPr id="14" name="">
             <a:extLst xmlns:a="http://schemas.openxmlformats.org/drawingml/2006/main">
               <a:ext uri="{FF2B5EF4-FFF2-40B4-BE49-F238E27FC236}">
-                <a16:creationId xmlns:a16="http://schemas.microsoft.com/office/drawing/2014/main" id="{5034869A-7258-485E-8BBB-AC634539B9E9}"/>
+                <a16:creationId xmlns:a16="http://schemas.microsoft.com/office/drawing/2014/main" id="{C2F618B4-53D2-428A-9E28-A0F3DB479C1A}"/>
               </a:ext>
             </a:extLst>
           </p:cNvPr>
@@ -21627,7 +21627,7 @@
           <p:cNvPr id="15" name="">
             <a:extLst xmlns:a="http://schemas.openxmlformats.org/drawingml/2006/main">
               <a:ext uri="{FF2B5EF4-FFF2-40B4-BE49-F238E27FC236}">
-                <a16:creationId xmlns:a16="http://schemas.microsoft.com/office/drawing/2014/main" id="{1BE8BCC9-2854-491C-AA87-8D5473D06314}"/>
+                <a16:creationId xmlns:a16="http://schemas.microsoft.com/office/drawing/2014/main" id="{E1ED32DC-6210-47FC-83CA-E57265B7B235}"/>
               </a:ext>
             </a:extLst>
           </p:cNvPr>
@@ -21662,7 +21662,7 @@
           <p:cNvPr id="16" name="">
             <a:extLst xmlns:a="http://schemas.openxmlformats.org/drawingml/2006/main">
               <a:ext uri="{FF2B5EF4-FFF2-40B4-BE49-F238E27FC236}">
-                <a16:creationId xmlns:a16="http://schemas.microsoft.com/office/drawing/2014/main" id="{F2F8AE6C-AA6A-468A-9A07-E2251AEE40CD}"/>
+                <a16:creationId xmlns:a16="http://schemas.microsoft.com/office/drawing/2014/main" id="{1D4CE18C-93F9-4CE3-A78B-0BE093C9725A}"/>
               </a:ext>
             </a:extLst>
           </p:cNvPr>
@@ -21720,7 +21720,7 @@
           <p:cNvPr id="17" name="">
             <a:extLst xmlns:a="http://schemas.openxmlformats.org/drawingml/2006/main">
               <a:ext uri="{FF2B5EF4-FFF2-40B4-BE49-F238E27FC236}">
-                <a16:creationId xmlns:a16="http://schemas.microsoft.com/office/drawing/2014/main" id="{1D6A13F8-2593-4152-BC1F-6BA2405CD8C7}"/>
+                <a16:creationId xmlns:a16="http://schemas.microsoft.com/office/drawing/2014/main" id="{5C1AB72A-419C-451F-8133-6D0F90D3DF65}"/>
               </a:ext>
             </a:extLst>
           </p:cNvPr>
@@ -21757,7 +21757,7 @@
           <p:cNvPr id="18" name="">
             <a:extLst xmlns:a="http://schemas.openxmlformats.org/drawingml/2006/main">
               <a:ext uri="{FF2B5EF4-FFF2-40B4-BE49-F238E27FC236}">
-                <a16:creationId xmlns:a16="http://schemas.microsoft.com/office/drawing/2014/main" id="{398ACFFC-565C-4B3F-9550-217C932CAABE}"/>
+                <a16:creationId xmlns:a16="http://schemas.microsoft.com/office/drawing/2014/main" id="{DB6D2E87-E2BA-4A9A-AF5F-1E0B6CFB5F8E}"/>
               </a:ext>
             </a:extLst>
           </p:cNvPr>
@@ -21792,7 +21792,7 @@
           <p:cNvPr id="19" name="">
             <a:extLst xmlns:a="http://schemas.openxmlformats.org/drawingml/2006/main">
               <a:ext uri="{FF2B5EF4-FFF2-40B4-BE49-F238E27FC236}">
-                <a16:creationId xmlns:a16="http://schemas.microsoft.com/office/drawing/2014/main" id="{8C266F9E-C348-4D3A-9AB6-10FD1F43673C}"/>
+                <a16:creationId xmlns:a16="http://schemas.microsoft.com/office/drawing/2014/main" id="{0497C5D2-B7F2-48C1-A5A7-759C9AD3BF16}"/>
               </a:ext>
             </a:extLst>
           </p:cNvPr>
@@ -21850,7 +21850,7 @@
           <p:cNvPr id="20" name="">
             <a:extLst xmlns:a="http://schemas.openxmlformats.org/drawingml/2006/main">
               <a:ext uri="{FF2B5EF4-FFF2-40B4-BE49-F238E27FC236}">
-                <a16:creationId xmlns:a16="http://schemas.microsoft.com/office/drawing/2014/main" id="{E16E6958-5371-4141-BF1B-BB8575FFF733}"/>
+                <a16:creationId xmlns:a16="http://schemas.microsoft.com/office/drawing/2014/main" id="{F1FF67FF-5A4A-4072-96F5-D90B52AE6C62}"/>
               </a:ext>
             </a:extLst>
           </p:cNvPr>
@@ -21942,7 +21942,7 @@
           <p:cNvPr id="21" name="">
             <a:extLst xmlns:a="http://schemas.openxmlformats.org/drawingml/2006/main">
               <a:ext uri="{FF2B5EF4-FFF2-40B4-BE49-F238E27FC236}">
-                <a16:creationId xmlns:a16="http://schemas.microsoft.com/office/drawing/2014/main" id="{4977256D-8AC4-4858-847E-A5FBAB11D3BC}"/>
+                <a16:creationId xmlns:a16="http://schemas.microsoft.com/office/drawing/2014/main" id="{B5A243F3-05FB-4B35-AEFD-CCF5D0F7ABF6}"/>
               </a:ext>
             </a:extLst>
           </p:cNvPr>
@@ -21979,7 +21979,7 @@
           <p:cNvPr id="22" name="">
             <a:extLst xmlns:a="http://schemas.openxmlformats.org/drawingml/2006/main">
               <a:ext uri="{FF2B5EF4-FFF2-40B4-BE49-F238E27FC236}">
-                <a16:creationId xmlns:a16="http://schemas.microsoft.com/office/drawing/2014/main" id="{946FE4AD-DD40-4436-A5BE-76395B2E420E}"/>
+                <a16:creationId xmlns:a16="http://schemas.microsoft.com/office/drawing/2014/main" id="{8A55DFF6-FB71-46DC-89FF-1E32DA57AFFE}"/>
               </a:ext>
             </a:extLst>
           </p:cNvPr>
@@ -22014,7 +22014,7 @@
           <p:cNvPr id="23" name="">
             <a:extLst xmlns:a="http://schemas.openxmlformats.org/drawingml/2006/main">
               <a:ext uri="{FF2B5EF4-FFF2-40B4-BE49-F238E27FC236}">
-                <a16:creationId xmlns:a16="http://schemas.microsoft.com/office/drawing/2014/main" id="{B9553D70-1E82-4465-B135-B29E2D7E9C57}"/>
+                <a16:creationId xmlns:a16="http://schemas.microsoft.com/office/drawing/2014/main" id="{EF10AEB4-1C3B-4C2B-A386-03DF92A7C68B}"/>
               </a:ext>
             </a:extLst>
           </p:cNvPr>
@@ -22072,7 +22072,7 @@
           <p:cNvPr id="24" name="">
             <a:extLst xmlns:a="http://schemas.openxmlformats.org/drawingml/2006/main">
               <a:ext uri="{FF2B5EF4-FFF2-40B4-BE49-F238E27FC236}">
-                <a16:creationId xmlns:a16="http://schemas.microsoft.com/office/drawing/2014/main" id="{2956D7A2-C0A3-4E64-AE3F-37528B7D56D3}"/>
+                <a16:creationId xmlns:a16="http://schemas.microsoft.com/office/drawing/2014/main" id="{FC18C74D-FF3E-494B-859E-B2D21F23C0A6}"/>
               </a:ext>
             </a:extLst>
           </p:cNvPr>
@@ -22181,7 +22181,7 @@
           <p:cNvPr id="25" name="">
             <a:extLst xmlns:a="http://schemas.openxmlformats.org/drawingml/2006/main">
               <a:ext uri="{FF2B5EF4-FFF2-40B4-BE49-F238E27FC236}">
-                <a16:creationId xmlns:a16="http://schemas.microsoft.com/office/drawing/2014/main" id="{27F13121-B859-4359-80E5-93CDF5B471C2}"/>
+                <a16:creationId xmlns:a16="http://schemas.microsoft.com/office/drawing/2014/main" id="{E3255291-28D7-4ABA-8B45-913F6713D761}"/>
               </a:ext>
             </a:extLst>
           </p:cNvPr>
@@ -22214,7 +22214,7 @@
           <p:cNvPr id="26" name="">
             <a:extLst xmlns:a="http://schemas.openxmlformats.org/drawingml/2006/main">
               <a:ext uri="{FF2B5EF4-FFF2-40B4-BE49-F238E27FC236}">
-                <a16:creationId xmlns:a16="http://schemas.microsoft.com/office/drawing/2014/main" id="{DDFC1ED3-FAE7-420B-8179-54D2245F5E08}"/>
+                <a16:creationId xmlns:a16="http://schemas.microsoft.com/office/drawing/2014/main" id="{62AAF860-CAF6-4A7E-9EA2-C37C24A37EE8}"/>
               </a:ext>
             </a:extLst>
           </p:cNvPr>
@@ -22268,7 +22268,7 @@
           <p:cNvPr id="27" name="">
             <a:extLst xmlns:a="http://schemas.openxmlformats.org/drawingml/2006/main">
               <a:ext uri="{FF2B5EF4-FFF2-40B4-BE49-F238E27FC236}">
-                <a16:creationId xmlns:a16="http://schemas.microsoft.com/office/drawing/2014/main" id="{9F4BBC79-A199-4225-8EC9-20584ED1B75F}"/>
+                <a16:creationId xmlns:a16="http://schemas.microsoft.com/office/drawing/2014/main" id="{BF47C9D9-149A-4356-B9C0-77EEC2E1F71B}"/>
               </a:ext>
             </a:extLst>
           </p:cNvPr>
@@ -22324,7 +22324,7 @@
     </p:spTree>
     <p:extLst>
       <p:ext uri="{BB962C8B-B14F-4D97-AF65-F5344CB8AC3E}">
-        <p14:creationId xmlns:p14="http://schemas.microsoft.com/office/powerpoint/2010/main" val="278678487"/>
+        <p14:creationId xmlns:p14="http://schemas.microsoft.com/office/powerpoint/2010/main" val="1174361897"/>
       </p:ext>
     </p:extLst>
   </p:cSld>

--- a/collections/organoid/presentation/brain-organoid-question-journey/outputs/output.pptx
+++ b/collections/organoid/presentation/brain-organoid-question-journey/outputs/output.pptx
@@ -2,24 +2,25 @@
 <file path=ppt/presentation.xml><?xml version="1.0" encoding="utf-8"?>
 <p:presentation xmlns:p="http://schemas.openxmlformats.org/presentationml/2006/main">
   <p:sldMasterIdLst>
-    <p:sldMasterId xmlns:r="http://schemas.openxmlformats.org/officeDocument/2006/relationships" id="2147483648" r:id="R42cd8106476044c2"/>
+    <p:sldMasterId xmlns:r="http://schemas.openxmlformats.org/officeDocument/2006/relationships" id="2147483648" r:id="R8c0caf5a97114da0"/>
   </p:sldMasterIdLst>
   <p:notesMasterIdLst>
-    <p:notesMasterId xmlns:r="http://schemas.openxmlformats.org/officeDocument/2006/relationships" r:id="R581d68f7b7bd4d37"/>
+    <p:notesMasterId xmlns:r="http://schemas.openxmlformats.org/officeDocument/2006/relationships" r:id="Reb0f0dab47ec4045"/>
   </p:notesMasterIdLst>
   <p:sldIdLst>
-    <p:sldId xmlns:r="http://schemas.openxmlformats.org/officeDocument/2006/relationships" id="256" r:id="Red2de704d0b343cf"/>
-    <p:sldId xmlns:r="http://schemas.openxmlformats.org/officeDocument/2006/relationships" id="257" r:id="R323670421495409d"/>
-    <p:sldId xmlns:r="http://schemas.openxmlformats.org/officeDocument/2006/relationships" id="258" r:id="Rdcc959b2d3044939"/>
-    <p:sldId xmlns:r="http://schemas.openxmlformats.org/officeDocument/2006/relationships" id="259" r:id="R96bb5c60221342d4"/>
-    <p:sldId xmlns:r="http://schemas.openxmlformats.org/officeDocument/2006/relationships" id="260" r:id="R9fa8cb2c731e42ff"/>
-    <p:sldId xmlns:r="http://schemas.openxmlformats.org/officeDocument/2006/relationships" id="261" r:id="R959bf8efd2504c68"/>
-    <p:sldId xmlns:r="http://schemas.openxmlformats.org/officeDocument/2006/relationships" id="262" r:id="R3ded1b02455a4e72"/>
-    <p:sldId xmlns:r="http://schemas.openxmlformats.org/officeDocument/2006/relationships" id="263" r:id="R91b52064a5db4ffd"/>
-    <p:sldId xmlns:r="http://schemas.openxmlformats.org/officeDocument/2006/relationships" id="264" r:id="Rb8443296857a4762"/>
-    <p:sldId xmlns:r="http://schemas.openxmlformats.org/officeDocument/2006/relationships" id="265" r:id="Rdf33b4fc733c4d49"/>
-    <p:sldId xmlns:r="http://schemas.openxmlformats.org/officeDocument/2006/relationships" id="266" r:id="R7626f40f07124a03"/>
-    <p:sldId xmlns:r="http://schemas.openxmlformats.org/officeDocument/2006/relationships" id="267" r:id="R791628791b7842c1"/>
+    <p:sldId xmlns:r="http://schemas.openxmlformats.org/officeDocument/2006/relationships" id="256" r:id="Re36c11e160294ea9"/>
+    <p:sldId xmlns:r="http://schemas.openxmlformats.org/officeDocument/2006/relationships" id="257" r:id="Rd7cadffd0aef4f28"/>
+    <p:sldId xmlns:r="http://schemas.openxmlformats.org/officeDocument/2006/relationships" id="258" r:id="R330a00bbdd7b45c1"/>
+    <p:sldId xmlns:r="http://schemas.openxmlformats.org/officeDocument/2006/relationships" id="259" r:id="R5eb0c892070647cc"/>
+    <p:sldId xmlns:r="http://schemas.openxmlformats.org/officeDocument/2006/relationships" id="260" r:id="Rb8cb1ee50c814577"/>
+    <p:sldId xmlns:r="http://schemas.openxmlformats.org/officeDocument/2006/relationships" id="261" r:id="Rb50b8793c8614a6a"/>
+    <p:sldId xmlns:r="http://schemas.openxmlformats.org/officeDocument/2006/relationships" id="262" r:id="Ra3626d69efc34d6b"/>
+    <p:sldId xmlns:r="http://schemas.openxmlformats.org/officeDocument/2006/relationships" id="263" r:id="Rf5ef0e083a494444"/>
+    <p:sldId xmlns:r="http://schemas.openxmlformats.org/officeDocument/2006/relationships" id="264" r:id="R84d1a7591a9448f1"/>
+    <p:sldId xmlns:r="http://schemas.openxmlformats.org/officeDocument/2006/relationships" id="265" r:id="Rb98ea558c6ee4fc2"/>
+    <p:sldId xmlns:r="http://schemas.openxmlformats.org/officeDocument/2006/relationships" id="266" r:id="R043f1a3b23a94b74"/>
+    <p:sldId xmlns:r="http://schemas.openxmlformats.org/officeDocument/2006/relationships" id="267" r:id="R92b33bed6f824d6f"/>
+    <p:sldId xmlns:r="http://schemas.openxmlformats.org/officeDocument/2006/relationships" id="268" r:id="R7e155083d9cb4521"/>
   </p:sldIdLst>
   <p:sldSz cx="12192000" cy="6858000"/>
   <p:notesSz cx="6858000" cy="9144000"/>
@@ -818,6 +819,126 @@
           <a:lstStyle xmlns:a="http://schemas.openxmlformats.org/drawingml/2006/main"/>
           <a:p xmlns:a="http://schemas.openxmlformats.org/drawingml/2006/main">
             <a:r>
+              <a:t>이 슬라이드는 발표의 마지막 부분에서 review paper writing과 직접 연결해 주는 역할을 한다.</a:t>
+            </a:r>
+          </a:p>
+          <a:p xmlns:a="http://schemas.openxmlformats.org/drawingml/2006/main">
+            <a:r>
+              <a:t>핵심은 논문을 하나씩 나열하는 리뷰가 아니라, 질문이 이동한 순서대로 chapter를 세우는 것이다.</a:t>
+            </a:r>
+          </a:p>
+          <a:p xmlns:a="http://schemas.openxmlformats.org/drawingml/2006/main">
+            <a:r>
+              <a:t>즉 protocol family에서 시작해 benchmark axes로 확장하고, 마지막에는 readout-first selection rule로 정리하는 구조가 된다.</a:t>
+            </a:r>
+          </a:p>
+          <a:p xmlns:a="http://schemas.openxmlformats.org/drawingml/2006/main">
+            <a:r>
+              <a:t/>
+            </a:r>
+          </a:p>
+          <a:p xmlns:a="http://schemas.openxmlformats.org/drawingml/2006/main">
+            <a:r>
+              <a:t>[Sources]</a:t>
+            </a:r>
+          </a:p>
+          <a:p xmlns:a="http://schemas.openxmlformats.org/drawingml/2006/main">
+            <a:r>
+              <a:t>- collections/organoid/wiki/queries/20260408_174047_brain-subregion-protocol-comparison.md</a:t>
+            </a:r>
+          </a:p>
+          <a:p xmlns:a="http://schemas.openxmlformats.org/drawingml/2006/main">
+            <a:r>
+              <a:t>- collections/organoid/wiki/queries/20260409_brain-protocol-maturation-synchronization.md</a:t>
+            </a:r>
+          </a:p>
+          <a:p xmlns:a="http://schemas.openxmlformats.org/drawingml/2006/main">
+            <a:r>
+              <a:t>- collections/organoid/wiki/queries/20260420_172825_brain-functional-readout-selection.md</a:t>
+            </a:r>
+          </a:p>
+          <a:p xmlns:a="http://schemas.openxmlformats.org/drawingml/2006/main">
+            <a:r>
+              <a:t>- collections/organoid/wiki/syntheses/20260424_organoid-developmental-baseline-and-regionalization-playbook.md</a:t>
+            </a:r>
+          </a:p>
+          <a:p xmlns:a="http://schemas.openxmlformats.org/drawingml/2006/main">
+            <a:r>
+              <a:t>- collections/organoid/wiki/concepts/brain-organoid-fidelity-reproducibility-and-atlases.md</a:t>
+            </a:r>
+          </a:p>
+          <a:p xmlns:a="http://schemas.openxmlformats.org/drawingml/2006/main">
+            <a:r>
+              <a:t>- collections/organoid/wiki/concepts/brain-organoid-patterning-and-assembloids.md</a:t>
+            </a:r>
+          </a:p>
+        </p:txBody>
+      </p:sp>
+      <p:sp>
+        <p:nvSpPr>
+          <p:cNvPr id="4" name="Slide Number Placeholder 3"/>
+          <p:cNvSpPr>
+            <a:spLocks xmlns:a="http://schemas.openxmlformats.org/drawingml/2006/main" noGrp="1"/>
+          </p:cNvSpPr>
+          <p:nvPr>
+            <p:ph type="sldNum" idx="5"/>
+          </p:nvPr>
+        </p:nvSpPr>
+        <p:spPr/>
+        <p:txBody>
+          <a:bodyPr xmlns:a="http://schemas.openxmlformats.org/drawingml/2006/main"/>
+          <a:lstStyle xmlns:a="http://schemas.openxmlformats.org/drawingml/2006/main"/>
+          <a:p xmlns:a="http://schemas.openxmlformats.org/drawingml/2006/main"/>
+        </p:txBody>
+      </p:sp>
+    </p:spTree>
+  </p:cSld>
+  <p:clrMapOvr>
+    <a:masterClrMapping xmlns:a="http://schemas.openxmlformats.org/drawingml/2006/main"/>
+  </p:clrMapOvr>
+</p:notes>
+</file>
+
+<file path=ppt/notesSlides/notesSlide13.xml><?xml version="1.0" encoding="utf-8"?>
+<p:notes xmlns:p="http://schemas.openxmlformats.org/presentationml/2006/main">
+  <p:cSld>
+    <p:spTree>
+      <p:nvGrpSpPr>
+        <p:cNvPr id="1" name=""/>
+        <p:cNvGrpSpPr/>
+        <p:nvPr/>
+      </p:nvGrpSpPr>
+      <p:grpSpPr>
+        <a:xfrm xmlns:a="http://schemas.openxmlformats.org/drawingml/2006/main"/>
+      </p:grpSpPr>
+      <p:sp>
+        <p:nvSpPr>
+          <p:cNvPr id="2" name="Slide Image Placeholder 1"/>
+          <p:cNvSpPr>
+            <a:spLocks xmlns:a="http://schemas.openxmlformats.org/drawingml/2006/main" noGrp="1"/>
+          </p:cNvSpPr>
+          <p:nvPr>
+            <p:ph type="sldImg" idx="0"/>
+          </p:nvPr>
+        </p:nvSpPr>
+        <p:spPr/>
+      </p:sp>
+      <p:sp>
+        <p:nvSpPr>
+          <p:cNvPr id="3" name="Notes Placeholder 2"/>
+          <p:cNvSpPr>
+            <a:spLocks xmlns:a="http://schemas.openxmlformats.org/drawingml/2006/main" noGrp="1"/>
+          </p:cNvSpPr>
+          <p:nvPr>
+            <p:ph type="body" idx="1"/>
+          </p:nvPr>
+        </p:nvSpPr>
+        <p:spPr/>
+        <p:txBody>
+          <a:bodyPr xmlns:a="http://schemas.openxmlformats.org/drawingml/2006/main"/>
+          <a:lstStyle xmlns:a="http://schemas.openxmlformats.org/drawingml/2006/main"/>
+          <a:p xmlns:a="http://schemas.openxmlformats.org/drawingml/2006/main">
+            <a:r>
               <a:t>마무리에서는 세 가지 takeaway를 다시 강조한다.</a:t>
             </a:r>
           </a:p>
@@ -1880,7 +2001,7 @@
           <p:cNvPr id="1" name="Title 1">
             <a:extLst xmlns:a="http://schemas.openxmlformats.org/drawingml/2006/main">
               <a:ext uri="{FF2B5EF4-FFF2-40B4-BE49-F238E27FC236}">
-                <a16:creationId xmlns:a16="http://schemas.microsoft.com/office/drawing/2014/main" id="{E984C53E-73FF-47C3-BCC4-CD33EEB688C4}"/>
+                <a16:creationId xmlns:a16="http://schemas.microsoft.com/office/drawing/2014/main" id="{EE9B9336-AD92-4E55-B0BB-DD5E2816FCBC}"/>
               </a:ext>
             </a:extLst>
           </p:cNvPr>
@@ -1911,7 +2032,7 @@
           <p:cNvPr id="2" name="Subtitle 2">
             <a:extLst xmlns:a="http://schemas.openxmlformats.org/drawingml/2006/main">
               <a:ext uri="{FF2B5EF4-FFF2-40B4-BE49-F238E27FC236}">
-                <a16:creationId xmlns:a16="http://schemas.microsoft.com/office/drawing/2014/main" id="{445E72D9-EF75-47FD-90F3-2978A0053B3E}"/>
+                <a16:creationId xmlns:a16="http://schemas.microsoft.com/office/drawing/2014/main" id="{108D341E-060A-4618-ADBA-B356B00E0DDA}"/>
               </a:ext>
             </a:extLst>
           </p:cNvPr>
@@ -1974,7 +2095,7 @@
           <p:cNvPr id="3" name="Date Placeholder 3">
             <a:extLst xmlns:a="http://schemas.openxmlformats.org/drawingml/2006/main">
               <a:ext uri="{FF2B5EF4-FFF2-40B4-BE49-F238E27FC236}">
-                <a16:creationId xmlns:a16="http://schemas.microsoft.com/office/drawing/2014/main" id="{32BF8197-0EF5-405A-9788-3103C40335C2}"/>
+                <a16:creationId xmlns:a16="http://schemas.microsoft.com/office/drawing/2014/main" id="{7E04374C-0BA8-4393-8B67-C9C826C2D1C9}"/>
               </a:ext>
             </a:extLst>
           </p:cNvPr>
@@ -1995,7 +2116,7 @@
           <p:cNvPr id="4" name="Footer Placeholder 4">
             <a:extLst xmlns:a="http://schemas.openxmlformats.org/drawingml/2006/main">
               <a:ext uri="{FF2B5EF4-FFF2-40B4-BE49-F238E27FC236}">
-                <a16:creationId xmlns:a16="http://schemas.microsoft.com/office/drawing/2014/main" id="{C92BC197-5FDD-48EB-8886-4BD8BD7EA07A}"/>
+                <a16:creationId xmlns:a16="http://schemas.microsoft.com/office/drawing/2014/main" id="{AA600E7D-EC07-43CF-9AB7-09DBCABA4EC7}"/>
               </a:ext>
             </a:extLst>
           </p:cNvPr>
@@ -2016,7 +2137,7 @@
           <p:cNvPr id="5" name="Slide Number Placeholder 5">
             <a:extLst xmlns:a="http://schemas.openxmlformats.org/drawingml/2006/main">
               <a:ext uri="{FF2B5EF4-FFF2-40B4-BE49-F238E27FC236}">
-                <a16:creationId xmlns:a16="http://schemas.microsoft.com/office/drawing/2014/main" id="{E12CE447-476B-4BAE-A1FF-E669E79965E6}"/>
+                <a16:creationId xmlns:a16="http://schemas.microsoft.com/office/drawing/2014/main" id="{EDD0F201-AE24-4D54-ACE2-5F86EBC94A0A}"/>
               </a:ext>
             </a:extLst>
           </p:cNvPr>
@@ -2059,7 +2180,7 @@
           <p:cNvPr id="1" name="Slide Number Placeholder 5">
             <a:extLst xmlns:a="http://schemas.openxmlformats.org/drawingml/2006/main">
               <a:ext uri="{FF2B5EF4-FFF2-40B4-BE49-F238E27FC236}">
-                <a16:creationId xmlns:a16="http://schemas.microsoft.com/office/drawing/2014/main" id="{EFCA763A-768B-4E94-96C4-73A5DD2AF43D}"/>
+                <a16:creationId xmlns:a16="http://schemas.microsoft.com/office/drawing/2014/main" id="{1B824CBC-E7A4-4DB2-8E5A-64395DD95FEC}"/>
               </a:ext>
             </a:extLst>
           </p:cNvPr>
@@ -2098,7 +2219,7 @@
   </p:cSld>
   <p:clrMap bg1="lt1" tx1="dk1" bg2="lt2" tx2="dk2" accent1="accent1" accent2="accent2" accent3="accent3" accent4="accent4" accent5="accent5" accent6="accent6" hlink="hlink" folHlink="folHlink"/>
   <p:sldLayoutIdLst>
-    <p:sldLayoutId xmlns:r="http://schemas.openxmlformats.org/officeDocument/2006/relationships" id="2147483649" r:id="R296c6e276f144e4d"/>
+    <p:sldLayoutId xmlns:r="http://schemas.openxmlformats.org/officeDocument/2006/relationships" id="2147483649" r:id="Re3cc46a66fa84bd8"/>
   </p:sldLayoutIdLst>
   <p:txStyles>
     <p:titleStyle>
@@ -2404,7 +2525,7 @@
           <p:cNvPr id="1" name="Slide Number Placeholder 5">
             <a:extLst xmlns:a="http://schemas.openxmlformats.org/drawingml/2006/main">
               <a:ext uri="{FF2B5EF4-FFF2-40B4-BE49-F238E27FC236}">
-                <a16:creationId xmlns:a16="http://schemas.microsoft.com/office/drawing/2014/main" id="{E12CE447-476B-4BAE-A1FF-E669E79965E6}"/>
+                <a16:creationId xmlns:a16="http://schemas.microsoft.com/office/drawing/2014/main" id="{EDD0F201-AE24-4D54-ACE2-5F86EBC94A0A}"/>
               </a:ext>
             </a:extLst>
           </p:cNvPr>
@@ -2440,7 +2561,7 @@
           <p:nvPr/>
         </p:nvPicPr>
         <p:blipFill>
-          <a:blip xmlns:r="http://schemas.openxmlformats.org/officeDocument/2006/relationships" xmlns:a="http://schemas.openxmlformats.org/drawingml/2006/main" r:embed="Ra9dfebe3f5164d58"/>
+          <a:blip xmlns:r="http://schemas.openxmlformats.org/officeDocument/2006/relationships" xmlns:a="http://schemas.openxmlformats.org/drawingml/2006/main" r:embed="Rc9d8b1b674214625"/>
           <a:srcRect xmlns:a="http://schemas.openxmlformats.org/drawingml/2006/main" l="0" t="21875" r="0" b="21875"/>
           <a:stretch xmlns:a="http://schemas.openxmlformats.org/drawingml/2006/main">
             <a:fillRect l="0" t="0" r="0" b="0"/>
@@ -2461,7 +2582,7 @@
           <p:cNvPr id="3" name="">
             <a:extLst xmlns:a="http://schemas.openxmlformats.org/drawingml/2006/main">
               <a:ext uri="{FF2B5EF4-FFF2-40B4-BE49-F238E27FC236}">
-                <a16:creationId xmlns:a16="http://schemas.microsoft.com/office/drawing/2014/main" id="{24F74158-27A2-4528-AC4C-F53A59EA4118}"/>
+                <a16:creationId xmlns:a16="http://schemas.microsoft.com/office/drawing/2014/main" id="{DBC667C0-2691-4077-A853-D10E740581B4}"/>
               </a:ext>
             </a:extLst>
           </p:cNvPr>
@@ -2496,7 +2617,7 @@
           <p:cNvPr id="4" name="">
             <a:extLst xmlns:a="http://schemas.openxmlformats.org/drawingml/2006/main">
               <a:ext uri="{FF2B5EF4-FFF2-40B4-BE49-F238E27FC236}">
-                <a16:creationId xmlns:a16="http://schemas.microsoft.com/office/drawing/2014/main" id="{EEEDC98F-D4B7-41DC-9495-F1D2EA54EF5C}"/>
+                <a16:creationId xmlns:a16="http://schemas.microsoft.com/office/drawing/2014/main" id="{08AFF53D-38B8-4E1D-85BC-B9BF6C891389}"/>
               </a:ext>
             </a:extLst>
           </p:cNvPr>
@@ -2531,7 +2652,7 @@
           <p:cNvPr id="5" name="">
             <a:extLst xmlns:a="http://schemas.openxmlformats.org/drawingml/2006/main">
               <a:ext uri="{FF2B5EF4-FFF2-40B4-BE49-F238E27FC236}">
-                <a16:creationId xmlns:a16="http://schemas.microsoft.com/office/drawing/2014/main" id="{579073B7-8261-41B6-BB39-89AA8F6E11D9}"/>
+                <a16:creationId xmlns:a16="http://schemas.microsoft.com/office/drawing/2014/main" id="{2C1EF796-016B-45F3-A5B1-DCFA8799972E}"/>
               </a:ext>
             </a:extLst>
           </p:cNvPr>
@@ -2568,7 +2689,7 @@
           <p:cNvPr id="6" name="">
             <a:extLst xmlns:a="http://schemas.openxmlformats.org/drawingml/2006/main">
               <a:ext uri="{FF2B5EF4-FFF2-40B4-BE49-F238E27FC236}">
-                <a16:creationId xmlns:a16="http://schemas.microsoft.com/office/drawing/2014/main" id="{963E9C87-817A-4608-A097-A44E2F5EECD1}"/>
+                <a16:creationId xmlns:a16="http://schemas.microsoft.com/office/drawing/2014/main" id="{5F7BA109-4507-41F0-B2C5-6764820D21C6}"/>
               </a:ext>
             </a:extLst>
           </p:cNvPr>
@@ -2605,7 +2726,7 @@
           <p:cNvPr id="7" name="">
             <a:extLst xmlns:a="http://schemas.openxmlformats.org/drawingml/2006/main">
               <a:ext uri="{FF2B5EF4-FFF2-40B4-BE49-F238E27FC236}">
-                <a16:creationId xmlns:a16="http://schemas.microsoft.com/office/drawing/2014/main" id="{75BB9787-7EB3-49F5-9063-4784F16F8162}"/>
+                <a16:creationId xmlns:a16="http://schemas.microsoft.com/office/drawing/2014/main" id="{5E7B2D89-4324-48EA-B2A7-54E5C4AF4EDC}"/>
               </a:ext>
             </a:extLst>
           </p:cNvPr>
@@ -2642,7 +2763,7 @@
           <p:cNvPr id="8" name="">
             <a:extLst xmlns:a="http://schemas.openxmlformats.org/drawingml/2006/main">
               <a:ext uri="{FF2B5EF4-FFF2-40B4-BE49-F238E27FC236}">
-                <a16:creationId xmlns:a16="http://schemas.microsoft.com/office/drawing/2014/main" id="{B1864EFD-A2F6-4E52-8A1A-80D2BC0B88F2}"/>
+                <a16:creationId xmlns:a16="http://schemas.microsoft.com/office/drawing/2014/main" id="{58CD09DD-1C24-487A-8F0D-62BEF407F7BD}"/>
               </a:ext>
             </a:extLst>
           </p:cNvPr>
@@ -2679,7 +2800,7 @@
           <p:cNvPr id="9" name="">
             <a:extLst xmlns:a="http://schemas.openxmlformats.org/drawingml/2006/main">
               <a:ext uri="{FF2B5EF4-FFF2-40B4-BE49-F238E27FC236}">
-                <a16:creationId xmlns:a16="http://schemas.microsoft.com/office/drawing/2014/main" id="{AF2FE664-AAC2-4150-8EDB-E741797E735D}"/>
+                <a16:creationId xmlns:a16="http://schemas.microsoft.com/office/drawing/2014/main" id="{996FB239-2886-4DEA-BB76-2BDC4DFF9BEE}"/>
               </a:ext>
             </a:extLst>
           </p:cNvPr>
@@ -2714,7 +2835,7 @@
           <p:cNvPr id="10" name="">
             <a:extLst xmlns:a="http://schemas.openxmlformats.org/drawingml/2006/main">
               <a:ext uri="{FF2B5EF4-FFF2-40B4-BE49-F238E27FC236}">
-                <a16:creationId xmlns:a16="http://schemas.microsoft.com/office/drawing/2014/main" id="{C7DEE1ED-F31A-4C6C-BC2A-E2FE26E2272C}"/>
+                <a16:creationId xmlns:a16="http://schemas.microsoft.com/office/drawing/2014/main" id="{B4E252F1-4E10-4D69-9E59-2590BB59722C}"/>
               </a:ext>
             </a:extLst>
           </p:cNvPr>
@@ -2772,7 +2893,7 @@
           <p:cNvPr id="11" name="">
             <a:extLst xmlns:a="http://schemas.openxmlformats.org/drawingml/2006/main">
               <a:ext uri="{FF2B5EF4-FFF2-40B4-BE49-F238E27FC236}">
-                <a16:creationId xmlns:a16="http://schemas.microsoft.com/office/drawing/2014/main" id="{CD481D7A-AE49-4EE4-87D2-3611EBB99977}"/>
+                <a16:creationId xmlns:a16="http://schemas.microsoft.com/office/drawing/2014/main" id="{8CDE208E-A9A5-4C8A-A3FF-D2E396A3B0ED}"/>
               </a:ext>
             </a:extLst>
           </p:cNvPr>
@@ -2847,7 +2968,7 @@
           <p:cNvPr id="12" name="">
             <a:extLst xmlns:a="http://schemas.openxmlformats.org/drawingml/2006/main">
               <a:ext uri="{FF2B5EF4-FFF2-40B4-BE49-F238E27FC236}">
-                <a16:creationId xmlns:a16="http://schemas.microsoft.com/office/drawing/2014/main" id="{230848AB-D272-4F06-9F6F-4D3E384BA491}"/>
+                <a16:creationId xmlns:a16="http://schemas.microsoft.com/office/drawing/2014/main" id="{BA8C877C-855E-4A66-9290-7A378B6FAAFC}"/>
               </a:ext>
             </a:extLst>
           </p:cNvPr>
@@ -2922,7 +3043,7 @@
           <p:cNvPr id="13" name="">
             <a:extLst xmlns:a="http://schemas.openxmlformats.org/drawingml/2006/main">
               <a:ext uri="{FF2B5EF4-FFF2-40B4-BE49-F238E27FC236}">
-                <a16:creationId xmlns:a16="http://schemas.microsoft.com/office/drawing/2014/main" id="{06E96802-70D9-4CCD-9004-65ED763DCC5A}"/>
+                <a16:creationId xmlns:a16="http://schemas.microsoft.com/office/drawing/2014/main" id="{20208BCD-522C-401E-9462-2E62A49C15C0}"/>
               </a:ext>
             </a:extLst>
           </p:cNvPr>
@@ -2959,7 +3080,7 @@
           <p:cNvPr id="14" name="">
             <a:extLst xmlns:a="http://schemas.openxmlformats.org/drawingml/2006/main">
               <a:ext uri="{FF2B5EF4-FFF2-40B4-BE49-F238E27FC236}">
-                <a16:creationId xmlns:a16="http://schemas.microsoft.com/office/drawing/2014/main" id="{9F67B23D-D9C9-48EB-B690-30376987F23D}"/>
+                <a16:creationId xmlns:a16="http://schemas.microsoft.com/office/drawing/2014/main" id="{AA89B5D2-5596-40A6-8269-2D61A93FF174}"/>
               </a:ext>
             </a:extLst>
           </p:cNvPr>
@@ -3017,7 +3138,7 @@
           <p:cNvPr id="15" name="">
             <a:extLst xmlns:a="http://schemas.openxmlformats.org/drawingml/2006/main">
               <a:ext uri="{FF2B5EF4-FFF2-40B4-BE49-F238E27FC236}">
-                <a16:creationId xmlns:a16="http://schemas.microsoft.com/office/drawing/2014/main" id="{2ABAA598-E3F6-4C3A-A2B5-65C58D494FF0}"/>
+                <a16:creationId xmlns:a16="http://schemas.microsoft.com/office/drawing/2014/main" id="{226B9A8A-D3A5-4B3F-BA3D-1302A5B99144}"/>
               </a:ext>
             </a:extLst>
           </p:cNvPr>
@@ -3052,7 +3173,7 @@
           <p:cNvPr id="16" name="">
             <a:extLst xmlns:a="http://schemas.openxmlformats.org/drawingml/2006/main">
               <a:ext uri="{FF2B5EF4-FFF2-40B4-BE49-F238E27FC236}">
-                <a16:creationId xmlns:a16="http://schemas.microsoft.com/office/drawing/2014/main" id="{27029C60-BBC5-449D-BF37-4D44386C83AC}"/>
+                <a16:creationId xmlns:a16="http://schemas.microsoft.com/office/drawing/2014/main" id="{0BDEBC5C-195B-409B-98D9-ABDAEC7B759E}"/>
               </a:ext>
             </a:extLst>
           </p:cNvPr>
@@ -3087,7 +3208,7 @@
           <p:cNvPr id="17" name="">
             <a:extLst xmlns:a="http://schemas.openxmlformats.org/drawingml/2006/main">
               <a:ext uri="{FF2B5EF4-FFF2-40B4-BE49-F238E27FC236}">
-                <a16:creationId xmlns:a16="http://schemas.microsoft.com/office/drawing/2014/main" id="{44814FFA-4386-4976-B345-64DEADC69202}"/>
+                <a16:creationId xmlns:a16="http://schemas.microsoft.com/office/drawing/2014/main" id="{231F3E7E-E906-4357-A8AF-9251C3730681}"/>
               </a:ext>
             </a:extLst>
           </p:cNvPr>
@@ -3141,7 +3262,7 @@
           <p:cNvPr id="18" name="">
             <a:extLst xmlns:a="http://schemas.openxmlformats.org/drawingml/2006/main">
               <a:ext uri="{FF2B5EF4-FFF2-40B4-BE49-F238E27FC236}">
-                <a16:creationId xmlns:a16="http://schemas.microsoft.com/office/drawing/2014/main" id="{03B62286-81A8-4E57-8F06-435F69C7F99A}"/>
+                <a16:creationId xmlns:a16="http://schemas.microsoft.com/office/drawing/2014/main" id="{963FDB44-B527-4C30-B471-41676F15861E}"/>
               </a:ext>
             </a:extLst>
           </p:cNvPr>
@@ -3199,7 +3320,7 @@
           <p:cNvPr id="19" name="">
             <a:extLst xmlns:a="http://schemas.openxmlformats.org/drawingml/2006/main">
               <a:ext uri="{FF2B5EF4-FFF2-40B4-BE49-F238E27FC236}">
-                <a16:creationId xmlns:a16="http://schemas.microsoft.com/office/drawing/2014/main" id="{B2DCEBFA-2603-4F8D-A026-729AA62772CF}"/>
+                <a16:creationId xmlns:a16="http://schemas.microsoft.com/office/drawing/2014/main" id="{1C0978A5-38F9-440E-BC7A-9692AF80CFCD}"/>
               </a:ext>
             </a:extLst>
           </p:cNvPr>
@@ -3274,7 +3395,7 @@
           <p:cNvPr id="20" name="">
             <a:extLst xmlns:a="http://schemas.openxmlformats.org/drawingml/2006/main">
               <a:ext uri="{FF2B5EF4-FFF2-40B4-BE49-F238E27FC236}">
-                <a16:creationId xmlns:a16="http://schemas.microsoft.com/office/drawing/2014/main" id="{48DF6715-AFE9-47FA-87BE-574D2C9E6F7A}"/>
+                <a16:creationId xmlns:a16="http://schemas.microsoft.com/office/drawing/2014/main" id="{F78AD037-8C18-466C-8445-E0F801A8F2C2}"/>
               </a:ext>
             </a:extLst>
           </p:cNvPr>
@@ -3309,7 +3430,7 @@
           <p:cNvPr id="21" name="">
             <a:extLst xmlns:a="http://schemas.openxmlformats.org/drawingml/2006/main">
               <a:ext uri="{FF2B5EF4-FFF2-40B4-BE49-F238E27FC236}">
-                <a16:creationId xmlns:a16="http://schemas.microsoft.com/office/drawing/2014/main" id="{27B8BA6C-A49A-4AC3-8C96-CE6D4850A50C}"/>
+                <a16:creationId xmlns:a16="http://schemas.microsoft.com/office/drawing/2014/main" id="{5FF779EA-D611-4D73-A81C-35817CC1072A}"/>
               </a:ext>
             </a:extLst>
           </p:cNvPr>
@@ -3344,7 +3465,7 @@
           <p:cNvPr id="22" name="">
             <a:extLst xmlns:a="http://schemas.openxmlformats.org/drawingml/2006/main">
               <a:ext uri="{FF2B5EF4-FFF2-40B4-BE49-F238E27FC236}">
-                <a16:creationId xmlns:a16="http://schemas.microsoft.com/office/drawing/2014/main" id="{ADA6661D-6794-427D-BF38-E84D2B77B103}"/>
+                <a16:creationId xmlns:a16="http://schemas.microsoft.com/office/drawing/2014/main" id="{51C74B1E-A6FA-4FB2-A41C-5B908254C2E4}"/>
               </a:ext>
             </a:extLst>
           </p:cNvPr>
@@ -3398,7 +3519,7 @@
           <p:cNvPr id="23" name="">
             <a:extLst xmlns:a="http://schemas.openxmlformats.org/drawingml/2006/main">
               <a:ext uri="{FF2B5EF4-FFF2-40B4-BE49-F238E27FC236}">
-                <a16:creationId xmlns:a16="http://schemas.microsoft.com/office/drawing/2014/main" id="{D82C0B55-E8E9-48F0-8C6E-8D413BDD0E9B}"/>
+                <a16:creationId xmlns:a16="http://schemas.microsoft.com/office/drawing/2014/main" id="{FF8A330B-936D-4762-BC8C-C9A5CDD4F1B3}"/>
               </a:ext>
             </a:extLst>
           </p:cNvPr>
@@ -3456,7 +3577,7 @@
           <p:cNvPr id="24" name="">
             <a:extLst xmlns:a="http://schemas.openxmlformats.org/drawingml/2006/main">
               <a:ext uri="{FF2B5EF4-FFF2-40B4-BE49-F238E27FC236}">
-                <a16:creationId xmlns:a16="http://schemas.microsoft.com/office/drawing/2014/main" id="{B45CC6DC-BCE5-4770-B7CC-B0C70AB0DDCD}"/>
+                <a16:creationId xmlns:a16="http://schemas.microsoft.com/office/drawing/2014/main" id="{2BA80424-8163-46CB-A1A9-780A0331BBA4}"/>
               </a:ext>
             </a:extLst>
           </p:cNvPr>
@@ -3531,7 +3652,7 @@
           <p:cNvPr id="25" name="">
             <a:extLst xmlns:a="http://schemas.openxmlformats.org/drawingml/2006/main">
               <a:ext uri="{FF2B5EF4-FFF2-40B4-BE49-F238E27FC236}">
-                <a16:creationId xmlns:a16="http://schemas.microsoft.com/office/drawing/2014/main" id="{4C5225BB-C083-4254-ACEE-E4820AA78B3A}"/>
+                <a16:creationId xmlns:a16="http://schemas.microsoft.com/office/drawing/2014/main" id="{2B141C4A-9773-433A-A4B7-63FB7D4B6899}"/>
               </a:ext>
             </a:extLst>
           </p:cNvPr>
@@ -3566,7 +3687,7 @@
           <p:cNvPr id="26" name="">
             <a:extLst xmlns:a="http://schemas.openxmlformats.org/drawingml/2006/main">
               <a:ext uri="{FF2B5EF4-FFF2-40B4-BE49-F238E27FC236}">
-                <a16:creationId xmlns:a16="http://schemas.microsoft.com/office/drawing/2014/main" id="{53548352-02C0-4531-A017-4BFF9173D178}"/>
+                <a16:creationId xmlns:a16="http://schemas.microsoft.com/office/drawing/2014/main" id="{C9396F0A-8BF6-4DF2-B60B-1C06272709F4}"/>
               </a:ext>
             </a:extLst>
           </p:cNvPr>
@@ -3601,7 +3722,7 @@
           <p:cNvPr id="27" name="">
             <a:extLst xmlns:a="http://schemas.openxmlformats.org/drawingml/2006/main">
               <a:ext uri="{FF2B5EF4-FFF2-40B4-BE49-F238E27FC236}">
-                <a16:creationId xmlns:a16="http://schemas.microsoft.com/office/drawing/2014/main" id="{3A7FF1A6-4F9B-439A-9482-BFB5F921C164}"/>
+                <a16:creationId xmlns:a16="http://schemas.microsoft.com/office/drawing/2014/main" id="{AF436F3B-6A5D-4D81-BC82-92AE9B7480D9}"/>
               </a:ext>
             </a:extLst>
           </p:cNvPr>
@@ -3655,7 +3776,7 @@
           <p:cNvPr id="28" name="">
             <a:extLst xmlns:a="http://schemas.openxmlformats.org/drawingml/2006/main">
               <a:ext uri="{FF2B5EF4-FFF2-40B4-BE49-F238E27FC236}">
-                <a16:creationId xmlns:a16="http://schemas.microsoft.com/office/drawing/2014/main" id="{FDD96450-04B1-4450-A255-B3F90ADAA3F0}"/>
+                <a16:creationId xmlns:a16="http://schemas.microsoft.com/office/drawing/2014/main" id="{230AE716-6A7A-4DE4-9BDD-229903FC4D87}"/>
               </a:ext>
             </a:extLst>
           </p:cNvPr>
@@ -3713,7 +3834,7 @@
           <p:cNvPr id="29" name="">
             <a:extLst xmlns:a="http://schemas.openxmlformats.org/drawingml/2006/main">
               <a:ext uri="{FF2B5EF4-FFF2-40B4-BE49-F238E27FC236}">
-                <a16:creationId xmlns:a16="http://schemas.microsoft.com/office/drawing/2014/main" id="{59D1D6AD-61CE-48FC-B208-9E4AD8E88E72}"/>
+                <a16:creationId xmlns:a16="http://schemas.microsoft.com/office/drawing/2014/main" id="{18878B55-CD42-47D8-866F-CC5B92277377}"/>
               </a:ext>
             </a:extLst>
           </p:cNvPr>
@@ -3788,7 +3909,7 @@
           <p:cNvPr id="30" name="">
             <a:extLst xmlns:a="http://schemas.openxmlformats.org/drawingml/2006/main">
               <a:ext uri="{FF2B5EF4-FFF2-40B4-BE49-F238E27FC236}">
-                <a16:creationId xmlns:a16="http://schemas.microsoft.com/office/drawing/2014/main" id="{3AF87737-3E64-43EF-924B-CB0DFA2A8243}"/>
+                <a16:creationId xmlns:a16="http://schemas.microsoft.com/office/drawing/2014/main" id="{1682B77D-6A66-4037-AA92-B490EEEA2BC1}"/>
               </a:ext>
             </a:extLst>
           </p:cNvPr>
@@ -3823,7 +3944,7 @@
           <p:cNvPr id="31" name="">
             <a:extLst xmlns:a="http://schemas.openxmlformats.org/drawingml/2006/main">
               <a:ext uri="{FF2B5EF4-FFF2-40B4-BE49-F238E27FC236}">
-                <a16:creationId xmlns:a16="http://schemas.microsoft.com/office/drawing/2014/main" id="{094573C2-8358-42AC-B79A-0B5B3BACBD8A}"/>
+                <a16:creationId xmlns:a16="http://schemas.microsoft.com/office/drawing/2014/main" id="{48B6F8D9-BC55-47DB-A9C0-37A9407BE514}"/>
               </a:ext>
             </a:extLst>
           </p:cNvPr>
@@ -3858,7 +3979,7 @@
           <p:cNvPr id="32" name="">
             <a:extLst xmlns:a="http://schemas.openxmlformats.org/drawingml/2006/main">
               <a:ext uri="{FF2B5EF4-FFF2-40B4-BE49-F238E27FC236}">
-                <a16:creationId xmlns:a16="http://schemas.microsoft.com/office/drawing/2014/main" id="{10B01B08-299D-4619-ADAB-769A96531F33}"/>
+                <a16:creationId xmlns:a16="http://schemas.microsoft.com/office/drawing/2014/main" id="{207BDFC5-5A5C-487F-AA79-8384E9D8CA2B}"/>
               </a:ext>
             </a:extLst>
           </p:cNvPr>
@@ -3912,7 +4033,7 @@
           <p:cNvPr id="33" name="">
             <a:extLst xmlns:a="http://schemas.openxmlformats.org/drawingml/2006/main">
               <a:ext uri="{FF2B5EF4-FFF2-40B4-BE49-F238E27FC236}">
-                <a16:creationId xmlns:a16="http://schemas.microsoft.com/office/drawing/2014/main" id="{A4EC46A9-F2EA-4861-8551-D7821DC9BE2D}"/>
+                <a16:creationId xmlns:a16="http://schemas.microsoft.com/office/drawing/2014/main" id="{A29302B8-6088-4B18-AD3D-04512E708277}"/>
               </a:ext>
             </a:extLst>
           </p:cNvPr>
@@ -3970,7 +4091,7 @@
           <p:cNvPr id="34" name="">
             <a:extLst xmlns:a="http://schemas.openxmlformats.org/drawingml/2006/main">
               <a:ext uri="{FF2B5EF4-FFF2-40B4-BE49-F238E27FC236}">
-                <a16:creationId xmlns:a16="http://schemas.microsoft.com/office/drawing/2014/main" id="{D2E32441-4FC4-4E7F-A75E-93C7BD78577C}"/>
+                <a16:creationId xmlns:a16="http://schemas.microsoft.com/office/drawing/2014/main" id="{6BFEB4BB-3F72-41F0-946B-4531E99C5556}"/>
               </a:ext>
             </a:extLst>
           </p:cNvPr>
@@ -4028,7 +4149,7 @@
           <p:cNvPr id="35" name="">
             <a:extLst xmlns:a="http://schemas.openxmlformats.org/drawingml/2006/main">
               <a:ext uri="{FF2B5EF4-FFF2-40B4-BE49-F238E27FC236}">
-                <a16:creationId xmlns:a16="http://schemas.microsoft.com/office/drawing/2014/main" id="{6997A693-E7FB-40F5-B2BE-20C1D425DAEC}"/>
+                <a16:creationId xmlns:a16="http://schemas.microsoft.com/office/drawing/2014/main" id="{E659ED19-82AE-4F12-845C-46E49E7C94DC}"/>
               </a:ext>
             </a:extLst>
           </p:cNvPr>
@@ -4063,7 +4184,7 @@
           <p:cNvPr id="36" name="">
             <a:extLst xmlns:a="http://schemas.openxmlformats.org/drawingml/2006/main">
               <a:ext uri="{FF2B5EF4-FFF2-40B4-BE49-F238E27FC236}">
-                <a16:creationId xmlns:a16="http://schemas.microsoft.com/office/drawing/2014/main" id="{7FE7DAD8-9073-48B5-8A00-C40BC6FAFA01}"/>
+                <a16:creationId xmlns:a16="http://schemas.microsoft.com/office/drawing/2014/main" id="{EFDF3EA9-B55E-455E-813B-435951FF3A34}"/>
               </a:ext>
             </a:extLst>
           </p:cNvPr>
@@ -4098,7 +4219,7 @@
           <p:cNvPr id="37" name="">
             <a:extLst xmlns:a="http://schemas.openxmlformats.org/drawingml/2006/main">
               <a:ext uri="{FF2B5EF4-FFF2-40B4-BE49-F238E27FC236}">
-                <a16:creationId xmlns:a16="http://schemas.microsoft.com/office/drawing/2014/main" id="{9D3A45F3-1CAF-4E19-9B61-33F037CB9E24}"/>
+                <a16:creationId xmlns:a16="http://schemas.microsoft.com/office/drawing/2014/main" id="{714D8E1F-71AB-41E4-AF98-4CC050FDB2AC}"/>
               </a:ext>
             </a:extLst>
           </p:cNvPr>
@@ -4133,7 +4254,7 @@
           <p:cNvPr id="38" name="">
             <a:extLst xmlns:a="http://schemas.openxmlformats.org/drawingml/2006/main">
               <a:ext uri="{FF2B5EF4-FFF2-40B4-BE49-F238E27FC236}">
-                <a16:creationId xmlns:a16="http://schemas.microsoft.com/office/drawing/2014/main" id="{E59BAF55-3911-4E87-BEE5-0100242B8E3D}"/>
+                <a16:creationId xmlns:a16="http://schemas.microsoft.com/office/drawing/2014/main" id="{2A9166CB-15A2-40C2-9621-817BF5FC3278}"/>
               </a:ext>
             </a:extLst>
           </p:cNvPr>
@@ -4187,7 +4308,7 @@
           <p:cNvPr id="39" name="">
             <a:extLst xmlns:a="http://schemas.openxmlformats.org/drawingml/2006/main">
               <a:ext uri="{FF2B5EF4-FFF2-40B4-BE49-F238E27FC236}">
-                <a16:creationId xmlns:a16="http://schemas.microsoft.com/office/drawing/2014/main" id="{9B7431D5-B87A-421F-91A5-0F5DAD4EB2FF}"/>
+                <a16:creationId xmlns:a16="http://schemas.microsoft.com/office/drawing/2014/main" id="{EC2288C8-2AEC-42A5-9DBA-F90393FEBE20}"/>
               </a:ext>
             </a:extLst>
           </p:cNvPr>
@@ -4241,7 +4362,7 @@
           <p:cNvPr id="40" name="">
             <a:extLst xmlns:a="http://schemas.openxmlformats.org/drawingml/2006/main">
               <a:ext uri="{FF2B5EF4-FFF2-40B4-BE49-F238E27FC236}">
-                <a16:creationId xmlns:a16="http://schemas.microsoft.com/office/drawing/2014/main" id="{C96E2656-8A07-45DE-B6F3-1226AD1B8CE9}"/>
+                <a16:creationId xmlns:a16="http://schemas.microsoft.com/office/drawing/2014/main" id="{1402C814-783C-4990-AAAD-E0AB371F0EC2}"/>
               </a:ext>
             </a:extLst>
           </p:cNvPr>
@@ -4297,7 +4418,7 @@
     </p:spTree>
     <p:extLst>
       <p:ext uri="{BB962C8B-B14F-4D97-AF65-F5344CB8AC3E}">
-        <p14:creationId xmlns:p14="http://schemas.microsoft.com/office/powerpoint/2010/main" val="779714260"/>
+        <p14:creationId xmlns:p14="http://schemas.microsoft.com/office/powerpoint/2010/main" val="990912654"/>
       </p:ext>
     </p:extLst>
   </p:cSld>
@@ -4328,7 +4449,7 @@
           <p:cNvPr id="1" name="Slide Number Placeholder 5">
             <a:extLst xmlns:a="http://schemas.openxmlformats.org/drawingml/2006/main">
               <a:ext uri="{FF2B5EF4-FFF2-40B4-BE49-F238E27FC236}">
-                <a16:creationId xmlns:a16="http://schemas.microsoft.com/office/drawing/2014/main" id="{E12CE447-476B-4BAE-A1FF-E669E79965E6}"/>
+                <a16:creationId xmlns:a16="http://schemas.microsoft.com/office/drawing/2014/main" id="{EDD0F201-AE24-4D54-ACE2-5F86EBC94A0A}"/>
               </a:ext>
             </a:extLst>
           </p:cNvPr>
@@ -4364,7 +4485,7 @@
           <p:nvPr/>
         </p:nvPicPr>
         <p:blipFill>
-          <a:blip xmlns:r="http://schemas.openxmlformats.org/officeDocument/2006/relationships" xmlns:a="http://schemas.openxmlformats.org/drawingml/2006/main" r:embed="Ra3610326cacf46f5"/>
+          <a:blip xmlns:r="http://schemas.openxmlformats.org/officeDocument/2006/relationships" xmlns:a="http://schemas.openxmlformats.org/drawingml/2006/main" r:embed="R8f4c2bb4e8704639"/>
           <a:srcRect xmlns:a="http://schemas.openxmlformats.org/drawingml/2006/main" l="0" t="21875" r="0" b="21875"/>
           <a:stretch xmlns:a="http://schemas.openxmlformats.org/drawingml/2006/main">
             <a:fillRect l="0" t="0" r="0" b="0"/>
@@ -4385,7 +4506,7 @@
           <p:cNvPr id="3" name="">
             <a:extLst xmlns:a="http://schemas.openxmlformats.org/drawingml/2006/main">
               <a:ext uri="{FF2B5EF4-FFF2-40B4-BE49-F238E27FC236}">
-                <a16:creationId xmlns:a16="http://schemas.microsoft.com/office/drawing/2014/main" id="{6956BC0F-7971-4457-B954-C616E28E1611}"/>
+                <a16:creationId xmlns:a16="http://schemas.microsoft.com/office/drawing/2014/main" id="{5C2C186F-F9DE-42F8-8C91-6F2F19CA8E9E}"/>
               </a:ext>
             </a:extLst>
           </p:cNvPr>
@@ -4420,7 +4541,7 @@
           <p:cNvPr id="4" name="">
             <a:extLst xmlns:a="http://schemas.openxmlformats.org/drawingml/2006/main">
               <a:ext uri="{FF2B5EF4-FFF2-40B4-BE49-F238E27FC236}">
-                <a16:creationId xmlns:a16="http://schemas.microsoft.com/office/drawing/2014/main" id="{5264BAB2-84B6-436D-9ADE-5F0561432059}"/>
+                <a16:creationId xmlns:a16="http://schemas.microsoft.com/office/drawing/2014/main" id="{14FB3FF9-3CA9-433F-A6C4-291F83CFB6A0}"/>
               </a:ext>
             </a:extLst>
           </p:cNvPr>
@@ -4455,7 +4576,7 @@
           <p:cNvPr id="5" name="">
             <a:extLst xmlns:a="http://schemas.openxmlformats.org/drawingml/2006/main">
               <a:ext uri="{FF2B5EF4-FFF2-40B4-BE49-F238E27FC236}">
-                <a16:creationId xmlns:a16="http://schemas.microsoft.com/office/drawing/2014/main" id="{0A0C9BFF-D65E-45A2-AAEE-7940D739C0AE}"/>
+                <a16:creationId xmlns:a16="http://schemas.microsoft.com/office/drawing/2014/main" id="{A40C7813-88F2-45BA-80CB-661BDAFBF491}"/>
               </a:ext>
             </a:extLst>
           </p:cNvPr>
@@ -4492,7 +4613,7 @@
           <p:cNvPr id="6" name="">
             <a:extLst xmlns:a="http://schemas.openxmlformats.org/drawingml/2006/main">
               <a:ext uri="{FF2B5EF4-FFF2-40B4-BE49-F238E27FC236}">
-                <a16:creationId xmlns:a16="http://schemas.microsoft.com/office/drawing/2014/main" id="{CA1AD432-EEAB-4DF4-AEFD-71C6415C77D4}"/>
+                <a16:creationId xmlns:a16="http://schemas.microsoft.com/office/drawing/2014/main" id="{758BEC56-B363-4EF5-AB03-9B09621C8966}"/>
               </a:ext>
             </a:extLst>
           </p:cNvPr>
@@ -4529,7 +4650,7 @@
           <p:cNvPr id="7" name="">
             <a:extLst xmlns:a="http://schemas.openxmlformats.org/drawingml/2006/main">
               <a:ext uri="{FF2B5EF4-FFF2-40B4-BE49-F238E27FC236}">
-                <a16:creationId xmlns:a16="http://schemas.microsoft.com/office/drawing/2014/main" id="{E897191F-1EAD-47B0-B702-9837419DE286}"/>
+                <a16:creationId xmlns:a16="http://schemas.microsoft.com/office/drawing/2014/main" id="{748C9A2B-3A37-42A4-B6C9-F8999F1B6555}"/>
               </a:ext>
             </a:extLst>
           </p:cNvPr>
@@ -4566,7 +4687,7 @@
           <p:cNvPr id="8" name="">
             <a:extLst xmlns:a="http://schemas.openxmlformats.org/drawingml/2006/main">
               <a:ext uri="{FF2B5EF4-FFF2-40B4-BE49-F238E27FC236}">
-                <a16:creationId xmlns:a16="http://schemas.microsoft.com/office/drawing/2014/main" id="{435DCA43-07B6-437F-9C7C-CA5352376EBA}"/>
+                <a16:creationId xmlns:a16="http://schemas.microsoft.com/office/drawing/2014/main" id="{92A3C4F6-E031-4D94-AE75-4A0FECF6358A}"/>
               </a:ext>
             </a:extLst>
           </p:cNvPr>
@@ -4603,7 +4724,7 @@
           <p:cNvPr id="9" name="">
             <a:extLst xmlns:a="http://schemas.openxmlformats.org/drawingml/2006/main">
               <a:ext uri="{FF2B5EF4-FFF2-40B4-BE49-F238E27FC236}">
-                <a16:creationId xmlns:a16="http://schemas.microsoft.com/office/drawing/2014/main" id="{8578DF86-6C0A-4230-9442-B1147A9F18EE}"/>
+                <a16:creationId xmlns:a16="http://schemas.microsoft.com/office/drawing/2014/main" id="{D539E2C8-82B2-4CC6-B021-6DFD15A61C0E}"/>
               </a:ext>
             </a:extLst>
           </p:cNvPr>
@@ -4661,7 +4782,7 @@
           <p:cNvPr id="10" name="">
             <a:extLst xmlns:a="http://schemas.openxmlformats.org/drawingml/2006/main">
               <a:ext uri="{FF2B5EF4-FFF2-40B4-BE49-F238E27FC236}">
-                <a16:creationId xmlns:a16="http://schemas.microsoft.com/office/drawing/2014/main" id="{11797080-E472-456C-A2A4-EC0D82BF21B0}"/>
+                <a16:creationId xmlns:a16="http://schemas.microsoft.com/office/drawing/2014/main" id="{9ED56AF3-1664-448A-AE88-BBC6B224C70A}"/>
               </a:ext>
             </a:extLst>
           </p:cNvPr>
@@ -4709,7 +4830,7 @@
                   <a:srgbClr val="0F5B3F"/>
                 </a:solidFill>
               </a:rPr>
-              <a:t>10 / 12</a:t>
+              <a:t>10 / 13</a:t>
             </a:r>
           </a:p>
         </p:txBody>
@@ -4719,7 +4840,7 @@
           <p:cNvPr id="11" name="">
             <a:extLst xmlns:a="http://schemas.openxmlformats.org/drawingml/2006/main">
               <a:ext uri="{FF2B5EF4-FFF2-40B4-BE49-F238E27FC236}">
-                <a16:creationId xmlns:a16="http://schemas.microsoft.com/office/drawing/2014/main" id="{DCDEAAA6-FFE8-440D-BC2A-BA2400BD1EFC}"/>
+                <a16:creationId xmlns:a16="http://schemas.microsoft.com/office/drawing/2014/main" id="{DEE0FBE9-CFCC-4D74-A21B-2DFDE47F5837}"/>
               </a:ext>
             </a:extLst>
           </p:cNvPr>
@@ -4754,7 +4875,7 @@
           <p:cNvPr id="12" name="">
             <a:extLst xmlns:a="http://schemas.openxmlformats.org/drawingml/2006/main">
               <a:ext uri="{FF2B5EF4-FFF2-40B4-BE49-F238E27FC236}">
-                <a16:creationId xmlns:a16="http://schemas.microsoft.com/office/drawing/2014/main" id="{B4FB6497-5B6B-4142-AE33-1EE6824D0EAA}"/>
+                <a16:creationId xmlns:a16="http://schemas.microsoft.com/office/drawing/2014/main" id="{E03007F1-C921-491A-9600-937599A1D3CB}"/>
               </a:ext>
             </a:extLst>
           </p:cNvPr>
@@ -4787,7 +4908,7 @@
           <p:cNvPr id="13" name="">
             <a:extLst xmlns:a="http://schemas.openxmlformats.org/drawingml/2006/main">
               <a:ext uri="{FF2B5EF4-FFF2-40B4-BE49-F238E27FC236}">
-                <a16:creationId xmlns:a16="http://schemas.microsoft.com/office/drawing/2014/main" id="{AE0BEA8A-627A-4540-BCEA-70E1601824CD}"/>
+                <a16:creationId xmlns:a16="http://schemas.microsoft.com/office/drawing/2014/main" id="{4EB4FA04-3688-4227-8E1D-7352DDCAE377}"/>
               </a:ext>
             </a:extLst>
           </p:cNvPr>
@@ -4862,7 +4983,7 @@
           <p:cNvPr id="14" name="">
             <a:extLst xmlns:a="http://schemas.openxmlformats.org/drawingml/2006/main">
               <a:ext uri="{FF2B5EF4-FFF2-40B4-BE49-F238E27FC236}">
-                <a16:creationId xmlns:a16="http://schemas.microsoft.com/office/drawing/2014/main" id="{0D9F5C67-4D06-4962-A02B-B2DEF6DC2560}"/>
+                <a16:creationId xmlns:a16="http://schemas.microsoft.com/office/drawing/2014/main" id="{0EDA75AF-3829-4616-860D-5765A1F48254}"/>
               </a:ext>
             </a:extLst>
           </p:cNvPr>
@@ -4899,7 +5020,7 @@
           <p:cNvPr id="15" name="">
             <a:extLst xmlns:a="http://schemas.openxmlformats.org/drawingml/2006/main">
               <a:ext uri="{FF2B5EF4-FFF2-40B4-BE49-F238E27FC236}">
-                <a16:creationId xmlns:a16="http://schemas.microsoft.com/office/drawing/2014/main" id="{B2797F29-3082-43BF-B39D-FDFFE6B8BB25}"/>
+                <a16:creationId xmlns:a16="http://schemas.microsoft.com/office/drawing/2014/main" id="{1755CA7D-AE0A-46F4-A425-D7DA0C6580AA}"/>
               </a:ext>
             </a:extLst>
           </p:cNvPr>
@@ -4934,7 +5055,7 @@
           <p:cNvPr id="16" name="">
             <a:extLst xmlns:a="http://schemas.openxmlformats.org/drawingml/2006/main">
               <a:ext uri="{FF2B5EF4-FFF2-40B4-BE49-F238E27FC236}">
-                <a16:creationId xmlns:a16="http://schemas.microsoft.com/office/drawing/2014/main" id="{1344D1EF-2EFB-42A1-9C0F-FBC7AEAAC878}"/>
+                <a16:creationId xmlns:a16="http://schemas.microsoft.com/office/drawing/2014/main" id="{31EEE965-81CD-4771-93E2-D772F8A78BEF}"/>
               </a:ext>
             </a:extLst>
           </p:cNvPr>
@@ -4992,7 +5113,7 @@
           <p:cNvPr id="17" name="">
             <a:extLst xmlns:a="http://schemas.openxmlformats.org/drawingml/2006/main">
               <a:ext uri="{FF2B5EF4-FFF2-40B4-BE49-F238E27FC236}">
-                <a16:creationId xmlns:a16="http://schemas.microsoft.com/office/drawing/2014/main" id="{134246AF-1392-4DEA-B373-5DFB9F63C18F}"/>
+                <a16:creationId xmlns:a16="http://schemas.microsoft.com/office/drawing/2014/main" id="{2137693F-FA99-47FA-A238-6E49D1014AA5}"/>
               </a:ext>
             </a:extLst>
           </p:cNvPr>
@@ -5084,7 +5205,7 @@
           <p:cNvPr id="18" name="">
             <a:extLst xmlns:a="http://schemas.openxmlformats.org/drawingml/2006/main">
               <a:ext uri="{FF2B5EF4-FFF2-40B4-BE49-F238E27FC236}">
-                <a16:creationId xmlns:a16="http://schemas.microsoft.com/office/drawing/2014/main" id="{05A4C597-E516-4A1F-9E0F-D4B3C77B9D65}"/>
+                <a16:creationId xmlns:a16="http://schemas.microsoft.com/office/drawing/2014/main" id="{A0077404-7313-4C8D-9372-6D2A48286F91}"/>
               </a:ext>
             </a:extLst>
           </p:cNvPr>
@@ -5121,7 +5242,7 @@
           <p:cNvPr id="19" name="">
             <a:extLst xmlns:a="http://schemas.openxmlformats.org/drawingml/2006/main">
               <a:ext uri="{FF2B5EF4-FFF2-40B4-BE49-F238E27FC236}">
-                <a16:creationId xmlns:a16="http://schemas.microsoft.com/office/drawing/2014/main" id="{928F6EA5-D76F-4F52-8F71-511BABC6F66B}"/>
+                <a16:creationId xmlns:a16="http://schemas.microsoft.com/office/drawing/2014/main" id="{33FE8ED9-AC90-4133-BE9E-09C6FFE19B7E}"/>
               </a:ext>
             </a:extLst>
           </p:cNvPr>
@@ -5156,7 +5277,7 @@
           <p:cNvPr id="20" name="">
             <a:extLst xmlns:a="http://schemas.openxmlformats.org/drawingml/2006/main">
               <a:ext uri="{FF2B5EF4-FFF2-40B4-BE49-F238E27FC236}">
-                <a16:creationId xmlns:a16="http://schemas.microsoft.com/office/drawing/2014/main" id="{F60EDD69-CC40-4599-A732-C1B1CFE4C1F5}"/>
+                <a16:creationId xmlns:a16="http://schemas.microsoft.com/office/drawing/2014/main" id="{4449913B-D844-41DC-859E-436E723535CF}"/>
               </a:ext>
             </a:extLst>
           </p:cNvPr>
@@ -5214,7 +5335,7 @@
           <p:cNvPr id="21" name="">
             <a:extLst xmlns:a="http://schemas.openxmlformats.org/drawingml/2006/main">
               <a:ext uri="{FF2B5EF4-FFF2-40B4-BE49-F238E27FC236}">
-                <a16:creationId xmlns:a16="http://schemas.microsoft.com/office/drawing/2014/main" id="{ED1A6053-2448-4E1E-BC07-BAF4259885DD}"/>
+                <a16:creationId xmlns:a16="http://schemas.microsoft.com/office/drawing/2014/main" id="{D25CF05D-56D1-463C-965C-F32D592C873D}"/>
               </a:ext>
             </a:extLst>
           </p:cNvPr>
@@ -5306,7 +5427,7 @@
           <p:cNvPr id="22" name="">
             <a:extLst xmlns:a="http://schemas.openxmlformats.org/drawingml/2006/main">
               <a:ext uri="{FF2B5EF4-FFF2-40B4-BE49-F238E27FC236}">
-                <a16:creationId xmlns:a16="http://schemas.microsoft.com/office/drawing/2014/main" id="{C04640D6-015F-421B-8D4F-679660949209}"/>
+                <a16:creationId xmlns:a16="http://schemas.microsoft.com/office/drawing/2014/main" id="{A6556331-2E40-4C3A-8499-AF333B8E21B0}"/>
               </a:ext>
             </a:extLst>
           </p:cNvPr>
@@ -5343,7 +5464,7 @@
           <p:cNvPr id="23" name="">
             <a:extLst xmlns:a="http://schemas.openxmlformats.org/drawingml/2006/main">
               <a:ext uri="{FF2B5EF4-FFF2-40B4-BE49-F238E27FC236}">
-                <a16:creationId xmlns:a16="http://schemas.microsoft.com/office/drawing/2014/main" id="{62AC9757-2935-48B4-AA79-596C940503D5}"/>
+                <a16:creationId xmlns:a16="http://schemas.microsoft.com/office/drawing/2014/main" id="{E28781FB-985D-43E6-9322-5C92147DD588}"/>
               </a:ext>
             </a:extLst>
           </p:cNvPr>
@@ -5378,7 +5499,7 @@
           <p:cNvPr id="24" name="">
             <a:extLst xmlns:a="http://schemas.openxmlformats.org/drawingml/2006/main">
               <a:ext uri="{FF2B5EF4-FFF2-40B4-BE49-F238E27FC236}">
-                <a16:creationId xmlns:a16="http://schemas.microsoft.com/office/drawing/2014/main" id="{31390366-C997-4E8F-B848-5FDC44871B44}"/>
+                <a16:creationId xmlns:a16="http://schemas.microsoft.com/office/drawing/2014/main" id="{FDFCD9D8-A498-4F25-9E68-1AAF9D115186}"/>
               </a:ext>
             </a:extLst>
           </p:cNvPr>
@@ -5436,7 +5557,7 @@
           <p:cNvPr id="25" name="">
             <a:extLst xmlns:a="http://schemas.openxmlformats.org/drawingml/2006/main">
               <a:ext uri="{FF2B5EF4-FFF2-40B4-BE49-F238E27FC236}">
-                <a16:creationId xmlns:a16="http://schemas.microsoft.com/office/drawing/2014/main" id="{9B8CC9E8-2B7F-4D23-B0D1-F401AD4A03FB}"/>
+                <a16:creationId xmlns:a16="http://schemas.microsoft.com/office/drawing/2014/main" id="{D15D1A78-A30E-4AB6-90F9-EADAAC5A9A4E}"/>
               </a:ext>
             </a:extLst>
           </p:cNvPr>
@@ -5528,7 +5649,7 @@
           <p:cNvPr id="26" name="">
             <a:extLst xmlns:a="http://schemas.openxmlformats.org/drawingml/2006/main">
               <a:ext uri="{FF2B5EF4-FFF2-40B4-BE49-F238E27FC236}">
-                <a16:creationId xmlns:a16="http://schemas.microsoft.com/office/drawing/2014/main" id="{FC3D7DDE-3C37-4E31-BB70-4120809DC8C9}"/>
+                <a16:creationId xmlns:a16="http://schemas.microsoft.com/office/drawing/2014/main" id="{DD2218AF-D81E-44EF-AEF6-EC36B6C30E89}"/>
               </a:ext>
             </a:extLst>
           </p:cNvPr>
@@ -5565,7 +5686,7 @@
           <p:cNvPr id="27" name="">
             <a:extLst xmlns:a="http://schemas.openxmlformats.org/drawingml/2006/main">
               <a:ext uri="{FF2B5EF4-FFF2-40B4-BE49-F238E27FC236}">
-                <a16:creationId xmlns:a16="http://schemas.microsoft.com/office/drawing/2014/main" id="{82BB3830-8E41-425C-AB6A-6AA71DDF621C}"/>
+                <a16:creationId xmlns:a16="http://schemas.microsoft.com/office/drawing/2014/main" id="{FCA40C32-52CE-42F1-B8E2-570A633D06C0}"/>
               </a:ext>
             </a:extLst>
           </p:cNvPr>
@@ -5600,7 +5721,7 @@
           <p:cNvPr id="28" name="">
             <a:extLst xmlns:a="http://schemas.openxmlformats.org/drawingml/2006/main">
               <a:ext uri="{FF2B5EF4-FFF2-40B4-BE49-F238E27FC236}">
-                <a16:creationId xmlns:a16="http://schemas.microsoft.com/office/drawing/2014/main" id="{1CD61796-2E2D-4AD9-9348-2F2702DBD5B9}"/>
+                <a16:creationId xmlns:a16="http://schemas.microsoft.com/office/drawing/2014/main" id="{8B9F829B-E818-4906-8882-0E896D88DE4C}"/>
               </a:ext>
             </a:extLst>
           </p:cNvPr>
@@ -5658,7 +5779,7 @@
           <p:cNvPr id="29" name="">
             <a:extLst xmlns:a="http://schemas.openxmlformats.org/drawingml/2006/main">
               <a:ext uri="{FF2B5EF4-FFF2-40B4-BE49-F238E27FC236}">
-                <a16:creationId xmlns:a16="http://schemas.microsoft.com/office/drawing/2014/main" id="{417128D8-4258-44EE-A4FA-A1066AE49B91}"/>
+                <a16:creationId xmlns:a16="http://schemas.microsoft.com/office/drawing/2014/main" id="{EE22054F-CF0D-487D-8920-78CF8767E111}"/>
               </a:ext>
             </a:extLst>
           </p:cNvPr>
@@ -5733,7 +5854,7 @@
           <p:cNvPr id="30" name="">
             <a:extLst xmlns:a="http://schemas.openxmlformats.org/drawingml/2006/main">
               <a:ext uri="{FF2B5EF4-FFF2-40B4-BE49-F238E27FC236}">
-                <a16:creationId xmlns:a16="http://schemas.microsoft.com/office/drawing/2014/main" id="{C52394EC-0670-41A7-87D0-E98B185B7BD7}"/>
+                <a16:creationId xmlns:a16="http://schemas.microsoft.com/office/drawing/2014/main" id="{23CF21A8-F882-4B2E-8914-FB8A298C430B}"/>
               </a:ext>
             </a:extLst>
           </p:cNvPr>
@@ -5770,7 +5891,7 @@
           <p:cNvPr id="31" name="">
             <a:extLst xmlns:a="http://schemas.openxmlformats.org/drawingml/2006/main">
               <a:ext uri="{FF2B5EF4-FFF2-40B4-BE49-F238E27FC236}">
-                <a16:creationId xmlns:a16="http://schemas.microsoft.com/office/drawing/2014/main" id="{3CB55DB7-AA4C-45E9-A3A1-6E62EF679DF0}"/>
+                <a16:creationId xmlns:a16="http://schemas.microsoft.com/office/drawing/2014/main" id="{8DA593CD-B4B2-460B-8FE0-9249E312E80F}"/>
               </a:ext>
             </a:extLst>
           </p:cNvPr>
@@ -5805,7 +5926,7 @@
           <p:cNvPr id="32" name="">
             <a:extLst xmlns:a="http://schemas.openxmlformats.org/drawingml/2006/main">
               <a:ext uri="{FF2B5EF4-FFF2-40B4-BE49-F238E27FC236}">
-                <a16:creationId xmlns:a16="http://schemas.microsoft.com/office/drawing/2014/main" id="{501F7918-CC4F-4F09-B056-6678F6EE6443}"/>
+                <a16:creationId xmlns:a16="http://schemas.microsoft.com/office/drawing/2014/main" id="{FE2DDF3D-B94E-4971-9F36-40993C1EE0D8}"/>
               </a:ext>
             </a:extLst>
           </p:cNvPr>
@@ -5863,7 +5984,7 @@
           <p:cNvPr id="33" name="">
             <a:extLst xmlns:a="http://schemas.openxmlformats.org/drawingml/2006/main">
               <a:ext uri="{FF2B5EF4-FFF2-40B4-BE49-F238E27FC236}">
-                <a16:creationId xmlns:a16="http://schemas.microsoft.com/office/drawing/2014/main" id="{5606EC4B-786F-41D0-9800-8F542662B54E}"/>
+                <a16:creationId xmlns:a16="http://schemas.microsoft.com/office/drawing/2014/main" id="{C3ED95E3-68B2-45A3-8A76-92AA01933ECE}"/>
               </a:ext>
             </a:extLst>
           </p:cNvPr>
@@ -5938,7 +6059,7 @@
           <p:cNvPr id="34" name="">
             <a:extLst xmlns:a="http://schemas.openxmlformats.org/drawingml/2006/main">
               <a:ext uri="{FF2B5EF4-FFF2-40B4-BE49-F238E27FC236}">
-                <a16:creationId xmlns:a16="http://schemas.microsoft.com/office/drawing/2014/main" id="{1907A304-3B5E-4AEB-B074-176A3ECD9632}"/>
+                <a16:creationId xmlns:a16="http://schemas.microsoft.com/office/drawing/2014/main" id="{24F6C797-F103-4B04-8DC4-FDBC99A8141D}"/>
               </a:ext>
             </a:extLst>
           </p:cNvPr>
@@ -5973,7 +6094,7 @@
           <p:cNvPr id="35" name="">
             <a:extLst xmlns:a="http://schemas.openxmlformats.org/drawingml/2006/main">
               <a:ext uri="{FF2B5EF4-FFF2-40B4-BE49-F238E27FC236}">
-                <a16:creationId xmlns:a16="http://schemas.microsoft.com/office/drawing/2014/main" id="{ABC98EFA-7954-40F8-BB58-72C960AF46DE}"/>
+                <a16:creationId xmlns:a16="http://schemas.microsoft.com/office/drawing/2014/main" id="{75AF7A64-8761-414F-AB0A-0D98BBF59EF9}"/>
               </a:ext>
             </a:extLst>
           </p:cNvPr>
@@ -6008,7 +6129,7 @@
           <p:cNvPr id="36" name="">
             <a:extLst xmlns:a="http://schemas.openxmlformats.org/drawingml/2006/main">
               <a:ext uri="{FF2B5EF4-FFF2-40B4-BE49-F238E27FC236}">
-                <a16:creationId xmlns:a16="http://schemas.microsoft.com/office/drawing/2014/main" id="{DA6A8A0E-8013-43D4-92A1-C2EAEEA45CAE}"/>
+                <a16:creationId xmlns:a16="http://schemas.microsoft.com/office/drawing/2014/main" id="{0C5DCDBE-33DA-4829-A703-9FDD447C90A7}"/>
               </a:ext>
             </a:extLst>
           </p:cNvPr>
@@ -6066,7 +6187,7 @@
           <p:cNvPr id="37" name="">
             <a:extLst xmlns:a="http://schemas.openxmlformats.org/drawingml/2006/main">
               <a:ext uri="{FF2B5EF4-FFF2-40B4-BE49-F238E27FC236}">
-                <a16:creationId xmlns:a16="http://schemas.microsoft.com/office/drawing/2014/main" id="{9485E434-3817-461A-935C-BF8263B9751D}"/>
+                <a16:creationId xmlns:a16="http://schemas.microsoft.com/office/drawing/2014/main" id="{2FCB8F7B-0B04-4383-94D5-7565C241AEAF}"/>
               </a:ext>
             </a:extLst>
           </p:cNvPr>
@@ -6122,7 +6243,7 @@
     </p:spTree>
     <p:extLst>
       <p:ext uri="{BB962C8B-B14F-4D97-AF65-F5344CB8AC3E}">
-        <p14:creationId xmlns:p14="http://schemas.microsoft.com/office/powerpoint/2010/main" val="1782805291"/>
+        <p14:creationId xmlns:p14="http://schemas.microsoft.com/office/powerpoint/2010/main" val="1673631592"/>
       </p:ext>
     </p:extLst>
   </p:cSld>
@@ -6153,7 +6274,7 @@
           <p:cNvPr id="1" name="Slide Number Placeholder 5">
             <a:extLst xmlns:a="http://schemas.openxmlformats.org/drawingml/2006/main">
               <a:ext uri="{FF2B5EF4-FFF2-40B4-BE49-F238E27FC236}">
-                <a16:creationId xmlns:a16="http://schemas.microsoft.com/office/drawing/2014/main" id="{E12CE447-476B-4BAE-A1FF-E669E79965E6}"/>
+                <a16:creationId xmlns:a16="http://schemas.microsoft.com/office/drawing/2014/main" id="{EDD0F201-AE24-4D54-ACE2-5F86EBC94A0A}"/>
               </a:ext>
             </a:extLst>
           </p:cNvPr>
@@ -6189,7 +6310,7 @@
           <p:nvPr/>
         </p:nvPicPr>
         <p:blipFill>
-          <a:blip xmlns:r="http://schemas.openxmlformats.org/officeDocument/2006/relationships" xmlns:a="http://schemas.openxmlformats.org/drawingml/2006/main" r:embed="R5cf176069fa3486b"/>
+          <a:blip xmlns:r="http://schemas.openxmlformats.org/officeDocument/2006/relationships" xmlns:a="http://schemas.openxmlformats.org/drawingml/2006/main" r:embed="Rcd428b96d8954bce"/>
           <a:srcRect xmlns:a="http://schemas.openxmlformats.org/drawingml/2006/main" l="0" t="21875" r="0" b="21875"/>
           <a:stretch xmlns:a="http://schemas.openxmlformats.org/drawingml/2006/main">
             <a:fillRect l="0" t="0" r="0" b="0"/>
@@ -6210,7 +6331,7 @@
           <p:cNvPr id="3" name="">
             <a:extLst xmlns:a="http://schemas.openxmlformats.org/drawingml/2006/main">
               <a:ext uri="{FF2B5EF4-FFF2-40B4-BE49-F238E27FC236}">
-                <a16:creationId xmlns:a16="http://schemas.microsoft.com/office/drawing/2014/main" id="{05FE0591-4EBF-456F-8AC7-839659264A1C}"/>
+                <a16:creationId xmlns:a16="http://schemas.microsoft.com/office/drawing/2014/main" id="{D9C35D0D-FFB3-4141-98B8-7E0029200331}"/>
               </a:ext>
             </a:extLst>
           </p:cNvPr>
@@ -6245,7 +6366,7 @@
           <p:cNvPr id="4" name="">
             <a:extLst xmlns:a="http://schemas.openxmlformats.org/drawingml/2006/main">
               <a:ext uri="{FF2B5EF4-FFF2-40B4-BE49-F238E27FC236}">
-                <a16:creationId xmlns:a16="http://schemas.microsoft.com/office/drawing/2014/main" id="{53E1A65E-7774-444E-9A39-67D67554D12B}"/>
+                <a16:creationId xmlns:a16="http://schemas.microsoft.com/office/drawing/2014/main" id="{B4DEDF91-5A88-44E0-BC52-DF02DEFBCEDA}"/>
               </a:ext>
             </a:extLst>
           </p:cNvPr>
@@ -6280,7 +6401,7 @@
           <p:cNvPr id="5" name="">
             <a:extLst xmlns:a="http://schemas.openxmlformats.org/drawingml/2006/main">
               <a:ext uri="{FF2B5EF4-FFF2-40B4-BE49-F238E27FC236}">
-                <a16:creationId xmlns:a16="http://schemas.microsoft.com/office/drawing/2014/main" id="{71880B04-6F7E-4879-BB47-32E946BAF024}"/>
+                <a16:creationId xmlns:a16="http://schemas.microsoft.com/office/drawing/2014/main" id="{28310831-8EA0-442B-B14A-3ED8D857FF35}"/>
               </a:ext>
             </a:extLst>
           </p:cNvPr>
@@ -6317,7 +6438,7 @@
           <p:cNvPr id="6" name="">
             <a:extLst xmlns:a="http://schemas.openxmlformats.org/drawingml/2006/main">
               <a:ext uri="{FF2B5EF4-FFF2-40B4-BE49-F238E27FC236}">
-                <a16:creationId xmlns:a16="http://schemas.microsoft.com/office/drawing/2014/main" id="{CB584B2F-A9FC-4A16-B060-B73EF2BAD8EE}"/>
+                <a16:creationId xmlns:a16="http://schemas.microsoft.com/office/drawing/2014/main" id="{CB552EE3-22DE-48D1-A3B2-1DBAD0857BF6}"/>
               </a:ext>
             </a:extLst>
           </p:cNvPr>
@@ -6354,7 +6475,7 @@
           <p:cNvPr id="7" name="">
             <a:extLst xmlns:a="http://schemas.openxmlformats.org/drawingml/2006/main">
               <a:ext uri="{FF2B5EF4-FFF2-40B4-BE49-F238E27FC236}">
-                <a16:creationId xmlns:a16="http://schemas.microsoft.com/office/drawing/2014/main" id="{A52FBEFA-C7EF-482C-8527-3799D8585ADB}"/>
+                <a16:creationId xmlns:a16="http://schemas.microsoft.com/office/drawing/2014/main" id="{3DADE6C9-8B9F-4006-AEBD-4505505F3635}"/>
               </a:ext>
             </a:extLst>
           </p:cNvPr>
@@ -6391,7 +6512,7 @@
           <p:cNvPr id="8" name="">
             <a:extLst xmlns:a="http://schemas.openxmlformats.org/drawingml/2006/main">
               <a:ext uri="{FF2B5EF4-FFF2-40B4-BE49-F238E27FC236}">
-                <a16:creationId xmlns:a16="http://schemas.microsoft.com/office/drawing/2014/main" id="{A2E7140B-585D-4EEE-8070-FA653D212BE0}"/>
+                <a16:creationId xmlns:a16="http://schemas.microsoft.com/office/drawing/2014/main" id="{F0CE92F2-2035-4511-BC79-89720F001B0E}"/>
               </a:ext>
             </a:extLst>
           </p:cNvPr>
@@ -6428,7 +6549,7 @@
           <p:cNvPr id="9" name="">
             <a:extLst xmlns:a="http://schemas.openxmlformats.org/drawingml/2006/main">
               <a:ext uri="{FF2B5EF4-FFF2-40B4-BE49-F238E27FC236}">
-                <a16:creationId xmlns:a16="http://schemas.microsoft.com/office/drawing/2014/main" id="{DF1BFB32-E0E7-4507-81E2-5529271D5CDD}"/>
+                <a16:creationId xmlns:a16="http://schemas.microsoft.com/office/drawing/2014/main" id="{A022ABDB-703F-41AE-B10B-149BB037CE43}"/>
               </a:ext>
             </a:extLst>
           </p:cNvPr>
@@ -6486,7 +6607,7 @@
           <p:cNvPr id="10" name="">
             <a:extLst xmlns:a="http://schemas.openxmlformats.org/drawingml/2006/main">
               <a:ext uri="{FF2B5EF4-FFF2-40B4-BE49-F238E27FC236}">
-                <a16:creationId xmlns:a16="http://schemas.microsoft.com/office/drawing/2014/main" id="{ABBD20BE-7227-4841-9AC6-7A1470A28E53}"/>
+                <a16:creationId xmlns:a16="http://schemas.microsoft.com/office/drawing/2014/main" id="{BCFF9D6A-8C8A-4A7F-AD06-471256B598F5}"/>
               </a:ext>
             </a:extLst>
           </p:cNvPr>
@@ -6534,7 +6655,7 @@
                   <a:srgbClr val="0F5B3F"/>
                 </a:solidFill>
               </a:rPr>
-              <a:t>11 / 12</a:t>
+              <a:t>11 / 13</a:t>
             </a:r>
           </a:p>
         </p:txBody>
@@ -6544,7 +6665,7 @@
           <p:cNvPr id="11" name="">
             <a:extLst xmlns:a="http://schemas.openxmlformats.org/drawingml/2006/main">
               <a:ext uri="{FF2B5EF4-FFF2-40B4-BE49-F238E27FC236}">
-                <a16:creationId xmlns:a16="http://schemas.microsoft.com/office/drawing/2014/main" id="{2B893AD9-81D5-4D8A-B47C-BB10191F0347}"/>
+                <a16:creationId xmlns:a16="http://schemas.microsoft.com/office/drawing/2014/main" id="{95CCE233-A557-47DF-999D-835A668EEF91}"/>
               </a:ext>
             </a:extLst>
           </p:cNvPr>
@@ -6579,7 +6700,7 @@
           <p:cNvPr id="12" name="">
             <a:extLst xmlns:a="http://schemas.openxmlformats.org/drawingml/2006/main">
               <a:ext uri="{FF2B5EF4-FFF2-40B4-BE49-F238E27FC236}">
-                <a16:creationId xmlns:a16="http://schemas.microsoft.com/office/drawing/2014/main" id="{C0F4889B-3840-4689-AE10-00199D88CD74}"/>
+                <a16:creationId xmlns:a16="http://schemas.microsoft.com/office/drawing/2014/main" id="{8851F424-7EB0-4494-B8EE-BD2C23AA0135}"/>
               </a:ext>
             </a:extLst>
           </p:cNvPr>
@@ -6612,7 +6733,7 @@
           <p:cNvPr id="13" name="">
             <a:extLst xmlns:a="http://schemas.openxmlformats.org/drawingml/2006/main">
               <a:ext uri="{FF2B5EF4-FFF2-40B4-BE49-F238E27FC236}">
-                <a16:creationId xmlns:a16="http://schemas.microsoft.com/office/drawing/2014/main" id="{7BA2165B-E9EF-46D6-A41D-A8D9A5FCCC53}"/>
+                <a16:creationId xmlns:a16="http://schemas.microsoft.com/office/drawing/2014/main" id="{3398D2A4-FC3B-47AA-AECB-441CE4E74AB0}"/>
               </a:ext>
             </a:extLst>
           </p:cNvPr>
@@ -6687,7 +6808,7 @@
           <p:cNvPr id="14" name="">
             <a:extLst xmlns:a="http://schemas.openxmlformats.org/drawingml/2006/main">
               <a:ext uri="{FF2B5EF4-FFF2-40B4-BE49-F238E27FC236}">
-                <a16:creationId xmlns:a16="http://schemas.microsoft.com/office/drawing/2014/main" id="{C1B5517D-02D5-42B3-B174-D5CA690E9283}"/>
+                <a16:creationId xmlns:a16="http://schemas.microsoft.com/office/drawing/2014/main" id="{F2B2D53B-7D91-491C-93B0-48F665FE001F}"/>
               </a:ext>
             </a:extLst>
           </p:cNvPr>
@@ -6722,7 +6843,7 @@
           <p:cNvPr id="15" name="">
             <a:extLst xmlns:a="http://schemas.openxmlformats.org/drawingml/2006/main">
               <a:ext uri="{FF2B5EF4-FFF2-40B4-BE49-F238E27FC236}">
-                <a16:creationId xmlns:a16="http://schemas.microsoft.com/office/drawing/2014/main" id="{1A1E0697-767B-4998-9C26-C7ACFB0011E8}"/>
+                <a16:creationId xmlns:a16="http://schemas.microsoft.com/office/drawing/2014/main" id="{1746ABB4-51FE-43D1-8275-2936BC1253A4}"/>
               </a:ext>
             </a:extLst>
           </p:cNvPr>
@@ -6757,7 +6878,7 @@
           <p:cNvPr id="16" name="">
             <a:extLst xmlns:a="http://schemas.openxmlformats.org/drawingml/2006/main">
               <a:ext uri="{FF2B5EF4-FFF2-40B4-BE49-F238E27FC236}">
-                <a16:creationId xmlns:a16="http://schemas.microsoft.com/office/drawing/2014/main" id="{3F525599-6856-4836-894C-3722D0C14D9E}"/>
+                <a16:creationId xmlns:a16="http://schemas.microsoft.com/office/drawing/2014/main" id="{482689D3-EC41-4EB8-B175-D15E9968361E}"/>
               </a:ext>
             </a:extLst>
           </p:cNvPr>
@@ -6815,7 +6936,7 @@
           <p:cNvPr id="17" name="">
             <a:extLst xmlns:a="http://schemas.openxmlformats.org/drawingml/2006/main">
               <a:ext uri="{FF2B5EF4-FFF2-40B4-BE49-F238E27FC236}">
-                <a16:creationId xmlns:a16="http://schemas.microsoft.com/office/drawing/2014/main" id="{BF7D4763-7271-4AB9-8D3C-B622AB701222}"/>
+                <a16:creationId xmlns:a16="http://schemas.microsoft.com/office/drawing/2014/main" id="{8D33F7B0-BE88-4313-84ED-CC8EF5DF85A5}"/>
               </a:ext>
             </a:extLst>
           </p:cNvPr>
@@ -6907,7 +7028,7 @@
           <p:cNvPr id="18" name="">
             <a:extLst xmlns:a="http://schemas.openxmlformats.org/drawingml/2006/main">
               <a:ext uri="{FF2B5EF4-FFF2-40B4-BE49-F238E27FC236}">
-                <a16:creationId xmlns:a16="http://schemas.microsoft.com/office/drawing/2014/main" id="{E0D65D5E-B585-4054-B53B-00D146C2C58E}"/>
+                <a16:creationId xmlns:a16="http://schemas.microsoft.com/office/drawing/2014/main" id="{20366EB0-3488-45B5-8951-E5267EB2C286}"/>
               </a:ext>
             </a:extLst>
           </p:cNvPr>
@@ -6944,7 +7065,7 @@
           <p:cNvPr id="19" name="">
             <a:extLst xmlns:a="http://schemas.openxmlformats.org/drawingml/2006/main">
               <a:ext uri="{FF2B5EF4-FFF2-40B4-BE49-F238E27FC236}">
-                <a16:creationId xmlns:a16="http://schemas.microsoft.com/office/drawing/2014/main" id="{A84996C3-66B5-44EF-9CC8-367026EC2707}"/>
+                <a16:creationId xmlns:a16="http://schemas.microsoft.com/office/drawing/2014/main" id="{BAC3B30C-F523-4013-8F1A-8FBB0DDB57FF}"/>
               </a:ext>
             </a:extLst>
           </p:cNvPr>
@@ -6979,7 +7100,7 @@
           <p:cNvPr id="20" name="">
             <a:extLst xmlns:a="http://schemas.openxmlformats.org/drawingml/2006/main">
               <a:ext uri="{FF2B5EF4-FFF2-40B4-BE49-F238E27FC236}">
-                <a16:creationId xmlns:a16="http://schemas.microsoft.com/office/drawing/2014/main" id="{485F01DB-35A1-4E7A-95B2-B6F415815E88}"/>
+                <a16:creationId xmlns:a16="http://schemas.microsoft.com/office/drawing/2014/main" id="{4A706274-875A-4DBE-A043-8234674FDD04}"/>
               </a:ext>
             </a:extLst>
           </p:cNvPr>
@@ -7037,7 +7158,7 @@
           <p:cNvPr id="21" name="">
             <a:extLst xmlns:a="http://schemas.openxmlformats.org/drawingml/2006/main">
               <a:ext uri="{FF2B5EF4-FFF2-40B4-BE49-F238E27FC236}">
-                <a16:creationId xmlns:a16="http://schemas.microsoft.com/office/drawing/2014/main" id="{8A89806E-05DB-4813-97B8-D077B3BDC34B}"/>
+                <a16:creationId xmlns:a16="http://schemas.microsoft.com/office/drawing/2014/main" id="{8F424E25-A6C5-468C-8897-FB3F8E25A89A}"/>
               </a:ext>
             </a:extLst>
           </p:cNvPr>
@@ -7112,7 +7233,7 @@
           <p:cNvPr id="22" name="">
             <a:extLst xmlns:a="http://schemas.openxmlformats.org/drawingml/2006/main">
               <a:ext uri="{FF2B5EF4-FFF2-40B4-BE49-F238E27FC236}">
-                <a16:creationId xmlns:a16="http://schemas.microsoft.com/office/drawing/2014/main" id="{080179DE-3D04-4C22-85C0-155F7E46CAD0}"/>
+                <a16:creationId xmlns:a16="http://schemas.microsoft.com/office/drawing/2014/main" id="{9DB4BBF1-5D5B-48BD-A499-3A3625B79E5F}"/>
               </a:ext>
             </a:extLst>
           </p:cNvPr>
@@ -7149,7 +7270,7 @@
           <p:cNvPr id="23" name="">
             <a:extLst xmlns:a="http://schemas.openxmlformats.org/drawingml/2006/main">
               <a:ext uri="{FF2B5EF4-FFF2-40B4-BE49-F238E27FC236}">
-                <a16:creationId xmlns:a16="http://schemas.microsoft.com/office/drawing/2014/main" id="{12685967-B6B6-4D18-9B10-C0378A607448}"/>
+                <a16:creationId xmlns:a16="http://schemas.microsoft.com/office/drawing/2014/main" id="{34D2AB03-3A34-4B12-9871-70DB68FB5D43}"/>
               </a:ext>
             </a:extLst>
           </p:cNvPr>
@@ -7184,7 +7305,7 @@
           <p:cNvPr id="24" name="">
             <a:extLst xmlns:a="http://schemas.openxmlformats.org/drawingml/2006/main">
               <a:ext uri="{FF2B5EF4-FFF2-40B4-BE49-F238E27FC236}">
-                <a16:creationId xmlns:a16="http://schemas.microsoft.com/office/drawing/2014/main" id="{688BE405-ADA1-4032-B931-01AA03C0AD52}"/>
+                <a16:creationId xmlns:a16="http://schemas.microsoft.com/office/drawing/2014/main" id="{A5061F9E-3DFA-425A-9C7A-59FA0049369E}"/>
               </a:ext>
             </a:extLst>
           </p:cNvPr>
@@ -7242,7 +7363,7 @@
           <p:cNvPr id="25" name="">
             <a:extLst xmlns:a="http://schemas.openxmlformats.org/drawingml/2006/main">
               <a:ext uri="{FF2B5EF4-FFF2-40B4-BE49-F238E27FC236}">
-                <a16:creationId xmlns:a16="http://schemas.microsoft.com/office/drawing/2014/main" id="{B6195A30-CA7F-4D81-93B2-2D66CE07777A}"/>
+                <a16:creationId xmlns:a16="http://schemas.microsoft.com/office/drawing/2014/main" id="{B067EC7F-4745-49C1-93A6-6FFFD5BC6826}"/>
               </a:ext>
             </a:extLst>
           </p:cNvPr>
@@ -7317,7 +7438,7 @@
           <p:cNvPr id="26" name="">
             <a:extLst xmlns:a="http://schemas.openxmlformats.org/drawingml/2006/main">
               <a:ext uri="{FF2B5EF4-FFF2-40B4-BE49-F238E27FC236}">
-                <a16:creationId xmlns:a16="http://schemas.microsoft.com/office/drawing/2014/main" id="{72192983-648D-47BB-89BB-4E240B79DC4C}"/>
+                <a16:creationId xmlns:a16="http://schemas.microsoft.com/office/drawing/2014/main" id="{EBAB79E5-EFBE-4D58-B2C7-765B566566FB}"/>
               </a:ext>
             </a:extLst>
           </p:cNvPr>
@@ -7352,7 +7473,7 @@
           <p:cNvPr id="27" name="">
             <a:extLst xmlns:a="http://schemas.openxmlformats.org/drawingml/2006/main">
               <a:ext uri="{FF2B5EF4-FFF2-40B4-BE49-F238E27FC236}">
-                <a16:creationId xmlns:a16="http://schemas.microsoft.com/office/drawing/2014/main" id="{15700A4B-6841-4F61-8C83-D0565F51BD5B}"/>
+                <a16:creationId xmlns:a16="http://schemas.microsoft.com/office/drawing/2014/main" id="{A2A119B8-2A1B-4CE6-9EB6-42C841509DDD}"/>
               </a:ext>
             </a:extLst>
           </p:cNvPr>
@@ -7387,7 +7508,7 @@
           <p:cNvPr id="28" name="">
             <a:extLst xmlns:a="http://schemas.openxmlformats.org/drawingml/2006/main">
               <a:ext uri="{FF2B5EF4-FFF2-40B4-BE49-F238E27FC236}">
-                <a16:creationId xmlns:a16="http://schemas.microsoft.com/office/drawing/2014/main" id="{6746FB12-B3CC-4939-B356-0B8EB84236B0}"/>
+                <a16:creationId xmlns:a16="http://schemas.microsoft.com/office/drawing/2014/main" id="{38F19495-699C-4FA2-AFF5-11FF3517F31B}"/>
               </a:ext>
             </a:extLst>
           </p:cNvPr>
@@ -7445,7 +7566,7 @@
           <p:cNvPr id="29" name="">
             <a:extLst xmlns:a="http://schemas.openxmlformats.org/drawingml/2006/main">
               <a:ext uri="{FF2B5EF4-FFF2-40B4-BE49-F238E27FC236}">
-                <a16:creationId xmlns:a16="http://schemas.microsoft.com/office/drawing/2014/main" id="{B9B22DEA-F9E3-4D78-B9CA-C1F46244C4AB}"/>
+                <a16:creationId xmlns:a16="http://schemas.microsoft.com/office/drawing/2014/main" id="{8847EEE6-AACF-4C19-BE0D-2BEC7C260815}"/>
               </a:ext>
             </a:extLst>
           </p:cNvPr>
@@ -7503,7 +7624,7 @@
           <p:cNvPr id="30" name="">
             <a:extLst xmlns:a="http://schemas.openxmlformats.org/drawingml/2006/main">
               <a:ext uri="{FF2B5EF4-FFF2-40B4-BE49-F238E27FC236}">
-                <a16:creationId xmlns:a16="http://schemas.microsoft.com/office/drawing/2014/main" id="{98FC0606-F49D-4CF5-9171-A2D513400360}"/>
+                <a16:creationId xmlns:a16="http://schemas.microsoft.com/office/drawing/2014/main" id="{2C81EE62-7215-4C04-9A0B-82F4B5D88195}"/>
               </a:ext>
             </a:extLst>
           </p:cNvPr>
@@ -7538,7 +7659,7 @@
           <p:cNvPr id="31" name="">
             <a:extLst xmlns:a="http://schemas.openxmlformats.org/drawingml/2006/main">
               <a:ext uri="{FF2B5EF4-FFF2-40B4-BE49-F238E27FC236}">
-                <a16:creationId xmlns:a16="http://schemas.microsoft.com/office/drawing/2014/main" id="{49E0466E-BD81-4330-B3F8-3FC897C2CBB5}"/>
+                <a16:creationId xmlns:a16="http://schemas.microsoft.com/office/drawing/2014/main" id="{D8DAD0D2-2550-437D-93BB-7F467BAD630B}"/>
               </a:ext>
             </a:extLst>
           </p:cNvPr>
@@ -7596,7 +7717,7 @@
           <p:cNvPr id="32" name="">
             <a:extLst xmlns:a="http://schemas.openxmlformats.org/drawingml/2006/main">
               <a:ext uri="{FF2B5EF4-FFF2-40B4-BE49-F238E27FC236}">
-                <a16:creationId xmlns:a16="http://schemas.microsoft.com/office/drawing/2014/main" id="{B88DE70F-B4F5-445F-AB6B-D3A5D6D704E8}"/>
+                <a16:creationId xmlns:a16="http://schemas.microsoft.com/office/drawing/2014/main" id="{2A632D8A-34DD-4C4B-A1D7-26D64D9E4668}"/>
               </a:ext>
             </a:extLst>
           </p:cNvPr>
@@ -7654,7 +7775,7 @@
           <p:cNvPr id="33" name="">
             <a:extLst xmlns:a="http://schemas.openxmlformats.org/drawingml/2006/main">
               <a:ext uri="{FF2B5EF4-FFF2-40B4-BE49-F238E27FC236}">
-                <a16:creationId xmlns:a16="http://schemas.microsoft.com/office/drawing/2014/main" id="{3C86D310-FF81-48EB-A668-1085D89C7EFD}"/>
+                <a16:creationId xmlns:a16="http://schemas.microsoft.com/office/drawing/2014/main" id="{5D5321AE-4F48-4873-8923-1E473D859DB7}"/>
               </a:ext>
             </a:extLst>
           </p:cNvPr>
@@ -7710,7 +7831,7 @@
     </p:spTree>
     <p:extLst>
       <p:ext uri="{BB962C8B-B14F-4D97-AF65-F5344CB8AC3E}">
-        <p14:creationId xmlns:p14="http://schemas.microsoft.com/office/powerpoint/2010/main" val="1334124735"/>
+        <p14:creationId xmlns:p14="http://schemas.microsoft.com/office/powerpoint/2010/main" val="1345272916"/>
       </p:ext>
     </p:extLst>
   </p:cSld>
@@ -7741,7 +7862,7 @@
           <p:cNvPr id="1" name="Slide Number Placeholder 5">
             <a:extLst xmlns:a="http://schemas.openxmlformats.org/drawingml/2006/main">
               <a:ext uri="{FF2B5EF4-FFF2-40B4-BE49-F238E27FC236}">
-                <a16:creationId xmlns:a16="http://schemas.microsoft.com/office/drawing/2014/main" id="{E12CE447-476B-4BAE-A1FF-E669E79965E6}"/>
+                <a16:creationId xmlns:a16="http://schemas.microsoft.com/office/drawing/2014/main" id="{EDD0F201-AE24-4D54-ACE2-5F86EBC94A0A}"/>
               </a:ext>
             </a:extLst>
           </p:cNvPr>
@@ -7777,7 +7898,7 @@
           <p:nvPr/>
         </p:nvPicPr>
         <p:blipFill>
-          <a:blip xmlns:r="http://schemas.openxmlformats.org/officeDocument/2006/relationships" xmlns:a="http://schemas.openxmlformats.org/drawingml/2006/main" r:embed="Rf5fefd5a0f61438b"/>
+          <a:blip xmlns:r="http://schemas.openxmlformats.org/officeDocument/2006/relationships" xmlns:a="http://schemas.openxmlformats.org/drawingml/2006/main" r:embed="R08dc4e269b4745ba"/>
           <a:srcRect xmlns:a="http://schemas.openxmlformats.org/drawingml/2006/main" l="0" t="21875" r="0" b="21875"/>
           <a:stretch xmlns:a="http://schemas.openxmlformats.org/drawingml/2006/main">
             <a:fillRect l="0" t="0" r="0" b="0"/>
@@ -7798,7 +7919,7 @@
           <p:cNvPr id="3" name="">
             <a:extLst xmlns:a="http://schemas.openxmlformats.org/drawingml/2006/main">
               <a:ext uri="{FF2B5EF4-FFF2-40B4-BE49-F238E27FC236}">
-                <a16:creationId xmlns:a16="http://schemas.microsoft.com/office/drawing/2014/main" id="{9384C98C-857B-44F1-8730-842DD6CF5344}"/>
+                <a16:creationId xmlns:a16="http://schemas.microsoft.com/office/drawing/2014/main" id="{3FC32856-49C7-4E45-9D5F-B9CA0EEC046B}"/>
               </a:ext>
             </a:extLst>
           </p:cNvPr>
@@ -7833,7 +7954,7 @@
           <p:cNvPr id="4" name="">
             <a:extLst xmlns:a="http://schemas.openxmlformats.org/drawingml/2006/main">
               <a:ext uri="{FF2B5EF4-FFF2-40B4-BE49-F238E27FC236}">
-                <a16:creationId xmlns:a16="http://schemas.microsoft.com/office/drawing/2014/main" id="{D674D4FC-FFC7-4ABB-9406-1E580C6EA1C0}"/>
+                <a16:creationId xmlns:a16="http://schemas.microsoft.com/office/drawing/2014/main" id="{645878F7-6807-4FAB-A567-4518EC4DCC37}"/>
               </a:ext>
             </a:extLst>
           </p:cNvPr>
@@ -7868,7 +7989,7 @@
           <p:cNvPr id="5" name="">
             <a:extLst xmlns:a="http://schemas.openxmlformats.org/drawingml/2006/main">
               <a:ext uri="{FF2B5EF4-FFF2-40B4-BE49-F238E27FC236}">
-                <a16:creationId xmlns:a16="http://schemas.microsoft.com/office/drawing/2014/main" id="{C420D122-7475-4611-8B91-7969E183BC8A}"/>
+                <a16:creationId xmlns:a16="http://schemas.microsoft.com/office/drawing/2014/main" id="{BF355876-66E3-4C37-8BB2-E7AEE8BC1FA7}"/>
               </a:ext>
             </a:extLst>
           </p:cNvPr>
@@ -7905,7 +8026,7 @@
           <p:cNvPr id="6" name="">
             <a:extLst xmlns:a="http://schemas.openxmlformats.org/drawingml/2006/main">
               <a:ext uri="{FF2B5EF4-FFF2-40B4-BE49-F238E27FC236}">
-                <a16:creationId xmlns:a16="http://schemas.microsoft.com/office/drawing/2014/main" id="{F714CD26-F999-4CFC-BF53-65E57786D881}"/>
+                <a16:creationId xmlns:a16="http://schemas.microsoft.com/office/drawing/2014/main" id="{14CE53FA-CEF2-4BF1-97E9-965A6E313A87}"/>
               </a:ext>
             </a:extLst>
           </p:cNvPr>
@@ -7942,7 +8063,7 @@
           <p:cNvPr id="7" name="">
             <a:extLst xmlns:a="http://schemas.openxmlformats.org/drawingml/2006/main">
               <a:ext uri="{FF2B5EF4-FFF2-40B4-BE49-F238E27FC236}">
-                <a16:creationId xmlns:a16="http://schemas.microsoft.com/office/drawing/2014/main" id="{02D6D254-8613-4E69-9273-8735EA4E55E9}"/>
+                <a16:creationId xmlns:a16="http://schemas.microsoft.com/office/drawing/2014/main" id="{17957947-611E-49FC-8C71-15D8F45695EB}"/>
               </a:ext>
             </a:extLst>
           </p:cNvPr>
@@ -7979,7 +8100,7 @@
           <p:cNvPr id="8" name="">
             <a:extLst xmlns:a="http://schemas.openxmlformats.org/drawingml/2006/main">
               <a:ext uri="{FF2B5EF4-FFF2-40B4-BE49-F238E27FC236}">
-                <a16:creationId xmlns:a16="http://schemas.microsoft.com/office/drawing/2014/main" id="{0591ADF7-41AF-41F4-9340-7444EB809B0C}"/>
+                <a16:creationId xmlns:a16="http://schemas.microsoft.com/office/drawing/2014/main" id="{C496F449-1423-481E-9065-9ABC01DCE53C}"/>
               </a:ext>
             </a:extLst>
           </p:cNvPr>
@@ -8016,7 +8137,7 @@
           <p:cNvPr id="9" name="">
             <a:extLst xmlns:a="http://schemas.openxmlformats.org/drawingml/2006/main">
               <a:ext uri="{FF2B5EF4-FFF2-40B4-BE49-F238E27FC236}">
-                <a16:creationId xmlns:a16="http://schemas.microsoft.com/office/drawing/2014/main" id="{D9DC9BC4-0E6C-4EE2-BC5A-436B80B9535C}"/>
+                <a16:creationId xmlns:a16="http://schemas.microsoft.com/office/drawing/2014/main" id="{29DEF44B-732A-4FEB-A28B-FF40D2B9ABB9}"/>
               </a:ext>
             </a:extLst>
           </p:cNvPr>
@@ -8064,7 +8185,7 @@
                   <a:srgbClr val="0F5B3F"/>
                 </a:solidFill>
               </a:rPr>
-              <a:t>CLOSING</a:t>
+              <a:t>REVIEW WRITING</a:t>
             </a:r>
           </a:p>
         </p:txBody>
@@ -8074,7 +8195,7 @@
           <p:cNvPr id="10" name="">
             <a:extLst xmlns:a="http://schemas.openxmlformats.org/drawingml/2006/main">
               <a:ext uri="{FF2B5EF4-FFF2-40B4-BE49-F238E27FC236}">
-                <a16:creationId xmlns:a16="http://schemas.microsoft.com/office/drawing/2014/main" id="{7CE02FFF-EEEA-40A7-A81C-C67523107C97}"/>
+                <a16:creationId xmlns:a16="http://schemas.microsoft.com/office/drawing/2014/main" id="{D2F4816A-3192-47C6-8D38-DCE691AF1417}"/>
               </a:ext>
             </a:extLst>
           </p:cNvPr>
@@ -8122,7 +8243,7 @@
                   <a:srgbClr val="0F5B3F"/>
                 </a:solidFill>
               </a:rPr>
-              <a:t>12 / 12</a:t>
+              <a:t>12 / 13</a:t>
             </a:r>
           </a:p>
         </p:txBody>
@@ -8132,7 +8253,7 @@
           <p:cNvPr id="11" name="">
             <a:extLst xmlns:a="http://schemas.openxmlformats.org/drawingml/2006/main">
               <a:ext uri="{FF2B5EF4-FFF2-40B4-BE49-F238E27FC236}">
-                <a16:creationId xmlns:a16="http://schemas.microsoft.com/office/drawing/2014/main" id="{5501C4DE-1AB1-49EE-8F4D-EEE3056FB8DB}"/>
+                <a16:creationId xmlns:a16="http://schemas.microsoft.com/office/drawing/2014/main" id="{04347C77-C1C7-4C52-A2A3-283F52FBB8F0}"/>
               </a:ext>
             </a:extLst>
           </p:cNvPr>
@@ -8167,7 +8288,7 @@
           <p:cNvPr id="12" name="">
             <a:extLst xmlns:a="http://schemas.openxmlformats.org/drawingml/2006/main">
               <a:ext uri="{FF2B5EF4-FFF2-40B4-BE49-F238E27FC236}">
-                <a16:creationId xmlns:a16="http://schemas.microsoft.com/office/drawing/2014/main" id="{194F14CF-00C9-4026-86A4-3BB98A44D8DD}"/>
+                <a16:creationId xmlns:a16="http://schemas.microsoft.com/office/drawing/2014/main" id="{68961EBB-DF36-4A48-9361-11B7EA16B74D}"/>
               </a:ext>
             </a:extLst>
           </p:cNvPr>
@@ -8200,7 +8321,7 @@
           <p:cNvPr id="13" name="">
             <a:extLst xmlns:a="http://schemas.openxmlformats.org/drawingml/2006/main">
               <a:ext uri="{FF2B5EF4-FFF2-40B4-BE49-F238E27FC236}">
-                <a16:creationId xmlns:a16="http://schemas.microsoft.com/office/drawing/2014/main" id="{4D74C4C6-B265-47A0-86B9-465FA1616555}"/>
+                <a16:creationId xmlns:a16="http://schemas.microsoft.com/office/drawing/2014/main" id="{B36BB6DB-98D3-4CA8-A4BF-70830B862AC8}"/>
               </a:ext>
             </a:extLst>
           </p:cNvPr>
@@ -8248,6 +8369,1649 @@
                   <a:srgbClr val="132024"/>
                 </a:solidFill>
               </a:rPr>
+              <a:t>이 연결고리를 리뷰논문으로</a:t>
+            </a:r>
+          </a:p>
+          <a:p xmlns:a="http://schemas.openxmlformats.org/drawingml/2006/main">
+            <a:pPr algn="l">
+              <a:defRPr sz="2850" b="1">
+                <a:solidFill>
+                  <a:srgbClr val="132024"/>
+                </a:solidFill>
+              </a:defRPr>
+            </a:pPr>
+            <a:r>
+              <a:rPr sz="2850" b="1">
+                <a:solidFill>
+                  <a:srgbClr val="132024"/>
+                </a:solidFill>
+              </a:rPr>
+              <a:t>바꾸면 어떻게 쓰게 되는가</a:t>
+            </a:r>
+          </a:p>
+        </p:txBody>
+      </p:sp>
+      <p:sp>
+        <p:nvSpPr>
+          <p:cNvPr id="14" name="">
+            <a:extLst xmlns:a="http://schemas.openxmlformats.org/drawingml/2006/main">
+              <a:ext uri="{FF2B5EF4-FFF2-40B4-BE49-F238E27FC236}">
+                <a16:creationId xmlns:a16="http://schemas.microsoft.com/office/drawing/2014/main" id="{98CAAAD6-A541-441A-941E-2DA852A4CFBF}"/>
+              </a:ext>
+            </a:extLst>
+          </p:cNvPr>
+          <p:cNvSpPr>
+            <a:spLocks xmlns:a="http://schemas.openxmlformats.org/drawingml/2006/main" noGrp="1"/>
+          </p:cNvSpPr>
+          <p:nvPr/>
+        </p:nvSpPr>
+        <p:spPr>
+          <a:xfrm xmlns:a="http://schemas.openxmlformats.org/drawingml/2006/main">
+            <a:off x="704850" y="1733550"/>
+            <a:ext cx="10763250" cy="723900"/>
+          </a:xfrm>
+          <a:prstGeom xmlns:a="http://schemas.openxmlformats.org/drawingml/2006/main" prst="roundRect">
+            <a:avLst>
+              <a:gd name="adj" fmla="val 10526"/>
+            </a:avLst>
+          </a:prstGeom>
+          <a:solidFill xmlns:a="http://schemas.openxmlformats.org/drawingml/2006/main">
+            <a:srgbClr val="F4E8C8"/>
+          </a:solidFill>
+          <a:ln xmlns:a="http://schemas.openxmlformats.org/drawingml/2006/main" w="11430">
+            <a:solidFill>
+              <a:srgbClr val="132024"/>
+            </a:solidFill>
+            <a:prstDash val="solid"/>
+          </a:ln>
+        </p:spPr>
+      </p:sp>
+      <p:sp>
+        <p:nvSpPr>
+          <p:cNvPr id="15" name="">
+            <a:extLst xmlns:a="http://schemas.openxmlformats.org/drawingml/2006/main">
+              <a:ext uri="{FF2B5EF4-FFF2-40B4-BE49-F238E27FC236}">
+                <a16:creationId xmlns:a16="http://schemas.microsoft.com/office/drawing/2014/main" id="{4CB6969B-E212-48FA-BB2E-660231CFF46C}"/>
+              </a:ext>
+            </a:extLst>
+          </p:cNvPr>
+          <p:cNvSpPr>
+            <a:spLocks xmlns:a="http://schemas.openxmlformats.org/drawingml/2006/main" noGrp="1"/>
+          </p:cNvSpPr>
+          <p:nvPr/>
+        </p:nvSpPr>
+        <p:spPr>
+          <a:xfrm xmlns:a="http://schemas.openxmlformats.org/drawingml/2006/main">
+            <a:off x="752475" y="1781175"/>
+            <a:ext cx="57150" cy="628650"/>
+          </a:xfrm>
+          <a:prstGeom xmlns:a="http://schemas.openxmlformats.org/drawingml/2006/main" prst="rect">
+            <a:avLst/>
+          </a:prstGeom>
+          <a:solidFill xmlns:a="http://schemas.openxmlformats.org/drawingml/2006/main">
+            <a:srgbClr val="C9972B"/>
+          </a:solidFill>
+          <a:ln xmlns:a="http://schemas.openxmlformats.org/drawingml/2006/main" w="0">
+            <a:solidFill>
+              <a:srgbClr val="000000">
+                <a:alpha val="0"/>
+              </a:srgbClr>
+            </a:solidFill>
+            <a:prstDash val="solid"/>
+          </a:ln>
+        </p:spPr>
+      </p:sp>
+      <p:sp>
+        <p:nvSpPr>
+          <p:cNvPr id="16" name="">
+            <a:extLst xmlns:a="http://schemas.openxmlformats.org/drawingml/2006/main">
+              <a:ext uri="{FF2B5EF4-FFF2-40B4-BE49-F238E27FC236}">
+                <a16:creationId xmlns:a16="http://schemas.microsoft.com/office/drawing/2014/main" id="{0A308B70-6AAC-4137-840D-1E27DA4E3C68}"/>
+              </a:ext>
+            </a:extLst>
+          </p:cNvPr>
+          <p:cNvSpPr>
+            <a:spLocks xmlns:a="http://schemas.openxmlformats.org/drawingml/2006/main" noGrp="1"/>
+          </p:cNvSpPr>
+          <p:nvPr/>
+        </p:nvSpPr>
+        <p:spPr>
+          <a:xfrm xmlns:a="http://schemas.openxmlformats.org/drawingml/2006/main">
+            <a:off x="914400" y="1885950"/>
+            <a:ext cx="10382250" cy="457200"/>
+          </a:xfrm>
+          <a:prstGeom xmlns:a="http://schemas.openxmlformats.org/drawingml/2006/main" prst="rect">
+            <a:avLst/>
+          </a:prstGeom>
+          <a:solidFill xmlns:a="http://schemas.openxmlformats.org/drawingml/2006/main">
+            <a:srgbClr val="000000">
+              <a:alpha val="0"/>
+            </a:srgbClr>
+          </a:solidFill>
+          <a:ln xmlns:a="http://schemas.openxmlformats.org/drawingml/2006/main" w="0">
+            <a:solidFill>
+              <a:srgbClr val="000000">
+                <a:alpha val="0"/>
+              </a:srgbClr>
+            </a:solidFill>
+            <a:prstDash val="solid"/>
+          </a:ln>
+        </p:spPr>
+        <p:txBody>
+          <a:bodyPr xmlns:a="http://schemas.openxmlformats.org/drawingml/2006/main" lIns="0" tIns="0" rIns="0" bIns="0" anchor="t"/>
+          <a:lstStyle xmlns:a="http://schemas.openxmlformats.org/drawingml/2006/main"/>
+          <a:p xmlns:a="http://schemas.openxmlformats.org/drawingml/2006/main">
+            <a:pPr algn="l">
+              <a:defRPr sz="1350" b="0">
+                <a:solidFill>
+                  <a:srgbClr val="132024"/>
+                </a:solidFill>
+              </a:defRPr>
+            </a:pPr>
+            <a:r>
+              <a:rPr sz="1350" b="0">
+                <a:solidFill>
+                  <a:srgbClr val="132024"/>
+                </a:solidFill>
+              </a:rPr>
+              <a:t>핵심은 paper-by-paper 요약이 아니라, 위키에서 질문이 이동한 순서대로 review의 장과 비교 기준을 세우는 것이다.</a:t>
+            </a:r>
+          </a:p>
+        </p:txBody>
+      </p:sp>
+      <p:sp>
+        <p:nvSpPr>
+          <p:cNvPr id="17" name="">
+            <a:extLst xmlns:a="http://schemas.openxmlformats.org/drawingml/2006/main">
+              <a:ext uri="{FF2B5EF4-FFF2-40B4-BE49-F238E27FC236}">
+                <a16:creationId xmlns:a16="http://schemas.microsoft.com/office/drawing/2014/main" id="{9B9DDFF8-D926-4B75-AA76-3E0569F6C72D}"/>
+              </a:ext>
+            </a:extLst>
+          </p:cNvPr>
+          <p:cNvSpPr>
+            <a:spLocks xmlns:a="http://schemas.openxmlformats.org/drawingml/2006/main" noGrp="1"/>
+          </p:cNvSpPr>
+          <p:nvPr/>
+        </p:nvSpPr>
+        <p:spPr>
+          <a:xfrm xmlns:a="http://schemas.openxmlformats.org/drawingml/2006/main">
+            <a:off x="704850" y="2857500"/>
+            <a:ext cx="3048000" cy="2095500"/>
+          </a:xfrm>
+          <a:prstGeom xmlns:a="http://schemas.openxmlformats.org/drawingml/2006/main" prst="roundRect">
+            <a:avLst>
+              <a:gd name="adj" fmla="val 3636"/>
+            </a:avLst>
+          </a:prstGeom>
+          <a:solidFill xmlns:a="http://schemas.openxmlformats.org/drawingml/2006/main">
+            <a:srgbClr val="FFFDF8">
+              <a:alpha val="96863"/>
+            </a:srgbClr>
+          </a:solidFill>
+          <a:ln xmlns:a="http://schemas.openxmlformats.org/drawingml/2006/main" w="11430">
+            <a:solidFill>
+              <a:srgbClr val="132024"/>
+            </a:solidFill>
+            <a:prstDash val="solid"/>
+          </a:ln>
+        </p:spPr>
+      </p:sp>
+      <p:sp>
+        <p:nvSpPr>
+          <p:cNvPr id="18" name="">
+            <a:extLst xmlns:a="http://schemas.openxmlformats.org/drawingml/2006/main">
+              <a:ext uri="{FF2B5EF4-FFF2-40B4-BE49-F238E27FC236}">
+                <a16:creationId xmlns:a16="http://schemas.microsoft.com/office/drawing/2014/main" id="{72CF7C7C-7BF8-46DB-B952-6943B475F695}"/>
+              </a:ext>
+            </a:extLst>
+          </p:cNvPr>
+          <p:cNvSpPr>
+            <a:spLocks xmlns:a="http://schemas.openxmlformats.org/drawingml/2006/main" noGrp="1"/>
+          </p:cNvSpPr>
+          <p:nvPr/>
+        </p:nvSpPr>
+        <p:spPr>
+          <a:xfrm xmlns:a="http://schemas.openxmlformats.org/drawingml/2006/main">
+            <a:off x="762000" y="2914650"/>
+            <a:ext cx="2933700" cy="57150"/>
+          </a:xfrm>
+          <a:prstGeom xmlns:a="http://schemas.openxmlformats.org/drawingml/2006/main" prst="rect">
+            <a:avLst/>
+          </a:prstGeom>
+          <a:solidFill xmlns:a="http://schemas.openxmlformats.org/drawingml/2006/main">
+            <a:srgbClr val="1D9A69"/>
+          </a:solidFill>
+          <a:ln xmlns:a="http://schemas.openxmlformats.org/drawingml/2006/main" w="0">
+            <a:solidFill>
+              <a:srgbClr val="000000">
+                <a:alpha val="0"/>
+              </a:srgbClr>
+            </a:solidFill>
+            <a:prstDash val="solid"/>
+          </a:ln>
+        </p:spPr>
+      </p:sp>
+      <p:sp>
+        <p:nvSpPr>
+          <p:cNvPr id="19" name="">
+            <a:extLst xmlns:a="http://schemas.openxmlformats.org/drawingml/2006/main">
+              <a:ext uri="{FF2B5EF4-FFF2-40B4-BE49-F238E27FC236}">
+                <a16:creationId xmlns:a16="http://schemas.microsoft.com/office/drawing/2014/main" id="{59C982DC-525A-4F69-8C4E-C0842F626773}"/>
+              </a:ext>
+            </a:extLst>
+          </p:cNvPr>
+          <p:cNvSpPr>
+            <a:spLocks xmlns:a="http://schemas.openxmlformats.org/drawingml/2006/main" noGrp="1"/>
+          </p:cNvSpPr>
+          <p:nvPr/>
+        </p:nvSpPr>
+        <p:spPr>
+          <a:xfrm xmlns:a="http://schemas.openxmlformats.org/drawingml/2006/main">
+            <a:off x="914400" y="3048000"/>
+            <a:ext cx="2628900" cy="285750"/>
+          </a:xfrm>
+          <a:prstGeom xmlns:a="http://schemas.openxmlformats.org/drawingml/2006/main" prst="rect">
+            <a:avLst/>
+          </a:prstGeom>
+          <a:solidFill xmlns:a="http://schemas.openxmlformats.org/drawingml/2006/main">
+            <a:srgbClr val="000000">
+              <a:alpha val="0"/>
+            </a:srgbClr>
+          </a:solidFill>
+          <a:ln xmlns:a="http://schemas.openxmlformats.org/drawingml/2006/main" w="0">
+            <a:solidFill>
+              <a:srgbClr val="000000">
+                <a:alpha val="0"/>
+              </a:srgbClr>
+            </a:solidFill>
+            <a:prstDash val="solid"/>
+          </a:ln>
+        </p:spPr>
+        <p:txBody>
+          <a:bodyPr xmlns:a="http://schemas.openxmlformats.org/drawingml/2006/main" lIns="0" tIns="0" rIns="0" bIns="0" anchor="t"/>
+          <a:lstStyle xmlns:a="http://schemas.openxmlformats.org/drawingml/2006/main"/>
+          <a:p xmlns:a="http://schemas.openxmlformats.org/drawingml/2006/main">
+            <a:pPr algn="l">
+              <a:defRPr sz="1125" b="1">
+                <a:solidFill>
+                  <a:srgbClr val="0F5B3F"/>
+                </a:solidFill>
+              </a:defRPr>
+            </a:pPr>
+            <a:r>
+              <a:rPr sz="1125" b="1">
+                <a:solidFill>
+                  <a:srgbClr val="0F5B3F"/>
+                </a:solidFill>
+              </a:rPr>
+              <a:t>1장: protocol family</a:t>
+            </a:r>
+          </a:p>
+        </p:txBody>
+      </p:sp>
+      <p:sp>
+        <p:nvSpPr>
+          <p:cNvPr id="20" name="">
+            <a:extLst xmlns:a="http://schemas.openxmlformats.org/drawingml/2006/main">
+              <a:ext uri="{FF2B5EF4-FFF2-40B4-BE49-F238E27FC236}">
+                <a16:creationId xmlns:a16="http://schemas.microsoft.com/office/drawing/2014/main" id="{353858DA-0290-47F5-8DD4-B53020840D10}"/>
+              </a:ext>
+            </a:extLst>
+          </p:cNvPr>
+          <p:cNvSpPr>
+            <a:spLocks xmlns:a="http://schemas.openxmlformats.org/drawingml/2006/main" noGrp="1"/>
+          </p:cNvSpPr>
+          <p:nvPr/>
+        </p:nvSpPr>
+        <p:spPr>
+          <a:xfrm xmlns:a="http://schemas.openxmlformats.org/drawingml/2006/main">
+            <a:off x="914400" y="3467100"/>
+            <a:ext cx="2628900" cy="1314450"/>
+          </a:xfrm>
+          <a:prstGeom xmlns:a="http://schemas.openxmlformats.org/drawingml/2006/main" prst="rect">
+            <a:avLst/>
+          </a:prstGeom>
+          <a:solidFill xmlns:a="http://schemas.openxmlformats.org/drawingml/2006/main">
+            <a:srgbClr val="000000">
+              <a:alpha val="0"/>
+            </a:srgbClr>
+          </a:solidFill>
+          <a:ln xmlns:a="http://schemas.openxmlformats.org/drawingml/2006/main" w="0">
+            <a:solidFill>
+              <a:srgbClr val="000000">
+                <a:alpha val="0"/>
+              </a:srgbClr>
+            </a:solidFill>
+            <a:prstDash val="solid"/>
+          </a:ln>
+        </p:spPr>
+        <p:txBody>
+          <a:bodyPr xmlns:a="http://schemas.openxmlformats.org/drawingml/2006/main" lIns="0" tIns="0" rIns="0" bIns="0" anchor="t"/>
+          <a:lstStyle xmlns:a="http://schemas.openxmlformats.org/drawingml/2006/main"/>
+          <a:p xmlns:a="http://schemas.openxmlformats.org/drawingml/2006/main">
+            <a:pPr algn="l">
+              <a:defRPr sz="1200" b="0">
+                <a:solidFill>
+                  <a:srgbClr val="132024"/>
+                </a:solidFill>
+              </a:defRPr>
+            </a:pPr>
+            <a:r>
+              <a:rPr sz="1200" b="0">
+                <a:solidFill>
+                  <a:srgbClr val="132024"/>
+                </a:solidFill>
+              </a:rPr>
+              <a:t>whole cerebral,</a:t>
+            </a:r>
+          </a:p>
+          <a:p xmlns:a="http://schemas.openxmlformats.org/drawingml/2006/main">
+            <a:pPr algn="l">
+              <a:defRPr sz="1200" b="0">
+                <a:solidFill>
+                  <a:srgbClr val="132024"/>
+                </a:solidFill>
+              </a:defRPr>
+            </a:pPr>
+            <a:r>
+              <a:rPr sz="1200" b="0">
+                <a:solidFill>
+                  <a:srgbClr val="132024"/>
+                </a:solidFill>
+              </a:rPr>
+              <a:t>forebrain/cortical,</a:t>
+            </a:r>
+          </a:p>
+          <a:p xmlns:a="http://schemas.openxmlformats.org/drawingml/2006/main">
+            <a:pPr algn="l">
+              <a:defRPr sz="1200" b="0">
+                <a:solidFill>
+                  <a:srgbClr val="132024"/>
+                </a:solidFill>
+              </a:defRPr>
+            </a:pPr>
+            <a:r>
+              <a:rPr sz="1200" b="0">
+                <a:solidFill>
+                  <a:srgbClr val="132024"/>
+                </a:solidFill>
+              </a:rPr>
+              <a:t>posterior/niche를 baseline</a:t>
+            </a:r>
+          </a:p>
+          <a:p xmlns:a="http://schemas.openxmlformats.org/drawingml/2006/main">
+            <a:pPr algn="l">
+              <a:defRPr sz="1200" b="0">
+                <a:solidFill>
+                  <a:srgbClr val="132024"/>
+                </a:solidFill>
+              </a:defRPr>
+            </a:pPr>
+            <a:r>
+              <a:rPr sz="1200" b="0">
+                <a:solidFill>
+                  <a:srgbClr val="132024"/>
+                </a:solidFill>
+              </a:rPr>
+              <a:t>family로 먼저 정리한다.</a:t>
+            </a:r>
+          </a:p>
+        </p:txBody>
+      </p:sp>
+      <p:sp>
+        <p:nvSpPr>
+          <p:cNvPr id="21" name="">
+            <a:extLst xmlns:a="http://schemas.openxmlformats.org/drawingml/2006/main">
+              <a:ext uri="{FF2B5EF4-FFF2-40B4-BE49-F238E27FC236}">
+                <a16:creationId xmlns:a16="http://schemas.microsoft.com/office/drawing/2014/main" id="{D0A34B77-CC66-4D3D-9D1D-11B26AC3340C}"/>
+              </a:ext>
+            </a:extLst>
+          </p:cNvPr>
+          <p:cNvSpPr>
+            <a:spLocks xmlns:a="http://schemas.openxmlformats.org/drawingml/2006/main" noGrp="1"/>
+          </p:cNvSpPr>
+          <p:nvPr/>
+        </p:nvSpPr>
+        <p:spPr>
+          <a:xfrm xmlns:a="http://schemas.openxmlformats.org/drawingml/2006/main">
+            <a:off x="3905250" y="3771900"/>
+            <a:ext cx="704850" cy="228600"/>
+          </a:xfrm>
+          <a:prstGeom xmlns:a="http://schemas.openxmlformats.org/drawingml/2006/main" prst="rightArrow">
+            <a:avLst/>
+          </a:prstGeom>
+          <a:solidFill xmlns:a="http://schemas.openxmlformats.org/drawingml/2006/main">
+            <a:srgbClr val="F4E8C8"/>
+          </a:solidFill>
+          <a:ln xmlns:a="http://schemas.openxmlformats.org/drawingml/2006/main" w="9525">
+            <a:solidFill>
+              <a:srgbClr val="132024"/>
+            </a:solidFill>
+            <a:prstDash val="solid"/>
+          </a:ln>
+        </p:spPr>
+      </p:sp>
+      <p:sp>
+        <p:nvSpPr>
+          <p:cNvPr id="22" name="">
+            <a:extLst xmlns:a="http://schemas.openxmlformats.org/drawingml/2006/main">
+              <a:ext uri="{FF2B5EF4-FFF2-40B4-BE49-F238E27FC236}">
+                <a16:creationId xmlns:a16="http://schemas.microsoft.com/office/drawing/2014/main" id="{04D44445-54CB-4796-AC71-059BC818223D}"/>
+              </a:ext>
+            </a:extLst>
+          </p:cNvPr>
+          <p:cNvSpPr>
+            <a:spLocks xmlns:a="http://schemas.openxmlformats.org/drawingml/2006/main" noGrp="1"/>
+          </p:cNvSpPr>
+          <p:nvPr/>
+        </p:nvSpPr>
+        <p:spPr>
+          <a:xfrm xmlns:a="http://schemas.openxmlformats.org/drawingml/2006/main">
+            <a:off x="4762500" y="2857500"/>
+            <a:ext cx="3048000" cy="2095500"/>
+          </a:xfrm>
+          <a:prstGeom xmlns:a="http://schemas.openxmlformats.org/drawingml/2006/main" prst="roundRect">
+            <a:avLst>
+              <a:gd name="adj" fmla="val 3636"/>
+            </a:avLst>
+          </a:prstGeom>
+          <a:solidFill xmlns:a="http://schemas.openxmlformats.org/drawingml/2006/main">
+            <a:srgbClr val="FFFDF8">
+              <a:alpha val="96863"/>
+            </a:srgbClr>
+          </a:solidFill>
+          <a:ln xmlns:a="http://schemas.openxmlformats.org/drawingml/2006/main" w="11430">
+            <a:solidFill>
+              <a:srgbClr val="132024"/>
+            </a:solidFill>
+            <a:prstDash val="solid"/>
+          </a:ln>
+        </p:spPr>
+      </p:sp>
+      <p:sp>
+        <p:nvSpPr>
+          <p:cNvPr id="23" name="">
+            <a:extLst xmlns:a="http://schemas.openxmlformats.org/drawingml/2006/main">
+              <a:ext uri="{FF2B5EF4-FFF2-40B4-BE49-F238E27FC236}">
+                <a16:creationId xmlns:a16="http://schemas.microsoft.com/office/drawing/2014/main" id="{8C2E8ECA-0FF9-42A2-A133-7FD61862FCA2}"/>
+              </a:ext>
+            </a:extLst>
+          </p:cNvPr>
+          <p:cNvSpPr>
+            <a:spLocks xmlns:a="http://schemas.openxmlformats.org/drawingml/2006/main" noGrp="1"/>
+          </p:cNvSpPr>
+          <p:nvPr/>
+        </p:nvSpPr>
+        <p:spPr>
+          <a:xfrm xmlns:a="http://schemas.openxmlformats.org/drawingml/2006/main">
+            <a:off x="4819650" y="2914650"/>
+            <a:ext cx="2933700" cy="57150"/>
+          </a:xfrm>
+          <a:prstGeom xmlns:a="http://schemas.openxmlformats.org/drawingml/2006/main" prst="rect">
+            <a:avLst/>
+          </a:prstGeom>
+          <a:solidFill xmlns:a="http://schemas.openxmlformats.org/drawingml/2006/main">
+            <a:srgbClr val="C9972B"/>
+          </a:solidFill>
+          <a:ln xmlns:a="http://schemas.openxmlformats.org/drawingml/2006/main" w="0">
+            <a:solidFill>
+              <a:srgbClr val="000000">
+                <a:alpha val="0"/>
+              </a:srgbClr>
+            </a:solidFill>
+            <a:prstDash val="solid"/>
+          </a:ln>
+        </p:spPr>
+      </p:sp>
+      <p:sp>
+        <p:nvSpPr>
+          <p:cNvPr id="24" name="">
+            <a:extLst xmlns:a="http://schemas.openxmlformats.org/drawingml/2006/main">
+              <a:ext uri="{FF2B5EF4-FFF2-40B4-BE49-F238E27FC236}">
+                <a16:creationId xmlns:a16="http://schemas.microsoft.com/office/drawing/2014/main" id="{49FD9002-EB13-45DB-9E4F-165B53A541EC}"/>
+              </a:ext>
+            </a:extLst>
+          </p:cNvPr>
+          <p:cNvSpPr>
+            <a:spLocks xmlns:a="http://schemas.openxmlformats.org/drawingml/2006/main" noGrp="1"/>
+          </p:cNvSpPr>
+          <p:nvPr/>
+        </p:nvSpPr>
+        <p:spPr>
+          <a:xfrm xmlns:a="http://schemas.openxmlformats.org/drawingml/2006/main">
+            <a:off x="4972050" y="3048000"/>
+            <a:ext cx="2628900" cy="285750"/>
+          </a:xfrm>
+          <a:prstGeom xmlns:a="http://schemas.openxmlformats.org/drawingml/2006/main" prst="rect">
+            <a:avLst/>
+          </a:prstGeom>
+          <a:solidFill xmlns:a="http://schemas.openxmlformats.org/drawingml/2006/main">
+            <a:srgbClr val="000000">
+              <a:alpha val="0"/>
+            </a:srgbClr>
+          </a:solidFill>
+          <a:ln xmlns:a="http://schemas.openxmlformats.org/drawingml/2006/main" w="0">
+            <a:solidFill>
+              <a:srgbClr val="000000">
+                <a:alpha val="0"/>
+              </a:srgbClr>
+            </a:solidFill>
+            <a:prstDash val="solid"/>
+          </a:ln>
+        </p:spPr>
+        <p:txBody>
+          <a:bodyPr xmlns:a="http://schemas.openxmlformats.org/drawingml/2006/main" lIns="0" tIns="0" rIns="0" bIns="0" anchor="t"/>
+          <a:lstStyle xmlns:a="http://schemas.openxmlformats.org/drawingml/2006/main"/>
+          <a:p xmlns:a="http://schemas.openxmlformats.org/drawingml/2006/main">
+            <a:pPr algn="l">
+              <a:defRPr sz="1125" b="1">
+                <a:solidFill>
+                  <a:srgbClr val="0F5B3F"/>
+                </a:solidFill>
+              </a:defRPr>
+            </a:pPr>
+            <a:r>
+              <a:rPr sz="1125" b="1">
+                <a:solidFill>
+                  <a:srgbClr val="0F5B3F"/>
+                </a:solidFill>
+              </a:rPr>
+              <a:t>2장: benchmark axes</a:t>
+            </a:r>
+          </a:p>
+        </p:txBody>
+      </p:sp>
+      <p:sp>
+        <p:nvSpPr>
+          <p:cNvPr id="25" name="">
+            <a:extLst xmlns:a="http://schemas.openxmlformats.org/drawingml/2006/main">
+              <a:ext uri="{FF2B5EF4-FFF2-40B4-BE49-F238E27FC236}">
+                <a16:creationId xmlns:a16="http://schemas.microsoft.com/office/drawing/2014/main" id="{1F89B466-88DF-4BC0-8C97-F01C25DA5772}"/>
+              </a:ext>
+            </a:extLst>
+          </p:cNvPr>
+          <p:cNvSpPr>
+            <a:spLocks xmlns:a="http://schemas.openxmlformats.org/drawingml/2006/main" noGrp="1"/>
+          </p:cNvSpPr>
+          <p:nvPr/>
+        </p:nvSpPr>
+        <p:spPr>
+          <a:xfrm xmlns:a="http://schemas.openxmlformats.org/drawingml/2006/main">
+            <a:off x="4972050" y="3467100"/>
+            <a:ext cx="2628900" cy="1314450"/>
+          </a:xfrm>
+          <a:prstGeom xmlns:a="http://schemas.openxmlformats.org/drawingml/2006/main" prst="rect">
+            <a:avLst/>
+          </a:prstGeom>
+          <a:solidFill xmlns:a="http://schemas.openxmlformats.org/drawingml/2006/main">
+            <a:srgbClr val="000000">
+              <a:alpha val="0"/>
+            </a:srgbClr>
+          </a:solidFill>
+          <a:ln xmlns:a="http://schemas.openxmlformats.org/drawingml/2006/main" w="0">
+            <a:solidFill>
+              <a:srgbClr val="000000">
+                <a:alpha val="0"/>
+              </a:srgbClr>
+            </a:solidFill>
+            <a:prstDash val="solid"/>
+          </a:ln>
+        </p:spPr>
+        <p:txBody>
+          <a:bodyPr xmlns:a="http://schemas.openxmlformats.org/drawingml/2006/main" lIns="0" tIns="0" rIns="0" bIns="0" anchor="t"/>
+          <a:lstStyle xmlns:a="http://schemas.openxmlformats.org/drawingml/2006/main"/>
+          <a:p xmlns:a="http://schemas.openxmlformats.org/drawingml/2006/main">
+            <a:pPr algn="l">
+              <a:defRPr sz="1200" b="0">
+                <a:solidFill>
+                  <a:srgbClr val="132024"/>
+                </a:solidFill>
+              </a:defRPr>
+            </a:pPr>
+            <a:r>
+              <a:rPr sz="1200" b="0">
+                <a:solidFill>
+                  <a:srgbClr val="132024"/>
+                </a:solidFill>
+              </a:rPr>
+              <a:t>reproducibility, fidelity,</a:t>
+            </a:r>
+          </a:p>
+          <a:p xmlns:a="http://schemas.openxmlformats.org/drawingml/2006/main">
+            <a:pPr algn="l">
+              <a:defRPr sz="1200" b="0">
+                <a:solidFill>
+                  <a:srgbClr val="132024"/>
+                </a:solidFill>
+              </a:defRPr>
+            </a:pPr>
+            <a:r>
+              <a:rPr sz="1200" b="0">
+                <a:solidFill>
+                  <a:srgbClr val="132024"/>
+                </a:solidFill>
+              </a:rPr>
+              <a:t>timing, atlas alignment를</a:t>
+            </a:r>
+          </a:p>
+          <a:p xmlns:a="http://schemas.openxmlformats.org/drawingml/2006/main">
+            <a:pPr algn="l">
+              <a:defRPr sz="1200" b="0">
+                <a:solidFill>
+                  <a:srgbClr val="132024"/>
+                </a:solidFill>
+              </a:defRPr>
+            </a:pPr>
+            <a:r>
+              <a:rPr sz="1200" b="0">
+                <a:solidFill>
+                  <a:srgbClr val="132024"/>
+                </a:solidFill>
+              </a:rPr>
+              <a:t>비교 축으로 분리한다.</a:t>
+            </a:r>
+          </a:p>
+        </p:txBody>
+      </p:sp>
+      <p:sp>
+        <p:nvSpPr>
+          <p:cNvPr id="26" name="">
+            <a:extLst xmlns:a="http://schemas.openxmlformats.org/drawingml/2006/main">
+              <a:ext uri="{FF2B5EF4-FFF2-40B4-BE49-F238E27FC236}">
+                <a16:creationId xmlns:a16="http://schemas.microsoft.com/office/drawing/2014/main" id="{E710F060-A17A-4966-B7E9-91A05654D977}"/>
+              </a:ext>
+            </a:extLst>
+          </p:cNvPr>
+          <p:cNvSpPr>
+            <a:spLocks xmlns:a="http://schemas.openxmlformats.org/drawingml/2006/main" noGrp="1"/>
+          </p:cNvSpPr>
+          <p:nvPr/>
+        </p:nvSpPr>
+        <p:spPr>
+          <a:xfrm xmlns:a="http://schemas.openxmlformats.org/drawingml/2006/main">
+            <a:off x="7962900" y="3771900"/>
+            <a:ext cx="704850" cy="228600"/>
+          </a:xfrm>
+          <a:prstGeom xmlns:a="http://schemas.openxmlformats.org/drawingml/2006/main" prst="rightArrow">
+            <a:avLst/>
+          </a:prstGeom>
+          <a:solidFill xmlns:a="http://schemas.openxmlformats.org/drawingml/2006/main">
+            <a:srgbClr val="F4E8C8"/>
+          </a:solidFill>
+          <a:ln xmlns:a="http://schemas.openxmlformats.org/drawingml/2006/main" w="9525">
+            <a:solidFill>
+              <a:srgbClr val="132024"/>
+            </a:solidFill>
+            <a:prstDash val="solid"/>
+          </a:ln>
+        </p:spPr>
+      </p:sp>
+      <p:sp>
+        <p:nvSpPr>
+          <p:cNvPr id="27" name="">
+            <a:extLst xmlns:a="http://schemas.openxmlformats.org/drawingml/2006/main">
+              <a:ext uri="{FF2B5EF4-FFF2-40B4-BE49-F238E27FC236}">
+                <a16:creationId xmlns:a16="http://schemas.microsoft.com/office/drawing/2014/main" id="{D90DF1F1-9D95-41E0-800A-E27CFEF743E3}"/>
+              </a:ext>
+            </a:extLst>
+          </p:cNvPr>
+          <p:cNvSpPr>
+            <a:spLocks xmlns:a="http://schemas.openxmlformats.org/drawingml/2006/main" noGrp="1"/>
+          </p:cNvSpPr>
+          <p:nvPr/>
+        </p:nvSpPr>
+        <p:spPr>
+          <a:xfrm xmlns:a="http://schemas.openxmlformats.org/drawingml/2006/main">
+            <a:off x="8820150" y="2857500"/>
+            <a:ext cx="2647950" cy="2095500"/>
+          </a:xfrm>
+          <a:prstGeom xmlns:a="http://schemas.openxmlformats.org/drawingml/2006/main" prst="roundRect">
+            <a:avLst>
+              <a:gd name="adj" fmla="val 3636"/>
+            </a:avLst>
+          </a:prstGeom>
+          <a:solidFill xmlns:a="http://schemas.openxmlformats.org/drawingml/2006/main">
+            <a:srgbClr val="FFFDF8">
+              <a:alpha val="96863"/>
+            </a:srgbClr>
+          </a:solidFill>
+          <a:ln xmlns:a="http://schemas.openxmlformats.org/drawingml/2006/main" w="11430">
+            <a:solidFill>
+              <a:srgbClr val="132024"/>
+            </a:solidFill>
+            <a:prstDash val="solid"/>
+          </a:ln>
+        </p:spPr>
+      </p:sp>
+      <p:sp>
+        <p:nvSpPr>
+          <p:cNvPr id="28" name="">
+            <a:extLst xmlns:a="http://schemas.openxmlformats.org/drawingml/2006/main">
+              <a:ext uri="{FF2B5EF4-FFF2-40B4-BE49-F238E27FC236}">
+                <a16:creationId xmlns:a16="http://schemas.microsoft.com/office/drawing/2014/main" id="{9BFC0E46-58A2-4F6D-8CF0-DC7EF5730F2D}"/>
+              </a:ext>
+            </a:extLst>
+          </p:cNvPr>
+          <p:cNvSpPr>
+            <a:spLocks xmlns:a="http://schemas.openxmlformats.org/drawingml/2006/main" noGrp="1"/>
+          </p:cNvSpPr>
+          <p:nvPr/>
+        </p:nvSpPr>
+        <p:spPr>
+          <a:xfrm xmlns:a="http://schemas.openxmlformats.org/drawingml/2006/main">
+            <a:off x="8877300" y="2914650"/>
+            <a:ext cx="2533650" cy="57150"/>
+          </a:xfrm>
+          <a:prstGeom xmlns:a="http://schemas.openxmlformats.org/drawingml/2006/main" prst="rect">
+            <a:avLst/>
+          </a:prstGeom>
+          <a:solidFill xmlns:a="http://schemas.openxmlformats.org/drawingml/2006/main">
+            <a:srgbClr val="D66C60"/>
+          </a:solidFill>
+          <a:ln xmlns:a="http://schemas.openxmlformats.org/drawingml/2006/main" w="0">
+            <a:solidFill>
+              <a:srgbClr val="000000">
+                <a:alpha val="0"/>
+              </a:srgbClr>
+            </a:solidFill>
+            <a:prstDash val="solid"/>
+          </a:ln>
+        </p:spPr>
+      </p:sp>
+      <p:sp>
+        <p:nvSpPr>
+          <p:cNvPr id="29" name="">
+            <a:extLst xmlns:a="http://schemas.openxmlformats.org/drawingml/2006/main">
+              <a:ext uri="{FF2B5EF4-FFF2-40B4-BE49-F238E27FC236}">
+                <a16:creationId xmlns:a16="http://schemas.microsoft.com/office/drawing/2014/main" id="{13C098B3-68F1-4C74-BC1F-F1FBFD8D9DE5}"/>
+              </a:ext>
+            </a:extLst>
+          </p:cNvPr>
+          <p:cNvSpPr>
+            <a:spLocks xmlns:a="http://schemas.openxmlformats.org/drawingml/2006/main" noGrp="1"/>
+          </p:cNvSpPr>
+          <p:nvPr/>
+        </p:nvSpPr>
+        <p:spPr>
+          <a:xfrm xmlns:a="http://schemas.openxmlformats.org/drawingml/2006/main">
+            <a:off x="9029700" y="3048000"/>
+            <a:ext cx="2228850" cy="285750"/>
+          </a:xfrm>
+          <a:prstGeom xmlns:a="http://schemas.openxmlformats.org/drawingml/2006/main" prst="rect">
+            <a:avLst/>
+          </a:prstGeom>
+          <a:solidFill xmlns:a="http://schemas.openxmlformats.org/drawingml/2006/main">
+            <a:srgbClr val="000000">
+              <a:alpha val="0"/>
+            </a:srgbClr>
+          </a:solidFill>
+          <a:ln xmlns:a="http://schemas.openxmlformats.org/drawingml/2006/main" w="0">
+            <a:solidFill>
+              <a:srgbClr val="000000">
+                <a:alpha val="0"/>
+              </a:srgbClr>
+            </a:solidFill>
+            <a:prstDash val="solid"/>
+          </a:ln>
+        </p:spPr>
+        <p:txBody>
+          <a:bodyPr xmlns:a="http://schemas.openxmlformats.org/drawingml/2006/main" lIns="0" tIns="0" rIns="0" bIns="0" anchor="t"/>
+          <a:lstStyle xmlns:a="http://schemas.openxmlformats.org/drawingml/2006/main"/>
+          <a:p xmlns:a="http://schemas.openxmlformats.org/drawingml/2006/main">
+            <a:pPr algn="l">
+              <a:defRPr sz="1125" b="1">
+                <a:solidFill>
+                  <a:srgbClr val="0F5B3F"/>
+                </a:solidFill>
+              </a:defRPr>
+            </a:pPr>
+            <a:r>
+              <a:rPr sz="1125" b="1">
+                <a:solidFill>
+                  <a:srgbClr val="0F5B3F"/>
+                </a:solidFill>
+              </a:rPr>
+              <a:t>3장: design rule</a:t>
+            </a:r>
+          </a:p>
+        </p:txBody>
+      </p:sp>
+      <p:sp>
+        <p:nvSpPr>
+          <p:cNvPr id="30" name="">
+            <a:extLst xmlns:a="http://schemas.openxmlformats.org/drawingml/2006/main">
+              <a:ext uri="{FF2B5EF4-FFF2-40B4-BE49-F238E27FC236}">
+                <a16:creationId xmlns:a16="http://schemas.microsoft.com/office/drawing/2014/main" id="{268AAB7E-52C2-4317-BCEE-C93B059DBE97}"/>
+              </a:ext>
+            </a:extLst>
+          </p:cNvPr>
+          <p:cNvSpPr>
+            <a:spLocks xmlns:a="http://schemas.openxmlformats.org/drawingml/2006/main" noGrp="1"/>
+          </p:cNvSpPr>
+          <p:nvPr/>
+        </p:nvSpPr>
+        <p:spPr>
+          <a:xfrm xmlns:a="http://schemas.openxmlformats.org/drawingml/2006/main">
+            <a:off x="9029700" y="3467100"/>
+            <a:ext cx="2228850" cy="1314450"/>
+          </a:xfrm>
+          <a:prstGeom xmlns:a="http://schemas.openxmlformats.org/drawingml/2006/main" prst="rect">
+            <a:avLst/>
+          </a:prstGeom>
+          <a:solidFill xmlns:a="http://schemas.openxmlformats.org/drawingml/2006/main">
+            <a:srgbClr val="000000">
+              <a:alpha val="0"/>
+            </a:srgbClr>
+          </a:solidFill>
+          <a:ln xmlns:a="http://schemas.openxmlformats.org/drawingml/2006/main" w="0">
+            <a:solidFill>
+              <a:srgbClr val="000000">
+                <a:alpha val="0"/>
+              </a:srgbClr>
+            </a:solidFill>
+            <a:prstDash val="solid"/>
+          </a:ln>
+        </p:spPr>
+        <p:txBody>
+          <a:bodyPr xmlns:a="http://schemas.openxmlformats.org/drawingml/2006/main" lIns="0" tIns="0" rIns="0" bIns="0" anchor="t"/>
+          <a:lstStyle xmlns:a="http://schemas.openxmlformats.org/drawingml/2006/main"/>
+          <a:p xmlns:a="http://schemas.openxmlformats.org/drawingml/2006/main">
+            <a:pPr algn="l">
+              <a:defRPr sz="1200" b="0">
+                <a:solidFill>
+                  <a:srgbClr val="132024"/>
+                </a:solidFill>
+              </a:defRPr>
+            </a:pPr>
+            <a:r>
+              <a:rPr sz="1200" b="0">
+                <a:solidFill>
+                  <a:srgbClr val="132024"/>
+                </a:solidFill>
+              </a:rPr>
+              <a:t>마지막에는 readout-first</a:t>
+            </a:r>
+          </a:p>
+          <a:p xmlns:a="http://schemas.openxmlformats.org/drawingml/2006/main">
+            <a:pPr algn="l">
+              <a:defRPr sz="1200" b="0">
+                <a:solidFill>
+                  <a:srgbClr val="132024"/>
+                </a:solidFill>
+              </a:defRPr>
+            </a:pPr>
+            <a:r>
+              <a:rPr sz="1200" b="0">
+                <a:solidFill>
+                  <a:srgbClr val="132024"/>
+                </a:solidFill>
+              </a:rPr>
+              <a:t>selection rule로</a:t>
+            </a:r>
+          </a:p>
+          <a:p xmlns:a="http://schemas.openxmlformats.org/drawingml/2006/main">
+            <a:pPr algn="l">
+              <a:defRPr sz="1200" b="0">
+                <a:solidFill>
+                  <a:srgbClr val="132024"/>
+                </a:solidFill>
+              </a:defRPr>
+            </a:pPr>
+            <a:r>
+              <a:rPr sz="1200" b="0">
+                <a:solidFill>
+                  <a:srgbClr val="132024"/>
+                </a:solidFill>
+              </a:rPr>
+              <a:t>protocol choice를 다시</a:t>
+            </a:r>
+          </a:p>
+          <a:p xmlns:a="http://schemas.openxmlformats.org/drawingml/2006/main">
+            <a:pPr algn="l">
+              <a:defRPr sz="1200" b="0">
+                <a:solidFill>
+                  <a:srgbClr val="132024"/>
+                </a:solidFill>
+              </a:defRPr>
+            </a:pPr>
+            <a:r>
+              <a:rPr sz="1200" b="0">
+                <a:solidFill>
+                  <a:srgbClr val="132024"/>
+                </a:solidFill>
+              </a:rPr>
+              <a:t>묶는다.</a:t>
+            </a:r>
+          </a:p>
+        </p:txBody>
+      </p:sp>
+      <p:sp>
+        <p:nvSpPr>
+          <p:cNvPr id="31" name="">
+            <a:extLst xmlns:a="http://schemas.openxmlformats.org/drawingml/2006/main">
+              <a:ext uri="{FF2B5EF4-FFF2-40B4-BE49-F238E27FC236}">
+                <a16:creationId xmlns:a16="http://schemas.microsoft.com/office/drawing/2014/main" id="{32ECFEB9-4AD3-4D62-B805-483ADC962302}"/>
+              </a:ext>
+            </a:extLst>
+          </p:cNvPr>
+          <p:cNvSpPr>
+            <a:spLocks xmlns:a="http://schemas.openxmlformats.org/drawingml/2006/main" noGrp="1"/>
+          </p:cNvSpPr>
+          <p:nvPr/>
+        </p:nvSpPr>
+        <p:spPr>
+          <a:xfrm xmlns:a="http://schemas.openxmlformats.org/drawingml/2006/main">
+            <a:off x="704850" y="5353050"/>
+            <a:ext cx="10763250" cy="781050"/>
+          </a:xfrm>
+          <a:prstGeom xmlns:a="http://schemas.openxmlformats.org/drawingml/2006/main" prst="roundRect">
+            <a:avLst>
+              <a:gd name="adj" fmla="val 9756"/>
+            </a:avLst>
+          </a:prstGeom>
+          <a:solidFill xmlns:a="http://schemas.openxmlformats.org/drawingml/2006/main">
+            <a:srgbClr val="DDF4E8"/>
+          </a:solidFill>
+          <a:ln xmlns:a="http://schemas.openxmlformats.org/drawingml/2006/main" w="11430">
+            <a:solidFill>
+              <a:srgbClr val="132024"/>
+            </a:solidFill>
+            <a:prstDash val="solid"/>
+          </a:ln>
+        </p:spPr>
+      </p:sp>
+      <p:sp>
+        <p:nvSpPr>
+          <p:cNvPr id="32" name="">
+            <a:extLst xmlns:a="http://schemas.openxmlformats.org/drawingml/2006/main">
+              <a:ext uri="{FF2B5EF4-FFF2-40B4-BE49-F238E27FC236}">
+                <a16:creationId xmlns:a16="http://schemas.microsoft.com/office/drawing/2014/main" id="{78905D24-B19F-480C-972A-33C50E31BC45}"/>
+              </a:ext>
+            </a:extLst>
+          </p:cNvPr>
+          <p:cNvSpPr>
+            <a:spLocks xmlns:a="http://schemas.openxmlformats.org/drawingml/2006/main" noGrp="1"/>
+          </p:cNvSpPr>
+          <p:nvPr/>
+        </p:nvSpPr>
+        <p:spPr>
+          <a:xfrm xmlns:a="http://schemas.openxmlformats.org/drawingml/2006/main">
+            <a:off x="752475" y="5400675"/>
+            <a:ext cx="57150" cy="685800"/>
+          </a:xfrm>
+          <a:prstGeom xmlns:a="http://schemas.openxmlformats.org/drawingml/2006/main" prst="rect">
+            <a:avLst/>
+          </a:prstGeom>
+          <a:solidFill xmlns:a="http://schemas.openxmlformats.org/drawingml/2006/main">
+            <a:srgbClr val="1D9A69"/>
+          </a:solidFill>
+          <a:ln xmlns:a="http://schemas.openxmlformats.org/drawingml/2006/main" w="0">
+            <a:solidFill>
+              <a:srgbClr val="000000">
+                <a:alpha val="0"/>
+              </a:srgbClr>
+            </a:solidFill>
+            <a:prstDash val="solid"/>
+          </a:ln>
+        </p:spPr>
+      </p:sp>
+      <p:sp>
+        <p:nvSpPr>
+          <p:cNvPr id="33" name="">
+            <a:extLst xmlns:a="http://schemas.openxmlformats.org/drawingml/2006/main">
+              <a:ext uri="{FF2B5EF4-FFF2-40B4-BE49-F238E27FC236}">
+                <a16:creationId xmlns:a16="http://schemas.microsoft.com/office/drawing/2014/main" id="{1B491C86-7DEC-4C4D-8854-015425E9D143}"/>
+              </a:ext>
+            </a:extLst>
+          </p:cNvPr>
+          <p:cNvSpPr>
+            <a:spLocks xmlns:a="http://schemas.openxmlformats.org/drawingml/2006/main" noGrp="1"/>
+          </p:cNvSpPr>
+          <p:nvPr/>
+        </p:nvSpPr>
+        <p:spPr>
+          <a:xfrm xmlns:a="http://schemas.openxmlformats.org/drawingml/2006/main">
+            <a:off x="914400" y="5505450"/>
+            <a:ext cx="10382250" cy="514350"/>
+          </a:xfrm>
+          <a:prstGeom xmlns:a="http://schemas.openxmlformats.org/drawingml/2006/main" prst="rect">
+            <a:avLst/>
+          </a:prstGeom>
+          <a:solidFill xmlns:a="http://schemas.openxmlformats.org/drawingml/2006/main">
+            <a:srgbClr val="000000">
+              <a:alpha val="0"/>
+            </a:srgbClr>
+          </a:solidFill>
+          <a:ln xmlns:a="http://schemas.openxmlformats.org/drawingml/2006/main" w="0">
+            <a:solidFill>
+              <a:srgbClr val="000000">
+                <a:alpha val="0"/>
+              </a:srgbClr>
+            </a:solidFill>
+            <a:prstDash val="solid"/>
+          </a:ln>
+        </p:spPr>
+        <p:txBody>
+          <a:bodyPr xmlns:a="http://schemas.openxmlformats.org/drawingml/2006/main" lIns="0" tIns="0" rIns="0" bIns="0" anchor="t"/>
+          <a:lstStyle xmlns:a="http://schemas.openxmlformats.org/drawingml/2006/main"/>
+          <a:p xmlns:a="http://schemas.openxmlformats.org/drawingml/2006/main">
+            <a:pPr algn="l">
+              <a:defRPr sz="1350" b="0">
+                <a:solidFill>
+                  <a:srgbClr val="132024"/>
+                </a:solidFill>
+              </a:defRPr>
+            </a:pPr>
+            <a:r>
+              <a:rPr sz="1350" b="0">
+                <a:solidFill>
+                  <a:srgbClr val="132024"/>
+                </a:solidFill>
+              </a:rPr>
+              <a:t>따라서 리뷰논문의 중심 주장도 '어느 protocol이 최고인가'가 아니라 '어떤 질문과 readout이 어떤 protocol selection rule을 요구하는가'가 된다.</a:t>
+            </a:r>
+          </a:p>
+        </p:txBody>
+      </p:sp>
+      <p:sp>
+        <p:nvSpPr>
+          <p:cNvPr id="34" name="">
+            <a:extLst xmlns:a="http://schemas.openxmlformats.org/drawingml/2006/main">
+              <a:ext uri="{FF2B5EF4-FFF2-40B4-BE49-F238E27FC236}">
+                <a16:creationId xmlns:a16="http://schemas.microsoft.com/office/drawing/2014/main" id="{22C5B716-309E-44C1-8C65-05E2AB597294}"/>
+              </a:ext>
+            </a:extLst>
+          </p:cNvPr>
+          <p:cNvSpPr>
+            <a:spLocks xmlns:a="http://schemas.openxmlformats.org/drawingml/2006/main" noGrp="1"/>
+          </p:cNvSpPr>
+          <p:nvPr/>
+        </p:nvSpPr>
+        <p:spPr>
+          <a:xfrm xmlns:a="http://schemas.openxmlformats.org/drawingml/2006/main">
+            <a:off x="609600" y="6515100"/>
+            <a:ext cx="8572500" cy="171450"/>
+          </a:xfrm>
+          <a:prstGeom xmlns:a="http://schemas.openxmlformats.org/drawingml/2006/main" prst="rect">
+            <a:avLst/>
+          </a:prstGeom>
+          <a:solidFill xmlns:a="http://schemas.openxmlformats.org/drawingml/2006/main">
+            <a:srgbClr val="000000">
+              <a:alpha val="0"/>
+            </a:srgbClr>
+          </a:solidFill>
+          <a:ln xmlns:a="http://schemas.openxmlformats.org/drawingml/2006/main" w="0">
+            <a:solidFill>
+              <a:srgbClr val="000000">
+                <a:alpha val="0"/>
+              </a:srgbClr>
+            </a:solidFill>
+            <a:prstDash val="solid"/>
+          </a:ln>
+        </p:spPr>
+        <p:txBody>
+          <a:bodyPr xmlns:a="http://schemas.openxmlformats.org/drawingml/2006/main" lIns="0" tIns="0" rIns="0" bIns="0" anchor="t"/>
+          <a:lstStyle xmlns:a="http://schemas.openxmlformats.org/drawingml/2006/main"/>
+          <a:p xmlns:a="http://schemas.openxmlformats.org/drawingml/2006/main">
+            <a:pPr algn="l">
+              <a:defRPr sz="750" b="0">
+                <a:solidFill>
+                  <a:srgbClr val="6A767C"/>
+                </a:solidFill>
+              </a:defRPr>
+            </a:pPr>
+            <a:r>
+              <a:rPr sz="750" b="0">
+                <a:solidFill>
+                  <a:srgbClr val="6A767C"/>
+                </a:solidFill>
+              </a:rPr>
+              <a:t>이 연결고리가 발표의 질문 체인을 리뷰논문의 장 구조와 주장 구조로 바꿔준다.</a:t>
+            </a:r>
+          </a:p>
+        </p:txBody>
+      </p:sp>
+    </p:spTree>
+    <p:extLst>
+      <p:ext uri="{BB962C8B-B14F-4D97-AF65-F5344CB8AC3E}">
+        <p14:creationId xmlns:p14="http://schemas.microsoft.com/office/powerpoint/2010/main" val="102979179"/>
+      </p:ext>
+    </p:extLst>
+  </p:cSld>
+</p:sld>
+</file>
+
+<file path=ppt/slides/slide13.xml><?xml version="1.0" encoding="utf-8"?>
+<p:sld xmlns:p="http://schemas.openxmlformats.org/presentationml/2006/main">
+  <p:cSld>
+    <p:bg>
+      <p:bgPr>
+        <a:solidFill xmlns:a="http://schemas.openxmlformats.org/drawingml/2006/main">
+          <a:srgbClr val="F7F1E7"/>
+        </a:solidFill>
+      </p:bgPr>
+    </p:bg>
+    <p:spTree>
+      <p:nvGrpSpPr>
+        <p:cNvPr id="1" name=""/>
+        <p:cNvGrpSpPr/>
+        <p:nvPr/>
+      </p:nvGrpSpPr>
+      <p:grpSpPr>
+        <a:xfrm xmlns:a="http://schemas.openxmlformats.org/drawingml/2006/main"/>
+      </p:grpSpPr>
+      <p:sp>
+        <p:nvSpPr>
+          <p:cNvPr id="1" name="Slide Number Placeholder 5">
+            <a:extLst xmlns:a="http://schemas.openxmlformats.org/drawingml/2006/main">
+              <a:ext uri="{FF2B5EF4-FFF2-40B4-BE49-F238E27FC236}">
+                <a16:creationId xmlns:a16="http://schemas.microsoft.com/office/drawing/2014/main" id="{EDD0F201-AE24-4D54-ACE2-5F86EBC94A0A}"/>
+              </a:ext>
+            </a:extLst>
+          </p:cNvPr>
+          <p:cNvSpPr>
+            <a:spLocks xmlns:a="http://schemas.openxmlformats.org/drawingml/2006/main" noGrp="1"/>
+          </p:cNvSpPr>
+          <p:nvPr>
+            <p:ph type="sldNum" idx="12"/>
+          </p:nvPr>
+        </p:nvSpPr>
+        <p:spPr>
+          <a:xfrm xmlns:a="http://schemas.openxmlformats.org/drawingml/2006/main">
+            <a:off x="1524000" y="1122363"/>
+            <a:ext cx="9144000" cy="2387600"/>
+          </a:xfrm>
+        </p:spPr>
+        <p:txBody>
+          <a:bodyPr xmlns:a="http://schemas.openxmlformats.org/drawingml/2006/main"/>
+          <a:lstStyle xmlns:a="http://schemas.openxmlformats.org/drawingml/2006/main"/>
+          <a:p xmlns:a="http://schemas.openxmlformats.org/drawingml/2006/main">
+            <a:r>
+              <a:t/>
+            </a:r>
+          </a:p>
+        </p:txBody>
+      </p:sp>
+      <p:pic>
+        <p:nvPicPr>
+          <p:cNvPr id="2" name=""/>
+          <p:cNvPicPr>
+            <a:picLocks xmlns:a="http://schemas.openxmlformats.org/drawingml/2006/main" noChangeAspect="1"/>
+          </p:cNvPicPr>
+          <p:nvPr/>
+        </p:nvPicPr>
+        <p:blipFill>
+          <a:blip xmlns:r="http://schemas.openxmlformats.org/officeDocument/2006/relationships" xmlns:a="http://schemas.openxmlformats.org/drawingml/2006/main" r:embed="R5122b89414fe408d"/>
+          <a:srcRect xmlns:a="http://schemas.openxmlformats.org/drawingml/2006/main" l="0" t="21875" r="0" b="21875"/>
+          <a:stretch xmlns:a="http://schemas.openxmlformats.org/drawingml/2006/main">
+            <a:fillRect l="0" t="0" r="0" b="0"/>
+          </a:stretch>
+        </p:blipFill>
+        <p:spPr>
+          <a:xfrm xmlns:a="http://schemas.openxmlformats.org/drawingml/2006/main">
+            <a:off x="0" y="0"/>
+            <a:ext cx="12192000" cy="6858000"/>
+          </a:xfrm>
+          <a:prstGeom xmlns:a="http://schemas.openxmlformats.org/drawingml/2006/main" prst="rect">
+            <a:avLst/>
+          </a:prstGeom>
+        </p:spPr>
+      </p:pic>
+      <p:sp>
+        <p:nvSpPr>
+          <p:cNvPr id="3" name="">
+            <a:extLst xmlns:a="http://schemas.openxmlformats.org/drawingml/2006/main">
+              <a:ext uri="{FF2B5EF4-FFF2-40B4-BE49-F238E27FC236}">
+                <a16:creationId xmlns:a16="http://schemas.microsoft.com/office/drawing/2014/main" id="{37CBC1B4-A3FB-4463-BB49-6CC85157A7FC}"/>
+              </a:ext>
+            </a:extLst>
+          </p:cNvPr>
+          <p:cNvSpPr>
+            <a:spLocks xmlns:a="http://schemas.openxmlformats.org/drawingml/2006/main" noGrp="1"/>
+          </p:cNvSpPr>
+          <p:nvPr/>
+        </p:nvSpPr>
+        <p:spPr>
+          <a:xfrm xmlns:a="http://schemas.openxmlformats.org/drawingml/2006/main">
+            <a:off x="7867650" y="781050"/>
+            <a:ext cx="3638550" cy="3638550"/>
+          </a:xfrm>
+          <a:prstGeom xmlns:a="http://schemas.openxmlformats.org/drawingml/2006/main" prst="ellipse">
+            <a:avLst/>
+          </a:prstGeom>
+          <a:solidFill xmlns:a="http://schemas.openxmlformats.org/drawingml/2006/main">
+            <a:srgbClr val="E4F5EC"/>
+          </a:solidFill>
+          <a:ln xmlns:a="http://schemas.openxmlformats.org/drawingml/2006/main" w="0">
+            <a:solidFill>
+              <a:srgbClr val="000000">
+                <a:alpha val="0"/>
+              </a:srgbClr>
+            </a:solidFill>
+            <a:prstDash val="solid"/>
+          </a:ln>
+        </p:spPr>
+      </p:sp>
+      <p:sp>
+        <p:nvSpPr>
+          <p:cNvPr id="4" name="">
+            <a:extLst xmlns:a="http://schemas.openxmlformats.org/drawingml/2006/main">
+              <a:ext uri="{FF2B5EF4-FFF2-40B4-BE49-F238E27FC236}">
+                <a16:creationId xmlns:a16="http://schemas.microsoft.com/office/drawing/2014/main" id="{37178373-5B0F-4C17-9254-CA1EE2F79358}"/>
+              </a:ext>
+            </a:extLst>
+          </p:cNvPr>
+          <p:cNvSpPr>
+            <a:spLocks xmlns:a="http://schemas.openxmlformats.org/drawingml/2006/main" noGrp="1"/>
+          </p:cNvSpPr>
+          <p:nvPr/>
+        </p:nvSpPr>
+        <p:spPr>
+          <a:xfrm xmlns:a="http://schemas.openxmlformats.org/drawingml/2006/main">
+            <a:off x="9220200" y="4152900"/>
+            <a:ext cx="1962150" cy="1962150"/>
+          </a:xfrm>
+          <a:prstGeom xmlns:a="http://schemas.openxmlformats.org/drawingml/2006/main" prst="ellipse">
+            <a:avLst/>
+          </a:prstGeom>
+          <a:solidFill xmlns:a="http://schemas.openxmlformats.org/drawingml/2006/main">
+            <a:srgbClr val="F6EAD0"/>
+          </a:solidFill>
+          <a:ln xmlns:a="http://schemas.openxmlformats.org/drawingml/2006/main" w="0">
+            <a:solidFill>
+              <a:srgbClr val="000000">
+                <a:alpha val="0"/>
+              </a:srgbClr>
+            </a:solidFill>
+            <a:prstDash val="solid"/>
+          </a:ln>
+        </p:spPr>
+      </p:sp>
+      <p:sp>
+        <p:nvSpPr>
+          <p:cNvPr id="5" name="">
+            <a:extLst xmlns:a="http://schemas.openxmlformats.org/drawingml/2006/main">
+              <a:ext uri="{FF2B5EF4-FFF2-40B4-BE49-F238E27FC236}">
+                <a16:creationId xmlns:a16="http://schemas.microsoft.com/office/drawing/2014/main" id="{FF0B72CB-53D9-4DF8-8C7F-D979129B0094}"/>
+              </a:ext>
+            </a:extLst>
+          </p:cNvPr>
+          <p:cNvSpPr>
+            <a:spLocks xmlns:a="http://schemas.openxmlformats.org/drawingml/2006/main" noGrp="1"/>
+          </p:cNvSpPr>
+          <p:nvPr/>
+        </p:nvSpPr>
+        <p:spPr>
+          <a:xfrm xmlns:a="http://schemas.openxmlformats.org/drawingml/2006/main">
+            <a:off x="8534400" y="1409700"/>
+            <a:ext cx="2457450" cy="1409700"/>
+          </a:xfrm>
+          <a:prstGeom xmlns:a="http://schemas.openxmlformats.org/drawingml/2006/main" prst="roundRect">
+            <a:avLst>
+              <a:gd name="adj" fmla="val 5405"/>
+            </a:avLst>
+          </a:prstGeom>
+          <a:solidFill xmlns:a="http://schemas.openxmlformats.org/drawingml/2006/main">
+            <a:srgbClr val="FFFDF8">
+              <a:alpha val="96863"/>
+            </a:srgbClr>
+          </a:solidFill>
+          <a:ln xmlns:a="http://schemas.openxmlformats.org/drawingml/2006/main" w="9525">
+            <a:solidFill>
+              <a:srgbClr val="132024"/>
+            </a:solidFill>
+            <a:prstDash val="solid"/>
+          </a:ln>
+        </p:spPr>
+      </p:sp>
+      <p:sp>
+        <p:nvSpPr>
+          <p:cNvPr id="6" name="">
+            <a:extLst xmlns:a="http://schemas.openxmlformats.org/drawingml/2006/main">
+              <a:ext uri="{FF2B5EF4-FFF2-40B4-BE49-F238E27FC236}">
+                <a16:creationId xmlns:a16="http://schemas.microsoft.com/office/drawing/2014/main" id="{30A19F84-69A2-40F8-8FBE-A75E30148FA8}"/>
+              </a:ext>
+            </a:extLst>
+          </p:cNvPr>
+          <p:cNvSpPr>
+            <a:spLocks xmlns:a="http://schemas.openxmlformats.org/drawingml/2006/main" noGrp="1"/>
+          </p:cNvSpPr>
+          <p:nvPr/>
+        </p:nvSpPr>
+        <p:spPr>
+          <a:xfrm xmlns:a="http://schemas.openxmlformats.org/drawingml/2006/main">
+            <a:off x="9010650" y="3067050"/>
+            <a:ext cx="2152650" cy="1123950"/>
+          </a:xfrm>
+          <a:prstGeom xmlns:a="http://schemas.openxmlformats.org/drawingml/2006/main" prst="roundRect">
+            <a:avLst>
+              <a:gd name="adj" fmla="val 6780"/>
+            </a:avLst>
+          </a:prstGeom>
+          <a:solidFill xmlns:a="http://schemas.openxmlformats.org/drawingml/2006/main">
+            <a:srgbClr val="FFFDF8">
+              <a:alpha val="96863"/>
+            </a:srgbClr>
+          </a:solidFill>
+          <a:ln xmlns:a="http://schemas.openxmlformats.org/drawingml/2006/main" w="9525">
+            <a:solidFill>
+              <a:srgbClr val="132024"/>
+            </a:solidFill>
+            <a:prstDash val="solid"/>
+          </a:ln>
+        </p:spPr>
+      </p:sp>
+      <p:sp>
+        <p:nvSpPr>
+          <p:cNvPr id="7" name="">
+            <a:extLst xmlns:a="http://schemas.openxmlformats.org/drawingml/2006/main">
+              <a:ext uri="{FF2B5EF4-FFF2-40B4-BE49-F238E27FC236}">
+                <a16:creationId xmlns:a16="http://schemas.microsoft.com/office/drawing/2014/main" id="{4A31B9A8-C3FA-464C-BF2B-4C402B97B8EA}"/>
+              </a:ext>
+            </a:extLst>
+          </p:cNvPr>
+          <p:cNvSpPr>
+            <a:spLocks xmlns:a="http://schemas.openxmlformats.org/drawingml/2006/main" noGrp="1"/>
+          </p:cNvSpPr>
+          <p:nvPr/>
+        </p:nvSpPr>
+        <p:spPr>
+          <a:xfrm xmlns:a="http://schemas.openxmlformats.org/drawingml/2006/main">
+            <a:off x="8039100" y="4629150"/>
+            <a:ext cx="2000250" cy="914400"/>
+          </a:xfrm>
+          <a:prstGeom xmlns:a="http://schemas.openxmlformats.org/drawingml/2006/main" prst="roundRect">
+            <a:avLst>
+              <a:gd name="adj" fmla="val 8333"/>
+            </a:avLst>
+          </a:prstGeom>
+          <a:solidFill xmlns:a="http://schemas.openxmlformats.org/drawingml/2006/main">
+            <a:srgbClr val="FFFDF8">
+              <a:alpha val="96863"/>
+            </a:srgbClr>
+          </a:solidFill>
+          <a:ln xmlns:a="http://schemas.openxmlformats.org/drawingml/2006/main" w="9525">
+            <a:solidFill>
+              <a:srgbClr val="132024"/>
+            </a:solidFill>
+            <a:prstDash val="solid"/>
+          </a:ln>
+        </p:spPr>
+      </p:sp>
+      <p:sp>
+        <p:nvSpPr>
+          <p:cNvPr id="8" name="">
+            <a:extLst xmlns:a="http://schemas.openxmlformats.org/drawingml/2006/main">
+              <a:ext uri="{FF2B5EF4-FFF2-40B4-BE49-F238E27FC236}">
+                <a16:creationId xmlns:a16="http://schemas.microsoft.com/office/drawing/2014/main" id="{BB33A0B5-F45D-4CFE-8B25-8F68D12F94A7}"/>
+              </a:ext>
+            </a:extLst>
+          </p:cNvPr>
+          <p:cNvSpPr>
+            <a:spLocks xmlns:a="http://schemas.openxmlformats.org/drawingml/2006/main" noGrp="1"/>
+          </p:cNvSpPr>
+          <p:nvPr/>
+        </p:nvSpPr>
+        <p:spPr>
+          <a:xfrm xmlns:a="http://schemas.openxmlformats.org/drawingml/2006/main">
+            <a:off x="0" y="0"/>
+            <a:ext cx="12192000" cy="6858000"/>
+          </a:xfrm>
+          <a:prstGeom xmlns:a="http://schemas.openxmlformats.org/drawingml/2006/main" prst="rect">
+            <a:avLst/>
+          </a:prstGeom>
+          <a:solidFill xmlns:a="http://schemas.openxmlformats.org/drawingml/2006/main">
+            <a:srgbClr val="FFFCF7">
+              <a:alpha val="80000"/>
+            </a:srgbClr>
+          </a:solidFill>
+          <a:ln xmlns:a="http://schemas.openxmlformats.org/drawingml/2006/main" w="0">
+            <a:solidFill>
+              <a:srgbClr val="000000">
+                <a:alpha val="0"/>
+              </a:srgbClr>
+            </a:solidFill>
+            <a:prstDash val="solid"/>
+          </a:ln>
+        </p:spPr>
+      </p:sp>
+      <p:sp>
+        <p:nvSpPr>
+          <p:cNvPr id="9" name="">
+            <a:extLst xmlns:a="http://schemas.openxmlformats.org/drawingml/2006/main">
+              <a:ext uri="{FF2B5EF4-FFF2-40B4-BE49-F238E27FC236}">
+                <a16:creationId xmlns:a16="http://schemas.microsoft.com/office/drawing/2014/main" id="{C65335AB-68BE-470F-8372-CADAAFC9FFAF}"/>
+              </a:ext>
+            </a:extLst>
+          </p:cNvPr>
+          <p:cNvSpPr>
+            <a:spLocks xmlns:a="http://schemas.openxmlformats.org/drawingml/2006/main" noGrp="1"/>
+          </p:cNvSpPr>
+          <p:nvPr/>
+        </p:nvSpPr>
+        <p:spPr>
+          <a:xfrm xmlns:a="http://schemas.openxmlformats.org/drawingml/2006/main">
+            <a:off x="609600" y="323850"/>
+            <a:ext cx="4762500" cy="228600"/>
+          </a:xfrm>
+          <a:prstGeom xmlns:a="http://schemas.openxmlformats.org/drawingml/2006/main" prst="rect">
+            <a:avLst/>
+          </a:prstGeom>
+          <a:solidFill xmlns:a="http://schemas.openxmlformats.org/drawingml/2006/main">
+            <a:srgbClr val="000000">
+              <a:alpha val="0"/>
+            </a:srgbClr>
+          </a:solidFill>
+          <a:ln xmlns:a="http://schemas.openxmlformats.org/drawingml/2006/main" w="0">
+            <a:solidFill>
+              <a:srgbClr val="000000">
+                <a:alpha val="0"/>
+              </a:srgbClr>
+            </a:solidFill>
+            <a:prstDash val="solid"/>
+          </a:ln>
+        </p:spPr>
+        <p:txBody>
+          <a:bodyPr xmlns:a="http://schemas.openxmlformats.org/drawingml/2006/main" lIns="0" tIns="0" rIns="0" bIns="0" anchor="t"/>
+          <a:lstStyle xmlns:a="http://schemas.openxmlformats.org/drawingml/2006/main"/>
+          <a:p xmlns:a="http://schemas.openxmlformats.org/drawingml/2006/main">
+            <a:pPr algn="l">
+              <a:defRPr sz="975" b="1">
+                <a:solidFill>
+                  <a:srgbClr val="0F5B3F"/>
+                </a:solidFill>
+              </a:defRPr>
+            </a:pPr>
+            <a:r>
+              <a:rPr sz="975" b="1">
+                <a:solidFill>
+                  <a:srgbClr val="0F5B3F"/>
+                </a:solidFill>
+              </a:rPr>
+              <a:t>CLOSING</a:t>
+            </a:r>
+          </a:p>
+        </p:txBody>
+      </p:sp>
+      <p:sp>
+        <p:nvSpPr>
+          <p:cNvPr id="10" name="">
+            <a:extLst xmlns:a="http://schemas.openxmlformats.org/drawingml/2006/main">
+              <a:ext uri="{FF2B5EF4-FFF2-40B4-BE49-F238E27FC236}">
+                <a16:creationId xmlns:a16="http://schemas.microsoft.com/office/drawing/2014/main" id="{D79E942E-1F14-4F0D-83A3-5665CB1EC6B3}"/>
+              </a:ext>
+            </a:extLst>
+          </p:cNvPr>
+          <p:cNvSpPr>
+            <a:spLocks xmlns:a="http://schemas.openxmlformats.org/drawingml/2006/main" noGrp="1"/>
+          </p:cNvSpPr>
+          <p:nvPr/>
+        </p:nvSpPr>
+        <p:spPr>
+          <a:xfrm xmlns:a="http://schemas.openxmlformats.org/drawingml/2006/main">
+            <a:off x="10610850" y="323850"/>
+            <a:ext cx="990600" cy="228600"/>
+          </a:xfrm>
+          <a:prstGeom xmlns:a="http://schemas.openxmlformats.org/drawingml/2006/main" prst="rect">
+            <a:avLst/>
+          </a:prstGeom>
+          <a:solidFill xmlns:a="http://schemas.openxmlformats.org/drawingml/2006/main">
+            <a:srgbClr val="000000">
+              <a:alpha val="0"/>
+            </a:srgbClr>
+          </a:solidFill>
+          <a:ln xmlns:a="http://schemas.openxmlformats.org/drawingml/2006/main" w="0">
+            <a:solidFill>
+              <a:srgbClr val="000000">
+                <a:alpha val="0"/>
+              </a:srgbClr>
+            </a:solidFill>
+            <a:prstDash val="solid"/>
+          </a:ln>
+        </p:spPr>
+        <p:txBody>
+          <a:bodyPr xmlns:a="http://schemas.openxmlformats.org/drawingml/2006/main" lIns="0" tIns="0" rIns="0" bIns="0" anchor="t"/>
+          <a:lstStyle xmlns:a="http://schemas.openxmlformats.org/drawingml/2006/main"/>
+          <a:p xmlns:a="http://schemas.openxmlformats.org/drawingml/2006/main">
+            <a:pPr algn="r">
+              <a:defRPr sz="975" b="1">
+                <a:solidFill>
+                  <a:srgbClr val="0F5B3F"/>
+                </a:solidFill>
+              </a:defRPr>
+            </a:pPr>
+            <a:r>
+              <a:rPr sz="975" b="1">
+                <a:solidFill>
+                  <a:srgbClr val="0F5B3F"/>
+                </a:solidFill>
+              </a:rPr>
+              <a:t>13 / 13</a:t>
+            </a:r>
+          </a:p>
+        </p:txBody>
+      </p:sp>
+      <p:sp>
+        <p:nvSpPr>
+          <p:cNvPr id="11" name="">
+            <a:extLst xmlns:a="http://schemas.openxmlformats.org/drawingml/2006/main">
+              <a:ext uri="{FF2B5EF4-FFF2-40B4-BE49-F238E27FC236}">
+                <a16:creationId xmlns:a16="http://schemas.microsoft.com/office/drawing/2014/main" id="{80943B30-DDA8-41F1-AEB5-CA91814B4D4A}"/>
+              </a:ext>
+            </a:extLst>
+          </p:cNvPr>
+          <p:cNvSpPr>
+            <a:spLocks xmlns:a="http://schemas.openxmlformats.org/drawingml/2006/main" noGrp="1"/>
+          </p:cNvSpPr>
+          <p:nvPr/>
+        </p:nvSpPr>
+        <p:spPr>
+          <a:xfrm xmlns:a="http://schemas.openxmlformats.org/drawingml/2006/main">
+            <a:off x="609600" y="609600"/>
+            <a:ext cx="10972800" cy="19050"/>
+          </a:xfrm>
+          <a:prstGeom xmlns:a="http://schemas.openxmlformats.org/drawingml/2006/main" prst="rect">
+            <a:avLst/>
+          </a:prstGeom>
+          <a:solidFill xmlns:a="http://schemas.openxmlformats.org/drawingml/2006/main">
+            <a:srgbClr val="132024"/>
+          </a:solidFill>
+          <a:ln xmlns:a="http://schemas.openxmlformats.org/drawingml/2006/main" w="0">
+            <a:solidFill>
+              <a:srgbClr val="000000">
+                <a:alpha val="0"/>
+              </a:srgbClr>
+            </a:solidFill>
+            <a:prstDash val="solid"/>
+          </a:ln>
+        </p:spPr>
+      </p:sp>
+      <p:sp>
+        <p:nvSpPr>
+          <p:cNvPr id="12" name="">
+            <a:extLst xmlns:a="http://schemas.openxmlformats.org/drawingml/2006/main">
+              <a:ext uri="{FF2B5EF4-FFF2-40B4-BE49-F238E27FC236}">
+                <a16:creationId xmlns:a16="http://schemas.microsoft.com/office/drawing/2014/main" id="{315D77E8-FE71-4FFE-B614-C084ADE3A62F}"/>
+              </a:ext>
+            </a:extLst>
+          </p:cNvPr>
+          <p:cNvSpPr>
+            <a:spLocks xmlns:a="http://schemas.openxmlformats.org/drawingml/2006/main" noGrp="1"/>
+          </p:cNvSpPr>
+          <p:nvPr/>
+        </p:nvSpPr>
+        <p:spPr>
+          <a:xfrm xmlns:a="http://schemas.openxmlformats.org/drawingml/2006/main">
+            <a:off x="542925" y="542925"/>
+            <a:ext cx="152400" cy="152400"/>
+          </a:xfrm>
+          <a:prstGeom xmlns:a="http://schemas.openxmlformats.org/drawingml/2006/main" prst="ellipse">
+            <a:avLst/>
+          </a:prstGeom>
+          <a:solidFill xmlns:a="http://schemas.openxmlformats.org/drawingml/2006/main">
+            <a:srgbClr val="1D9A69"/>
+          </a:solidFill>
+          <a:ln xmlns:a="http://schemas.openxmlformats.org/drawingml/2006/main" w="19050">
+            <a:solidFill>
+              <a:srgbClr val="132024"/>
+            </a:solidFill>
+            <a:prstDash val="solid"/>
+          </a:ln>
+        </p:spPr>
+      </p:sp>
+      <p:sp>
+        <p:nvSpPr>
+          <p:cNvPr id="13" name="">
+            <a:extLst xmlns:a="http://schemas.openxmlformats.org/drawingml/2006/main">
+              <a:ext uri="{FF2B5EF4-FFF2-40B4-BE49-F238E27FC236}">
+                <a16:creationId xmlns:a16="http://schemas.microsoft.com/office/drawing/2014/main" id="{9FC8EE7E-4590-4594-A3E1-F84180900D34}"/>
+              </a:ext>
+            </a:extLst>
+          </p:cNvPr>
+          <p:cNvSpPr>
+            <a:spLocks xmlns:a="http://schemas.openxmlformats.org/drawingml/2006/main" noGrp="1"/>
+          </p:cNvSpPr>
+          <p:nvPr/>
+        </p:nvSpPr>
+        <p:spPr>
+          <a:xfrm xmlns:a="http://schemas.openxmlformats.org/drawingml/2006/main">
+            <a:off x="609600" y="838200"/>
+            <a:ext cx="7239000" cy="1123950"/>
+          </a:xfrm>
+          <a:prstGeom xmlns:a="http://schemas.openxmlformats.org/drawingml/2006/main" prst="rect">
+            <a:avLst/>
+          </a:prstGeom>
+          <a:solidFill xmlns:a="http://schemas.openxmlformats.org/drawingml/2006/main">
+            <a:srgbClr val="000000">
+              <a:alpha val="0"/>
+            </a:srgbClr>
+          </a:solidFill>
+          <a:ln xmlns:a="http://schemas.openxmlformats.org/drawingml/2006/main" w="0">
+            <a:solidFill>
+              <a:srgbClr val="000000">
+                <a:alpha val="0"/>
+              </a:srgbClr>
+            </a:solidFill>
+            <a:prstDash val="solid"/>
+          </a:ln>
+        </p:spPr>
+        <p:txBody>
+          <a:bodyPr xmlns:a="http://schemas.openxmlformats.org/drawingml/2006/main" lIns="0" tIns="0" rIns="0" bIns="0" anchor="t"/>
+          <a:lstStyle xmlns:a="http://schemas.openxmlformats.org/drawingml/2006/main"/>
+          <a:p xmlns:a="http://schemas.openxmlformats.org/drawingml/2006/main">
+            <a:pPr algn="l">
+              <a:defRPr sz="2850" b="1">
+                <a:solidFill>
+                  <a:srgbClr val="132024"/>
+                </a:solidFill>
+              </a:defRPr>
+            </a:pPr>
+            <a:r>
+              <a:rPr sz="2850" b="1">
+                <a:solidFill>
+                  <a:srgbClr val="132024"/>
+                </a:solidFill>
+              </a:rPr>
               <a:t>정리: 좋은 질문은</a:t>
             </a:r>
           </a:p>
@@ -8275,7 +10039,7 @@
           <p:cNvPr id="14" name="">
             <a:extLst xmlns:a="http://schemas.openxmlformats.org/drawingml/2006/main">
               <a:ext uri="{FF2B5EF4-FFF2-40B4-BE49-F238E27FC236}">
-                <a16:creationId xmlns:a16="http://schemas.microsoft.com/office/drawing/2014/main" id="{FC204420-6ADF-4D67-994B-BA6B4007DDDE}"/>
+                <a16:creationId xmlns:a16="http://schemas.microsoft.com/office/drawing/2014/main" id="{CFBE256E-54D8-46E0-9613-D436FF7FE282}"/>
               </a:ext>
             </a:extLst>
           </p:cNvPr>
@@ -8312,7 +10076,7 @@
           <p:cNvPr id="15" name="">
             <a:extLst xmlns:a="http://schemas.openxmlformats.org/drawingml/2006/main">
               <a:ext uri="{FF2B5EF4-FFF2-40B4-BE49-F238E27FC236}">
-                <a16:creationId xmlns:a16="http://schemas.microsoft.com/office/drawing/2014/main" id="{9209A18E-E9B6-45DD-A455-1ED8AE0E0ADE}"/>
+                <a16:creationId xmlns:a16="http://schemas.microsoft.com/office/drawing/2014/main" id="{9B23C56F-9331-4F4C-B916-4B9F094A8CA6}"/>
               </a:ext>
             </a:extLst>
           </p:cNvPr>
@@ -8347,7 +10111,7 @@
           <p:cNvPr id="16" name="">
             <a:extLst xmlns:a="http://schemas.openxmlformats.org/drawingml/2006/main">
               <a:ext uri="{FF2B5EF4-FFF2-40B4-BE49-F238E27FC236}">
-                <a16:creationId xmlns:a16="http://schemas.microsoft.com/office/drawing/2014/main" id="{53114F34-ECD2-47AE-9750-7EFCD885A2A2}"/>
+                <a16:creationId xmlns:a16="http://schemas.microsoft.com/office/drawing/2014/main" id="{B3FF6EF0-8637-4EE1-9614-892E98F452FB}"/>
               </a:ext>
             </a:extLst>
           </p:cNvPr>
@@ -8405,7 +10169,7 @@
           <p:cNvPr id="17" name="">
             <a:extLst xmlns:a="http://schemas.openxmlformats.org/drawingml/2006/main">
               <a:ext uri="{FF2B5EF4-FFF2-40B4-BE49-F238E27FC236}">
-                <a16:creationId xmlns:a16="http://schemas.microsoft.com/office/drawing/2014/main" id="{E9762C3E-5BFE-4E89-9858-4F96FCA60DA1}"/>
+                <a16:creationId xmlns:a16="http://schemas.microsoft.com/office/drawing/2014/main" id="{579D62AF-488D-4AAE-9CD6-3B8BD5E95C16}"/>
               </a:ext>
             </a:extLst>
           </p:cNvPr>
@@ -8497,7 +10261,7 @@
           <p:cNvPr id="18" name="">
             <a:extLst xmlns:a="http://schemas.openxmlformats.org/drawingml/2006/main">
               <a:ext uri="{FF2B5EF4-FFF2-40B4-BE49-F238E27FC236}">
-                <a16:creationId xmlns:a16="http://schemas.microsoft.com/office/drawing/2014/main" id="{70B5254B-ACCD-4D1C-9F67-2AA61F079F11}"/>
+                <a16:creationId xmlns:a16="http://schemas.microsoft.com/office/drawing/2014/main" id="{A8F071A0-67D0-492D-8DD4-4B3BD5E81478}"/>
               </a:ext>
             </a:extLst>
           </p:cNvPr>
@@ -8534,7 +10298,7 @@
           <p:cNvPr id="19" name="">
             <a:extLst xmlns:a="http://schemas.openxmlformats.org/drawingml/2006/main">
               <a:ext uri="{FF2B5EF4-FFF2-40B4-BE49-F238E27FC236}">
-                <a16:creationId xmlns:a16="http://schemas.microsoft.com/office/drawing/2014/main" id="{4B43475D-2D26-4759-86E7-44C3E684D0B3}"/>
+                <a16:creationId xmlns:a16="http://schemas.microsoft.com/office/drawing/2014/main" id="{E81F94B3-87E5-46F3-8D2F-D8D459206921}"/>
               </a:ext>
             </a:extLst>
           </p:cNvPr>
@@ -8569,7 +10333,7 @@
           <p:cNvPr id="20" name="">
             <a:extLst xmlns:a="http://schemas.openxmlformats.org/drawingml/2006/main">
               <a:ext uri="{FF2B5EF4-FFF2-40B4-BE49-F238E27FC236}">
-                <a16:creationId xmlns:a16="http://schemas.microsoft.com/office/drawing/2014/main" id="{A82723D2-9D1C-41E6-B378-B4726A082954}"/>
+                <a16:creationId xmlns:a16="http://schemas.microsoft.com/office/drawing/2014/main" id="{89A62A0C-4B19-4938-9CB9-8D8D664A151A}"/>
               </a:ext>
             </a:extLst>
           </p:cNvPr>
@@ -8627,7 +10391,7 @@
           <p:cNvPr id="21" name="">
             <a:extLst xmlns:a="http://schemas.openxmlformats.org/drawingml/2006/main">
               <a:ext uri="{FF2B5EF4-FFF2-40B4-BE49-F238E27FC236}">
-                <a16:creationId xmlns:a16="http://schemas.microsoft.com/office/drawing/2014/main" id="{3FD1B59D-F125-4B43-BE10-F3573BCFE656}"/>
+                <a16:creationId xmlns:a16="http://schemas.microsoft.com/office/drawing/2014/main" id="{FE8A9731-CCB4-4221-95CE-9B804670BFDE}"/>
               </a:ext>
             </a:extLst>
           </p:cNvPr>
@@ -8719,7 +10483,7 @@
           <p:cNvPr id="22" name="">
             <a:extLst xmlns:a="http://schemas.openxmlformats.org/drawingml/2006/main">
               <a:ext uri="{FF2B5EF4-FFF2-40B4-BE49-F238E27FC236}">
-                <a16:creationId xmlns:a16="http://schemas.microsoft.com/office/drawing/2014/main" id="{EE253744-BD0D-4069-894C-EA795F9ECD3E}"/>
+                <a16:creationId xmlns:a16="http://schemas.microsoft.com/office/drawing/2014/main" id="{431AFB51-AF34-48CE-AC7C-5CC49243A421}"/>
               </a:ext>
             </a:extLst>
           </p:cNvPr>
@@ -8756,7 +10520,7 @@
           <p:cNvPr id="23" name="">
             <a:extLst xmlns:a="http://schemas.openxmlformats.org/drawingml/2006/main">
               <a:ext uri="{FF2B5EF4-FFF2-40B4-BE49-F238E27FC236}">
-                <a16:creationId xmlns:a16="http://schemas.microsoft.com/office/drawing/2014/main" id="{2D707A71-4E3F-46E1-9732-88E0B9141339}"/>
+                <a16:creationId xmlns:a16="http://schemas.microsoft.com/office/drawing/2014/main" id="{40931521-B306-411D-AB1E-28271A26A589}"/>
               </a:ext>
             </a:extLst>
           </p:cNvPr>
@@ -8791,7 +10555,7 @@
           <p:cNvPr id="24" name="">
             <a:extLst xmlns:a="http://schemas.openxmlformats.org/drawingml/2006/main">
               <a:ext uri="{FF2B5EF4-FFF2-40B4-BE49-F238E27FC236}">
-                <a16:creationId xmlns:a16="http://schemas.microsoft.com/office/drawing/2014/main" id="{7282EE9B-4BF9-44D8-8AEF-641926AABD04}"/>
+                <a16:creationId xmlns:a16="http://schemas.microsoft.com/office/drawing/2014/main" id="{46B0C752-F48A-4CF8-934A-12AE0D35FFEA}"/>
               </a:ext>
             </a:extLst>
           </p:cNvPr>
@@ -8849,7 +10613,7 @@
           <p:cNvPr id="25" name="">
             <a:extLst xmlns:a="http://schemas.openxmlformats.org/drawingml/2006/main">
               <a:ext uri="{FF2B5EF4-FFF2-40B4-BE49-F238E27FC236}">
-                <a16:creationId xmlns:a16="http://schemas.microsoft.com/office/drawing/2014/main" id="{CFA31F5B-056A-422E-95CB-57290A037C35}"/>
+                <a16:creationId xmlns:a16="http://schemas.microsoft.com/office/drawing/2014/main" id="{D82985ED-F888-488E-ACB7-8CAB05D2CB39}"/>
               </a:ext>
             </a:extLst>
           </p:cNvPr>
@@ -8941,7 +10705,7 @@
           <p:cNvPr id="26" name="">
             <a:extLst xmlns:a="http://schemas.openxmlformats.org/drawingml/2006/main">
               <a:ext uri="{FF2B5EF4-FFF2-40B4-BE49-F238E27FC236}">
-                <a16:creationId xmlns:a16="http://schemas.microsoft.com/office/drawing/2014/main" id="{12E5A192-4B27-4910-8DD0-684A70251EF5}"/>
+                <a16:creationId xmlns:a16="http://schemas.microsoft.com/office/drawing/2014/main" id="{0FC70A8B-DD25-4700-A399-603D3FA8C188}"/>
               </a:ext>
             </a:extLst>
           </p:cNvPr>
@@ -8978,7 +10742,7 @@
           <p:cNvPr id="27" name="">
             <a:extLst xmlns:a="http://schemas.openxmlformats.org/drawingml/2006/main">
               <a:ext uri="{FF2B5EF4-FFF2-40B4-BE49-F238E27FC236}">
-                <a16:creationId xmlns:a16="http://schemas.microsoft.com/office/drawing/2014/main" id="{08D5E5B2-93AF-452B-A5F3-944FA8AAA5C1}"/>
+                <a16:creationId xmlns:a16="http://schemas.microsoft.com/office/drawing/2014/main" id="{7FC3679B-3358-494C-BBE1-46F5EB3EC4C2}"/>
               </a:ext>
             </a:extLst>
           </p:cNvPr>
@@ -9013,7 +10777,7 @@
           <p:cNvPr id="28" name="">
             <a:extLst xmlns:a="http://schemas.openxmlformats.org/drawingml/2006/main">
               <a:ext uri="{FF2B5EF4-FFF2-40B4-BE49-F238E27FC236}">
-                <a16:creationId xmlns:a16="http://schemas.microsoft.com/office/drawing/2014/main" id="{A929C73F-2793-418F-BEE5-39B8C6370CCB}"/>
+                <a16:creationId xmlns:a16="http://schemas.microsoft.com/office/drawing/2014/main" id="{7CD98EB9-3F99-479F-A58F-ABFA380AF930}"/>
               </a:ext>
             </a:extLst>
           </p:cNvPr>
@@ -9071,7 +10835,7 @@
           <p:cNvPr id="29" name="">
             <a:extLst xmlns:a="http://schemas.openxmlformats.org/drawingml/2006/main">
               <a:ext uri="{FF2B5EF4-FFF2-40B4-BE49-F238E27FC236}">
-                <a16:creationId xmlns:a16="http://schemas.microsoft.com/office/drawing/2014/main" id="{BB262265-C31E-47B6-9962-D26263C9AE0A}"/>
+                <a16:creationId xmlns:a16="http://schemas.microsoft.com/office/drawing/2014/main" id="{D39FAAAF-6C09-48AA-9ECC-D07022B51AD4}"/>
               </a:ext>
             </a:extLst>
           </p:cNvPr>
@@ -9106,7 +10870,7 @@
           <p:cNvPr id="30" name="">
             <a:extLst xmlns:a="http://schemas.openxmlformats.org/drawingml/2006/main">
               <a:ext uri="{FF2B5EF4-FFF2-40B4-BE49-F238E27FC236}">
-                <a16:creationId xmlns:a16="http://schemas.microsoft.com/office/drawing/2014/main" id="{3ADDA5AA-8322-4516-9F4C-BCDA73BF404D}"/>
+                <a16:creationId xmlns:a16="http://schemas.microsoft.com/office/drawing/2014/main" id="{FFEC9E75-26D4-446A-B68B-C11D23B6600F}"/>
               </a:ext>
             </a:extLst>
           </p:cNvPr>
@@ -9141,7 +10905,7 @@
           <p:cNvPr id="31" name="">
             <a:extLst xmlns:a="http://schemas.openxmlformats.org/drawingml/2006/main">
               <a:ext uri="{FF2B5EF4-FFF2-40B4-BE49-F238E27FC236}">
-                <a16:creationId xmlns:a16="http://schemas.microsoft.com/office/drawing/2014/main" id="{41B1CFEB-7923-4272-A48D-63C5016A8136}"/>
+                <a16:creationId xmlns:a16="http://schemas.microsoft.com/office/drawing/2014/main" id="{379E20EB-DCDB-4FB9-974F-9D4147971214}"/>
               </a:ext>
             </a:extLst>
           </p:cNvPr>
@@ -9199,7 +10963,7 @@
           <p:cNvPr id="32" name="">
             <a:extLst xmlns:a="http://schemas.openxmlformats.org/drawingml/2006/main">
               <a:ext uri="{FF2B5EF4-FFF2-40B4-BE49-F238E27FC236}">
-                <a16:creationId xmlns:a16="http://schemas.microsoft.com/office/drawing/2014/main" id="{9ED95CE8-3833-4EDB-8C64-4EC18ED39753}"/>
+                <a16:creationId xmlns:a16="http://schemas.microsoft.com/office/drawing/2014/main" id="{A14B2FF5-F358-4B8D-9AC6-BB79E8D1C0B3}"/>
               </a:ext>
             </a:extLst>
           </p:cNvPr>
@@ -9255,7 +11019,7 @@
     </p:spTree>
     <p:extLst>
       <p:ext uri="{BB962C8B-B14F-4D97-AF65-F5344CB8AC3E}">
-        <p14:creationId xmlns:p14="http://schemas.microsoft.com/office/powerpoint/2010/main" val="812584234"/>
+        <p14:creationId xmlns:p14="http://schemas.microsoft.com/office/powerpoint/2010/main" val="2033270621"/>
       </p:ext>
     </p:extLst>
   </p:cSld>
@@ -9286,7 +11050,7 @@
           <p:cNvPr id="1" name="Slide Number Placeholder 5">
             <a:extLst xmlns:a="http://schemas.openxmlformats.org/drawingml/2006/main">
               <a:ext uri="{FF2B5EF4-FFF2-40B4-BE49-F238E27FC236}">
-                <a16:creationId xmlns:a16="http://schemas.microsoft.com/office/drawing/2014/main" id="{E12CE447-476B-4BAE-A1FF-E669E79965E6}"/>
+                <a16:creationId xmlns:a16="http://schemas.microsoft.com/office/drawing/2014/main" id="{EDD0F201-AE24-4D54-ACE2-5F86EBC94A0A}"/>
               </a:ext>
             </a:extLst>
           </p:cNvPr>
@@ -9322,7 +11086,7 @@
           <p:nvPr/>
         </p:nvPicPr>
         <p:blipFill>
-          <a:blip xmlns:r="http://schemas.openxmlformats.org/officeDocument/2006/relationships" xmlns:a="http://schemas.openxmlformats.org/drawingml/2006/main" r:embed="R7fdde2bcaa84465d"/>
+          <a:blip xmlns:r="http://schemas.openxmlformats.org/officeDocument/2006/relationships" xmlns:a="http://schemas.openxmlformats.org/drawingml/2006/main" r:embed="R196df9a9724245e5"/>
           <a:srcRect xmlns:a="http://schemas.openxmlformats.org/drawingml/2006/main" l="0" t="21875" r="0" b="21875"/>
           <a:stretch xmlns:a="http://schemas.openxmlformats.org/drawingml/2006/main">
             <a:fillRect l="0" t="0" r="0" b="0"/>
@@ -9343,7 +11107,7 @@
           <p:cNvPr id="3" name="">
             <a:extLst xmlns:a="http://schemas.openxmlformats.org/drawingml/2006/main">
               <a:ext uri="{FF2B5EF4-FFF2-40B4-BE49-F238E27FC236}">
-                <a16:creationId xmlns:a16="http://schemas.microsoft.com/office/drawing/2014/main" id="{F8A3BDA3-164C-4348-967A-151849033020}"/>
+                <a16:creationId xmlns:a16="http://schemas.microsoft.com/office/drawing/2014/main" id="{BA8F9D90-C27E-4645-AEF8-9992D9737908}"/>
               </a:ext>
             </a:extLst>
           </p:cNvPr>
@@ -9378,7 +11142,7 @@
           <p:cNvPr id="4" name="">
             <a:extLst xmlns:a="http://schemas.openxmlformats.org/drawingml/2006/main">
               <a:ext uri="{FF2B5EF4-FFF2-40B4-BE49-F238E27FC236}">
-                <a16:creationId xmlns:a16="http://schemas.microsoft.com/office/drawing/2014/main" id="{B989BD80-9A48-4456-BFD6-5D50361B952D}"/>
+                <a16:creationId xmlns:a16="http://schemas.microsoft.com/office/drawing/2014/main" id="{674CF358-2D06-4203-9030-0F7EF28AB6B3}"/>
               </a:ext>
             </a:extLst>
           </p:cNvPr>
@@ -9413,7 +11177,7 @@
           <p:cNvPr id="5" name="">
             <a:extLst xmlns:a="http://schemas.openxmlformats.org/drawingml/2006/main">
               <a:ext uri="{FF2B5EF4-FFF2-40B4-BE49-F238E27FC236}">
-                <a16:creationId xmlns:a16="http://schemas.microsoft.com/office/drawing/2014/main" id="{19F73437-AC02-4D5A-8E1F-7E3E10EF9F7E}"/>
+                <a16:creationId xmlns:a16="http://schemas.microsoft.com/office/drawing/2014/main" id="{31BA5368-B0D3-4FB2-BD54-BE1765DE3DAF}"/>
               </a:ext>
             </a:extLst>
           </p:cNvPr>
@@ -9450,7 +11214,7 @@
           <p:cNvPr id="6" name="">
             <a:extLst xmlns:a="http://schemas.openxmlformats.org/drawingml/2006/main">
               <a:ext uri="{FF2B5EF4-FFF2-40B4-BE49-F238E27FC236}">
-                <a16:creationId xmlns:a16="http://schemas.microsoft.com/office/drawing/2014/main" id="{DBD224AD-07FC-4280-A326-81AE245899D6}"/>
+                <a16:creationId xmlns:a16="http://schemas.microsoft.com/office/drawing/2014/main" id="{2C48E2C9-2719-4B7D-92E0-9838188A65A9}"/>
               </a:ext>
             </a:extLst>
           </p:cNvPr>
@@ -9487,7 +11251,7 @@
           <p:cNvPr id="7" name="">
             <a:extLst xmlns:a="http://schemas.openxmlformats.org/drawingml/2006/main">
               <a:ext uri="{FF2B5EF4-FFF2-40B4-BE49-F238E27FC236}">
-                <a16:creationId xmlns:a16="http://schemas.microsoft.com/office/drawing/2014/main" id="{F3E4CD8B-ACEF-48A2-A82C-52B0F59A9129}"/>
+                <a16:creationId xmlns:a16="http://schemas.microsoft.com/office/drawing/2014/main" id="{746204A9-EC19-457A-80F0-BBF8BBE1A650}"/>
               </a:ext>
             </a:extLst>
           </p:cNvPr>
@@ -9524,7 +11288,7 @@
           <p:cNvPr id="8" name="">
             <a:extLst xmlns:a="http://schemas.openxmlformats.org/drawingml/2006/main">
               <a:ext uri="{FF2B5EF4-FFF2-40B4-BE49-F238E27FC236}">
-                <a16:creationId xmlns:a16="http://schemas.microsoft.com/office/drawing/2014/main" id="{C810F4EA-692C-4BFC-B5E8-3D32FB9E1BB6}"/>
+                <a16:creationId xmlns:a16="http://schemas.microsoft.com/office/drawing/2014/main" id="{25D9FE5C-176A-4C1F-8BD6-9D264119EF02}"/>
               </a:ext>
             </a:extLst>
           </p:cNvPr>
@@ -9561,7 +11325,7 @@
           <p:cNvPr id="9" name="">
             <a:extLst xmlns:a="http://schemas.openxmlformats.org/drawingml/2006/main">
               <a:ext uri="{FF2B5EF4-FFF2-40B4-BE49-F238E27FC236}">
-                <a16:creationId xmlns:a16="http://schemas.microsoft.com/office/drawing/2014/main" id="{6B014754-AD80-4A21-815C-E0EB354FF22B}"/>
+                <a16:creationId xmlns:a16="http://schemas.microsoft.com/office/drawing/2014/main" id="{F451C9A4-F610-490D-9144-C31BB773A1D8}"/>
               </a:ext>
             </a:extLst>
           </p:cNvPr>
@@ -9619,7 +11383,7 @@
           <p:cNvPr id="10" name="">
             <a:extLst xmlns:a="http://schemas.openxmlformats.org/drawingml/2006/main">
               <a:ext uri="{FF2B5EF4-FFF2-40B4-BE49-F238E27FC236}">
-                <a16:creationId xmlns:a16="http://schemas.microsoft.com/office/drawing/2014/main" id="{4C46C21C-1DA6-4AD7-A8D4-594B588FE722}"/>
+                <a16:creationId xmlns:a16="http://schemas.microsoft.com/office/drawing/2014/main" id="{89691D54-6E59-4476-B5D3-BBE84079C5A5}"/>
               </a:ext>
             </a:extLst>
           </p:cNvPr>
@@ -9667,7 +11431,7 @@
                   <a:srgbClr val="0F5B3F"/>
                 </a:solidFill>
               </a:rPr>
-              <a:t>02 / 12</a:t>
+              <a:t>02 / 13</a:t>
             </a:r>
           </a:p>
         </p:txBody>
@@ -9677,7 +11441,7 @@
           <p:cNvPr id="11" name="">
             <a:extLst xmlns:a="http://schemas.openxmlformats.org/drawingml/2006/main">
               <a:ext uri="{FF2B5EF4-FFF2-40B4-BE49-F238E27FC236}">
-                <a16:creationId xmlns:a16="http://schemas.microsoft.com/office/drawing/2014/main" id="{96655942-F299-484D-B577-A2699FB22AC7}"/>
+                <a16:creationId xmlns:a16="http://schemas.microsoft.com/office/drawing/2014/main" id="{8D2E236C-8873-4DEC-8D0B-ACB3EEA82604}"/>
               </a:ext>
             </a:extLst>
           </p:cNvPr>
@@ -9712,7 +11476,7 @@
           <p:cNvPr id="12" name="">
             <a:extLst xmlns:a="http://schemas.openxmlformats.org/drawingml/2006/main">
               <a:ext uri="{FF2B5EF4-FFF2-40B4-BE49-F238E27FC236}">
-                <a16:creationId xmlns:a16="http://schemas.microsoft.com/office/drawing/2014/main" id="{80D40DFE-A5B5-4A93-BD11-A21FB5DB31AD}"/>
+                <a16:creationId xmlns:a16="http://schemas.microsoft.com/office/drawing/2014/main" id="{2721ACCC-E807-4DC4-9A8D-D23B40DCB7DF}"/>
               </a:ext>
             </a:extLst>
           </p:cNvPr>
@@ -9745,7 +11509,7 @@
           <p:cNvPr id="13" name="">
             <a:extLst xmlns:a="http://schemas.openxmlformats.org/drawingml/2006/main">
               <a:ext uri="{FF2B5EF4-FFF2-40B4-BE49-F238E27FC236}">
-                <a16:creationId xmlns:a16="http://schemas.microsoft.com/office/drawing/2014/main" id="{931C6D8F-3120-4711-A56B-D6C5898A1D63}"/>
+                <a16:creationId xmlns:a16="http://schemas.microsoft.com/office/drawing/2014/main" id="{0544AA15-E11D-4A83-8C14-9991A2E874AB}"/>
               </a:ext>
             </a:extLst>
           </p:cNvPr>
@@ -9820,7 +11584,7 @@
           <p:cNvPr id="14" name="">
             <a:extLst xmlns:a="http://schemas.openxmlformats.org/drawingml/2006/main">
               <a:ext uri="{FF2B5EF4-FFF2-40B4-BE49-F238E27FC236}">
-                <a16:creationId xmlns:a16="http://schemas.microsoft.com/office/drawing/2014/main" id="{C693D743-A8BE-4AFC-8E1C-5A4957D736F0}"/>
+                <a16:creationId xmlns:a16="http://schemas.microsoft.com/office/drawing/2014/main" id="{EC6D6B09-2DBB-4B81-BAED-AA515A6E977C}"/>
               </a:ext>
             </a:extLst>
           </p:cNvPr>
@@ -9855,7 +11619,7 @@
           <p:cNvPr id="15" name="">
             <a:extLst xmlns:a="http://schemas.openxmlformats.org/drawingml/2006/main">
               <a:ext uri="{FF2B5EF4-FFF2-40B4-BE49-F238E27FC236}">
-                <a16:creationId xmlns:a16="http://schemas.microsoft.com/office/drawing/2014/main" id="{DF852EBA-8860-4B61-8325-F2F7BECD1C6F}"/>
+                <a16:creationId xmlns:a16="http://schemas.microsoft.com/office/drawing/2014/main" id="{A0F00F60-DD95-4106-988E-C7A5D316B101}"/>
               </a:ext>
             </a:extLst>
           </p:cNvPr>
@@ -9890,7 +11654,7 @@
           <p:cNvPr id="16" name="">
             <a:extLst xmlns:a="http://schemas.openxmlformats.org/drawingml/2006/main">
               <a:ext uri="{FF2B5EF4-FFF2-40B4-BE49-F238E27FC236}">
-                <a16:creationId xmlns:a16="http://schemas.microsoft.com/office/drawing/2014/main" id="{D60B118E-E968-4552-A15E-2E27E9E9DE35}"/>
+                <a16:creationId xmlns:a16="http://schemas.microsoft.com/office/drawing/2014/main" id="{E25F2CD0-4559-4783-8AF0-8DD7C60D3FD8}"/>
               </a:ext>
             </a:extLst>
           </p:cNvPr>
@@ -9948,7 +11712,7 @@
           <p:cNvPr id="17" name="">
             <a:extLst xmlns:a="http://schemas.openxmlformats.org/drawingml/2006/main">
               <a:ext uri="{FF2B5EF4-FFF2-40B4-BE49-F238E27FC236}">
-                <a16:creationId xmlns:a16="http://schemas.microsoft.com/office/drawing/2014/main" id="{55C7226F-0481-4462-92D1-14C71601BF62}"/>
+                <a16:creationId xmlns:a16="http://schemas.microsoft.com/office/drawing/2014/main" id="{B28F14AC-F36D-4A07-B8CC-D4AEBAB1F7E9}"/>
               </a:ext>
             </a:extLst>
           </p:cNvPr>
@@ -9985,7 +11749,7 @@
           <p:cNvPr id="18" name="">
             <a:extLst xmlns:a="http://schemas.openxmlformats.org/drawingml/2006/main">
               <a:ext uri="{FF2B5EF4-FFF2-40B4-BE49-F238E27FC236}">
-                <a16:creationId xmlns:a16="http://schemas.microsoft.com/office/drawing/2014/main" id="{7D529E99-A171-447D-9481-A2B956D8030A}"/>
+                <a16:creationId xmlns:a16="http://schemas.microsoft.com/office/drawing/2014/main" id="{CAB426E9-8EAE-4C1B-82D6-6AA61561A642}"/>
               </a:ext>
             </a:extLst>
           </p:cNvPr>
@@ -10020,7 +11784,7 @@
           <p:cNvPr id="19" name="">
             <a:extLst xmlns:a="http://schemas.openxmlformats.org/drawingml/2006/main">
               <a:ext uri="{FF2B5EF4-FFF2-40B4-BE49-F238E27FC236}">
-                <a16:creationId xmlns:a16="http://schemas.microsoft.com/office/drawing/2014/main" id="{1D1828DA-6B7C-44F6-8AEF-F22F68E64F92}"/>
+                <a16:creationId xmlns:a16="http://schemas.microsoft.com/office/drawing/2014/main" id="{196EC01C-1FC1-4276-8243-F20962A1F131}"/>
               </a:ext>
             </a:extLst>
           </p:cNvPr>
@@ -10078,7 +11842,7 @@
           <p:cNvPr id="20" name="">
             <a:extLst xmlns:a="http://schemas.openxmlformats.org/drawingml/2006/main">
               <a:ext uri="{FF2B5EF4-FFF2-40B4-BE49-F238E27FC236}">
-                <a16:creationId xmlns:a16="http://schemas.microsoft.com/office/drawing/2014/main" id="{3D6F4A8C-62E6-43C9-B993-F96F0ACF1F6F}"/>
+                <a16:creationId xmlns:a16="http://schemas.microsoft.com/office/drawing/2014/main" id="{D03FD563-BF49-4A1E-B438-FCD71BB4484E}"/>
               </a:ext>
             </a:extLst>
           </p:cNvPr>
@@ -10204,7 +11968,7 @@
           <p:cNvPr id="21" name="">
             <a:extLst xmlns:a="http://schemas.openxmlformats.org/drawingml/2006/main">
               <a:ext uri="{FF2B5EF4-FFF2-40B4-BE49-F238E27FC236}">
-                <a16:creationId xmlns:a16="http://schemas.microsoft.com/office/drawing/2014/main" id="{E14FD467-79BE-496D-990D-28AE914E00F0}"/>
+                <a16:creationId xmlns:a16="http://schemas.microsoft.com/office/drawing/2014/main" id="{D5E99507-C584-40FD-AD19-59BD06F12915}"/>
               </a:ext>
             </a:extLst>
           </p:cNvPr>
@@ -10241,7 +12005,7 @@
           <p:cNvPr id="22" name="">
             <a:extLst xmlns:a="http://schemas.openxmlformats.org/drawingml/2006/main">
               <a:ext uri="{FF2B5EF4-FFF2-40B4-BE49-F238E27FC236}">
-                <a16:creationId xmlns:a16="http://schemas.microsoft.com/office/drawing/2014/main" id="{BBBA4C57-1F54-4578-B8F9-0A3E6F400B24}"/>
+                <a16:creationId xmlns:a16="http://schemas.microsoft.com/office/drawing/2014/main" id="{E8C35D4C-F31D-4527-B4D0-F870FC2842FB}"/>
               </a:ext>
             </a:extLst>
           </p:cNvPr>
@@ -10276,7 +12040,7 @@
           <p:cNvPr id="23" name="">
             <a:extLst xmlns:a="http://schemas.openxmlformats.org/drawingml/2006/main">
               <a:ext uri="{FF2B5EF4-FFF2-40B4-BE49-F238E27FC236}">
-                <a16:creationId xmlns:a16="http://schemas.microsoft.com/office/drawing/2014/main" id="{B6F745D5-D36F-4F23-A539-691074D1BC26}"/>
+                <a16:creationId xmlns:a16="http://schemas.microsoft.com/office/drawing/2014/main" id="{95485084-D726-42DA-A12F-2D4E2745E63A}"/>
               </a:ext>
             </a:extLst>
           </p:cNvPr>
@@ -10334,7 +12098,7 @@
           <p:cNvPr id="24" name="">
             <a:extLst xmlns:a="http://schemas.openxmlformats.org/drawingml/2006/main">
               <a:ext uri="{FF2B5EF4-FFF2-40B4-BE49-F238E27FC236}">
-                <a16:creationId xmlns:a16="http://schemas.microsoft.com/office/drawing/2014/main" id="{F439B610-1D93-41B8-BC76-81D853C99D89}"/>
+                <a16:creationId xmlns:a16="http://schemas.microsoft.com/office/drawing/2014/main" id="{54B89DD8-C39A-4922-8D8C-DC764E4F293F}"/>
               </a:ext>
             </a:extLst>
           </p:cNvPr>
@@ -10443,7 +12207,7 @@
           <p:cNvPr id="25" name="">
             <a:extLst xmlns:a="http://schemas.openxmlformats.org/drawingml/2006/main">
               <a:ext uri="{FF2B5EF4-FFF2-40B4-BE49-F238E27FC236}">
-                <a16:creationId xmlns:a16="http://schemas.microsoft.com/office/drawing/2014/main" id="{7F2D40E3-8D8D-4478-AA9B-E712EEEF84E8}"/>
+                <a16:creationId xmlns:a16="http://schemas.microsoft.com/office/drawing/2014/main" id="{B3947442-52DD-47A7-BA4F-0267CD1C49F3}"/>
               </a:ext>
             </a:extLst>
           </p:cNvPr>
@@ -10480,7 +12244,7 @@
           <p:cNvPr id="26" name="">
             <a:extLst xmlns:a="http://schemas.openxmlformats.org/drawingml/2006/main">
               <a:ext uri="{FF2B5EF4-FFF2-40B4-BE49-F238E27FC236}">
-                <a16:creationId xmlns:a16="http://schemas.microsoft.com/office/drawing/2014/main" id="{03450718-6289-4910-B027-ACB1BF949EB5}"/>
+                <a16:creationId xmlns:a16="http://schemas.microsoft.com/office/drawing/2014/main" id="{3FA93942-62CD-4853-94B0-428C0702EFE4}"/>
               </a:ext>
             </a:extLst>
           </p:cNvPr>
@@ -10515,7 +12279,7 @@
           <p:cNvPr id="27" name="">
             <a:extLst xmlns:a="http://schemas.openxmlformats.org/drawingml/2006/main">
               <a:ext uri="{FF2B5EF4-FFF2-40B4-BE49-F238E27FC236}">
-                <a16:creationId xmlns:a16="http://schemas.microsoft.com/office/drawing/2014/main" id="{51F33D46-6EA7-4768-83CB-FB59E8028736}"/>
+                <a16:creationId xmlns:a16="http://schemas.microsoft.com/office/drawing/2014/main" id="{47B48FB8-6B9F-4721-99DB-3C68DD781FF8}"/>
               </a:ext>
             </a:extLst>
           </p:cNvPr>
@@ -10573,7 +12337,7 @@
           <p:cNvPr id="28" name="">
             <a:extLst xmlns:a="http://schemas.openxmlformats.org/drawingml/2006/main">
               <a:ext uri="{FF2B5EF4-FFF2-40B4-BE49-F238E27FC236}">
-                <a16:creationId xmlns:a16="http://schemas.microsoft.com/office/drawing/2014/main" id="{FD1405D4-C34A-44D1-8976-61D9BAD8C899}"/>
+                <a16:creationId xmlns:a16="http://schemas.microsoft.com/office/drawing/2014/main" id="{3F29F1AE-5DAD-488F-AAAD-FCCA1D6358F2}"/>
               </a:ext>
             </a:extLst>
           </p:cNvPr>
@@ -10682,7 +12446,7 @@
           <p:cNvPr id="29" name="">
             <a:extLst xmlns:a="http://schemas.openxmlformats.org/drawingml/2006/main">
               <a:ext uri="{FF2B5EF4-FFF2-40B4-BE49-F238E27FC236}">
-                <a16:creationId xmlns:a16="http://schemas.microsoft.com/office/drawing/2014/main" id="{A74820F1-A166-48D9-8D42-A62CB801A981}"/>
+                <a16:creationId xmlns:a16="http://schemas.microsoft.com/office/drawing/2014/main" id="{C7BB8181-B409-4AD7-8DF1-71DCC12EC2E2}"/>
               </a:ext>
             </a:extLst>
           </p:cNvPr>
@@ -10719,7 +12483,7 @@
           <p:cNvPr id="30" name="">
             <a:extLst xmlns:a="http://schemas.openxmlformats.org/drawingml/2006/main">
               <a:ext uri="{FF2B5EF4-FFF2-40B4-BE49-F238E27FC236}">
-                <a16:creationId xmlns:a16="http://schemas.microsoft.com/office/drawing/2014/main" id="{2D044B2C-CBCF-46A1-90E6-0974D3D021AC}"/>
+                <a16:creationId xmlns:a16="http://schemas.microsoft.com/office/drawing/2014/main" id="{35A83CD3-B3E6-46D7-AFD9-5B6C7D454324}"/>
               </a:ext>
             </a:extLst>
           </p:cNvPr>
@@ -10754,7 +12518,7 @@
           <p:cNvPr id="31" name="">
             <a:extLst xmlns:a="http://schemas.openxmlformats.org/drawingml/2006/main">
               <a:ext uri="{FF2B5EF4-FFF2-40B4-BE49-F238E27FC236}">
-                <a16:creationId xmlns:a16="http://schemas.microsoft.com/office/drawing/2014/main" id="{F2A9465A-FB7E-4CD9-8208-574CCED5AA93}"/>
+                <a16:creationId xmlns:a16="http://schemas.microsoft.com/office/drawing/2014/main" id="{5AAD187E-4CC3-4178-A516-A210B3CC31DA}"/>
               </a:ext>
             </a:extLst>
           </p:cNvPr>
@@ -10812,7 +12576,7 @@
           <p:cNvPr id="32" name="">
             <a:extLst xmlns:a="http://schemas.openxmlformats.org/drawingml/2006/main">
               <a:ext uri="{FF2B5EF4-FFF2-40B4-BE49-F238E27FC236}">
-                <a16:creationId xmlns:a16="http://schemas.microsoft.com/office/drawing/2014/main" id="{4D46B4E7-F4E1-422D-950A-6C9082351D84}"/>
+                <a16:creationId xmlns:a16="http://schemas.microsoft.com/office/drawing/2014/main" id="{52308F99-D7F8-4C57-837B-BEF3FE046463}"/>
               </a:ext>
             </a:extLst>
           </p:cNvPr>
@@ -10921,7 +12685,7 @@
           <p:cNvPr id="33" name="">
             <a:extLst xmlns:a="http://schemas.openxmlformats.org/drawingml/2006/main">
               <a:ext uri="{FF2B5EF4-FFF2-40B4-BE49-F238E27FC236}">
-                <a16:creationId xmlns:a16="http://schemas.microsoft.com/office/drawing/2014/main" id="{9212EB29-B888-49AC-889C-8ABD933A38A8}"/>
+                <a16:creationId xmlns:a16="http://schemas.microsoft.com/office/drawing/2014/main" id="{3378FCD5-6AE5-44F7-B457-443E72A9B56A}"/>
               </a:ext>
             </a:extLst>
           </p:cNvPr>
@@ -10975,7 +12739,7 @@
           <p:cNvPr id="34" name="">
             <a:extLst xmlns:a="http://schemas.openxmlformats.org/drawingml/2006/main">
               <a:ext uri="{FF2B5EF4-FFF2-40B4-BE49-F238E27FC236}">
-                <a16:creationId xmlns:a16="http://schemas.microsoft.com/office/drawing/2014/main" id="{ABDB2FF6-7079-425F-9BAE-AE7C9DDA8777}"/>
+                <a16:creationId xmlns:a16="http://schemas.microsoft.com/office/drawing/2014/main" id="{A7CE955B-1676-4C66-89B0-6199BA62D422}"/>
               </a:ext>
             </a:extLst>
           </p:cNvPr>
@@ -11008,7 +12772,7 @@
           <p:cNvPr id="35" name="">
             <a:extLst xmlns:a="http://schemas.openxmlformats.org/drawingml/2006/main">
               <a:ext uri="{FF2B5EF4-FFF2-40B4-BE49-F238E27FC236}">
-                <a16:creationId xmlns:a16="http://schemas.microsoft.com/office/drawing/2014/main" id="{A04A5203-CE74-4E6E-9BF6-E88886974334}"/>
+                <a16:creationId xmlns:a16="http://schemas.microsoft.com/office/drawing/2014/main" id="{A96A14BA-A8BB-47FE-AE96-6972827B7974}"/>
               </a:ext>
             </a:extLst>
           </p:cNvPr>
@@ -11062,7 +12826,7 @@
           <p:cNvPr id="36" name="">
             <a:extLst xmlns:a="http://schemas.openxmlformats.org/drawingml/2006/main">
               <a:ext uri="{FF2B5EF4-FFF2-40B4-BE49-F238E27FC236}">
-                <a16:creationId xmlns:a16="http://schemas.microsoft.com/office/drawing/2014/main" id="{CA8EDD70-14B4-409B-9F80-89A96BF5868A}"/>
+                <a16:creationId xmlns:a16="http://schemas.microsoft.com/office/drawing/2014/main" id="{AB59A16B-E5E7-45C1-9F2D-A29DF9CD7960}"/>
               </a:ext>
             </a:extLst>
           </p:cNvPr>
@@ -11095,7 +12859,7 @@
           <p:cNvPr id="37" name="">
             <a:extLst xmlns:a="http://schemas.openxmlformats.org/drawingml/2006/main">
               <a:ext uri="{FF2B5EF4-FFF2-40B4-BE49-F238E27FC236}">
-                <a16:creationId xmlns:a16="http://schemas.microsoft.com/office/drawing/2014/main" id="{0E5997D5-4180-43F0-97E2-0DB2AA0D02B5}"/>
+                <a16:creationId xmlns:a16="http://schemas.microsoft.com/office/drawing/2014/main" id="{D373EE38-BD2A-40E8-BEE7-9142E7745379}"/>
               </a:ext>
             </a:extLst>
           </p:cNvPr>
@@ -11149,7 +12913,7 @@
           <p:cNvPr id="38" name="">
             <a:extLst xmlns:a="http://schemas.openxmlformats.org/drawingml/2006/main">
               <a:ext uri="{FF2B5EF4-FFF2-40B4-BE49-F238E27FC236}">
-                <a16:creationId xmlns:a16="http://schemas.microsoft.com/office/drawing/2014/main" id="{7FE86AE0-C9EB-47E4-B081-BAB93661FBAF}"/>
+                <a16:creationId xmlns:a16="http://schemas.microsoft.com/office/drawing/2014/main" id="{6949E8A9-0213-40D5-86F1-DACD7B8091C9}"/>
               </a:ext>
             </a:extLst>
           </p:cNvPr>
@@ -11182,7 +12946,7 @@
           <p:cNvPr id="39" name="">
             <a:extLst xmlns:a="http://schemas.openxmlformats.org/drawingml/2006/main">
               <a:ext uri="{FF2B5EF4-FFF2-40B4-BE49-F238E27FC236}">
-                <a16:creationId xmlns:a16="http://schemas.microsoft.com/office/drawing/2014/main" id="{837864E7-C0F5-4CEC-A310-A7B639444E6F}"/>
+                <a16:creationId xmlns:a16="http://schemas.microsoft.com/office/drawing/2014/main" id="{0622E207-44B4-4D2E-829B-56B404DC0A1C}"/>
               </a:ext>
             </a:extLst>
           </p:cNvPr>
@@ -11236,7 +13000,7 @@
           <p:cNvPr id="40" name="">
             <a:extLst xmlns:a="http://schemas.openxmlformats.org/drawingml/2006/main">
               <a:ext uri="{FF2B5EF4-FFF2-40B4-BE49-F238E27FC236}">
-                <a16:creationId xmlns:a16="http://schemas.microsoft.com/office/drawing/2014/main" id="{E00D854F-CF2F-410F-9E88-BE89E727DC57}"/>
+                <a16:creationId xmlns:a16="http://schemas.microsoft.com/office/drawing/2014/main" id="{C1081A79-7CD9-4B60-8EF2-3DFB88C4452B}"/>
               </a:ext>
             </a:extLst>
           </p:cNvPr>
@@ -11292,7 +13056,7 @@
     </p:spTree>
     <p:extLst>
       <p:ext uri="{BB962C8B-B14F-4D97-AF65-F5344CB8AC3E}">
-        <p14:creationId xmlns:p14="http://schemas.microsoft.com/office/powerpoint/2010/main" val="739240916"/>
+        <p14:creationId xmlns:p14="http://schemas.microsoft.com/office/powerpoint/2010/main" val="1364356712"/>
       </p:ext>
     </p:extLst>
   </p:cSld>
@@ -11323,7 +13087,7 @@
           <p:cNvPr id="1" name="Slide Number Placeholder 5">
             <a:extLst xmlns:a="http://schemas.openxmlformats.org/drawingml/2006/main">
               <a:ext uri="{FF2B5EF4-FFF2-40B4-BE49-F238E27FC236}">
-                <a16:creationId xmlns:a16="http://schemas.microsoft.com/office/drawing/2014/main" id="{E12CE447-476B-4BAE-A1FF-E669E79965E6}"/>
+                <a16:creationId xmlns:a16="http://schemas.microsoft.com/office/drawing/2014/main" id="{EDD0F201-AE24-4D54-ACE2-5F86EBC94A0A}"/>
               </a:ext>
             </a:extLst>
           </p:cNvPr>
@@ -11359,7 +13123,7 @@
           <p:nvPr/>
         </p:nvPicPr>
         <p:blipFill>
-          <a:blip xmlns:r="http://schemas.openxmlformats.org/officeDocument/2006/relationships" xmlns:a="http://schemas.openxmlformats.org/drawingml/2006/main" r:embed="R51662ef22ae54aae"/>
+          <a:blip xmlns:r="http://schemas.openxmlformats.org/officeDocument/2006/relationships" xmlns:a="http://schemas.openxmlformats.org/drawingml/2006/main" r:embed="R0e4ab859c7e04766"/>
           <a:srcRect xmlns:a="http://schemas.openxmlformats.org/drawingml/2006/main" l="0" t="21875" r="0" b="21875"/>
           <a:stretch xmlns:a="http://schemas.openxmlformats.org/drawingml/2006/main">
             <a:fillRect l="0" t="0" r="0" b="0"/>
@@ -11380,7 +13144,7 @@
           <p:cNvPr id="3" name="">
             <a:extLst xmlns:a="http://schemas.openxmlformats.org/drawingml/2006/main">
               <a:ext uri="{FF2B5EF4-FFF2-40B4-BE49-F238E27FC236}">
-                <a16:creationId xmlns:a16="http://schemas.microsoft.com/office/drawing/2014/main" id="{06D18CE6-4C0D-4415-83B2-E2E382F332BB}"/>
+                <a16:creationId xmlns:a16="http://schemas.microsoft.com/office/drawing/2014/main" id="{B2CAF6DB-9868-42E2-B734-DA1B8208D5DF}"/>
               </a:ext>
             </a:extLst>
           </p:cNvPr>
@@ -11415,7 +13179,7 @@
           <p:cNvPr id="4" name="">
             <a:extLst xmlns:a="http://schemas.openxmlformats.org/drawingml/2006/main">
               <a:ext uri="{FF2B5EF4-FFF2-40B4-BE49-F238E27FC236}">
-                <a16:creationId xmlns:a16="http://schemas.microsoft.com/office/drawing/2014/main" id="{627D553A-B099-4940-86EB-C985A9209950}"/>
+                <a16:creationId xmlns:a16="http://schemas.microsoft.com/office/drawing/2014/main" id="{FC25F7D3-73F1-4112-83C5-C1F8A6ACF6FC}"/>
               </a:ext>
             </a:extLst>
           </p:cNvPr>
@@ -11450,7 +13214,7 @@
           <p:cNvPr id="5" name="">
             <a:extLst xmlns:a="http://schemas.openxmlformats.org/drawingml/2006/main">
               <a:ext uri="{FF2B5EF4-FFF2-40B4-BE49-F238E27FC236}">
-                <a16:creationId xmlns:a16="http://schemas.microsoft.com/office/drawing/2014/main" id="{409B5C03-9E5A-40F5-9DF2-E636B6A79CD7}"/>
+                <a16:creationId xmlns:a16="http://schemas.microsoft.com/office/drawing/2014/main" id="{1E20A3BD-9246-408F-BBBC-5BBFFA1C0C5A}"/>
               </a:ext>
             </a:extLst>
           </p:cNvPr>
@@ -11487,7 +13251,7 @@
           <p:cNvPr id="6" name="">
             <a:extLst xmlns:a="http://schemas.openxmlformats.org/drawingml/2006/main">
               <a:ext uri="{FF2B5EF4-FFF2-40B4-BE49-F238E27FC236}">
-                <a16:creationId xmlns:a16="http://schemas.microsoft.com/office/drawing/2014/main" id="{7D2D13BD-DAE5-4A8A-9458-32C619A27A71}"/>
+                <a16:creationId xmlns:a16="http://schemas.microsoft.com/office/drawing/2014/main" id="{C1F56F5B-77B6-4E0D-A3CB-2874C73B70DA}"/>
               </a:ext>
             </a:extLst>
           </p:cNvPr>
@@ -11524,7 +13288,7 @@
           <p:cNvPr id="7" name="">
             <a:extLst xmlns:a="http://schemas.openxmlformats.org/drawingml/2006/main">
               <a:ext uri="{FF2B5EF4-FFF2-40B4-BE49-F238E27FC236}">
-                <a16:creationId xmlns:a16="http://schemas.microsoft.com/office/drawing/2014/main" id="{E304AF91-058B-4E0F-B6D2-49B08A472EC4}"/>
+                <a16:creationId xmlns:a16="http://schemas.microsoft.com/office/drawing/2014/main" id="{8B559262-66B7-43DA-9972-1DE52721E1F0}"/>
               </a:ext>
             </a:extLst>
           </p:cNvPr>
@@ -11561,7 +13325,7 @@
           <p:cNvPr id="8" name="">
             <a:extLst xmlns:a="http://schemas.openxmlformats.org/drawingml/2006/main">
               <a:ext uri="{FF2B5EF4-FFF2-40B4-BE49-F238E27FC236}">
-                <a16:creationId xmlns:a16="http://schemas.microsoft.com/office/drawing/2014/main" id="{48CFCE25-6705-4DEE-8C48-C3A7C7469D58}"/>
+                <a16:creationId xmlns:a16="http://schemas.microsoft.com/office/drawing/2014/main" id="{A4D1B9A3-BF76-4133-8B16-FA0F549805CA}"/>
               </a:ext>
             </a:extLst>
           </p:cNvPr>
@@ -11598,7 +13362,7 @@
           <p:cNvPr id="9" name="">
             <a:extLst xmlns:a="http://schemas.openxmlformats.org/drawingml/2006/main">
               <a:ext uri="{FF2B5EF4-FFF2-40B4-BE49-F238E27FC236}">
-                <a16:creationId xmlns:a16="http://schemas.microsoft.com/office/drawing/2014/main" id="{0F662108-2B6A-449B-AFA7-8A54267A8580}"/>
+                <a16:creationId xmlns:a16="http://schemas.microsoft.com/office/drawing/2014/main" id="{36F65239-191E-446D-A544-F5994F84D0C9}"/>
               </a:ext>
             </a:extLst>
           </p:cNvPr>
@@ -11656,7 +13420,7 @@
           <p:cNvPr id="10" name="">
             <a:extLst xmlns:a="http://schemas.openxmlformats.org/drawingml/2006/main">
               <a:ext uri="{FF2B5EF4-FFF2-40B4-BE49-F238E27FC236}">
-                <a16:creationId xmlns:a16="http://schemas.microsoft.com/office/drawing/2014/main" id="{F504E3B5-79AF-4024-AF6E-5458E6B18A8E}"/>
+                <a16:creationId xmlns:a16="http://schemas.microsoft.com/office/drawing/2014/main" id="{2D4F7FE3-5A7E-411A-A1D3-A1DA8E3C70C7}"/>
               </a:ext>
             </a:extLst>
           </p:cNvPr>
@@ -11704,7 +13468,7 @@
                   <a:srgbClr val="0F5B3F"/>
                 </a:solidFill>
               </a:rPr>
-              <a:t>03 / 12</a:t>
+              <a:t>03 / 13</a:t>
             </a:r>
           </a:p>
         </p:txBody>
@@ -11714,7 +13478,7 @@
           <p:cNvPr id="11" name="">
             <a:extLst xmlns:a="http://schemas.openxmlformats.org/drawingml/2006/main">
               <a:ext uri="{FF2B5EF4-FFF2-40B4-BE49-F238E27FC236}">
-                <a16:creationId xmlns:a16="http://schemas.microsoft.com/office/drawing/2014/main" id="{86856388-A3C8-4670-B4AF-A32589215E7A}"/>
+                <a16:creationId xmlns:a16="http://schemas.microsoft.com/office/drawing/2014/main" id="{AF7941A1-6839-4D5A-BB55-DECC06120456}"/>
               </a:ext>
             </a:extLst>
           </p:cNvPr>
@@ -11749,7 +13513,7 @@
           <p:cNvPr id="12" name="">
             <a:extLst xmlns:a="http://schemas.openxmlformats.org/drawingml/2006/main">
               <a:ext uri="{FF2B5EF4-FFF2-40B4-BE49-F238E27FC236}">
-                <a16:creationId xmlns:a16="http://schemas.microsoft.com/office/drawing/2014/main" id="{F0C7C468-F504-498A-A603-3DC259FC8E79}"/>
+                <a16:creationId xmlns:a16="http://schemas.microsoft.com/office/drawing/2014/main" id="{860ACF58-97CA-4332-B67F-3B0586DDD4DF}"/>
               </a:ext>
             </a:extLst>
           </p:cNvPr>
@@ -11782,7 +13546,7 @@
           <p:cNvPr id="13" name="">
             <a:extLst xmlns:a="http://schemas.openxmlformats.org/drawingml/2006/main">
               <a:ext uri="{FF2B5EF4-FFF2-40B4-BE49-F238E27FC236}">
-                <a16:creationId xmlns:a16="http://schemas.microsoft.com/office/drawing/2014/main" id="{73F9E196-E330-4195-9685-A6BCFC0E0C08}"/>
+                <a16:creationId xmlns:a16="http://schemas.microsoft.com/office/drawing/2014/main" id="{DDEC2DED-5F6E-4F97-8006-763FF6FCD58C}"/>
               </a:ext>
             </a:extLst>
           </p:cNvPr>
@@ -11857,7 +13621,7 @@
           <p:cNvPr id="14" name="">
             <a:extLst xmlns:a="http://schemas.openxmlformats.org/drawingml/2006/main">
               <a:ext uri="{FF2B5EF4-FFF2-40B4-BE49-F238E27FC236}">
-                <a16:creationId xmlns:a16="http://schemas.microsoft.com/office/drawing/2014/main" id="{61750C2E-A4E9-4BC3-A538-E061671AEB77}"/>
+                <a16:creationId xmlns:a16="http://schemas.microsoft.com/office/drawing/2014/main" id="{370DEA43-55DA-410E-9CB8-903B7045AC46}"/>
               </a:ext>
             </a:extLst>
           </p:cNvPr>
@@ -11892,7 +13656,7 @@
           <p:cNvPr id="15" name="">
             <a:extLst xmlns:a="http://schemas.openxmlformats.org/drawingml/2006/main">
               <a:ext uri="{FF2B5EF4-FFF2-40B4-BE49-F238E27FC236}">
-                <a16:creationId xmlns:a16="http://schemas.microsoft.com/office/drawing/2014/main" id="{1929C17C-1BDE-42B6-9336-575A831E42EF}"/>
+                <a16:creationId xmlns:a16="http://schemas.microsoft.com/office/drawing/2014/main" id="{72188DE4-19CD-4A17-A5CC-56906594DF53}"/>
               </a:ext>
             </a:extLst>
           </p:cNvPr>
@@ -11927,7 +13691,7 @@
           <p:cNvPr id="16" name="">
             <a:extLst xmlns:a="http://schemas.openxmlformats.org/drawingml/2006/main">
               <a:ext uri="{FF2B5EF4-FFF2-40B4-BE49-F238E27FC236}">
-                <a16:creationId xmlns:a16="http://schemas.microsoft.com/office/drawing/2014/main" id="{1D04031E-401B-4CA0-8DFB-B238B5D04FF6}"/>
+                <a16:creationId xmlns:a16="http://schemas.microsoft.com/office/drawing/2014/main" id="{5AF7B6C3-D940-4DA1-B992-4F9D06E6C79B}"/>
               </a:ext>
             </a:extLst>
           </p:cNvPr>
@@ -11985,7 +13749,7 @@
           <p:cNvPr id="17" name="">
             <a:extLst xmlns:a="http://schemas.openxmlformats.org/drawingml/2006/main">
               <a:ext uri="{FF2B5EF4-FFF2-40B4-BE49-F238E27FC236}">
-                <a16:creationId xmlns:a16="http://schemas.microsoft.com/office/drawing/2014/main" id="{C4F5742D-965A-4DCD-B493-5CEAF49467BE}"/>
+                <a16:creationId xmlns:a16="http://schemas.microsoft.com/office/drawing/2014/main" id="{CAD79C9C-21EF-4374-94CD-A3976754750E}"/>
               </a:ext>
             </a:extLst>
           </p:cNvPr>
@@ -12022,7 +13786,7 @@
           <p:cNvPr id="18" name="">
             <a:extLst xmlns:a="http://schemas.openxmlformats.org/drawingml/2006/main">
               <a:ext uri="{FF2B5EF4-FFF2-40B4-BE49-F238E27FC236}">
-                <a16:creationId xmlns:a16="http://schemas.microsoft.com/office/drawing/2014/main" id="{C162741C-46CA-41BE-B816-49B6E66429DB}"/>
+                <a16:creationId xmlns:a16="http://schemas.microsoft.com/office/drawing/2014/main" id="{2D8DDD39-55D6-452F-9816-2527F7DF5373}"/>
               </a:ext>
             </a:extLst>
           </p:cNvPr>
@@ -12057,7 +13821,7 @@
           <p:cNvPr id="19" name="">
             <a:extLst xmlns:a="http://schemas.openxmlformats.org/drawingml/2006/main">
               <a:ext uri="{FF2B5EF4-FFF2-40B4-BE49-F238E27FC236}">
-                <a16:creationId xmlns:a16="http://schemas.microsoft.com/office/drawing/2014/main" id="{606A782E-A49C-4693-9277-50BFD57FB61E}"/>
+                <a16:creationId xmlns:a16="http://schemas.microsoft.com/office/drawing/2014/main" id="{83296058-FB22-42CE-8421-DA77B3A8E41E}"/>
               </a:ext>
             </a:extLst>
           </p:cNvPr>
@@ -12115,7 +13879,7 @@
           <p:cNvPr id="20" name="">
             <a:extLst xmlns:a="http://schemas.openxmlformats.org/drawingml/2006/main">
               <a:ext uri="{FF2B5EF4-FFF2-40B4-BE49-F238E27FC236}">
-                <a16:creationId xmlns:a16="http://schemas.microsoft.com/office/drawing/2014/main" id="{AA64EA51-D710-4E0D-B864-0D5071399AE3}"/>
+                <a16:creationId xmlns:a16="http://schemas.microsoft.com/office/drawing/2014/main" id="{A1A90942-E731-452B-8A21-ED0A27351D39}"/>
               </a:ext>
             </a:extLst>
           </p:cNvPr>
@@ -12224,7 +13988,7 @@
           <p:cNvPr id="21" name="">
             <a:extLst xmlns:a="http://schemas.openxmlformats.org/drawingml/2006/main">
               <a:ext uri="{FF2B5EF4-FFF2-40B4-BE49-F238E27FC236}">
-                <a16:creationId xmlns:a16="http://schemas.microsoft.com/office/drawing/2014/main" id="{7793E34E-76BB-4618-AFC5-43F94E6D8686}"/>
+                <a16:creationId xmlns:a16="http://schemas.microsoft.com/office/drawing/2014/main" id="{A23A718A-1877-469D-9D66-23A89DB194EC}"/>
               </a:ext>
             </a:extLst>
           </p:cNvPr>
@@ -12261,7 +14025,7 @@
           <p:cNvPr id="22" name="">
             <a:extLst xmlns:a="http://schemas.openxmlformats.org/drawingml/2006/main">
               <a:ext uri="{FF2B5EF4-FFF2-40B4-BE49-F238E27FC236}">
-                <a16:creationId xmlns:a16="http://schemas.microsoft.com/office/drawing/2014/main" id="{93C03E04-D76C-43C3-AEC5-E844B2048548}"/>
+                <a16:creationId xmlns:a16="http://schemas.microsoft.com/office/drawing/2014/main" id="{0A86026C-655E-4E46-B890-483F788FFEA5}"/>
               </a:ext>
             </a:extLst>
           </p:cNvPr>
@@ -12296,7 +14060,7 @@
           <p:cNvPr id="23" name="">
             <a:extLst xmlns:a="http://schemas.openxmlformats.org/drawingml/2006/main">
               <a:ext uri="{FF2B5EF4-FFF2-40B4-BE49-F238E27FC236}">
-                <a16:creationId xmlns:a16="http://schemas.microsoft.com/office/drawing/2014/main" id="{B51EB596-1212-4A4D-BA74-DF3F94FAF25E}"/>
+                <a16:creationId xmlns:a16="http://schemas.microsoft.com/office/drawing/2014/main" id="{64A657CD-530F-4BC4-90CC-6345A2E24B9A}"/>
               </a:ext>
             </a:extLst>
           </p:cNvPr>
@@ -12354,7 +14118,7 @@
           <p:cNvPr id="24" name="">
             <a:extLst xmlns:a="http://schemas.openxmlformats.org/drawingml/2006/main">
               <a:ext uri="{FF2B5EF4-FFF2-40B4-BE49-F238E27FC236}">
-                <a16:creationId xmlns:a16="http://schemas.microsoft.com/office/drawing/2014/main" id="{E979F6BC-0559-42C0-AE5E-5287E7977577}"/>
+                <a16:creationId xmlns:a16="http://schemas.microsoft.com/office/drawing/2014/main" id="{663EADD1-9087-4A95-828D-83389C86D439}"/>
               </a:ext>
             </a:extLst>
           </p:cNvPr>
@@ -12463,7 +14227,7 @@
           <p:cNvPr id="25" name="">
             <a:extLst xmlns:a="http://schemas.openxmlformats.org/drawingml/2006/main">
               <a:ext uri="{FF2B5EF4-FFF2-40B4-BE49-F238E27FC236}">
-                <a16:creationId xmlns:a16="http://schemas.microsoft.com/office/drawing/2014/main" id="{C133ADE3-D919-4773-B4BF-6D0CA3D4827D}"/>
+                <a16:creationId xmlns:a16="http://schemas.microsoft.com/office/drawing/2014/main" id="{184AAB81-06A3-4569-9571-9915821ACA2A}"/>
               </a:ext>
             </a:extLst>
           </p:cNvPr>
@@ -12500,7 +14264,7 @@
           <p:cNvPr id="26" name="">
             <a:extLst xmlns:a="http://schemas.openxmlformats.org/drawingml/2006/main">
               <a:ext uri="{FF2B5EF4-FFF2-40B4-BE49-F238E27FC236}">
-                <a16:creationId xmlns:a16="http://schemas.microsoft.com/office/drawing/2014/main" id="{2B7DC544-7156-4D40-925B-CB8DFE86EC3E}"/>
+                <a16:creationId xmlns:a16="http://schemas.microsoft.com/office/drawing/2014/main" id="{A8A2928F-482B-4BF8-8215-9032F4D309FE}"/>
               </a:ext>
             </a:extLst>
           </p:cNvPr>
@@ -12535,7 +14299,7 @@
           <p:cNvPr id="27" name="">
             <a:extLst xmlns:a="http://schemas.openxmlformats.org/drawingml/2006/main">
               <a:ext uri="{FF2B5EF4-FFF2-40B4-BE49-F238E27FC236}">
-                <a16:creationId xmlns:a16="http://schemas.microsoft.com/office/drawing/2014/main" id="{6A6C197D-466E-4AF4-8848-8EB9A9BE357A}"/>
+                <a16:creationId xmlns:a16="http://schemas.microsoft.com/office/drawing/2014/main" id="{ECA034F9-7E87-40FA-8B61-1C4111478F23}"/>
               </a:ext>
             </a:extLst>
           </p:cNvPr>
@@ -12593,7 +14357,7 @@
           <p:cNvPr id="28" name="">
             <a:extLst xmlns:a="http://schemas.openxmlformats.org/drawingml/2006/main">
               <a:ext uri="{FF2B5EF4-FFF2-40B4-BE49-F238E27FC236}">
-                <a16:creationId xmlns:a16="http://schemas.microsoft.com/office/drawing/2014/main" id="{59DBB416-20FE-45FD-860A-979CED5079D1}"/>
+                <a16:creationId xmlns:a16="http://schemas.microsoft.com/office/drawing/2014/main" id="{B46C3E99-F165-464D-B2D4-C0882AA259C1}"/>
               </a:ext>
             </a:extLst>
           </p:cNvPr>
@@ -12702,7 +14466,7 @@
           <p:cNvPr id="29" name="">
             <a:extLst xmlns:a="http://schemas.openxmlformats.org/drawingml/2006/main">
               <a:ext uri="{FF2B5EF4-FFF2-40B4-BE49-F238E27FC236}">
-                <a16:creationId xmlns:a16="http://schemas.microsoft.com/office/drawing/2014/main" id="{FEEE00CC-6220-4594-9B9C-825F29C70903}"/>
+                <a16:creationId xmlns:a16="http://schemas.microsoft.com/office/drawing/2014/main" id="{CAD4DB48-5135-4A6D-B740-09748D874185}"/>
               </a:ext>
             </a:extLst>
           </p:cNvPr>
@@ -12739,7 +14503,7 @@
           <p:cNvPr id="30" name="">
             <a:extLst xmlns:a="http://schemas.openxmlformats.org/drawingml/2006/main">
               <a:ext uri="{FF2B5EF4-FFF2-40B4-BE49-F238E27FC236}">
-                <a16:creationId xmlns:a16="http://schemas.microsoft.com/office/drawing/2014/main" id="{EE64DE0D-24A2-4C21-A8F0-A2FA4611A612}"/>
+                <a16:creationId xmlns:a16="http://schemas.microsoft.com/office/drawing/2014/main" id="{6AEA0305-8CCF-47D3-B05F-4C9938BFE941}"/>
               </a:ext>
             </a:extLst>
           </p:cNvPr>
@@ -12774,7 +14538,7 @@
           <p:cNvPr id="31" name="">
             <a:extLst xmlns:a="http://schemas.openxmlformats.org/drawingml/2006/main">
               <a:ext uri="{FF2B5EF4-FFF2-40B4-BE49-F238E27FC236}">
-                <a16:creationId xmlns:a16="http://schemas.microsoft.com/office/drawing/2014/main" id="{FECE3605-E843-4848-B316-A9D7AA6373C3}"/>
+                <a16:creationId xmlns:a16="http://schemas.microsoft.com/office/drawing/2014/main" id="{F3D23DDD-ABAF-4C79-9BA2-57389A2FF92D}"/>
               </a:ext>
             </a:extLst>
           </p:cNvPr>
@@ -12832,7 +14596,7 @@
           <p:cNvPr id="32" name="">
             <a:extLst xmlns:a="http://schemas.openxmlformats.org/drawingml/2006/main">
               <a:ext uri="{FF2B5EF4-FFF2-40B4-BE49-F238E27FC236}">
-                <a16:creationId xmlns:a16="http://schemas.microsoft.com/office/drawing/2014/main" id="{371C49AA-87C0-4BED-B39F-D268F60D0FD6}"/>
+                <a16:creationId xmlns:a16="http://schemas.microsoft.com/office/drawing/2014/main" id="{CE0E1805-D5D4-41FD-875A-EC2C1113BF14}"/>
               </a:ext>
             </a:extLst>
           </p:cNvPr>
@@ -12941,7 +14705,7 @@
           <p:cNvPr id="33" name="">
             <a:extLst xmlns:a="http://schemas.openxmlformats.org/drawingml/2006/main">
               <a:ext uri="{FF2B5EF4-FFF2-40B4-BE49-F238E27FC236}">
-                <a16:creationId xmlns:a16="http://schemas.microsoft.com/office/drawing/2014/main" id="{F4725FEA-8A5A-42EF-92D3-8406C8F530E4}"/>
+                <a16:creationId xmlns:a16="http://schemas.microsoft.com/office/drawing/2014/main" id="{7037B7BD-CFB2-460B-8470-63D4C6B254BB}"/>
               </a:ext>
             </a:extLst>
           </p:cNvPr>
@@ -12995,7 +14759,7 @@
           <p:cNvPr id="34" name="">
             <a:extLst xmlns:a="http://schemas.openxmlformats.org/drawingml/2006/main">
               <a:ext uri="{FF2B5EF4-FFF2-40B4-BE49-F238E27FC236}">
-                <a16:creationId xmlns:a16="http://schemas.microsoft.com/office/drawing/2014/main" id="{CACA3172-57A6-4B6F-9265-36682497B6FD}"/>
+                <a16:creationId xmlns:a16="http://schemas.microsoft.com/office/drawing/2014/main" id="{3B4D5B4A-55E1-4800-8967-1FBD455C9982}"/>
               </a:ext>
             </a:extLst>
           </p:cNvPr>
@@ -13028,7 +14792,7 @@
           <p:cNvPr id="35" name="">
             <a:extLst xmlns:a="http://schemas.openxmlformats.org/drawingml/2006/main">
               <a:ext uri="{FF2B5EF4-FFF2-40B4-BE49-F238E27FC236}">
-                <a16:creationId xmlns:a16="http://schemas.microsoft.com/office/drawing/2014/main" id="{811D0E9F-DA18-4D91-AD54-031F0AECC8B9}"/>
+                <a16:creationId xmlns:a16="http://schemas.microsoft.com/office/drawing/2014/main" id="{E6769D84-7439-4FF0-8488-61BAA34E808C}"/>
               </a:ext>
             </a:extLst>
           </p:cNvPr>
@@ -13082,7 +14846,7 @@
           <p:cNvPr id="36" name="">
             <a:extLst xmlns:a="http://schemas.openxmlformats.org/drawingml/2006/main">
               <a:ext uri="{FF2B5EF4-FFF2-40B4-BE49-F238E27FC236}">
-                <a16:creationId xmlns:a16="http://schemas.microsoft.com/office/drawing/2014/main" id="{6ECDD42F-DE88-44B0-9A5D-0A25627B21EC}"/>
+                <a16:creationId xmlns:a16="http://schemas.microsoft.com/office/drawing/2014/main" id="{10DEFFAF-92F0-4D95-9354-75A69F8C8D30}"/>
               </a:ext>
             </a:extLst>
           </p:cNvPr>
@@ -13115,7 +14879,7 @@
           <p:cNvPr id="37" name="">
             <a:extLst xmlns:a="http://schemas.openxmlformats.org/drawingml/2006/main">
               <a:ext uri="{FF2B5EF4-FFF2-40B4-BE49-F238E27FC236}">
-                <a16:creationId xmlns:a16="http://schemas.microsoft.com/office/drawing/2014/main" id="{373C9C87-4385-4867-B1EC-83D3736787B6}"/>
+                <a16:creationId xmlns:a16="http://schemas.microsoft.com/office/drawing/2014/main" id="{78AF39C0-ACA7-4FA9-9F0C-E18E75A81A15}"/>
               </a:ext>
             </a:extLst>
           </p:cNvPr>
@@ -13169,7 +14933,7 @@
           <p:cNvPr id="38" name="">
             <a:extLst xmlns:a="http://schemas.openxmlformats.org/drawingml/2006/main">
               <a:ext uri="{FF2B5EF4-FFF2-40B4-BE49-F238E27FC236}">
-                <a16:creationId xmlns:a16="http://schemas.microsoft.com/office/drawing/2014/main" id="{7846CE5A-71A4-49C8-ACFC-AF3EABD11329}"/>
+                <a16:creationId xmlns:a16="http://schemas.microsoft.com/office/drawing/2014/main" id="{BF7C0280-5DAD-4A89-805A-8D3D930D28CB}"/>
               </a:ext>
             </a:extLst>
           </p:cNvPr>
@@ -13202,7 +14966,7 @@
           <p:cNvPr id="39" name="">
             <a:extLst xmlns:a="http://schemas.openxmlformats.org/drawingml/2006/main">
               <a:ext uri="{FF2B5EF4-FFF2-40B4-BE49-F238E27FC236}">
-                <a16:creationId xmlns:a16="http://schemas.microsoft.com/office/drawing/2014/main" id="{BFF65069-7B56-402A-AD83-ECCEB27D7199}"/>
+                <a16:creationId xmlns:a16="http://schemas.microsoft.com/office/drawing/2014/main" id="{86C56488-7CF9-4977-A102-EDDA71C300CB}"/>
               </a:ext>
             </a:extLst>
           </p:cNvPr>
@@ -13256,7 +15020,7 @@
           <p:cNvPr id="40" name="">
             <a:extLst xmlns:a="http://schemas.openxmlformats.org/drawingml/2006/main">
               <a:ext uri="{FF2B5EF4-FFF2-40B4-BE49-F238E27FC236}">
-                <a16:creationId xmlns:a16="http://schemas.microsoft.com/office/drawing/2014/main" id="{68752777-C132-4F5F-B011-8B16558D1E8B}"/>
+                <a16:creationId xmlns:a16="http://schemas.microsoft.com/office/drawing/2014/main" id="{5E0BDE0E-3437-43B7-9664-F5CA928F9975}"/>
               </a:ext>
             </a:extLst>
           </p:cNvPr>
@@ -13312,7 +15076,7 @@
     </p:spTree>
     <p:extLst>
       <p:ext uri="{BB962C8B-B14F-4D97-AF65-F5344CB8AC3E}">
-        <p14:creationId xmlns:p14="http://schemas.microsoft.com/office/powerpoint/2010/main" val="1394357154"/>
+        <p14:creationId xmlns:p14="http://schemas.microsoft.com/office/powerpoint/2010/main" val="785376136"/>
       </p:ext>
     </p:extLst>
   </p:cSld>
@@ -13343,7 +15107,7 @@
           <p:cNvPr id="1" name="Slide Number Placeholder 5">
             <a:extLst xmlns:a="http://schemas.openxmlformats.org/drawingml/2006/main">
               <a:ext uri="{FF2B5EF4-FFF2-40B4-BE49-F238E27FC236}">
-                <a16:creationId xmlns:a16="http://schemas.microsoft.com/office/drawing/2014/main" id="{E12CE447-476B-4BAE-A1FF-E669E79965E6}"/>
+                <a16:creationId xmlns:a16="http://schemas.microsoft.com/office/drawing/2014/main" id="{EDD0F201-AE24-4D54-ACE2-5F86EBC94A0A}"/>
               </a:ext>
             </a:extLst>
           </p:cNvPr>
@@ -13379,7 +15143,7 @@
           <p:nvPr/>
         </p:nvPicPr>
         <p:blipFill>
-          <a:blip xmlns:r="http://schemas.openxmlformats.org/officeDocument/2006/relationships" xmlns:a="http://schemas.openxmlformats.org/drawingml/2006/main" r:embed="R203812fe74f849a7"/>
+          <a:blip xmlns:r="http://schemas.openxmlformats.org/officeDocument/2006/relationships" xmlns:a="http://schemas.openxmlformats.org/drawingml/2006/main" r:embed="Rca2df88beb9c4ec9"/>
           <a:srcRect xmlns:a="http://schemas.openxmlformats.org/drawingml/2006/main" l="0" t="21875" r="0" b="21875"/>
           <a:stretch xmlns:a="http://schemas.openxmlformats.org/drawingml/2006/main">
             <a:fillRect l="0" t="0" r="0" b="0"/>
@@ -13400,7 +15164,7 @@
           <p:cNvPr id="3" name="">
             <a:extLst xmlns:a="http://schemas.openxmlformats.org/drawingml/2006/main">
               <a:ext uri="{FF2B5EF4-FFF2-40B4-BE49-F238E27FC236}">
-                <a16:creationId xmlns:a16="http://schemas.microsoft.com/office/drawing/2014/main" id="{A11CAA33-5EA0-4A45-BCD5-8CD7D73E3548}"/>
+                <a16:creationId xmlns:a16="http://schemas.microsoft.com/office/drawing/2014/main" id="{54283D48-E1FF-406A-AF21-A6F536E504CE}"/>
               </a:ext>
             </a:extLst>
           </p:cNvPr>
@@ -13435,7 +15199,7 @@
           <p:cNvPr id="4" name="">
             <a:extLst xmlns:a="http://schemas.openxmlformats.org/drawingml/2006/main">
               <a:ext uri="{FF2B5EF4-FFF2-40B4-BE49-F238E27FC236}">
-                <a16:creationId xmlns:a16="http://schemas.microsoft.com/office/drawing/2014/main" id="{F3F14A8D-B64A-4829-8A9F-5BB5C4DFAF7F}"/>
+                <a16:creationId xmlns:a16="http://schemas.microsoft.com/office/drawing/2014/main" id="{3CFEE77A-C890-46CC-BF51-3A79AE6252AA}"/>
               </a:ext>
             </a:extLst>
           </p:cNvPr>
@@ -13470,7 +15234,7 @@
           <p:cNvPr id="5" name="">
             <a:extLst xmlns:a="http://schemas.openxmlformats.org/drawingml/2006/main">
               <a:ext uri="{FF2B5EF4-FFF2-40B4-BE49-F238E27FC236}">
-                <a16:creationId xmlns:a16="http://schemas.microsoft.com/office/drawing/2014/main" id="{537B1EB2-451A-4699-8250-C8FE5928B42D}"/>
+                <a16:creationId xmlns:a16="http://schemas.microsoft.com/office/drawing/2014/main" id="{3CE23557-40C4-45EF-92C6-06DCF13753FD}"/>
               </a:ext>
             </a:extLst>
           </p:cNvPr>
@@ -13507,7 +15271,7 @@
           <p:cNvPr id="6" name="">
             <a:extLst xmlns:a="http://schemas.openxmlformats.org/drawingml/2006/main">
               <a:ext uri="{FF2B5EF4-FFF2-40B4-BE49-F238E27FC236}">
-                <a16:creationId xmlns:a16="http://schemas.microsoft.com/office/drawing/2014/main" id="{6CD9E060-CC3C-4AA6-8C91-985578BE0349}"/>
+                <a16:creationId xmlns:a16="http://schemas.microsoft.com/office/drawing/2014/main" id="{A5965519-5863-4F6A-96FD-EAC80D2D0057}"/>
               </a:ext>
             </a:extLst>
           </p:cNvPr>
@@ -13544,7 +15308,7 @@
           <p:cNvPr id="7" name="">
             <a:extLst xmlns:a="http://schemas.openxmlformats.org/drawingml/2006/main">
               <a:ext uri="{FF2B5EF4-FFF2-40B4-BE49-F238E27FC236}">
-                <a16:creationId xmlns:a16="http://schemas.microsoft.com/office/drawing/2014/main" id="{1D8143B9-7917-460C-8DD4-4EF606227B9D}"/>
+                <a16:creationId xmlns:a16="http://schemas.microsoft.com/office/drawing/2014/main" id="{C9B0BD89-F970-4CB7-97FD-9A7E67836B65}"/>
               </a:ext>
             </a:extLst>
           </p:cNvPr>
@@ -13581,7 +15345,7 @@
           <p:cNvPr id="8" name="">
             <a:extLst xmlns:a="http://schemas.openxmlformats.org/drawingml/2006/main">
               <a:ext uri="{FF2B5EF4-FFF2-40B4-BE49-F238E27FC236}">
-                <a16:creationId xmlns:a16="http://schemas.microsoft.com/office/drawing/2014/main" id="{CDCC7253-DECC-4808-9FD7-B2AB2C2BD343}"/>
+                <a16:creationId xmlns:a16="http://schemas.microsoft.com/office/drawing/2014/main" id="{17C6087F-2813-4498-92ED-70608E7B0AEF}"/>
               </a:ext>
             </a:extLst>
           </p:cNvPr>
@@ -13618,7 +15382,7 @@
           <p:cNvPr id="9" name="">
             <a:extLst xmlns:a="http://schemas.openxmlformats.org/drawingml/2006/main">
               <a:ext uri="{FF2B5EF4-FFF2-40B4-BE49-F238E27FC236}">
-                <a16:creationId xmlns:a16="http://schemas.microsoft.com/office/drawing/2014/main" id="{A3ECED39-FF42-49A5-AC22-BAC2957C6060}"/>
+                <a16:creationId xmlns:a16="http://schemas.microsoft.com/office/drawing/2014/main" id="{28D898C5-A0E8-4134-B718-94DCB24B7EE9}"/>
               </a:ext>
             </a:extLst>
           </p:cNvPr>
@@ -13676,7 +15440,7 @@
           <p:cNvPr id="10" name="">
             <a:extLst xmlns:a="http://schemas.openxmlformats.org/drawingml/2006/main">
               <a:ext uri="{FF2B5EF4-FFF2-40B4-BE49-F238E27FC236}">
-                <a16:creationId xmlns:a16="http://schemas.microsoft.com/office/drawing/2014/main" id="{592907F2-785B-4EC2-B2BF-F4B07AD6AF2E}"/>
+                <a16:creationId xmlns:a16="http://schemas.microsoft.com/office/drawing/2014/main" id="{F1CC8DB7-7B0B-4D8C-88F6-FF8827B39B38}"/>
               </a:ext>
             </a:extLst>
           </p:cNvPr>
@@ -13724,7 +15488,7 @@
                   <a:srgbClr val="0F5B3F"/>
                 </a:solidFill>
               </a:rPr>
-              <a:t>04 / 12</a:t>
+              <a:t>04 / 13</a:t>
             </a:r>
           </a:p>
         </p:txBody>
@@ -13734,7 +15498,7 @@
           <p:cNvPr id="11" name="">
             <a:extLst xmlns:a="http://schemas.openxmlformats.org/drawingml/2006/main">
               <a:ext uri="{FF2B5EF4-FFF2-40B4-BE49-F238E27FC236}">
-                <a16:creationId xmlns:a16="http://schemas.microsoft.com/office/drawing/2014/main" id="{91E2F72D-F54C-412A-8549-A9C859033B0B}"/>
+                <a16:creationId xmlns:a16="http://schemas.microsoft.com/office/drawing/2014/main" id="{5491CAC7-1513-4B53-A054-71396A1FD35C}"/>
               </a:ext>
             </a:extLst>
           </p:cNvPr>
@@ -13769,7 +15533,7 @@
           <p:cNvPr id="12" name="">
             <a:extLst xmlns:a="http://schemas.openxmlformats.org/drawingml/2006/main">
               <a:ext uri="{FF2B5EF4-FFF2-40B4-BE49-F238E27FC236}">
-                <a16:creationId xmlns:a16="http://schemas.microsoft.com/office/drawing/2014/main" id="{62338E28-16F0-4DBF-86BF-C8D14CBAF63D}"/>
+                <a16:creationId xmlns:a16="http://schemas.microsoft.com/office/drawing/2014/main" id="{F0D063F9-081E-4761-B5AE-86B8EA08F1F2}"/>
               </a:ext>
             </a:extLst>
           </p:cNvPr>
@@ -13802,7 +15566,7 @@
           <p:cNvPr id="13" name="">
             <a:extLst xmlns:a="http://schemas.openxmlformats.org/drawingml/2006/main">
               <a:ext uri="{FF2B5EF4-FFF2-40B4-BE49-F238E27FC236}">
-                <a16:creationId xmlns:a16="http://schemas.microsoft.com/office/drawing/2014/main" id="{6FD86669-4F43-43EA-9945-A2F643F0B993}"/>
+                <a16:creationId xmlns:a16="http://schemas.microsoft.com/office/drawing/2014/main" id="{0E4E335A-DBDA-41CC-871E-AD256A00E337}"/>
               </a:ext>
             </a:extLst>
           </p:cNvPr>
@@ -13877,7 +15641,7 @@
           <p:cNvPr id="14" name="">
             <a:extLst xmlns:a="http://schemas.openxmlformats.org/drawingml/2006/main">
               <a:ext uri="{FF2B5EF4-FFF2-40B4-BE49-F238E27FC236}">
-                <a16:creationId xmlns:a16="http://schemas.microsoft.com/office/drawing/2014/main" id="{E5E94A83-2065-44D3-A5C2-9C047A0E988D}"/>
+                <a16:creationId xmlns:a16="http://schemas.microsoft.com/office/drawing/2014/main" id="{3358A7E1-0218-47F5-BF0C-940403476733}"/>
               </a:ext>
             </a:extLst>
           </p:cNvPr>
@@ -13914,7 +15678,7 @@
           <p:cNvPr id="15" name="">
             <a:extLst xmlns:a="http://schemas.openxmlformats.org/drawingml/2006/main">
               <a:ext uri="{FF2B5EF4-FFF2-40B4-BE49-F238E27FC236}">
-                <a16:creationId xmlns:a16="http://schemas.microsoft.com/office/drawing/2014/main" id="{5D1AF7E6-B777-4AD9-84FE-B4FE92E28301}"/>
+                <a16:creationId xmlns:a16="http://schemas.microsoft.com/office/drawing/2014/main" id="{6E7F39ED-7A3C-4233-8EBC-D79761B4B042}"/>
               </a:ext>
             </a:extLst>
           </p:cNvPr>
@@ -13949,7 +15713,7 @@
           <p:cNvPr id="16" name="">
             <a:extLst xmlns:a="http://schemas.openxmlformats.org/drawingml/2006/main">
               <a:ext uri="{FF2B5EF4-FFF2-40B4-BE49-F238E27FC236}">
-                <a16:creationId xmlns:a16="http://schemas.microsoft.com/office/drawing/2014/main" id="{C1F5BC5D-67F4-476F-BC39-49042DD35074}"/>
+                <a16:creationId xmlns:a16="http://schemas.microsoft.com/office/drawing/2014/main" id="{FD4E23D7-C014-4AE6-9A9D-105281989EE1}"/>
               </a:ext>
             </a:extLst>
           </p:cNvPr>
@@ -14007,7 +15771,7 @@
           <p:cNvPr id="17" name="">
             <a:extLst xmlns:a="http://schemas.openxmlformats.org/drawingml/2006/main">
               <a:ext uri="{FF2B5EF4-FFF2-40B4-BE49-F238E27FC236}">
-                <a16:creationId xmlns:a16="http://schemas.microsoft.com/office/drawing/2014/main" id="{77FB79B9-2473-4358-9082-124A81237859}"/>
+                <a16:creationId xmlns:a16="http://schemas.microsoft.com/office/drawing/2014/main" id="{6C966198-3879-4EBD-B65F-A1D71E1337A5}"/>
               </a:ext>
             </a:extLst>
           </p:cNvPr>
@@ -14116,7 +15880,7 @@
           <p:cNvPr id="18" name="">
             <a:extLst xmlns:a="http://schemas.openxmlformats.org/drawingml/2006/main">
               <a:ext uri="{FF2B5EF4-FFF2-40B4-BE49-F238E27FC236}">
-                <a16:creationId xmlns:a16="http://schemas.microsoft.com/office/drawing/2014/main" id="{5DB06B90-B995-4AF4-8BD0-D9B3B05C8E1C}"/>
+                <a16:creationId xmlns:a16="http://schemas.microsoft.com/office/drawing/2014/main" id="{F8FC74B1-96C7-4F44-A16D-E88CB02D6EDB}"/>
               </a:ext>
             </a:extLst>
           </p:cNvPr>
@@ -14149,7 +15913,7 @@
           <p:cNvPr id="19" name="">
             <a:extLst xmlns:a="http://schemas.openxmlformats.org/drawingml/2006/main">
               <a:ext uri="{FF2B5EF4-FFF2-40B4-BE49-F238E27FC236}">
-                <a16:creationId xmlns:a16="http://schemas.microsoft.com/office/drawing/2014/main" id="{32E8CFD5-D802-40C9-819E-DA20FE63DDB4}"/>
+                <a16:creationId xmlns:a16="http://schemas.microsoft.com/office/drawing/2014/main" id="{9AE40B3C-D541-4CC6-BA06-B2FD41C4F23A}"/>
               </a:ext>
             </a:extLst>
           </p:cNvPr>
@@ -14186,7 +15950,7 @@
           <p:cNvPr id="20" name="">
             <a:extLst xmlns:a="http://schemas.openxmlformats.org/drawingml/2006/main">
               <a:ext uri="{FF2B5EF4-FFF2-40B4-BE49-F238E27FC236}">
-                <a16:creationId xmlns:a16="http://schemas.microsoft.com/office/drawing/2014/main" id="{176DF6F3-4529-4CE9-AC4D-EF47822FCDDA}"/>
+                <a16:creationId xmlns:a16="http://schemas.microsoft.com/office/drawing/2014/main" id="{A667C397-A675-410B-BFC5-A415F9902E51}"/>
               </a:ext>
             </a:extLst>
           </p:cNvPr>
@@ -14221,7 +15985,7 @@
           <p:cNvPr id="21" name="">
             <a:extLst xmlns:a="http://schemas.openxmlformats.org/drawingml/2006/main">
               <a:ext uri="{FF2B5EF4-FFF2-40B4-BE49-F238E27FC236}">
-                <a16:creationId xmlns:a16="http://schemas.microsoft.com/office/drawing/2014/main" id="{CB87B3A2-1056-4F58-A51C-3279C0E47B8E}"/>
+                <a16:creationId xmlns:a16="http://schemas.microsoft.com/office/drawing/2014/main" id="{9300CAEB-4CE0-4134-9D7F-4D85ED86F0B3}"/>
               </a:ext>
             </a:extLst>
           </p:cNvPr>
@@ -14279,7 +16043,7 @@
           <p:cNvPr id="22" name="">
             <a:extLst xmlns:a="http://schemas.openxmlformats.org/drawingml/2006/main">
               <a:ext uri="{FF2B5EF4-FFF2-40B4-BE49-F238E27FC236}">
-                <a16:creationId xmlns:a16="http://schemas.microsoft.com/office/drawing/2014/main" id="{08F41C24-A61E-4E29-A5E6-2BA8885CC5CF}"/>
+                <a16:creationId xmlns:a16="http://schemas.microsoft.com/office/drawing/2014/main" id="{698B5BCA-46A2-439C-A6EC-57601F780AF6}"/>
               </a:ext>
             </a:extLst>
           </p:cNvPr>
@@ -14388,7 +16152,7 @@
           <p:cNvPr id="23" name="">
             <a:extLst xmlns:a="http://schemas.openxmlformats.org/drawingml/2006/main">
               <a:ext uri="{FF2B5EF4-FFF2-40B4-BE49-F238E27FC236}">
-                <a16:creationId xmlns:a16="http://schemas.microsoft.com/office/drawing/2014/main" id="{E06257DF-BEAB-4C74-8AC9-5A2013CC2BA4}"/>
+                <a16:creationId xmlns:a16="http://schemas.microsoft.com/office/drawing/2014/main" id="{0533505E-7421-4C86-842C-200546272340}"/>
               </a:ext>
             </a:extLst>
           </p:cNvPr>
@@ -14421,7 +16185,7 @@
           <p:cNvPr id="24" name="">
             <a:extLst xmlns:a="http://schemas.openxmlformats.org/drawingml/2006/main">
               <a:ext uri="{FF2B5EF4-FFF2-40B4-BE49-F238E27FC236}">
-                <a16:creationId xmlns:a16="http://schemas.microsoft.com/office/drawing/2014/main" id="{CB9F27A0-B788-4E48-B211-5C69678C4EBF}"/>
+                <a16:creationId xmlns:a16="http://schemas.microsoft.com/office/drawing/2014/main" id="{80A9D6A6-F037-4D9B-9FD5-C181D8D10C95}"/>
               </a:ext>
             </a:extLst>
           </p:cNvPr>
@@ -14458,7 +16222,7 @@
           <p:cNvPr id="25" name="">
             <a:extLst xmlns:a="http://schemas.openxmlformats.org/drawingml/2006/main">
               <a:ext uri="{FF2B5EF4-FFF2-40B4-BE49-F238E27FC236}">
-                <a16:creationId xmlns:a16="http://schemas.microsoft.com/office/drawing/2014/main" id="{FFA7F26A-DAC4-4B2C-98E2-9BB2A1DCF1F7}"/>
+                <a16:creationId xmlns:a16="http://schemas.microsoft.com/office/drawing/2014/main" id="{45C3B393-ED53-4EC1-AF3C-F91B9FC55A36}"/>
               </a:ext>
             </a:extLst>
           </p:cNvPr>
@@ -14493,7 +16257,7 @@
           <p:cNvPr id="26" name="">
             <a:extLst xmlns:a="http://schemas.openxmlformats.org/drawingml/2006/main">
               <a:ext uri="{FF2B5EF4-FFF2-40B4-BE49-F238E27FC236}">
-                <a16:creationId xmlns:a16="http://schemas.microsoft.com/office/drawing/2014/main" id="{AD189B84-D955-48CA-ACF3-4F182B28DD04}"/>
+                <a16:creationId xmlns:a16="http://schemas.microsoft.com/office/drawing/2014/main" id="{9B2F9FB7-DCDE-4FE8-9CAC-5566759BDD87}"/>
               </a:ext>
             </a:extLst>
           </p:cNvPr>
@@ -14551,7 +16315,7 @@
           <p:cNvPr id="27" name="">
             <a:extLst xmlns:a="http://schemas.openxmlformats.org/drawingml/2006/main">
               <a:ext uri="{FF2B5EF4-FFF2-40B4-BE49-F238E27FC236}">
-                <a16:creationId xmlns:a16="http://schemas.microsoft.com/office/drawing/2014/main" id="{9773D69F-FB95-46A1-8BA6-67BE6BD506F9}"/>
+                <a16:creationId xmlns:a16="http://schemas.microsoft.com/office/drawing/2014/main" id="{D2033981-D02C-46B2-B129-9D6206E3E599}"/>
               </a:ext>
             </a:extLst>
           </p:cNvPr>
@@ -14643,7 +16407,7 @@
           <p:cNvPr id="28" name="">
             <a:extLst xmlns:a="http://schemas.openxmlformats.org/drawingml/2006/main">
               <a:ext uri="{FF2B5EF4-FFF2-40B4-BE49-F238E27FC236}">
-                <a16:creationId xmlns:a16="http://schemas.microsoft.com/office/drawing/2014/main" id="{62A27BF9-1237-42CF-9155-DC39A8C12A42}"/>
+                <a16:creationId xmlns:a16="http://schemas.microsoft.com/office/drawing/2014/main" id="{C2C30D9B-BC86-4C4F-9C74-E2F135DE7951}"/>
               </a:ext>
             </a:extLst>
           </p:cNvPr>
@@ -14678,7 +16442,7 @@
           <p:cNvPr id="29" name="">
             <a:extLst xmlns:a="http://schemas.openxmlformats.org/drawingml/2006/main">
               <a:ext uri="{FF2B5EF4-FFF2-40B4-BE49-F238E27FC236}">
-                <a16:creationId xmlns:a16="http://schemas.microsoft.com/office/drawing/2014/main" id="{8440B62C-4558-4FCC-BD2F-1EB153B31AF9}"/>
+                <a16:creationId xmlns:a16="http://schemas.microsoft.com/office/drawing/2014/main" id="{C28CE52D-4B28-464D-943B-FA27BD3DE3A8}"/>
               </a:ext>
             </a:extLst>
           </p:cNvPr>
@@ -14713,7 +16477,7 @@
           <p:cNvPr id="30" name="">
             <a:extLst xmlns:a="http://schemas.openxmlformats.org/drawingml/2006/main">
               <a:ext uri="{FF2B5EF4-FFF2-40B4-BE49-F238E27FC236}">
-                <a16:creationId xmlns:a16="http://schemas.microsoft.com/office/drawing/2014/main" id="{2035AB98-EAA3-4B06-B2C4-7250E2064B2C}"/>
+                <a16:creationId xmlns:a16="http://schemas.microsoft.com/office/drawing/2014/main" id="{B91FB715-5D40-410B-9D8C-0BEB3424BA17}"/>
               </a:ext>
             </a:extLst>
           </p:cNvPr>
@@ -14771,7 +16535,7 @@
           <p:cNvPr id="31" name="">
             <a:extLst xmlns:a="http://schemas.openxmlformats.org/drawingml/2006/main">
               <a:ext uri="{FF2B5EF4-FFF2-40B4-BE49-F238E27FC236}">
-                <a16:creationId xmlns:a16="http://schemas.microsoft.com/office/drawing/2014/main" id="{12C1452E-2D2F-47A5-B221-D2DB671FED75}"/>
+                <a16:creationId xmlns:a16="http://schemas.microsoft.com/office/drawing/2014/main" id="{89EF4800-7B30-4495-8DB8-103816E88AD5}"/>
               </a:ext>
             </a:extLst>
           </p:cNvPr>
@@ -14827,7 +16591,7 @@
     </p:spTree>
     <p:extLst>
       <p:ext uri="{BB962C8B-B14F-4D97-AF65-F5344CB8AC3E}">
-        <p14:creationId xmlns:p14="http://schemas.microsoft.com/office/powerpoint/2010/main" val="1908421148"/>
+        <p14:creationId xmlns:p14="http://schemas.microsoft.com/office/powerpoint/2010/main" val="1269731943"/>
       </p:ext>
     </p:extLst>
   </p:cSld>
@@ -14858,7 +16622,7 @@
           <p:cNvPr id="1" name="Slide Number Placeholder 5">
             <a:extLst xmlns:a="http://schemas.openxmlformats.org/drawingml/2006/main">
               <a:ext uri="{FF2B5EF4-FFF2-40B4-BE49-F238E27FC236}">
-                <a16:creationId xmlns:a16="http://schemas.microsoft.com/office/drawing/2014/main" id="{E12CE447-476B-4BAE-A1FF-E669E79965E6}"/>
+                <a16:creationId xmlns:a16="http://schemas.microsoft.com/office/drawing/2014/main" id="{EDD0F201-AE24-4D54-ACE2-5F86EBC94A0A}"/>
               </a:ext>
             </a:extLst>
           </p:cNvPr>
@@ -14894,7 +16658,7 @@
           <p:nvPr/>
         </p:nvPicPr>
         <p:blipFill>
-          <a:blip xmlns:r="http://schemas.openxmlformats.org/officeDocument/2006/relationships" xmlns:a="http://schemas.openxmlformats.org/drawingml/2006/main" r:embed="R2336609a21444d95"/>
+          <a:blip xmlns:r="http://schemas.openxmlformats.org/officeDocument/2006/relationships" xmlns:a="http://schemas.openxmlformats.org/drawingml/2006/main" r:embed="R10774a2cb35a4e07"/>
           <a:srcRect xmlns:a="http://schemas.openxmlformats.org/drawingml/2006/main" l="0" t="21875" r="0" b="21875"/>
           <a:stretch xmlns:a="http://schemas.openxmlformats.org/drawingml/2006/main">
             <a:fillRect l="0" t="0" r="0" b="0"/>
@@ -14915,7 +16679,7 @@
           <p:cNvPr id="3" name="">
             <a:extLst xmlns:a="http://schemas.openxmlformats.org/drawingml/2006/main">
               <a:ext uri="{FF2B5EF4-FFF2-40B4-BE49-F238E27FC236}">
-                <a16:creationId xmlns:a16="http://schemas.microsoft.com/office/drawing/2014/main" id="{30CA5D47-C4E0-4A8E-8F69-C675713A3AFC}"/>
+                <a16:creationId xmlns:a16="http://schemas.microsoft.com/office/drawing/2014/main" id="{5683C6F5-27F0-4811-A944-9659366D8EC4}"/>
               </a:ext>
             </a:extLst>
           </p:cNvPr>
@@ -14950,7 +16714,7 @@
           <p:cNvPr id="4" name="">
             <a:extLst xmlns:a="http://schemas.openxmlformats.org/drawingml/2006/main">
               <a:ext uri="{FF2B5EF4-FFF2-40B4-BE49-F238E27FC236}">
-                <a16:creationId xmlns:a16="http://schemas.microsoft.com/office/drawing/2014/main" id="{A76A70C4-38AD-493B-9C7F-C6403F2118F6}"/>
+                <a16:creationId xmlns:a16="http://schemas.microsoft.com/office/drawing/2014/main" id="{8BF95AAF-1930-4B83-8FCF-A662D37AD4F8}"/>
               </a:ext>
             </a:extLst>
           </p:cNvPr>
@@ -14985,7 +16749,7 @@
           <p:cNvPr id="5" name="">
             <a:extLst xmlns:a="http://schemas.openxmlformats.org/drawingml/2006/main">
               <a:ext uri="{FF2B5EF4-FFF2-40B4-BE49-F238E27FC236}">
-                <a16:creationId xmlns:a16="http://schemas.microsoft.com/office/drawing/2014/main" id="{E11F7184-FC2F-4DBB-8C82-917A76F8F6E7}"/>
+                <a16:creationId xmlns:a16="http://schemas.microsoft.com/office/drawing/2014/main" id="{C173477E-3F85-43FE-B2B9-5B528D3D084A}"/>
               </a:ext>
             </a:extLst>
           </p:cNvPr>
@@ -15022,7 +16786,7 @@
           <p:cNvPr id="6" name="">
             <a:extLst xmlns:a="http://schemas.openxmlformats.org/drawingml/2006/main">
               <a:ext uri="{FF2B5EF4-FFF2-40B4-BE49-F238E27FC236}">
-                <a16:creationId xmlns:a16="http://schemas.microsoft.com/office/drawing/2014/main" id="{5EC8B7CF-629E-44AA-AECD-58D981B218F6}"/>
+                <a16:creationId xmlns:a16="http://schemas.microsoft.com/office/drawing/2014/main" id="{3B8D3A4C-0BE7-4DB9-BD30-2ECAB9BB8A36}"/>
               </a:ext>
             </a:extLst>
           </p:cNvPr>
@@ -15059,7 +16823,7 @@
           <p:cNvPr id="7" name="">
             <a:extLst xmlns:a="http://schemas.openxmlformats.org/drawingml/2006/main">
               <a:ext uri="{FF2B5EF4-FFF2-40B4-BE49-F238E27FC236}">
-                <a16:creationId xmlns:a16="http://schemas.microsoft.com/office/drawing/2014/main" id="{7BB2938C-FEAD-4422-A33A-D017EA940132}"/>
+                <a16:creationId xmlns:a16="http://schemas.microsoft.com/office/drawing/2014/main" id="{EFC2FB44-33F2-46D7-ABB7-EF3092DB0633}"/>
               </a:ext>
             </a:extLst>
           </p:cNvPr>
@@ -15096,7 +16860,7 @@
           <p:cNvPr id="8" name="">
             <a:extLst xmlns:a="http://schemas.openxmlformats.org/drawingml/2006/main">
               <a:ext uri="{FF2B5EF4-FFF2-40B4-BE49-F238E27FC236}">
-                <a16:creationId xmlns:a16="http://schemas.microsoft.com/office/drawing/2014/main" id="{35D0A677-A012-44A0-B3D6-652C23B24AA0}"/>
+                <a16:creationId xmlns:a16="http://schemas.microsoft.com/office/drawing/2014/main" id="{FE3682DC-E452-4499-9194-8017B28C6159}"/>
               </a:ext>
             </a:extLst>
           </p:cNvPr>
@@ -15133,7 +16897,7 @@
           <p:cNvPr id="9" name="">
             <a:extLst xmlns:a="http://schemas.openxmlformats.org/drawingml/2006/main">
               <a:ext uri="{FF2B5EF4-FFF2-40B4-BE49-F238E27FC236}">
-                <a16:creationId xmlns:a16="http://schemas.microsoft.com/office/drawing/2014/main" id="{29D9D992-C308-4EA1-83A8-EB0E015C4837}"/>
+                <a16:creationId xmlns:a16="http://schemas.microsoft.com/office/drawing/2014/main" id="{E2DF7DA3-2F60-495F-82BB-54F72E9DE85A}"/>
               </a:ext>
             </a:extLst>
           </p:cNvPr>
@@ -15191,7 +16955,7 @@
           <p:cNvPr id="10" name="">
             <a:extLst xmlns:a="http://schemas.openxmlformats.org/drawingml/2006/main">
               <a:ext uri="{FF2B5EF4-FFF2-40B4-BE49-F238E27FC236}">
-                <a16:creationId xmlns:a16="http://schemas.microsoft.com/office/drawing/2014/main" id="{01DCC677-AA51-4D35-BB4E-13D1D82E3471}"/>
+                <a16:creationId xmlns:a16="http://schemas.microsoft.com/office/drawing/2014/main" id="{43B9902C-17AE-4052-ABD2-0F3585E257DA}"/>
               </a:ext>
             </a:extLst>
           </p:cNvPr>
@@ -15239,7 +17003,7 @@
                   <a:srgbClr val="0F5B3F"/>
                 </a:solidFill>
               </a:rPr>
-              <a:t>05 / 12</a:t>
+              <a:t>05 / 13</a:t>
             </a:r>
           </a:p>
         </p:txBody>
@@ -15249,7 +17013,7 @@
           <p:cNvPr id="11" name="">
             <a:extLst xmlns:a="http://schemas.openxmlformats.org/drawingml/2006/main">
               <a:ext uri="{FF2B5EF4-FFF2-40B4-BE49-F238E27FC236}">
-                <a16:creationId xmlns:a16="http://schemas.microsoft.com/office/drawing/2014/main" id="{39F1F3A0-C083-46D8-A510-D8B1F79F8BD6}"/>
+                <a16:creationId xmlns:a16="http://schemas.microsoft.com/office/drawing/2014/main" id="{8FFC2E43-47FF-471F-BDB8-82C666271150}"/>
               </a:ext>
             </a:extLst>
           </p:cNvPr>
@@ -15284,7 +17048,7 @@
           <p:cNvPr id="12" name="">
             <a:extLst xmlns:a="http://schemas.openxmlformats.org/drawingml/2006/main">
               <a:ext uri="{FF2B5EF4-FFF2-40B4-BE49-F238E27FC236}">
-                <a16:creationId xmlns:a16="http://schemas.microsoft.com/office/drawing/2014/main" id="{5F4AF19C-DA5C-4241-BD5C-B7468ECC4917}"/>
+                <a16:creationId xmlns:a16="http://schemas.microsoft.com/office/drawing/2014/main" id="{2D0960E9-0305-43A5-B70A-60A5791B4014}"/>
               </a:ext>
             </a:extLst>
           </p:cNvPr>
@@ -15317,7 +17081,7 @@
           <p:cNvPr id="13" name="">
             <a:extLst xmlns:a="http://schemas.openxmlformats.org/drawingml/2006/main">
               <a:ext uri="{FF2B5EF4-FFF2-40B4-BE49-F238E27FC236}">
-                <a16:creationId xmlns:a16="http://schemas.microsoft.com/office/drawing/2014/main" id="{CEE212F1-B5A8-499F-9A81-0FDB54EBA1CE}"/>
+                <a16:creationId xmlns:a16="http://schemas.microsoft.com/office/drawing/2014/main" id="{CA1E7A28-79BB-4442-8562-9AC8BF93C30A}"/>
               </a:ext>
             </a:extLst>
           </p:cNvPr>
@@ -15392,7 +17156,7 @@
           <p:cNvPr id="14" name="">
             <a:extLst xmlns:a="http://schemas.openxmlformats.org/drawingml/2006/main">
               <a:ext uri="{FF2B5EF4-FFF2-40B4-BE49-F238E27FC236}">
-                <a16:creationId xmlns:a16="http://schemas.microsoft.com/office/drawing/2014/main" id="{10C24E03-0283-4611-A45D-9A49F134D6FB}"/>
+                <a16:creationId xmlns:a16="http://schemas.microsoft.com/office/drawing/2014/main" id="{DF4F082A-2EDA-4217-9414-11EC951E49D1}"/>
               </a:ext>
             </a:extLst>
           </p:cNvPr>
@@ -15429,7 +17193,7 @@
           <p:cNvPr id="15" name="">
             <a:extLst xmlns:a="http://schemas.openxmlformats.org/drawingml/2006/main">
               <a:ext uri="{FF2B5EF4-FFF2-40B4-BE49-F238E27FC236}">
-                <a16:creationId xmlns:a16="http://schemas.microsoft.com/office/drawing/2014/main" id="{63098BCC-4D2E-4D15-94C7-C16B708EEDC8}"/>
+                <a16:creationId xmlns:a16="http://schemas.microsoft.com/office/drawing/2014/main" id="{2C36C98A-7A1C-45CD-91C5-7AAB22186FF0}"/>
               </a:ext>
             </a:extLst>
           </p:cNvPr>
@@ -15464,7 +17228,7 @@
           <p:cNvPr id="16" name="">
             <a:extLst xmlns:a="http://schemas.openxmlformats.org/drawingml/2006/main">
               <a:ext uri="{FF2B5EF4-FFF2-40B4-BE49-F238E27FC236}">
-                <a16:creationId xmlns:a16="http://schemas.microsoft.com/office/drawing/2014/main" id="{9433C0D1-C0D1-4A68-8C20-E1098E813F80}"/>
+                <a16:creationId xmlns:a16="http://schemas.microsoft.com/office/drawing/2014/main" id="{7344F9EC-8F24-4CA5-A24E-EF3F167202B6}"/>
               </a:ext>
             </a:extLst>
           </p:cNvPr>
@@ -15522,7 +17286,7 @@
           <p:cNvPr id="17" name="">
             <a:extLst xmlns:a="http://schemas.openxmlformats.org/drawingml/2006/main">
               <a:ext uri="{FF2B5EF4-FFF2-40B4-BE49-F238E27FC236}">
-                <a16:creationId xmlns:a16="http://schemas.microsoft.com/office/drawing/2014/main" id="{C79CCD4C-46FD-4391-B582-342048F8FD7A}"/>
+                <a16:creationId xmlns:a16="http://schemas.microsoft.com/office/drawing/2014/main" id="{F6688E53-B038-4091-9DF2-B27D298C7656}"/>
               </a:ext>
             </a:extLst>
           </p:cNvPr>
@@ -15614,7 +17378,7 @@
           <p:cNvPr id="18" name="">
             <a:extLst xmlns:a="http://schemas.openxmlformats.org/drawingml/2006/main">
               <a:ext uri="{FF2B5EF4-FFF2-40B4-BE49-F238E27FC236}">
-                <a16:creationId xmlns:a16="http://schemas.microsoft.com/office/drawing/2014/main" id="{23A9897D-91C4-44BE-A66D-D0DCC8E9195A}"/>
+                <a16:creationId xmlns:a16="http://schemas.microsoft.com/office/drawing/2014/main" id="{3F57D961-C1E4-4C95-86D4-B75FCD3A8780}"/>
               </a:ext>
             </a:extLst>
           </p:cNvPr>
@@ -15651,7 +17415,7 @@
           <p:cNvPr id="19" name="">
             <a:extLst xmlns:a="http://schemas.openxmlformats.org/drawingml/2006/main">
               <a:ext uri="{FF2B5EF4-FFF2-40B4-BE49-F238E27FC236}">
-                <a16:creationId xmlns:a16="http://schemas.microsoft.com/office/drawing/2014/main" id="{A1CCE9CF-910F-4EFB-93C6-C104BDDFC8D7}"/>
+                <a16:creationId xmlns:a16="http://schemas.microsoft.com/office/drawing/2014/main" id="{D1E849EC-DF55-4D4B-BE91-C294950300A1}"/>
               </a:ext>
             </a:extLst>
           </p:cNvPr>
@@ -15686,7 +17450,7 @@
           <p:cNvPr id="20" name="">
             <a:extLst xmlns:a="http://schemas.openxmlformats.org/drawingml/2006/main">
               <a:ext uri="{FF2B5EF4-FFF2-40B4-BE49-F238E27FC236}">
-                <a16:creationId xmlns:a16="http://schemas.microsoft.com/office/drawing/2014/main" id="{E2CB9F38-CB71-4C30-8CAD-67A4A0FE1824}"/>
+                <a16:creationId xmlns:a16="http://schemas.microsoft.com/office/drawing/2014/main" id="{AE676B04-4D22-40C8-9C7F-3079CC275645}"/>
               </a:ext>
             </a:extLst>
           </p:cNvPr>
@@ -15744,7 +17508,7 @@
           <p:cNvPr id="21" name="">
             <a:extLst xmlns:a="http://schemas.openxmlformats.org/drawingml/2006/main">
               <a:ext uri="{FF2B5EF4-FFF2-40B4-BE49-F238E27FC236}">
-                <a16:creationId xmlns:a16="http://schemas.microsoft.com/office/drawing/2014/main" id="{D930F14A-BC8E-4E9C-8E51-23631C186561}"/>
+                <a16:creationId xmlns:a16="http://schemas.microsoft.com/office/drawing/2014/main" id="{F38EF7CC-B0B5-4668-BDB8-BCE6F6003D10}"/>
               </a:ext>
             </a:extLst>
           </p:cNvPr>
@@ -15836,7 +17600,7 @@
           <p:cNvPr id="22" name="">
             <a:extLst xmlns:a="http://schemas.openxmlformats.org/drawingml/2006/main">
               <a:ext uri="{FF2B5EF4-FFF2-40B4-BE49-F238E27FC236}">
-                <a16:creationId xmlns:a16="http://schemas.microsoft.com/office/drawing/2014/main" id="{0C8A54C4-EC7C-41D7-B062-0564E6D3D345}"/>
+                <a16:creationId xmlns:a16="http://schemas.microsoft.com/office/drawing/2014/main" id="{FDF12410-007A-4914-A388-38BA65A3BF37}"/>
               </a:ext>
             </a:extLst>
           </p:cNvPr>
@@ -15873,7 +17637,7 @@
           <p:cNvPr id="23" name="">
             <a:extLst xmlns:a="http://schemas.openxmlformats.org/drawingml/2006/main">
               <a:ext uri="{FF2B5EF4-FFF2-40B4-BE49-F238E27FC236}">
-                <a16:creationId xmlns:a16="http://schemas.microsoft.com/office/drawing/2014/main" id="{EF944F62-B7A9-4C76-80E5-136515B698F0}"/>
+                <a16:creationId xmlns:a16="http://schemas.microsoft.com/office/drawing/2014/main" id="{263072F4-8485-46B6-A47E-001632C1AC94}"/>
               </a:ext>
             </a:extLst>
           </p:cNvPr>
@@ -15908,7 +17672,7 @@
           <p:cNvPr id="24" name="">
             <a:extLst xmlns:a="http://schemas.openxmlformats.org/drawingml/2006/main">
               <a:ext uri="{FF2B5EF4-FFF2-40B4-BE49-F238E27FC236}">
-                <a16:creationId xmlns:a16="http://schemas.microsoft.com/office/drawing/2014/main" id="{9A341710-5718-4153-91E2-9447732121C3}"/>
+                <a16:creationId xmlns:a16="http://schemas.microsoft.com/office/drawing/2014/main" id="{1F51F1AD-A06E-4A71-A844-277F9F673DB6}"/>
               </a:ext>
             </a:extLst>
           </p:cNvPr>
@@ -15966,7 +17730,7 @@
           <p:cNvPr id="25" name="">
             <a:extLst xmlns:a="http://schemas.openxmlformats.org/drawingml/2006/main">
               <a:ext uri="{FF2B5EF4-FFF2-40B4-BE49-F238E27FC236}">
-                <a16:creationId xmlns:a16="http://schemas.microsoft.com/office/drawing/2014/main" id="{AC5A20A5-9A6B-4FE6-9B2B-52D6C7B9299E}"/>
+                <a16:creationId xmlns:a16="http://schemas.microsoft.com/office/drawing/2014/main" id="{B2E8C80E-D149-438A-88CA-9F2AC89334C3}"/>
               </a:ext>
             </a:extLst>
           </p:cNvPr>
@@ -16041,7 +17805,7 @@
           <p:cNvPr id="26" name="">
             <a:extLst xmlns:a="http://schemas.openxmlformats.org/drawingml/2006/main">
               <a:ext uri="{FF2B5EF4-FFF2-40B4-BE49-F238E27FC236}">
-                <a16:creationId xmlns:a16="http://schemas.microsoft.com/office/drawing/2014/main" id="{02225F26-2534-43B4-8E02-C5B10FC2461D}"/>
+                <a16:creationId xmlns:a16="http://schemas.microsoft.com/office/drawing/2014/main" id="{D765B249-574F-4064-89DD-F84A0751E31F}"/>
               </a:ext>
             </a:extLst>
           </p:cNvPr>
@@ -16076,7 +17840,7 @@
           <p:cNvPr id="27" name="">
             <a:extLst xmlns:a="http://schemas.openxmlformats.org/drawingml/2006/main">
               <a:ext uri="{FF2B5EF4-FFF2-40B4-BE49-F238E27FC236}">
-                <a16:creationId xmlns:a16="http://schemas.microsoft.com/office/drawing/2014/main" id="{FF3A20F7-7166-4626-AF4C-F6B974A6FD88}"/>
+                <a16:creationId xmlns:a16="http://schemas.microsoft.com/office/drawing/2014/main" id="{D8D52DE2-EB1B-4A7C-B8A7-627AFBED4DEC}"/>
               </a:ext>
             </a:extLst>
           </p:cNvPr>
@@ -16111,7 +17875,7 @@
           <p:cNvPr id="28" name="">
             <a:extLst xmlns:a="http://schemas.openxmlformats.org/drawingml/2006/main">
               <a:ext uri="{FF2B5EF4-FFF2-40B4-BE49-F238E27FC236}">
-                <a16:creationId xmlns:a16="http://schemas.microsoft.com/office/drawing/2014/main" id="{16D284DE-607A-40C1-B78A-98BF6414C63C}"/>
+                <a16:creationId xmlns:a16="http://schemas.microsoft.com/office/drawing/2014/main" id="{A11072EA-0F6C-478D-AC11-597A6C2759FC}"/>
               </a:ext>
             </a:extLst>
           </p:cNvPr>
@@ -16169,7 +17933,7 @@
           <p:cNvPr id="29" name="">
             <a:extLst xmlns:a="http://schemas.openxmlformats.org/drawingml/2006/main">
               <a:ext uri="{FF2B5EF4-FFF2-40B4-BE49-F238E27FC236}">
-                <a16:creationId xmlns:a16="http://schemas.microsoft.com/office/drawing/2014/main" id="{4DD2F103-22B9-4905-8DD9-B667DF5142FC}"/>
+                <a16:creationId xmlns:a16="http://schemas.microsoft.com/office/drawing/2014/main" id="{14D6DF6B-C6B7-403E-B845-854030C97CC1}"/>
               </a:ext>
             </a:extLst>
           </p:cNvPr>
@@ -16227,7 +17991,7 @@
           <p:cNvPr id="30" name="">
             <a:extLst xmlns:a="http://schemas.openxmlformats.org/drawingml/2006/main">
               <a:ext uri="{FF2B5EF4-FFF2-40B4-BE49-F238E27FC236}">
-                <a16:creationId xmlns:a16="http://schemas.microsoft.com/office/drawing/2014/main" id="{10481A7D-810F-4083-8058-5DB035718985}"/>
+                <a16:creationId xmlns:a16="http://schemas.microsoft.com/office/drawing/2014/main" id="{D557BA42-A1D4-4477-B9A1-9377FEBDF8B6}"/>
               </a:ext>
             </a:extLst>
           </p:cNvPr>
@@ -16262,7 +18026,7 @@
           <p:cNvPr id="31" name="">
             <a:extLst xmlns:a="http://schemas.openxmlformats.org/drawingml/2006/main">
               <a:ext uri="{FF2B5EF4-FFF2-40B4-BE49-F238E27FC236}">
-                <a16:creationId xmlns:a16="http://schemas.microsoft.com/office/drawing/2014/main" id="{47C24B9F-5584-4FFF-88F6-4AD081A1F027}"/>
+                <a16:creationId xmlns:a16="http://schemas.microsoft.com/office/drawing/2014/main" id="{527C50B7-FA22-4DF9-BCDE-013E0FC20F38}"/>
               </a:ext>
             </a:extLst>
           </p:cNvPr>
@@ -16320,7 +18084,7 @@
           <p:cNvPr id="32" name="">
             <a:extLst xmlns:a="http://schemas.openxmlformats.org/drawingml/2006/main">
               <a:ext uri="{FF2B5EF4-FFF2-40B4-BE49-F238E27FC236}">
-                <a16:creationId xmlns:a16="http://schemas.microsoft.com/office/drawing/2014/main" id="{5E234A58-F897-42F0-B49F-C3B3886FD69F}"/>
+                <a16:creationId xmlns:a16="http://schemas.microsoft.com/office/drawing/2014/main" id="{756A7562-2829-42C7-B3E4-AC60E5E952C0}"/>
               </a:ext>
             </a:extLst>
           </p:cNvPr>
@@ -16378,7 +18142,7 @@
           <p:cNvPr id="33" name="">
             <a:extLst xmlns:a="http://schemas.openxmlformats.org/drawingml/2006/main">
               <a:ext uri="{FF2B5EF4-FFF2-40B4-BE49-F238E27FC236}">
-                <a16:creationId xmlns:a16="http://schemas.microsoft.com/office/drawing/2014/main" id="{1B9D13BC-ACB0-4CD9-9184-DDADDA4174A4}"/>
+                <a16:creationId xmlns:a16="http://schemas.microsoft.com/office/drawing/2014/main" id="{233A812D-4324-45AB-AC1F-BCC43ED49748}"/>
               </a:ext>
             </a:extLst>
           </p:cNvPr>
@@ -16434,7 +18198,7 @@
     </p:spTree>
     <p:extLst>
       <p:ext uri="{BB962C8B-B14F-4D97-AF65-F5344CB8AC3E}">
-        <p14:creationId xmlns:p14="http://schemas.microsoft.com/office/powerpoint/2010/main" val="1981200296"/>
+        <p14:creationId xmlns:p14="http://schemas.microsoft.com/office/powerpoint/2010/main" val="264649173"/>
       </p:ext>
     </p:extLst>
   </p:cSld>
@@ -16465,7 +18229,7 @@
           <p:cNvPr id="1" name="Slide Number Placeholder 5">
             <a:extLst xmlns:a="http://schemas.openxmlformats.org/drawingml/2006/main">
               <a:ext uri="{FF2B5EF4-FFF2-40B4-BE49-F238E27FC236}">
-                <a16:creationId xmlns:a16="http://schemas.microsoft.com/office/drawing/2014/main" id="{E12CE447-476B-4BAE-A1FF-E669E79965E6}"/>
+                <a16:creationId xmlns:a16="http://schemas.microsoft.com/office/drawing/2014/main" id="{EDD0F201-AE24-4D54-ACE2-5F86EBC94A0A}"/>
               </a:ext>
             </a:extLst>
           </p:cNvPr>
@@ -16501,7 +18265,7 @@
           <p:nvPr/>
         </p:nvPicPr>
         <p:blipFill>
-          <a:blip xmlns:r="http://schemas.openxmlformats.org/officeDocument/2006/relationships" xmlns:a="http://schemas.openxmlformats.org/drawingml/2006/main" r:embed="R7af939c822d740e5"/>
+          <a:blip xmlns:r="http://schemas.openxmlformats.org/officeDocument/2006/relationships" xmlns:a="http://schemas.openxmlformats.org/drawingml/2006/main" r:embed="R4e943559d2844855"/>
           <a:srcRect xmlns:a="http://schemas.openxmlformats.org/drawingml/2006/main" l="0" t="21875" r="0" b="21875"/>
           <a:stretch xmlns:a="http://schemas.openxmlformats.org/drawingml/2006/main">
             <a:fillRect l="0" t="0" r="0" b="0"/>
@@ -16522,7 +18286,7 @@
           <p:cNvPr id="3" name="">
             <a:extLst xmlns:a="http://schemas.openxmlformats.org/drawingml/2006/main">
               <a:ext uri="{FF2B5EF4-FFF2-40B4-BE49-F238E27FC236}">
-                <a16:creationId xmlns:a16="http://schemas.microsoft.com/office/drawing/2014/main" id="{66ABB4A3-709F-4CFF-8E7B-0B8343E00882}"/>
+                <a16:creationId xmlns:a16="http://schemas.microsoft.com/office/drawing/2014/main" id="{0C8E08E9-AE0C-41CB-BD4D-F4BA781B01B6}"/>
               </a:ext>
             </a:extLst>
           </p:cNvPr>
@@ -16557,7 +18321,7 @@
           <p:cNvPr id="4" name="">
             <a:extLst xmlns:a="http://schemas.openxmlformats.org/drawingml/2006/main">
               <a:ext uri="{FF2B5EF4-FFF2-40B4-BE49-F238E27FC236}">
-                <a16:creationId xmlns:a16="http://schemas.microsoft.com/office/drawing/2014/main" id="{4E68818B-5A51-4D94-B4DC-086B41846A73}"/>
+                <a16:creationId xmlns:a16="http://schemas.microsoft.com/office/drawing/2014/main" id="{6DE0BB65-29B5-4C9E-8FF0-48D1A3C332BE}"/>
               </a:ext>
             </a:extLst>
           </p:cNvPr>
@@ -16592,7 +18356,7 @@
           <p:cNvPr id="5" name="">
             <a:extLst xmlns:a="http://schemas.openxmlformats.org/drawingml/2006/main">
               <a:ext uri="{FF2B5EF4-FFF2-40B4-BE49-F238E27FC236}">
-                <a16:creationId xmlns:a16="http://schemas.microsoft.com/office/drawing/2014/main" id="{120C6A25-FD81-423E-B678-F09496111C7F}"/>
+                <a16:creationId xmlns:a16="http://schemas.microsoft.com/office/drawing/2014/main" id="{C6543348-A665-48A8-9A38-DA3E0846206E}"/>
               </a:ext>
             </a:extLst>
           </p:cNvPr>
@@ -16629,7 +18393,7 @@
           <p:cNvPr id="6" name="">
             <a:extLst xmlns:a="http://schemas.openxmlformats.org/drawingml/2006/main">
               <a:ext uri="{FF2B5EF4-FFF2-40B4-BE49-F238E27FC236}">
-                <a16:creationId xmlns:a16="http://schemas.microsoft.com/office/drawing/2014/main" id="{4BD4A9D5-7F40-4935-A1BD-EE28A951771F}"/>
+                <a16:creationId xmlns:a16="http://schemas.microsoft.com/office/drawing/2014/main" id="{44321B4E-11D5-41CE-9FE1-95913417A8C4}"/>
               </a:ext>
             </a:extLst>
           </p:cNvPr>
@@ -16666,7 +18430,7 @@
           <p:cNvPr id="7" name="">
             <a:extLst xmlns:a="http://schemas.openxmlformats.org/drawingml/2006/main">
               <a:ext uri="{FF2B5EF4-FFF2-40B4-BE49-F238E27FC236}">
-                <a16:creationId xmlns:a16="http://schemas.microsoft.com/office/drawing/2014/main" id="{E2202ED4-8414-4CCF-B662-9A2EEA900B95}"/>
+                <a16:creationId xmlns:a16="http://schemas.microsoft.com/office/drawing/2014/main" id="{1849CCD5-B084-4083-A76E-9A71833C3C3B}"/>
               </a:ext>
             </a:extLst>
           </p:cNvPr>
@@ -16703,7 +18467,7 @@
           <p:cNvPr id="8" name="">
             <a:extLst xmlns:a="http://schemas.openxmlformats.org/drawingml/2006/main">
               <a:ext uri="{FF2B5EF4-FFF2-40B4-BE49-F238E27FC236}">
-                <a16:creationId xmlns:a16="http://schemas.microsoft.com/office/drawing/2014/main" id="{CA60DBA4-F83A-4E70-8601-073DC52695C0}"/>
+                <a16:creationId xmlns:a16="http://schemas.microsoft.com/office/drawing/2014/main" id="{6FCF2EEB-750C-4CCF-992A-80147F229AE0}"/>
               </a:ext>
             </a:extLst>
           </p:cNvPr>
@@ -16740,7 +18504,7 @@
           <p:cNvPr id="9" name="">
             <a:extLst xmlns:a="http://schemas.openxmlformats.org/drawingml/2006/main">
               <a:ext uri="{FF2B5EF4-FFF2-40B4-BE49-F238E27FC236}">
-                <a16:creationId xmlns:a16="http://schemas.microsoft.com/office/drawing/2014/main" id="{72385720-2918-4945-9480-0AD3A024E583}"/>
+                <a16:creationId xmlns:a16="http://schemas.microsoft.com/office/drawing/2014/main" id="{B30A84AF-7357-44B1-9440-5FD099B64A83}"/>
               </a:ext>
             </a:extLst>
           </p:cNvPr>
@@ -16798,7 +18562,7 @@
           <p:cNvPr id="10" name="">
             <a:extLst xmlns:a="http://schemas.openxmlformats.org/drawingml/2006/main">
               <a:ext uri="{FF2B5EF4-FFF2-40B4-BE49-F238E27FC236}">
-                <a16:creationId xmlns:a16="http://schemas.microsoft.com/office/drawing/2014/main" id="{9EDEED1D-4B84-478A-88E2-06CA363DD609}"/>
+                <a16:creationId xmlns:a16="http://schemas.microsoft.com/office/drawing/2014/main" id="{C0420D79-EA4D-4214-8A99-E522BF7FD9E2}"/>
               </a:ext>
             </a:extLst>
           </p:cNvPr>
@@ -16846,7 +18610,7 @@
                   <a:srgbClr val="0F5B3F"/>
                 </a:solidFill>
               </a:rPr>
-              <a:t>06 / 12</a:t>
+              <a:t>06 / 13</a:t>
             </a:r>
           </a:p>
         </p:txBody>
@@ -16856,7 +18620,7 @@
           <p:cNvPr id="11" name="">
             <a:extLst xmlns:a="http://schemas.openxmlformats.org/drawingml/2006/main">
               <a:ext uri="{FF2B5EF4-FFF2-40B4-BE49-F238E27FC236}">
-                <a16:creationId xmlns:a16="http://schemas.microsoft.com/office/drawing/2014/main" id="{AFE0D3B6-3486-4DE0-A9F8-8AF0A65064AD}"/>
+                <a16:creationId xmlns:a16="http://schemas.microsoft.com/office/drawing/2014/main" id="{5104647A-A2F1-40AB-ADCF-FE438B43D14D}"/>
               </a:ext>
             </a:extLst>
           </p:cNvPr>
@@ -16891,7 +18655,7 @@
           <p:cNvPr id="12" name="">
             <a:extLst xmlns:a="http://schemas.openxmlformats.org/drawingml/2006/main">
               <a:ext uri="{FF2B5EF4-FFF2-40B4-BE49-F238E27FC236}">
-                <a16:creationId xmlns:a16="http://schemas.microsoft.com/office/drawing/2014/main" id="{71AF5ED5-902D-4828-8E53-3BAABDCED272}"/>
+                <a16:creationId xmlns:a16="http://schemas.microsoft.com/office/drawing/2014/main" id="{143B211E-DBE3-46EF-B10F-B50511C52860}"/>
               </a:ext>
             </a:extLst>
           </p:cNvPr>
@@ -16924,7 +18688,7 @@
           <p:cNvPr id="13" name="">
             <a:extLst xmlns:a="http://schemas.openxmlformats.org/drawingml/2006/main">
               <a:ext uri="{FF2B5EF4-FFF2-40B4-BE49-F238E27FC236}">
-                <a16:creationId xmlns:a16="http://schemas.microsoft.com/office/drawing/2014/main" id="{D55737C5-A7C9-44BC-9638-F0DD2970C5DA}"/>
+                <a16:creationId xmlns:a16="http://schemas.microsoft.com/office/drawing/2014/main" id="{227734A0-1087-4849-864B-65EBE9FC0351}"/>
               </a:ext>
             </a:extLst>
           </p:cNvPr>
@@ -16999,7 +18763,7 @@
           <p:cNvPr id="14" name="">
             <a:extLst xmlns:a="http://schemas.openxmlformats.org/drawingml/2006/main">
               <a:ext uri="{FF2B5EF4-FFF2-40B4-BE49-F238E27FC236}">
-                <a16:creationId xmlns:a16="http://schemas.microsoft.com/office/drawing/2014/main" id="{D7EE6A33-0C3F-400E-A348-2C6FA08BBE74}"/>
+                <a16:creationId xmlns:a16="http://schemas.microsoft.com/office/drawing/2014/main" id="{A94AF0F8-1EDA-4AB4-9D98-2E6AF3FC4385}"/>
               </a:ext>
             </a:extLst>
           </p:cNvPr>
@@ -17036,7 +18800,7 @@
           <p:cNvPr id="15" name="">
             <a:extLst xmlns:a="http://schemas.openxmlformats.org/drawingml/2006/main">
               <a:ext uri="{FF2B5EF4-FFF2-40B4-BE49-F238E27FC236}">
-                <a16:creationId xmlns:a16="http://schemas.microsoft.com/office/drawing/2014/main" id="{FD8B4411-8D49-4D0F-A7A6-4D1871B03831}"/>
+                <a16:creationId xmlns:a16="http://schemas.microsoft.com/office/drawing/2014/main" id="{6A802B84-902B-45B5-A468-B90748E3121B}"/>
               </a:ext>
             </a:extLst>
           </p:cNvPr>
@@ -17071,7 +18835,7 @@
           <p:cNvPr id="16" name="">
             <a:extLst xmlns:a="http://schemas.openxmlformats.org/drawingml/2006/main">
               <a:ext uri="{FF2B5EF4-FFF2-40B4-BE49-F238E27FC236}">
-                <a16:creationId xmlns:a16="http://schemas.microsoft.com/office/drawing/2014/main" id="{769FC0FD-A793-430A-A358-C7F7B4094FA3}"/>
+                <a16:creationId xmlns:a16="http://schemas.microsoft.com/office/drawing/2014/main" id="{6FCA8E40-526F-466B-BEDA-C1AF5C261807}"/>
               </a:ext>
             </a:extLst>
           </p:cNvPr>
@@ -17129,7 +18893,7 @@
           <p:cNvPr id="17" name="">
             <a:extLst xmlns:a="http://schemas.openxmlformats.org/drawingml/2006/main">
               <a:ext uri="{FF2B5EF4-FFF2-40B4-BE49-F238E27FC236}">
-                <a16:creationId xmlns:a16="http://schemas.microsoft.com/office/drawing/2014/main" id="{2C37BAFF-B46A-4AAF-BD09-787DA4F490AB}"/>
+                <a16:creationId xmlns:a16="http://schemas.microsoft.com/office/drawing/2014/main" id="{3A97C2F6-E769-4484-8AC4-969E4991D290}"/>
               </a:ext>
             </a:extLst>
           </p:cNvPr>
@@ -17255,7 +19019,7 @@
           <p:cNvPr id="18" name="">
             <a:extLst xmlns:a="http://schemas.openxmlformats.org/drawingml/2006/main">
               <a:ext uri="{FF2B5EF4-FFF2-40B4-BE49-F238E27FC236}">
-                <a16:creationId xmlns:a16="http://schemas.microsoft.com/office/drawing/2014/main" id="{CF839CA2-73CE-47CE-9FE4-363B0CECE580}"/>
+                <a16:creationId xmlns:a16="http://schemas.microsoft.com/office/drawing/2014/main" id="{EBB82A23-86BD-40E0-8841-719ADF7DEF53}"/>
               </a:ext>
             </a:extLst>
           </p:cNvPr>
@@ -17292,7 +19056,7 @@
           <p:cNvPr id="19" name="">
             <a:extLst xmlns:a="http://schemas.openxmlformats.org/drawingml/2006/main">
               <a:ext uri="{FF2B5EF4-FFF2-40B4-BE49-F238E27FC236}">
-                <a16:creationId xmlns:a16="http://schemas.microsoft.com/office/drawing/2014/main" id="{49292B6F-41CD-49CB-8EFB-FB2CF3AEF941}"/>
+                <a16:creationId xmlns:a16="http://schemas.microsoft.com/office/drawing/2014/main" id="{94A56558-2C33-4C54-87AD-700440587666}"/>
               </a:ext>
             </a:extLst>
           </p:cNvPr>
@@ -17327,7 +19091,7 @@
           <p:cNvPr id="20" name="">
             <a:extLst xmlns:a="http://schemas.openxmlformats.org/drawingml/2006/main">
               <a:ext uri="{FF2B5EF4-FFF2-40B4-BE49-F238E27FC236}">
-                <a16:creationId xmlns:a16="http://schemas.microsoft.com/office/drawing/2014/main" id="{F739D388-3C6B-4C7E-ADF8-CC296E3415F4}"/>
+                <a16:creationId xmlns:a16="http://schemas.microsoft.com/office/drawing/2014/main" id="{B381B982-4C6D-4207-B189-3273A336DDFC}"/>
               </a:ext>
             </a:extLst>
           </p:cNvPr>
@@ -17385,7 +19149,7 @@
           <p:cNvPr id="21" name="">
             <a:extLst xmlns:a="http://schemas.openxmlformats.org/drawingml/2006/main">
               <a:ext uri="{FF2B5EF4-FFF2-40B4-BE49-F238E27FC236}">
-                <a16:creationId xmlns:a16="http://schemas.microsoft.com/office/drawing/2014/main" id="{BE7FED42-3CD0-42CC-91DC-CE8C61DFF20D}"/>
+                <a16:creationId xmlns:a16="http://schemas.microsoft.com/office/drawing/2014/main" id="{E3CEE4C2-F40C-4875-97CD-DFA39581DA1C}"/>
               </a:ext>
             </a:extLst>
           </p:cNvPr>
@@ -17511,7 +19275,7 @@
           <p:cNvPr id="22" name="">
             <a:extLst xmlns:a="http://schemas.openxmlformats.org/drawingml/2006/main">
               <a:ext uri="{FF2B5EF4-FFF2-40B4-BE49-F238E27FC236}">
-                <a16:creationId xmlns:a16="http://schemas.microsoft.com/office/drawing/2014/main" id="{D57D7BFF-43C3-426F-BF4E-60C4BEBCAD61}"/>
+                <a16:creationId xmlns:a16="http://schemas.microsoft.com/office/drawing/2014/main" id="{FCD3E3D8-9F85-45F2-ADF5-D0D414CD8CC9}"/>
               </a:ext>
             </a:extLst>
           </p:cNvPr>
@@ -17548,7 +19312,7 @@
           <p:cNvPr id="23" name="">
             <a:extLst xmlns:a="http://schemas.openxmlformats.org/drawingml/2006/main">
               <a:ext uri="{FF2B5EF4-FFF2-40B4-BE49-F238E27FC236}">
-                <a16:creationId xmlns:a16="http://schemas.microsoft.com/office/drawing/2014/main" id="{435B6FBC-5AB2-4FF0-8084-6D11D3E91BFB}"/>
+                <a16:creationId xmlns:a16="http://schemas.microsoft.com/office/drawing/2014/main" id="{20452906-5304-4329-B7B9-E6A165CBE012}"/>
               </a:ext>
             </a:extLst>
           </p:cNvPr>
@@ -17583,7 +19347,7 @@
           <p:cNvPr id="24" name="">
             <a:extLst xmlns:a="http://schemas.openxmlformats.org/drawingml/2006/main">
               <a:ext uri="{FF2B5EF4-FFF2-40B4-BE49-F238E27FC236}">
-                <a16:creationId xmlns:a16="http://schemas.microsoft.com/office/drawing/2014/main" id="{45C214DA-F06A-431F-8136-276DC2F21F75}"/>
+                <a16:creationId xmlns:a16="http://schemas.microsoft.com/office/drawing/2014/main" id="{7BEDF20E-67F4-4C47-84F0-42B6BB77E6DD}"/>
               </a:ext>
             </a:extLst>
           </p:cNvPr>
@@ -17641,7 +19405,7 @@
           <p:cNvPr id="25" name="">
             <a:extLst xmlns:a="http://schemas.openxmlformats.org/drawingml/2006/main">
               <a:ext uri="{FF2B5EF4-FFF2-40B4-BE49-F238E27FC236}">
-                <a16:creationId xmlns:a16="http://schemas.microsoft.com/office/drawing/2014/main" id="{BEFE507B-A861-412D-A502-45441CDD598B}"/>
+                <a16:creationId xmlns:a16="http://schemas.microsoft.com/office/drawing/2014/main" id="{96044008-1DE9-4DA3-AADF-4AC4783C2C60}"/>
               </a:ext>
             </a:extLst>
           </p:cNvPr>
@@ -17784,7 +19548,7 @@
           <p:cNvPr id="26" name="">
             <a:extLst xmlns:a="http://schemas.openxmlformats.org/drawingml/2006/main">
               <a:ext uri="{FF2B5EF4-FFF2-40B4-BE49-F238E27FC236}">
-                <a16:creationId xmlns:a16="http://schemas.microsoft.com/office/drawing/2014/main" id="{8E1980B6-AA43-4C8C-9EA0-08BFA8931FBF}"/>
+                <a16:creationId xmlns:a16="http://schemas.microsoft.com/office/drawing/2014/main" id="{0299376E-B934-4C5A-9787-93CEABFAD357}"/>
               </a:ext>
             </a:extLst>
           </p:cNvPr>
@@ -17819,7 +19583,7 @@
           <p:cNvPr id="27" name="">
             <a:extLst xmlns:a="http://schemas.openxmlformats.org/drawingml/2006/main">
               <a:ext uri="{FF2B5EF4-FFF2-40B4-BE49-F238E27FC236}">
-                <a16:creationId xmlns:a16="http://schemas.microsoft.com/office/drawing/2014/main" id="{1BCBDE02-712D-4135-9DFC-9A49072B768A}"/>
+                <a16:creationId xmlns:a16="http://schemas.microsoft.com/office/drawing/2014/main" id="{F27E9551-9B01-4557-A5AE-3C1FBF832521}"/>
               </a:ext>
             </a:extLst>
           </p:cNvPr>
@@ -17854,7 +19618,7 @@
           <p:cNvPr id="28" name="">
             <a:extLst xmlns:a="http://schemas.openxmlformats.org/drawingml/2006/main">
               <a:ext uri="{FF2B5EF4-FFF2-40B4-BE49-F238E27FC236}">
-                <a16:creationId xmlns:a16="http://schemas.microsoft.com/office/drawing/2014/main" id="{D367BCA0-3C63-4F9E-A93F-71A59454B15B}"/>
+                <a16:creationId xmlns:a16="http://schemas.microsoft.com/office/drawing/2014/main" id="{7A4A3639-D69A-49A5-87E6-51401F31A324}"/>
               </a:ext>
             </a:extLst>
           </p:cNvPr>
@@ -17912,7 +19676,7 @@
           <p:cNvPr id="29" name="">
             <a:extLst xmlns:a="http://schemas.openxmlformats.org/drawingml/2006/main">
               <a:ext uri="{FF2B5EF4-FFF2-40B4-BE49-F238E27FC236}">
-                <a16:creationId xmlns:a16="http://schemas.microsoft.com/office/drawing/2014/main" id="{A02BEB14-A4DE-48AB-BDA2-53F2C7408465}"/>
+                <a16:creationId xmlns:a16="http://schemas.microsoft.com/office/drawing/2014/main" id="{5D9BB1F2-8283-4928-B988-C49E37CF1E00}"/>
               </a:ext>
             </a:extLst>
           </p:cNvPr>
@@ -17968,7 +19732,7 @@
     </p:spTree>
     <p:extLst>
       <p:ext uri="{BB962C8B-B14F-4D97-AF65-F5344CB8AC3E}">
-        <p14:creationId xmlns:p14="http://schemas.microsoft.com/office/powerpoint/2010/main" val="1262752408"/>
+        <p14:creationId xmlns:p14="http://schemas.microsoft.com/office/powerpoint/2010/main" val="573929164"/>
       </p:ext>
     </p:extLst>
   </p:cSld>
@@ -17999,7 +19763,7 @@
           <p:cNvPr id="1" name="Slide Number Placeholder 5">
             <a:extLst xmlns:a="http://schemas.openxmlformats.org/drawingml/2006/main">
               <a:ext uri="{FF2B5EF4-FFF2-40B4-BE49-F238E27FC236}">
-                <a16:creationId xmlns:a16="http://schemas.microsoft.com/office/drawing/2014/main" id="{E12CE447-476B-4BAE-A1FF-E669E79965E6}"/>
+                <a16:creationId xmlns:a16="http://schemas.microsoft.com/office/drawing/2014/main" id="{EDD0F201-AE24-4D54-ACE2-5F86EBC94A0A}"/>
               </a:ext>
             </a:extLst>
           </p:cNvPr>
@@ -18035,7 +19799,7 @@
           <p:nvPr/>
         </p:nvPicPr>
         <p:blipFill>
-          <a:blip xmlns:r="http://schemas.openxmlformats.org/officeDocument/2006/relationships" xmlns:a="http://schemas.openxmlformats.org/drawingml/2006/main" r:embed="R269a7dfc5c2d45b8"/>
+          <a:blip xmlns:r="http://schemas.openxmlformats.org/officeDocument/2006/relationships" xmlns:a="http://schemas.openxmlformats.org/drawingml/2006/main" r:embed="Rd07f2a5f1105435e"/>
           <a:srcRect xmlns:a="http://schemas.openxmlformats.org/drawingml/2006/main" l="0" t="21875" r="0" b="21875"/>
           <a:stretch xmlns:a="http://schemas.openxmlformats.org/drawingml/2006/main">
             <a:fillRect l="0" t="0" r="0" b="0"/>
@@ -18056,7 +19820,7 @@
           <p:cNvPr id="3" name="">
             <a:extLst xmlns:a="http://schemas.openxmlformats.org/drawingml/2006/main">
               <a:ext uri="{FF2B5EF4-FFF2-40B4-BE49-F238E27FC236}">
-                <a16:creationId xmlns:a16="http://schemas.microsoft.com/office/drawing/2014/main" id="{76818D23-B15D-45D3-91C3-6EC89210A6B2}"/>
+                <a16:creationId xmlns:a16="http://schemas.microsoft.com/office/drawing/2014/main" id="{14122EC9-F9A4-41F8-929D-BD93BB7EFBDC}"/>
               </a:ext>
             </a:extLst>
           </p:cNvPr>
@@ -18091,7 +19855,7 @@
           <p:cNvPr id="4" name="">
             <a:extLst xmlns:a="http://schemas.openxmlformats.org/drawingml/2006/main">
               <a:ext uri="{FF2B5EF4-FFF2-40B4-BE49-F238E27FC236}">
-                <a16:creationId xmlns:a16="http://schemas.microsoft.com/office/drawing/2014/main" id="{C1743759-0C0B-473B-913F-9E911D5C28A6}"/>
+                <a16:creationId xmlns:a16="http://schemas.microsoft.com/office/drawing/2014/main" id="{DDF32AB2-B0B1-4BDE-861B-1C5E6DB48642}"/>
               </a:ext>
             </a:extLst>
           </p:cNvPr>
@@ -18126,7 +19890,7 @@
           <p:cNvPr id="5" name="">
             <a:extLst xmlns:a="http://schemas.openxmlformats.org/drawingml/2006/main">
               <a:ext uri="{FF2B5EF4-FFF2-40B4-BE49-F238E27FC236}">
-                <a16:creationId xmlns:a16="http://schemas.microsoft.com/office/drawing/2014/main" id="{8C12B079-E22C-4C5F-9B56-2CFB12C4CC52}"/>
+                <a16:creationId xmlns:a16="http://schemas.microsoft.com/office/drawing/2014/main" id="{2A478C05-9507-4071-8D37-FE5225AF4F37}"/>
               </a:ext>
             </a:extLst>
           </p:cNvPr>
@@ -18163,7 +19927,7 @@
           <p:cNvPr id="6" name="">
             <a:extLst xmlns:a="http://schemas.openxmlformats.org/drawingml/2006/main">
               <a:ext uri="{FF2B5EF4-FFF2-40B4-BE49-F238E27FC236}">
-                <a16:creationId xmlns:a16="http://schemas.microsoft.com/office/drawing/2014/main" id="{713C69E6-4859-456C-AEEA-F29410A66050}"/>
+                <a16:creationId xmlns:a16="http://schemas.microsoft.com/office/drawing/2014/main" id="{5701600E-698E-40CB-864F-A3BC19E877EF}"/>
               </a:ext>
             </a:extLst>
           </p:cNvPr>
@@ -18200,7 +19964,7 @@
           <p:cNvPr id="7" name="">
             <a:extLst xmlns:a="http://schemas.openxmlformats.org/drawingml/2006/main">
               <a:ext uri="{FF2B5EF4-FFF2-40B4-BE49-F238E27FC236}">
-                <a16:creationId xmlns:a16="http://schemas.microsoft.com/office/drawing/2014/main" id="{E2DD8F25-174A-4274-8FE3-040759AC5DDD}"/>
+                <a16:creationId xmlns:a16="http://schemas.microsoft.com/office/drawing/2014/main" id="{5A09633A-AEFE-44E6-8A50-B219ADF97772}"/>
               </a:ext>
             </a:extLst>
           </p:cNvPr>
@@ -18237,7 +20001,7 @@
           <p:cNvPr id="8" name="">
             <a:extLst xmlns:a="http://schemas.openxmlformats.org/drawingml/2006/main">
               <a:ext uri="{FF2B5EF4-FFF2-40B4-BE49-F238E27FC236}">
-                <a16:creationId xmlns:a16="http://schemas.microsoft.com/office/drawing/2014/main" id="{041953D7-B75B-47A3-BBA8-7C150D8D3472}"/>
+                <a16:creationId xmlns:a16="http://schemas.microsoft.com/office/drawing/2014/main" id="{C8A2E0A4-B36C-45BB-851F-1CAB310ABA30}"/>
               </a:ext>
             </a:extLst>
           </p:cNvPr>
@@ -18274,7 +20038,7 @@
           <p:cNvPr id="9" name="">
             <a:extLst xmlns:a="http://schemas.openxmlformats.org/drawingml/2006/main">
               <a:ext uri="{FF2B5EF4-FFF2-40B4-BE49-F238E27FC236}">
-                <a16:creationId xmlns:a16="http://schemas.microsoft.com/office/drawing/2014/main" id="{68BC78A3-27CE-4AA5-8A29-CA353E819674}"/>
+                <a16:creationId xmlns:a16="http://schemas.microsoft.com/office/drawing/2014/main" id="{DE3092CF-C141-4B2B-9CB5-C0F9EB43986C}"/>
               </a:ext>
             </a:extLst>
           </p:cNvPr>
@@ -18332,7 +20096,7 @@
           <p:cNvPr id="10" name="">
             <a:extLst xmlns:a="http://schemas.openxmlformats.org/drawingml/2006/main">
               <a:ext uri="{FF2B5EF4-FFF2-40B4-BE49-F238E27FC236}">
-                <a16:creationId xmlns:a16="http://schemas.microsoft.com/office/drawing/2014/main" id="{9155F077-AD21-46F6-AADC-609B3646D8C7}"/>
+                <a16:creationId xmlns:a16="http://schemas.microsoft.com/office/drawing/2014/main" id="{9F3D3DEF-4D61-4F14-861E-3E93724BBB0A}"/>
               </a:ext>
             </a:extLst>
           </p:cNvPr>
@@ -18380,7 +20144,7 @@
                   <a:srgbClr val="0F5B3F"/>
                 </a:solidFill>
               </a:rPr>
-              <a:t>07 / 12</a:t>
+              <a:t>07 / 13</a:t>
             </a:r>
           </a:p>
         </p:txBody>
@@ -18390,7 +20154,7 @@
           <p:cNvPr id="11" name="">
             <a:extLst xmlns:a="http://schemas.openxmlformats.org/drawingml/2006/main">
               <a:ext uri="{FF2B5EF4-FFF2-40B4-BE49-F238E27FC236}">
-                <a16:creationId xmlns:a16="http://schemas.microsoft.com/office/drawing/2014/main" id="{B4AADD52-C3BE-4CB3-95F0-BF794213F42B}"/>
+                <a16:creationId xmlns:a16="http://schemas.microsoft.com/office/drawing/2014/main" id="{C474548E-7C2D-4F0E-9A52-79BDBC77CE59}"/>
               </a:ext>
             </a:extLst>
           </p:cNvPr>
@@ -18425,7 +20189,7 @@
           <p:cNvPr id="12" name="">
             <a:extLst xmlns:a="http://schemas.openxmlformats.org/drawingml/2006/main">
               <a:ext uri="{FF2B5EF4-FFF2-40B4-BE49-F238E27FC236}">
-                <a16:creationId xmlns:a16="http://schemas.microsoft.com/office/drawing/2014/main" id="{AA933734-6B89-4C0C-8D34-DB324689A0C2}"/>
+                <a16:creationId xmlns:a16="http://schemas.microsoft.com/office/drawing/2014/main" id="{D278E476-E436-470D-B97E-5B8257F9E90D}"/>
               </a:ext>
             </a:extLst>
           </p:cNvPr>
@@ -18458,7 +20222,7 @@
           <p:cNvPr id="13" name="">
             <a:extLst xmlns:a="http://schemas.openxmlformats.org/drawingml/2006/main">
               <a:ext uri="{FF2B5EF4-FFF2-40B4-BE49-F238E27FC236}">
-                <a16:creationId xmlns:a16="http://schemas.microsoft.com/office/drawing/2014/main" id="{298ADF0E-E3A7-4E0B-B0BB-54344DAD2571}"/>
+                <a16:creationId xmlns:a16="http://schemas.microsoft.com/office/drawing/2014/main" id="{614BF3DA-1848-4E2F-BAD0-20D4FCAF87F1}"/>
               </a:ext>
             </a:extLst>
           </p:cNvPr>
@@ -18533,7 +20297,7 @@
           <p:cNvPr id="14" name="">
             <a:extLst xmlns:a="http://schemas.openxmlformats.org/drawingml/2006/main">
               <a:ext uri="{FF2B5EF4-FFF2-40B4-BE49-F238E27FC236}">
-                <a16:creationId xmlns:a16="http://schemas.microsoft.com/office/drawing/2014/main" id="{C5D288F8-147B-4287-8449-E30D8090C15E}"/>
+                <a16:creationId xmlns:a16="http://schemas.microsoft.com/office/drawing/2014/main" id="{8A33F9B6-3F09-4DDA-9EF2-1C97DA27A095}"/>
               </a:ext>
             </a:extLst>
           </p:cNvPr>
@@ -18568,7 +20332,7 @@
           <p:cNvPr id="15" name="">
             <a:extLst xmlns:a="http://schemas.openxmlformats.org/drawingml/2006/main">
               <a:ext uri="{FF2B5EF4-FFF2-40B4-BE49-F238E27FC236}">
-                <a16:creationId xmlns:a16="http://schemas.microsoft.com/office/drawing/2014/main" id="{2F94D1A6-6670-415A-A016-CAE08EF1A11F}"/>
+                <a16:creationId xmlns:a16="http://schemas.microsoft.com/office/drawing/2014/main" id="{66A4E5E8-A1B0-4FA8-B12A-17CBEEE589B9}"/>
               </a:ext>
             </a:extLst>
           </p:cNvPr>
@@ -18603,7 +20367,7 @@
           <p:cNvPr id="16" name="">
             <a:extLst xmlns:a="http://schemas.openxmlformats.org/drawingml/2006/main">
               <a:ext uri="{FF2B5EF4-FFF2-40B4-BE49-F238E27FC236}">
-                <a16:creationId xmlns:a16="http://schemas.microsoft.com/office/drawing/2014/main" id="{2C358938-31CA-412F-9F3C-C7311E38B0F7}"/>
+                <a16:creationId xmlns:a16="http://schemas.microsoft.com/office/drawing/2014/main" id="{151FF360-BD21-43E3-A06A-7C9FE5AAE421}"/>
               </a:ext>
             </a:extLst>
           </p:cNvPr>
@@ -18661,7 +20425,7 @@
           <p:cNvPr id="17" name="">
             <a:extLst xmlns:a="http://schemas.openxmlformats.org/drawingml/2006/main">
               <a:ext uri="{FF2B5EF4-FFF2-40B4-BE49-F238E27FC236}">
-                <a16:creationId xmlns:a16="http://schemas.microsoft.com/office/drawing/2014/main" id="{784DCA01-9A89-4543-B3DB-990F24A91D43}"/>
+                <a16:creationId xmlns:a16="http://schemas.microsoft.com/office/drawing/2014/main" id="{DC2D7293-CFC8-4877-A349-7EF7CB47EBFF}"/>
               </a:ext>
             </a:extLst>
           </p:cNvPr>
@@ -18698,7 +20462,7 @@
           <p:cNvPr id="18" name="">
             <a:extLst xmlns:a="http://schemas.openxmlformats.org/drawingml/2006/main">
               <a:ext uri="{FF2B5EF4-FFF2-40B4-BE49-F238E27FC236}">
-                <a16:creationId xmlns:a16="http://schemas.microsoft.com/office/drawing/2014/main" id="{7D2725EE-FF75-4014-B06C-6B8A0F2F50C2}"/>
+                <a16:creationId xmlns:a16="http://schemas.microsoft.com/office/drawing/2014/main" id="{10B38CDB-C026-462C-9721-4E9AECC24E2F}"/>
               </a:ext>
             </a:extLst>
           </p:cNvPr>
@@ -18733,7 +20497,7 @@
           <p:cNvPr id="19" name="">
             <a:extLst xmlns:a="http://schemas.openxmlformats.org/drawingml/2006/main">
               <a:ext uri="{FF2B5EF4-FFF2-40B4-BE49-F238E27FC236}">
-                <a16:creationId xmlns:a16="http://schemas.microsoft.com/office/drawing/2014/main" id="{093D5E45-AC07-486B-AD4B-91C6E9955B6E}"/>
+                <a16:creationId xmlns:a16="http://schemas.microsoft.com/office/drawing/2014/main" id="{4A9E2D3E-75B2-4CEB-A8D1-7EFB6BE926EF}"/>
               </a:ext>
             </a:extLst>
           </p:cNvPr>
@@ -18791,7 +20555,7 @@
           <p:cNvPr id="20" name="">
             <a:extLst xmlns:a="http://schemas.openxmlformats.org/drawingml/2006/main">
               <a:ext uri="{FF2B5EF4-FFF2-40B4-BE49-F238E27FC236}">
-                <a16:creationId xmlns:a16="http://schemas.microsoft.com/office/drawing/2014/main" id="{7E4077C2-8818-4729-9F63-902AFD12E6D9}"/>
+                <a16:creationId xmlns:a16="http://schemas.microsoft.com/office/drawing/2014/main" id="{1AA6BDA4-70F0-47C4-A653-91B4C1C4DC03}"/>
               </a:ext>
             </a:extLst>
           </p:cNvPr>
@@ -18883,7 +20647,7 @@
           <p:cNvPr id="21" name="">
             <a:extLst xmlns:a="http://schemas.openxmlformats.org/drawingml/2006/main">
               <a:ext uri="{FF2B5EF4-FFF2-40B4-BE49-F238E27FC236}">
-                <a16:creationId xmlns:a16="http://schemas.microsoft.com/office/drawing/2014/main" id="{0DFE64DF-5A1D-46F2-8E80-FAF3026DD5E8}"/>
+                <a16:creationId xmlns:a16="http://schemas.microsoft.com/office/drawing/2014/main" id="{8D8BFB4E-AD18-41BD-B26E-C3B9BED645AD}"/>
               </a:ext>
             </a:extLst>
           </p:cNvPr>
@@ -18920,7 +20684,7 @@
           <p:cNvPr id="22" name="">
             <a:extLst xmlns:a="http://schemas.openxmlformats.org/drawingml/2006/main">
               <a:ext uri="{FF2B5EF4-FFF2-40B4-BE49-F238E27FC236}">
-                <a16:creationId xmlns:a16="http://schemas.microsoft.com/office/drawing/2014/main" id="{3324517A-759D-4354-8E55-BDA95BC489EB}"/>
+                <a16:creationId xmlns:a16="http://schemas.microsoft.com/office/drawing/2014/main" id="{BEF828AE-7194-475E-89D7-25558607B7C8}"/>
               </a:ext>
             </a:extLst>
           </p:cNvPr>
@@ -18955,7 +20719,7 @@
           <p:cNvPr id="23" name="">
             <a:extLst xmlns:a="http://schemas.openxmlformats.org/drawingml/2006/main">
               <a:ext uri="{FF2B5EF4-FFF2-40B4-BE49-F238E27FC236}">
-                <a16:creationId xmlns:a16="http://schemas.microsoft.com/office/drawing/2014/main" id="{87901807-40CE-49FC-B2E6-E4357D6EFC97}"/>
+                <a16:creationId xmlns:a16="http://schemas.microsoft.com/office/drawing/2014/main" id="{3A384E2A-F336-4385-9338-0E24CED61FA7}"/>
               </a:ext>
             </a:extLst>
           </p:cNvPr>
@@ -19013,7 +20777,7 @@
           <p:cNvPr id="24" name="">
             <a:extLst xmlns:a="http://schemas.openxmlformats.org/drawingml/2006/main">
               <a:ext uri="{FF2B5EF4-FFF2-40B4-BE49-F238E27FC236}">
-                <a16:creationId xmlns:a16="http://schemas.microsoft.com/office/drawing/2014/main" id="{DD53FCA9-6302-4A69-A545-47EB4ED2825E}"/>
+                <a16:creationId xmlns:a16="http://schemas.microsoft.com/office/drawing/2014/main" id="{7A5E2CD3-2725-47DF-BD51-EF3BE6B27493}"/>
               </a:ext>
             </a:extLst>
           </p:cNvPr>
@@ -19105,7 +20869,7 @@
           <p:cNvPr id="25" name="">
             <a:extLst xmlns:a="http://schemas.openxmlformats.org/drawingml/2006/main">
               <a:ext uri="{FF2B5EF4-FFF2-40B4-BE49-F238E27FC236}">
-                <a16:creationId xmlns:a16="http://schemas.microsoft.com/office/drawing/2014/main" id="{FF503D38-B0F1-4CC8-9AE4-19C82CD60729}"/>
+                <a16:creationId xmlns:a16="http://schemas.microsoft.com/office/drawing/2014/main" id="{8D54A6A7-85CF-466C-B93D-66CC9C405812}"/>
               </a:ext>
             </a:extLst>
           </p:cNvPr>
@@ -19142,7 +20906,7 @@
           <p:cNvPr id="26" name="">
             <a:extLst xmlns:a="http://schemas.openxmlformats.org/drawingml/2006/main">
               <a:ext uri="{FF2B5EF4-FFF2-40B4-BE49-F238E27FC236}">
-                <a16:creationId xmlns:a16="http://schemas.microsoft.com/office/drawing/2014/main" id="{24702C47-6650-4A42-9B5D-41B779CDA719}"/>
+                <a16:creationId xmlns:a16="http://schemas.microsoft.com/office/drawing/2014/main" id="{34E3993B-7424-44B5-A4BD-3C777EE00B0D}"/>
               </a:ext>
             </a:extLst>
           </p:cNvPr>
@@ -19177,7 +20941,7 @@
           <p:cNvPr id="27" name="">
             <a:extLst xmlns:a="http://schemas.openxmlformats.org/drawingml/2006/main">
               <a:ext uri="{FF2B5EF4-FFF2-40B4-BE49-F238E27FC236}">
-                <a16:creationId xmlns:a16="http://schemas.microsoft.com/office/drawing/2014/main" id="{D054D9D2-02FF-475F-9B61-7823E7C2B6DA}"/>
+                <a16:creationId xmlns:a16="http://schemas.microsoft.com/office/drawing/2014/main" id="{E89D9657-B6D1-455C-8912-AFE174CD4191}"/>
               </a:ext>
             </a:extLst>
           </p:cNvPr>
@@ -19235,7 +20999,7 @@
           <p:cNvPr id="28" name="">
             <a:extLst xmlns:a="http://schemas.openxmlformats.org/drawingml/2006/main">
               <a:ext uri="{FF2B5EF4-FFF2-40B4-BE49-F238E27FC236}">
-                <a16:creationId xmlns:a16="http://schemas.microsoft.com/office/drawing/2014/main" id="{18EE8F0E-1BCF-463D-BB1C-F9658FA37535}"/>
+                <a16:creationId xmlns:a16="http://schemas.microsoft.com/office/drawing/2014/main" id="{60A4A721-AC0E-46EF-A7D8-684793D9944F}"/>
               </a:ext>
             </a:extLst>
           </p:cNvPr>
@@ -19327,7 +21091,7 @@
           <p:cNvPr id="29" name="">
             <a:extLst xmlns:a="http://schemas.openxmlformats.org/drawingml/2006/main">
               <a:ext uri="{FF2B5EF4-FFF2-40B4-BE49-F238E27FC236}">
-                <a16:creationId xmlns:a16="http://schemas.microsoft.com/office/drawing/2014/main" id="{02EBD374-0999-498D-84E1-09049394767D}"/>
+                <a16:creationId xmlns:a16="http://schemas.microsoft.com/office/drawing/2014/main" id="{3A756CA5-F833-4C16-8A1D-E6A55840CAA6}"/>
               </a:ext>
             </a:extLst>
           </p:cNvPr>
@@ -19381,7 +21145,7 @@
           <p:cNvPr id="30" name="">
             <a:extLst xmlns:a="http://schemas.openxmlformats.org/drawingml/2006/main">
               <a:ext uri="{FF2B5EF4-FFF2-40B4-BE49-F238E27FC236}">
-                <a16:creationId xmlns:a16="http://schemas.microsoft.com/office/drawing/2014/main" id="{598F1EA4-3123-48D2-AF91-5089EA0F1827}"/>
+                <a16:creationId xmlns:a16="http://schemas.microsoft.com/office/drawing/2014/main" id="{B17DAD6D-FE6F-43CE-BA7D-490C4A0ED3FD}"/>
               </a:ext>
             </a:extLst>
           </p:cNvPr>
@@ -19437,7 +21201,7 @@
     </p:spTree>
     <p:extLst>
       <p:ext uri="{BB962C8B-B14F-4D97-AF65-F5344CB8AC3E}">
-        <p14:creationId xmlns:p14="http://schemas.microsoft.com/office/powerpoint/2010/main" val="1768761511"/>
+        <p14:creationId xmlns:p14="http://schemas.microsoft.com/office/powerpoint/2010/main" val="1206462675"/>
       </p:ext>
     </p:extLst>
   </p:cSld>
@@ -19468,7 +21232,7 @@
           <p:cNvPr id="1" name="Slide Number Placeholder 5">
             <a:extLst xmlns:a="http://schemas.openxmlformats.org/drawingml/2006/main">
               <a:ext uri="{FF2B5EF4-FFF2-40B4-BE49-F238E27FC236}">
-                <a16:creationId xmlns:a16="http://schemas.microsoft.com/office/drawing/2014/main" id="{E12CE447-476B-4BAE-A1FF-E669E79965E6}"/>
+                <a16:creationId xmlns:a16="http://schemas.microsoft.com/office/drawing/2014/main" id="{EDD0F201-AE24-4D54-ACE2-5F86EBC94A0A}"/>
               </a:ext>
             </a:extLst>
           </p:cNvPr>
@@ -19504,7 +21268,7 @@
           <p:nvPr/>
         </p:nvPicPr>
         <p:blipFill>
-          <a:blip xmlns:r="http://schemas.openxmlformats.org/officeDocument/2006/relationships" xmlns:a="http://schemas.openxmlformats.org/drawingml/2006/main" r:embed="Rce274e8403d24e64"/>
+          <a:blip xmlns:r="http://schemas.openxmlformats.org/officeDocument/2006/relationships" xmlns:a="http://schemas.openxmlformats.org/drawingml/2006/main" r:embed="R670a0e88972c488d"/>
           <a:srcRect xmlns:a="http://schemas.openxmlformats.org/drawingml/2006/main" l="0" t="21875" r="0" b="21875"/>
           <a:stretch xmlns:a="http://schemas.openxmlformats.org/drawingml/2006/main">
             <a:fillRect l="0" t="0" r="0" b="0"/>
@@ -19525,7 +21289,7 @@
           <p:cNvPr id="3" name="">
             <a:extLst xmlns:a="http://schemas.openxmlformats.org/drawingml/2006/main">
               <a:ext uri="{FF2B5EF4-FFF2-40B4-BE49-F238E27FC236}">
-                <a16:creationId xmlns:a16="http://schemas.microsoft.com/office/drawing/2014/main" id="{EA23B219-1FDC-421B-A3A6-64ABD1CBE6A8}"/>
+                <a16:creationId xmlns:a16="http://schemas.microsoft.com/office/drawing/2014/main" id="{D0023030-2795-412F-B16D-3315C26382AC}"/>
               </a:ext>
             </a:extLst>
           </p:cNvPr>
@@ -19560,7 +21324,7 @@
           <p:cNvPr id="4" name="">
             <a:extLst xmlns:a="http://schemas.openxmlformats.org/drawingml/2006/main">
               <a:ext uri="{FF2B5EF4-FFF2-40B4-BE49-F238E27FC236}">
-                <a16:creationId xmlns:a16="http://schemas.microsoft.com/office/drawing/2014/main" id="{B74A005E-E8ED-4469-9794-57228C889436}"/>
+                <a16:creationId xmlns:a16="http://schemas.microsoft.com/office/drawing/2014/main" id="{41C1B59C-80C8-4735-8761-62A6E9F3952D}"/>
               </a:ext>
             </a:extLst>
           </p:cNvPr>
@@ -19595,7 +21359,7 @@
           <p:cNvPr id="5" name="">
             <a:extLst xmlns:a="http://schemas.openxmlformats.org/drawingml/2006/main">
               <a:ext uri="{FF2B5EF4-FFF2-40B4-BE49-F238E27FC236}">
-                <a16:creationId xmlns:a16="http://schemas.microsoft.com/office/drawing/2014/main" id="{CA2B3121-D3E5-47CB-994D-BFA93004F5EF}"/>
+                <a16:creationId xmlns:a16="http://schemas.microsoft.com/office/drawing/2014/main" id="{7942B764-815D-4CEE-8039-5C6E7684F4EA}"/>
               </a:ext>
             </a:extLst>
           </p:cNvPr>
@@ -19632,7 +21396,7 @@
           <p:cNvPr id="6" name="">
             <a:extLst xmlns:a="http://schemas.openxmlformats.org/drawingml/2006/main">
               <a:ext uri="{FF2B5EF4-FFF2-40B4-BE49-F238E27FC236}">
-                <a16:creationId xmlns:a16="http://schemas.microsoft.com/office/drawing/2014/main" id="{EFCBF658-7ADE-45E5-BD97-62E313A95546}"/>
+                <a16:creationId xmlns:a16="http://schemas.microsoft.com/office/drawing/2014/main" id="{A613AEAC-762D-47DE-9268-6C65AB927012}"/>
               </a:ext>
             </a:extLst>
           </p:cNvPr>
@@ -19669,7 +21433,7 @@
           <p:cNvPr id="7" name="">
             <a:extLst xmlns:a="http://schemas.openxmlformats.org/drawingml/2006/main">
               <a:ext uri="{FF2B5EF4-FFF2-40B4-BE49-F238E27FC236}">
-                <a16:creationId xmlns:a16="http://schemas.microsoft.com/office/drawing/2014/main" id="{7806656D-238C-456E-A5FB-7FDA4B94D16C}"/>
+                <a16:creationId xmlns:a16="http://schemas.microsoft.com/office/drawing/2014/main" id="{91E8707A-D36F-48CB-9C94-1812218A6C9D}"/>
               </a:ext>
             </a:extLst>
           </p:cNvPr>
@@ -19706,7 +21470,7 @@
           <p:cNvPr id="8" name="">
             <a:extLst xmlns:a="http://schemas.openxmlformats.org/drawingml/2006/main">
               <a:ext uri="{FF2B5EF4-FFF2-40B4-BE49-F238E27FC236}">
-                <a16:creationId xmlns:a16="http://schemas.microsoft.com/office/drawing/2014/main" id="{B2B2ED55-5B5C-4352-AE3F-7C04459E60F8}"/>
+                <a16:creationId xmlns:a16="http://schemas.microsoft.com/office/drawing/2014/main" id="{7C5D4574-39C0-45AA-B2B9-AC61AEDBD4BA}"/>
               </a:ext>
             </a:extLst>
           </p:cNvPr>
@@ -19743,7 +21507,7 @@
           <p:cNvPr id="9" name="">
             <a:extLst xmlns:a="http://schemas.openxmlformats.org/drawingml/2006/main">
               <a:ext uri="{FF2B5EF4-FFF2-40B4-BE49-F238E27FC236}">
-                <a16:creationId xmlns:a16="http://schemas.microsoft.com/office/drawing/2014/main" id="{5A91ABC1-5415-43D7-BC18-C7D4E22B19D1}"/>
+                <a16:creationId xmlns:a16="http://schemas.microsoft.com/office/drawing/2014/main" id="{A9505730-12D8-4CF5-BD68-8B02C5500D80}"/>
               </a:ext>
             </a:extLst>
           </p:cNvPr>
@@ -19801,7 +21565,7 @@
           <p:cNvPr id="10" name="">
             <a:extLst xmlns:a="http://schemas.openxmlformats.org/drawingml/2006/main">
               <a:ext uri="{FF2B5EF4-FFF2-40B4-BE49-F238E27FC236}">
-                <a16:creationId xmlns:a16="http://schemas.microsoft.com/office/drawing/2014/main" id="{DFE9AC40-4785-42AF-9F7A-688AB1249C09}"/>
+                <a16:creationId xmlns:a16="http://schemas.microsoft.com/office/drawing/2014/main" id="{B0194C58-F8BE-4E95-B72B-CF1D952719E1}"/>
               </a:ext>
             </a:extLst>
           </p:cNvPr>
@@ -19849,7 +21613,7 @@
                   <a:srgbClr val="0F5B3F"/>
                 </a:solidFill>
               </a:rPr>
-              <a:t>08 / 12</a:t>
+              <a:t>08 / 13</a:t>
             </a:r>
           </a:p>
         </p:txBody>
@@ -19859,7 +21623,7 @@
           <p:cNvPr id="11" name="">
             <a:extLst xmlns:a="http://schemas.openxmlformats.org/drawingml/2006/main">
               <a:ext uri="{FF2B5EF4-FFF2-40B4-BE49-F238E27FC236}">
-                <a16:creationId xmlns:a16="http://schemas.microsoft.com/office/drawing/2014/main" id="{3BDD6A73-E0B0-4FCC-BE22-0FC1B528C5F5}"/>
+                <a16:creationId xmlns:a16="http://schemas.microsoft.com/office/drawing/2014/main" id="{FD69F9E3-375A-44D6-BE88-B929FFB9CEED}"/>
               </a:ext>
             </a:extLst>
           </p:cNvPr>
@@ -19894,7 +21658,7 @@
           <p:cNvPr id="12" name="">
             <a:extLst xmlns:a="http://schemas.openxmlformats.org/drawingml/2006/main">
               <a:ext uri="{FF2B5EF4-FFF2-40B4-BE49-F238E27FC236}">
-                <a16:creationId xmlns:a16="http://schemas.microsoft.com/office/drawing/2014/main" id="{19C987E3-7886-4931-826A-FFD357BE7838}"/>
+                <a16:creationId xmlns:a16="http://schemas.microsoft.com/office/drawing/2014/main" id="{14C79379-D3C4-40D3-A633-EF2C124F1D56}"/>
               </a:ext>
             </a:extLst>
           </p:cNvPr>
@@ -19927,7 +21691,7 @@
           <p:cNvPr id="13" name="">
             <a:extLst xmlns:a="http://schemas.openxmlformats.org/drawingml/2006/main">
               <a:ext uri="{FF2B5EF4-FFF2-40B4-BE49-F238E27FC236}">
-                <a16:creationId xmlns:a16="http://schemas.microsoft.com/office/drawing/2014/main" id="{97EFDC21-BD97-4906-ADA6-C2714EDEE16D}"/>
+                <a16:creationId xmlns:a16="http://schemas.microsoft.com/office/drawing/2014/main" id="{34C517A0-0E11-42CA-ABE0-5ECE119B2750}"/>
               </a:ext>
             </a:extLst>
           </p:cNvPr>
@@ -20002,7 +21766,7 @@
           <p:cNvPr id="14" name="">
             <a:extLst xmlns:a="http://schemas.openxmlformats.org/drawingml/2006/main">
               <a:ext uri="{FF2B5EF4-FFF2-40B4-BE49-F238E27FC236}">
-                <a16:creationId xmlns:a16="http://schemas.microsoft.com/office/drawing/2014/main" id="{24B9D0DA-A1F4-41E4-A89C-95330AEB1DCC}"/>
+                <a16:creationId xmlns:a16="http://schemas.microsoft.com/office/drawing/2014/main" id="{B870BE64-9CDB-4629-AE19-22E7942872E9}"/>
               </a:ext>
             </a:extLst>
           </p:cNvPr>
@@ -20039,7 +21803,7 @@
           <p:cNvPr id="15" name="">
             <a:extLst xmlns:a="http://schemas.openxmlformats.org/drawingml/2006/main">
               <a:ext uri="{FF2B5EF4-FFF2-40B4-BE49-F238E27FC236}">
-                <a16:creationId xmlns:a16="http://schemas.microsoft.com/office/drawing/2014/main" id="{9C824847-677B-48B5-9F34-A421429AA0D5}"/>
+                <a16:creationId xmlns:a16="http://schemas.microsoft.com/office/drawing/2014/main" id="{3EDA52AF-8F5C-4C32-B054-EAF54505EF20}"/>
               </a:ext>
             </a:extLst>
           </p:cNvPr>
@@ -20074,7 +21838,7 @@
           <p:cNvPr id="16" name="">
             <a:extLst xmlns:a="http://schemas.openxmlformats.org/drawingml/2006/main">
               <a:ext uri="{FF2B5EF4-FFF2-40B4-BE49-F238E27FC236}">
-                <a16:creationId xmlns:a16="http://schemas.microsoft.com/office/drawing/2014/main" id="{9E1A3FA7-525A-4E31-91F1-86350AE785DD}"/>
+                <a16:creationId xmlns:a16="http://schemas.microsoft.com/office/drawing/2014/main" id="{F3DB19D8-EF2E-45C8-972F-3A4DAE0A31ED}"/>
               </a:ext>
             </a:extLst>
           </p:cNvPr>
@@ -20132,7 +21896,7 @@
           <p:cNvPr id="17" name="">
             <a:extLst xmlns:a="http://schemas.openxmlformats.org/drawingml/2006/main">
               <a:ext uri="{FF2B5EF4-FFF2-40B4-BE49-F238E27FC236}">
-                <a16:creationId xmlns:a16="http://schemas.microsoft.com/office/drawing/2014/main" id="{9AC9B2E5-95BF-4770-B7E9-1A8959D2274E}"/>
+                <a16:creationId xmlns:a16="http://schemas.microsoft.com/office/drawing/2014/main" id="{CEB6C763-DDA4-4412-AA15-A44BF14A4D76}"/>
               </a:ext>
             </a:extLst>
           </p:cNvPr>
@@ -20224,7 +21988,7 @@
           <p:cNvPr id="18" name="">
             <a:extLst xmlns:a="http://schemas.openxmlformats.org/drawingml/2006/main">
               <a:ext uri="{FF2B5EF4-FFF2-40B4-BE49-F238E27FC236}">
-                <a16:creationId xmlns:a16="http://schemas.microsoft.com/office/drawing/2014/main" id="{9DFAB654-CA3E-40CA-899D-6375A353E31F}"/>
+                <a16:creationId xmlns:a16="http://schemas.microsoft.com/office/drawing/2014/main" id="{EBE5B963-1C97-45CA-BC87-A30FB421ECAC}"/>
               </a:ext>
             </a:extLst>
           </p:cNvPr>
@@ -20261,7 +22025,7 @@
           <p:cNvPr id="19" name="">
             <a:extLst xmlns:a="http://schemas.openxmlformats.org/drawingml/2006/main">
               <a:ext uri="{FF2B5EF4-FFF2-40B4-BE49-F238E27FC236}">
-                <a16:creationId xmlns:a16="http://schemas.microsoft.com/office/drawing/2014/main" id="{BD6EAD98-AE58-4C3A-8EEB-CE8AC3316800}"/>
+                <a16:creationId xmlns:a16="http://schemas.microsoft.com/office/drawing/2014/main" id="{563FE9A8-E5F6-4F60-B8E3-050E71D2E543}"/>
               </a:ext>
             </a:extLst>
           </p:cNvPr>
@@ -20296,7 +22060,7 @@
           <p:cNvPr id="20" name="">
             <a:extLst xmlns:a="http://schemas.openxmlformats.org/drawingml/2006/main">
               <a:ext uri="{FF2B5EF4-FFF2-40B4-BE49-F238E27FC236}">
-                <a16:creationId xmlns:a16="http://schemas.microsoft.com/office/drawing/2014/main" id="{16892F0C-0EDA-4E4A-B102-FA246BC41414}"/>
+                <a16:creationId xmlns:a16="http://schemas.microsoft.com/office/drawing/2014/main" id="{B6A8C60A-6D00-420B-8C32-7D798CFD55E4}"/>
               </a:ext>
             </a:extLst>
           </p:cNvPr>
@@ -20354,7 +22118,7 @@
           <p:cNvPr id="21" name="">
             <a:extLst xmlns:a="http://schemas.openxmlformats.org/drawingml/2006/main">
               <a:ext uri="{FF2B5EF4-FFF2-40B4-BE49-F238E27FC236}">
-                <a16:creationId xmlns:a16="http://schemas.microsoft.com/office/drawing/2014/main" id="{B6B531BA-7A49-4A0D-B0ED-CDBF5E7CD6E7}"/>
+                <a16:creationId xmlns:a16="http://schemas.microsoft.com/office/drawing/2014/main" id="{28C290C0-C8A8-4650-A53A-197A29D9C3BC}"/>
               </a:ext>
             </a:extLst>
           </p:cNvPr>
@@ -20429,7 +22193,7 @@
           <p:cNvPr id="22" name="">
             <a:extLst xmlns:a="http://schemas.openxmlformats.org/drawingml/2006/main">
               <a:ext uri="{FF2B5EF4-FFF2-40B4-BE49-F238E27FC236}">
-                <a16:creationId xmlns:a16="http://schemas.microsoft.com/office/drawing/2014/main" id="{562B0672-1921-4DE5-BEF8-298143783999}"/>
+                <a16:creationId xmlns:a16="http://schemas.microsoft.com/office/drawing/2014/main" id="{FCA4D1FA-7580-49E1-A617-EC67FF17862C}"/>
               </a:ext>
             </a:extLst>
           </p:cNvPr>
@@ -20466,7 +22230,7 @@
           <p:cNvPr id="23" name="">
             <a:extLst xmlns:a="http://schemas.openxmlformats.org/drawingml/2006/main">
               <a:ext uri="{FF2B5EF4-FFF2-40B4-BE49-F238E27FC236}">
-                <a16:creationId xmlns:a16="http://schemas.microsoft.com/office/drawing/2014/main" id="{19512C37-FEC4-4201-8F13-0EA9F1542DB7}"/>
+                <a16:creationId xmlns:a16="http://schemas.microsoft.com/office/drawing/2014/main" id="{727CEB7F-BD7C-489D-A5D3-B776DE750A2A}"/>
               </a:ext>
             </a:extLst>
           </p:cNvPr>
@@ -20501,7 +22265,7 @@
           <p:cNvPr id="24" name="">
             <a:extLst xmlns:a="http://schemas.openxmlformats.org/drawingml/2006/main">
               <a:ext uri="{FF2B5EF4-FFF2-40B4-BE49-F238E27FC236}">
-                <a16:creationId xmlns:a16="http://schemas.microsoft.com/office/drawing/2014/main" id="{A4BB9A12-4E8D-4D4B-A7BC-54E06DEE4C1B}"/>
+                <a16:creationId xmlns:a16="http://schemas.microsoft.com/office/drawing/2014/main" id="{355C3D7D-D904-4282-9B39-05CB727229C9}"/>
               </a:ext>
             </a:extLst>
           </p:cNvPr>
@@ -20559,7 +22323,7 @@
           <p:cNvPr id="25" name="">
             <a:extLst xmlns:a="http://schemas.openxmlformats.org/drawingml/2006/main">
               <a:ext uri="{FF2B5EF4-FFF2-40B4-BE49-F238E27FC236}">
-                <a16:creationId xmlns:a16="http://schemas.microsoft.com/office/drawing/2014/main" id="{59139619-2F79-4016-AC4C-7133824505A6}"/>
+                <a16:creationId xmlns:a16="http://schemas.microsoft.com/office/drawing/2014/main" id="{4D2F2AA8-4919-46B9-9403-6DF698A19FC7}"/>
               </a:ext>
             </a:extLst>
           </p:cNvPr>
@@ -20634,7 +22398,7 @@
           <p:cNvPr id="26" name="">
             <a:extLst xmlns:a="http://schemas.openxmlformats.org/drawingml/2006/main">
               <a:ext uri="{FF2B5EF4-FFF2-40B4-BE49-F238E27FC236}">
-                <a16:creationId xmlns:a16="http://schemas.microsoft.com/office/drawing/2014/main" id="{D63F14EB-D6D6-4A99-8D40-B9E8CAB1AEC8}"/>
+                <a16:creationId xmlns:a16="http://schemas.microsoft.com/office/drawing/2014/main" id="{726A96E5-A562-48BD-94D6-76B5EE93B336}"/>
               </a:ext>
             </a:extLst>
           </p:cNvPr>
@@ -20669,7 +22433,7 @@
           <p:cNvPr id="27" name="">
             <a:extLst xmlns:a="http://schemas.openxmlformats.org/drawingml/2006/main">
               <a:ext uri="{FF2B5EF4-FFF2-40B4-BE49-F238E27FC236}">
-                <a16:creationId xmlns:a16="http://schemas.microsoft.com/office/drawing/2014/main" id="{DA4CFE49-BEFD-43B2-AB48-FA924D6A0A42}"/>
+                <a16:creationId xmlns:a16="http://schemas.microsoft.com/office/drawing/2014/main" id="{BE30EBA6-128E-44D8-A1B6-8AF0F7610D63}"/>
               </a:ext>
             </a:extLst>
           </p:cNvPr>
@@ -20704,7 +22468,7 @@
           <p:cNvPr id="28" name="">
             <a:extLst xmlns:a="http://schemas.openxmlformats.org/drawingml/2006/main">
               <a:ext uri="{FF2B5EF4-FFF2-40B4-BE49-F238E27FC236}">
-                <a16:creationId xmlns:a16="http://schemas.microsoft.com/office/drawing/2014/main" id="{CDB9CC04-AC8C-40E1-AC6A-95EB544FF7DC}"/>
+                <a16:creationId xmlns:a16="http://schemas.microsoft.com/office/drawing/2014/main" id="{DD25E6D7-E3D0-44FA-A36F-77D1308E23C3}"/>
               </a:ext>
             </a:extLst>
           </p:cNvPr>
@@ -20762,7 +22526,7 @@
           <p:cNvPr id="29" name="">
             <a:extLst xmlns:a="http://schemas.openxmlformats.org/drawingml/2006/main">
               <a:ext uri="{FF2B5EF4-FFF2-40B4-BE49-F238E27FC236}">
-                <a16:creationId xmlns:a16="http://schemas.microsoft.com/office/drawing/2014/main" id="{CA1DCFD2-3529-4B0B-9C3A-FB93082EA81B}"/>
+                <a16:creationId xmlns:a16="http://schemas.microsoft.com/office/drawing/2014/main" id="{E5AD8ADF-0CCB-4996-8A73-D0A16C78088E}"/>
               </a:ext>
             </a:extLst>
           </p:cNvPr>
@@ -20820,7 +22584,7 @@
           <p:cNvPr id="30" name="">
             <a:extLst xmlns:a="http://schemas.openxmlformats.org/drawingml/2006/main">
               <a:ext uri="{FF2B5EF4-FFF2-40B4-BE49-F238E27FC236}">
-                <a16:creationId xmlns:a16="http://schemas.microsoft.com/office/drawing/2014/main" id="{DAFAD79D-C3B3-408D-A469-889BA5D7C32E}"/>
+                <a16:creationId xmlns:a16="http://schemas.microsoft.com/office/drawing/2014/main" id="{355B911A-01A5-4385-B319-63FBA4393001}"/>
               </a:ext>
             </a:extLst>
           </p:cNvPr>
@@ -20855,7 +22619,7 @@
           <p:cNvPr id="31" name="">
             <a:extLst xmlns:a="http://schemas.openxmlformats.org/drawingml/2006/main">
               <a:ext uri="{FF2B5EF4-FFF2-40B4-BE49-F238E27FC236}">
-                <a16:creationId xmlns:a16="http://schemas.microsoft.com/office/drawing/2014/main" id="{F7878BAA-B863-471A-B790-4B38C3E23F59}"/>
+                <a16:creationId xmlns:a16="http://schemas.microsoft.com/office/drawing/2014/main" id="{5821597F-8C01-43E7-BDEF-49AD06BB7EDF}"/>
               </a:ext>
             </a:extLst>
           </p:cNvPr>
@@ -20913,7 +22677,7 @@
           <p:cNvPr id="32" name="">
             <a:extLst xmlns:a="http://schemas.openxmlformats.org/drawingml/2006/main">
               <a:ext uri="{FF2B5EF4-FFF2-40B4-BE49-F238E27FC236}">
-                <a16:creationId xmlns:a16="http://schemas.microsoft.com/office/drawing/2014/main" id="{59BD7354-D222-4042-8006-85271BE459A0}"/>
+                <a16:creationId xmlns:a16="http://schemas.microsoft.com/office/drawing/2014/main" id="{2974C348-C518-4E4F-84C3-119D2B3E9937}"/>
               </a:ext>
             </a:extLst>
           </p:cNvPr>
@@ -20971,7 +22735,7 @@
           <p:cNvPr id="33" name="">
             <a:extLst xmlns:a="http://schemas.openxmlformats.org/drawingml/2006/main">
               <a:ext uri="{FF2B5EF4-FFF2-40B4-BE49-F238E27FC236}">
-                <a16:creationId xmlns:a16="http://schemas.microsoft.com/office/drawing/2014/main" id="{FC2BDAFD-AAA5-46D4-82A6-1D417BBA2E93}"/>
+                <a16:creationId xmlns:a16="http://schemas.microsoft.com/office/drawing/2014/main" id="{96B95A93-B6AB-4F6E-A7F5-D1C670578E79}"/>
               </a:ext>
             </a:extLst>
           </p:cNvPr>
@@ -21027,7 +22791,7 @@
     </p:spTree>
     <p:extLst>
       <p:ext uri="{BB962C8B-B14F-4D97-AF65-F5344CB8AC3E}">
-        <p14:creationId xmlns:p14="http://schemas.microsoft.com/office/powerpoint/2010/main" val="968263222"/>
+        <p14:creationId xmlns:p14="http://schemas.microsoft.com/office/powerpoint/2010/main" val="1312374359"/>
       </p:ext>
     </p:extLst>
   </p:cSld>
@@ -21058,7 +22822,7 @@
           <p:cNvPr id="1" name="Slide Number Placeholder 5">
             <a:extLst xmlns:a="http://schemas.openxmlformats.org/drawingml/2006/main">
               <a:ext uri="{FF2B5EF4-FFF2-40B4-BE49-F238E27FC236}">
-                <a16:creationId xmlns:a16="http://schemas.microsoft.com/office/drawing/2014/main" id="{E12CE447-476B-4BAE-A1FF-E669E79965E6}"/>
+                <a16:creationId xmlns:a16="http://schemas.microsoft.com/office/drawing/2014/main" id="{EDD0F201-AE24-4D54-ACE2-5F86EBC94A0A}"/>
               </a:ext>
             </a:extLst>
           </p:cNvPr>
@@ -21094,7 +22858,7 @@
           <p:nvPr/>
         </p:nvPicPr>
         <p:blipFill>
-          <a:blip xmlns:r="http://schemas.openxmlformats.org/officeDocument/2006/relationships" xmlns:a="http://schemas.openxmlformats.org/drawingml/2006/main" r:embed="Rb81ea05725de443f"/>
+          <a:blip xmlns:r="http://schemas.openxmlformats.org/officeDocument/2006/relationships" xmlns:a="http://schemas.openxmlformats.org/drawingml/2006/main" r:embed="Rda8acc5a3962427c"/>
           <a:srcRect xmlns:a="http://schemas.openxmlformats.org/drawingml/2006/main" l="0" t="21875" r="0" b="21875"/>
           <a:stretch xmlns:a="http://schemas.openxmlformats.org/drawingml/2006/main">
             <a:fillRect l="0" t="0" r="0" b="0"/>
@@ -21115,7 +22879,7 @@
           <p:cNvPr id="3" name="">
             <a:extLst xmlns:a="http://schemas.openxmlformats.org/drawingml/2006/main">
               <a:ext uri="{FF2B5EF4-FFF2-40B4-BE49-F238E27FC236}">
-                <a16:creationId xmlns:a16="http://schemas.microsoft.com/office/drawing/2014/main" id="{C95BBB47-9165-4794-8BEB-BC0ADD34FB9F}"/>
+                <a16:creationId xmlns:a16="http://schemas.microsoft.com/office/drawing/2014/main" id="{7901E18D-CB8B-472D-81D0-B076C13313D0}"/>
               </a:ext>
             </a:extLst>
           </p:cNvPr>
@@ -21150,7 +22914,7 @@
           <p:cNvPr id="4" name="">
             <a:extLst xmlns:a="http://schemas.openxmlformats.org/drawingml/2006/main">
               <a:ext uri="{FF2B5EF4-FFF2-40B4-BE49-F238E27FC236}">
-                <a16:creationId xmlns:a16="http://schemas.microsoft.com/office/drawing/2014/main" id="{2306754F-0257-49FF-97D6-C311E98B1F67}"/>
+                <a16:creationId xmlns:a16="http://schemas.microsoft.com/office/drawing/2014/main" id="{BD41D64B-3EFC-4213-A931-88700E9FAD70}"/>
               </a:ext>
             </a:extLst>
           </p:cNvPr>
@@ -21185,7 +22949,7 @@
           <p:cNvPr id="5" name="">
             <a:extLst xmlns:a="http://schemas.openxmlformats.org/drawingml/2006/main">
               <a:ext uri="{FF2B5EF4-FFF2-40B4-BE49-F238E27FC236}">
-                <a16:creationId xmlns:a16="http://schemas.microsoft.com/office/drawing/2014/main" id="{238C9EE0-BB03-4B18-AA48-AF191A3916B7}"/>
+                <a16:creationId xmlns:a16="http://schemas.microsoft.com/office/drawing/2014/main" id="{1C5E937A-7F73-4C06-99E6-81C5B77BBD3B}"/>
               </a:ext>
             </a:extLst>
           </p:cNvPr>
@@ -21222,7 +22986,7 @@
           <p:cNvPr id="6" name="">
             <a:extLst xmlns:a="http://schemas.openxmlformats.org/drawingml/2006/main">
               <a:ext uri="{FF2B5EF4-FFF2-40B4-BE49-F238E27FC236}">
-                <a16:creationId xmlns:a16="http://schemas.microsoft.com/office/drawing/2014/main" id="{9A0E4700-6338-46A4-9FA9-E898E2D7AAEF}"/>
+                <a16:creationId xmlns:a16="http://schemas.microsoft.com/office/drawing/2014/main" id="{E431541A-D5AC-4E9F-9B53-C93AD75A04C1}"/>
               </a:ext>
             </a:extLst>
           </p:cNvPr>
@@ -21259,7 +23023,7 @@
           <p:cNvPr id="7" name="">
             <a:extLst xmlns:a="http://schemas.openxmlformats.org/drawingml/2006/main">
               <a:ext uri="{FF2B5EF4-FFF2-40B4-BE49-F238E27FC236}">
-                <a16:creationId xmlns:a16="http://schemas.microsoft.com/office/drawing/2014/main" id="{34931C99-AD58-4211-8B11-9F498A613F71}"/>
+                <a16:creationId xmlns:a16="http://schemas.microsoft.com/office/drawing/2014/main" id="{ABBF6899-5C3E-4BD9-9520-0C57C651FC93}"/>
               </a:ext>
             </a:extLst>
           </p:cNvPr>
@@ -21296,7 +23060,7 @@
           <p:cNvPr id="8" name="">
             <a:extLst xmlns:a="http://schemas.openxmlformats.org/drawingml/2006/main">
               <a:ext uri="{FF2B5EF4-FFF2-40B4-BE49-F238E27FC236}">
-                <a16:creationId xmlns:a16="http://schemas.microsoft.com/office/drawing/2014/main" id="{DDA7DC33-B406-46DE-843A-1B722FAA09A5}"/>
+                <a16:creationId xmlns:a16="http://schemas.microsoft.com/office/drawing/2014/main" id="{AB6650DB-55B6-400C-A2EC-18101E08B160}"/>
               </a:ext>
             </a:extLst>
           </p:cNvPr>
@@ -21333,7 +23097,7 @@
           <p:cNvPr id="9" name="">
             <a:extLst xmlns:a="http://schemas.openxmlformats.org/drawingml/2006/main">
               <a:ext uri="{FF2B5EF4-FFF2-40B4-BE49-F238E27FC236}">
-                <a16:creationId xmlns:a16="http://schemas.microsoft.com/office/drawing/2014/main" id="{06511CF3-1DF8-4365-9A13-255833BD7E8F}"/>
+                <a16:creationId xmlns:a16="http://schemas.microsoft.com/office/drawing/2014/main" id="{2069474C-3D1A-4779-B68A-A102D320B27E}"/>
               </a:ext>
             </a:extLst>
           </p:cNvPr>
@@ -21391,7 +23155,7 @@
           <p:cNvPr id="10" name="">
             <a:extLst xmlns:a="http://schemas.openxmlformats.org/drawingml/2006/main">
               <a:ext uri="{FF2B5EF4-FFF2-40B4-BE49-F238E27FC236}">
-                <a16:creationId xmlns:a16="http://schemas.microsoft.com/office/drawing/2014/main" id="{0CA5DE55-61FB-47BB-9797-CDB6589C6CD1}"/>
+                <a16:creationId xmlns:a16="http://schemas.microsoft.com/office/drawing/2014/main" id="{1946DCC4-BC77-4F6E-8E9D-3579D637C91A}"/>
               </a:ext>
             </a:extLst>
           </p:cNvPr>
@@ -21439,7 +23203,7 @@
                   <a:srgbClr val="0F5B3F"/>
                 </a:solidFill>
               </a:rPr>
-              <a:t>09 / 12</a:t>
+              <a:t>09 / 13</a:t>
             </a:r>
           </a:p>
         </p:txBody>
@@ -21449,7 +23213,7 @@
           <p:cNvPr id="11" name="">
             <a:extLst xmlns:a="http://schemas.openxmlformats.org/drawingml/2006/main">
               <a:ext uri="{FF2B5EF4-FFF2-40B4-BE49-F238E27FC236}">
-                <a16:creationId xmlns:a16="http://schemas.microsoft.com/office/drawing/2014/main" id="{F9C8BDA7-52E6-49D2-B818-005F10B4492C}"/>
+                <a16:creationId xmlns:a16="http://schemas.microsoft.com/office/drawing/2014/main" id="{A150B5A4-1004-4299-8472-EC77B512B551}"/>
               </a:ext>
             </a:extLst>
           </p:cNvPr>
@@ -21484,7 +23248,7 @@
           <p:cNvPr id="12" name="">
             <a:extLst xmlns:a="http://schemas.openxmlformats.org/drawingml/2006/main">
               <a:ext uri="{FF2B5EF4-FFF2-40B4-BE49-F238E27FC236}">
-                <a16:creationId xmlns:a16="http://schemas.microsoft.com/office/drawing/2014/main" id="{0744AFA6-9497-4453-870C-1C93ACDABABF}"/>
+                <a16:creationId xmlns:a16="http://schemas.microsoft.com/office/drawing/2014/main" id="{A1D2FCD6-0B1B-451A-B25F-8CDEE40F4AD5}"/>
               </a:ext>
             </a:extLst>
           </p:cNvPr>
@@ -21517,7 +23281,7 @@
           <p:cNvPr id="13" name="">
             <a:extLst xmlns:a="http://schemas.openxmlformats.org/drawingml/2006/main">
               <a:ext uri="{FF2B5EF4-FFF2-40B4-BE49-F238E27FC236}">
-                <a16:creationId xmlns:a16="http://schemas.microsoft.com/office/drawing/2014/main" id="{C31D58EF-7466-4155-86A5-11239B066E2E}"/>
+                <a16:creationId xmlns:a16="http://schemas.microsoft.com/office/drawing/2014/main" id="{FB416A49-C1BE-4485-B206-645672384F9A}"/>
               </a:ext>
             </a:extLst>
           </p:cNvPr>
@@ -21592,7 +23356,7 @@
           <p:cNvPr id="14" name="">
             <a:extLst xmlns:a="http://schemas.openxmlformats.org/drawingml/2006/main">
               <a:ext uri="{FF2B5EF4-FFF2-40B4-BE49-F238E27FC236}">
-                <a16:creationId xmlns:a16="http://schemas.microsoft.com/office/drawing/2014/main" id="{C2F618B4-53D2-428A-9E28-A0F3DB479C1A}"/>
+                <a16:creationId xmlns:a16="http://schemas.microsoft.com/office/drawing/2014/main" id="{6A923A38-A6C6-4C18-8BE7-BE2CC3ACB748}"/>
               </a:ext>
             </a:extLst>
           </p:cNvPr>
@@ -21627,7 +23391,7 @@
           <p:cNvPr id="15" name="">
             <a:extLst xmlns:a="http://schemas.openxmlformats.org/drawingml/2006/main">
               <a:ext uri="{FF2B5EF4-FFF2-40B4-BE49-F238E27FC236}">
-                <a16:creationId xmlns:a16="http://schemas.microsoft.com/office/drawing/2014/main" id="{E1ED32DC-6210-47FC-83CA-E57265B7B235}"/>
+                <a16:creationId xmlns:a16="http://schemas.microsoft.com/office/drawing/2014/main" id="{41344924-FF3E-4040-8F3A-42B601DF113A}"/>
               </a:ext>
             </a:extLst>
           </p:cNvPr>
@@ -21662,7 +23426,7 @@
           <p:cNvPr id="16" name="">
             <a:extLst xmlns:a="http://schemas.openxmlformats.org/drawingml/2006/main">
               <a:ext uri="{FF2B5EF4-FFF2-40B4-BE49-F238E27FC236}">
-                <a16:creationId xmlns:a16="http://schemas.microsoft.com/office/drawing/2014/main" id="{1D4CE18C-93F9-4CE3-A78B-0BE093C9725A}"/>
+                <a16:creationId xmlns:a16="http://schemas.microsoft.com/office/drawing/2014/main" id="{871119D6-75BE-438D-99B7-50F36DEB983C}"/>
               </a:ext>
             </a:extLst>
           </p:cNvPr>
@@ -21720,7 +23484,7 @@
           <p:cNvPr id="17" name="">
             <a:extLst xmlns:a="http://schemas.openxmlformats.org/drawingml/2006/main">
               <a:ext uri="{FF2B5EF4-FFF2-40B4-BE49-F238E27FC236}">
-                <a16:creationId xmlns:a16="http://schemas.microsoft.com/office/drawing/2014/main" id="{5C1AB72A-419C-451F-8133-6D0F90D3DF65}"/>
+                <a16:creationId xmlns:a16="http://schemas.microsoft.com/office/drawing/2014/main" id="{FE40320E-77F6-4243-BA31-47D6F1A90C88}"/>
               </a:ext>
             </a:extLst>
           </p:cNvPr>
@@ -21757,7 +23521,7 @@
           <p:cNvPr id="18" name="">
             <a:extLst xmlns:a="http://schemas.openxmlformats.org/drawingml/2006/main">
               <a:ext uri="{FF2B5EF4-FFF2-40B4-BE49-F238E27FC236}">
-                <a16:creationId xmlns:a16="http://schemas.microsoft.com/office/drawing/2014/main" id="{DB6D2E87-E2BA-4A9A-AF5F-1E0B6CFB5F8E}"/>
+                <a16:creationId xmlns:a16="http://schemas.microsoft.com/office/drawing/2014/main" id="{CBEF7357-0461-4022-A757-E09E39560516}"/>
               </a:ext>
             </a:extLst>
           </p:cNvPr>
@@ -21792,7 +23556,7 @@
           <p:cNvPr id="19" name="">
             <a:extLst xmlns:a="http://schemas.openxmlformats.org/drawingml/2006/main">
               <a:ext uri="{FF2B5EF4-FFF2-40B4-BE49-F238E27FC236}">
-                <a16:creationId xmlns:a16="http://schemas.microsoft.com/office/drawing/2014/main" id="{0497C5D2-B7F2-48C1-A5A7-759C9AD3BF16}"/>
+                <a16:creationId xmlns:a16="http://schemas.microsoft.com/office/drawing/2014/main" id="{FD8CA4A5-4A5C-42BE-9DDA-418B1A1E4BD0}"/>
               </a:ext>
             </a:extLst>
           </p:cNvPr>
@@ -21850,7 +23614,7 @@
           <p:cNvPr id="20" name="">
             <a:extLst xmlns:a="http://schemas.openxmlformats.org/drawingml/2006/main">
               <a:ext uri="{FF2B5EF4-FFF2-40B4-BE49-F238E27FC236}">
-                <a16:creationId xmlns:a16="http://schemas.microsoft.com/office/drawing/2014/main" id="{F1FF67FF-5A4A-4072-96F5-D90B52AE6C62}"/>
+                <a16:creationId xmlns:a16="http://schemas.microsoft.com/office/drawing/2014/main" id="{525196D0-BA82-464F-8ABA-2E9F5E5425FD}"/>
               </a:ext>
             </a:extLst>
           </p:cNvPr>
@@ -21942,7 +23706,7 @@
           <p:cNvPr id="21" name="">
             <a:extLst xmlns:a="http://schemas.openxmlformats.org/drawingml/2006/main">
               <a:ext uri="{FF2B5EF4-FFF2-40B4-BE49-F238E27FC236}">
-                <a16:creationId xmlns:a16="http://schemas.microsoft.com/office/drawing/2014/main" id="{B5A243F3-05FB-4B35-AEFD-CCF5D0F7ABF6}"/>
+                <a16:creationId xmlns:a16="http://schemas.microsoft.com/office/drawing/2014/main" id="{607C4A90-37C5-440A-9E65-BF21C9ACC69E}"/>
               </a:ext>
             </a:extLst>
           </p:cNvPr>
@@ -21979,7 +23743,7 @@
           <p:cNvPr id="22" name="">
             <a:extLst xmlns:a="http://schemas.openxmlformats.org/drawingml/2006/main">
               <a:ext uri="{FF2B5EF4-FFF2-40B4-BE49-F238E27FC236}">
-                <a16:creationId xmlns:a16="http://schemas.microsoft.com/office/drawing/2014/main" id="{8A55DFF6-FB71-46DC-89FF-1E32DA57AFFE}"/>
+                <a16:creationId xmlns:a16="http://schemas.microsoft.com/office/drawing/2014/main" id="{D2D06A4E-0D42-46AE-A8C6-390D2116BC02}"/>
               </a:ext>
             </a:extLst>
           </p:cNvPr>
@@ -22014,7 +23778,7 @@
           <p:cNvPr id="23" name="">
             <a:extLst xmlns:a="http://schemas.openxmlformats.org/drawingml/2006/main">
               <a:ext uri="{FF2B5EF4-FFF2-40B4-BE49-F238E27FC236}">
-                <a16:creationId xmlns:a16="http://schemas.microsoft.com/office/drawing/2014/main" id="{EF10AEB4-1C3B-4C2B-A386-03DF92A7C68B}"/>
+                <a16:creationId xmlns:a16="http://schemas.microsoft.com/office/drawing/2014/main" id="{B6459C4D-26F3-4C43-9D8E-31A3D35D04C1}"/>
               </a:ext>
             </a:extLst>
           </p:cNvPr>
@@ -22072,7 +23836,7 @@
           <p:cNvPr id="24" name="">
             <a:extLst xmlns:a="http://schemas.openxmlformats.org/drawingml/2006/main">
               <a:ext uri="{FF2B5EF4-FFF2-40B4-BE49-F238E27FC236}">
-                <a16:creationId xmlns:a16="http://schemas.microsoft.com/office/drawing/2014/main" id="{FC18C74D-FF3E-494B-859E-B2D21F23C0A6}"/>
+                <a16:creationId xmlns:a16="http://schemas.microsoft.com/office/drawing/2014/main" id="{B36F00F4-0A39-4815-B847-B60074AC67A6}"/>
               </a:ext>
             </a:extLst>
           </p:cNvPr>
@@ -22181,7 +23945,7 @@
           <p:cNvPr id="25" name="">
             <a:extLst xmlns:a="http://schemas.openxmlformats.org/drawingml/2006/main">
               <a:ext uri="{FF2B5EF4-FFF2-40B4-BE49-F238E27FC236}">
-                <a16:creationId xmlns:a16="http://schemas.microsoft.com/office/drawing/2014/main" id="{E3255291-28D7-4ABA-8B45-913F6713D761}"/>
+                <a16:creationId xmlns:a16="http://schemas.microsoft.com/office/drawing/2014/main" id="{5BCB44EE-3B12-474C-B3DD-5576C16AF2A5}"/>
               </a:ext>
             </a:extLst>
           </p:cNvPr>
@@ -22214,7 +23978,7 @@
           <p:cNvPr id="26" name="">
             <a:extLst xmlns:a="http://schemas.openxmlformats.org/drawingml/2006/main">
               <a:ext uri="{FF2B5EF4-FFF2-40B4-BE49-F238E27FC236}">
-                <a16:creationId xmlns:a16="http://schemas.microsoft.com/office/drawing/2014/main" id="{62AAF860-CAF6-4A7E-9EA2-C37C24A37EE8}"/>
+                <a16:creationId xmlns:a16="http://schemas.microsoft.com/office/drawing/2014/main" id="{7B8F33AB-1484-4A1F-BAF6-7BFF33BB9CC5}"/>
               </a:ext>
             </a:extLst>
           </p:cNvPr>
@@ -22268,7 +24032,7 @@
           <p:cNvPr id="27" name="">
             <a:extLst xmlns:a="http://schemas.openxmlformats.org/drawingml/2006/main">
               <a:ext uri="{FF2B5EF4-FFF2-40B4-BE49-F238E27FC236}">
-                <a16:creationId xmlns:a16="http://schemas.microsoft.com/office/drawing/2014/main" id="{BF47C9D9-149A-4356-B9C0-77EEC2E1F71B}"/>
+                <a16:creationId xmlns:a16="http://schemas.microsoft.com/office/drawing/2014/main" id="{3BE450F7-E497-4EE1-AC86-B9622B58932B}"/>
               </a:ext>
             </a:extLst>
           </p:cNvPr>
@@ -22324,7 +24088,7 @@
     </p:spTree>
     <p:extLst>
       <p:ext uri="{BB962C8B-B14F-4D97-AF65-F5344CB8AC3E}">
-        <p14:creationId xmlns:p14="http://schemas.microsoft.com/office/powerpoint/2010/main" val="1174361897"/>
+        <p14:creationId xmlns:p14="http://schemas.microsoft.com/office/powerpoint/2010/main" val="427968544"/>
       </p:ext>
     </p:extLst>
   </p:cSld>

--- a/collections/organoid/presentation/brain-organoid-question-journey/outputs/output.pptx
+++ b/collections/organoid/presentation/brain-organoid-question-journey/outputs/output.pptx
@@ -24138,14 +24138,14 @@
     </a:clrScheme>
     <a:fontScheme name="Office">
       <a:majorFont>
-        <a:latin typeface="Calibri Light"/>
-        <a:ea typeface="Calibri Light"/>
-        <a:cs typeface="Calibri Light"/>
+        <a:latin typeface="Arial"/>
+        <a:ea typeface="Malgun Gothic"/>
+        <a:cs typeface="Arial"/>
       </a:majorFont>
       <a:minorFont>
-        <a:latin typeface="Calibri"/>
-        <a:ea typeface="Calibri"/>
-        <a:cs typeface="Calibri"/>
+        <a:latin typeface="Arial"/>
+        <a:ea typeface="Malgun Gothic"/>
+        <a:cs typeface="Arial"/>
       </a:minorFont>
     </a:fontScheme>
     <a:fmtScheme name="ChatGPT">

--- a/collections/organoid/presentation/brain-organoid-question-journey/outputs/output.pptx
+++ b/collections/organoid/presentation/brain-organoid-question-journey/outputs/output.pptx
@@ -2,25 +2,25 @@
 <file path=ppt/presentation.xml><?xml version="1.0" encoding="utf-8"?>
 <p:presentation xmlns:p="http://schemas.openxmlformats.org/presentationml/2006/main">
   <p:sldMasterIdLst>
-    <p:sldMasterId xmlns:r="http://schemas.openxmlformats.org/officeDocument/2006/relationships" id="2147483648" r:id="R8c0caf5a97114da0"/>
+    <p:sldMasterId xmlns:r="http://schemas.openxmlformats.org/officeDocument/2006/relationships" id="2147483648" r:id="R59d8d55b52544e80"/>
   </p:sldMasterIdLst>
   <p:notesMasterIdLst>
-    <p:notesMasterId xmlns:r="http://schemas.openxmlformats.org/officeDocument/2006/relationships" r:id="Reb0f0dab47ec4045"/>
+    <p:notesMasterId xmlns:r="http://schemas.openxmlformats.org/officeDocument/2006/relationships" r:id="R897b400928fe4194"/>
   </p:notesMasterIdLst>
   <p:sldIdLst>
-    <p:sldId xmlns:r="http://schemas.openxmlformats.org/officeDocument/2006/relationships" id="256" r:id="Re36c11e160294ea9"/>
-    <p:sldId xmlns:r="http://schemas.openxmlformats.org/officeDocument/2006/relationships" id="257" r:id="Rd7cadffd0aef4f28"/>
-    <p:sldId xmlns:r="http://schemas.openxmlformats.org/officeDocument/2006/relationships" id="258" r:id="R330a00bbdd7b45c1"/>
-    <p:sldId xmlns:r="http://schemas.openxmlformats.org/officeDocument/2006/relationships" id="259" r:id="R5eb0c892070647cc"/>
-    <p:sldId xmlns:r="http://schemas.openxmlformats.org/officeDocument/2006/relationships" id="260" r:id="Rb8cb1ee50c814577"/>
-    <p:sldId xmlns:r="http://schemas.openxmlformats.org/officeDocument/2006/relationships" id="261" r:id="Rb50b8793c8614a6a"/>
-    <p:sldId xmlns:r="http://schemas.openxmlformats.org/officeDocument/2006/relationships" id="262" r:id="Ra3626d69efc34d6b"/>
-    <p:sldId xmlns:r="http://schemas.openxmlformats.org/officeDocument/2006/relationships" id="263" r:id="Rf5ef0e083a494444"/>
-    <p:sldId xmlns:r="http://schemas.openxmlformats.org/officeDocument/2006/relationships" id="264" r:id="R84d1a7591a9448f1"/>
-    <p:sldId xmlns:r="http://schemas.openxmlformats.org/officeDocument/2006/relationships" id="265" r:id="Rb98ea558c6ee4fc2"/>
-    <p:sldId xmlns:r="http://schemas.openxmlformats.org/officeDocument/2006/relationships" id="266" r:id="R043f1a3b23a94b74"/>
-    <p:sldId xmlns:r="http://schemas.openxmlformats.org/officeDocument/2006/relationships" id="267" r:id="R92b33bed6f824d6f"/>
-    <p:sldId xmlns:r="http://schemas.openxmlformats.org/officeDocument/2006/relationships" id="268" r:id="R7e155083d9cb4521"/>
+    <p:sldId xmlns:r="http://schemas.openxmlformats.org/officeDocument/2006/relationships" id="256" r:id="R298c4f830490421e"/>
+    <p:sldId xmlns:r="http://schemas.openxmlformats.org/officeDocument/2006/relationships" id="257" r:id="R6a8facdd2e9f41f0"/>
+    <p:sldId xmlns:r="http://schemas.openxmlformats.org/officeDocument/2006/relationships" id="258" r:id="R751300ae35ac42e1"/>
+    <p:sldId xmlns:r="http://schemas.openxmlformats.org/officeDocument/2006/relationships" id="259" r:id="Rb84bb13bc6284db1"/>
+    <p:sldId xmlns:r="http://schemas.openxmlformats.org/officeDocument/2006/relationships" id="260" r:id="R2df036b8fef74c9f"/>
+    <p:sldId xmlns:r="http://schemas.openxmlformats.org/officeDocument/2006/relationships" id="261" r:id="R614fdacc59d6410e"/>
+    <p:sldId xmlns:r="http://schemas.openxmlformats.org/officeDocument/2006/relationships" id="262" r:id="Rcfb526a55e5e41bc"/>
+    <p:sldId xmlns:r="http://schemas.openxmlformats.org/officeDocument/2006/relationships" id="263" r:id="R4699cedc23b046bd"/>
+    <p:sldId xmlns:r="http://schemas.openxmlformats.org/officeDocument/2006/relationships" id="264" r:id="Rfad30d8528fd437c"/>
+    <p:sldId xmlns:r="http://schemas.openxmlformats.org/officeDocument/2006/relationships" id="265" r:id="R9aa31311cf1b4849"/>
+    <p:sldId xmlns:r="http://schemas.openxmlformats.org/officeDocument/2006/relationships" id="266" r:id="R16b7209c25d54427"/>
+    <p:sldId xmlns:r="http://schemas.openxmlformats.org/officeDocument/2006/relationships" id="267" r:id="Ra2b9134bdbe44ed6"/>
+    <p:sldId xmlns:r="http://schemas.openxmlformats.org/officeDocument/2006/relationships" id="268" r:id="R5f4460b6ab8c4180"/>
   </p:sldIdLst>
   <p:sldSz cx="12192000" cy="6858000"/>
   <p:notesSz cx="6858000" cy="9144000"/>
@@ -2001,7 +2001,7 @@
           <p:cNvPr id="1" name="Title 1">
             <a:extLst xmlns:a="http://schemas.openxmlformats.org/drawingml/2006/main">
               <a:ext uri="{FF2B5EF4-FFF2-40B4-BE49-F238E27FC236}">
-                <a16:creationId xmlns:a16="http://schemas.microsoft.com/office/drawing/2014/main" id="{EE9B9336-AD92-4E55-B0BB-DD5E2816FCBC}"/>
+                <a16:creationId xmlns:a16="http://schemas.microsoft.com/office/drawing/2014/main" id="{34045EEF-0E9B-40F1-9156-295B22028368}"/>
               </a:ext>
             </a:extLst>
           </p:cNvPr>
@@ -2032,7 +2032,7 @@
           <p:cNvPr id="2" name="Subtitle 2">
             <a:extLst xmlns:a="http://schemas.openxmlformats.org/drawingml/2006/main">
               <a:ext uri="{FF2B5EF4-FFF2-40B4-BE49-F238E27FC236}">
-                <a16:creationId xmlns:a16="http://schemas.microsoft.com/office/drawing/2014/main" id="{108D341E-060A-4618-ADBA-B356B00E0DDA}"/>
+                <a16:creationId xmlns:a16="http://schemas.microsoft.com/office/drawing/2014/main" id="{5C7DB787-FFA2-4AA0-AB74-4B583BE10B1B}"/>
               </a:ext>
             </a:extLst>
           </p:cNvPr>
@@ -2095,7 +2095,7 @@
           <p:cNvPr id="3" name="Date Placeholder 3">
             <a:extLst xmlns:a="http://schemas.openxmlformats.org/drawingml/2006/main">
               <a:ext uri="{FF2B5EF4-FFF2-40B4-BE49-F238E27FC236}">
-                <a16:creationId xmlns:a16="http://schemas.microsoft.com/office/drawing/2014/main" id="{7E04374C-0BA8-4393-8B67-C9C826C2D1C9}"/>
+                <a16:creationId xmlns:a16="http://schemas.microsoft.com/office/drawing/2014/main" id="{F2EBD201-56F1-4389-B290-FDF9A5440669}"/>
               </a:ext>
             </a:extLst>
           </p:cNvPr>
@@ -2116,7 +2116,7 @@
           <p:cNvPr id="4" name="Footer Placeholder 4">
             <a:extLst xmlns:a="http://schemas.openxmlformats.org/drawingml/2006/main">
               <a:ext uri="{FF2B5EF4-FFF2-40B4-BE49-F238E27FC236}">
-                <a16:creationId xmlns:a16="http://schemas.microsoft.com/office/drawing/2014/main" id="{AA600E7D-EC07-43CF-9AB7-09DBCABA4EC7}"/>
+                <a16:creationId xmlns:a16="http://schemas.microsoft.com/office/drawing/2014/main" id="{BD8CEA7E-CE08-4D5A-84A1-87A543129B89}"/>
               </a:ext>
             </a:extLst>
           </p:cNvPr>
@@ -2137,7 +2137,7 @@
           <p:cNvPr id="5" name="Slide Number Placeholder 5">
             <a:extLst xmlns:a="http://schemas.openxmlformats.org/drawingml/2006/main">
               <a:ext uri="{FF2B5EF4-FFF2-40B4-BE49-F238E27FC236}">
-                <a16:creationId xmlns:a16="http://schemas.microsoft.com/office/drawing/2014/main" id="{EDD0F201-AE24-4D54-ACE2-5F86EBC94A0A}"/>
+                <a16:creationId xmlns:a16="http://schemas.microsoft.com/office/drawing/2014/main" id="{316B49F2-843A-4E0C-BBC2-0E3A47804521}"/>
               </a:ext>
             </a:extLst>
           </p:cNvPr>
@@ -2180,7 +2180,7 @@
           <p:cNvPr id="1" name="Slide Number Placeholder 5">
             <a:extLst xmlns:a="http://schemas.openxmlformats.org/drawingml/2006/main">
               <a:ext uri="{FF2B5EF4-FFF2-40B4-BE49-F238E27FC236}">
-                <a16:creationId xmlns:a16="http://schemas.microsoft.com/office/drawing/2014/main" id="{1B824CBC-E7A4-4DB2-8E5A-64395DD95FEC}"/>
+                <a16:creationId xmlns:a16="http://schemas.microsoft.com/office/drawing/2014/main" id="{006676B3-2C8D-4448-BBE4-F73EC8E9FFBC}"/>
               </a:ext>
             </a:extLst>
           </p:cNvPr>
@@ -2219,7 +2219,7 @@
   </p:cSld>
   <p:clrMap bg1="lt1" tx1="dk1" bg2="lt2" tx2="dk2" accent1="accent1" accent2="accent2" accent3="accent3" accent4="accent4" accent5="accent5" accent6="accent6" hlink="hlink" folHlink="folHlink"/>
   <p:sldLayoutIdLst>
-    <p:sldLayoutId xmlns:r="http://schemas.openxmlformats.org/officeDocument/2006/relationships" id="2147483649" r:id="Re3cc46a66fa84bd8"/>
+    <p:sldLayoutId xmlns:r="http://schemas.openxmlformats.org/officeDocument/2006/relationships" id="2147483649" r:id="Rd80a3c90fd414db2"/>
   </p:sldLayoutIdLst>
   <p:txStyles>
     <p:titleStyle>
@@ -2525,7 +2525,7 @@
           <p:cNvPr id="1" name="Slide Number Placeholder 5">
             <a:extLst xmlns:a="http://schemas.openxmlformats.org/drawingml/2006/main">
               <a:ext uri="{FF2B5EF4-FFF2-40B4-BE49-F238E27FC236}">
-                <a16:creationId xmlns:a16="http://schemas.microsoft.com/office/drawing/2014/main" id="{EDD0F201-AE24-4D54-ACE2-5F86EBC94A0A}"/>
+                <a16:creationId xmlns:a16="http://schemas.microsoft.com/office/drawing/2014/main" id="{316B49F2-843A-4E0C-BBC2-0E3A47804521}"/>
               </a:ext>
             </a:extLst>
           </p:cNvPr>
@@ -2561,7 +2561,7 @@
           <p:nvPr/>
         </p:nvPicPr>
         <p:blipFill>
-          <a:blip xmlns:r="http://schemas.openxmlformats.org/officeDocument/2006/relationships" xmlns:a="http://schemas.openxmlformats.org/drawingml/2006/main" r:embed="Rc9d8b1b674214625"/>
+          <a:blip xmlns:r="http://schemas.openxmlformats.org/officeDocument/2006/relationships" xmlns:a="http://schemas.openxmlformats.org/drawingml/2006/main" r:embed="Rd0b08e13d6864c4f"/>
           <a:srcRect xmlns:a="http://schemas.openxmlformats.org/drawingml/2006/main" l="0" t="21875" r="0" b="21875"/>
           <a:stretch xmlns:a="http://schemas.openxmlformats.org/drawingml/2006/main">
             <a:fillRect l="0" t="0" r="0" b="0"/>
@@ -2582,7 +2582,7 @@
           <p:cNvPr id="3" name="">
             <a:extLst xmlns:a="http://schemas.openxmlformats.org/drawingml/2006/main">
               <a:ext uri="{FF2B5EF4-FFF2-40B4-BE49-F238E27FC236}">
-                <a16:creationId xmlns:a16="http://schemas.microsoft.com/office/drawing/2014/main" id="{DBC667C0-2691-4077-A853-D10E740581B4}"/>
+                <a16:creationId xmlns:a16="http://schemas.microsoft.com/office/drawing/2014/main" id="{7656FAE8-B3CF-44B9-9795-D32F4BF6A1A3}"/>
               </a:ext>
             </a:extLst>
           </p:cNvPr>
@@ -2617,7 +2617,7 @@
           <p:cNvPr id="4" name="">
             <a:extLst xmlns:a="http://schemas.openxmlformats.org/drawingml/2006/main">
               <a:ext uri="{FF2B5EF4-FFF2-40B4-BE49-F238E27FC236}">
-                <a16:creationId xmlns:a16="http://schemas.microsoft.com/office/drawing/2014/main" id="{08AFF53D-38B8-4E1D-85BC-B9BF6C891389}"/>
+                <a16:creationId xmlns:a16="http://schemas.microsoft.com/office/drawing/2014/main" id="{9750F254-C91C-4C81-9ADC-51FA2074BEF4}"/>
               </a:ext>
             </a:extLst>
           </p:cNvPr>
@@ -2652,7 +2652,7 @@
           <p:cNvPr id="5" name="">
             <a:extLst xmlns:a="http://schemas.openxmlformats.org/drawingml/2006/main">
               <a:ext uri="{FF2B5EF4-FFF2-40B4-BE49-F238E27FC236}">
-                <a16:creationId xmlns:a16="http://schemas.microsoft.com/office/drawing/2014/main" id="{2C1EF796-016B-45F3-A5B1-DCFA8799972E}"/>
+                <a16:creationId xmlns:a16="http://schemas.microsoft.com/office/drawing/2014/main" id="{9914214C-3FB8-40EF-8FE3-EEAE67828A36}"/>
               </a:ext>
             </a:extLst>
           </p:cNvPr>
@@ -2689,7 +2689,7 @@
           <p:cNvPr id="6" name="">
             <a:extLst xmlns:a="http://schemas.openxmlformats.org/drawingml/2006/main">
               <a:ext uri="{FF2B5EF4-FFF2-40B4-BE49-F238E27FC236}">
-                <a16:creationId xmlns:a16="http://schemas.microsoft.com/office/drawing/2014/main" id="{5F7BA109-4507-41F0-B2C5-6764820D21C6}"/>
+                <a16:creationId xmlns:a16="http://schemas.microsoft.com/office/drawing/2014/main" id="{B71DE6D7-4367-4F4E-84A9-C187320141EE}"/>
               </a:ext>
             </a:extLst>
           </p:cNvPr>
@@ -2726,7 +2726,7 @@
           <p:cNvPr id="7" name="">
             <a:extLst xmlns:a="http://schemas.openxmlformats.org/drawingml/2006/main">
               <a:ext uri="{FF2B5EF4-FFF2-40B4-BE49-F238E27FC236}">
-                <a16:creationId xmlns:a16="http://schemas.microsoft.com/office/drawing/2014/main" id="{5E7B2D89-4324-48EA-B2A7-54E5C4AF4EDC}"/>
+                <a16:creationId xmlns:a16="http://schemas.microsoft.com/office/drawing/2014/main" id="{B4722D10-310C-442D-9842-E5C4793E9B93}"/>
               </a:ext>
             </a:extLst>
           </p:cNvPr>
@@ -2763,7 +2763,7 @@
           <p:cNvPr id="8" name="">
             <a:extLst xmlns:a="http://schemas.openxmlformats.org/drawingml/2006/main">
               <a:ext uri="{FF2B5EF4-FFF2-40B4-BE49-F238E27FC236}">
-                <a16:creationId xmlns:a16="http://schemas.microsoft.com/office/drawing/2014/main" id="{58CD09DD-1C24-487A-8F0D-62BEF407F7BD}"/>
+                <a16:creationId xmlns:a16="http://schemas.microsoft.com/office/drawing/2014/main" id="{74C5DFE0-A242-4E9D-9785-95CCB6B020F4}"/>
               </a:ext>
             </a:extLst>
           </p:cNvPr>
@@ -2800,7 +2800,7 @@
           <p:cNvPr id="9" name="">
             <a:extLst xmlns:a="http://schemas.openxmlformats.org/drawingml/2006/main">
               <a:ext uri="{FF2B5EF4-FFF2-40B4-BE49-F238E27FC236}">
-                <a16:creationId xmlns:a16="http://schemas.microsoft.com/office/drawing/2014/main" id="{996FB239-2886-4DEA-BB76-2BDC4DFF9BEE}"/>
+                <a16:creationId xmlns:a16="http://schemas.microsoft.com/office/drawing/2014/main" id="{AF7E8EF2-C956-41E5-BD1B-1C155FD95BCA}"/>
               </a:ext>
             </a:extLst>
           </p:cNvPr>
@@ -2835,7 +2835,7 @@
           <p:cNvPr id="10" name="">
             <a:extLst xmlns:a="http://schemas.openxmlformats.org/drawingml/2006/main">
               <a:ext uri="{FF2B5EF4-FFF2-40B4-BE49-F238E27FC236}">
-                <a16:creationId xmlns:a16="http://schemas.microsoft.com/office/drawing/2014/main" id="{B4E252F1-4E10-4D69-9E59-2590BB59722C}"/>
+                <a16:creationId xmlns:a16="http://schemas.microsoft.com/office/drawing/2014/main" id="{D484B1F6-4F97-48A2-81AB-A091C0404C86}"/>
               </a:ext>
             </a:extLst>
           </p:cNvPr>
@@ -2893,7 +2893,7 @@
           <p:cNvPr id="11" name="">
             <a:extLst xmlns:a="http://schemas.openxmlformats.org/drawingml/2006/main">
               <a:ext uri="{FF2B5EF4-FFF2-40B4-BE49-F238E27FC236}">
-                <a16:creationId xmlns:a16="http://schemas.microsoft.com/office/drawing/2014/main" id="{8CDE208E-A9A5-4C8A-A3FF-D2E396A3B0ED}"/>
+                <a16:creationId xmlns:a16="http://schemas.microsoft.com/office/drawing/2014/main" id="{7352E215-1981-4884-B48E-F802D5172DA4}"/>
               </a:ext>
             </a:extLst>
           </p:cNvPr>
@@ -2941,7 +2941,7 @@
                   <a:srgbClr val="132024"/>
                 </a:solidFill>
               </a:rPr>
-              <a:t>Brain organoid protocol 비교는</a:t>
+              <a:t>Brain organoid protocol 비교:</a:t>
             </a:r>
           </a:p>
           <a:p xmlns:a="http://schemas.openxmlformats.org/drawingml/2006/main">
@@ -2958,7 +2958,7 @@
                   <a:srgbClr val="132024"/>
                 </a:solidFill>
               </a:rPr>
-              <a:t>왜 subregion 비교만으로 끝나지 않는가</a:t>
+              <a:t>subregion에서 readout까지</a:t>
             </a:r>
           </a:p>
         </p:txBody>
@@ -2968,7 +2968,7 @@
           <p:cNvPr id="12" name="">
             <a:extLst xmlns:a="http://schemas.openxmlformats.org/drawingml/2006/main">
               <a:ext uri="{FF2B5EF4-FFF2-40B4-BE49-F238E27FC236}">
-                <a16:creationId xmlns:a16="http://schemas.microsoft.com/office/drawing/2014/main" id="{BA8C877C-855E-4A66-9290-7A378B6FAAFC}"/>
+                <a16:creationId xmlns:a16="http://schemas.microsoft.com/office/drawing/2014/main" id="{B0885214-41E6-40DB-B1B0-303D693B6D38}"/>
               </a:ext>
             </a:extLst>
           </p:cNvPr>
@@ -3016,7 +3016,7 @@
                   <a:srgbClr val="344146"/>
                 </a:solidFill>
               </a:rPr>
-              <a:t>LLM-wiki를 collection 단위로 운영한 뒤,</a:t>
+              <a:t>collection 기반 LLM-wiki 운영을 바탕으로,</a:t>
             </a:r>
           </a:p>
           <a:p xmlns:a="http://schemas.openxmlformats.org/drawingml/2006/main">
@@ -3033,7 +3033,7 @@
                   <a:srgbClr val="344146"/>
                 </a:solidFill>
               </a:rPr>
-              <a:t>brain organoid 질문이 subregion 비교에서 readout-first rule로 어떻게 확장됐는지를 보여준다.</a:t>
+              <a:t>brain organoid protocol 비교 기준의 확장 과정을 제시한다.</a:t>
             </a:r>
           </a:p>
         </p:txBody>
@@ -3043,7 +3043,7 @@
           <p:cNvPr id="13" name="">
             <a:extLst xmlns:a="http://schemas.openxmlformats.org/drawingml/2006/main">
               <a:ext uri="{FF2B5EF4-FFF2-40B4-BE49-F238E27FC236}">
-                <a16:creationId xmlns:a16="http://schemas.microsoft.com/office/drawing/2014/main" id="{20208BCD-522C-401E-9462-2E62A49C15C0}"/>
+                <a16:creationId xmlns:a16="http://schemas.microsoft.com/office/drawing/2014/main" id="{6E6BC554-D3DC-49C9-88C8-F038E5CB52A8}"/>
               </a:ext>
             </a:extLst>
           </p:cNvPr>
@@ -3080,7 +3080,7 @@
           <p:cNvPr id="14" name="">
             <a:extLst xmlns:a="http://schemas.openxmlformats.org/drawingml/2006/main">
               <a:ext uri="{FF2B5EF4-FFF2-40B4-BE49-F238E27FC236}">
-                <a16:creationId xmlns:a16="http://schemas.microsoft.com/office/drawing/2014/main" id="{AA89B5D2-5596-40A6-8269-2D61A93FF174}"/>
+                <a16:creationId xmlns:a16="http://schemas.microsoft.com/office/drawing/2014/main" id="{90B48BE7-B62E-4F24-B688-42FCFE781FD7}"/>
               </a:ext>
             </a:extLst>
           </p:cNvPr>
@@ -3128,7 +3128,7 @@
                   <a:srgbClr val="132024"/>
                 </a:solidFill>
               </a:rPr>
-              <a:t>질문이 바뀌면 비교 기준도 바뀐다</a:t>
+              <a:t>질문의 변화는 비교 기준의 변화를 요구한다</a:t>
             </a:r>
           </a:p>
         </p:txBody>
@@ -3138,7 +3138,7 @@
           <p:cNvPr id="15" name="">
             <a:extLst xmlns:a="http://schemas.openxmlformats.org/drawingml/2006/main">
               <a:ext uri="{FF2B5EF4-FFF2-40B4-BE49-F238E27FC236}">
-                <a16:creationId xmlns:a16="http://schemas.microsoft.com/office/drawing/2014/main" id="{226B9A8A-D3A5-4B3F-BA3D-1302A5B99144}"/>
+                <a16:creationId xmlns:a16="http://schemas.microsoft.com/office/drawing/2014/main" id="{D1D6A755-DC72-413F-91B6-4732872374A9}"/>
               </a:ext>
             </a:extLst>
           </p:cNvPr>
@@ -3173,7 +3173,7 @@
           <p:cNvPr id="16" name="">
             <a:extLst xmlns:a="http://schemas.openxmlformats.org/drawingml/2006/main">
               <a:ext uri="{FF2B5EF4-FFF2-40B4-BE49-F238E27FC236}">
-                <a16:creationId xmlns:a16="http://schemas.microsoft.com/office/drawing/2014/main" id="{0BDEBC5C-195B-409B-98D9-ABDAEC7B759E}"/>
+                <a16:creationId xmlns:a16="http://schemas.microsoft.com/office/drawing/2014/main" id="{9459B3D6-3117-4A3B-9B95-323D86AA1CAC}"/>
               </a:ext>
             </a:extLst>
           </p:cNvPr>
@@ -3208,7 +3208,7 @@
           <p:cNvPr id="17" name="">
             <a:extLst xmlns:a="http://schemas.openxmlformats.org/drawingml/2006/main">
               <a:ext uri="{FF2B5EF4-FFF2-40B4-BE49-F238E27FC236}">
-                <a16:creationId xmlns:a16="http://schemas.microsoft.com/office/drawing/2014/main" id="{231F3E7E-E906-4357-A8AF-9251C3730681}"/>
+                <a16:creationId xmlns:a16="http://schemas.microsoft.com/office/drawing/2014/main" id="{EB0C58E2-E62C-4B36-BFF2-687794D9EF59}"/>
               </a:ext>
             </a:extLst>
           </p:cNvPr>
@@ -3262,7 +3262,7 @@
           <p:cNvPr id="18" name="">
             <a:extLst xmlns:a="http://schemas.openxmlformats.org/drawingml/2006/main">
               <a:ext uri="{FF2B5EF4-FFF2-40B4-BE49-F238E27FC236}">
-                <a16:creationId xmlns:a16="http://schemas.microsoft.com/office/drawing/2014/main" id="{963FDB44-B527-4C30-B471-41676F15861E}"/>
+                <a16:creationId xmlns:a16="http://schemas.microsoft.com/office/drawing/2014/main" id="{DFEC0294-7B58-4C17-922F-13AD6BDBD9DC}"/>
               </a:ext>
             </a:extLst>
           </p:cNvPr>
@@ -3320,7 +3320,7 @@
           <p:cNvPr id="19" name="">
             <a:extLst xmlns:a="http://schemas.openxmlformats.org/drawingml/2006/main">
               <a:ext uri="{FF2B5EF4-FFF2-40B4-BE49-F238E27FC236}">
-                <a16:creationId xmlns:a16="http://schemas.microsoft.com/office/drawing/2014/main" id="{1C0978A5-38F9-440E-BC7A-9692AF80CFCD}"/>
+                <a16:creationId xmlns:a16="http://schemas.microsoft.com/office/drawing/2014/main" id="{241C0B32-E579-4255-AEA6-8F13080A89C5}"/>
               </a:ext>
             </a:extLst>
           </p:cNvPr>
@@ -3395,7 +3395,7 @@
           <p:cNvPr id="20" name="">
             <a:extLst xmlns:a="http://schemas.openxmlformats.org/drawingml/2006/main">
               <a:ext uri="{FF2B5EF4-FFF2-40B4-BE49-F238E27FC236}">
-                <a16:creationId xmlns:a16="http://schemas.microsoft.com/office/drawing/2014/main" id="{F78AD037-8C18-466C-8445-E0F801A8F2C2}"/>
+                <a16:creationId xmlns:a16="http://schemas.microsoft.com/office/drawing/2014/main" id="{E6F9DABF-8D16-4137-A4E9-938E799684CC}"/>
               </a:ext>
             </a:extLst>
           </p:cNvPr>
@@ -3430,7 +3430,7 @@
           <p:cNvPr id="21" name="">
             <a:extLst xmlns:a="http://schemas.openxmlformats.org/drawingml/2006/main">
               <a:ext uri="{FF2B5EF4-FFF2-40B4-BE49-F238E27FC236}">
-                <a16:creationId xmlns:a16="http://schemas.microsoft.com/office/drawing/2014/main" id="{5FF779EA-D611-4D73-A81C-35817CC1072A}"/>
+                <a16:creationId xmlns:a16="http://schemas.microsoft.com/office/drawing/2014/main" id="{D471E07E-CC92-40A1-B485-C23FBBCBEA20}"/>
               </a:ext>
             </a:extLst>
           </p:cNvPr>
@@ -3465,7 +3465,7 @@
           <p:cNvPr id="22" name="">
             <a:extLst xmlns:a="http://schemas.openxmlformats.org/drawingml/2006/main">
               <a:ext uri="{FF2B5EF4-FFF2-40B4-BE49-F238E27FC236}">
-                <a16:creationId xmlns:a16="http://schemas.microsoft.com/office/drawing/2014/main" id="{51C74B1E-A6FA-4FB2-A41C-5B908254C2E4}"/>
+                <a16:creationId xmlns:a16="http://schemas.microsoft.com/office/drawing/2014/main" id="{06FB9AF7-F8D4-4387-842C-92E2DDA598A0}"/>
               </a:ext>
             </a:extLst>
           </p:cNvPr>
@@ -3519,7 +3519,7 @@
           <p:cNvPr id="23" name="">
             <a:extLst xmlns:a="http://schemas.openxmlformats.org/drawingml/2006/main">
               <a:ext uri="{FF2B5EF4-FFF2-40B4-BE49-F238E27FC236}">
-                <a16:creationId xmlns:a16="http://schemas.microsoft.com/office/drawing/2014/main" id="{FF8A330B-936D-4762-BC8C-C9A5CDD4F1B3}"/>
+                <a16:creationId xmlns:a16="http://schemas.microsoft.com/office/drawing/2014/main" id="{A466E300-5B9D-4FD3-B774-4DA47E8A8789}"/>
               </a:ext>
             </a:extLst>
           </p:cNvPr>
@@ -3577,7 +3577,7 @@
           <p:cNvPr id="24" name="">
             <a:extLst xmlns:a="http://schemas.openxmlformats.org/drawingml/2006/main">
               <a:ext uri="{FF2B5EF4-FFF2-40B4-BE49-F238E27FC236}">
-                <a16:creationId xmlns:a16="http://schemas.microsoft.com/office/drawing/2014/main" id="{2BA80424-8163-46CB-A1A9-780A0331BBA4}"/>
+                <a16:creationId xmlns:a16="http://schemas.microsoft.com/office/drawing/2014/main" id="{D6AF835F-ABD2-48C5-9906-1A48D4D70966}"/>
               </a:ext>
             </a:extLst>
           </p:cNvPr>
@@ -3652,7 +3652,7 @@
           <p:cNvPr id="25" name="">
             <a:extLst xmlns:a="http://schemas.openxmlformats.org/drawingml/2006/main">
               <a:ext uri="{FF2B5EF4-FFF2-40B4-BE49-F238E27FC236}">
-                <a16:creationId xmlns:a16="http://schemas.microsoft.com/office/drawing/2014/main" id="{2B141C4A-9773-433A-A4B7-63FB7D4B6899}"/>
+                <a16:creationId xmlns:a16="http://schemas.microsoft.com/office/drawing/2014/main" id="{61C4FF31-4441-49B3-81C8-F1E27E678143}"/>
               </a:ext>
             </a:extLst>
           </p:cNvPr>
@@ -3687,7 +3687,7 @@
           <p:cNvPr id="26" name="">
             <a:extLst xmlns:a="http://schemas.openxmlformats.org/drawingml/2006/main">
               <a:ext uri="{FF2B5EF4-FFF2-40B4-BE49-F238E27FC236}">
-                <a16:creationId xmlns:a16="http://schemas.microsoft.com/office/drawing/2014/main" id="{C9396F0A-8BF6-4DF2-B60B-1C06272709F4}"/>
+                <a16:creationId xmlns:a16="http://schemas.microsoft.com/office/drawing/2014/main" id="{7CD70868-2D59-425C-BC16-6DE39B255C3D}"/>
               </a:ext>
             </a:extLst>
           </p:cNvPr>
@@ -3722,7 +3722,7 @@
           <p:cNvPr id="27" name="">
             <a:extLst xmlns:a="http://schemas.openxmlformats.org/drawingml/2006/main">
               <a:ext uri="{FF2B5EF4-FFF2-40B4-BE49-F238E27FC236}">
-                <a16:creationId xmlns:a16="http://schemas.microsoft.com/office/drawing/2014/main" id="{AF436F3B-6A5D-4D81-BC82-92AE9B7480D9}"/>
+                <a16:creationId xmlns:a16="http://schemas.microsoft.com/office/drawing/2014/main" id="{63F9B6D3-B0D5-4E3F-9334-7E9D306C533A}"/>
               </a:ext>
             </a:extLst>
           </p:cNvPr>
@@ -3776,7 +3776,7 @@
           <p:cNvPr id="28" name="">
             <a:extLst xmlns:a="http://schemas.openxmlformats.org/drawingml/2006/main">
               <a:ext uri="{FF2B5EF4-FFF2-40B4-BE49-F238E27FC236}">
-                <a16:creationId xmlns:a16="http://schemas.microsoft.com/office/drawing/2014/main" id="{230AE716-6A7A-4DE4-9BDD-229903FC4D87}"/>
+                <a16:creationId xmlns:a16="http://schemas.microsoft.com/office/drawing/2014/main" id="{C4EF457D-B929-478D-8FFC-63BA2D733642}"/>
               </a:ext>
             </a:extLst>
           </p:cNvPr>
@@ -3834,7 +3834,7 @@
           <p:cNvPr id="29" name="">
             <a:extLst xmlns:a="http://schemas.openxmlformats.org/drawingml/2006/main">
               <a:ext uri="{FF2B5EF4-FFF2-40B4-BE49-F238E27FC236}">
-                <a16:creationId xmlns:a16="http://schemas.microsoft.com/office/drawing/2014/main" id="{18878B55-CD42-47D8-866F-CC5B92277377}"/>
+                <a16:creationId xmlns:a16="http://schemas.microsoft.com/office/drawing/2014/main" id="{43897698-2ECB-40FF-BA0B-65D414457630}"/>
               </a:ext>
             </a:extLst>
           </p:cNvPr>
@@ -3909,7 +3909,7 @@
           <p:cNvPr id="30" name="">
             <a:extLst xmlns:a="http://schemas.openxmlformats.org/drawingml/2006/main">
               <a:ext uri="{FF2B5EF4-FFF2-40B4-BE49-F238E27FC236}">
-                <a16:creationId xmlns:a16="http://schemas.microsoft.com/office/drawing/2014/main" id="{1682B77D-6A66-4037-AA92-B490EEEA2BC1}"/>
+                <a16:creationId xmlns:a16="http://schemas.microsoft.com/office/drawing/2014/main" id="{B25BFFAD-7AA2-4144-BC63-DFBB1E866E5B}"/>
               </a:ext>
             </a:extLst>
           </p:cNvPr>
@@ -3944,7 +3944,7 @@
           <p:cNvPr id="31" name="">
             <a:extLst xmlns:a="http://schemas.openxmlformats.org/drawingml/2006/main">
               <a:ext uri="{FF2B5EF4-FFF2-40B4-BE49-F238E27FC236}">
-                <a16:creationId xmlns:a16="http://schemas.microsoft.com/office/drawing/2014/main" id="{48B6F8D9-BC55-47DB-A9C0-37A9407BE514}"/>
+                <a16:creationId xmlns:a16="http://schemas.microsoft.com/office/drawing/2014/main" id="{293EC087-C258-4FCC-BF7E-41A12BD5D45D}"/>
               </a:ext>
             </a:extLst>
           </p:cNvPr>
@@ -3979,7 +3979,7 @@
           <p:cNvPr id="32" name="">
             <a:extLst xmlns:a="http://schemas.openxmlformats.org/drawingml/2006/main">
               <a:ext uri="{FF2B5EF4-FFF2-40B4-BE49-F238E27FC236}">
-                <a16:creationId xmlns:a16="http://schemas.microsoft.com/office/drawing/2014/main" id="{207BDFC5-5A5C-487F-AA79-8384E9D8CA2B}"/>
+                <a16:creationId xmlns:a16="http://schemas.microsoft.com/office/drawing/2014/main" id="{A0E9ECC2-EB6F-484E-9ECD-46DA5562E01A}"/>
               </a:ext>
             </a:extLst>
           </p:cNvPr>
@@ -4033,7 +4033,7 @@
           <p:cNvPr id="33" name="">
             <a:extLst xmlns:a="http://schemas.openxmlformats.org/drawingml/2006/main">
               <a:ext uri="{FF2B5EF4-FFF2-40B4-BE49-F238E27FC236}">
-                <a16:creationId xmlns:a16="http://schemas.microsoft.com/office/drawing/2014/main" id="{A29302B8-6088-4B18-AD3D-04512E708277}"/>
+                <a16:creationId xmlns:a16="http://schemas.microsoft.com/office/drawing/2014/main" id="{279AB456-368D-47C0-A868-AF5046217353}"/>
               </a:ext>
             </a:extLst>
           </p:cNvPr>
@@ -4091,7 +4091,7 @@
           <p:cNvPr id="34" name="">
             <a:extLst xmlns:a="http://schemas.openxmlformats.org/drawingml/2006/main">
               <a:ext uri="{FF2B5EF4-FFF2-40B4-BE49-F238E27FC236}">
-                <a16:creationId xmlns:a16="http://schemas.microsoft.com/office/drawing/2014/main" id="{6BFEB4BB-3F72-41F0-946B-4531E99C5556}"/>
+                <a16:creationId xmlns:a16="http://schemas.microsoft.com/office/drawing/2014/main" id="{9EA499CD-2133-43C2-A5C2-727F304BDEB6}"/>
               </a:ext>
             </a:extLst>
           </p:cNvPr>
@@ -4149,7 +4149,7 @@
           <p:cNvPr id="35" name="">
             <a:extLst xmlns:a="http://schemas.openxmlformats.org/drawingml/2006/main">
               <a:ext uri="{FF2B5EF4-FFF2-40B4-BE49-F238E27FC236}">
-                <a16:creationId xmlns:a16="http://schemas.microsoft.com/office/drawing/2014/main" id="{E659ED19-82AE-4F12-845C-46E49E7C94DC}"/>
+                <a16:creationId xmlns:a16="http://schemas.microsoft.com/office/drawing/2014/main" id="{F6B289DA-CFBC-4286-ADA5-AB55B67B113C}"/>
               </a:ext>
             </a:extLst>
           </p:cNvPr>
@@ -4184,7 +4184,7 @@
           <p:cNvPr id="36" name="">
             <a:extLst xmlns:a="http://schemas.openxmlformats.org/drawingml/2006/main">
               <a:ext uri="{FF2B5EF4-FFF2-40B4-BE49-F238E27FC236}">
-                <a16:creationId xmlns:a16="http://schemas.microsoft.com/office/drawing/2014/main" id="{EFDF3EA9-B55E-455E-813B-435951FF3A34}"/>
+                <a16:creationId xmlns:a16="http://schemas.microsoft.com/office/drawing/2014/main" id="{26584A45-7366-4C7F-83C0-46D04DB35D6C}"/>
               </a:ext>
             </a:extLst>
           </p:cNvPr>
@@ -4219,7 +4219,7 @@
           <p:cNvPr id="37" name="">
             <a:extLst xmlns:a="http://schemas.openxmlformats.org/drawingml/2006/main">
               <a:ext uri="{FF2B5EF4-FFF2-40B4-BE49-F238E27FC236}">
-                <a16:creationId xmlns:a16="http://schemas.microsoft.com/office/drawing/2014/main" id="{714D8E1F-71AB-41E4-AF98-4CC050FDB2AC}"/>
+                <a16:creationId xmlns:a16="http://schemas.microsoft.com/office/drawing/2014/main" id="{3E8FB96C-1C65-4C7A-9C81-5774BDDDC5E6}"/>
               </a:ext>
             </a:extLst>
           </p:cNvPr>
@@ -4254,7 +4254,7 @@
           <p:cNvPr id="38" name="">
             <a:extLst xmlns:a="http://schemas.openxmlformats.org/drawingml/2006/main">
               <a:ext uri="{FF2B5EF4-FFF2-40B4-BE49-F238E27FC236}">
-                <a16:creationId xmlns:a16="http://schemas.microsoft.com/office/drawing/2014/main" id="{2A9166CB-15A2-40C2-9621-817BF5FC3278}"/>
+                <a16:creationId xmlns:a16="http://schemas.microsoft.com/office/drawing/2014/main" id="{9A3370F3-703D-4578-AF6D-3C4010F62607}"/>
               </a:ext>
             </a:extLst>
           </p:cNvPr>
@@ -4308,7 +4308,7 @@
           <p:cNvPr id="39" name="">
             <a:extLst xmlns:a="http://schemas.openxmlformats.org/drawingml/2006/main">
               <a:ext uri="{FF2B5EF4-FFF2-40B4-BE49-F238E27FC236}">
-                <a16:creationId xmlns:a16="http://schemas.microsoft.com/office/drawing/2014/main" id="{EC2288C8-2AEC-42A5-9DBA-F90393FEBE20}"/>
+                <a16:creationId xmlns:a16="http://schemas.microsoft.com/office/drawing/2014/main" id="{A57DD1DB-E2B2-449B-99E3-DF7E045AC1F9}"/>
               </a:ext>
             </a:extLst>
           </p:cNvPr>
@@ -4362,7 +4362,7 @@
           <p:cNvPr id="40" name="">
             <a:extLst xmlns:a="http://schemas.openxmlformats.org/drawingml/2006/main">
               <a:ext uri="{FF2B5EF4-FFF2-40B4-BE49-F238E27FC236}">
-                <a16:creationId xmlns:a16="http://schemas.microsoft.com/office/drawing/2014/main" id="{1402C814-783C-4990-AAAD-E0AB371F0EC2}"/>
+                <a16:creationId xmlns:a16="http://schemas.microsoft.com/office/drawing/2014/main" id="{382DC030-A32B-4182-B980-1C93264562A2}"/>
               </a:ext>
             </a:extLst>
           </p:cNvPr>
@@ -4410,7 +4410,7 @@
                   <a:srgbClr val="6A767C"/>
                 </a:solidFill>
               </a:rPr>
-              <a:t>흐름: LLM-wiki 운영 -&gt; subregion 질문 -&gt; benchmark -&gt; readout-first rule</a:t>
+              <a:t>구성: LLM-wiki 운영 -&gt; subregion 기준 -&gt; benchmark 축 -&gt; readout-first rule</a:t>
             </a:r>
           </a:p>
         </p:txBody>
@@ -4418,7 +4418,7 @@
     </p:spTree>
     <p:extLst>
       <p:ext uri="{BB962C8B-B14F-4D97-AF65-F5344CB8AC3E}">
-        <p14:creationId xmlns:p14="http://schemas.microsoft.com/office/powerpoint/2010/main" val="990912654"/>
+        <p14:creationId xmlns:p14="http://schemas.microsoft.com/office/powerpoint/2010/main" val="572877768"/>
       </p:ext>
     </p:extLst>
   </p:cSld>
@@ -4449,7 +4449,7 @@
           <p:cNvPr id="1" name="Slide Number Placeholder 5">
             <a:extLst xmlns:a="http://schemas.openxmlformats.org/drawingml/2006/main">
               <a:ext uri="{FF2B5EF4-FFF2-40B4-BE49-F238E27FC236}">
-                <a16:creationId xmlns:a16="http://schemas.microsoft.com/office/drawing/2014/main" id="{EDD0F201-AE24-4D54-ACE2-5F86EBC94A0A}"/>
+                <a16:creationId xmlns:a16="http://schemas.microsoft.com/office/drawing/2014/main" id="{316B49F2-843A-4E0C-BBC2-0E3A47804521}"/>
               </a:ext>
             </a:extLst>
           </p:cNvPr>
@@ -4485,7 +4485,7 @@
           <p:nvPr/>
         </p:nvPicPr>
         <p:blipFill>
-          <a:blip xmlns:r="http://schemas.openxmlformats.org/officeDocument/2006/relationships" xmlns:a="http://schemas.openxmlformats.org/drawingml/2006/main" r:embed="R8f4c2bb4e8704639"/>
+          <a:blip xmlns:r="http://schemas.openxmlformats.org/officeDocument/2006/relationships" xmlns:a="http://schemas.openxmlformats.org/drawingml/2006/main" r:embed="Rcd83ae1958854270"/>
           <a:srcRect xmlns:a="http://schemas.openxmlformats.org/drawingml/2006/main" l="0" t="21875" r="0" b="21875"/>
           <a:stretch xmlns:a="http://schemas.openxmlformats.org/drawingml/2006/main">
             <a:fillRect l="0" t="0" r="0" b="0"/>
@@ -4506,7 +4506,7 @@
           <p:cNvPr id="3" name="">
             <a:extLst xmlns:a="http://schemas.openxmlformats.org/drawingml/2006/main">
               <a:ext uri="{FF2B5EF4-FFF2-40B4-BE49-F238E27FC236}">
-                <a16:creationId xmlns:a16="http://schemas.microsoft.com/office/drawing/2014/main" id="{5C2C186F-F9DE-42F8-8C91-6F2F19CA8E9E}"/>
+                <a16:creationId xmlns:a16="http://schemas.microsoft.com/office/drawing/2014/main" id="{59DE5CD8-E889-454A-8C1B-B2176321AEAF}"/>
               </a:ext>
             </a:extLst>
           </p:cNvPr>
@@ -4541,7 +4541,7 @@
           <p:cNvPr id="4" name="">
             <a:extLst xmlns:a="http://schemas.openxmlformats.org/drawingml/2006/main">
               <a:ext uri="{FF2B5EF4-FFF2-40B4-BE49-F238E27FC236}">
-                <a16:creationId xmlns:a16="http://schemas.microsoft.com/office/drawing/2014/main" id="{14FB3FF9-3CA9-433F-A6C4-291F83CFB6A0}"/>
+                <a16:creationId xmlns:a16="http://schemas.microsoft.com/office/drawing/2014/main" id="{B5581904-FD76-42C5-9B2C-8AD816B86568}"/>
               </a:ext>
             </a:extLst>
           </p:cNvPr>
@@ -4576,7 +4576,7 @@
           <p:cNvPr id="5" name="">
             <a:extLst xmlns:a="http://schemas.openxmlformats.org/drawingml/2006/main">
               <a:ext uri="{FF2B5EF4-FFF2-40B4-BE49-F238E27FC236}">
-                <a16:creationId xmlns:a16="http://schemas.microsoft.com/office/drawing/2014/main" id="{A40C7813-88F2-45BA-80CB-661BDAFBF491}"/>
+                <a16:creationId xmlns:a16="http://schemas.microsoft.com/office/drawing/2014/main" id="{7AD5C0D5-4298-4A7C-99BC-07E59AFDAA5D}"/>
               </a:ext>
             </a:extLst>
           </p:cNvPr>
@@ -4613,7 +4613,7 @@
           <p:cNvPr id="6" name="">
             <a:extLst xmlns:a="http://schemas.openxmlformats.org/drawingml/2006/main">
               <a:ext uri="{FF2B5EF4-FFF2-40B4-BE49-F238E27FC236}">
-                <a16:creationId xmlns:a16="http://schemas.microsoft.com/office/drawing/2014/main" id="{758BEC56-B363-4EF5-AB03-9B09621C8966}"/>
+                <a16:creationId xmlns:a16="http://schemas.microsoft.com/office/drawing/2014/main" id="{28BD9F64-DB4F-4FEC-8993-F7F3F3AFDFEA}"/>
               </a:ext>
             </a:extLst>
           </p:cNvPr>
@@ -4650,7 +4650,7 @@
           <p:cNvPr id="7" name="">
             <a:extLst xmlns:a="http://schemas.openxmlformats.org/drawingml/2006/main">
               <a:ext uri="{FF2B5EF4-FFF2-40B4-BE49-F238E27FC236}">
-                <a16:creationId xmlns:a16="http://schemas.microsoft.com/office/drawing/2014/main" id="{748C9A2B-3A37-42A4-B6C9-F8999F1B6555}"/>
+                <a16:creationId xmlns:a16="http://schemas.microsoft.com/office/drawing/2014/main" id="{3E1F2529-81E3-4F74-83B2-11DB43D07838}"/>
               </a:ext>
             </a:extLst>
           </p:cNvPr>
@@ -4687,7 +4687,7 @@
           <p:cNvPr id="8" name="">
             <a:extLst xmlns:a="http://schemas.openxmlformats.org/drawingml/2006/main">
               <a:ext uri="{FF2B5EF4-FFF2-40B4-BE49-F238E27FC236}">
-                <a16:creationId xmlns:a16="http://schemas.microsoft.com/office/drawing/2014/main" id="{92A3C4F6-E031-4D94-AE75-4A0FECF6358A}"/>
+                <a16:creationId xmlns:a16="http://schemas.microsoft.com/office/drawing/2014/main" id="{3AFD9F49-77F1-48BC-BFB3-26317B90AEF6}"/>
               </a:ext>
             </a:extLst>
           </p:cNvPr>
@@ -4724,7 +4724,7 @@
           <p:cNvPr id="9" name="">
             <a:extLst xmlns:a="http://schemas.openxmlformats.org/drawingml/2006/main">
               <a:ext uri="{FF2B5EF4-FFF2-40B4-BE49-F238E27FC236}">
-                <a16:creationId xmlns:a16="http://schemas.microsoft.com/office/drawing/2014/main" id="{D539E2C8-82B2-4CC6-B021-6DFD15A61C0E}"/>
+                <a16:creationId xmlns:a16="http://schemas.microsoft.com/office/drawing/2014/main" id="{6884F111-8BF3-47C2-8FE7-F2E597F82D29}"/>
               </a:ext>
             </a:extLst>
           </p:cNvPr>
@@ -4782,7 +4782,7 @@
           <p:cNvPr id="10" name="">
             <a:extLst xmlns:a="http://schemas.openxmlformats.org/drawingml/2006/main">
               <a:ext uri="{FF2B5EF4-FFF2-40B4-BE49-F238E27FC236}">
-                <a16:creationId xmlns:a16="http://schemas.microsoft.com/office/drawing/2014/main" id="{9ED56AF3-1664-448A-AE88-BBC6B224C70A}"/>
+                <a16:creationId xmlns:a16="http://schemas.microsoft.com/office/drawing/2014/main" id="{46C809DA-924B-46F8-876F-56391365F9E9}"/>
               </a:ext>
             </a:extLst>
           </p:cNvPr>
@@ -4840,7 +4840,7 @@
           <p:cNvPr id="11" name="">
             <a:extLst xmlns:a="http://schemas.openxmlformats.org/drawingml/2006/main">
               <a:ext uri="{FF2B5EF4-FFF2-40B4-BE49-F238E27FC236}">
-                <a16:creationId xmlns:a16="http://schemas.microsoft.com/office/drawing/2014/main" id="{DEE0FBE9-CFCC-4D74-A21B-2DFDE47F5837}"/>
+                <a16:creationId xmlns:a16="http://schemas.microsoft.com/office/drawing/2014/main" id="{8FEE0121-43BD-4083-AEC1-20ED5C085838}"/>
               </a:ext>
             </a:extLst>
           </p:cNvPr>
@@ -4875,7 +4875,7 @@
           <p:cNvPr id="12" name="">
             <a:extLst xmlns:a="http://schemas.openxmlformats.org/drawingml/2006/main">
               <a:ext uri="{FF2B5EF4-FFF2-40B4-BE49-F238E27FC236}">
-                <a16:creationId xmlns:a16="http://schemas.microsoft.com/office/drawing/2014/main" id="{E03007F1-C921-491A-9600-937599A1D3CB}"/>
+                <a16:creationId xmlns:a16="http://schemas.microsoft.com/office/drawing/2014/main" id="{6E505462-CB71-4E4D-8B9A-8FB57D7D6CD3}"/>
               </a:ext>
             </a:extLst>
           </p:cNvPr>
@@ -4908,7 +4908,7 @@
           <p:cNvPr id="13" name="">
             <a:extLst xmlns:a="http://schemas.openxmlformats.org/drawingml/2006/main">
               <a:ext uri="{FF2B5EF4-FFF2-40B4-BE49-F238E27FC236}">
-                <a16:creationId xmlns:a16="http://schemas.microsoft.com/office/drawing/2014/main" id="{4EB4FA04-3688-4227-8E1D-7352DDCAE377}"/>
+                <a16:creationId xmlns:a16="http://schemas.microsoft.com/office/drawing/2014/main" id="{3ACF54BD-10B2-4B39-A454-0723F76DE916}"/>
               </a:ext>
             </a:extLst>
           </p:cNvPr>
@@ -4956,7 +4956,7 @@
                   <a:srgbClr val="132024"/>
                 </a:solidFill>
               </a:rPr>
-              <a:t>그래서 protocol 비교는</a:t>
+              <a:t>Protocol 비교의</a:t>
             </a:r>
           </a:p>
           <a:p xmlns:a="http://schemas.openxmlformats.org/drawingml/2006/main">
@@ -4973,7 +4973,7 @@
                   <a:srgbClr val="132024"/>
                 </a:solidFill>
               </a:rPr>
-              <a:t>5개의 축으로 나뉘었다</a:t>
+              <a:t>5개 축</a:t>
             </a:r>
           </a:p>
         </p:txBody>
@@ -4983,7 +4983,7 @@
           <p:cNvPr id="14" name="">
             <a:extLst xmlns:a="http://schemas.openxmlformats.org/drawingml/2006/main">
               <a:ext uri="{FF2B5EF4-FFF2-40B4-BE49-F238E27FC236}">
-                <a16:creationId xmlns:a16="http://schemas.microsoft.com/office/drawing/2014/main" id="{0EDA75AF-3829-4616-860D-5765A1F48254}"/>
+                <a16:creationId xmlns:a16="http://schemas.microsoft.com/office/drawing/2014/main" id="{5F0F075C-1DFC-473C-B05D-50700AAA95B6}"/>
               </a:ext>
             </a:extLst>
           </p:cNvPr>
@@ -5020,7 +5020,7 @@
           <p:cNvPr id="15" name="">
             <a:extLst xmlns:a="http://schemas.openxmlformats.org/drawingml/2006/main">
               <a:ext uri="{FF2B5EF4-FFF2-40B4-BE49-F238E27FC236}">
-                <a16:creationId xmlns:a16="http://schemas.microsoft.com/office/drawing/2014/main" id="{1755CA7D-AE0A-46F4-A425-D7DA0C6580AA}"/>
+                <a16:creationId xmlns:a16="http://schemas.microsoft.com/office/drawing/2014/main" id="{034533C1-5D9A-4347-8DD5-A44572E284BE}"/>
               </a:ext>
             </a:extLst>
           </p:cNvPr>
@@ -5055,7 +5055,7 @@
           <p:cNvPr id="16" name="">
             <a:extLst xmlns:a="http://schemas.openxmlformats.org/drawingml/2006/main">
               <a:ext uri="{FF2B5EF4-FFF2-40B4-BE49-F238E27FC236}">
-                <a16:creationId xmlns:a16="http://schemas.microsoft.com/office/drawing/2014/main" id="{31EEE965-81CD-4771-93E2-D772F8A78BEF}"/>
+                <a16:creationId xmlns:a16="http://schemas.microsoft.com/office/drawing/2014/main" id="{DDF475E0-E110-43DA-AE8C-DBC3D3E5B62B}"/>
               </a:ext>
             </a:extLst>
           </p:cNvPr>
@@ -5113,7 +5113,7 @@
           <p:cNvPr id="17" name="">
             <a:extLst xmlns:a="http://schemas.openxmlformats.org/drawingml/2006/main">
               <a:ext uri="{FF2B5EF4-FFF2-40B4-BE49-F238E27FC236}">
-                <a16:creationId xmlns:a16="http://schemas.microsoft.com/office/drawing/2014/main" id="{2137693F-FA99-47FA-A238-6E49D1014AA5}"/>
+                <a16:creationId xmlns:a16="http://schemas.microsoft.com/office/drawing/2014/main" id="{31E97947-B1D4-45D6-9F1A-29024CBCE96F}"/>
               </a:ext>
             </a:extLst>
           </p:cNvPr>
@@ -5161,7 +5161,7 @@
                   <a:srgbClr val="132024"/>
                 </a:solidFill>
               </a:rPr>
-              <a:t>어떤 brain region 또는 subregion을</a:t>
+              <a:t>생성되는 brain region 또는</a:t>
             </a:r>
           </a:p>
           <a:p xmlns:a="http://schemas.openxmlformats.org/drawingml/2006/main">
@@ -5178,7 +5178,7 @@
                   <a:srgbClr val="132024"/>
                 </a:solidFill>
               </a:rPr>
-              <a:t>만들고 있는가? anchor: Q1, Sloan,</a:t>
+              <a:t>subregion의 정체성 anchor: Q1,</a:t>
             </a:r>
           </a:p>
           <a:p xmlns:a="http://schemas.openxmlformats.org/drawingml/2006/main">
@@ -5195,7 +5195,7 @@
                   <a:srgbClr val="132024"/>
                 </a:solidFill>
               </a:rPr>
-              <a:t>Atamian</a:t>
+              <a:t>Sloan, Atamian</a:t>
             </a:r>
           </a:p>
         </p:txBody>
@@ -5205,7 +5205,7 @@
           <p:cNvPr id="18" name="">
             <a:extLst xmlns:a="http://schemas.openxmlformats.org/drawingml/2006/main">
               <a:ext uri="{FF2B5EF4-FFF2-40B4-BE49-F238E27FC236}">
-                <a16:creationId xmlns:a16="http://schemas.microsoft.com/office/drawing/2014/main" id="{A0077404-7313-4C8D-9372-6D2A48286F91}"/>
+                <a16:creationId xmlns:a16="http://schemas.microsoft.com/office/drawing/2014/main" id="{ABB75908-0C02-43BC-8046-156A3E456D86}"/>
               </a:ext>
             </a:extLst>
           </p:cNvPr>
@@ -5242,7 +5242,7 @@
           <p:cNvPr id="19" name="">
             <a:extLst xmlns:a="http://schemas.openxmlformats.org/drawingml/2006/main">
               <a:ext uri="{FF2B5EF4-FFF2-40B4-BE49-F238E27FC236}">
-                <a16:creationId xmlns:a16="http://schemas.microsoft.com/office/drawing/2014/main" id="{33FE8ED9-AC90-4133-BE9E-09C6FFE19B7E}"/>
+                <a16:creationId xmlns:a16="http://schemas.microsoft.com/office/drawing/2014/main" id="{376EC645-AF4F-4A05-865F-AC773F18EFFE}"/>
               </a:ext>
             </a:extLst>
           </p:cNvPr>
@@ -5277,7 +5277,7 @@
           <p:cNvPr id="20" name="">
             <a:extLst xmlns:a="http://schemas.openxmlformats.org/drawingml/2006/main">
               <a:ext uri="{FF2B5EF4-FFF2-40B4-BE49-F238E27FC236}">
-                <a16:creationId xmlns:a16="http://schemas.microsoft.com/office/drawing/2014/main" id="{4449913B-D844-41DC-859E-436E723535CF}"/>
+                <a16:creationId xmlns:a16="http://schemas.microsoft.com/office/drawing/2014/main" id="{FA0B2714-3403-4A06-A489-A0B16DD37467}"/>
               </a:ext>
             </a:extLst>
           </p:cNvPr>
@@ -5335,7 +5335,7 @@
           <p:cNvPr id="21" name="">
             <a:extLst xmlns:a="http://schemas.openxmlformats.org/drawingml/2006/main">
               <a:ext uri="{FF2B5EF4-FFF2-40B4-BE49-F238E27FC236}">
-                <a16:creationId xmlns:a16="http://schemas.microsoft.com/office/drawing/2014/main" id="{D25CF05D-56D1-463C-965C-F32D592C873D}"/>
+                <a16:creationId xmlns:a16="http://schemas.microsoft.com/office/drawing/2014/main" id="{023CE000-70B3-44EC-A406-4C6607746614}"/>
               </a:ext>
             </a:extLst>
           </p:cNvPr>
@@ -5383,7 +5383,7 @@
                   <a:srgbClr val="132024"/>
                 </a:solidFill>
               </a:rPr>
-              <a:t>같은 protocol 안에서 cell</a:t>
+              <a:t>동일 protocol 내 cell</a:t>
             </a:r>
           </a:p>
           <a:p xmlns:a="http://schemas.openxmlformats.org/drawingml/2006/main">
@@ -5400,7 +5400,7 @@
                   <a:srgbClr val="132024"/>
                 </a:solidFill>
               </a:rPr>
-              <a:t>composition variance가 얼마나</a:t>
+              <a:t>composition variance의 수준</a:t>
             </a:r>
           </a:p>
           <a:p xmlns:a="http://schemas.openxmlformats.org/drawingml/2006/main">
@@ -5417,7 +5417,7 @@
                   <a:srgbClr val="132024"/>
                 </a:solidFill>
               </a:rPr>
-              <a:t>낮은가? anchor: Velasco, Yoon</a:t>
+              <a:t>anchor: Velasco, Yoon</a:t>
             </a:r>
           </a:p>
         </p:txBody>
@@ -5427,7 +5427,7 @@
           <p:cNvPr id="22" name="">
             <a:extLst xmlns:a="http://schemas.openxmlformats.org/drawingml/2006/main">
               <a:ext uri="{FF2B5EF4-FFF2-40B4-BE49-F238E27FC236}">
-                <a16:creationId xmlns:a16="http://schemas.microsoft.com/office/drawing/2014/main" id="{A6556331-2E40-4C3A-8499-AF333B8E21B0}"/>
+                <a16:creationId xmlns:a16="http://schemas.microsoft.com/office/drawing/2014/main" id="{0868BB02-FB2D-428A-BA56-4A4E42FAF988}"/>
               </a:ext>
             </a:extLst>
           </p:cNvPr>
@@ -5464,7 +5464,7 @@
           <p:cNvPr id="23" name="">
             <a:extLst xmlns:a="http://schemas.openxmlformats.org/drawingml/2006/main">
               <a:ext uri="{FF2B5EF4-FFF2-40B4-BE49-F238E27FC236}">
-                <a16:creationId xmlns:a16="http://schemas.microsoft.com/office/drawing/2014/main" id="{E28781FB-985D-43E6-9322-5C92147DD588}"/>
+                <a16:creationId xmlns:a16="http://schemas.microsoft.com/office/drawing/2014/main" id="{353ABF01-7DB0-4510-959C-F142BFDA8F42}"/>
               </a:ext>
             </a:extLst>
           </p:cNvPr>
@@ -5499,7 +5499,7 @@
           <p:cNvPr id="24" name="">
             <a:extLst xmlns:a="http://schemas.openxmlformats.org/drawingml/2006/main">
               <a:ext uri="{FF2B5EF4-FFF2-40B4-BE49-F238E27FC236}">
-                <a16:creationId xmlns:a16="http://schemas.microsoft.com/office/drawing/2014/main" id="{FDFCD9D8-A498-4F25-9E68-1AAF9D115186}"/>
+                <a16:creationId xmlns:a16="http://schemas.microsoft.com/office/drawing/2014/main" id="{E5FB126D-C91E-441F-913F-1B76AFF25945}"/>
               </a:ext>
             </a:extLst>
           </p:cNvPr>
@@ -5557,7 +5557,7 @@
           <p:cNvPr id="25" name="">
             <a:extLst xmlns:a="http://schemas.openxmlformats.org/drawingml/2006/main">
               <a:ext uri="{FF2B5EF4-FFF2-40B4-BE49-F238E27FC236}">
-                <a16:creationId xmlns:a16="http://schemas.microsoft.com/office/drawing/2014/main" id="{D15D1A78-A30E-4AB6-90F9-EADAAC5A9A4E}"/>
+                <a16:creationId xmlns:a16="http://schemas.microsoft.com/office/drawing/2014/main" id="{1CFB6C9F-2CEA-4312-8203-4D50BF7F97C9}"/>
               </a:ext>
             </a:extLst>
           </p:cNvPr>
@@ -5605,7 +5605,7 @@
                   <a:srgbClr val="132024"/>
                 </a:solidFill>
               </a:rPr>
-              <a:t>primary fetal brain과의</a:t>
+              <a:t>primary fetal brain 대비 분자적</a:t>
             </a:r>
           </a:p>
           <a:p xmlns:a="http://schemas.openxmlformats.org/drawingml/2006/main">
@@ -5622,24 +5622,7 @@
                   <a:srgbClr val="132024"/>
                 </a:solidFill>
               </a:rPr>
-              <a:t>distance를 어떻게 볼 것인가? anchor:</a:t>
-            </a:r>
-          </a:p>
-          <a:p xmlns:a="http://schemas.openxmlformats.org/drawingml/2006/main">
-            <a:pPr algn="l">
-              <a:defRPr sz="1200" b="0">
-                <a:solidFill>
-                  <a:srgbClr val="132024"/>
-                </a:solidFill>
-              </a:defRPr>
-            </a:pPr>
-            <a:r>
-              <a:rPr sz="1200" b="0">
-                <a:solidFill>
-                  <a:srgbClr val="132024"/>
-                </a:solidFill>
-              </a:rPr>
-              <a:t>Bhaduri, He</a:t>
+              <a:t>거리의 평가 anchor: Bhaduri, He</a:t>
             </a:r>
           </a:p>
         </p:txBody>
@@ -5649,7 +5632,7 @@
           <p:cNvPr id="26" name="">
             <a:extLst xmlns:a="http://schemas.openxmlformats.org/drawingml/2006/main">
               <a:ext uri="{FF2B5EF4-FFF2-40B4-BE49-F238E27FC236}">
-                <a16:creationId xmlns:a16="http://schemas.microsoft.com/office/drawing/2014/main" id="{DD2218AF-D81E-44EF-AEF6-EC36B6C30E89}"/>
+                <a16:creationId xmlns:a16="http://schemas.microsoft.com/office/drawing/2014/main" id="{940F5124-829A-418F-9D33-3F53C1170F9B}"/>
               </a:ext>
             </a:extLst>
           </p:cNvPr>
@@ -5686,7 +5669,7 @@
           <p:cNvPr id="27" name="">
             <a:extLst xmlns:a="http://schemas.openxmlformats.org/drawingml/2006/main">
               <a:ext uri="{FF2B5EF4-FFF2-40B4-BE49-F238E27FC236}">
-                <a16:creationId xmlns:a16="http://schemas.microsoft.com/office/drawing/2014/main" id="{FCA40C32-52CE-42F1-B8E2-570A633D06C0}"/>
+                <a16:creationId xmlns:a16="http://schemas.microsoft.com/office/drawing/2014/main" id="{F78B61C0-FBAE-49DC-9606-A92A17C64555}"/>
               </a:ext>
             </a:extLst>
           </p:cNvPr>
@@ -5721,7 +5704,7 @@
           <p:cNvPr id="28" name="">
             <a:extLst xmlns:a="http://schemas.openxmlformats.org/drawingml/2006/main">
               <a:ext uri="{FF2B5EF4-FFF2-40B4-BE49-F238E27FC236}">
-                <a16:creationId xmlns:a16="http://schemas.microsoft.com/office/drawing/2014/main" id="{8B9F829B-E818-4906-8882-0E896D88DE4C}"/>
+                <a16:creationId xmlns:a16="http://schemas.microsoft.com/office/drawing/2014/main" id="{4438CEBF-C3ED-457A-9038-A4EA07BB9C63}"/>
               </a:ext>
             </a:extLst>
           </p:cNvPr>
@@ -5779,7 +5762,7 @@
           <p:cNvPr id="29" name="">
             <a:extLst xmlns:a="http://schemas.openxmlformats.org/drawingml/2006/main">
               <a:ext uri="{FF2B5EF4-FFF2-40B4-BE49-F238E27FC236}">
-                <a16:creationId xmlns:a16="http://schemas.microsoft.com/office/drawing/2014/main" id="{EE22054F-CF0D-487D-8920-78CF8767E111}"/>
+                <a16:creationId xmlns:a16="http://schemas.microsoft.com/office/drawing/2014/main" id="{FDDD3C32-7B6B-4E40-8CF7-D185FF937C27}"/>
               </a:ext>
             </a:extLst>
           </p:cNvPr>
@@ -5827,7 +5810,7 @@
                   <a:srgbClr val="132024"/>
                 </a:solidFill>
               </a:rPr>
-              <a:t>culture day를 developmental stage로 어떻게</a:t>
+              <a:t>culture day와 developmental stage 간 대응</a:t>
             </a:r>
           </a:p>
           <a:p xmlns:a="http://schemas.openxmlformats.org/drawingml/2006/main">
@@ -5844,7 +5827,7 @@
                   <a:srgbClr val="132024"/>
                 </a:solidFill>
               </a:rPr>
-              <a:t>읽을 것인가? anchor: Kanton, Giandomenico</a:t>
+              <a:t>관계 anchor: Kanton, Giandomenico</a:t>
             </a:r>
           </a:p>
         </p:txBody>
@@ -5854,7 +5837,7 @@
           <p:cNvPr id="30" name="">
             <a:extLst xmlns:a="http://schemas.openxmlformats.org/drawingml/2006/main">
               <a:ext uri="{FF2B5EF4-FFF2-40B4-BE49-F238E27FC236}">
-                <a16:creationId xmlns:a16="http://schemas.microsoft.com/office/drawing/2014/main" id="{23CF21A8-F882-4B2E-8914-FB8A298C430B}"/>
+                <a16:creationId xmlns:a16="http://schemas.microsoft.com/office/drawing/2014/main" id="{7607605B-C849-4D8A-8A9B-707F3928CBFF}"/>
               </a:ext>
             </a:extLst>
           </p:cNvPr>
@@ -5891,7 +5874,7 @@
           <p:cNvPr id="31" name="">
             <a:extLst xmlns:a="http://schemas.openxmlformats.org/drawingml/2006/main">
               <a:ext uri="{FF2B5EF4-FFF2-40B4-BE49-F238E27FC236}">
-                <a16:creationId xmlns:a16="http://schemas.microsoft.com/office/drawing/2014/main" id="{8DA593CD-B4B2-460B-8FE0-9249E312E80F}"/>
+                <a16:creationId xmlns:a16="http://schemas.microsoft.com/office/drawing/2014/main" id="{BCC8A50A-99FE-47AC-8073-1E8528B658C2}"/>
               </a:ext>
             </a:extLst>
           </p:cNvPr>
@@ -5926,7 +5909,7 @@
           <p:cNvPr id="32" name="">
             <a:extLst xmlns:a="http://schemas.openxmlformats.org/drawingml/2006/main">
               <a:ext uri="{FF2B5EF4-FFF2-40B4-BE49-F238E27FC236}">
-                <a16:creationId xmlns:a16="http://schemas.microsoft.com/office/drawing/2014/main" id="{FE2DDF3D-B94E-4971-9F36-40993C1EE0D8}"/>
+                <a16:creationId xmlns:a16="http://schemas.microsoft.com/office/drawing/2014/main" id="{D306DA5C-783B-4E1A-9FA9-A057A903349D}"/>
               </a:ext>
             </a:extLst>
           </p:cNvPr>
@@ -5984,7 +5967,7 @@
           <p:cNvPr id="33" name="">
             <a:extLst xmlns:a="http://schemas.openxmlformats.org/drawingml/2006/main">
               <a:ext uri="{FF2B5EF4-FFF2-40B4-BE49-F238E27FC236}">
-                <a16:creationId xmlns:a16="http://schemas.microsoft.com/office/drawing/2014/main" id="{C3ED95E3-68B2-45A3-8A76-92AA01933ECE}"/>
+                <a16:creationId xmlns:a16="http://schemas.microsoft.com/office/drawing/2014/main" id="{A3A68205-871B-41B6-B295-C7FD766338BC}"/>
               </a:ext>
             </a:extLst>
           </p:cNvPr>
@@ -6032,7 +6015,7 @@
                   <a:srgbClr val="132024"/>
                 </a:solidFill>
               </a:rPr>
-              <a:t>여러 protocol을 같은 reference atlas 좌표계에서</a:t>
+              <a:t>reference atlas 좌표계에서의 cross-protocol</a:t>
             </a:r>
           </a:p>
           <a:p xmlns:a="http://schemas.openxmlformats.org/drawingml/2006/main">
@@ -6049,7 +6032,7 @@
                   <a:srgbClr val="132024"/>
                 </a:solidFill>
               </a:rPr>
-              <a:t>어떻게 정렬할 것인가? anchor: He 2024</a:t>
+              <a:t>정렬 anchor: He 2024</a:t>
             </a:r>
           </a:p>
         </p:txBody>
@@ -6059,7 +6042,7 @@
           <p:cNvPr id="34" name="">
             <a:extLst xmlns:a="http://schemas.openxmlformats.org/drawingml/2006/main">
               <a:ext uri="{FF2B5EF4-FFF2-40B4-BE49-F238E27FC236}">
-                <a16:creationId xmlns:a16="http://schemas.microsoft.com/office/drawing/2014/main" id="{24F6C797-F103-4B04-8DC4-FDBC99A8141D}"/>
+                <a16:creationId xmlns:a16="http://schemas.microsoft.com/office/drawing/2014/main" id="{360B1932-3FA1-4492-A06E-3CE0D851457B}"/>
               </a:ext>
             </a:extLst>
           </p:cNvPr>
@@ -6094,7 +6077,7 @@
           <p:cNvPr id="35" name="">
             <a:extLst xmlns:a="http://schemas.openxmlformats.org/drawingml/2006/main">
               <a:ext uri="{FF2B5EF4-FFF2-40B4-BE49-F238E27FC236}">
-                <a16:creationId xmlns:a16="http://schemas.microsoft.com/office/drawing/2014/main" id="{75AF7A64-8761-414F-AB0A-0D98BBF59EF9}"/>
+                <a16:creationId xmlns:a16="http://schemas.microsoft.com/office/drawing/2014/main" id="{EE04611D-5F84-4EC5-9B49-AA6B5AB63E28}"/>
               </a:ext>
             </a:extLst>
           </p:cNvPr>
@@ -6129,7 +6112,7 @@
           <p:cNvPr id="36" name="">
             <a:extLst xmlns:a="http://schemas.openxmlformats.org/drawingml/2006/main">
               <a:ext uri="{FF2B5EF4-FFF2-40B4-BE49-F238E27FC236}">
-                <a16:creationId xmlns:a16="http://schemas.microsoft.com/office/drawing/2014/main" id="{0C5DCDBE-33DA-4829-A703-9FDD447C90A7}"/>
+                <a16:creationId xmlns:a16="http://schemas.microsoft.com/office/drawing/2014/main" id="{74E33842-603B-47B4-98F3-901AFE395925}"/>
               </a:ext>
             </a:extLst>
           </p:cNvPr>
@@ -6177,7 +6160,7 @@
                   <a:srgbClr val="132024"/>
                 </a:solidFill>
               </a:rPr>
-              <a:t>핵심 메시지: reproducibility와 fidelity는 같은 말이 아니다.</a:t>
+              <a:t>핵심 메시지: reproducibility와 fidelity는 동일 지표가 아니다.</a:t>
             </a:r>
           </a:p>
         </p:txBody>
@@ -6187,7 +6170,7 @@
           <p:cNvPr id="37" name="">
             <a:extLst xmlns:a="http://schemas.openxmlformats.org/drawingml/2006/main">
               <a:ext uri="{FF2B5EF4-FFF2-40B4-BE49-F238E27FC236}">
-                <a16:creationId xmlns:a16="http://schemas.microsoft.com/office/drawing/2014/main" id="{2FCB8F7B-0B04-4383-94D5-7565C241AEAF}"/>
+                <a16:creationId xmlns:a16="http://schemas.microsoft.com/office/drawing/2014/main" id="{E24630F9-6797-4336-9C54-94C02FAEBF3B}"/>
               </a:ext>
             </a:extLst>
           </p:cNvPr>
@@ -6235,7 +6218,7 @@
                   <a:srgbClr val="6A767C"/>
                 </a:solidFill>
               </a:rPr>
-              <a:t>5축은 서로 다른 benchmark question이며, 한 축의 강점이 다른 축의 답을 대신하지 않는다.</a:t>
+              <a:t>5축은 상호 독립적인 benchmark question이며, 한 축의 강점이 다른 축의 답을 대체하지 않는다.</a:t>
             </a:r>
           </a:p>
         </p:txBody>
@@ -6243,7 +6226,7 @@
     </p:spTree>
     <p:extLst>
       <p:ext uri="{BB962C8B-B14F-4D97-AF65-F5344CB8AC3E}">
-        <p14:creationId xmlns:p14="http://schemas.microsoft.com/office/powerpoint/2010/main" val="1673631592"/>
+        <p14:creationId xmlns:p14="http://schemas.microsoft.com/office/powerpoint/2010/main" val="494538535"/>
       </p:ext>
     </p:extLst>
   </p:cSld>
@@ -6274,7 +6257,7 @@
           <p:cNvPr id="1" name="Slide Number Placeholder 5">
             <a:extLst xmlns:a="http://schemas.openxmlformats.org/drawingml/2006/main">
               <a:ext uri="{FF2B5EF4-FFF2-40B4-BE49-F238E27FC236}">
-                <a16:creationId xmlns:a16="http://schemas.microsoft.com/office/drawing/2014/main" id="{EDD0F201-AE24-4D54-ACE2-5F86EBC94A0A}"/>
+                <a16:creationId xmlns:a16="http://schemas.microsoft.com/office/drawing/2014/main" id="{316B49F2-843A-4E0C-BBC2-0E3A47804521}"/>
               </a:ext>
             </a:extLst>
           </p:cNvPr>
@@ -6310,7 +6293,7 @@
           <p:nvPr/>
         </p:nvPicPr>
         <p:blipFill>
-          <a:blip xmlns:r="http://schemas.openxmlformats.org/officeDocument/2006/relationships" xmlns:a="http://schemas.openxmlformats.org/drawingml/2006/main" r:embed="Rcd428b96d8954bce"/>
+          <a:blip xmlns:r="http://schemas.openxmlformats.org/officeDocument/2006/relationships" xmlns:a="http://schemas.openxmlformats.org/drawingml/2006/main" r:embed="R7b2e90d100df4277"/>
           <a:srcRect xmlns:a="http://schemas.openxmlformats.org/drawingml/2006/main" l="0" t="21875" r="0" b="21875"/>
           <a:stretch xmlns:a="http://schemas.openxmlformats.org/drawingml/2006/main">
             <a:fillRect l="0" t="0" r="0" b="0"/>
@@ -6331,7 +6314,7 @@
           <p:cNvPr id="3" name="">
             <a:extLst xmlns:a="http://schemas.openxmlformats.org/drawingml/2006/main">
               <a:ext uri="{FF2B5EF4-FFF2-40B4-BE49-F238E27FC236}">
-                <a16:creationId xmlns:a16="http://schemas.microsoft.com/office/drawing/2014/main" id="{D9C35D0D-FFB3-4141-98B8-7E0029200331}"/>
+                <a16:creationId xmlns:a16="http://schemas.microsoft.com/office/drawing/2014/main" id="{1528C9C6-D0B9-41F9-84E8-287138C79CC8}"/>
               </a:ext>
             </a:extLst>
           </p:cNvPr>
@@ -6366,7 +6349,7 @@
           <p:cNvPr id="4" name="">
             <a:extLst xmlns:a="http://schemas.openxmlformats.org/drawingml/2006/main">
               <a:ext uri="{FF2B5EF4-FFF2-40B4-BE49-F238E27FC236}">
-                <a16:creationId xmlns:a16="http://schemas.microsoft.com/office/drawing/2014/main" id="{B4DEDF91-5A88-44E0-BC52-DF02DEFBCEDA}"/>
+                <a16:creationId xmlns:a16="http://schemas.microsoft.com/office/drawing/2014/main" id="{80005BFC-CC3F-4F25-8BA4-21A50ED7EC01}"/>
               </a:ext>
             </a:extLst>
           </p:cNvPr>
@@ -6401,7 +6384,7 @@
           <p:cNvPr id="5" name="">
             <a:extLst xmlns:a="http://schemas.openxmlformats.org/drawingml/2006/main">
               <a:ext uri="{FF2B5EF4-FFF2-40B4-BE49-F238E27FC236}">
-                <a16:creationId xmlns:a16="http://schemas.microsoft.com/office/drawing/2014/main" id="{28310831-8EA0-442B-B14A-3ED8D857FF35}"/>
+                <a16:creationId xmlns:a16="http://schemas.microsoft.com/office/drawing/2014/main" id="{F854C3FD-2D83-4D67-906C-10FAFAA1ABA6}"/>
               </a:ext>
             </a:extLst>
           </p:cNvPr>
@@ -6438,7 +6421,7 @@
           <p:cNvPr id="6" name="">
             <a:extLst xmlns:a="http://schemas.openxmlformats.org/drawingml/2006/main">
               <a:ext uri="{FF2B5EF4-FFF2-40B4-BE49-F238E27FC236}">
-                <a16:creationId xmlns:a16="http://schemas.microsoft.com/office/drawing/2014/main" id="{CB552EE3-22DE-48D1-A3B2-1DBAD0857BF6}"/>
+                <a16:creationId xmlns:a16="http://schemas.microsoft.com/office/drawing/2014/main" id="{7CD0BF7A-8C01-4736-AF58-F1F50EB149A3}"/>
               </a:ext>
             </a:extLst>
           </p:cNvPr>
@@ -6475,7 +6458,7 @@
           <p:cNvPr id="7" name="">
             <a:extLst xmlns:a="http://schemas.openxmlformats.org/drawingml/2006/main">
               <a:ext uri="{FF2B5EF4-FFF2-40B4-BE49-F238E27FC236}">
-                <a16:creationId xmlns:a16="http://schemas.microsoft.com/office/drawing/2014/main" id="{3DADE6C9-8B9F-4006-AEBD-4505505F3635}"/>
+                <a16:creationId xmlns:a16="http://schemas.microsoft.com/office/drawing/2014/main" id="{B128DE85-07B4-49DA-8AED-D84A52FAE79D}"/>
               </a:ext>
             </a:extLst>
           </p:cNvPr>
@@ -6512,7 +6495,7 @@
           <p:cNvPr id="8" name="">
             <a:extLst xmlns:a="http://schemas.openxmlformats.org/drawingml/2006/main">
               <a:ext uri="{FF2B5EF4-FFF2-40B4-BE49-F238E27FC236}">
-                <a16:creationId xmlns:a16="http://schemas.microsoft.com/office/drawing/2014/main" id="{F0CE92F2-2035-4511-BC79-89720F001B0E}"/>
+                <a16:creationId xmlns:a16="http://schemas.microsoft.com/office/drawing/2014/main" id="{A20C2888-F2EF-4E5A-8A4F-B8E4C2223F5A}"/>
               </a:ext>
             </a:extLst>
           </p:cNvPr>
@@ -6549,7 +6532,7 @@
           <p:cNvPr id="9" name="">
             <a:extLst xmlns:a="http://schemas.openxmlformats.org/drawingml/2006/main">
               <a:ext uri="{FF2B5EF4-FFF2-40B4-BE49-F238E27FC236}">
-                <a16:creationId xmlns:a16="http://schemas.microsoft.com/office/drawing/2014/main" id="{A022ABDB-703F-41AE-B10B-149BB037CE43}"/>
+                <a16:creationId xmlns:a16="http://schemas.microsoft.com/office/drawing/2014/main" id="{EB5B1852-6540-437C-B254-1D39532B93E2}"/>
               </a:ext>
             </a:extLst>
           </p:cNvPr>
@@ -6607,7 +6590,7 @@
           <p:cNvPr id="10" name="">
             <a:extLst xmlns:a="http://schemas.openxmlformats.org/drawingml/2006/main">
               <a:ext uri="{FF2B5EF4-FFF2-40B4-BE49-F238E27FC236}">
-                <a16:creationId xmlns:a16="http://schemas.microsoft.com/office/drawing/2014/main" id="{BCFF9D6A-8C8A-4A7F-AD06-471256B598F5}"/>
+                <a16:creationId xmlns:a16="http://schemas.microsoft.com/office/drawing/2014/main" id="{6E5C5371-D50C-40B6-8BCB-945BCD8229CE}"/>
               </a:ext>
             </a:extLst>
           </p:cNvPr>
@@ -6665,7 +6648,7 @@
           <p:cNvPr id="11" name="">
             <a:extLst xmlns:a="http://schemas.openxmlformats.org/drawingml/2006/main">
               <a:ext uri="{FF2B5EF4-FFF2-40B4-BE49-F238E27FC236}">
-                <a16:creationId xmlns:a16="http://schemas.microsoft.com/office/drawing/2014/main" id="{95CCE233-A557-47DF-999D-835A668EEF91}"/>
+                <a16:creationId xmlns:a16="http://schemas.microsoft.com/office/drawing/2014/main" id="{C529D32C-DC59-4564-928F-FC1E525CA564}"/>
               </a:ext>
             </a:extLst>
           </p:cNvPr>
@@ -6700,7 +6683,7 @@
           <p:cNvPr id="12" name="">
             <a:extLst xmlns:a="http://schemas.openxmlformats.org/drawingml/2006/main">
               <a:ext uri="{FF2B5EF4-FFF2-40B4-BE49-F238E27FC236}">
-                <a16:creationId xmlns:a16="http://schemas.microsoft.com/office/drawing/2014/main" id="{8851F424-7EB0-4494-B8EE-BD2C23AA0135}"/>
+                <a16:creationId xmlns:a16="http://schemas.microsoft.com/office/drawing/2014/main" id="{EDD5F267-D144-4BE3-8329-01929BF221B4}"/>
               </a:ext>
             </a:extLst>
           </p:cNvPr>
@@ -6733,7 +6716,7 @@
           <p:cNvPr id="13" name="">
             <a:extLst xmlns:a="http://schemas.openxmlformats.org/drawingml/2006/main">
               <a:ext uri="{FF2B5EF4-FFF2-40B4-BE49-F238E27FC236}">
-                <a16:creationId xmlns:a16="http://schemas.microsoft.com/office/drawing/2014/main" id="{3398D2A4-FC3B-47AA-AECB-441CE4E74AB0}"/>
+                <a16:creationId xmlns:a16="http://schemas.microsoft.com/office/drawing/2014/main" id="{62431588-BFD6-4D17-AEE4-9794188E3A02}"/>
               </a:ext>
             </a:extLst>
           </p:cNvPr>
@@ -6781,7 +6764,7 @@
                   <a:srgbClr val="132024"/>
                 </a:solidFill>
               </a:rPr>
-              <a:t>3차 질문: region보다</a:t>
+              <a:t>3차 질문: readout 우선의</a:t>
             </a:r>
           </a:p>
           <a:p xmlns:a="http://schemas.openxmlformats.org/drawingml/2006/main">
@@ -6798,7 +6781,7 @@
                   <a:srgbClr val="132024"/>
                 </a:solidFill>
               </a:rPr>
-              <a:t>readout을 먼저 적어야 하는가</a:t>
+              <a:t>selection rule</a:t>
             </a:r>
           </a:p>
         </p:txBody>
@@ -6808,7 +6791,7 @@
           <p:cNvPr id="14" name="">
             <a:extLst xmlns:a="http://schemas.openxmlformats.org/drawingml/2006/main">
               <a:ext uri="{FF2B5EF4-FFF2-40B4-BE49-F238E27FC236}">
-                <a16:creationId xmlns:a16="http://schemas.microsoft.com/office/drawing/2014/main" id="{F2B2D53B-7D91-491C-93B0-48F665FE001F}"/>
+                <a16:creationId xmlns:a16="http://schemas.microsoft.com/office/drawing/2014/main" id="{0FC6B00E-49FC-48A2-8693-929A245813CC}"/>
               </a:ext>
             </a:extLst>
           </p:cNvPr>
@@ -6843,7 +6826,7 @@
           <p:cNvPr id="15" name="">
             <a:extLst xmlns:a="http://schemas.openxmlformats.org/drawingml/2006/main">
               <a:ext uri="{FF2B5EF4-FFF2-40B4-BE49-F238E27FC236}">
-                <a16:creationId xmlns:a16="http://schemas.microsoft.com/office/drawing/2014/main" id="{1746ABB4-51FE-43D1-8275-2936BC1253A4}"/>
+                <a16:creationId xmlns:a16="http://schemas.microsoft.com/office/drawing/2014/main" id="{F6F9C0E4-6C61-4422-BD6F-09D46E11279E}"/>
               </a:ext>
             </a:extLst>
           </p:cNvPr>
@@ -6878,7 +6861,7 @@
           <p:cNvPr id="16" name="">
             <a:extLst xmlns:a="http://schemas.openxmlformats.org/drawingml/2006/main">
               <a:ext uri="{FF2B5EF4-FFF2-40B4-BE49-F238E27FC236}">
-                <a16:creationId xmlns:a16="http://schemas.microsoft.com/office/drawing/2014/main" id="{482689D3-EC41-4EB8-B175-D15E9968361E}"/>
+                <a16:creationId xmlns:a16="http://schemas.microsoft.com/office/drawing/2014/main" id="{A738F2D6-4984-48FF-A0D5-64E07C011D72}"/>
               </a:ext>
             </a:extLst>
           </p:cNvPr>
@@ -6936,7 +6919,7 @@
           <p:cNvPr id="17" name="">
             <a:extLst xmlns:a="http://schemas.openxmlformats.org/drawingml/2006/main">
               <a:ext uri="{FF2B5EF4-FFF2-40B4-BE49-F238E27FC236}">
-                <a16:creationId xmlns:a16="http://schemas.microsoft.com/office/drawing/2014/main" id="{8D33F7B0-BE88-4313-84ED-CC8EF5DF85A5}"/>
+                <a16:creationId xmlns:a16="http://schemas.microsoft.com/office/drawing/2014/main" id="{9A25C6F5-C6FD-4A1E-9DE3-27F7DE31993A}"/>
               </a:ext>
             </a:extLst>
           </p:cNvPr>
@@ -6984,7 +6967,7 @@
                   <a:srgbClr val="132024"/>
                 </a:solidFill>
               </a:rPr>
-              <a:t>먼저 가장 중요한 readout을 적고, 그</a:t>
+              <a:t>우선 핵심 readout을 명시하고, 해당</a:t>
             </a:r>
           </a:p>
           <a:p xmlns:a="http://schemas.openxmlformats.org/drawingml/2006/main">
@@ -7018,7 +7001,7 @@
                   <a:srgbClr val="132024"/>
                 </a:solidFill>
               </a:rPr>
-              <a:t>branch를 고른다.</a:t>
+              <a:t>branch를 선택한다.</a:t>
             </a:r>
           </a:p>
         </p:txBody>
@@ -7028,7 +7011,7 @@
           <p:cNvPr id="18" name="">
             <a:extLst xmlns:a="http://schemas.openxmlformats.org/drawingml/2006/main">
               <a:ext uri="{FF2B5EF4-FFF2-40B4-BE49-F238E27FC236}">
-                <a16:creationId xmlns:a16="http://schemas.microsoft.com/office/drawing/2014/main" id="{20366EB0-3488-45B5-8951-E5267EB2C286}"/>
+                <a16:creationId xmlns:a16="http://schemas.microsoft.com/office/drawing/2014/main" id="{BE1ACCB6-2A88-43D6-8403-814E5AAE6EB4}"/>
               </a:ext>
             </a:extLst>
           </p:cNvPr>
@@ -7065,7 +7048,7 @@
           <p:cNvPr id="19" name="">
             <a:extLst xmlns:a="http://schemas.openxmlformats.org/drawingml/2006/main">
               <a:ext uri="{FF2B5EF4-FFF2-40B4-BE49-F238E27FC236}">
-                <a16:creationId xmlns:a16="http://schemas.microsoft.com/office/drawing/2014/main" id="{BAC3B30C-F523-4013-8F1A-8FBB0DDB57FF}"/>
+                <a16:creationId xmlns:a16="http://schemas.microsoft.com/office/drawing/2014/main" id="{D9FF6B94-7304-4D20-A16E-F354A4E5D7ED}"/>
               </a:ext>
             </a:extLst>
           </p:cNvPr>
@@ -7100,7 +7083,7 @@
           <p:cNvPr id="20" name="">
             <a:extLst xmlns:a="http://schemas.openxmlformats.org/drawingml/2006/main">
               <a:ext uri="{FF2B5EF4-FFF2-40B4-BE49-F238E27FC236}">
-                <a16:creationId xmlns:a16="http://schemas.microsoft.com/office/drawing/2014/main" id="{4A706274-875A-4DBE-A043-8234674FDD04}"/>
+                <a16:creationId xmlns:a16="http://schemas.microsoft.com/office/drawing/2014/main" id="{50A32D21-28C5-4E70-A1EE-00C74889D87C}"/>
               </a:ext>
             </a:extLst>
           </p:cNvPr>
@@ -7158,7 +7141,7 @@
           <p:cNvPr id="21" name="">
             <a:extLst xmlns:a="http://schemas.openxmlformats.org/drawingml/2006/main">
               <a:ext uri="{FF2B5EF4-FFF2-40B4-BE49-F238E27FC236}">
-                <a16:creationId xmlns:a16="http://schemas.microsoft.com/office/drawing/2014/main" id="{8F424E25-A6C5-468C-8897-FB3F8E25A89A}"/>
+                <a16:creationId xmlns:a16="http://schemas.microsoft.com/office/drawing/2014/main" id="{A66D0DF1-5FDA-4DC8-8967-6E1391F5D290}"/>
               </a:ext>
             </a:extLst>
           </p:cNvPr>
@@ -7233,7 +7216,7 @@
           <p:cNvPr id="22" name="">
             <a:extLst xmlns:a="http://schemas.openxmlformats.org/drawingml/2006/main">
               <a:ext uri="{FF2B5EF4-FFF2-40B4-BE49-F238E27FC236}">
-                <a16:creationId xmlns:a16="http://schemas.microsoft.com/office/drawing/2014/main" id="{9DB4BBF1-5D5B-48BD-A499-3A3625B79E5F}"/>
+                <a16:creationId xmlns:a16="http://schemas.microsoft.com/office/drawing/2014/main" id="{B9C87091-2C53-4479-8481-76073F09811C}"/>
               </a:ext>
             </a:extLst>
           </p:cNvPr>
@@ -7270,7 +7253,7 @@
           <p:cNvPr id="23" name="">
             <a:extLst xmlns:a="http://schemas.openxmlformats.org/drawingml/2006/main">
               <a:ext uri="{FF2B5EF4-FFF2-40B4-BE49-F238E27FC236}">
-                <a16:creationId xmlns:a16="http://schemas.microsoft.com/office/drawing/2014/main" id="{34D2AB03-3A34-4B12-9871-70DB68FB5D43}"/>
+                <a16:creationId xmlns:a16="http://schemas.microsoft.com/office/drawing/2014/main" id="{C56BF561-072C-4B24-B2E4-ED4442822F1F}"/>
               </a:ext>
             </a:extLst>
           </p:cNvPr>
@@ -7305,7 +7288,7 @@
           <p:cNvPr id="24" name="">
             <a:extLst xmlns:a="http://schemas.openxmlformats.org/drawingml/2006/main">
               <a:ext uri="{FF2B5EF4-FFF2-40B4-BE49-F238E27FC236}">
-                <a16:creationId xmlns:a16="http://schemas.microsoft.com/office/drawing/2014/main" id="{A5061F9E-3DFA-425A-9C7A-59FA0049369E}"/>
+                <a16:creationId xmlns:a16="http://schemas.microsoft.com/office/drawing/2014/main" id="{79C89A51-DED4-43C7-8C30-5842647EA632}"/>
               </a:ext>
             </a:extLst>
           </p:cNvPr>
@@ -7363,7 +7346,7 @@
           <p:cNvPr id="25" name="">
             <a:extLst xmlns:a="http://schemas.openxmlformats.org/drawingml/2006/main">
               <a:ext uri="{FF2B5EF4-FFF2-40B4-BE49-F238E27FC236}">
-                <a16:creationId xmlns:a16="http://schemas.microsoft.com/office/drawing/2014/main" id="{B067EC7F-4745-49C1-93A6-6FFFD5BC6826}"/>
+                <a16:creationId xmlns:a16="http://schemas.microsoft.com/office/drawing/2014/main" id="{E7DE6679-E7E6-42E2-9479-0C90A274F002}"/>
               </a:ext>
             </a:extLst>
           </p:cNvPr>
@@ -7428,7 +7411,7 @@
                   <a:srgbClr val="132024"/>
                 </a:solidFill>
               </a:rPr>
-              <a:t>Fitzgerald, Kelley, Chen 등</a:t>
+              <a:t>Fitzgerald, Kelley, Chen</a:t>
             </a:r>
           </a:p>
         </p:txBody>
@@ -7438,7 +7421,7 @@
           <p:cNvPr id="26" name="">
             <a:extLst xmlns:a="http://schemas.openxmlformats.org/drawingml/2006/main">
               <a:ext uri="{FF2B5EF4-FFF2-40B4-BE49-F238E27FC236}">
-                <a16:creationId xmlns:a16="http://schemas.microsoft.com/office/drawing/2014/main" id="{EBAB79E5-EFBE-4D58-B2C7-765B566566FB}"/>
+                <a16:creationId xmlns:a16="http://schemas.microsoft.com/office/drawing/2014/main" id="{3556A19B-294B-4989-8D84-A449A6CC5562}"/>
               </a:ext>
             </a:extLst>
           </p:cNvPr>
@@ -7473,7 +7456,7 @@
           <p:cNvPr id="27" name="">
             <a:extLst xmlns:a="http://schemas.openxmlformats.org/drawingml/2006/main">
               <a:ext uri="{FF2B5EF4-FFF2-40B4-BE49-F238E27FC236}">
-                <a16:creationId xmlns:a16="http://schemas.microsoft.com/office/drawing/2014/main" id="{A2A119B8-2A1B-4CE6-9EB6-42C841509DDD}"/>
+                <a16:creationId xmlns:a16="http://schemas.microsoft.com/office/drawing/2014/main" id="{03F62A30-D27D-47FE-AA34-2B5B995A99D3}"/>
               </a:ext>
             </a:extLst>
           </p:cNvPr>
@@ -7508,7 +7491,7 @@
           <p:cNvPr id="28" name="">
             <a:extLst xmlns:a="http://schemas.openxmlformats.org/drawingml/2006/main">
               <a:ext uri="{FF2B5EF4-FFF2-40B4-BE49-F238E27FC236}">
-                <a16:creationId xmlns:a16="http://schemas.microsoft.com/office/drawing/2014/main" id="{38F19495-699C-4FA2-AFF5-11FF3517F31B}"/>
+                <a16:creationId xmlns:a16="http://schemas.microsoft.com/office/drawing/2014/main" id="{B17B91E7-2D50-4A09-9344-5D8ED5533891}"/>
               </a:ext>
             </a:extLst>
           </p:cNvPr>
@@ -7566,7 +7549,7 @@
           <p:cNvPr id="29" name="">
             <a:extLst xmlns:a="http://schemas.openxmlformats.org/drawingml/2006/main">
               <a:ext uri="{FF2B5EF4-FFF2-40B4-BE49-F238E27FC236}">
-                <a16:creationId xmlns:a16="http://schemas.microsoft.com/office/drawing/2014/main" id="{8847EEE6-AACF-4C19-BE0D-2BEC7C260815}"/>
+                <a16:creationId xmlns:a16="http://schemas.microsoft.com/office/drawing/2014/main" id="{8D729A8D-4278-4156-AB82-51474C0E86A8}"/>
               </a:ext>
             </a:extLst>
           </p:cNvPr>
@@ -7614,7 +7597,7 @@
                   <a:srgbClr val="344146"/>
                 </a:solidFill>
               </a:rPr>
-              <a:t>Insert screenshot here</a:t>
+              <a:t>Graph screenshot placeholder</a:t>
             </a:r>
           </a:p>
         </p:txBody>
@@ -7624,7 +7607,7 @@
           <p:cNvPr id="30" name="">
             <a:extLst xmlns:a="http://schemas.openxmlformats.org/drawingml/2006/main">
               <a:ext uri="{FF2B5EF4-FFF2-40B4-BE49-F238E27FC236}">
-                <a16:creationId xmlns:a16="http://schemas.microsoft.com/office/drawing/2014/main" id="{2C81EE62-7215-4C04-9A0B-82F4B5D88195}"/>
+                <a16:creationId xmlns:a16="http://schemas.microsoft.com/office/drawing/2014/main" id="{B8A560E8-D231-43D4-8631-5D8BC593F904}"/>
               </a:ext>
             </a:extLst>
           </p:cNvPr>
@@ -7659,7 +7642,7 @@
           <p:cNvPr id="31" name="">
             <a:extLst xmlns:a="http://schemas.openxmlformats.org/drawingml/2006/main">
               <a:ext uri="{FF2B5EF4-FFF2-40B4-BE49-F238E27FC236}">
-                <a16:creationId xmlns:a16="http://schemas.microsoft.com/office/drawing/2014/main" id="{D8DAD0D2-2550-437D-93BB-7F467BAD630B}"/>
+                <a16:creationId xmlns:a16="http://schemas.microsoft.com/office/drawing/2014/main" id="{C001129C-B529-4993-B239-854608B71517}"/>
               </a:ext>
             </a:extLst>
           </p:cNvPr>
@@ -7717,7 +7700,7 @@
           <p:cNvPr id="32" name="">
             <a:extLst xmlns:a="http://schemas.openxmlformats.org/drawingml/2006/main">
               <a:ext uri="{FF2B5EF4-FFF2-40B4-BE49-F238E27FC236}">
-                <a16:creationId xmlns:a16="http://schemas.microsoft.com/office/drawing/2014/main" id="{2A632D8A-34DD-4C4B-A1D7-26D64D9E4668}"/>
+                <a16:creationId xmlns:a16="http://schemas.microsoft.com/office/drawing/2014/main" id="{E96FBAB1-F74A-43A0-9291-8901BF114ADE}"/>
               </a:ext>
             </a:extLst>
           </p:cNvPr>
@@ -7765,7 +7748,7 @@
                   <a:srgbClr val="6A767C"/>
                 </a:solidFill>
               </a:rPr>
-              <a:t>Insert the local graph for Q3 here</a:t>
+              <a:t>Q3 local graph</a:t>
             </a:r>
           </a:p>
         </p:txBody>
@@ -7775,7 +7758,7 @@
           <p:cNvPr id="33" name="">
             <a:extLst xmlns:a="http://schemas.openxmlformats.org/drawingml/2006/main">
               <a:ext uri="{FF2B5EF4-FFF2-40B4-BE49-F238E27FC236}">
-                <a16:creationId xmlns:a16="http://schemas.microsoft.com/office/drawing/2014/main" id="{5D5321AE-4F48-4873-8923-1E473D859DB7}"/>
+                <a16:creationId xmlns:a16="http://schemas.microsoft.com/office/drawing/2014/main" id="{FEA08BCB-3E97-4866-B30F-7AFCE4CB2541}"/>
               </a:ext>
             </a:extLst>
           </p:cNvPr>
@@ -7823,7 +7806,7 @@
                   <a:srgbClr val="6A767C"/>
                 </a:solidFill>
               </a:rPr>
-              <a:t>오른쪽에는 Q3 query note의 Obsidian local graph를 삽입하면 된다.</a:t>
+              <a:t>우측 패널: Q3 query note의 Obsidian local graph 삽입 위치</a:t>
             </a:r>
           </a:p>
         </p:txBody>
@@ -7831,7 +7814,7 @@
     </p:spTree>
     <p:extLst>
       <p:ext uri="{BB962C8B-B14F-4D97-AF65-F5344CB8AC3E}">
-        <p14:creationId xmlns:p14="http://schemas.microsoft.com/office/powerpoint/2010/main" val="1345272916"/>
+        <p14:creationId xmlns:p14="http://schemas.microsoft.com/office/powerpoint/2010/main" val="2002511710"/>
       </p:ext>
     </p:extLst>
   </p:cSld>
@@ -7862,7 +7845,7 @@
           <p:cNvPr id="1" name="Slide Number Placeholder 5">
             <a:extLst xmlns:a="http://schemas.openxmlformats.org/drawingml/2006/main">
               <a:ext uri="{FF2B5EF4-FFF2-40B4-BE49-F238E27FC236}">
-                <a16:creationId xmlns:a16="http://schemas.microsoft.com/office/drawing/2014/main" id="{EDD0F201-AE24-4D54-ACE2-5F86EBC94A0A}"/>
+                <a16:creationId xmlns:a16="http://schemas.microsoft.com/office/drawing/2014/main" id="{316B49F2-843A-4E0C-BBC2-0E3A47804521}"/>
               </a:ext>
             </a:extLst>
           </p:cNvPr>
@@ -7898,7 +7881,7 @@
           <p:nvPr/>
         </p:nvPicPr>
         <p:blipFill>
-          <a:blip xmlns:r="http://schemas.openxmlformats.org/officeDocument/2006/relationships" xmlns:a="http://schemas.openxmlformats.org/drawingml/2006/main" r:embed="R08dc4e269b4745ba"/>
+          <a:blip xmlns:r="http://schemas.openxmlformats.org/officeDocument/2006/relationships" xmlns:a="http://schemas.openxmlformats.org/drawingml/2006/main" r:embed="R384ee0d779004d36"/>
           <a:srcRect xmlns:a="http://schemas.openxmlformats.org/drawingml/2006/main" l="0" t="21875" r="0" b="21875"/>
           <a:stretch xmlns:a="http://schemas.openxmlformats.org/drawingml/2006/main">
             <a:fillRect l="0" t="0" r="0" b="0"/>
@@ -7919,7 +7902,7 @@
           <p:cNvPr id="3" name="">
             <a:extLst xmlns:a="http://schemas.openxmlformats.org/drawingml/2006/main">
               <a:ext uri="{FF2B5EF4-FFF2-40B4-BE49-F238E27FC236}">
-                <a16:creationId xmlns:a16="http://schemas.microsoft.com/office/drawing/2014/main" id="{3FC32856-49C7-4E45-9D5F-B9CA0EEC046B}"/>
+                <a16:creationId xmlns:a16="http://schemas.microsoft.com/office/drawing/2014/main" id="{37143286-0D7E-45DF-96F0-23193FC2F558}"/>
               </a:ext>
             </a:extLst>
           </p:cNvPr>
@@ -7954,7 +7937,7 @@
           <p:cNvPr id="4" name="">
             <a:extLst xmlns:a="http://schemas.openxmlformats.org/drawingml/2006/main">
               <a:ext uri="{FF2B5EF4-FFF2-40B4-BE49-F238E27FC236}">
-                <a16:creationId xmlns:a16="http://schemas.microsoft.com/office/drawing/2014/main" id="{645878F7-6807-4FAB-A567-4518EC4DCC37}"/>
+                <a16:creationId xmlns:a16="http://schemas.microsoft.com/office/drawing/2014/main" id="{DAD0366C-46D8-46A2-AA5D-AAC4631E0DDC}"/>
               </a:ext>
             </a:extLst>
           </p:cNvPr>
@@ -7989,7 +7972,7 @@
           <p:cNvPr id="5" name="">
             <a:extLst xmlns:a="http://schemas.openxmlformats.org/drawingml/2006/main">
               <a:ext uri="{FF2B5EF4-FFF2-40B4-BE49-F238E27FC236}">
-                <a16:creationId xmlns:a16="http://schemas.microsoft.com/office/drawing/2014/main" id="{BF355876-66E3-4C37-8BB2-E7AEE8BC1FA7}"/>
+                <a16:creationId xmlns:a16="http://schemas.microsoft.com/office/drawing/2014/main" id="{E68F1B16-058E-4861-99A7-B6266D98ABA3}"/>
               </a:ext>
             </a:extLst>
           </p:cNvPr>
@@ -8026,7 +8009,7 @@
           <p:cNvPr id="6" name="">
             <a:extLst xmlns:a="http://schemas.openxmlformats.org/drawingml/2006/main">
               <a:ext uri="{FF2B5EF4-FFF2-40B4-BE49-F238E27FC236}">
-                <a16:creationId xmlns:a16="http://schemas.microsoft.com/office/drawing/2014/main" id="{14CE53FA-CEF2-4BF1-97E9-965A6E313A87}"/>
+                <a16:creationId xmlns:a16="http://schemas.microsoft.com/office/drawing/2014/main" id="{C107DEDD-1A61-49EB-A847-AD6A6BA81F60}"/>
               </a:ext>
             </a:extLst>
           </p:cNvPr>
@@ -8063,7 +8046,7 @@
           <p:cNvPr id="7" name="">
             <a:extLst xmlns:a="http://schemas.openxmlformats.org/drawingml/2006/main">
               <a:ext uri="{FF2B5EF4-FFF2-40B4-BE49-F238E27FC236}">
-                <a16:creationId xmlns:a16="http://schemas.microsoft.com/office/drawing/2014/main" id="{17957947-611E-49FC-8C71-15D8F45695EB}"/>
+                <a16:creationId xmlns:a16="http://schemas.microsoft.com/office/drawing/2014/main" id="{56B1AB3A-63DA-4FDC-BCAD-64969D99B6C8}"/>
               </a:ext>
             </a:extLst>
           </p:cNvPr>
@@ -8100,7 +8083,7 @@
           <p:cNvPr id="8" name="">
             <a:extLst xmlns:a="http://schemas.openxmlformats.org/drawingml/2006/main">
               <a:ext uri="{FF2B5EF4-FFF2-40B4-BE49-F238E27FC236}">
-                <a16:creationId xmlns:a16="http://schemas.microsoft.com/office/drawing/2014/main" id="{C496F449-1423-481E-9065-9ABC01DCE53C}"/>
+                <a16:creationId xmlns:a16="http://schemas.microsoft.com/office/drawing/2014/main" id="{A9E5174A-0229-498F-8BE5-73BAE6ED3F5F}"/>
               </a:ext>
             </a:extLst>
           </p:cNvPr>
@@ -8137,7 +8120,7 @@
           <p:cNvPr id="9" name="">
             <a:extLst xmlns:a="http://schemas.openxmlformats.org/drawingml/2006/main">
               <a:ext uri="{FF2B5EF4-FFF2-40B4-BE49-F238E27FC236}">
-                <a16:creationId xmlns:a16="http://schemas.microsoft.com/office/drawing/2014/main" id="{29DEF44B-732A-4FEB-A28B-FF40D2B9ABB9}"/>
+                <a16:creationId xmlns:a16="http://schemas.microsoft.com/office/drawing/2014/main" id="{F0D4DD6D-2D09-44EC-A67F-E85021FAC913}"/>
               </a:ext>
             </a:extLst>
           </p:cNvPr>
@@ -8195,7 +8178,7 @@
           <p:cNvPr id="10" name="">
             <a:extLst xmlns:a="http://schemas.openxmlformats.org/drawingml/2006/main">
               <a:ext uri="{FF2B5EF4-FFF2-40B4-BE49-F238E27FC236}">
-                <a16:creationId xmlns:a16="http://schemas.microsoft.com/office/drawing/2014/main" id="{D2F4816A-3192-47C6-8D38-DCE691AF1417}"/>
+                <a16:creationId xmlns:a16="http://schemas.microsoft.com/office/drawing/2014/main" id="{4A0814D6-81CA-4D76-8EAB-FCA2C329491F}"/>
               </a:ext>
             </a:extLst>
           </p:cNvPr>
@@ -8253,7 +8236,7 @@
           <p:cNvPr id="11" name="">
             <a:extLst xmlns:a="http://schemas.openxmlformats.org/drawingml/2006/main">
               <a:ext uri="{FF2B5EF4-FFF2-40B4-BE49-F238E27FC236}">
-                <a16:creationId xmlns:a16="http://schemas.microsoft.com/office/drawing/2014/main" id="{04347C77-C1C7-4C52-A2A3-283F52FBB8F0}"/>
+                <a16:creationId xmlns:a16="http://schemas.microsoft.com/office/drawing/2014/main" id="{4D80D903-485F-4D45-962F-87EADB8E65AB}"/>
               </a:ext>
             </a:extLst>
           </p:cNvPr>
@@ -8288,7 +8271,7 @@
           <p:cNvPr id="12" name="">
             <a:extLst xmlns:a="http://schemas.openxmlformats.org/drawingml/2006/main">
               <a:ext uri="{FF2B5EF4-FFF2-40B4-BE49-F238E27FC236}">
-                <a16:creationId xmlns:a16="http://schemas.microsoft.com/office/drawing/2014/main" id="{68961EBB-DF36-4A48-9361-11B7EA16B74D}"/>
+                <a16:creationId xmlns:a16="http://schemas.microsoft.com/office/drawing/2014/main" id="{9DE1871D-0D78-4E00-A5CB-3A6921AF09EC}"/>
               </a:ext>
             </a:extLst>
           </p:cNvPr>
@@ -8321,7 +8304,7 @@
           <p:cNvPr id="13" name="">
             <a:extLst xmlns:a="http://schemas.openxmlformats.org/drawingml/2006/main">
               <a:ext uri="{FF2B5EF4-FFF2-40B4-BE49-F238E27FC236}">
-                <a16:creationId xmlns:a16="http://schemas.microsoft.com/office/drawing/2014/main" id="{B36BB6DB-98D3-4CA8-A4BF-70830B862AC8}"/>
+                <a16:creationId xmlns:a16="http://schemas.microsoft.com/office/drawing/2014/main" id="{2808FE27-6E1D-44D1-AD20-88F8C4CC8D71}"/>
               </a:ext>
             </a:extLst>
           </p:cNvPr>
@@ -8369,7 +8352,7 @@
                   <a:srgbClr val="132024"/>
                 </a:solidFill>
               </a:rPr>
-              <a:t>이 연결고리를 리뷰논문으로</a:t>
+              <a:t>리뷰논문 구조로의</a:t>
             </a:r>
           </a:p>
           <a:p xmlns:a="http://schemas.openxmlformats.org/drawingml/2006/main">
@@ -8386,7 +8369,7 @@
                   <a:srgbClr val="132024"/>
                 </a:solidFill>
               </a:rPr>
-              <a:t>바꾸면 어떻게 쓰게 되는가</a:t>
+              <a:t>전환</a:t>
             </a:r>
           </a:p>
         </p:txBody>
@@ -8396,7 +8379,7 @@
           <p:cNvPr id="14" name="">
             <a:extLst xmlns:a="http://schemas.openxmlformats.org/drawingml/2006/main">
               <a:ext uri="{FF2B5EF4-FFF2-40B4-BE49-F238E27FC236}">
-                <a16:creationId xmlns:a16="http://schemas.microsoft.com/office/drawing/2014/main" id="{98CAAAD6-A541-441A-941E-2DA852A4CFBF}"/>
+                <a16:creationId xmlns:a16="http://schemas.microsoft.com/office/drawing/2014/main" id="{B085423C-93E9-4DDD-8FAB-68682955DFBC}"/>
               </a:ext>
             </a:extLst>
           </p:cNvPr>
@@ -8431,7 +8414,7 @@
           <p:cNvPr id="15" name="">
             <a:extLst xmlns:a="http://schemas.openxmlformats.org/drawingml/2006/main">
               <a:ext uri="{FF2B5EF4-FFF2-40B4-BE49-F238E27FC236}">
-                <a16:creationId xmlns:a16="http://schemas.microsoft.com/office/drawing/2014/main" id="{4CB6969B-E212-48FA-BB2E-660231CFF46C}"/>
+                <a16:creationId xmlns:a16="http://schemas.microsoft.com/office/drawing/2014/main" id="{4AF630D2-0354-482D-9BD5-28AE2B67016D}"/>
               </a:ext>
             </a:extLst>
           </p:cNvPr>
@@ -8466,7 +8449,7 @@
           <p:cNvPr id="16" name="">
             <a:extLst xmlns:a="http://schemas.openxmlformats.org/drawingml/2006/main">
               <a:ext uri="{FF2B5EF4-FFF2-40B4-BE49-F238E27FC236}">
-                <a16:creationId xmlns:a16="http://schemas.microsoft.com/office/drawing/2014/main" id="{0A308B70-6AAC-4137-840D-1E27DA4E3C68}"/>
+                <a16:creationId xmlns:a16="http://schemas.microsoft.com/office/drawing/2014/main" id="{BB08D6C5-1B4A-4219-ABA4-974DC6156093}"/>
               </a:ext>
             </a:extLst>
           </p:cNvPr>
@@ -8514,7 +8497,7 @@
                   <a:srgbClr val="132024"/>
                 </a:solidFill>
               </a:rPr>
-              <a:t>핵심은 paper-by-paper 요약이 아니라, 위키에서 질문이 이동한 순서대로 review의 장과 비교 기준을 세우는 것이다.</a:t>
+              <a:t>핵심은 개별 논문 나열이 아니라, 위키에서 확인된 질문 이동 순서에 따라 review의 장과 비교 기준을 구성하는 것이다.</a:t>
             </a:r>
           </a:p>
         </p:txBody>
@@ -8524,7 +8507,7 @@
           <p:cNvPr id="17" name="">
             <a:extLst xmlns:a="http://schemas.openxmlformats.org/drawingml/2006/main">
               <a:ext uri="{FF2B5EF4-FFF2-40B4-BE49-F238E27FC236}">
-                <a16:creationId xmlns:a16="http://schemas.microsoft.com/office/drawing/2014/main" id="{9B9DDFF8-D926-4B75-AA76-3E0569F6C72D}"/>
+                <a16:creationId xmlns:a16="http://schemas.microsoft.com/office/drawing/2014/main" id="{C264EB58-5EE8-4DDE-9782-7FAAB76CD01D}"/>
               </a:ext>
             </a:extLst>
           </p:cNvPr>
@@ -8561,7 +8544,7 @@
           <p:cNvPr id="18" name="">
             <a:extLst xmlns:a="http://schemas.openxmlformats.org/drawingml/2006/main">
               <a:ext uri="{FF2B5EF4-FFF2-40B4-BE49-F238E27FC236}">
-                <a16:creationId xmlns:a16="http://schemas.microsoft.com/office/drawing/2014/main" id="{72CF7C7C-7BF8-46DB-B952-6943B475F695}"/>
+                <a16:creationId xmlns:a16="http://schemas.microsoft.com/office/drawing/2014/main" id="{E5F6511F-D550-4E24-8079-E321152582B5}"/>
               </a:ext>
             </a:extLst>
           </p:cNvPr>
@@ -8596,7 +8579,7 @@
           <p:cNvPr id="19" name="">
             <a:extLst xmlns:a="http://schemas.openxmlformats.org/drawingml/2006/main">
               <a:ext uri="{FF2B5EF4-FFF2-40B4-BE49-F238E27FC236}">
-                <a16:creationId xmlns:a16="http://schemas.microsoft.com/office/drawing/2014/main" id="{59C982DC-525A-4F69-8C4E-C0842F626773}"/>
+                <a16:creationId xmlns:a16="http://schemas.microsoft.com/office/drawing/2014/main" id="{BC249A1A-9618-417C-A3F1-D2A857DA1768}"/>
               </a:ext>
             </a:extLst>
           </p:cNvPr>
@@ -8654,7 +8637,7 @@
           <p:cNvPr id="20" name="">
             <a:extLst xmlns:a="http://schemas.openxmlformats.org/drawingml/2006/main">
               <a:ext uri="{FF2B5EF4-FFF2-40B4-BE49-F238E27FC236}">
-                <a16:creationId xmlns:a16="http://schemas.microsoft.com/office/drawing/2014/main" id="{353858DA-0290-47F5-8DD4-B53020840D10}"/>
+                <a16:creationId xmlns:a16="http://schemas.microsoft.com/office/drawing/2014/main" id="{B4E76991-9443-4C84-9BC9-9BA674A6DC43}"/>
               </a:ext>
             </a:extLst>
           </p:cNvPr>
@@ -8753,7 +8736,7 @@
                   <a:srgbClr val="132024"/>
                 </a:solidFill>
               </a:rPr>
-              <a:t>family로 먼저 정리한다.</a:t>
+              <a:t>family로 정리한다.</a:t>
             </a:r>
           </a:p>
         </p:txBody>
@@ -8763,7 +8746,7 @@
           <p:cNvPr id="21" name="">
             <a:extLst xmlns:a="http://schemas.openxmlformats.org/drawingml/2006/main">
               <a:ext uri="{FF2B5EF4-FFF2-40B4-BE49-F238E27FC236}">
-                <a16:creationId xmlns:a16="http://schemas.microsoft.com/office/drawing/2014/main" id="{D0A34B77-CC66-4D3D-9D1D-11B26AC3340C}"/>
+                <a16:creationId xmlns:a16="http://schemas.microsoft.com/office/drawing/2014/main" id="{7DEEAA51-19A0-4F62-863D-AE088FF5B160}"/>
               </a:ext>
             </a:extLst>
           </p:cNvPr>
@@ -8796,7 +8779,7 @@
           <p:cNvPr id="22" name="">
             <a:extLst xmlns:a="http://schemas.openxmlformats.org/drawingml/2006/main">
               <a:ext uri="{FF2B5EF4-FFF2-40B4-BE49-F238E27FC236}">
-                <a16:creationId xmlns:a16="http://schemas.microsoft.com/office/drawing/2014/main" id="{04D44445-54CB-4796-AC71-059BC818223D}"/>
+                <a16:creationId xmlns:a16="http://schemas.microsoft.com/office/drawing/2014/main" id="{0445D963-D883-44E8-A62E-CF73A96FD93E}"/>
               </a:ext>
             </a:extLst>
           </p:cNvPr>
@@ -8833,7 +8816,7 @@
           <p:cNvPr id="23" name="">
             <a:extLst xmlns:a="http://schemas.openxmlformats.org/drawingml/2006/main">
               <a:ext uri="{FF2B5EF4-FFF2-40B4-BE49-F238E27FC236}">
-                <a16:creationId xmlns:a16="http://schemas.microsoft.com/office/drawing/2014/main" id="{8C2E8ECA-0FF9-42A2-A133-7FD61862FCA2}"/>
+                <a16:creationId xmlns:a16="http://schemas.microsoft.com/office/drawing/2014/main" id="{603E2C10-44D2-4158-B759-72B8C8783A85}"/>
               </a:ext>
             </a:extLst>
           </p:cNvPr>
@@ -8868,7 +8851,7 @@
           <p:cNvPr id="24" name="">
             <a:extLst xmlns:a="http://schemas.openxmlformats.org/drawingml/2006/main">
               <a:ext uri="{FF2B5EF4-FFF2-40B4-BE49-F238E27FC236}">
-                <a16:creationId xmlns:a16="http://schemas.microsoft.com/office/drawing/2014/main" id="{49FD9002-EB13-45DB-9E4F-165B53A541EC}"/>
+                <a16:creationId xmlns:a16="http://schemas.microsoft.com/office/drawing/2014/main" id="{F3935500-1B62-4DAD-A514-FB41AE8F03FC}"/>
               </a:ext>
             </a:extLst>
           </p:cNvPr>
@@ -8926,7 +8909,7 @@
           <p:cNvPr id="25" name="">
             <a:extLst xmlns:a="http://schemas.openxmlformats.org/drawingml/2006/main">
               <a:ext uri="{FF2B5EF4-FFF2-40B4-BE49-F238E27FC236}">
-                <a16:creationId xmlns:a16="http://schemas.microsoft.com/office/drawing/2014/main" id="{1F89B466-88DF-4BC0-8C97-F01C25DA5772}"/>
+                <a16:creationId xmlns:a16="http://schemas.microsoft.com/office/drawing/2014/main" id="{A70E103A-65D5-4020-8316-D851C51D717E}"/>
               </a:ext>
             </a:extLst>
           </p:cNvPr>
@@ -9018,7 +9001,7 @@
           <p:cNvPr id="26" name="">
             <a:extLst xmlns:a="http://schemas.openxmlformats.org/drawingml/2006/main">
               <a:ext uri="{FF2B5EF4-FFF2-40B4-BE49-F238E27FC236}">
-                <a16:creationId xmlns:a16="http://schemas.microsoft.com/office/drawing/2014/main" id="{E710F060-A17A-4966-B7E9-91A05654D977}"/>
+                <a16:creationId xmlns:a16="http://schemas.microsoft.com/office/drawing/2014/main" id="{E32403C5-7424-45BF-88B5-B5B67608BA6A}"/>
               </a:ext>
             </a:extLst>
           </p:cNvPr>
@@ -9051,7 +9034,7 @@
           <p:cNvPr id="27" name="">
             <a:extLst xmlns:a="http://schemas.openxmlformats.org/drawingml/2006/main">
               <a:ext uri="{FF2B5EF4-FFF2-40B4-BE49-F238E27FC236}">
-                <a16:creationId xmlns:a16="http://schemas.microsoft.com/office/drawing/2014/main" id="{D90DF1F1-9D95-41E0-800A-E27CFEF743E3}"/>
+                <a16:creationId xmlns:a16="http://schemas.microsoft.com/office/drawing/2014/main" id="{EBEF5931-C8F3-4C2F-8C95-9419BC850BD2}"/>
               </a:ext>
             </a:extLst>
           </p:cNvPr>
@@ -9088,7 +9071,7 @@
           <p:cNvPr id="28" name="">
             <a:extLst xmlns:a="http://schemas.openxmlformats.org/drawingml/2006/main">
               <a:ext uri="{FF2B5EF4-FFF2-40B4-BE49-F238E27FC236}">
-                <a16:creationId xmlns:a16="http://schemas.microsoft.com/office/drawing/2014/main" id="{9BFC0E46-58A2-4F6D-8CF0-DC7EF5730F2D}"/>
+                <a16:creationId xmlns:a16="http://schemas.microsoft.com/office/drawing/2014/main" id="{0DA8F2D7-079F-4FB4-82E7-1F4EB13AF571}"/>
               </a:ext>
             </a:extLst>
           </p:cNvPr>
@@ -9123,7 +9106,7 @@
           <p:cNvPr id="29" name="">
             <a:extLst xmlns:a="http://schemas.openxmlformats.org/drawingml/2006/main">
               <a:ext uri="{FF2B5EF4-FFF2-40B4-BE49-F238E27FC236}">
-                <a16:creationId xmlns:a16="http://schemas.microsoft.com/office/drawing/2014/main" id="{13C098B3-68F1-4C74-BC1F-F1FBFD8D9DE5}"/>
+                <a16:creationId xmlns:a16="http://schemas.microsoft.com/office/drawing/2014/main" id="{B0550019-535A-4C3C-81CA-49583F400C35}"/>
               </a:ext>
             </a:extLst>
           </p:cNvPr>
@@ -9181,7 +9164,7 @@
           <p:cNvPr id="30" name="">
             <a:extLst xmlns:a="http://schemas.openxmlformats.org/drawingml/2006/main">
               <a:ext uri="{FF2B5EF4-FFF2-40B4-BE49-F238E27FC236}">
-                <a16:creationId xmlns:a16="http://schemas.microsoft.com/office/drawing/2014/main" id="{268AAB7E-52C2-4317-BCEE-C93B059DBE97}"/>
+                <a16:creationId xmlns:a16="http://schemas.microsoft.com/office/drawing/2014/main" id="{A4BB4E68-9756-4A97-A1EC-124A116C08E2}"/>
               </a:ext>
             </a:extLst>
           </p:cNvPr>
@@ -9229,7 +9212,7 @@
                   <a:srgbClr val="132024"/>
                 </a:solidFill>
               </a:rPr>
-              <a:t>마지막에는 readout-first</a:t>
+              <a:t>마지막 단계에서 readout-first</a:t>
             </a:r>
           </a:p>
           <a:p xmlns:a="http://schemas.openxmlformats.org/drawingml/2006/main">
@@ -9263,24 +9246,7 @@
                   <a:srgbClr val="132024"/>
                 </a:solidFill>
               </a:rPr>
-              <a:t>protocol choice를 다시</a:t>
-            </a:r>
-          </a:p>
-          <a:p xmlns:a="http://schemas.openxmlformats.org/drawingml/2006/main">
-            <a:pPr algn="l">
-              <a:defRPr sz="1200" b="0">
-                <a:solidFill>
-                  <a:srgbClr val="132024"/>
-                </a:solidFill>
-              </a:defRPr>
-            </a:pPr>
-            <a:r>
-              <a:rPr sz="1200" b="0">
-                <a:solidFill>
-                  <a:srgbClr val="132024"/>
-                </a:solidFill>
-              </a:rPr>
-              <a:t>묶는다.</a:t>
+              <a:t>protocol choice를 재구성한다.</a:t>
             </a:r>
           </a:p>
         </p:txBody>
@@ -9290,7 +9256,7 @@
           <p:cNvPr id="31" name="">
             <a:extLst xmlns:a="http://schemas.openxmlformats.org/drawingml/2006/main">
               <a:ext uri="{FF2B5EF4-FFF2-40B4-BE49-F238E27FC236}">
-                <a16:creationId xmlns:a16="http://schemas.microsoft.com/office/drawing/2014/main" id="{32ECFEB9-4AD3-4D62-B805-483ADC962302}"/>
+                <a16:creationId xmlns:a16="http://schemas.microsoft.com/office/drawing/2014/main" id="{D670229D-75D7-467A-876B-F44BE49EE7F4}"/>
               </a:ext>
             </a:extLst>
           </p:cNvPr>
@@ -9325,7 +9291,7 @@
           <p:cNvPr id="32" name="">
             <a:extLst xmlns:a="http://schemas.openxmlformats.org/drawingml/2006/main">
               <a:ext uri="{FF2B5EF4-FFF2-40B4-BE49-F238E27FC236}">
-                <a16:creationId xmlns:a16="http://schemas.microsoft.com/office/drawing/2014/main" id="{78905D24-B19F-480C-972A-33C50E31BC45}"/>
+                <a16:creationId xmlns:a16="http://schemas.microsoft.com/office/drawing/2014/main" id="{22A2F465-5EE9-442F-BEED-41D40D56DA87}"/>
               </a:ext>
             </a:extLst>
           </p:cNvPr>
@@ -9360,7 +9326,7 @@
           <p:cNvPr id="33" name="">
             <a:extLst xmlns:a="http://schemas.openxmlformats.org/drawingml/2006/main">
               <a:ext uri="{FF2B5EF4-FFF2-40B4-BE49-F238E27FC236}">
-                <a16:creationId xmlns:a16="http://schemas.microsoft.com/office/drawing/2014/main" id="{1B491C86-7DEC-4C4D-8854-015425E9D143}"/>
+                <a16:creationId xmlns:a16="http://schemas.microsoft.com/office/drawing/2014/main" id="{2A66DD07-DEA0-4E86-A5BA-22797EE35416}"/>
               </a:ext>
             </a:extLst>
           </p:cNvPr>
@@ -9408,7 +9374,7 @@
                   <a:srgbClr val="132024"/>
                 </a:solidFill>
               </a:rPr>
-              <a:t>따라서 리뷰논문의 중심 주장도 '어느 protocol이 최고인가'가 아니라 '어떤 질문과 readout이 어떤 protocol selection rule을 요구하는가'가 된다.</a:t>
+              <a:t>따라서 리뷰논문의 중심 주장도 '어느 protocol이 우월한가'가 아니라 '어떤 질문과 readout이 어떤 protocol selection rule을 요구하는가'로 정리된다.</a:t>
             </a:r>
           </a:p>
         </p:txBody>
@@ -9418,7 +9384,7 @@
           <p:cNvPr id="34" name="">
             <a:extLst xmlns:a="http://schemas.openxmlformats.org/drawingml/2006/main">
               <a:ext uri="{FF2B5EF4-FFF2-40B4-BE49-F238E27FC236}">
-                <a16:creationId xmlns:a16="http://schemas.microsoft.com/office/drawing/2014/main" id="{22C5B716-309E-44C1-8C65-05E2AB597294}"/>
+                <a16:creationId xmlns:a16="http://schemas.microsoft.com/office/drawing/2014/main" id="{B7077926-FDA2-4F1B-A210-020F7AF8D147}"/>
               </a:ext>
             </a:extLst>
           </p:cNvPr>
@@ -9466,7 +9432,7 @@
                   <a:srgbClr val="6A767C"/>
                 </a:solidFill>
               </a:rPr>
-              <a:t>이 연결고리가 발표의 질문 체인을 리뷰논문의 장 구조와 주장 구조로 바꿔준다.</a:t>
+              <a:t>이 연결고리는 발표의 질문 체인을 리뷰논문의 장 구조와 주장 구조로 전환한다.</a:t>
             </a:r>
           </a:p>
         </p:txBody>
@@ -9474,7 +9440,7 @@
     </p:spTree>
     <p:extLst>
       <p:ext uri="{BB962C8B-B14F-4D97-AF65-F5344CB8AC3E}">
-        <p14:creationId xmlns:p14="http://schemas.microsoft.com/office/powerpoint/2010/main" val="102979179"/>
+        <p14:creationId xmlns:p14="http://schemas.microsoft.com/office/powerpoint/2010/main" val="2066303521"/>
       </p:ext>
     </p:extLst>
   </p:cSld>
@@ -9505,7 +9471,7 @@
           <p:cNvPr id="1" name="Slide Number Placeholder 5">
             <a:extLst xmlns:a="http://schemas.openxmlformats.org/drawingml/2006/main">
               <a:ext uri="{FF2B5EF4-FFF2-40B4-BE49-F238E27FC236}">
-                <a16:creationId xmlns:a16="http://schemas.microsoft.com/office/drawing/2014/main" id="{EDD0F201-AE24-4D54-ACE2-5F86EBC94A0A}"/>
+                <a16:creationId xmlns:a16="http://schemas.microsoft.com/office/drawing/2014/main" id="{316B49F2-843A-4E0C-BBC2-0E3A47804521}"/>
               </a:ext>
             </a:extLst>
           </p:cNvPr>
@@ -9541,7 +9507,7 @@
           <p:nvPr/>
         </p:nvPicPr>
         <p:blipFill>
-          <a:blip xmlns:r="http://schemas.openxmlformats.org/officeDocument/2006/relationships" xmlns:a="http://schemas.openxmlformats.org/drawingml/2006/main" r:embed="R5122b89414fe408d"/>
+          <a:blip xmlns:r="http://schemas.openxmlformats.org/officeDocument/2006/relationships" xmlns:a="http://schemas.openxmlformats.org/drawingml/2006/main" r:embed="Rf44be0902a5f4499"/>
           <a:srcRect xmlns:a="http://schemas.openxmlformats.org/drawingml/2006/main" l="0" t="21875" r="0" b="21875"/>
           <a:stretch xmlns:a="http://schemas.openxmlformats.org/drawingml/2006/main">
             <a:fillRect l="0" t="0" r="0" b="0"/>
@@ -9562,7 +9528,7 @@
           <p:cNvPr id="3" name="">
             <a:extLst xmlns:a="http://schemas.openxmlformats.org/drawingml/2006/main">
               <a:ext uri="{FF2B5EF4-FFF2-40B4-BE49-F238E27FC236}">
-                <a16:creationId xmlns:a16="http://schemas.microsoft.com/office/drawing/2014/main" id="{37CBC1B4-A3FB-4463-BB49-6CC85157A7FC}"/>
+                <a16:creationId xmlns:a16="http://schemas.microsoft.com/office/drawing/2014/main" id="{6B7471CA-EF77-4622-9139-488A242B2AF3}"/>
               </a:ext>
             </a:extLst>
           </p:cNvPr>
@@ -9597,7 +9563,7 @@
           <p:cNvPr id="4" name="">
             <a:extLst xmlns:a="http://schemas.openxmlformats.org/drawingml/2006/main">
               <a:ext uri="{FF2B5EF4-FFF2-40B4-BE49-F238E27FC236}">
-                <a16:creationId xmlns:a16="http://schemas.microsoft.com/office/drawing/2014/main" id="{37178373-5B0F-4C17-9254-CA1EE2F79358}"/>
+                <a16:creationId xmlns:a16="http://schemas.microsoft.com/office/drawing/2014/main" id="{FC0C9BB4-8474-47E5-8C79-2C4A3B562801}"/>
               </a:ext>
             </a:extLst>
           </p:cNvPr>
@@ -9632,7 +9598,7 @@
           <p:cNvPr id="5" name="">
             <a:extLst xmlns:a="http://schemas.openxmlformats.org/drawingml/2006/main">
               <a:ext uri="{FF2B5EF4-FFF2-40B4-BE49-F238E27FC236}">
-                <a16:creationId xmlns:a16="http://schemas.microsoft.com/office/drawing/2014/main" id="{FF0B72CB-53D9-4DF8-8C7F-D979129B0094}"/>
+                <a16:creationId xmlns:a16="http://schemas.microsoft.com/office/drawing/2014/main" id="{95068538-CD27-4D54-913A-B3784CC138BE}"/>
               </a:ext>
             </a:extLst>
           </p:cNvPr>
@@ -9669,7 +9635,7 @@
           <p:cNvPr id="6" name="">
             <a:extLst xmlns:a="http://schemas.openxmlformats.org/drawingml/2006/main">
               <a:ext uri="{FF2B5EF4-FFF2-40B4-BE49-F238E27FC236}">
-                <a16:creationId xmlns:a16="http://schemas.microsoft.com/office/drawing/2014/main" id="{30A19F84-69A2-40F8-8FBE-A75E30148FA8}"/>
+                <a16:creationId xmlns:a16="http://schemas.microsoft.com/office/drawing/2014/main" id="{678AA7B7-2176-40B8-A0C6-BBBB2CE9D211}"/>
               </a:ext>
             </a:extLst>
           </p:cNvPr>
@@ -9706,7 +9672,7 @@
           <p:cNvPr id="7" name="">
             <a:extLst xmlns:a="http://schemas.openxmlformats.org/drawingml/2006/main">
               <a:ext uri="{FF2B5EF4-FFF2-40B4-BE49-F238E27FC236}">
-                <a16:creationId xmlns:a16="http://schemas.microsoft.com/office/drawing/2014/main" id="{4A31B9A8-C3FA-464C-BF2B-4C402B97B8EA}"/>
+                <a16:creationId xmlns:a16="http://schemas.microsoft.com/office/drawing/2014/main" id="{E90A5DE2-7987-4C4D-A7D9-64B86293C8EA}"/>
               </a:ext>
             </a:extLst>
           </p:cNvPr>
@@ -9743,7 +9709,7 @@
           <p:cNvPr id="8" name="">
             <a:extLst xmlns:a="http://schemas.openxmlformats.org/drawingml/2006/main">
               <a:ext uri="{FF2B5EF4-FFF2-40B4-BE49-F238E27FC236}">
-                <a16:creationId xmlns:a16="http://schemas.microsoft.com/office/drawing/2014/main" id="{BB33A0B5-F45D-4CFE-8B25-8F68D12F94A7}"/>
+                <a16:creationId xmlns:a16="http://schemas.microsoft.com/office/drawing/2014/main" id="{1D8B319E-FB5A-4E64-AB47-D7AA5C418D10}"/>
               </a:ext>
             </a:extLst>
           </p:cNvPr>
@@ -9780,7 +9746,7 @@
           <p:cNvPr id="9" name="">
             <a:extLst xmlns:a="http://schemas.openxmlformats.org/drawingml/2006/main">
               <a:ext uri="{FF2B5EF4-FFF2-40B4-BE49-F238E27FC236}">
-                <a16:creationId xmlns:a16="http://schemas.microsoft.com/office/drawing/2014/main" id="{C65335AB-68BE-470F-8372-CADAAFC9FFAF}"/>
+                <a16:creationId xmlns:a16="http://schemas.microsoft.com/office/drawing/2014/main" id="{6C0320C1-1446-4A30-82F5-0F3578DF3D22}"/>
               </a:ext>
             </a:extLst>
           </p:cNvPr>
@@ -9838,7 +9804,7 @@
           <p:cNvPr id="10" name="">
             <a:extLst xmlns:a="http://schemas.openxmlformats.org/drawingml/2006/main">
               <a:ext uri="{FF2B5EF4-FFF2-40B4-BE49-F238E27FC236}">
-                <a16:creationId xmlns:a16="http://schemas.microsoft.com/office/drawing/2014/main" id="{D79E942E-1F14-4F0D-83A3-5665CB1EC6B3}"/>
+                <a16:creationId xmlns:a16="http://schemas.microsoft.com/office/drawing/2014/main" id="{E4252F9F-43E6-4C0B-B460-D3577B9E1F2A}"/>
               </a:ext>
             </a:extLst>
           </p:cNvPr>
@@ -9896,7 +9862,7 @@
           <p:cNvPr id="11" name="">
             <a:extLst xmlns:a="http://schemas.openxmlformats.org/drawingml/2006/main">
               <a:ext uri="{FF2B5EF4-FFF2-40B4-BE49-F238E27FC236}">
-                <a16:creationId xmlns:a16="http://schemas.microsoft.com/office/drawing/2014/main" id="{80943B30-DDA8-41F1-AEB5-CA91814B4D4A}"/>
+                <a16:creationId xmlns:a16="http://schemas.microsoft.com/office/drawing/2014/main" id="{C8C0C203-C4BB-4C61-819C-4D18674CFA93}"/>
               </a:ext>
             </a:extLst>
           </p:cNvPr>
@@ -9931,7 +9897,7 @@
           <p:cNvPr id="12" name="">
             <a:extLst xmlns:a="http://schemas.openxmlformats.org/drawingml/2006/main">
               <a:ext uri="{FF2B5EF4-FFF2-40B4-BE49-F238E27FC236}">
-                <a16:creationId xmlns:a16="http://schemas.microsoft.com/office/drawing/2014/main" id="{315D77E8-FE71-4FFE-B614-C084ADE3A62F}"/>
+                <a16:creationId xmlns:a16="http://schemas.microsoft.com/office/drawing/2014/main" id="{F8D7CC36-4E1D-41DC-978A-5A1FED15D701}"/>
               </a:ext>
             </a:extLst>
           </p:cNvPr>
@@ -9964,7 +9930,7 @@
           <p:cNvPr id="13" name="">
             <a:extLst xmlns:a="http://schemas.openxmlformats.org/drawingml/2006/main">
               <a:ext uri="{FF2B5EF4-FFF2-40B4-BE49-F238E27FC236}">
-                <a16:creationId xmlns:a16="http://schemas.microsoft.com/office/drawing/2014/main" id="{9FC8EE7E-4590-4594-A3E1-F84180900D34}"/>
+                <a16:creationId xmlns:a16="http://schemas.microsoft.com/office/drawing/2014/main" id="{06E84247-F026-424D-BFF1-46E6240DBA90}"/>
               </a:ext>
             </a:extLst>
           </p:cNvPr>
@@ -10012,24 +9978,7 @@
                   <a:srgbClr val="132024"/>
                 </a:solidFill>
               </a:rPr>
-              <a:t>정리: 좋은 질문은</a:t>
-            </a:r>
-          </a:p>
-          <a:p xmlns:a="http://schemas.openxmlformats.org/drawingml/2006/main">
-            <a:pPr algn="l">
-              <a:defRPr sz="2850" b="1">
-                <a:solidFill>
-                  <a:srgbClr val="132024"/>
-                </a:solidFill>
-              </a:defRPr>
-            </a:pPr>
-            <a:r>
-              <a:rPr sz="2850" b="1">
-                <a:solidFill>
-                  <a:srgbClr val="132024"/>
-                </a:solidFill>
-              </a:rPr>
-              <a:t>위키를 정리하면서 생겨났다</a:t>
+              <a:t>정리</a:t>
             </a:r>
           </a:p>
         </p:txBody>
@@ -10039,7 +9988,7 @@
           <p:cNvPr id="14" name="">
             <a:extLst xmlns:a="http://schemas.openxmlformats.org/drawingml/2006/main">
               <a:ext uri="{FF2B5EF4-FFF2-40B4-BE49-F238E27FC236}">
-                <a16:creationId xmlns:a16="http://schemas.microsoft.com/office/drawing/2014/main" id="{CFBE256E-54D8-46E0-9613-D436FF7FE282}"/>
+                <a16:creationId xmlns:a16="http://schemas.microsoft.com/office/drawing/2014/main" id="{44EA7CE5-35CB-4A02-B4BD-0DBBABAB8D92}"/>
               </a:ext>
             </a:extLst>
           </p:cNvPr>
@@ -10076,7 +10025,7 @@
           <p:cNvPr id="15" name="">
             <a:extLst xmlns:a="http://schemas.openxmlformats.org/drawingml/2006/main">
               <a:ext uri="{FF2B5EF4-FFF2-40B4-BE49-F238E27FC236}">
-                <a16:creationId xmlns:a16="http://schemas.microsoft.com/office/drawing/2014/main" id="{9B23C56F-9331-4F4C-B916-4B9F094A8CA6}"/>
+                <a16:creationId xmlns:a16="http://schemas.microsoft.com/office/drawing/2014/main" id="{A63D6DC5-E074-41FA-A1B4-AF105FF6A977}"/>
               </a:ext>
             </a:extLst>
           </p:cNvPr>
@@ -10111,7 +10060,7 @@
           <p:cNvPr id="16" name="">
             <a:extLst xmlns:a="http://schemas.openxmlformats.org/drawingml/2006/main">
               <a:ext uri="{FF2B5EF4-FFF2-40B4-BE49-F238E27FC236}">
-                <a16:creationId xmlns:a16="http://schemas.microsoft.com/office/drawing/2014/main" id="{B3FF6EF0-8637-4EE1-9614-892E98F452FB}"/>
+                <a16:creationId xmlns:a16="http://schemas.microsoft.com/office/drawing/2014/main" id="{132D03E6-CE05-4BF7-BB21-19323FBF87C1}"/>
               </a:ext>
             </a:extLst>
           </p:cNvPr>
@@ -10169,7 +10118,7 @@
           <p:cNvPr id="17" name="">
             <a:extLst xmlns:a="http://schemas.openxmlformats.org/drawingml/2006/main">
               <a:ext uri="{FF2B5EF4-FFF2-40B4-BE49-F238E27FC236}">
-                <a16:creationId xmlns:a16="http://schemas.microsoft.com/office/drawing/2014/main" id="{579D62AF-488D-4AAE-9CD6-3B8BD5E95C16}"/>
+                <a16:creationId xmlns:a16="http://schemas.microsoft.com/office/drawing/2014/main" id="{BDCD8C40-5C5C-457C-B537-F6FFCF0FED48}"/>
               </a:ext>
             </a:extLst>
           </p:cNvPr>
@@ -10234,24 +10183,7 @@
                   <a:srgbClr val="132024"/>
                 </a:solidFill>
               </a:rPr>
-              <a:t>질문 범위를 좁히고 문헌 해석을 더 조밀하게 쌓게</a:t>
-            </a:r>
-          </a:p>
-          <a:p xmlns:a="http://schemas.openxmlformats.org/drawingml/2006/main">
-            <a:pPr algn="l">
-              <a:defRPr sz="1200" b="0">
-                <a:solidFill>
-                  <a:srgbClr val="132024"/>
-                </a:solidFill>
-              </a:defRPr>
-            </a:pPr>
-            <a:r>
-              <a:rPr sz="1200" b="0">
-                <a:solidFill>
-                  <a:srgbClr val="132024"/>
-                </a:solidFill>
-              </a:rPr>
-              <a:t>해줬다.</a:t>
+              <a:t>질문 범위를 제한하고 문헌 해석의 밀도를 높였다.</a:t>
             </a:r>
           </a:p>
         </p:txBody>
@@ -10261,7 +10193,7 @@
           <p:cNvPr id="18" name="">
             <a:extLst xmlns:a="http://schemas.openxmlformats.org/drawingml/2006/main">
               <a:ext uri="{FF2B5EF4-FFF2-40B4-BE49-F238E27FC236}">
-                <a16:creationId xmlns:a16="http://schemas.microsoft.com/office/drawing/2014/main" id="{A8F071A0-67D0-492D-8DD4-4B3BD5E81478}"/>
+                <a16:creationId xmlns:a16="http://schemas.microsoft.com/office/drawing/2014/main" id="{B212C2EC-C493-4110-88EE-94C276EF6CC6}"/>
               </a:ext>
             </a:extLst>
           </p:cNvPr>
@@ -10298,7 +10230,7 @@
           <p:cNvPr id="19" name="">
             <a:extLst xmlns:a="http://schemas.openxmlformats.org/drawingml/2006/main">
               <a:ext uri="{FF2B5EF4-FFF2-40B4-BE49-F238E27FC236}">
-                <a16:creationId xmlns:a16="http://schemas.microsoft.com/office/drawing/2014/main" id="{E81F94B3-87E5-46F3-8D2F-D8D459206921}"/>
+                <a16:creationId xmlns:a16="http://schemas.microsoft.com/office/drawing/2014/main" id="{F72B93F8-6471-4193-86A2-B753B7691EB4}"/>
               </a:ext>
             </a:extLst>
           </p:cNvPr>
@@ -10333,7 +10265,7 @@
           <p:cNvPr id="20" name="">
             <a:extLst xmlns:a="http://schemas.openxmlformats.org/drawingml/2006/main">
               <a:ext uri="{FF2B5EF4-FFF2-40B4-BE49-F238E27FC236}">
-                <a16:creationId xmlns:a16="http://schemas.microsoft.com/office/drawing/2014/main" id="{89A62A0C-4B19-4938-9CB9-8D8D664A151A}"/>
+                <a16:creationId xmlns:a16="http://schemas.microsoft.com/office/drawing/2014/main" id="{F3C6FB03-0E0A-4747-A8ED-C11BFBAA0F0B}"/>
               </a:ext>
             </a:extLst>
           </p:cNvPr>
@@ -10391,7 +10323,7 @@
           <p:cNvPr id="21" name="">
             <a:extLst xmlns:a="http://schemas.openxmlformats.org/drawingml/2006/main">
               <a:ext uri="{FF2B5EF4-FFF2-40B4-BE49-F238E27FC236}">
-                <a16:creationId xmlns:a16="http://schemas.microsoft.com/office/drawing/2014/main" id="{FE8A9731-CCB4-4221-95CE-9B804670BFDE}"/>
+                <a16:creationId xmlns:a16="http://schemas.microsoft.com/office/drawing/2014/main" id="{908A8305-7B3F-4B24-96C1-6D8EC38278BA}"/>
               </a:ext>
             </a:extLst>
           </p:cNvPr>
@@ -10473,7 +10405,7 @@
                   <a:srgbClr val="132024"/>
                 </a:solidFill>
               </a:rPr>
-              <a:t>benchmark question으로 확장됐다.</a:t>
+              <a:t>benchmark question으로 확장되었다.</a:t>
             </a:r>
           </a:p>
         </p:txBody>
@@ -10483,7 +10415,7 @@
           <p:cNvPr id="22" name="">
             <a:extLst xmlns:a="http://schemas.openxmlformats.org/drawingml/2006/main">
               <a:ext uri="{FF2B5EF4-FFF2-40B4-BE49-F238E27FC236}">
-                <a16:creationId xmlns:a16="http://schemas.microsoft.com/office/drawing/2014/main" id="{431AFB51-AF34-48CE-AC7C-5CC49243A421}"/>
+                <a16:creationId xmlns:a16="http://schemas.microsoft.com/office/drawing/2014/main" id="{415C051E-47EA-47AF-82D2-D7CCE6E6CFC2}"/>
               </a:ext>
             </a:extLst>
           </p:cNvPr>
@@ -10520,7 +10452,7 @@
           <p:cNvPr id="23" name="">
             <a:extLst xmlns:a="http://schemas.openxmlformats.org/drawingml/2006/main">
               <a:ext uri="{FF2B5EF4-FFF2-40B4-BE49-F238E27FC236}">
-                <a16:creationId xmlns:a16="http://schemas.microsoft.com/office/drawing/2014/main" id="{40931521-B306-411D-AB1E-28271A26A589}"/>
+                <a16:creationId xmlns:a16="http://schemas.microsoft.com/office/drawing/2014/main" id="{568DE227-BF6B-4150-AE6A-84F12D6107A4}"/>
               </a:ext>
             </a:extLst>
           </p:cNvPr>
@@ -10555,7 +10487,7 @@
           <p:cNvPr id="24" name="">
             <a:extLst xmlns:a="http://schemas.openxmlformats.org/drawingml/2006/main">
               <a:ext uri="{FF2B5EF4-FFF2-40B4-BE49-F238E27FC236}">
-                <a16:creationId xmlns:a16="http://schemas.microsoft.com/office/drawing/2014/main" id="{46B0C752-F48A-4CF8-934A-12AE0D35FFEA}"/>
+                <a16:creationId xmlns:a16="http://schemas.microsoft.com/office/drawing/2014/main" id="{0C3D6DC8-4037-427E-8C03-A6A297A1A860}"/>
               </a:ext>
             </a:extLst>
           </p:cNvPr>
@@ -10613,7 +10545,7 @@
           <p:cNvPr id="25" name="">
             <a:extLst xmlns:a="http://schemas.openxmlformats.org/drawingml/2006/main">
               <a:ext uri="{FF2B5EF4-FFF2-40B4-BE49-F238E27FC236}">
-                <a16:creationId xmlns:a16="http://schemas.microsoft.com/office/drawing/2014/main" id="{D82985ED-F888-488E-ACB7-8CAB05D2CB39}"/>
+                <a16:creationId xmlns:a16="http://schemas.microsoft.com/office/drawing/2014/main" id="{CD617BE0-810E-4730-997F-CF95BB73D1EB}"/>
               </a:ext>
             </a:extLst>
           </p:cNvPr>
@@ -10695,7 +10627,7 @@
                   <a:srgbClr val="132024"/>
                 </a:solidFill>
               </a:rPr>
-              <a:t>rule로 이동했다.</a:t>
+              <a:t>rule로 이동하였다.</a:t>
             </a:r>
           </a:p>
         </p:txBody>
@@ -10705,7 +10637,7 @@
           <p:cNvPr id="26" name="">
             <a:extLst xmlns:a="http://schemas.openxmlformats.org/drawingml/2006/main">
               <a:ext uri="{FF2B5EF4-FFF2-40B4-BE49-F238E27FC236}">
-                <a16:creationId xmlns:a16="http://schemas.microsoft.com/office/drawing/2014/main" id="{0FC70A8B-DD25-4700-A399-603D3FA8C188}"/>
+                <a16:creationId xmlns:a16="http://schemas.microsoft.com/office/drawing/2014/main" id="{F0E5F874-81BC-45E1-A87F-C69492190512}"/>
               </a:ext>
             </a:extLst>
           </p:cNvPr>
@@ -10742,7 +10674,7 @@
           <p:cNvPr id="27" name="">
             <a:extLst xmlns:a="http://schemas.openxmlformats.org/drawingml/2006/main">
               <a:ext uri="{FF2B5EF4-FFF2-40B4-BE49-F238E27FC236}">
-                <a16:creationId xmlns:a16="http://schemas.microsoft.com/office/drawing/2014/main" id="{7FC3679B-3358-494C-BBE1-46F5EB3EC4C2}"/>
+                <a16:creationId xmlns:a16="http://schemas.microsoft.com/office/drawing/2014/main" id="{069209DF-DE8C-4EC5-9A35-AE28790C445C}"/>
               </a:ext>
             </a:extLst>
           </p:cNvPr>
@@ -10777,7 +10709,7 @@
           <p:cNvPr id="28" name="">
             <a:extLst xmlns:a="http://schemas.openxmlformats.org/drawingml/2006/main">
               <a:ext uri="{FF2B5EF4-FFF2-40B4-BE49-F238E27FC236}">
-                <a16:creationId xmlns:a16="http://schemas.microsoft.com/office/drawing/2014/main" id="{7CD98EB9-3F99-479F-A58F-ABFA380AF930}"/>
+                <a16:creationId xmlns:a16="http://schemas.microsoft.com/office/drawing/2014/main" id="{2B7731E1-EBBE-401D-B6B9-7BFE92FAA090}"/>
               </a:ext>
             </a:extLst>
           </p:cNvPr>
@@ -10825,7 +10757,7 @@
                   <a:srgbClr val="132024"/>
                 </a:solidFill>
               </a:rPr>
-              <a:t>토론용 질문: 왜 reproducibility와 fidelity를 분리해야 하는가? 어떤 readout을 먼저 적어야 하는가? host validation은 언제 필요한가?</a:t>
+              <a:t>Q&amp;A 주요 쟁점: reproducibility와 fidelity의 분리, readout 우선순위, host validation 적용 시점</a:t>
             </a:r>
           </a:p>
         </p:txBody>
@@ -10835,7 +10767,7 @@
           <p:cNvPr id="29" name="">
             <a:extLst xmlns:a="http://schemas.openxmlformats.org/drawingml/2006/main">
               <a:ext uri="{FF2B5EF4-FFF2-40B4-BE49-F238E27FC236}">
-                <a16:creationId xmlns:a16="http://schemas.microsoft.com/office/drawing/2014/main" id="{D39FAAAF-6C09-48AA-9ECC-D07022B51AD4}"/>
+                <a16:creationId xmlns:a16="http://schemas.microsoft.com/office/drawing/2014/main" id="{4C60E2FC-107F-48BF-BD46-583EB0D9E221}"/>
               </a:ext>
             </a:extLst>
           </p:cNvPr>
@@ -10870,7 +10802,7 @@
           <p:cNvPr id="30" name="">
             <a:extLst xmlns:a="http://schemas.openxmlformats.org/drawingml/2006/main">
               <a:ext uri="{FF2B5EF4-FFF2-40B4-BE49-F238E27FC236}">
-                <a16:creationId xmlns:a16="http://schemas.microsoft.com/office/drawing/2014/main" id="{FFEC9E75-26D4-446A-B68B-C11D23B6600F}"/>
+                <a16:creationId xmlns:a16="http://schemas.microsoft.com/office/drawing/2014/main" id="{A35D8FC8-DD46-4536-8274-FA92A3A35230}"/>
               </a:ext>
             </a:extLst>
           </p:cNvPr>
@@ -10905,7 +10837,7 @@
           <p:cNvPr id="31" name="">
             <a:extLst xmlns:a="http://schemas.openxmlformats.org/drawingml/2006/main">
               <a:ext uri="{FF2B5EF4-FFF2-40B4-BE49-F238E27FC236}">
-                <a16:creationId xmlns:a16="http://schemas.microsoft.com/office/drawing/2014/main" id="{379E20EB-DCDB-4FB9-974F-9D4147971214}"/>
+                <a16:creationId xmlns:a16="http://schemas.microsoft.com/office/drawing/2014/main" id="{CE129A26-63FD-4862-B931-BC038A08F2C7}"/>
               </a:ext>
             </a:extLst>
           </p:cNvPr>
@@ -10953,7 +10885,7 @@
                   <a:srgbClr val="132024"/>
                 </a:solidFill>
               </a:rPr>
-              <a:t>정리: 좋은 질문은 더 많은 논문을 나열해서가 아니라, 위키를 정리하면서 비교 기준을 다시 세울 때 생겨났다.</a:t>
+              <a:t>정리: 유의미한 질문은 문헌의 단순 축적이 아니라, 위키 기반 비교 기준의 재구성 과정에서 형성되었다.</a:t>
             </a:r>
           </a:p>
         </p:txBody>
@@ -10963,7 +10895,7 @@
           <p:cNvPr id="32" name="">
             <a:extLst xmlns:a="http://schemas.openxmlformats.org/drawingml/2006/main">
               <a:ext uri="{FF2B5EF4-FFF2-40B4-BE49-F238E27FC236}">
-                <a16:creationId xmlns:a16="http://schemas.microsoft.com/office/drawing/2014/main" id="{A14B2FF5-F358-4B8D-9AC6-BB79E8D1C0B3}"/>
+                <a16:creationId xmlns:a16="http://schemas.microsoft.com/office/drawing/2014/main" id="{9102C42B-C637-492B-93E0-85E05B0E3ADA}"/>
               </a:ext>
             </a:extLst>
           </p:cNvPr>
@@ -11011,7 +10943,7 @@
                   <a:srgbClr val="6A767C"/>
                 </a:solidFill>
               </a:rPr>
-              <a:t>LLM-wiki 운영 방식이 질문의 정교화와 발표의 구조를 함께 만들었다.</a:t>
+              <a:t>LLM-wiki 운영 구조는 질문의 정교화와 발표의 구조 형성에 동시에 기여하였다.</a:t>
             </a:r>
           </a:p>
         </p:txBody>
@@ -11019,7 +10951,7 @@
     </p:spTree>
     <p:extLst>
       <p:ext uri="{BB962C8B-B14F-4D97-AF65-F5344CB8AC3E}">
-        <p14:creationId xmlns:p14="http://schemas.microsoft.com/office/powerpoint/2010/main" val="2033270621"/>
+        <p14:creationId xmlns:p14="http://schemas.microsoft.com/office/powerpoint/2010/main" val="1005983086"/>
       </p:ext>
     </p:extLst>
   </p:cSld>
@@ -11050,7 +10982,7 @@
           <p:cNvPr id="1" name="Slide Number Placeholder 5">
             <a:extLst xmlns:a="http://schemas.openxmlformats.org/drawingml/2006/main">
               <a:ext uri="{FF2B5EF4-FFF2-40B4-BE49-F238E27FC236}">
-                <a16:creationId xmlns:a16="http://schemas.microsoft.com/office/drawing/2014/main" id="{EDD0F201-AE24-4D54-ACE2-5F86EBC94A0A}"/>
+                <a16:creationId xmlns:a16="http://schemas.microsoft.com/office/drawing/2014/main" id="{316B49F2-843A-4E0C-BBC2-0E3A47804521}"/>
               </a:ext>
             </a:extLst>
           </p:cNvPr>
@@ -11086,7 +11018,7 @@
           <p:nvPr/>
         </p:nvPicPr>
         <p:blipFill>
-          <a:blip xmlns:r="http://schemas.openxmlformats.org/officeDocument/2006/relationships" xmlns:a="http://schemas.openxmlformats.org/drawingml/2006/main" r:embed="R196df9a9724245e5"/>
+          <a:blip xmlns:r="http://schemas.openxmlformats.org/officeDocument/2006/relationships" xmlns:a="http://schemas.openxmlformats.org/drawingml/2006/main" r:embed="R062f4a4f85224aa1"/>
           <a:srcRect xmlns:a="http://schemas.openxmlformats.org/drawingml/2006/main" l="0" t="21875" r="0" b="21875"/>
           <a:stretch xmlns:a="http://schemas.openxmlformats.org/drawingml/2006/main">
             <a:fillRect l="0" t="0" r="0" b="0"/>
@@ -11107,7 +11039,7 @@
           <p:cNvPr id="3" name="">
             <a:extLst xmlns:a="http://schemas.openxmlformats.org/drawingml/2006/main">
               <a:ext uri="{FF2B5EF4-FFF2-40B4-BE49-F238E27FC236}">
-                <a16:creationId xmlns:a16="http://schemas.microsoft.com/office/drawing/2014/main" id="{BA8F9D90-C27E-4645-AEF8-9992D9737908}"/>
+                <a16:creationId xmlns:a16="http://schemas.microsoft.com/office/drawing/2014/main" id="{2E328710-7B2B-45FD-8CEE-5F67872A1A93}"/>
               </a:ext>
             </a:extLst>
           </p:cNvPr>
@@ -11142,7 +11074,7 @@
           <p:cNvPr id="4" name="">
             <a:extLst xmlns:a="http://schemas.openxmlformats.org/drawingml/2006/main">
               <a:ext uri="{FF2B5EF4-FFF2-40B4-BE49-F238E27FC236}">
-                <a16:creationId xmlns:a16="http://schemas.microsoft.com/office/drawing/2014/main" id="{674CF358-2D06-4203-9030-0F7EF28AB6B3}"/>
+                <a16:creationId xmlns:a16="http://schemas.microsoft.com/office/drawing/2014/main" id="{8D66D503-98BB-4177-9050-AF2DC4DC7AD4}"/>
               </a:ext>
             </a:extLst>
           </p:cNvPr>
@@ -11177,7 +11109,7 @@
           <p:cNvPr id="5" name="">
             <a:extLst xmlns:a="http://schemas.openxmlformats.org/drawingml/2006/main">
               <a:ext uri="{FF2B5EF4-FFF2-40B4-BE49-F238E27FC236}">
-                <a16:creationId xmlns:a16="http://schemas.microsoft.com/office/drawing/2014/main" id="{31BA5368-B0D3-4FB2-BD54-BE1765DE3DAF}"/>
+                <a16:creationId xmlns:a16="http://schemas.microsoft.com/office/drawing/2014/main" id="{88CBD866-0FBB-4C06-BA6A-95042F696BED}"/>
               </a:ext>
             </a:extLst>
           </p:cNvPr>
@@ -11214,7 +11146,7 @@
           <p:cNvPr id="6" name="">
             <a:extLst xmlns:a="http://schemas.openxmlformats.org/drawingml/2006/main">
               <a:ext uri="{FF2B5EF4-FFF2-40B4-BE49-F238E27FC236}">
-                <a16:creationId xmlns:a16="http://schemas.microsoft.com/office/drawing/2014/main" id="{2C48E2C9-2719-4B7D-92E0-9838188A65A9}"/>
+                <a16:creationId xmlns:a16="http://schemas.microsoft.com/office/drawing/2014/main" id="{13C453D3-FFF7-44FC-93A7-FEC11122C8EA}"/>
               </a:ext>
             </a:extLst>
           </p:cNvPr>
@@ -11251,7 +11183,7 @@
           <p:cNvPr id="7" name="">
             <a:extLst xmlns:a="http://schemas.openxmlformats.org/drawingml/2006/main">
               <a:ext uri="{FF2B5EF4-FFF2-40B4-BE49-F238E27FC236}">
-                <a16:creationId xmlns:a16="http://schemas.microsoft.com/office/drawing/2014/main" id="{746204A9-EC19-457A-80F0-BBF8BBE1A650}"/>
+                <a16:creationId xmlns:a16="http://schemas.microsoft.com/office/drawing/2014/main" id="{DD1BD497-5184-4276-86AE-39F377BE9BC0}"/>
               </a:ext>
             </a:extLst>
           </p:cNvPr>
@@ -11288,7 +11220,7 @@
           <p:cNvPr id="8" name="">
             <a:extLst xmlns:a="http://schemas.openxmlformats.org/drawingml/2006/main">
               <a:ext uri="{FF2B5EF4-FFF2-40B4-BE49-F238E27FC236}">
-                <a16:creationId xmlns:a16="http://schemas.microsoft.com/office/drawing/2014/main" id="{25D9FE5C-176A-4C1F-8BD6-9D264119EF02}"/>
+                <a16:creationId xmlns:a16="http://schemas.microsoft.com/office/drawing/2014/main" id="{8B72EFBA-C097-4593-970C-09D59B850375}"/>
               </a:ext>
             </a:extLst>
           </p:cNvPr>
@@ -11325,7 +11257,7 @@
           <p:cNvPr id="9" name="">
             <a:extLst xmlns:a="http://schemas.openxmlformats.org/drawingml/2006/main">
               <a:ext uri="{FF2B5EF4-FFF2-40B4-BE49-F238E27FC236}">
-                <a16:creationId xmlns:a16="http://schemas.microsoft.com/office/drawing/2014/main" id="{F451C9A4-F610-490D-9144-C31BB773A1D8}"/>
+                <a16:creationId xmlns:a16="http://schemas.microsoft.com/office/drawing/2014/main" id="{56D1AC6C-A9F4-48A2-B116-F6839B3A3C9D}"/>
               </a:ext>
             </a:extLst>
           </p:cNvPr>
@@ -11383,7 +11315,7 @@
           <p:cNvPr id="10" name="">
             <a:extLst xmlns:a="http://schemas.openxmlformats.org/drawingml/2006/main">
               <a:ext uri="{FF2B5EF4-FFF2-40B4-BE49-F238E27FC236}">
-                <a16:creationId xmlns:a16="http://schemas.microsoft.com/office/drawing/2014/main" id="{89691D54-6E59-4476-B5D3-BBE84079C5A5}"/>
+                <a16:creationId xmlns:a16="http://schemas.microsoft.com/office/drawing/2014/main" id="{CF49761F-B2B4-4776-AC48-4F0489596C38}"/>
               </a:ext>
             </a:extLst>
           </p:cNvPr>
@@ -11441,7 +11373,7 @@
           <p:cNvPr id="11" name="">
             <a:extLst xmlns:a="http://schemas.openxmlformats.org/drawingml/2006/main">
               <a:ext uri="{FF2B5EF4-FFF2-40B4-BE49-F238E27FC236}">
-                <a16:creationId xmlns:a16="http://schemas.microsoft.com/office/drawing/2014/main" id="{8D2E236C-8873-4DEC-8D0B-ACB3EEA82604}"/>
+                <a16:creationId xmlns:a16="http://schemas.microsoft.com/office/drawing/2014/main" id="{32BA6C35-1DFE-4430-BBB2-B73454522B8D}"/>
               </a:ext>
             </a:extLst>
           </p:cNvPr>
@@ -11476,7 +11408,7 @@
           <p:cNvPr id="12" name="">
             <a:extLst xmlns:a="http://schemas.openxmlformats.org/drawingml/2006/main">
               <a:ext uri="{FF2B5EF4-FFF2-40B4-BE49-F238E27FC236}">
-                <a16:creationId xmlns:a16="http://schemas.microsoft.com/office/drawing/2014/main" id="{2721ACCC-E807-4DC4-9A8D-D23B40DCB7DF}"/>
+                <a16:creationId xmlns:a16="http://schemas.microsoft.com/office/drawing/2014/main" id="{434D1BAC-5C77-4FA6-BB66-65378FC50EA2}"/>
               </a:ext>
             </a:extLst>
           </p:cNvPr>
@@ -11509,7 +11441,7 @@
           <p:cNvPr id="13" name="">
             <a:extLst xmlns:a="http://schemas.openxmlformats.org/drawingml/2006/main">
               <a:ext uri="{FF2B5EF4-FFF2-40B4-BE49-F238E27FC236}">
-                <a16:creationId xmlns:a16="http://schemas.microsoft.com/office/drawing/2014/main" id="{0544AA15-E11D-4A83-8C14-9991A2E874AB}"/>
+                <a16:creationId xmlns:a16="http://schemas.microsoft.com/office/drawing/2014/main" id="{93ACFD68-E3CA-4EC3-AC8B-CC8C9EB186FF}"/>
               </a:ext>
             </a:extLst>
           </p:cNvPr>
@@ -11557,7 +11489,7 @@
                   <a:srgbClr val="132024"/>
                 </a:solidFill>
               </a:rPr>
-              <a:t>내가 LLM-wiki를</a:t>
+              <a:t>LLM-wiki</a:t>
             </a:r>
           </a:p>
           <a:p xmlns:a="http://schemas.openxmlformats.org/drawingml/2006/main">
@@ -11574,7 +11506,7 @@
                   <a:srgbClr val="132024"/>
                 </a:solidFill>
               </a:rPr>
-              <a:t>운영하는 방식</a:t>
+              <a:t>운영 구조</a:t>
             </a:r>
           </a:p>
         </p:txBody>
@@ -11584,7 +11516,7 @@
           <p:cNvPr id="14" name="">
             <a:extLst xmlns:a="http://schemas.openxmlformats.org/drawingml/2006/main">
               <a:ext uri="{FF2B5EF4-FFF2-40B4-BE49-F238E27FC236}">
-                <a16:creationId xmlns:a16="http://schemas.microsoft.com/office/drawing/2014/main" id="{EC6D6B09-2DBB-4B81-BAED-AA515A6E977C}"/>
+                <a16:creationId xmlns:a16="http://schemas.microsoft.com/office/drawing/2014/main" id="{318AAD89-7DC1-4033-A91D-0BFEED2DA8DD}"/>
               </a:ext>
             </a:extLst>
           </p:cNvPr>
@@ -11619,7 +11551,7 @@
           <p:cNvPr id="15" name="">
             <a:extLst xmlns:a="http://schemas.openxmlformats.org/drawingml/2006/main">
               <a:ext uri="{FF2B5EF4-FFF2-40B4-BE49-F238E27FC236}">
-                <a16:creationId xmlns:a16="http://schemas.microsoft.com/office/drawing/2014/main" id="{A0F00F60-DD95-4106-988E-C7A5D316B101}"/>
+                <a16:creationId xmlns:a16="http://schemas.microsoft.com/office/drawing/2014/main" id="{631C815F-07B6-4227-BD59-425BA6BFED1B}"/>
               </a:ext>
             </a:extLst>
           </p:cNvPr>
@@ -11654,7 +11586,7 @@
           <p:cNvPr id="16" name="">
             <a:extLst xmlns:a="http://schemas.openxmlformats.org/drawingml/2006/main">
               <a:ext uri="{FF2B5EF4-FFF2-40B4-BE49-F238E27FC236}">
-                <a16:creationId xmlns:a16="http://schemas.microsoft.com/office/drawing/2014/main" id="{E25F2CD0-4559-4783-8AF0-8DD7C60D3FD8}"/>
+                <a16:creationId xmlns:a16="http://schemas.microsoft.com/office/drawing/2014/main" id="{D184A8BC-C846-49F9-9B5E-1621BC735495}"/>
               </a:ext>
             </a:extLst>
           </p:cNvPr>
@@ -11702,7 +11634,7 @@
                   <a:srgbClr val="132024"/>
                 </a:solidFill>
               </a:rPr>
-              <a:t>collection 단위로 질문 범위를 제한해 관련 없는 지식 혼입을 줄이고, 같은 주제 안에서 source와 해석을 더 조밀하게 쌓아갔다.</a:t>
+              <a:t>collection 단위의 범위 제한을 통해 비관련 지식의 혼입을 줄이고, 동일 주제 내 source와 해석을 조밀하게 축적하였다.</a:t>
             </a:r>
           </a:p>
         </p:txBody>
@@ -11712,7 +11644,7 @@
           <p:cNvPr id="17" name="">
             <a:extLst xmlns:a="http://schemas.openxmlformats.org/drawingml/2006/main">
               <a:ext uri="{FF2B5EF4-FFF2-40B4-BE49-F238E27FC236}">
-                <a16:creationId xmlns:a16="http://schemas.microsoft.com/office/drawing/2014/main" id="{B28F14AC-F36D-4A07-B8CC-D4AEBAB1F7E9}"/>
+                <a16:creationId xmlns:a16="http://schemas.microsoft.com/office/drawing/2014/main" id="{D1BE06B9-2F3D-4A45-8324-676FD39FEFC8}"/>
               </a:ext>
             </a:extLst>
           </p:cNvPr>
@@ -11749,7 +11681,7 @@
           <p:cNvPr id="18" name="">
             <a:extLst xmlns:a="http://schemas.openxmlformats.org/drawingml/2006/main">
               <a:ext uri="{FF2B5EF4-FFF2-40B4-BE49-F238E27FC236}">
-                <a16:creationId xmlns:a16="http://schemas.microsoft.com/office/drawing/2014/main" id="{CAB426E9-8EAE-4C1B-82D6-6AA61561A642}"/>
+                <a16:creationId xmlns:a16="http://schemas.microsoft.com/office/drawing/2014/main" id="{BB3C64E4-17B1-4063-9BE4-A37E3393F941}"/>
               </a:ex